--- a/static/audit_presentation_khalil.pptx
+++ b/static/audit_presentation_khalil.pptx
@@ -2,20 +2,20 @@
 <file path=ppt/presentation.xml><?xml version="1.0" encoding="utf-8"?>
 <p:presentation xmlns:p="http://schemas.openxmlformats.org/presentationml/2006/main">
   <p:sldMasterIdLst>
-    <p:sldMasterId xmlns:r="http://schemas.openxmlformats.org/officeDocument/2006/relationships" id="2147483648" r:id="R648f130faea2475e"/>
+    <p:sldMasterId xmlns:r="http://schemas.openxmlformats.org/officeDocument/2006/relationships" id="2147483648" r:id="R11dde32025024150"/>
   </p:sldMasterIdLst>
   <p:notesMasterIdLst>
-    <p:notesMasterId xmlns:r="http://schemas.openxmlformats.org/officeDocument/2006/relationships" r:id="Re4913442b42543cc"/>
+    <p:notesMasterId xmlns:r="http://schemas.openxmlformats.org/officeDocument/2006/relationships" r:id="R9ced71cf198e40f8"/>
   </p:notesMasterIdLst>
   <p:sldIdLst>
-    <p:sldId xmlns:r="http://schemas.openxmlformats.org/officeDocument/2006/relationships" id="256" r:id="Rdef36dbcef6f464f"/>
-    <p:sldId xmlns:r="http://schemas.openxmlformats.org/officeDocument/2006/relationships" id="257" r:id="R4632837900f24fb6"/>
-    <p:sldId xmlns:r="http://schemas.openxmlformats.org/officeDocument/2006/relationships" id="258" r:id="R40307bcf473a4f65"/>
-    <p:sldId xmlns:r="http://schemas.openxmlformats.org/officeDocument/2006/relationships" id="259" r:id="R8facc0fed70d4a60"/>
-    <p:sldId xmlns:r="http://schemas.openxmlformats.org/officeDocument/2006/relationships" id="260" r:id="R363c22ca047b4e9f"/>
-    <p:sldId xmlns:r="http://schemas.openxmlformats.org/officeDocument/2006/relationships" id="261" r:id="R9786d68440274ad4"/>
-    <p:sldId xmlns:r="http://schemas.openxmlformats.org/officeDocument/2006/relationships" id="262" r:id="Ra42bf113475942f4"/>
-    <p:sldId xmlns:r="http://schemas.openxmlformats.org/officeDocument/2006/relationships" id="263" r:id="Rbbebede07e604452"/>
+    <p:sldId xmlns:r="http://schemas.openxmlformats.org/officeDocument/2006/relationships" id="256" r:id="Rc60936aadbf64464"/>
+    <p:sldId xmlns:r="http://schemas.openxmlformats.org/officeDocument/2006/relationships" id="257" r:id="R3bdeaf6b16c747b9"/>
+    <p:sldId xmlns:r="http://schemas.openxmlformats.org/officeDocument/2006/relationships" id="258" r:id="R67dc3e26595048d6"/>
+    <p:sldId xmlns:r="http://schemas.openxmlformats.org/officeDocument/2006/relationships" id="259" r:id="Rf4398af4e5274f2a"/>
+    <p:sldId xmlns:r="http://schemas.openxmlformats.org/officeDocument/2006/relationships" id="260" r:id="Re9979d1892494353"/>
+    <p:sldId xmlns:r="http://schemas.openxmlformats.org/officeDocument/2006/relationships" id="261" r:id="R99a4a714c4f64654"/>
+    <p:sldId xmlns:r="http://schemas.openxmlformats.org/officeDocument/2006/relationships" id="262" r:id="R2521038e76ed463d"/>
+    <p:sldId xmlns:r="http://schemas.openxmlformats.org/officeDocument/2006/relationships" id="263" r:id="R3da430677aa24f7f"/>
   </p:sldIdLst>
   <p:sldSz cx="12192000" cy="6858000"/>
   <p:notesSz cx="6858000" cy="9144000"/>
@@ -1070,7 +1070,7 @@
   </p:cSld>
   <p:clrMap bg1="lt1" tx1="dk1" bg2="lt2" tx2="dk2" accent1="accent1" accent2="accent2" accent3="accent3" accent4="accent4" accent5="accent5" accent6="accent6" hlink="hlink" folHlink="folHlink"/>
   <p:sldLayoutIdLst>
-    <p:sldLayoutId xmlns:r="http://schemas.openxmlformats.org/officeDocument/2006/relationships" id="2147483649" r:id="R4205ca023a674b4f"/>
+    <p:sldLayoutId xmlns:r="http://schemas.openxmlformats.org/officeDocument/2006/relationships" id="2147483649" r:id="R1d5753c8684e4754"/>
   </p:sldLayoutIdLst>
   <p:txStyles>
     <p:titleStyle>
@@ -1621,7 +1621,7 @@
           <p:cNvPr id="1" name="">
             <a:extLst xmlns:a="http://schemas.openxmlformats.org/drawingml/2006/main">
               <a:ext uri="{FF2B5EF4-FFF2-40B4-BE49-F238E27FC236}">
-                <a16:creationId xmlns:a16="http://schemas.microsoft.com/office/drawing/2014/main" id="{004E89B5-4F01-4A26-8C79-30FD99925D31}"/>
+                <a16:creationId xmlns:a16="http://schemas.microsoft.com/office/drawing/2014/main" id="{97FF487E-1EDD-4DBE-B33A-36A650EFF99A}"/>
               </a:ext>
             </a:extLst>
           </p:cNvPr>
@@ -1652,7 +1652,7 @@
           <p:cNvPr id="2" name="">
             <a:extLst xmlns:a="http://schemas.openxmlformats.org/drawingml/2006/main">
               <a:ext uri="{FF2B5EF4-FFF2-40B4-BE49-F238E27FC236}">
-                <a16:creationId xmlns:a16="http://schemas.microsoft.com/office/drawing/2014/main" id="{99A7ACB7-CE75-435F-991D-DB3C2F998169}"/>
+                <a16:creationId xmlns:a16="http://schemas.microsoft.com/office/drawing/2014/main" id="{7F00005D-DCE7-4192-97A3-5973CF06A05E}"/>
               </a:ext>
             </a:extLst>
           </p:cNvPr>
@@ -1680,14 +1680,14 @@
       </p:sp>
       <p:pic>
         <p:nvPicPr>
-          <p:cNvPr id="16" name=""/>
+          <p:cNvPr id="19" name=""/>
           <p:cNvPicPr>
             <a:picLocks xmlns:a="http://schemas.openxmlformats.org/drawingml/2006/main" noChangeAspect="1"/>
           </p:cNvPicPr>
           <p:nvPr/>
         </p:nvPicPr>
         <p:blipFill>
-          <a:blip xmlns:r="http://schemas.openxmlformats.org/officeDocument/2006/relationships" xmlns:a="http://schemas.openxmlformats.org/drawingml/2006/main" r:embed="R47b1fc6d6e5b4278"/>
+          <a:blip xmlns:r="http://schemas.openxmlformats.org/officeDocument/2006/relationships" xmlns:a="http://schemas.openxmlformats.org/drawingml/2006/main" r:embed="R2e93d92b7bea46a4"/>
           <a:stretch xmlns:a="http://schemas.openxmlformats.org/drawingml/2006/main"/>
         </p:blipFill>
         <p:spPr>
@@ -1705,7 +1705,7 @@
           <p:cNvPr id="4" name="">
             <a:extLst xmlns:a="http://schemas.openxmlformats.org/drawingml/2006/main">
               <a:ext uri="{FF2B5EF4-FFF2-40B4-BE49-F238E27FC236}">
-                <a16:creationId xmlns:a16="http://schemas.microsoft.com/office/drawing/2014/main" id="{0DD33B46-77CF-4CF4-972F-B78BB748B18C}"/>
+                <a16:creationId xmlns:a16="http://schemas.microsoft.com/office/drawing/2014/main" id="{AFFBA393-6477-4AB0-BA35-F671E49EF737}"/>
               </a:ext>
             </a:extLst>
           </p:cNvPr>
@@ -1755,7 +1755,7 @@
           <p:cNvPr id="5" name="">
             <a:extLst xmlns:a="http://schemas.openxmlformats.org/drawingml/2006/main">
               <a:ext uri="{FF2B5EF4-FFF2-40B4-BE49-F238E27FC236}">
-                <a16:creationId xmlns:a16="http://schemas.microsoft.com/office/drawing/2014/main" id="{28A0262B-D882-4A03-AD53-55BA4A79013F}"/>
+                <a16:creationId xmlns:a16="http://schemas.microsoft.com/office/drawing/2014/main" id="{0ED911BE-147C-4554-BC4F-2D9775BE7018}"/>
               </a:ext>
             </a:extLst>
           </p:cNvPr>
@@ -1805,7 +1805,7 @@
           <p:cNvPr id="6" name="">
             <a:extLst xmlns:a="http://schemas.openxmlformats.org/drawingml/2006/main">
               <a:ext uri="{FF2B5EF4-FFF2-40B4-BE49-F238E27FC236}">
-                <a16:creationId xmlns:a16="http://schemas.microsoft.com/office/drawing/2014/main" id="{E14E6DDA-B3BB-4E41-88A2-CDB098096015}"/>
+                <a16:creationId xmlns:a16="http://schemas.microsoft.com/office/drawing/2014/main" id="{4C8874B8-8CEF-43E4-A76E-8DB575963806}"/>
               </a:ext>
             </a:extLst>
           </p:cNvPr>
@@ -1855,7 +1855,7 @@
           <p:cNvPr id="7" name="">
             <a:extLst xmlns:a="http://schemas.openxmlformats.org/drawingml/2006/main">
               <a:ext uri="{FF2B5EF4-FFF2-40B4-BE49-F238E27FC236}">
-                <a16:creationId xmlns:a16="http://schemas.microsoft.com/office/drawing/2014/main" id="{107A99A7-39DB-4947-9F4C-C67BBA8D223C}"/>
+                <a16:creationId xmlns:a16="http://schemas.microsoft.com/office/drawing/2014/main" id="{2AB92A24-4EFC-4083-9424-D8BE6D4755D8}"/>
               </a:ext>
             </a:extLst>
           </p:cNvPr>
@@ -1867,7 +1867,7 @@
         <p:spPr>
           <a:xfrm xmlns:a="http://schemas.openxmlformats.org/drawingml/2006/main">
             <a:off x="685800" y="4714875"/>
-            <a:ext cx="1962150" cy="990600"/>
+            <a:ext cx="1809750" cy="990600"/>
           </a:xfrm>
           <a:prstGeom xmlns:a="http://schemas.openxmlformats.org/drawingml/2006/main" prst="roundRect">
             <a:avLst>
@@ -1875,6 +1875,139 @@
             </a:avLst>
           </a:prstGeom>
           <a:solidFill xmlns:a="http://schemas.openxmlformats.org/drawingml/2006/main">
+            <a:srgbClr val="161616"/>
+          </a:solidFill>
+          <a:ln xmlns:a="http://schemas.openxmlformats.org/drawingml/2006/main" w="0">
+            <a:noFill/>
+            <a:prstDash val="solid"/>
+          </a:ln>
+        </p:spPr>
+      </p:sp>
+      <p:sp>
+        <p:nvSpPr>
+          <p:cNvPr id="8" name="">
+            <a:extLst xmlns:a="http://schemas.openxmlformats.org/drawingml/2006/main">
+              <a:ext uri="{FF2B5EF4-FFF2-40B4-BE49-F238E27FC236}">
+                <a16:creationId xmlns:a16="http://schemas.microsoft.com/office/drawing/2014/main" id="{0D73DC4C-5498-4F8F-A57C-507EC6E934DE}"/>
+              </a:ext>
+            </a:extLst>
+          </p:cNvPr>
+          <p:cNvSpPr>
+            <a:spLocks xmlns:a="http://schemas.openxmlformats.org/drawingml/2006/main" noGrp="1"/>
+          </p:cNvSpPr>
+          <p:nvPr/>
+        </p:nvSpPr>
+        <p:spPr>
+          <a:xfrm xmlns:a="http://schemas.openxmlformats.org/drawingml/2006/main">
+            <a:off x="838200" y="4876800"/>
+            <a:ext cx="1504950" cy="238125"/>
+          </a:xfrm>
+          <a:prstGeom xmlns:a="http://schemas.openxmlformats.org/drawingml/2006/main" prst="rect">
+            <a:avLst/>
+          </a:prstGeom>
+          <a:noFill xmlns:a="http://schemas.openxmlformats.org/drawingml/2006/main"/>
+          <a:ln xmlns:a="http://schemas.openxmlformats.org/drawingml/2006/main" w="0">
+            <a:noFill/>
+            <a:prstDash val="solid"/>
+          </a:ln>
+        </p:spPr>
+        <p:txBody>
+          <a:bodyPr xmlns:a="http://schemas.openxmlformats.org/drawingml/2006/main"/>
+          <a:lstStyle xmlns:a="http://schemas.openxmlformats.org/drawingml/2006/main"/>
+          <a:p xmlns:a="http://schemas.openxmlformats.org/drawingml/2006/main">
+            <a:pPr algn="ctr">
+              <a:defRPr sz="1125" b="1">
+                <a:solidFill>
+                  <a:srgbClr val="FFFFFF"/>
+                </a:solidFill>
+              </a:defRPr>
+            </a:pPr>
+            <a:r>
+              <a:rPr sz="1125" b="1">
+                <a:solidFill>
+                  <a:srgbClr val="FFFFFF"/>
+                </a:solidFill>
+              </a:rPr>
+              <a:t>Зрелость ИТ</a:t>
+            </a:r>
+          </a:p>
+        </p:txBody>
+      </p:sp>
+      <p:sp>
+        <p:nvSpPr>
+          <p:cNvPr id="9" name="">
+            <a:extLst xmlns:a="http://schemas.openxmlformats.org/drawingml/2006/main">
+              <a:ext uri="{FF2B5EF4-FFF2-40B4-BE49-F238E27FC236}">
+                <a16:creationId xmlns:a16="http://schemas.microsoft.com/office/drawing/2014/main" id="{2FB1E50C-8F8F-44A2-A24C-2877E58104E4}"/>
+              </a:ext>
+            </a:extLst>
+          </p:cNvPr>
+          <p:cNvSpPr>
+            <a:spLocks xmlns:a="http://schemas.openxmlformats.org/drawingml/2006/main" noGrp="1"/>
+          </p:cNvSpPr>
+          <p:nvPr/>
+        </p:nvSpPr>
+        <p:spPr>
+          <a:xfrm xmlns:a="http://schemas.openxmlformats.org/drawingml/2006/main">
+            <a:off x="838200" y="5153025"/>
+            <a:ext cx="1504950" cy="419100"/>
+          </a:xfrm>
+          <a:prstGeom xmlns:a="http://schemas.openxmlformats.org/drawingml/2006/main" prst="rect">
+            <a:avLst/>
+          </a:prstGeom>
+          <a:noFill xmlns:a="http://schemas.openxmlformats.org/drawingml/2006/main"/>
+          <a:ln xmlns:a="http://schemas.openxmlformats.org/drawingml/2006/main" w="0">
+            <a:noFill/>
+            <a:prstDash val="solid"/>
+          </a:ln>
+        </p:spPr>
+        <p:txBody>
+          <a:bodyPr xmlns:a="http://schemas.openxmlformats.org/drawingml/2006/main"/>
+          <a:lstStyle xmlns:a="http://schemas.openxmlformats.org/drawingml/2006/main"/>
+          <a:p xmlns:a="http://schemas.openxmlformats.org/drawingml/2006/main">
+            <a:pPr algn="ctr">
+              <a:defRPr sz="2550" b="1">
+                <a:solidFill>
+                  <a:srgbClr val="FFFFFF"/>
+                </a:solidFill>
+              </a:defRPr>
+            </a:pPr>
+            <a:r>
+              <a:rPr sz="2550" b="1">
+                <a:solidFill>
+                  <a:srgbClr val="FFFFFF"/>
+                </a:solidFill>
+              </a:rPr>
+              <a:t>{{IT_SCORE}}%</a:t>
+            </a:r>
+          </a:p>
+        </p:txBody>
+      </p:sp>
+      <p:sp>
+        <p:nvSpPr>
+          <p:cNvPr id="10" name="">
+            <a:extLst xmlns:a="http://schemas.openxmlformats.org/drawingml/2006/main">
+              <a:ext uri="{FF2B5EF4-FFF2-40B4-BE49-F238E27FC236}">
+                <a16:creationId xmlns:a16="http://schemas.microsoft.com/office/drawing/2014/main" id="{44D0DB36-B30F-41D9-BDD4-71F9C919DC56}"/>
+              </a:ext>
+            </a:extLst>
+          </p:cNvPr>
+          <p:cNvSpPr>
+            <a:spLocks xmlns:a="http://schemas.openxmlformats.org/drawingml/2006/main" noGrp="1"/>
+          </p:cNvSpPr>
+          <p:nvPr/>
+        </p:nvSpPr>
+        <p:spPr>
+          <a:xfrm xmlns:a="http://schemas.openxmlformats.org/drawingml/2006/main">
+            <a:off x="2647950" y="4714875"/>
+            <a:ext cx="1809750" cy="990600"/>
+          </a:xfrm>
+          <a:prstGeom xmlns:a="http://schemas.openxmlformats.org/drawingml/2006/main" prst="roundRect">
+            <a:avLst>
+              <a:gd name="adj" fmla="val 11538"/>
+            </a:avLst>
+          </a:prstGeom>
+          <a:solidFill xmlns:a="http://schemas.openxmlformats.org/drawingml/2006/main">
             <a:srgbClr val="FF6412"/>
           </a:solidFill>
           <a:ln xmlns:a="http://schemas.openxmlformats.org/drawingml/2006/main" w="0">
@@ -1885,22 +2018,22 @@
       </p:sp>
       <p:sp>
         <p:nvSpPr>
-          <p:cNvPr id="8" name="">
-            <a:extLst xmlns:a="http://schemas.openxmlformats.org/drawingml/2006/main">
-              <a:ext uri="{FF2B5EF4-FFF2-40B4-BE49-F238E27FC236}">
-                <a16:creationId xmlns:a16="http://schemas.microsoft.com/office/drawing/2014/main" id="{CA0496C8-0371-4622-964E-86C2C705A862}"/>
-              </a:ext>
-            </a:extLst>
-          </p:cNvPr>
-          <p:cNvSpPr>
-            <a:spLocks xmlns:a="http://schemas.openxmlformats.org/drawingml/2006/main" noGrp="1"/>
-          </p:cNvSpPr>
-          <p:nvPr/>
-        </p:nvSpPr>
-        <p:spPr>
-          <a:xfrm xmlns:a="http://schemas.openxmlformats.org/drawingml/2006/main">
-            <a:off x="876300" y="4876800"/>
-            <a:ext cx="1581150" cy="238125"/>
+          <p:cNvPr id="11" name="">
+            <a:extLst xmlns:a="http://schemas.openxmlformats.org/drawingml/2006/main">
+              <a:ext uri="{FF2B5EF4-FFF2-40B4-BE49-F238E27FC236}">
+                <a16:creationId xmlns:a16="http://schemas.microsoft.com/office/drawing/2014/main" id="{CBEA07F1-F7F9-465C-A395-910C60A564F4}"/>
+              </a:ext>
+            </a:extLst>
+          </p:cNvPr>
+          <p:cNvSpPr>
+            <a:spLocks xmlns:a="http://schemas.openxmlformats.org/drawingml/2006/main" noGrp="1"/>
+          </p:cNvSpPr>
+          <p:nvPr/>
+        </p:nvSpPr>
+        <p:spPr>
+          <a:xfrm xmlns:a="http://schemas.openxmlformats.org/drawingml/2006/main">
+            <a:off x="2800350" y="4876800"/>
+            <a:ext cx="1504950" cy="238125"/>
           </a:xfrm>
           <a:prstGeom xmlns:a="http://schemas.openxmlformats.org/drawingml/2006/main" prst="rect">
             <a:avLst/>
@@ -1935,22 +2068,22 @@
       </p:sp>
       <p:sp>
         <p:nvSpPr>
-          <p:cNvPr id="9" name="">
-            <a:extLst xmlns:a="http://schemas.openxmlformats.org/drawingml/2006/main">
-              <a:ext uri="{FF2B5EF4-FFF2-40B4-BE49-F238E27FC236}">
-                <a16:creationId xmlns:a16="http://schemas.microsoft.com/office/drawing/2014/main" id="{5F5006AD-DEEC-4442-87D3-23787B8EE292}"/>
-              </a:ext>
-            </a:extLst>
-          </p:cNvPr>
-          <p:cNvSpPr>
-            <a:spLocks xmlns:a="http://schemas.openxmlformats.org/drawingml/2006/main" noGrp="1"/>
-          </p:cNvSpPr>
-          <p:nvPr/>
-        </p:nvSpPr>
-        <p:spPr>
-          <a:xfrm xmlns:a="http://schemas.openxmlformats.org/drawingml/2006/main">
-            <a:off x="876300" y="5153025"/>
-            <a:ext cx="1581150" cy="419100"/>
+          <p:cNvPr id="12" name="">
+            <a:extLst xmlns:a="http://schemas.openxmlformats.org/drawingml/2006/main">
+              <a:ext uri="{FF2B5EF4-FFF2-40B4-BE49-F238E27FC236}">
+                <a16:creationId xmlns:a16="http://schemas.microsoft.com/office/drawing/2014/main" id="{3F1FFB3C-E49A-4624-9597-B79E16DB1652}"/>
+              </a:ext>
+            </a:extLst>
+          </p:cNvPr>
+          <p:cNvSpPr>
+            <a:spLocks xmlns:a="http://schemas.openxmlformats.org/drawingml/2006/main" noGrp="1"/>
+          </p:cNvSpPr>
+          <p:nvPr/>
+        </p:nvSpPr>
+        <p:spPr>
+          <a:xfrm xmlns:a="http://schemas.openxmlformats.org/drawingml/2006/main">
+            <a:off x="2800350" y="5153025"/>
+            <a:ext cx="1504950" cy="419100"/>
           </a:xfrm>
           <a:prstGeom xmlns:a="http://schemas.openxmlformats.org/drawingml/2006/main" prst="rect">
             <a:avLst/>
@@ -1985,22 +2118,22 @@
       </p:sp>
       <p:sp>
         <p:nvSpPr>
-          <p:cNvPr id="10" name="">
-            <a:extLst xmlns:a="http://schemas.openxmlformats.org/drawingml/2006/main">
-              <a:ext uri="{FF2B5EF4-FFF2-40B4-BE49-F238E27FC236}">
-                <a16:creationId xmlns:a16="http://schemas.microsoft.com/office/drawing/2014/main" id="{CD74588F-C3C1-4087-BEF2-5DA59D9C27E0}"/>
-              </a:ext>
-            </a:extLst>
-          </p:cNvPr>
-          <p:cNvSpPr>
-            <a:spLocks xmlns:a="http://schemas.openxmlformats.org/drawingml/2006/main" noGrp="1"/>
-          </p:cNvSpPr>
-          <p:nvPr/>
-        </p:nvSpPr>
-        <p:spPr>
-          <a:xfrm xmlns:a="http://schemas.openxmlformats.org/drawingml/2006/main">
-            <a:off x="3009900" y="5162550"/>
-            <a:ext cx="2000250" cy="323850"/>
+          <p:cNvPr id="13" name="">
+            <a:extLst xmlns:a="http://schemas.openxmlformats.org/drawingml/2006/main">
+              <a:ext uri="{FF2B5EF4-FFF2-40B4-BE49-F238E27FC236}">
+                <a16:creationId xmlns:a16="http://schemas.microsoft.com/office/drawing/2014/main" id="{FDAFF6BB-60C5-47EB-9210-4C9ECA5B0A15}"/>
+              </a:ext>
+            </a:extLst>
+          </p:cNvPr>
+          <p:cNvSpPr>
+            <a:spLocks xmlns:a="http://schemas.openxmlformats.org/drawingml/2006/main" noGrp="1"/>
+          </p:cNvSpPr>
+          <p:nvPr/>
+        </p:nvSpPr>
+        <p:spPr>
+          <a:xfrm xmlns:a="http://schemas.openxmlformats.org/drawingml/2006/main">
+            <a:off x="4810125" y="5162550"/>
+            <a:ext cx="1714500" cy="323850"/>
           </a:xfrm>
           <a:prstGeom xmlns:a="http://schemas.openxmlformats.org/drawingml/2006/main" prst="rect">
             <a:avLst/>
@@ -2035,14 +2168,14 @@
       </p:sp>
       <p:pic>
         <p:nvPicPr>
-          <p:cNvPr id="24" name=""/>
+          <p:cNvPr id="30" name=""/>
           <p:cNvPicPr>
             <a:picLocks xmlns:a="http://schemas.openxmlformats.org/drawingml/2006/main" noChangeAspect="1"/>
           </p:cNvPicPr>
           <p:nvPr/>
         </p:nvPicPr>
         <p:blipFill>
-          <a:blip xmlns:r="http://schemas.openxmlformats.org/officeDocument/2006/relationships" xmlns:a="http://schemas.openxmlformats.org/drawingml/2006/main" r:embed="R66ed8300bb4949fa"/>
+          <a:blip xmlns:r="http://schemas.openxmlformats.org/officeDocument/2006/relationships" xmlns:a="http://schemas.openxmlformats.org/drawingml/2006/main" r:embed="Rf7374e47715143e7"/>
           <a:srcRect xmlns:a="http://schemas.openxmlformats.org/drawingml/2006/main" l="5453" t="0" r="5453" b="0"/>
           <a:stretch xmlns:a="http://schemas.openxmlformats.org/drawingml/2006/main">
             <a:fillRect l="0" t="0" r="0" b="0"/>
@@ -2060,10 +2193,10 @@
       </p:pic>
       <p:sp>
         <p:nvSpPr>
-          <p:cNvPr id="12" name="">
-            <a:extLst xmlns:a="http://schemas.openxmlformats.org/drawingml/2006/main">
-              <a:ext uri="{FF2B5EF4-FFF2-40B4-BE49-F238E27FC236}">
-                <a16:creationId xmlns:a16="http://schemas.microsoft.com/office/drawing/2014/main" id="{8C8D3AF7-46F5-414C-B8B0-406444AF5AF2}"/>
+          <p:cNvPr id="15" name="">
+            <a:extLst xmlns:a="http://schemas.openxmlformats.org/drawingml/2006/main">
+              <a:ext uri="{FF2B5EF4-FFF2-40B4-BE49-F238E27FC236}">
+                <a16:creationId xmlns:a16="http://schemas.microsoft.com/office/drawing/2014/main" id="{19084D76-9DB0-4A09-938B-44CE1C5392FC}"/>
               </a:ext>
             </a:extLst>
           </p:cNvPr>
@@ -2091,10 +2224,10 @@
       </p:sp>
       <p:sp>
         <p:nvSpPr>
-          <p:cNvPr id="13" name="">
-            <a:extLst xmlns:a="http://schemas.openxmlformats.org/drawingml/2006/main">
-              <a:ext uri="{FF2B5EF4-FFF2-40B4-BE49-F238E27FC236}">
-                <a16:creationId xmlns:a16="http://schemas.microsoft.com/office/drawing/2014/main" id="{3B6F6D6C-0E06-423A-91FD-B6D0C0E298D3}"/>
+          <p:cNvPr id="16" name="">
+            <a:extLst xmlns:a="http://schemas.openxmlformats.org/drawingml/2006/main">
+              <a:ext uri="{FF2B5EF4-FFF2-40B4-BE49-F238E27FC236}">
+                <a16:creationId xmlns:a16="http://schemas.microsoft.com/office/drawing/2014/main" id="{F37C8587-B886-4658-8C53-845C1D350858}"/>
               </a:ext>
             </a:extLst>
           </p:cNvPr>
@@ -2142,7 +2275,7 @@
     </p:spTree>
     <p:extLst>
       <p:ext uri="{BB962C8B-B14F-4D97-AF65-F5344CB8AC3E}">
-        <p14:creationId xmlns:p14="http://schemas.microsoft.com/office/powerpoint/2010/main" val="1025738593"/>
+        <p14:creationId xmlns:p14="http://schemas.microsoft.com/office/powerpoint/2010/main" val="1316263158"/>
       </p:ext>
     </p:extLst>
   </p:cSld>
@@ -2173,7 +2306,7 @@
           <p:cNvPr id="1" name="">
             <a:extLst xmlns:a="http://schemas.openxmlformats.org/drawingml/2006/main">
               <a:ext uri="{FF2B5EF4-FFF2-40B4-BE49-F238E27FC236}">
-                <a16:creationId xmlns:a16="http://schemas.microsoft.com/office/drawing/2014/main" id="{607FAB1A-0B1B-4CD0-9F81-E8040C76B23A}"/>
+                <a16:creationId xmlns:a16="http://schemas.microsoft.com/office/drawing/2014/main" id="{3703F741-7B43-457F-949B-5790C52D00C1}"/>
               </a:ext>
             </a:extLst>
           </p:cNvPr>
@@ -2208,7 +2341,7 @@
           <p:nvPr/>
         </p:nvPicPr>
         <p:blipFill>
-          <a:blip xmlns:r="http://schemas.openxmlformats.org/officeDocument/2006/relationships" xmlns:a="http://schemas.openxmlformats.org/drawingml/2006/main" r:embed="R21ebc3d06889496d"/>
+          <a:blip xmlns:r="http://schemas.openxmlformats.org/officeDocument/2006/relationships" xmlns:a="http://schemas.openxmlformats.org/drawingml/2006/main" r:embed="R995c866f65c14d18"/>
           <a:stretch xmlns:a="http://schemas.openxmlformats.org/drawingml/2006/main"/>
         </p:blipFill>
         <p:spPr>
@@ -2226,7 +2359,7 @@
           <p:cNvPr id="3" name="">
             <a:extLst xmlns:a="http://schemas.openxmlformats.org/drawingml/2006/main">
               <a:ext uri="{FF2B5EF4-FFF2-40B4-BE49-F238E27FC236}">
-                <a16:creationId xmlns:a16="http://schemas.microsoft.com/office/drawing/2014/main" id="{D31A30CD-AA3E-4DFB-87C8-796C38CDE80E}"/>
+                <a16:creationId xmlns:a16="http://schemas.microsoft.com/office/drawing/2014/main" id="{BECEA233-8FFE-4D20-B41D-689025DD0380}"/>
               </a:ext>
             </a:extLst>
           </p:cNvPr>
@@ -2276,7 +2409,7 @@
           <p:cNvPr id="4" name="">
             <a:extLst xmlns:a="http://schemas.openxmlformats.org/drawingml/2006/main">
               <a:ext uri="{FF2B5EF4-FFF2-40B4-BE49-F238E27FC236}">
-                <a16:creationId xmlns:a16="http://schemas.microsoft.com/office/drawing/2014/main" id="{A86743A8-8735-4E58-9CD1-DE26A9B46B8E}"/>
+                <a16:creationId xmlns:a16="http://schemas.microsoft.com/office/drawing/2014/main" id="{902FC9AF-8210-4F28-9A88-6384FC72EBA0}"/>
               </a:ext>
             </a:extLst>
           </p:cNvPr>
@@ -2309,7 +2442,7 @@
           <p:cNvPr id="5" name="">
             <a:extLst xmlns:a="http://schemas.openxmlformats.org/drawingml/2006/main">
               <a:ext uri="{FF2B5EF4-FFF2-40B4-BE49-F238E27FC236}">
-                <a16:creationId xmlns:a16="http://schemas.microsoft.com/office/drawing/2014/main" id="{E77797FE-E66D-4354-AEA0-F3083DA43D7D}"/>
+                <a16:creationId xmlns:a16="http://schemas.microsoft.com/office/drawing/2014/main" id="{17D0E841-1E58-496A-BD9F-2383F6CB024F}"/>
               </a:ext>
             </a:extLst>
           </p:cNvPr>
@@ -2340,7 +2473,7 @@
           <p:cNvPr id="6" name="">
             <a:extLst xmlns:a="http://schemas.openxmlformats.org/drawingml/2006/main">
               <a:ext uri="{FF2B5EF4-FFF2-40B4-BE49-F238E27FC236}">
-                <a16:creationId xmlns:a16="http://schemas.microsoft.com/office/drawing/2014/main" id="{9A8F6C63-FA39-4D52-9CCA-297F0F5B86DC}"/>
+                <a16:creationId xmlns:a16="http://schemas.microsoft.com/office/drawing/2014/main" id="{4EDFB2C6-647A-440D-A993-3D36F30A15E2}"/>
               </a:ext>
             </a:extLst>
           </p:cNvPr>
@@ -2390,7 +2523,7 @@
           <p:cNvPr id="7" name="">
             <a:extLst xmlns:a="http://schemas.openxmlformats.org/drawingml/2006/main">
               <a:ext uri="{FF2B5EF4-FFF2-40B4-BE49-F238E27FC236}">
-                <a16:creationId xmlns:a16="http://schemas.microsoft.com/office/drawing/2014/main" id="{F2228676-A6DF-416F-993F-F03A16E6CB63}"/>
+                <a16:creationId xmlns:a16="http://schemas.microsoft.com/office/drawing/2014/main" id="{68C2A410-87E6-488A-9516-FC245E1E90A6}"/>
               </a:ext>
             </a:extLst>
           </p:cNvPr>
@@ -2440,7 +2573,7 @@
           <p:cNvPr id="8" name="">
             <a:extLst xmlns:a="http://schemas.openxmlformats.org/drawingml/2006/main">
               <a:ext uri="{FF2B5EF4-FFF2-40B4-BE49-F238E27FC236}">
-                <a16:creationId xmlns:a16="http://schemas.microsoft.com/office/drawing/2014/main" id="{7054F628-B829-4475-AD45-BA77AEA318AB}"/>
+                <a16:creationId xmlns:a16="http://schemas.microsoft.com/office/drawing/2014/main" id="{2446937F-5242-4BEC-B69D-7CEA0E72BFC9}"/>
               </a:ext>
             </a:extLst>
           </p:cNvPr>
@@ -2490,7 +2623,7 @@
           <p:cNvPr id="9" name="">
             <a:extLst xmlns:a="http://schemas.openxmlformats.org/drawingml/2006/main">
               <a:ext uri="{FF2B5EF4-FFF2-40B4-BE49-F238E27FC236}">
-                <a16:creationId xmlns:a16="http://schemas.microsoft.com/office/drawing/2014/main" id="{E8DE65E6-0127-406D-9B9E-8DECFB91FB20}"/>
+                <a16:creationId xmlns:a16="http://schemas.microsoft.com/office/drawing/2014/main" id="{E95DE043-91A8-45DA-9B05-D64A79DA93F9}"/>
               </a:ext>
             </a:extLst>
           </p:cNvPr>
@@ -2540,7 +2673,7 @@
           <p:cNvPr id="10" name="">
             <a:extLst xmlns:a="http://schemas.openxmlformats.org/drawingml/2006/main">
               <a:ext uri="{FF2B5EF4-FFF2-40B4-BE49-F238E27FC236}">
-                <a16:creationId xmlns:a16="http://schemas.microsoft.com/office/drawing/2014/main" id="{4FDB8058-7F89-4204-8B2D-95673AC9E000}"/>
+                <a16:creationId xmlns:a16="http://schemas.microsoft.com/office/drawing/2014/main" id="{E606FE7A-3C92-4FFF-B28D-1C52FB1AD7D1}"/>
               </a:ext>
             </a:extLst>
           </p:cNvPr>
@@ -2590,7 +2723,7 @@
           <p:cNvPr id="11" name="">
             <a:extLst xmlns:a="http://schemas.openxmlformats.org/drawingml/2006/main">
               <a:ext uri="{FF2B5EF4-FFF2-40B4-BE49-F238E27FC236}">
-                <a16:creationId xmlns:a16="http://schemas.microsoft.com/office/drawing/2014/main" id="{082B9BB9-5D9F-4A8B-B32A-FED7DA5474C0}"/>
+                <a16:creationId xmlns:a16="http://schemas.microsoft.com/office/drawing/2014/main" id="{46228556-943C-4A94-8685-C4EA4D294CE0}"/>
               </a:ext>
             </a:extLst>
           </p:cNvPr>
@@ -2621,7 +2754,7 @@
           <p:cNvPr id="12" name="">
             <a:extLst xmlns:a="http://schemas.openxmlformats.org/drawingml/2006/main">
               <a:ext uri="{FF2B5EF4-FFF2-40B4-BE49-F238E27FC236}">
-                <a16:creationId xmlns:a16="http://schemas.microsoft.com/office/drawing/2014/main" id="{2EF656CC-0A01-4B11-AB4F-FD9FF857AA62}"/>
+                <a16:creationId xmlns:a16="http://schemas.microsoft.com/office/drawing/2014/main" id="{C90618A6-5594-4B85-98FF-FE7404FC4B42}"/>
               </a:ext>
             </a:extLst>
           </p:cNvPr>
@@ -2671,7 +2804,7 @@
           <p:cNvPr id="13" name="">
             <a:extLst xmlns:a="http://schemas.openxmlformats.org/drawingml/2006/main">
               <a:ext uri="{FF2B5EF4-FFF2-40B4-BE49-F238E27FC236}">
-                <a16:creationId xmlns:a16="http://schemas.microsoft.com/office/drawing/2014/main" id="{D1EE7E87-DE3D-41CE-855D-D72A35BD7329}"/>
+                <a16:creationId xmlns:a16="http://schemas.microsoft.com/office/drawing/2014/main" id="{A690ED7B-7B42-4BF2-9E3C-C4D41C7BC053}"/>
               </a:ext>
             </a:extLst>
           </p:cNvPr>
@@ -2721,7 +2854,7 @@
           <p:cNvPr id="14" name="">
             <a:extLst xmlns:a="http://schemas.openxmlformats.org/drawingml/2006/main">
               <a:ext uri="{FF2B5EF4-FFF2-40B4-BE49-F238E27FC236}">
-                <a16:creationId xmlns:a16="http://schemas.microsoft.com/office/drawing/2014/main" id="{1252F216-5E0C-4A76-B918-066B16EC402C}"/>
+                <a16:creationId xmlns:a16="http://schemas.microsoft.com/office/drawing/2014/main" id="{217117F1-F7FF-4F5E-90A5-22789A2E49AC}"/>
               </a:ext>
             </a:extLst>
           </p:cNvPr>
@@ -2752,7 +2885,7 @@
           <p:cNvPr id="15" name="">
             <a:extLst xmlns:a="http://schemas.openxmlformats.org/drawingml/2006/main">
               <a:ext uri="{FF2B5EF4-FFF2-40B4-BE49-F238E27FC236}">
-                <a16:creationId xmlns:a16="http://schemas.microsoft.com/office/drawing/2014/main" id="{C0D363FD-5E33-4AE1-A124-C3CBF1E6D475}"/>
+                <a16:creationId xmlns:a16="http://schemas.microsoft.com/office/drawing/2014/main" id="{FB276E43-4BFF-4690-94BD-9969CE6F757E}"/>
               </a:ext>
             </a:extLst>
           </p:cNvPr>
@@ -2802,7 +2935,7 @@
           <p:cNvPr id="16" name="">
             <a:extLst xmlns:a="http://schemas.openxmlformats.org/drawingml/2006/main">
               <a:ext uri="{FF2B5EF4-FFF2-40B4-BE49-F238E27FC236}">
-                <a16:creationId xmlns:a16="http://schemas.microsoft.com/office/drawing/2014/main" id="{4E983E75-92F9-4C81-AFA6-DBC36BBD5E4E}"/>
+                <a16:creationId xmlns:a16="http://schemas.microsoft.com/office/drawing/2014/main" id="{2743F487-8FCC-437E-916A-3ED6FAB4453F}"/>
               </a:ext>
             </a:extLst>
           </p:cNvPr>
@@ -2852,7 +2985,7 @@
           <p:cNvPr id="17" name="">
             <a:extLst xmlns:a="http://schemas.openxmlformats.org/drawingml/2006/main">
               <a:ext uri="{FF2B5EF4-FFF2-40B4-BE49-F238E27FC236}">
-                <a16:creationId xmlns:a16="http://schemas.microsoft.com/office/drawing/2014/main" id="{B3EA03C2-FBBE-4983-86BB-9591E5EEB9F7}"/>
+                <a16:creationId xmlns:a16="http://schemas.microsoft.com/office/drawing/2014/main" id="{2F0D81B0-A567-4946-A2D3-800550AD9FE3}"/>
               </a:ext>
             </a:extLst>
           </p:cNvPr>
@@ -2883,7 +3016,7 @@
           <p:cNvPr id="18" name="">
             <a:extLst xmlns:a="http://schemas.openxmlformats.org/drawingml/2006/main">
               <a:ext uri="{FF2B5EF4-FFF2-40B4-BE49-F238E27FC236}">
-                <a16:creationId xmlns:a16="http://schemas.microsoft.com/office/drawing/2014/main" id="{69E0C108-1D8D-41C3-9001-568B2EBB7967}"/>
+                <a16:creationId xmlns:a16="http://schemas.microsoft.com/office/drawing/2014/main" id="{22EC4666-549E-4982-BF6A-F331E39E7B4C}"/>
               </a:ext>
             </a:extLst>
           </p:cNvPr>
@@ -2933,7 +3066,7 @@
           <p:cNvPr id="19" name="">
             <a:extLst xmlns:a="http://schemas.openxmlformats.org/drawingml/2006/main">
               <a:ext uri="{FF2B5EF4-FFF2-40B4-BE49-F238E27FC236}">
-                <a16:creationId xmlns:a16="http://schemas.microsoft.com/office/drawing/2014/main" id="{B2BEE636-5373-4B0B-83F5-8FFBAD22351C}"/>
+                <a16:creationId xmlns:a16="http://schemas.microsoft.com/office/drawing/2014/main" id="{67DDFDA5-8D86-424B-9F32-8E9F6F92F5BC}"/>
               </a:ext>
             </a:extLst>
           </p:cNvPr>
@@ -2981,7 +3114,7 @@
     </p:spTree>
     <p:extLst>
       <p:ext uri="{BB962C8B-B14F-4D97-AF65-F5344CB8AC3E}">
-        <p14:creationId xmlns:p14="http://schemas.microsoft.com/office/powerpoint/2010/main" val="100908621"/>
+        <p14:creationId xmlns:p14="http://schemas.microsoft.com/office/powerpoint/2010/main" val="1426213452"/>
       </p:ext>
     </p:extLst>
   </p:cSld>
@@ -3012,7 +3145,7 @@
           <p:cNvPr id="1" name="">
             <a:extLst xmlns:a="http://schemas.openxmlformats.org/drawingml/2006/main">
               <a:ext uri="{FF2B5EF4-FFF2-40B4-BE49-F238E27FC236}">
-                <a16:creationId xmlns:a16="http://schemas.microsoft.com/office/drawing/2014/main" id="{CE23033F-C600-421B-9DC7-3A565030C9E2}"/>
+                <a16:creationId xmlns:a16="http://schemas.microsoft.com/office/drawing/2014/main" id="{9FA90AB5-46DD-4AF5-8BC1-13CD84153A04}"/>
               </a:ext>
             </a:extLst>
           </p:cNvPr>
@@ -3047,7 +3180,7 @@
           <p:nvPr/>
         </p:nvPicPr>
         <p:blipFill>
-          <a:blip xmlns:r="http://schemas.openxmlformats.org/officeDocument/2006/relationships" xmlns:a="http://schemas.openxmlformats.org/drawingml/2006/main" r:embed="R7039bc50c0094cc8"/>
+          <a:blip xmlns:r="http://schemas.openxmlformats.org/officeDocument/2006/relationships" xmlns:a="http://schemas.openxmlformats.org/drawingml/2006/main" r:embed="R91c91d82644c404c"/>
           <a:stretch xmlns:a="http://schemas.openxmlformats.org/drawingml/2006/main"/>
         </p:blipFill>
         <p:spPr>
@@ -3065,7 +3198,7 @@
           <p:cNvPr id="3" name="">
             <a:extLst xmlns:a="http://schemas.openxmlformats.org/drawingml/2006/main">
               <a:ext uri="{FF2B5EF4-FFF2-40B4-BE49-F238E27FC236}">
-                <a16:creationId xmlns:a16="http://schemas.microsoft.com/office/drawing/2014/main" id="{0EDB496F-F1D8-4D8B-945B-FA524F216798}"/>
+                <a16:creationId xmlns:a16="http://schemas.microsoft.com/office/drawing/2014/main" id="{4D285644-933D-4E72-90B7-6589E21849A1}"/>
               </a:ext>
             </a:extLst>
           </p:cNvPr>
@@ -3115,7 +3248,7 @@
           <p:cNvPr id="4" name="">
             <a:extLst xmlns:a="http://schemas.openxmlformats.org/drawingml/2006/main">
               <a:ext uri="{FF2B5EF4-FFF2-40B4-BE49-F238E27FC236}">
-                <a16:creationId xmlns:a16="http://schemas.microsoft.com/office/drawing/2014/main" id="{233DC1E6-260C-464E-9666-2EB08D8D4453}"/>
+                <a16:creationId xmlns:a16="http://schemas.microsoft.com/office/drawing/2014/main" id="{7027CF31-9C75-4E3E-B4DC-4A0CD88333DF}"/>
               </a:ext>
             </a:extLst>
           </p:cNvPr>
@@ -3148,7 +3281,7 @@
           <p:cNvPr id="5" name="">
             <a:extLst xmlns:a="http://schemas.openxmlformats.org/drawingml/2006/main">
               <a:ext uri="{FF2B5EF4-FFF2-40B4-BE49-F238E27FC236}">
-                <a16:creationId xmlns:a16="http://schemas.microsoft.com/office/drawing/2014/main" id="{23A68DDB-A43E-4B35-8920-21D40264C251}"/>
+                <a16:creationId xmlns:a16="http://schemas.microsoft.com/office/drawing/2014/main" id="{56A67796-A4D7-4402-95C5-3882C47D6978}"/>
               </a:ext>
             </a:extLst>
           </p:cNvPr>
@@ -3179,7 +3312,7 @@
           <p:cNvPr id="6" name="">
             <a:extLst xmlns:a="http://schemas.openxmlformats.org/drawingml/2006/main">
               <a:ext uri="{FF2B5EF4-FFF2-40B4-BE49-F238E27FC236}">
-                <a16:creationId xmlns:a16="http://schemas.microsoft.com/office/drawing/2014/main" id="{4D675AF2-2B84-4BF4-BEDD-35BDA5F434D9}"/>
+                <a16:creationId xmlns:a16="http://schemas.microsoft.com/office/drawing/2014/main" id="{A68F315B-1FBC-489C-8ED8-F207840700BD}"/>
               </a:ext>
             </a:extLst>
           </p:cNvPr>
@@ -3229,7 +3362,7 @@
           <p:cNvPr id="7" name="">
             <a:extLst xmlns:a="http://schemas.openxmlformats.org/drawingml/2006/main">
               <a:ext uri="{FF2B5EF4-FFF2-40B4-BE49-F238E27FC236}">
-                <a16:creationId xmlns:a16="http://schemas.microsoft.com/office/drawing/2014/main" id="{D88179C6-E0FF-400B-8706-F058AE1E639D}"/>
+                <a16:creationId xmlns:a16="http://schemas.microsoft.com/office/drawing/2014/main" id="{FC7FA5F5-88C3-46B5-9C15-EDA04CF96ADE}"/>
               </a:ext>
             </a:extLst>
           </p:cNvPr>
@@ -3279,7 +3412,7 @@
           <p:cNvPr id="8" name="">
             <a:extLst xmlns:a="http://schemas.openxmlformats.org/drawingml/2006/main">
               <a:ext uri="{FF2B5EF4-FFF2-40B4-BE49-F238E27FC236}">
-                <a16:creationId xmlns:a16="http://schemas.microsoft.com/office/drawing/2014/main" id="{19046038-2FB4-44C5-898B-EAE4C9801606}"/>
+                <a16:creationId xmlns:a16="http://schemas.microsoft.com/office/drawing/2014/main" id="{BC76305E-DE07-4D24-8F4D-C0ECA54E5C05}"/>
               </a:ext>
             </a:extLst>
           </p:cNvPr>
@@ -3314,7 +3447,7 @@
           <p:cNvPr id="9" name="">
             <a:extLst xmlns:a="http://schemas.openxmlformats.org/drawingml/2006/main">
               <a:ext uri="{FF2B5EF4-FFF2-40B4-BE49-F238E27FC236}">
-                <a16:creationId xmlns:a16="http://schemas.microsoft.com/office/drawing/2014/main" id="{FC5EF72C-C531-4072-965B-788318E2EE22}"/>
+                <a16:creationId xmlns:a16="http://schemas.microsoft.com/office/drawing/2014/main" id="{865B7C89-35F7-43F3-84E5-4ADA64E835C1}"/>
               </a:ext>
             </a:extLst>
           </p:cNvPr>
@@ -3364,7 +3497,7 @@
           <p:cNvPr id="10" name="">
             <a:extLst xmlns:a="http://schemas.openxmlformats.org/drawingml/2006/main">
               <a:ext uri="{FF2B5EF4-FFF2-40B4-BE49-F238E27FC236}">
-                <a16:creationId xmlns:a16="http://schemas.microsoft.com/office/drawing/2014/main" id="{F219FFA4-3341-480E-B969-0F02D95221D0}"/>
+                <a16:creationId xmlns:a16="http://schemas.microsoft.com/office/drawing/2014/main" id="{31063CEC-061C-4335-B97B-12CD03800CE3}"/>
               </a:ext>
             </a:extLst>
           </p:cNvPr>
@@ -3414,7 +3547,7 @@
           <p:cNvPr id="11" name="">
             <a:extLst xmlns:a="http://schemas.openxmlformats.org/drawingml/2006/main">
               <a:ext uri="{FF2B5EF4-FFF2-40B4-BE49-F238E27FC236}">
-                <a16:creationId xmlns:a16="http://schemas.microsoft.com/office/drawing/2014/main" id="{80A7E3AA-73EF-4E62-85AD-87CB702673C7}"/>
+                <a16:creationId xmlns:a16="http://schemas.microsoft.com/office/drawing/2014/main" id="{C6E75039-4B66-49B4-9508-696130663D11}"/>
               </a:ext>
             </a:extLst>
           </p:cNvPr>
@@ -3449,7 +3582,7 @@
           <p:cNvPr id="12" name="">
             <a:extLst xmlns:a="http://schemas.openxmlformats.org/drawingml/2006/main">
               <a:ext uri="{FF2B5EF4-FFF2-40B4-BE49-F238E27FC236}">
-                <a16:creationId xmlns:a16="http://schemas.microsoft.com/office/drawing/2014/main" id="{2F0C6690-8678-4826-9393-C62A86B0C058}"/>
+                <a16:creationId xmlns:a16="http://schemas.microsoft.com/office/drawing/2014/main" id="{C7E808D8-AADB-4370-A2E9-39A41BA13D32}"/>
               </a:ext>
             </a:extLst>
           </p:cNvPr>
@@ -3499,7 +3632,7 @@
           <p:cNvPr id="13" name="">
             <a:extLst xmlns:a="http://schemas.openxmlformats.org/drawingml/2006/main">
               <a:ext uri="{FF2B5EF4-FFF2-40B4-BE49-F238E27FC236}">
-                <a16:creationId xmlns:a16="http://schemas.microsoft.com/office/drawing/2014/main" id="{D395C636-7B8C-4D00-ACB6-7E4FCA4F7F02}"/>
+                <a16:creationId xmlns:a16="http://schemas.microsoft.com/office/drawing/2014/main" id="{7B78454E-03CF-412C-80E9-5B49437001C8}"/>
               </a:ext>
             </a:extLst>
           </p:cNvPr>
@@ -3549,7 +3682,7 @@
           <p:cNvPr id="14" name="">
             <a:extLst xmlns:a="http://schemas.openxmlformats.org/drawingml/2006/main">
               <a:ext uri="{FF2B5EF4-FFF2-40B4-BE49-F238E27FC236}">
-                <a16:creationId xmlns:a16="http://schemas.microsoft.com/office/drawing/2014/main" id="{3407B09B-EA56-4B6F-A170-900312823401}"/>
+                <a16:creationId xmlns:a16="http://schemas.microsoft.com/office/drawing/2014/main" id="{988F5E98-7D7C-406F-A401-A33592E2C418}"/>
               </a:ext>
             </a:extLst>
           </p:cNvPr>
@@ -3584,7 +3717,7 @@
           <p:cNvPr id="15" name="">
             <a:extLst xmlns:a="http://schemas.openxmlformats.org/drawingml/2006/main">
               <a:ext uri="{FF2B5EF4-FFF2-40B4-BE49-F238E27FC236}">
-                <a16:creationId xmlns:a16="http://schemas.microsoft.com/office/drawing/2014/main" id="{0888274D-514F-4C56-AF85-6E778CFB4C9E}"/>
+                <a16:creationId xmlns:a16="http://schemas.microsoft.com/office/drawing/2014/main" id="{F862549A-A554-48F5-A325-B272B54B1819}"/>
               </a:ext>
             </a:extLst>
           </p:cNvPr>
@@ -3634,7 +3767,7 @@
           <p:cNvPr id="16" name="">
             <a:extLst xmlns:a="http://schemas.openxmlformats.org/drawingml/2006/main">
               <a:ext uri="{FF2B5EF4-FFF2-40B4-BE49-F238E27FC236}">
-                <a16:creationId xmlns:a16="http://schemas.microsoft.com/office/drawing/2014/main" id="{CACEC617-E815-4ACC-99FE-5B12F755E01C}"/>
+                <a16:creationId xmlns:a16="http://schemas.microsoft.com/office/drawing/2014/main" id="{772BC34C-EF62-48E2-9618-04CF4CA8E26F}"/>
               </a:ext>
             </a:extLst>
           </p:cNvPr>
@@ -3684,7 +3817,7 @@
           <p:cNvPr id="17" name="">
             <a:extLst xmlns:a="http://schemas.openxmlformats.org/drawingml/2006/main">
               <a:ext uri="{FF2B5EF4-FFF2-40B4-BE49-F238E27FC236}">
-                <a16:creationId xmlns:a16="http://schemas.microsoft.com/office/drawing/2014/main" id="{F1953C64-55C8-4779-9C42-4AFFD4E9ED07}"/>
+                <a16:creationId xmlns:a16="http://schemas.microsoft.com/office/drawing/2014/main" id="{E049E5AC-55CB-4271-B828-8A22EE380F67}"/>
               </a:ext>
             </a:extLst>
           </p:cNvPr>
@@ -3719,7 +3852,7 @@
           <p:cNvPr id="18" name="">
             <a:extLst xmlns:a="http://schemas.openxmlformats.org/drawingml/2006/main">
               <a:ext uri="{FF2B5EF4-FFF2-40B4-BE49-F238E27FC236}">
-                <a16:creationId xmlns:a16="http://schemas.microsoft.com/office/drawing/2014/main" id="{C7200112-C6EC-462F-96B8-1917E482E6BC}"/>
+                <a16:creationId xmlns:a16="http://schemas.microsoft.com/office/drawing/2014/main" id="{6CBFED2A-9876-4FA1-9DC0-17CE9F5F3FAC}"/>
               </a:ext>
             </a:extLst>
           </p:cNvPr>
@@ -3769,7 +3902,7 @@
           <p:cNvPr id="19" name="">
             <a:extLst xmlns:a="http://schemas.openxmlformats.org/drawingml/2006/main">
               <a:ext uri="{FF2B5EF4-FFF2-40B4-BE49-F238E27FC236}">
-                <a16:creationId xmlns:a16="http://schemas.microsoft.com/office/drawing/2014/main" id="{8C674224-5267-4983-9BF2-6879BF45C0B1}"/>
+                <a16:creationId xmlns:a16="http://schemas.microsoft.com/office/drawing/2014/main" id="{5E23DF8C-678D-46F4-994E-F74C8B203D35}"/>
               </a:ext>
             </a:extLst>
           </p:cNvPr>
@@ -3819,7 +3952,7 @@
           <p:cNvPr id="20" name="">
             <a:extLst xmlns:a="http://schemas.openxmlformats.org/drawingml/2006/main">
               <a:ext uri="{FF2B5EF4-FFF2-40B4-BE49-F238E27FC236}">
-                <a16:creationId xmlns:a16="http://schemas.microsoft.com/office/drawing/2014/main" id="{424C6D73-E134-48DB-99E7-B7DC6F739BA8}"/>
+                <a16:creationId xmlns:a16="http://schemas.microsoft.com/office/drawing/2014/main" id="{DF6E4755-E1EF-4842-A3BD-BD1F05938A51}"/>
               </a:ext>
             </a:extLst>
           </p:cNvPr>
@@ -3869,7 +4002,7 @@
           <p:cNvPr id="21" name="">
             <a:extLst xmlns:a="http://schemas.openxmlformats.org/drawingml/2006/main">
               <a:ext uri="{FF2B5EF4-FFF2-40B4-BE49-F238E27FC236}">
-                <a16:creationId xmlns:a16="http://schemas.microsoft.com/office/drawing/2014/main" id="{C308D6B4-F59B-4BB8-8F29-0EABBEF8D6D7}"/>
+                <a16:creationId xmlns:a16="http://schemas.microsoft.com/office/drawing/2014/main" id="{EE325DE6-B211-4318-AC7C-274B88002825}"/>
               </a:ext>
             </a:extLst>
           </p:cNvPr>
@@ -3919,7 +4052,7 @@
           <p:cNvPr id="22" name="">
             <a:extLst xmlns:a="http://schemas.openxmlformats.org/drawingml/2006/main">
               <a:ext uri="{FF2B5EF4-FFF2-40B4-BE49-F238E27FC236}">
-                <a16:creationId xmlns:a16="http://schemas.microsoft.com/office/drawing/2014/main" id="{5C423231-05B6-4C9F-B898-A8B80D8DE508}"/>
+                <a16:creationId xmlns:a16="http://schemas.microsoft.com/office/drawing/2014/main" id="{4C14DC28-6CDA-430A-A75B-6A07C561D2A4}"/>
               </a:ext>
             </a:extLst>
           </p:cNvPr>
@@ -3969,7 +4102,7 @@
           <p:cNvPr id="23" name="">
             <a:extLst xmlns:a="http://schemas.openxmlformats.org/drawingml/2006/main">
               <a:ext uri="{FF2B5EF4-FFF2-40B4-BE49-F238E27FC236}">
-                <a16:creationId xmlns:a16="http://schemas.microsoft.com/office/drawing/2014/main" id="{45356F72-3556-4064-B4CE-A63F8A150FE7}"/>
+                <a16:creationId xmlns:a16="http://schemas.microsoft.com/office/drawing/2014/main" id="{53F55C08-CC05-4CB5-AE14-61A71BD2F5A1}"/>
               </a:ext>
             </a:extLst>
           </p:cNvPr>
@@ -4017,7 +4150,7 @@
     </p:spTree>
     <p:extLst>
       <p:ext uri="{BB962C8B-B14F-4D97-AF65-F5344CB8AC3E}">
-        <p14:creationId xmlns:p14="http://schemas.microsoft.com/office/powerpoint/2010/main" val="1839271596"/>
+        <p14:creationId xmlns:p14="http://schemas.microsoft.com/office/powerpoint/2010/main" val="2131284679"/>
       </p:ext>
     </p:extLst>
   </p:cSld>
@@ -4048,7 +4181,7 @@
           <p:cNvPr id="1" name="">
             <a:extLst xmlns:a="http://schemas.openxmlformats.org/drawingml/2006/main">
               <a:ext uri="{FF2B5EF4-FFF2-40B4-BE49-F238E27FC236}">
-                <a16:creationId xmlns:a16="http://schemas.microsoft.com/office/drawing/2014/main" id="{3AED8586-A29C-447B-878E-DA545630E6C2}"/>
+                <a16:creationId xmlns:a16="http://schemas.microsoft.com/office/drawing/2014/main" id="{D1E47A20-9F09-4BF1-A6EB-144846731552}"/>
               </a:ext>
             </a:extLst>
           </p:cNvPr>
@@ -4083,7 +4216,7 @@
           <p:nvPr/>
         </p:nvPicPr>
         <p:blipFill>
-          <a:blip xmlns:r="http://schemas.openxmlformats.org/officeDocument/2006/relationships" xmlns:a="http://schemas.openxmlformats.org/drawingml/2006/main" r:embed="Rf93db0b6f3214a79"/>
+          <a:blip xmlns:r="http://schemas.openxmlformats.org/officeDocument/2006/relationships" xmlns:a="http://schemas.openxmlformats.org/drawingml/2006/main" r:embed="R17c0a79415d24742"/>
           <a:stretch xmlns:a="http://schemas.openxmlformats.org/drawingml/2006/main"/>
         </p:blipFill>
         <p:spPr>
@@ -4101,7 +4234,7 @@
           <p:cNvPr id="3" name="">
             <a:extLst xmlns:a="http://schemas.openxmlformats.org/drawingml/2006/main">
               <a:ext uri="{FF2B5EF4-FFF2-40B4-BE49-F238E27FC236}">
-                <a16:creationId xmlns:a16="http://schemas.microsoft.com/office/drawing/2014/main" id="{CD16C278-C1B3-42BC-AB66-BAD0A1214499}"/>
+                <a16:creationId xmlns:a16="http://schemas.microsoft.com/office/drawing/2014/main" id="{2127455C-8ACA-4712-9BF0-52C47A9A1D3A}"/>
               </a:ext>
             </a:extLst>
           </p:cNvPr>
@@ -4151,7 +4284,7 @@
           <p:cNvPr id="4" name="">
             <a:extLst xmlns:a="http://schemas.openxmlformats.org/drawingml/2006/main">
               <a:ext uri="{FF2B5EF4-FFF2-40B4-BE49-F238E27FC236}">
-                <a16:creationId xmlns:a16="http://schemas.microsoft.com/office/drawing/2014/main" id="{43137520-B3D3-48E4-B241-C06C72D3A38F}"/>
+                <a16:creationId xmlns:a16="http://schemas.microsoft.com/office/drawing/2014/main" id="{358D0DC8-E0F1-4622-8788-2C87C89CF688}"/>
               </a:ext>
             </a:extLst>
           </p:cNvPr>
@@ -4184,7 +4317,7 @@
           <p:cNvPr id="5" name="">
             <a:extLst xmlns:a="http://schemas.openxmlformats.org/drawingml/2006/main">
               <a:ext uri="{FF2B5EF4-FFF2-40B4-BE49-F238E27FC236}">
-                <a16:creationId xmlns:a16="http://schemas.microsoft.com/office/drawing/2014/main" id="{94100C75-CBFD-4922-90A2-851F4CC24BD9}"/>
+                <a16:creationId xmlns:a16="http://schemas.microsoft.com/office/drawing/2014/main" id="{5F8D532A-D708-467E-B26D-9E34572F13C4}"/>
               </a:ext>
             </a:extLst>
           </p:cNvPr>
@@ -4215,7 +4348,7 @@
           <p:cNvPr id="6" name="">
             <a:extLst xmlns:a="http://schemas.openxmlformats.org/drawingml/2006/main">
               <a:ext uri="{FF2B5EF4-FFF2-40B4-BE49-F238E27FC236}">
-                <a16:creationId xmlns:a16="http://schemas.microsoft.com/office/drawing/2014/main" id="{DDAF85F9-F25C-42CB-90EA-075160148173}"/>
+                <a16:creationId xmlns:a16="http://schemas.microsoft.com/office/drawing/2014/main" id="{A015619F-F69F-4037-8B8B-6A5E6BFA5603}"/>
               </a:ext>
             </a:extLst>
           </p:cNvPr>
@@ -4265,7 +4398,7 @@
           <p:cNvPr id="7" name="">
             <a:extLst xmlns:a="http://schemas.openxmlformats.org/drawingml/2006/main">
               <a:ext uri="{FF2B5EF4-FFF2-40B4-BE49-F238E27FC236}">
-                <a16:creationId xmlns:a16="http://schemas.microsoft.com/office/drawing/2014/main" id="{32A9F90B-5741-42C8-9816-1265A6107E64}"/>
+                <a16:creationId xmlns:a16="http://schemas.microsoft.com/office/drawing/2014/main" id="{19FC81BF-E115-4952-B215-4016C01B4C40}"/>
               </a:ext>
             </a:extLst>
           </p:cNvPr>
@@ -4315,7 +4448,7 @@
           <p:cNvPr id="8" name="">
             <a:extLst xmlns:a="http://schemas.openxmlformats.org/drawingml/2006/main">
               <a:ext uri="{FF2B5EF4-FFF2-40B4-BE49-F238E27FC236}">
-                <a16:creationId xmlns:a16="http://schemas.microsoft.com/office/drawing/2014/main" id="{652815F5-6DD1-41DC-B044-017BAC0AEDFD}"/>
+                <a16:creationId xmlns:a16="http://schemas.microsoft.com/office/drawing/2014/main" id="{CA31CDC4-0F78-4C62-9439-E14669820758}"/>
               </a:ext>
             </a:extLst>
           </p:cNvPr>
@@ -4348,7 +4481,7 @@
           <p:cNvPr id="9" name="">
             <a:extLst xmlns:a="http://schemas.openxmlformats.org/drawingml/2006/main">
               <a:ext uri="{FF2B5EF4-FFF2-40B4-BE49-F238E27FC236}">
-                <a16:creationId xmlns:a16="http://schemas.microsoft.com/office/drawing/2014/main" id="{AE51E021-C962-44F6-BFC2-38E447AFCD65}"/>
+                <a16:creationId xmlns:a16="http://schemas.microsoft.com/office/drawing/2014/main" id="{BB9FCBFC-D4C2-49CC-A2ED-E9EB85AEB913}"/>
               </a:ext>
             </a:extLst>
           </p:cNvPr>
@@ -4398,7 +4531,7 @@
           <p:cNvPr id="10" name="">
             <a:extLst xmlns:a="http://schemas.openxmlformats.org/drawingml/2006/main">
               <a:ext uri="{FF2B5EF4-FFF2-40B4-BE49-F238E27FC236}">
-                <a16:creationId xmlns:a16="http://schemas.microsoft.com/office/drawing/2014/main" id="{2388A019-A094-4C11-A6BD-3BF5184A1DC3}"/>
+                <a16:creationId xmlns:a16="http://schemas.microsoft.com/office/drawing/2014/main" id="{413243E8-1482-42AF-88E4-D49594B78056}"/>
               </a:ext>
             </a:extLst>
           </p:cNvPr>
@@ -4448,7 +4581,7 @@
           <p:cNvPr id="11" name="">
             <a:extLst xmlns:a="http://schemas.openxmlformats.org/drawingml/2006/main">
               <a:ext uri="{FF2B5EF4-FFF2-40B4-BE49-F238E27FC236}">
-                <a16:creationId xmlns:a16="http://schemas.microsoft.com/office/drawing/2014/main" id="{5DEE487C-DECB-4F6D-82BE-C8F489A0476F}"/>
+                <a16:creationId xmlns:a16="http://schemas.microsoft.com/office/drawing/2014/main" id="{6D9CB64C-58BB-4EFD-933A-53C9B7673471}"/>
               </a:ext>
             </a:extLst>
           </p:cNvPr>
@@ -4498,7 +4631,7 @@
           <p:cNvPr id="12" name="">
             <a:extLst xmlns:a="http://schemas.openxmlformats.org/drawingml/2006/main">
               <a:ext uri="{FF2B5EF4-FFF2-40B4-BE49-F238E27FC236}">
-                <a16:creationId xmlns:a16="http://schemas.microsoft.com/office/drawing/2014/main" id="{3500797E-242D-444A-96FC-5D9425A3D31D}"/>
+                <a16:creationId xmlns:a16="http://schemas.microsoft.com/office/drawing/2014/main" id="{F1E44112-589C-4C0B-B11B-8BB41EB14F09}"/>
               </a:ext>
             </a:extLst>
           </p:cNvPr>
@@ -4529,7 +4662,7 @@
           <p:cNvPr id="13" name="">
             <a:extLst xmlns:a="http://schemas.openxmlformats.org/drawingml/2006/main">
               <a:ext uri="{FF2B5EF4-FFF2-40B4-BE49-F238E27FC236}">
-                <a16:creationId xmlns:a16="http://schemas.microsoft.com/office/drawing/2014/main" id="{39952E1A-116D-4C10-BE83-1A05639D11B8}"/>
+                <a16:creationId xmlns:a16="http://schemas.microsoft.com/office/drawing/2014/main" id="{11F3EBD9-14F5-44C2-B770-80B72654AA37}"/>
               </a:ext>
             </a:extLst>
           </p:cNvPr>
@@ -4562,7 +4695,7 @@
           <p:cNvPr id="14" name="">
             <a:extLst xmlns:a="http://schemas.openxmlformats.org/drawingml/2006/main">
               <a:ext uri="{FF2B5EF4-FFF2-40B4-BE49-F238E27FC236}">
-                <a16:creationId xmlns:a16="http://schemas.microsoft.com/office/drawing/2014/main" id="{7E5055B3-F67C-4EF8-B466-CAD5CEE7C4D5}"/>
+                <a16:creationId xmlns:a16="http://schemas.microsoft.com/office/drawing/2014/main" id="{291EBA44-5AA2-42D1-AB4C-81528A9818F7}"/>
               </a:ext>
             </a:extLst>
           </p:cNvPr>
@@ -4612,7 +4745,7 @@
           <p:cNvPr id="15" name="">
             <a:extLst xmlns:a="http://schemas.openxmlformats.org/drawingml/2006/main">
               <a:ext uri="{FF2B5EF4-FFF2-40B4-BE49-F238E27FC236}">
-                <a16:creationId xmlns:a16="http://schemas.microsoft.com/office/drawing/2014/main" id="{7F26B7E5-576E-43F7-AE93-20F3DD858C8C}"/>
+                <a16:creationId xmlns:a16="http://schemas.microsoft.com/office/drawing/2014/main" id="{F9471DD7-0CCB-4EBF-9DEC-F0B44CF6C25A}"/>
               </a:ext>
             </a:extLst>
           </p:cNvPr>
@@ -4662,7 +4795,7 @@
           <p:cNvPr id="16" name="">
             <a:extLst xmlns:a="http://schemas.openxmlformats.org/drawingml/2006/main">
               <a:ext uri="{FF2B5EF4-FFF2-40B4-BE49-F238E27FC236}">
-                <a16:creationId xmlns:a16="http://schemas.microsoft.com/office/drawing/2014/main" id="{4389FB8E-5269-43F5-9903-3EB6840F2211}"/>
+                <a16:creationId xmlns:a16="http://schemas.microsoft.com/office/drawing/2014/main" id="{112C8138-B295-4520-8BE9-7CFAAADC6269}"/>
               </a:ext>
             </a:extLst>
           </p:cNvPr>
@@ -4712,7 +4845,7 @@
           <p:cNvPr id="17" name="">
             <a:extLst xmlns:a="http://schemas.openxmlformats.org/drawingml/2006/main">
               <a:ext uri="{FF2B5EF4-FFF2-40B4-BE49-F238E27FC236}">
-                <a16:creationId xmlns:a16="http://schemas.microsoft.com/office/drawing/2014/main" id="{8612D0B8-B06E-44B8-B7FF-541A89D590EC}"/>
+                <a16:creationId xmlns:a16="http://schemas.microsoft.com/office/drawing/2014/main" id="{C63FDF59-602A-4A42-A143-9917C4DE4A93}"/>
               </a:ext>
             </a:extLst>
           </p:cNvPr>
@@ -4743,7 +4876,7 @@
           <p:cNvPr id="18" name="">
             <a:extLst xmlns:a="http://schemas.openxmlformats.org/drawingml/2006/main">
               <a:ext uri="{FF2B5EF4-FFF2-40B4-BE49-F238E27FC236}">
-                <a16:creationId xmlns:a16="http://schemas.microsoft.com/office/drawing/2014/main" id="{10329257-8BF9-47BE-8251-9BEA5D477C0A}"/>
+                <a16:creationId xmlns:a16="http://schemas.microsoft.com/office/drawing/2014/main" id="{CB826E39-B6B1-46C4-8346-CBCCF00CA5CD}"/>
               </a:ext>
             </a:extLst>
           </p:cNvPr>
@@ -4776,7 +4909,7 @@
           <p:cNvPr id="19" name="">
             <a:extLst xmlns:a="http://schemas.openxmlformats.org/drawingml/2006/main">
               <a:ext uri="{FF2B5EF4-FFF2-40B4-BE49-F238E27FC236}">
-                <a16:creationId xmlns:a16="http://schemas.microsoft.com/office/drawing/2014/main" id="{5F8DE6BA-BB54-4F14-AA32-D716D7EB4FED}"/>
+                <a16:creationId xmlns:a16="http://schemas.microsoft.com/office/drawing/2014/main" id="{8035A0DC-224D-4AD5-B330-14E7E3A1A1EC}"/>
               </a:ext>
             </a:extLst>
           </p:cNvPr>
@@ -4826,7 +4959,7 @@
           <p:cNvPr id="20" name="">
             <a:extLst xmlns:a="http://schemas.openxmlformats.org/drawingml/2006/main">
               <a:ext uri="{FF2B5EF4-FFF2-40B4-BE49-F238E27FC236}">
-                <a16:creationId xmlns:a16="http://schemas.microsoft.com/office/drawing/2014/main" id="{B10170D6-D439-4583-9D47-B7190E3A7E3B}"/>
+                <a16:creationId xmlns:a16="http://schemas.microsoft.com/office/drawing/2014/main" id="{B7500B41-290F-4758-A38D-35F780C0ABC6}"/>
               </a:ext>
             </a:extLst>
           </p:cNvPr>
@@ -4876,7 +5009,7 @@
           <p:cNvPr id="21" name="">
             <a:extLst xmlns:a="http://schemas.openxmlformats.org/drawingml/2006/main">
               <a:ext uri="{FF2B5EF4-FFF2-40B4-BE49-F238E27FC236}">
-                <a16:creationId xmlns:a16="http://schemas.microsoft.com/office/drawing/2014/main" id="{6A8CDECC-1D3C-47D9-B158-76989DCBDAEE}"/>
+                <a16:creationId xmlns:a16="http://schemas.microsoft.com/office/drawing/2014/main" id="{B9A41AAE-7455-41AD-AA4B-E0EB281A7251}"/>
               </a:ext>
             </a:extLst>
           </p:cNvPr>
@@ -4926,7 +5059,7 @@
           <p:cNvPr id="22" name="">
             <a:extLst xmlns:a="http://schemas.openxmlformats.org/drawingml/2006/main">
               <a:ext uri="{FF2B5EF4-FFF2-40B4-BE49-F238E27FC236}">
-                <a16:creationId xmlns:a16="http://schemas.microsoft.com/office/drawing/2014/main" id="{26EBC821-B80E-44A9-BCB3-C848051EDA05}"/>
+                <a16:creationId xmlns:a16="http://schemas.microsoft.com/office/drawing/2014/main" id="{1C7D107E-9DB0-420F-B2FB-09956C0BE50C}"/>
               </a:ext>
             </a:extLst>
           </p:cNvPr>
@@ -4957,7 +5090,7 @@
           <p:cNvPr id="23" name="">
             <a:extLst xmlns:a="http://schemas.openxmlformats.org/drawingml/2006/main">
               <a:ext uri="{FF2B5EF4-FFF2-40B4-BE49-F238E27FC236}">
-                <a16:creationId xmlns:a16="http://schemas.microsoft.com/office/drawing/2014/main" id="{A233AF7C-529C-45E3-8707-7D0AFD872836}"/>
+                <a16:creationId xmlns:a16="http://schemas.microsoft.com/office/drawing/2014/main" id="{D22CDC60-A00B-42EE-91FC-0A116FC8E6B6}"/>
               </a:ext>
             </a:extLst>
           </p:cNvPr>
@@ -4990,7 +5123,7 @@
           <p:cNvPr id="24" name="">
             <a:extLst xmlns:a="http://schemas.openxmlformats.org/drawingml/2006/main">
               <a:ext uri="{FF2B5EF4-FFF2-40B4-BE49-F238E27FC236}">
-                <a16:creationId xmlns:a16="http://schemas.microsoft.com/office/drawing/2014/main" id="{60F5F3D9-7F91-47D3-B632-B145A034BD0D}"/>
+                <a16:creationId xmlns:a16="http://schemas.microsoft.com/office/drawing/2014/main" id="{B6D209F1-3CB3-410A-BF2A-B0421B7D4EF7}"/>
               </a:ext>
             </a:extLst>
           </p:cNvPr>
@@ -5040,7 +5173,7 @@
           <p:cNvPr id="25" name="">
             <a:extLst xmlns:a="http://schemas.openxmlformats.org/drawingml/2006/main">
               <a:ext uri="{FF2B5EF4-FFF2-40B4-BE49-F238E27FC236}">
-                <a16:creationId xmlns:a16="http://schemas.microsoft.com/office/drawing/2014/main" id="{0AC65B7D-64C4-435C-9025-83D5722A2E47}"/>
+                <a16:creationId xmlns:a16="http://schemas.microsoft.com/office/drawing/2014/main" id="{5F372317-B07A-4A1F-822B-E7105CA166EF}"/>
               </a:ext>
             </a:extLst>
           </p:cNvPr>
@@ -5090,7 +5223,7 @@
           <p:cNvPr id="26" name="">
             <a:extLst xmlns:a="http://schemas.openxmlformats.org/drawingml/2006/main">
               <a:ext uri="{FF2B5EF4-FFF2-40B4-BE49-F238E27FC236}">
-                <a16:creationId xmlns:a16="http://schemas.microsoft.com/office/drawing/2014/main" id="{32972225-716B-4222-BE24-6A882CEA9226}"/>
+                <a16:creationId xmlns:a16="http://schemas.microsoft.com/office/drawing/2014/main" id="{EE24BB5D-E2EB-4343-9490-A952711BB735}"/>
               </a:ext>
             </a:extLst>
           </p:cNvPr>
@@ -5138,7 +5271,7 @@
     </p:spTree>
     <p:extLst>
       <p:ext uri="{BB962C8B-B14F-4D97-AF65-F5344CB8AC3E}">
-        <p14:creationId xmlns:p14="http://schemas.microsoft.com/office/powerpoint/2010/main" val="1551456878"/>
+        <p14:creationId xmlns:p14="http://schemas.microsoft.com/office/powerpoint/2010/main" val="951358501"/>
       </p:ext>
     </p:extLst>
   </p:cSld>
@@ -5169,7 +5302,7 @@
           <p:cNvPr id="1" name="">
             <a:extLst xmlns:a="http://schemas.openxmlformats.org/drawingml/2006/main">
               <a:ext uri="{FF2B5EF4-FFF2-40B4-BE49-F238E27FC236}">
-                <a16:creationId xmlns:a16="http://schemas.microsoft.com/office/drawing/2014/main" id="{8A43EF0A-A766-4552-9A92-3CACFFB33260}"/>
+                <a16:creationId xmlns:a16="http://schemas.microsoft.com/office/drawing/2014/main" id="{6E9E8874-3B1F-40C6-91A7-EB125705FBCB}"/>
               </a:ext>
             </a:extLst>
           </p:cNvPr>
@@ -5197,14 +5330,14 @@
       </p:sp>
       <p:pic>
         <p:nvPicPr>
-          <p:cNvPr id="20" name=""/>
+          <p:cNvPr id="40" name=""/>
           <p:cNvPicPr>
             <a:picLocks xmlns:a="http://schemas.openxmlformats.org/drawingml/2006/main" noChangeAspect="1"/>
           </p:cNvPicPr>
           <p:nvPr/>
         </p:nvPicPr>
         <p:blipFill>
-          <a:blip xmlns:r="http://schemas.openxmlformats.org/officeDocument/2006/relationships" xmlns:a="http://schemas.openxmlformats.org/drawingml/2006/main" r:embed="R174cc1ca81384e1f"/>
+          <a:blip xmlns:r="http://schemas.openxmlformats.org/officeDocument/2006/relationships" xmlns:a="http://schemas.openxmlformats.org/drawingml/2006/main" r:embed="R749d38f8876c42f1"/>
           <a:stretch xmlns:a="http://schemas.openxmlformats.org/drawingml/2006/main"/>
         </p:blipFill>
         <p:spPr>
@@ -5222,7 +5355,7 @@
           <p:cNvPr id="3" name="">
             <a:extLst xmlns:a="http://schemas.openxmlformats.org/drawingml/2006/main">
               <a:ext uri="{FF2B5EF4-FFF2-40B4-BE49-F238E27FC236}">
-                <a16:creationId xmlns:a16="http://schemas.microsoft.com/office/drawing/2014/main" id="{F8A23122-B1A5-475A-89DB-A091D83EDC83}"/>
+                <a16:creationId xmlns:a16="http://schemas.microsoft.com/office/drawing/2014/main" id="{2DC42AC8-EC58-4B3E-896A-6FF300D7CD69}"/>
               </a:ext>
             </a:extLst>
           </p:cNvPr>
@@ -5272,7 +5405,7 @@
           <p:cNvPr id="4" name="">
             <a:extLst xmlns:a="http://schemas.openxmlformats.org/drawingml/2006/main">
               <a:ext uri="{FF2B5EF4-FFF2-40B4-BE49-F238E27FC236}">
-                <a16:creationId xmlns:a16="http://schemas.microsoft.com/office/drawing/2014/main" id="{E6B3082A-B922-421B-99E8-17A9CCAEFA67}"/>
+                <a16:creationId xmlns:a16="http://schemas.microsoft.com/office/drawing/2014/main" id="{44B12D64-90DC-4F5A-992F-22C5C115081E}"/>
               </a:ext>
             </a:extLst>
           </p:cNvPr>
@@ -5305,7 +5438,7 @@
           <p:cNvPr id="5" name="">
             <a:extLst xmlns:a="http://schemas.openxmlformats.org/drawingml/2006/main">
               <a:ext uri="{FF2B5EF4-FFF2-40B4-BE49-F238E27FC236}">
-                <a16:creationId xmlns:a16="http://schemas.microsoft.com/office/drawing/2014/main" id="{7DA1002D-CB2F-4A40-9C18-851AC77C006D}"/>
+                <a16:creationId xmlns:a16="http://schemas.microsoft.com/office/drawing/2014/main" id="{750965DA-6A02-42DE-AE65-568897EC1D65}"/>
               </a:ext>
             </a:extLst>
           </p:cNvPr>
@@ -5336,7 +5469,7 @@
           <p:cNvPr id="6" name="">
             <a:extLst xmlns:a="http://schemas.openxmlformats.org/drawingml/2006/main">
               <a:ext uri="{FF2B5EF4-FFF2-40B4-BE49-F238E27FC236}">
-                <a16:creationId xmlns:a16="http://schemas.microsoft.com/office/drawing/2014/main" id="{3F25C06C-5C5A-4D01-AE19-7A692BC31619}"/>
+                <a16:creationId xmlns:a16="http://schemas.microsoft.com/office/drawing/2014/main" id="{93607864-3DDD-4719-BDEF-509A0CF66412}"/>
               </a:ext>
             </a:extLst>
           </p:cNvPr>
@@ -5386,7 +5519,7 @@
           <p:cNvPr id="7" name="">
             <a:extLst xmlns:a="http://schemas.openxmlformats.org/drawingml/2006/main">
               <a:ext uri="{FF2B5EF4-FFF2-40B4-BE49-F238E27FC236}">
-                <a16:creationId xmlns:a16="http://schemas.microsoft.com/office/drawing/2014/main" id="{8F2491BC-BF87-43B5-A5DC-8E063ED37A8E}"/>
+                <a16:creationId xmlns:a16="http://schemas.microsoft.com/office/drawing/2014/main" id="{B690908E-9E7F-45AD-BB7A-D449E2B52AED}"/>
               </a:ext>
             </a:extLst>
           </p:cNvPr>
@@ -5436,18 +5569,18 @@
           <p:cNvPr id="8" name="">
             <a:extLst xmlns:a="http://schemas.openxmlformats.org/drawingml/2006/main">
               <a:ext uri="{FF2B5EF4-FFF2-40B4-BE49-F238E27FC236}">
-                <a16:creationId xmlns:a16="http://schemas.microsoft.com/office/drawing/2014/main" id="{5410ABB8-4FA1-4ADD-9483-50A55794D63A}"/>
-              </a:ext>
-            </a:extLst>
-          </p:cNvPr>
-          <p:cNvSpPr>
-            <a:spLocks xmlns:a="http://schemas.openxmlformats.org/drawingml/2006/main" noGrp="1"/>
-          </p:cNvSpPr>
-          <p:nvPr/>
-        </p:nvSpPr>
-        <p:spPr>
-          <a:xfrm xmlns:a="http://schemas.openxmlformats.org/drawingml/2006/main">
-            <a:off x="609600" y="1638300"/>
+                <a16:creationId xmlns:a16="http://schemas.microsoft.com/office/drawing/2014/main" id="{7E6E10C9-9205-402F-9881-EC6F89A7B8E3}"/>
+              </a:ext>
+            </a:extLst>
+          </p:cNvPr>
+          <p:cNvSpPr>
+            <a:spLocks xmlns:a="http://schemas.openxmlformats.org/drawingml/2006/main" noGrp="1"/>
+          </p:cNvSpPr>
+          <p:nvPr/>
+        </p:nvSpPr>
+        <p:spPr>
+          <a:xfrm xmlns:a="http://schemas.openxmlformats.org/drawingml/2006/main">
+            <a:off x="609600" y="1466850"/>
             <a:ext cx="457200" cy="266700"/>
           </a:xfrm>
           <a:prstGeom xmlns:a="http://schemas.openxmlformats.org/drawingml/2006/main" prst="rect">
@@ -5464,14 +5597,14 @@
           <a:lstStyle xmlns:a="http://schemas.openxmlformats.org/drawingml/2006/main"/>
           <a:p xmlns:a="http://schemas.openxmlformats.org/drawingml/2006/main">
             <a:pPr>
-              <a:defRPr sz="1275" b="1">
+              <a:defRPr sz="1200" b="1">
                 <a:solidFill>
                   <a:srgbClr val="FF6412"/>
                 </a:solidFill>
               </a:defRPr>
             </a:pPr>
             <a:r>
-              <a:rPr sz="1275" b="1">
+              <a:rPr sz="1200" b="1">
                 <a:solidFill>
                   <a:srgbClr val="FF6412"/>
                 </a:solidFill>
@@ -5486,19 +5619,19 @@
           <p:cNvPr id="9" name="">
             <a:extLst xmlns:a="http://schemas.openxmlformats.org/drawingml/2006/main">
               <a:ext uri="{FF2B5EF4-FFF2-40B4-BE49-F238E27FC236}">
-                <a16:creationId xmlns:a16="http://schemas.microsoft.com/office/drawing/2014/main" id="{2C93C36C-5D5C-4E9C-B624-4DEE61BB0BF3}"/>
-              </a:ext>
-            </a:extLst>
-          </p:cNvPr>
-          <p:cNvSpPr>
-            <a:spLocks xmlns:a="http://schemas.openxmlformats.org/drawingml/2006/main" noGrp="1"/>
-          </p:cNvSpPr>
-          <p:nvPr/>
-        </p:nvSpPr>
-        <p:spPr>
-          <a:xfrm xmlns:a="http://schemas.openxmlformats.org/drawingml/2006/main">
-            <a:off x="1200150" y="1581150"/>
-            <a:ext cx="10048875" cy="1028700"/>
+                <a16:creationId xmlns:a16="http://schemas.microsoft.com/office/drawing/2014/main" id="{C21707F0-2339-47FB-813C-F77B20179ECD}"/>
+              </a:ext>
+            </a:extLst>
+          </p:cNvPr>
+          <p:cNvSpPr>
+            <a:spLocks xmlns:a="http://schemas.openxmlformats.org/drawingml/2006/main" noGrp="1"/>
+          </p:cNvSpPr>
+          <p:nvPr/>
+        </p:nvSpPr>
+        <p:spPr>
+          <a:xfrm xmlns:a="http://schemas.openxmlformats.org/drawingml/2006/main">
+            <a:off x="1200150" y="1409700"/>
+            <a:ext cx="9982200" cy="266700"/>
           </a:xfrm>
           <a:prstGeom xmlns:a="http://schemas.openxmlformats.org/drawingml/2006/main" prst="rect">
             <a:avLst/>
@@ -5514,19 +5647,19 @@
           <a:lstStyle xmlns:a="http://schemas.openxmlformats.org/drawingml/2006/main"/>
           <a:p xmlns:a="http://schemas.openxmlformats.org/drawingml/2006/main">
             <a:pPr>
-              <a:defRPr sz="1350">
+              <a:defRPr sz="1425" b="1">
                 <a:solidFill>
                   <a:srgbClr val="161616"/>
                 </a:solidFill>
               </a:defRPr>
             </a:pPr>
             <a:r>
-              <a:rPr sz="1350">
+              <a:rPr sz="1425" b="1">
                 <a:solidFill>
                   <a:srgbClr val="161616"/>
                 </a:solidFill>
               </a:rPr>
-              <a:t>{{IT_1}}</a:t>
+              <a:t>{{IT_1_TITLE}}</a:t>
             </a:r>
           </a:p>
         </p:txBody>
@@ -5536,19 +5669,269 @@
           <p:cNvPr id="10" name="">
             <a:extLst xmlns:a="http://schemas.openxmlformats.org/drawingml/2006/main">
               <a:ext uri="{FF2B5EF4-FFF2-40B4-BE49-F238E27FC236}">
-                <a16:creationId xmlns:a16="http://schemas.microsoft.com/office/drawing/2014/main" id="{7E4ECF77-3691-40F4-AB5F-B38A93C935A7}"/>
-              </a:ext>
-            </a:extLst>
-          </p:cNvPr>
-          <p:cNvSpPr>
-            <a:spLocks xmlns:a="http://schemas.openxmlformats.org/drawingml/2006/main" noGrp="1"/>
-          </p:cNvSpPr>
-          <p:nvPr/>
-        </p:nvSpPr>
-        <p:spPr>
-          <a:xfrm xmlns:a="http://schemas.openxmlformats.org/drawingml/2006/main">
-            <a:off x="1200150" y="2571750"/>
-            <a:ext cx="10048875" cy="9525"/>
+                <a16:creationId xmlns:a16="http://schemas.microsoft.com/office/drawing/2014/main" id="{9771E41C-F3A7-4FE0-A98D-BCCBA8216067}"/>
+              </a:ext>
+            </a:extLst>
+          </p:cNvPr>
+          <p:cNvSpPr>
+            <a:spLocks xmlns:a="http://schemas.openxmlformats.org/drawingml/2006/main" noGrp="1"/>
+          </p:cNvSpPr>
+          <p:nvPr/>
+        </p:nvSpPr>
+        <p:spPr>
+          <a:xfrm xmlns:a="http://schemas.openxmlformats.org/drawingml/2006/main">
+            <a:off x="1200150" y="1704975"/>
+            <a:ext cx="9982200" cy="400050"/>
+          </a:xfrm>
+          <a:prstGeom xmlns:a="http://schemas.openxmlformats.org/drawingml/2006/main" prst="rect">
+            <a:avLst/>
+          </a:prstGeom>
+          <a:noFill xmlns:a="http://schemas.openxmlformats.org/drawingml/2006/main"/>
+          <a:ln xmlns:a="http://schemas.openxmlformats.org/drawingml/2006/main" w="0">
+            <a:noFill/>
+            <a:prstDash val="solid"/>
+          </a:ln>
+        </p:spPr>
+        <p:txBody>
+          <a:bodyPr xmlns:a="http://schemas.openxmlformats.org/drawingml/2006/main"/>
+          <a:lstStyle xmlns:a="http://schemas.openxmlformats.org/drawingml/2006/main"/>
+          <a:p xmlns:a="http://schemas.openxmlformats.org/drawingml/2006/main">
+            <a:pPr>
+              <a:defRPr sz="1125">
+                <a:solidFill>
+                  <a:srgbClr val="667085"/>
+                </a:solidFill>
+              </a:defRPr>
+            </a:pPr>
+            <a:r>
+              <a:rPr sz="1125">
+                <a:solidFill>
+                  <a:srgbClr val="667085"/>
+                </a:solidFill>
+              </a:rPr>
+              <a:t>{{IT_1_ACTION}}</a:t>
+            </a:r>
+          </a:p>
+        </p:txBody>
+      </p:sp>
+      <p:sp>
+        <p:nvSpPr>
+          <p:cNvPr id="11" name="">
+            <a:extLst xmlns:a="http://schemas.openxmlformats.org/drawingml/2006/main">
+              <a:ext uri="{FF2B5EF4-FFF2-40B4-BE49-F238E27FC236}">
+                <a16:creationId xmlns:a16="http://schemas.microsoft.com/office/drawing/2014/main" id="{3EF1E4A9-1678-42A1-B093-E0CDF518DF8A}"/>
+              </a:ext>
+            </a:extLst>
+          </p:cNvPr>
+          <p:cNvSpPr>
+            <a:spLocks xmlns:a="http://schemas.openxmlformats.org/drawingml/2006/main" noGrp="1"/>
+          </p:cNvSpPr>
+          <p:nvPr/>
+        </p:nvSpPr>
+        <p:spPr>
+          <a:xfrm xmlns:a="http://schemas.openxmlformats.org/drawingml/2006/main">
+            <a:off x="1200150" y="2171700"/>
+            <a:ext cx="742950" cy="190500"/>
+          </a:xfrm>
+          <a:prstGeom xmlns:a="http://schemas.openxmlformats.org/drawingml/2006/main" prst="rect">
+            <a:avLst/>
+          </a:prstGeom>
+          <a:noFill xmlns:a="http://schemas.openxmlformats.org/drawingml/2006/main"/>
+          <a:ln xmlns:a="http://schemas.openxmlformats.org/drawingml/2006/main" w="0">
+            <a:noFill/>
+            <a:prstDash val="solid"/>
+          </a:ln>
+        </p:spPr>
+        <p:txBody>
+          <a:bodyPr xmlns:a="http://schemas.openxmlformats.org/drawingml/2006/main"/>
+          <a:lstStyle xmlns:a="http://schemas.openxmlformats.org/drawingml/2006/main"/>
+          <a:p xmlns:a="http://schemas.openxmlformats.org/drawingml/2006/main">
+            <a:pPr>
+              <a:defRPr sz="975" b="1">
+                <a:solidFill>
+                  <a:srgbClr val="FF6412"/>
+                </a:solidFill>
+              </a:defRPr>
+            </a:pPr>
+            <a:r>
+              <a:rPr sz="975" b="1">
+                <a:solidFill>
+                  <a:srgbClr val="FF6412"/>
+                </a:solidFill>
+              </a:rPr>
+              <a:t>Решение</a:t>
+            </a:r>
+          </a:p>
+        </p:txBody>
+      </p:sp>
+      <p:sp>
+        <p:nvSpPr>
+          <p:cNvPr id="12" name="">
+            <a:extLst xmlns:a="http://schemas.openxmlformats.org/drawingml/2006/main">
+              <a:ext uri="{FF2B5EF4-FFF2-40B4-BE49-F238E27FC236}">
+                <a16:creationId xmlns:a16="http://schemas.microsoft.com/office/drawing/2014/main" id="{83ADC052-36D0-45FB-92CA-C17E9D280F6D}"/>
+              </a:ext>
+            </a:extLst>
+          </p:cNvPr>
+          <p:cNvSpPr>
+            <a:spLocks xmlns:a="http://schemas.openxmlformats.org/drawingml/2006/main" noGrp="1"/>
+          </p:cNvSpPr>
+          <p:nvPr/>
+        </p:nvSpPr>
+        <p:spPr>
+          <a:xfrm xmlns:a="http://schemas.openxmlformats.org/drawingml/2006/main">
+            <a:off x="1962150" y="2152650"/>
+            <a:ext cx="3810000" cy="323850"/>
+          </a:xfrm>
+          <a:prstGeom xmlns:a="http://schemas.openxmlformats.org/drawingml/2006/main" prst="rect">
+            <a:avLst/>
+          </a:prstGeom>
+          <a:noFill xmlns:a="http://schemas.openxmlformats.org/drawingml/2006/main"/>
+          <a:ln xmlns:a="http://schemas.openxmlformats.org/drawingml/2006/main" w="0">
+            <a:noFill/>
+            <a:prstDash val="solid"/>
+          </a:ln>
+        </p:spPr>
+        <p:txBody>
+          <a:bodyPr xmlns:a="http://schemas.openxmlformats.org/drawingml/2006/main"/>
+          <a:lstStyle xmlns:a="http://schemas.openxmlformats.org/drawingml/2006/main"/>
+          <a:p xmlns:a="http://schemas.openxmlformats.org/drawingml/2006/main">
+            <a:pPr>
+              <a:defRPr sz="1050" b="1">
+                <a:solidFill>
+                  <a:srgbClr val="161616"/>
+                </a:solidFill>
+              </a:defRPr>
+            </a:pPr>
+            <a:r>
+              <a:rPr sz="1050" b="1">
+                <a:solidFill>
+                  <a:srgbClr val="161616"/>
+                </a:solidFill>
+              </a:rPr>
+              <a:t>{{IT_1_SOLUTION}}</a:t>
+            </a:r>
+          </a:p>
+        </p:txBody>
+      </p:sp>
+      <p:sp>
+        <p:nvSpPr>
+          <p:cNvPr id="13" name="">
+            <a:extLst xmlns:a="http://schemas.openxmlformats.org/drawingml/2006/main">
+              <a:ext uri="{FF2B5EF4-FFF2-40B4-BE49-F238E27FC236}">
+                <a16:creationId xmlns:a16="http://schemas.microsoft.com/office/drawing/2014/main" id="{703F063B-47E2-4D1F-BAEC-02A9A4D55DBE}"/>
+              </a:ext>
+            </a:extLst>
+          </p:cNvPr>
+          <p:cNvSpPr>
+            <a:spLocks xmlns:a="http://schemas.openxmlformats.org/drawingml/2006/main" noGrp="1"/>
+          </p:cNvSpPr>
+          <p:nvPr/>
+        </p:nvSpPr>
+        <p:spPr>
+          <a:xfrm xmlns:a="http://schemas.openxmlformats.org/drawingml/2006/main">
+            <a:off x="6019800" y="2171700"/>
+            <a:ext cx="1104900" cy="190500"/>
+          </a:xfrm>
+          <a:prstGeom xmlns:a="http://schemas.openxmlformats.org/drawingml/2006/main" prst="rect">
+            <a:avLst/>
+          </a:prstGeom>
+          <a:noFill xmlns:a="http://schemas.openxmlformats.org/drawingml/2006/main"/>
+          <a:ln xmlns:a="http://schemas.openxmlformats.org/drawingml/2006/main" w="0">
+            <a:noFill/>
+            <a:prstDash val="solid"/>
+          </a:ln>
+        </p:spPr>
+        <p:txBody>
+          <a:bodyPr xmlns:a="http://schemas.openxmlformats.org/drawingml/2006/main"/>
+          <a:lstStyle xmlns:a="http://schemas.openxmlformats.org/drawingml/2006/main"/>
+          <a:p xmlns:a="http://schemas.openxmlformats.org/drawingml/2006/main">
+            <a:pPr>
+              <a:defRPr sz="975" b="1">
+                <a:solidFill>
+                  <a:srgbClr val="FF6412"/>
+                </a:solidFill>
+              </a:defRPr>
+            </a:pPr>
+            <a:r>
+              <a:rPr sz="975" b="1">
+                <a:solidFill>
+                  <a:srgbClr val="FF6412"/>
+                </a:solidFill>
+              </a:rPr>
+              <a:t>Производители</a:t>
+            </a:r>
+          </a:p>
+        </p:txBody>
+      </p:sp>
+      <p:sp>
+        <p:nvSpPr>
+          <p:cNvPr id="14" name="">
+            <a:extLst xmlns:a="http://schemas.openxmlformats.org/drawingml/2006/main">
+              <a:ext uri="{FF2B5EF4-FFF2-40B4-BE49-F238E27FC236}">
+                <a16:creationId xmlns:a16="http://schemas.microsoft.com/office/drawing/2014/main" id="{30604C3A-06EC-4101-B00C-5A05477D65BE}"/>
+              </a:ext>
+            </a:extLst>
+          </p:cNvPr>
+          <p:cNvSpPr>
+            <a:spLocks xmlns:a="http://schemas.openxmlformats.org/drawingml/2006/main" noGrp="1"/>
+          </p:cNvSpPr>
+          <p:nvPr/>
+        </p:nvSpPr>
+        <p:spPr>
+          <a:xfrm xmlns:a="http://schemas.openxmlformats.org/drawingml/2006/main">
+            <a:off x="7181850" y="2152650"/>
+            <a:ext cx="4000500" cy="323850"/>
+          </a:xfrm>
+          <a:prstGeom xmlns:a="http://schemas.openxmlformats.org/drawingml/2006/main" prst="rect">
+            <a:avLst/>
+          </a:prstGeom>
+          <a:noFill xmlns:a="http://schemas.openxmlformats.org/drawingml/2006/main"/>
+          <a:ln xmlns:a="http://schemas.openxmlformats.org/drawingml/2006/main" w="0">
+            <a:noFill/>
+            <a:prstDash val="solid"/>
+          </a:ln>
+        </p:spPr>
+        <p:txBody>
+          <a:bodyPr xmlns:a="http://schemas.openxmlformats.org/drawingml/2006/main"/>
+          <a:lstStyle xmlns:a="http://schemas.openxmlformats.org/drawingml/2006/main"/>
+          <a:p xmlns:a="http://schemas.openxmlformats.org/drawingml/2006/main">
+            <a:pPr>
+              <a:defRPr sz="1050" b="1">
+                <a:solidFill>
+                  <a:srgbClr val="161616"/>
+                </a:solidFill>
+              </a:defRPr>
+            </a:pPr>
+            <a:r>
+              <a:rPr sz="1050" b="1">
+                <a:solidFill>
+                  <a:srgbClr val="161616"/>
+                </a:solidFill>
+              </a:rPr>
+              <a:t>{{IT_1_VENDORS}}</a:t>
+            </a:r>
+          </a:p>
+        </p:txBody>
+      </p:sp>
+      <p:sp>
+        <p:nvSpPr>
+          <p:cNvPr id="15" name="">
+            <a:extLst xmlns:a="http://schemas.openxmlformats.org/drawingml/2006/main">
+              <a:ext uri="{FF2B5EF4-FFF2-40B4-BE49-F238E27FC236}">
+                <a16:creationId xmlns:a16="http://schemas.microsoft.com/office/drawing/2014/main" id="{B2B56750-D1A7-4953-8801-62C318BCF2EA}"/>
+              </a:ext>
+            </a:extLst>
+          </p:cNvPr>
+          <p:cNvSpPr>
+            <a:spLocks xmlns:a="http://schemas.openxmlformats.org/drawingml/2006/main" noGrp="1"/>
+          </p:cNvSpPr>
+          <p:nvPr/>
+        </p:nvSpPr>
+        <p:spPr>
+          <a:xfrm xmlns:a="http://schemas.openxmlformats.org/drawingml/2006/main">
+            <a:off x="1200150" y="2552700"/>
+            <a:ext cx="9982200" cy="9525"/>
           </a:xfrm>
           <a:prstGeom xmlns:a="http://schemas.openxmlformats.org/drawingml/2006/main" prst="rect">
             <a:avLst/>
@@ -5564,21 +5947,21 @@
       </p:sp>
       <p:sp>
         <p:nvSpPr>
-          <p:cNvPr id="11" name="">
-            <a:extLst xmlns:a="http://schemas.openxmlformats.org/drawingml/2006/main">
-              <a:ext uri="{FF2B5EF4-FFF2-40B4-BE49-F238E27FC236}">
-                <a16:creationId xmlns:a16="http://schemas.microsoft.com/office/drawing/2014/main" id="{1F28727F-B917-4927-94A1-B717DAE01021}"/>
-              </a:ext>
-            </a:extLst>
-          </p:cNvPr>
-          <p:cNvSpPr>
-            <a:spLocks xmlns:a="http://schemas.openxmlformats.org/drawingml/2006/main" noGrp="1"/>
-          </p:cNvSpPr>
-          <p:nvPr/>
-        </p:nvSpPr>
-        <p:spPr>
-          <a:xfrm xmlns:a="http://schemas.openxmlformats.org/drawingml/2006/main">
-            <a:off x="609600" y="2800350"/>
+          <p:cNvPr id="16" name="">
+            <a:extLst xmlns:a="http://schemas.openxmlformats.org/drawingml/2006/main">
+              <a:ext uri="{FF2B5EF4-FFF2-40B4-BE49-F238E27FC236}">
+                <a16:creationId xmlns:a16="http://schemas.microsoft.com/office/drawing/2014/main" id="{068B5AC9-4181-4C0A-B3B6-502B8D95A277}"/>
+              </a:ext>
+            </a:extLst>
+          </p:cNvPr>
+          <p:cNvSpPr>
+            <a:spLocks xmlns:a="http://schemas.openxmlformats.org/drawingml/2006/main" noGrp="1"/>
+          </p:cNvSpPr>
+          <p:nvPr/>
+        </p:nvSpPr>
+        <p:spPr>
+          <a:xfrm xmlns:a="http://schemas.openxmlformats.org/drawingml/2006/main">
+            <a:off x="609600" y="2724150"/>
             <a:ext cx="457200" cy="266700"/>
           </a:xfrm>
           <a:prstGeom xmlns:a="http://schemas.openxmlformats.org/drawingml/2006/main" prst="rect">
@@ -5595,14 +5978,14 @@
           <a:lstStyle xmlns:a="http://schemas.openxmlformats.org/drawingml/2006/main"/>
           <a:p xmlns:a="http://schemas.openxmlformats.org/drawingml/2006/main">
             <a:pPr>
-              <a:defRPr sz="1275" b="1">
+              <a:defRPr sz="1200" b="1">
                 <a:solidFill>
                   <a:srgbClr val="FF6412"/>
                 </a:solidFill>
               </a:defRPr>
             </a:pPr>
             <a:r>
-              <a:rPr sz="1275" b="1">
+              <a:rPr sz="1200" b="1">
                 <a:solidFill>
                   <a:srgbClr val="FF6412"/>
                 </a:solidFill>
@@ -5614,22 +5997,22 @@
       </p:sp>
       <p:sp>
         <p:nvSpPr>
-          <p:cNvPr id="12" name="">
-            <a:extLst xmlns:a="http://schemas.openxmlformats.org/drawingml/2006/main">
-              <a:ext uri="{FF2B5EF4-FFF2-40B4-BE49-F238E27FC236}">
-                <a16:creationId xmlns:a16="http://schemas.microsoft.com/office/drawing/2014/main" id="{950587A1-C4FB-4F3B-9948-15A286AFD9FB}"/>
-              </a:ext>
-            </a:extLst>
-          </p:cNvPr>
-          <p:cNvSpPr>
-            <a:spLocks xmlns:a="http://schemas.openxmlformats.org/drawingml/2006/main" noGrp="1"/>
-          </p:cNvSpPr>
-          <p:nvPr/>
-        </p:nvSpPr>
-        <p:spPr>
-          <a:xfrm xmlns:a="http://schemas.openxmlformats.org/drawingml/2006/main">
-            <a:off x="1200150" y="2743200"/>
-            <a:ext cx="10048875" cy="1028700"/>
+          <p:cNvPr id="17" name="">
+            <a:extLst xmlns:a="http://schemas.openxmlformats.org/drawingml/2006/main">
+              <a:ext uri="{FF2B5EF4-FFF2-40B4-BE49-F238E27FC236}">
+                <a16:creationId xmlns:a16="http://schemas.microsoft.com/office/drawing/2014/main" id="{A0ABF8BC-8AE4-431A-8D46-8B64EB4F7D44}"/>
+              </a:ext>
+            </a:extLst>
+          </p:cNvPr>
+          <p:cNvSpPr>
+            <a:spLocks xmlns:a="http://schemas.openxmlformats.org/drawingml/2006/main" noGrp="1"/>
+          </p:cNvSpPr>
+          <p:nvPr/>
+        </p:nvSpPr>
+        <p:spPr>
+          <a:xfrm xmlns:a="http://schemas.openxmlformats.org/drawingml/2006/main">
+            <a:off x="1200150" y="2667000"/>
+            <a:ext cx="9982200" cy="266700"/>
           </a:xfrm>
           <a:prstGeom xmlns:a="http://schemas.openxmlformats.org/drawingml/2006/main" prst="rect">
             <a:avLst/>
@@ -5645,41 +6028,291 @@
           <a:lstStyle xmlns:a="http://schemas.openxmlformats.org/drawingml/2006/main"/>
           <a:p xmlns:a="http://schemas.openxmlformats.org/drawingml/2006/main">
             <a:pPr>
-              <a:defRPr sz="1350">
+              <a:defRPr sz="1425" b="1">
                 <a:solidFill>
                   <a:srgbClr val="161616"/>
                 </a:solidFill>
               </a:defRPr>
             </a:pPr>
             <a:r>
-              <a:rPr sz="1350">
+              <a:rPr sz="1425" b="1">
                 <a:solidFill>
                   <a:srgbClr val="161616"/>
                 </a:solidFill>
               </a:rPr>
-              <a:t>{{IT_2}}</a:t>
-            </a:r>
-          </a:p>
-        </p:txBody>
-      </p:sp>
-      <p:sp>
-        <p:nvSpPr>
-          <p:cNvPr id="13" name="">
-            <a:extLst xmlns:a="http://schemas.openxmlformats.org/drawingml/2006/main">
-              <a:ext uri="{FF2B5EF4-FFF2-40B4-BE49-F238E27FC236}">
-                <a16:creationId xmlns:a16="http://schemas.microsoft.com/office/drawing/2014/main" id="{D0347D58-6DDE-4D7B-BBA9-445F550B0CBD}"/>
-              </a:ext>
-            </a:extLst>
-          </p:cNvPr>
-          <p:cNvSpPr>
-            <a:spLocks xmlns:a="http://schemas.openxmlformats.org/drawingml/2006/main" noGrp="1"/>
-          </p:cNvSpPr>
-          <p:nvPr/>
-        </p:nvSpPr>
-        <p:spPr>
-          <a:xfrm xmlns:a="http://schemas.openxmlformats.org/drawingml/2006/main">
-            <a:off x="1200150" y="3733800"/>
-            <a:ext cx="10048875" cy="9525"/>
+              <a:t>{{IT_2_TITLE}}</a:t>
+            </a:r>
+          </a:p>
+        </p:txBody>
+      </p:sp>
+      <p:sp>
+        <p:nvSpPr>
+          <p:cNvPr id="18" name="">
+            <a:extLst xmlns:a="http://schemas.openxmlformats.org/drawingml/2006/main">
+              <a:ext uri="{FF2B5EF4-FFF2-40B4-BE49-F238E27FC236}">
+                <a16:creationId xmlns:a16="http://schemas.microsoft.com/office/drawing/2014/main" id="{1A96B82D-311B-40F8-8D37-FC6D91E5C26E}"/>
+              </a:ext>
+            </a:extLst>
+          </p:cNvPr>
+          <p:cNvSpPr>
+            <a:spLocks xmlns:a="http://schemas.openxmlformats.org/drawingml/2006/main" noGrp="1"/>
+          </p:cNvSpPr>
+          <p:nvPr/>
+        </p:nvSpPr>
+        <p:spPr>
+          <a:xfrm xmlns:a="http://schemas.openxmlformats.org/drawingml/2006/main">
+            <a:off x="1200150" y="2962275"/>
+            <a:ext cx="9982200" cy="400050"/>
+          </a:xfrm>
+          <a:prstGeom xmlns:a="http://schemas.openxmlformats.org/drawingml/2006/main" prst="rect">
+            <a:avLst/>
+          </a:prstGeom>
+          <a:noFill xmlns:a="http://schemas.openxmlformats.org/drawingml/2006/main"/>
+          <a:ln xmlns:a="http://schemas.openxmlformats.org/drawingml/2006/main" w="0">
+            <a:noFill/>
+            <a:prstDash val="solid"/>
+          </a:ln>
+        </p:spPr>
+        <p:txBody>
+          <a:bodyPr xmlns:a="http://schemas.openxmlformats.org/drawingml/2006/main"/>
+          <a:lstStyle xmlns:a="http://schemas.openxmlformats.org/drawingml/2006/main"/>
+          <a:p xmlns:a="http://schemas.openxmlformats.org/drawingml/2006/main">
+            <a:pPr>
+              <a:defRPr sz="1125">
+                <a:solidFill>
+                  <a:srgbClr val="667085"/>
+                </a:solidFill>
+              </a:defRPr>
+            </a:pPr>
+            <a:r>
+              <a:rPr sz="1125">
+                <a:solidFill>
+                  <a:srgbClr val="667085"/>
+                </a:solidFill>
+              </a:rPr>
+              <a:t>{{IT_2_ACTION}}</a:t>
+            </a:r>
+          </a:p>
+        </p:txBody>
+      </p:sp>
+      <p:sp>
+        <p:nvSpPr>
+          <p:cNvPr id="19" name="">
+            <a:extLst xmlns:a="http://schemas.openxmlformats.org/drawingml/2006/main">
+              <a:ext uri="{FF2B5EF4-FFF2-40B4-BE49-F238E27FC236}">
+                <a16:creationId xmlns:a16="http://schemas.microsoft.com/office/drawing/2014/main" id="{99E1F3DC-3D76-4C50-B5CD-BCA6FB7EFF07}"/>
+              </a:ext>
+            </a:extLst>
+          </p:cNvPr>
+          <p:cNvSpPr>
+            <a:spLocks xmlns:a="http://schemas.openxmlformats.org/drawingml/2006/main" noGrp="1"/>
+          </p:cNvSpPr>
+          <p:nvPr/>
+        </p:nvSpPr>
+        <p:spPr>
+          <a:xfrm xmlns:a="http://schemas.openxmlformats.org/drawingml/2006/main">
+            <a:off x="1200150" y="3429000"/>
+            <a:ext cx="742950" cy="190500"/>
+          </a:xfrm>
+          <a:prstGeom xmlns:a="http://schemas.openxmlformats.org/drawingml/2006/main" prst="rect">
+            <a:avLst/>
+          </a:prstGeom>
+          <a:noFill xmlns:a="http://schemas.openxmlformats.org/drawingml/2006/main"/>
+          <a:ln xmlns:a="http://schemas.openxmlformats.org/drawingml/2006/main" w="0">
+            <a:noFill/>
+            <a:prstDash val="solid"/>
+          </a:ln>
+        </p:spPr>
+        <p:txBody>
+          <a:bodyPr xmlns:a="http://schemas.openxmlformats.org/drawingml/2006/main"/>
+          <a:lstStyle xmlns:a="http://schemas.openxmlformats.org/drawingml/2006/main"/>
+          <a:p xmlns:a="http://schemas.openxmlformats.org/drawingml/2006/main">
+            <a:pPr>
+              <a:defRPr sz="975" b="1">
+                <a:solidFill>
+                  <a:srgbClr val="FF6412"/>
+                </a:solidFill>
+              </a:defRPr>
+            </a:pPr>
+            <a:r>
+              <a:rPr sz="975" b="1">
+                <a:solidFill>
+                  <a:srgbClr val="FF6412"/>
+                </a:solidFill>
+              </a:rPr>
+              <a:t>Решение</a:t>
+            </a:r>
+          </a:p>
+        </p:txBody>
+      </p:sp>
+      <p:sp>
+        <p:nvSpPr>
+          <p:cNvPr id="20" name="">
+            <a:extLst xmlns:a="http://schemas.openxmlformats.org/drawingml/2006/main">
+              <a:ext uri="{FF2B5EF4-FFF2-40B4-BE49-F238E27FC236}">
+                <a16:creationId xmlns:a16="http://schemas.microsoft.com/office/drawing/2014/main" id="{E66922C8-0CF9-49DB-9595-D385E33A122C}"/>
+              </a:ext>
+            </a:extLst>
+          </p:cNvPr>
+          <p:cNvSpPr>
+            <a:spLocks xmlns:a="http://schemas.openxmlformats.org/drawingml/2006/main" noGrp="1"/>
+          </p:cNvSpPr>
+          <p:nvPr/>
+        </p:nvSpPr>
+        <p:spPr>
+          <a:xfrm xmlns:a="http://schemas.openxmlformats.org/drawingml/2006/main">
+            <a:off x="1962150" y="3409950"/>
+            <a:ext cx="3810000" cy="323850"/>
+          </a:xfrm>
+          <a:prstGeom xmlns:a="http://schemas.openxmlformats.org/drawingml/2006/main" prst="rect">
+            <a:avLst/>
+          </a:prstGeom>
+          <a:noFill xmlns:a="http://schemas.openxmlformats.org/drawingml/2006/main"/>
+          <a:ln xmlns:a="http://schemas.openxmlformats.org/drawingml/2006/main" w="0">
+            <a:noFill/>
+            <a:prstDash val="solid"/>
+          </a:ln>
+        </p:spPr>
+        <p:txBody>
+          <a:bodyPr xmlns:a="http://schemas.openxmlformats.org/drawingml/2006/main"/>
+          <a:lstStyle xmlns:a="http://schemas.openxmlformats.org/drawingml/2006/main"/>
+          <a:p xmlns:a="http://schemas.openxmlformats.org/drawingml/2006/main">
+            <a:pPr>
+              <a:defRPr sz="1050" b="1">
+                <a:solidFill>
+                  <a:srgbClr val="161616"/>
+                </a:solidFill>
+              </a:defRPr>
+            </a:pPr>
+            <a:r>
+              <a:rPr sz="1050" b="1">
+                <a:solidFill>
+                  <a:srgbClr val="161616"/>
+                </a:solidFill>
+              </a:rPr>
+              <a:t>{{IT_2_SOLUTION}}</a:t>
+            </a:r>
+          </a:p>
+        </p:txBody>
+      </p:sp>
+      <p:sp>
+        <p:nvSpPr>
+          <p:cNvPr id="21" name="">
+            <a:extLst xmlns:a="http://schemas.openxmlformats.org/drawingml/2006/main">
+              <a:ext uri="{FF2B5EF4-FFF2-40B4-BE49-F238E27FC236}">
+                <a16:creationId xmlns:a16="http://schemas.microsoft.com/office/drawing/2014/main" id="{F0F05988-062D-4094-8810-2E84C507FBDF}"/>
+              </a:ext>
+            </a:extLst>
+          </p:cNvPr>
+          <p:cNvSpPr>
+            <a:spLocks xmlns:a="http://schemas.openxmlformats.org/drawingml/2006/main" noGrp="1"/>
+          </p:cNvSpPr>
+          <p:nvPr/>
+        </p:nvSpPr>
+        <p:spPr>
+          <a:xfrm xmlns:a="http://schemas.openxmlformats.org/drawingml/2006/main">
+            <a:off x="6019800" y="3429000"/>
+            <a:ext cx="1104900" cy="190500"/>
+          </a:xfrm>
+          <a:prstGeom xmlns:a="http://schemas.openxmlformats.org/drawingml/2006/main" prst="rect">
+            <a:avLst/>
+          </a:prstGeom>
+          <a:noFill xmlns:a="http://schemas.openxmlformats.org/drawingml/2006/main"/>
+          <a:ln xmlns:a="http://schemas.openxmlformats.org/drawingml/2006/main" w="0">
+            <a:noFill/>
+            <a:prstDash val="solid"/>
+          </a:ln>
+        </p:spPr>
+        <p:txBody>
+          <a:bodyPr xmlns:a="http://schemas.openxmlformats.org/drawingml/2006/main"/>
+          <a:lstStyle xmlns:a="http://schemas.openxmlformats.org/drawingml/2006/main"/>
+          <a:p xmlns:a="http://schemas.openxmlformats.org/drawingml/2006/main">
+            <a:pPr>
+              <a:defRPr sz="975" b="1">
+                <a:solidFill>
+                  <a:srgbClr val="FF6412"/>
+                </a:solidFill>
+              </a:defRPr>
+            </a:pPr>
+            <a:r>
+              <a:rPr sz="975" b="1">
+                <a:solidFill>
+                  <a:srgbClr val="FF6412"/>
+                </a:solidFill>
+              </a:rPr>
+              <a:t>Производители</a:t>
+            </a:r>
+          </a:p>
+        </p:txBody>
+      </p:sp>
+      <p:sp>
+        <p:nvSpPr>
+          <p:cNvPr id="22" name="">
+            <a:extLst xmlns:a="http://schemas.openxmlformats.org/drawingml/2006/main">
+              <a:ext uri="{FF2B5EF4-FFF2-40B4-BE49-F238E27FC236}">
+                <a16:creationId xmlns:a16="http://schemas.microsoft.com/office/drawing/2014/main" id="{F14D2C86-0605-49C1-9F0B-83E1FE2256DB}"/>
+              </a:ext>
+            </a:extLst>
+          </p:cNvPr>
+          <p:cNvSpPr>
+            <a:spLocks xmlns:a="http://schemas.openxmlformats.org/drawingml/2006/main" noGrp="1"/>
+          </p:cNvSpPr>
+          <p:nvPr/>
+        </p:nvSpPr>
+        <p:spPr>
+          <a:xfrm xmlns:a="http://schemas.openxmlformats.org/drawingml/2006/main">
+            <a:off x="7181850" y="3409950"/>
+            <a:ext cx="4000500" cy="323850"/>
+          </a:xfrm>
+          <a:prstGeom xmlns:a="http://schemas.openxmlformats.org/drawingml/2006/main" prst="rect">
+            <a:avLst/>
+          </a:prstGeom>
+          <a:noFill xmlns:a="http://schemas.openxmlformats.org/drawingml/2006/main"/>
+          <a:ln xmlns:a="http://schemas.openxmlformats.org/drawingml/2006/main" w="0">
+            <a:noFill/>
+            <a:prstDash val="solid"/>
+          </a:ln>
+        </p:spPr>
+        <p:txBody>
+          <a:bodyPr xmlns:a="http://schemas.openxmlformats.org/drawingml/2006/main"/>
+          <a:lstStyle xmlns:a="http://schemas.openxmlformats.org/drawingml/2006/main"/>
+          <a:p xmlns:a="http://schemas.openxmlformats.org/drawingml/2006/main">
+            <a:pPr>
+              <a:defRPr sz="1050" b="1">
+                <a:solidFill>
+                  <a:srgbClr val="161616"/>
+                </a:solidFill>
+              </a:defRPr>
+            </a:pPr>
+            <a:r>
+              <a:rPr sz="1050" b="1">
+                <a:solidFill>
+                  <a:srgbClr val="161616"/>
+                </a:solidFill>
+              </a:rPr>
+              <a:t>{{IT_2_VENDORS}}</a:t>
+            </a:r>
+          </a:p>
+        </p:txBody>
+      </p:sp>
+      <p:sp>
+        <p:nvSpPr>
+          <p:cNvPr id="23" name="">
+            <a:extLst xmlns:a="http://schemas.openxmlformats.org/drawingml/2006/main">
+              <a:ext uri="{FF2B5EF4-FFF2-40B4-BE49-F238E27FC236}">
+                <a16:creationId xmlns:a16="http://schemas.microsoft.com/office/drawing/2014/main" id="{BD38CDD5-FD2A-497F-84C7-1FFA23B1CCFB}"/>
+              </a:ext>
+            </a:extLst>
+          </p:cNvPr>
+          <p:cNvSpPr>
+            <a:spLocks xmlns:a="http://schemas.openxmlformats.org/drawingml/2006/main" noGrp="1"/>
+          </p:cNvSpPr>
+          <p:nvPr/>
+        </p:nvSpPr>
+        <p:spPr>
+          <a:xfrm xmlns:a="http://schemas.openxmlformats.org/drawingml/2006/main">
+            <a:off x="1200150" y="3810000"/>
+            <a:ext cx="9982200" cy="9525"/>
           </a:xfrm>
           <a:prstGeom xmlns:a="http://schemas.openxmlformats.org/drawingml/2006/main" prst="rect">
             <a:avLst/>
@@ -5695,21 +6328,21 @@
       </p:sp>
       <p:sp>
         <p:nvSpPr>
-          <p:cNvPr id="14" name="">
-            <a:extLst xmlns:a="http://schemas.openxmlformats.org/drawingml/2006/main">
-              <a:ext uri="{FF2B5EF4-FFF2-40B4-BE49-F238E27FC236}">
-                <a16:creationId xmlns:a16="http://schemas.microsoft.com/office/drawing/2014/main" id="{75323178-518D-4395-91C8-36E28C069A33}"/>
-              </a:ext>
-            </a:extLst>
-          </p:cNvPr>
-          <p:cNvSpPr>
-            <a:spLocks xmlns:a="http://schemas.openxmlformats.org/drawingml/2006/main" noGrp="1"/>
-          </p:cNvSpPr>
-          <p:nvPr/>
-        </p:nvSpPr>
-        <p:spPr>
-          <a:xfrm xmlns:a="http://schemas.openxmlformats.org/drawingml/2006/main">
-            <a:off x="609600" y="3962400"/>
+          <p:cNvPr id="24" name="">
+            <a:extLst xmlns:a="http://schemas.openxmlformats.org/drawingml/2006/main">
+              <a:ext uri="{FF2B5EF4-FFF2-40B4-BE49-F238E27FC236}">
+                <a16:creationId xmlns:a16="http://schemas.microsoft.com/office/drawing/2014/main" id="{4AF0A8EA-6EA3-4CB4-9601-79B582917920}"/>
+              </a:ext>
+            </a:extLst>
+          </p:cNvPr>
+          <p:cNvSpPr>
+            <a:spLocks xmlns:a="http://schemas.openxmlformats.org/drawingml/2006/main" noGrp="1"/>
+          </p:cNvSpPr>
+          <p:nvPr/>
+        </p:nvSpPr>
+        <p:spPr>
+          <a:xfrm xmlns:a="http://schemas.openxmlformats.org/drawingml/2006/main">
+            <a:off x="609600" y="3981450"/>
             <a:ext cx="457200" cy="266700"/>
           </a:xfrm>
           <a:prstGeom xmlns:a="http://schemas.openxmlformats.org/drawingml/2006/main" prst="rect">
@@ -5726,14 +6359,14 @@
           <a:lstStyle xmlns:a="http://schemas.openxmlformats.org/drawingml/2006/main"/>
           <a:p xmlns:a="http://schemas.openxmlformats.org/drawingml/2006/main">
             <a:pPr>
-              <a:defRPr sz="1275" b="1">
+              <a:defRPr sz="1200" b="1">
                 <a:solidFill>
                   <a:srgbClr val="FF6412"/>
                 </a:solidFill>
               </a:defRPr>
             </a:pPr>
             <a:r>
-              <a:rPr sz="1275" b="1">
+              <a:rPr sz="1200" b="1">
                 <a:solidFill>
                   <a:srgbClr val="FF6412"/>
                 </a:solidFill>
@@ -5745,22 +6378,22 @@
       </p:sp>
       <p:sp>
         <p:nvSpPr>
-          <p:cNvPr id="15" name="">
-            <a:extLst xmlns:a="http://schemas.openxmlformats.org/drawingml/2006/main">
-              <a:ext uri="{FF2B5EF4-FFF2-40B4-BE49-F238E27FC236}">
-                <a16:creationId xmlns:a16="http://schemas.microsoft.com/office/drawing/2014/main" id="{09D55E4C-1E6D-4E07-892A-F2461B7EF15E}"/>
-              </a:ext>
-            </a:extLst>
-          </p:cNvPr>
-          <p:cNvSpPr>
-            <a:spLocks xmlns:a="http://schemas.openxmlformats.org/drawingml/2006/main" noGrp="1"/>
-          </p:cNvSpPr>
-          <p:nvPr/>
-        </p:nvSpPr>
-        <p:spPr>
-          <a:xfrm xmlns:a="http://schemas.openxmlformats.org/drawingml/2006/main">
-            <a:off x="1200150" y="3905250"/>
-            <a:ext cx="10048875" cy="1028700"/>
+          <p:cNvPr id="25" name="">
+            <a:extLst xmlns:a="http://schemas.openxmlformats.org/drawingml/2006/main">
+              <a:ext uri="{FF2B5EF4-FFF2-40B4-BE49-F238E27FC236}">
+                <a16:creationId xmlns:a16="http://schemas.microsoft.com/office/drawing/2014/main" id="{99691807-DC40-49F1-BC61-0A96117E517A}"/>
+              </a:ext>
+            </a:extLst>
+          </p:cNvPr>
+          <p:cNvSpPr>
+            <a:spLocks xmlns:a="http://schemas.openxmlformats.org/drawingml/2006/main" noGrp="1"/>
+          </p:cNvSpPr>
+          <p:nvPr/>
+        </p:nvSpPr>
+        <p:spPr>
+          <a:xfrm xmlns:a="http://schemas.openxmlformats.org/drawingml/2006/main">
+            <a:off x="1200150" y="3924300"/>
+            <a:ext cx="9982200" cy="266700"/>
           </a:xfrm>
           <a:prstGeom xmlns:a="http://schemas.openxmlformats.org/drawingml/2006/main" prst="rect">
             <a:avLst/>
@@ -5776,41 +6409,291 @@
           <a:lstStyle xmlns:a="http://schemas.openxmlformats.org/drawingml/2006/main"/>
           <a:p xmlns:a="http://schemas.openxmlformats.org/drawingml/2006/main">
             <a:pPr>
-              <a:defRPr sz="1350">
+              <a:defRPr sz="1425" b="1">
                 <a:solidFill>
                   <a:srgbClr val="161616"/>
                 </a:solidFill>
               </a:defRPr>
             </a:pPr>
             <a:r>
-              <a:rPr sz="1350">
+              <a:rPr sz="1425" b="1">
                 <a:solidFill>
                   <a:srgbClr val="161616"/>
                 </a:solidFill>
               </a:rPr>
-              <a:t>{{IT_3}}</a:t>
-            </a:r>
-          </a:p>
-        </p:txBody>
-      </p:sp>
-      <p:sp>
-        <p:nvSpPr>
-          <p:cNvPr id="16" name="">
-            <a:extLst xmlns:a="http://schemas.openxmlformats.org/drawingml/2006/main">
-              <a:ext uri="{FF2B5EF4-FFF2-40B4-BE49-F238E27FC236}">
-                <a16:creationId xmlns:a16="http://schemas.microsoft.com/office/drawing/2014/main" id="{194619FF-B4A4-490A-861B-599DBCED0B14}"/>
-              </a:ext>
-            </a:extLst>
-          </p:cNvPr>
-          <p:cNvSpPr>
-            <a:spLocks xmlns:a="http://schemas.openxmlformats.org/drawingml/2006/main" noGrp="1"/>
-          </p:cNvSpPr>
-          <p:nvPr/>
-        </p:nvSpPr>
-        <p:spPr>
-          <a:xfrm xmlns:a="http://schemas.openxmlformats.org/drawingml/2006/main">
-            <a:off x="1200150" y="4895850"/>
-            <a:ext cx="10048875" cy="9525"/>
+              <a:t>{{IT_3_TITLE}}</a:t>
+            </a:r>
+          </a:p>
+        </p:txBody>
+      </p:sp>
+      <p:sp>
+        <p:nvSpPr>
+          <p:cNvPr id="26" name="">
+            <a:extLst xmlns:a="http://schemas.openxmlformats.org/drawingml/2006/main">
+              <a:ext uri="{FF2B5EF4-FFF2-40B4-BE49-F238E27FC236}">
+                <a16:creationId xmlns:a16="http://schemas.microsoft.com/office/drawing/2014/main" id="{266BBA60-F91D-41FC-8956-9592D2CF6FD5}"/>
+              </a:ext>
+            </a:extLst>
+          </p:cNvPr>
+          <p:cNvSpPr>
+            <a:spLocks xmlns:a="http://schemas.openxmlformats.org/drawingml/2006/main" noGrp="1"/>
+          </p:cNvSpPr>
+          <p:nvPr/>
+        </p:nvSpPr>
+        <p:spPr>
+          <a:xfrm xmlns:a="http://schemas.openxmlformats.org/drawingml/2006/main">
+            <a:off x="1200150" y="4219575"/>
+            <a:ext cx="9982200" cy="400050"/>
+          </a:xfrm>
+          <a:prstGeom xmlns:a="http://schemas.openxmlformats.org/drawingml/2006/main" prst="rect">
+            <a:avLst/>
+          </a:prstGeom>
+          <a:noFill xmlns:a="http://schemas.openxmlformats.org/drawingml/2006/main"/>
+          <a:ln xmlns:a="http://schemas.openxmlformats.org/drawingml/2006/main" w="0">
+            <a:noFill/>
+            <a:prstDash val="solid"/>
+          </a:ln>
+        </p:spPr>
+        <p:txBody>
+          <a:bodyPr xmlns:a="http://schemas.openxmlformats.org/drawingml/2006/main"/>
+          <a:lstStyle xmlns:a="http://schemas.openxmlformats.org/drawingml/2006/main"/>
+          <a:p xmlns:a="http://schemas.openxmlformats.org/drawingml/2006/main">
+            <a:pPr>
+              <a:defRPr sz="1125">
+                <a:solidFill>
+                  <a:srgbClr val="667085"/>
+                </a:solidFill>
+              </a:defRPr>
+            </a:pPr>
+            <a:r>
+              <a:rPr sz="1125">
+                <a:solidFill>
+                  <a:srgbClr val="667085"/>
+                </a:solidFill>
+              </a:rPr>
+              <a:t>{{IT_3_ACTION}}</a:t>
+            </a:r>
+          </a:p>
+        </p:txBody>
+      </p:sp>
+      <p:sp>
+        <p:nvSpPr>
+          <p:cNvPr id="27" name="">
+            <a:extLst xmlns:a="http://schemas.openxmlformats.org/drawingml/2006/main">
+              <a:ext uri="{FF2B5EF4-FFF2-40B4-BE49-F238E27FC236}">
+                <a16:creationId xmlns:a16="http://schemas.microsoft.com/office/drawing/2014/main" id="{5710D0F0-F663-4930-9227-638E32693085}"/>
+              </a:ext>
+            </a:extLst>
+          </p:cNvPr>
+          <p:cNvSpPr>
+            <a:spLocks xmlns:a="http://schemas.openxmlformats.org/drawingml/2006/main" noGrp="1"/>
+          </p:cNvSpPr>
+          <p:nvPr/>
+        </p:nvSpPr>
+        <p:spPr>
+          <a:xfrm xmlns:a="http://schemas.openxmlformats.org/drawingml/2006/main">
+            <a:off x="1200150" y="4686300"/>
+            <a:ext cx="742950" cy="190500"/>
+          </a:xfrm>
+          <a:prstGeom xmlns:a="http://schemas.openxmlformats.org/drawingml/2006/main" prst="rect">
+            <a:avLst/>
+          </a:prstGeom>
+          <a:noFill xmlns:a="http://schemas.openxmlformats.org/drawingml/2006/main"/>
+          <a:ln xmlns:a="http://schemas.openxmlformats.org/drawingml/2006/main" w="0">
+            <a:noFill/>
+            <a:prstDash val="solid"/>
+          </a:ln>
+        </p:spPr>
+        <p:txBody>
+          <a:bodyPr xmlns:a="http://schemas.openxmlformats.org/drawingml/2006/main"/>
+          <a:lstStyle xmlns:a="http://schemas.openxmlformats.org/drawingml/2006/main"/>
+          <a:p xmlns:a="http://schemas.openxmlformats.org/drawingml/2006/main">
+            <a:pPr>
+              <a:defRPr sz="975" b="1">
+                <a:solidFill>
+                  <a:srgbClr val="FF6412"/>
+                </a:solidFill>
+              </a:defRPr>
+            </a:pPr>
+            <a:r>
+              <a:rPr sz="975" b="1">
+                <a:solidFill>
+                  <a:srgbClr val="FF6412"/>
+                </a:solidFill>
+              </a:rPr>
+              <a:t>Решение</a:t>
+            </a:r>
+          </a:p>
+        </p:txBody>
+      </p:sp>
+      <p:sp>
+        <p:nvSpPr>
+          <p:cNvPr id="28" name="">
+            <a:extLst xmlns:a="http://schemas.openxmlformats.org/drawingml/2006/main">
+              <a:ext uri="{FF2B5EF4-FFF2-40B4-BE49-F238E27FC236}">
+                <a16:creationId xmlns:a16="http://schemas.microsoft.com/office/drawing/2014/main" id="{0ECC9BF8-2FBA-4A5E-AA34-14079C4755FD}"/>
+              </a:ext>
+            </a:extLst>
+          </p:cNvPr>
+          <p:cNvSpPr>
+            <a:spLocks xmlns:a="http://schemas.openxmlformats.org/drawingml/2006/main" noGrp="1"/>
+          </p:cNvSpPr>
+          <p:nvPr/>
+        </p:nvSpPr>
+        <p:spPr>
+          <a:xfrm xmlns:a="http://schemas.openxmlformats.org/drawingml/2006/main">
+            <a:off x="1962150" y="4667250"/>
+            <a:ext cx="3810000" cy="323850"/>
+          </a:xfrm>
+          <a:prstGeom xmlns:a="http://schemas.openxmlformats.org/drawingml/2006/main" prst="rect">
+            <a:avLst/>
+          </a:prstGeom>
+          <a:noFill xmlns:a="http://schemas.openxmlformats.org/drawingml/2006/main"/>
+          <a:ln xmlns:a="http://schemas.openxmlformats.org/drawingml/2006/main" w="0">
+            <a:noFill/>
+            <a:prstDash val="solid"/>
+          </a:ln>
+        </p:spPr>
+        <p:txBody>
+          <a:bodyPr xmlns:a="http://schemas.openxmlformats.org/drawingml/2006/main"/>
+          <a:lstStyle xmlns:a="http://schemas.openxmlformats.org/drawingml/2006/main"/>
+          <a:p xmlns:a="http://schemas.openxmlformats.org/drawingml/2006/main">
+            <a:pPr>
+              <a:defRPr sz="1050" b="1">
+                <a:solidFill>
+                  <a:srgbClr val="161616"/>
+                </a:solidFill>
+              </a:defRPr>
+            </a:pPr>
+            <a:r>
+              <a:rPr sz="1050" b="1">
+                <a:solidFill>
+                  <a:srgbClr val="161616"/>
+                </a:solidFill>
+              </a:rPr>
+              <a:t>{{IT_3_SOLUTION}}</a:t>
+            </a:r>
+          </a:p>
+        </p:txBody>
+      </p:sp>
+      <p:sp>
+        <p:nvSpPr>
+          <p:cNvPr id="29" name="">
+            <a:extLst xmlns:a="http://schemas.openxmlformats.org/drawingml/2006/main">
+              <a:ext uri="{FF2B5EF4-FFF2-40B4-BE49-F238E27FC236}">
+                <a16:creationId xmlns:a16="http://schemas.microsoft.com/office/drawing/2014/main" id="{B2BF93DF-829F-439A-BFD2-A94DF3219CC6}"/>
+              </a:ext>
+            </a:extLst>
+          </p:cNvPr>
+          <p:cNvSpPr>
+            <a:spLocks xmlns:a="http://schemas.openxmlformats.org/drawingml/2006/main" noGrp="1"/>
+          </p:cNvSpPr>
+          <p:nvPr/>
+        </p:nvSpPr>
+        <p:spPr>
+          <a:xfrm xmlns:a="http://schemas.openxmlformats.org/drawingml/2006/main">
+            <a:off x="6019800" y="4686300"/>
+            <a:ext cx="1104900" cy="190500"/>
+          </a:xfrm>
+          <a:prstGeom xmlns:a="http://schemas.openxmlformats.org/drawingml/2006/main" prst="rect">
+            <a:avLst/>
+          </a:prstGeom>
+          <a:noFill xmlns:a="http://schemas.openxmlformats.org/drawingml/2006/main"/>
+          <a:ln xmlns:a="http://schemas.openxmlformats.org/drawingml/2006/main" w="0">
+            <a:noFill/>
+            <a:prstDash val="solid"/>
+          </a:ln>
+        </p:spPr>
+        <p:txBody>
+          <a:bodyPr xmlns:a="http://schemas.openxmlformats.org/drawingml/2006/main"/>
+          <a:lstStyle xmlns:a="http://schemas.openxmlformats.org/drawingml/2006/main"/>
+          <a:p xmlns:a="http://schemas.openxmlformats.org/drawingml/2006/main">
+            <a:pPr>
+              <a:defRPr sz="975" b="1">
+                <a:solidFill>
+                  <a:srgbClr val="FF6412"/>
+                </a:solidFill>
+              </a:defRPr>
+            </a:pPr>
+            <a:r>
+              <a:rPr sz="975" b="1">
+                <a:solidFill>
+                  <a:srgbClr val="FF6412"/>
+                </a:solidFill>
+              </a:rPr>
+              <a:t>Производители</a:t>
+            </a:r>
+          </a:p>
+        </p:txBody>
+      </p:sp>
+      <p:sp>
+        <p:nvSpPr>
+          <p:cNvPr id="30" name="">
+            <a:extLst xmlns:a="http://schemas.openxmlformats.org/drawingml/2006/main">
+              <a:ext uri="{FF2B5EF4-FFF2-40B4-BE49-F238E27FC236}">
+                <a16:creationId xmlns:a16="http://schemas.microsoft.com/office/drawing/2014/main" id="{82065BA6-FAF1-402C-9985-D1E57F969463}"/>
+              </a:ext>
+            </a:extLst>
+          </p:cNvPr>
+          <p:cNvSpPr>
+            <a:spLocks xmlns:a="http://schemas.openxmlformats.org/drawingml/2006/main" noGrp="1"/>
+          </p:cNvSpPr>
+          <p:nvPr/>
+        </p:nvSpPr>
+        <p:spPr>
+          <a:xfrm xmlns:a="http://schemas.openxmlformats.org/drawingml/2006/main">
+            <a:off x="7181850" y="4667250"/>
+            <a:ext cx="4000500" cy="323850"/>
+          </a:xfrm>
+          <a:prstGeom xmlns:a="http://schemas.openxmlformats.org/drawingml/2006/main" prst="rect">
+            <a:avLst/>
+          </a:prstGeom>
+          <a:noFill xmlns:a="http://schemas.openxmlformats.org/drawingml/2006/main"/>
+          <a:ln xmlns:a="http://schemas.openxmlformats.org/drawingml/2006/main" w="0">
+            <a:noFill/>
+            <a:prstDash val="solid"/>
+          </a:ln>
+        </p:spPr>
+        <p:txBody>
+          <a:bodyPr xmlns:a="http://schemas.openxmlformats.org/drawingml/2006/main"/>
+          <a:lstStyle xmlns:a="http://schemas.openxmlformats.org/drawingml/2006/main"/>
+          <a:p xmlns:a="http://schemas.openxmlformats.org/drawingml/2006/main">
+            <a:pPr>
+              <a:defRPr sz="1050" b="1">
+                <a:solidFill>
+                  <a:srgbClr val="161616"/>
+                </a:solidFill>
+              </a:defRPr>
+            </a:pPr>
+            <a:r>
+              <a:rPr sz="1050" b="1">
+                <a:solidFill>
+                  <a:srgbClr val="161616"/>
+                </a:solidFill>
+              </a:rPr>
+              <a:t>{{IT_3_VENDORS}}</a:t>
+            </a:r>
+          </a:p>
+        </p:txBody>
+      </p:sp>
+      <p:sp>
+        <p:nvSpPr>
+          <p:cNvPr id="31" name="">
+            <a:extLst xmlns:a="http://schemas.openxmlformats.org/drawingml/2006/main">
+              <a:ext uri="{FF2B5EF4-FFF2-40B4-BE49-F238E27FC236}">
+                <a16:creationId xmlns:a16="http://schemas.microsoft.com/office/drawing/2014/main" id="{BA3DDC19-32F3-4A1B-8774-CEC1A7524D83}"/>
+              </a:ext>
+            </a:extLst>
+          </p:cNvPr>
+          <p:cNvSpPr>
+            <a:spLocks xmlns:a="http://schemas.openxmlformats.org/drawingml/2006/main" noGrp="1"/>
+          </p:cNvSpPr>
+          <p:nvPr/>
+        </p:nvSpPr>
+        <p:spPr>
+          <a:xfrm xmlns:a="http://schemas.openxmlformats.org/drawingml/2006/main">
+            <a:off x="1200150" y="5067300"/>
+            <a:ext cx="9982200" cy="9525"/>
           </a:xfrm>
           <a:prstGeom xmlns:a="http://schemas.openxmlformats.org/drawingml/2006/main" prst="rect">
             <a:avLst/>
@@ -5826,21 +6709,21 @@
       </p:sp>
       <p:sp>
         <p:nvSpPr>
-          <p:cNvPr id="17" name="">
-            <a:extLst xmlns:a="http://schemas.openxmlformats.org/drawingml/2006/main">
-              <a:ext uri="{FF2B5EF4-FFF2-40B4-BE49-F238E27FC236}">
-                <a16:creationId xmlns:a16="http://schemas.microsoft.com/office/drawing/2014/main" id="{1664155A-06D8-4ED2-87C5-A3A28300D4A0}"/>
-              </a:ext>
-            </a:extLst>
-          </p:cNvPr>
-          <p:cNvSpPr>
-            <a:spLocks xmlns:a="http://schemas.openxmlformats.org/drawingml/2006/main" noGrp="1"/>
-          </p:cNvSpPr>
-          <p:nvPr/>
-        </p:nvSpPr>
-        <p:spPr>
-          <a:xfrm xmlns:a="http://schemas.openxmlformats.org/drawingml/2006/main">
-            <a:off x="609600" y="5124450"/>
+          <p:cNvPr id="32" name="">
+            <a:extLst xmlns:a="http://schemas.openxmlformats.org/drawingml/2006/main">
+              <a:ext uri="{FF2B5EF4-FFF2-40B4-BE49-F238E27FC236}">
+                <a16:creationId xmlns:a16="http://schemas.microsoft.com/office/drawing/2014/main" id="{63D6FE82-EF74-42B8-A9C6-BDD6DB33F360}"/>
+              </a:ext>
+            </a:extLst>
+          </p:cNvPr>
+          <p:cNvSpPr>
+            <a:spLocks xmlns:a="http://schemas.openxmlformats.org/drawingml/2006/main" noGrp="1"/>
+          </p:cNvSpPr>
+          <p:nvPr/>
+        </p:nvSpPr>
+        <p:spPr>
+          <a:xfrm xmlns:a="http://schemas.openxmlformats.org/drawingml/2006/main">
+            <a:off x="609600" y="5238750"/>
             <a:ext cx="457200" cy="266700"/>
           </a:xfrm>
           <a:prstGeom xmlns:a="http://schemas.openxmlformats.org/drawingml/2006/main" prst="rect">
@@ -5857,14 +6740,14 @@
           <a:lstStyle xmlns:a="http://schemas.openxmlformats.org/drawingml/2006/main"/>
           <a:p xmlns:a="http://schemas.openxmlformats.org/drawingml/2006/main">
             <a:pPr>
-              <a:defRPr sz="1275" b="1">
+              <a:defRPr sz="1200" b="1">
                 <a:solidFill>
                   <a:srgbClr val="FF6412"/>
                 </a:solidFill>
               </a:defRPr>
             </a:pPr>
             <a:r>
-              <a:rPr sz="1275" b="1">
+              <a:rPr sz="1200" b="1">
                 <a:solidFill>
                   <a:srgbClr val="FF6412"/>
                 </a:solidFill>
@@ -5876,22 +6759,22 @@
       </p:sp>
       <p:sp>
         <p:nvSpPr>
-          <p:cNvPr id="18" name="">
-            <a:extLst xmlns:a="http://schemas.openxmlformats.org/drawingml/2006/main">
-              <a:ext uri="{FF2B5EF4-FFF2-40B4-BE49-F238E27FC236}">
-                <a16:creationId xmlns:a16="http://schemas.microsoft.com/office/drawing/2014/main" id="{35300A5A-A826-4E01-B4D0-3B87CB3D5AEA}"/>
-              </a:ext>
-            </a:extLst>
-          </p:cNvPr>
-          <p:cNvSpPr>
-            <a:spLocks xmlns:a="http://schemas.openxmlformats.org/drawingml/2006/main" noGrp="1"/>
-          </p:cNvSpPr>
-          <p:nvPr/>
-        </p:nvSpPr>
-        <p:spPr>
-          <a:xfrm xmlns:a="http://schemas.openxmlformats.org/drawingml/2006/main">
-            <a:off x="1200150" y="5067300"/>
-            <a:ext cx="10048875" cy="1028700"/>
+          <p:cNvPr id="33" name="">
+            <a:extLst xmlns:a="http://schemas.openxmlformats.org/drawingml/2006/main">
+              <a:ext uri="{FF2B5EF4-FFF2-40B4-BE49-F238E27FC236}">
+                <a16:creationId xmlns:a16="http://schemas.microsoft.com/office/drawing/2014/main" id="{8BB02F0F-0AA2-4BAE-9D22-8FCB7F446ACE}"/>
+              </a:ext>
+            </a:extLst>
+          </p:cNvPr>
+          <p:cNvSpPr>
+            <a:spLocks xmlns:a="http://schemas.openxmlformats.org/drawingml/2006/main" noGrp="1"/>
+          </p:cNvSpPr>
+          <p:nvPr/>
+        </p:nvSpPr>
+        <p:spPr>
+          <a:xfrm xmlns:a="http://schemas.openxmlformats.org/drawingml/2006/main">
+            <a:off x="1200150" y="5181600"/>
+            <a:ext cx="9982200" cy="266700"/>
           </a:xfrm>
           <a:prstGeom xmlns:a="http://schemas.openxmlformats.org/drawingml/2006/main" prst="rect">
             <a:avLst/>
@@ -5907,19 +6790,269 @@
           <a:lstStyle xmlns:a="http://schemas.openxmlformats.org/drawingml/2006/main"/>
           <a:p xmlns:a="http://schemas.openxmlformats.org/drawingml/2006/main">
             <a:pPr>
-              <a:defRPr sz="1350">
+              <a:defRPr sz="1425" b="1">
                 <a:solidFill>
                   <a:srgbClr val="161616"/>
                 </a:solidFill>
               </a:defRPr>
             </a:pPr>
             <a:r>
-              <a:rPr sz="1350">
+              <a:rPr sz="1425" b="1">
                 <a:solidFill>
                   <a:srgbClr val="161616"/>
                 </a:solidFill>
               </a:rPr>
-              <a:t>{{IT_4}}</a:t>
+              <a:t>{{IT_4_TITLE}}</a:t>
+            </a:r>
+          </a:p>
+        </p:txBody>
+      </p:sp>
+      <p:sp>
+        <p:nvSpPr>
+          <p:cNvPr id="34" name="">
+            <a:extLst xmlns:a="http://schemas.openxmlformats.org/drawingml/2006/main">
+              <a:ext uri="{FF2B5EF4-FFF2-40B4-BE49-F238E27FC236}">
+                <a16:creationId xmlns:a16="http://schemas.microsoft.com/office/drawing/2014/main" id="{05566B89-8515-4ACF-B814-1E6996A5E403}"/>
+              </a:ext>
+            </a:extLst>
+          </p:cNvPr>
+          <p:cNvSpPr>
+            <a:spLocks xmlns:a="http://schemas.openxmlformats.org/drawingml/2006/main" noGrp="1"/>
+          </p:cNvSpPr>
+          <p:nvPr/>
+        </p:nvSpPr>
+        <p:spPr>
+          <a:xfrm xmlns:a="http://schemas.openxmlformats.org/drawingml/2006/main">
+            <a:off x="1200150" y="5476875"/>
+            <a:ext cx="9982200" cy="400050"/>
+          </a:xfrm>
+          <a:prstGeom xmlns:a="http://schemas.openxmlformats.org/drawingml/2006/main" prst="rect">
+            <a:avLst/>
+          </a:prstGeom>
+          <a:noFill xmlns:a="http://schemas.openxmlformats.org/drawingml/2006/main"/>
+          <a:ln xmlns:a="http://schemas.openxmlformats.org/drawingml/2006/main" w="0">
+            <a:noFill/>
+            <a:prstDash val="solid"/>
+          </a:ln>
+        </p:spPr>
+        <p:txBody>
+          <a:bodyPr xmlns:a="http://schemas.openxmlformats.org/drawingml/2006/main"/>
+          <a:lstStyle xmlns:a="http://schemas.openxmlformats.org/drawingml/2006/main"/>
+          <a:p xmlns:a="http://schemas.openxmlformats.org/drawingml/2006/main">
+            <a:pPr>
+              <a:defRPr sz="1125">
+                <a:solidFill>
+                  <a:srgbClr val="667085"/>
+                </a:solidFill>
+              </a:defRPr>
+            </a:pPr>
+            <a:r>
+              <a:rPr sz="1125">
+                <a:solidFill>
+                  <a:srgbClr val="667085"/>
+                </a:solidFill>
+              </a:rPr>
+              <a:t>{{IT_4_ACTION}}</a:t>
+            </a:r>
+          </a:p>
+        </p:txBody>
+      </p:sp>
+      <p:sp>
+        <p:nvSpPr>
+          <p:cNvPr id="35" name="">
+            <a:extLst xmlns:a="http://schemas.openxmlformats.org/drawingml/2006/main">
+              <a:ext uri="{FF2B5EF4-FFF2-40B4-BE49-F238E27FC236}">
+                <a16:creationId xmlns:a16="http://schemas.microsoft.com/office/drawing/2014/main" id="{80804563-4AFA-4651-B0F1-491242163F9D}"/>
+              </a:ext>
+            </a:extLst>
+          </p:cNvPr>
+          <p:cNvSpPr>
+            <a:spLocks xmlns:a="http://schemas.openxmlformats.org/drawingml/2006/main" noGrp="1"/>
+          </p:cNvSpPr>
+          <p:nvPr/>
+        </p:nvSpPr>
+        <p:spPr>
+          <a:xfrm xmlns:a="http://schemas.openxmlformats.org/drawingml/2006/main">
+            <a:off x="1200150" y="5943600"/>
+            <a:ext cx="742950" cy="190500"/>
+          </a:xfrm>
+          <a:prstGeom xmlns:a="http://schemas.openxmlformats.org/drawingml/2006/main" prst="rect">
+            <a:avLst/>
+          </a:prstGeom>
+          <a:noFill xmlns:a="http://schemas.openxmlformats.org/drawingml/2006/main"/>
+          <a:ln xmlns:a="http://schemas.openxmlformats.org/drawingml/2006/main" w="0">
+            <a:noFill/>
+            <a:prstDash val="solid"/>
+          </a:ln>
+        </p:spPr>
+        <p:txBody>
+          <a:bodyPr xmlns:a="http://schemas.openxmlformats.org/drawingml/2006/main"/>
+          <a:lstStyle xmlns:a="http://schemas.openxmlformats.org/drawingml/2006/main"/>
+          <a:p xmlns:a="http://schemas.openxmlformats.org/drawingml/2006/main">
+            <a:pPr>
+              <a:defRPr sz="975" b="1">
+                <a:solidFill>
+                  <a:srgbClr val="FF6412"/>
+                </a:solidFill>
+              </a:defRPr>
+            </a:pPr>
+            <a:r>
+              <a:rPr sz="975" b="1">
+                <a:solidFill>
+                  <a:srgbClr val="FF6412"/>
+                </a:solidFill>
+              </a:rPr>
+              <a:t>Решение</a:t>
+            </a:r>
+          </a:p>
+        </p:txBody>
+      </p:sp>
+      <p:sp>
+        <p:nvSpPr>
+          <p:cNvPr id="36" name="">
+            <a:extLst xmlns:a="http://schemas.openxmlformats.org/drawingml/2006/main">
+              <a:ext uri="{FF2B5EF4-FFF2-40B4-BE49-F238E27FC236}">
+                <a16:creationId xmlns:a16="http://schemas.microsoft.com/office/drawing/2014/main" id="{6335E42B-06D6-4F2B-9522-A1719CF2BABF}"/>
+              </a:ext>
+            </a:extLst>
+          </p:cNvPr>
+          <p:cNvSpPr>
+            <a:spLocks xmlns:a="http://schemas.openxmlformats.org/drawingml/2006/main" noGrp="1"/>
+          </p:cNvSpPr>
+          <p:nvPr/>
+        </p:nvSpPr>
+        <p:spPr>
+          <a:xfrm xmlns:a="http://schemas.openxmlformats.org/drawingml/2006/main">
+            <a:off x="1962150" y="5924550"/>
+            <a:ext cx="3810000" cy="323850"/>
+          </a:xfrm>
+          <a:prstGeom xmlns:a="http://schemas.openxmlformats.org/drawingml/2006/main" prst="rect">
+            <a:avLst/>
+          </a:prstGeom>
+          <a:noFill xmlns:a="http://schemas.openxmlformats.org/drawingml/2006/main"/>
+          <a:ln xmlns:a="http://schemas.openxmlformats.org/drawingml/2006/main" w="0">
+            <a:noFill/>
+            <a:prstDash val="solid"/>
+          </a:ln>
+        </p:spPr>
+        <p:txBody>
+          <a:bodyPr xmlns:a="http://schemas.openxmlformats.org/drawingml/2006/main"/>
+          <a:lstStyle xmlns:a="http://schemas.openxmlformats.org/drawingml/2006/main"/>
+          <a:p xmlns:a="http://schemas.openxmlformats.org/drawingml/2006/main">
+            <a:pPr>
+              <a:defRPr sz="1050" b="1">
+                <a:solidFill>
+                  <a:srgbClr val="161616"/>
+                </a:solidFill>
+              </a:defRPr>
+            </a:pPr>
+            <a:r>
+              <a:rPr sz="1050" b="1">
+                <a:solidFill>
+                  <a:srgbClr val="161616"/>
+                </a:solidFill>
+              </a:rPr>
+              <a:t>{{IT_4_SOLUTION}}</a:t>
+            </a:r>
+          </a:p>
+        </p:txBody>
+      </p:sp>
+      <p:sp>
+        <p:nvSpPr>
+          <p:cNvPr id="37" name="">
+            <a:extLst xmlns:a="http://schemas.openxmlformats.org/drawingml/2006/main">
+              <a:ext uri="{FF2B5EF4-FFF2-40B4-BE49-F238E27FC236}">
+                <a16:creationId xmlns:a16="http://schemas.microsoft.com/office/drawing/2014/main" id="{65DAF99E-6669-4065-B41B-72826172A3A8}"/>
+              </a:ext>
+            </a:extLst>
+          </p:cNvPr>
+          <p:cNvSpPr>
+            <a:spLocks xmlns:a="http://schemas.openxmlformats.org/drawingml/2006/main" noGrp="1"/>
+          </p:cNvSpPr>
+          <p:nvPr/>
+        </p:nvSpPr>
+        <p:spPr>
+          <a:xfrm xmlns:a="http://schemas.openxmlformats.org/drawingml/2006/main">
+            <a:off x="6019800" y="5943600"/>
+            <a:ext cx="1104900" cy="190500"/>
+          </a:xfrm>
+          <a:prstGeom xmlns:a="http://schemas.openxmlformats.org/drawingml/2006/main" prst="rect">
+            <a:avLst/>
+          </a:prstGeom>
+          <a:noFill xmlns:a="http://schemas.openxmlformats.org/drawingml/2006/main"/>
+          <a:ln xmlns:a="http://schemas.openxmlformats.org/drawingml/2006/main" w="0">
+            <a:noFill/>
+            <a:prstDash val="solid"/>
+          </a:ln>
+        </p:spPr>
+        <p:txBody>
+          <a:bodyPr xmlns:a="http://schemas.openxmlformats.org/drawingml/2006/main"/>
+          <a:lstStyle xmlns:a="http://schemas.openxmlformats.org/drawingml/2006/main"/>
+          <a:p xmlns:a="http://schemas.openxmlformats.org/drawingml/2006/main">
+            <a:pPr>
+              <a:defRPr sz="975" b="1">
+                <a:solidFill>
+                  <a:srgbClr val="FF6412"/>
+                </a:solidFill>
+              </a:defRPr>
+            </a:pPr>
+            <a:r>
+              <a:rPr sz="975" b="1">
+                <a:solidFill>
+                  <a:srgbClr val="FF6412"/>
+                </a:solidFill>
+              </a:rPr>
+              <a:t>Производители</a:t>
+            </a:r>
+          </a:p>
+        </p:txBody>
+      </p:sp>
+      <p:sp>
+        <p:nvSpPr>
+          <p:cNvPr id="38" name="">
+            <a:extLst xmlns:a="http://schemas.openxmlformats.org/drawingml/2006/main">
+              <a:ext uri="{FF2B5EF4-FFF2-40B4-BE49-F238E27FC236}">
+                <a16:creationId xmlns:a16="http://schemas.microsoft.com/office/drawing/2014/main" id="{BB578F08-068E-4DF4-A27A-8065A34FC295}"/>
+              </a:ext>
+            </a:extLst>
+          </p:cNvPr>
+          <p:cNvSpPr>
+            <a:spLocks xmlns:a="http://schemas.openxmlformats.org/drawingml/2006/main" noGrp="1"/>
+          </p:cNvSpPr>
+          <p:nvPr/>
+        </p:nvSpPr>
+        <p:spPr>
+          <a:xfrm xmlns:a="http://schemas.openxmlformats.org/drawingml/2006/main">
+            <a:off x="7181850" y="5924550"/>
+            <a:ext cx="4000500" cy="323850"/>
+          </a:xfrm>
+          <a:prstGeom xmlns:a="http://schemas.openxmlformats.org/drawingml/2006/main" prst="rect">
+            <a:avLst/>
+          </a:prstGeom>
+          <a:noFill xmlns:a="http://schemas.openxmlformats.org/drawingml/2006/main"/>
+          <a:ln xmlns:a="http://schemas.openxmlformats.org/drawingml/2006/main" w="0">
+            <a:noFill/>
+            <a:prstDash val="solid"/>
+          </a:ln>
+        </p:spPr>
+        <p:txBody>
+          <a:bodyPr xmlns:a="http://schemas.openxmlformats.org/drawingml/2006/main"/>
+          <a:lstStyle xmlns:a="http://schemas.openxmlformats.org/drawingml/2006/main"/>
+          <a:p xmlns:a="http://schemas.openxmlformats.org/drawingml/2006/main">
+            <a:pPr>
+              <a:defRPr sz="1050" b="1">
+                <a:solidFill>
+                  <a:srgbClr val="161616"/>
+                </a:solidFill>
+              </a:defRPr>
+            </a:pPr>
+            <a:r>
+              <a:rPr sz="1050" b="1">
+                <a:solidFill>
+                  <a:srgbClr val="161616"/>
+                </a:solidFill>
+              </a:rPr>
+              <a:t>{{IT_4_VENDORS}}</a:t>
             </a:r>
           </a:p>
         </p:txBody>
@@ -5927,7 +7060,7 @@
     </p:spTree>
     <p:extLst>
       <p:ext uri="{BB962C8B-B14F-4D97-AF65-F5344CB8AC3E}">
-        <p14:creationId xmlns:p14="http://schemas.microsoft.com/office/powerpoint/2010/main" val="280099906"/>
+        <p14:creationId xmlns:p14="http://schemas.microsoft.com/office/powerpoint/2010/main" val="459432121"/>
       </p:ext>
     </p:extLst>
   </p:cSld>
@@ -5958,7 +7091,7 @@
           <p:cNvPr id="1" name="">
             <a:extLst xmlns:a="http://schemas.openxmlformats.org/drawingml/2006/main">
               <a:ext uri="{FF2B5EF4-FFF2-40B4-BE49-F238E27FC236}">
-                <a16:creationId xmlns:a16="http://schemas.microsoft.com/office/drawing/2014/main" id="{DB980A6F-63B2-4D79-AA8B-A01C521D6914}"/>
+                <a16:creationId xmlns:a16="http://schemas.microsoft.com/office/drawing/2014/main" id="{E79CE56B-94BA-4766-A488-DFF886D39725}"/>
               </a:ext>
             </a:extLst>
           </p:cNvPr>
@@ -5986,14 +7119,14 @@
       </p:sp>
       <p:pic>
         <p:nvPicPr>
-          <p:cNvPr id="20" name=""/>
+          <p:cNvPr id="40" name=""/>
           <p:cNvPicPr>
             <a:picLocks xmlns:a="http://schemas.openxmlformats.org/drawingml/2006/main" noChangeAspect="1"/>
           </p:cNvPicPr>
           <p:nvPr/>
         </p:nvPicPr>
         <p:blipFill>
-          <a:blip xmlns:r="http://schemas.openxmlformats.org/officeDocument/2006/relationships" xmlns:a="http://schemas.openxmlformats.org/drawingml/2006/main" r:embed="Rf6774e2da5dc4724"/>
+          <a:blip xmlns:r="http://schemas.openxmlformats.org/officeDocument/2006/relationships" xmlns:a="http://schemas.openxmlformats.org/drawingml/2006/main" r:embed="R3fa5491773bd4a67"/>
           <a:stretch xmlns:a="http://schemas.openxmlformats.org/drawingml/2006/main"/>
         </p:blipFill>
         <p:spPr>
@@ -6011,7 +7144,7 @@
           <p:cNvPr id="3" name="">
             <a:extLst xmlns:a="http://schemas.openxmlformats.org/drawingml/2006/main">
               <a:ext uri="{FF2B5EF4-FFF2-40B4-BE49-F238E27FC236}">
-                <a16:creationId xmlns:a16="http://schemas.microsoft.com/office/drawing/2014/main" id="{7FC0ACFF-28F8-407E-823E-FCF839671B6A}"/>
+                <a16:creationId xmlns:a16="http://schemas.microsoft.com/office/drawing/2014/main" id="{8B22BCD2-1D3E-4CB7-A2FA-22DA2FD23540}"/>
               </a:ext>
             </a:extLst>
           </p:cNvPr>
@@ -6061,7 +7194,7 @@
           <p:cNvPr id="4" name="">
             <a:extLst xmlns:a="http://schemas.openxmlformats.org/drawingml/2006/main">
               <a:ext uri="{FF2B5EF4-FFF2-40B4-BE49-F238E27FC236}">
-                <a16:creationId xmlns:a16="http://schemas.microsoft.com/office/drawing/2014/main" id="{E1B906E9-F959-4A78-A6E4-D06EDBFFFC74}"/>
+                <a16:creationId xmlns:a16="http://schemas.microsoft.com/office/drawing/2014/main" id="{CB685BA6-8F8B-4977-B712-0A33746C61F8}"/>
               </a:ext>
             </a:extLst>
           </p:cNvPr>
@@ -6094,7 +7227,7 @@
           <p:cNvPr id="5" name="">
             <a:extLst xmlns:a="http://schemas.openxmlformats.org/drawingml/2006/main">
               <a:ext uri="{FF2B5EF4-FFF2-40B4-BE49-F238E27FC236}">
-                <a16:creationId xmlns:a16="http://schemas.microsoft.com/office/drawing/2014/main" id="{98D9FDD9-592A-4878-A7A6-208BA7BAA791}"/>
+                <a16:creationId xmlns:a16="http://schemas.microsoft.com/office/drawing/2014/main" id="{D21D6E67-9146-485C-8373-1EED69B00AD8}"/>
               </a:ext>
             </a:extLst>
           </p:cNvPr>
@@ -6125,7 +7258,7 @@
           <p:cNvPr id="6" name="">
             <a:extLst xmlns:a="http://schemas.openxmlformats.org/drawingml/2006/main">
               <a:ext uri="{FF2B5EF4-FFF2-40B4-BE49-F238E27FC236}">
-                <a16:creationId xmlns:a16="http://schemas.microsoft.com/office/drawing/2014/main" id="{6DF8D2C3-508C-40D6-A406-8A06C93C68FE}"/>
+                <a16:creationId xmlns:a16="http://schemas.microsoft.com/office/drawing/2014/main" id="{D04C6D50-076B-4433-974C-FC0CA460CF93}"/>
               </a:ext>
             </a:extLst>
           </p:cNvPr>
@@ -6175,7 +7308,7 @@
           <p:cNvPr id="7" name="">
             <a:extLst xmlns:a="http://schemas.openxmlformats.org/drawingml/2006/main">
               <a:ext uri="{FF2B5EF4-FFF2-40B4-BE49-F238E27FC236}">
-                <a16:creationId xmlns:a16="http://schemas.microsoft.com/office/drawing/2014/main" id="{0CDCDE0A-D10A-4FDF-ABDB-D61C4F5EF525}"/>
+                <a16:creationId xmlns:a16="http://schemas.microsoft.com/office/drawing/2014/main" id="{97A3F18C-62C6-4B46-B27B-B8DE1868B3B4}"/>
               </a:ext>
             </a:extLst>
           </p:cNvPr>
@@ -6225,18 +7358,18 @@
           <p:cNvPr id="8" name="">
             <a:extLst xmlns:a="http://schemas.openxmlformats.org/drawingml/2006/main">
               <a:ext uri="{FF2B5EF4-FFF2-40B4-BE49-F238E27FC236}">
-                <a16:creationId xmlns:a16="http://schemas.microsoft.com/office/drawing/2014/main" id="{598BE0E0-B5F1-4B2A-BD1B-23850A204937}"/>
-              </a:ext>
-            </a:extLst>
-          </p:cNvPr>
-          <p:cNvSpPr>
-            <a:spLocks xmlns:a="http://schemas.openxmlformats.org/drawingml/2006/main" noGrp="1"/>
-          </p:cNvSpPr>
-          <p:nvPr/>
-        </p:nvSpPr>
-        <p:spPr>
-          <a:xfrm xmlns:a="http://schemas.openxmlformats.org/drawingml/2006/main">
-            <a:off x="609600" y="1638300"/>
+                <a16:creationId xmlns:a16="http://schemas.microsoft.com/office/drawing/2014/main" id="{923E90F4-08C1-4FCE-87C1-34E0D6A3F681}"/>
+              </a:ext>
+            </a:extLst>
+          </p:cNvPr>
+          <p:cNvSpPr>
+            <a:spLocks xmlns:a="http://schemas.openxmlformats.org/drawingml/2006/main" noGrp="1"/>
+          </p:cNvSpPr>
+          <p:nvPr/>
+        </p:nvSpPr>
+        <p:spPr>
+          <a:xfrm xmlns:a="http://schemas.openxmlformats.org/drawingml/2006/main">
+            <a:off x="609600" y="1466850"/>
             <a:ext cx="457200" cy="266700"/>
           </a:xfrm>
           <a:prstGeom xmlns:a="http://schemas.openxmlformats.org/drawingml/2006/main" prst="rect">
@@ -6253,14 +7386,14 @@
           <a:lstStyle xmlns:a="http://schemas.openxmlformats.org/drawingml/2006/main"/>
           <a:p xmlns:a="http://schemas.openxmlformats.org/drawingml/2006/main">
             <a:pPr>
-              <a:defRPr sz="1275" b="1">
+              <a:defRPr sz="1200" b="1">
                 <a:solidFill>
                   <a:srgbClr val="FF6412"/>
                 </a:solidFill>
               </a:defRPr>
             </a:pPr>
             <a:r>
-              <a:rPr sz="1275" b="1">
+              <a:rPr sz="1200" b="1">
                 <a:solidFill>
                   <a:srgbClr val="FF6412"/>
                 </a:solidFill>
@@ -6275,19 +7408,19 @@
           <p:cNvPr id="9" name="">
             <a:extLst xmlns:a="http://schemas.openxmlformats.org/drawingml/2006/main">
               <a:ext uri="{FF2B5EF4-FFF2-40B4-BE49-F238E27FC236}">
-                <a16:creationId xmlns:a16="http://schemas.microsoft.com/office/drawing/2014/main" id="{280E8C1F-5655-419E-8A15-CA5CF2CBA3CE}"/>
-              </a:ext>
-            </a:extLst>
-          </p:cNvPr>
-          <p:cNvSpPr>
-            <a:spLocks xmlns:a="http://schemas.openxmlformats.org/drawingml/2006/main" noGrp="1"/>
-          </p:cNvSpPr>
-          <p:nvPr/>
-        </p:nvSpPr>
-        <p:spPr>
-          <a:xfrm xmlns:a="http://schemas.openxmlformats.org/drawingml/2006/main">
-            <a:off x="1200150" y="1581150"/>
-            <a:ext cx="10048875" cy="1028700"/>
+                <a16:creationId xmlns:a16="http://schemas.microsoft.com/office/drawing/2014/main" id="{A5FEDCE2-081C-425F-8340-4B2141171DCA}"/>
+              </a:ext>
+            </a:extLst>
+          </p:cNvPr>
+          <p:cNvSpPr>
+            <a:spLocks xmlns:a="http://schemas.openxmlformats.org/drawingml/2006/main" noGrp="1"/>
+          </p:cNvSpPr>
+          <p:nvPr/>
+        </p:nvSpPr>
+        <p:spPr>
+          <a:xfrm xmlns:a="http://schemas.openxmlformats.org/drawingml/2006/main">
+            <a:off x="1200150" y="1409700"/>
+            <a:ext cx="9982200" cy="266700"/>
           </a:xfrm>
           <a:prstGeom xmlns:a="http://schemas.openxmlformats.org/drawingml/2006/main" prst="rect">
             <a:avLst/>
@@ -6303,19 +7436,19 @@
           <a:lstStyle xmlns:a="http://schemas.openxmlformats.org/drawingml/2006/main"/>
           <a:p xmlns:a="http://schemas.openxmlformats.org/drawingml/2006/main">
             <a:pPr>
-              <a:defRPr sz="1350">
+              <a:defRPr sz="1425" b="1">
                 <a:solidFill>
                   <a:srgbClr val="161616"/>
                 </a:solidFill>
               </a:defRPr>
             </a:pPr>
             <a:r>
-              <a:rPr sz="1350">
+              <a:rPr sz="1425" b="1">
                 <a:solidFill>
                   <a:srgbClr val="161616"/>
                 </a:solidFill>
               </a:rPr>
-              <a:t>{{SEC_1}}</a:t>
+              <a:t>{{SEC_1_TITLE}}</a:t>
             </a:r>
           </a:p>
         </p:txBody>
@@ -6325,19 +7458,269 @@
           <p:cNvPr id="10" name="">
             <a:extLst xmlns:a="http://schemas.openxmlformats.org/drawingml/2006/main">
               <a:ext uri="{FF2B5EF4-FFF2-40B4-BE49-F238E27FC236}">
-                <a16:creationId xmlns:a16="http://schemas.microsoft.com/office/drawing/2014/main" id="{2854218C-DEBE-4E4B-8AED-FD72C5DF4CD4}"/>
-              </a:ext>
-            </a:extLst>
-          </p:cNvPr>
-          <p:cNvSpPr>
-            <a:spLocks xmlns:a="http://schemas.openxmlformats.org/drawingml/2006/main" noGrp="1"/>
-          </p:cNvSpPr>
-          <p:nvPr/>
-        </p:nvSpPr>
-        <p:spPr>
-          <a:xfrm xmlns:a="http://schemas.openxmlformats.org/drawingml/2006/main">
-            <a:off x="1200150" y="2571750"/>
-            <a:ext cx="10048875" cy="9525"/>
+                <a16:creationId xmlns:a16="http://schemas.microsoft.com/office/drawing/2014/main" id="{CD5D2D07-D6B8-415A-A04A-483AEA3CE17F}"/>
+              </a:ext>
+            </a:extLst>
+          </p:cNvPr>
+          <p:cNvSpPr>
+            <a:spLocks xmlns:a="http://schemas.openxmlformats.org/drawingml/2006/main" noGrp="1"/>
+          </p:cNvSpPr>
+          <p:nvPr/>
+        </p:nvSpPr>
+        <p:spPr>
+          <a:xfrm xmlns:a="http://schemas.openxmlformats.org/drawingml/2006/main">
+            <a:off x="1200150" y="1704975"/>
+            <a:ext cx="9982200" cy="400050"/>
+          </a:xfrm>
+          <a:prstGeom xmlns:a="http://schemas.openxmlformats.org/drawingml/2006/main" prst="rect">
+            <a:avLst/>
+          </a:prstGeom>
+          <a:noFill xmlns:a="http://schemas.openxmlformats.org/drawingml/2006/main"/>
+          <a:ln xmlns:a="http://schemas.openxmlformats.org/drawingml/2006/main" w="0">
+            <a:noFill/>
+            <a:prstDash val="solid"/>
+          </a:ln>
+        </p:spPr>
+        <p:txBody>
+          <a:bodyPr xmlns:a="http://schemas.openxmlformats.org/drawingml/2006/main"/>
+          <a:lstStyle xmlns:a="http://schemas.openxmlformats.org/drawingml/2006/main"/>
+          <a:p xmlns:a="http://schemas.openxmlformats.org/drawingml/2006/main">
+            <a:pPr>
+              <a:defRPr sz="1125">
+                <a:solidFill>
+                  <a:srgbClr val="667085"/>
+                </a:solidFill>
+              </a:defRPr>
+            </a:pPr>
+            <a:r>
+              <a:rPr sz="1125">
+                <a:solidFill>
+                  <a:srgbClr val="667085"/>
+                </a:solidFill>
+              </a:rPr>
+              <a:t>{{SEC_1_ACTION}}</a:t>
+            </a:r>
+          </a:p>
+        </p:txBody>
+      </p:sp>
+      <p:sp>
+        <p:nvSpPr>
+          <p:cNvPr id="11" name="">
+            <a:extLst xmlns:a="http://schemas.openxmlformats.org/drawingml/2006/main">
+              <a:ext uri="{FF2B5EF4-FFF2-40B4-BE49-F238E27FC236}">
+                <a16:creationId xmlns:a16="http://schemas.microsoft.com/office/drawing/2014/main" id="{5DADDD60-F718-4A3C-867B-1B752CE41FB7}"/>
+              </a:ext>
+            </a:extLst>
+          </p:cNvPr>
+          <p:cNvSpPr>
+            <a:spLocks xmlns:a="http://schemas.openxmlformats.org/drawingml/2006/main" noGrp="1"/>
+          </p:cNvSpPr>
+          <p:nvPr/>
+        </p:nvSpPr>
+        <p:spPr>
+          <a:xfrm xmlns:a="http://schemas.openxmlformats.org/drawingml/2006/main">
+            <a:off x="1200150" y="2171700"/>
+            <a:ext cx="742950" cy="190500"/>
+          </a:xfrm>
+          <a:prstGeom xmlns:a="http://schemas.openxmlformats.org/drawingml/2006/main" prst="rect">
+            <a:avLst/>
+          </a:prstGeom>
+          <a:noFill xmlns:a="http://schemas.openxmlformats.org/drawingml/2006/main"/>
+          <a:ln xmlns:a="http://schemas.openxmlformats.org/drawingml/2006/main" w="0">
+            <a:noFill/>
+            <a:prstDash val="solid"/>
+          </a:ln>
+        </p:spPr>
+        <p:txBody>
+          <a:bodyPr xmlns:a="http://schemas.openxmlformats.org/drawingml/2006/main"/>
+          <a:lstStyle xmlns:a="http://schemas.openxmlformats.org/drawingml/2006/main"/>
+          <a:p xmlns:a="http://schemas.openxmlformats.org/drawingml/2006/main">
+            <a:pPr>
+              <a:defRPr sz="975" b="1">
+                <a:solidFill>
+                  <a:srgbClr val="FF6412"/>
+                </a:solidFill>
+              </a:defRPr>
+            </a:pPr>
+            <a:r>
+              <a:rPr sz="975" b="1">
+                <a:solidFill>
+                  <a:srgbClr val="FF6412"/>
+                </a:solidFill>
+              </a:rPr>
+              <a:t>Решение</a:t>
+            </a:r>
+          </a:p>
+        </p:txBody>
+      </p:sp>
+      <p:sp>
+        <p:nvSpPr>
+          <p:cNvPr id="12" name="">
+            <a:extLst xmlns:a="http://schemas.openxmlformats.org/drawingml/2006/main">
+              <a:ext uri="{FF2B5EF4-FFF2-40B4-BE49-F238E27FC236}">
+                <a16:creationId xmlns:a16="http://schemas.microsoft.com/office/drawing/2014/main" id="{ACD4C989-DDF7-4B0C-AFA6-12F55FEAC833}"/>
+              </a:ext>
+            </a:extLst>
+          </p:cNvPr>
+          <p:cNvSpPr>
+            <a:spLocks xmlns:a="http://schemas.openxmlformats.org/drawingml/2006/main" noGrp="1"/>
+          </p:cNvSpPr>
+          <p:nvPr/>
+        </p:nvSpPr>
+        <p:spPr>
+          <a:xfrm xmlns:a="http://schemas.openxmlformats.org/drawingml/2006/main">
+            <a:off x="1962150" y="2152650"/>
+            <a:ext cx="3810000" cy="323850"/>
+          </a:xfrm>
+          <a:prstGeom xmlns:a="http://schemas.openxmlformats.org/drawingml/2006/main" prst="rect">
+            <a:avLst/>
+          </a:prstGeom>
+          <a:noFill xmlns:a="http://schemas.openxmlformats.org/drawingml/2006/main"/>
+          <a:ln xmlns:a="http://schemas.openxmlformats.org/drawingml/2006/main" w="0">
+            <a:noFill/>
+            <a:prstDash val="solid"/>
+          </a:ln>
+        </p:spPr>
+        <p:txBody>
+          <a:bodyPr xmlns:a="http://schemas.openxmlformats.org/drawingml/2006/main"/>
+          <a:lstStyle xmlns:a="http://schemas.openxmlformats.org/drawingml/2006/main"/>
+          <a:p xmlns:a="http://schemas.openxmlformats.org/drawingml/2006/main">
+            <a:pPr>
+              <a:defRPr sz="1050" b="1">
+                <a:solidFill>
+                  <a:srgbClr val="161616"/>
+                </a:solidFill>
+              </a:defRPr>
+            </a:pPr>
+            <a:r>
+              <a:rPr sz="1050" b="1">
+                <a:solidFill>
+                  <a:srgbClr val="161616"/>
+                </a:solidFill>
+              </a:rPr>
+              <a:t>{{SEC_1_SOLUTION}}</a:t>
+            </a:r>
+          </a:p>
+        </p:txBody>
+      </p:sp>
+      <p:sp>
+        <p:nvSpPr>
+          <p:cNvPr id="13" name="">
+            <a:extLst xmlns:a="http://schemas.openxmlformats.org/drawingml/2006/main">
+              <a:ext uri="{FF2B5EF4-FFF2-40B4-BE49-F238E27FC236}">
+                <a16:creationId xmlns:a16="http://schemas.microsoft.com/office/drawing/2014/main" id="{A54B9C29-867B-4ECF-9ACC-703DCB6601A8}"/>
+              </a:ext>
+            </a:extLst>
+          </p:cNvPr>
+          <p:cNvSpPr>
+            <a:spLocks xmlns:a="http://schemas.openxmlformats.org/drawingml/2006/main" noGrp="1"/>
+          </p:cNvSpPr>
+          <p:nvPr/>
+        </p:nvSpPr>
+        <p:spPr>
+          <a:xfrm xmlns:a="http://schemas.openxmlformats.org/drawingml/2006/main">
+            <a:off x="6019800" y="2171700"/>
+            <a:ext cx="1104900" cy="190500"/>
+          </a:xfrm>
+          <a:prstGeom xmlns:a="http://schemas.openxmlformats.org/drawingml/2006/main" prst="rect">
+            <a:avLst/>
+          </a:prstGeom>
+          <a:noFill xmlns:a="http://schemas.openxmlformats.org/drawingml/2006/main"/>
+          <a:ln xmlns:a="http://schemas.openxmlformats.org/drawingml/2006/main" w="0">
+            <a:noFill/>
+            <a:prstDash val="solid"/>
+          </a:ln>
+        </p:spPr>
+        <p:txBody>
+          <a:bodyPr xmlns:a="http://schemas.openxmlformats.org/drawingml/2006/main"/>
+          <a:lstStyle xmlns:a="http://schemas.openxmlformats.org/drawingml/2006/main"/>
+          <a:p xmlns:a="http://schemas.openxmlformats.org/drawingml/2006/main">
+            <a:pPr>
+              <a:defRPr sz="975" b="1">
+                <a:solidFill>
+                  <a:srgbClr val="FF6412"/>
+                </a:solidFill>
+              </a:defRPr>
+            </a:pPr>
+            <a:r>
+              <a:rPr sz="975" b="1">
+                <a:solidFill>
+                  <a:srgbClr val="FF6412"/>
+                </a:solidFill>
+              </a:rPr>
+              <a:t>Производители</a:t>
+            </a:r>
+          </a:p>
+        </p:txBody>
+      </p:sp>
+      <p:sp>
+        <p:nvSpPr>
+          <p:cNvPr id="14" name="">
+            <a:extLst xmlns:a="http://schemas.openxmlformats.org/drawingml/2006/main">
+              <a:ext uri="{FF2B5EF4-FFF2-40B4-BE49-F238E27FC236}">
+                <a16:creationId xmlns:a16="http://schemas.microsoft.com/office/drawing/2014/main" id="{197CB7AE-76EA-47FC-9B5A-06EF00D02E81}"/>
+              </a:ext>
+            </a:extLst>
+          </p:cNvPr>
+          <p:cNvSpPr>
+            <a:spLocks xmlns:a="http://schemas.openxmlformats.org/drawingml/2006/main" noGrp="1"/>
+          </p:cNvSpPr>
+          <p:nvPr/>
+        </p:nvSpPr>
+        <p:spPr>
+          <a:xfrm xmlns:a="http://schemas.openxmlformats.org/drawingml/2006/main">
+            <a:off x="7181850" y="2152650"/>
+            <a:ext cx="4000500" cy="323850"/>
+          </a:xfrm>
+          <a:prstGeom xmlns:a="http://schemas.openxmlformats.org/drawingml/2006/main" prst="rect">
+            <a:avLst/>
+          </a:prstGeom>
+          <a:noFill xmlns:a="http://schemas.openxmlformats.org/drawingml/2006/main"/>
+          <a:ln xmlns:a="http://schemas.openxmlformats.org/drawingml/2006/main" w="0">
+            <a:noFill/>
+            <a:prstDash val="solid"/>
+          </a:ln>
+        </p:spPr>
+        <p:txBody>
+          <a:bodyPr xmlns:a="http://schemas.openxmlformats.org/drawingml/2006/main"/>
+          <a:lstStyle xmlns:a="http://schemas.openxmlformats.org/drawingml/2006/main"/>
+          <a:p xmlns:a="http://schemas.openxmlformats.org/drawingml/2006/main">
+            <a:pPr>
+              <a:defRPr sz="1050" b="1">
+                <a:solidFill>
+                  <a:srgbClr val="161616"/>
+                </a:solidFill>
+              </a:defRPr>
+            </a:pPr>
+            <a:r>
+              <a:rPr sz="1050" b="1">
+                <a:solidFill>
+                  <a:srgbClr val="161616"/>
+                </a:solidFill>
+              </a:rPr>
+              <a:t>{{SEC_1_VENDORS}}</a:t>
+            </a:r>
+          </a:p>
+        </p:txBody>
+      </p:sp>
+      <p:sp>
+        <p:nvSpPr>
+          <p:cNvPr id="15" name="">
+            <a:extLst xmlns:a="http://schemas.openxmlformats.org/drawingml/2006/main">
+              <a:ext uri="{FF2B5EF4-FFF2-40B4-BE49-F238E27FC236}">
+                <a16:creationId xmlns:a16="http://schemas.microsoft.com/office/drawing/2014/main" id="{068D9DD1-051B-471A-963E-882E1A969B9F}"/>
+              </a:ext>
+            </a:extLst>
+          </p:cNvPr>
+          <p:cNvSpPr>
+            <a:spLocks xmlns:a="http://schemas.openxmlformats.org/drawingml/2006/main" noGrp="1"/>
+          </p:cNvSpPr>
+          <p:nvPr/>
+        </p:nvSpPr>
+        <p:spPr>
+          <a:xfrm xmlns:a="http://schemas.openxmlformats.org/drawingml/2006/main">
+            <a:off x="1200150" y="2552700"/>
+            <a:ext cx="9982200" cy="9525"/>
           </a:xfrm>
           <a:prstGeom xmlns:a="http://schemas.openxmlformats.org/drawingml/2006/main" prst="rect">
             <a:avLst/>
@@ -6353,21 +7736,21 @@
       </p:sp>
       <p:sp>
         <p:nvSpPr>
-          <p:cNvPr id="11" name="">
-            <a:extLst xmlns:a="http://schemas.openxmlformats.org/drawingml/2006/main">
-              <a:ext uri="{FF2B5EF4-FFF2-40B4-BE49-F238E27FC236}">
-                <a16:creationId xmlns:a16="http://schemas.microsoft.com/office/drawing/2014/main" id="{A0C1E1D8-9C59-479C-9178-20A21F9D8347}"/>
-              </a:ext>
-            </a:extLst>
-          </p:cNvPr>
-          <p:cNvSpPr>
-            <a:spLocks xmlns:a="http://schemas.openxmlformats.org/drawingml/2006/main" noGrp="1"/>
-          </p:cNvSpPr>
-          <p:nvPr/>
-        </p:nvSpPr>
-        <p:spPr>
-          <a:xfrm xmlns:a="http://schemas.openxmlformats.org/drawingml/2006/main">
-            <a:off x="609600" y="2800350"/>
+          <p:cNvPr id="16" name="">
+            <a:extLst xmlns:a="http://schemas.openxmlformats.org/drawingml/2006/main">
+              <a:ext uri="{FF2B5EF4-FFF2-40B4-BE49-F238E27FC236}">
+                <a16:creationId xmlns:a16="http://schemas.microsoft.com/office/drawing/2014/main" id="{7A81AB0F-C97F-4A70-B078-2A9F260E09CD}"/>
+              </a:ext>
+            </a:extLst>
+          </p:cNvPr>
+          <p:cNvSpPr>
+            <a:spLocks xmlns:a="http://schemas.openxmlformats.org/drawingml/2006/main" noGrp="1"/>
+          </p:cNvSpPr>
+          <p:nvPr/>
+        </p:nvSpPr>
+        <p:spPr>
+          <a:xfrm xmlns:a="http://schemas.openxmlformats.org/drawingml/2006/main">
+            <a:off x="609600" y="2724150"/>
             <a:ext cx="457200" cy="266700"/>
           </a:xfrm>
           <a:prstGeom xmlns:a="http://schemas.openxmlformats.org/drawingml/2006/main" prst="rect">
@@ -6384,14 +7767,14 @@
           <a:lstStyle xmlns:a="http://schemas.openxmlformats.org/drawingml/2006/main"/>
           <a:p xmlns:a="http://schemas.openxmlformats.org/drawingml/2006/main">
             <a:pPr>
-              <a:defRPr sz="1275" b="1">
+              <a:defRPr sz="1200" b="1">
                 <a:solidFill>
                   <a:srgbClr val="FF6412"/>
                 </a:solidFill>
               </a:defRPr>
             </a:pPr>
             <a:r>
-              <a:rPr sz="1275" b="1">
+              <a:rPr sz="1200" b="1">
                 <a:solidFill>
                   <a:srgbClr val="FF6412"/>
                 </a:solidFill>
@@ -6403,22 +7786,22 @@
       </p:sp>
       <p:sp>
         <p:nvSpPr>
-          <p:cNvPr id="12" name="">
-            <a:extLst xmlns:a="http://schemas.openxmlformats.org/drawingml/2006/main">
-              <a:ext uri="{FF2B5EF4-FFF2-40B4-BE49-F238E27FC236}">
-                <a16:creationId xmlns:a16="http://schemas.microsoft.com/office/drawing/2014/main" id="{C217C3F3-286F-4BCA-A895-6F5ED9B16CBE}"/>
-              </a:ext>
-            </a:extLst>
-          </p:cNvPr>
-          <p:cNvSpPr>
-            <a:spLocks xmlns:a="http://schemas.openxmlformats.org/drawingml/2006/main" noGrp="1"/>
-          </p:cNvSpPr>
-          <p:nvPr/>
-        </p:nvSpPr>
-        <p:spPr>
-          <a:xfrm xmlns:a="http://schemas.openxmlformats.org/drawingml/2006/main">
-            <a:off x="1200150" y="2743200"/>
-            <a:ext cx="10048875" cy="1028700"/>
+          <p:cNvPr id="17" name="">
+            <a:extLst xmlns:a="http://schemas.openxmlformats.org/drawingml/2006/main">
+              <a:ext uri="{FF2B5EF4-FFF2-40B4-BE49-F238E27FC236}">
+                <a16:creationId xmlns:a16="http://schemas.microsoft.com/office/drawing/2014/main" id="{2E37C848-B070-4255-BF97-0AB986D658D0}"/>
+              </a:ext>
+            </a:extLst>
+          </p:cNvPr>
+          <p:cNvSpPr>
+            <a:spLocks xmlns:a="http://schemas.openxmlformats.org/drawingml/2006/main" noGrp="1"/>
+          </p:cNvSpPr>
+          <p:nvPr/>
+        </p:nvSpPr>
+        <p:spPr>
+          <a:xfrm xmlns:a="http://schemas.openxmlformats.org/drawingml/2006/main">
+            <a:off x="1200150" y="2667000"/>
+            <a:ext cx="9982200" cy="266700"/>
           </a:xfrm>
           <a:prstGeom xmlns:a="http://schemas.openxmlformats.org/drawingml/2006/main" prst="rect">
             <a:avLst/>
@@ -6434,41 +7817,291 @@
           <a:lstStyle xmlns:a="http://schemas.openxmlformats.org/drawingml/2006/main"/>
           <a:p xmlns:a="http://schemas.openxmlformats.org/drawingml/2006/main">
             <a:pPr>
-              <a:defRPr sz="1350">
+              <a:defRPr sz="1425" b="1">
                 <a:solidFill>
                   <a:srgbClr val="161616"/>
                 </a:solidFill>
               </a:defRPr>
             </a:pPr>
             <a:r>
-              <a:rPr sz="1350">
+              <a:rPr sz="1425" b="1">
                 <a:solidFill>
                   <a:srgbClr val="161616"/>
                 </a:solidFill>
               </a:rPr>
-              <a:t>{{SEC_2}}</a:t>
-            </a:r>
-          </a:p>
-        </p:txBody>
-      </p:sp>
-      <p:sp>
-        <p:nvSpPr>
-          <p:cNvPr id="13" name="">
-            <a:extLst xmlns:a="http://schemas.openxmlformats.org/drawingml/2006/main">
-              <a:ext uri="{FF2B5EF4-FFF2-40B4-BE49-F238E27FC236}">
-                <a16:creationId xmlns:a16="http://schemas.microsoft.com/office/drawing/2014/main" id="{FF34DFE4-A6DB-4BD0-81B8-4ED6FB0F2AFB}"/>
-              </a:ext>
-            </a:extLst>
-          </p:cNvPr>
-          <p:cNvSpPr>
-            <a:spLocks xmlns:a="http://schemas.openxmlformats.org/drawingml/2006/main" noGrp="1"/>
-          </p:cNvSpPr>
-          <p:nvPr/>
-        </p:nvSpPr>
-        <p:spPr>
-          <a:xfrm xmlns:a="http://schemas.openxmlformats.org/drawingml/2006/main">
-            <a:off x="1200150" y="3733800"/>
-            <a:ext cx="10048875" cy="9525"/>
+              <a:t>{{SEC_2_TITLE}}</a:t>
+            </a:r>
+          </a:p>
+        </p:txBody>
+      </p:sp>
+      <p:sp>
+        <p:nvSpPr>
+          <p:cNvPr id="18" name="">
+            <a:extLst xmlns:a="http://schemas.openxmlformats.org/drawingml/2006/main">
+              <a:ext uri="{FF2B5EF4-FFF2-40B4-BE49-F238E27FC236}">
+                <a16:creationId xmlns:a16="http://schemas.microsoft.com/office/drawing/2014/main" id="{6B2FA649-26CB-47BE-A1E1-B70F5E330B0A}"/>
+              </a:ext>
+            </a:extLst>
+          </p:cNvPr>
+          <p:cNvSpPr>
+            <a:spLocks xmlns:a="http://schemas.openxmlformats.org/drawingml/2006/main" noGrp="1"/>
+          </p:cNvSpPr>
+          <p:nvPr/>
+        </p:nvSpPr>
+        <p:spPr>
+          <a:xfrm xmlns:a="http://schemas.openxmlformats.org/drawingml/2006/main">
+            <a:off x="1200150" y="2962275"/>
+            <a:ext cx="9982200" cy="400050"/>
+          </a:xfrm>
+          <a:prstGeom xmlns:a="http://schemas.openxmlformats.org/drawingml/2006/main" prst="rect">
+            <a:avLst/>
+          </a:prstGeom>
+          <a:noFill xmlns:a="http://schemas.openxmlformats.org/drawingml/2006/main"/>
+          <a:ln xmlns:a="http://schemas.openxmlformats.org/drawingml/2006/main" w="0">
+            <a:noFill/>
+            <a:prstDash val="solid"/>
+          </a:ln>
+        </p:spPr>
+        <p:txBody>
+          <a:bodyPr xmlns:a="http://schemas.openxmlformats.org/drawingml/2006/main"/>
+          <a:lstStyle xmlns:a="http://schemas.openxmlformats.org/drawingml/2006/main"/>
+          <a:p xmlns:a="http://schemas.openxmlformats.org/drawingml/2006/main">
+            <a:pPr>
+              <a:defRPr sz="1125">
+                <a:solidFill>
+                  <a:srgbClr val="667085"/>
+                </a:solidFill>
+              </a:defRPr>
+            </a:pPr>
+            <a:r>
+              <a:rPr sz="1125">
+                <a:solidFill>
+                  <a:srgbClr val="667085"/>
+                </a:solidFill>
+              </a:rPr>
+              <a:t>{{SEC_2_ACTION}}</a:t>
+            </a:r>
+          </a:p>
+        </p:txBody>
+      </p:sp>
+      <p:sp>
+        <p:nvSpPr>
+          <p:cNvPr id="19" name="">
+            <a:extLst xmlns:a="http://schemas.openxmlformats.org/drawingml/2006/main">
+              <a:ext uri="{FF2B5EF4-FFF2-40B4-BE49-F238E27FC236}">
+                <a16:creationId xmlns:a16="http://schemas.microsoft.com/office/drawing/2014/main" id="{2E2AD0E4-2568-44C1-A089-63CA00510787}"/>
+              </a:ext>
+            </a:extLst>
+          </p:cNvPr>
+          <p:cNvSpPr>
+            <a:spLocks xmlns:a="http://schemas.openxmlformats.org/drawingml/2006/main" noGrp="1"/>
+          </p:cNvSpPr>
+          <p:nvPr/>
+        </p:nvSpPr>
+        <p:spPr>
+          <a:xfrm xmlns:a="http://schemas.openxmlformats.org/drawingml/2006/main">
+            <a:off x="1200150" y="3429000"/>
+            <a:ext cx="742950" cy="190500"/>
+          </a:xfrm>
+          <a:prstGeom xmlns:a="http://schemas.openxmlformats.org/drawingml/2006/main" prst="rect">
+            <a:avLst/>
+          </a:prstGeom>
+          <a:noFill xmlns:a="http://schemas.openxmlformats.org/drawingml/2006/main"/>
+          <a:ln xmlns:a="http://schemas.openxmlformats.org/drawingml/2006/main" w="0">
+            <a:noFill/>
+            <a:prstDash val="solid"/>
+          </a:ln>
+        </p:spPr>
+        <p:txBody>
+          <a:bodyPr xmlns:a="http://schemas.openxmlformats.org/drawingml/2006/main"/>
+          <a:lstStyle xmlns:a="http://schemas.openxmlformats.org/drawingml/2006/main"/>
+          <a:p xmlns:a="http://schemas.openxmlformats.org/drawingml/2006/main">
+            <a:pPr>
+              <a:defRPr sz="975" b="1">
+                <a:solidFill>
+                  <a:srgbClr val="FF6412"/>
+                </a:solidFill>
+              </a:defRPr>
+            </a:pPr>
+            <a:r>
+              <a:rPr sz="975" b="1">
+                <a:solidFill>
+                  <a:srgbClr val="FF6412"/>
+                </a:solidFill>
+              </a:rPr>
+              <a:t>Решение</a:t>
+            </a:r>
+          </a:p>
+        </p:txBody>
+      </p:sp>
+      <p:sp>
+        <p:nvSpPr>
+          <p:cNvPr id="20" name="">
+            <a:extLst xmlns:a="http://schemas.openxmlformats.org/drawingml/2006/main">
+              <a:ext uri="{FF2B5EF4-FFF2-40B4-BE49-F238E27FC236}">
+                <a16:creationId xmlns:a16="http://schemas.microsoft.com/office/drawing/2014/main" id="{C6027A01-0BC1-4144-99A5-11BE9704799C}"/>
+              </a:ext>
+            </a:extLst>
+          </p:cNvPr>
+          <p:cNvSpPr>
+            <a:spLocks xmlns:a="http://schemas.openxmlformats.org/drawingml/2006/main" noGrp="1"/>
+          </p:cNvSpPr>
+          <p:nvPr/>
+        </p:nvSpPr>
+        <p:spPr>
+          <a:xfrm xmlns:a="http://schemas.openxmlformats.org/drawingml/2006/main">
+            <a:off x="1962150" y="3409950"/>
+            <a:ext cx="3810000" cy="323850"/>
+          </a:xfrm>
+          <a:prstGeom xmlns:a="http://schemas.openxmlformats.org/drawingml/2006/main" prst="rect">
+            <a:avLst/>
+          </a:prstGeom>
+          <a:noFill xmlns:a="http://schemas.openxmlformats.org/drawingml/2006/main"/>
+          <a:ln xmlns:a="http://schemas.openxmlformats.org/drawingml/2006/main" w="0">
+            <a:noFill/>
+            <a:prstDash val="solid"/>
+          </a:ln>
+        </p:spPr>
+        <p:txBody>
+          <a:bodyPr xmlns:a="http://schemas.openxmlformats.org/drawingml/2006/main"/>
+          <a:lstStyle xmlns:a="http://schemas.openxmlformats.org/drawingml/2006/main"/>
+          <a:p xmlns:a="http://schemas.openxmlformats.org/drawingml/2006/main">
+            <a:pPr>
+              <a:defRPr sz="1050" b="1">
+                <a:solidFill>
+                  <a:srgbClr val="161616"/>
+                </a:solidFill>
+              </a:defRPr>
+            </a:pPr>
+            <a:r>
+              <a:rPr sz="1050" b="1">
+                <a:solidFill>
+                  <a:srgbClr val="161616"/>
+                </a:solidFill>
+              </a:rPr>
+              <a:t>{{SEC_2_SOLUTION}}</a:t>
+            </a:r>
+          </a:p>
+        </p:txBody>
+      </p:sp>
+      <p:sp>
+        <p:nvSpPr>
+          <p:cNvPr id="21" name="">
+            <a:extLst xmlns:a="http://schemas.openxmlformats.org/drawingml/2006/main">
+              <a:ext uri="{FF2B5EF4-FFF2-40B4-BE49-F238E27FC236}">
+                <a16:creationId xmlns:a16="http://schemas.microsoft.com/office/drawing/2014/main" id="{EE05F6D0-8EE6-47D2-BD10-1367CF774F16}"/>
+              </a:ext>
+            </a:extLst>
+          </p:cNvPr>
+          <p:cNvSpPr>
+            <a:spLocks xmlns:a="http://schemas.openxmlformats.org/drawingml/2006/main" noGrp="1"/>
+          </p:cNvSpPr>
+          <p:nvPr/>
+        </p:nvSpPr>
+        <p:spPr>
+          <a:xfrm xmlns:a="http://schemas.openxmlformats.org/drawingml/2006/main">
+            <a:off x="6019800" y="3429000"/>
+            <a:ext cx="1104900" cy="190500"/>
+          </a:xfrm>
+          <a:prstGeom xmlns:a="http://schemas.openxmlformats.org/drawingml/2006/main" prst="rect">
+            <a:avLst/>
+          </a:prstGeom>
+          <a:noFill xmlns:a="http://schemas.openxmlformats.org/drawingml/2006/main"/>
+          <a:ln xmlns:a="http://schemas.openxmlformats.org/drawingml/2006/main" w="0">
+            <a:noFill/>
+            <a:prstDash val="solid"/>
+          </a:ln>
+        </p:spPr>
+        <p:txBody>
+          <a:bodyPr xmlns:a="http://schemas.openxmlformats.org/drawingml/2006/main"/>
+          <a:lstStyle xmlns:a="http://schemas.openxmlformats.org/drawingml/2006/main"/>
+          <a:p xmlns:a="http://schemas.openxmlformats.org/drawingml/2006/main">
+            <a:pPr>
+              <a:defRPr sz="975" b="1">
+                <a:solidFill>
+                  <a:srgbClr val="FF6412"/>
+                </a:solidFill>
+              </a:defRPr>
+            </a:pPr>
+            <a:r>
+              <a:rPr sz="975" b="1">
+                <a:solidFill>
+                  <a:srgbClr val="FF6412"/>
+                </a:solidFill>
+              </a:rPr>
+              <a:t>Производители</a:t>
+            </a:r>
+          </a:p>
+        </p:txBody>
+      </p:sp>
+      <p:sp>
+        <p:nvSpPr>
+          <p:cNvPr id="22" name="">
+            <a:extLst xmlns:a="http://schemas.openxmlformats.org/drawingml/2006/main">
+              <a:ext uri="{FF2B5EF4-FFF2-40B4-BE49-F238E27FC236}">
+                <a16:creationId xmlns:a16="http://schemas.microsoft.com/office/drawing/2014/main" id="{9C3E26FE-ED25-4F79-9A2E-97A3EAA5589F}"/>
+              </a:ext>
+            </a:extLst>
+          </p:cNvPr>
+          <p:cNvSpPr>
+            <a:spLocks xmlns:a="http://schemas.openxmlformats.org/drawingml/2006/main" noGrp="1"/>
+          </p:cNvSpPr>
+          <p:nvPr/>
+        </p:nvSpPr>
+        <p:spPr>
+          <a:xfrm xmlns:a="http://schemas.openxmlformats.org/drawingml/2006/main">
+            <a:off x="7181850" y="3409950"/>
+            <a:ext cx="4000500" cy="323850"/>
+          </a:xfrm>
+          <a:prstGeom xmlns:a="http://schemas.openxmlformats.org/drawingml/2006/main" prst="rect">
+            <a:avLst/>
+          </a:prstGeom>
+          <a:noFill xmlns:a="http://schemas.openxmlformats.org/drawingml/2006/main"/>
+          <a:ln xmlns:a="http://schemas.openxmlformats.org/drawingml/2006/main" w="0">
+            <a:noFill/>
+            <a:prstDash val="solid"/>
+          </a:ln>
+        </p:spPr>
+        <p:txBody>
+          <a:bodyPr xmlns:a="http://schemas.openxmlformats.org/drawingml/2006/main"/>
+          <a:lstStyle xmlns:a="http://schemas.openxmlformats.org/drawingml/2006/main"/>
+          <a:p xmlns:a="http://schemas.openxmlformats.org/drawingml/2006/main">
+            <a:pPr>
+              <a:defRPr sz="1050" b="1">
+                <a:solidFill>
+                  <a:srgbClr val="161616"/>
+                </a:solidFill>
+              </a:defRPr>
+            </a:pPr>
+            <a:r>
+              <a:rPr sz="1050" b="1">
+                <a:solidFill>
+                  <a:srgbClr val="161616"/>
+                </a:solidFill>
+              </a:rPr>
+              <a:t>{{SEC_2_VENDORS}}</a:t>
+            </a:r>
+          </a:p>
+        </p:txBody>
+      </p:sp>
+      <p:sp>
+        <p:nvSpPr>
+          <p:cNvPr id="23" name="">
+            <a:extLst xmlns:a="http://schemas.openxmlformats.org/drawingml/2006/main">
+              <a:ext uri="{FF2B5EF4-FFF2-40B4-BE49-F238E27FC236}">
+                <a16:creationId xmlns:a16="http://schemas.microsoft.com/office/drawing/2014/main" id="{1972C1E1-A16F-4B2E-8151-4E6CE98A0488}"/>
+              </a:ext>
+            </a:extLst>
+          </p:cNvPr>
+          <p:cNvSpPr>
+            <a:spLocks xmlns:a="http://schemas.openxmlformats.org/drawingml/2006/main" noGrp="1"/>
+          </p:cNvSpPr>
+          <p:nvPr/>
+        </p:nvSpPr>
+        <p:spPr>
+          <a:xfrm xmlns:a="http://schemas.openxmlformats.org/drawingml/2006/main">
+            <a:off x="1200150" y="3810000"/>
+            <a:ext cx="9982200" cy="9525"/>
           </a:xfrm>
           <a:prstGeom xmlns:a="http://schemas.openxmlformats.org/drawingml/2006/main" prst="rect">
             <a:avLst/>
@@ -6484,21 +8117,21 @@
       </p:sp>
       <p:sp>
         <p:nvSpPr>
-          <p:cNvPr id="14" name="">
-            <a:extLst xmlns:a="http://schemas.openxmlformats.org/drawingml/2006/main">
-              <a:ext uri="{FF2B5EF4-FFF2-40B4-BE49-F238E27FC236}">
-                <a16:creationId xmlns:a16="http://schemas.microsoft.com/office/drawing/2014/main" id="{600859A6-5733-4FAF-A90E-965CD89DD00E}"/>
-              </a:ext>
-            </a:extLst>
-          </p:cNvPr>
-          <p:cNvSpPr>
-            <a:spLocks xmlns:a="http://schemas.openxmlformats.org/drawingml/2006/main" noGrp="1"/>
-          </p:cNvSpPr>
-          <p:nvPr/>
-        </p:nvSpPr>
-        <p:spPr>
-          <a:xfrm xmlns:a="http://schemas.openxmlformats.org/drawingml/2006/main">
-            <a:off x="609600" y="3962400"/>
+          <p:cNvPr id="24" name="">
+            <a:extLst xmlns:a="http://schemas.openxmlformats.org/drawingml/2006/main">
+              <a:ext uri="{FF2B5EF4-FFF2-40B4-BE49-F238E27FC236}">
+                <a16:creationId xmlns:a16="http://schemas.microsoft.com/office/drawing/2014/main" id="{5A679FD7-BC44-47A4-B610-EEBBC7884091}"/>
+              </a:ext>
+            </a:extLst>
+          </p:cNvPr>
+          <p:cNvSpPr>
+            <a:spLocks xmlns:a="http://schemas.openxmlformats.org/drawingml/2006/main" noGrp="1"/>
+          </p:cNvSpPr>
+          <p:nvPr/>
+        </p:nvSpPr>
+        <p:spPr>
+          <a:xfrm xmlns:a="http://schemas.openxmlformats.org/drawingml/2006/main">
+            <a:off x="609600" y="3981450"/>
             <a:ext cx="457200" cy="266700"/>
           </a:xfrm>
           <a:prstGeom xmlns:a="http://schemas.openxmlformats.org/drawingml/2006/main" prst="rect">
@@ -6515,14 +8148,14 @@
           <a:lstStyle xmlns:a="http://schemas.openxmlformats.org/drawingml/2006/main"/>
           <a:p xmlns:a="http://schemas.openxmlformats.org/drawingml/2006/main">
             <a:pPr>
-              <a:defRPr sz="1275" b="1">
+              <a:defRPr sz="1200" b="1">
                 <a:solidFill>
                   <a:srgbClr val="FF6412"/>
                 </a:solidFill>
               </a:defRPr>
             </a:pPr>
             <a:r>
-              <a:rPr sz="1275" b="1">
+              <a:rPr sz="1200" b="1">
                 <a:solidFill>
                   <a:srgbClr val="FF6412"/>
                 </a:solidFill>
@@ -6534,22 +8167,22 @@
       </p:sp>
       <p:sp>
         <p:nvSpPr>
-          <p:cNvPr id="15" name="">
-            <a:extLst xmlns:a="http://schemas.openxmlformats.org/drawingml/2006/main">
-              <a:ext uri="{FF2B5EF4-FFF2-40B4-BE49-F238E27FC236}">
-                <a16:creationId xmlns:a16="http://schemas.microsoft.com/office/drawing/2014/main" id="{DEE1BF02-BE01-40C6-AF7D-88379F07292F}"/>
-              </a:ext>
-            </a:extLst>
-          </p:cNvPr>
-          <p:cNvSpPr>
-            <a:spLocks xmlns:a="http://schemas.openxmlformats.org/drawingml/2006/main" noGrp="1"/>
-          </p:cNvSpPr>
-          <p:nvPr/>
-        </p:nvSpPr>
-        <p:spPr>
-          <a:xfrm xmlns:a="http://schemas.openxmlformats.org/drawingml/2006/main">
-            <a:off x="1200150" y="3905250"/>
-            <a:ext cx="10048875" cy="1028700"/>
+          <p:cNvPr id="25" name="">
+            <a:extLst xmlns:a="http://schemas.openxmlformats.org/drawingml/2006/main">
+              <a:ext uri="{FF2B5EF4-FFF2-40B4-BE49-F238E27FC236}">
+                <a16:creationId xmlns:a16="http://schemas.microsoft.com/office/drawing/2014/main" id="{ADFC1773-B892-45B6-ACFE-30016AE490C2}"/>
+              </a:ext>
+            </a:extLst>
+          </p:cNvPr>
+          <p:cNvSpPr>
+            <a:spLocks xmlns:a="http://schemas.openxmlformats.org/drawingml/2006/main" noGrp="1"/>
+          </p:cNvSpPr>
+          <p:nvPr/>
+        </p:nvSpPr>
+        <p:spPr>
+          <a:xfrm xmlns:a="http://schemas.openxmlformats.org/drawingml/2006/main">
+            <a:off x="1200150" y="3924300"/>
+            <a:ext cx="9982200" cy="266700"/>
           </a:xfrm>
           <a:prstGeom xmlns:a="http://schemas.openxmlformats.org/drawingml/2006/main" prst="rect">
             <a:avLst/>
@@ -6565,41 +8198,291 @@
           <a:lstStyle xmlns:a="http://schemas.openxmlformats.org/drawingml/2006/main"/>
           <a:p xmlns:a="http://schemas.openxmlformats.org/drawingml/2006/main">
             <a:pPr>
-              <a:defRPr sz="1350">
+              <a:defRPr sz="1425" b="1">
                 <a:solidFill>
                   <a:srgbClr val="161616"/>
                 </a:solidFill>
               </a:defRPr>
             </a:pPr>
             <a:r>
-              <a:rPr sz="1350">
+              <a:rPr sz="1425" b="1">
                 <a:solidFill>
                   <a:srgbClr val="161616"/>
                 </a:solidFill>
               </a:rPr>
-              <a:t>{{SEC_3}}</a:t>
-            </a:r>
-          </a:p>
-        </p:txBody>
-      </p:sp>
-      <p:sp>
-        <p:nvSpPr>
-          <p:cNvPr id="16" name="">
-            <a:extLst xmlns:a="http://schemas.openxmlformats.org/drawingml/2006/main">
-              <a:ext uri="{FF2B5EF4-FFF2-40B4-BE49-F238E27FC236}">
-                <a16:creationId xmlns:a16="http://schemas.microsoft.com/office/drawing/2014/main" id="{6CBB219D-9B02-47C9-AB8B-14B7F3EBED20}"/>
-              </a:ext>
-            </a:extLst>
-          </p:cNvPr>
-          <p:cNvSpPr>
-            <a:spLocks xmlns:a="http://schemas.openxmlformats.org/drawingml/2006/main" noGrp="1"/>
-          </p:cNvSpPr>
-          <p:nvPr/>
-        </p:nvSpPr>
-        <p:spPr>
-          <a:xfrm xmlns:a="http://schemas.openxmlformats.org/drawingml/2006/main">
-            <a:off x="1200150" y="4895850"/>
-            <a:ext cx="10048875" cy="9525"/>
+              <a:t>{{SEC_3_TITLE}}</a:t>
+            </a:r>
+          </a:p>
+        </p:txBody>
+      </p:sp>
+      <p:sp>
+        <p:nvSpPr>
+          <p:cNvPr id="26" name="">
+            <a:extLst xmlns:a="http://schemas.openxmlformats.org/drawingml/2006/main">
+              <a:ext uri="{FF2B5EF4-FFF2-40B4-BE49-F238E27FC236}">
+                <a16:creationId xmlns:a16="http://schemas.microsoft.com/office/drawing/2014/main" id="{BA0BC68D-96C1-4F2D-98AB-99F53D7A89F3}"/>
+              </a:ext>
+            </a:extLst>
+          </p:cNvPr>
+          <p:cNvSpPr>
+            <a:spLocks xmlns:a="http://schemas.openxmlformats.org/drawingml/2006/main" noGrp="1"/>
+          </p:cNvSpPr>
+          <p:nvPr/>
+        </p:nvSpPr>
+        <p:spPr>
+          <a:xfrm xmlns:a="http://schemas.openxmlformats.org/drawingml/2006/main">
+            <a:off x="1200150" y="4219575"/>
+            <a:ext cx="9982200" cy="400050"/>
+          </a:xfrm>
+          <a:prstGeom xmlns:a="http://schemas.openxmlformats.org/drawingml/2006/main" prst="rect">
+            <a:avLst/>
+          </a:prstGeom>
+          <a:noFill xmlns:a="http://schemas.openxmlformats.org/drawingml/2006/main"/>
+          <a:ln xmlns:a="http://schemas.openxmlformats.org/drawingml/2006/main" w="0">
+            <a:noFill/>
+            <a:prstDash val="solid"/>
+          </a:ln>
+        </p:spPr>
+        <p:txBody>
+          <a:bodyPr xmlns:a="http://schemas.openxmlformats.org/drawingml/2006/main"/>
+          <a:lstStyle xmlns:a="http://schemas.openxmlformats.org/drawingml/2006/main"/>
+          <a:p xmlns:a="http://schemas.openxmlformats.org/drawingml/2006/main">
+            <a:pPr>
+              <a:defRPr sz="1125">
+                <a:solidFill>
+                  <a:srgbClr val="667085"/>
+                </a:solidFill>
+              </a:defRPr>
+            </a:pPr>
+            <a:r>
+              <a:rPr sz="1125">
+                <a:solidFill>
+                  <a:srgbClr val="667085"/>
+                </a:solidFill>
+              </a:rPr>
+              <a:t>{{SEC_3_ACTION}}</a:t>
+            </a:r>
+          </a:p>
+        </p:txBody>
+      </p:sp>
+      <p:sp>
+        <p:nvSpPr>
+          <p:cNvPr id="27" name="">
+            <a:extLst xmlns:a="http://schemas.openxmlformats.org/drawingml/2006/main">
+              <a:ext uri="{FF2B5EF4-FFF2-40B4-BE49-F238E27FC236}">
+                <a16:creationId xmlns:a16="http://schemas.microsoft.com/office/drawing/2014/main" id="{27F2788E-701D-42C1-B342-CE471A063B6E}"/>
+              </a:ext>
+            </a:extLst>
+          </p:cNvPr>
+          <p:cNvSpPr>
+            <a:spLocks xmlns:a="http://schemas.openxmlformats.org/drawingml/2006/main" noGrp="1"/>
+          </p:cNvSpPr>
+          <p:nvPr/>
+        </p:nvSpPr>
+        <p:spPr>
+          <a:xfrm xmlns:a="http://schemas.openxmlformats.org/drawingml/2006/main">
+            <a:off x="1200150" y="4686300"/>
+            <a:ext cx="742950" cy="190500"/>
+          </a:xfrm>
+          <a:prstGeom xmlns:a="http://schemas.openxmlformats.org/drawingml/2006/main" prst="rect">
+            <a:avLst/>
+          </a:prstGeom>
+          <a:noFill xmlns:a="http://schemas.openxmlformats.org/drawingml/2006/main"/>
+          <a:ln xmlns:a="http://schemas.openxmlformats.org/drawingml/2006/main" w="0">
+            <a:noFill/>
+            <a:prstDash val="solid"/>
+          </a:ln>
+        </p:spPr>
+        <p:txBody>
+          <a:bodyPr xmlns:a="http://schemas.openxmlformats.org/drawingml/2006/main"/>
+          <a:lstStyle xmlns:a="http://schemas.openxmlformats.org/drawingml/2006/main"/>
+          <a:p xmlns:a="http://schemas.openxmlformats.org/drawingml/2006/main">
+            <a:pPr>
+              <a:defRPr sz="975" b="1">
+                <a:solidFill>
+                  <a:srgbClr val="FF6412"/>
+                </a:solidFill>
+              </a:defRPr>
+            </a:pPr>
+            <a:r>
+              <a:rPr sz="975" b="1">
+                <a:solidFill>
+                  <a:srgbClr val="FF6412"/>
+                </a:solidFill>
+              </a:rPr>
+              <a:t>Решение</a:t>
+            </a:r>
+          </a:p>
+        </p:txBody>
+      </p:sp>
+      <p:sp>
+        <p:nvSpPr>
+          <p:cNvPr id="28" name="">
+            <a:extLst xmlns:a="http://schemas.openxmlformats.org/drawingml/2006/main">
+              <a:ext uri="{FF2B5EF4-FFF2-40B4-BE49-F238E27FC236}">
+                <a16:creationId xmlns:a16="http://schemas.microsoft.com/office/drawing/2014/main" id="{C5FD67A0-746B-4035-9F96-1A7FEFB9D198}"/>
+              </a:ext>
+            </a:extLst>
+          </p:cNvPr>
+          <p:cNvSpPr>
+            <a:spLocks xmlns:a="http://schemas.openxmlformats.org/drawingml/2006/main" noGrp="1"/>
+          </p:cNvSpPr>
+          <p:nvPr/>
+        </p:nvSpPr>
+        <p:spPr>
+          <a:xfrm xmlns:a="http://schemas.openxmlformats.org/drawingml/2006/main">
+            <a:off x="1962150" y="4667250"/>
+            <a:ext cx="3810000" cy="323850"/>
+          </a:xfrm>
+          <a:prstGeom xmlns:a="http://schemas.openxmlformats.org/drawingml/2006/main" prst="rect">
+            <a:avLst/>
+          </a:prstGeom>
+          <a:noFill xmlns:a="http://schemas.openxmlformats.org/drawingml/2006/main"/>
+          <a:ln xmlns:a="http://schemas.openxmlformats.org/drawingml/2006/main" w="0">
+            <a:noFill/>
+            <a:prstDash val="solid"/>
+          </a:ln>
+        </p:spPr>
+        <p:txBody>
+          <a:bodyPr xmlns:a="http://schemas.openxmlformats.org/drawingml/2006/main"/>
+          <a:lstStyle xmlns:a="http://schemas.openxmlformats.org/drawingml/2006/main"/>
+          <a:p xmlns:a="http://schemas.openxmlformats.org/drawingml/2006/main">
+            <a:pPr>
+              <a:defRPr sz="1050" b="1">
+                <a:solidFill>
+                  <a:srgbClr val="161616"/>
+                </a:solidFill>
+              </a:defRPr>
+            </a:pPr>
+            <a:r>
+              <a:rPr sz="1050" b="1">
+                <a:solidFill>
+                  <a:srgbClr val="161616"/>
+                </a:solidFill>
+              </a:rPr>
+              <a:t>{{SEC_3_SOLUTION}}</a:t>
+            </a:r>
+          </a:p>
+        </p:txBody>
+      </p:sp>
+      <p:sp>
+        <p:nvSpPr>
+          <p:cNvPr id="29" name="">
+            <a:extLst xmlns:a="http://schemas.openxmlformats.org/drawingml/2006/main">
+              <a:ext uri="{FF2B5EF4-FFF2-40B4-BE49-F238E27FC236}">
+                <a16:creationId xmlns:a16="http://schemas.microsoft.com/office/drawing/2014/main" id="{EFEABB66-5D66-4FFA-A7E2-3240608FBD1E}"/>
+              </a:ext>
+            </a:extLst>
+          </p:cNvPr>
+          <p:cNvSpPr>
+            <a:spLocks xmlns:a="http://schemas.openxmlformats.org/drawingml/2006/main" noGrp="1"/>
+          </p:cNvSpPr>
+          <p:nvPr/>
+        </p:nvSpPr>
+        <p:spPr>
+          <a:xfrm xmlns:a="http://schemas.openxmlformats.org/drawingml/2006/main">
+            <a:off x="6019800" y="4686300"/>
+            <a:ext cx="1104900" cy="190500"/>
+          </a:xfrm>
+          <a:prstGeom xmlns:a="http://schemas.openxmlformats.org/drawingml/2006/main" prst="rect">
+            <a:avLst/>
+          </a:prstGeom>
+          <a:noFill xmlns:a="http://schemas.openxmlformats.org/drawingml/2006/main"/>
+          <a:ln xmlns:a="http://schemas.openxmlformats.org/drawingml/2006/main" w="0">
+            <a:noFill/>
+            <a:prstDash val="solid"/>
+          </a:ln>
+        </p:spPr>
+        <p:txBody>
+          <a:bodyPr xmlns:a="http://schemas.openxmlformats.org/drawingml/2006/main"/>
+          <a:lstStyle xmlns:a="http://schemas.openxmlformats.org/drawingml/2006/main"/>
+          <a:p xmlns:a="http://schemas.openxmlformats.org/drawingml/2006/main">
+            <a:pPr>
+              <a:defRPr sz="975" b="1">
+                <a:solidFill>
+                  <a:srgbClr val="FF6412"/>
+                </a:solidFill>
+              </a:defRPr>
+            </a:pPr>
+            <a:r>
+              <a:rPr sz="975" b="1">
+                <a:solidFill>
+                  <a:srgbClr val="FF6412"/>
+                </a:solidFill>
+              </a:rPr>
+              <a:t>Производители</a:t>
+            </a:r>
+          </a:p>
+        </p:txBody>
+      </p:sp>
+      <p:sp>
+        <p:nvSpPr>
+          <p:cNvPr id="30" name="">
+            <a:extLst xmlns:a="http://schemas.openxmlformats.org/drawingml/2006/main">
+              <a:ext uri="{FF2B5EF4-FFF2-40B4-BE49-F238E27FC236}">
+                <a16:creationId xmlns:a16="http://schemas.microsoft.com/office/drawing/2014/main" id="{BE596B57-6C60-408E-81AB-C42514EB5D8A}"/>
+              </a:ext>
+            </a:extLst>
+          </p:cNvPr>
+          <p:cNvSpPr>
+            <a:spLocks xmlns:a="http://schemas.openxmlformats.org/drawingml/2006/main" noGrp="1"/>
+          </p:cNvSpPr>
+          <p:nvPr/>
+        </p:nvSpPr>
+        <p:spPr>
+          <a:xfrm xmlns:a="http://schemas.openxmlformats.org/drawingml/2006/main">
+            <a:off x="7181850" y="4667250"/>
+            <a:ext cx="4000500" cy="323850"/>
+          </a:xfrm>
+          <a:prstGeom xmlns:a="http://schemas.openxmlformats.org/drawingml/2006/main" prst="rect">
+            <a:avLst/>
+          </a:prstGeom>
+          <a:noFill xmlns:a="http://schemas.openxmlformats.org/drawingml/2006/main"/>
+          <a:ln xmlns:a="http://schemas.openxmlformats.org/drawingml/2006/main" w="0">
+            <a:noFill/>
+            <a:prstDash val="solid"/>
+          </a:ln>
+        </p:spPr>
+        <p:txBody>
+          <a:bodyPr xmlns:a="http://schemas.openxmlformats.org/drawingml/2006/main"/>
+          <a:lstStyle xmlns:a="http://schemas.openxmlformats.org/drawingml/2006/main"/>
+          <a:p xmlns:a="http://schemas.openxmlformats.org/drawingml/2006/main">
+            <a:pPr>
+              <a:defRPr sz="1050" b="1">
+                <a:solidFill>
+                  <a:srgbClr val="161616"/>
+                </a:solidFill>
+              </a:defRPr>
+            </a:pPr>
+            <a:r>
+              <a:rPr sz="1050" b="1">
+                <a:solidFill>
+                  <a:srgbClr val="161616"/>
+                </a:solidFill>
+              </a:rPr>
+              <a:t>{{SEC_3_VENDORS}}</a:t>
+            </a:r>
+          </a:p>
+        </p:txBody>
+      </p:sp>
+      <p:sp>
+        <p:nvSpPr>
+          <p:cNvPr id="31" name="">
+            <a:extLst xmlns:a="http://schemas.openxmlformats.org/drawingml/2006/main">
+              <a:ext uri="{FF2B5EF4-FFF2-40B4-BE49-F238E27FC236}">
+                <a16:creationId xmlns:a16="http://schemas.microsoft.com/office/drawing/2014/main" id="{C0865F4A-37A9-4B66-8FB7-3E994A211682}"/>
+              </a:ext>
+            </a:extLst>
+          </p:cNvPr>
+          <p:cNvSpPr>
+            <a:spLocks xmlns:a="http://schemas.openxmlformats.org/drawingml/2006/main" noGrp="1"/>
+          </p:cNvSpPr>
+          <p:nvPr/>
+        </p:nvSpPr>
+        <p:spPr>
+          <a:xfrm xmlns:a="http://schemas.openxmlformats.org/drawingml/2006/main">
+            <a:off x="1200150" y="5067300"/>
+            <a:ext cx="9982200" cy="9525"/>
           </a:xfrm>
           <a:prstGeom xmlns:a="http://schemas.openxmlformats.org/drawingml/2006/main" prst="rect">
             <a:avLst/>
@@ -6615,21 +8498,21 @@
       </p:sp>
       <p:sp>
         <p:nvSpPr>
-          <p:cNvPr id="17" name="">
-            <a:extLst xmlns:a="http://schemas.openxmlformats.org/drawingml/2006/main">
-              <a:ext uri="{FF2B5EF4-FFF2-40B4-BE49-F238E27FC236}">
-                <a16:creationId xmlns:a16="http://schemas.microsoft.com/office/drawing/2014/main" id="{428F4D80-E5ED-44C6-8A17-A075A359CB6A}"/>
-              </a:ext>
-            </a:extLst>
-          </p:cNvPr>
-          <p:cNvSpPr>
-            <a:spLocks xmlns:a="http://schemas.openxmlformats.org/drawingml/2006/main" noGrp="1"/>
-          </p:cNvSpPr>
-          <p:nvPr/>
-        </p:nvSpPr>
-        <p:spPr>
-          <a:xfrm xmlns:a="http://schemas.openxmlformats.org/drawingml/2006/main">
-            <a:off x="609600" y="5124450"/>
+          <p:cNvPr id="32" name="">
+            <a:extLst xmlns:a="http://schemas.openxmlformats.org/drawingml/2006/main">
+              <a:ext uri="{FF2B5EF4-FFF2-40B4-BE49-F238E27FC236}">
+                <a16:creationId xmlns:a16="http://schemas.microsoft.com/office/drawing/2014/main" id="{41431341-F1B4-4440-9407-9B9F08B118F7}"/>
+              </a:ext>
+            </a:extLst>
+          </p:cNvPr>
+          <p:cNvSpPr>
+            <a:spLocks xmlns:a="http://schemas.openxmlformats.org/drawingml/2006/main" noGrp="1"/>
+          </p:cNvSpPr>
+          <p:nvPr/>
+        </p:nvSpPr>
+        <p:spPr>
+          <a:xfrm xmlns:a="http://schemas.openxmlformats.org/drawingml/2006/main">
+            <a:off x="609600" y="5238750"/>
             <a:ext cx="457200" cy="266700"/>
           </a:xfrm>
           <a:prstGeom xmlns:a="http://schemas.openxmlformats.org/drawingml/2006/main" prst="rect">
@@ -6646,14 +8529,14 @@
           <a:lstStyle xmlns:a="http://schemas.openxmlformats.org/drawingml/2006/main"/>
           <a:p xmlns:a="http://schemas.openxmlformats.org/drawingml/2006/main">
             <a:pPr>
-              <a:defRPr sz="1275" b="1">
+              <a:defRPr sz="1200" b="1">
                 <a:solidFill>
                   <a:srgbClr val="FF6412"/>
                 </a:solidFill>
               </a:defRPr>
             </a:pPr>
             <a:r>
-              <a:rPr sz="1275" b="1">
+              <a:rPr sz="1200" b="1">
                 <a:solidFill>
                   <a:srgbClr val="FF6412"/>
                 </a:solidFill>
@@ -6665,22 +8548,22 @@
       </p:sp>
       <p:sp>
         <p:nvSpPr>
-          <p:cNvPr id="18" name="">
-            <a:extLst xmlns:a="http://schemas.openxmlformats.org/drawingml/2006/main">
-              <a:ext uri="{FF2B5EF4-FFF2-40B4-BE49-F238E27FC236}">
-                <a16:creationId xmlns:a16="http://schemas.microsoft.com/office/drawing/2014/main" id="{D6AC462C-7131-44A9-B3FA-70050AF15C84}"/>
-              </a:ext>
-            </a:extLst>
-          </p:cNvPr>
-          <p:cNvSpPr>
-            <a:spLocks xmlns:a="http://schemas.openxmlformats.org/drawingml/2006/main" noGrp="1"/>
-          </p:cNvSpPr>
-          <p:nvPr/>
-        </p:nvSpPr>
-        <p:spPr>
-          <a:xfrm xmlns:a="http://schemas.openxmlformats.org/drawingml/2006/main">
-            <a:off x="1200150" y="5067300"/>
-            <a:ext cx="10048875" cy="1028700"/>
+          <p:cNvPr id="33" name="">
+            <a:extLst xmlns:a="http://schemas.openxmlformats.org/drawingml/2006/main">
+              <a:ext uri="{FF2B5EF4-FFF2-40B4-BE49-F238E27FC236}">
+                <a16:creationId xmlns:a16="http://schemas.microsoft.com/office/drawing/2014/main" id="{14CF72D3-61E0-4EC1-8498-BAC9C7B2DAF4}"/>
+              </a:ext>
+            </a:extLst>
+          </p:cNvPr>
+          <p:cNvSpPr>
+            <a:spLocks xmlns:a="http://schemas.openxmlformats.org/drawingml/2006/main" noGrp="1"/>
+          </p:cNvSpPr>
+          <p:nvPr/>
+        </p:nvSpPr>
+        <p:spPr>
+          <a:xfrm xmlns:a="http://schemas.openxmlformats.org/drawingml/2006/main">
+            <a:off x="1200150" y="5181600"/>
+            <a:ext cx="9982200" cy="266700"/>
           </a:xfrm>
           <a:prstGeom xmlns:a="http://schemas.openxmlformats.org/drawingml/2006/main" prst="rect">
             <a:avLst/>
@@ -6696,19 +8579,269 @@
           <a:lstStyle xmlns:a="http://schemas.openxmlformats.org/drawingml/2006/main"/>
           <a:p xmlns:a="http://schemas.openxmlformats.org/drawingml/2006/main">
             <a:pPr>
-              <a:defRPr sz="1350">
+              <a:defRPr sz="1425" b="1">
                 <a:solidFill>
                   <a:srgbClr val="161616"/>
                 </a:solidFill>
               </a:defRPr>
             </a:pPr>
             <a:r>
-              <a:rPr sz="1350">
+              <a:rPr sz="1425" b="1">
                 <a:solidFill>
                   <a:srgbClr val="161616"/>
                 </a:solidFill>
               </a:rPr>
-              <a:t>{{SEC_4}}</a:t>
+              <a:t>{{SEC_4_TITLE}}</a:t>
+            </a:r>
+          </a:p>
+        </p:txBody>
+      </p:sp>
+      <p:sp>
+        <p:nvSpPr>
+          <p:cNvPr id="34" name="">
+            <a:extLst xmlns:a="http://schemas.openxmlformats.org/drawingml/2006/main">
+              <a:ext uri="{FF2B5EF4-FFF2-40B4-BE49-F238E27FC236}">
+                <a16:creationId xmlns:a16="http://schemas.microsoft.com/office/drawing/2014/main" id="{7BBAB905-31C7-4E7C-B108-008283175B85}"/>
+              </a:ext>
+            </a:extLst>
+          </p:cNvPr>
+          <p:cNvSpPr>
+            <a:spLocks xmlns:a="http://schemas.openxmlformats.org/drawingml/2006/main" noGrp="1"/>
+          </p:cNvSpPr>
+          <p:nvPr/>
+        </p:nvSpPr>
+        <p:spPr>
+          <a:xfrm xmlns:a="http://schemas.openxmlformats.org/drawingml/2006/main">
+            <a:off x="1200150" y="5476875"/>
+            <a:ext cx="9982200" cy="400050"/>
+          </a:xfrm>
+          <a:prstGeom xmlns:a="http://schemas.openxmlformats.org/drawingml/2006/main" prst="rect">
+            <a:avLst/>
+          </a:prstGeom>
+          <a:noFill xmlns:a="http://schemas.openxmlformats.org/drawingml/2006/main"/>
+          <a:ln xmlns:a="http://schemas.openxmlformats.org/drawingml/2006/main" w="0">
+            <a:noFill/>
+            <a:prstDash val="solid"/>
+          </a:ln>
+        </p:spPr>
+        <p:txBody>
+          <a:bodyPr xmlns:a="http://schemas.openxmlformats.org/drawingml/2006/main"/>
+          <a:lstStyle xmlns:a="http://schemas.openxmlformats.org/drawingml/2006/main"/>
+          <a:p xmlns:a="http://schemas.openxmlformats.org/drawingml/2006/main">
+            <a:pPr>
+              <a:defRPr sz="1125">
+                <a:solidFill>
+                  <a:srgbClr val="667085"/>
+                </a:solidFill>
+              </a:defRPr>
+            </a:pPr>
+            <a:r>
+              <a:rPr sz="1125">
+                <a:solidFill>
+                  <a:srgbClr val="667085"/>
+                </a:solidFill>
+              </a:rPr>
+              <a:t>{{SEC_4_ACTION}}</a:t>
+            </a:r>
+          </a:p>
+        </p:txBody>
+      </p:sp>
+      <p:sp>
+        <p:nvSpPr>
+          <p:cNvPr id="35" name="">
+            <a:extLst xmlns:a="http://schemas.openxmlformats.org/drawingml/2006/main">
+              <a:ext uri="{FF2B5EF4-FFF2-40B4-BE49-F238E27FC236}">
+                <a16:creationId xmlns:a16="http://schemas.microsoft.com/office/drawing/2014/main" id="{7ACE78B0-1C8D-4B47-92FF-FF51C4A57A9D}"/>
+              </a:ext>
+            </a:extLst>
+          </p:cNvPr>
+          <p:cNvSpPr>
+            <a:spLocks xmlns:a="http://schemas.openxmlformats.org/drawingml/2006/main" noGrp="1"/>
+          </p:cNvSpPr>
+          <p:nvPr/>
+        </p:nvSpPr>
+        <p:spPr>
+          <a:xfrm xmlns:a="http://schemas.openxmlformats.org/drawingml/2006/main">
+            <a:off x="1200150" y="5943600"/>
+            <a:ext cx="742950" cy="190500"/>
+          </a:xfrm>
+          <a:prstGeom xmlns:a="http://schemas.openxmlformats.org/drawingml/2006/main" prst="rect">
+            <a:avLst/>
+          </a:prstGeom>
+          <a:noFill xmlns:a="http://schemas.openxmlformats.org/drawingml/2006/main"/>
+          <a:ln xmlns:a="http://schemas.openxmlformats.org/drawingml/2006/main" w="0">
+            <a:noFill/>
+            <a:prstDash val="solid"/>
+          </a:ln>
+        </p:spPr>
+        <p:txBody>
+          <a:bodyPr xmlns:a="http://schemas.openxmlformats.org/drawingml/2006/main"/>
+          <a:lstStyle xmlns:a="http://schemas.openxmlformats.org/drawingml/2006/main"/>
+          <a:p xmlns:a="http://schemas.openxmlformats.org/drawingml/2006/main">
+            <a:pPr>
+              <a:defRPr sz="975" b="1">
+                <a:solidFill>
+                  <a:srgbClr val="FF6412"/>
+                </a:solidFill>
+              </a:defRPr>
+            </a:pPr>
+            <a:r>
+              <a:rPr sz="975" b="1">
+                <a:solidFill>
+                  <a:srgbClr val="FF6412"/>
+                </a:solidFill>
+              </a:rPr>
+              <a:t>Решение</a:t>
+            </a:r>
+          </a:p>
+        </p:txBody>
+      </p:sp>
+      <p:sp>
+        <p:nvSpPr>
+          <p:cNvPr id="36" name="">
+            <a:extLst xmlns:a="http://schemas.openxmlformats.org/drawingml/2006/main">
+              <a:ext uri="{FF2B5EF4-FFF2-40B4-BE49-F238E27FC236}">
+                <a16:creationId xmlns:a16="http://schemas.microsoft.com/office/drawing/2014/main" id="{BDB47B3B-6676-4E8A-A7C7-B24EAFC74EC2}"/>
+              </a:ext>
+            </a:extLst>
+          </p:cNvPr>
+          <p:cNvSpPr>
+            <a:spLocks xmlns:a="http://schemas.openxmlformats.org/drawingml/2006/main" noGrp="1"/>
+          </p:cNvSpPr>
+          <p:nvPr/>
+        </p:nvSpPr>
+        <p:spPr>
+          <a:xfrm xmlns:a="http://schemas.openxmlformats.org/drawingml/2006/main">
+            <a:off x="1962150" y="5924550"/>
+            <a:ext cx="3810000" cy="323850"/>
+          </a:xfrm>
+          <a:prstGeom xmlns:a="http://schemas.openxmlformats.org/drawingml/2006/main" prst="rect">
+            <a:avLst/>
+          </a:prstGeom>
+          <a:noFill xmlns:a="http://schemas.openxmlformats.org/drawingml/2006/main"/>
+          <a:ln xmlns:a="http://schemas.openxmlformats.org/drawingml/2006/main" w="0">
+            <a:noFill/>
+            <a:prstDash val="solid"/>
+          </a:ln>
+        </p:spPr>
+        <p:txBody>
+          <a:bodyPr xmlns:a="http://schemas.openxmlformats.org/drawingml/2006/main"/>
+          <a:lstStyle xmlns:a="http://schemas.openxmlformats.org/drawingml/2006/main"/>
+          <a:p xmlns:a="http://schemas.openxmlformats.org/drawingml/2006/main">
+            <a:pPr>
+              <a:defRPr sz="1050" b="1">
+                <a:solidFill>
+                  <a:srgbClr val="161616"/>
+                </a:solidFill>
+              </a:defRPr>
+            </a:pPr>
+            <a:r>
+              <a:rPr sz="1050" b="1">
+                <a:solidFill>
+                  <a:srgbClr val="161616"/>
+                </a:solidFill>
+              </a:rPr>
+              <a:t>{{SEC_4_SOLUTION}}</a:t>
+            </a:r>
+          </a:p>
+        </p:txBody>
+      </p:sp>
+      <p:sp>
+        <p:nvSpPr>
+          <p:cNvPr id="37" name="">
+            <a:extLst xmlns:a="http://schemas.openxmlformats.org/drawingml/2006/main">
+              <a:ext uri="{FF2B5EF4-FFF2-40B4-BE49-F238E27FC236}">
+                <a16:creationId xmlns:a16="http://schemas.microsoft.com/office/drawing/2014/main" id="{6F2109F6-B35B-4309-996A-762EAA525E9D}"/>
+              </a:ext>
+            </a:extLst>
+          </p:cNvPr>
+          <p:cNvSpPr>
+            <a:spLocks xmlns:a="http://schemas.openxmlformats.org/drawingml/2006/main" noGrp="1"/>
+          </p:cNvSpPr>
+          <p:nvPr/>
+        </p:nvSpPr>
+        <p:spPr>
+          <a:xfrm xmlns:a="http://schemas.openxmlformats.org/drawingml/2006/main">
+            <a:off x="6019800" y="5943600"/>
+            <a:ext cx="1104900" cy="190500"/>
+          </a:xfrm>
+          <a:prstGeom xmlns:a="http://schemas.openxmlformats.org/drawingml/2006/main" prst="rect">
+            <a:avLst/>
+          </a:prstGeom>
+          <a:noFill xmlns:a="http://schemas.openxmlformats.org/drawingml/2006/main"/>
+          <a:ln xmlns:a="http://schemas.openxmlformats.org/drawingml/2006/main" w="0">
+            <a:noFill/>
+            <a:prstDash val="solid"/>
+          </a:ln>
+        </p:spPr>
+        <p:txBody>
+          <a:bodyPr xmlns:a="http://schemas.openxmlformats.org/drawingml/2006/main"/>
+          <a:lstStyle xmlns:a="http://schemas.openxmlformats.org/drawingml/2006/main"/>
+          <a:p xmlns:a="http://schemas.openxmlformats.org/drawingml/2006/main">
+            <a:pPr>
+              <a:defRPr sz="975" b="1">
+                <a:solidFill>
+                  <a:srgbClr val="FF6412"/>
+                </a:solidFill>
+              </a:defRPr>
+            </a:pPr>
+            <a:r>
+              <a:rPr sz="975" b="1">
+                <a:solidFill>
+                  <a:srgbClr val="FF6412"/>
+                </a:solidFill>
+              </a:rPr>
+              <a:t>Производители</a:t>
+            </a:r>
+          </a:p>
+        </p:txBody>
+      </p:sp>
+      <p:sp>
+        <p:nvSpPr>
+          <p:cNvPr id="38" name="">
+            <a:extLst xmlns:a="http://schemas.openxmlformats.org/drawingml/2006/main">
+              <a:ext uri="{FF2B5EF4-FFF2-40B4-BE49-F238E27FC236}">
+                <a16:creationId xmlns:a16="http://schemas.microsoft.com/office/drawing/2014/main" id="{A4D0672E-8EF5-4853-95BA-684854FD548A}"/>
+              </a:ext>
+            </a:extLst>
+          </p:cNvPr>
+          <p:cNvSpPr>
+            <a:spLocks xmlns:a="http://schemas.openxmlformats.org/drawingml/2006/main" noGrp="1"/>
+          </p:cNvSpPr>
+          <p:nvPr/>
+        </p:nvSpPr>
+        <p:spPr>
+          <a:xfrm xmlns:a="http://schemas.openxmlformats.org/drawingml/2006/main">
+            <a:off x="7181850" y="5924550"/>
+            <a:ext cx="4000500" cy="323850"/>
+          </a:xfrm>
+          <a:prstGeom xmlns:a="http://schemas.openxmlformats.org/drawingml/2006/main" prst="rect">
+            <a:avLst/>
+          </a:prstGeom>
+          <a:noFill xmlns:a="http://schemas.openxmlformats.org/drawingml/2006/main"/>
+          <a:ln xmlns:a="http://schemas.openxmlformats.org/drawingml/2006/main" w="0">
+            <a:noFill/>
+            <a:prstDash val="solid"/>
+          </a:ln>
+        </p:spPr>
+        <p:txBody>
+          <a:bodyPr xmlns:a="http://schemas.openxmlformats.org/drawingml/2006/main"/>
+          <a:lstStyle xmlns:a="http://schemas.openxmlformats.org/drawingml/2006/main"/>
+          <a:p xmlns:a="http://schemas.openxmlformats.org/drawingml/2006/main">
+            <a:pPr>
+              <a:defRPr sz="1050" b="1">
+                <a:solidFill>
+                  <a:srgbClr val="161616"/>
+                </a:solidFill>
+              </a:defRPr>
+            </a:pPr>
+            <a:r>
+              <a:rPr sz="1050" b="1">
+                <a:solidFill>
+                  <a:srgbClr val="161616"/>
+                </a:solidFill>
+              </a:rPr>
+              <a:t>{{SEC_4_VENDORS}}</a:t>
             </a:r>
           </a:p>
         </p:txBody>
@@ -6716,7 +8849,7 @@
     </p:spTree>
     <p:extLst>
       <p:ext uri="{BB962C8B-B14F-4D97-AF65-F5344CB8AC3E}">
-        <p14:creationId xmlns:p14="http://schemas.microsoft.com/office/powerpoint/2010/main" val="272360377"/>
+        <p14:creationId xmlns:p14="http://schemas.microsoft.com/office/powerpoint/2010/main" val="579356930"/>
       </p:ext>
     </p:extLst>
   </p:cSld>
@@ -6747,7 +8880,7 @@
           <p:cNvPr id="1" name="">
             <a:extLst xmlns:a="http://schemas.openxmlformats.org/drawingml/2006/main">
               <a:ext uri="{FF2B5EF4-FFF2-40B4-BE49-F238E27FC236}">
-                <a16:creationId xmlns:a16="http://schemas.microsoft.com/office/drawing/2014/main" id="{D75CE6E4-3E75-48CC-B769-FD7967AE6043}"/>
+                <a16:creationId xmlns:a16="http://schemas.microsoft.com/office/drawing/2014/main" id="{F037E29F-2C61-463A-BD39-44A122B88AC7}"/>
               </a:ext>
             </a:extLst>
           </p:cNvPr>
@@ -6782,7 +8915,7 @@
           <p:nvPr/>
         </p:nvPicPr>
         <p:blipFill>
-          <a:blip xmlns:r="http://schemas.openxmlformats.org/officeDocument/2006/relationships" xmlns:a="http://schemas.openxmlformats.org/drawingml/2006/main" r:embed="R8b8d7ebe6faa467c"/>
+          <a:blip xmlns:r="http://schemas.openxmlformats.org/officeDocument/2006/relationships" xmlns:a="http://schemas.openxmlformats.org/drawingml/2006/main" r:embed="R0af8997e22fa4aee"/>
           <a:stretch xmlns:a="http://schemas.openxmlformats.org/drawingml/2006/main"/>
         </p:blipFill>
         <p:spPr>
@@ -6800,7 +8933,7 @@
           <p:cNvPr id="3" name="">
             <a:extLst xmlns:a="http://schemas.openxmlformats.org/drawingml/2006/main">
               <a:ext uri="{FF2B5EF4-FFF2-40B4-BE49-F238E27FC236}">
-                <a16:creationId xmlns:a16="http://schemas.microsoft.com/office/drawing/2014/main" id="{7C6B7327-56A1-4024-93CB-9C9F50C05888}"/>
+                <a16:creationId xmlns:a16="http://schemas.microsoft.com/office/drawing/2014/main" id="{A9358CA5-0265-4D9B-BB90-4713A53E29EF}"/>
               </a:ext>
             </a:extLst>
           </p:cNvPr>
@@ -6850,7 +8983,7 @@
           <p:cNvPr id="4" name="">
             <a:extLst xmlns:a="http://schemas.openxmlformats.org/drawingml/2006/main">
               <a:ext uri="{FF2B5EF4-FFF2-40B4-BE49-F238E27FC236}">
-                <a16:creationId xmlns:a16="http://schemas.microsoft.com/office/drawing/2014/main" id="{44EA3421-BAE1-465F-B128-6F49EEB4A0A6}"/>
+                <a16:creationId xmlns:a16="http://schemas.microsoft.com/office/drawing/2014/main" id="{C0644DDC-8239-4006-B875-A6E9BDC70919}"/>
               </a:ext>
             </a:extLst>
           </p:cNvPr>
@@ -6883,7 +9016,7 @@
           <p:cNvPr id="5" name="">
             <a:extLst xmlns:a="http://schemas.openxmlformats.org/drawingml/2006/main">
               <a:ext uri="{FF2B5EF4-FFF2-40B4-BE49-F238E27FC236}">
-                <a16:creationId xmlns:a16="http://schemas.microsoft.com/office/drawing/2014/main" id="{FCA30435-7C9D-4437-B696-1CD4677B2A01}"/>
+                <a16:creationId xmlns:a16="http://schemas.microsoft.com/office/drawing/2014/main" id="{E9A2F387-AF61-4B81-A021-1C2E6128E798}"/>
               </a:ext>
             </a:extLst>
           </p:cNvPr>
@@ -6914,7 +9047,7 @@
           <p:cNvPr id="6" name="">
             <a:extLst xmlns:a="http://schemas.openxmlformats.org/drawingml/2006/main">
               <a:ext uri="{FF2B5EF4-FFF2-40B4-BE49-F238E27FC236}">
-                <a16:creationId xmlns:a16="http://schemas.microsoft.com/office/drawing/2014/main" id="{E6AF5F36-1A60-4F5B-A453-F536AC0EC917}"/>
+                <a16:creationId xmlns:a16="http://schemas.microsoft.com/office/drawing/2014/main" id="{47694219-A1E1-4025-9B42-745265D7A151}"/>
               </a:ext>
             </a:extLst>
           </p:cNvPr>
@@ -6964,7 +9097,7 @@
           <p:cNvPr id="7" name="">
             <a:extLst xmlns:a="http://schemas.openxmlformats.org/drawingml/2006/main">
               <a:ext uri="{FF2B5EF4-FFF2-40B4-BE49-F238E27FC236}">
-                <a16:creationId xmlns:a16="http://schemas.microsoft.com/office/drawing/2014/main" id="{779A0727-7E72-40CF-9B95-361D3378F304}"/>
+                <a16:creationId xmlns:a16="http://schemas.microsoft.com/office/drawing/2014/main" id="{19F80CD0-3630-407C-A51B-2A670EA72FA6}"/>
               </a:ext>
             </a:extLst>
           </p:cNvPr>
@@ -7014,7 +9147,7 @@
           <p:cNvPr id="8" name="">
             <a:extLst xmlns:a="http://schemas.openxmlformats.org/drawingml/2006/main">
               <a:ext uri="{FF2B5EF4-FFF2-40B4-BE49-F238E27FC236}">
-                <a16:creationId xmlns:a16="http://schemas.microsoft.com/office/drawing/2014/main" id="{AF8B153C-5E07-4A44-829F-30AF4CE0AE6F}"/>
+                <a16:creationId xmlns:a16="http://schemas.microsoft.com/office/drawing/2014/main" id="{3AA4F72D-13B4-429C-8FE3-5D1FCF4E7B0A}"/>
               </a:ext>
             </a:extLst>
           </p:cNvPr>
@@ -7049,7 +9182,7 @@
           <p:cNvPr id="9" name="">
             <a:extLst xmlns:a="http://schemas.openxmlformats.org/drawingml/2006/main">
               <a:ext uri="{FF2B5EF4-FFF2-40B4-BE49-F238E27FC236}">
-                <a16:creationId xmlns:a16="http://schemas.microsoft.com/office/drawing/2014/main" id="{AECFAADC-530F-43F4-A8A1-57E488A87302}"/>
+                <a16:creationId xmlns:a16="http://schemas.microsoft.com/office/drawing/2014/main" id="{7CF9B0F5-CD2D-4E76-9BAE-87B450D564A0}"/>
               </a:ext>
             </a:extLst>
           </p:cNvPr>
@@ -7082,7 +9215,7 @@
           <p:cNvPr id="10" name="">
             <a:extLst xmlns:a="http://schemas.openxmlformats.org/drawingml/2006/main">
               <a:ext uri="{FF2B5EF4-FFF2-40B4-BE49-F238E27FC236}">
-                <a16:creationId xmlns:a16="http://schemas.microsoft.com/office/drawing/2014/main" id="{B7CBC586-980F-4473-8843-25D882C067A7}"/>
+                <a16:creationId xmlns:a16="http://schemas.microsoft.com/office/drawing/2014/main" id="{0C541B2C-9CD6-4393-AE3C-67ED64DA87B2}"/>
               </a:ext>
             </a:extLst>
           </p:cNvPr>
@@ -7132,7 +9265,7 @@
           <p:cNvPr id="11" name="">
             <a:extLst xmlns:a="http://schemas.openxmlformats.org/drawingml/2006/main">
               <a:ext uri="{FF2B5EF4-FFF2-40B4-BE49-F238E27FC236}">
-                <a16:creationId xmlns:a16="http://schemas.microsoft.com/office/drawing/2014/main" id="{252EC6AB-9AA7-4E90-A706-A6B2794B8597}"/>
+                <a16:creationId xmlns:a16="http://schemas.microsoft.com/office/drawing/2014/main" id="{C71B10A8-96D5-4E60-A4C3-F44CBC2B12DD}"/>
               </a:ext>
             </a:extLst>
           </p:cNvPr>
@@ -7182,7 +9315,7 @@
           <p:cNvPr id="12" name="">
             <a:extLst xmlns:a="http://schemas.openxmlformats.org/drawingml/2006/main">
               <a:ext uri="{FF2B5EF4-FFF2-40B4-BE49-F238E27FC236}">
-                <a16:creationId xmlns:a16="http://schemas.microsoft.com/office/drawing/2014/main" id="{3C1121E5-243F-453E-BAFC-3940C1CA00B8}"/>
+                <a16:creationId xmlns:a16="http://schemas.microsoft.com/office/drawing/2014/main" id="{7EE9BF2E-46A4-4176-A40B-95FD71DDF0A7}"/>
               </a:ext>
             </a:extLst>
           </p:cNvPr>
@@ -7232,7 +9365,7 @@
           <p:cNvPr id="13" name="">
             <a:extLst xmlns:a="http://schemas.openxmlformats.org/drawingml/2006/main">
               <a:ext uri="{FF2B5EF4-FFF2-40B4-BE49-F238E27FC236}">
-                <a16:creationId xmlns:a16="http://schemas.microsoft.com/office/drawing/2014/main" id="{82419C15-7524-43F3-8AAD-24231E826255}"/>
+                <a16:creationId xmlns:a16="http://schemas.microsoft.com/office/drawing/2014/main" id="{A2C76B52-C369-4F75-AA0B-2486F3BCD0E7}"/>
               </a:ext>
             </a:extLst>
           </p:cNvPr>
@@ -7263,7 +9396,7 @@
           <p:cNvPr id="14" name="">
             <a:extLst xmlns:a="http://schemas.openxmlformats.org/drawingml/2006/main">
               <a:ext uri="{FF2B5EF4-FFF2-40B4-BE49-F238E27FC236}">
-                <a16:creationId xmlns:a16="http://schemas.microsoft.com/office/drawing/2014/main" id="{9FE53DFA-6C41-4589-AE02-26193CBECFC7}"/>
+                <a16:creationId xmlns:a16="http://schemas.microsoft.com/office/drawing/2014/main" id="{A90A5628-FF65-4040-86F8-903AD26E0E80}"/>
               </a:ext>
             </a:extLst>
           </p:cNvPr>
@@ -7313,7 +9446,7 @@
           <p:cNvPr id="15" name="">
             <a:extLst xmlns:a="http://schemas.openxmlformats.org/drawingml/2006/main">
               <a:ext uri="{FF2B5EF4-FFF2-40B4-BE49-F238E27FC236}">
-                <a16:creationId xmlns:a16="http://schemas.microsoft.com/office/drawing/2014/main" id="{B7675053-EB95-4402-ABA6-B231F3BA4C38}"/>
+                <a16:creationId xmlns:a16="http://schemas.microsoft.com/office/drawing/2014/main" id="{6261F001-B63F-4FB2-8631-C482637E4733}"/>
               </a:ext>
             </a:extLst>
           </p:cNvPr>
@@ -7363,7 +9496,7 @@
           <p:cNvPr id="16" name="">
             <a:extLst xmlns:a="http://schemas.openxmlformats.org/drawingml/2006/main">
               <a:ext uri="{FF2B5EF4-FFF2-40B4-BE49-F238E27FC236}">
-                <a16:creationId xmlns:a16="http://schemas.microsoft.com/office/drawing/2014/main" id="{5CAFF7FA-E8AB-433F-939E-03C46717C414}"/>
+                <a16:creationId xmlns:a16="http://schemas.microsoft.com/office/drawing/2014/main" id="{F0F5F9C4-FE11-401D-9DFD-3364283F04E3}"/>
               </a:ext>
             </a:extLst>
           </p:cNvPr>
@@ -7398,7 +9531,7 @@
           <p:cNvPr id="17" name="">
             <a:extLst xmlns:a="http://schemas.openxmlformats.org/drawingml/2006/main">
               <a:ext uri="{FF2B5EF4-FFF2-40B4-BE49-F238E27FC236}">
-                <a16:creationId xmlns:a16="http://schemas.microsoft.com/office/drawing/2014/main" id="{B6D3C5F5-BF0A-4DB7-83A7-A4EA9ACCB951}"/>
+                <a16:creationId xmlns:a16="http://schemas.microsoft.com/office/drawing/2014/main" id="{A404E6B2-B936-4409-9630-EAE5A7B03259}"/>
               </a:ext>
             </a:extLst>
           </p:cNvPr>
@@ -7431,7 +9564,7 @@
           <p:cNvPr id="18" name="">
             <a:extLst xmlns:a="http://schemas.openxmlformats.org/drawingml/2006/main">
               <a:ext uri="{FF2B5EF4-FFF2-40B4-BE49-F238E27FC236}">
-                <a16:creationId xmlns:a16="http://schemas.microsoft.com/office/drawing/2014/main" id="{2DE5D9C7-5555-426F-9C59-BCF63B8014BB}"/>
+                <a16:creationId xmlns:a16="http://schemas.microsoft.com/office/drawing/2014/main" id="{2AC59F59-747E-4DB4-8779-F3F76AB5CD2E}"/>
               </a:ext>
             </a:extLst>
           </p:cNvPr>
@@ -7481,7 +9614,7 @@
           <p:cNvPr id="19" name="">
             <a:extLst xmlns:a="http://schemas.openxmlformats.org/drawingml/2006/main">
               <a:ext uri="{FF2B5EF4-FFF2-40B4-BE49-F238E27FC236}">
-                <a16:creationId xmlns:a16="http://schemas.microsoft.com/office/drawing/2014/main" id="{E6290A87-7CCB-49E5-ADB7-F7F3A3062D20}"/>
+                <a16:creationId xmlns:a16="http://schemas.microsoft.com/office/drawing/2014/main" id="{617E077B-0909-4526-9B55-6CA568FDE415}"/>
               </a:ext>
             </a:extLst>
           </p:cNvPr>
@@ -7531,7 +9664,7 @@
           <p:cNvPr id="20" name="">
             <a:extLst xmlns:a="http://schemas.openxmlformats.org/drawingml/2006/main">
               <a:ext uri="{FF2B5EF4-FFF2-40B4-BE49-F238E27FC236}">
-                <a16:creationId xmlns:a16="http://schemas.microsoft.com/office/drawing/2014/main" id="{F722E1BF-9EA4-4D1E-982D-CBEA7D7AA5F8}"/>
+                <a16:creationId xmlns:a16="http://schemas.microsoft.com/office/drawing/2014/main" id="{DB5C822B-E69B-4819-A87D-EF97D568EE7F}"/>
               </a:ext>
             </a:extLst>
           </p:cNvPr>
@@ -7581,7 +9714,7 @@
           <p:cNvPr id="21" name="">
             <a:extLst xmlns:a="http://schemas.openxmlformats.org/drawingml/2006/main">
               <a:ext uri="{FF2B5EF4-FFF2-40B4-BE49-F238E27FC236}">
-                <a16:creationId xmlns:a16="http://schemas.microsoft.com/office/drawing/2014/main" id="{52B1E4F9-BBA4-4269-B5BD-95D69C260581}"/>
+                <a16:creationId xmlns:a16="http://schemas.microsoft.com/office/drawing/2014/main" id="{907AB9C1-3329-40E7-8801-C800B4B41611}"/>
               </a:ext>
             </a:extLst>
           </p:cNvPr>
@@ -7612,7 +9745,7 @@
           <p:cNvPr id="22" name="">
             <a:extLst xmlns:a="http://schemas.openxmlformats.org/drawingml/2006/main">
               <a:ext uri="{FF2B5EF4-FFF2-40B4-BE49-F238E27FC236}">
-                <a16:creationId xmlns:a16="http://schemas.microsoft.com/office/drawing/2014/main" id="{903979B0-E786-4E3A-A84E-C6082B4BE9DF}"/>
+                <a16:creationId xmlns:a16="http://schemas.microsoft.com/office/drawing/2014/main" id="{716F6664-DAF3-4475-89AE-3BD2CF888436}"/>
               </a:ext>
             </a:extLst>
           </p:cNvPr>
@@ -7662,7 +9795,7 @@
           <p:cNvPr id="23" name="">
             <a:extLst xmlns:a="http://schemas.openxmlformats.org/drawingml/2006/main">
               <a:ext uri="{FF2B5EF4-FFF2-40B4-BE49-F238E27FC236}">
-                <a16:creationId xmlns:a16="http://schemas.microsoft.com/office/drawing/2014/main" id="{108E0661-01A9-44F9-B5FB-C26A2916F69E}"/>
+                <a16:creationId xmlns:a16="http://schemas.microsoft.com/office/drawing/2014/main" id="{5B47F24C-8C9F-40E6-8E5A-C5E6BA4C1238}"/>
               </a:ext>
             </a:extLst>
           </p:cNvPr>
@@ -7712,7 +9845,7 @@
           <p:cNvPr id="24" name="">
             <a:extLst xmlns:a="http://schemas.openxmlformats.org/drawingml/2006/main">
               <a:ext uri="{FF2B5EF4-FFF2-40B4-BE49-F238E27FC236}">
-                <a16:creationId xmlns:a16="http://schemas.microsoft.com/office/drawing/2014/main" id="{C42D31BD-3875-414C-B462-F50E34488089}"/>
+                <a16:creationId xmlns:a16="http://schemas.microsoft.com/office/drawing/2014/main" id="{4D8818F5-7811-4848-BDAB-6B155C5103EB}"/>
               </a:ext>
             </a:extLst>
           </p:cNvPr>
@@ -7747,7 +9880,7 @@
           <p:cNvPr id="25" name="">
             <a:extLst xmlns:a="http://schemas.openxmlformats.org/drawingml/2006/main">
               <a:ext uri="{FF2B5EF4-FFF2-40B4-BE49-F238E27FC236}">
-                <a16:creationId xmlns:a16="http://schemas.microsoft.com/office/drawing/2014/main" id="{8D6A8C7D-8969-4669-ABA2-768ED76BD1BF}"/>
+                <a16:creationId xmlns:a16="http://schemas.microsoft.com/office/drawing/2014/main" id="{EE1D6B65-5BFC-4171-AF56-20874D76E971}"/>
               </a:ext>
             </a:extLst>
           </p:cNvPr>
@@ -7780,7 +9913,7 @@
           <p:cNvPr id="26" name="">
             <a:extLst xmlns:a="http://schemas.openxmlformats.org/drawingml/2006/main">
               <a:ext uri="{FF2B5EF4-FFF2-40B4-BE49-F238E27FC236}">
-                <a16:creationId xmlns:a16="http://schemas.microsoft.com/office/drawing/2014/main" id="{0064A8B9-97B1-4728-AAB6-1532C00413C6}"/>
+                <a16:creationId xmlns:a16="http://schemas.microsoft.com/office/drawing/2014/main" id="{728481CA-226B-4A75-8C74-56E81F5AFB85}"/>
               </a:ext>
             </a:extLst>
           </p:cNvPr>
@@ -7830,7 +9963,7 @@
           <p:cNvPr id="27" name="">
             <a:extLst xmlns:a="http://schemas.openxmlformats.org/drawingml/2006/main">
               <a:ext uri="{FF2B5EF4-FFF2-40B4-BE49-F238E27FC236}">
-                <a16:creationId xmlns:a16="http://schemas.microsoft.com/office/drawing/2014/main" id="{BE8897E4-A345-4557-A7D9-62EEB835A91A}"/>
+                <a16:creationId xmlns:a16="http://schemas.microsoft.com/office/drawing/2014/main" id="{3CDCE293-FF9F-4874-B972-A779F91E650D}"/>
               </a:ext>
             </a:extLst>
           </p:cNvPr>
@@ -7880,7 +10013,7 @@
           <p:cNvPr id="28" name="">
             <a:extLst xmlns:a="http://schemas.openxmlformats.org/drawingml/2006/main">
               <a:ext uri="{FF2B5EF4-FFF2-40B4-BE49-F238E27FC236}">
-                <a16:creationId xmlns:a16="http://schemas.microsoft.com/office/drawing/2014/main" id="{27591CDC-1687-4DAA-8B5E-9EA3CD0F66F3}"/>
+                <a16:creationId xmlns:a16="http://schemas.microsoft.com/office/drawing/2014/main" id="{64E65F25-4E55-4104-B4E0-D5369B578962}"/>
               </a:ext>
             </a:extLst>
           </p:cNvPr>
@@ -7930,7 +10063,7 @@
           <p:cNvPr id="29" name="">
             <a:extLst xmlns:a="http://schemas.openxmlformats.org/drawingml/2006/main">
               <a:ext uri="{FF2B5EF4-FFF2-40B4-BE49-F238E27FC236}">
-                <a16:creationId xmlns:a16="http://schemas.microsoft.com/office/drawing/2014/main" id="{093592E3-C9E9-4457-84EF-4DDF80DC1D89}"/>
+                <a16:creationId xmlns:a16="http://schemas.microsoft.com/office/drawing/2014/main" id="{BFBAD827-A5C2-4817-8D72-FBA31330C42D}"/>
               </a:ext>
             </a:extLst>
           </p:cNvPr>
@@ -7961,7 +10094,7 @@
           <p:cNvPr id="30" name="">
             <a:extLst xmlns:a="http://schemas.openxmlformats.org/drawingml/2006/main">
               <a:ext uri="{FF2B5EF4-FFF2-40B4-BE49-F238E27FC236}">
-                <a16:creationId xmlns:a16="http://schemas.microsoft.com/office/drawing/2014/main" id="{6E4D940E-5ACD-43D8-922B-4DEB6BE0A27C}"/>
+                <a16:creationId xmlns:a16="http://schemas.microsoft.com/office/drawing/2014/main" id="{E2FD58FC-8C82-4FE5-ADCF-49211796B06D}"/>
               </a:ext>
             </a:extLst>
           </p:cNvPr>
@@ -8011,7 +10144,7 @@
           <p:cNvPr id="31" name="">
             <a:extLst xmlns:a="http://schemas.openxmlformats.org/drawingml/2006/main">
               <a:ext uri="{FF2B5EF4-FFF2-40B4-BE49-F238E27FC236}">
-                <a16:creationId xmlns:a16="http://schemas.microsoft.com/office/drawing/2014/main" id="{01C61B3D-CD67-4985-9CF5-FA0B2B3F86CA}"/>
+                <a16:creationId xmlns:a16="http://schemas.microsoft.com/office/drawing/2014/main" id="{4C06354F-EFD6-4017-9849-C30B97D1DB7B}"/>
               </a:ext>
             </a:extLst>
           </p:cNvPr>
@@ -8059,7 +10192,7 @@
     </p:spTree>
     <p:extLst>
       <p:ext uri="{BB962C8B-B14F-4D97-AF65-F5344CB8AC3E}">
-        <p14:creationId xmlns:p14="http://schemas.microsoft.com/office/powerpoint/2010/main" val="1732656846"/>
+        <p14:creationId xmlns:p14="http://schemas.microsoft.com/office/powerpoint/2010/main" val="643507263"/>
       </p:ext>
     </p:extLst>
   </p:cSld>
@@ -8072,7 +10205,7 @@
     <p:bg>
       <p:bgPr>
         <a:solidFill xmlns:a="http://schemas.openxmlformats.org/drawingml/2006/main">
-          <a:srgbClr val="161616"/>
+          <a:srgbClr val="FFFFFF"/>
         </a:solidFill>
       </p:bgPr>
     </p:bg>
@@ -8090,7 +10223,7 @@
           <p:cNvPr id="1" name="">
             <a:extLst xmlns:a="http://schemas.openxmlformats.org/drawingml/2006/main">
               <a:ext uri="{FF2B5EF4-FFF2-40B4-BE49-F238E27FC236}">
-                <a16:creationId xmlns:a16="http://schemas.microsoft.com/office/drawing/2014/main" id="{9BB4605F-9F8C-4D8E-9DAD-EAAB64D950EC}"/>
+                <a16:creationId xmlns:a16="http://schemas.microsoft.com/office/drawing/2014/main" id="{9ABFF5B5-565A-4980-8E47-226DD44A2DE7}"/>
               </a:ext>
             </a:extLst>
           </p:cNvPr>
@@ -8102,7 +10235,7 @@
         <p:spPr>
           <a:xfrm xmlns:a="http://schemas.openxmlformats.org/drawingml/2006/main">
             <a:off x="0" y="0"/>
-            <a:ext cx="209550" cy="6858000"/>
+            <a:ext cx="171450" cy="6858000"/>
           </a:xfrm>
           <a:prstGeom xmlns:a="http://schemas.openxmlformats.org/drawingml/2006/main" prst="rect">
             <a:avLst/>
@@ -8118,20 +10251,20 @@
       </p:sp>
       <p:pic>
         <p:nvPicPr>
-          <p:cNvPr id="17" name=""/>
+          <p:cNvPr id="27" name=""/>
           <p:cNvPicPr>
             <a:picLocks xmlns:a="http://schemas.openxmlformats.org/drawingml/2006/main" noChangeAspect="1"/>
           </p:cNvPicPr>
           <p:nvPr/>
         </p:nvPicPr>
         <p:blipFill>
-          <a:blip xmlns:r="http://schemas.openxmlformats.org/officeDocument/2006/relationships" xmlns:a="http://schemas.openxmlformats.org/drawingml/2006/main" r:embed="R449b5f48b3fe40fa"/>
+          <a:blip xmlns:r="http://schemas.openxmlformats.org/officeDocument/2006/relationships" xmlns:a="http://schemas.openxmlformats.org/drawingml/2006/main" r:embed="R89286b4d032c47cb"/>
           <a:stretch xmlns:a="http://schemas.openxmlformats.org/drawingml/2006/main"/>
         </p:blipFill>
         <p:spPr>
           <a:xfrm xmlns:a="http://schemas.openxmlformats.org/drawingml/2006/main">
-            <a:off x="9512270" y="342900"/>
-            <a:ext cx="1835209" cy="685800"/>
+            <a:off x="9950954" y="247650"/>
+            <a:ext cx="1529341" cy="571500"/>
           </a:xfrm>
           <a:prstGeom xmlns:a="http://schemas.openxmlformats.org/drawingml/2006/main" prst="rect">
             <a:avLst/>
@@ -8143,19 +10276,19 @@
           <p:cNvPr id="3" name="">
             <a:extLst xmlns:a="http://schemas.openxmlformats.org/drawingml/2006/main">
               <a:ext uri="{FF2B5EF4-FFF2-40B4-BE49-F238E27FC236}">
-                <a16:creationId xmlns:a16="http://schemas.microsoft.com/office/drawing/2014/main" id="{ED24AF1A-07B8-46A9-BC90-1134E2FA71BC}"/>
-              </a:ext>
-            </a:extLst>
-          </p:cNvPr>
-          <p:cNvSpPr>
-            <a:spLocks xmlns:a="http://schemas.openxmlformats.org/drawingml/2006/main" noGrp="1"/>
-          </p:cNvSpPr>
-          <p:nvPr/>
-        </p:nvSpPr>
-        <p:spPr>
-          <a:xfrm xmlns:a="http://schemas.openxmlformats.org/drawingml/2006/main">
-            <a:off x="628650" y="552450"/>
-            <a:ext cx="7810500" cy="552450"/>
+                <a16:creationId xmlns:a16="http://schemas.microsoft.com/office/drawing/2014/main" id="{7356C67F-540D-4A46-8612-A7B17A72D74C}"/>
+              </a:ext>
+            </a:extLst>
+          </p:cNvPr>
+          <p:cNvSpPr>
+            <a:spLocks xmlns:a="http://schemas.openxmlformats.org/drawingml/2006/main" noGrp="1"/>
+          </p:cNvSpPr>
+          <p:nvPr/>
+        </p:nvSpPr>
+        <p:spPr>
+          <a:xfrm xmlns:a="http://schemas.openxmlformats.org/drawingml/2006/main">
+            <a:off x="552450" y="419100"/>
+            <a:ext cx="8286750" cy="533400"/>
           </a:xfrm>
           <a:prstGeom xmlns:a="http://schemas.openxmlformats.org/drawingml/2006/main" prst="rect">
             <a:avLst/>
@@ -8171,19 +10304,19 @@
           <a:lstStyle xmlns:a="http://schemas.openxmlformats.org/drawingml/2006/main"/>
           <a:p xmlns:a="http://schemas.openxmlformats.org/drawingml/2006/main">
             <a:pPr>
-              <a:defRPr sz="2700" b="1">
-                <a:solidFill>
-                  <a:srgbClr val="FFFFFF"/>
-                </a:solidFill>
-              </a:defRPr>
-            </a:pPr>
-            <a:r>
-              <a:rPr sz="2700" b="1">
-                <a:solidFill>
-                  <a:srgbClr val="FFFFFF"/>
-                </a:solidFill>
-              </a:rPr>
-              <a:t>Решения, которые стоит принять сейчас</a:t>
+              <a:defRPr sz="2550" b="1">
+                <a:solidFill>
+                  <a:srgbClr val="161616"/>
+                </a:solidFill>
+              </a:defRPr>
+            </a:pPr>
+            <a:r>
+              <a:rPr sz="2550" b="1">
+                <a:solidFill>
+                  <a:srgbClr val="161616"/>
+                </a:solidFill>
+              </a:rPr>
+              <a:t>Зафиксируйте решения и следующий шаг</a:t>
             </a:r>
           </a:p>
         </p:txBody>
@@ -8193,19 +10326,19 @@
           <p:cNvPr id="4" name="">
             <a:extLst xmlns:a="http://schemas.openxmlformats.org/drawingml/2006/main">
               <a:ext uri="{FF2B5EF4-FFF2-40B4-BE49-F238E27FC236}">
-                <a16:creationId xmlns:a16="http://schemas.microsoft.com/office/drawing/2014/main" id="{C0B5E759-3BDF-45D0-8F9D-1785A6183559}"/>
-              </a:ext>
-            </a:extLst>
-          </p:cNvPr>
-          <p:cNvSpPr>
-            <a:spLocks xmlns:a="http://schemas.openxmlformats.org/drawingml/2006/main" noGrp="1"/>
-          </p:cNvSpPr>
-          <p:nvPr/>
-        </p:nvSpPr>
-        <p:spPr>
-          <a:xfrm xmlns:a="http://schemas.openxmlformats.org/drawingml/2006/main">
-            <a:off x="628650" y="1276350"/>
-            <a:ext cx="1066800" cy="76200"/>
+                <a16:creationId xmlns:a16="http://schemas.microsoft.com/office/drawing/2014/main" id="{F196AA98-4C64-4D3C-9959-9AFD8D59D889}"/>
+              </a:ext>
+            </a:extLst>
+          </p:cNvPr>
+          <p:cNvSpPr>
+            <a:spLocks xmlns:a="http://schemas.openxmlformats.org/drawingml/2006/main" noGrp="1"/>
+          </p:cNvSpPr>
+          <p:nvPr/>
+        </p:nvSpPr>
+        <p:spPr>
+          <a:xfrm xmlns:a="http://schemas.openxmlformats.org/drawingml/2006/main">
+            <a:off x="552450" y="1066800"/>
+            <a:ext cx="990600" cy="66675"/>
           </a:xfrm>
           <a:prstGeom xmlns:a="http://schemas.openxmlformats.org/drawingml/2006/main" prst="roundRect">
             <a:avLst>
@@ -8226,424 +10359,22 @@
           <p:cNvPr id="5" name="">
             <a:extLst xmlns:a="http://schemas.openxmlformats.org/drawingml/2006/main">
               <a:ext uri="{FF2B5EF4-FFF2-40B4-BE49-F238E27FC236}">
-                <a16:creationId xmlns:a16="http://schemas.microsoft.com/office/drawing/2014/main" id="{BE07ED31-DA31-4F1F-A915-8CAA834746A8}"/>
-              </a:ext>
-            </a:extLst>
-          </p:cNvPr>
-          <p:cNvSpPr>
-            <a:spLocks xmlns:a="http://schemas.openxmlformats.org/drawingml/2006/main" noGrp="1"/>
-          </p:cNvSpPr>
-          <p:nvPr/>
-        </p:nvSpPr>
-        <p:spPr>
-          <a:xfrm xmlns:a="http://schemas.openxmlformats.org/drawingml/2006/main">
-            <a:off x="628650" y="1752600"/>
-            <a:ext cx="457200" cy="285750"/>
-          </a:xfrm>
-          <a:prstGeom xmlns:a="http://schemas.openxmlformats.org/drawingml/2006/main" prst="rect">
-            <a:avLst/>
-          </a:prstGeom>
-          <a:noFill xmlns:a="http://schemas.openxmlformats.org/drawingml/2006/main"/>
-          <a:ln xmlns:a="http://schemas.openxmlformats.org/drawingml/2006/main" w="0">
-            <a:noFill/>
-            <a:prstDash val="solid"/>
-          </a:ln>
-        </p:spPr>
-        <p:txBody>
-          <a:bodyPr xmlns:a="http://schemas.openxmlformats.org/drawingml/2006/main"/>
-          <a:lstStyle xmlns:a="http://schemas.openxmlformats.org/drawingml/2006/main"/>
-          <a:p xmlns:a="http://schemas.openxmlformats.org/drawingml/2006/main">
-            <a:pPr>
-              <a:defRPr sz="1200" b="1">
-                <a:solidFill>
-                  <a:srgbClr val="FF6412"/>
-                </a:solidFill>
-              </a:defRPr>
-            </a:pPr>
-            <a:r>
-              <a:rPr sz="1200" b="1">
-                <a:solidFill>
-                  <a:srgbClr val="FF6412"/>
-                </a:solidFill>
-              </a:rPr>
-              <a:t>01</a:t>
-            </a:r>
-          </a:p>
-        </p:txBody>
-      </p:sp>
-      <p:sp>
-        <p:nvSpPr>
-          <p:cNvPr id="6" name="">
-            <a:extLst xmlns:a="http://schemas.openxmlformats.org/drawingml/2006/main">
-              <a:ext uri="{FF2B5EF4-FFF2-40B4-BE49-F238E27FC236}">
-                <a16:creationId xmlns:a16="http://schemas.microsoft.com/office/drawing/2014/main" id="{E24E077D-CB2A-4534-B05F-25A07F83A3F8}"/>
-              </a:ext>
-            </a:extLst>
-          </p:cNvPr>
-          <p:cNvSpPr>
-            <a:spLocks xmlns:a="http://schemas.openxmlformats.org/drawingml/2006/main" noGrp="1"/>
-          </p:cNvSpPr>
-          <p:nvPr/>
-        </p:nvSpPr>
-        <p:spPr>
-          <a:xfrm xmlns:a="http://schemas.openxmlformats.org/drawingml/2006/main">
-            <a:off x="1238250" y="1714500"/>
-            <a:ext cx="9715500" cy="647700"/>
-          </a:xfrm>
-          <a:prstGeom xmlns:a="http://schemas.openxmlformats.org/drawingml/2006/main" prst="rect">
-            <a:avLst/>
-          </a:prstGeom>
-          <a:noFill xmlns:a="http://schemas.openxmlformats.org/drawingml/2006/main"/>
-          <a:ln xmlns:a="http://schemas.openxmlformats.org/drawingml/2006/main" w="0">
-            <a:noFill/>
-            <a:prstDash val="solid"/>
-          </a:ln>
-        </p:spPr>
-        <p:txBody>
-          <a:bodyPr xmlns:a="http://schemas.openxmlformats.org/drawingml/2006/main"/>
-          <a:lstStyle xmlns:a="http://schemas.openxmlformats.org/drawingml/2006/main"/>
-          <a:p xmlns:a="http://schemas.openxmlformats.org/drawingml/2006/main">
-            <a:pPr>
-              <a:defRPr sz="1425">
-                <a:solidFill>
-                  <a:srgbClr val="FFFFFF"/>
-                </a:solidFill>
-              </a:defRPr>
-            </a:pPr>
-            <a:r>
-              <a:rPr sz="1425">
-                <a:solidFill>
-                  <a:srgbClr val="FFFFFF"/>
-                </a:solidFill>
-              </a:rPr>
-              <a:t>{{DECISION_1}}</a:t>
-            </a:r>
-          </a:p>
-        </p:txBody>
-      </p:sp>
-      <p:sp>
-        <p:nvSpPr>
-          <p:cNvPr id="7" name="">
-            <a:extLst xmlns:a="http://schemas.openxmlformats.org/drawingml/2006/main">
-              <a:ext uri="{FF2B5EF4-FFF2-40B4-BE49-F238E27FC236}">
-                <a16:creationId xmlns:a16="http://schemas.microsoft.com/office/drawing/2014/main" id="{7C8E954C-55E6-4B56-AE81-F2AEF76CAA2D}"/>
-              </a:ext>
-            </a:extLst>
-          </p:cNvPr>
-          <p:cNvSpPr>
-            <a:spLocks xmlns:a="http://schemas.openxmlformats.org/drawingml/2006/main" noGrp="1"/>
-          </p:cNvSpPr>
-          <p:nvPr/>
-        </p:nvSpPr>
-        <p:spPr>
-          <a:xfrm xmlns:a="http://schemas.openxmlformats.org/drawingml/2006/main">
-            <a:off x="628650" y="2628900"/>
-            <a:ext cx="457200" cy="285750"/>
-          </a:xfrm>
-          <a:prstGeom xmlns:a="http://schemas.openxmlformats.org/drawingml/2006/main" prst="rect">
-            <a:avLst/>
-          </a:prstGeom>
-          <a:noFill xmlns:a="http://schemas.openxmlformats.org/drawingml/2006/main"/>
-          <a:ln xmlns:a="http://schemas.openxmlformats.org/drawingml/2006/main" w="0">
-            <a:noFill/>
-            <a:prstDash val="solid"/>
-          </a:ln>
-        </p:spPr>
-        <p:txBody>
-          <a:bodyPr xmlns:a="http://schemas.openxmlformats.org/drawingml/2006/main"/>
-          <a:lstStyle xmlns:a="http://schemas.openxmlformats.org/drawingml/2006/main"/>
-          <a:p xmlns:a="http://schemas.openxmlformats.org/drawingml/2006/main">
-            <a:pPr>
-              <a:defRPr sz="1200" b="1">
-                <a:solidFill>
-                  <a:srgbClr val="FF6412"/>
-                </a:solidFill>
-              </a:defRPr>
-            </a:pPr>
-            <a:r>
-              <a:rPr sz="1200" b="1">
-                <a:solidFill>
-                  <a:srgbClr val="FF6412"/>
-                </a:solidFill>
-              </a:rPr>
-              <a:t>02</a:t>
-            </a:r>
-          </a:p>
-        </p:txBody>
-      </p:sp>
-      <p:sp>
-        <p:nvSpPr>
-          <p:cNvPr id="8" name="">
-            <a:extLst xmlns:a="http://schemas.openxmlformats.org/drawingml/2006/main">
-              <a:ext uri="{FF2B5EF4-FFF2-40B4-BE49-F238E27FC236}">
-                <a16:creationId xmlns:a16="http://schemas.microsoft.com/office/drawing/2014/main" id="{B92BDC9C-156B-4D10-8013-306556CE4158}"/>
-              </a:ext>
-            </a:extLst>
-          </p:cNvPr>
-          <p:cNvSpPr>
-            <a:spLocks xmlns:a="http://schemas.openxmlformats.org/drawingml/2006/main" noGrp="1"/>
-          </p:cNvSpPr>
-          <p:nvPr/>
-        </p:nvSpPr>
-        <p:spPr>
-          <a:xfrm xmlns:a="http://schemas.openxmlformats.org/drawingml/2006/main">
-            <a:off x="1238250" y="2590800"/>
-            <a:ext cx="9715500" cy="647700"/>
-          </a:xfrm>
-          <a:prstGeom xmlns:a="http://schemas.openxmlformats.org/drawingml/2006/main" prst="rect">
-            <a:avLst/>
-          </a:prstGeom>
-          <a:noFill xmlns:a="http://schemas.openxmlformats.org/drawingml/2006/main"/>
-          <a:ln xmlns:a="http://schemas.openxmlformats.org/drawingml/2006/main" w="0">
-            <a:noFill/>
-            <a:prstDash val="solid"/>
-          </a:ln>
-        </p:spPr>
-        <p:txBody>
-          <a:bodyPr xmlns:a="http://schemas.openxmlformats.org/drawingml/2006/main"/>
-          <a:lstStyle xmlns:a="http://schemas.openxmlformats.org/drawingml/2006/main"/>
-          <a:p xmlns:a="http://schemas.openxmlformats.org/drawingml/2006/main">
-            <a:pPr>
-              <a:defRPr sz="1425">
-                <a:solidFill>
-                  <a:srgbClr val="FFFFFF"/>
-                </a:solidFill>
-              </a:defRPr>
-            </a:pPr>
-            <a:r>
-              <a:rPr sz="1425">
-                <a:solidFill>
-                  <a:srgbClr val="FFFFFF"/>
-                </a:solidFill>
-              </a:rPr>
-              <a:t>{{DECISION_2}}</a:t>
-            </a:r>
-          </a:p>
-        </p:txBody>
-      </p:sp>
-      <p:sp>
-        <p:nvSpPr>
-          <p:cNvPr id="9" name="">
-            <a:extLst xmlns:a="http://schemas.openxmlformats.org/drawingml/2006/main">
-              <a:ext uri="{FF2B5EF4-FFF2-40B4-BE49-F238E27FC236}">
-                <a16:creationId xmlns:a16="http://schemas.microsoft.com/office/drawing/2014/main" id="{6AFB1D6F-B99B-473C-BCEF-785422A61860}"/>
-              </a:ext>
-            </a:extLst>
-          </p:cNvPr>
-          <p:cNvSpPr>
-            <a:spLocks xmlns:a="http://schemas.openxmlformats.org/drawingml/2006/main" noGrp="1"/>
-          </p:cNvSpPr>
-          <p:nvPr/>
-        </p:nvSpPr>
-        <p:spPr>
-          <a:xfrm xmlns:a="http://schemas.openxmlformats.org/drawingml/2006/main">
-            <a:off x="628650" y="3505200"/>
-            <a:ext cx="457200" cy="285750"/>
-          </a:xfrm>
-          <a:prstGeom xmlns:a="http://schemas.openxmlformats.org/drawingml/2006/main" prst="rect">
-            <a:avLst/>
-          </a:prstGeom>
-          <a:noFill xmlns:a="http://schemas.openxmlformats.org/drawingml/2006/main"/>
-          <a:ln xmlns:a="http://schemas.openxmlformats.org/drawingml/2006/main" w="0">
-            <a:noFill/>
-            <a:prstDash val="solid"/>
-          </a:ln>
-        </p:spPr>
-        <p:txBody>
-          <a:bodyPr xmlns:a="http://schemas.openxmlformats.org/drawingml/2006/main"/>
-          <a:lstStyle xmlns:a="http://schemas.openxmlformats.org/drawingml/2006/main"/>
-          <a:p xmlns:a="http://schemas.openxmlformats.org/drawingml/2006/main">
-            <a:pPr>
-              <a:defRPr sz="1200" b="1">
-                <a:solidFill>
-                  <a:srgbClr val="FF6412"/>
-                </a:solidFill>
-              </a:defRPr>
-            </a:pPr>
-            <a:r>
-              <a:rPr sz="1200" b="1">
-                <a:solidFill>
-                  <a:srgbClr val="FF6412"/>
-                </a:solidFill>
-              </a:rPr>
-              <a:t>03</a:t>
-            </a:r>
-          </a:p>
-        </p:txBody>
-      </p:sp>
-      <p:sp>
-        <p:nvSpPr>
-          <p:cNvPr id="10" name="">
-            <a:extLst xmlns:a="http://schemas.openxmlformats.org/drawingml/2006/main">
-              <a:ext uri="{FF2B5EF4-FFF2-40B4-BE49-F238E27FC236}">
-                <a16:creationId xmlns:a16="http://schemas.microsoft.com/office/drawing/2014/main" id="{C452F15C-F33C-4825-BDDC-CE45D15F2C94}"/>
-              </a:ext>
-            </a:extLst>
-          </p:cNvPr>
-          <p:cNvSpPr>
-            <a:spLocks xmlns:a="http://schemas.openxmlformats.org/drawingml/2006/main" noGrp="1"/>
-          </p:cNvSpPr>
-          <p:nvPr/>
-        </p:nvSpPr>
-        <p:spPr>
-          <a:xfrm xmlns:a="http://schemas.openxmlformats.org/drawingml/2006/main">
-            <a:off x="1238250" y="3467100"/>
-            <a:ext cx="9715500" cy="647700"/>
-          </a:xfrm>
-          <a:prstGeom xmlns:a="http://schemas.openxmlformats.org/drawingml/2006/main" prst="rect">
-            <a:avLst/>
-          </a:prstGeom>
-          <a:noFill xmlns:a="http://schemas.openxmlformats.org/drawingml/2006/main"/>
-          <a:ln xmlns:a="http://schemas.openxmlformats.org/drawingml/2006/main" w="0">
-            <a:noFill/>
-            <a:prstDash val="solid"/>
-          </a:ln>
-        </p:spPr>
-        <p:txBody>
-          <a:bodyPr xmlns:a="http://schemas.openxmlformats.org/drawingml/2006/main"/>
-          <a:lstStyle xmlns:a="http://schemas.openxmlformats.org/drawingml/2006/main"/>
-          <a:p xmlns:a="http://schemas.openxmlformats.org/drawingml/2006/main">
-            <a:pPr>
-              <a:defRPr sz="1425">
-                <a:solidFill>
-                  <a:srgbClr val="FFFFFF"/>
-                </a:solidFill>
-              </a:defRPr>
-            </a:pPr>
-            <a:r>
-              <a:rPr sz="1425">
-                <a:solidFill>
-                  <a:srgbClr val="FFFFFF"/>
-                </a:solidFill>
-              </a:rPr>
-              <a:t>{{DECISION_3}}</a:t>
-            </a:r>
-          </a:p>
-        </p:txBody>
-      </p:sp>
-      <p:sp>
-        <p:nvSpPr>
-          <p:cNvPr id="11" name="">
-            <a:extLst xmlns:a="http://schemas.openxmlformats.org/drawingml/2006/main">
-              <a:ext uri="{FF2B5EF4-FFF2-40B4-BE49-F238E27FC236}">
-                <a16:creationId xmlns:a16="http://schemas.microsoft.com/office/drawing/2014/main" id="{8C79344B-27A2-436C-9C09-6CD828A92814}"/>
-              </a:ext>
-            </a:extLst>
-          </p:cNvPr>
-          <p:cNvSpPr>
-            <a:spLocks xmlns:a="http://schemas.openxmlformats.org/drawingml/2006/main" noGrp="1"/>
-          </p:cNvSpPr>
-          <p:nvPr/>
-        </p:nvSpPr>
-        <p:spPr>
-          <a:xfrm xmlns:a="http://schemas.openxmlformats.org/drawingml/2006/main">
-            <a:off x="628650" y="4381500"/>
-            <a:ext cx="457200" cy="285750"/>
-          </a:xfrm>
-          <a:prstGeom xmlns:a="http://schemas.openxmlformats.org/drawingml/2006/main" prst="rect">
-            <a:avLst/>
-          </a:prstGeom>
-          <a:noFill xmlns:a="http://schemas.openxmlformats.org/drawingml/2006/main"/>
-          <a:ln xmlns:a="http://schemas.openxmlformats.org/drawingml/2006/main" w="0">
-            <a:noFill/>
-            <a:prstDash val="solid"/>
-          </a:ln>
-        </p:spPr>
-        <p:txBody>
-          <a:bodyPr xmlns:a="http://schemas.openxmlformats.org/drawingml/2006/main"/>
-          <a:lstStyle xmlns:a="http://schemas.openxmlformats.org/drawingml/2006/main"/>
-          <a:p xmlns:a="http://schemas.openxmlformats.org/drawingml/2006/main">
-            <a:pPr>
-              <a:defRPr sz="1200" b="1">
-                <a:solidFill>
-                  <a:srgbClr val="FF6412"/>
-                </a:solidFill>
-              </a:defRPr>
-            </a:pPr>
-            <a:r>
-              <a:rPr sz="1200" b="1">
-                <a:solidFill>
-                  <a:srgbClr val="FF6412"/>
-                </a:solidFill>
-              </a:rPr>
-              <a:t>04</a:t>
-            </a:r>
-          </a:p>
-        </p:txBody>
-      </p:sp>
-      <p:sp>
-        <p:nvSpPr>
-          <p:cNvPr id="12" name="">
-            <a:extLst xmlns:a="http://schemas.openxmlformats.org/drawingml/2006/main">
-              <a:ext uri="{FF2B5EF4-FFF2-40B4-BE49-F238E27FC236}">
-                <a16:creationId xmlns:a16="http://schemas.microsoft.com/office/drawing/2014/main" id="{7CC780CB-8290-4DB2-8C30-6824F0D4CB0D}"/>
-              </a:ext>
-            </a:extLst>
-          </p:cNvPr>
-          <p:cNvSpPr>
-            <a:spLocks xmlns:a="http://schemas.openxmlformats.org/drawingml/2006/main" noGrp="1"/>
-          </p:cNvSpPr>
-          <p:nvPr/>
-        </p:nvSpPr>
-        <p:spPr>
-          <a:xfrm xmlns:a="http://schemas.openxmlformats.org/drawingml/2006/main">
-            <a:off x="1238250" y="4343400"/>
-            <a:ext cx="9715500" cy="647700"/>
-          </a:xfrm>
-          <a:prstGeom xmlns:a="http://schemas.openxmlformats.org/drawingml/2006/main" prst="rect">
-            <a:avLst/>
-          </a:prstGeom>
-          <a:noFill xmlns:a="http://schemas.openxmlformats.org/drawingml/2006/main"/>
-          <a:ln xmlns:a="http://schemas.openxmlformats.org/drawingml/2006/main" w="0">
-            <a:noFill/>
-            <a:prstDash val="solid"/>
-          </a:ln>
-        </p:spPr>
-        <p:txBody>
-          <a:bodyPr xmlns:a="http://schemas.openxmlformats.org/drawingml/2006/main"/>
-          <a:lstStyle xmlns:a="http://schemas.openxmlformats.org/drawingml/2006/main"/>
-          <a:p xmlns:a="http://schemas.openxmlformats.org/drawingml/2006/main">
-            <a:pPr>
-              <a:defRPr sz="1425">
-                <a:solidFill>
-                  <a:srgbClr val="FFFFFF"/>
-                </a:solidFill>
-              </a:defRPr>
-            </a:pPr>
-            <a:r>
-              <a:rPr sz="1425">
-                <a:solidFill>
-                  <a:srgbClr val="FFFFFF"/>
-                </a:solidFill>
-              </a:rPr>
-              <a:t>{{DECISION_4}}</a:t>
-            </a:r>
-          </a:p>
-        </p:txBody>
-      </p:sp>
-      <p:sp>
-        <p:nvSpPr>
-          <p:cNvPr id="13" name="">
-            <a:extLst xmlns:a="http://schemas.openxmlformats.org/drawingml/2006/main">
-              <a:ext uri="{FF2B5EF4-FFF2-40B4-BE49-F238E27FC236}">
-                <a16:creationId xmlns:a16="http://schemas.microsoft.com/office/drawing/2014/main" id="{AA3B4ED1-D0C6-4424-9CF2-4DB5C2FA5328}"/>
-              </a:ext>
-            </a:extLst>
-          </p:cNvPr>
-          <p:cNvSpPr>
-            <a:spLocks xmlns:a="http://schemas.openxmlformats.org/drawingml/2006/main" noGrp="1"/>
-          </p:cNvSpPr>
-          <p:nvPr/>
-        </p:nvSpPr>
-        <p:spPr>
-          <a:xfrm xmlns:a="http://schemas.openxmlformats.org/drawingml/2006/main">
-            <a:off x="628650" y="5543550"/>
-            <a:ext cx="5429250" cy="704850"/>
-          </a:xfrm>
-          <a:prstGeom xmlns:a="http://schemas.openxmlformats.org/drawingml/2006/main" prst="roundRect">
-            <a:avLst>
-              <a:gd name="adj" fmla="val 10811"/>
-            </a:avLst>
+                <a16:creationId xmlns:a16="http://schemas.microsoft.com/office/drawing/2014/main" id="{F1266970-0E04-47CE-B1A8-99C45DE2BDEF}"/>
+              </a:ext>
+            </a:extLst>
+          </p:cNvPr>
+          <p:cNvSpPr>
+            <a:spLocks xmlns:a="http://schemas.openxmlformats.org/drawingml/2006/main" noGrp="1"/>
+          </p:cNvSpPr>
+          <p:nvPr/>
+        </p:nvSpPr>
+        <p:spPr>
+          <a:xfrm xmlns:a="http://schemas.openxmlformats.org/drawingml/2006/main">
+            <a:off x="0" y="6629400"/>
+            <a:ext cx="12192000" cy="228600"/>
+          </a:xfrm>
+          <a:prstGeom xmlns:a="http://schemas.openxmlformats.org/drawingml/2006/main" prst="rect">
+            <a:avLst/>
           </a:prstGeom>
           <a:solidFill xmlns:a="http://schemas.openxmlformats.org/drawingml/2006/main">
             <a:srgbClr val="FF6412"/>
@@ -8656,22 +10387,650 @@
       </p:sp>
       <p:sp>
         <p:nvSpPr>
+          <p:cNvPr id="6" name="">
+            <a:extLst xmlns:a="http://schemas.openxmlformats.org/drawingml/2006/main">
+              <a:ext uri="{FF2B5EF4-FFF2-40B4-BE49-F238E27FC236}">
+                <a16:creationId xmlns:a16="http://schemas.microsoft.com/office/drawing/2014/main" id="{CFA4211D-57E1-4CA0-99E3-5E7FC58E1BA1}"/>
+              </a:ext>
+            </a:extLst>
+          </p:cNvPr>
+          <p:cNvSpPr>
+            <a:spLocks xmlns:a="http://schemas.openxmlformats.org/drawingml/2006/main" noGrp="1"/>
+          </p:cNvSpPr>
+          <p:nvPr/>
+        </p:nvSpPr>
+        <p:spPr>
+          <a:xfrm xmlns:a="http://schemas.openxmlformats.org/drawingml/2006/main">
+            <a:off x="400050" y="6657975"/>
+            <a:ext cx="5715000" cy="152400"/>
+          </a:xfrm>
+          <a:prstGeom xmlns:a="http://schemas.openxmlformats.org/drawingml/2006/main" prst="rect">
+            <a:avLst/>
+          </a:prstGeom>
+          <a:noFill xmlns:a="http://schemas.openxmlformats.org/drawingml/2006/main"/>
+          <a:ln xmlns:a="http://schemas.openxmlformats.org/drawingml/2006/main" w="0">
+            <a:noFill/>
+            <a:prstDash val="solid"/>
+          </a:ln>
+        </p:spPr>
+        <p:txBody>
+          <a:bodyPr xmlns:a="http://schemas.openxmlformats.org/drawingml/2006/main"/>
+          <a:lstStyle xmlns:a="http://schemas.openxmlformats.org/drawingml/2006/main"/>
+          <a:p xmlns:a="http://schemas.openxmlformats.org/drawingml/2006/main">
+            <a:pPr>
+              <a:defRPr sz="750" b="1">
+                <a:solidFill>
+                  <a:srgbClr val="FFFFFF"/>
+                </a:solidFill>
+              </a:defRPr>
+            </a:pPr>
+            <a:r>
+              <a:rPr sz="750" b="1">
+                <a:solidFill>
+                  <a:srgbClr val="FFFFFF"/>
+                </a:solidFill>
+              </a:rPr>
+              <a:t>Khalil Audit System  |  by Ivan Rudoy</a:t>
+            </a:r>
+          </a:p>
+        </p:txBody>
+      </p:sp>
+      <p:sp>
+        <p:nvSpPr>
+          <p:cNvPr id="7" name="">
+            <a:extLst xmlns:a="http://schemas.openxmlformats.org/drawingml/2006/main">
+              <a:ext uri="{FF2B5EF4-FFF2-40B4-BE49-F238E27FC236}">
+                <a16:creationId xmlns:a16="http://schemas.microsoft.com/office/drawing/2014/main" id="{24004E4F-9C0F-4395-8025-9D4EBC4EA818}"/>
+              </a:ext>
+            </a:extLst>
+          </p:cNvPr>
+          <p:cNvSpPr>
+            <a:spLocks xmlns:a="http://schemas.openxmlformats.org/drawingml/2006/main" noGrp="1"/>
+          </p:cNvSpPr>
+          <p:nvPr/>
+        </p:nvSpPr>
+        <p:spPr>
+          <a:xfrm xmlns:a="http://schemas.openxmlformats.org/drawingml/2006/main">
+            <a:off x="11334750" y="6657975"/>
+            <a:ext cx="428625" cy="152400"/>
+          </a:xfrm>
+          <a:prstGeom xmlns:a="http://schemas.openxmlformats.org/drawingml/2006/main" prst="rect">
+            <a:avLst/>
+          </a:prstGeom>
+          <a:noFill xmlns:a="http://schemas.openxmlformats.org/drawingml/2006/main"/>
+          <a:ln xmlns:a="http://schemas.openxmlformats.org/drawingml/2006/main" w="0">
+            <a:noFill/>
+            <a:prstDash val="solid"/>
+          </a:ln>
+        </p:spPr>
+        <p:txBody>
+          <a:bodyPr xmlns:a="http://schemas.openxmlformats.org/drawingml/2006/main"/>
+          <a:lstStyle xmlns:a="http://schemas.openxmlformats.org/drawingml/2006/main"/>
+          <a:p xmlns:a="http://schemas.openxmlformats.org/drawingml/2006/main">
+            <a:pPr algn="r">
+              <a:defRPr sz="750" b="1">
+                <a:solidFill>
+                  <a:srgbClr val="FFFFFF"/>
+                </a:solidFill>
+              </a:defRPr>
+            </a:pPr>
+            <a:r>
+              <a:rPr sz="750" b="1">
+                <a:solidFill>
+                  <a:srgbClr val="FFFFFF"/>
+                </a:solidFill>
+              </a:rPr>
+              <a:t>08</a:t>
+            </a:r>
+          </a:p>
+        </p:txBody>
+      </p:sp>
+      <p:sp>
+        <p:nvSpPr>
+          <p:cNvPr id="8" name="">
+            <a:extLst xmlns:a="http://schemas.openxmlformats.org/drawingml/2006/main">
+              <a:ext uri="{FF2B5EF4-FFF2-40B4-BE49-F238E27FC236}">
+                <a16:creationId xmlns:a16="http://schemas.microsoft.com/office/drawing/2014/main" id="{C56EB38C-6109-4153-BADB-EAD7FA9B0729}"/>
+              </a:ext>
+            </a:extLst>
+          </p:cNvPr>
+          <p:cNvSpPr>
+            <a:spLocks xmlns:a="http://schemas.openxmlformats.org/drawingml/2006/main" noGrp="1"/>
+          </p:cNvSpPr>
+          <p:nvPr/>
+        </p:nvSpPr>
+        <p:spPr>
+          <a:xfrm xmlns:a="http://schemas.openxmlformats.org/drawingml/2006/main">
+            <a:off x="552450" y="1562100"/>
+            <a:ext cx="457200" cy="285750"/>
+          </a:xfrm>
+          <a:prstGeom xmlns:a="http://schemas.openxmlformats.org/drawingml/2006/main" prst="rect">
+            <a:avLst/>
+          </a:prstGeom>
+          <a:noFill xmlns:a="http://schemas.openxmlformats.org/drawingml/2006/main"/>
+          <a:ln xmlns:a="http://schemas.openxmlformats.org/drawingml/2006/main" w="0">
+            <a:noFill/>
+            <a:prstDash val="solid"/>
+          </a:ln>
+        </p:spPr>
+        <p:txBody>
+          <a:bodyPr xmlns:a="http://schemas.openxmlformats.org/drawingml/2006/main"/>
+          <a:lstStyle xmlns:a="http://schemas.openxmlformats.org/drawingml/2006/main"/>
+          <a:p xmlns:a="http://schemas.openxmlformats.org/drawingml/2006/main">
+            <a:pPr>
+              <a:defRPr sz="1200" b="1">
+                <a:solidFill>
+                  <a:srgbClr val="FF6412"/>
+                </a:solidFill>
+              </a:defRPr>
+            </a:pPr>
+            <a:r>
+              <a:rPr sz="1200" b="1">
+                <a:solidFill>
+                  <a:srgbClr val="FF6412"/>
+                </a:solidFill>
+              </a:rPr>
+              <a:t>01</a:t>
+            </a:r>
+          </a:p>
+        </p:txBody>
+      </p:sp>
+      <p:sp>
+        <p:nvSpPr>
+          <p:cNvPr id="9" name="">
+            <a:extLst xmlns:a="http://schemas.openxmlformats.org/drawingml/2006/main">
+              <a:ext uri="{FF2B5EF4-FFF2-40B4-BE49-F238E27FC236}">
+                <a16:creationId xmlns:a16="http://schemas.microsoft.com/office/drawing/2014/main" id="{B085A384-A693-48C6-8190-D63FCBB5007D}"/>
+              </a:ext>
+            </a:extLst>
+          </p:cNvPr>
+          <p:cNvSpPr>
+            <a:spLocks xmlns:a="http://schemas.openxmlformats.org/drawingml/2006/main" noGrp="1"/>
+          </p:cNvSpPr>
+          <p:nvPr/>
+        </p:nvSpPr>
+        <p:spPr>
+          <a:xfrm xmlns:a="http://schemas.openxmlformats.org/drawingml/2006/main">
+            <a:off x="1104900" y="1524000"/>
+            <a:ext cx="6419850" cy="742950"/>
+          </a:xfrm>
+          <a:prstGeom xmlns:a="http://schemas.openxmlformats.org/drawingml/2006/main" prst="rect">
+            <a:avLst/>
+          </a:prstGeom>
+          <a:noFill xmlns:a="http://schemas.openxmlformats.org/drawingml/2006/main"/>
+          <a:ln xmlns:a="http://schemas.openxmlformats.org/drawingml/2006/main" w="0">
+            <a:noFill/>
+            <a:prstDash val="solid"/>
+          </a:ln>
+        </p:spPr>
+        <p:txBody>
+          <a:bodyPr xmlns:a="http://schemas.openxmlformats.org/drawingml/2006/main"/>
+          <a:lstStyle xmlns:a="http://schemas.openxmlformats.org/drawingml/2006/main"/>
+          <a:p xmlns:a="http://schemas.openxmlformats.org/drawingml/2006/main">
+            <a:pPr>
+              <a:defRPr sz="1275">
+                <a:solidFill>
+                  <a:srgbClr val="161616"/>
+                </a:solidFill>
+              </a:defRPr>
+            </a:pPr>
+            <a:r>
+              <a:rPr sz="1275">
+                <a:solidFill>
+                  <a:srgbClr val="161616"/>
+                </a:solidFill>
+              </a:rPr>
+              <a:t>{{DECISION_1}}</a:t>
+            </a:r>
+          </a:p>
+        </p:txBody>
+      </p:sp>
+      <p:sp>
+        <p:nvSpPr>
+          <p:cNvPr id="10" name="">
+            <a:extLst xmlns:a="http://schemas.openxmlformats.org/drawingml/2006/main">
+              <a:ext uri="{FF2B5EF4-FFF2-40B4-BE49-F238E27FC236}">
+                <a16:creationId xmlns:a16="http://schemas.microsoft.com/office/drawing/2014/main" id="{BF458661-09ED-4D1A-9083-8A56050E1E7A}"/>
+              </a:ext>
+            </a:extLst>
+          </p:cNvPr>
+          <p:cNvSpPr>
+            <a:spLocks xmlns:a="http://schemas.openxmlformats.org/drawingml/2006/main" noGrp="1"/>
+          </p:cNvSpPr>
+          <p:nvPr/>
+        </p:nvSpPr>
+        <p:spPr>
+          <a:xfrm xmlns:a="http://schemas.openxmlformats.org/drawingml/2006/main">
+            <a:off x="1104900" y="2400300"/>
+            <a:ext cx="6419850" cy="9525"/>
+          </a:xfrm>
+          <a:prstGeom xmlns:a="http://schemas.openxmlformats.org/drawingml/2006/main" prst="rect">
+            <a:avLst/>
+          </a:prstGeom>
+          <a:solidFill xmlns:a="http://schemas.openxmlformats.org/drawingml/2006/main">
+            <a:srgbClr val="E4E7EC"/>
+          </a:solidFill>
+          <a:ln xmlns:a="http://schemas.openxmlformats.org/drawingml/2006/main" w="0">
+            <a:noFill/>
+            <a:prstDash val="solid"/>
+          </a:ln>
+        </p:spPr>
+      </p:sp>
+      <p:sp>
+        <p:nvSpPr>
+          <p:cNvPr id="11" name="">
+            <a:extLst xmlns:a="http://schemas.openxmlformats.org/drawingml/2006/main">
+              <a:ext uri="{FF2B5EF4-FFF2-40B4-BE49-F238E27FC236}">
+                <a16:creationId xmlns:a16="http://schemas.microsoft.com/office/drawing/2014/main" id="{7C39BD80-4727-4581-9F84-3F8CDF21C1C9}"/>
+              </a:ext>
+            </a:extLst>
+          </p:cNvPr>
+          <p:cNvSpPr>
+            <a:spLocks xmlns:a="http://schemas.openxmlformats.org/drawingml/2006/main" noGrp="1"/>
+          </p:cNvSpPr>
+          <p:nvPr/>
+        </p:nvSpPr>
+        <p:spPr>
+          <a:xfrm xmlns:a="http://schemas.openxmlformats.org/drawingml/2006/main">
+            <a:off x="552450" y="2628900"/>
+            <a:ext cx="457200" cy="285750"/>
+          </a:xfrm>
+          <a:prstGeom xmlns:a="http://schemas.openxmlformats.org/drawingml/2006/main" prst="rect">
+            <a:avLst/>
+          </a:prstGeom>
+          <a:noFill xmlns:a="http://schemas.openxmlformats.org/drawingml/2006/main"/>
+          <a:ln xmlns:a="http://schemas.openxmlformats.org/drawingml/2006/main" w="0">
+            <a:noFill/>
+            <a:prstDash val="solid"/>
+          </a:ln>
+        </p:spPr>
+        <p:txBody>
+          <a:bodyPr xmlns:a="http://schemas.openxmlformats.org/drawingml/2006/main"/>
+          <a:lstStyle xmlns:a="http://schemas.openxmlformats.org/drawingml/2006/main"/>
+          <a:p xmlns:a="http://schemas.openxmlformats.org/drawingml/2006/main">
+            <a:pPr>
+              <a:defRPr sz="1200" b="1">
+                <a:solidFill>
+                  <a:srgbClr val="FF6412"/>
+                </a:solidFill>
+              </a:defRPr>
+            </a:pPr>
+            <a:r>
+              <a:rPr sz="1200" b="1">
+                <a:solidFill>
+                  <a:srgbClr val="FF6412"/>
+                </a:solidFill>
+              </a:rPr>
+              <a:t>02</a:t>
+            </a:r>
+          </a:p>
+        </p:txBody>
+      </p:sp>
+      <p:sp>
+        <p:nvSpPr>
+          <p:cNvPr id="12" name="">
+            <a:extLst xmlns:a="http://schemas.openxmlformats.org/drawingml/2006/main">
+              <a:ext uri="{FF2B5EF4-FFF2-40B4-BE49-F238E27FC236}">
+                <a16:creationId xmlns:a16="http://schemas.microsoft.com/office/drawing/2014/main" id="{8666F9AF-11A0-4FBC-AC27-50A6A6E12C43}"/>
+              </a:ext>
+            </a:extLst>
+          </p:cNvPr>
+          <p:cNvSpPr>
+            <a:spLocks xmlns:a="http://schemas.openxmlformats.org/drawingml/2006/main" noGrp="1"/>
+          </p:cNvSpPr>
+          <p:nvPr/>
+        </p:nvSpPr>
+        <p:spPr>
+          <a:xfrm xmlns:a="http://schemas.openxmlformats.org/drawingml/2006/main">
+            <a:off x="1104900" y="2590800"/>
+            <a:ext cx="6419850" cy="742950"/>
+          </a:xfrm>
+          <a:prstGeom xmlns:a="http://schemas.openxmlformats.org/drawingml/2006/main" prst="rect">
+            <a:avLst/>
+          </a:prstGeom>
+          <a:noFill xmlns:a="http://schemas.openxmlformats.org/drawingml/2006/main"/>
+          <a:ln xmlns:a="http://schemas.openxmlformats.org/drawingml/2006/main" w="0">
+            <a:noFill/>
+            <a:prstDash val="solid"/>
+          </a:ln>
+        </p:spPr>
+        <p:txBody>
+          <a:bodyPr xmlns:a="http://schemas.openxmlformats.org/drawingml/2006/main"/>
+          <a:lstStyle xmlns:a="http://schemas.openxmlformats.org/drawingml/2006/main"/>
+          <a:p xmlns:a="http://schemas.openxmlformats.org/drawingml/2006/main">
+            <a:pPr>
+              <a:defRPr sz="1275">
+                <a:solidFill>
+                  <a:srgbClr val="161616"/>
+                </a:solidFill>
+              </a:defRPr>
+            </a:pPr>
+            <a:r>
+              <a:rPr sz="1275">
+                <a:solidFill>
+                  <a:srgbClr val="161616"/>
+                </a:solidFill>
+              </a:rPr>
+              <a:t>{{DECISION_2}}</a:t>
+            </a:r>
+          </a:p>
+        </p:txBody>
+      </p:sp>
+      <p:sp>
+        <p:nvSpPr>
+          <p:cNvPr id="13" name="">
+            <a:extLst xmlns:a="http://schemas.openxmlformats.org/drawingml/2006/main">
+              <a:ext uri="{FF2B5EF4-FFF2-40B4-BE49-F238E27FC236}">
+                <a16:creationId xmlns:a16="http://schemas.microsoft.com/office/drawing/2014/main" id="{62CA21D2-2503-4560-9B72-16C10E2BA59E}"/>
+              </a:ext>
+            </a:extLst>
+          </p:cNvPr>
+          <p:cNvSpPr>
+            <a:spLocks xmlns:a="http://schemas.openxmlformats.org/drawingml/2006/main" noGrp="1"/>
+          </p:cNvSpPr>
+          <p:nvPr/>
+        </p:nvSpPr>
+        <p:spPr>
+          <a:xfrm xmlns:a="http://schemas.openxmlformats.org/drawingml/2006/main">
+            <a:off x="1104900" y="3467100"/>
+            <a:ext cx="6419850" cy="9525"/>
+          </a:xfrm>
+          <a:prstGeom xmlns:a="http://schemas.openxmlformats.org/drawingml/2006/main" prst="rect">
+            <a:avLst/>
+          </a:prstGeom>
+          <a:solidFill xmlns:a="http://schemas.openxmlformats.org/drawingml/2006/main">
+            <a:srgbClr val="E4E7EC"/>
+          </a:solidFill>
+          <a:ln xmlns:a="http://schemas.openxmlformats.org/drawingml/2006/main" w="0">
+            <a:noFill/>
+            <a:prstDash val="solid"/>
+          </a:ln>
+        </p:spPr>
+      </p:sp>
+      <p:sp>
+        <p:nvSpPr>
           <p:cNvPr id="14" name="">
             <a:extLst xmlns:a="http://schemas.openxmlformats.org/drawingml/2006/main">
               <a:ext uri="{FF2B5EF4-FFF2-40B4-BE49-F238E27FC236}">
-                <a16:creationId xmlns:a16="http://schemas.microsoft.com/office/drawing/2014/main" id="{2BDFE16C-02E8-4C16-B3B7-F1F08FF84A1C}"/>
-              </a:ext>
-            </a:extLst>
-          </p:cNvPr>
-          <p:cNvSpPr>
-            <a:spLocks xmlns:a="http://schemas.openxmlformats.org/drawingml/2006/main" noGrp="1"/>
-          </p:cNvSpPr>
-          <p:nvPr/>
-        </p:nvSpPr>
-        <p:spPr>
-          <a:xfrm xmlns:a="http://schemas.openxmlformats.org/drawingml/2006/main">
-            <a:off x="838200" y="5724525"/>
-            <a:ext cx="5010150" cy="400050"/>
+                <a16:creationId xmlns:a16="http://schemas.microsoft.com/office/drawing/2014/main" id="{7CC93F91-1485-4F91-9517-F5C1F6B2586B}"/>
+              </a:ext>
+            </a:extLst>
+          </p:cNvPr>
+          <p:cNvSpPr>
+            <a:spLocks xmlns:a="http://schemas.openxmlformats.org/drawingml/2006/main" noGrp="1"/>
+          </p:cNvSpPr>
+          <p:nvPr/>
+        </p:nvSpPr>
+        <p:spPr>
+          <a:xfrm xmlns:a="http://schemas.openxmlformats.org/drawingml/2006/main">
+            <a:off x="552450" y="3695700"/>
+            <a:ext cx="457200" cy="285750"/>
+          </a:xfrm>
+          <a:prstGeom xmlns:a="http://schemas.openxmlformats.org/drawingml/2006/main" prst="rect">
+            <a:avLst/>
+          </a:prstGeom>
+          <a:noFill xmlns:a="http://schemas.openxmlformats.org/drawingml/2006/main"/>
+          <a:ln xmlns:a="http://schemas.openxmlformats.org/drawingml/2006/main" w="0">
+            <a:noFill/>
+            <a:prstDash val="solid"/>
+          </a:ln>
+        </p:spPr>
+        <p:txBody>
+          <a:bodyPr xmlns:a="http://schemas.openxmlformats.org/drawingml/2006/main"/>
+          <a:lstStyle xmlns:a="http://schemas.openxmlformats.org/drawingml/2006/main"/>
+          <a:p xmlns:a="http://schemas.openxmlformats.org/drawingml/2006/main">
+            <a:pPr>
+              <a:defRPr sz="1200" b="1">
+                <a:solidFill>
+                  <a:srgbClr val="FF6412"/>
+                </a:solidFill>
+              </a:defRPr>
+            </a:pPr>
+            <a:r>
+              <a:rPr sz="1200" b="1">
+                <a:solidFill>
+                  <a:srgbClr val="FF6412"/>
+                </a:solidFill>
+              </a:rPr>
+              <a:t>03</a:t>
+            </a:r>
+          </a:p>
+        </p:txBody>
+      </p:sp>
+      <p:sp>
+        <p:nvSpPr>
+          <p:cNvPr id="15" name="">
+            <a:extLst xmlns:a="http://schemas.openxmlformats.org/drawingml/2006/main">
+              <a:ext uri="{FF2B5EF4-FFF2-40B4-BE49-F238E27FC236}">
+                <a16:creationId xmlns:a16="http://schemas.microsoft.com/office/drawing/2014/main" id="{03915FF4-35CE-4848-A47C-8027C9DE16AC}"/>
+              </a:ext>
+            </a:extLst>
+          </p:cNvPr>
+          <p:cNvSpPr>
+            <a:spLocks xmlns:a="http://schemas.openxmlformats.org/drawingml/2006/main" noGrp="1"/>
+          </p:cNvSpPr>
+          <p:nvPr/>
+        </p:nvSpPr>
+        <p:spPr>
+          <a:xfrm xmlns:a="http://schemas.openxmlformats.org/drawingml/2006/main">
+            <a:off x="1104900" y="3657600"/>
+            <a:ext cx="6419850" cy="742950"/>
+          </a:xfrm>
+          <a:prstGeom xmlns:a="http://schemas.openxmlformats.org/drawingml/2006/main" prst="rect">
+            <a:avLst/>
+          </a:prstGeom>
+          <a:noFill xmlns:a="http://schemas.openxmlformats.org/drawingml/2006/main"/>
+          <a:ln xmlns:a="http://schemas.openxmlformats.org/drawingml/2006/main" w="0">
+            <a:noFill/>
+            <a:prstDash val="solid"/>
+          </a:ln>
+        </p:spPr>
+        <p:txBody>
+          <a:bodyPr xmlns:a="http://schemas.openxmlformats.org/drawingml/2006/main"/>
+          <a:lstStyle xmlns:a="http://schemas.openxmlformats.org/drawingml/2006/main"/>
+          <a:p xmlns:a="http://schemas.openxmlformats.org/drawingml/2006/main">
+            <a:pPr>
+              <a:defRPr sz="1275">
+                <a:solidFill>
+                  <a:srgbClr val="161616"/>
+                </a:solidFill>
+              </a:defRPr>
+            </a:pPr>
+            <a:r>
+              <a:rPr sz="1275">
+                <a:solidFill>
+                  <a:srgbClr val="161616"/>
+                </a:solidFill>
+              </a:rPr>
+              <a:t>{{DECISION_3}}</a:t>
+            </a:r>
+          </a:p>
+        </p:txBody>
+      </p:sp>
+      <p:sp>
+        <p:nvSpPr>
+          <p:cNvPr id="16" name="">
+            <a:extLst xmlns:a="http://schemas.openxmlformats.org/drawingml/2006/main">
+              <a:ext uri="{FF2B5EF4-FFF2-40B4-BE49-F238E27FC236}">
+                <a16:creationId xmlns:a16="http://schemas.microsoft.com/office/drawing/2014/main" id="{D9EEB2FD-F3A0-45C6-8D1B-3A18FC485B28}"/>
+              </a:ext>
+            </a:extLst>
+          </p:cNvPr>
+          <p:cNvSpPr>
+            <a:spLocks xmlns:a="http://schemas.openxmlformats.org/drawingml/2006/main" noGrp="1"/>
+          </p:cNvSpPr>
+          <p:nvPr/>
+        </p:nvSpPr>
+        <p:spPr>
+          <a:xfrm xmlns:a="http://schemas.openxmlformats.org/drawingml/2006/main">
+            <a:off x="1104900" y="4533900"/>
+            <a:ext cx="6419850" cy="9525"/>
+          </a:xfrm>
+          <a:prstGeom xmlns:a="http://schemas.openxmlformats.org/drawingml/2006/main" prst="rect">
+            <a:avLst/>
+          </a:prstGeom>
+          <a:solidFill xmlns:a="http://schemas.openxmlformats.org/drawingml/2006/main">
+            <a:srgbClr val="E4E7EC"/>
+          </a:solidFill>
+          <a:ln xmlns:a="http://schemas.openxmlformats.org/drawingml/2006/main" w="0">
+            <a:noFill/>
+            <a:prstDash val="solid"/>
+          </a:ln>
+        </p:spPr>
+      </p:sp>
+      <p:sp>
+        <p:nvSpPr>
+          <p:cNvPr id="17" name="">
+            <a:extLst xmlns:a="http://schemas.openxmlformats.org/drawingml/2006/main">
+              <a:ext uri="{FF2B5EF4-FFF2-40B4-BE49-F238E27FC236}">
+                <a16:creationId xmlns:a16="http://schemas.microsoft.com/office/drawing/2014/main" id="{6CB58F33-709A-4E8C-9C7F-E5A349A38D97}"/>
+              </a:ext>
+            </a:extLst>
+          </p:cNvPr>
+          <p:cNvSpPr>
+            <a:spLocks xmlns:a="http://schemas.openxmlformats.org/drawingml/2006/main" noGrp="1"/>
+          </p:cNvSpPr>
+          <p:nvPr/>
+        </p:nvSpPr>
+        <p:spPr>
+          <a:xfrm xmlns:a="http://schemas.openxmlformats.org/drawingml/2006/main">
+            <a:off x="552450" y="4762500"/>
+            <a:ext cx="457200" cy="285750"/>
+          </a:xfrm>
+          <a:prstGeom xmlns:a="http://schemas.openxmlformats.org/drawingml/2006/main" prst="rect">
+            <a:avLst/>
+          </a:prstGeom>
+          <a:noFill xmlns:a="http://schemas.openxmlformats.org/drawingml/2006/main"/>
+          <a:ln xmlns:a="http://schemas.openxmlformats.org/drawingml/2006/main" w="0">
+            <a:noFill/>
+            <a:prstDash val="solid"/>
+          </a:ln>
+        </p:spPr>
+        <p:txBody>
+          <a:bodyPr xmlns:a="http://schemas.openxmlformats.org/drawingml/2006/main"/>
+          <a:lstStyle xmlns:a="http://schemas.openxmlformats.org/drawingml/2006/main"/>
+          <a:p xmlns:a="http://schemas.openxmlformats.org/drawingml/2006/main">
+            <a:pPr>
+              <a:defRPr sz="1200" b="1">
+                <a:solidFill>
+                  <a:srgbClr val="FF6412"/>
+                </a:solidFill>
+              </a:defRPr>
+            </a:pPr>
+            <a:r>
+              <a:rPr sz="1200" b="1">
+                <a:solidFill>
+                  <a:srgbClr val="FF6412"/>
+                </a:solidFill>
+              </a:rPr>
+              <a:t>04</a:t>
+            </a:r>
+          </a:p>
+        </p:txBody>
+      </p:sp>
+      <p:sp>
+        <p:nvSpPr>
+          <p:cNvPr id="18" name="">
+            <a:extLst xmlns:a="http://schemas.openxmlformats.org/drawingml/2006/main">
+              <a:ext uri="{FF2B5EF4-FFF2-40B4-BE49-F238E27FC236}">
+                <a16:creationId xmlns:a16="http://schemas.microsoft.com/office/drawing/2014/main" id="{989698DC-22EC-4EAF-8D6D-265005503CDD}"/>
+              </a:ext>
+            </a:extLst>
+          </p:cNvPr>
+          <p:cNvSpPr>
+            <a:spLocks xmlns:a="http://schemas.openxmlformats.org/drawingml/2006/main" noGrp="1"/>
+          </p:cNvSpPr>
+          <p:nvPr/>
+        </p:nvSpPr>
+        <p:spPr>
+          <a:xfrm xmlns:a="http://schemas.openxmlformats.org/drawingml/2006/main">
+            <a:off x="1104900" y="4724400"/>
+            <a:ext cx="6419850" cy="742950"/>
+          </a:xfrm>
+          <a:prstGeom xmlns:a="http://schemas.openxmlformats.org/drawingml/2006/main" prst="rect">
+            <a:avLst/>
+          </a:prstGeom>
+          <a:noFill xmlns:a="http://schemas.openxmlformats.org/drawingml/2006/main"/>
+          <a:ln xmlns:a="http://schemas.openxmlformats.org/drawingml/2006/main" w="0">
+            <a:noFill/>
+            <a:prstDash val="solid"/>
+          </a:ln>
+        </p:spPr>
+        <p:txBody>
+          <a:bodyPr xmlns:a="http://schemas.openxmlformats.org/drawingml/2006/main"/>
+          <a:lstStyle xmlns:a="http://schemas.openxmlformats.org/drawingml/2006/main"/>
+          <a:p xmlns:a="http://schemas.openxmlformats.org/drawingml/2006/main">
+            <a:pPr>
+              <a:defRPr sz="1275">
+                <a:solidFill>
+                  <a:srgbClr val="161616"/>
+                </a:solidFill>
+              </a:defRPr>
+            </a:pPr>
+            <a:r>
+              <a:rPr sz="1275">
+                <a:solidFill>
+                  <a:srgbClr val="161616"/>
+                </a:solidFill>
+              </a:rPr>
+              <a:t>{{DECISION_4}}</a:t>
+            </a:r>
+          </a:p>
+        </p:txBody>
+      </p:sp>
+      <p:sp>
+        <p:nvSpPr>
+          <p:cNvPr id="19" name="">
+            <a:extLst xmlns:a="http://schemas.openxmlformats.org/drawingml/2006/main">
+              <a:ext uri="{FF2B5EF4-FFF2-40B4-BE49-F238E27FC236}">
+                <a16:creationId xmlns:a16="http://schemas.microsoft.com/office/drawing/2014/main" id="{C9B5C3D2-6CE5-4350-A7AE-CA3D45C1391B}"/>
+              </a:ext>
+            </a:extLst>
+          </p:cNvPr>
+          <p:cNvSpPr>
+            <a:spLocks xmlns:a="http://schemas.openxmlformats.org/drawingml/2006/main" noGrp="1"/>
+          </p:cNvSpPr>
+          <p:nvPr/>
+        </p:nvSpPr>
+        <p:spPr>
+          <a:xfrm xmlns:a="http://schemas.openxmlformats.org/drawingml/2006/main">
+            <a:off x="7905750" y="1390650"/>
+            <a:ext cx="3467100" cy="4705350"/>
+          </a:xfrm>
+          <a:prstGeom xmlns:a="http://schemas.openxmlformats.org/drawingml/2006/main" prst="roundRect">
+            <a:avLst>
+              <a:gd name="adj" fmla="val 3297"/>
+            </a:avLst>
+          </a:prstGeom>
+          <a:solidFill xmlns:a="http://schemas.openxmlformats.org/drawingml/2006/main">
+            <a:srgbClr val="FFF3EB"/>
+          </a:solidFill>
+          <a:ln xmlns:a="http://schemas.openxmlformats.org/drawingml/2006/main" w="9525">
+            <a:solidFill>
+              <a:srgbClr val="E4E7EC"/>
+            </a:solidFill>
+            <a:prstDash val="solid"/>
+          </a:ln>
+        </p:spPr>
+      </p:sp>
+      <p:sp>
+        <p:nvSpPr>
+          <p:cNvPr id="20" name="">
+            <a:extLst xmlns:a="http://schemas.openxmlformats.org/drawingml/2006/main">
+              <a:ext uri="{FF2B5EF4-FFF2-40B4-BE49-F238E27FC236}">
+                <a16:creationId xmlns:a16="http://schemas.microsoft.com/office/drawing/2014/main" id="{D332004F-604A-4207-BB17-3E9D2306A507}"/>
+              </a:ext>
+            </a:extLst>
+          </p:cNvPr>
+          <p:cNvSpPr>
+            <a:spLocks xmlns:a="http://schemas.openxmlformats.org/drawingml/2006/main" noGrp="1"/>
+          </p:cNvSpPr>
+          <p:nvPr/>
+        </p:nvSpPr>
+        <p:spPr>
+          <a:xfrm xmlns:a="http://schemas.openxmlformats.org/drawingml/2006/main">
+            <a:off x="8210550" y="1657350"/>
+            <a:ext cx="2857500" cy="628650"/>
           </a:xfrm>
           <a:prstGeom xmlns:a="http://schemas.openxmlformats.org/drawingml/2006/main" prst="rect">
             <a:avLst/>
@@ -8687,69 +11046,241 @@
           <a:lstStyle xmlns:a="http://schemas.openxmlformats.org/drawingml/2006/main"/>
           <a:p xmlns:a="http://schemas.openxmlformats.org/drawingml/2006/main">
             <a:pPr algn="ctr">
-              <a:defRPr sz="1275" b="1">
-                <a:solidFill>
-                  <a:srgbClr val="FFFFFF"/>
-                </a:solidFill>
-              </a:defRPr>
-            </a:pPr>
-            <a:r>
-              <a:rPr sz="1275" b="1">
-                <a:solidFill>
-                  <a:srgbClr val="FFFFFF"/>
-                </a:solidFill>
-              </a:rPr>
-              <a:t>Следующий шаг: согласовать приоритеты, владельцев и критерии результата</a:t>
-            </a:r>
-          </a:p>
-        </p:txBody>
-      </p:sp>
-      <p:sp>
-        <p:nvSpPr>
-          <p:cNvPr id="15" name="">
-            <a:extLst xmlns:a="http://schemas.openxmlformats.org/drawingml/2006/main">
-              <a:ext uri="{FF2B5EF4-FFF2-40B4-BE49-F238E27FC236}">
-                <a16:creationId xmlns:a16="http://schemas.microsoft.com/office/drawing/2014/main" id="{8A78E9C2-7844-488C-A63C-66F22706AB02}"/>
-              </a:ext>
-            </a:extLst>
-          </p:cNvPr>
-          <p:cNvSpPr>
-            <a:spLocks xmlns:a="http://schemas.openxmlformats.org/drawingml/2006/main" noGrp="1"/>
-          </p:cNvSpPr>
-          <p:nvPr/>
-        </p:nvSpPr>
-        <p:spPr>
-          <a:xfrm xmlns:a="http://schemas.openxmlformats.org/drawingml/2006/main">
-            <a:off x="7239000" y="5876925"/>
-            <a:ext cx="4286250" cy="228600"/>
-          </a:xfrm>
-          <a:prstGeom xmlns:a="http://schemas.openxmlformats.org/drawingml/2006/main" prst="rect">
-            <a:avLst/>
-          </a:prstGeom>
-          <a:noFill xmlns:a="http://schemas.openxmlformats.org/drawingml/2006/main"/>
-          <a:ln xmlns:a="http://schemas.openxmlformats.org/drawingml/2006/main" w="0">
-            <a:noFill/>
-            <a:prstDash val="solid"/>
-          </a:ln>
-        </p:spPr>
-        <p:txBody>
-          <a:bodyPr xmlns:a="http://schemas.openxmlformats.org/drawingml/2006/main"/>
-          <a:lstStyle xmlns:a="http://schemas.openxmlformats.org/drawingml/2006/main"/>
-          <a:p xmlns:a="http://schemas.openxmlformats.org/drawingml/2006/main">
-            <a:pPr algn="r">
-              <a:defRPr sz="975" b="1">
-                <a:solidFill>
-                  <a:srgbClr val="FFFFFF"/>
-                </a:solidFill>
-              </a:defRPr>
-            </a:pPr>
-            <a:r>
-              <a:rPr sz="975" b="1">
-                <a:solidFill>
-                  <a:srgbClr val="FFFFFF"/>
-                </a:solidFill>
-              </a:rPr>
-              <a:t>Khalil Audit System  |  by Ivan Rudoy</a:t>
+              <a:defRPr sz="1875" b="1">
+                <a:solidFill>
+                  <a:srgbClr val="161616"/>
+                </a:solidFill>
+              </a:defRPr>
+            </a:pPr>
+            <a:r>
+              <a:rPr sz="1875" b="1">
+                <a:solidFill>
+                  <a:srgbClr val="161616"/>
+                </a:solidFill>
+              </a:rPr>
+              <a:t>Хотите получить больше сведений?</a:t>
+            </a:r>
+          </a:p>
+        </p:txBody>
+      </p:sp>
+      <p:sp>
+        <p:nvSpPr>
+          <p:cNvPr id="21" name="">
+            <a:extLst xmlns:a="http://schemas.openxmlformats.org/drawingml/2006/main">
+              <a:ext uri="{FF2B5EF4-FFF2-40B4-BE49-F238E27FC236}">
+                <a16:creationId xmlns:a16="http://schemas.microsoft.com/office/drawing/2014/main" id="{8481B602-E3C2-4896-BEC9-8EB34F5C1B6E}"/>
+              </a:ext>
+            </a:extLst>
+          </p:cNvPr>
+          <p:cNvSpPr>
+            <a:spLocks xmlns:a="http://schemas.openxmlformats.org/drawingml/2006/main" noGrp="1"/>
+          </p:cNvSpPr>
+          <p:nvPr/>
+        </p:nvSpPr>
+        <p:spPr>
+          <a:xfrm xmlns:a="http://schemas.openxmlformats.org/drawingml/2006/main">
+            <a:off x="8248650" y="2305050"/>
+            <a:ext cx="2781300" cy="571500"/>
+          </a:xfrm>
+          <a:prstGeom xmlns:a="http://schemas.openxmlformats.org/drawingml/2006/main" prst="rect">
+            <a:avLst/>
+          </a:prstGeom>
+          <a:noFill xmlns:a="http://schemas.openxmlformats.org/drawingml/2006/main"/>
+          <a:ln xmlns:a="http://schemas.openxmlformats.org/drawingml/2006/main" w="0">
+            <a:noFill/>
+            <a:prstDash val="solid"/>
+          </a:ln>
+        </p:spPr>
+        <p:txBody>
+          <a:bodyPr xmlns:a="http://schemas.openxmlformats.org/drawingml/2006/main"/>
+          <a:lstStyle xmlns:a="http://schemas.openxmlformats.org/drawingml/2006/main"/>
+          <a:p xmlns:a="http://schemas.openxmlformats.org/drawingml/2006/main">
+            <a:pPr algn="ctr">
+              <a:defRPr sz="1200">
+                <a:solidFill>
+                  <a:srgbClr val="667085"/>
+                </a:solidFill>
+              </a:defRPr>
+            </a:pPr>
+            <a:r>
+              <a:rPr sz="1200">
+                <a:solidFill>
+                  <a:srgbClr val="667085"/>
+                </a:solidFill>
+              </a:rPr>
+              <a:t>Обсудим приоритеты, варианты решений и практический план внедрения.</a:t>
+            </a:r>
+          </a:p>
+        </p:txBody>
+      </p:sp>
+      <p:pic>
+        <p:nvPicPr>
+          <p:cNvPr id="47" name=""/>
+          <p:cNvPicPr>
+            <a:picLocks xmlns:a="http://schemas.openxmlformats.org/drawingml/2006/main" noChangeAspect="1"/>
+          </p:cNvPicPr>
+          <p:nvPr/>
+        </p:nvPicPr>
+        <p:blipFill>
+          <a:blip xmlns:r="http://schemas.openxmlformats.org/officeDocument/2006/relationships" xmlns:a="http://schemas.openxmlformats.org/drawingml/2006/main" r:embed="R188b775082614d2f"/>
+          <a:stretch xmlns:a="http://schemas.openxmlformats.org/drawingml/2006/main"/>
+        </p:blipFill>
+        <p:spPr>
+          <a:xfrm xmlns:a="http://schemas.openxmlformats.org/drawingml/2006/main">
+            <a:off x="8705850" y="2990850"/>
+            <a:ext cx="1866900" cy="1866900"/>
+          </a:xfrm>
+          <a:prstGeom xmlns:a="http://schemas.openxmlformats.org/drawingml/2006/main" prst="rect">
+            <a:avLst/>
+          </a:prstGeom>
+        </p:spPr>
+      </p:pic>
+      <p:sp>
+        <p:nvSpPr>
+          <p:cNvPr id="23" name="">
+            <a:extLst xmlns:a="http://schemas.openxmlformats.org/drawingml/2006/main">
+              <a:ext uri="{FF2B5EF4-FFF2-40B4-BE49-F238E27FC236}">
+                <a16:creationId xmlns:a16="http://schemas.microsoft.com/office/drawing/2014/main" id="{AF962E50-1266-4A72-925A-825FF83B792A}"/>
+              </a:ext>
+            </a:extLst>
+          </p:cNvPr>
+          <p:cNvSpPr>
+            <a:spLocks xmlns:a="http://schemas.openxmlformats.org/drawingml/2006/main" noGrp="1"/>
+          </p:cNvSpPr>
+          <p:nvPr/>
+        </p:nvSpPr>
+        <p:spPr>
+          <a:xfrm xmlns:a="http://schemas.openxmlformats.org/drawingml/2006/main">
+            <a:off x="8191500" y="4953000"/>
+            <a:ext cx="2895600" cy="266700"/>
+          </a:xfrm>
+          <a:prstGeom xmlns:a="http://schemas.openxmlformats.org/drawingml/2006/main" prst="rect">
+            <a:avLst/>
+          </a:prstGeom>
+          <a:noFill xmlns:a="http://schemas.openxmlformats.org/drawingml/2006/main"/>
+          <a:ln xmlns:a="http://schemas.openxmlformats.org/drawingml/2006/main" w="0">
+            <a:noFill/>
+            <a:prstDash val="solid"/>
+          </a:ln>
+        </p:spPr>
+        <p:txBody>
+          <a:bodyPr xmlns:a="http://schemas.openxmlformats.org/drawingml/2006/main"/>
+          <a:lstStyle xmlns:a="http://schemas.openxmlformats.org/drawingml/2006/main"/>
+          <a:p xmlns:a="http://schemas.openxmlformats.org/drawingml/2006/main">
+            <a:pPr algn="ctr">
+              <a:defRPr sz="975">
+                <a:solidFill>
+                  <a:srgbClr val="667085"/>
+                </a:solidFill>
+              </a:defRPr>
+            </a:pPr>
+            <a:r>
+              <a:rPr sz="975">
+                <a:solidFill>
+                  <a:srgbClr val="667085"/>
+                </a:solidFill>
+              </a:rPr>
+              <a:t>Сканируйте QR, чтобы сохранить контакты</a:t>
+            </a:r>
+          </a:p>
+        </p:txBody>
+      </p:sp>
+      <p:sp>
+        <p:nvSpPr>
+          <p:cNvPr id="24" name="">
+            <a:extLst xmlns:a="http://schemas.openxmlformats.org/drawingml/2006/main">
+              <a:ext uri="{FF2B5EF4-FFF2-40B4-BE49-F238E27FC236}">
+                <a16:creationId xmlns:a16="http://schemas.microsoft.com/office/drawing/2014/main" id="{86140A10-9A04-4DDA-8306-20A8D7CA251C}"/>
+              </a:ext>
+            </a:extLst>
+          </p:cNvPr>
+          <p:cNvSpPr>
+            <a:spLocks xmlns:a="http://schemas.openxmlformats.org/drawingml/2006/main" noGrp="1"/>
+          </p:cNvSpPr>
+          <p:nvPr/>
+        </p:nvSpPr>
+        <p:spPr>
+          <a:xfrm xmlns:a="http://schemas.openxmlformats.org/drawingml/2006/main">
+            <a:off x="8134350" y="5314950"/>
+            <a:ext cx="3009900" cy="228600"/>
+          </a:xfrm>
+          <a:prstGeom xmlns:a="http://schemas.openxmlformats.org/drawingml/2006/main" prst="rect">
+            <a:avLst/>
+          </a:prstGeom>
+          <a:noFill xmlns:a="http://schemas.openxmlformats.org/drawingml/2006/main"/>
+          <a:ln xmlns:a="http://schemas.openxmlformats.org/drawingml/2006/main" w="0">
+            <a:noFill/>
+            <a:prstDash val="solid"/>
+          </a:ln>
+        </p:spPr>
+        <p:txBody>
+          <a:bodyPr xmlns:a="http://schemas.openxmlformats.org/drawingml/2006/main"/>
+          <a:lstStyle xmlns:a="http://schemas.openxmlformats.org/drawingml/2006/main"/>
+          <a:p xmlns:a="http://schemas.openxmlformats.org/drawingml/2006/main">
+            <a:pPr algn="ctr">
+              <a:defRPr sz="1125" b="1">
+                <a:solidFill>
+                  <a:srgbClr val="FF6412"/>
+                </a:solidFill>
+              </a:defRPr>
+            </a:pPr>
+            <a:r>
+              <a:rPr sz="1125" b="1">
+                <a:solidFill>
+                  <a:srgbClr val="FF6412"/>
+                </a:solidFill>
+              </a:rPr>
+              <a:t>info@khalilgroup.kz</a:t>
+            </a:r>
+          </a:p>
+        </p:txBody>
+      </p:sp>
+      <p:sp>
+        <p:nvSpPr>
+          <p:cNvPr id="25" name="">
+            <a:extLst xmlns:a="http://schemas.openxmlformats.org/drawingml/2006/main">
+              <a:ext uri="{FF2B5EF4-FFF2-40B4-BE49-F238E27FC236}">
+                <a16:creationId xmlns:a16="http://schemas.microsoft.com/office/drawing/2014/main" id="{D9DCEE38-1996-4686-BF52-AB9FDB0EFE29}"/>
+              </a:ext>
+            </a:extLst>
+          </p:cNvPr>
+          <p:cNvSpPr>
+            <a:spLocks xmlns:a="http://schemas.openxmlformats.org/drawingml/2006/main" noGrp="1"/>
+          </p:cNvSpPr>
+          <p:nvPr/>
+        </p:nvSpPr>
+        <p:spPr>
+          <a:xfrm xmlns:a="http://schemas.openxmlformats.org/drawingml/2006/main">
+            <a:off x="8134350" y="5581650"/>
+            <a:ext cx="3009900" cy="228600"/>
+          </a:xfrm>
+          <a:prstGeom xmlns:a="http://schemas.openxmlformats.org/drawingml/2006/main" prst="rect">
+            <a:avLst/>
+          </a:prstGeom>
+          <a:noFill xmlns:a="http://schemas.openxmlformats.org/drawingml/2006/main"/>
+          <a:ln xmlns:a="http://schemas.openxmlformats.org/drawingml/2006/main" w="0">
+            <a:noFill/>
+            <a:prstDash val="solid"/>
+          </a:ln>
+        </p:spPr>
+        <p:txBody>
+          <a:bodyPr xmlns:a="http://schemas.openxmlformats.org/drawingml/2006/main"/>
+          <a:lstStyle xmlns:a="http://schemas.openxmlformats.org/drawingml/2006/main"/>
+          <a:p xmlns:a="http://schemas.openxmlformats.org/drawingml/2006/main">
+            <a:pPr algn="ctr">
+              <a:defRPr sz="1125" b="1">
+                <a:solidFill>
+                  <a:srgbClr val="161616"/>
+                </a:solidFill>
+              </a:defRPr>
+            </a:pPr>
+            <a:r>
+              <a:rPr sz="1125" b="1">
+                <a:solidFill>
+                  <a:srgbClr val="161616"/>
+                </a:solidFill>
+              </a:rPr>
+              <a:t>+7 706 701 48 35</a:t>
             </a:r>
           </a:p>
         </p:txBody>
@@ -8757,7 +11288,7 @@
     </p:spTree>
     <p:extLst>
       <p:ext uri="{BB962C8B-B14F-4D97-AF65-F5344CB8AC3E}">
-        <p14:creationId xmlns:p14="http://schemas.microsoft.com/office/powerpoint/2010/main" val="403134430"/>
+        <p14:creationId xmlns:p14="http://schemas.microsoft.com/office/powerpoint/2010/main" val="1394581934"/>
       </p:ext>
     </p:extLst>
   </p:cSld>

--- a/static/audit_presentation_khalil.pptx
+++ b/static/audit_presentation_khalil.pptx
@@ -2,20 +2,20 @@
 <file path=ppt/presentation.xml><?xml version="1.0" encoding="utf-8"?>
 <p:presentation xmlns:p="http://schemas.openxmlformats.org/presentationml/2006/main">
   <p:sldMasterIdLst>
-    <p:sldMasterId xmlns:r="http://schemas.openxmlformats.org/officeDocument/2006/relationships" id="2147483648" r:id="R11dde32025024150"/>
+    <p:sldMasterId xmlns:r="http://schemas.openxmlformats.org/officeDocument/2006/relationships" id="2147483648" r:id="R982adf2f485446c4"/>
   </p:sldMasterIdLst>
   <p:notesMasterIdLst>
-    <p:notesMasterId xmlns:r="http://schemas.openxmlformats.org/officeDocument/2006/relationships" r:id="R9ced71cf198e40f8"/>
+    <p:notesMasterId xmlns:r="http://schemas.openxmlformats.org/officeDocument/2006/relationships" r:id="R1892d6f9ccb94827"/>
   </p:notesMasterIdLst>
   <p:sldIdLst>
-    <p:sldId xmlns:r="http://schemas.openxmlformats.org/officeDocument/2006/relationships" id="256" r:id="Rc60936aadbf64464"/>
-    <p:sldId xmlns:r="http://schemas.openxmlformats.org/officeDocument/2006/relationships" id="257" r:id="R3bdeaf6b16c747b9"/>
-    <p:sldId xmlns:r="http://schemas.openxmlformats.org/officeDocument/2006/relationships" id="258" r:id="R67dc3e26595048d6"/>
-    <p:sldId xmlns:r="http://schemas.openxmlformats.org/officeDocument/2006/relationships" id="259" r:id="Rf4398af4e5274f2a"/>
-    <p:sldId xmlns:r="http://schemas.openxmlformats.org/officeDocument/2006/relationships" id="260" r:id="Re9979d1892494353"/>
-    <p:sldId xmlns:r="http://schemas.openxmlformats.org/officeDocument/2006/relationships" id="261" r:id="R99a4a714c4f64654"/>
-    <p:sldId xmlns:r="http://schemas.openxmlformats.org/officeDocument/2006/relationships" id="262" r:id="R2521038e76ed463d"/>
-    <p:sldId xmlns:r="http://schemas.openxmlformats.org/officeDocument/2006/relationships" id="263" r:id="R3da430677aa24f7f"/>
+    <p:sldId xmlns:r="http://schemas.openxmlformats.org/officeDocument/2006/relationships" id="256" r:id="R88387043d83d4e68"/>
+    <p:sldId xmlns:r="http://schemas.openxmlformats.org/officeDocument/2006/relationships" id="257" r:id="Rb333e184529944c5"/>
+    <p:sldId xmlns:r="http://schemas.openxmlformats.org/officeDocument/2006/relationships" id="258" r:id="Rb2d99d4eedab46af"/>
+    <p:sldId xmlns:r="http://schemas.openxmlformats.org/officeDocument/2006/relationships" id="259" r:id="Rf0cd254aeced4d94"/>
+    <p:sldId xmlns:r="http://schemas.openxmlformats.org/officeDocument/2006/relationships" id="260" r:id="R41f09ae1851f4618"/>
+    <p:sldId xmlns:r="http://schemas.openxmlformats.org/officeDocument/2006/relationships" id="261" r:id="R4a34fdb1b66d4d0c"/>
+    <p:sldId xmlns:r="http://schemas.openxmlformats.org/officeDocument/2006/relationships" id="262" r:id="R1e169c5cd4124f0c"/>
+    <p:sldId xmlns:r="http://schemas.openxmlformats.org/officeDocument/2006/relationships" id="263" r:id="R0c76a433880c4b59"/>
   </p:sldIdLst>
   <p:sldSz cx="12192000" cy="6858000"/>
   <p:notesSz cx="6858000" cy="9144000"/>
@@ -1070,7 +1070,7 @@
   </p:cSld>
   <p:clrMap bg1="lt1" tx1="dk1" bg2="lt2" tx2="dk2" accent1="accent1" accent2="accent2" accent3="accent3" accent4="accent4" accent5="accent5" accent6="accent6" hlink="hlink" folHlink="folHlink"/>
   <p:sldLayoutIdLst>
-    <p:sldLayoutId xmlns:r="http://schemas.openxmlformats.org/officeDocument/2006/relationships" id="2147483649" r:id="R1d5753c8684e4754"/>
+    <p:sldLayoutId xmlns:r="http://schemas.openxmlformats.org/officeDocument/2006/relationships" id="2147483649" r:id="R4c89658b743b42f1"/>
   </p:sldLayoutIdLst>
   <p:txStyles>
     <p:titleStyle>
@@ -1621,7 +1621,7 @@
           <p:cNvPr id="1" name="">
             <a:extLst xmlns:a="http://schemas.openxmlformats.org/drawingml/2006/main">
               <a:ext uri="{FF2B5EF4-FFF2-40B4-BE49-F238E27FC236}">
-                <a16:creationId xmlns:a16="http://schemas.microsoft.com/office/drawing/2014/main" id="{97FF487E-1EDD-4DBE-B33A-36A650EFF99A}"/>
+                <a16:creationId xmlns:a16="http://schemas.microsoft.com/office/drawing/2014/main" id="{2383C2B3-E291-48D8-8C2F-C7860ACBD6E6}"/>
               </a:ext>
             </a:extLst>
           </p:cNvPr>
@@ -1652,7 +1652,7 @@
           <p:cNvPr id="2" name="">
             <a:extLst xmlns:a="http://schemas.openxmlformats.org/drawingml/2006/main">
               <a:ext uri="{FF2B5EF4-FFF2-40B4-BE49-F238E27FC236}">
-                <a16:creationId xmlns:a16="http://schemas.microsoft.com/office/drawing/2014/main" id="{7F00005D-DCE7-4192-97A3-5973CF06A05E}"/>
+                <a16:creationId xmlns:a16="http://schemas.microsoft.com/office/drawing/2014/main" id="{B6B6A1E8-35D9-4E6D-89EC-A4B1E28AAD70}"/>
               </a:ext>
             </a:extLst>
           </p:cNvPr>
@@ -1687,7 +1687,7 @@
           <p:nvPr/>
         </p:nvPicPr>
         <p:blipFill>
-          <a:blip xmlns:r="http://schemas.openxmlformats.org/officeDocument/2006/relationships" xmlns:a="http://schemas.openxmlformats.org/drawingml/2006/main" r:embed="R2e93d92b7bea46a4"/>
+          <a:blip xmlns:r="http://schemas.openxmlformats.org/officeDocument/2006/relationships" xmlns:a="http://schemas.openxmlformats.org/drawingml/2006/main" r:embed="Rfde7d0a8d89b45b6"/>
           <a:stretch xmlns:a="http://schemas.openxmlformats.org/drawingml/2006/main"/>
         </p:blipFill>
         <p:spPr>
@@ -1705,7 +1705,7 @@
           <p:cNvPr id="4" name="">
             <a:extLst xmlns:a="http://schemas.openxmlformats.org/drawingml/2006/main">
               <a:ext uri="{FF2B5EF4-FFF2-40B4-BE49-F238E27FC236}">
-                <a16:creationId xmlns:a16="http://schemas.microsoft.com/office/drawing/2014/main" id="{AFFBA393-6477-4AB0-BA35-F671E49EF737}"/>
+                <a16:creationId xmlns:a16="http://schemas.microsoft.com/office/drawing/2014/main" id="{FF5187EB-0EDE-4784-A100-66E245545DC4}"/>
               </a:ext>
             </a:extLst>
           </p:cNvPr>
@@ -1755,7 +1755,7 @@
           <p:cNvPr id="5" name="">
             <a:extLst xmlns:a="http://schemas.openxmlformats.org/drawingml/2006/main">
               <a:ext uri="{FF2B5EF4-FFF2-40B4-BE49-F238E27FC236}">
-                <a16:creationId xmlns:a16="http://schemas.microsoft.com/office/drawing/2014/main" id="{0ED911BE-147C-4554-BC4F-2D9775BE7018}"/>
+                <a16:creationId xmlns:a16="http://schemas.microsoft.com/office/drawing/2014/main" id="{2D5C7EBC-6675-49E0-B73B-215F4CD510FE}"/>
               </a:ext>
             </a:extLst>
           </p:cNvPr>
@@ -1805,7 +1805,7 @@
           <p:cNvPr id="6" name="">
             <a:extLst xmlns:a="http://schemas.openxmlformats.org/drawingml/2006/main">
               <a:ext uri="{FF2B5EF4-FFF2-40B4-BE49-F238E27FC236}">
-                <a16:creationId xmlns:a16="http://schemas.microsoft.com/office/drawing/2014/main" id="{4C8874B8-8CEF-43E4-A76E-8DB575963806}"/>
+                <a16:creationId xmlns:a16="http://schemas.microsoft.com/office/drawing/2014/main" id="{832AABFC-375A-4C82-BDD7-91EF7E2F8A89}"/>
               </a:ext>
             </a:extLst>
           </p:cNvPr>
@@ -1855,7 +1855,7 @@
           <p:cNvPr id="7" name="">
             <a:extLst xmlns:a="http://schemas.openxmlformats.org/drawingml/2006/main">
               <a:ext uri="{FF2B5EF4-FFF2-40B4-BE49-F238E27FC236}">
-                <a16:creationId xmlns:a16="http://schemas.microsoft.com/office/drawing/2014/main" id="{2AB92A24-4EFC-4083-9424-D8BE6D4755D8}"/>
+                <a16:creationId xmlns:a16="http://schemas.microsoft.com/office/drawing/2014/main" id="{EA884043-15A3-40E3-AEA9-EC53EF60CF82}"/>
               </a:ext>
             </a:extLst>
           </p:cNvPr>
@@ -1888,7 +1888,7 @@
           <p:cNvPr id="8" name="">
             <a:extLst xmlns:a="http://schemas.openxmlformats.org/drawingml/2006/main">
               <a:ext uri="{FF2B5EF4-FFF2-40B4-BE49-F238E27FC236}">
-                <a16:creationId xmlns:a16="http://schemas.microsoft.com/office/drawing/2014/main" id="{0D73DC4C-5498-4F8F-A57C-507EC6E934DE}"/>
+                <a16:creationId xmlns:a16="http://schemas.microsoft.com/office/drawing/2014/main" id="{F26545DA-F93E-4C6C-A922-07A1ED1047E8}"/>
               </a:ext>
             </a:extLst>
           </p:cNvPr>
@@ -1938,7 +1938,7 @@
           <p:cNvPr id="9" name="">
             <a:extLst xmlns:a="http://schemas.openxmlformats.org/drawingml/2006/main">
               <a:ext uri="{FF2B5EF4-FFF2-40B4-BE49-F238E27FC236}">
-                <a16:creationId xmlns:a16="http://schemas.microsoft.com/office/drawing/2014/main" id="{2FB1E50C-8F8F-44A2-A24C-2877E58104E4}"/>
+                <a16:creationId xmlns:a16="http://schemas.microsoft.com/office/drawing/2014/main" id="{A07A7A10-92B6-4A27-AE01-AE3CF0FD0E33}"/>
               </a:ext>
             </a:extLst>
           </p:cNvPr>
@@ -1988,7 +1988,7 @@
           <p:cNvPr id="10" name="">
             <a:extLst xmlns:a="http://schemas.openxmlformats.org/drawingml/2006/main">
               <a:ext uri="{FF2B5EF4-FFF2-40B4-BE49-F238E27FC236}">
-                <a16:creationId xmlns:a16="http://schemas.microsoft.com/office/drawing/2014/main" id="{44D0DB36-B30F-41D9-BDD4-71F9C919DC56}"/>
+                <a16:creationId xmlns:a16="http://schemas.microsoft.com/office/drawing/2014/main" id="{673F60FC-06B4-4D1F-90C0-0FB2EB33C719}"/>
               </a:ext>
             </a:extLst>
           </p:cNvPr>
@@ -2021,7 +2021,7 @@
           <p:cNvPr id="11" name="">
             <a:extLst xmlns:a="http://schemas.openxmlformats.org/drawingml/2006/main">
               <a:ext uri="{FF2B5EF4-FFF2-40B4-BE49-F238E27FC236}">
-                <a16:creationId xmlns:a16="http://schemas.microsoft.com/office/drawing/2014/main" id="{CBEA07F1-F7F9-465C-A395-910C60A564F4}"/>
+                <a16:creationId xmlns:a16="http://schemas.microsoft.com/office/drawing/2014/main" id="{F0B111EB-BDDA-47BD-8311-72B63D99F9A3}"/>
               </a:ext>
             </a:extLst>
           </p:cNvPr>
@@ -2071,7 +2071,7 @@
           <p:cNvPr id="12" name="">
             <a:extLst xmlns:a="http://schemas.openxmlformats.org/drawingml/2006/main">
               <a:ext uri="{FF2B5EF4-FFF2-40B4-BE49-F238E27FC236}">
-                <a16:creationId xmlns:a16="http://schemas.microsoft.com/office/drawing/2014/main" id="{3F1FFB3C-E49A-4624-9597-B79E16DB1652}"/>
+                <a16:creationId xmlns:a16="http://schemas.microsoft.com/office/drawing/2014/main" id="{DD2D125E-631C-4FED-A911-7E7A0AA3CB28}"/>
               </a:ext>
             </a:extLst>
           </p:cNvPr>
@@ -2121,7 +2121,7 @@
           <p:cNvPr id="13" name="">
             <a:extLst xmlns:a="http://schemas.openxmlformats.org/drawingml/2006/main">
               <a:ext uri="{FF2B5EF4-FFF2-40B4-BE49-F238E27FC236}">
-                <a16:creationId xmlns:a16="http://schemas.microsoft.com/office/drawing/2014/main" id="{FDAFF6BB-60C5-47EB-9210-4C9ECA5B0A15}"/>
+                <a16:creationId xmlns:a16="http://schemas.microsoft.com/office/drawing/2014/main" id="{E6DC24CA-CFD2-4FE8-B900-631ED8720F83}"/>
               </a:ext>
             </a:extLst>
           </p:cNvPr>
@@ -2175,7 +2175,7 @@
           <p:nvPr/>
         </p:nvPicPr>
         <p:blipFill>
-          <a:blip xmlns:r="http://schemas.openxmlformats.org/officeDocument/2006/relationships" xmlns:a="http://schemas.openxmlformats.org/drawingml/2006/main" r:embed="Rf7374e47715143e7"/>
+          <a:blip xmlns:r="http://schemas.openxmlformats.org/officeDocument/2006/relationships" xmlns:a="http://schemas.openxmlformats.org/drawingml/2006/main" r:embed="R9e9dc9bcf6f0482a"/>
           <a:srcRect xmlns:a="http://schemas.openxmlformats.org/drawingml/2006/main" l="5453" t="0" r="5453" b="0"/>
           <a:stretch xmlns:a="http://schemas.openxmlformats.org/drawingml/2006/main">
             <a:fillRect l="0" t="0" r="0" b="0"/>
@@ -2196,7 +2196,7 @@
           <p:cNvPr id="15" name="">
             <a:extLst xmlns:a="http://schemas.openxmlformats.org/drawingml/2006/main">
               <a:ext uri="{FF2B5EF4-FFF2-40B4-BE49-F238E27FC236}">
-                <a16:creationId xmlns:a16="http://schemas.microsoft.com/office/drawing/2014/main" id="{19084D76-9DB0-4A09-938B-44CE1C5392FC}"/>
+                <a16:creationId xmlns:a16="http://schemas.microsoft.com/office/drawing/2014/main" id="{1C8BFAB7-7640-4F44-B6F6-87F1246C4E4B}"/>
               </a:ext>
             </a:extLst>
           </p:cNvPr>
@@ -2227,7 +2227,7 @@
           <p:cNvPr id="16" name="">
             <a:extLst xmlns:a="http://schemas.openxmlformats.org/drawingml/2006/main">
               <a:ext uri="{FF2B5EF4-FFF2-40B4-BE49-F238E27FC236}">
-                <a16:creationId xmlns:a16="http://schemas.microsoft.com/office/drawing/2014/main" id="{F37C8587-B886-4658-8C53-845C1D350858}"/>
+                <a16:creationId xmlns:a16="http://schemas.microsoft.com/office/drawing/2014/main" id="{A8F3E87D-15FD-41AA-876F-5886B05345F8}"/>
               </a:ext>
             </a:extLst>
           </p:cNvPr>
@@ -2275,7 +2275,7 @@
     </p:spTree>
     <p:extLst>
       <p:ext uri="{BB962C8B-B14F-4D97-AF65-F5344CB8AC3E}">
-        <p14:creationId xmlns:p14="http://schemas.microsoft.com/office/powerpoint/2010/main" val="1316263158"/>
+        <p14:creationId xmlns:p14="http://schemas.microsoft.com/office/powerpoint/2010/main" val="1123301306"/>
       </p:ext>
     </p:extLst>
   </p:cSld>
@@ -2306,7 +2306,7 @@
           <p:cNvPr id="1" name="">
             <a:extLst xmlns:a="http://schemas.openxmlformats.org/drawingml/2006/main">
               <a:ext uri="{FF2B5EF4-FFF2-40B4-BE49-F238E27FC236}">
-                <a16:creationId xmlns:a16="http://schemas.microsoft.com/office/drawing/2014/main" id="{3703F741-7B43-457F-949B-5790C52D00C1}"/>
+                <a16:creationId xmlns:a16="http://schemas.microsoft.com/office/drawing/2014/main" id="{D9F66DAF-870D-4A84-BFAD-9D2FC24C3215}"/>
               </a:ext>
             </a:extLst>
           </p:cNvPr>
@@ -2341,7 +2341,7 @@
           <p:nvPr/>
         </p:nvPicPr>
         <p:blipFill>
-          <a:blip xmlns:r="http://schemas.openxmlformats.org/officeDocument/2006/relationships" xmlns:a="http://schemas.openxmlformats.org/drawingml/2006/main" r:embed="R995c866f65c14d18"/>
+          <a:blip xmlns:r="http://schemas.openxmlformats.org/officeDocument/2006/relationships" xmlns:a="http://schemas.openxmlformats.org/drawingml/2006/main" r:embed="R8de4c7862970492a"/>
           <a:stretch xmlns:a="http://schemas.openxmlformats.org/drawingml/2006/main"/>
         </p:blipFill>
         <p:spPr>
@@ -2359,7 +2359,7 @@
           <p:cNvPr id="3" name="">
             <a:extLst xmlns:a="http://schemas.openxmlformats.org/drawingml/2006/main">
               <a:ext uri="{FF2B5EF4-FFF2-40B4-BE49-F238E27FC236}">
-                <a16:creationId xmlns:a16="http://schemas.microsoft.com/office/drawing/2014/main" id="{BECEA233-8FFE-4D20-B41D-689025DD0380}"/>
+                <a16:creationId xmlns:a16="http://schemas.microsoft.com/office/drawing/2014/main" id="{C1A49023-FB82-4DF4-AE0A-B72675C1FDD4}"/>
               </a:ext>
             </a:extLst>
           </p:cNvPr>
@@ -2409,7 +2409,7 @@
           <p:cNvPr id="4" name="">
             <a:extLst xmlns:a="http://schemas.openxmlformats.org/drawingml/2006/main">
               <a:ext uri="{FF2B5EF4-FFF2-40B4-BE49-F238E27FC236}">
-                <a16:creationId xmlns:a16="http://schemas.microsoft.com/office/drawing/2014/main" id="{902FC9AF-8210-4F28-9A88-6384FC72EBA0}"/>
+                <a16:creationId xmlns:a16="http://schemas.microsoft.com/office/drawing/2014/main" id="{0A37F1A1-DA1C-4AF6-A402-3D97956E0A15}"/>
               </a:ext>
             </a:extLst>
           </p:cNvPr>
@@ -2442,7 +2442,7 @@
           <p:cNvPr id="5" name="">
             <a:extLst xmlns:a="http://schemas.openxmlformats.org/drawingml/2006/main">
               <a:ext uri="{FF2B5EF4-FFF2-40B4-BE49-F238E27FC236}">
-                <a16:creationId xmlns:a16="http://schemas.microsoft.com/office/drawing/2014/main" id="{17D0E841-1E58-496A-BD9F-2383F6CB024F}"/>
+                <a16:creationId xmlns:a16="http://schemas.microsoft.com/office/drawing/2014/main" id="{18A38AC5-EB78-40E0-AA88-C9D10A615619}"/>
               </a:ext>
             </a:extLst>
           </p:cNvPr>
@@ -2473,7 +2473,7 @@
           <p:cNvPr id="6" name="">
             <a:extLst xmlns:a="http://schemas.openxmlformats.org/drawingml/2006/main">
               <a:ext uri="{FF2B5EF4-FFF2-40B4-BE49-F238E27FC236}">
-                <a16:creationId xmlns:a16="http://schemas.microsoft.com/office/drawing/2014/main" id="{4EDFB2C6-647A-440D-A993-3D36F30A15E2}"/>
+                <a16:creationId xmlns:a16="http://schemas.microsoft.com/office/drawing/2014/main" id="{F2E334BF-C046-4C53-AD73-B5F1892F10DE}"/>
               </a:ext>
             </a:extLst>
           </p:cNvPr>
@@ -2523,7 +2523,7 @@
           <p:cNvPr id="7" name="">
             <a:extLst xmlns:a="http://schemas.openxmlformats.org/drawingml/2006/main">
               <a:ext uri="{FF2B5EF4-FFF2-40B4-BE49-F238E27FC236}">
-                <a16:creationId xmlns:a16="http://schemas.microsoft.com/office/drawing/2014/main" id="{68C2A410-87E6-488A-9516-FC245E1E90A6}"/>
+                <a16:creationId xmlns:a16="http://schemas.microsoft.com/office/drawing/2014/main" id="{F1F5F58B-2B18-4D48-8A9B-A343BBC08FDB}"/>
               </a:ext>
             </a:extLst>
           </p:cNvPr>
@@ -2573,7 +2573,7 @@
           <p:cNvPr id="8" name="">
             <a:extLst xmlns:a="http://schemas.openxmlformats.org/drawingml/2006/main">
               <a:ext uri="{FF2B5EF4-FFF2-40B4-BE49-F238E27FC236}">
-                <a16:creationId xmlns:a16="http://schemas.microsoft.com/office/drawing/2014/main" id="{2446937F-5242-4BEC-B69D-7CEA0E72BFC9}"/>
+                <a16:creationId xmlns:a16="http://schemas.microsoft.com/office/drawing/2014/main" id="{2FB1FA33-9DE5-483E-B1AE-AE3F81026693}"/>
               </a:ext>
             </a:extLst>
           </p:cNvPr>
@@ -2623,7 +2623,7 @@
           <p:cNvPr id="9" name="">
             <a:extLst xmlns:a="http://schemas.openxmlformats.org/drawingml/2006/main">
               <a:ext uri="{FF2B5EF4-FFF2-40B4-BE49-F238E27FC236}">
-                <a16:creationId xmlns:a16="http://schemas.microsoft.com/office/drawing/2014/main" id="{E95DE043-91A8-45DA-9B05-D64A79DA93F9}"/>
+                <a16:creationId xmlns:a16="http://schemas.microsoft.com/office/drawing/2014/main" id="{31269965-CF01-4621-943F-9A707995A347}"/>
               </a:ext>
             </a:extLst>
           </p:cNvPr>
@@ -2673,7 +2673,7 @@
           <p:cNvPr id="10" name="">
             <a:extLst xmlns:a="http://schemas.openxmlformats.org/drawingml/2006/main">
               <a:ext uri="{FF2B5EF4-FFF2-40B4-BE49-F238E27FC236}">
-                <a16:creationId xmlns:a16="http://schemas.microsoft.com/office/drawing/2014/main" id="{E606FE7A-3C92-4FFF-B28D-1C52FB1AD7D1}"/>
+                <a16:creationId xmlns:a16="http://schemas.microsoft.com/office/drawing/2014/main" id="{D86A1E03-4640-4953-AABE-076F253D6EE2}"/>
               </a:ext>
             </a:extLst>
           </p:cNvPr>
@@ -2723,7 +2723,7 @@
           <p:cNvPr id="11" name="">
             <a:extLst xmlns:a="http://schemas.openxmlformats.org/drawingml/2006/main">
               <a:ext uri="{FF2B5EF4-FFF2-40B4-BE49-F238E27FC236}">
-                <a16:creationId xmlns:a16="http://schemas.microsoft.com/office/drawing/2014/main" id="{46228556-943C-4A94-8685-C4EA4D294CE0}"/>
+                <a16:creationId xmlns:a16="http://schemas.microsoft.com/office/drawing/2014/main" id="{1EDF5FF8-58E1-4CAB-AE01-5AC4245857A3}"/>
               </a:ext>
             </a:extLst>
           </p:cNvPr>
@@ -2754,7 +2754,7 @@
           <p:cNvPr id="12" name="">
             <a:extLst xmlns:a="http://schemas.openxmlformats.org/drawingml/2006/main">
               <a:ext uri="{FF2B5EF4-FFF2-40B4-BE49-F238E27FC236}">
-                <a16:creationId xmlns:a16="http://schemas.microsoft.com/office/drawing/2014/main" id="{C90618A6-5594-4B85-98FF-FE7404FC4B42}"/>
+                <a16:creationId xmlns:a16="http://schemas.microsoft.com/office/drawing/2014/main" id="{E74DC487-E1DE-487E-A835-E789829D7EE3}"/>
               </a:ext>
             </a:extLst>
           </p:cNvPr>
@@ -2804,7 +2804,7 @@
           <p:cNvPr id="13" name="">
             <a:extLst xmlns:a="http://schemas.openxmlformats.org/drawingml/2006/main">
               <a:ext uri="{FF2B5EF4-FFF2-40B4-BE49-F238E27FC236}">
-                <a16:creationId xmlns:a16="http://schemas.microsoft.com/office/drawing/2014/main" id="{A690ED7B-7B42-4BF2-9E3C-C4D41C7BC053}"/>
+                <a16:creationId xmlns:a16="http://schemas.microsoft.com/office/drawing/2014/main" id="{3BB8C540-5EC3-4621-AA05-8FEDD6DD9EF6}"/>
               </a:ext>
             </a:extLst>
           </p:cNvPr>
@@ -2854,7 +2854,7 @@
           <p:cNvPr id="14" name="">
             <a:extLst xmlns:a="http://schemas.openxmlformats.org/drawingml/2006/main">
               <a:ext uri="{FF2B5EF4-FFF2-40B4-BE49-F238E27FC236}">
-                <a16:creationId xmlns:a16="http://schemas.microsoft.com/office/drawing/2014/main" id="{217117F1-F7FF-4F5E-90A5-22789A2E49AC}"/>
+                <a16:creationId xmlns:a16="http://schemas.microsoft.com/office/drawing/2014/main" id="{2F8FCE3B-CE69-492A-A4C8-75142C596055}"/>
               </a:ext>
             </a:extLst>
           </p:cNvPr>
@@ -2885,7 +2885,7 @@
           <p:cNvPr id="15" name="">
             <a:extLst xmlns:a="http://schemas.openxmlformats.org/drawingml/2006/main">
               <a:ext uri="{FF2B5EF4-FFF2-40B4-BE49-F238E27FC236}">
-                <a16:creationId xmlns:a16="http://schemas.microsoft.com/office/drawing/2014/main" id="{FB276E43-4BFF-4690-94BD-9969CE6F757E}"/>
+                <a16:creationId xmlns:a16="http://schemas.microsoft.com/office/drawing/2014/main" id="{96A63AE6-2633-49B9-80A4-0E13E9D2CAC6}"/>
               </a:ext>
             </a:extLst>
           </p:cNvPr>
@@ -2935,7 +2935,7 @@
           <p:cNvPr id="16" name="">
             <a:extLst xmlns:a="http://schemas.openxmlformats.org/drawingml/2006/main">
               <a:ext uri="{FF2B5EF4-FFF2-40B4-BE49-F238E27FC236}">
-                <a16:creationId xmlns:a16="http://schemas.microsoft.com/office/drawing/2014/main" id="{2743F487-8FCC-437E-916A-3ED6FAB4453F}"/>
+                <a16:creationId xmlns:a16="http://schemas.microsoft.com/office/drawing/2014/main" id="{2CDF38BC-3F17-4E11-A0B5-45FF88249E9D}"/>
               </a:ext>
             </a:extLst>
           </p:cNvPr>
@@ -2985,7 +2985,7 @@
           <p:cNvPr id="17" name="">
             <a:extLst xmlns:a="http://schemas.openxmlformats.org/drawingml/2006/main">
               <a:ext uri="{FF2B5EF4-FFF2-40B4-BE49-F238E27FC236}">
-                <a16:creationId xmlns:a16="http://schemas.microsoft.com/office/drawing/2014/main" id="{2F0D81B0-A567-4946-A2D3-800550AD9FE3}"/>
+                <a16:creationId xmlns:a16="http://schemas.microsoft.com/office/drawing/2014/main" id="{F1A157CD-0A37-4F36-A243-B281A33CF81E}"/>
               </a:ext>
             </a:extLst>
           </p:cNvPr>
@@ -3016,7 +3016,7 @@
           <p:cNvPr id="18" name="">
             <a:extLst xmlns:a="http://schemas.openxmlformats.org/drawingml/2006/main">
               <a:ext uri="{FF2B5EF4-FFF2-40B4-BE49-F238E27FC236}">
-                <a16:creationId xmlns:a16="http://schemas.microsoft.com/office/drawing/2014/main" id="{22EC4666-549E-4982-BF6A-F331E39E7B4C}"/>
+                <a16:creationId xmlns:a16="http://schemas.microsoft.com/office/drawing/2014/main" id="{82CD7742-614D-44AD-A367-8C310BE89312}"/>
               </a:ext>
             </a:extLst>
           </p:cNvPr>
@@ -3066,7 +3066,7 @@
           <p:cNvPr id="19" name="">
             <a:extLst xmlns:a="http://schemas.openxmlformats.org/drawingml/2006/main">
               <a:ext uri="{FF2B5EF4-FFF2-40B4-BE49-F238E27FC236}">
-                <a16:creationId xmlns:a16="http://schemas.microsoft.com/office/drawing/2014/main" id="{67DDFDA5-8D86-424B-9F32-8E9F6F92F5BC}"/>
+                <a16:creationId xmlns:a16="http://schemas.microsoft.com/office/drawing/2014/main" id="{4B021ECA-6B46-4864-9DA4-7C299FDFB0F3}"/>
               </a:ext>
             </a:extLst>
           </p:cNvPr>
@@ -3114,7 +3114,7 @@
     </p:spTree>
     <p:extLst>
       <p:ext uri="{BB962C8B-B14F-4D97-AF65-F5344CB8AC3E}">
-        <p14:creationId xmlns:p14="http://schemas.microsoft.com/office/powerpoint/2010/main" val="1426213452"/>
+        <p14:creationId xmlns:p14="http://schemas.microsoft.com/office/powerpoint/2010/main" val="686187726"/>
       </p:ext>
     </p:extLst>
   </p:cSld>
@@ -3145,7 +3145,7 @@
           <p:cNvPr id="1" name="">
             <a:extLst xmlns:a="http://schemas.openxmlformats.org/drawingml/2006/main">
               <a:ext uri="{FF2B5EF4-FFF2-40B4-BE49-F238E27FC236}">
-                <a16:creationId xmlns:a16="http://schemas.microsoft.com/office/drawing/2014/main" id="{9FA90AB5-46DD-4AF5-8BC1-13CD84153A04}"/>
+                <a16:creationId xmlns:a16="http://schemas.microsoft.com/office/drawing/2014/main" id="{588E6AD4-5CBE-46DB-A78D-0636A3E49DFA}"/>
               </a:ext>
             </a:extLst>
           </p:cNvPr>
@@ -3173,14 +3173,14 @@
       </p:sp>
       <p:pic>
         <p:nvPicPr>
-          <p:cNvPr id="25" name=""/>
+          <p:cNvPr id="33" name=""/>
           <p:cNvPicPr>
             <a:picLocks xmlns:a="http://schemas.openxmlformats.org/drawingml/2006/main" noChangeAspect="1"/>
           </p:cNvPicPr>
           <p:nvPr/>
         </p:nvPicPr>
         <p:blipFill>
-          <a:blip xmlns:r="http://schemas.openxmlformats.org/officeDocument/2006/relationships" xmlns:a="http://schemas.openxmlformats.org/drawingml/2006/main" r:embed="R91c91d82644c404c"/>
+          <a:blip xmlns:r="http://schemas.openxmlformats.org/officeDocument/2006/relationships" xmlns:a="http://schemas.openxmlformats.org/drawingml/2006/main" r:embed="R439dd34c6ef74b57"/>
           <a:stretch xmlns:a="http://schemas.openxmlformats.org/drawingml/2006/main"/>
         </p:blipFill>
         <p:spPr>
@@ -3198,7 +3198,7 @@
           <p:cNvPr id="3" name="">
             <a:extLst xmlns:a="http://schemas.openxmlformats.org/drawingml/2006/main">
               <a:ext uri="{FF2B5EF4-FFF2-40B4-BE49-F238E27FC236}">
-                <a16:creationId xmlns:a16="http://schemas.microsoft.com/office/drawing/2014/main" id="{4D285644-933D-4E72-90B7-6589E21849A1}"/>
+                <a16:creationId xmlns:a16="http://schemas.microsoft.com/office/drawing/2014/main" id="{5393D8B9-FB05-4E39-953A-3070CE57C0E9}"/>
               </a:ext>
             </a:extLst>
           </p:cNvPr>
@@ -3238,7 +3238,7 @@
                   <a:srgbClr val="161616"/>
                 </a:solidFill>
               </a:rPr>
-              <a:t>Контекст инфраструктуры определяет приоритеты</a:t>
+              <a:t>Масштаб инфраструктуры задает три приоритета</a:t>
             </a:r>
           </a:p>
         </p:txBody>
@@ -3248,7 +3248,7 @@
           <p:cNvPr id="4" name="">
             <a:extLst xmlns:a="http://schemas.openxmlformats.org/drawingml/2006/main">
               <a:ext uri="{FF2B5EF4-FFF2-40B4-BE49-F238E27FC236}">
-                <a16:creationId xmlns:a16="http://schemas.microsoft.com/office/drawing/2014/main" id="{7027CF31-9C75-4E3E-B4DC-4A0CD88333DF}"/>
+                <a16:creationId xmlns:a16="http://schemas.microsoft.com/office/drawing/2014/main" id="{BCA25DD4-7885-4F45-9C99-69CF0E81816F}"/>
               </a:ext>
             </a:extLst>
           </p:cNvPr>
@@ -3281,7 +3281,7 @@
           <p:cNvPr id="5" name="">
             <a:extLst xmlns:a="http://schemas.openxmlformats.org/drawingml/2006/main">
               <a:ext uri="{FF2B5EF4-FFF2-40B4-BE49-F238E27FC236}">
-                <a16:creationId xmlns:a16="http://schemas.microsoft.com/office/drawing/2014/main" id="{56A67796-A4D7-4402-95C5-3882C47D6978}"/>
+                <a16:creationId xmlns:a16="http://schemas.microsoft.com/office/drawing/2014/main" id="{2EB72D21-E350-4888-B606-F9A8E5BB0569}"/>
               </a:ext>
             </a:extLst>
           </p:cNvPr>
@@ -3312,7 +3312,7 @@
           <p:cNvPr id="6" name="">
             <a:extLst xmlns:a="http://schemas.openxmlformats.org/drawingml/2006/main">
               <a:ext uri="{FF2B5EF4-FFF2-40B4-BE49-F238E27FC236}">
-                <a16:creationId xmlns:a16="http://schemas.microsoft.com/office/drawing/2014/main" id="{A68F315B-1FBC-489C-8ED8-F207840700BD}"/>
+                <a16:creationId xmlns:a16="http://schemas.microsoft.com/office/drawing/2014/main" id="{AB79E2F9-D017-4757-B13A-E799FA3CB3F9}"/>
               </a:ext>
             </a:extLst>
           </p:cNvPr>
@@ -3362,7 +3362,7 @@
           <p:cNvPr id="7" name="">
             <a:extLst xmlns:a="http://schemas.openxmlformats.org/drawingml/2006/main">
               <a:ext uri="{FF2B5EF4-FFF2-40B4-BE49-F238E27FC236}">
-                <a16:creationId xmlns:a16="http://schemas.microsoft.com/office/drawing/2014/main" id="{FC7FA5F5-88C3-46B5-9C15-EDA04CF96ADE}"/>
+                <a16:creationId xmlns:a16="http://schemas.microsoft.com/office/drawing/2014/main" id="{1903B7D0-C85A-4428-AB23-461095B9E632}"/>
               </a:ext>
             </a:extLst>
           </p:cNvPr>
@@ -3412,7 +3412,7 @@
           <p:cNvPr id="8" name="">
             <a:extLst xmlns:a="http://schemas.openxmlformats.org/drawingml/2006/main">
               <a:ext uri="{FF2B5EF4-FFF2-40B4-BE49-F238E27FC236}">
-                <a16:creationId xmlns:a16="http://schemas.microsoft.com/office/drawing/2014/main" id="{BC76305E-DE07-4D24-8F4D-C0ECA54E5C05}"/>
+                <a16:creationId xmlns:a16="http://schemas.microsoft.com/office/drawing/2014/main" id="{AA09E551-F7C1-48C0-8497-494E07FB4528}"/>
               </a:ext>
             </a:extLst>
           </p:cNvPr>
@@ -3447,7 +3447,7 @@
           <p:cNvPr id="9" name="">
             <a:extLst xmlns:a="http://schemas.openxmlformats.org/drawingml/2006/main">
               <a:ext uri="{FF2B5EF4-FFF2-40B4-BE49-F238E27FC236}">
-                <a16:creationId xmlns:a16="http://schemas.microsoft.com/office/drawing/2014/main" id="{865B7C89-35F7-43F3-84E5-4ADA64E835C1}"/>
+                <a16:creationId xmlns:a16="http://schemas.microsoft.com/office/drawing/2014/main" id="{8291B8F6-913E-4C02-A39E-32C3B78234BE}"/>
               </a:ext>
             </a:extLst>
           </p:cNvPr>
@@ -3497,7 +3497,7 @@
           <p:cNvPr id="10" name="">
             <a:extLst xmlns:a="http://schemas.openxmlformats.org/drawingml/2006/main">
               <a:ext uri="{FF2B5EF4-FFF2-40B4-BE49-F238E27FC236}">
-                <a16:creationId xmlns:a16="http://schemas.microsoft.com/office/drawing/2014/main" id="{31063CEC-061C-4335-B97B-12CD03800CE3}"/>
+                <a16:creationId xmlns:a16="http://schemas.microsoft.com/office/drawing/2014/main" id="{D12970EB-6B63-4F8A-A639-44FA6BF9166F}"/>
               </a:ext>
             </a:extLst>
           </p:cNvPr>
@@ -3547,7 +3547,7 @@
           <p:cNvPr id="11" name="">
             <a:extLst xmlns:a="http://schemas.openxmlformats.org/drawingml/2006/main">
               <a:ext uri="{FF2B5EF4-FFF2-40B4-BE49-F238E27FC236}">
-                <a16:creationId xmlns:a16="http://schemas.microsoft.com/office/drawing/2014/main" id="{C6E75039-4B66-49B4-9508-696130663D11}"/>
+                <a16:creationId xmlns:a16="http://schemas.microsoft.com/office/drawing/2014/main" id="{86329963-EE78-4B00-9ACA-4F1C4FA064E8}"/>
               </a:ext>
             </a:extLst>
           </p:cNvPr>
@@ -3582,7 +3582,7 @@
           <p:cNvPr id="12" name="">
             <a:extLst xmlns:a="http://schemas.openxmlformats.org/drawingml/2006/main">
               <a:ext uri="{FF2B5EF4-FFF2-40B4-BE49-F238E27FC236}">
-                <a16:creationId xmlns:a16="http://schemas.microsoft.com/office/drawing/2014/main" id="{C7E808D8-AADB-4370-A2E9-39A41BA13D32}"/>
+                <a16:creationId xmlns:a16="http://schemas.microsoft.com/office/drawing/2014/main" id="{7771E4A7-3C24-4E49-8FC3-920CE0DEA677}"/>
               </a:ext>
             </a:extLst>
           </p:cNvPr>
@@ -3632,7 +3632,7 @@
           <p:cNvPr id="13" name="">
             <a:extLst xmlns:a="http://schemas.openxmlformats.org/drawingml/2006/main">
               <a:ext uri="{FF2B5EF4-FFF2-40B4-BE49-F238E27FC236}">
-                <a16:creationId xmlns:a16="http://schemas.microsoft.com/office/drawing/2014/main" id="{7B78454E-03CF-412C-80E9-5B49437001C8}"/>
+                <a16:creationId xmlns:a16="http://schemas.microsoft.com/office/drawing/2014/main" id="{37C009AB-AC33-4264-9D70-2C20E84028BE}"/>
               </a:ext>
             </a:extLst>
           </p:cNvPr>
@@ -3682,7 +3682,7 @@
           <p:cNvPr id="14" name="">
             <a:extLst xmlns:a="http://schemas.openxmlformats.org/drawingml/2006/main">
               <a:ext uri="{FF2B5EF4-FFF2-40B4-BE49-F238E27FC236}">
-                <a16:creationId xmlns:a16="http://schemas.microsoft.com/office/drawing/2014/main" id="{988F5E98-7D7C-406F-A401-A33592E2C418}"/>
+                <a16:creationId xmlns:a16="http://schemas.microsoft.com/office/drawing/2014/main" id="{D19C28F6-D12D-4B8B-B61E-481E5B10D936}"/>
               </a:ext>
             </a:extLst>
           </p:cNvPr>
@@ -3717,7 +3717,7 @@
           <p:cNvPr id="15" name="">
             <a:extLst xmlns:a="http://schemas.openxmlformats.org/drawingml/2006/main">
               <a:ext uri="{FF2B5EF4-FFF2-40B4-BE49-F238E27FC236}">
-                <a16:creationId xmlns:a16="http://schemas.microsoft.com/office/drawing/2014/main" id="{F862549A-A554-48F5-A325-B272B54B1819}"/>
+                <a16:creationId xmlns:a16="http://schemas.microsoft.com/office/drawing/2014/main" id="{2F061253-0651-4B71-AA99-CB2A305383FE}"/>
               </a:ext>
             </a:extLst>
           </p:cNvPr>
@@ -3767,7 +3767,7 @@
           <p:cNvPr id="16" name="">
             <a:extLst xmlns:a="http://schemas.openxmlformats.org/drawingml/2006/main">
               <a:ext uri="{FF2B5EF4-FFF2-40B4-BE49-F238E27FC236}">
-                <a16:creationId xmlns:a16="http://schemas.microsoft.com/office/drawing/2014/main" id="{772BC34C-EF62-48E2-9618-04CF4CA8E26F}"/>
+                <a16:creationId xmlns:a16="http://schemas.microsoft.com/office/drawing/2014/main" id="{968E60F1-A6C0-4C29-914D-4A2480DC7E06}"/>
               </a:ext>
             </a:extLst>
           </p:cNvPr>
@@ -3817,7 +3817,7 @@
           <p:cNvPr id="17" name="">
             <a:extLst xmlns:a="http://schemas.openxmlformats.org/drawingml/2006/main">
               <a:ext uri="{FF2B5EF4-FFF2-40B4-BE49-F238E27FC236}">
-                <a16:creationId xmlns:a16="http://schemas.microsoft.com/office/drawing/2014/main" id="{E049E5AC-55CB-4271-B828-8A22EE380F67}"/>
+                <a16:creationId xmlns:a16="http://schemas.microsoft.com/office/drawing/2014/main" id="{FD93A2A1-1124-4C1C-83B3-7714F840DEEE}"/>
               </a:ext>
             </a:extLst>
           </p:cNvPr>
@@ -3852,7 +3852,7 @@
           <p:cNvPr id="18" name="">
             <a:extLst xmlns:a="http://schemas.openxmlformats.org/drawingml/2006/main">
               <a:ext uri="{FF2B5EF4-FFF2-40B4-BE49-F238E27FC236}">
-                <a16:creationId xmlns:a16="http://schemas.microsoft.com/office/drawing/2014/main" id="{6CBFED2A-9876-4FA1-9DC0-17CE9F5F3FAC}"/>
+                <a16:creationId xmlns:a16="http://schemas.microsoft.com/office/drawing/2014/main" id="{BBDF9ADF-AFA1-47E6-87C0-82FC60C20E32}"/>
               </a:ext>
             </a:extLst>
           </p:cNvPr>
@@ -3902,7 +3902,7 @@
           <p:cNvPr id="19" name="">
             <a:extLst xmlns:a="http://schemas.openxmlformats.org/drawingml/2006/main">
               <a:ext uri="{FF2B5EF4-FFF2-40B4-BE49-F238E27FC236}">
-                <a16:creationId xmlns:a16="http://schemas.microsoft.com/office/drawing/2014/main" id="{5E23DF8C-678D-46F4-994E-F74C8B203D35}"/>
+                <a16:creationId xmlns:a16="http://schemas.microsoft.com/office/drawing/2014/main" id="{62639149-5377-4027-9E9C-07BDD51143BD}"/>
               </a:ext>
             </a:extLst>
           </p:cNvPr>
@@ -3952,19 +3952,69 @@
           <p:cNvPr id="20" name="">
             <a:extLst xmlns:a="http://schemas.openxmlformats.org/drawingml/2006/main">
               <a:ext uri="{FF2B5EF4-FFF2-40B4-BE49-F238E27FC236}">
-                <a16:creationId xmlns:a16="http://schemas.microsoft.com/office/drawing/2014/main" id="{DF6E4755-E1EF-4842-A3BD-BD1F05938A51}"/>
-              </a:ext>
-            </a:extLst>
-          </p:cNvPr>
-          <p:cNvSpPr>
-            <a:spLocks xmlns:a="http://schemas.openxmlformats.org/drawingml/2006/main" noGrp="1"/>
-          </p:cNvSpPr>
-          <p:nvPr/>
-        </p:nvSpPr>
-        <p:spPr>
-          <a:xfrm xmlns:a="http://schemas.openxmlformats.org/drawingml/2006/main">
-            <a:off x="552450" y="3143250"/>
-            <a:ext cx="1714500" cy="285750"/>
+                <a16:creationId xmlns:a16="http://schemas.microsoft.com/office/drawing/2014/main" id="{6F760C82-A9AE-4C0C-B958-4D6D98E314F1}"/>
+              </a:ext>
+            </a:extLst>
+          </p:cNvPr>
+          <p:cNvSpPr>
+            <a:spLocks xmlns:a="http://schemas.openxmlformats.org/drawingml/2006/main" noGrp="1"/>
+          </p:cNvSpPr>
+          <p:nvPr/>
+        </p:nvSpPr>
+        <p:spPr>
+          <a:xfrm xmlns:a="http://schemas.openxmlformats.org/drawingml/2006/main">
+            <a:off x="552450" y="3009900"/>
+            <a:ext cx="1714500" cy="247650"/>
+          </a:xfrm>
+          <a:prstGeom xmlns:a="http://schemas.openxmlformats.org/drawingml/2006/main" prst="rect">
+            <a:avLst/>
+          </a:prstGeom>
+          <a:noFill xmlns:a="http://schemas.openxmlformats.org/drawingml/2006/main"/>
+          <a:ln xmlns:a="http://schemas.openxmlformats.org/drawingml/2006/main" w="0">
+            <a:noFill/>
+            <a:prstDash val="solid"/>
+          </a:ln>
+        </p:spPr>
+        <p:txBody>
+          <a:bodyPr xmlns:a="http://schemas.openxmlformats.org/drawingml/2006/main"/>
+          <a:lstStyle xmlns:a="http://schemas.openxmlformats.org/drawingml/2006/main"/>
+          <a:p xmlns:a="http://schemas.openxmlformats.org/drawingml/2006/main">
+            <a:pPr>
+              <a:defRPr sz="1275" b="1">
+                <a:solidFill>
+                  <a:srgbClr val="FF6412"/>
+                </a:solidFill>
+              </a:defRPr>
+            </a:pPr>
+            <a:r>
+              <a:rPr sz="1275" b="1">
+                <a:solidFill>
+                  <a:srgbClr val="FF6412"/>
+                </a:solidFill>
+              </a:rPr>
+              <a:t>Профиль</a:t>
+            </a:r>
+          </a:p>
+        </p:txBody>
+      </p:sp>
+      <p:sp>
+        <p:nvSpPr>
+          <p:cNvPr id="21" name="">
+            <a:extLst xmlns:a="http://schemas.openxmlformats.org/drawingml/2006/main">
+              <a:ext uri="{FF2B5EF4-FFF2-40B4-BE49-F238E27FC236}">
+                <a16:creationId xmlns:a16="http://schemas.microsoft.com/office/drawing/2014/main" id="{8BCDD531-28C8-402B-875B-386F30BBBEF6}"/>
+              </a:ext>
+            </a:extLst>
+          </p:cNvPr>
+          <p:cNvSpPr>
+            <a:spLocks xmlns:a="http://schemas.openxmlformats.org/drawingml/2006/main" noGrp="1"/>
+          </p:cNvSpPr>
+          <p:nvPr/>
+        </p:nvSpPr>
+        <p:spPr>
+          <a:xfrm xmlns:a="http://schemas.openxmlformats.org/drawingml/2006/main">
+            <a:off x="552450" y="3314700"/>
+            <a:ext cx="10648950" cy="590550"/>
           </a:xfrm>
           <a:prstGeom xmlns:a="http://schemas.openxmlformats.org/drawingml/2006/main" prst="rect">
             <a:avLst/>
@@ -3982,6 +4032,56 @@
             <a:pPr>
               <a:defRPr sz="1350" b="1">
                 <a:solidFill>
+                  <a:srgbClr val="161616"/>
+                </a:solidFill>
+              </a:defRPr>
+            </a:pPr>
+            <a:r>
+              <a:rPr sz="1350" b="1">
+                <a:solidFill>
+                  <a:srgbClr val="161616"/>
+                </a:solidFill>
+              </a:rPr>
+              <a:t>{{PROFILE}}</a:t>
+            </a:r>
+          </a:p>
+        </p:txBody>
+      </p:sp>
+      <p:sp>
+        <p:nvSpPr>
+          <p:cNvPr id="22" name="">
+            <a:extLst xmlns:a="http://schemas.openxmlformats.org/drawingml/2006/main">
+              <a:ext uri="{FF2B5EF4-FFF2-40B4-BE49-F238E27FC236}">
+                <a16:creationId xmlns:a16="http://schemas.microsoft.com/office/drawing/2014/main" id="{5597C389-E76F-4260-A271-B29DF2ABBF07}"/>
+              </a:ext>
+            </a:extLst>
+          </p:cNvPr>
+          <p:cNvSpPr>
+            <a:spLocks xmlns:a="http://schemas.openxmlformats.org/drawingml/2006/main" noGrp="1"/>
+          </p:cNvSpPr>
+          <p:nvPr/>
+        </p:nvSpPr>
+        <p:spPr>
+          <a:xfrm xmlns:a="http://schemas.openxmlformats.org/drawingml/2006/main">
+            <a:off x="552450" y="4114800"/>
+            <a:ext cx="2857500" cy="266700"/>
+          </a:xfrm>
+          <a:prstGeom xmlns:a="http://schemas.openxmlformats.org/drawingml/2006/main" prst="rect">
+            <a:avLst/>
+          </a:prstGeom>
+          <a:noFill xmlns:a="http://schemas.openxmlformats.org/drawingml/2006/main"/>
+          <a:ln xmlns:a="http://schemas.openxmlformats.org/drawingml/2006/main" w="0">
+            <a:noFill/>
+            <a:prstDash val="solid"/>
+          </a:ln>
+        </p:spPr>
+        <p:txBody>
+          <a:bodyPr xmlns:a="http://schemas.openxmlformats.org/drawingml/2006/main"/>
+          <a:lstStyle xmlns:a="http://schemas.openxmlformats.org/drawingml/2006/main"/>
+          <a:p xmlns:a="http://schemas.openxmlformats.org/drawingml/2006/main">
+            <a:pPr>
+              <a:defRPr sz="1350" b="1">
+                <a:solidFill>
                   <a:srgbClr val="FF6412"/>
                 </a:solidFill>
               </a:defRPr>
@@ -3992,79 +4092,62 @@
                   <a:srgbClr val="FF6412"/>
                 </a:solidFill>
               </a:rPr>
-              <a:t>Профиль</a:t>
-            </a:r>
-          </a:p>
-        </p:txBody>
-      </p:sp>
-      <p:sp>
-        <p:nvSpPr>
-          <p:cNvPr id="21" name="">
-            <a:extLst xmlns:a="http://schemas.openxmlformats.org/drawingml/2006/main">
-              <a:ext uri="{FF2B5EF4-FFF2-40B4-BE49-F238E27FC236}">
-                <a16:creationId xmlns:a16="http://schemas.microsoft.com/office/drawing/2014/main" id="{EE325DE6-B211-4318-AC7C-274B88002825}"/>
-              </a:ext>
-            </a:extLst>
-          </p:cNvPr>
-          <p:cNvSpPr>
-            <a:spLocks xmlns:a="http://schemas.openxmlformats.org/drawingml/2006/main" noGrp="1"/>
-          </p:cNvSpPr>
-          <p:nvPr/>
-        </p:nvSpPr>
-        <p:spPr>
-          <a:xfrm xmlns:a="http://schemas.openxmlformats.org/drawingml/2006/main">
-            <a:off x="552450" y="3543300"/>
-            <a:ext cx="10648950" cy="781050"/>
-          </a:xfrm>
-          <a:prstGeom xmlns:a="http://schemas.openxmlformats.org/drawingml/2006/main" prst="rect">
-            <a:avLst/>
-          </a:prstGeom>
-          <a:noFill xmlns:a="http://schemas.openxmlformats.org/drawingml/2006/main"/>
-          <a:ln xmlns:a="http://schemas.openxmlformats.org/drawingml/2006/main" w="0">
-            <a:noFill/>
-            <a:prstDash val="solid"/>
-          </a:ln>
-        </p:spPr>
-        <p:txBody>
-          <a:bodyPr xmlns:a="http://schemas.openxmlformats.org/drawingml/2006/main"/>
-          <a:lstStyle xmlns:a="http://schemas.openxmlformats.org/drawingml/2006/main"/>
-          <a:p xmlns:a="http://schemas.openxmlformats.org/drawingml/2006/main">
-            <a:pPr>
-              <a:defRPr sz="1500" b="1">
-                <a:solidFill>
-                  <a:srgbClr val="161616"/>
-                </a:solidFill>
-              </a:defRPr>
-            </a:pPr>
-            <a:r>
-              <a:rPr sz="1500" b="1">
-                <a:solidFill>
-                  <a:srgbClr val="161616"/>
-                </a:solidFill>
-              </a:rPr>
-              <a:t>{{PROFILE}}</a:t>
-            </a:r>
-          </a:p>
-        </p:txBody>
-      </p:sp>
-      <p:sp>
-        <p:nvSpPr>
-          <p:cNvPr id="22" name="">
-            <a:extLst xmlns:a="http://schemas.openxmlformats.org/drawingml/2006/main">
-              <a:ext uri="{FF2B5EF4-FFF2-40B4-BE49-F238E27FC236}">
-                <a16:creationId xmlns:a16="http://schemas.microsoft.com/office/drawing/2014/main" id="{4C14DC28-6CDA-430A-A75B-6A07C561D2A4}"/>
-              </a:ext>
-            </a:extLst>
-          </p:cNvPr>
-          <p:cNvSpPr>
-            <a:spLocks xmlns:a="http://schemas.openxmlformats.org/drawingml/2006/main" noGrp="1"/>
-          </p:cNvSpPr>
-          <p:nvPr/>
-        </p:nvSpPr>
-        <p:spPr>
-          <a:xfrm xmlns:a="http://schemas.openxmlformats.org/drawingml/2006/main">
-            <a:off x="552450" y="4667250"/>
-            <a:ext cx="2286000" cy="285750"/>
+              <a:t>Управленческий фокус</a:t>
+            </a:r>
+          </a:p>
+        </p:txBody>
+      </p:sp>
+      <p:sp>
+        <p:nvSpPr>
+          <p:cNvPr id="23" name="">
+            <a:extLst xmlns:a="http://schemas.openxmlformats.org/drawingml/2006/main">
+              <a:ext uri="{FF2B5EF4-FFF2-40B4-BE49-F238E27FC236}">
+                <a16:creationId xmlns:a16="http://schemas.microsoft.com/office/drawing/2014/main" id="{38088CF2-B020-4995-AF5D-000522FEE693}"/>
+              </a:ext>
+            </a:extLst>
+          </p:cNvPr>
+          <p:cNvSpPr>
+            <a:spLocks xmlns:a="http://schemas.openxmlformats.org/drawingml/2006/main" noGrp="1"/>
+          </p:cNvSpPr>
+          <p:nvPr/>
+        </p:nvSpPr>
+        <p:spPr>
+          <a:xfrm xmlns:a="http://schemas.openxmlformats.org/drawingml/2006/main">
+            <a:off x="552450" y="4591050"/>
+            <a:ext cx="66675" cy="1333500"/>
+          </a:xfrm>
+          <a:prstGeom xmlns:a="http://schemas.openxmlformats.org/drawingml/2006/main" prst="roundRect">
+            <a:avLst>
+              <a:gd name="adj" fmla="val 50000"/>
+            </a:avLst>
+          </a:prstGeom>
+          <a:solidFill xmlns:a="http://schemas.openxmlformats.org/drawingml/2006/main">
+            <a:srgbClr val="FF6412"/>
+          </a:solidFill>
+          <a:ln xmlns:a="http://schemas.openxmlformats.org/drawingml/2006/main" w="0">
+            <a:noFill/>
+            <a:prstDash val="solid"/>
+          </a:ln>
+        </p:spPr>
+      </p:sp>
+      <p:sp>
+        <p:nvSpPr>
+          <p:cNvPr id="24" name="">
+            <a:extLst xmlns:a="http://schemas.openxmlformats.org/drawingml/2006/main">
+              <a:ext uri="{FF2B5EF4-FFF2-40B4-BE49-F238E27FC236}">
+                <a16:creationId xmlns:a16="http://schemas.microsoft.com/office/drawing/2014/main" id="{CCA71A3D-D8DB-4330-9E0D-9E3B0C3823FB}"/>
+              </a:ext>
+            </a:extLst>
+          </p:cNvPr>
+          <p:cNvSpPr>
+            <a:spLocks xmlns:a="http://schemas.openxmlformats.org/drawingml/2006/main" noGrp="1"/>
+          </p:cNvSpPr>
+          <p:nvPr/>
+        </p:nvSpPr>
+        <p:spPr>
+          <a:xfrm xmlns:a="http://schemas.openxmlformats.org/drawingml/2006/main">
+            <a:off x="781050" y="4552950"/>
+            <a:ext cx="3105150" cy="361950"/>
           </a:xfrm>
           <a:prstGeom xmlns:a="http://schemas.openxmlformats.org/drawingml/2006/main" prst="rect">
             <a:avLst/>
@@ -4082,67 +4165,333 @@
             <a:pPr>
               <a:defRPr sz="1350" b="1">
                 <a:solidFill>
-                  <a:srgbClr val="FF6412"/>
+                  <a:srgbClr val="161616"/>
                 </a:solidFill>
               </a:defRPr>
             </a:pPr>
             <a:r>
               <a:rPr sz="1350" b="1">
                 <a:solidFill>
-                  <a:srgbClr val="FF6412"/>
-                </a:solidFill>
-              </a:rPr>
-              <a:t>Что это означает</a:t>
-            </a:r>
-          </a:p>
-        </p:txBody>
-      </p:sp>
-      <p:sp>
-        <p:nvSpPr>
-          <p:cNvPr id="23" name="">
-            <a:extLst xmlns:a="http://schemas.openxmlformats.org/drawingml/2006/main">
-              <a:ext uri="{FF2B5EF4-FFF2-40B4-BE49-F238E27FC236}">
-                <a16:creationId xmlns:a16="http://schemas.microsoft.com/office/drawing/2014/main" id="{53F55C08-CC05-4CB5-AE14-61A71BD2F5A1}"/>
-              </a:ext>
-            </a:extLst>
-          </p:cNvPr>
-          <p:cNvSpPr>
-            <a:spLocks xmlns:a="http://schemas.openxmlformats.org/drawingml/2006/main" noGrp="1"/>
-          </p:cNvSpPr>
-          <p:nvPr/>
-        </p:nvSpPr>
-        <p:spPr>
-          <a:xfrm xmlns:a="http://schemas.openxmlformats.org/drawingml/2006/main">
-            <a:off x="552450" y="5067300"/>
-            <a:ext cx="10648950" cy="990600"/>
-          </a:xfrm>
-          <a:prstGeom xmlns:a="http://schemas.openxmlformats.org/drawingml/2006/main" prst="rect">
-            <a:avLst/>
-          </a:prstGeom>
-          <a:noFill xmlns:a="http://schemas.openxmlformats.org/drawingml/2006/main"/>
-          <a:ln xmlns:a="http://schemas.openxmlformats.org/drawingml/2006/main" w="0">
-            <a:noFill/>
-            <a:prstDash val="solid"/>
-          </a:ln>
-        </p:spPr>
-        <p:txBody>
-          <a:bodyPr xmlns:a="http://schemas.openxmlformats.org/drawingml/2006/main"/>
-          <a:lstStyle xmlns:a="http://schemas.openxmlformats.org/drawingml/2006/main"/>
-          <a:p xmlns:a="http://schemas.openxmlformats.org/drawingml/2006/main">
-            <a:pPr>
-              <a:defRPr sz="1425">
-                <a:solidFill>
-                  <a:srgbClr val="161616"/>
-                </a:solidFill>
-              </a:defRPr>
-            </a:pPr>
-            <a:r>
-              <a:rPr sz="1425">
-                <a:solidFill>
-                  <a:srgbClr val="161616"/>
-                </a:solidFill>
-              </a:rPr>
-              <a:t>{{PROFILE_IMPLICATION}}</a:t>
+                  <a:srgbClr val="161616"/>
+                </a:solidFill>
+              </a:rPr>
+              <a:t>{{FOCUS_1_TITLE}}</a:t>
+            </a:r>
+          </a:p>
+        </p:txBody>
+      </p:sp>
+      <p:sp>
+        <p:nvSpPr>
+          <p:cNvPr id="25" name="">
+            <a:extLst xmlns:a="http://schemas.openxmlformats.org/drawingml/2006/main">
+              <a:ext uri="{FF2B5EF4-FFF2-40B4-BE49-F238E27FC236}">
+                <a16:creationId xmlns:a16="http://schemas.microsoft.com/office/drawing/2014/main" id="{708E7738-0381-4F3E-85F1-75F854217653}"/>
+              </a:ext>
+            </a:extLst>
+          </p:cNvPr>
+          <p:cNvSpPr>
+            <a:spLocks xmlns:a="http://schemas.openxmlformats.org/drawingml/2006/main" noGrp="1"/>
+          </p:cNvSpPr>
+          <p:nvPr/>
+        </p:nvSpPr>
+        <p:spPr>
+          <a:xfrm xmlns:a="http://schemas.openxmlformats.org/drawingml/2006/main">
+            <a:off x="781050" y="5000625"/>
+            <a:ext cx="3105150" cy="933450"/>
+          </a:xfrm>
+          <a:prstGeom xmlns:a="http://schemas.openxmlformats.org/drawingml/2006/main" prst="rect">
+            <a:avLst/>
+          </a:prstGeom>
+          <a:noFill xmlns:a="http://schemas.openxmlformats.org/drawingml/2006/main"/>
+          <a:ln xmlns:a="http://schemas.openxmlformats.org/drawingml/2006/main" w="0">
+            <a:noFill/>
+            <a:prstDash val="solid"/>
+          </a:ln>
+        </p:spPr>
+        <p:txBody>
+          <a:bodyPr xmlns:a="http://schemas.openxmlformats.org/drawingml/2006/main"/>
+          <a:lstStyle xmlns:a="http://schemas.openxmlformats.org/drawingml/2006/main"/>
+          <a:p xmlns:a="http://schemas.openxmlformats.org/drawingml/2006/main">
+            <a:pPr>
+              <a:defRPr sz="1125">
+                <a:solidFill>
+                  <a:srgbClr val="667085"/>
+                </a:solidFill>
+              </a:defRPr>
+            </a:pPr>
+            <a:r>
+              <a:rPr sz="1125">
+                <a:solidFill>
+                  <a:srgbClr val="667085"/>
+                </a:solidFill>
+              </a:rPr>
+              <a:t>{{FOCUS_1_TEXT}}</a:t>
+            </a:r>
+          </a:p>
+        </p:txBody>
+      </p:sp>
+      <p:sp>
+        <p:nvSpPr>
+          <p:cNvPr id="26" name="">
+            <a:extLst xmlns:a="http://schemas.openxmlformats.org/drawingml/2006/main">
+              <a:ext uri="{FF2B5EF4-FFF2-40B4-BE49-F238E27FC236}">
+                <a16:creationId xmlns:a16="http://schemas.microsoft.com/office/drawing/2014/main" id="{6F63596A-048D-4367-816F-EFAE260B02E2}"/>
+              </a:ext>
+            </a:extLst>
+          </p:cNvPr>
+          <p:cNvSpPr>
+            <a:spLocks xmlns:a="http://schemas.openxmlformats.org/drawingml/2006/main" noGrp="1"/>
+          </p:cNvSpPr>
+          <p:nvPr/>
+        </p:nvSpPr>
+        <p:spPr>
+          <a:xfrm xmlns:a="http://schemas.openxmlformats.org/drawingml/2006/main">
+            <a:off x="4191000" y="4591050"/>
+            <a:ext cx="66675" cy="1333500"/>
+          </a:xfrm>
+          <a:prstGeom xmlns:a="http://schemas.openxmlformats.org/drawingml/2006/main" prst="roundRect">
+            <a:avLst>
+              <a:gd name="adj" fmla="val 50000"/>
+            </a:avLst>
+          </a:prstGeom>
+          <a:solidFill xmlns:a="http://schemas.openxmlformats.org/drawingml/2006/main">
+            <a:srgbClr val="FF6412"/>
+          </a:solidFill>
+          <a:ln xmlns:a="http://schemas.openxmlformats.org/drawingml/2006/main" w="0">
+            <a:noFill/>
+            <a:prstDash val="solid"/>
+          </a:ln>
+        </p:spPr>
+      </p:sp>
+      <p:sp>
+        <p:nvSpPr>
+          <p:cNvPr id="27" name="">
+            <a:extLst xmlns:a="http://schemas.openxmlformats.org/drawingml/2006/main">
+              <a:ext uri="{FF2B5EF4-FFF2-40B4-BE49-F238E27FC236}">
+                <a16:creationId xmlns:a16="http://schemas.microsoft.com/office/drawing/2014/main" id="{07B68291-5C89-4464-9F97-1307725E59C9}"/>
+              </a:ext>
+            </a:extLst>
+          </p:cNvPr>
+          <p:cNvSpPr>
+            <a:spLocks xmlns:a="http://schemas.openxmlformats.org/drawingml/2006/main" noGrp="1"/>
+          </p:cNvSpPr>
+          <p:nvPr/>
+        </p:nvSpPr>
+        <p:spPr>
+          <a:xfrm xmlns:a="http://schemas.openxmlformats.org/drawingml/2006/main">
+            <a:off x="4419600" y="4552950"/>
+            <a:ext cx="3105150" cy="361950"/>
+          </a:xfrm>
+          <a:prstGeom xmlns:a="http://schemas.openxmlformats.org/drawingml/2006/main" prst="rect">
+            <a:avLst/>
+          </a:prstGeom>
+          <a:noFill xmlns:a="http://schemas.openxmlformats.org/drawingml/2006/main"/>
+          <a:ln xmlns:a="http://schemas.openxmlformats.org/drawingml/2006/main" w="0">
+            <a:noFill/>
+            <a:prstDash val="solid"/>
+          </a:ln>
+        </p:spPr>
+        <p:txBody>
+          <a:bodyPr xmlns:a="http://schemas.openxmlformats.org/drawingml/2006/main"/>
+          <a:lstStyle xmlns:a="http://schemas.openxmlformats.org/drawingml/2006/main"/>
+          <a:p xmlns:a="http://schemas.openxmlformats.org/drawingml/2006/main">
+            <a:pPr>
+              <a:defRPr sz="1350" b="1">
+                <a:solidFill>
+                  <a:srgbClr val="161616"/>
+                </a:solidFill>
+              </a:defRPr>
+            </a:pPr>
+            <a:r>
+              <a:rPr sz="1350" b="1">
+                <a:solidFill>
+                  <a:srgbClr val="161616"/>
+                </a:solidFill>
+              </a:rPr>
+              <a:t>{{FOCUS_2_TITLE}}</a:t>
+            </a:r>
+          </a:p>
+        </p:txBody>
+      </p:sp>
+      <p:sp>
+        <p:nvSpPr>
+          <p:cNvPr id="28" name="">
+            <a:extLst xmlns:a="http://schemas.openxmlformats.org/drawingml/2006/main">
+              <a:ext uri="{FF2B5EF4-FFF2-40B4-BE49-F238E27FC236}">
+                <a16:creationId xmlns:a16="http://schemas.microsoft.com/office/drawing/2014/main" id="{1C3A2F74-2D9E-415B-BEF4-A60C166C2D6D}"/>
+              </a:ext>
+            </a:extLst>
+          </p:cNvPr>
+          <p:cNvSpPr>
+            <a:spLocks xmlns:a="http://schemas.openxmlformats.org/drawingml/2006/main" noGrp="1"/>
+          </p:cNvSpPr>
+          <p:nvPr/>
+        </p:nvSpPr>
+        <p:spPr>
+          <a:xfrm xmlns:a="http://schemas.openxmlformats.org/drawingml/2006/main">
+            <a:off x="4419600" y="5000625"/>
+            <a:ext cx="3105150" cy="933450"/>
+          </a:xfrm>
+          <a:prstGeom xmlns:a="http://schemas.openxmlformats.org/drawingml/2006/main" prst="rect">
+            <a:avLst/>
+          </a:prstGeom>
+          <a:noFill xmlns:a="http://schemas.openxmlformats.org/drawingml/2006/main"/>
+          <a:ln xmlns:a="http://schemas.openxmlformats.org/drawingml/2006/main" w="0">
+            <a:noFill/>
+            <a:prstDash val="solid"/>
+          </a:ln>
+        </p:spPr>
+        <p:txBody>
+          <a:bodyPr xmlns:a="http://schemas.openxmlformats.org/drawingml/2006/main"/>
+          <a:lstStyle xmlns:a="http://schemas.openxmlformats.org/drawingml/2006/main"/>
+          <a:p xmlns:a="http://schemas.openxmlformats.org/drawingml/2006/main">
+            <a:pPr>
+              <a:defRPr sz="1125">
+                <a:solidFill>
+                  <a:srgbClr val="667085"/>
+                </a:solidFill>
+              </a:defRPr>
+            </a:pPr>
+            <a:r>
+              <a:rPr sz="1125">
+                <a:solidFill>
+                  <a:srgbClr val="667085"/>
+                </a:solidFill>
+              </a:rPr>
+              <a:t>{{FOCUS_2_TEXT}}</a:t>
+            </a:r>
+          </a:p>
+        </p:txBody>
+      </p:sp>
+      <p:sp>
+        <p:nvSpPr>
+          <p:cNvPr id="29" name="">
+            <a:extLst xmlns:a="http://schemas.openxmlformats.org/drawingml/2006/main">
+              <a:ext uri="{FF2B5EF4-FFF2-40B4-BE49-F238E27FC236}">
+                <a16:creationId xmlns:a16="http://schemas.microsoft.com/office/drawing/2014/main" id="{301086FB-ECEB-4AE6-B97A-F7B6945A33A9}"/>
+              </a:ext>
+            </a:extLst>
+          </p:cNvPr>
+          <p:cNvSpPr>
+            <a:spLocks xmlns:a="http://schemas.openxmlformats.org/drawingml/2006/main" noGrp="1"/>
+          </p:cNvSpPr>
+          <p:nvPr/>
+        </p:nvSpPr>
+        <p:spPr>
+          <a:xfrm xmlns:a="http://schemas.openxmlformats.org/drawingml/2006/main">
+            <a:off x="7829550" y="4591050"/>
+            <a:ext cx="66675" cy="1333500"/>
+          </a:xfrm>
+          <a:prstGeom xmlns:a="http://schemas.openxmlformats.org/drawingml/2006/main" prst="roundRect">
+            <a:avLst>
+              <a:gd name="adj" fmla="val 50000"/>
+            </a:avLst>
+          </a:prstGeom>
+          <a:solidFill xmlns:a="http://schemas.openxmlformats.org/drawingml/2006/main">
+            <a:srgbClr val="FF6412"/>
+          </a:solidFill>
+          <a:ln xmlns:a="http://schemas.openxmlformats.org/drawingml/2006/main" w="0">
+            <a:noFill/>
+            <a:prstDash val="solid"/>
+          </a:ln>
+        </p:spPr>
+      </p:sp>
+      <p:sp>
+        <p:nvSpPr>
+          <p:cNvPr id="30" name="">
+            <a:extLst xmlns:a="http://schemas.openxmlformats.org/drawingml/2006/main">
+              <a:ext uri="{FF2B5EF4-FFF2-40B4-BE49-F238E27FC236}">
+                <a16:creationId xmlns:a16="http://schemas.microsoft.com/office/drawing/2014/main" id="{D8D6814B-EA2B-4E48-B5C3-8C0A168FDE1E}"/>
+              </a:ext>
+            </a:extLst>
+          </p:cNvPr>
+          <p:cNvSpPr>
+            <a:spLocks xmlns:a="http://schemas.openxmlformats.org/drawingml/2006/main" noGrp="1"/>
+          </p:cNvSpPr>
+          <p:nvPr/>
+        </p:nvSpPr>
+        <p:spPr>
+          <a:xfrm xmlns:a="http://schemas.openxmlformats.org/drawingml/2006/main">
+            <a:off x="8058150" y="4552950"/>
+            <a:ext cx="3105150" cy="361950"/>
+          </a:xfrm>
+          <a:prstGeom xmlns:a="http://schemas.openxmlformats.org/drawingml/2006/main" prst="rect">
+            <a:avLst/>
+          </a:prstGeom>
+          <a:noFill xmlns:a="http://schemas.openxmlformats.org/drawingml/2006/main"/>
+          <a:ln xmlns:a="http://schemas.openxmlformats.org/drawingml/2006/main" w="0">
+            <a:noFill/>
+            <a:prstDash val="solid"/>
+          </a:ln>
+        </p:spPr>
+        <p:txBody>
+          <a:bodyPr xmlns:a="http://schemas.openxmlformats.org/drawingml/2006/main"/>
+          <a:lstStyle xmlns:a="http://schemas.openxmlformats.org/drawingml/2006/main"/>
+          <a:p xmlns:a="http://schemas.openxmlformats.org/drawingml/2006/main">
+            <a:pPr>
+              <a:defRPr sz="1350" b="1">
+                <a:solidFill>
+                  <a:srgbClr val="161616"/>
+                </a:solidFill>
+              </a:defRPr>
+            </a:pPr>
+            <a:r>
+              <a:rPr sz="1350" b="1">
+                <a:solidFill>
+                  <a:srgbClr val="161616"/>
+                </a:solidFill>
+              </a:rPr>
+              <a:t>{{FOCUS_3_TITLE}}</a:t>
+            </a:r>
+          </a:p>
+        </p:txBody>
+      </p:sp>
+      <p:sp>
+        <p:nvSpPr>
+          <p:cNvPr id="31" name="">
+            <a:extLst xmlns:a="http://schemas.openxmlformats.org/drawingml/2006/main">
+              <a:ext uri="{FF2B5EF4-FFF2-40B4-BE49-F238E27FC236}">
+                <a16:creationId xmlns:a16="http://schemas.microsoft.com/office/drawing/2014/main" id="{E5F0550F-CF12-499C-A694-D01011855440}"/>
+              </a:ext>
+            </a:extLst>
+          </p:cNvPr>
+          <p:cNvSpPr>
+            <a:spLocks xmlns:a="http://schemas.openxmlformats.org/drawingml/2006/main" noGrp="1"/>
+          </p:cNvSpPr>
+          <p:nvPr/>
+        </p:nvSpPr>
+        <p:spPr>
+          <a:xfrm xmlns:a="http://schemas.openxmlformats.org/drawingml/2006/main">
+            <a:off x="8058150" y="5000625"/>
+            <a:ext cx="3105150" cy="933450"/>
+          </a:xfrm>
+          <a:prstGeom xmlns:a="http://schemas.openxmlformats.org/drawingml/2006/main" prst="rect">
+            <a:avLst/>
+          </a:prstGeom>
+          <a:noFill xmlns:a="http://schemas.openxmlformats.org/drawingml/2006/main"/>
+          <a:ln xmlns:a="http://schemas.openxmlformats.org/drawingml/2006/main" w="0">
+            <a:noFill/>
+            <a:prstDash val="solid"/>
+          </a:ln>
+        </p:spPr>
+        <p:txBody>
+          <a:bodyPr xmlns:a="http://schemas.openxmlformats.org/drawingml/2006/main"/>
+          <a:lstStyle xmlns:a="http://schemas.openxmlformats.org/drawingml/2006/main"/>
+          <a:p xmlns:a="http://schemas.openxmlformats.org/drawingml/2006/main">
+            <a:pPr>
+              <a:defRPr sz="1125">
+                <a:solidFill>
+                  <a:srgbClr val="667085"/>
+                </a:solidFill>
+              </a:defRPr>
+            </a:pPr>
+            <a:r>
+              <a:rPr sz="1125">
+                <a:solidFill>
+                  <a:srgbClr val="667085"/>
+                </a:solidFill>
+              </a:rPr>
+              <a:t>{{FOCUS_3_TEXT}}</a:t>
             </a:r>
           </a:p>
         </p:txBody>
@@ -4150,7 +4499,7 @@
     </p:spTree>
     <p:extLst>
       <p:ext uri="{BB962C8B-B14F-4D97-AF65-F5344CB8AC3E}">
-        <p14:creationId xmlns:p14="http://schemas.microsoft.com/office/powerpoint/2010/main" val="2131284679"/>
+        <p14:creationId xmlns:p14="http://schemas.microsoft.com/office/powerpoint/2010/main" val="149179077"/>
       </p:ext>
     </p:extLst>
   </p:cSld>
@@ -4181,7 +4530,7 @@
           <p:cNvPr id="1" name="">
             <a:extLst xmlns:a="http://schemas.openxmlformats.org/drawingml/2006/main">
               <a:ext uri="{FF2B5EF4-FFF2-40B4-BE49-F238E27FC236}">
-                <a16:creationId xmlns:a16="http://schemas.microsoft.com/office/drawing/2014/main" id="{D1E47A20-9F09-4BF1-A6EB-144846731552}"/>
+                <a16:creationId xmlns:a16="http://schemas.microsoft.com/office/drawing/2014/main" id="{8672AB02-EA51-4572-A088-7A1E4EF83A29}"/>
               </a:ext>
             </a:extLst>
           </p:cNvPr>
@@ -4209,14 +4558,14 @@
       </p:sp>
       <p:pic>
         <p:nvPicPr>
-          <p:cNvPr id="28" name=""/>
+          <p:cNvPr id="36" name=""/>
           <p:cNvPicPr>
             <a:picLocks xmlns:a="http://schemas.openxmlformats.org/drawingml/2006/main" noChangeAspect="1"/>
           </p:cNvPicPr>
           <p:nvPr/>
         </p:nvPicPr>
         <p:blipFill>
-          <a:blip xmlns:r="http://schemas.openxmlformats.org/officeDocument/2006/relationships" xmlns:a="http://schemas.openxmlformats.org/drawingml/2006/main" r:embed="R17c0a79415d24742"/>
+          <a:blip xmlns:r="http://schemas.openxmlformats.org/officeDocument/2006/relationships" xmlns:a="http://schemas.openxmlformats.org/drawingml/2006/main" r:embed="R69d5a15b57ca4b63"/>
           <a:stretch xmlns:a="http://schemas.openxmlformats.org/drawingml/2006/main"/>
         </p:blipFill>
         <p:spPr>
@@ -4234,7 +4583,7 @@
           <p:cNvPr id="3" name="">
             <a:extLst xmlns:a="http://schemas.openxmlformats.org/drawingml/2006/main">
               <a:ext uri="{FF2B5EF4-FFF2-40B4-BE49-F238E27FC236}">
-                <a16:creationId xmlns:a16="http://schemas.microsoft.com/office/drawing/2014/main" id="{2127455C-8ACA-4712-9BF0-52C47A9A1D3A}"/>
+                <a16:creationId xmlns:a16="http://schemas.microsoft.com/office/drawing/2014/main" id="{4E41C61B-9757-463D-AEB9-C6A338B44DAC}"/>
               </a:ext>
             </a:extLst>
           </p:cNvPr>
@@ -4284,7 +4633,7 @@
           <p:cNvPr id="4" name="">
             <a:extLst xmlns:a="http://schemas.openxmlformats.org/drawingml/2006/main">
               <a:ext uri="{FF2B5EF4-FFF2-40B4-BE49-F238E27FC236}">
-                <a16:creationId xmlns:a16="http://schemas.microsoft.com/office/drawing/2014/main" id="{358D0DC8-E0F1-4622-8788-2C87C89CF688}"/>
+                <a16:creationId xmlns:a16="http://schemas.microsoft.com/office/drawing/2014/main" id="{E4EB5DD1-CA08-4532-B016-6C973A4BDB6A}"/>
               </a:ext>
             </a:extLst>
           </p:cNvPr>
@@ -4317,7 +4666,7 @@
           <p:cNvPr id="5" name="">
             <a:extLst xmlns:a="http://schemas.openxmlformats.org/drawingml/2006/main">
               <a:ext uri="{FF2B5EF4-FFF2-40B4-BE49-F238E27FC236}">
-                <a16:creationId xmlns:a16="http://schemas.microsoft.com/office/drawing/2014/main" id="{5F8D532A-D708-467E-B26D-9E34572F13C4}"/>
+                <a16:creationId xmlns:a16="http://schemas.microsoft.com/office/drawing/2014/main" id="{7BF7DF13-C141-4C9F-A720-32E377166F01}"/>
               </a:ext>
             </a:extLst>
           </p:cNvPr>
@@ -4348,7 +4697,7 @@
           <p:cNvPr id="6" name="">
             <a:extLst xmlns:a="http://schemas.openxmlformats.org/drawingml/2006/main">
               <a:ext uri="{FF2B5EF4-FFF2-40B4-BE49-F238E27FC236}">
-                <a16:creationId xmlns:a16="http://schemas.microsoft.com/office/drawing/2014/main" id="{A015619F-F69F-4037-8B8B-6A5E6BFA5603}"/>
+                <a16:creationId xmlns:a16="http://schemas.microsoft.com/office/drawing/2014/main" id="{D10931BC-A6AD-4EC4-85C5-E9F2475439FC}"/>
               </a:ext>
             </a:extLst>
           </p:cNvPr>
@@ -4398,7 +4747,7 @@
           <p:cNvPr id="7" name="">
             <a:extLst xmlns:a="http://schemas.openxmlformats.org/drawingml/2006/main">
               <a:ext uri="{FF2B5EF4-FFF2-40B4-BE49-F238E27FC236}">
-                <a16:creationId xmlns:a16="http://schemas.microsoft.com/office/drawing/2014/main" id="{19FC81BF-E115-4952-B215-4016C01B4C40}"/>
+                <a16:creationId xmlns:a16="http://schemas.microsoft.com/office/drawing/2014/main" id="{A1EE5011-0D58-4CEB-AB74-AF7464BDCB88}"/>
               </a:ext>
             </a:extLst>
           </p:cNvPr>
@@ -4448,23 +4797,23 @@
           <p:cNvPr id="8" name="">
             <a:extLst xmlns:a="http://schemas.openxmlformats.org/drawingml/2006/main">
               <a:ext uri="{FF2B5EF4-FFF2-40B4-BE49-F238E27FC236}">
-                <a16:creationId xmlns:a16="http://schemas.microsoft.com/office/drawing/2014/main" id="{CA31CDC4-0F78-4C62-9439-E14669820758}"/>
-              </a:ext>
-            </a:extLst>
-          </p:cNvPr>
-          <p:cNvSpPr>
-            <a:spLocks xmlns:a="http://schemas.openxmlformats.org/drawingml/2006/main" noGrp="1"/>
-          </p:cNvSpPr>
-          <p:nvPr/>
-        </p:nvSpPr>
-        <p:spPr>
-          <a:xfrm xmlns:a="http://schemas.openxmlformats.org/drawingml/2006/main">
-            <a:off x="552450" y="1409700"/>
-            <a:ext cx="1047750" cy="895350"/>
+                <a16:creationId xmlns:a16="http://schemas.microsoft.com/office/drawing/2014/main" id="{52377925-34DD-461A-A63C-0A54CD648E35}"/>
+              </a:ext>
+            </a:extLst>
+          </p:cNvPr>
+          <p:cNvSpPr>
+            <a:spLocks xmlns:a="http://schemas.openxmlformats.org/drawingml/2006/main" noGrp="1"/>
+          </p:cNvSpPr>
+          <p:nvPr/>
+        </p:nvSpPr>
+        <p:spPr>
+          <a:xfrm xmlns:a="http://schemas.openxmlformats.org/drawingml/2006/main">
+            <a:off x="552450" y="1390650"/>
+            <a:ext cx="1047750" cy="1009650"/>
           </a:xfrm>
           <a:prstGeom xmlns:a="http://schemas.openxmlformats.org/drawingml/2006/main" prst="roundRect">
             <a:avLst>
-              <a:gd name="adj" fmla="val 8511"/>
+              <a:gd name="adj" fmla="val 7547"/>
             </a:avLst>
           </a:prstGeom>
           <a:solidFill xmlns:a="http://schemas.openxmlformats.org/drawingml/2006/main">
@@ -4481,18 +4830,18 @@
           <p:cNvPr id="9" name="">
             <a:extLst xmlns:a="http://schemas.openxmlformats.org/drawingml/2006/main">
               <a:ext uri="{FF2B5EF4-FFF2-40B4-BE49-F238E27FC236}">
-                <a16:creationId xmlns:a16="http://schemas.microsoft.com/office/drawing/2014/main" id="{BB9FCBFC-D4C2-49CC-A2ED-E9EB85AEB913}"/>
-              </a:ext>
-            </a:extLst>
-          </p:cNvPr>
-          <p:cNvSpPr>
-            <a:spLocks xmlns:a="http://schemas.openxmlformats.org/drawingml/2006/main" noGrp="1"/>
-          </p:cNvSpPr>
-          <p:nvPr/>
-        </p:nvSpPr>
-        <p:spPr>
-          <a:xfrm xmlns:a="http://schemas.openxmlformats.org/drawingml/2006/main">
-            <a:off x="647700" y="1704975"/>
+                <a16:creationId xmlns:a16="http://schemas.microsoft.com/office/drawing/2014/main" id="{A6513A55-0690-4F2E-9C04-DCE50F08CC54}"/>
+              </a:ext>
+            </a:extLst>
+          </p:cNvPr>
+          <p:cNvSpPr>
+            <a:spLocks xmlns:a="http://schemas.openxmlformats.org/drawingml/2006/main" noGrp="1"/>
+          </p:cNvSpPr>
+          <p:nvPr/>
+        </p:nvSpPr>
+        <p:spPr>
+          <a:xfrm xmlns:a="http://schemas.openxmlformats.org/drawingml/2006/main">
+            <a:off x="647700" y="1743075"/>
             <a:ext cx="857250" cy="266700"/>
           </a:xfrm>
           <a:prstGeom xmlns:a="http://schemas.openxmlformats.org/drawingml/2006/main" prst="rect">
@@ -4531,42 +4880,42 @@
           <p:cNvPr id="10" name="">
             <a:extLst xmlns:a="http://schemas.openxmlformats.org/drawingml/2006/main">
               <a:ext uri="{FF2B5EF4-FFF2-40B4-BE49-F238E27FC236}">
-                <a16:creationId xmlns:a16="http://schemas.microsoft.com/office/drawing/2014/main" id="{413243E8-1482-42AF-88E4-D49594B78056}"/>
-              </a:ext>
-            </a:extLst>
-          </p:cNvPr>
-          <p:cNvSpPr>
-            <a:spLocks xmlns:a="http://schemas.openxmlformats.org/drawingml/2006/main" noGrp="1"/>
-          </p:cNvSpPr>
-          <p:nvPr/>
-        </p:nvSpPr>
-        <p:spPr>
-          <a:xfrm xmlns:a="http://schemas.openxmlformats.org/drawingml/2006/main">
-            <a:off x="1866900" y="1409700"/>
-            <a:ext cx="3905250" cy="381000"/>
-          </a:xfrm>
-          <a:prstGeom xmlns:a="http://schemas.openxmlformats.org/drawingml/2006/main" prst="rect">
-            <a:avLst/>
-          </a:prstGeom>
-          <a:noFill xmlns:a="http://schemas.openxmlformats.org/drawingml/2006/main"/>
-          <a:ln xmlns:a="http://schemas.openxmlformats.org/drawingml/2006/main" w="0">
-            <a:noFill/>
-            <a:prstDash val="solid"/>
-          </a:ln>
-        </p:spPr>
-        <p:txBody>
-          <a:bodyPr xmlns:a="http://schemas.openxmlformats.org/drawingml/2006/main"/>
-          <a:lstStyle xmlns:a="http://schemas.openxmlformats.org/drawingml/2006/main"/>
-          <a:p xmlns:a="http://schemas.openxmlformats.org/drawingml/2006/main">
-            <a:pPr>
-              <a:defRPr sz="1500" b="1">
-                <a:solidFill>
-                  <a:srgbClr val="161616"/>
-                </a:solidFill>
-              </a:defRPr>
-            </a:pPr>
-            <a:r>
-              <a:rPr sz="1500" b="1">
+                <a16:creationId xmlns:a16="http://schemas.microsoft.com/office/drawing/2014/main" id="{07CDC1D4-F219-4B68-8F93-BCBCFB69832E}"/>
+              </a:ext>
+            </a:extLst>
+          </p:cNvPr>
+          <p:cNvSpPr>
+            <a:spLocks xmlns:a="http://schemas.openxmlformats.org/drawingml/2006/main" noGrp="1"/>
+          </p:cNvSpPr>
+          <p:nvPr/>
+        </p:nvSpPr>
+        <p:spPr>
+          <a:xfrm xmlns:a="http://schemas.openxmlformats.org/drawingml/2006/main">
+            <a:off x="1866900" y="1390650"/>
+            <a:ext cx="9334500" cy="295275"/>
+          </a:xfrm>
+          <a:prstGeom xmlns:a="http://schemas.openxmlformats.org/drawingml/2006/main" prst="rect">
+            <a:avLst/>
+          </a:prstGeom>
+          <a:noFill xmlns:a="http://schemas.openxmlformats.org/drawingml/2006/main"/>
+          <a:ln xmlns:a="http://schemas.openxmlformats.org/drawingml/2006/main" w="0">
+            <a:noFill/>
+            <a:prstDash val="solid"/>
+          </a:ln>
+        </p:spPr>
+        <p:txBody>
+          <a:bodyPr xmlns:a="http://schemas.openxmlformats.org/drawingml/2006/main"/>
+          <a:lstStyle xmlns:a="http://schemas.openxmlformats.org/drawingml/2006/main"/>
+          <a:p xmlns:a="http://schemas.openxmlformats.org/drawingml/2006/main">
+            <a:pPr>
+              <a:defRPr sz="1350" b="1">
+                <a:solidFill>
+                  <a:srgbClr val="161616"/>
+                </a:solidFill>
+              </a:defRPr>
+            </a:pPr>
+            <a:r>
+              <a:rPr sz="1350" b="1">
                 <a:solidFill>
                   <a:srgbClr val="161616"/>
                 </a:solidFill>
@@ -4581,42 +4930,42 @@
           <p:cNvPr id="11" name="">
             <a:extLst xmlns:a="http://schemas.openxmlformats.org/drawingml/2006/main">
               <a:ext uri="{FF2B5EF4-FFF2-40B4-BE49-F238E27FC236}">
-                <a16:creationId xmlns:a16="http://schemas.microsoft.com/office/drawing/2014/main" id="{6D9CB64C-58BB-4EFD-933A-53C9B7673471}"/>
-              </a:ext>
-            </a:extLst>
-          </p:cNvPr>
-          <p:cNvSpPr>
-            <a:spLocks xmlns:a="http://schemas.openxmlformats.org/drawingml/2006/main" noGrp="1"/>
-          </p:cNvSpPr>
-          <p:nvPr/>
-        </p:nvSpPr>
-        <p:spPr>
-          <a:xfrm xmlns:a="http://schemas.openxmlformats.org/drawingml/2006/main">
-            <a:off x="1866900" y="1809750"/>
-            <a:ext cx="9334500" cy="552450"/>
-          </a:xfrm>
-          <a:prstGeom xmlns:a="http://schemas.openxmlformats.org/drawingml/2006/main" prst="rect">
-            <a:avLst/>
-          </a:prstGeom>
-          <a:noFill xmlns:a="http://schemas.openxmlformats.org/drawingml/2006/main"/>
-          <a:ln xmlns:a="http://schemas.openxmlformats.org/drawingml/2006/main" w="0">
-            <a:noFill/>
-            <a:prstDash val="solid"/>
-          </a:ln>
-        </p:spPr>
-        <p:txBody>
-          <a:bodyPr xmlns:a="http://schemas.openxmlformats.org/drawingml/2006/main"/>
-          <a:lstStyle xmlns:a="http://schemas.openxmlformats.org/drawingml/2006/main"/>
-          <a:p xmlns:a="http://schemas.openxmlformats.org/drawingml/2006/main">
-            <a:pPr>
-              <a:defRPr sz="1200">
+                <a16:creationId xmlns:a16="http://schemas.microsoft.com/office/drawing/2014/main" id="{410C6BE6-B9E9-4798-918D-81C176872AA7}"/>
+              </a:ext>
+            </a:extLst>
+          </p:cNvPr>
+          <p:cNvSpPr>
+            <a:spLocks xmlns:a="http://schemas.openxmlformats.org/drawingml/2006/main" noGrp="1"/>
+          </p:cNvSpPr>
+          <p:nvPr/>
+        </p:nvSpPr>
+        <p:spPr>
+          <a:xfrm xmlns:a="http://schemas.openxmlformats.org/drawingml/2006/main">
+            <a:off x="1866900" y="1695450"/>
+            <a:ext cx="9334500" cy="333375"/>
+          </a:xfrm>
+          <a:prstGeom xmlns:a="http://schemas.openxmlformats.org/drawingml/2006/main" prst="rect">
+            <a:avLst/>
+          </a:prstGeom>
+          <a:noFill xmlns:a="http://schemas.openxmlformats.org/drawingml/2006/main"/>
+          <a:ln xmlns:a="http://schemas.openxmlformats.org/drawingml/2006/main" w="0">
+            <a:noFill/>
+            <a:prstDash val="solid"/>
+          </a:ln>
+        </p:spPr>
+        <p:txBody>
+          <a:bodyPr xmlns:a="http://schemas.openxmlformats.org/drawingml/2006/main"/>
+          <a:lstStyle xmlns:a="http://schemas.openxmlformats.org/drawingml/2006/main"/>
+          <a:p xmlns:a="http://schemas.openxmlformats.org/drawingml/2006/main">
+            <a:pPr>
+              <a:defRPr sz="1050">
                 <a:solidFill>
                   <a:srgbClr val="667085"/>
                 </a:solidFill>
               </a:defRPr>
             </a:pPr>
             <a:r>
-              <a:rPr sz="1200">
+              <a:rPr sz="1050">
                 <a:solidFill>
                   <a:srgbClr val="667085"/>
                 </a:solidFill>
@@ -4631,18 +4980,118 @@
           <p:cNvPr id="12" name="">
             <a:extLst xmlns:a="http://schemas.openxmlformats.org/drawingml/2006/main">
               <a:ext uri="{FF2B5EF4-FFF2-40B4-BE49-F238E27FC236}">
-                <a16:creationId xmlns:a16="http://schemas.microsoft.com/office/drawing/2014/main" id="{F1E44112-589C-4C0B-B11B-8BB41EB14F09}"/>
-              </a:ext>
-            </a:extLst>
-          </p:cNvPr>
-          <p:cNvSpPr>
-            <a:spLocks xmlns:a="http://schemas.openxmlformats.org/drawingml/2006/main" noGrp="1"/>
-          </p:cNvSpPr>
-          <p:nvPr/>
-        </p:nvSpPr>
-        <p:spPr>
-          <a:xfrm xmlns:a="http://schemas.openxmlformats.org/drawingml/2006/main">
-            <a:off x="1866900" y="2476500"/>
+                <a16:creationId xmlns:a16="http://schemas.microsoft.com/office/drawing/2014/main" id="{6ACA73A9-AB09-4D95-B13A-F69B38E9CA13}"/>
+              </a:ext>
+            </a:extLst>
+          </p:cNvPr>
+          <p:cNvSpPr>
+            <a:spLocks xmlns:a="http://schemas.openxmlformats.org/drawingml/2006/main" noGrp="1"/>
+          </p:cNvSpPr>
+          <p:nvPr/>
+        </p:nvSpPr>
+        <p:spPr>
+          <a:xfrm xmlns:a="http://schemas.openxmlformats.org/drawingml/2006/main">
+            <a:off x="1866900" y="2114550"/>
+            <a:ext cx="990600" cy="190500"/>
+          </a:xfrm>
+          <a:prstGeom xmlns:a="http://schemas.openxmlformats.org/drawingml/2006/main" prst="rect">
+            <a:avLst/>
+          </a:prstGeom>
+          <a:noFill xmlns:a="http://schemas.openxmlformats.org/drawingml/2006/main"/>
+          <a:ln xmlns:a="http://schemas.openxmlformats.org/drawingml/2006/main" w="0">
+            <a:noFill/>
+            <a:prstDash val="solid"/>
+          </a:ln>
+        </p:spPr>
+        <p:txBody>
+          <a:bodyPr xmlns:a="http://schemas.openxmlformats.org/drawingml/2006/main"/>
+          <a:lstStyle xmlns:a="http://schemas.openxmlformats.org/drawingml/2006/main"/>
+          <a:p xmlns:a="http://schemas.openxmlformats.org/drawingml/2006/main">
+            <a:pPr>
+              <a:defRPr sz="975" b="1">
+                <a:solidFill>
+                  <a:srgbClr val="FF6412"/>
+                </a:solidFill>
+              </a:defRPr>
+            </a:pPr>
+            <a:r>
+              <a:rPr sz="975" b="1">
+                <a:solidFill>
+                  <a:srgbClr val="FF6412"/>
+                </a:solidFill>
+              </a:rPr>
+              <a:t>Рекомендуем</a:t>
+            </a:r>
+          </a:p>
+        </p:txBody>
+      </p:sp>
+      <p:sp>
+        <p:nvSpPr>
+          <p:cNvPr id="13" name="">
+            <a:extLst xmlns:a="http://schemas.openxmlformats.org/drawingml/2006/main">
+              <a:ext uri="{FF2B5EF4-FFF2-40B4-BE49-F238E27FC236}">
+                <a16:creationId xmlns:a16="http://schemas.microsoft.com/office/drawing/2014/main" id="{5E61EA99-53F3-4F76-B8D9-BC22855F46AC}"/>
+              </a:ext>
+            </a:extLst>
+          </p:cNvPr>
+          <p:cNvSpPr>
+            <a:spLocks xmlns:a="http://schemas.openxmlformats.org/drawingml/2006/main" noGrp="1"/>
+          </p:cNvSpPr>
+          <p:nvPr/>
+        </p:nvSpPr>
+        <p:spPr>
+          <a:xfrm xmlns:a="http://schemas.openxmlformats.org/drawingml/2006/main">
+            <a:off x="2895600" y="2076450"/>
+            <a:ext cx="8305800" cy="323850"/>
+          </a:xfrm>
+          <a:prstGeom xmlns:a="http://schemas.openxmlformats.org/drawingml/2006/main" prst="rect">
+            <a:avLst/>
+          </a:prstGeom>
+          <a:noFill xmlns:a="http://schemas.openxmlformats.org/drawingml/2006/main"/>
+          <a:ln xmlns:a="http://schemas.openxmlformats.org/drawingml/2006/main" w="0">
+            <a:noFill/>
+            <a:prstDash val="solid"/>
+          </a:ln>
+        </p:spPr>
+        <p:txBody>
+          <a:bodyPr xmlns:a="http://schemas.openxmlformats.org/drawingml/2006/main"/>
+          <a:lstStyle xmlns:a="http://schemas.openxmlformats.org/drawingml/2006/main"/>
+          <a:p xmlns:a="http://schemas.openxmlformats.org/drawingml/2006/main">
+            <a:pPr>
+              <a:defRPr sz="1050" b="1">
+                <a:solidFill>
+                  <a:srgbClr val="161616"/>
+                </a:solidFill>
+              </a:defRPr>
+            </a:pPr>
+            <a:r>
+              <a:rPr sz="1050" b="1">
+                <a:solidFill>
+                  <a:srgbClr val="161616"/>
+                </a:solidFill>
+              </a:rPr>
+              <a:t>{{RISK_1_RECOMMENDATION}}</a:t>
+            </a:r>
+          </a:p>
+        </p:txBody>
+      </p:sp>
+      <p:sp>
+        <p:nvSpPr>
+          <p:cNvPr id="14" name="">
+            <a:extLst xmlns:a="http://schemas.openxmlformats.org/drawingml/2006/main">
+              <a:ext uri="{FF2B5EF4-FFF2-40B4-BE49-F238E27FC236}">
+                <a16:creationId xmlns:a16="http://schemas.microsoft.com/office/drawing/2014/main" id="{4D9AE20C-0E20-4A02-95AC-0099F70149BE}"/>
+              </a:ext>
+            </a:extLst>
+          </p:cNvPr>
+          <p:cNvSpPr>
+            <a:spLocks xmlns:a="http://schemas.openxmlformats.org/drawingml/2006/main" noGrp="1"/>
+          </p:cNvSpPr>
+          <p:nvPr/>
+        </p:nvSpPr>
+        <p:spPr>
+          <a:xfrm xmlns:a="http://schemas.openxmlformats.org/drawingml/2006/main">
+            <a:off x="1866900" y="2495550"/>
             <a:ext cx="9334500" cy="9525"/>
           </a:xfrm>
           <a:prstGeom xmlns:a="http://schemas.openxmlformats.org/drawingml/2006/main" prst="rect">
@@ -4659,10 +5108,10 @@
       </p:sp>
       <p:sp>
         <p:nvSpPr>
-          <p:cNvPr id="13" name="">
-            <a:extLst xmlns:a="http://schemas.openxmlformats.org/drawingml/2006/main">
-              <a:ext uri="{FF2B5EF4-FFF2-40B4-BE49-F238E27FC236}">
-                <a16:creationId xmlns:a16="http://schemas.microsoft.com/office/drawing/2014/main" id="{11F3EBD9-14F5-44C2-B770-80B72654AA37}"/>
+          <p:cNvPr id="15" name="">
+            <a:extLst xmlns:a="http://schemas.openxmlformats.org/drawingml/2006/main">
+              <a:ext uri="{FF2B5EF4-FFF2-40B4-BE49-F238E27FC236}">
+                <a16:creationId xmlns:a16="http://schemas.microsoft.com/office/drawing/2014/main" id="{F03CC43A-8E4E-46E6-A6A0-42A19335B12C}"/>
               </a:ext>
             </a:extLst>
           </p:cNvPr>
@@ -4674,11 +5123,11 @@
         <p:spPr>
           <a:xfrm xmlns:a="http://schemas.openxmlformats.org/drawingml/2006/main">
             <a:off x="552450" y="2609850"/>
-            <a:ext cx="1047750" cy="895350"/>
+            <a:ext cx="1047750" cy="1009650"/>
           </a:xfrm>
           <a:prstGeom xmlns:a="http://schemas.openxmlformats.org/drawingml/2006/main" prst="roundRect">
             <a:avLst>
-              <a:gd name="adj" fmla="val 8511"/>
+              <a:gd name="adj" fmla="val 7547"/>
             </a:avLst>
           </a:prstGeom>
           <a:solidFill xmlns:a="http://schemas.openxmlformats.org/drawingml/2006/main">
@@ -4692,21 +5141,21 @@
       </p:sp>
       <p:sp>
         <p:nvSpPr>
-          <p:cNvPr id="14" name="">
-            <a:extLst xmlns:a="http://schemas.openxmlformats.org/drawingml/2006/main">
-              <a:ext uri="{FF2B5EF4-FFF2-40B4-BE49-F238E27FC236}">
-                <a16:creationId xmlns:a16="http://schemas.microsoft.com/office/drawing/2014/main" id="{291EBA44-5AA2-42D1-AB4C-81528A9818F7}"/>
-              </a:ext>
-            </a:extLst>
-          </p:cNvPr>
-          <p:cNvSpPr>
-            <a:spLocks xmlns:a="http://schemas.openxmlformats.org/drawingml/2006/main" noGrp="1"/>
-          </p:cNvSpPr>
-          <p:nvPr/>
-        </p:nvSpPr>
-        <p:spPr>
-          <a:xfrm xmlns:a="http://schemas.openxmlformats.org/drawingml/2006/main">
-            <a:off x="647700" y="2905125"/>
+          <p:cNvPr id="16" name="">
+            <a:extLst xmlns:a="http://schemas.openxmlformats.org/drawingml/2006/main">
+              <a:ext uri="{FF2B5EF4-FFF2-40B4-BE49-F238E27FC236}">
+                <a16:creationId xmlns:a16="http://schemas.microsoft.com/office/drawing/2014/main" id="{ACBB27A1-E405-4A15-A467-85CAE065D1E3}"/>
+              </a:ext>
+            </a:extLst>
+          </p:cNvPr>
+          <p:cNvSpPr>
+            <a:spLocks xmlns:a="http://schemas.openxmlformats.org/drawingml/2006/main" noGrp="1"/>
+          </p:cNvSpPr>
+          <p:nvPr/>
+        </p:nvSpPr>
+        <p:spPr>
+          <a:xfrm xmlns:a="http://schemas.openxmlformats.org/drawingml/2006/main">
+            <a:off x="647700" y="2962275"/>
             <a:ext cx="857250" cy="266700"/>
           </a:xfrm>
           <a:prstGeom xmlns:a="http://schemas.openxmlformats.org/drawingml/2006/main" prst="rect">
@@ -4742,10 +5191,10 @@
       </p:sp>
       <p:sp>
         <p:nvSpPr>
-          <p:cNvPr id="15" name="">
-            <a:extLst xmlns:a="http://schemas.openxmlformats.org/drawingml/2006/main">
-              <a:ext uri="{FF2B5EF4-FFF2-40B4-BE49-F238E27FC236}">
-                <a16:creationId xmlns:a16="http://schemas.microsoft.com/office/drawing/2014/main" id="{F9471DD7-0CCB-4EBF-9DEC-F0B44CF6C25A}"/>
+          <p:cNvPr id="17" name="">
+            <a:extLst xmlns:a="http://schemas.openxmlformats.org/drawingml/2006/main">
+              <a:ext uri="{FF2B5EF4-FFF2-40B4-BE49-F238E27FC236}">
+                <a16:creationId xmlns:a16="http://schemas.microsoft.com/office/drawing/2014/main" id="{EFEC0E81-B012-4124-8685-CA9D5C0FB013}"/>
               </a:ext>
             </a:extLst>
           </p:cNvPr>
@@ -4757,30 +5206,30 @@
         <p:spPr>
           <a:xfrm xmlns:a="http://schemas.openxmlformats.org/drawingml/2006/main">
             <a:off x="1866900" y="2609850"/>
-            <a:ext cx="3905250" cy="381000"/>
-          </a:xfrm>
-          <a:prstGeom xmlns:a="http://schemas.openxmlformats.org/drawingml/2006/main" prst="rect">
-            <a:avLst/>
-          </a:prstGeom>
-          <a:noFill xmlns:a="http://schemas.openxmlformats.org/drawingml/2006/main"/>
-          <a:ln xmlns:a="http://schemas.openxmlformats.org/drawingml/2006/main" w="0">
-            <a:noFill/>
-            <a:prstDash val="solid"/>
-          </a:ln>
-        </p:spPr>
-        <p:txBody>
-          <a:bodyPr xmlns:a="http://schemas.openxmlformats.org/drawingml/2006/main"/>
-          <a:lstStyle xmlns:a="http://schemas.openxmlformats.org/drawingml/2006/main"/>
-          <a:p xmlns:a="http://schemas.openxmlformats.org/drawingml/2006/main">
-            <a:pPr>
-              <a:defRPr sz="1500" b="1">
-                <a:solidFill>
-                  <a:srgbClr val="161616"/>
-                </a:solidFill>
-              </a:defRPr>
-            </a:pPr>
-            <a:r>
-              <a:rPr sz="1500" b="1">
+            <a:ext cx="9334500" cy="295275"/>
+          </a:xfrm>
+          <a:prstGeom xmlns:a="http://schemas.openxmlformats.org/drawingml/2006/main" prst="rect">
+            <a:avLst/>
+          </a:prstGeom>
+          <a:noFill xmlns:a="http://schemas.openxmlformats.org/drawingml/2006/main"/>
+          <a:ln xmlns:a="http://schemas.openxmlformats.org/drawingml/2006/main" w="0">
+            <a:noFill/>
+            <a:prstDash val="solid"/>
+          </a:ln>
+        </p:spPr>
+        <p:txBody>
+          <a:bodyPr xmlns:a="http://schemas.openxmlformats.org/drawingml/2006/main"/>
+          <a:lstStyle xmlns:a="http://schemas.openxmlformats.org/drawingml/2006/main"/>
+          <a:p xmlns:a="http://schemas.openxmlformats.org/drawingml/2006/main">
+            <a:pPr>
+              <a:defRPr sz="1350" b="1">
+                <a:solidFill>
+                  <a:srgbClr val="161616"/>
+                </a:solidFill>
+              </a:defRPr>
+            </a:pPr>
+            <a:r>
+              <a:rPr sz="1350" b="1">
                 <a:solidFill>
                   <a:srgbClr val="161616"/>
                 </a:solidFill>
@@ -4792,45 +5241,45 @@
       </p:sp>
       <p:sp>
         <p:nvSpPr>
-          <p:cNvPr id="16" name="">
-            <a:extLst xmlns:a="http://schemas.openxmlformats.org/drawingml/2006/main">
-              <a:ext uri="{FF2B5EF4-FFF2-40B4-BE49-F238E27FC236}">
-                <a16:creationId xmlns:a16="http://schemas.microsoft.com/office/drawing/2014/main" id="{112C8138-B295-4520-8BE9-7CFAAADC6269}"/>
-              </a:ext>
-            </a:extLst>
-          </p:cNvPr>
-          <p:cNvSpPr>
-            <a:spLocks xmlns:a="http://schemas.openxmlformats.org/drawingml/2006/main" noGrp="1"/>
-          </p:cNvSpPr>
-          <p:nvPr/>
-        </p:nvSpPr>
-        <p:spPr>
-          <a:xfrm xmlns:a="http://schemas.openxmlformats.org/drawingml/2006/main">
-            <a:off x="1866900" y="3009900"/>
-            <a:ext cx="9334500" cy="552450"/>
-          </a:xfrm>
-          <a:prstGeom xmlns:a="http://schemas.openxmlformats.org/drawingml/2006/main" prst="rect">
-            <a:avLst/>
-          </a:prstGeom>
-          <a:noFill xmlns:a="http://schemas.openxmlformats.org/drawingml/2006/main"/>
-          <a:ln xmlns:a="http://schemas.openxmlformats.org/drawingml/2006/main" w="0">
-            <a:noFill/>
-            <a:prstDash val="solid"/>
-          </a:ln>
-        </p:spPr>
-        <p:txBody>
-          <a:bodyPr xmlns:a="http://schemas.openxmlformats.org/drawingml/2006/main"/>
-          <a:lstStyle xmlns:a="http://schemas.openxmlformats.org/drawingml/2006/main"/>
-          <a:p xmlns:a="http://schemas.openxmlformats.org/drawingml/2006/main">
-            <a:pPr>
-              <a:defRPr sz="1200">
+          <p:cNvPr id="18" name="">
+            <a:extLst xmlns:a="http://schemas.openxmlformats.org/drawingml/2006/main">
+              <a:ext uri="{FF2B5EF4-FFF2-40B4-BE49-F238E27FC236}">
+                <a16:creationId xmlns:a16="http://schemas.microsoft.com/office/drawing/2014/main" id="{976E3828-65ED-4069-86AF-86B2C7DC810E}"/>
+              </a:ext>
+            </a:extLst>
+          </p:cNvPr>
+          <p:cNvSpPr>
+            <a:spLocks xmlns:a="http://schemas.openxmlformats.org/drawingml/2006/main" noGrp="1"/>
+          </p:cNvSpPr>
+          <p:nvPr/>
+        </p:nvSpPr>
+        <p:spPr>
+          <a:xfrm xmlns:a="http://schemas.openxmlformats.org/drawingml/2006/main">
+            <a:off x="1866900" y="2914650"/>
+            <a:ext cx="9334500" cy="333375"/>
+          </a:xfrm>
+          <a:prstGeom xmlns:a="http://schemas.openxmlformats.org/drawingml/2006/main" prst="rect">
+            <a:avLst/>
+          </a:prstGeom>
+          <a:noFill xmlns:a="http://schemas.openxmlformats.org/drawingml/2006/main"/>
+          <a:ln xmlns:a="http://schemas.openxmlformats.org/drawingml/2006/main" w="0">
+            <a:noFill/>
+            <a:prstDash val="solid"/>
+          </a:ln>
+        </p:spPr>
+        <p:txBody>
+          <a:bodyPr xmlns:a="http://schemas.openxmlformats.org/drawingml/2006/main"/>
+          <a:lstStyle xmlns:a="http://schemas.openxmlformats.org/drawingml/2006/main"/>
+          <a:p xmlns:a="http://schemas.openxmlformats.org/drawingml/2006/main">
+            <a:pPr>
+              <a:defRPr sz="1050">
                 <a:solidFill>
                   <a:srgbClr val="667085"/>
                 </a:solidFill>
               </a:defRPr>
             </a:pPr>
             <a:r>
-              <a:rPr sz="1200">
+              <a:rPr sz="1050">
                 <a:solidFill>
                   <a:srgbClr val="667085"/>
                 </a:solidFill>
@@ -4842,21 +5291,121 @@
       </p:sp>
       <p:sp>
         <p:nvSpPr>
-          <p:cNvPr id="17" name="">
-            <a:extLst xmlns:a="http://schemas.openxmlformats.org/drawingml/2006/main">
-              <a:ext uri="{FF2B5EF4-FFF2-40B4-BE49-F238E27FC236}">
-                <a16:creationId xmlns:a16="http://schemas.microsoft.com/office/drawing/2014/main" id="{C63FDF59-602A-4A42-A143-9917C4DE4A93}"/>
-              </a:ext>
-            </a:extLst>
-          </p:cNvPr>
-          <p:cNvSpPr>
-            <a:spLocks xmlns:a="http://schemas.openxmlformats.org/drawingml/2006/main" noGrp="1"/>
-          </p:cNvSpPr>
-          <p:nvPr/>
-        </p:nvSpPr>
-        <p:spPr>
-          <a:xfrm xmlns:a="http://schemas.openxmlformats.org/drawingml/2006/main">
-            <a:off x="1866900" y="3676650"/>
+          <p:cNvPr id="19" name="">
+            <a:extLst xmlns:a="http://schemas.openxmlformats.org/drawingml/2006/main">
+              <a:ext uri="{FF2B5EF4-FFF2-40B4-BE49-F238E27FC236}">
+                <a16:creationId xmlns:a16="http://schemas.microsoft.com/office/drawing/2014/main" id="{A2B13135-4465-46CE-9733-558C4A2A679C}"/>
+              </a:ext>
+            </a:extLst>
+          </p:cNvPr>
+          <p:cNvSpPr>
+            <a:spLocks xmlns:a="http://schemas.openxmlformats.org/drawingml/2006/main" noGrp="1"/>
+          </p:cNvSpPr>
+          <p:nvPr/>
+        </p:nvSpPr>
+        <p:spPr>
+          <a:xfrm xmlns:a="http://schemas.openxmlformats.org/drawingml/2006/main">
+            <a:off x="1866900" y="3333750"/>
+            <a:ext cx="990600" cy="190500"/>
+          </a:xfrm>
+          <a:prstGeom xmlns:a="http://schemas.openxmlformats.org/drawingml/2006/main" prst="rect">
+            <a:avLst/>
+          </a:prstGeom>
+          <a:noFill xmlns:a="http://schemas.openxmlformats.org/drawingml/2006/main"/>
+          <a:ln xmlns:a="http://schemas.openxmlformats.org/drawingml/2006/main" w="0">
+            <a:noFill/>
+            <a:prstDash val="solid"/>
+          </a:ln>
+        </p:spPr>
+        <p:txBody>
+          <a:bodyPr xmlns:a="http://schemas.openxmlformats.org/drawingml/2006/main"/>
+          <a:lstStyle xmlns:a="http://schemas.openxmlformats.org/drawingml/2006/main"/>
+          <a:p xmlns:a="http://schemas.openxmlformats.org/drawingml/2006/main">
+            <a:pPr>
+              <a:defRPr sz="975" b="1">
+                <a:solidFill>
+                  <a:srgbClr val="FF6412"/>
+                </a:solidFill>
+              </a:defRPr>
+            </a:pPr>
+            <a:r>
+              <a:rPr sz="975" b="1">
+                <a:solidFill>
+                  <a:srgbClr val="FF6412"/>
+                </a:solidFill>
+              </a:rPr>
+              <a:t>Рекомендуем</a:t>
+            </a:r>
+          </a:p>
+        </p:txBody>
+      </p:sp>
+      <p:sp>
+        <p:nvSpPr>
+          <p:cNvPr id="20" name="">
+            <a:extLst xmlns:a="http://schemas.openxmlformats.org/drawingml/2006/main">
+              <a:ext uri="{FF2B5EF4-FFF2-40B4-BE49-F238E27FC236}">
+                <a16:creationId xmlns:a16="http://schemas.microsoft.com/office/drawing/2014/main" id="{0712B236-5DBB-4A7E-900E-6B2D1DEC6E55}"/>
+              </a:ext>
+            </a:extLst>
+          </p:cNvPr>
+          <p:cNvSpPr>
+            <a:spLocks xmlns:a="http://schemas.openxmlformats.org/drawingml/2006/main" noGrp="1"/>
+          </p:cNvSpPr>
+          <p:nvPr/>
+        </p:nvSpPr>
+        <p:spPr>
+          <a:xfrm xmlns:a="http://schemas.openxmlformats.org/drawingml/2006/main">
+            <a:off x="2895600" y="3295650"/>
+            <a:ext cx="8305800" cy="323850"/>
+          </a:xfrm>
+          <a:prstGeom xmlns:a="http://schemas.openxmlformats.org/drawingml/2006/main" prst="rect">
+            <a:avLst/>
+          </a:prstGeom>
+          <a:noFill xmlns:a="http://schemas.openxmlformats.org/drawingml/2006/main"/>
+          <a:ln xmlns:a="http://schemas.openxmlformats.org/drawingml/2006/main" w="0">
+            <a:noFill/>
+            <a:prstDash val="solid"/>
+          </a:ln>
+        </p:spPr>
+        <p:txBody>
+          <a:bodyPr xmlns:a="http://schemas.openxmlformats.org/drawingml/2006/main"/>
+          <a:lstStyle xmlns:a="http://schemas.openxmlformats.org/drawingml/2006/main"/>
+          <a:p xmlns:a="http://schemas.openxmlformats.org/drawingml/2006/main">
+            <a:pPr>
+              <a:defRPr sz="1050" b="1">
+                <a:solidFill>
+                  <a:srgbClr val="161616"/>
+                </a:solidFill>
+              </a:defRPr>
+            </a:pPr>
+            <a:r>
+              <a:rPr sz="1050" b="1">
+                <a:solidFill>
+                  <a:srgbClr val="161616"/>
+                </a:solidFill>
+              </a:rPr>
+              <a:t>{{RISK_2_RECOMMENDATION}}</a:t>
+            </a:r>
+          </a:p>
+        </p:txBody>
+      </p:sp>
+      <p:sp>
+        <p:nvSpPr>
+          <p:cNvPr id="21" name="">
+            <a:extLst xmlns:a="http://schemas.openxmlformats.org/drawingml/2006/main">
+              <a:ext uri="{FF2B5EF4-FFF2-40B4-BE49-F238E27FC236}">
+                <a16:creationId xmlns:a16="http://schemas.microsoft.com/office/drawing/2014/main" id="{6EC6466F-71C7-4BD9-8817-125B8737F98B}"/>
+              </a:ext>
+            </a:extLst>
+          </p:cNvPr>
+          <p:cNvSpPr>
+            <a:spLocks xmlns:a="http://schemas.openxmlformats.org/drawingml/2006/main" noGrp="1"/>
+          </p:cNvSpPr>
+          <p:nvPr/>
+        </p:nvSpPr>
+        <p:spPr>
+          <a:xfrm xmlns:a="http://schemas.openxmlformats.org/drawingml/2006/main">
+            <a:off x="1866900" y="3714750"/>
             <a:ext cx="9334500" cy="9525"/>
           </a:xfrm>
           <a:prstGeom xmlns:a="http://schemas.openxmlformats.org/drawingml/2006/main" prst="rect">
@@ -4873,26 +5422,26 @@
       </p:sp>
       <p:sp>
         <p:nvSpPr>
-          <p:cNvPr id="18" name="">
-            <a:extLst xmlns:a="http://schemas.openxmlformats.org/drawingml/2006/main">
-              <a:ext uri="{FF2B5EF4-FFF2-40B4-BE49-F238E27FC236}">
-                <a16:creationId xmlns:a16="http://schemas.microsoft.com/office/drawing/2014/main" id="{CB826E39-B6B1-46C4-8346-CBCCF00CA5CD}"/>
-              </a:ext>
-            </a:extLst>
-          </p:cNvPr>
-          <p:cNvSpPr>
-            <a:spLocks xmlns:a="http://schemas.openxmlformats.org/drawingml/2006/main" noGrp="1"/>
-          </p:cNvSpPr>
-          <p:nvPr/>
-        </p:nvSpPr>
-        <p:spPr>
-          <a:xfrm xmlns:a="http://schemas.openxmlformats.org/drawingml/2006/main">
-            <a:off x="552450" y="3810000"/>
-            <a:ext cx="1047750" cy="895350"/>
+          <p:cNvPr id="22" name="">
+            <a:extLst xmlns:a="http://schemas.openxmlformats.org/drawingml/2006/main">
+              <a:ext uri="{FF2B5EF4-FFF2-40B4-BE49-F238E27FC236}">
+                <a16:creationId xmlns:a16="http://schemas.microsoft.com/office/drawing/2014/main" id="{3EA7F8F8-66EE-412A-AB62-227539752984}"/>
+              </a:ext>
+            </a:extLst>
+          </p:cNvPr>
+          <p:cNvSpPr>
+            <a:spLocks xmlns:a="http://schemas.openxmlformats.org/drawingml/2006/main" noGrp="1"/>
+          </p:cNvSpPr>
+          <p:nvPr/>
+        </p:nvSpPr>
+        <p:spPr>
+          <a:xfrm xmlns:a="http://schemas.openxmlformats.org/drawingml/2006/main">
+            <a:off x="552450" y="3829050"/>
+            <a:ext cx="1047750" cy="1009650"/>
           </a:xfrm>
           <a:prstGeom xmlns:a="http://schemas.openxmlformats.org/drawingml/2006/main" prst="roundRect">
             <a:avLst>
-              <a:gd name="adj" fmla="val 8511"/>
+              <a:gd name="adj" fmla="val 7547"/>
             </a:avLst>
           </a:prstGeom>
           <a:solidFill xmlns:a="http://schemas.openxmlformats.org/drawingml/2006/main">
@@ -4906,21 +5455,21 @@
       </p:sp>
       <p:sp>
         <p:nvSpPr>
-          <p:cNvPr id="19" name="">
-            <a:extLst xmlns:a="http://schemas.openxmlformats.org/drawingml/2006/main">
-              <a:ext uri="{FF2B5EF4-FFF2-40B4-BE49-F238E27FC236}">
-                <a16:creationId xmlns:a16="http://schemas.microsoft.com/office/drawing/2014/main" id="{8035A0DC-224D-4AD5-B330-14E7E3A1A1EC}"/>
-              </a:ext>
-            </a:extLst>
-          </p:cNvPr>
-          <p:cNvSpPr>
-            <a:spLocks xmlns:a="http://schemas.openxmlformats.org/drawingml/2006/main" noGrp="1"/>
-          </p:cNvSpPr>
-          <p:nvPr/>
-        </p:nvSpPr>
-        <p:spPr>
-          <a:xfrm xmlns:a="http://schemas.openxmlformats.org/drawingml/2006/main">
-            <a:off x="647700" y="4105275"/>
+          <p:cNvPr id="23" name="">
+            <a:extLst xmlns:a="http://schemas.openxmlformats.org/drawingml/2006/main">
+              <a:ext uri="{FF2B5EF4-FFF2-40B4-BE49-F238E27FC236}">
+                <a16:creationId xmlns:a16="http://schemas.microsoft.com/office/drawing/2014/main" id="{F97FDD44-15D6-418D-8244-47AB1B23D834}"/>
+              </a:ext>
+            </a:extLst>
+          </p:cNvPr>
+          <p:cNvSpPr>
+            <a:spLocks xmlns:a="http://schemas.openxmlformats.org/drawingml/2006/main" noGrp="1"/>
+          </p:cNvSpPr>
+          <p:nvPr/>
+        </p:nvSpPr>
+        <p:spPr>
+          <a:xfrm xmlns:a="http://schemas.openxmlformats.org/drawingml/2006/main">
+            <a:off x="647700" y="4181475"/>
             <a:ext cx="857250" cy="266700"/>
           </a:xfrm>
           <a:prstGeom xmlns:a="http://schemas.openxmlformats.org/drawingml/2006/main" prst="rect">
@@ -4956,45 +5505,45 @@
       </p:sp>
       <p:sp>
         <p:nvSpPr>
-          <p:cNvPr id="20" name="">
-            <a:extLst xmlns:a="http://schemas.openxmlformats.org/drawingml/2006/main">
-              <a:ext uri="{FF2B5EF4-FFF2-40B4-BE49-F238E27FC236}">
-                <a16:creationId xmlns:a16="http://schemas.microsoft.com/office/drawing/2014/main" id="{B7500B41-290F-4758-A38D-35F780C0ABC6}"/>
-              </a:ext>
-            </a:extLst>
-          </p:cNvPr>
-          <p:cNvSpPr>
-            <a:spLocks xmlns:a="http://schemas.openxmlformats.org/drawingml/2006/main" noGrp="1"/>
-          </p:cNvSpPr>
-          <p:nvPr/>
-        </p:nvSpPr>
-        <p:spPr>
-          <a:xfrm xmlns:a="http://schemas.openxmlformats.org/drawingml/2006/main">
-            <a:off x="1866900" y="3810000"/>
-            <a:ext cx="3905250" cy="381000"/>
-          </a:xfrm>
-          <a:prstGeom xmlns:a="http://schemas.openxmlformats.org/drawingml/2006/main" prst="rect">
-            <a:avLst/>
-          </a:prstGeom>
-          <a:noFill xmlns:a="http://schemas.openxmlformats.org/drawingml/2006/main"/>
-          <a:ln xmlns:a="http://schemas.openxmlformats.org/drawingml/2006/main" w="0">
-            <a:noFill/>
-            <a:prstDash val="solid"/>
-          </a:ln>
-        </p:spPr>
-        <p:txBody>
-          <a:bodyPr xmlns:a="http://schemas.openxmlformats.org/drawingml/2006/main"/>
-          <a:lstStyle xmlns:a="http://schemas.openxmlformats.org/drawingml/2006/main"/>
-          <a:p xmlns:a="http://schemas.openxmlformats.org/drawingml/2006/main">
-            <a:pPr>
-              <a:defRPr sz="1500" b="1">
-                <a:solidFill>
-                  <a:srgbClr val="161616"/>
-                </a:solidFill>
-              </a:defRPr>
-            </a:pPr>
-            <a:r>
-              <a:rPr sz="1500" b="1">
+          <p:cNvPr id="24" name="">
+            <a:extLst xmlns:a="http://schemas.openxmlformats.org/drawingml/2006/main">
+              <a:ext uri="{FF2B5EF4-FFF2-40B4-BE49-F238E27FC236}">
+                <a16:creationId xmlns:a16="http://schemas.microsoft.com/office/drawing/2014/main" id="{9B39B17F-5EDD-4C12-8B02-9D0E959A0A04}"/>
+              </a:ext>
+            </a:extLst>
+          </p:cNvPr>
+          <p:cNvSpPr>
+            <a:spLocks xmlns:a="http://schemas.openxmlformats.org/drawingml/2006/main" noGrp="1"/>
+          </p:cNvSpPr>
+          <p:nvPr/>
+        </p:nvSpPr>
+        <p:spPr>
+          <a:xfrm xmlns:a="http://schemas.openxmlformats.org/drawingml/2006/main">
+            <a:off x="1866900" y="3829050"/>
+            <a:ext cx="9334500" cy="295275"/>
+          </a:xfrm>
+          <a:prstGeom xmlns:a="http://schemas.openxmlformats.org/drawingml/2006/main" prst="rect">
+            <a:avLst/>
+          </a:prstGeom>
+          <a:noFill xmlns:a="http://schemas.openxmlformats.org/drawingml/2006/main"/>
+          <a:ln xmlns:a="http://schemas.openxmlformats.org/drawingml/2006/main" w="0">
+            <a:noFill/>
+            <a:prstDash val="solid"/>
+          </a:ln>
+        </p:spPr>
+        <p:txBody>
+          <a:bodyPr xmlns:a="http://schemas.openxmlformats.org/drawingml/2006/main"/>
+          <a:lstStyle xmlns:a="http://schemas.openxmlformats.org/drawingml/2006/main"/>
+          <a:p xmlns:a="http://schemas.openxmlformats.org/drawingml/2006/main">
+            <a:pPr>
+              <a:defRPr sz="1350" b="1">
+                <a:solidFill>
+                  <a:srgbClr val="161616"/>
+                </a:solidFill>
+              </a:defRPr>
+            </a:pPr>
+            <a:r>
+              <a:rPr sz="1350" b="1">
                 <a:solidFill>
                   <a:srgbClr val="161616"/>
                 </a:solidFill>
@@ -5006,45 +5555,45 @@
       </p:sp>
       <p:sp>
         <p:nvSpPr>
-          <p:cNvPr id="21" name="">
-            <a:extLst xmlns:a="http://schemas.openxmlformats.org/drawingml/2006/main">
-              <a:ext uri="{FF2B5EF4-FFF2-40B4-BE49-F238E27FC236}">
-                <a16:creationId xmlns:a16="http://schemas.microsoft.com/office/drawing/2014/main" id="{B9A41AAE-7455-41AD-AA4B-E0EB281A7251}"/>
-              </a:ext>
-            </a:extLst>
-          </p:cNvPr>
-          <p:cNvSpPr>
-            <a:spLocks xmlns:a="http://schemas.openxmlformats.org/drawingml/2006/main" noGrp="1"/>
-          </p:cNvSpPr>
-          <p:nvPr/>
-        </p:nvSpPr>
-        <p:spPr>
-          <a:xfrm xmlns:a="http://schemas.openxmlformats.org/drawingml/2006/main">
-            <a:off x="1866900" y="4210050"/>
-            <a:ext cx="9334500" cy="552450"/>
-          </a:xfrm>
-          <a:prstGeom xmlns:a="http://schemas.openxmlformats.org/drawingml/2006/main" prst="rect">
-            <a:avLst/>
-          </a:prstGeom>
-          <a:noFill xmlns:a="http://schemas.openxmlformats.org/drawingml/2006/main"/>
-          <a:ln xmlns:a="http://schemas.openxmlformats.org/drawingml/2006/main" w="0">
-            <a:noFill/>
-            <a:prstDash val="solid"/>
-          </a:ln>
-        </p:spPr>
-        <p:txBody>
-          <a:bodyPr xmlns:a="http://schemas.openxmlformats.org/drawingml/2006/main"/>
-          <a:lstStyle xmlns:a="http://schemas.openxmlformats.org/drawingml/2006/main"/>
-          <a:p xmlns:a="http://schemas.openxmlformats.org/drawingml/2006/main">
-            <a:pPr>
-              <a:defRPr sz="1200">
+          <p:cNvPr id="25" name="">
+            <a:extLst xmlns:a="http://schemas.openxmlformats.org/drawingml/2006/main">
+              <a:ext uri="{FF2B5EF4-FFF2-40B4-BE49-F238E27FC236}">
+                <a16:creationId xmlns:a16="http://schemas.microsoft.com/office/drawing/2014/main" id="{2304100F-F4E8-464C-8B37-C99AE8BDBF9A}"/>
+              </a:ext>
+            </a:extLst>
+          </p:cNvPr>
+          <p:cNvSpPr>
+            <a:spLocks xmlns:a="http://schemas.openxmlformats.org/drawingml/2006/main" noGrp="1"/>
+          </p:cNvSpPr>
+          <p:nvPr/>
+        </p:nvSpPr>
+        <p:spPr>
+          <a:xfrm xmlns:a="http://schemas.openxmlformats.org/drawingml/2006/main">
+            <a:off x="1866900" y="4133850"/>
+            <a:ext cx="9334500" cy="333375"/>
+          </a:xfrm>
+          <a:prstGeom xmlns:a="http://schemas.openxmlformats.org/drawingml/2006/main" prst="rect">
+            <a:avLst/>
+          </a:prstGeom>
+          <a:noFill xmlns:a="http://schemas.openxmlformats.org/drawingml/2006/main"/>
+          <a:ln xmlns:a="http://schemas.openxmlformats.org/drawingml/2006/main" w="0">
+            <a:noFill/>
+            <a:prstDash val="solid"/>
+          </a:ln>
+        </p:spPr>
+        <p:txBody>
+          <a:bodyPr xmlns:a="http://schemas.openxmlformats.org/drawingml/2006/main"/>
+          <a:lstStyle xmlns:a="http://schemas.openxmlformats.org/drawingml/2006/main"/>
+          <a:p xmlns:a="http://schemas.openxmlformats.org/drawingml/2006/main">
+            <a:pPr>
+              <a:defRPr sz="1050">
                 <a:solidFill>
                   <a:srgbClr val="667085"/>
                 </a:solidFill>
               </a:defRPr>
             </a:pPr>
             <a:r>
-              <a:rPr sz="1200">
+              <a:rPr sz="1050">
                 <a:solidFill>
                   <a:srgbClr val="667085"/>
                 </a:solidFill>
@@ -5056,21 +5605,121 @@
       </p:sp>
       <p:sp>
         <p:nvSpPr>
-          <p:cNvPr id="22" name="">
-            <a:extLst xmlns:a="http://schemas.openxmlformats.org/drawingml/2006/main">
-              <a:ext uri="{FF2B5EF4-FFF2-40B4-BE49-F238E27FC236}">
-                <a16:creationId xmlns:a16="http://schemas.microsoft.com/office/drawing/2014/main" id="{1C7D107E-9DB0-420F-B2FB-09956C0BE50C}"/>
-              </a:ext>
-            </a:extLst>
-          </p:cNvPr>
-          <p:cNvSpPr>
-            <a:spLocks xmlns:a="http://schemas.openxmlformats.org/drawingml/2006/main" noGrp="1"/>
-          </p:cNvSpPr>
-          <p:nvPr/>
-        </p:nvSpPr>
-        <p:spPr>
-          <a:xfrm xmlns:a="http://schemas.openxmlformats.org/drawingml/2006/main">
-            <a:off x="1866900" y="4876800"/>
+          <p:cNvPr id="26" name="">
+            <a:extLst xmlns:a="http://schemas.openxmlformats.org/drawingml/2006/main">
+              <a:ext uri="{FF2B5EF4-FFF2-40B4-BE49-F238E27FC236}">
+                <a16:creationId xmlns:a16="http://schemas.microsoft.com/office/drawing/2014/main" id="{3283A435-FD20-4838-9191-898CB6F8EEAF}"/>
+              </a:ext>
+            </a:extLst>
+          </p:cNvPr>
+          <p:cNvSpPr>
+            <a:spLocks xmlns:a="http://schemas.openxmlformats.org/drawingml/2006/main" noGrp="1"/>
+          </p:cNvSpPr>
+          <p:nvPr/>
+        </p:nvSpPr>
+        <p:spPr>
+          <a:xfrm xmlns:a="http://schemas.openxmlformats.org/drawingml/2006/main">
+            <a:off x="1866900" y="4552950"/>
+            <a:ext cx="990600" cy="190500"/>
+          </a:xfrm>
+          <a:prstGeom xmlns:a="http://schemas.openxmlformats.org/drawingml/2006/main" prst="rect">
+            <a:avLst/>
+          </a:prstGeom>
+          <a:noFill xmlns:a="http://schemas.openxmlformats.org/drawingml/2006/main"/>
+          <a:ln xmlns:a="http://schemas.openxmlformats.org/drawingml/2006/main" w="0">
+            <a:noFill/>
+            <a:prstDash val="solid"/>
+          </a:ln>
+        </p:spPr>
+        <p:txBody>
+          <a:bodyPr xmlns:a="http://schemas.openxmlformats.org/drawingml/2006/main"/>
+          <a:lstStyle xmlns:a="http://schemas.openxmlformats.org/drawingml/2006/main"/>
+          <a:p xmlns:a="http://schemas.openxmlformats.org/drawingml/2006/main">
+            <a:pPr>
+              <a:defRPr sz="975" b="1">
+                <a:solidFill>
+                  <a:srgbClr val="FF6412"/>
+                </a:solidFill>
+              </a:defRPr>
+            </a:pPr>
+            <a:r>
+              <a:rPr sz="975" b="1">
+                <a:solidFill>
+                  <a:srgbClr val="FF6412"/>
+                </a:solidFill>
+              </a:rPr>
+              <a:t>Рекомендуем</a:t>
+            </a:r>
+          </a:p>
+        </p:txBody>
+      </p:sp>
+      <p:sp>
+        <p:nvSpPr>
+          <p:cNvPr id="27" name="">
+            <a:extLst xmlns:a="http://schemas.openxmlformats.org/drawingml/2006/main">
+              <a:ext uri="{FF2B5EF4-FFF2-40B4-BE49-F238E27FC236}">
+                <a16:creationId xmlns:a16="http://schemas.microsoft.com/office/drawing/2014/main" id="{5D1790DF-B493-48F9-9D08-0C6D67D91C0C}"/>
+              </a:ext>
+            </a:extLst>
+          </p:cNvPr>
+          <p:cNvSpPr>
+            <a:spLocks xmlns:a="http://schemas.openxmlformats.org/drawingml/2006/main" noGrp="1"/>
+          </p:cNvSpPr>
+          <p:nvPr/>
+        </p:nvSpPr>
+        <p:spPr>
+          <a:xfrm xmlns:a="http://schemas.openxmlformats.org/drawingml/2006/main">
+            <a:off x="2895600" y="4514850"/>
+            <a:ext cx="8305800" cy="323850"/>
+          </a:xfrm>
+          <a:prstGeom xmlns:a="http://schemas.openxmlformats.org/drawingml/2006/main" prst="rect">
+            <a:avLst/>
+          </a:prstGeom>
+          <a:noFill xmlns:a="http://schemas.openxmlformats.org/drawingml/2006/main"/>
+          <a:ln xmlns:a="http://schemas.openxmlformats.org/drawingml/2006/main" w="0">
+            <a:noFill/>
+            <a:prstDash val="solid"/>
+          </a:ln>
+        </p:spPr>
+        <p:txBody>
+          <a:bodyPr xmlns:a="http://schemas.openxmlformats.org/drawingml/2006/main"/>
+          <a:lstStyle xmlns:a="http://schemas.openxmlformats.org/drawingml/2006/main"/>
+          <a:p xmlns:a="http://schemas.openxmlformats.org/drawingml/2006/main">
+            <a:pPr>
+              <a:defRPr sz="1050" b="1">
+                <a:solidFill>
+                  <a:srgbClr val="161616"/>
+                </a:solidFill>
+              </a:defRPr>
+            </a:pPr>
+            <a:r>
+              <a:rPr sz="1050" b="1">
+                <a:solidFill>
+                  <a:srgbClr val="161616"/>
+                </a:solidFill>
+              </a:rPr>
+              <a:t>{{RISK_3_RECOMMENDATION}}</a:t>
+            </a:r>
+          </a:p>
+        </p:txBody>
+      </p:sp>
+      <p:sp>
+        <p:nvSpPr>
+          <p:cNvPr id="28" name="">
+            <a:extLst xmlns:a="http://schemas.openxmlformats.org/drawingml/2006/main">
+              <a:ext uri="{FF2B5EF4-FFF2-40B4-BE49-F238E27FC236}">
+                <a16:creationId xmlns:a16="http://schemas.microsoft.com/office/drawing/2014/main" id="{E57FBF37-D54B-4433-B6DD-9F19D34C295C}"/>
+              </a:ext>
+            </a:extLst>
+          </p:cNvPr>
+          <p:cNvSpPr>
+            <a:spLocks xmlns:a="http://schemas.openxmlformats.org/drawingml/2006/main" noGrp="1"/>
+          </p:cNvSpPr>
+          <p:nvPr/>
+        </p:nvSpPr>
+        <p:spPr>
+          <a:xfrm xmlns:a="http://schemas.openxmlformats.org/drawingml/2006/main">
+            <a:off x="1866900" y="4933950"/>
             <a:ext cx="9334500" cy="9525"/>
           </a:xfrm>
           <a:prstGeom xmlns:a="http://schemas.openxmlformats.org/drawingml/2006/main" prst="rect">
@@ -5087,26 +5736,26 @@
       </p:sp>
       <p:sp>
         <p:nvSpPr>
-          <p:cNvPr id="23" name="">
-            <a:extLst xmlns:a="http://schemas.openxmlformats.org/drawingml/2006/main">
-              <a:ext uri="{FF2B5EF4-FFF2-40B4-BE49-F238E27FC236}">
-                <a16:creationId xmlns:a16="http://schemas.microsoft.com/office/drawing/2014/main" id="{D22CDC60-A00B-42EE-91FC-0A116FC8E6B6}"/>
-              </a:ext>
-            </a:extLst>
-          </p:cNvPr>
-          <p:cNvSpPr>
-            <a:spLocks xmlns:a="http://schemas.openxmlformats.org/drawingml/2006/main" noGrp="1"/>
-          </p:cNvSpPr>
-          <p:nvPr/>
-        </p:nvSpPr>
-        <p:spPr>
-          <a:xfrm xmlns:a="http://schemas.openxmlformats.org/drawingml/2006/main">
-            <a:off x="552450" y="5010150"/>
-            <a:ext cx="1047750" cy="895350"/>
+          <p:cNvPr id="29" name="">
+            <a:extLst xmlns:a="http://schemas.openxmlformats.org/drawingml/2006/main">
+              <a:ext uri="{FF2B5EF4-FFF2-40B4-BE49-F238E27FC236}">
+                <a16:creationId xmlns:a16="http://schemas.microsoft.com/office/drawing/2014/main" id="{40158CD2-92FB-4BAB-A725-AD284F856341}"/>
+              </a:ext>
+            </a:extLst>
+          </p:cNvPr>
+          <p:cNvSpPr>
+            <a:spLocks xmlns:a="http://schemas.openxmlformats.org/drawingml/2006/main" noGrp="1"/>
+          </p:cNvSpPr>
+          <p:nvPr/>
+        </p:nvSpPr>
+        <p:spPr>
+          <a:xfrm xmlns:a="http://schemas.openxmlformats.org/drawingml/2006/main">
+            <a:off x="552450" y="5048250"/>
+            <a:ext cx="1047750" cy="1009650"/>
           </a:xfrm>
           <a:prstGeom xmlns:a="http://schemas.openxmlformats.org/drawingml/2006/main" prst="roundRect">
             <a:avLst>
-              <a:gd name="adj" fmla="val 8511"/>
+              <a:gd name="adj" fmla="val 7547"/>
             </a:avLst>
           </a:prstGeom>
           <a:solidFill xmlns:a="http://schemas.openxmlformats.org/drawingml/2006/main">
@@ -5120,21 +5769,21 @@
       </p:sp>
       <p:sp>
         <p:nvSpPr>
-          <p:cNvPr id="24" name="">
-            <a:extLst xmlns:a="http://schemas.openxmlformats.org/drawingml/2006/main">
-              <a:ext uri="{FF2B5EF4-FFF2-40B4-BE49-F238E27FC236}">
-                <a16:creationId xmlns:a16="http://schemas.microsoft.com/office/drawing/2014/main" id="{B6D209F1-3CB3-410A-BF2A-B0421B7D4EF7}"/>
-              </a:ext>
-            </a:extLst>
-          </p:cNvPr>
-          <p:cNvSpPr>
-            <a:spLocks xmlns:a="http://schemas.openxmlformats.org/drawingml/2006/main" noGrp="1"/>
-          </p:cNvSpPr>
-          <p:nvPr/>
-        </p:nvSpPr>
-        <p:spPr>
-          <a:xfrm xmlns:a="http://schemas.openxmlformats.org/drawingml/2006/main">
-            <a:off x="647700" y="5305425"/>
+          <p:cNvPr id="30" name="">
+            <a:extLst xmlns:a="http://schemas.openxmlformats.org/drawingml/2006/main">
+              <a:ext uri="{FF2B5EF4-FFF2-40B4-BE49-F238E27FC236}">
+                <a16:creationId xmlns:a16="http://schemas.microsoft.com/office/drawing/2014/main" id="{BA5D87C3-B305-457F-9945-FA08223F7EFC}"/>
+              </a:ext>
+            </a:extLst>
+          </p:cNvPr>
+          <p:cNvSpPr>
+            <a:spLocks xmlns:a="http://schemas.openxmlformats.org/drawingml/2006/main" noGrp="1"/>
+          </p:cNvSpPr>
+          <p:nvPr/>
+        </p:nvSpPr>
+        <p:spPr>
+          <a:xfrm xmlns:a="http://schemas.openxmlformats.org/drawingml/2006/main">
+            <a:off x="647700" y="5400675"/>
             <a:ext cx="857250" cy="266700"/>
           </a:xfrm>
           <a:prstGeom xmlns:a="http://schemas.openxmlformats.org/drawingml/2006/main" prst="rect">
@@ -5170,45 +5819,45 @@
       </p:sp>
       <p:sp>
         <p:nvSpPr>
-          <p:cNvPr id="25" name="">
-            <a:extLst xmlns:a="http://schemas.openxmlformats.org/drawingml/2006/main">
-              <a:ext uri="{FF2B5EF4-FFF2-40B4-BE49-F238E27FC236}">
-                <a16:creationId xmlns:a16="http://schemas.microsoft.com/office/drawing/2014/main" id="{5F372317-B07A-4A1F-822B-E7105CA166EF}"/>
-              </a:ext>
-            </a:extLst>
-          </p:cNvPr>
-          <p:cNvSpPr>
-            <a:spLocks xmlns:a="http://schemas.openxmlformats.org/drawingml/2006/main" noGrp="1"/>
-          </p:cNvSpPr>
-          <p:nvPr/>
-        </p:nvSpPr>
-        <p:spPr>
-          <a:xfrm xmlns:a="http://schemas.openxmlformats.org/drawingml/2006/main">
-            <a:off x="1866900" y="5010150"/>
-            <a:ext cx="3905250" cy="381000"/>
-          </a:xfrm>
-          <a:prstGeom xmlns:a="http://schemas.openxmlformats.org/drawingml/2006/main" prst="rect">
-            <a:avLst/>
-          </a:prstGeom>
-          <a:noFill xmlns:a="http://schemas.openxmlformats.org/drawingml/2006/main"/>
-          <a:ln xmlns:a="http://schemas.openxmlformats.org/drawingml/2006/main" w="0">
-            <a:noFill/>
-            <a:prstDash val="solid"/>
-          </a:ln>
-        </p:spPr>
-        <p:txBody>
-          <a:bodyPr xmlns:a="http://schemas.openxmlformats.org/drawingml/2006/main"/>
-          <a:lstStyle xmlns:a="http://schemas.openxmlformats.org/drawingml/2006/main"/>
-          <a:p xmlns:a="http://schemas.openxmlformats.org/drawingml/2006/main">
-            <a:pPr>
-              <a:defRPr sz="1500" b="1">
-                <a:solidFill>
-                  <a:srgbClr val="161616"/>
-                </a:solidFill>
-              </a:defRPr>
-            </a:pPr>
-            <a:r>
-              <a:rPr sz="1500" b="1">
+          <p:cNvPr id="31" name="">
+            <a:extLst xmlns:a="http://schemas.openxmlformats.org/drawingml/2006/main">
+              <a:ext uri="{FF2B5EF4-FFF2-40B4-BE49-F238E27FC236}">
+                <a16:creationId xmlns:a16="http://schemas.microsoft.com/office/drawing/2014/main" id="{6D3CB388-399B-495B-BDC6-27E8157FE59E}"/>
+              </a:ext>
+            </a:extLst>
+          </p:cNvPr>
+          <p:cNvSpPr>
+            <a:spLocks xmlns:a="http://schemas.openxmlformats.org/drawingml/2006/main" noGrp="1"/>
+          </p:cNvSpPr>
+          <p:nvPr/>
+        </p:nvSpPr>
+        <p:spPr>
+          <a:xfrm xmlns:a="http://schemas.openxmlformats.org/drawingml/2006/main">
+            <a:off x="1866900" y="5048250"/>
+            <a:ext cx="9334500" cy="295275"/>
+          </a:xfrm>
+          <a:prstGeom xmlns:a="http://schemas.openxmlformats.org/drawingml/2006/main" prst="rect">
+            <a:avLst/>
+          </a:prstGeom>
+          <a:noFill xmlns:a="http://schemas.openxmlformats.org/drawingml/2006/main"/>
+          <a:ln xmlns:a="http://schemas.openxmlformats.org/drawingml/2006/main" w="0">
+            <a:noFill/>
+            <a:prstDash val="solid"/>
+          </a:ln>
+        </p:spPr>
+        <p:txBody>
+          <a:bodyPr xmlns:a="http://schemas.openxmlformats.org/drawingml/2006/main"/>
+          <a:lstStyle xmlns:a="http://schemas.openxmlformats.org/drawingml/2006/main"/>
+          <a:p xmlns:a="http://schemas.openxmlformats.org/drawingml/2006/main">
+            <a:pPr>
+              <a:defRPr sz="1350" b="1">
+                <a:solidFill>
+                  <a:srgbClr val="161616"/>
+                </a:solidFill>
+              </a:defRPr>
+            </a:pPr>
+            <a:r>
+              <a:rPr sz="1350" b="1">
                 <a:solidFill>
                   <a:srgbClr val="161616"/>
                 </a:solidFill>
@@ -5220,50 +5869,150 @@
       </p:sp>
       <p:sp>
         <p:nvSpPr>
-          <p:cNvPr id="26" name="">
-            <a:extLst xmlns:a="http://schemas.openxmlformats.org/drawingml/2006/main">
-              <a:ext uri="{FF2B5EF4-FFF2-40B4-BE49-F238E27FC236}">
-                <a16:creationId xmlns:a16="http://schemas.microsoft.com/office/drawing/2014/main" id="{EE24BB5D-E2EB-4343-9490-A952711BB735}"/>
-              </a:ext>
-            </a:extLst>
-          </p:cNvPr>
-          <p:cNvSpPr>
-            <a:spLocks xmlns:a="http://schemas.openxmlformats.org/drawingml/2006/main" noGrp="1"/>
-          </p:cNvSpPr>
-          <p:nvPr/>
-        </p:nvSpPr>
-        <p:spPr>
-          <a:xfrm xmlns:a="http://schemas.openxmlformats.org/drawingml/2006/main">
-            <a:off x="1866900" y="5410200"/>
-            <a:ext cx="9334500" cy="552450"/>
-          </a:xfrm>
-          <a:prstGeom xmlns:a="http://schemas.openxmlformats.org/drawingml/2006/main" prst="rect">
-            <a:avLst/>
-          </a:prstGeom>
-          <a:noFill xmlns:a="http://schemas.openxmlformats.org/drawingml/2006/main"/>
-          <a:ln xmlns:a="http://schemas.openxmlformats.org/drawingml/2006/main" w="0">
-            <a:noFill/>
-            <a:prstDash val="solid"/>
-          </a:ln>
-        </p:spPr>
-        <p:txBody>
-          <a:bodyPr xmlns:a="http://schemas.openxmlformats.org/drawingml/2006/main"/>
-          <a:lstStyle xmlns:a="http://schemas.openxmlformats.org/drawingml/2006/main"/>
-          <a:p xmlns:a="http://schemas.openxmlformats.org/drawingml/2006/main">
-            <a:pPr>
-              <a:defRPr sz="1200">
+          <p:cNvPr id="32" name="">
+            <a:extLst xmlns:a="http://schemas.openxmlformats.org/drawingml/2006/main">
+              <a:ext uri="{FF2B5EF4-FFF2-40B4-BE49-F238E27FC236}">
+                <a16:creationId xmlns:a16="http://schemas.microsoft.com/office/drawing/2014/main" id="{296749D3-572E-40D2-9644-E474465F395B}"/>
+              </a:ext>
+            </a:extLst>
+          </p:cNvPr>
+          <p:cNvSpPr>
+            <a:spLocks xmlns:a="http://schemas.openxmlformats.org/drawingml/2006/main" noGrp="1"/>
+          </p:cNvSpPr>
+          <p:nvPr/>
+        </p:nvSpPr>
+        <p:spPr>
+          <a:xfrm xmlns:a="http://schemas.openxmlformats.org/drawingml/2006/main">
+            <a:off x="1866900" y="5353050"/>
+            <a:ext cx="9334500" cy="333375"/>
+          </a:xfrm>
+          <a:prstGeom xmlns:a="http://schemas.openxmlformats.org/drawingml/2006/main" prst="rect">
+            <a:avLst/>
+          </a:prstGeom>
+          <a:noFill xmlns:a="http://schemas.openxmlformats.org/drawingml/2006/main"/>
+          <a:ln xmlns:a="http://schemas.openxmlformats.org/drawingml/2006/main" w="0">
+            <a:noFill/>
+            <a:prstDash val="solid"/>
+          </a:ln>
+        </p:spPr>
+        <p:txBody>
+          <a:bodyPr xmlns:a="http://schemas.openxmlformats.org/drawingml/2006/main"/>
+          <a:lstStyle xmlns:a="http://schemas.openxmlformats.org/drawingml/2006/main"/>
+          <a:p xmlns:a="http://schemas.openxmlformats.org/drawingml/2006/main">
+            <a:pPr>
+              <a:defRPr sz="1050">
                 <a:solidFill>
                   <a:srgbClr val="667085"/>
                 </a:solidFill>
               </a:defRPr>
             </a:pPr>
             <a:r>
-              <a:rPr sz="1200">
+              <a:rPr sz="1050">
                 <a:solidFill>
                   <a:srgbClr val="667085"/>
                 </a:solidFill>
               </a:rPr>
               <a:t>{{RISK_4_IMPACT}}</a:t>
+            </a:r>
+          </a:p>
+        </p:txBody>
+      </p:sp>
+      <p:sp>
+        <p:nvSpPr>
+          <p:cNvPr id="33" name="">
+            <a:extLst xmlns:a="http://schemas.openxmlformats.org/drawingml/2006/main">
+              <a:ext uri="{FF2B5EF4-FFF2-40B4-BE49-F238E27FC236}">
+                <a16:creationId xmlns:a16="http://schemas.microsoft.com/office/drawing/2014/main" id="{06B493BF-F12E-4091-925B-06958824BA77}"/>
+              </a:ext>
+            </a:extLst>
+          </p:cNvPr>
+          <p:cNvSpPr>
+            <a:spLocks xmlns:a="http://schemas.openxmlformats.org/drawingml/2006/main" noGrp="1"/>
+          </p:cNvSpPr>
+          <p:nvPr/>
+        </p:nvSpPr>
+        <p:spPr>
+          <a:xfrm xmlns:a="http://schemas.openxmlformats.org/drawingml/2006/main">
+            <a:off x="1866900" y="5772150"/>
+            <a:ext cx="990600" cy="190500"/>
+          </a:xfrm>
+          <a:prstGeom xmlns:a="http://schemas.openxmlformats.org/drawingml/2006/main" prst="rect">
+            <a:avLst/>
+          </a:prstGeom>
+          <a:noFill xmlns:a="http://schemas.openxmlformats.org/drawingml/2006/main"/>
+          <a:ln xmlns:a="http://schemas.openxmlformats.org/drawingml/2006/main" w="0">
+            <a:noFill/>
+            <a:prstDash val="solid"/>
+          </a:ln>
+        </p:spPr>
+        <p:txBody>
+          <a:bodyPr xmlns:a="http://schemas.openxmlformats.org/drawingml/2006/main"/>
+          <a:lstStyle xmlns:a="http://schemas.openxmlformats.org/drawingml/2006/main"/>
+          <a:p xmlns:a="http://schemas.openxmlformats.org/drawingml/2006/main">
+            <a:pPr>
+              <a:defRPr sz="975" b="1">
+                <a:solidFill>
+                  <a:srgbClr val="FF6412"/>
+                </a:solidFill>
+              </a:defRPr>
+            </a:pPr>
+            <a:r>
+              <a:rPr sz="975" b="1">
+                <a:solidFill>
+                  <a:srgbClr val="FF6412"/>
+                </a:solidFill>
+              </a:rPr>
+              <a:t>Рекомендуем</a:t>
+            </a:r>
+          </a:p>
+        </p:txBody>
+      </p:sp>
+      <p:sp>
+        <p:nvSpPr>
+          <p:cNvPr id="34" name="">
+            <a:extLst xmlns:a="http://schemas.openxmlformats.org/drawingml/2006/main">
+              <a:ext uri="{FF2B5EF4-FFF2-40B4-BE49-F238E27FC236}">
+                <a16:creationId xmlns:a16="http://schemas.microsoft.com/office/drawing/2014/main" id="{FAA1F972-E450-4CD7-9163-A6F8065714BC}"/>
+              </a:ext>
+            </a:extLst>
+          </p:cNvPr>
+          <p:cNvSpPr>
+            <a:spLocks xmlns:a="http://schemas.openxmlformats.org/drawingml/2006/main" noGrp="1"/>
+          </p:cNvSpPr>
+          <p:nvPr/>
+        </p:nvSpPr>
+        <p:spPr>
+          <a:xfrm xmlns:a="http://schemas.openxmlformats.org/drawingml/2006/main">
+            <a:off x="2895600" y="5734050"/>
+            <a:ext cx="8305800" cy="323850"/>
+          </a:xfrm>
+          <a:prstGeom xmlns:a="http://schemas.openxmlformats.org/drawingml/2006/main" prst="rect">
+            <a:avLst/>
+          </a:prstGeom>
+          <a:noFill xmlns:a="http://schemas.openxmlformats.org/drawingml/2006/main"/>
+          <a:ln xmlns:a="http://schemas.openxmlformats.org/drawingml/2006/main" w="0">
+            <a:noFill/>
+            <a:prstDash val="solid"/>
+          </a:ln>
+        </p:spPr>
+        <p:txBody>
+          <a:bodyPr xmlns:a="http://schemas.openxmlformats.org/drawingml/2006/main"/>
+          <a:lstStyle xmlns:a="http://schemas.openxmlformats.org/drawingml/2006/main"/>
+          <a:p xmlns:a="http://schemas.openxmlformats.org/drawingml/2006/main">
+            <a:pPr>
+              <a:defRPr sz="1050" b="1">
+                <a:solidFill>
+                  <a:srgbClr val="161616"/>
+                </a:solidFill>
+              </a:defRPr>
+            </a:pPr>
+            <a:r>
+              <a:rPr sz="1050" b="1">
+                <a:solidFill>
+                  <a:srgbClr val="161616"/>
+                </a:solidFill>
+              </a:rPr>
+              <a:t>{{RISK_4_RECOMMENDATION}}</a:t>
             </a:r>
           </a:p>
         </p:txBody>
@@ -5271,7 +6020,7 @@
     </p:spTree>
     <p:extLst>
       <p:ext uri="{BB962C8B-B14F-4D97-AF65-F5344CB8AC3E}">
-        <p14:creationId xmlns:p14="http://schemas.microsoft.com/office/powerpoint/2010/main" val="951358501"/>
+        <p14:creationId xmlns:p14="http://schemas.microsoft.com/office/powerpoint/2010/main" val="2103099065"/>
       </p:ext>
     </p:extLst>
   </p:cSld>
@@ -5302,7 +6051,7 @@
           <p:cNvPr id="1" name="">
             <a:extLst xmlns:a="http://schemas.openxmlformats.org/drawingml/2006/main">
               <a:ext uri="{FF2B5EF4-FFF2-40B4-BE49-F238E27FC236}">
-                <a16:creationId xmlns:a16="http://schemas.microsoft.com/office/drawing/2014/main" id="{6E9E8874-3B1F-40C6-91A7-EB125705FBCB}"/>
+                <a16:creationId xmlns:a16="http://schemas.microsoft.com/office/drawing/2014/main" id="{2AC74C2B-8144-4975-B0B9-D713DB6659EC}"/>
               </a:ext>
             </a:extLst>
           </p:cNvPr>
@@ -5330,14 +6079,14 @@
       </p:sp>
       <p:pic>
         <p:nvPicPr>
-          <p:cNvPr id="40" name=""/>
+          <p:cNvPr id="45" name=""/>
           <p:cNvPicPr>
             <a:picLocks xmlns:a="http://schemas.openxmlformats.org/drawingml/2006/main" noChangeAspect="1"/>
           </p:cNvPicPr>
           <p:nvPr/>
         </p:nvPicPr>
         <p:blipFill>
-          <a:blip xmlns:r="http://schemas.openxmlformats.org/officeDocument/2006/relationships" xmlns:a="http://schemas.openxmlformats.org/drawingml/2006/main" r:embed="R749d38f8876c42f1"/>
+          <a:blip xmlns:r="http://schemas.openxmlformats.org/officeDocument/2006/relationships" xmlns:a="http://schemas.openxmlformats.org/drawingml/2006/main" r:embed="R360a79fb69d043f1"/>
           <a:stretch xmlns:a="http://schemas.openxmlformats.org/drawingml/2006/main"/>
         </p:blipFill>
         <p:spPr>
@@ -5355,7 +6104,7 @@
           <p:cNvPr id="3" name="">
             <a:extLst xmlns:a="http://schemas.openxmlformats.org/drawingml/2006/main">
               <a:ext uri="{FF2B5EF4-FFF2-40B4-BE49-F238E27FC236}">
-                <a16:creationId xmlns:a16="http://schemas.microsoft.com/office/drawing/2014/main" id="{2DC42AC8-EC58-4B3E-896A-6FF300D7CD69}"/>
+                <a16:creationId xmlns:a16="http://schemas.microsoft.com/office/drawing/2014/main" id="{5F4FB033-0D24-45E8-B5A0-1A7EB6A192DD}"/>
               </a:ext>
             </a:extLst>
           </p:cNvPr>
@@ -5395,7 +6144,7 @@
                   <a:srgbClr val="161616"/>
                 </a:solidFill>
               </a:rPr>
-              <a:t>ИТ-рекомендации укрепляют управляемость среды</a:t>
+              <a:t>Рекомендации: первоочередные меры</a:t>
             </a:r>
           </a:p>
         </p:txBody>
@@ -5405,7 +6154,7 @@
           <p:cNvPr id="4" name="">
             <a:extLst xmlns:a="http://schemas.openxmlformats.org/drawingml/2006/main">
               <a:ext uri="{FF2B5EF4-FFF2-40B4-BE49-F238E27FC236}">
-                <a16:creationId xmlns:a16="http://schemas.microsoft.com/office/drawing/2014/main" id="{44B12D64-90DC-4F5A-992F-22C5C115081E}"/>
+                <a16:creationId xmlns:a16="http://schemas.microsoft.com/office/drawing/2014/main" id="{1D052ECD-61C6-4D3C-B935-CB86285196D4}"/>
               </a:ext>
             </a:extLst>
           </p:cNvPr>
@@ -5438,7 +6187,7 @@
           <p:cNvPr id="5" name="">
             <a:extLst xmlns:a="http://schemas.openxmlformats.org/drawingml/2006/main">
               <a:ext uri="{FF2B5EF4-FFF2-40B4-BE49-F238E27FC236}">
-                <a16:creationId xmlns:a16="http://schemas.microsoft.com/office/drawing/2014/main" id="{750965DA-6A02-42DE-AE65-568897EC1D65}"/>
+                <a16:creationId xmlns:a16="http://schemas.microsoft.com/office/drawing/2014/main" id="{09A19392-A9AF-493F-A2B8-7BED52D854CE}"/>
               </a:ext>
             </a:extLst>
           </p:cNvPr>
@@ -5469,7 +6218,7 @@
           <p:cNvPr id="6" name="">
             <a:extLst xmlns:a="http://schemas.openxmlformats.org/drawingml/2006/main">
               <a:ext uri="{FF2B5EF4-FFF2-40B4-BE49-F238E27FC236}">
-                <a16:creationId xmlns:a16="http://schemas.microsoft.com/office/drawing/2014/main" id="{93607864-3DDD-4719-BDEF-509A0CF66412}"/>
+                <a16:creationId xmlns:a16="http://schemas.microsoft.com/office/drawing/2014/main" id="{1749AD7C-D649-4D6E-881D-A28014F24EED}"/>
               </a:ext>
             </a:extLst>
           </p:cNvPr>
@@ -5519,7 +6268,7 @@
           <p:cNvPr id="7" name="">
             <a:extLst xmlns:a="http://schemas.openxmlformats.org/drawingml/2006/main">
               <a:ext uri="{FF2B5EF4-FFF2-40B4-BE49-F238E27FC236}">
-                <a16:creationId xmlns:a16="http://schemas.microsoft.com/office/drawing/2014/main" id="{B690908E-9E7F-45AD-BB7A-D449E2B52AED}"/>
+                <a16:creationId xmlns:a16="http://schemas.microsoft.com/office/drawing/2014/main" id="{BA2A28FF-984C-4F91-A560-D551FFFDD2E7}"/>
               </a:ext>
             </a:extLst>
           </p:cNvPr>
@@ -5569,19 +6318,54 @@
           <p:cNvPr id="8" name="">
             <a:extLst xmlns:a="http://schemas.openxmlformats.org/drawingml/2006/main">
               <a:ext uri="{FF2B5EF4-FFF2-40B4-BE49-F238E27FC236}">
-                <a16:creationId xmlns:a16="http://schemas.microsoft.com/office/drawing/2014/main" id="{7E6E10C9-9205-402F-9881-EC6F89A7B8E3}"/>
-              </a:ext>
-            </a:extLst>
-          </p:cNvPr>
-          <p:cNvSpPr>
-            <a:spLocks xmlns:a="http://schemas.openxmlformats.org/drawingml/2006/main" noGrp="1"/>
-          </p:cNvSpPr>
-          <p:nvPr/>
-        </p:nvSpPr>
-        <p:spPr>
-          <a:xfrm xmlns:a="http://schemas.openxmlformats.org/drawingml/2006/main">
-            <a:off x="609600" y="1466850"/>
-            <a:ext cx="457200" cy="266700"/>
+                <a16:creationId xmlns:a16="http://schemas.microsoft.com/office/drawing/2014/main" id="{340EF57C-EB40-43E3-BB9E-E0C919EDF87B}"/>
+              </a:ext>
+            </a:extLst>
+          </p:cNvPr>
+          <p:cNvSpPr>
+            <a:spLocks xmlns:a="http://schemas.openxmlformats.org/drawingml/2006/main" noGrp="1"/>
+          </p:cNvSpPr>
+          <p:nvPr/>
+        </p:nvSpPr>
+        <p:spPr>
+          <a:xfrm xmlns:a="http://schemas.openxmlformats.org/drawingml/2006/main">
+            <a:off x="552450" y="1428750"/>
+            <a:ext cx="5162550" cy="2143125"/>
+          </a:xfrm>
+          <a:prstGeom xmlns:a="http://schemas.openxmlformats.org/drawingml/2006/main" prst="roundRect">
+            <a:avLst>
+              <a:gd name="adj" fmla="val 3556"/>
+            </a:avLst>
+          </a:prstGeom>
+          <a:solidFill xmlns:a="http://schemas.openxmlformats.org/drawingml/2006/main">
+            <a:srgbClr val="FFFFFF"/>
+          </a:solidFill>
+          <a:ln xmlns:a="http://schemas.openxmlformats.org/drawingml/2006/main" w="9525">
+            <a:solidFill>
+              <a:srgbClr val="E4E7EC"/>
+            </a:solidFill>
+            <a:prstDash val="solid"/>
+          </a:ln>
+        </p:spPr>
+      </p:sp>
+      <p:sp>
+        <p:nvSpPr>
+          <p:cNvPr id="9" name="">
+            <a:extLst xmlns:a="http://schemas.openxmlformats.org/drawingml/2006/main">
+              <a:ext uri="{FF2B5EF4-FFF2-40B4-BE49-F238E27FC236}">
+                <a16:creationId xmlns:a16="http://schemas.microsoft.com/office/drawing/2014/main" id="{537C9152-60C3-4006-B806-67EBCD7ECE04}"/>
+              </a:ext>
+            </a:extLst>
+          </p:cNvPr>
+          <p:cNvSpPr>
+            <a:spLocks xmlns:a="http://schemas.openxmlformats.org/drawingml/2006/main" noGrp="1"/>
+          </p:cNvSpPr>
+          <p:nvPr/>
+        </p:nvSpPr>
+        <p:spPr>
+          <a:xfrm xmlns:a="http://schemas.openxmlformats.org/drawingml/2006/main">
+            <a:off x="742950" y="1600200"/>
+            <a:ext cx="361950" cy="247650"/>
           </a:xfrm>
           <a:prstGeom xmlns:a="http://schemas.openxmlformats.org/drawingml/2006/main" prst="rect">
             <a:avLst/>
@@ -5616,72 +6400,72 @@
       </p:sp>
       <p:sp>
         <p:nvSpPr>
-          <p:cNvPr id="9" name="">
-            <a:extLst xmlns:a="http://schemas.openxmlformats.org/drawingml/2006/main">
-              <a:ext uri="{FF2B5EF4-FFF2-40B4-BE49-F238E27FC236}">
-                <a16:creationId xmlns:a16="http://schemas.microsoft.com/office/drawing/2014/main" id="{C21707F0-2339-47FB-813C-F77B20179ECD}"/>
-              </a:ext>
-            </a:extLst>
-          </p:cNvPr>
-          <p:cNvSpPr>
-            <a:spLocks xmlns:a="http://schemas.openxmlformats.org/drawingml/2006/main" noGrp="1"/>
-          </p:cNvSpPr>
-          <p:nvPr/>
-        </p:nvSpPr>
-        <p:spPr>
-          <a:xfrm xmlns:a="http://schemas.openxmlformats.org/drawingml/2006/main">
-            <a:off x="1200150" y="1409700"/>
-            <a:ext cx="9982200" cy="266700"/>
-          </a:xfrm>
-          <a:prstGeom xmlns:a="http://schemas.openxmlformats.org/drawingml/2006/main" prst="rect">
-            <a:avLst/>
-          </a:prstGeom>
-          <a:noFill xmlns:a="http://schemas.openxmlformats.org/drawingml/2006/main"/>
-          <a:ln xmlns:a="http://schemas.openxmlformats.org/drawingml/2006/main" w="0">
-            <a:noFill/>
-            <a:prstDash val="solid"/>
-          </a:ln>
-        </p:spPr>
-        <p:txBody>
-          <a:bodyPr xmlns:a="http://schemas.openxmlformats.org/drawingml/2006/main"/>
-          <a:lstStyle xmlns:a="http://schemas.openxmlformats.org/drawingml/2006/main"/>
-          <a:p xmlns:a="http://schemas.openxmlformats.org/drawingml/2006/main">
-            <a:pPr>
-              <a:defRPr sz="1425" b="1">
-                <a:solidFill>
-                  <a:srgbClr val="161616"/>
-                </a:solidFill>
-              </a:defRPr>
-            </a:pPr>
-            <a:r>
-              <a:rPr sz="1425" b="1">
-                <a:solidFill>
-                  <a:srgbClr val="161616"/>
-                </a:solidFill>
-              </a:rPr>
-              <a:t>{{IT_1_TITLE}}</a:t>
-            </a:r>
-          </a:p>
-        </p:txBody>
-      </p:sp>
-      <p:sp>
-        <p:nvSpPr>
           <p:cNvPr id="10" name="">
             <a:extLst xmlns:a="http://schemas.openxmlformats.org/drawingml/2006/main">
               <a:ext uri="{FF2B5EF4-FFF2-40B4-BE49-F238E27FC236}">
-                <a16:creationId xmlns:a16="http://schemas.microsoft.com/office/drawing/2014/main" id="{9771E41C-F3A7-4FE0-A98D-BCCBA8216067}"/>
-              </a:ext>
-            </a:extLst>
-          </p:cNvPr>
-          <p:cNvSpPr>
-            <a:spLocks xmlns:a="http://schemas.openxmlformats.org/drawingml/2006/main" noGrp="1"/>
-          </p:cNvSpPr>
-          <p:nvPr/>
-        </p:nvSpPr>
-        <p:spPr>
-          <a:xfrm xmlns:a="http://schemas.openxmlformats.org/drawingml/2006/main">
-            <a:off x="1200150" y="1704975"/>
-            <a:ext cx="9982200" cy="400050"/>
+                <a16:creationId xmlns:a16="http://schemas.microsoft.com/office/drawing/2014/main" id="{004FEF1A-9E73-4339-AAC2-0C00702DA62F}"/>
+              </a:ext>
+            </a:extLst>
+          </p:cNvPr>
+          <p:cNvSpPr>
+            <a:spLocks xmlns:a="http://schemas.openxmlformats.org/drawingml/2006/main" noGrp="1"/>
+          </p:cNvSpPr>
+          <p:nvPr/>
+        </p:nvSpPr>
+        <p:spPr>
+          <a:xfrm xmlns:a="http://schemas.openxmlformats.org/drawingml/2006/main">
+            <a:off x="1162050" y="1571625"/>
+            <a:ext cx="4324350" cy="400050"/>
+          </a:xfrm>
+          <a:prstGeom xmlns:a="http://schemas.openxmlformats.org/drawingml/2006/main" prst="rect">
+            <a:avLst/>
+          </a:prstGeom>
+          <a:noFill xmlns:a="http://schemas.openxmlformats.org/drawingml/2006/main"/>
+          <a:ln xmlns:a="http://schemas.openxmlformats.org/drawingml/2006/main" w="0">
+            <a:noFill/>
+            <a:prstDash val="solid"/>
+          </a:ln>
+        </p:spPr>
+        <p:txBody>
+          <a:bodyPr xmlns:a="http://schemas.openxmlformats.org/drawingml/2006/main"/>
+          <a:lstStyle xmlns:a="http://schemas.openxmlformats.org/drawingml/2006/main"/>
+          <a:p xmlns:a="http://schemas.openxmlformats.org/drawingml/2006/main">
+            <a:pPr>
+              <a:defRPr sz="1350" b="1">
+                <a:solidFill>
+                  <a:srgbClr val="161616"/>
+                </a:solidFill>
+              </a:defRPr>
+            </a:pPr>
+            <a:r>
+              <a:rPr sz="1350" b="1">
+                <a:solidFill>
+                  <a:srgbClr val="161616"/>
+                </a:solidFill>
+              </a:rPr>
+              <a:t>{{REC_1_TITLE}}</a:t>
+            </a:r>
+          </a:p>
+        </p:txBody>
+      </p:sp>
+      <p:sp>
+        <p:nvSpPr>
+          <p:cNvPr id="11" name="">
+            <a:extLst xmlns:a="http://schemas.openxmlformats.org/drawingml/2006/main">
+              <a:ext uri="{FF2B5EF4-FFF2-40B4-BE49-F238E27FC236}">
+                <a16:creationId xmlns:a16="http://schemas.microsoft.com/office/drawing/2014/main" id="{01AAF9F0-7CA4-4C78-A27D-16D399A14962}"/>
+              </a:ext>
+            </a:extLst>
+          </p:cNvPr>
+          <p:cNvSpPr>
+            <a:spLocks xmlns:a="http://schemas.openxmlformats.org/drawingml/2006/main" noGrp="1"/>
+          </p:cNvSpPr>
+          <p:nvPr/>
+        </p:nvSpPr>
+        <p:spPr>
+          <a:xfrm xmlns:a="http://schemas.openxmlformats.org/drawingml/2006/main">
+            <a:off x="762000" y="2047875"/>
+            <a:ext cx="4743450" cy="552450"/>
           </a:xfrm>
           <a:prstGeom xmlns:a="http://schemas.openxmlformats.org/drawingml/2006/main" prst="rect">
             <a:avLst/>
@@ -5709,57 +6493,7 @@
                   <a:srgbClr val="667085"/>
                 </a:solidFill>
               </a:rPr>
-              <a:t>{{IT_1_ACTION}}</a:t>
-            </a:r>
-          </a:p>
-        </p:txBody>
-      </p:sp>
-      <p:sp>
-        <p:nvSpPr>
-          <p:cNvPr id="11" name="">
-            <a:extLst xmlns:a="http://schemas.openxmlformats.org/drawingml/2006/main">
-              <a:ext uri="{FF2B5EF4-FFF2-40B4-BE49-F238E27FC236}">
-                <a16:creationId xmlns:a16="http://schemas.microsoft.com/office/drawing/2014/main" id="{3EF1E4A9-1678-42A1-B093-E0CDF518DF8A}"/>
-              </a:ext>
-            </a:extLst>
-          </p:cNvPr>
-          <p:cNvSpPr>
-            <a:spLocks xmlns:a="http://schemas.openxmlformats.org/drawingml/2006/main" noGrp="1"/>
-          </p:cNvSpPr>
-          <p:nvPr/>
-        </p:nvSpPr>
-        <p:spPr>
-          <a:xfrm xmlns:a="http://schemas.openxmlformats.org/drawingml/2006/main">
-            <a:off x="1200150" y="2171700"/>
-            <a:ext cx="742950" cy="190500"/>
-          </a:xfrm>
-          <a:prstGeom xmlns:a="http://schemas.openxmlformats.org/drawingml/2006/main" prst="rect">
-            <a:avLst/>
-          </a:prstGeom>
-          <a:noFill xmlns:a="http://schemas.openxmlformats.org/drawingml/2006/main"/>
-          <a:ln xmlns:a="http://schemas.openxmlformats.org/drawingml/2006/main" w="0">
-            <a:noFill/>
-            <a:prstDash val="solid"/>
-          </a:ln>
-        </p:spPr>
-        <p:txBody>
-          <a:bodyPr xmlns:a="http://schemas.openxmlformats.org/drawingml/2006/main"/>
-          <a:lstStyle xmlns:a="http://schemas.openxmlformats.org/drawingml/2006/main"/>
-          <a:p xmlns:a="http://schemas.openxmlformats.org/drawingml/2006/main">
-            <a:pPr>
-              <a:defRPr sz="975" b="1">
-                <a:solidFill>
-                  <a:srgbClr val="FF6412"/>
-                </a:solidFill>
-              </a:defRPr>
-            </a:pPr>
-            <a:r>
-              <a:rPr sz="975" b="1">
-                <a:solidFill>
-                  <a:srgbClr val="FF6412"/>
-                </a:solidFill>
-              </a:rPr>
-              <a:t>Решение</a:t>
+              <a:t>{{REC_1_ACTION}}</a:t>
             </a:r>
           </a:p>
         </p:txBody>
@@ -5769,169 +6503,19 @@
           <p:cNvPr id="12" name="">
             <a:extLst xmlns:a="http://schemas.openxmlformats.org/drawingml/2006/main">
               <a:ext uri="{FF2B5EF4-FFF2-40B4-BE49-F238E27FC236}">
-                <a16:creationId xmlns:a16="http://schemas.microsoft.com/office/drawing/2014/main" id="{83ADC052-36D0-45FB-92CA-C17E9D280F6D}"/>
-              </a:ext>
-            </a:extLst>
-          </p:cNvPr>
-          <p:cNvSpPr>
-            <a:spLocks xmlns:a="http://schemas.openxmlformats.org/drawingml/2006/main" noGrp="1"/>
-          </p:cNvSpPr>
-          <p:nvPr/>
-        </p:nvSpPr>
-        <p:spPr>
-          <a:xfrm xmlns:a="http://schemas.openxmlformats.org/drawingml/2006/main">
-            <a:off x="1962150" y="2152650"/>
-            <a:ext cx="3810000" cy="323850"/>
-          </a:xfrm>
-          <a:prstGeom xmlns:a="http://schemas.openxmlformats.org/drawingml/2006/main" prst="rect">
-            <a:avLst/>
-          </a:prstGeom>
-          <a:noFill xmlns:a="http://schemas.openxmlformats.org/drawingml/2006/main"/>
-          <a:ln xmlns:a="http://schemas.openxmlformats.org/drawingml/2006/main" w="0">
-            <a:noFill/>
-            <a:prstDash val="solid"/>
-          </a:ln>
-        </p:spPr>
-        <p:txBody>
-          <a:bodyPr xmlns:a="http://schemas.openxmlformats.org/drawingml/2006/main"/>
-          <a:lstStyle xmlns:a="http://schemas.openxmlformats.org/drawingml/2006/main"/>
-          <a:p xmlns:a="http://schemas.openxmlformats.org/drawingml/2006/main">
-            <a:pPr>
-              <a:defRPr sz="1050" b="1">
-                <a:solidFill>
-                  <a:srgbClr val="161616"/>
-                </a:solidFill>
-              </a:defRPr>
-            </a:pPr>
-            <a:r>
-              <a:rPr sz="1050" b="1">
-                <a:solidFill>
-                  <a:srgbClr val="161616"/>
-                </a:solidFill>
-              </a:rPr>
-              <a:t>{{IT_1_SOLUTION}}</a:t>
-            </a:r>
-          </a:p>
-        </p:txBody>
-      </p:sp>
-      <p:sp>
-        <p:nvSpPr>
-          <p:cNvPr id="13" name="">
-            <a:extLst xmlns:a="http://schemas.openxmlformats.org/drawingml/2006/main">
-              <a:ext uri="{FF2B5EF4-FFF2-40B4-BE49-F238E27FC236}">
-                <a16:creationId xmlns:a16="http://schemas.microsoft.com/office/drawing/2014/main" id="{703F063B-47E2-4D1F-BAEC-02A9A4D55DBE}"/>
-              </a:ext>
-            </a:extLst>
-          </p:cNvPr>
-          <p:cNvSpPr>
-            <a:spLocks xmlns:a="http://schemas.openxmlformats.org/drawingml/2006/main" noGrp="1"/>
-          </p:cNvSpPr>
-          <p:nvPr/>
-        </p:nvSpPr>
-        <p:spPr>
-          <a:xfrm xmlns:a="http://schemas.openxmlformats.org/drawingml/2006/main">
-            <a:off x="6019800" y="2171700"/>
-            <a:ext cx="1104900" cy="190500"/>
-          </a:xfrm>
-          <a:prstGeom xmlns:a="http://schemas.openxmlformats.org/drawingml/2006/main" prst="rect">
-            <a:avLst/>
-          </a:prstGeom>
-          <a:noFill xmlns:a="http://schemas.openxmlformats.org/drawingml/2006/main"/>
-          <a:ln xmlns:a="http://schemas.openxmlformats.org/drawingml/2006/main" w="0">
-            <a:noFill/>
-            <a:prstDash val="solid"/>
-          </a:ln>
-        </p:spPr>
-        <p:txBody>
-          <a:bodyPr xmlns:a="http://schemas.openxmlformats.org/drawingml/2006/main"/>
-          <a:lstStyle xmlns:a="http://schemas.openxmlformats.org/drawingml/2006/main"/>
-          <a:p xmlns:a="http://schemas.openxmlformats.org/drawingml/2006/main">
-            <a:pPr>
-              <a:defRPr sz="975" b="1">
-                <a:solidFill>
-                  <a:srgbClr val="FF6412"/>
-                </a:solidFill>
-              </a:defRPr>
-            </a:pPr>
-            <a:r>
-              <a:rPr sz="975" b="1">
-                <a:solidFill>
-                  <a:srgbClr val="FF6412"/>
-                </a:solidFill>
-              </a:rPr>
-              <a:t>Производители</a:t>
-            </a:r>
-          </a:p>
-        </p:txBody>
-      </p:sp>
-      <p:sp>
-        <p:nvSpPr>
-          <p:cNvPr id="14" name="">
-            <a:extLst xmlns:a="http://schemas.openxmlformats.org/drawingml/2006/main">
-              <a:ext uri="{FF2B5EF4-FFF2-40B4-BE49-F238E27FC236}">
-                <a16:creationId xmlns:a16="http://schemas.microsoft.com/office/drawing/2014/main" id="{30604C3A-06EC-4101-B00C-5A05477D65BE}"/>
-              </a:ext>
-            </a:extLst>
-          </p:cNvPr>
-          <p:cNvSpPr>
-            <a:spLocks xmlns:a="http://schemas.openxmlformats.org/drawingml/2006/main" noGrp="1"/>
-          </p:cNvSpPr>
-          <p:nvPr/>
-        </p:nvSpPr>
-        <p:spPr>
-          <a:xfrm xmlns:a="http://schemas.openxmlformats.org/drawingml/2006/main">
-            <a:off x="7181850" y="2152650"/>
-            <a:ext cx="4000500" cy="323850"/>
-          </a:xfrm>
-          <a:prstGeom xmlns:a="http://schemas.openxmlformats.org/drawingml/2006/main" prst="rect">
-            <a:avLst/>
-          </a:prstGeom>
-          <a:noFill xmlns:a="http://schemas.openxmlformats.org/drawingml/2006/main"/>
-          <a:ln xmlns:a="http://schemas.openxmlformats.org/drawingml/2006/main" w="0">
-            <a:noFill/>
-            <a:prstDash val="solid"/>
-          </a:ln>
-        </p:spPr>
-        <p:txBody>
-          <a:bodyPr xmlns:a="http://schemas.openxmlformats.org/drawingml/2006/main"/>
-          <a:lstStyle xmlns:a="http://schemas.openxmlformats.org/drawingml/2006/main"/>
-          <a:p xmlns:a="http://schemas.openxmlformats.org/drawingml/2006/main">
-            <a:pPr>
-              <a:defRPr sz="1050" b="1">
-                <a:solidFill>
-                  <a:srgbClr val="161616"/>
-                </a:solidFill>
-              </a:defRPr>
-            </a:pPr>
-            <a:r>
-              <a:rPr sz="1050" b="1">
-                <a:solidFill>
-                  <a:srgbClr val="161616"/>
-                </a:solidFill>
-              </a:rPr>
-              <a:t>{{IT_1_VENDORS}}</a:t>
-            </a:r>
-          </a:p>
-        </p:txBody>
-      </p:sp>
-      <p:sp>
-        <p:nvSpPr>
-          <p:cNvPr id="15" name="">
-            <a:extLst xmlns:a="http://schemas.openxmlformats.org/drawingml/2006/main">
-              <a:ext uri="{FF2B5EF4-FFF2-40B4-BE49-F238E27FC236}">
-                <a16:creationId xmlns:a16="http://schemas.microsoft.com/office/drawing/2014/main" id="{B2B56750-D1A7-4953-8801-62C318BCF2EA}"/>
-              </a:ext>
-            </a:extLst>
-          </p:cNvPr>
-          <p:cNvSpPr>
-            <a:spLocks xmlns:a="http://schemas.openxmlformats.org/drawingml/2006/main" noGrp="1"/>
-          </p:cNvSpPr>
-          <p:nvPr/>
-        </p:nvSpPr>
-        <p:spPr>
-          <a:xfrm xmlns:a="http://schemas.openxmlformats.org/drawingml/2006/main">
-            <a:off x="1200150" y="2552700"/>
-            <a:ext cx="9982200" cy="9525"/>
+                <a16:creationId xmlns:a16="http://schemas.microsoft.com/office/drawing/2014/main" id="{2DA39A0C-4DD9-44D9-91C2-A8E936A776B0}"/>
+              </a:ext>
+            </a:extLst>
+          </p:cNvPr>
+          <p:cNvSpPr>
+            <a:spLocks xmlns:a="http://schemas.openxmlformats.org/drawingml/2006/main" noGrp="1"/>
+          </p:cNvSpPr>
+          <p:nvPr/>
+        </p:nvSpPr>
+        <p:spPr>
+          <a:xfrm xmlns:a="http://schemas.openxmlformats.org/drawingml/2006/main">
+            <a:off x="762000" y="2686050"/>
+            <a:ext cx="4743450" cy="9525"/>
           </a:xfrm>
           <a:prstGeom xmlns:a="http://schemas.openxmlformats.org/drawingml/2006/main" prst="rect">
             <a:avLst/>
@@ -5947,22 +6531,257 @@
       </p:sp>
       <p:sp>
         <p:nvSpPr>
+          <p:cNvPr id="13" name="">
+            <a:extLst xmlns:a="http://schemas.openxmlformats.org/drawingml/2006/main">
+              <a:ext uri="{FF2B5EF4-FFF2-40B4-BE49-F238E27FC236}">
+                <a16:creationId xmlns:a16="http://schemas.microsoft.com/office/drawing/2014/main" id="{DDE16A23-E63A-4028-BC23-A50C9269961C}"/>
+              </a:ext>
+            </a:extLst>
+          </p:cNvPr>
+          <p:cNvSpPr>
+            <a:spLocks xmlns:a="http://schemas.openxmlformats.org/drawingml/2006/main" noGrp="1"/>
+          </p:cNvSpPr>
+          <p:nvPr/>
+        </p:nvSpPr>
+        <p:spPr>
+          <a:xfrm xmlns:a="http://schemas.openxmlformats.org/drawingml/2006/main">
+            <a:off x="762000" y="2819400"/>
+            <a:ext cx="2171700" cy="171450"/>
+          </a:xfrm>
+          <a:prstGeom xmlns:a="http://schemas.openxmlformats.org/drawingml/2006/main" prst="rect">
+            <a:avLst/>
+          </a:prstGeom>
+          <a:noFill xmlns:a="http://schemas.openxmlformats.org/drawingml/2006/main"/>
+          <a:ln xmlns:a="http://schemas.openxmlformats.org/drawingml/2006/main" w="0">
+            <a:noFill/>
+            <a:prstDash val="solid"/>
+          </a:ln>
+        </p:spPr>
+        <p:txBody>
+          <a:bodyPr xmlns:a="http://schemas.openxmlformats.org/drawingml/2006/main"/>
+          <a:lstStyle xmlns:a="http://schemas.openxmlformats.org/drawingml/2006/main"/>
+          <a:p xmlns:a="http://schemas.openxmlformats.org/drawingml/2006/main">
+            <a:pPr>
+              <a:defRPr sz="900" b="1">
+                <a:solidFill>
+                  <a:srgbClr val="FF6412"/>
+                </a:solidFill>
+              </a:defRPr>
+            </a:pPr>
+            <a:r>
+              <a:rPr sz="900" b="1">
+                <a:solidFill>
+                  <a:srgbClr val="FF6412"/>
+                </a:solidFill>
+              </a:rPr>
+              <a:t>Решение</a:t>
+            </a:r>
+          </a:p>
+        </p:txBody>
+      </p:sp>
+      <p:sp>
+        <p:nvSpPr>
+          <p:cNvPr id="14" name="">
+            <a:extLst xmlns:a="http://schemas.openxmlformats.org/drawingml/2006/main">
+              <a:ext uri="{FF2B5EF4-FFF2-40B4-BE49-F238E27FC236}">
+                <a16:creationId xmlns:a16="http://schemas.microsoft.com/office/drawing/2014/main" id="{4D803101-18F9-4D3B-88ED-FA785890550A}"/>
+              </a:ext>
+            </a:extLst>
+          </p:cNvPr>
+          <p:cNvSpPr>
+            <a:spLocks xmlns:a="http://schemas.openxmlformats.org/drawingml/2006/main" noGrp="1"/>
+          </p:cNvSpPr>
+          <p:nvPr/>
+        </p:nvSpPr>
+        <p:spPr>
+          <a:xfrm xmlns:a="http://schemas.openxmlformats.org/drawingml/2006/main">
+            <a:off x="762000" y="3009900"/>
+            <a:ext cx="2266950" cy="409575"/>
+          </a:xfrm>
+          <a:prstGeom xmlns:a="http://schemas.openxmlformats.org/drawingml/2006/main" prst="rect">
+            <a:avLst/>
+          </a:prstGeom>
+          <a:noFill xmlns:a="http://schemas.openxmlformats.org/drawingml/2006/main"/>
+          <a:ln xmlns:a="http://schemas.openxmlformats.org/drawingml/2006/main" w="0">
+            <a:noFill/>
+            <a:prstDash val="solid"/>
+          </a:ln>
+        </p:spPr>
+        <p:txBody>
+          <a:bodyPr xmlns:a="http://schemas.openxmlformats.org/drawingml/2006/main"/>
+          <a:lstStyle xmlns:a="http://schemas.openxmlformats.org/drawingml/2006/main"/>
+          <a:p xmlns:a="http://schemas.openxmlformats.org/drawingml/2006/main">
+            <a:pPr>
+              <a:defRPr sz="1050" b="1">
+                <a:solidFill>
+                  <a:srgbClr val="161616"/>
+                </a:solidFill>
+              </a:defRPr>
+            </a:pPr>
+            <a:r>
+              <a:rPr sz="1050" b="1">
+                <a:solidFill>
+                  <a:srgbClr val="161616"/>
+                </a:solidFill>
+              </a:rPr>
+              <a:t>{{REC_1_SOLUTION}}</a:t>
+            </a:r>
+          </a:p>
+        </p:txBody>
+      </p:sp>
+      <p:sp>
+        <p:nvSpPr>
+          <p:cNvPr id="15" name="">
+            <a:extLst xmlns:a="http://schemas.openxmlformats.org/drawingml/2006/main">
+              <a:ext uri="{FF2B5EF4-FFF2-40B4-BE49-F238E27FC236}">
+                <a16:creationId xmlns:a16="http://schemas.microsoft.com/office/drawing/2014/main" id="{8A3F84F6-A658-413A-AF52-233B66EC4AA4}"/>
+              </a:ext>
+            </a:extLst>
+          </p:cNvPr>
+          <p:cNvSpPr>
+            <a:spLocks xmlns:a="http://schemas.openxmlformats.org/drawingml/2006/main" noGrp="1"/>
+          </p:cNvSpPr>
+          <p:nvPr/>
+        </p:nvSpPr>
+        <p:spPr>
+          <a:xfrm xmlns:a="http://schemas.openxmlformats.org/drawingml/2006/main">
+            <a:off x="3219450" y="2819400"/>
+            <a:ext cx="2266950" cy="171450"/>
+          </a:xfrm>
+          <a:prstGeom xmlns:a="http://schemas.openxmlformats.org/drawingml/2006/main" prst="rect">
+            <a:avLst/>
+          </a:prstGeom>
+          <a:noFill xmlns:a="http://schemas.openxmlformats.org/drawingml/2006/main"/>
+          <a:ln xmlns:a="http://schemas.openxmlformats.org/drawingml/2006/main" w="0">
+            <a:noFill/>
+            <a:prstDash val="solid"/>
+          </a:ln>
+        </p:spPr>
+        <p:txBody>
+          <a:bodyPr xmlns:a="http://schemas.openxmlformats.org/drawingml/2006/main"/>
+          <a:lstStyle xmlns:a="http://schemas.openxmlformats.org/drawingml/2006/main"/>
+          <a:p xmlns:a="http://schemas.openxmlformats.org/drawingml/2006/main">
+            <a:pPr>
+              <a:defRPr sz="900" b="1">
+                <a:solidFill>
+                  <a:srgbClr val="FF6412"/>
+                </a:solidFill>
+              </a:defRPr>
+            </a:pPr>
+            <a:r>
+              <a:rPr sz="900" b="1">
+                <a:solidFill>
+                  <a:srgbClr val="FF6412"/>
+                </a:solidFill>
+              </a:rPr>
+              <a:t>Производители</a:t>
+            </a:r>
+          </a:p>
+        </p:txBody>
+      </p:sp>
+      <p:sp>
+        <p:nvSpPr>
           <p:cNvPr id="16" name="">
             <a:extLst xmlns:a="http://schemas.openxmlformats.org/drawingml/2006/main">
               <a:ext uri="{FF2B5EF4-FFF2-40B4-BE49-F238E27FC236}">
-                <a16:creationId xmlns:a16="http://schemas.microsoft.com/office/drawing/2014/main" id="{068B5AC9-4181-4C0A-B3B6-502B8D95A277}"/>
-              </a:ext>
-            </a:extLst>
-          </p:cNvPr>
-          <p:cNvSpPr>
-            <a:spLocks xmlns:a="http://schemas.openxmlformats.org/drawingml/2006/main" noGrp="1"/>
-          </p:cNvSpPr>
-          <p:nvPr/>
-        </p:nvSpPr>
-        <p:spPr>
-          <a:xfrm xmlns:a="http://schemas.openxmlformats.org/drawingml/2006/main">
-            <a:off x="609600" y="2724150"/>
-            <a:ext cx="457200" cy="266700"/>
+                <a16:creationId xmlns:a16="http://schemas.microsoft.com/office/drawing/2014/main" id="{ABA40E5D-C2AE-4401-AE49-53E90719CF1A}"/>
+              </a:ext>
+            </a:extLst>
+          </p:cNvPr>
+          <p:cNvSpPr>
+            <a:spLocks xmlns:a="http://schemas.openxmlformats.org/drawingml/2006/main" noGrp="1"/>
+          </p:cNvSpPr>
+          <p:nvPr/>
+        </p:nvSpPr>
+        <p:spPr>
+          <a:xfrm xmlns:a="http://schemas.openxmlformats.org/drawingml/2006/main">
+            <a:off x="3219450" y="3009900"/>
+            <a:ext cx="2266950" cy="409575"/>
+          </a:xfrm>
+          <a:prstGeom xmlns:a="http://schemas.openxmlformats.org/drawingml/2006/main" prst="rect">
+            <a:avLst/>
+          </a:prstGeom>
+          <a:noFill xmlns:a="http://schemas.openxmlformats.org/drawingml/2006/main"/>
+          <a:ln xmlns:a="http://schemas.openxmlformats.org/drawingml/2006/main" w="0">
+            <a:noFill/>
+            <a:prstDash val="solid"/>
+          </a:ln>
+        </p:spPr>
+        <p:txBody>
+          <a:bodyPr xmlns:a="http://schemas.openxmlformats.org/drawingml/2006/main"/>
+          <a:lstStyle xmlns:a="http://schemas.openxmlformats.org/drawingml/2006/main"/>
+          <a:p xmlns:a="http://schemas.openxmlformats.org/drawingml/2006/main">
+            <a:pPr>
+              <a:defRPr sz="1050" b="1">
+                <a:solidFill>
+                  <a:srgbClr val="161616"/>
+                </a:solidFill>
+              </a:defRPr>
+            </a:pPr>
+            <a:r>
+              <a:rPr sz="1050" b="1">
+                <a:solidFill>
+                  <a:srgbClr val="161616"/>
+                </a:solidFill>
+              </a:rPr>
+              <a:t>{{REC_1_VENDORS}}</a:t>
+            </a:r>
+          </a:p>
+        </p:txBody>
+      </p:sp>
+      <p:sp>
+        <p:nvSpPr>
+          <p:cNvPr id="17" name="">
+            <a:extLst xmlns:a="http://schemas.openxmlformats.org/drawingml/2006/main">
+              <a:ext uri="{FF2B5EF4-FFF2-40B4-BE49-F238E27FC236}">
+                <a16:creationId xmlns:a16="http://schemas.microsoft.com/office/drawing/2014/main" id="{79110E8A-37FF-4EF9-B55E-B05FFD4EFA52}"/>
+              </a:ext>
+            </a:extLst>
+          </p:cNvPr>
+          <p:cNvSpPr>
+            <a:spLocks xmlns:a="http://schemas.openxmlformats.org/drawingml/2006/main" noGrp="1"/>
+          </p:cNvSpPr>
+          <p:nvPr/>
+        </p:nvSpPr>
+        <p:spPr>
+          <a:xfrm xmlns:a="http://schemas.openxmlformats.org/drawingml/2006/main">
+            <a:off x="6076950" y="1428750"/>
+            <a:ext cx="5162550" cy="2143125"/>
+          </a:xfrm>
+          <a:prstGeom xmlns:a="http://schemas.openxmlformats.org/drawingml/2006/main" prst="roundRect">
+            <a:avLst>
+              <a:gd name="adj" fmla="val 3556"/>
+            </a:avLst>
+          </a:prstGeom>
+          <a:solidFill xmlns:a="http://schemas.openxmlformats.org/drawingml/2006/main">
+            <a:srgbClr val="FFFFFF"/>
+          </a:solidFill>
+          <a:ln xmlns:a="http://schemas.openxmlformats.org/drawingml/2006/main" w="9525">
+            <a:solidFill>
+              <a:srgbClr val="E4E7EC"/>
+            </a:solidFill>
+            <a:prstDash val="solid"/>
+          </a:ln>
+        </p:spPr>
+      </p:sp>
+      <p:sp>
+        <p:nvSpPr>
+          <p:cNvPr id="18" name="">
+            <a:extLst xmlns:a="http://schemas.openxmlformats.org/drawingml/2006/main">
+              <a:ext uri="{FF2B5EF4-FFF2-40B4-BE49-F238E27FC236}">
+                <a16:creationId xmlns:a16="http://schemas.microsoft.com/office/drawing/2014/main" id="{9D4D9371-8092-4E5D-8CC8-02ECE06BD6DF}"/>
+              </a:ext>
+            </a:extLst>
+          </p:cNvPr>
+          <p:cNvSpPr>
+            <a:spLocks xmlns:a="http://schemas.openxmlformats.org/drawingml/2006/main" noGrp="1"/>
+          </p:cNvSpPr>
+          <p:nvPr/>
+        </p:nvSpPr>
+        <p:spPr>
+          <a:xfrm xmlns:a="http://schemas.openxmlformats.org/drawingml/2006/main">
+            <a:off x="6267450" y="1600200"/>
+            <a:ext cx="361950" cy="247650"/>
           </a:xfrm>
           <a:prstGeom xmlns:a="http://schemas.openxmlformats.org/drawingml/2006/main" prst="rect">
             <a:avLst/>
@@ -5997,72 +6816,72 @@
       </p:sp>
       <p:sp>
         <p:nvSpPr>
-          <p:cNvPr id="17" name="">
-            <a:extLst xmlns:a="http://schemas.openxmlformats.org/drawingml/2006/main">
-              <a:ext uri="{FF2B5EF4-FFF2-40B4-BE49-F238E27FC236}">
-                <a16:creationId xmlns:a16="http://schemas.microsoft.com/office/drawing/2014/main" id="{A0ABF8BC-8AE4-431A-8D46-8B64EB4F7D44}"/>
-              </a:ext>
-            </a:extLst>
-          </p:cNvPr>
-          <p:cNvSpPr>
-            <a:spLocks xmlns:a="http://schemas.openxmlformats.org/drawingml/2006/main" noGrp="1"/>
-          </p:cNvSpPr>
-          <p:nvPr/>
-        </p:nvSpPr>
-        <p:spPr>
-          <a:xfrm xmlns:a="http://schemas.openxmlformats.org/drawingml/2006/main">
-            <a:off x="1200150" y="2667000"/>
-            <a:ext cx="9982200" cy="266700"/>
-          </a:xfrm>
-          <a:prstGeom xmlns:a="http://schemas.openxmlformats.org/drawingml/2006/main" prst="rect">
-            <a:avLst/>
-          </a:prstGeom>
-          <a:noFill xmlns:a="http://schemas.openxmlformats.org/drawingml/2006/main"/>
-          <a:ln xmlns:a="http://schemas.openxmlformats.org/drawingml/2006/main" w="0">
-            <a:noFill/>
-            <a:prstDash val="solid"/>
-          </a:ln>
-        </p:spPr>
-        <p:txBody>
-          <a:bodyPr xmlns:a="http://schemas.openxmlformats.org/drawingml/2006/main"/>
-          <a:lstStyle xmlns:a="http://schemas.openxmlformats.org/drawingml/2006/main"/>
-          <a:p xmlns:a="http://schemas.openxmlformats.org/drawingml/2006/main">
-            <a:pPr>
-              <a:defRPr sz="1425" b="1">
-                <a:solidFill>
-                  <a:srgbClr val="161616"/>
-                </a:solidFill>
-              </a:defRPr>
-            </a:pPr>
-            <a:r>
-              <a:rPr sz="1425" b="1">
-                <a:solidFill>
-                  <a:srgbClr val="161616"/>
-                </a:solidFill>
-              </a:rPr>
-              <a:t>{{IT_2_TITLE}}</a:t>
-            </a:r>
-          </a:p>
-        </p:txBody>
-      </p:sp>
-      <p:sp>
-        <p:nvSpPr>
-          <p:cNvPr id="18" name="">
-            <a:extLst xmlns:a="http://schemas.openxmlformats.org/drawingml/2006/main">
-              <a:ext uri="{FF2B5EF4-FFF2-40B4-BE49-F238E27FC236}">
-                <a16:creationId xmlns:a16="http://schemas.microsoft.com/office/drawing/2014/main" id="{1A96B82D-311B-40F8-8D37-FC6D91E5C26E}"/>
-              </a:ext>
-            </a:extLst>
-          </p:cNvPr>
-          <p:cNvSpPr>
-            <a:spLocks xmlns:a="http://schemas.openxmlformats.org/drawingml/2006/main" noGrp="1"/>
-          </p:cNvSpPr>
-          <p:nvPr/>
-        </p:nvSpPr>
-        <p:spPr>
-          <a:xfrm xmlns:a="http://schemas.openxmlformats.org/drawingml/2006/main">
-            <a:off x="1200150" y="2962275"/>
-            <a:ext cx="9982200" cy="400050"/>
+          <p:cNvPr id="19" name="">
+            <a:extLst xmlns:a="http://schemas.openxmlformats.org/drawingml/2006/main">
+              <a:ext uri="{FF2B5EF4-FFF2-40B4-BE49-F238E27FC236}">
+                <a16:creationId xmlns:a16="http://schemas.microsoft.com/office/drawing/2014/main" id="{FB9A6FE1-89A0-407B-9A7D-B4209FB4AAC0}"/>
+              </a:ext>
+            </a:extLst>
+          </p:cNvPr>
+          <p:cNvSpPr>
+            <a:spLocks xmlns:a="http://schemas.openxmlformats.org/drawingml/2006/main" noGrp="1"/>
+          </p:cNvSpPr>
+          <p:nvPr/>
+        </p:nvSpPr>
+        <p:spPr>
+          <a:xfrm xmlns:a="http://schemas.openxmlformats.org/drawingml/2006/main">
+            <a:off x="6686550" y="1571625"/>
+            <a:ext cx="4324350" cy="400050"/>
+          </a:xfrm>
+          <a:prstGeom xmlns:a="http://schemas.openxmlformats.org/drawingml/2006/main" prst="rect">
+            <a:avLst/>
+          </a:prstGeom>
+          <a:noFill xmlns:a="http://schemas.openxmlformats.org/drawingml/2006/main"/>
+          <a:ln xmlns:a="http://schemas.openxmlformats.org/drawingml/2006/main" w="0">
+            <a:noFill/>
+            <a:prstDash val="solid"/>
+          </a:ln>
+        </p:spPr>
+        <p:txBody>
+          <a:bodyPr xmlns:a="http://schemas.openxmlformats.org/drawingml/2006/main"/>
+          <a:lstStyle xmlns:a="http://schemas.openxmlformats.org/drawingml/2006/main"/>
+          <a:p xmlns:a="http://schemas.openxmlformats.org/drawingml/2006/main">
+            <a:pPr>
+              <a:defRPr sz="1350" b="1">
+                <a:solidFill>
+                  <a:srgbClr val="161616"/>
+                </a:solidFill>
+              </a:defRPr>
+            </a:pPr>
+            <a:r>
+              <a:rPr sz="1350" b="1">
+                <a:solidFill>
+                  <a:srgbClr val="161616"/>
+                </a:solidFill>
+              </a:rPr>
+              <a:t>{{REC_2_TITLE}}</a:t>
+            </a:r>
+          </a:p>
+        </p:txBody>
+      </p:sp>
+      <p:sp>
+        <p:nvSpPr>
+          <p:cNvPr id="20" name="">
+            <a:extLst xmlns:a="http://schemas.openxmlformats.org/drawingml/2006/main">
+              <a:ext uri="{FF2B5EF4-FFF2-40B4-BE49-F238E27FC236}">
+                <a16:creationId xmlns:a16="http://schemas.microsoft.com/office/drawing/2014/main" id="{08977473-C5DA-4522-98D6-CB579F44796B}"/>
+              </a:ext>
+            </a:extLst>
+          </p:cNvPr>
+          <p:cNvSpPr>
+            <a:spLocks xmlns:a="http://schemas.openxmlformats.org/drawingml/2006/main" noGrp="1"/>
+          </p:cNvSpPr>
+          <p:nvPr/>
+        </p:nvSpPr>
+        <p:spPr>
+          <a:xfrm xmlns:a="http://schemas.openxmlformats.org/drawingml/2006/main">
+            <a:off x="6286500" y="2047875"/>
+            <a:ext cx="4743450" cy="552450"/>
           </a:xfrm>
           <a:prstGeom xmlns:a="http://schemas.openxmlformats.org/drawingml/2006/main" prst="rect">
             <a:avLst/>
@@ -6090,107 +6909,7 @@
                   <a:srgbClr val="667085"/>
                 </a:solidFill>
               </a:rPr>
-              <a:t>{{IT_2_ACTION}}</a:t>
-            </a:r>
-          </a:p>
-        </p:txBody>
-      </p:sp>
-      <p:sp>
-        <p:nvSpPr>
-          <p:cNvPr id="19" name="">
-            <a:extLst xmlns:a="http://schemas.openxmlformats.org/drawingml/2006/main">
-              <a:ext uri="{FF2B5EF4-FFF2-40B4-BE49-F238E27FC236}">
-                <a16:creationId xmlns:a16="http://schemas.microsoft.com/office/drawing/2014/main" id="{99E1F3DC-3D76-4C50-B5CD-BCA6FB7EFF07}"/>
-              </a:ext>
-            </a:extLst>
-          </p:cNvPr>
-          <p:cNvSpPr>
-            <a:spLocks xmlns:a="http://schemas.openxmlformats.org/drawingml/2006/main" noGrp="1"/>
-          </p:cNvSpPr>
-          <p:nvPr/>
-        </p:nvSpPr>
-        <p:spPr>
-          <a:xfrm xmlns:a="http://schemas.openxmlformats.org/drawingml/2006/main">
-            <a:off x="1200150" y="3429000"/>
-            <a:ext cx="742950" cy="190500"/>
-          </a:xfrm>
-          <a:prstGeom xmlns:a="http://schemas.openxmlformats.org/drawingml/2006/main" prst="rect">
-            <a:avLst/>
-          </a:prstGeom>
-          <a:noFill xmlns:a="http://schemas.openxmlformats.org/drawingml/2006/main"/>
-          <a:ln xmlns:a="http://schemas.openxmlformats.org/drawingml/2006/main" w="0">
-            <a:noFill/>
-            <a:prstDash val="solid"/>
-          </a:ln>
-        </p:spPr>
-        <p:txBody>
-          <a:bodyPr xmlns:a="http://schemas.openxmlformats.org/drawingml/2006/main"/>
-          <a:lstStyle xmlns:a="http://schemas.openxmlformats.org/drawingml/2006/main"/>
-          <a:p xmlns:a="http://schemas.openxmlformats.org/drawingml/2006/main">
-            <a:pPr>
-              <a:defRPr sz="975" b="1">
-                <a:solidFill>
-                  <a:srgbClr val="FF6412"/>
-                </a:solidFill>
-              </a:defRPr>
-            </a:pPr>
-            <a:r>
-              <a:rPr sz="975" b="1">
-                <a:solidFill>
-                  <a:srgbClr val="FF6412"/>
-                </a:solidFill>
-              </a:rPr>
-              <a:t>Решение</a:t>
-            </a:r>
-          </a:p>
-        </p:txBody>
-      </p:sp>
-      <p:sp>
-        <p:nvSpPr>
-          <p:cNvPr id="20" name="">
-            <a:extLst xmlns:a="http://schemas.openxmlformats.org/drawingml/2006/main">
-              <a:ext uri="{FF2B5EF4-FFF2-40B4-BE49-F238E27FC236}">
-                <a16:creationId xmlns:a16="http://schemas.microsoft.com/office/drawing/2014/main" id="{E66922C8-0CF9-49DB-9595-D385E33A122C}"/>
-              </a:ext>
-            </a:extLst>
-          </p:cNvPr>
-          <p:cNvSpPr>
-            <a:spLocks xmlns:a="http://schemas.openxmlformats.org/drawingml/2006/main" noGrp="1"/>
-          </p:cNvSpPr>
-          <p:nvPr/>
-        </p:nvSpPr>
-        <p:spPr>
-          <a:xfrm xmlns:a="http://schemas.openxmlformats.org/drawingml/2006/main">
-            <a:off x="1962150" y="3409950"/>
-            <a:ext cx="3810000" cy="323850"/>
-          </a:xfrm>
-          <a:prstGeom xmlns:a="http://schemas.openxmlformats.org/drawingml/2006/main" prst="rect">
-            <a:avLst/>
-          </a:prstGeom>
-          <a:noFill xmlns:a="http://schemas.openxmlformats.org/drawingml/2006/main"/>
-          <a:ln xmlns:a="http://schemas.openxmlformats.org/drawingml/2006/main" w="0">
-            <a:noFill/>
-            <a:prstDash val="solid"/>
-          </a:ln>
-        </p:spPr>
-        <p:txBody>
-          <a:bodyPr xmlns:a="http://schemas.openxmlformats.org/drawingml/2006/main"/>
-          <a:lstStyle xmlns:a="http://schemas.openxmlformats.org/drawingml/2006/main"/>
-          <a:p xmlns:a="http://schemas.openxmlformats.org/drawingml/2006/main">
-            <a:pPr>
-              <a:defRPr sz="1050" b="1">
-                <a:solidFill>
-                  <a:srgbClr val="161616"/>
-                </a:solidFill>
-              </a:defRPr>
-            </a:pPr>
-            <a:r>
-              <a:rPr sz="1050" b="1">
-                <a:solidFill>
-                  <a:srgbClr val="161616"/>
-                </a:solidFill>
-              </a:rPr>
-              <a:t>{{IT_2_SOLUTION}}</a:t>
+              <a:t>{{REC_2_ACTION}}</a:t>
             </a:r>
           </a:p>
         </p:txBody>
@@ -6200,119 +6919,19 @@
           <p:cNvPr id="21" name="">
             <a:extLst xmlns:a="http://schemas.openxmlformats.org/drawingml/2006/main">
               <a:ext uri="{FF2B5EF4-FFF2-40B4-BE49-F238E27FC236}">
-                <a16:creationId xmlns:a16="http://schemas.microsoft.com/office/drawing/2014/main" id="{F0F05988-062D-4094-8810-2E84C507FBDF}"/>
-              </a:ext>
-            </a:extLst>
-          </p:cNvPr>
-          <p:cNvSpPr>
-            <a:spLocks xmlns:a="http://schemas.openxmlformats.org/drawingml/2006/main" noGrp="1"/>
-          </p:cNvSpPr>
-          <p:nvPr/>
-        </p:nvSpPr>
-        <p:spPr>
-          <a:xfrm xmlns:a="http://schemas.openxmlformats.org/drawingml/2006/main">
-            <a:off x="6019800" y="3429000"/>
-            <a:ext cx="1104900" cy="190500"/>
-          </a:xfrm>
-          <a:prstGeom xmlns:a="http://schemas.openxmlformats.org/drawingml/2006/main" prst="rect">
-            <a:avLst/>
-          </a:prstGeom>
-          <a:noFill xmlns:a="http://schemas.openxmlformats.org/drawingml/2006/main"/>
-          <a:ln xmlns:a="http://schemas.openxmlformats.org/drawingml/2006/main" w="0">
-            <a:noFill/>
-            <a:prstDash val="solid"/>
-          </a:ln>
-        </p:spPr>
-        <p:txBody>
-          <a:bodyPr xmlns:a="http://schemas.openxmlformats.org/drawingml/2006/main"/>
-          <a:lstStyle xmlns:a="http://schemas.openxmlformats.org/drawingml/2006/main"/>
-          <a:p xmlns:a="http://schemas.openxmlformats.org/drawingml/2006/main">
-            <a:pPr>
-              <a:defRPr sz="975" b="1">
-                <a:solidFill>
-                  <a:srgbClr val="FF6412"/>
-                </a:solidFill>
-              </a:defRPr>
-            </a:pPr>
-            <a:r>
-              <a:rPr sz="975" b="1">
-                <a:solidFill>
-                  <a:srgbClr val="FF6412"/>
-                </a:solidFill>
-              </a:rPr>
-              <a:t>Производители</a:t>
-            </a:r>
-          </a:p>
-        </p:txBody>
-      </p:sp>
-      <p:sp>
-        <p:nvSpPr>
-          <p:cNvPr id="22" name="">
-            <a:extLst xmlns:a="http://schemas.openxmlformats.org/drawingml/2006/main">
-              <a:ext uri="{FF2B5EF4-FFF2-40B4-BE49-F238E27FC236}">
-                <a16:creationId xmlns:a16="http://schemas.microsoft.com/office/drawing/2014/main" id="{F14D2C86-0605-49C1-9F0B-83E1FE2256DB}"/>
-              </a:ext>
-            </a:extLst>
-          </p:cNvPr>
-          <p:cNvSpPr>
-            <a:spLocks xmlns:a="http://schemas.openxmlformats.org/drawingml/2006/main" noGrp="1"/>
-          </p:cNvSpPr>
-          <p:nvPr/>
-        </p:nvSpPr>
-        <p:spPr>
-          <a:xfrm xmlns:a="http://schemas.openxmlformats.org/drawingml/2006/main">
-            <a:off x="7181850" y="3409950"/>
-            <a:ext cx="4000500" cy="323850"/>
-          </a:xfrm>
-          <a:prstGeom xmlns:a="http://schemas.openxmlformats.org/drawingml/2006/main" prst="rect">
-            <a:avLst/>
-          </a:prstGeom>
-          <a:noFill xmlns:a="http://schemas.openxmlformats.org/drawingml/2006/main"/>
-          <a:ln xmlns:a="http://schemas.openxmlformats.org/drawingml/2006/main" w="0">
-            <a:noFill/>
-            <a:prstDash val="solid"/>
-          </a:ln>
-        </p:spPr>
-        <p:txBody>
-          <a:bodyPr xmlns:a="http://schemas.openxmlformats.org/drawingml/2006/main"/>
-          <a:lstStyle xmlns:a="http://schemas.openxmlformats.org/drawingml/2006/main"/>
-          <a:p xmlns:a="http://schemas.openxmlformats.org/drawingml/2006/main">
-            <a:pPr>
-              <a:defRPr sz="1050" b="1">
-                <a:solidFill>
-                  <a:srgbClr val="161616"/>
-                </a:solidFill>
-              </a:defRPr>
-            </a:pPr>
-            <a:r>
-              <a:rPr sz="1050" b="1">
-                <a:solidFill>
-                  <a:srgbClr val="161616"/>
-                </a:solidFill>
-              </a:rPr>
-              <a:t>{{IT_2_VENDORS}}</a:t>
-            </a:r>
-          </a:p>
-        </p:txBody>
-      </p:sp>
-      <p:sp>
-        <p:nvSpPr>
-          <p:cNvPr id="23" name="">
-            <a:extLst xmlns:a="http://schemas.openxmlformats.org/drawingml/2006/main">
-              <a:ext uri="{FF2B5EF4-FFF2-40B4-BE49-F238E27FC236}">
-                <a16:creationId xmlns:a16="http://schemas.microsoft.com/office/drawing/2014/main" id="{BD38CDD5-FD2A-497F-84C7-1FFA23B1CCFB}"/>
-              </a:ext>
-            </a:extLst>
-          </p:cNvPr>
-          <p:cNvSpPr>
-            <a:spLocks xmlns:a="http://schemas.openxmlformats.org/drawingml/2006/main" noGrp="1"/>
-          </p:cNvSpPr>
-          <p:nvPr/>
-        </p:nvSpPr>
-        <p:spPr>
-          <a:xfrm xmlns:a="http://schemas.openxmlformats.org/drawingml/2006/main">
-            <a:off x="1200150" y="3810000"/>
-            <a:ext cx="9982200" cy="9525"/>
+                <a16:creationId xmlns:a16="http://schemas.microsoft.com/office/drawing/2014/main" id="{FFA3F17B-634F-4FE3-AB54-3517A41026F7}"/>
+              </a:ext>
+            </a:extLst>
+          </p:cNvPr>
+          <p:cNvSpPr>
+            <a:spLocks xmlns:a="http://schemas.openxmlformats.org/drawingml/2006/main" noGrp="1"/>
+          </p:cNvSpPr>
+          <p:nvPr/>
+        </p:nvSpPr>
+        <p:spPr>
+          <a:xfrm xmlns:a="http://schemas.openxmlformats.org/drawingml/2006/main">
+            <a:off x="6286500" y="2686050"/>
+            <a:ext cx="4743450" cy="9525"/>
           </a:xfrm>
           <a:prstGeom xmlns:a="http://schemas.openxmlformats.org/drawingml/2006/main" prst="rect">
             <a:avLst/>
@@ -6328,22 +6947,257 @@
       </p:sp>
       <p:sp>
         <p:nvSpPr>
+          <p:cNvPr id="22" name="">
+            <a:extLst xmlns:a="http://schemas.openxmlformats.org/drawingml/2006/main">
+              <a:ext uri="{FF2B5EF4-FFF2-40B4-BE49-F238E27FC236}">
+                <a16:creationId xmlns:a16="http://schemas.microsoft.com/office/drawing/2014/main" id="{73C304E8-ABB9-47E6-BF17-8016C342D22E}"/>
+              </a:ext>
+            </a:extLst>
+          </p:cNvPr>
+          <p:cNvSpPr>
+            <a:spLocks xmlns:a="http://schemas.openxmlformats.org/drawingml/2006/main" noGrp="1"/>
+          </p:cNvSpPr>
+          <p:nvPr/>
+        </p:nvSpPr>
+        <p:spPr>
+          <a:xfrm xmlns:a="http://schemas.openxmlformats.org/drawingml/2006/main">
+            <a:off x="6286500" y="2819400"/>
+            <a:ext cx="2171700" cy="171450"/>
+          </a:xfrm>
+          <a:prstGeom xmlns:a="http://schemas.openxmlformats.org/drawingml/2006/main" prst="rect">
+            <a:avLst/>
+          </a:prstGeom>
+          <a:noFill xmlns:a="http://schemas.openxmlformats.org/drawingml/2006/main"/>
+          <a:ln xmlns:a="http://schemas.openxmlformats.org/drawingml/2006/main" w="0">
+            <a:noFill/>
+            <a:prstDash val="solid"/>
+          </a:ln>
+        </p:spPr>
+        <p:txBody>
+          <a:bodyPr xmlns:a="http://schemas.openxmlformats.org/drawingml/2006/main"/>
+          <a:lstStyle xmlns:a="http://schemas.openxmlformats.org/drawingml/2006/main"/>
+          <a:p xmlns:a="http://schemas.openxmlformats.org/drawingml/2006/main">
+            <a:pPr>
+              <a:defRPr sz="900" b="1">
+                <a:solidFill>
+                  <a:srgbClr val="FF6412"/>
+                </a:solidFill>
+              </a:defRPr>
+            </a:pPr>
+            <a:r>
+              <a:rPr sz="900" b="1">
+                <a:solidFill>
+                  <a:srgbClr val="FF6412"/>
+                </a:solidFill>
+              </a:rPr>
+              <a:t>Решение</a:t>
+            </a:r>
+          </a:p>
+        </p:txBody>
+      </p:sp>
+      <p:sp>
+        <p:nvSpPr>
+          <p:cNvPr id="23" name="">
+            <a:extLst xmlns:a="http://schemas.openxmlformats.org/drawingml/2006/main">
+              <a:ext uri="{FF2B5EF4-FFF2-40B4-BE49-F238E27FC236}">
+                <a16:creationId xmlns:a16="http://schemas.microsoft.com/office/drawing/2014/main" id="{A020880D-0B3F-4E47-B4CD-7A982747733C}"/>
+              </a:ext>
+            </a:extLst>
+          </p:cNvPr>
+          <p:cNvSpPr>
+            <a:spLocks xmlns:a="http://schemas.openxmlformats.org/drawingml/2006/main" noGrp="1"/>
+          </p:cNvSpPr>
+          <p:nvPr/>
+        </p:nvSpPr>
+        <p:spPr>
+          <a:xfrm xmlns:a="http://schemas.openxmlformats.org/drawingml/2006/main">
+            <a:off x="6286500" y="3009900"/>
+            <a:ext cx="2266950" cy="409575"/>
+          </a:xfrm>
+          <a:prstGeom xmlns:a="http://schemas.openxmlformats.org/drawingml/2006/main" prst="rect">
+            <a:avLst/>
+          </a:prstGeom>
+          <a:noFill xmlns:a="http://schemas.openxmlformats.org/drawingml/2006/main"/>
+          <a:ln xmlns:a="http://schemas.openxmlformats.org/drawingml/2006/main" w="0">
+            <a:noFill/>
+            <a:prstDash val="solid"/>
+          </a:ln>
+        </p:spPr>
+        <p:txBody>
+          <a:bodyPr xmlns:a="http://schemas.openxmlformats.org/drawingml/2006/main"/>
+          <a:lstStyle xmlns:a="http://schemas.openxmlformats.org/drawingml/2006/main"/>
+          <a:p xmlns:a="http://schemas.openxmlformats.org/drawingml/2006/main">
+            <a:pPr>
+              <a:defRPr sz="1050" b="1">
+                <a:solidFill>
+                  <a:srgbClr val="161616"/>
+                </a:solidFill>
+              </a:defRPr>
+            </a:pPr>
+            <a:r>
+              <a:rPr sz="1050" b="1">
+                <a:solidFill>
+                  <a:srgbClr val="161616"/>
+                </a:solidFill>
+              </a:rPr>
+              <a:t>{{REC_2_SOLUTION}}</a:t>
+            </a:r>
+          </a:p>
+        </p:txBody>
+      </p:sp>
+      <p:sp>
+        <p:nvSpPr>
           <p:cNvPr id="24" name="">
             <a:extLst xmlns:a="http://schemas.openxmlformats.org/drawingml/2006/main">
               <a:ext uri="{FF2B5EF4-FFF2-40B4-BE49-F238E27FC236}">
-                <a16:creationId xmlns:a16="http://schemas.microsoft.com/office/drawing/2014/main" id="{4AF0A8EA-6EA3-4CB4-9601-79B582917920}"/>
-              </a:ext>
-            </a:extLst>
-          </p:cNvPr>
-          <p:cNvSpPr>
-            <a:spLocks xmlns:a="http://schemas.openxmlformats.org/drawingml/2006/main" noGrp="1"/>
-          </p:cNvSpPr>
-          <p:nvPr/>
-        </p:nvSpPr>
-        <p:spPr>
-          <a:xfrm xmlns:a="http://schemas.openxmlformats.org/drawingml/2006/main">
-            <a:off x="609600" y="3981450"/>
-            <a:ext cx="457200" cy="266700"/>
+                <a16:creationId xmlns:a16="http://schemas.microsoft.com/office/drawing/2014/main" id="{F79D8D99-4A89-4D00-90AA-3090EDF64E63}"/>
+              </a:ext>
+            </a:extLst>
+          </p:cNvPr>
+          <p:cNvSpPr>
+            <a:spLocks xmlns:a="http://schemas.openxmlformats.org/drawingml/2006/main" noGrp="1"/>
+          </p:cNvSpPr>
+          <p:nvPr/>
+        </p:nvSpPr>
+        <p:spPr>
+          <a:xfrm xmlns:a="http://schemas.openxmlformats.org/drawingml/2006/main">
+            <a:off x="8743950" y="2819400"/>
+            <a:ext cx="2266950" cy="171450"/>
+          </a:xfrm>
+          <a:prstGeom xmlns:a="http://schemas.openxmlformats.org/drawingml/2006/main" prst="rect">
+            <a:avLst/>
+          </a:prstGeom>
+          <a:noFill xmlns:a="http://schemas.openxmlformats.org/drawingml/2006/main"/>
+          <a:ln xmlns:a="http://schemas.openxmlformats.org/drawingml/2006/main" w="0">
+            <a:noFill/>
+            <a:prstDash val="solid"/>
+          </a:ln>
+        </p:spPr>
+        <p:txBody>
+          <a:bodyPr xmlns:a="http://schemas.openxmlformats.org/drawingml/2006/main"/>
+          <a:lstStyle xmlns:a="http://schemas.openxmlformats.org/drawingml/2006/main"/>
+          <a:p xmlns:a="http://schemas.openxmlformats.org/drawingml/2006/main">
+            <a:pPr>
+              <a:defRPr sz="900" b="1">
+                <a:solidFill>
+                  <a:srgbClr val="FF6412"/>
+                </a:solidFill>
+              </a:defRPr>
+            </a:pPr>
+            <a:r>
+              <a:rPr sz="900" b="1">
+                <a:solidFill>
+                  <a:srgbClr val="FF6412"/>
+                </a:solidFill>
+              </a:rPr>
+              <a:t>Производители</a:t>
+            </a:r>
+          </a:p>
+        </p:txBody>
+      </p:sp>
+      <p:sp>
+        <p:nvSpPr>
+          <p:cNvPr id="25" name="">
+            <a:extLst xmlns:a="http://schemas.openxmlformats.org/drawingml/2006/main">
+              <a:ext uri="{FF2B5EF4-FFF2-40B4-BE49-F238E27FC236}">
+                <a16:creationId xmlns:a16="http://schemas.microsoft.com/office/drawing/2014/main" id="{E992B6B7-437F-4080-81D6-268C7896E57C}"/>
+              </a:ext>
+            </a:extLst>
+          </p:cNvPr>
+          <p:cNvSpPr>
+            <a:spLocks xmlns:a="http://schemas.openxmlformats.org/drawingml/2006/main" noGrp="1"/>
+          </p:cNvSpPr>
+          <p:nvPr/>
+        </p:nvSpPr>
+        <p:spPr>
+          <a:xfrm xmlns:a="http://schemas.openxmlformats.org/drawingml/2006/main">
+            <a:off x="8743950" y="3009900"/>
+            <a:ext cx="2266950" cy="409575"/>
+          </a:xfrm>
+          <a:prstGeom xmlns:a="http://schemas.openxmlformats.org/drawingml/2006/main" prst="rect">
+            <a:avLst/>
+          </a:prstGeom>
+          <a:noFill xmlns:a="http://schemas.openxmlformats.org/drawingml/2006/main"/>
+          <a:ln xmlns:a="http://schemas.openxmlformats.org/drawingml/2006/main" w="0">
+            <a:noFill/>
+            <a:prstDash val="solid"/>
+          </a:ln>
+        </p:spPr>
+        <p:txBody>
+          <a:bodyPr xmlns:a="http://schemas.openxmlformats.org/drawingml/2006/main"/>
+          <a:lstStyle xmlns:a="http://schemas.openxmlformats.org/drawingml/2006/main"/>
+          <a:p xmlns:a="http://schemas.openxmlformats.org/drawingml/2006/main">
+            <a:pPr>
+              <a:defRPr sz="1050" b="1">
+                <a:solidFill>
+                  <a:srgbClr val="161616"/>
+                </a:solidFill>
+              </a:defRPr>
+            </a:pPr>
+            <a:r>
+              <a:rPr sz="1050" b="1">
+                <a:solidFill>
+                  <a:srgbClr val="161616"/>
+                </a:solidFill>
+              </a:rPr>
+              <a:t>{{REC_2_VENDORS}}</a:t>
+            </a:r>
+          </a:p>
+        </p:txBody>
+      </p:sp>
+      <p:sp>
+        <p:nvSpPr>
+          <p:cNvPr id="26" name="">
+            <a:extLst xmlns:a="http://schemas.openxmlformats.org/drawingml/2006/main">
+              <a:ext uri="{FF2B5EF4-FFF2-40B4-BE49-F238E27FC236}">
+                <a16:creationId xmlns:a16="http://schemas.microsoft.com/office/drawing/2014/main" id="{B2ADE089-7F7E-471E-AF03-DBE5C537D68C}"/>
+              </a:ext>
+            </a:extLst>
+          </p:cNvPr>
+          <p:cNvSpPr>
+            <a:spLocks xmlns:a="http://schemas.openxmlformats.org/drawingml/2006/main" noGrp="1"/>
+          </p:cNvSpPr>
+          <p:nvPr/>
+        </p:nvSpPr>
+        <p:spPr>
+          <a:xfrm xmlns:a="http://schemas.openxmlformats.org/drawingml/2006/main">
+            <a:off x="552450" y="3857625"/>
+            <a:ext cx="5162550" cy="2143125"/>
+          </a:xfrm>
+          <a:prstGeom xmlns:a="http://schemas.openxmlformats.org/drawingml/2006/main" prst="roundRect">
+            <a:avLst>
+              <a:gd name="adj" fmla="val 3556"/>
+            </a:avLst>
+          </a:prstGeom>
+          <a:solidFill xmlns:a="http://schemas.openxmlformats.org/drawingml/2006/main">
+            <a:srgbClr val="FFFFFF"/>
+          </a:solidFill>
+          <a:ln xmlns:a="http://schemas.openxmlformats.org/drawingml/2006/main" w="9525">
+            <a:solidFill>
+              <a:srgbClr val="E4E7EC"/>
+            </a:solidFill>
+            <a:prstDash val="solid"/>
+          </a:ln>
+        </p:spPr>
+      </p:sp>
+      <p:sp>
+        <p:nvSpPr>
+          <p:cNvPr id="27" name="">
+            <a:extLst xmlns:a="http://schemas.openxmlformats.org/drawingml/2006/main">
+              <a:ext uri="{FF2B5EF4-FFF2-40B4-BE49-F238E27FC236}">
+                <a16:creationId xmlns:a16="http://schemas.microsoft.com/office/drawing/2014/main" id="{E7BE0072-7DFB-42B8-8967-C35566E92365}"/>
+              </a:ext>
+            </a:extLst>
+          </p:cNvPr>
+          <p:cNvSpPr>
+            <a:spLocks xmlns:a="http://schemas.openxmlformats.org/drawingml/2006/main" noGrp="1"/>
+          </p:cNvSpPr>
+          <p:nvPr/>
+        </p:nvSpPr>
+        <p:spPr>
+          <a:xfrm xmlns:a="http://schemas.openxmlformats.org/drawingml/2006/main">
+            <a:off x="742950" y="4029075"/>
+            <a:ext cx="361950" cy="247650"/>
           </a:xfrm>
           <a:prstGeom xmlns:a="http://schemas.openxmlformats.org/drawingml/2006/main" prst="rect">
             <a:avLst/>
@@ -6378,72 +7232,72 @@
       </p:sp>
       <p:sp>
         <p:nvSpPr>
-          <p:cNvPr id="25" name="">
-            <a:extLst xmlns:a="http://schemas.openxmlformats.org/drawingml/2006/main">
-              <a:ext uri="{FF2B5EF4-FFF2-40B4-BE49-F238E27FC236}">
-                <a16:creationId xmlns:a16="http://schemas.microsoft.com/office/drawing/2014/main" id="{99691807-DC40-49F1-BC61-0A96117E517A}"/>
-              </a:ext>
-            </a:extLst>
-          </p:cNvPr>
-          <p:cNvSpPr>
-            <a:spLocks xmlns:a="http://schemas.openxmlformats.org/drawingml/2006/main" noGrp="1"/>
-          </p:cNvSpPr>
-          <p:nvPr/>
-        </p:nvSpPr>
-        <p:spPr>
-          <a:xfrm xmlns:a="http://schemas.openxmlformats.org/drawingml/2006/main">
-            <a:off x="1200150" y="3924300"/>
-            <a:ext cx="9982200" cy="266700"/>
-          </a:xfrm>
-          <a:prstGeom xmlns:a="http://schemas.openxmlformats.org/drawingml/2006/main" prst="rect">
-            <a:avLst/>
-          </a:prstGeom>
-          <a:noFill xmlns:a="http://schemas.openxmlformats.org/drawingml/2006/main"/>
-          <a:ln xmlns:a="http://schemas.openxmlformats.org/drawingml/2006/main" w="0">
-            <a:noFill/>
-            <a:prstDash val="solid"/>
-          </a:ln>
-        </p:spPr>
-        <p:txBody>
-          <a:bodyPr xmlns:a="http://schemas.openxmlformats.org/drawingml/2006/main"/>
-          <a:lstStyle xmlns:a="http://schemas.openxmlformats.org/drawingml/2006/main"/>
-          <a:p xmlns:a="http://schemas.openxmlformats.org/drawingml/2006/main">
-            <a:pPr>
-              <a:defRPr sz="1425" b="1">
-                <a:solidFill>
-                  <a:srgbClr val="161616"/>
-                </a:solidFill>
-              </a:defRPr>
-            </a:pPr>
-            <a:r>
-              <a:rPr sz="1425" b="1">
-                <a:solidFill>
-                  <a:srgbClr val="161616"/>
-                </a:solidFill>
-              </a:rPr>
-              <a:t>{{IT_3_TITLE}}</a:t>
-            </a:r>
-          </a:p>
-        </p:txBody>
-      </p:sp>
-      <p:sp>
-        <p:nvSpPr>
-          <p:cNvPr id="26" name="">
-            <a:extLst xmlns:a="http://schemas.openxmlformats.org/drawingml/2006/main">
-              <a:ext uri="{FF2B5EF4-FFF2-40B4-BE49-F238E27FC236}">
-                <a16:creationId xmlns:a16="http://schemas.microsoft.com/office/drawing/2014/main" id="{266BBA60-F91D-41FC-8956-9592D2CF6FD5}"/>
-              </a:ext>
-            </a:extLst>
-          </p:cNvPr>
-          <p:cNvSpPr>
-            <a:spLocks xmlns:a="http://schemas.openxmlformats.org/drawingml/2006/main" noGrp="1"/>
-          </p:cNvSpPr>
-          <p:nvPr/>
-        </p:nvSpPr>
-        <p:spPr>
-          <a:xfrm xmlns:a="http://schemas.openxmlformats.org/drawingml/2006/main">
-            <a:off x="1200150" y="4219575"/>
-            <a:ext cx="9982200" cy="400050"/>
+          <p:cNvPr id="28" name="">
+            <a:extLst xmlns:a="http://schemas.openxmlformats.org/drawingml/2006/main">
+              <a:ext uri="{FF2B5EF4-FFF2-40B4-BE49-F238E27FC236}">
+                <a16:creationId xmlns:a16="http://schemas.microsoft.com/office/drawing/2014/main" id="{C4D2529C-BB71-4767-821A-606010A63BBC}"/>
+              </a:ext>
+            </a:extLst>
+          </p:cNvPr>
+          <p:cNvSpPr>
+            <a:spLocks xmlns:a="http://schemas.openxmlformats.org/drawingml/2006/main" noGrp="1"/>
+          </p:cNvSpPr>
+          <p:nvPr/>
+        </p:nvSpPr>
+        <p:spPr>
+          <a:xfrm xmlns:a="http://schemas.openxmlformats.org/drawingml/2006/main">
+            <a:off x="1162050" y="4000500"/>
+            <a:ext cx="4324350" cy="400050"/>
+          </a:xfrm>
+          <a:prstGeom xmlns:a="http://schemas.openxmlformats.org/drawingml/2006/main" prst="rect">
+            <a:avLst/>
+          </a:prstGeom>
+          <a:noFill xmlns:a="http://schemas.openxmlformats.org/drawingml/2006/main"/>
+          <a:ln xmlns:a="http://schemas.openxmlformats.org/drawingml/2006/main" w="0">
+            <a:noFill/>
+            <a:prstDash val="solid"/>
+          </a:ln>
+        </p:spPr>
+        <p:txBody>
+          <a:bodyPr xmlns:a="http://schemas.openxmlformats.org/drawingml/2006/main"/>
+          <a:lstStyle xmlns:a="http://schemas.openxmlformats.org/drawingml/2006/main"/>
+          <a:p xmlns:a="http://schemas.openxmlformats.org/drawingml/2006/main">
+            <a:pPr>
+              <a:defRPr sz="1350" b="1">
+                <a:solidFill>
+                  <a:srgbClr val="161616"/>
+                </a:solidFill>
+              </a:defRPr>
+            </a:pPr>
+            <a:r>
+              <a:rPr sz="1350" b="1">
+                <a:solidFill>
+                  <a:srgbClr val="161616"/>
+                </a:solidFill>
+              </a:rPr>
+              <a:t>{{REC_3_TITLE}}</a:t>
+            </a:r>
+          </a:p>
+        </p:txBody>
+      </p:sp>
+      <p:sp>
+        <p:nvSpPr>
+          <p:cNvPr id="29" name="">
+            <a:extLst xmlns:a="http://schemas.openxmlformats.org/drawingml/2006/main">
+              <a:ext uri="{FF2B5EF4-FFF2-40B4-BE49-F238E27FC236}">
+                <a16:creationId xmlns:a16="http://schemas.microsoft.com/office/drawing/2014/main" id="{2E16D93E-23AB-41F0-BF05-07797AA64E02}"/>
+              </a:ext>
+            </a:extLst>
+          </p:cNvPr>
+          <p:cNvSpPr>
+            <a:spLocks xmlns:a="http://schemas.openxmlformats.org/drawingml/2006/main" noGrp="1"/>
+          </p:cNvSpPr>
+          <p:nvPr/>
+        </p:nvSpPr>
+        <p:spPr>
+          <a:xfrm xmlns:a="http://schemas.openxmlformats.org/drawingml/2006/main">
+            <a:off x="762000" y="4476750"/>
+            <a:ext cx="4743450" cy="552450"/>
           </a:xfrm>
           <a:prstGeom xmlns:a="http://schemas.openxmlformats.org/drawingml/2006/main" prst="rect">
             <a:avLst/>
@@ -6471,157 +7325,7 @@
                   <a:srgbClr val="667085"/>
                 </a:solidFill>
               </a:rPr>
-              <a:t>{{IT_3_ACTION}}</a:t>
-            </a:r>
-          </a:p>
-        </p:txBody>
-      </p:sp>
-      <p:sp>
-        <p:nvSpPr>
-          <p:cNvPr id="27" name="">
-            <a:extLst xmlns:a="http://schemas.openxmlformats.org/drawingml/2006/main">
-              <a:ext uri="{FF2B5EF4-FFF2-40B4-BE49-F238E27FC236}">
-                <a16:creationId xmlns:a16="http://schemas.microsoft.com/office/drawing/2014/main" id="{5710D0F0-F663-4930-9227-638E32693085}"/>
-              </a:ext>
-            </a:extLst>
-          </p:cNvPr>
-          <p:cNvSpPr>
-            <a:spLocks xmlns:a="http://schemas.openxmlformats.org/drawingml/2006/main" noGrp="1"/>
-          </p:cNvSpPr>
-          <p:nvPr/>
-        </p:nvSpPr>
-        <p:spPr>
-          <a:xfrm xmlns:a="http://schemas.openxmlformats.org/drawingml/2006/main">
-            <a:off x="1200150" y="4686300"/>
-            <a:ext cx="742950" cy="190500"/>
-          </a:xfrm>
-          <a:prstGeom xmlns:a="http://schemas.openxmlformats.org/drawingml/2006/main" prst="rect">
-            <a:avLst/>
-          </a:prstGeom>
-          <a:noFill xmlns:a="http://schemas.openxmlformats.org/drawingml/2006/main"/>
-          <a:ln xmlns:a="http://schemas.openxmlformats.org/drawingml/2006/main" w="0">
-            <a:noFill/>
-            <a:prstDash val="solid"/>
-          </a:ln>
-        </p:spPr>
-        <p:txBody>
-          <a:bodyPr xmlns:a="http://schemas.openxmlformats.org/drawingml/2006/main"/>
-          <a:lstStyle xmlns:a="http://schemas.openxmlformats.org/drawingml/2006/main"/>
-          <a:p xmlns:a="http://schemas.openxmlformats.org/drawingml/2006/main">
-            <a:pPr>
-              <a:defRPr sz="975" b="1">
-                <a:solidFill>
-                  <a:srgbClr val="FF6412"/>
-                </a:solidFill>
-              </a:defRPr>
-            </a:pPr>
-            <a:r>
-              <a:rPr sz="975" b="1">
-                <a:solidFill>
-                  <a:srgbClr val="FF6412"/>
-                </a:solidFill>
-              </a:rPr>
-              <a:t>Решение</a:t>
-            </a:r>
-          </a:p>
-        </p:txBody>
-      </p:sp>
-      <p:sp>
-        <p:nvSpPr>
-          <p:cNvPr id="28" name="">
-            <a:extLst xmlns:a="http://schemas.openxmlformats.org/drawingml/2006/main">
-              <a:ext uri="{FF2B5EF4-FFF2-40B4-BE49-F238E27FC236}">
-                <a16:creationId xmlns:a16="http://schemas.microsoft.com/office/drawing/2014/main" id="{0ECC9BF8-2FBA-4A5E-AA34-14079C4755FD}"/>
-              </a:ext>
-            </a:extLst>
-          </p:cNvPr>
-          <p:cNvSpPr>
-            <a:spLocks xmlns:a="http://schemas.openxmlformats.org/drawingml/2006/main" noGrp="1"/>
-          </p:cNvSpPr>
-          <p:nvPr/>
-        </p:nvSpPr>
-        <p:spPr>
-          <a:xfrm xmlns:a="http://schemas.openxmlformats.org/drawingml/2006/main">
-            <a:off x="1962150" y="4667250"/>
-            <a:ext cx="3810000" cy="323850"/>
-          </a:xfrm>
-          <a:prstGeom xmlns:a="http://schemas.openxmlformats.org/drawingml/2006/main" prst="rect">
-            <a:avLst/>
-          </a:prstGeom>
-          <a:noFill xmlns:a="http://schemas.openxmlformats.org/drawingml/2006/main"/>
-          <a:ln xmlns:a="http://schemas.openxmlformats.org/drawingml/2006/main" w="0">
-            <a:noFill/>
-            <a:prstDash val="solid"/>
-          </a:ln>
-        </p:spPr>
-        <p:txBody>
-          <a:bodyPr xmlns:a="http://schemas.openxmlformats.org/drawingml/2006/main"/>
-          <a:lstStyle xmlns:a="http://schemas.openxmlformats.org/drawingml/2006/main"/>
-          <a:p xmlns:a="http://schemas.openxmlformats.org/drawingml/2006/main">
-            <a:pPr>
-              <a:defRPr sz="1050" b="1">
-                <a:solidFill>
-                  <a:srgbClr val="161616"/>
-                </a:solidFill>
-              </a:defRPr>
-            </a:pPr>
-            <a:r>
-              <a:rPr sz="1050" b="1">
-                <a:solidFill>
-                  <a:srgbClr val="161616"/>
-                </a:solidFill>
-              </a:rPr>
-              <a:t>{{IT_3_SOLUTION}}</a:t>
-            </a:r>
-          </a:p>
-        </p:txBody>
-      </p:sp>
-      <p:sp>
-        <p:nvSpPr>
-          <p:cNvPr id="29" name="">
-            <a:extLst xmlns:a="http://schemas.openxmlformats.org/drawingml/2006/main">
-              <a:ext uri="{FF2B5EF4-FFF2-40B4-BE49-F238E27FC236}">
-                <a16:creationId xmlns:a16="http://schemas.microsoft.com/office/drawing/2014/main" id="{B2BF93DF-829F-439A-BFD2-A94DF3219CC6}"/>
-              </a:ext>
-            </a:extLst>
-          </p:cNvPr>
-          <p:cNvSpPr>
-            <a:spLocks xmlns:a="http://schemas.openxmlformats.org/drawingml/2006/main" noGrp="1"/>
-          </p:cNvSpPr>
-          <p:nvPr/>
-        </p:nvSpPr>
-        <p:spPr>
-          <a:xfrm xmlns:a="http://schemas.openxmlformats.org/drawingml/2006/main">
-            <a:off x="6019800" y="4686300"/>
-            <a:ext cx="1104900" cy="190500"/>
-          </a:xfrm>
-          <a:prstGeom xmlns:a="http://schemas.openxmlformats.org/drawingml/2006/main" prst="rect">
-            <a:avLst/>
-          </a:prstGeom>
-          <a:noFill xmlns:a="http://schemas.openxmlformats.org/drawingml/2006/main"/>
-          <a:ln xmlns:a="http://schemas.openxmlformats.org/drawingml/2006/main" w="0">
-            <a:noFill/>
-            <a:prstDash val="solid"/>
-          </a:ln>
-        </p:spPr>
-        <p:txBody>
-          <a:bodyPr xmlns:a="http://schemas.openxmlformats.org/drawingml/2006/main"/>
-          <a:lstStyle xmlns:a="http://schemas.openxmlformats.org/drawingml/2006/main"/>
-          <a:p xmlns:a="http://schemas.openxmlformats.org/drawingml/2006/main">
-            <a:pPr>
-              <a:defRPr sz="975" b="1">
-                <a:solidFill>
-                  <a:srgbClr val="FF6412"/>
-                </a:solidFill>
-              </a:defRPr>
-            </a:pPr>
-            <a:r>
-              <a:rPr sz="975" b="1">
-                <a:solidFill>
-                  <a:srgbClr val="FF6412"/>
-                </a:solidFill>
-              </a:rPr>
-              <a:t>Производители</a:t>
+              <a:t>{{REC_3_ACTION}}</a:t>
             </a:r>
           </a:p>
         </p:txBody>
@@ -6631,69 +7335,19 @@
           <p:cNvPr id="30" name="">
             <a:extLst xmlns:a="http://schemas.openxmlformats.org/drawingml/2006/main">
               <a:ext uri="{FF2B5EF4-FFF2-40B4-BE49-F238E27FC236}">
-                <a16:creationId xmlns:a16="http://schemas.microsoft.com/office/drawing/2014/main" id="{82065BA6-FAF1-402C-9985-D1E57F969463}"/>
-              </a:ext>
-            </a:extLst>
-          </p:cNvPr>
-          <p:cNvSpPr>
-            <a:spLocks xmlns:a="http://schemas.openxmlformats.org/drawingml/2006/main" noGrp="1"/>
-          </p:cNvSpPr>
-          <p:nvPr/>
-        </p:nvSpPr>
-        <p:spPr>
-          <a:xfrm xmlns:a="http://schemas.openxmlformats.org/drawingml/2006/main">
-            <a:off x="7181850" y="4667250"/>
-            <a:ext cx="4000500" cy="323850"/>
-          </a:xfrm>
-          <a:prstGeom xmlns:a="http://schemas.openxmlformats.org/drawingml/2006/main" prst="rect">
-            <a:avLst/>
-          </a:prstGeom>
-          <a:noFill xmlns:a="http://schemas.openxmlformats.org/drawingml/2006/main"/>
-          <a:ln xmlns:a="http://schemas.openxmlformats.org/drawingml/2006/main" w="0">
-            <a:noFill/>
-            <a:prstDash val="solid"/>
-          </a:ln>
-        </p:spPr>
-        <p:txBody>
-          <a:bodyPr xmlns:a="http://schemas.openxmlformats.org/drawingml/2006/main"/>
-          <a:lstStyle xmlns:a="http://schemas.openxmlformats.org/drawingml/2006/main"/>
-          <a:p xmlns:a="http://schemas.openxmlformats.org/drawingml/2006/main">
-            <a:pPr>
-              <a:defRPr sz="1050" b="1">
-                <a:solidFill>
-                  <a:srgbClr val="161616"/>
-                </a:solidFill>
-              </a:defRPr>
-            </a:pPr>
-            <a:r>
-              <a:rPr sz="1050" b="1">
-                <a:solidFill>
-                  <a:srgbClr val="161616"/>
-                </a:solidFill>
-              </a:rPr>
-              <a:t>{{IT_3_VENDORS}}</a:t>
-            </a:r>
-          </a:p>
-        </p:txBody>
-      </p:sp>
-      <p:sp>
-        <p:nvSpPr>
-          <p:cNvPr id="31" name="">
-            <a:extLst xmlns:a="http://schemas.openxmlformats.org/drawingml/2006/main">
-              <a:ext uri="{FF2B5EF4-FFF2-40B4-BE49-F238E27FC236}">
-                <a16:creationId xmlns:a16="http://schemas.microsoft.com/office/drawing/2014/main" id="{BA3DDC19-32F3-4A1B-8774-CEC1A7524D83}"/>
-              </a:ext>
-            </a:extLst>
-          </p:cNvPr>
-          <p:cNvSpPr>
-            <a:spLocks xmlns:a="http://schemas.openxmlformats.org/drawingml/2006/main" noGrp="1"/>
-          </p:cNvSpPr>
-          <p:nvPr/>
-        </p:nvSpPr>
-        <p:spPr>
-          <a:xfrm xmlns:a="http://schemas.openxmlformats.org/drawingml/2006/main">
-            <a:off x="1200150" y="5067300"/>
-            <a:ext cx="9982200" cy="9525"/>
+                <a16:creationId xmlns:a16="http://schemas.microsoft.com/office/drawing/2014/main" id="{EC7CFFEE-0B42-4A9C-8C03-5F5ADFBEC487}"/>
+              </a:ext>
+            </a:extLst>
+          </p:cNvPr>
+          <p:cNvSpPr>
+            <a:spLocks xmlns:a="http://schemas.openxmlformats.org/drawingml/2006/main" noGrp="1"/>
+          </p:cNvSpPr>
+          <p:nvPr/>
+        </p:nvSpPr>
+        <p:spPr>
+          <a:xfrm xmlns:a="http://schemas.openxmlformats.org/drawingml/2006/main">
+            <a:off x="762000" y="5114925"/>
+            <a:ext cx="4743450" cy="9525"/>
           </a:xfrm>
           <a:prstGeom xmlns:a="http://schemas.openxmlformats.org/drawingml/2006/main" prst="rect">
             <a:avLst/>
@@ -6709,22 +7363,257 @@
       </p:sp>
       <p:sp>
         <p:nvSpPr>
+          <p:cNvPr id="31" name="">
+            <a:extLst xmlns:a="http://schemas.openxmlformats.org/drawingml/2006/main">
+              <a:ext uri="{FF2B5EF4-FFF2-40B4-BE49-F238E27FC236}">
+                <a16:creationId xmlns:a16="http://schemas.microsoft.com/office/drawing/2014/main" id="{D5FD0D97-B190-46B0-901E-2F55012EE830}"/>
+              </a:ext>
+            </a:extLst>
+          </p:cNvPr>
+          <p:cNvSpPr>
+            <a:spLocks xmlns:a="http://schemas.openxmlformats.org/drawingml/2006/main" noGrp="1"/>
+          </p:cNvSpPr>
+          <p:nvPr/>
+        </p:nvSpPr>
+        <p:spPr>
+          <a:xfrm xmlns:a="http://schemas.openxmlformats.org/drawingml/2006/main">
+            <a:off x="762000" y="5248275"/>
+            <a:ext cx="2171700" cy="171450"/>
+          </a:xfrm>
+          <a:prstGeom xmlns:a="http://schemas.openxmlformats.org/drawingml/2006/main" prst="rect">
+            <a:avLst/>
+          </a:prstGeom>
+          <a:noFill xmlns:a="http://schemas.openxmlformats.org/drawingml/2006/main"/>
+          <a:ln xmlns:a="http://schemas.openxmlformats.org/drawingml/2006/main" w="0">
+            <a:noFill/>
+            <a:prstDash val="solid"/>
+          </a:ln>
+        </p:spPr>
+        <p:txBody>
+          <a:bodyPr xmlns:a="http://schemas.openxmlformats.org/drawingml/2006/main"/>
+          <a:lstStyle xmlns:a="http://schemas.openxmlformats.org/drawingml/2006/main"/>
+          <a:p xmlns:a="http://schemas.openxmlformats.org/drawingml/2006/main">
+            <a:pPr>
+              <a:defRPr sz="900" b="1">
+                <a:solidFill>
+                  <a:srgbClr val="FF6412"/>
+                </a:solidFill>
+              </a:defRPr>
+            </a:pPr>
+            <a:r>
+              <a:rPr sz="900" b="1">
+                <a:solidFill>
+                  <a:srgbClr val="FF6412"/>
+                </a:solidFill>
+              </a:rPr>
+              <a:t>Решение</a:t>
+            </a:r>
+          </a:p>
+        </p:txBody>
+      </p:sp>
+      <p:sp>
+        <p:nvSpPr>
           <p:cNvPr id="32" name="">
             <a:extLst xmlns:a="http://schemas.openxmlformats.org/drawingml/2006/main">
               <a:ext uri="{FF2B5EF4-FFF2-40B4-BE49-F238E27FC236}">
-                <a16:creationId xmlns:a16="http://schemas.microsoft.com/office/drawing/2014/main" id="{63D6FE82-EF74-42B8-A9C6-BDD6DB33F360}"/>
-              </a:ext>
-            </a:extLst>
-          </p:cNvPr>
-          <p:cNvSpPr>
-            <a:spLocks xmlns:a="http://schemas.openxmlformats.org/drawingml/2006/main" noGrp="1"/>
-          </p:cNvSpPr>
-          <p:nvPr/>
-        </p:nvSpPr>
-        <p:spPr>
-          <a:xfrm xmlns:a="http://schemas.openxmlformats.org/drawingml/2006/main">
-            <a:off x="609600" y="5238750"/>
-            <a:ext cx="457200" cy="266700"/>
+                <a16:creationId xmlns:a16="http://schemas.microsoft.com/office/drawing/2014/main" id="{182EA1BD-7D25-4531-98BF-8610AE14A316}"/>
+              </a:ext>
+            </a:extLst>
+          </p:cNvPr>
+          <p:cNvSpPr>
+            <a:spLocks xmlns:a="http://schemas.openxmlformats.org/drawingml/2006/main" noGrp="1"/>
+          </p:cNvSpPr>
+          <p:nvPr/>
+        </p:nvSpPr>
+        <p:spPr>
+          <a:xfrm xmlns:a="http://schemas.openxmlformats.org/drawingml/2006/main">
+            <a:off x="762000" y="5438775"/>
+            <a:ext cx="2266950" cy="409575"/>
+          </a:xfrm>
+          <a:prstGeom xmlns:a="http://schemas.openxmlformats.org/drawingml/2006/main" prst="rect">
+            <a:avLst/>
+          </a:prstGeom>
+          <a:noFill xmlns:a="http://schemas.openxmlformats.org/drawingml/2006/main"/>
+          <a:ln xmlns:a="http://schemas.openxmlformats.org/drawingml/2006/main" w="0">
+            <a:noFill/>
+            <a:prstDash val="solid"/>
+          </a:ln>
+        </p:spPr>
+        <p:txBody>
+          <a:bodyPr xmlns:a="http://schemas.openxmlformats.org/drawingml/2006/main"/>
+          <a:lstStyle xmlns:a="http://schemas.openxmlformats.org/drawingml/2006/main"/>
+          <a:p xmlns:a="http://schemas.openxmlformats.org/drawingml/2006/main">
+            <a:pPr>
+              <a:defRPr sz="1050" b="1">
+                <a:solidFill>
+                  <a:srgbClr val="161616"/>
+                </a:solidFill>
+              </a:defRPr>
+            </a:pPr>
+            <a:r>
+              <a:rPr sz="1050" b="1">
+                <a:solidFill>
+                  <a:srgbClr val="161616"/>
+                </a:solidFill>
+              </a:rPr>
+              <a:t>{{REC_3_SOLUTION}}</a:t>
+            </a:r>
+          </a:p>
+        </p:txBody>
+      </p:sp>
+      <p:sp>
+        <p:nvSpPr>
+          <p:cNvPr id="33" name="">
+            <a:extLst xmlns:a="http://schemas.openxmlformats.org/drawingml/2006/main">
+              <a:ext uri="{FF2B5EF4-FFF2-40B4-BE49-F238E27FC236}">
+                <a16:creationId xmlns:a16="http://schemas.microsoft.com/office/drawing/2014/main" id="{21B772CF-B276-486F-9724-C4CA990422B2}"/>
+              </a:ext>
+            </a:extLst>
+          </p:cNvPr>
+          <p:cNvSpPr>
+            <a:spLocks xmlns:a="http://schemas.openxmlformats.org/drawingml/2006/main" noGrp="1"/>
+          </p:cNvSpPr>
+          <p:nvPr/>
+        </p:nvSpPr>
+        <p:spPr>
+          <a:xfrm xmlns:a="http://schemas.openxmlformats.org/drawingml/2006/main">
+            <a:off x="3219450" y="5248275"/>
+            <a:ext cx="2266950" cy="171450"/>
+          </a:xfrm>
+          <a:prstGeom xmlns:a="http://schemas.openxmlformats.org/drawingml/2006/main" prst="rect">
+            <a:avLst/>
+          </a:prstGeom>
+          <a:noFill xmlns:a="http://schemas.openxmlformats.org/drawingml/2006/main"/>
+          <a:ln xmlns:a="http://schemas.openxmlformats.org/drawingml/2006/main" w="0">
+            <a:noFill/>
+            <a:prstDash val="solid"/>
+          </a:ln>
+        </p:spPr>
+        <p:txBody>
+          <a:bodyPr xmlns:a="http://schemas.openxmlformats.org/drawingml/2006/main"/>
+          <a:lstStyle xmlns:a="http://schemas.openxmlformats.org/drawingml/2006/main"/>
+          <a:p xmlns:a="http://schemas.openxmlformats.org/drawingml/2006/main">
+            <a:pPr>
+              <a:defRPr sz="900" b="1">
+                <a:solidFill>
+                  <a:srgbClr val="FF6412"/>
+                </a:solidFill>
+              </a:defRPr>
+            </a:pPr>
+            <a:r>
+              <a:rPr sz="900" b="1">
+                <a:solidFill>
+                  <a:srgbClr val="FF6412"/>
+                </a:solidFill>
+              </a:rPr>
+              <a:t>Производители</a:t>
+            </a:r>
+          </a:p>
+        </p:txBody>
+      </p:sp>
+      <p:sp>
+        <p:nvSpPr>
+          <p:cNvPr id="34" name="">
+            <a:extLst xmlns:a="http://schemas.openxmlformats.org/drawingml/2006/main">
+              <a:ext uri="{FF2B5EF4-FFF2-40B4-BE49-F238E27FC236}">
+                <a16:creationId xmlns:a16="http://schemas.microsoft.com/office/drawing/2014/main" id="{26F4A6D7-C8A2-4FB3-8919-C1AB1E09AAE4}"/>
+              </a:ext>
+            </a:extLst>
+          </p:cNvPr>
+          <p:cNvSpPr>
+            <a:spLocks xmlns:a="http://schemas.openxmlformats.org/drawingml/2006/main" noGrp="1"/>
+          </p:cNvSpPr>
+          <p:nvPr/>
+        </p:nvSpPr>
+        <p:spPr>
+          <a:xfrm xmlns:a="http://schemas.openxmlformats.org/drawingml/2006/main">
+            <a:off x="3219450" y="5438775"/>
+            <a:ext cx="2266950" cy="409575"/>
+          </a:xfrm>
+          <a:prstGeom xmlns:a="http://schemas.openxmlformats.org/drawingml/2006/main" prst="rect">
+            <a:avLst/>
+          </a:prstGeom>
+          <a:noFill xmlns:a="http://schemas.openxmlformats.org/drawingml/2006/main"/>
+          <a:ln xmlns:a="http://schemas.openxmlformats.org/drawingml/2006/main" w="0">
+            <a:noFill/>
+            <a:prstDash val="solid"/>
+          </a:ln>
+        </p:spPr>
+        <p:txBody>
+          <a:bodyPr xmlns:a="http://schemas.openxmlformats.org/drawingml/2006/main"/>
+          <a:lstStyle xmlns:a="http://schemas.openxmlformats.org/drawingml/2006/main"/>
+          <a:p xmlns:a="http://schemas.openxmlformats.org/drawingml/2006/main">
+            <a:pPr>
+              <a:defRPr sz="1050" b="1">
+                <a:solidFill>
+                  <a:srgbClr val="161616"/>
+                </a:solidFill>
+              </a:defRPr>
+            </a:pPr>
+            <a:r>
+              <a:rPr sz="1050" b="1">
+                <a:solidFill>
+                  <a:srgbClr val="161616"/>
+                </a:solidFill>
+              </a:rPr>
+              <a:t>{{REC_3_VENDORS}}</a:t>
+            </a:r>
+          </a:p>
+        </p:txBody>
+      </p:sp>
+      <p:sp>
+        <p:nvSpPr>
+          <p:cNvPr id="35" name="">
+            <a:extLst xmlns:a="http://schemas.openxmlformats.org/drawingml/2006/main">
+              <a:ext uri="{FF2B5EF4-FFF2-40B4-BE49-F238E27FC236}">
+                <a16:creationId xmlns:a16="http://schemas.microsoft.com/office/drawing/2014/main" id="{1138313B-939E-4F1A-9CD4-1422E367F118}"/>
+              </a:ext>
+            </a:extLst>
+          </p:cNvPr>
+          <p:cNvSpPr>
+            <a:spLocks xmlns:a="http://schemas.openxmlformats.org/drawingml/2006/main" noGrp="1"/>
+          </p:cNvSpPr>
+          <p:nvPr/>
+        </p:nvSpPr>
+        <p:spPr>
+          <a:xfrm xmlns:a="http://schemas.openxmlformats.org/drawingml/2006/main">
+            <a:off x="6076950" y="3857625"/>
+            <a:ext cx="5162550" cy="2143125"/>
+          </a:xfrm>
+          <a:prstGeom xmlns:a="http://schemas.openxmlformats.org/drawingml/2006/main" prst="roundRect">
+            <a:avLst>
+              <a:gd name="adj" fmla="val 3556"/>
+            </a:avLst>
+          </a:prstGeom>
+          <a:solidFill xmlns:a="http://schemas.openxmlformats.org/drawingml/2006/main">
+            <a:srgbClr val="FFFFFF"/>
+          </a:solidFill>
+          <a:ln xmlns:a="http://schemas.openxmlformats.org/drawingml/2006/main" w="9525">
+            <a:solidFill>
+              <a:srgbClr val="E4E7EC"/>
+            </a:solidFill>
+            <a:prstDash val="solid"/>
+          </a:ln>
+        </p:spPr>
+      </p:sp>
+      <p:sp>
+        <p:nvSpPr>
+          <p:cNvPr id="36" name="">
+            <a:extLst xmlns:a="http://schemas.openxmlformats.org/drawingml/2006/main">
+              <a:ext uri="{FF2B5EF4-FFF2-40B4-BE49-F238E27FC236}">
+                <a16:creationId xmlns:a16="http://schemas.microsoft.com/office/drawing/2014/main" id="{C8D76F82-6A7B-4959-B3F4-9B4722FD0508}"/>
+              </a:ext>
+            </a:extLst>
+          </p:cNvPr>
+          <p:cNvSpPr>
+            <a:spLocks xmlns:a="http://schemas.openxmlformats.org/drawingml/2006/main" noGrp="1"/>
+          </p:cNvSpPr>
+          <p:nvPr/>
+        </p:nvSpPr>
+        <p:spPr>
+          <a:xfrm xmlns:a="http://schemas.openxmlformats.org/drawingml/2006/main">
+            <a:off x="6267450" y="4029075"/>
+            <a:ext cx="361950" cy="247650"/>
           </a:xfrm>
           <a:prstGeom xmlns:a="http://schemas.openxmlformats.org/drawingml/2006/main" prst="rect">
             <a:avLst/>
@@ -6759,72 +7648,72 @@
       </p:sp>
       <p:sp>
         <p:nvSpPr>
-          <p:cNvPr id="33" name="">
-            <a:extLst xmlns:a="http://schemas.openxmlformats.org/drawingml/2006/main">
-              <a:ext uri="{FF2B5EF4-FFF2-40B4-BE49-F238E27FC236}">
-                <a16:creationId xmlns:a16="http://schemas.microsoft.com/office/drawing/2014/main" id="{8BB02F0F-0AA2-4BAE-9D22-8FCB7F446ACE}"/>
-              </a:ext>
-            </a:extLst>
-          </p:cNvPr>
-          <p:cNvSpPr>
-            <a:spLocks xmlns:a="http://schemas.openxmlformats.org/drawingml/2006/main" noGrp="1"/>
-          </p:cNvSpPr>
-          <p:nvPr/>
-        </p:nvSpPr>
-        <p:spPr>
-          <a:xfrm xmlns:a="http://schemas.openxmlformats.org/drawingml/2006/main">
-            <a:off x="1200150" y="5181600"/>
-            <a:ext cx="9982200" cy="266700"/>
-          </a:xfrm>
-          <a:prstGeom xmlns:a="http://schemas.openxmlformats.org/drawingml/2006/main" prst="rect">
-            <a:avLst/>
-          </a:prstGeom>
-          <a:noFill xmlns:a="http://schemas.openxmlformats.org/drawingml/2006/main"/>
-          <a:ln xmlns:a="http://schemas.openxmlformats.org/drawingml/2006/main" w="0">
-            <a:noFill/>
-            <a:prstDash val="solid"/>
-          </a:ln>
-        </p:spPr>
-        <p:txBody>
-          <a:bodyPr xmlns:a="http://schemas.openxmlformats.org/drawingml/2006/main"/>
-          <a:lstStyle xmlns:a="http://schemas.openxmlformats.org/drawingml/2006/main"/>
-          <a:p xmlns:a="http://schemas.openxmlformats.org/drawingml/2006/main">
-            <a:pPr>
-              <a:defRPr sz="1425" b="1">
-                <a:solidFill>
-                  <a:srgbClr val="161616"/>
-                </a:solidFill>
-              </a:defRPr>
-            </a:pPr>
-            <a:r>
-              <a:rPr sz="1425" b="1">
-                <a:solidFill>
-                  <a:srgbClr val="161616"/>
-                </a:solidFill>
-              </a:rPr>
-              <a:t>{{IT_4_TITLE}}</a:t>
-            </a:r>
-          </a:p>
-        </p:txBody>
-      </p:sp>
-      <p:sp>
-        <p:nvSpPr>
-          <p:cNvPr id="34" name="">
-            <a:extLst xmlns:a="http://schemas.openxmlformats.org/drawingml/2006/main">
-              <a:ext uri="{FF2B5EF4-FFF2-40B4-BE49-F238E27FC236}">
-                <a16:creationId xmlns:a16="http://schemas.microsoft.com/office/drawing/2014/main" id="{05566B89-8515-4ACF-B814-1E6996A5E403}"/>
-              </a:ext>
-            </a:extLst>
-          </p:cNvPr>
-          <p:cNvSpPr>
-            <a:spLocks xmlns:a="http://schemas.openxmlformats.org/drawingml/2006/main" noGrp="1"/>
-          </p:cNvSpPr>
-          <p:nvPr/>
-        </p:nvSpPr>
-        <p:spPr>
-          <a:xfrm xmlns:a="http://schemas.openxmlformats.org/drawingml/2006/main">
-            <a:off x="1200150" y="5476875"/>
-            <a:ext cx="9982200" cy="400050"/>
+          <p:cNvPr id="37" name="">
+            <a:extLst xmlns:a="http://schemas.openxmlformats.org/drawingml/2006/main">
+              <a:ext uri="{FF2B5EF4-FFF2-40B4-BE49-F238E27FC236}">
+                <a16:creationId xmlns:a16="http://schemas.microsoft.com/office/drawing/2014/main" id="{5CE69759-97F7-407C-9A4B-E110616E0A4F}"/>
+              </a:ext>
+            </a:extLst>
+          </p:cNvPr>
+          <p:cNvSpPr>
+            <a:spLocks xmlns:a="http://schemas.openxmlformats.org/drawingml/2006/main" noGrp="1"/>
+          </p:cNvSpPr>
+          <p:nvPr/>
+        </p:nvSpPr>
+        <p:spPr>
+          <a:xfrm xmlns:a="http://schemas.openxmlformats.org/drawingml/2006/main">
+            <a:off x="6686550" y="4000500"/>
+            <a:ext cx="4324350" cy="400050"/>
+          </a:xfrm>
+          <a:prstGeom xmlns:a="http://schemas.openxmlformats.org/drawingml/2006/main" prst="rect">
+            <a:avLst/>
+          </a:prstGeom>
+          <a:noFill xmlns:a="http://schemas.openxmlformats.org/drawingml/2006/main"/>
+          <a:ln xmlns:a="http://schemas.openxmlformats.org/drawingml/2006/main" w="0">
+            <a:noFill/>
+            <a:prstDash val="solid"/>
+          </a:ln>
+        </p:spPr>
+        <p:txBody>
+          <a:bodyPr xmlns:a="http://schemas.openxmlformats.org/drawingml/2006/main"/>
+          <a:lstStyle xmlns:a="http://schemas.openxmlformats.org/drawingml/2006/main"/>
+          <a:p xmlns:a="http://schemas.openxmlformats.org/drawingml/2006/main">
+            <a:pPr>
+              <a:defRPr sz="1350" b="1">
+                <a:solidFill>
+                  <a:srgbClr val="161616"/>
+                </a:solidFill>
+              </a:defRPr>
+            </a:pPr>
+            <a:r>
+              <a:rPr sz="1350" b="1">
+                <a:solidFill>
+                  <a:srgbClr val="161616"/>
+                </a:solidFill>
+              </a:rPr>
+              <a:t>{{REC_4_TITLE}}</a:t>
+            </a:r>
+          </a:p>
+        </p:txBody>
+      </p:sp>
+      <p:sp>
+        <p:nvSpPr>
+          <p:cNvPr id="38" name="">
+            <a:extLst xmlns:a="http://schemas.openxmlformats.org/drawingml/2006/main">
+              <a:ext uri="{FF2B5EF4-FFF2-40B4-BE49-F238E27FC236}">
+                <a16:creationId xmlns:a16="http://schemas.microsoft.com/office/drawing/2014/main" id="{B36BF3CB-DE81-4237-A513-5FB6E032EF02}"/>
+              </a:ext>
+            </a:extLst>
+          </p:cNvPr>
+          <p:cNvSpPr>
+            <a:spLocks xmlns:a="http://schemas.openxmlformats.org/drawingml/2006/main" noGrp="1"/>
+          </p:cNvSpPr>
+          <p:nvPr/>
+        </p:nvSpPr>
+        <p:spPr>
+          <a:xfrm xmlns:a="http://schemas.openxmlformats.org/drawingml/2006/main">
+            <a:off x="6286500" y="4476750"/>
+            <a:ext cx="4743450" cy="552450"/>
           </a:xfrm>
           <a:prstGeom xmlns:a="http://schemas.openxmlformats.org/drawingml/2006/main" prst="rect">
             <a:avLst/>
@@ -6852,52 +7741,83 @@
                   <a:srgbClr val="667085"/>
                 </a:solidFill>
               </a:rPr>
-              <a:t>{{IT_4_ACTION}}</a:t>
-            </a:r>
-          </a:p>
-        </p:txBody>
-      </p:sp>
-      <p:sp>
-        <p:nvSpPr>
-          <p:cNvPr id="35" name="">
-            <a:extLst xmlns:a="http://schemas.openxmlformats.org/drawingml/2006/main">
-              <a:ext uri="{FF2B5EF4-FFF2-40B4-BE49-F238E27FC236}">
-                <a16:creationId xmlns:a16="http://schemas.microsoft.com/office/drawing/2014/main" id="{80804563-4AFA-4651-B0F1-491242163F9D}"/>
-              </a:ext>
-            </a:extLst>
-          </p:cNvPr>
-          <p:cNvSpPr>
-            <a:spLocks xmlns:a="http://schemas.openxmlformats.org/drawingml/2006/main" noGrp="1"/>
-          </p:cNvSpPr>
-          <p:nvPr/>
-        </p:nvSpPr>
-        <p:spPr>
-          <a:xfrm xmlns:a="http://schemas.openxmlformats.org/drawingml/2006/main">
-            <a:off x="1200150" y="5943600"/>
-            <a:ext cx="742950" cy="190500"/>
-          </a:xfrm>
-          <a:prstGeom xmlns:a="http://schemas.openxmlformats.org/drawingml/2006/main" prst="rect">
-            <a:avLst/>
-          </a:prstGeom>
-          <a:noFill xmlns:a="http://schemas.openxmlformats.org/drawingml/2006/main"/>
-          <a:ln xmlns:a="http://schemas.openxmlformats.org/drawingml/2006/main" w="0">
-            <a:noFill/>
-            <a:prstDash val="solid"/>
-          </a:ln>
-        </p:spPr>
-        <p:txBody>
-          <a:bodyPr xmlns:a="http://schemas.openxmlformats.org/drawingml/2006/main"/>
-          <a:lstStyle xmlns:a="http://schemas.openxmlformats.org/drawingml/2006/main"/>
-          <a:p xmlns:a="http://schemas.openxmlformats.org/drawingml/2006/main">
-            <a:pPr>
-              <a:defRPr sz="975" b="1">
+              <a:t>{{REC_4_ACTION}}</a:t>
+            </a:r>
+          </a:p>
+        </p:txBody>
+      </p:sp>
+      <p:sp>
+        <p:nvSpPr>
+          <p:cNvPr id="39" name="">
+            <a:extLst xmlns:a="http://schemas.openxmlformats.org/drawingml/2006/main">
+              <a:ext uri="{FF2B5EF4-FFF2-40B4-BE49-F238E27FC236}">
+                <a16:creationId xmlns:a16="http://schemas.microsoft.com/office/drawing/2014/main" id="{3B53093B-6DE2-4706-8669-DB62F6662354}"/>
+              </a:ext>
+            </a:extLst>
+          </p:cNvPr>
+          <p:cNvSpPr>
+            <a:spLocks xmlns:a="http://schemas.openxmlformats.org/drawingml/2006/main" noGrp="1"/>
+          </p:cNvSpPr>
+          <p:nvPr/>
+        </p:nvSpPr>
+        <p:spPr>
+          <a:xfrm xmlns:a="http://schemas.openxmlformats.org/drawingml/2006/main">
+            <a:off x="6286500" y="5114925"/>
+            <a:ext cx="4743450" cy="9525"/>
+          </a:xfrm>
+          <a:prstGeom xmlns:a="http://schemas.openxmlformats.org/drawingml/2006/main" prst="rect">
+            <a:avLst/>
+          </a:prstGeom>
+          <a:solidFill xmlns:a="http://schemas.openxmlformats.org/drawingml/2006/main">
+            <a:srgbClr val="E4E7EC"/>
+          </a:solidFill>
+          <a:ln xmlns:a="http://schemas.openxmlformats.org/drawingml/2006/main" w="0">
+            <a:noFill/>
+            <a:prstDash val="solid"/>
+          </a:ln>
+        </p:spPr>
+      </p:sp>
+      <p:sp>
+        <p:nvSpPr>
+          <p:cNvPr id="40" name="">
+            <a:extLst xmlns:a="http://schemas.openxmlformats.org/drawingml/2006/main">
+              <a:ext uri="{FF2B5EF4-FFF2-40B4-BE49-F238E27FC236}">
+                <a16:creationId xmlns:a16="http://schemas.microsoft.com/office/drawing/2014/main" id="{E85A1433-6DDD-4965-87C5-B6959DBD2238}"/>
+              </a:ext>
+            </a:extLst>
+          </p:cNvPr>
+          <p:cNvSpPr>
+            <a:spLocks xmlns:a="http://schemas.openxmlformats.org/drawingml/2006/main" noGrp="1"/>
+          </p:cNvSpPr>
+          <p:nvPr/>
+        </p:nvSpPr>
+        <p:spPr>
+          <a:xfrm xmlns:a="http://schemas.openxmlformats.org/drawingml/2006/main">
+            <a:off x="6286500" y="5248275"/>
+            <a:ext cx="2171700" cy="171450"/>
+          </a:xfrm>
+          <a:prstGeom xmlns:a="http://schemas.openxmlformats.org/drawingml/2006/main" prst="rect">
+            <a:avLst/>
+          </a:prstGeom>
+          <a:noFill xmlns:a="http://schemas.openxmlformats.org/drawingml/2006/main"/>
+          <a:ln xmlns:a="http://schemas.openxmlformats.org/drawingml/2006/main" w="0">
+            <a:noFill/>
+            <a:prstDash val="solid"/>
+          </a:ln>
+        </p:spPr>
+        <p:txBody>
+          <a:bodyPr xmlns:a="http://schemas.openxmlformats.org/drawingml/2006/main"/>
+          <a:lstStyle xmlns:a="http://schemas.openxmlformats.org/drawingml/2006/main"/>
+          <a:p xmlns:a="http://schemas.openxmlformats.org/drawingml/2006/main">
+            <a:pPr>
+              <a:defRPr sz="900" b="1">
                 <a:solidFill>
                   <a:srgbClr val="FF6412"/>
                 </a:solidFill>
               </a:defRPr>
             </a:pPr>
             <a:r>
-              <a:rPr sz="975" b="1">
+              <a:rPr sz="900" b="1">
                 <a:solidFill>
                   <a:srgbClr val="FF6412"/>
                 </a:solidFill>
@@ -6909,22 +7829,22 @@
       </p:sp>
       <p:sp>
         <p:nvSpPr>
-          <p:cNvPr id="36" name="">
-            <a:extLst xmlns:a="http://schemas.openxmlformats.org/drawingml/2006/main">
-              <a:ext uri="{FF2B5EF4-FFF2-40B4-BE49-F238E27FC236}">
-                <a16:creationId xmlns:a16="http://schemas.microsoft.com/office/drawing/2014/main" id="{6335E42B-06D6-4F2B-9522-A1719CF2BABF}"/>
-              </a:ext>
-            </a:extLst>
-          </p:cNvPr>
-          <p:cNvSpPr>
-            <a:spLocks xmlns:a="http://schemas.openxmlformats.org/drawingml/2006/main" noGrp="1"/>
-          </p:cNvSpPr>
-          <p:nvPr/>
-        </p:nvSpPr>
-        <p:spPr>
-          <a:xfrm xmlns:a="http://schemas.openxmlformats.org/drawingml/2006/main">
-            <a:off x="1962150" y="5924550"/>
-            <a:ext cx="3810000" cy="323850"/>
+          <p:cNvPr id="41" name="">
+            <a:extLst xmlns:a="http://schemas.openxmlformats.org/drawingml/2006/main">
+              <a:ext uri="{FF2B5EF4-FFF2-40B4-BE49-F238E27FC236}">
+                <a16:creationId xmlns:a16="http://schemas.microsoft.com/office/drawing/2014/main" id="{213CA329-76BA-4A38-A33B-49A23F0F014A}"/>
+              </a:ext>
+            </a:extLst>
+          </p:cNvPr>
+          <p:cNvSpPr>
+            <a:spLocks xmlns:a="http://schemas.openxmlformats.org/drawingml/2006/main" noGrp="1"/>
+          </p:cNvSpPr>
+          <p:nvPr/>
+        </p:nvSpPr>
+        <p:spPr>
+          <a:xfrm xmlns:a="http://schemas.openxmlformats.org/drawingml/2006/main">
+            <a:off x="6286500" y="5438775"/>
+            <a:ext cx="2266950" cy="409575"/>
           </a:xfrm>
           <a:prstGeom xmlns:a="http://schemas.openxmlformats.org/drawingml/2006/main" prst="rect">
             <a:avLst/>
@@ -6952,52 +7872,52 @@
                   <a:srgbClr val="161616"/>
                 </a:solidFill>
               </a:rPr>
-              <a:t>{{IT_4_SOLUTION}}</a:t>
-            </a:r>
-          </a:p>
-        </p:txBody>
-      </p:sp>
-      <p:sp>
-        <p:nvSpPr>
-          <p:cNvPr id="37" name="">
-            <a:extLst xmlns:a="http://schemas.openxmlformats.org/drawingml/2006/main">
-              <a:ext uri="{FF2B5EF4-FFF2-40B4-BE49-F238E27FC236}">
-                <a16:creationId xmlns:a16="http://schemas.microsoft.com/office/drawing/2014/main" id="{65DAF99E-6669-4065-B41B-72826172A3A8}"/>
-              </a:ext>
-            </a:extLst>
-          </p:cNvPr>
-          <p:cNvSpPr>
-            <a:spLocks xmlns:a="http://schemas.openxmlformats.org/drawingml/2006/main" noGrp="1"/>
-          </p:cNvSpPr>
-          <p:nvPr/>
-        </p:nvSpPr>
-        <p:spPr>
-          <a:xfrm xmlns:a="http://schemas.openxmlformats.org/drawingml/2006/main">
-            <a:off x="6019800" y="5943600"/>
-            <a:ext cx="1104900" cy="190500"/>
-          </a:xfrm>
-          <a:prstGeom xmlns:a="http://schemas.openxmlformats.org/drawingml/2006/main" prst="rect">
-            <a:avLst/>
-          </a:prstGeom>
-          <a:noFill xmlns:a="http://schemas.openxmlformats.org/drawingml/2006/main"/>
-          <a:ln xmlns:a="http://schemas.openxmlformats.org/drawingml/2006/main" w="0">
-            <a:noFill/>
-            <a:prstDash val="solid"/>
-          </a:ln>
-        </p:spPr>
-        <p:txBody>
-          <a:bodyPr xmlns:a="http://schemas.openxmlformats.org/drawingml/2006/main"/>
-          <a:lstStyle xmlns:a="http://schemas.openxmlformats.org/drawingml/2006/main"/>
-          <a:p xmlns:a="http://schemas.openxmlformats.org/drawingml/2006/main">
-            <a:pPr>
-              <a:defRPr sz="975" b="1">
+              <a:t>{{REC_4_SOLUTION}}</a:t>
+            </a:r>
+          </a:p>
+        </p:txBody>
+      </p:sp>
+      <p:sp>
+        <p:nvSpPr>
+          <p:cNvPr id="42" name="">
+            <a:extLst xmlns:a="http://schemas.openxmlformats.org/drawingml/2006/main">
+              <a:ext uri="{FF2B5EF4-FFF2-40B4-BE49-F238E27FC236}">
+                <a16:creationId xmlns:a16="http://schemas.microsoft.com/office/drawing/2014/main" id="{CD36DEA6-F0C0-405F-A5B3-796E44E2DCF2}"/>
+              </a:ext>
+            </a:extLst>
+          </p:cNvPr>
+          <p:cNvSpPr>
+            <a:spLocks xmlns:a="http://schemas.openxmlformats.org/drawingml/2006/main" noGrp="1"/>
+          </p:cNvSpPr>
+          <p:nvPr/>
+        </p:nvSpPr>
+        <p:spPr>
+          <a:xfrm xmlns:a="http://schemas.openxmlformats.org/drawingml/2006/main">
+            <a:off x="8743950" y="5248275"/>
+            <a:ext cx="2266950" cy="171450"/>
+          </a:xfrm>
+          <a:prstGeom xmlns:a="http://schemas.openxmlformats.org/drawingml/2006/main" prst="rect">
+            <a:avLst/>
+          </a:prstGeom>
+          <a:noFill xmlns:a="http://schemas.openxmlformats.org/drawingml/2006/main"/>
+          <a:ln xmlns:a="http://schemas.openxmlformats.org/drawingml/2006/main" w="0">
+            <a:noFill/>
+            <a:prstDash val="solid"/>
+          </a:ln>
+        </p:spPr>
+        <p:txBody>
+          <a:bodyPr xmlns:a="http://schemas.openxmlformats.org/drawingml/2006/main"/>
+          <a:lstStyle xmlns:a="http://schemas.openxmlformats.org/drawingml/2006/main"/>
+          <a:p xmlns:a="http://schemas.openxmlformats.org/drawingml/2006/main">
+            <a:pPr>
+              <a:defRPr sz="900" b="1">
                 <a:solidFill>
                   <a:srgbClr val="FF6412"/>
                 </a:solidFill>
               </a:defRPr>
             </a:pPr>
             <a:r>
-              <a:rPr sz="975" b="1">
+              <a:rPr sz="900" b="1">
                 <a:solidFill>
                   <a:srgbClr val="FF6412"/>
                 </a:solidFill>
@@ -7009,22 +7929,22 @@
       </p:sp>
       <p:sp>
         <p:nvSpPr>
-          <p:cNvPr id="38" name="">
-            <a:extLst xmlns:a="http://schemas.openxmlformats.org/drawingml/2006/main">
-              <a:ext uri="{FF2B5EF4-FFF2-40B4-BE49-F238E27FC236}">
-                <a16:creationId xmlns:a16="http://schemas.microsoft.com/office/drawing/2014/main" id="{BB578F08-068E-4DF4-A27A-8065A34FC295}"/>
-              </a:ext>
-            </a:extLst>
-          </p:cNvPr>
-          <p:cNvSpPr>
-            <a:spLocks xmlns:a="http://schemas.openxmlformats.org/drawingml/2006/main" noGrp="1"/>
-          </p:cNvSpPr>
-          <p:nvPr/>
-        </p:nvSpPr>
-        <p:spPr>
-          <a:xfrm xmlns:a="http://schemas.openxmlformats.org/drawingml/2006/main">
-            <a:off x="7181850" y="5924550"/>
-            <a:ext cx="4000500" cy="323850"/>
+          <p:cNvPr id="43" name="">
+            <a:extLst xmlns:a="http://schemas.openxmlformats.org/drawingml/2006/main">
+              <a:ext uri="{FF2B5EF4-FFF2-40B4-BE49-F238E27FC236}">
+                <a16:creationId xmlns:a16="http://schemas.microsoft.com/office/drawing/2014/main" id="{094155C9-5E7B-41B6-AF62-C19F8DE440F6}"/>
+              </a:ext>
+            </a:extLst>
+          </p:cNvPr>
+          <p:cNvSpPr>
+            <a:spLocks xmlns:a="http://schemas.openxmlformats.org/drawingml/2006/main" noGrp="1"/>
+          </p:cNvSpPr>
+          <p:nvPr/>
+        </p:nvSpPr>
+        <p:spPr>
+          <a:xfrm xmlns:a="http://schemas.openxmlformats.org/drawingml/2006/main">
+            <a:off x="8743950" y="5438775"/>
+            <a:ext cx="2266950" cy="409575"/>
           </a:xfrm>
           <a:prstGeom xmlns:a="http://schemas.openxmlformats.org/drawingml/2006/main" prst="rect">
             <a:avLst/>
@@ -7052,7 +7972,7 @@
                   <a:srgbClr val="161616"/>
                 </a:solidFill>
               </a:rPr>
-              <a:t>{{IT_4_VENDORS}}</a:t>
+              <a:t>{{REC_4_VENDORS}}</a:t>
             </a:r>
           </a:p>
         </p:txBody>
@@ -7060,7 +7980,7 @@
     </p:spTree>
     <p:extLst>
       <p:ext uri="{BB962C8B-B14F-4D97-AF65-F5344CB8AC3E}">
-        <p14:creationId xmlns:p14="http://schemas.microsoft.com/office/powerpoint/2010/main" val="459432121"/>
+        <p14:creationId xmlns:p14="http://schemas.microsoft.com/office/powerpoint/2010/main" val="752769714"/>
       </p:ext>
     </p:extLst>
   </p:cSld>
@@ -7091,7 +8011,7 @@
           <p:cNvPr id="1" name="">
             <a:extLst xmlns:a="http://schemas.openxmlformats.org/drawingml/2006/main">
               <a:ext uri="{FF2B5EF4-FFF2-40B4-BE49-F238E27FC236}">
-                <a16:creationId xmlns:a16="http://schemas.microsoft.com/office/drawing/2014/main" id="{E79CE56B-94BA-4766-A488-DFF886D39725}"/>
+                <a16:creationId xmlns:a16="http://schemas.microsoft.com/office/drawing/2014/main" id="{7E363A23-1DF3-4820-99CD-C7C52A6AF9DB}"/>
               </a:ext>
             </a:extLst>
           </p:cNvPr>
@@ -7119,14 +8039,14 @@
       </p:sp>
       <p:pic>
         <p:nvPicPr>
-          <p:cNvPr id="40" name=""/>
+          <p:cNvPr id="45" name=""/>
           <p:cNvPicPr>
             <a:picLocks xmlns:a="http://schemas.openxmlformats.org/drawingml/2006/main" noChangeAspect="1"/>
           </p:cNvPicPr>
           <p:nvPr/>
         </p:nvPicPr>
         <p:blipFill>
-          <a:blip xmlns:r="http://schemas.openxmlformats.org/officeDocument/2006/relationships" xmlns:a="http://schemas.openxmlformats.org/drawingml/2006/main" r:embed="R3fa5491773bd4a67"/>
+          <a:blip xmlns:r="http://schemas.openxmlformats.org/officeDocument/2006/relationships" xmlns:a="http://schemas.openxmlformats.org/drawingml/2006/main" r:embed="R92c1e96498b24f91"/>
           <a:stretch xmlns:a="http://schemas.openxmlformats.org/drawingml/2006/main"/>
         </p:blipFill>
         <p:spPr>
@@ -7144,7 +8064,7 @@
           <p:cNvPr id="3" name="">
             <a:extLst xmlns:a="http://schemas.openxmlformats.org/drawingml/2006/main">
               <a:ext uri="{FF2B5EF4-FFF2-40B4-BE49-F238E27FC236}">
-                <a16:creationId xmlns:a16="http://schemas.microsoft.com/office/drawing/2014/main" id="{8B22BCD2-1D3E-4CB7-A2FA-22DA2FD23540}"/>
+                <a16:creationId xmlns:a16="http://schemas.microsoft.com/office/drawing/2014/main" id="{6B2A66EE-D90A-49DB-9D37-A259B17F2C28}"/>
               </a:ext>
             </a:extLst>
           </p:cNvPr>
@@ -7184,7 +8104,7 @@
                   <a:srgbClr val="161616"/>
                 </a:solidFill>
               </a:rPr>
-              <a:t>ИБ-рекомендации снижают наиболее вероятные риски</a:t>
+              <a:t>Рекомендации: следующий этап</a:t>
             </a:r>
           </a:p>
         </p:txBody>
@@ -7194,7 +8114,7 @@
           <p:cNvPr id="4" name="">
             <a:extLst xmlns:a="http://schemas.openxmlformats.org/drawingml/2006/main">
               <a:ext uri="{FF2B5EF4-FFF2-40B4-BE49-F238E27FC236}">
-                <a16:creationId xmlns:a16="http://schemas.microsoft.com/office/drawing/2014/main" id="{CB685BA6-8F8B-4977-B712-0A33746C61F8}"/>
+                <a16:creationId xmlns:a16="http://schemas.microsoft.com/office/drawing/2014/main" id="{00C19D61-8CA6-43F6-A885-DE3162B86E7E}"/>
               </a:ext>
             </a:extLst>
           </p:cNvPr>
@@ -7227,7 +8147,7 @@
           <p:cNvPr id="5" name="">
             <a:extLst xmlns:a="http://schemas.openxmlformats.org/drawingml/2006/main">
               <a:ext uri="{FF2B5EF4-FFF2-40B4-BE49-F238E27FC236}">
-                <a16:creationId xmlns:a16="http://schemas.microsoft.com/office/drawing/2014/main" id="{D21D6E67-9146-485C-8373-1EED69B00AD8}"/>
+                <a16:creationId xmlns:a16="http://schemas.microsoft.com/office/drawing/2014/main" id="{C08BB227-A69E-48CB-8D78-B26E9E0A13C9}"/>
               </a:ext>
             </a:extLst>
           </p:cNvPr>
@@ -7258,7 +8178,7 @@
           <p:cNvPr id="6" name="">
             <a:extLst xmlns:a="http://schemas.openxmlformats.org/drawingml/2006/main">
               <a:ext uri="{FF2B5EF4-FFF2-40B4-BE49-F238E27FC236}">
-                <a16:creationId xmlns:a16="http://schemas.microsoft.com/office/drawing/2014/main" id="{D04C6D50-076B-4433-974C-FC0CA460CF93}"/>
+                <a16:creationId xmlns:a16="http://schemas.microsoft.com/office/drawing/2014/main" id="{8D326491-58FF-4247-9C4D-F61356AF9CD9}"/>
               </a:ext>
             </a:extLst>
           </p:cNvPr>
@@ -7308,7 +8228,7 @@
           <p:cNvPr id="7" name="">
             <a:extLst xmlns:a="http://schemas.openxmlformats.org/drawingml/2006/main">
               <a:ext uri="{FF2B5EF4-FFF2-40B4-BE49-F238E27FC236}">
-                <a16:creationId xmlns:a16="http://schemas.microsoft.com/office/drawing/2014/main" id="{97A3F18C-62C6-4B46-B27B-B8DE1868B3B4}"/>
+                <a16:creationId xmlns:a16="http://schemas.microsoft.com/office/drawing/2014/main" id="{5087260D-9AF4-4292-82AF-EBB7A0AF9DBF}"/>
               </a:ext>
             </a:extLst>
           </p:cNvPr>
@@ -7358,19 +8278,54 @@
           <p:cNvPr id="8" name="">
             <a:extLst xmlns:a="http://schemas.openxmlformats.org/drawingml/2006/main">
               <a:ext uri="{FF2B5EF4-FFF2-40B4-BE49-F238E27FC236}">
-                <a16:creationId xmlns:a16="http://schemas.microsoft.com/office/drawing/2014/main" id="{923E90F4-08C1-4FCE-87C1-34E0D6A3F681}"/>
-              </a:ext>
-            </a:extLst>
-          </p:cNvPr>
-          <p:cNvSpPr>
-            <a:spLocks xmlns:a="http://schemas.openxmlformats.org/drawingml/2006/main" noGrp="1"/>
-          </p:cNvSpPr>
-          <p:nvPr/>
-        </p:nvSpPr>
-        <p:spPr>
-          <a:xfrm xmlns:a="http://schemas.openxmlformats.org/drawingml/2006/main">
-            <a:off x="609600" y="1466850"/>
-            <a:ext cx="457200" cy="266700"/>
+                <a16:creationId xmlns:a16="http://schemas.microsoft.com/office/drawing/2014/main" id="{514F8F33-F3EE-4E83-A12D-0F78022E663B}"/>
+              </a:ext>
+            </a:extLst>
+          </p:cNvPr>
+          <p:cNvSpPr>
+            <a:spLocks xmlns:a="http://schemas.openxmlformats.org/drawingml/2006/main" noGrp="1"/>
+          </p:cNvSpPr>
+          <p:nvPr/>
+        </p:nvSpPr>
+        <p:spPr>
+          <a:xfrm xmlns:a="http://schemas.openxmlformats.org/drawingml/2006/main">
+            <a:off x="552450" y="1428750"/>
+            <a:ext cx="5162550" cy="2143125"/>
+          </a:xfrm>
+          <a:prstGeom xmlns:a="http://schemas.openxmlformats.org/drawingml/2006/main" prst="roundRect">
+            <a:avLst>
+              <a:gd name="adj" fmla="val 3556"/>
+            </a:avLst>
+          </a:prstGeom>
+          <a:solidFill xmlns:a="http://schemas.openxmlformats.org/drawingml/2006/main">
+            <a:srgbClr val="FFFFFF"/>
+          </a:solidFill>
+          <a:ln xmlns:a="http://schemas.openxmlformats.org/drawingml/2006/main" w="9525">
+            <a:solidFill>
+              <a:srgbClr val="E4E7EC"/>
+            </a:solidFill>
+            <a:prstDash val="solid"/>
+          </a:ln>
+        </p:spPr>
+      </p:sp>
+      <p:sp>
+        <p:nvSpPr>
+          <p:cNvPr id="9" name="">
+            <a:extLst xmlns:a="http://schemas.openxmlformats.org/drawingml/2006/main">
+              <a:ext uri="{FF2B5EF4-FFF2-40B4-BE49-F238E27FC236}">
+                <a16:creationId xmlns:a16="http://schemas.microsoft.com/office/drawing/2014/main" id="{F133AD31-05CC-46F0-93C1-BE9149BF0BD6}"/>
+              </a:ext>
+            </a:extLst>
+          </p:cNvPr>
+          <p:cNvSpPr>
+            <a:spLocks xmlns:a="http://schemas.openxmlformats.org/drawingml/2006/main" noGrp="1"/>
+          </p:cNvSpPr>
+          <p:nvPr/>
+        </p:nvSpPr>
+        <p:spPr>
+          <a:xfrm xmlns:a="http://schemas.openxmlformats.org/drawingml/2006/main">
+            <a:off x="742950" y="1600200"/>
+            <a:ext cx="361950" cy="247650"/>
           </a:xfrm>
           <a:prstGeom xmlns:a="http://schemas.openxmlformats.org/drawingml/2006/main" prst="rect">
             <a:avLst/>
@@ -7398,57 +8353,7 @@
                   <a:srgbClr val="FF6412"/>
                 </a:solidFill>
               </a:rPr>
-              <a:t>01</a:t>
-            </a:r>
-          </a:p>
-        </p:txBody>
-      </p:sp>
-      <p:sp>
-        <p:nvSpPr>
-          <p:cNvPr id="9" name="">
-            <a:extLst xmlns:a="http://schemas.openxmlformats.org/drawingml/2006/main">
-              <a:ext uri="{FF2B5EF4-FFF2-40B4-BE49-F238E27FC236}">
-                <a16:creationId xmlns:a16="http://schemas.microsoft.com/office/drawing/2014/main" id="{A5FEDCE2-081C-425F-8340-4B2141171DCA}"/>
-              </a:ext>
-            </a:extLst>
-          </p:cNvPr>
-          <p:cNvSpPr>
-            <a:spLocks xmlns:a="http://schemas.openxmlformats.org/drawingml/2006/main" noGrp="1"/>
-          </p:cNvSpPr>
-          <p:nvPr/>
-        </p:nvSpPr>
-        <p:spPr>
-          <a:xfrm xmlns:a="http://schemas.openxmlformats.org/drawingml/2006/main">
-            <a:off x="1200150" y="1409700"/>
-            <a:ext cx="9982200" cy="266700"/>
-          </a:xfrm>
-          <a:prstGeom xmlns:a="http://schemas.openxmlformats.org/drawingml/2006/main" prst="rect">
-            <a:avLst/>
-          </a:prstGeom>
-          <a:noFill xmlns:a="http://schemas.openxmlformats.org/drawingml/2006/main"/>
-          <a:ln xmlns:a="http://schemas.openxmlformats.org/drawingml/2006/main" w="0">
-            <a:noFill/>
-            <a:prstDash val="solid"/>
-          </a:ln>
-        </p:spPr>
-        <p:txBody>
-          <a:bodyPr xmlns:a="http://schemas.openxmlformats.org/drawingml/2006/main"/>
-          <a:lstStyle xmlns:a="http://schemas.openxmlformats.org/drawingml/2006/main"/>
-          <a:p xmlns:a="http://schemas.openxmlformats.org/drawingml/2006/main">
-            <a:pPr>
-              <a:defRPr sz="1425" b="1">
-                <a:solidFill>
-                  <a:srgbClr val="161616"/>
-                </a:solidFill>
-              </a:defRPr>
-            </a:pPr>
-            <a:r>
-              <a:rPr sz="1425" b="1">
-                <a:solidFill>
-                  <a:srgbClr val="161616"/>
-                </a:solidFill>
-              </a:rPr>
-              <a:t>{{SEC_1_TITLE}}</a:t>
+              <a:t>05</a:t>
             </a:r>
           </a:p>
         </p:txBody>
@@ -7458,19 +8363,69 @@
           <p:cNvPr id="10" name="">
             <a:extLst xmlns:a="http://schemas.openxmlformats.org/drawingml/2006/main">
               <a:ext uri="{FF2B5EF4-FFF2-40B4-BE49-F238E27FC236}">
-                <a16:creationId xmlns:a16="http://schemas.microsoft.com/office/drawing/2014/main" id="{CD5D2D07-D6B8-415A-A04A-483AEA3CE17F}"/>
-              </a:ext>
-            </a:extLst>
-          </p:cNvPr>
-          <p:cNvSpPr>
-            <a:spLocks xmlns:a="http://schemas.openxmlformats.org/drawingml/2006/main" noGrp="1"/>
-          </p:cNvSpPr>
-          <p:nvPr/>
-        </p:nvSpPr>
-        <p:spPr>
-          <a:xfrm xmlns:a="http://schemas.openxmlformats.org/drawingml/2006/main">
-            <a:off x="1200150" y="1704975"/>
-            <a:ext cx="9982200" cy="400050"/>
+                <a16:creationId xmlns:a16="http://schemas.microsoft.com/office/drawing/2014/main" id="{D5030796-74B5-40B1-A211-2E726327FA18}"/>
+              </a:ext>
+            </a:extLst>
+          </p:cNvPr>
+          <p:cNvSpPr>
+            <a:spLocks xmlns:a="http://schemas.openxmlformats.org/drawingml/2006/main" noGrp="1"/>
+          </p:cNvSpPr>
+          <p:nvPr/>
+        </p:nvSpPr>
+        <p:spPr>
+          <a:xfrm xmlns:a="http://schemas.openxmlformats.org/drawingml/2006/main">
+            <a:off x="1162050" y="1571625"/>
+            <a:ext cx="4324350" cy="400050"/>
+          </a:xfrm>
+          <a:prstGeom xmlns:a="http://schemas.openxmlformats.org/drawingml/2006/main" prst="rect">
+            <a:avLst/>
+          </a:prstGeom>
+          <a:noFill xmlns:a="http://schemas.openxmlformats.org/drawingml/2006/main"/>
+          <a:ln xmlns:a="http://schemas.openxmlformats.org/drawingml/2006/main" w="0">
+            <a:noFill/>
+            <a:prstDash val="solid"/>
+          </a:ln>
+        </p:spPr>
+        <p:txBody>
+          <a:bodyPr xmlns:a="http://schemas.openxmlformats.org/drawingml/2006/main"/>
+          <a:lstStyle xmlns:a="http://schemas.openxmlformats.org/drawingml/2006/main"/>
+          <a:p xmlns:a="http://schemas.openxmlformats.org/drawingml/2006/main">
+            <a:pPr>
+              <a:defRPr sz="1350" b="1">
+                <a:solidFill>
+                  <a:srgbClr val="161616"/>
+                </a:solidFill>
+              </a:defRPr>
+            </a:pPr>
+            <a:r>
+              <a:rPr sz="1350" b="1">
+                <a:solidFill>
+                  <a:srgbClr val="161616"/>
+                </a:solidFill>
+              </a:rPr>
+              <a:t>{{REC_5_TITLE}}</a:t>
+            </a:r>
+          </a:p>
+        </p:txBody>
+      </p:sp>
+      <p:sp>
+        <p:nvSpPr>
+          <p:cNvPr id="11" name="">
+            <a:extLst xmlns:a="http://schemas.openxmlformats.org/drawingml/2006/main">
+              <a:ext uri="{FF2B5EF4-FFF2-40B4-BE49-F238E27FC236}">
+                <a16:creationId xmlns:a16="http://schemas.microsoft.com/office/drawing/2014/main" id="{A3574A02-4F4F-4225-ABBA-9324F1B8A66C}"/>
+              </a:ext>
+            </a:extLst>
+          </p:cNvPr>
+          <p:cNvSpPr>
+            <a:spLocks xmlns:a="http://schemas.openxmlformats.org/drawingml/2006/main" noGrp="1"/>
+          </p:cNvSpPr>
+          <p:nvPr/>
+        </p:nvSpPr>
+        <p:spPr>
+          <a:xfrm xmlns:a="http://schemas.openxmlformats.org/drawingml/2006/main">
+            <a:off x="762000" y="2047875"/>
+            <a:ext cx="4743450" cy="552450"/>
           </a:xfrm>
           <a:prstGeom xmlns:a="http://schemas.openxmlformats.org/drawingml/2006/main" prst="rect">
             <a:avLst/>
@@ -7498,57 +8453,7 @@
                   <a:srgbClr val="667085"/>
                 </a:solidFill>
               </a:rPr>
-              <a:t>{{SEC_1_ACTION}}</a:t>
-            </a:r>
-          </a:p>
-        </p:txBody>
-      </p:sp>
-      <p:sp>
-        <p:nvSpPr>
-          <p:cNvPr id="11" name="">
-            <a:extLst xmlns:a="http://schemas.openxmlformats.org/drawingml/2006/main">
-              <a:ext uri="{FF2B5EF4-FFF2-40B4-BE49-F238E27FC236}">
-                <a16:creationId xmlns:a16="http://schemas.microsoft.com/office/drawing/2014/main" id="{5DADDD60-F718-4A3C-867B-1B752CE41FB7}"/>
-              </a:ext>
-            </a:extLst>
-          </p:cNvPr>
-          <p:cNvSpPr>
-            <a:spLocks xmlns:a="http://schemas.openxmlformats.org/drawingml/2006/main" noGrp="1"/>
-          </p:cNvSpPr>
-          <p:nvPr/>
-        </p:nvSpPr>
-        <p:spPr>
-          <a:xfrm xmlns:a="http://schemas.openxmlformats.org/drawingml/2006/main">
-            <a:off x="1200150" y="2171700"/>
-            <a:ext cx="742950" cy="190500"/>
-          </a:xfrm>
-          <a:prstGeom xmlns:a="http://schemas.openxmlformats.org/drawingml/2006/main" prst="rect">
-            <a:avLst/>
-          </a:prstGeom>
-          <a:noFill xmlns:a="http://schemas.openxmlformats.org/drawingml/2006/main"/>
-          <a:ln xmlns:a="http://schemas.openxmlformats.org/drawingml/2006/main" w="0">
-            <a:noFill/>
-            <a:prstDash val="solid"/>
-          </a:ln>
-        </p:spPr>
-        <p:txBody>
-          <a:bodyPr xmlns:a="http://schemas.openxmlformats.org/drawingml/2006/main"/>
-          <a:lstStyle xmlns:a="http://schemas.openxmlformats.org/drawingml/2006/main"/>
-          <a:p xmlns:a="http://schemas.openxmlformats.org/drawingml/2006/main">
-            <a:pPr>
-              <a:defRPr sz="975" b="1">
-                <a:solidFill>
-                  <a:srgbClr val="FF6412"/>
-                </a:solidFill>
-              </a:defRPr>
-            </a:pPr>
-            <a:r>
-              <a:rPr sz="975" b="1">
-                <a:solidFill>
-                  <a:srgbClr val="FF6412"/>
-                </a:solidFill>
-              </a:rPr>
-              <a:t>Решение</a:t>
+              <a:t>{{REC_5_ACTION}}</a:t>
             </a:r>
           </a:p>
         </p:txBody>
@@ -7558,169 +8463,19 @@
           <p:cNvPr id="12" name="">
             <a:extLst xmlns:a="http://schemas.openxmlformats.org/drawingml/2006/main">
               <a:ext uri="{FF2B5EF4-FFF2-40B4-BE49-F238E27FC236}">
-                <a16:creationId xmlns:a16="http://schemas.microsoft.com/office/drawing/2014/main" id="{ACD4C989-DDF7-4B0C-AFA6-12F55FEAC833}"/>
-              </a:ext>
-            </a:extLst>
-          </p:cNvPr>
-          <p:cNvSpPr>
-            <a:spLocks xmlns:a="http://schemas.openxmlformats.org/drawingml/2006/main" noGrp="1"/>
-          </p:cNvSpPr>
-          <p:nvPr/>
-        </p:nvSpPr>
-        <p:spPr>
-          <a:xfrm xmlns:a="http://schemas.openxmlformats.org/drawingml/2006/main">
-            <a:off x="1962150" y="2152650"/>
-            <a:ext cx="3810000" cy="323850"/>
-          </a:xfrm>
-          <a:prstGeom xmlns:a="http://schemas.openxmlformats.org/drawingml/2006/main" prst="rect">
-            <a:avLst/>
-          </a:prstGeom>
-          <a:noFill xmlns:a="http://schemas.openxmlformats.org/drawingml/2006/main"/>
-          <a:ln xmlns:a="http://schemas.openxmlformats.org/drawingml/2006/main" w="0">
-            <a:noFill/>
-            <a:prstDash val="solid"/>
-          </a:ln>
-        </p:spPr>
-        <p:txBody>
-          <a:bodyPr xmlns:a="http://schemas.openxmlformats.org/drawingml/2006/main"/>
-          <a:lstStyle xmlns:a="http://schemas.openxmlformats.org/drawingml/2006/main"/>
-          <a:p xmlns:a="http://schemas.openxmlformats.org/drawingml/2006/main">
-            <a:pPr>
-              <a:defRPr sz="1050" b="1">
-                <a:solidFill>
-                  <a:srgbClr val="161616"/>
-                </a:solidFill>
-              </a:defRPr>
-            </a:pPr>
-            <a:r>
-              <a:rPr sz="1050" b="1">
-                <a:solidFill>
-                  <a:srgbClr val="161616"/>
-                </a:solidFill>
-              </a:rPr>
-              <a:t>{{SEC_1_SOLUTION}}</a:t>
-            </a:r>
-          </a:p>
-        </p:txBody>
-      </p:sp>
-      <p:sp>
-        <p:nvSpPr>
-          <p:cNvPr id="13" name="">
-            <a:extLst xmlns:a="http://schemas.openxmlformats.org/drawingml/2006/main">
-              <a:ext uri="{FF2B5EF4-FFF2-40B4-BE49-F238E27FC236}">
-                <a16:creationId xmlns:a16="http://schemas.microsoft.com/office/drawing/2014/main" id="{A54B9C29-867B-4ECF-9ACC-703DCB6601A8}"/>
-              </a:ext>
-            </a:extLst>
-          </p:cNvPr>
-          <p:cNvSpPr>
-            <a:spLocks xmlns:a="http://schemas.openxmlformats.org/drawingml/2006/main" noGrp="1"/>
-          </p:cNvSpPr>
-          <p:nvPr/>
-        </p:nvSpPr>
-        <p:spPr>
-          <a:xfrm xmlns:a="http://schemas.openxmlformats.org/drawingml/2006/main">
-            <a:off x="6019800" y="2171700"/>
-            <a:ext cx="1104900" cy="190500"/>
-          </a:xfrm>
-          <a:prstGeom xmlns:a="http://schemas.openxmlformats.org/drawingml/2006/main" prst="rect">
-            <a:avLst/>
-          </a:prstGeom>
-          <a:noFill xmlns:a="http://schemas.openxmlformats.org/drawingml/2006/main"/>
-          <a:ln xmlns:a="http://schemas.openxmlformats.org/drawingml/2006/main" w="0">
-            <a:noFill/>
-            <a:prstDash val="solid"/>
-          </a:ln>
-        </p:spPr>
-        <p:txBody>
-          <a:bodyPr xmlns:a="http://schemas.openxmlformats.org/drawingml/2006/main"/>
-          <a:lstStyle xmlns:a="http://schemas.openxmlformats.org/drawingml/2006/main"/>
-          <a:p xmlns:a="http://schemas.openxmlformats.org/drawingml/2006/main">
-            <a:pPr>
-              <a:defRPr sz="975" b="1">
-                <a:solidFill>
-                  <a:srgbClr val="FF6412"/>
-                </a:solidFill>
-              </a:defRPr>
-            </a:pPr>
-            <a:r>
-              <a:rPr sz="975" b="1">
-                <a:solidFill>
-                  <a:srgbClr val="FF6412"/>
-                </a:solidFill>
-              </a:rPr>
-              <a:t>Производители</a:t>
-            </a:r>
-          </a:p>
-        </p:txBody>
-      </p:sp>
-      <p:sp>
-        <p:nvSpPr>
-          <p:cNvPr id="14" name="">
-            <a:extLst xmlns:a="http://schemas.openxmlformats.org/drawingml/2006/main">
-              <a:ext uri="{FF2B5EF4-FFF2-40B4-BE49-F238E27FC236}">
-                <a16:creationId xmlns:a16="http://schemas.microsoft.com/office/drawing/2014/main" id="{197CB7AE-76EA-47FC-9B5A-06EF00D02E81}"/>
-              </a:ext>
-            </a:extLst>
-          </p:cNvPr>
-          <p:cNvSpPr>
-            <a:spLocks xmlns:a="http://schemas.openxmlformats.org/drawingml/2006/main" noGrp="1"/>
-          </p:cNvSpPr>
-          <p:nvPr/>
-        </p:nvSpPr>
-        <p:spPr>
-          <a:xfrm xmlns:a="http://schemas.openxmlformats.org/drawingml/2006/main">
-            <a:off x="7181850" y="2152650"/>
-            <a:ext cx="4000500" cy="323850"/>
-          </a:xfrm>
-          <a:prstGeom xmlns:a="http://schemas.openxmlformats.org/drawingml/2006/main" prst="rect">
-            <a:avLst/>
-          </a:prstGeom>
-          <a:noFill xmlns:a="http://schemas.openxmlformats.org/drawingml/2006/main"/>
-          <a:ln xmlns:a="http://schemas.openxmlformats.org/drawingml/2006/main" w="0">
-            <a:noFill/>
-            <a:prstDash val="solid"/>
-          </a:ln>
-        </p:spPr>
-        <p:txBody>
-          <a:bodyPr xmlns:a="http://schemas.openxmlformats.org/drawingml/2006/main"/>
-          <a:lstStyle xmlns:a="http://schemas.openxmlformats.org/drawingml/2006/main"/>
-          <a:p xmlns:a="http://schemas.openxmlformats.org/drawingml/2006/main">
-            <a:pPr>
-              <a:defRPr sz="1050" b="1">
-                <a:solidFill>
-                  <a:srgbClr val="161616"/>
-                </a:solidFill>
-              </a:defRPr>
-            </a:pPr>
-            <a:r>
-              <a:rPr sz="1050" b="1">
-                <a:solidFill>
-                  <a:srgbClr val="161616"/>
-                </a:solidFill>
-              </a:rPr>
-              <a:t>{{SEC_1_VENDORS}}</a:t>
-            </a:r>
-          </a:p>
-        </p:txBody>
-      </p:sp>
-      <p:sp>
-        <p:nvSpPr>
-          <p:cNvPr id="15" name="">
-            <a:extLst xmlns:a="http://schemas.openxmlformats.org/drawingml/2006/main">
-              <a:ext uri="{FF2B5EF4-FFF2-40B4-BE49-F238E27FC236}">
-                <a16:creationId xmlns:a16="http://schemas.microsoft.com/office/drawing/2014/main" id="{068D9DD1-051B-471A-963E-882E1A969B9F}"/>
-              </a:ext>
-            </a:extLst>
-          </p:cNvPr>
-          <p:cNvSpPr>
-            <a:spLocks xmlns:a="http://schemas.openxmlformats.org/drawingml/2006/main" noGrp="1"/>
-          </p:cNvSpPr>
-          <p:nvPr/>
-        </p:nvSpPr>
-        <p:spPr>
-          <a:xfrm xmlns:a="http://schemas.openxmlformats.org/drawingml/2006/main">
-            <a:off x="1200150" y="2552700"/>
-            <a:ext cx="9982200" cy="9525"/>
+                <a16:creationId xmlns:a16="http://schemas.microsoft.com/office/drawing/2014/main" id="{00E618BE-C6F6-4542-8C32-AC80D32E8E0D}"/>
+              </a:ext>
+            </a:extLst>
+          </p:cNvPr>
+          <p:cNvSpPr>
+            <a:spLocks xmlns:a="http://schemas.openxmlformats.org/drawingml/2006/main" noGrp="1"/>
+          </p:cNvSpPr>
+          <p:nvPr/>
+        </p:nvSpPr>
+        <p:spPr>
+          <a:xfrm xmlns:a="http://schemas.openxmlformats.org/drawingml/2006/main">
+            <a:off x="762000" y="2686050"/>
+            <a:ext cx="4743450" cy="9525"/>
           </a:xfrm>
           <a:prstGeom xmlns:a="http://schemas.openxmlformats.org/drawingml/2006/main" prst="rect">
             <a:avLst/>
@@ -7736,22 +8491,257 @@
       </p:sp>
       <p:sp>
         <p:nvSpPr>
+          <p:cNvPr id="13" name="">
+            <a:extLst xmlns:a="http://schemas.openxmlformats.org/drawingml/2006/main">
+              <a:ext uri="{FF2B5EF4-FFF2-40B4-BE49-F238E27FC236}">
+                <a16:creationId xmlns:a16="http://schemas.microsoft.com/office/drawing/2014/main" id="{5EE4E0DE-521B-412E-9EA7-37A5FDDBFF0F}"/>
+              </a:ext>
+            </a:extLst>
+          </p:cNvPr>
+          <p:cNvSpPr>
+            <a:spLocks xmlns:a="http://schemas.openxmlformats.org/drawingml/2006/main" noGrp="1"/>
+          </p:cNvSpPr>
+          <p:nvPr/>
+        </p:nvSpPr>
+        <p:spPr>
+          <a:xfrm xmlns:a="http://schemas.openxmlformats.org/drawingml/2006/main">
+            <a:off x="762000" y="2819400"/>
+            <a:ext cx="2171700" cy="171450"/>
+          </a:xfrm>
+          <a:prstGeom xmlns:a="http://schemas.openxmlformats.org/drawingml/2006/main" prst="rect">
+            <a:avLst/>
+          </a:prstGeom>
+          <a:noFill xmlns:a="http://schemas.openxmlformats.org/drawingml/2006/main"/>
+          <a:ln xmlns:a="http://schemas.openxmlformats.org/drawingml/2006/main" w="0">
+            <a:noFill/>
+            <a:prstDash val="solid"/>
+          </a:ln>
+        </p:spPr>
+        <p:txBody>
+          <a:bodyPr xmlns:a="http://schemas.openxmlformats.org/drawingml/2006/main"/>
+          <a:lstStyle xmlns:a="http://schemas.openxmlformats.org/drawingml/2006/main"/>
+          <a:p xmlns:a="http://schemas.openxmlformats.org/drawingml/2006/main">
+            <a:pPr>
+              <a:defRPr sz="900" b="1">
+                <a:solidFill>
+                  <a:srgbClr val="FF6412"/>
+                </a:solidFill>
+              </a:defRPr>
+            </a:pPr>
+            <a:r>
+              <a:rPr sz="900" b="1">
+                <a:solidFill>
+                  <a:srgbClr val="FF6412"/>
+                </a:solidFill>
+              </a:rPr>
+              <a:t>Решение</a:t>
+            </a:r>
+          </a:p>
+        </p:txBody>
+      </p:sp>
+      <p:sp>
+        <p:nvSpPr>
+          <p:cNvPr id="14" name="">
+            <a:extLst xmlns:a="http://schemas.openxmlformats.org/drawingml/2006/main">
+              <a:ext uri="{FF2B5EF4-FFF2-40B4-BE49-F238E27FC236}">
+                <a16:creationId xmlns:a16="http://schemas.microsoft.com/office/drawing/2014/main" id="{12408D41-DF33-48FE-962C-564122DFFF74}"/>
+              </a:ext>
+            </a:extLst>
+          </p:cNvPr>
+          <p:cNvSpPr>
+            <a:spLocks xmlns:a="http://schemas.openxmlformats.org/drawingml/2006/main" noGrp="1"/>
+          </p:cNvSpPr>
+          <p:nvPr/>
+        </p:nvSpPr>
+        <p:spPr>
+          <a:xfrm xmlns:a="http://schemas.openxmlformats.org/drawingml/2006/main">
+            <a:off x="762000" y="3009900"/>
+            <a:ext cx="2266950" cy="409575"/>
+          </a:xfrm>
+          <a:prstGeom xmlns:a="http://schemas.openxmlformats.org/drawingml/2006/main" prst="rect">
+            <a:avLst/>
+          </a:prstGeom>
+          <a:noFill xmlns:a="http://schemas.openxmlformats.org/drawingml/2006/main"/>
+          <a:ln xmlns:a="http://schemas.openxmlformats.org/drawingml/2006/main" w="0">
+            <a:noFill/>
+            <a:prstDash val="solid"/>
+          </a:ln>
+        </p:spPr>
+        <p:txBody>
+          <a:bodyPr xmlns:a="http://schemas.openxmlformats.org/drawingml/2006/main"/>
+          <a:lstStyle xmlns:a="http://schemas.openxmlformats.org/drawingml/2006/main"/>
+          <a:p xmlns:a="http://schemas.openxmlformats.org/drawingml/2006/main">
+            <a:pPr>
+              <a:defRPr sz="1050" b="1">
+                <a:solidFill>
+                  <a:srgbClr val="161616"/>
+                </a:solidFill>
+              </a:defRPr>
+            </a:pPr>
+            <a:r>
+              <a:rPr sz="1050" b="1">
+                <a:solidFill>
+                  <a:srgbClr val="161616"/>
+                </a:solidFill>
+              </a:rPr>
+              <a:t>{{REC_5_SOLUTION}}</a:t>
+            </a:r>
+          </a:p>
+        </p:txBody>
+      </p:sp>
+      <p:sp>
+        <p:nvSpPr>
+          <p:cNvPr id="15" name="">
+            <a:extLst xmlns:a="http://schemas.openxmlformats.org/drawingml/2006/main">
+              <a:ext uri="{FF2B5EF4-FFF2-40B4-BE49-F238E27FC236}">
+                <a16:creationId xmlns:a16="http://schemas.microsoft.com/office/drawing/2014/main" id="{9E9E5832-DBC5-4C3B-BD69-22A08A3139F5}"/>
+              </a:ext>
+            </a:extLst>
+          </p:cNvPr>
+          <p:cNvSpPr>
+            <a:spLocks xmlns:a="http://schemas.openxmlformats.org/drawingml/2006/main" noGrp="1"/>
+          </p:cNvSpPr>
+          <p:nvPr/>
+        </p:nvSpPr>
+        <p:spPr>
+          <a:xfrm xmlns:a="http://schemas.openxmlformats.org/drawingml/2006/main">
+            <a:off x="3219450" y="2819400"/>
+            <a:ext cx="2266950" cy="171450"/>
+          </a:xfrm>
+          <a:prstGeom xmlns:a="http://schemas.openxmlformats.org/drawingml/2006/main" prst="rect">
+            <a:avLst/>
+          </a:prstGeom>
+          <a:noFill xmlns:a="http://schemas.openxmlformats.org/drawingml/2006/main"/>
+          <a:ln xmlns:a="http://schemas.openxmlformats.org/drawingml/2006/main" w="0">
+            <a:noFill/>
+            <a:prstDash val="solid"/>
+          </a:ln>
+        </p:spPr>
+        <p:txBody>
+          <a:bodyPr xmlns:a="http://schemas.openxmlformats.org/drawingml/2006/main"/>
+          <a:lstStyle xmlns:a="http://schemas.openxmlformats.org/drawingml/2006/main"/>
+          <a:p xmlns:a="http://schemas.openxmlformats.org/drawingml/2006/main">
+            <a:pPr>
+              <a:defRPr sz="900" b="1">
+                <a:solidFill>
+                  <a:srgbClr val="FF6412"/>
+                </a:solidFill>
+              </a:defRPr>
+            </a:pPr>
+            <a:r>
+              <a:rPr sz="900" b="1">
+                <a:solidFill>
+                  <a:srgbClr val="FF6412"/>
+                </a:solidFill>
+              </a:rPr>
+              <a:t>Производители</a:t>
+            </a:r>
+          </a:p>
+        </p:txBody>
+      </p:sp>
+      <p:sp>
+        <p:nvSpPr>
           <p:cNvPr id="16" name="">
             <a:extLst xmlns:a="http://schemas.openxmlformats.org/drawingml/2006/main">
               <a:ext uri="{FF2B5EF4-FFF2-40B4-BE49-F238E27FC236}">
-                <a16:creationId xmlns:a16="http://schemas.microsoft.com/office/drawing/2014/main" id="{7A81AB0F-C97F-4A70-B078-2A9F260E09CD}"/>
-              </a:ext>
-            </a:extLst>
-          </p:cNvPr>
-          <p:cNvSpPr>
-            <a:spLocks xmlns:a="http://schemas.openxmlformats.org/drawingml/2006/main" noGrp="1"/>
-          </p:cNvSpPr>
-          <p:nvPr/>
-        </p:nvSpPr>
-        <p:spPr>
-          <a:xfrm xmlns:a="http://schemas.openxmlformats.org/drawingml/2006/main">
-            <a:off x="609600" y="2724150"/>
-            <a:ext cx="457200" cy="266700"/>
+                <a16:creationId xmlns:a16="http://schemas.microsoft.com/office/drawing/2014/main" id="{9CF79407-22BA-4671-B014-708AAC29ED51}"/>
+              </a:ext>
+            </a:extLst>
+          </p:cNvPr>
+          <p:cNvSpPr>
+            <a:spLocks xmlns:a="http://schemas.openxmlformats.org/drawingml/2006/main" noGrp="1"/>
+          </p:cNvSpPr>
+          <p:nvPr/>
+        </p:nvSpPr>
+        <p:spPr>
+          <a:xfrm xmlns:a="http://schemas.openxmlformats.org/drawingml/2006/main">
+            <a:off x="3219450" y="3009900"/>
+            <a:ext cx="2266950" cy="409575"/>
+          </a:xfrm>
+          <a:prstGeom xmlns:a="http://schemas.openxmlformats.org/drawingml/2006/main" prst="rect">
+            <a:avLst/>
+          </a:prstGeom>
+          <a:noFill xmlns:a="http://schemas.openxmlformats.org/drawingml/2006/main"/>
+          <a:ln xmlns:a="http://schemas.openxmlformats.org/drawingml/2006/main" w="0">
+            <a:noFill/>
+            <a:prstDash val="solid"/>
+          </a:ln>
+        </p:spPr>
+        <p:txBody>
+          <a:bodyPr xmlns:a="http://schemas.openxmlformats.org/drawingml/2006/main"/>
+          <a:lstStyle xmlns:a="http://schemas.openxmlformats.org/drawingml/2006/main"/>
+          <a:p xmlns:a="http://schemas.openxmlformats.org/drawingml/2006/main">
+            <a:pPr>
+              <a:defRPr sz="1050" b="1">
+                <a:solidFill>
+                  <a:srgbClr val="161616"/>
+                </a:solidFill>
+              </a:defRPr>
+            </a:pPr>
+            <a:r>
+              <a:rPr sz="1050" b="1">
+                <a:solidFill>
+                  <a:srgbClr val="161616"/>
+                </a:solidFill>
+              </a:rPr>
+              <a:t>{{REC_5_VENDORS}}</a:t>
+            </a:r>
+          </a:p>
+        </p:txBody>
+      </p:sp>
+      <p:sp>
+        <p:nvSpPr>
+          <p:cNvPr id="17" name="">
+            <a:extLst xmlns:a="http://schemas.openxmlformats.org/drawingml/2006/main">
+              <a:ext uri="{FF2B5EF4-FFF2-40B4-BE49-F238E27FC236}">
+                <a16:creationId xmlns:a16="http://schemas.microsoft.com/office/drawing/2014/main" id="{2CFBA092-4E75-4664-8BCD-F2D61F9EC66C}"/>
+              </a:ext>
+            </a:extLst>
+          </p:cNvPr>
+          <p:cNvSpPr>
+            <a:spLocks xmlns:a="http://schemas.openxmlformats.org/drawingml/2006/main" noGrp="1"/>
+          </p:cNvSpPr>
+          <p:nvPr/>
+        </p:nvSpPr>
+        <p:spPr>
+          <a:xfrm xmlns:a="http://schemas.openxmlformats.org/drawingml/2006/main">
+            <a:off x="6076950" y="1428750"/>
+            <a:ext cx="5162550" cy="2143125"/>
+          </a:xfrm>
+          <a:prstGeom xmlns:a="http://schemas.openxmlformats.org/drawingml/2006/main" prst="roundRect">
+            <a:avLst>
+              <a:gd name="adj" fmla="val 3556"/>
+            </a:avLst>
+          </a:prstGeom>
+          <a:solidFill xmlns:a="http://schemas.openxmlformats.org/drawingml/2006/main">
+            <a:srgbClr val="FFFFFF"/>
+          </a:solidFill>
+          <a:ln xmlns:a="http://schemas.openxmlformats.org/drawingml/2006/main" w="9525">
+            <a:solidFill>
+              <a:srgbClr val="E4E7EC"/>
+            </a:solidFill>
+            <a:prstDash val="solid"/>
+          </a:ln>
+        </p:spPr>
+      </p:sp>
+      <p:sp>
+        <p:nvSpPr>
+          <p:cNvPr id="18" name="">
+            <a:extLst xmlns:a="http://schemas.openxmlformats.org/drawingml/2006/main">
+              <a:ext uri="{FF2B5EF4-FFF2-40B4-BE49-F238E27FC236}">
+                <a16:creationId xmlns:a16="http://schemas.microsoft.com/office/drawing/2014/main" id="{FD8761AB-9A9D-4449-80C6-C600AE22A69A}"/>
+              </a:ext>
+            </a:extLst>
+          </p:cNvPr>
+          <p:cNvSpPr>
+            <a:spLocks xmlns:a="http://schemas.openxmlformats.org/drawingml/2006/main" noGrp="1"/>
+          </p:cNvSpPr>
+          <p:nvPr/>
+        </p:nvSpPr>
+        <p:spPr>
+          <a:xfrm xmlns:a="http://schemas.openxmlformats.org/drawingml/2006/main">
+            <a:off x="6267450" y="1600200"/>
+            <a:ext cx="361950" cy="247650"/>
           </a:xfrm>
           <a:prstGeom xmlns:a="http://schemas.openxmlformats.org/drawingml/2006/main" prst="rect">
             <a:avLst/>
@@ -7779,79 +8769,79 @@
                   <a:srgbClr val="FF6412"/>
                 </a:solidFill>
               </a:rPr>
-              <a:t>02</a:t>
-            </a:r>
-          </a:p>
-        </p:txBody>
-      </p:sp>
-      <p:sp>
-        <p:nvSpPr>
-          <p:cNvPr id="17" name="">
-            <a:extLst xmlns:a="http://schemas.openxmlformats.org/drawingml/2006/main">
-              <a:ext uri="{FF2B5EF4-FFF2-40B4-BE49-F238E27FC236}">
-                <a16:creationId xmlns:a16="http://schemas.microsoft.com/office/drawing/2014/main" id="{2E37C848-B070-4255-BF97-0AB986D658D0}"/>
-              </a:ext>
-            </a:extLst>
-          </p:cNvPr>
-          <p:cNvSpPr>
-            <a:spLocks xmlns:a="http://schemas.openxmlformats.org/drawingml/2006/main" noGrp="1"/>
-          </p:cNvSpPr>
-          <p:nvPr/>
-        </p:nvSpPr>
-        <p:spPr>
-          <a:xfrm xmlns:a="http://schemas.openxmlformats.org/drawingml/2006/main">
-            <a:off x="1200150" y="2667000"/>
-            <a:ext cx="9982200" cy="266700"/>
-          </a:xfrm>
-          <a:prstGeom xmlns:a="http://schemas.openxmlformats.org/drawingml/2006/main" prst="rect">
-            <a:avLst/>
-          </a:prstGeom>
-          <a:noFill xmlns:a="http://schemas.openxmlformats.org/drawingml/2006/main"/>
-          <a:ln xmlns:a="http://schemas.openxmlformats.org/drawingml/2006/main" w="0">
-            <a:noFill/>
-            <a:prstDash val="solid"/>
-          </a:ln>
-        </p:spPr>
-        <p:txBody>
-          <a:bodyPr xmlns:a="http://schemas.openxmlformats.org/drawingml/2006/main"/>
-          <a:lstStyle xmlns:a="http://schemas.openxmlformats.org/drawingml/2006/main"/>
-          <a:p xmlns:a="http://schemas.openxmlformats.org/drawingml/2006/main">
-            <a:pPr>
-              <a:defRPr sz="1425" b="1">
-                <a:solidFill>
-                  <a:srgbClr val="161616"/>
-                </a:solidFill>
-              </a:defRPr>
-            </a:pPr>
-            <a:r>
-              <a:rPr sz="1425" b="1">
-                <a:solidFill>
-                  <a:srgbClr val="161616"/>
-                </a:solidFill>
-              </a:rPr>
-              <a:t>{{SEC_2_TITLE}}</a:t>
-            </a:r>
-          </a:p>
-        </p:txBody>
-      </p:sp>
-      <p:sp>
-        <p:nvSpPr>
-          <p:cNvPr id="18" name="">
-            <a:extLst xmlns:a="http://schemas.openxmlformats.org/drawingml/2006/main">
-              <a:ext uri="{FF2B5EF4-FFF2-40B4-BE49-F238E27FC236}">
-                <a16:creationId xmlns:a16="http://schemas.microsoft.com/office/drawing/2014/main" id="{6B2FA649-26CB-47BE-A1E1-B70F5E330B0A}"/>
-              </a:ext>
-            </a:extLst>
-          </p:cNvPr>
-          <p:cNvSpPr>
-            <a:spLocks xmlns:a="http://schemas.openxmlformats.org/drawingml/2006/main" noGrp="1"/>
-          </p:cNvSpPr>
-          <p:nvPr/>
-        </p:nvSpPr>
-        <p:spPr>
-          <a:xfrm xmlns:a="http://schemas.openxmlformats.org/drawingml/2006/main">
-            <a:off x="1200150" y="2962275"/>
-            <a:ext cx="9982200" cy="400050"/>
+              <a:t>06</a:t>
+            </a:r>
+          </a:p>
+        </p:txBody>
+      </p:sp>
+      <p:sp>
+        <p:nvSpPr>
+          <p:cNvPr id="19" name="">
+            <a:extLst xmlns:a="http://schemas.openxmlformats.org/drawingml/2006/main">
+              <a:ext uri="{FF2B5EF4-FFF2-40B4-BE49-F238E27FC236}">
+                <a16:creationId xmlns:a16="http://schemas.microsoft.com/office/drawing/2014/main" id="{08AE3DE8-73B3-4483-96DC-F4DB2CE5654C}"/>
+              </a:ext>
+            </a:extLst>
+          </p:cNvPr>
+          <p:cNvSpPr>
+            <a:spLocks xmlns:a="http://schemas.openxmlformats.org/drawingml/2006/main" noGrp="1"/>
+          </p:cNvSpPr>
+          <p:nvPr/>
+        </p:nvSpPr>
+        <p:spPr>
+          <a:xfrm xmlns:a="http://schemas.openxmlformats.org/drawingml/2006/main">
+            <a:off x="6686550" y="1571625"/>
+            <a:ext cx="4324350" cy="400050"/>
+          </a:xfrm>
+          <a:prstGeom xmlns:a="http://schemas.openxmlformats.org/drawingml/2006/main" prst="rect">
+            <a:avLst/>
+          </a:prstGeom>
+          <a:noFill xmlns:a="http://schemas.openxmlformats.org/drawingml/2006/main"/>
+          <a:ln xmlns:a="http://schemas.openxmlformats.org/drawingml/2006/main" w="0">
+            <a:noFill/>
+            <a:prstDash val="solid"/>
+          </a:ln>
+        </p:spPr>
+        <p:txBody>
+          <a:bodyPr xmlns:a="http://schemas.openxmlformats.org/drawingml/2006/main"/>
+          <a:lstStyle xmlns:a="http://schemas.openxmlformats.org/drawingml/2006/main"/>
+          <a:p xmlns:a="http://schemas.openxmlformats.org/drawingml/2006/main">
+            <a:pPr>
+              <a:defRPr sz="1350" b="1">
+                <a:solidFill>
+                  <a:srgbClr val="161616"/>
+                </a:solidFill>
+              </a:defRPr>
+            </a:pPr>
+            <a:r>
+              <a:rPr sz="1350" b="1">
+                <a:solidFill>
+                  <a:srgbClr val="161616"/>
+                </a:solidFill>
+              </a:rPr>
+              <a:t>{{REC_6_TITLE}}</a:t>
+            </a:r>
+          </a:p>
+        </p:txBody>
+      </p:sp>
+      <p:sp>
+        <p:nvSpPr>
+          <p:cNvPr id="20" name="">
+            <a:extLst xmlns:a="http://schemas.openxmlformats.org/drawingml/2006/main">
+              <a:ext uri="{FF2B5EF4-FFF2-40B4-BE49-F238E27FC236}">
+                <a16:creationId xmlns:a16="http://schemas.microsoft.com/office/drawing/2014/main" id="{FB592F0A-4372-45FC-BC3F-F8FFD547DA69}"/>
+              </a:ext>
+            </a:extLst>
+          </p:cNvPr>
+          <p:cNvSpPr>
+            <a:spLocks xmlns:a="http://schemas.openxmlformats.org/drawingml/2006/main" noGrp="1"/>
+          </p:cNvSpPr>
+          <p:nvPr/>
+        </p:nvSpPr>
+        <p:spPr>
+          <a:xfrm xmlns:a="http://schemas.openxmlformats.org/drawingml/2006/main">
+            <a:off x="6286500" y="2047875"/>
+            <a:ext cx="4743450" cy="552450"/>
           </a:xfrm>
           <a:prstGeom xmlns:a="http://schemas.openxmlformats.org/drawingml/2006/main" prst="rect">
             <a:avLst/>
@@ -7879,107 +8869,7 @@
                   <a:srgbClr val="667085"/>
                 </a:solidFill>
               </a:rPr>
-              <a:t>{{SEC_2_ACTION}}</a:t>
-            </a:r>
-          </a:p>
-        </p:txBody>
-      </p:sp>
-      <p:sp>
-        <p:nvSpPr>
-          <p:cNvPr id="19" name="">
-            <a:extLst xmlns:a="http://schemas.openxmlformats.org/drawingml/2006/main">
-              <a:ext uri="{FF2B5EF4-FFF2-40B4-BE49-F238E27FC236}">
-                <a16:creationId xmlns:a16="http://schemas.microsoft.com/office/drawing/2014/main" id="{2E2AD0E4-2568-44C1-A089-63CA00510787}"/>
-              </a:ext>
-            </a:extLst>
-          </p:cNvPr>
-          <p:cNvSpPr>
-            <a:spLocks xmlns:a="http://schemas.openxmlformats.org/drawingml/2006/main" noGrp="1"/>
-          </p:cNvSpPr>
-          <p:nvPr/>
-        </p:nvSpPr>
-        <p:spPr>
-          <a:xfrm xmlns:a="http://schemas.openxmlformats.org/drawingml/2006/main">
-            <a:off x="1200150" y="3429000"/>
-            <a:ext cx="742950" cy="190500"/>
-          </a:xfrm>
-          <a:prstGeom xmlns:a="http://schemas.openxmlformats.org/drawingml/2006/main" prst="rect">
-            <a:avLst/>
-          </a:prstGeom>
-          <a:noFill xmlns:a="http://schemas.openxmlformats.org/drawingml/2006/main"/>
-          <a:ln xmlns:a="http://schemas.openxmlformats.org/drawingml/2006/main" w="0">
-            <a:noFill/>
-            <a:prstDash val="solid"/>
-          </a:ln>
-        </p:spPr>
-        <p:txBody>
-          <a:bodyPr xmlns:a="http://schemas.openxmlformats.org/drawingml/2006/main"/>
-          <a:lstStyle xmlns:a="http://schemas.openxmlformats.org/drawingml/2006/main"/>
-          <a:p xmlns:a="http://schemas.openxmlformats.org/drawingml/2006/main">
-            <a:pPr>
-              <a:defRPr sz="975" b="1">
-                <a:solidFill>
-                  <a:srgbClr val="FF6412"/>
-                </a:solidFill>
-              </a:defRPr>
-            </a:pPr>
-            <a:r>
-              <a:rPr sz="975" b="1">
-                <a:solidFill>
-                  <a:srgbClr val="FF6412"/>
-                </a:solidFill>
-              </a:rPr>
-              <a:t>Решение</a:t>
-            </a:r>
-          </a:p>
-        </p:txBody>
-      </p:sp>
-      <p:sp>
-        <p:nvSpPr>
-          <p:cNvPr id="20" name="">
-            <a:extLst xmlns:a="http://schemas.openxmlformats.org/drawingml/2006/main">
-              <a:ext uri="{FF2B5EF4-FFF2-40B4-BE49-F238E27FC236}">
-                <a16:creationId xmlns:a16="http://schemas.microsoft.com/office/drawing/2014/main" id="{C6027A01-0BC1-4144-99A5-11BE9704799C}"/>
-              </a:ext>
-            </a:extLst>
-          </p:cNvPr>
-          <p:cNvSpPr>
-            <a:spLocks xmlns:a="http://schemas.openxmlformats.org/drawingml/2006/main" noGrp="1"/>
-          </p:cNvSpPr>
-          <p:nvPr/>
-        </p:nvSpPr>
-        <p:spPr>
-          <a:xfrm xmlns:a="http://schemas.openxmlformats.org/drawingml/2006/main">
-            <a:off x="1962150" y="3409950"/>
-            <a:ext cx="3810000" cy="323850"/>
-          </a:xfrm>
-          <a:prstGeom xmlns:a="http://schemas.openxmlformats.org/drawingml/2006/main" prst="rect">
-            <a:avLst/>
-          </a:prstGeom>
-          <a:noFill xmlns:a="http://schemas.openxmlformats.org/drawingml/2006/main"/>
-          <a:ln xmlns:a="http://schemas.openxmlformats.org/drawingml/2006/main" w="0">
-            <a:noFill/>
-            <a:prstDash val="solid"/>
-          </a:ln>
-        </p:spPr>
-        <p:txBody>
-          <a:bodyPr xmlns:a="http://schemas.openxmlformats.org/drawingml/2006/main"/>
-          <a:lstStyle xmlns:a="http://schemas.openxmlformats.org/drawingml/2006/main"/>
-          <a:p xmlns:a="http://schemas.openxmlformats.org/drawingml/2006/main">
-            <a:pPr>
-              <a:defRPr sz="1050" b="1">
-                <a:solidFill>
-                  <a:srgbClr val="161616"/>
-                </a:solidFill>
-              </a:defRPr>
-            </a:pPr>
-            <a:r>
-              <a:rPr sz="1050" b="1">
-                <a:solidFill>
-                  <a:srgbClr val="161616"/>
-                </a:solidFill>
-              </a:rPr>
-              <a:t>{{SEC_2_SOLUTION}}</a:t>
+              <a:t>{{REC_6_ACTION}}</a:t>
             </a:r>
           </a:p>
         </p:txBody>
@@ -7989,119 +8879,19 @@
           <p:cNvPr id="21" name="">
             <a:extLst xmlns:a="http://schemas.openxmlformats.org/drawingml/2006/main">
               <a:ext uri="{FF2B5EF4-FFF2-40B4-BE49-F238E27FC236}">
-                <a16:creationId xmlns:a16="http://schemas.microsoft.com/office/drawing/2014/main" id="{EE05F6D0-8EE6-47D2-BD10-1367CF774F16}"/>
-              </a:ext>
-            </a:extLst>
-          </p:cNvPr>
-          <p:cNvSpPr>
-            <a:spLocks xmlns:a="http://schemas.openxmlformats.org/drawingml/2006/main" noGrp="1"/>
-          </p:cNvSpPr>
-          <p:nvPr/>
-        </p:nvSpPr>
-        <p:spPr>
-          <a:xfrm xmlns:a="http://schemas.openxmlformats.org/drawingml/2006/main">
-            <a:off x="6019800" y="3429000"/>
-            <a:ext cx="1104900" cy="190500"/>
-          </a:xfrm>
-          <a:prstGeom xmlns:a="http://schemas.openxmlformats.org/drawingml/2006/main" prst="rect">
-            <a:avLst/>
-          </a:prstGeom>
-          <a:noFill xmlns:a="http://schemas.openxmlformats.org/drawingml/2006/main"/>
-          <a:ln xmlns:a="http://schemas.openxmlformats.org/drawingml/2006/main" w="0">
-            <a:noFill/>
-            <a:prstDash val="solid"/>
-          </a:ln>
-        </p:spPr>
-        <p:txBody>
-          <a:bodyPr xmlns:a="http://schemas.openxmlformats.org/drawingml/2006/main"/>
-          <a:lstStyle xmlns:a="http://schemas.openxmlformats.org/drawingml/2006/main"/>
-          <a:p xmlns:a="http://schemas.openxmlformats.org/drawingml/2006/main">
-            <a:pPr>
-              <a:defRPr sz="975" b="1">
-                <a:solidFill>
-                  <a:srgbClr val="FF6412"/>
-                </a:solidFill>
-              </a:defRPr>
-            </a:pPr>
-            <a:r>
-              <a:rPr sz="975" b="1">
-                <a:solidFill>
-                  <a:srgbClr val="FF6412"/>
-                </a:solidFill>
-              </a:rPr>
-              <a:t>Производители</a:t>
-            </a:r>
-          </a:p>
-        </p:txBody>
-      </p:sp>
-      <p:sp>
-        <p:nvSpPr>
-          <p:cNvPr id="22" name="">
-            <a:extLst xmlns:a="http://schemas.openxmlformats.org/drawingml/2006/main">
-              <a:ext uri="{FF2B5EF4-FFF2-40B4-BE49-F238E27FC236}">
-                <a16:creationId xmlns:a16="http://schemas.microsoft.com/office/drawing/2014/main" id="{9C3E26FE-ED25-4F79-9A2E-97A3EAA5589F}"/>
-              </a:ext>
-            </a:extLst>
-          </p:cNvPr>
-          <p:cNvSpPr>
-            <a:spLocks xmlns:a="http://schemas.openxmlformats.org/drawingml/2006/main" noGrp="1"/>
-          </p:cNvSpPr>
-          <p:nvPr/>
-        </p:nvSpPr>
-        <p:spPr>
-          <a:xfrm xmlns:a="http://schemas.openxmlformats.org/drawingml/2006/main">
-            <a:off x="7181850" y="3409950"/>
-            <a:ext cx="4000500" cy="323850"/>
-          </a:xfrm>
-          <a:prstGeom xmlns:a="http://schemas.openxmlformats.org/drawingml/2006/main" prst="rect">
-            <a:avLst/>
-          </a:prstGeom>
-          <a:noFill xmlns:a="http://schemas.openxmlformats.org/drawingml/2006/main"/>
-          <a:ln xmlns:a="http://schemas.openxmlformats.org/drawingml/2006/main" w="0">
-            <a:noFill/>
-            <a:prstDash val="solid"/>
-          </a:ln>
-        </p:spPr>
-        <p:txBody>
-          <a:bodyPr xmlns:a="http://schemas.openxmlformats.org/drawingml/2006/main"/>
-          <a:lstStyle xmlns:a="http://schemas.openxmlformats.org/drawingml/2006/main"/>
-          <a:p xmlns:a="http://schemas.openxmlformats.org/drawingml/2006/main">
-            <a:pPr>
-              <a:defRPr sz="1050" b="1">
-                <a:solidFill>
-                  <a:srgbClr val="161616"/>
-                </a:solidFill>
-              </a:defRPr>
-            </a:pPr>
-            <a:r>
-              <a:rPr sz="1050" b="1">
-                <a:solidFill>
-                  <a:srgbClr val="161616"/>
-                </a:solidFill>
-              </a:rPr>
-              <a:t>{{SEC_2_VENDORS}}</a:t>
-            </a:r>
-          </a:p>
-        </p:txBody>
-      </p:sp>
-      <p:sp>
-        <p:nvSpPr>
-          <p:cNvPr id="23" name="">
-            <a:extLst xmlns:a="http://schemas.openxmlformats.org/drawingml/2006/main">
-              <a:ext uri="{FF2B5EF4-FFF2-40B4-BE49-F238E27FC236}">
-                <a16:creationId xmlns:a16="http://schemas.microsoft.com/office/drawing/2014/main" id="{1972C1E1-A16F-4B2E-8151-4E6CE98A0488}"/>
-              </a:ext>
-            </a:extLst>
-          </p:cNvPr>
-          <p:cNvSpPr>
-            <a:spLocks xmlns:a="http://schemas.openxmlformats.org/drawingml/2006/main" noGrp="1"/>
-          </p:cNvSpPr>
-          <p:nvPr/>
-        </p:nvSpPr>
-        <p:spPr>
-          <a:xfrm xmlns:a="http://schemas.openxmlformats.org/drawingml/2006/main">
-            <a:off x="1200150" y="3810000"/>
-            <a:ext cx="9982200" cy="9525"/>
+                <a16:creationId xmlns:a16="http://schemas.microsoft.com/office/drawing/2014/main" id="{EBB54C01-4D3D-495A-835B-0D28779DD391}"/>
+              </a:ext>
+            </a:extLst>
+          </p:cNvPr>
+          <p:cNvSpPr>
+            <a:spLocks xmlns:a="http://schemas.openxmlformats.org/drawingml/2006/main" noGrp="1"/>
+          </p:cNvSpPr>
+          <p:nvPr/>
+        </p:nvSpPr>
+        <p:spPr>
+          <a:xfrm xmlns:a="http://schemas.openxmlformats.org/drawingml/2006/main">
+            <a:off x="6286500" y="2686050"/>
+            <a:ext cx="4743450" cy="9525"/>
           </a:xfrm>
           <a:prstGeom xmlns:a="http://schemas.openxmlformats.org/drawingml/2006/main" prst="rect">
             <a:avLst/>
@@ -8117,22 +8907,257 @@
       </p:sp>
       <p:sp>
         <p:nvSpPr>
+          <p:cNvPr id="22" name="">
+            <a:extLst xmlns:a="http://schemas.openxmlformats.org/drawingml/2006/main">
+              <a:ext uri="{FF2B5EF4-FFF2-40B4-BE49-F238E27FC236}">
+                <a16:creationId xmlns:a16="http://schemas.microsoft.com/office/drawing/2014/main" id="{3BC1C69E-55BF-4CF8-A7A5-251DEF16F2D3}"/>
+              </a:ext>
+            </a:extLst>
+          </p:cNvPr>
+          <p:cNvSpPr>
+            <a:spLocks xmlns:a="http://schemas.openxmlformats.org/drawingml/2006/main" noGrp="1"/>
+          </p:cNvSpPr>
+          <p:nvPr/>
+        </p:nvSpPr>
+        <p:spPr>
+          <a:xfrm xmlns:a="http://schemas.openxmlformats.org/drawingml/2006/main">
+            <a:off x="6286500" y="2819400"/>
+            <a:ext cx="2171700" cy="171450"/>
+          </a:xfrm>
+          <a:prstGeom xmlns:a="http://schemas.openxmlformats.org/drawingml/2006/main" prst="rect">
+            <a:avLst/>
+          </a:prstGeom>
+          <a:noFill xmlns:a="http://schemas.openxmlformats.org/drawingml/2006/main"/>
+          <a:ln xmlns:a="http://schemas.openxmlformats.org/drawingml/2006/main" w="0">
+            <a:noFill/>
+            <a:prstDash val="solid"/>
+          </a:ln>
+        </p:spPr>
+        <p:txBody>
+          <a:bodyPr xmlns:a="http://schemas.openxmlformats.org/drawingml/2006/main"/>
+          <a:lstStyle xmlns:a="http://schemas.openxmlformats.org/drawingml/2006/main"/>
+          <a:p xmlns:a="http://schemas.openxmlformats.org/drawingml/2006/main">
+            <a:pPr>
+              <a:defRPr sz="900" b="1">
+                <a:solidFill>
+                  <a:srgbClr val="FF6412"/>
+                </a:solidFill>
+              </a:defRPr>
+            </a:pPr>
+            <a:r>
+              <a:rPr sz="900" b="1">
+                <a:solidFill>
+                  <a:srgbClr val="FF6412"/>
+                </a:solidFill>
+              </a:rPr>
+              <a:t>Решение</a:t>
+            </a:r>
+          </a:p>
+        </p:txBody>
+      </p:sp>
+      <p:sp>
+        <p:nvSpPr>
+          <p:cNvPr id="23" name="">
+            <a:extLst xmlns:a="http://schemas.openxmlformats.org/drawingml/2006/main">
+              <a:ext uri="{FF2B5EF4-FFF2-40B4-BE49-F238E27FC236}">
+                <a16:creationId xmlns:a16="http://schemas.microsoft.com/office/drawing/2014/main" id="{A32AB903-C74A-4B8B-94BB-469CCAB9934B}"/>
+              </a:ext>
+            </a:extLst>
+          </p:cNvPr>
+          <p:cNvSpPr>
+            <a:spLocks xmlns:a="http://schemas.openxmlformats.org/drawingml/2006/main" noGrp="1"/>
+          </p:cNvSpPr>
+          <p:nvPr/>
+        </p:nvSpPr>
+        <p:spPr>
+          <a:xfrm xmlns:a="http://schemas.openxmlformats.org/drawingml/2006/main">
+            <a:off x="6286500" y="3009900"/>
+            <a:ext cx="2266950" cy="409575"/>
+          </a:xfrm>
+          <a:prstGeom xmlns:a="http://schemas.openxmlformats.org/drawingml/2006/main" prst="rect">
+            <a:avLst/>
+          </a:prstGeom>
+          <a:noFill xmlns:a="http://schemas.openxmlformats.org/drawingml/2006/main"/>
+          <a:ln xmlns:a="http://schemas.openxmlformats.org/drawingml/2006/main" w="0">
+            <a:noFill/>
+            <a:prstDash val="solid"/>
+          </a:ln>
+        </p:spPr>
+        <p:txBody>
+          <a:bodyPr xmlns:a="http://schemas.openxmlformats.org/drawingml/2006/main"/>
+          <a:lstStyle xmlns:a="http://schemas.openxmlformats.org/drawingml/2006/main"/>
+          <a:p xmlns:a="http://schemas.openxmlformats.org/drawingml/2006/main">
+            <a:pPr>
+              <a:defRPr sz="1050" b="1">
+                <a:solidFill>
+                  <a:srgbClr val="161616"/>
+                </a:solidFill>
+              </a:defRPr>
+            </a:pPr>
+            <a:r>
+              <a:rPr sz="1050" b="1">
+                <a:solidFill>
+                  <a:srgbClr val="161616"/>
+                </a:solidFill>
+              </a:rPr>
+              <a:t>{{REC_6_SOLUTION}}</a:t>
+            </a:r>
+          </a:p>
+        </p:txBody>
+      </p:sp>
+      <p:sp>
+        <p:nvSpPr>
           <p:cNvPr id="24" name="">
             <a:extLst xmlns:a="http://schemas.openxmlformats.org/drawingml/2006/main">
               <a:ext uri="{FF2B5EF4-FFF2-40B4-BE49-F238E27FC236}">
-                <a16:creationId xmlns:a16="http://schemas.microsoft.com/office/drawing/2014/main" id="{5A679FD7-BC44-47A4-B610-EEBBC7884091}"/>
-              </a:ext>
-            </a:extLst>
-          </p:cNvPr>
-          <p:cNvSpPr>
-            <a:spLocks xmlns:a="http://schemas.openxmlformats.org/drawingml/2006/main" noGrp="1"/>
-          </p:cNvSpPr>
-          <p:nvPr/>
-        </p:nvSpPr>
-        <p:spPr>
-          <a:xfrm xmlns:a="http://schemas.openxmlformats.org/drawingml/2006/main">
-            <a:off x="609600" y="3981450"/>
-            <a:ext cx="457200" cy="266700"/>
+                <a16:creationId xmlns:a16="http://schemas.microsoft.com/office/drawing/2014/main" id="{D6A7C62C-B931-43E4-90DD-64F31432C3DE}"/>
+              </a:ext>
+            </a:extLst>
+          </p:cNvPr>
+          <p:cNvSpPr>
+            <a:spLocks xmlns:a="http://schemas.openxmlformats.org/drawingml/2006/main" noGrp="1"/>
+          </p:cNvSpPr>
+          <p:nvPr/>
+        </p:nvSpPr>
+        <p:spPr>
+          <a:xfrm xmlns:a="http://schemas.openxmlformats.org/drawingml/2006/main">
+            <a:off x="8743950" y="2819400"/>
+            <a:ext cx="2266950" cy="171450"/>
+          </a:xfrm>
+          <a:prstGeom xmlns:a="http://schemas.openxmlformats.org/drawingml/2006/main" prst="rect">
+            <a:avLst/>
+          </a:prstGeom>
+          <a:noFill xmlns:a="http://schemas.openxmlformats.org/drawingml/2006/main"/>
+          <a:ln xmlns:a="http://schemas.openxmlformats.org/drawingml/2006/main" w="0">
+            <a:noFill/>
+            <a:prstDash val="solid"/>
+          </a:ln>
+        </p:spPr>
+        <p:txBody>
+          <a:bodyPr xmlns:a="http://schemas.openxmlformats.org/drawingml/2006/main"/>
+          <a:lstStyle xmlns:a="http://schemas.openxmlformats.org/drawingml/2006/main"/>
+          <a:p xmlns:a="http://schemas.openxmlformats.org/drawingml/2006/main">
+            <a:pPr>
+              <a:defRPr sz="900" b="1">
+                <a:solidFill>
+                  <a:srgbClr val="FF6412"/>
+                </a:solidFill>
+              </a:defRPr>
+            </a:pPr>
+            <a:r>
+              <a:rPr sz="900" b="1">
+                <a:solidFill>
+                  <a:srgbClr val="FF6412"/>
+                </a:solidFill>
+              </a:rPr>
+              <a:t>Производители</a:t>
+            </a:r>
+          </a:p>
+        </p:txBody>
+      </p:sp>
+      <p:sp>
+        <p:nvSpPr>
+          <p:cNvPr id="25" name="">
+            <a:extLst xmlns:a="http://schemas.openxmlformats.org/drawingml/2006/main">
+              <a:ext uri="{FF2B5EF4-FFF2-40B4-BE49-F238E27FC236}">
+                <a16:creationId xmlns:a16="http://schemas.microsoft.com/office/drawing/2014/main" id="{46145F25-1C39-4684-803A-4AF0E521589D}"/>
+              </a:ext>
+            </a:extLst>
+          </p:cNvPr>
+          <p:cNvSpPr>
+            <a:spLocks xmlns:a="http://schemas.openxmlformats.org/drawingml/2006/main" noGrp="1"/>
+          </p:cNvSpPr>
+          <p:nvPr/>
+        </p:nvSpPr>
+        <p:spPr>
+          <a:xfrm xmlns:a="http://schemas.openxmlformats.org/drawingml/2006/main">
+            <a:off x="8743950" y="3009900"/>
+            <a:ext cx="2266950" cy="409575"/>
+          </a:xfrm>
+          <a:prstGeom xmlns:a="http://schemas.openxmlformats.org/drawingml/2006/main" prst="rect">
+            <a:avLst/>
+          </a:prstGeom>
+          <a:noFill xmlns:a="http://schemas.openxmlformats.org/drawingml/2006/main"/>
+          <a:ln xmlns:a="http://schemas.openxmlformats.org/drawingml/2006/main" w="0">
+            <a:noFill/>
+            <a:prstDash val="solid"/>
+          </a:ln>
+        </p:spPr>
+        <p:txBody>
+          <a:bodyPr xmlns:a="http://schemas.openxmlformats.org/drawingml/2006/main"/>
+          <a:lstStyle xmlns:a="http://schemas.openxmlformats.org/drawingml/2006/main"/>
+          <a:p xmlns:a="http://schemas.openxmlformats.org/drawingml/2006/main">
+            <a:pPr>
+              <a:defRPr sz="1050" b="1">
+                <a:solidFill>
+                  <a:srgbClr val="161616"/>
+                </a:solidFill>
+              </a:defRPr>
+            </a:pPr>
+            <a:r>
+              <a:rPr sz="1050" b="1">
+                <a:solidFill>
+                  <a:srgbClr val="161616"/>
+                </a:solidFill>
+              </a:rPr>
+              <a:t>{{REC_6_VENDORS}}</a:t>
+            </a:r>
+          </a:p>
+        </p:txBody>
+      </p:sp>
+      <p:sp>
+        <p:nvSpPr>
+          <p:cNvPr id="26" name="">
+            <a:extLst xmlns:a="http://schemas.openxmlformats.org/drawingml/2006/main">
+              <a:ext uri="{FF2B5EF4-FFF2-40B4-BE49-F238E27FC236}">
+                <a16:creationId xmlns:a16="http://schemas.microsoft.com/office/drawing/2014/main" id="{D30E1765-7CA2-4BD7-ACB5-05C06251306B}"/>
+              </a:ext>
+            </a:extLst>
+          </p:cNvPr>
+          <p:cNvSpPr>
+            <a:spLocks xmlns:a="http://schemas.openxmlformats.org/drawingml/2006/main" noGrp="1"/>
+          </p:cNvSpPr>
+          <p:nvPr/>
+        </p:nvSpPr>
+        <p:spPr>
+          <a:xfrm xmlns:a="http://schemas.openxmlformats.org/drawingml/2006/main">
+            <a:off x="552450" y="3857625"/>
+            <a:ext cx="5162550" cy="2143125"/>
+          </a:xfrm>
+          <a:prstGeom xmlns:a="http://schemas.openxmlformats.org/drawingml/2006/main" prst="roundRect">
+            <a:avLst>
+              <a:gd name="adj" fmla="val 3556"/>
+            </a:avLst>
+          </a:prstGeom>
+          <a:solidFill xmlns:a="http://schemas.openxmlformats.org/drawingml/2006/main">
+            <a:srgbClr val="FFFFFF"/>
+          </a:solidFill>
+          <a:ln xmlns:a="http://schemas.openxmlformats.org/drawingml/2006/main" w="9525">
+            <a:solidFill>
+              <a:srgbClr val="E4E7EC"/>
+            </a:solidFill>
+            <a:prstDash val="solid"/>
+          </a:ln>
+        </p:spPr>
+      </p:sp>
+      <p:sp>
+        <p:nvSpPr>
+          <p:cNvPr id="27" name="">
+            <a:extLst xmlns:a="http://schemas.openxmlformats.org/drawingml/2006/main">
+              <a:ext uri="{FF2B5EF4-FFF2-40B4-BE49-F238E27FC236}">
+                <a16:creationId xmlns:a16="http://schemas.microsoft.com/office/drawing/2014/main" id="{A3FD10D3-1043-4FC5-9DF1-F7C40D34DF2E}"/>
+              </a:ext>
+            </a:extLst>
+          </p:cNvPr>
+          <p:cNvSpPr>
+            <a:spLocks xmlns:a="http://schemas.openxmlformats.org/drawingml/2006/main" noGrp="1"/>
+          </p:cNvSpPr>
+          <p:nvPr/>
+        </p:nvSpPr>
+        <p:spPr>
+          <a:xfrm xmlns:a="http://schemas.openxmlformats.org/drawingml/2006/main">
+            <a:off x="742950" y="4029075"/>
+            <a:ext cx="361950" cy="247650"/>
           </a:xfrm>
           <a:prstGeom xmlns:a="http://schemas.openxmlformats.org/drawingml/2006/main" prst="rect">
             <a:avLst/>
@@ -8160,79 +9185,79 @@
                   <a:srgbClr val="FF6412"/>
                 </a:solidFill>
               </a:rPr>
-              <a:t>03</a:t>
-            </a:r>
-          </a:p>
-        </p:txBody>
-      </p:sp>
-      <p:sp>
-        <p:nvSpPr>
-          <p:cNvPr id="25" name="">
-            <a:extLst xmlns:a="http://schemas.openxmlformats.org/drawingml/2006/main">
-              <a:ext uri="{FF2B5EF4-FFF2-40B4-BE49-F238E27FC236}">
-                <a16:creationId xmlns:a16="http://schemas.microsoft.com/office/drawing/2014/main" id="{ADFC1773-B892-45B6-ACFE-30016AE490C2}"/>
-              </a:ext>
-            </a:extLst>
-          </p:cNvPr>
-          <p:cNvSpPr>
-            <a:spLocks xmlns:a="http://schemas.openxmlformats.org/drawingml/2006/main" noGrp="1"/>
-          </p:cNvSpPr>
-          <p:nvPr/>
-        </p:nvSpPr>
-        <p:spPr>
-          <a:xfrm xmlns:a="http://schemas.openxmlformats.org/drawingml/2006/main">
-            <a:off x="1200150" y="3924300"/>
-            <a:ext cx="9982200" cy="266700"/>
-          </a:xfrm>
-          <a:prstGeom xmlns:a="http://schemas.openxmlformats.org/drawingml/2006/main" prst="rect">
-            <a:avLst/>
-          </a:prstGeom>
-          <a:noFill xmlns:a="http://schemas.openxmlformats.org/drawingml/2006/main"/>
-          <a:ln xmlns:a="http://schemas.openxmlformats.org/drawingml/2006/main" w="0">
-            <a:noFill/>
-            <a:prstDash val="solid"/>
-          </a:ln>
-        </p:spPr>
-        <p:txBody>
-          <a:bodyPr xmlns:a="http://schemas.openxmlformats.org/drawingml/2006/main"/>
-          <a:lstStyle xmlns:a="http://schemas.openxmlformats.org/drawingml/2006/main"/>
-          <a:p xmlns:a="http://schemas.openxmlformats.org/drawingml/2006/main">
-            <a:pPr>
-              <a:defRPr sz="1425" b="1">
-                <a:solidFill>
-                  <a:srgbClr val="161616"/>
-                </a:solidFill>
-              </a:defRPr>
-            </a:pPr>
-            <a:r>
-              <a:rPr sz="1425" b="1">
-                <a:solidFill>
-                  <a:srgbClr val="161616"/>
-                </a:solidFill>
-              </a:rPr>
-              <a:t>{{SEC_3_TITLE}}</a:t>
-            </a:r>
-          </a:p>
-        </p:txBody>
-      </p:sp>
-      <p:sp>
-        <p:nvSpPr>
-          <p:cNvPr id="26" name="">
-            <a:extLst xmlns:a="http://schemas.openxmlformats.org/drawingml/2006/main">
-              <a:ext uri="{FF2B5EF4-FFF2-40B4-BE49-F238E27FC236}">
-                <a16:creationId xmlns:a16="http://schemas.microsoft.com/office/drawing/2014/main" id="{BA0BC68D-96C1-4F2D-98AB-99F53D7A89F3}"/>
-              </a:ext>
-            </a:extLst>
-          </p:cNvPr>
-          <p:cNvSpPr>
-            <a:spLocks xmlns:a="http://schemas.openxmlformats.org/drawingml/2006/main" noGrp="1"/>
-          </p:cNvSpPr>
-          <p:nvPr/>
-        </p:nvSpPr>
-        <p:spPr>
-          <a:xfrm xmlns:a="http://schemas.openxmlformats.org/drawingml/2006/main">
-            <a:off x="1200150" y="4219575"/>
-            <a:ext cx="9982200" cy="400050"/>
+              <a:t>07</a:t>
+            </a:r>
+          </a:p>
+        </p:txBody>
+      </p:sp>
+      <p:sp>
+        <p:nvSpPr>
+          <p:cNvPr id="28" name="">
+            <a:extLst xmlns:a="http://schemas.openxmlformats.org/drawingml/2006/main">
+              <a:ext uri="{FF2B5EF4-FFF2-40B4-BE49-F238E27FC236}">
+                <a16:creationId xmlns:a16="http://schemas.microsoft.com/office/drawing/2014/main" id="{B9A1D5F6-3FF1-4168-B07E-E8189C4D27D1}"/>
+              </a:ext>
+            </a:extLst>
+          </p:cNvPr>
+          <p:cNvSpPr>
+            <a:spLocks xmlns:a="http://schemas.openxmlformats.org/drawingml/2006/main" noGrp="1"/>
+          </p:cNvSpPr>
+          <p:nvPr/>
+        </p:nvSpPr>
+        <p:spPr>
+          <a:xfrm xmlns:a="http://schemas.openxmlformats.org/drawingml/2006/main">
+            <a:off x="1162050" y="4000500"/>
+            <a:ext cx="4324350" cy="400050"/>
+          </a:xfrm>
+          <a:prstGeom xmlns:a="http://schemas.openxmlformats.org/drawingml/2006/main" prst="rect">
+            <a:avLst/>
+          </a:prstGeom>
+          <a:noFill xmlns:a="http://schemas.openxmlformats.org/drawingml/2006/main"/>
+          <a:ln xmlns:a="http://schemas.openxmlformats.org/drawingml/2006/main" w="0">
+            <a:noFill/>
+            <a:prstDash val="solid"/>
+          </a:ln>
+        </p:spPr>
+        <p:txBody>
+          <a:bodyPr xmlns:a="http://schemas.openxmlformats.org/drawingml/2006/main"/>
+          <a:lstStyle xmlns:a="http://schemas.openxmlformats.org/drawingml/2006/main"/>
+          <a:p xmlns:a="http://schemas.openxmlformats.org/drawingml/2006/main">
+            <a:pPr>
+              <a:defRPr sz="1350" b="1">
+                <a:solidFill>
+                  <a:srgbClr val="161616"/>
+                </a:solidFill>
+              </a:defRPr>
+            </a:pPr>
+            <a:r>
+              <a:rPr sz="1350" b="1">
+                <a:solidFill>
+                  <a:srgbClr val="161616"/>
+                </a:solidFill>
+              </a:rPr>
+              <a:t>{{REC_7_TITLE}}</a:t>
+            </a:r>
+          </a:p>
+        </p:txBody>
+      </p:sp>
+      <p:sp>
+        <p:nvSpPr>
+          <p:cNvPr id="29" name="">
+            <a:extLst xmlns:a="http://schemas.openxmlformats.org/drawingml/2006/main">
+              <a:ext uri="{FF2B5EF4-FFF2-40B4-BE49-F238E27FC236}">
+                <a16:creationId xmlns:a16="http://schemas.microsoft.com/office/drawing/2014/main" id="{CE1CEA8C-0984-4E69-B2D6-8D33F83CE86E}"/>
+              </a:ext>
+            </a:extLst>
+          </p:cNvPr>
+          <p:cNvSpPr>
+            <a:spLocks xmlns:a="http://schemas.openxmlformats.org/drawingml/2006/main" noGrp="1"/>
+          </p:cNvSpPr>
+          <p:nvPr/>
+        </p:nvSpPr>
+        <p:spPr>
+          <a:xfrm xmlns:a="http://schemas.openxmlformats.org/drawingml/2006/main">
+            <a:off x="762000" y="4476750"/>
+            <a:ext cx="4743450" cy="552450"/>
           </a:xfrm>
           <a:prstGeom xmlns:a="http://schemas.openxmlformats.org/drawingml/2006/main" prst="rect">
             <a:avLst/>
@@ -8260,157 +9285,7 @@
                   <a:srgbClr val="667085"/>
                 </a:solidFill>
               </a:rPr>
-              <a:t>{{SEC_3_ACTION}}</a:t>
-            </a:r>
-          </a:p>
-        </p:txBody>
-      </p:sp>
-      <p:sp>
-        <p:nvSpPr>
-          <p:cNvPr id="27" name="">
-            <a:extLst xmlns:a="http://schemas.openxmlformats.org/drawingml/2006/main">
-              <a:ext uri="{FF2B5EF4-FFF2-40B4-BE49-F238E27FC236}">
-                <a16:creationId xmlns:a16="http://schemas.microsoft.com/office/drawing/2014/main" id="{27F2788E-701D-42C1-B342-CE471A063B6E}"/>
-              </a:ext>
-            </a:extLst>
-          </p:cNvPr>
-          <p:cNvSpPr>
-            <a:spLocks xmlns:a="http://schemas.openxmlformats.org/drawingml/2006/main" noGrp="1"/>
-          </p:cNvSpPr>
-          <p:nvPr/>
-        </p:nvSpPr>
-        <p:spPr>
-          <a:xfrm xmlns:a="http://schemas.openxmlformats.org/drawingml/2006/main">
-            <a:off x="1200150" y="4686300"/>
-            <a:ext cx="742950" cy="190500"/>
-          </a:xfrm>
-          <a:prstGeom xmlns:a="http://schemas.openxmlformats.org/drawingml/2006/main" prst="rect">
-            <a:avLst/>
-          </a:prstGeom>
-          <a:noFill xmlns:a="http://schemas.openxmlformats.org/drawingml/2006/main"/>
-          <a:ln xmlns:a="http://schemas.openxmlformats.org/drawingml/2006/main" w="0">
-            <a:noFill/>
-            <a:prstDash val="solid"/>
-          </a:ln>
-        </p:spPr>
-        <p:txBody>
-          <a:bodyPr xmlns:a="http://schemas.openxmlformats.org/drawingml/2006/main"/>
-          <a:lstStyle xmlns:a="http://schemas.openxmlformats.org/drawingml/2006/main"/>
-          <a:p xmlns:a="http://schemas.openxmlformats.org/drawingml/2006/main">
-            <a:pPr>
-              <a:defRPr sz="975" b="1">
-                <a:solidFill>
-                  <a:srgbClr val="FF6412"/>
-                </a:solidFill>
-              </a:defRPr>
-            </a:pPr>
-            <a:r>
-              <a:rPr sz="975" b="1">
-                <a:solidFill>
-                  <a:srgbClr val="FF6412"/>
-                </a:solidFill>
-              </a:rPr>
-              <a:t>Решение</a:t>
-            </a:r>
-          </a:p>
-        </p:txBody>
-      </p:sp>
-      <p:sp>
-        <p:nvSpPr>
-          <p:cNvPr id="28" name="">
-            <a:extLst xmlns:a="http://schemas.openxmlformats.org/drawingml/2006/main">
-              <a:ext uri="{FF2B5EF4-FFF2-40B4-BE49-F238E27FC236}">
-                <a16:creationId xmlns:a16="http://schemas.microsoft.com/office/drawing/2014/main" id="{C5FD67A0-746B-4035-9F96-1A7FEFB9D198}"/>
-              </a:ext>
-            </a:extLst>
-          </p:cNvPr>
-          <p:cNvSpPr>
-            <a:spLocks xmlns:a="http://schemas.openxmlformats.org/drawingml/2006/main" noGrp="1"/>
-          </p:cNvSpPr>
-          <p:nvPr/>
-        </p:nvSpPr>
-        <p:spPr>
-          <a:xfrm xmlns:a="http://schemas.openxmlformats.org/drawingml/2006/main">
-            <a:off x="1962150" y="4667250"/>
-            <a:ext cx="3810000" cy="323850"/>
-          </a:xfrm>
-          <a:prstGeom xmlns:a="http://schemas.openxmlformats.org/drawingml/2006/main" prst="rect">
-            <a:avLst/>
-          </a:prstGeom>
-          <a:noFill xmlns:a="http://schemas.openxmlformats.org/drawingml/2006/main"/>
-          <a:ln xmlns:a="http://schemas.openxmlformats.org/drawingml/2006/main" w="0">
-            <a:noFill/>
-            <a:prstDash val="solid"/>
-          </a:ln>
-        </p:spPr>
-        <p:txBody>
-          <a:bodyPr xmlns:a="http://schemas.openxmlformats.org/drawingml/2006/main"/>
-          <a:lstStyle xmlns:a="http://schemas.openxmlformats.org/drawingml/2006/main"/>
-          <a:p xmlns:a="http://schemas.openxmlformats.org/drawingml/2006/main">
-            <a:pPr>
-              <a:defRPr sz="1050" b="1">
-                <a:solidFill>
-                  <a:srgbClr val="161616"/>
-                </a:solidFill>
-              </a:defRPr>
-            </a:pPr>
-            <a:r>
-              <a:rPr sz="1050" b="1">
-                <a:solidFill>
-                  <a:srgbClr val="161616"/>
-                </a:solidFill>
-              </a:rPr>
-              <a:t>{{SEC_3_SOLUTION}}</a:t>
-            </a:r>
-          </a:p>
-        </p:txBody>
-      </p:sp>
-      <p:sp>
-        <p:nvSpPr>
-          <p:cNvPr id="29" name="">
-            <a:extLst xmlns:a="http://schemas.openxmlformats.org/drawingml/2006/main">
-              <a:ext uri="{FF2B5EF4-FFF2-40B4-BE49-F238E27FC236}">
-                <a16:creationId xmlns:a16="http://schemas.microsoft.com/office/drawing/2014/main" id="{EFEABB66-5D66-4FFA-A7E2-3240608FBD1E}"/>
-              </a:ext>
-            </a:extLst>
-          </p:cNvPr>
-          <p:cNvSpPr>
-            <a:spLocks xmlns:a="http://schemas.openxmlformats.org/drawingml/2006/main" noGrp="1"/>
-          </p:cNvSpPr>
-          <p:nvPr/>
-        </p:nvSpPr>
-        <p:spPr>
-          <a:xfrm xmlns:a="http://schemas.openxmlformats.org/drawingml/2006/main">
-            <a:off x="6019800" y="4686300"/>
-            <a:ext cx="1104900" cy="190500"/>
-          </a:xfrm>
-          <a:prstGeom xmlns:a="http://schemas.openxmlformats.org/drawingml/2006/main" prst="rect">
-            <a:avLst/>
-          </a:prstGeom>
-          <a:noFill xmlns:a="http://schemas.openxmlformats.org/drawingml/2006/main"/>
-          <a:ln xmlns:a="http://schemas.openxmlformats.org/drawingml/2006/main" w="0">
-            <a:noFill/>
-            <a:prstDash val="solid"/>
-          </a:ln>
-        </p:spPr>
-        <p:txBody>
-          <a:bodyPr xmlns:a="http://schemas.openxmlformats.org/drawingml/2006/main"/>
-          <a:lstStyle xmlns:a="http://schemas.openxmlformats.org/drawingml/2006/main"/>
-          <a:p xmlns:a="http://schemas.openxmlformats.org/drawingml/2006/main">
-            <a:pPr>
-              <a:defRPr sz="975" b="1">
-                <a:solidFill>
-                  <a:srgbClr val="FF6412"/>
-                </a:solidFill>
-              </a:defRPr>
-            </a:pPr>
-            <a:r>
-              <a:rPr sz="975" b="1">
-                <a:solidFill>
-                  <a:srgbClr val="FF6412"/>
-                </a:solidFill>
-              </a:rPr>
-              <a:t>Производители</a:t>
+              <a:t>{{REC_7_ACTION}}</a:t>
             </a:r>
           </a:p>
         </p:txBody>
@@ -8420,69 +9295,19 @@
           <p:cNvPr id="30" name="">
             <a:extLst xmlns:a="http://schemas.openxmlformats.org/drawingml/2006/main">
               <a:ext uri="{FF2B5EF4-FFF2-40B4-BE49-F238E27FC236}">
-                <a16:creationId xmlns:a16="http://schemas.microsoft.com/office/drawing/2014/main" id="{BE596B57-6C60-408E-81AB-C42514EB5D8A}"/>
-              </a:ext>
-            </a:extLst>
-          </p:cNvPr>
-          <p:cNvSpPr>
-            <a:spLocks xmlns:a="http://schemas.openxmlformats.org/drawingml/2006/main" noGrp="1"/>
-          </p:cNvSpPr>
-          <p:nvPr/>
-        </p:nvSpPr>
-        <p:spPr>
-          <a:xfrm xmlns:a="http://schemas.openxmlformats.org/drawingml/2006/main">
-            <a:off x="7181850" y="4667250"/>
-            <a:ext cx="4000500" cy="323850"/>
-          </a:xfrm>
-          <a:prstGeom xmlns:a="http://schemas.openxmlformats.org/drawingml/2006/main" prst="rect">
-            <a:avLst/>
-          </a:prstGeom>
-          <a:noFill xmlns:a="http://schemas.openxmlformats.org/drawingml/2006/main"/>
-          <a:ln xmlns:a="http://schemas.openxmlformats.org/drawingml/2006/main" w="0">
-            <a:noFill/>
-            <a:prstDash val="solid"/>
-          </a:ln>
-        </p:spPr>
-        <p:txBody>
-          <a:bodyPr xmlns:a="http://schemas.openxmlformats.org/drawingml/2006/main"/>
-          <a:lstStyle xmlns:a="http://schemas.openxmlformats.org/drawingml/2006/main"/>
-          <a:p xmlns:a="http://schemas.openxmlformats.org/drawingml/2006/main">
-            <a:pPr>
-              <a:defRPr sz="1050" b="1">
-                <a:solidFill>
-                  <a:srgbClr val="161616"/>
-                </a:solidFill>
-              </a:defRPr>
-            </a:pPr>
-            <a:r>
-              <a:rPr sz="1050" b="1">
-                <a:solidFill>
-                  <a:srgbClr val="161616"/>
-                </a:solidFill>
-              </a:rPr>
-              <a:t>{{SEC_3_VENDORS}}</a:t>
-            </a:r>
-          </a:p>
-        </p:txBody>
-      </p:sp>
-      <p:sp>
-        <p:nvSpPr>
-          <p:cNvPr id="31" name="">
-            <a:extLst xmlns:a="http://schemas.openxmlformats.org/drawingml/2006/main">
-              <a:ext uri="{FF2B5EF4-FFF2-40B4-BE49-F238E27FC236}">
-                <a16:creationId xmlns:a16="http://schemas.microsoft.com/office/drawing/2014/main" id="{C0865F4A-37A9-4B66-8FB7-3E994A211682}"/>
-              </a:ext>
-            </a:extLst>
-          </p:cNvPr>
-          <p:cNvSpPr>
-            <a:spLocks xmlns:a="http://schemas.openxmlformats.org/drawingml/2006/main" noGrp="1"/>
-          </p:cNvSpPr>
-          <p:nvPr/>
-        </p:nvSpPr>
-        <p:spPr>
-          <a:xfrm xmlns:a="http://schemas.openxmlformats.org/drawingml/2006/main">
-            <a:off x="1200150" y="5067300"/>
-            <a:ext cx="9982200" cy="9525"/>
+                <a16:creationId xmlns:a16="http://schemas.microsoft.com/office/drawing/2014/main" id="{091F818E-32FC-4C49-8440-424920B6B5C3}"/>
+              </a:ext>
+            </a:extLst>
+          </p:cNvPr>
+          <p:cNvSpPr>
+            <a:spLocks xmlns:a="http://schemas.openxmlformats.org/drawingml/2006/main" noGrp="1"/>
+          </p:cNvSpPr>
+          <p:nvPr/>
+        </p:nvSpPr>
+        <p:spPr>
+          <a:xfrm xmlns:a="http://schemas.openxmlformats.org/drawingml/2006/main">
+            <a:off x="762000" y="5114925"/>
+            <a:ext cx="4743450" cy="9525"/>
           </a:xfrm>
           <a:prstGeom xmlns:a="http://schemas.openxmlformats.org/drawingml/2006/main" prst="rect">
             <a:avLst/>
@@ -8498,22 +9323,257 @@
       </p:sp>
       <p:sp>
         <p:nvSpPr>
+          <p:cNvPr id="31" name="">
+            <a:extLst xmlns:a="http://schemas.openxmlformats.org/drawingml/2006/main">
+              <a:ext uri="{FF2B5EF4-FFF2-40B4-BE49-F238E27FC236}">
+                <a16:creationId xmlns:a16="http://schemas.microsoft.com/office/drawing/2014/main" id="{29AB91CB-566C-4572-95BA-5674B7340A68}"/>
+              </a:ext>
+            </a:extLst>
+          </p:cNvPr>
+          <p:cNvSpPr>
+            <a:spLocks xmlns:a="http://schemas.openxmlformats.org/drawingml/2006/main" noGrp="1"/>
+          </p:cNvSpPr>
+          <p:nvPr/>
+        </p:nvSpPr>
+        <p:spPr>
+          <a:xfrm xmlns:a="http://schemas.openxmlformats.org/drawingml/2006/main">
+            <a:off x="762000" y="5248275"/>
+            <a:ext cx="2171700" cy="171450"/>
+          </a:xfrm>
+          <a:prstGeom xmlns:a="http://schemas.openxmlformats.org/drawingml/2006/main" prst="rect">
+            <a:avLst/>
+          </a:prstGeom>
+          <a:noFill xmlns:a="http://schemas.openxmlformats.org/drawingml/2006/main"/>
+          <a:ln xmlns:a="http://schemas.openxmlformats.org/drawingml/2006/main" w="0">
+            <a:noFill/>
+            <a:prstDash val="solid"/>
+          </a:ln>
+        </p:spPr>
+        <p:txBody>
+          <a:bodyPr xmlns:a="http://schemas.openxmlformats.org/drawingml/2006/main"/>
+          <a:lstStyle xmlns:a="http://schemas.openxmlformats.org/drawingml/2006/main"/>
+          <a:p xmlns:a="http://schemas.openxmlformats.org/drawingml/2006/main">
+            <a:pPr>
+              <a:defRPr sz="900" b="1">
+                <a:solidFill>
+                  <a:srgbClr val="FF6412"/>
+                </a:solidFill>
+              </a:defRPr>
+            </a:pPr>
+            <a:r>
+              <a:rPr sz="900" b="1">
+                <a:solidFill>
+                  <a:srgbClr val="FF6412"/>
+                </a:solidFill>
+              </a:rPr>
+              <a:t>Решение</a:t>
+            </a:r>
+          </a:p>
+        </p:txBody>
+      </p:sp>
+      <p:sp>
+        <p:nvSpPr>
           <p:cNvPr id="32" name="">
             <a:extLst xmlns:a="http://schemas.openxmlformats.org/drawingml/2006/main">
               <a:ext uri="{FF2B5EF4-FFF2-40B4-BE49-F238E27FC236}">
-                <a16:creationId xmlns:a16="http://schemas.microsoft.com/office/drawing/2014/main" id="{41431341-F1B4-4440-9407-9B9F08B118F7}"/>
-              </a:ext>
-            </a:extLst>
-          </p:cNvPr>
-          <p:cNvSpPr>
-            <a:spLocks xmlns:a="http://schemas.openxmlformats.org/drawingml/2006/main" noGrp="1"/>
-          </p:cNvSpPr>
-          <p:nvPr/>
-        </p:nvSpPr>
-        <p:spPr>
-          <a:xfrm xmlns:a="http://schemas.openxmlformats.org/drawingml/2006/main">
-            <a:off x="609600" y="5238750"/>
-            <a:ext cx="457200" cy="266700"/>
+                <a16:creationId xmlns:a16="http://schemas.microsoft.com/office/drawing/2014/main" id="{0F5BFA46-6673-4A01-8FF0-8086DAF0D289}"/>
+              </a:ext>
+            </a:extLst>
+          </p:cNvPr>
+          <p:cNvSpPr>
+            <a:spLocks xmlns:a="http://schemas.openxmlformats.org/drawingml/2006/main" noGrp="1"/>
+          </p:cNvSpPr>
+          <p:nvPr/>
+        </p:nvSpPr>
+        <p:spPr>
+          <a:xfrm xmlns:a="http://schemas.openxmlformats.org/drawingml/2006/main">
+            <a:off x="762000" y="5438775"/>
+            <a:ext cx="2266950" cy="409575"/>
+          </a:xfrm>
+          <a:prstGeom xmlns:a="http://schemas.openxmlformats.org/drawingml/2006/main" prst="rect">
+            <a:avLst/>
+          </a:prstGeom>
+          <a:noFill xmlns:a="http://schemas.openxmlformats.org/drawingml/2006/main"/>
+          <a:ln xmlns:a="http://schemas.openxmlformats.org/drawingml/2006/main" w="0">
+            <a:noFill/>
+            <a:prstDash val="solid"/>
+          </a:ln>
+        </p:spPr>
+        <p:txBody>
+          <a:bodyPr xmlns:a="http://schemas.openxmlformats.org/drawingml/2006/main"/>
+          <a:lstStyle xmlns:a="http://schemas.openxmlformats.org/drawingml/2006/main"/>
+          <a:p xmlns:a="http://schemas.openxmlformats.org/drawingml/2006/main">
+            <a:pPr>
+              <a:defRPr sz="1050" b="1">
+                <a:solidFill>
+                  <a:srgbClr val="161616"/>
+                </a:solidFill>
+              </a:defRPr>
+            </a:pPr>
+            <a:r>
+              <a:rPr sz="1050" b="1">
+                <a:solidFill>
+                  <a:srgbClr val="161616"/>
+                </a:solidFill>
+              </a:rPr>
+              <a:t>{{REC_7_SOLUTION}}</a:t>
+            </a:r>
+          </a:p>
+        </p:txBody>
+      </p:sp>
+      <p:sp>
+        <p:nvSpPr>
+          <p:cNvPr id="33" name="">
+            <a:extLst xmlns:a="http://schemas.openxmlformats.org/drawingml/2006/main">
+              <a:ext uri="{FF2B5EF4-FFF2-40B4-BE49-F238E27FC236}">
+                <a16:creationId xmlns:a16="http://schemas.microsoft.com/office/drawing/2014/main" id="{69B3DF3D-E7D4-4910-8E54-655A8DFBEAD6}"/>
+              </a:ext>
+            </a:extLst>
+          </p:cNvPr>
+          <p:cNvSpPr>
+            <a:spLocks xmlns:a="http://schemas.openxmlformats.org/drawingml/2006/main" noGrp="1"/>
+          </p:cNvSpPr>
+          <p:nvPr/>
+        </p:nvSpPr>
+        <p:spPr>
+          <a:xfrm xmlns:a="http://schemas.openxmlformats.org/drawingml/2006/main">
+            <a:off x="3219450" y="5248275"/>
+            <a:ext cx="2266950" cy="171450"/>
+          </a:xfrm>
+          <a:prstGeom xmlns:a="http://schemas.openxmlformats.org/drawingml/2006/main" prst="rect">
+            <a:avLst/>
+          </a:prstGeom>
+          <a:noFill xmlns:a="http://schemas.openxmlformats.org/drawingml/2006/main"/>
+          <a:ln xmlns:a="http://schemas.openxmlformats.org/drawingml/2006/main" w="0">
+            <a:noFill/>
+            <a:prstDash val="solid"/>
+          </a:ln>
+        </p:spPr>
+        <p:txBody>
+          <a:bodyPr xmlns:a="http://schemas.openxmlformats.org/drawingml/2006/main"/>
+          <a:lstStyle xmlns:a="http://schemas.openxmlformats.org/drawingml/2006/main"/>
+          <a:p xmlns:a="http://schemas.openxmlformats.org/drawingml/2006/main">
+            <a:pPr>
+              <a:defRPr sz="900" b="1">
+                <a:solidFill>
+                  <a:srgbClr val="FF6412"/>
+                </a:solidFill>
+              </a:defRPr>
+            </a:pPr>
+            <a:r>
+              <a:rPr sz="900" b="1">
+                <a:solidFill>
+                  <a:srgbClr val="FF6412"/>
+                </a:solidFill>
+              </a:rPr>
+              <a:t>Производители</a:t>
+            </a:r>
+          </a:p>
+        </p:txBody>
+      </p:sp>
+      <p:sp>
+        <p:nvSpPr>
+          <p:cNvPr id="34" name="">
+            <a:extLst xmlns:a="http://schemas.openxmlformats.org/drawingml/2006/main">
+              <a:ext uri="{FF2B5EF4-FFF2-40B4-BE49-F238E27FC236}">
+                <a16:creationId xmlns:a16="http://schemas.microsoft.com/office/drawing/2014/main" id="{F572638B-A667-43A4-94A0-6F5BF9AA86D8}"/>
+              </a:ext>
+            </a:extLst>
+          </p:cNvPr>
+          <p:cNvSpPr>
+            <a:spLocks xmlns:a="http://schemas.openxmlformats.org/drawingml/2006/main" noGrp="1"/>
+          </p:cNvSpPr>
+          <p:nvPr/>
+        </p:nvSpPr>
+        <p:spPr>
+          <a:xfrm xmlns:a="http://schemas.openxmlformats.org/drawingml/2006/main">
+            <a:off x="3219450" y="5438775"/>
+            <a:ext cx="2266950" cy="409575"/>
+          </a:xfrm>
+          <a:prstGeom xmlns:a="http://schemas.openxmlformats.org/drawingml/2006/main" prst="rect">
+            <a:avLst/>
+          </a:prstGeom>
+          <a:noFill xmlns:a="http://schemas.openxmlformats.org/drawingml/2006/main"/>
+          <a:ln xmlns:a="http://schemas.openxmlformats.org/drawingml/2006/main" w="0">
+            <a:noFill/>
+            <a:prstDash val="solid"/>
+          </a:ln>
+        </p:spPr>
+        <p:txBody>
+          <a:bodyPr xmlns:a="http://schemas.openxmlformats.org/drawingml/2006/main"/>
+          <a:lstStyle xmlns:a="http://schemas.openxmlformats.org/drawingml/2006/main"/>
+          <a:p xmlns:a="http://schemas.openxmlformats.org/drawingml/2006/main">
+            <a:pPr>
+              <a:defRPr sz="1050" b="1">
+                <a:solidFill>
+                  <a:srgbClr val="161616"/>
+                </a:solidFill>
+              </a:defRPr>
+            </a:pPr>
+            <a:r>
+              <a:rPr sz="1050" b="1">
+                <a:solidFill>
+                  <a:srgbClr val="161616"/>
+                </a:solidFill>
+              </a:rPr>
+              <a:t>{{REC_7_VENDORS}}</a:t>
+            </a:r>
+          </a:p>
+        </p:txBody>
+      </p:sp>
+      <p:sp>
+        <p:nvSpPr>
+          <p:cNvPr id="35" name="">
+            <a:extLst xmlns:a="http://schemas.openxmlformats.org/drawingml/2006/main">
+              <a:ext uri="{FF2B5EF4-FFF2-40B4-BE49-F238E27FC236}">
+                <a16:creationId xmlns:a16="http://schemas.microsoft.com/office/drawing/2014/main" id="{AF4F55DA-D77B-483D-96E6-500C961009FA}"/>
+              </a:ext>
+            </a:extLst>
+          </p:cNvPr>
+          <p:cNvSpPr>
+            <a:spLocks xmlns:a="http://schemas.openxmlformats.org/drawingml/2006/main" noGrp="1"/>
+          </p:cNvSpPr>
+          <p:nvPr/>
+        </p:nvSpPr>
+        <p:spPr>
+          <a:xfrm xmlns:a="http://schemas.openxmlformats.org/drawingml/2006/main">
+            <a:off x="6076950" y="3857625"/>
+            <a:ext cx="5162550" cy="2143125"/>
+          </a:xfrm>
+          <a:prstGeom xmlns:a="http://schemas.openxmlformats.org/drawingml/2006/main" prst="roundRect">
+            <a:avLst>
+              <a:gd name="adj" fmla="val 3556"/>
+            </a:avLst>
+          </a:prstGeom>
+          <a:solidFill xmlns:a="http://schemas.openxmlformats.org/drawingml/2006/main">
+            <a:srgbClr val="FFFFFF"/>
+          </a:solidFill>
+          <a:ln xmlns:a="http://schemas.openxmlformats.org/drawingml/2006/main" w="9525">
+            <a:solidFill>
+              <a:srgbClr val="E4E7EC"/>
+            </a:solidFill>
+            <a:prstDash val="solid"/>
+          </a:ln>
+        </p:spPr>
+      </p:sp>
+      <p:sp>
+        <p:nvSpPr>
+          <p:cNvPr id="36" name="">
+            <a:extLst xmlns:a="http://schemas.openxmlformats.org/drawingml/2006/main">
+              <a:ext uri="{FF2B5EF4-FFF2-40B4-BE49-F238E27FC236}">
+                <a16:creationId xmlns:a16="http://schemas.microsoft.com/office/drawing/2014/main" id="{8C6EB3B3-F9A9-4FA3-B071-0FA0185DB642}"/>
+              </a:ext>
+            </a:extLst>
+          </p:cNvPr>
+          <p:cNvSpPr>
+            <a:spLocks xmlns:a="http://schemas.openxmlformats.org/drawingml/2006/main" noGrp="1"/>
+          </p:cNvSpPr>
+          <p:nvPr/>
+        </p:nvSpPr>
+        <p:spPr>
+          <a:xfrm xmlns:a="http://schemas.openxmlformats.org/drawingml/2006/main">
+            <a:off x="6267450" y="4029075"/>
+            <a:ext cx="361950" cy="247650"/>
           </a:xfrm>
           <a:prstGeom xmlns:a="http://schemas.openxmlformats.org/drawingml/2006/main" prst="rect">
             <a:avLst/>
@@ -8541,79 +9601,79 @@
                   <a:srgbClr val="FF6412"/>
                 </a:solidFill>
               </a:rPr>
-              <a:t>04</a:t>
-            </a:r>
-          </a:p>
-        </p:txBody>
-      </p:sp>
-      <p:sp>
-        <p:nvSpPr>
-          <p:cNvPr id="33" name="">
-            <a:extLst xmlns:a="http://schemas.openxmlformats.org/drawingml/2006/main">
-              <a:ext uri="{FF2B5EF4-FFF2-40B4-BE49-F238E27FC236}">
-                <a16:creationId xmlns:a16="http://schemas.microsoft.com/office/drawing/2014/main" id="{14CF72D3-61E0-4EC1-8498-BAC9C7B2DAF4}"/>
-              </a:ext>
-            </a:extLst>
-          </p:cNvPr>
-          <p:cNvSpPr>
-            <a:spLocks xmlns:a="http://schemas.openxmlformats.org/drawingml/2006/main" noGrp="1"/>
-          </p:cNvSpPr>
-          <p:nvPr/>
-        </p:nvSpPr>
-        <p:spPr>
-          <a:xfrm xmlns:a="http://schemas.openxmlformats.org/drawingml/2006/main">
-            <a:off x="1200150" y="5181600"/>
-            <a:ext cx="9982200" cy="266700"/>
-          </a:xfrm>
-          <a:prstGeom xmlns:a="http://schemas.openxmlformats.org/drawingml/2006/main" prst="rect">
-            <a:avLst/>
-          </a:prstGeom>
-          <a:noFill xmlns:a="http://schemas.openxmlformats.org/drawingml/2006/main"/>
-          <a:ln xmlns:a="http://schemas.openxmlformats.org/drawingml/2006/main" w="0">
-            <a:noFill/>
-            <a:prstDash val="solid"/>
-          </a:ln>
-        </p:spPr>
-        <p:txBody>
-          <a:bodyPr xmlns:a="http://schemas.openxmlformats.org/drawingml/2006/main"/>
-          <a:lstStyle xmlns:a="http://schemas.openxmlformats.org/drawingml/2006/main"/>
-          <a:p xmlns:a="http://schemas.openxmlformats.org/drawingml/2006/main">
-            <a:pPr>
-              <a:defRPr sz="1425" b="1">
-                <a:solidFill>
-                  <a:srgbClr val="161616"/>
-                </a:solidFill>
-              </a:defRPr>
-            </a:pPr>
-            <a:r>
-              <a:rPr sz="1425" b="1">
-                <a:solidFill>
-                  <a:srgbClr val="161616"/>
-                </a:solidFill>
-              </a:rPr>
-              <a:t>{{SEC_4_TITLE}}</a:t>
-            </a:r>
-          </a:p>
-        </p:txBody>
-      </p:sp>
-      <p:sp>
-        <p:nvSpPr>
-          <p:cNvPr id="34" name="">
-            <a:extLst xmlns:a="http://schemas.openxmlformats.org/drawingml/2006/main">
-              <a:ext uri="{FF2B5EF4-FFF2-40B4-BE49-F238E27FC236}">
-                <a16:creationId xmlns:a16="http://schemas.microsoft.com/office/drawing/2014/main" id="{7BBAB905-31C7-4E7C-B108-008283175B85}"/>
-              </a:ext>
-            </a:extLst>
-          </p:cNvPr>
-          <p:cNvSpPr>
-            <a:spLocks xmlns:a="http://schemas.openxmlformats.org/drawingml/2006/main" noGrp="1"/>
-          </p:cNvSpPr>
-          <p:nvPr/>
-        </p:nvSpPr>
-        <p:spPr>
-          <a:xfrm xmlns:a="http://schemas.openxmlformats.org/drawingml/2006/main">
-            <a:off x="1200150" y="5476875"/>
-            <a:ext cx="9982200" cy="400050"/>
+              <a:t>08</a:t>
+            </a:r>
+          </a:p>
+        </p:txBody>
+      </p:sp>
+      <p:sp>
+        <p:nvSpPr>
+          <p:cNvPr id="37" name="">
+            <a:extLst xmlns:a="http://schemas.openxmlformats.org/drawingml/2006/main">
+              <a:ext uri="{FF2B5EF4-FFF2-40B4-BE49-F238E27FC236}">
+                <a16:creationId xmlns:a16="http://schemas.microsoft.com/office/drawing/2014/main" id="{8219BF4D-0A89-45FD-924D-782E71E24759}"/>
+              </a:ext>
+            </a:extLst>
+          </p:cNvPr>
+          <p:cNvSpPr>
+            <a:spLocks xmlns:a="http://schemas.openxmlformats.org/drawingml/2006/main" noGrp="1"/>
+          </p:cNvSpPr>
+          <p:nvPr/>
+        </p:nvSpPr>
+        <p:spPr>
+          <a:xfrm xmlns:a="http://schemas.openxmlformats.org/drawingml/2006/main">
+            <a:off x="6686550" y="4000500"/>
+            <a:ext cx="4324350" cy="400050"/>
+          </a:xfrm>
+          <a:prstGeom xmlns:a="http://schemas.openxmlformats.org/drawingml/2006/main" prst="rect">
+            <a:avLst/>
+          </a:prstGeom>
+          <a:noFill xmlns:a="http://schemas.openxmlformats.org/drawingml/2006/main"/>
+          <a:ln xmlns:a="http://schemas.openxmlformats.org/drawingml/2006/main" w="0">
+            <a:noFill/>
+            <a:prstDash val="solid"/>
+          </a:ln>
+        </p:spPr>
+        <p:txBody>
+          <a:bodyPr xmlns:a="http://schemas.openxmlformats.org/drawingml/2006/main"/>
+          <a:lstStyle xmlns:a="http://schemas.openxmlformats.org/drawingml/2006/main"/>
+          <a:p xmlns:a="http://schemas.openxmlformats.org/drawingml/2006/main">
+            <a:pPr>
+              <a:defRPr sz="1350" b="1">
+                <a:solidFill>
+                  <a:srgbClr val="161616"/>
+                </a:solidFill>
+              </a:defRPr>
+            </a:pPr>
+            <a:r>
+              <a:rPr sz="1350" b="1">
+                <a:solidFill>
+                  <a:srgbClr val="161616"/>
+                </a:solidFill>
+              </a:rPr>
+              <a:t>{{REC_8_TITLE}}</a:t>
+            </a:r>
+          </a:p>
+        </p:txBody>
+      </p:sp>
+      <p:sp>
+        <p:nvSpPr>
+          <p:cNvPr id="38" name="">
+            <a:extLst xmlns:a="http://schemas.openxmlformats.org/drawingml/2006/main">
+              <a:ext uri="{FF2B5EF4-FFF2-40B4-BE49-F238E27FC236}">
+                <a16:creationId xmlns:a16="http://schemas.microsoft.com/office/drawing/2014/main" id="{52BD62D4-95E0-4973-85ED-06FEE9528FD5}"/>
+              </a:ext>
+            </a:extLst>
+          </p:cNvPr>
+          <p:cNvSpPr>
+            <a:spLocks xmlns:a="http://schemas.openxmlformats.org/drawingml/2006/main" noGrp="1"/>
+          </p:cNvSpPr>
+          <p:nvPr/>
+        </p:nvSpPr>
+        <p:spPr>
+          <a:xfrm xmlns:a="http://schemas.openxmlformats.org/drawingml/2006/main">
+            <a:off x="6286500" y="4476750"/>
+            <a:ext cx="4743450" cy="552450"/>
           </a:xfrm>
           <a:prstGeom xmlns:a="http://schemas.openxmlformats.org/drawingml/2006/main" prst="rect">
             <a:avLst/>
@@ -8641,52 +9701,83 @@
                   <a:srgbClr val="667085"/>
                 </a:solidFill>
               </a:rPr>
-              <a:t>{{SEC_4_ACTION}}</a:t>
-            </a:r>
-          </a:p>
-        </p:txBody>
-      </p:sp>
-      <p:sp>
-        <p:nvSpPr>
-          <p:cNvPr id="35" name="">
-            <a:extLst xmlns:a="http://schemas.openxmlformats.org/drawingml/2006/main">
-              <a:ext uri="{FF2B5EF4-FFF2-40B4-BE49-F238E27FC236}">
-                <a16:creationId xmlns:a16="http://schemas.microsoft.com/office/drawing/2014/main" id="{7ACE78B0-1C8D-4B47-92FF-FF51C4A57A9D}"/>
-              </a:ext>
-            </a:extLst>
-          </p:cNvPr>
-          <p:cNvSpPr>
-            <a:spLocks xmlns:a="http://schemas.openxmlformats.org/drawingml/2006/main" noGrp="1"/>
-          </p:cNvSpPr>
-          <p:nvPr/>
-        </p:nvSpPr>
-        <p:spPr>
-          <a:xfrm xmlns:a="http://schemas.openxmlformats.org/drawingml/2006/main">
-            <a:off x="1200150" y="5943600"/>
-            <a:ext cx="742950" cy="190500"/>
-          </a:xfrm>
-          <a:prstGeom xmlns:a="http://schemas.openxmlformats.org/drawingml/2006/main" prst="rect">
-            <a:avLst/>
-          </a:prstGeom>
-          <a:noFill xmlns:a="http://schemas.openxmlformats.org/drawingml/2006/main"/>
-          <a:ln xmlns:a="http://schemas.openxmlformats.org/drawingml/2006/main" w="0">
-            <a:noFill/>
-            <a:prstDash val="solid"/>
-          </a:ln>
-        </p:spPr>
-        <p:txBody>
-          <a:bodyPr xmlns:a="http://schemas.openxmlformats.org/drawingml/2006/main"/>
-          <a:lstStyle xmlns:a="http://schemas.openxmlformats.org/drawingml/2006/main"/>
-          <a:p xmlns:a="http://schemas.openxmlformats.org/drawingml/2006/main">
-            <a:pPr>
-              <a:defRPr sz="975" b="1">
+              <a:t>{{REC_8_ACTION}}</a:t>
+            </a:r>
+          </a:p>
+        </p:txBody>
+      </p:sp>
+      <p:sp>
+        <p:nvSpPr>
+          <p:cNvPr id="39" name="">
+            <a:extLst xmlns:a="http://schemas.openxmlformats.org/drawingml/2006/main">
+              <a:ext uri="{FF2B5EF4-FFF2-40B4-BE49-F238E27FC236}">
+                <a16:creationId xmlns:a16="http://schemas.microsoft.com/office/drawing/2014/main" id="{FAC37D1E-A3A9-4B1D-9043-B0148D923C16}"/>
+              </a:ext>
+            </a:extLst>
+          </p:cNvPr>
+          <p:cNvSpPr>
+            <a:spLocks xmlns:a="http://schemas.openxmlformats.org/drawingml/2006/main" noGrp="1"/>
+          </p:cNvSpPr>
+          <p:nvPr/>
+        </p:nvSpPr>
+        <p:spPr>
+          <a:xfrm xmlns:a="http://schemas.openxmlformats.org/drawingml/2006/main">
+            <a:off x="6286500" y="5114925"/>
+            <a:ext cx="4743450" cy="9525"/>
+          </a:xfrm>
+          <a:prstGeom xmlns:a="http://schemas.openxmlformats.org/drawingml/2006/main" prst="rect">
+            <a:avLst/>
+          </a:prstGeom>
+          <a:solidFill xmlns:a="http://schemas.openxmlformats.org/drawingml/2006/main">
+            <a:srgbClr val="E4E7EC"/>
+          </a:solidFill>
+          <a:ln xmlns:a="http://schemas.openxmlformats.org/drawingml/2006/main" w="0">
+            <a:noFill/>
+            <a:prstDash val="solid"/>
+          </a:ln>
+        </p:spPr>
+      </p:sp>
+      <p:sp>
+        <p:nvSpPr>
+          <p:cNvPr id="40" name="">
+            <a:extLst xmlns:a="http://schemas.openxmlformats.org/drawingml/2006/main">
+              <a:ext uri="{FF2B5EF4-FFF2-40B4-BE49-F238E27FC236}">
+                <a16:creationId xmlns:a16="http://schemas.microsoft.com/office/drawing/2014/main" id="{CA366E6E-577E-424E-B06D-72B0884BF758}"/>
+              </a:ext>
+            </a:extLst>
+          </p:cNvPr>
+          <p:cNvSpPr>
+            <a:spLocks xmlns:a="http://schemas.openxmlformats.org/drawingml/2006/main" noGrp="1"/>
+          </p:cNvSpPr>
+          <p:nvPr/>
+        </p:nvSpPr>
+        <p:spPr>
+          <a:xfrm xmlns:a="http://schemas.openxmlformats.org/drawingml/2006/main">
+            <a:off x="6286500" y="5248275"/>
+            <a:ext cx="2171700" cy="171450"/>
+          </a:xfrm>
+          <a:prstGeom xmlns:a="http://schemas.openxmlformats.org/drawingml/2006/main" prst="rect">
+            <a:avLst/>
+          </a:prstGeom>
+          <a:noFill xmlns:a="http://schemas.openxmlformats.org/drawingml/2006/main"/>
+          <a:ln xmlns:a="http://schemas.openxmlformats.org/drawingml/2006/main" w="0">
+            <a:noFill/>
+            <a:prstDash val="solid"/>
+          </a:ln>
+        </p:spPr>
+        <p:txBody>
+          <a:bodyPr xmlns:a="http://schemas.openxmlformats.org/drawingml/2006/main"/>
+          <a:lstStyle xmlns:a="http://schemas.openxmlformats.org/drawingml/2006/main"/>
+          <a:p xmlns:a="http://schemas.openxmlformats.org/drawingml/2006/main">
+            <a:pPr>
+              <a:defRPr sz="900" b="1">
                 <a:solidFill>
                   <a:srgbClr val="FF6412"/>
                 </a:solidFill>
               </a:defRPr>
             </a:pPr>
             <a:r>
-              <a:rPr sz="975" b="1">
+              <a:rPr sz="900" b="1">
                 <a:solidFill>
                   <a:srgbClr val="FF6412"/>
                 </a:solidFill>
@@ -8698,22 +9789,22 @@
       </p:sp>
       <p:sp>
         <p:nvSpPr>
-          <p:cNvPr id="36" name="">
-            <a:extLst xmlns:a="http://schemas.openxmlformats.org/drawingml/2006/main">
-              <a:ext uri="{FF2B5EF4-FFF2-40B4-BE49-F238E27FC236}">
-                <a16:creationId xmlns:a16="http://schemas.microsoft.com/office/drawing/2014/main" id="{BDB47B3B-6676-4E8A-A7C7-B24EAFC74EC2}"/>
-              </a:ext>
-            </a:extLst>
-          </p:cNvPr>
-          <p:cNvSpPr>
-            <a:spLocks xmlns:a="http://schemas.openxmlformats.org/drawingml/2006/main" noGrp="1"/>
-          </p:cNvSpPr>
-          <p:nvPr/>
-        </p:nvSpPr>
-        <p:spPr>
-          <a:xfrm xmlns:a="http://schemas.openxmlformats.org/drawingml/2006/main">
-            <a:off x="1962150" y="5924550"/>
-            <a:ext cx="3810000" cy="323850"/>
+          <p:cNvPr id="41" name="">
+            <a:extLst xmlns:a="http://schemas.openxmlformats.org/drawingml/2006/main">
+              <a:ext uri="{FF2B5EF4-FFF2-40B4-BE49-F238E27FC236}">
+                <a16:creationId xmlns:a16="http://schemas.microsoft.com/office/drawing/2014/main" id="{5157304A-ADB8-4DDA-B453-B82291A71CCF}"/>
+              </a:ext>
+            </a:extLst>
+          </p:cNvPr>
+          <p:cNvSpPr>
+            <a:spLocks xmlns:a="http://schemas.openxmlformats.org/drawingml/2006/main" noGrp="1"/>
+          </p:cNvSpPr>
+          <p:nvPr/>
+        </p:nvSpPr>
+        <p:spPr>
+          <a:xfrm xmlns:a="http://schemas.openxmlformats.org/drawingml/2006/main">
+            <a:off x="6286500" y="5438775"/>
+            <a:ext cx="2266950" cy="409575"/>
           </a:xfrm>
           <a:prstGeom xmlns:a="http://schemas.openxmlformats.org/drawingml/2006/main" prst="rect">
             <a:avLst/>
@@ -8741,52 +9832,52 @@
                   <a:srgbClr val="161616"/>
                 </a:solidFill>
               </a:rPr>
-              <a:t>{{SEC_4_SOLUTION}}</a:t>
-            </a:r>
-          </a:p>
-        </p:txBody>
-      </p:sp>
-      <p:sp>
-        <p:nvSpPr>
-          <p:cNvPr id="37" name="">
-            <a:extLst xmlns:a="http://schemas.openxmlformats.org/drawingml/2006/main">
-              <a:ext uri="{FF2B5EF4-FFF2-40B4-BE49-F238E27FC236}">
-                <a16:creationId xmlns:a16="http://schemas.microsoft.com/office/drawing/2014/main" id="{6F2109F6-B35B-4309-996A-762EAA525E9D}"/>
-              </a:ext>
-            </a:extLst>
-          </p:cNvPr>
-          <p:cNvSpPr>
-            <a:spLocks xmlns:a="http://schemas.openxmlformats.org/drawingml/2006/main" noGrp="1"/>
-          </p:cNvSpPr>
-          <p:nvPr/>
-        </p:nvSpPr>
-        <p:spPr>
-          <a:xfrm xmlns:a="http://schemas.openxmlformats.org/drawingml/2006/main">
-            <a:off x="6019800" y="5943600"/>
-            <a:ext cx="1104900" cy="190500"/>
-          </a:xfrm>
-          <a:prstGeom xmlns:a="http://schemas.openxmlformats.org/drawingml/2006/main" prst="rect">
-            <a:avLst/>
-          </a:prstGeom>
-          <a:noFill xmlns:a="http://schemas.openxmlformats.org/drawingml/2006/main"/>
-          <a:ln xmlns:a="http://schemas.openxmlformats.org/drawingml/2006/main" w="0">
-            <a:noFill/>
-            <a:prstDash val="solid"/>
-          </a:ln>
-        </p:spPr>
-        <p:txBody>
-          <a:bodyPr xmlns:a="http://schemas.openxmlformats.org/drawingml/2006/main"/>
-          <a:lstStyle xmlns:a="http://schemas.openxmlformats.org/drawingml/2006/main"/>
-          <a:p xmlns:a="http://schemas.openxmlformats.org/drawingml/2006/main">
-            <a:pPr>
-              <a:defRPr sz="975" b="1">
+              <a:t>{{REC_8_SOLUTION}}</a:t>
+            </a:r>
+          </a:p>
+        </p:txBody>
+      </p:sp>
+      <p:sp>
+        <p:nvSpPr>
+          <p:cNvPr id="42" name="">
+            <a:extLst xmlns:a="http://schemas.openxmlformats.org/drawingml/2006/main">
+              <a:ext uri="{FF2B5EF4-FFF2-40B4-BE49-F238E27FC236}">
+                <a16:creationId xmlns:a16="http://schemas.microsoft.com/office/drawing/2014/main" id="{6F0BE944-E802-42A5-BEDB-E6FDC2B9AF9A}"/>
+              </a:ext>
+            </a:extLst>
+          </p:cNvPr>
+          <p:cNvSpPr>
+            <a:spLocks xmlns:a="http://schemas.openxmlformats.org/drawingml/2006/main" noGrp="1"/>
+          </p:cNvSpPr>
+          <p:nvPr/>
+        </p:nvSpPr>
+        <p:spPr>
+          <a:xfrm xmlns:a="http://schemas.openxmlformats.org/drawingml/2006/main">
+            <a:off x="8743950" y="5248275"/>
+            <a:ext cx="2266950" cy="171450"/>
+          </a:xfrm>
+          <a:prstGeom xmlns:a="http://schemas.openxmlformats.org/drawingml/2006/main" prst="rect">
+            <a:avLst/>
+          </a:prstGeom>
+          <a:noFill xmlns:a="http://schemas.openxmlformats.org/drawingml/2006/main"/>
+          <a:ln xmlns:a="http://schemas.openxmlformats.org/drawingml/2006/main" w="0">
+            <a:noFill/>
+            <a:prstDash val="solid"/>
+          </a:ln>
+        </p:spPr>
+        <p:txBody>
+          <a:bodyPr xmlns:a="http://schemas.openxmlformats.org/drawingml/2006/main"/>
+          <a:lstStyle xmlns:a="http://schemas.openxmlformats.org/drawingml/2006/main"/>
+          <a:p xmlns:a="http://schemas.openxmlformats.org/drawingml/2006/main">
+            <a:pPr>
+              <a:defRPr sz="900" b="1">
                 <a:solidFill>
                   <a:srgbClr val="FF6412"/>
                 </a:solidFill>
               </a:defRPr>
             </a:pPr>
             <a:r>
-              <a:rPr sz="975" b="1">
+              <a:rPr sz="900" b="1">
                 <a:solidFill>
                   <a:srgbClr val="FF6412"/>
                 </a:solidFill>
@@ -8798,22 +9889,22 @@
       </p:sp>
       <p:sp>
         <p:nvSpPr>
-          <p:cNvPr id="38" name="">
-            <a:extLst xmlns:a="http://schemas.openxmlformats.org/drawingml/2006/main">
-              <a:ext uri="{FF2B5EF4-FFF2-40B4-BE49-F238E27FC236}">
-                <a16:creationId xmlns:a16="http://schemas.microsoft.com/office/drawing/2014/main" id="{A4D0672E-8EF5-4853-95BA-684854FD548A}"/>
-              </a:ext>
-            </a:extLst>
-          </p:cNvPr>
-          <p:cNvSpPr>
-            <a:spLocks xmlns:a="http://schemas.openxmlformats.org/drawingml/2006/main" noGrp="1"/>
-          </p:cNvSpPr>
-          <p:nvPr/>
-        </p:nvSpPr>
-        <p:spPr>
-          <a:xfrm xmlns:a="http://schemas.openxmlformats.org/drawingml/2006/main">
-            <a:off x="7181850" y="5924550"/>
-            <a:ext cx="4000500" cy="323850"/>
+          <p:cNvPr id="43" name="">
+            <a:extLst xmlns:a="http://schemas.openxmlformats.org/drawingml/2006/main">
+              <a:ext uri="{FF2B5EF4-FFF2-40B4-BE49-F238E27FC236}">
+                <a16:creationId xmlns:a16="http://schemas.microsoft.com/office/drawing/2014/main" id="{00D3A4A9-F546-4258-97FA-476CCF26C290}"/>
+              </a:ext>
+            </a:extLst>
+          </p:cNvPr>
+          <p:cNvSpPr>
+            <a:spLocks xmlns:a="http://schemas.openxmlformats.org/drawingml/2006/main" noGrp="1"/>
+          </p:cNvSpPr>
+          <p:nvPr/>
+        </p:nvSpPr>
+        <p:spPr>
+          <a:xfrm xmlns:a="http://schemas.openxmlformats.org/drawingml/2006/main">
+            <a:off x="8743950" y="5438775"/>
+            <a:ext cx="2266950" cy="409575"/>
           </a:xfrm>
           <a:prstGeom xmlns:a="http://schemas.openxmlformats.org/drawingml/2006/main" prst="rect">
             <a:avLst/>
@@ -8841,7 +9932,7 @@
                   <a:srgbClr val="161616"/>
                 </a:solidFill>
               </a:rPr>
-              <a:t>{{SEC_4_VENDORS}}</a:t>
+              <a:t>{{REC_8_VENDORS}}</a:t>
             </a:r>
           </a:p>
         </p:txBody>
@@ -8849,7 +9940,7 @@
     </p:spTree>
     <p:extLst>
       <p:ext uri="{BB962C8B-B14F-4D97-AF65-F5344CB8AC3E}">
-        <p14:creationId xmlns:p14="http://schemas.microsoft.com/office/powerpoint/2010/main" val="579356930"/>
+        <p14:creationId xmlns:p14="http://schemas.microsoft.com/office/powerpoint/2010/main" val="1638769503"/>
       </p:ext>
     </p:extLst>
   </p:cSld>
@@ -8880,7 +9971,7 @@
           <p:cNvPr id="1" name="">
             <a:extLst xmlns:a="http://schemas.openxmlformats.org/drawingml/2006/main">
               <a:ext uri="{FF2B5EF4-FFF2-40B4-BE49-F238E27FC236}">
-                <a16:creationId xmlns:a16="http://schemas.microsoft.com/office/drawing/2014/main" id="{F037E29F-2C61-463A-BD39-44A122B88AC7}"/>
+                <a16:creationId xmlns:a16="http://schemas.microsoft.com/office/drawing/2014/main" id="{1D0819F5-2A8F-4F4D-BC89-F0A137FD1F10}"/>
               </a:ext>
             </a:extLst>
           </p:cNvPr>
@@ -8915,7 +10006,7 @@
           <p:nvPr/>
         </p:nvPicPr>
         <p:blipFill>
-          <a:blip xmlns:r="http://schemas.openxmlformats.org/officeDocument/2006/relationships" xmlns:a="http://schemas.openxmlformats.org/drawingml/2006/main" r:embed="R0af8997e22fa4aee"/>
+          <a:blip xmlns:r="http://schemas.openxmlformats.org/officeDocument/2006/relationships" xmlns:a="http://schemas.openxmlformats.org/drawingml/2006/main" r:embed="R229772d6d76f4285"/>
           <a:stretch xmlns:a="http://schemas.openxmlformats.org/drawingml/2006/main"/>
         </p:blipFill>
         <p:spPr>
@@ -8933,7 +10024,7 @@
           <p:cNvPr id="3" name="">
             <a:extLst xmlns:a="http://schemas.openxmlformats.org/drawingml/2006/main">
               <a:ext uri="{FF2B5EF4-FFF2-40B4-BE49-F238E27FC236}">
-                <a16:creationId xmlns:a16="http://schemas.microsoft.com/office/drawing/2014/main" id="{A9358CA5-0265-4D9B-BB90-4713A53E29EF}"/>
+                <a16:creationId xmlns:a16="http://schemas.microsoft.com/office/drawing/2014/main" id="{E54E9FEE-FD09-4737-932D-9054AA9B9028}"/>
               </a:ext>
             </a:extLst>
           </p:cNvPr>
@@ -8983,7 +10074,7 @@
           <p:cNvPr id="4" name="">
             <a:extLst xmlns:a="http://schemas.openxmlformats.org/drawingml/2006/main">
               <a:ext uri="{FF2B5EF4-FFF2-40B4-BE49-F238E27FC236}">
-                <a16:creationId xmlns:a16="http://schemas.microsoft.com/office/drawing/2014/main" id="{C0644DDC-8239-4006-B875-A6E9BDC70919}"/>
+                <a16:creationId xmlns:a16="http://schemas.microsoft.com/office/drawing/2014/main" id="{7BF95C3D-42C3-4B8E-AE0C-DCF292E7E561}"/>
               </a:ext>
             </a:extLst>
           </p:cNvPr>
@@ -9016,7 +10107,7 @@
           <p:cNvPr id="5" name="">
             <a:extLst xmlns:a="http://schemas.openxmlformats.org/drawingml/2006/main">
               <a:ext uri="{FF2B5EF4-FFF2-40B4-BE49-F238E27FC236}">
-                <a16:creationId xmlns:a16="http://schemas.microsoft.com/office/drawing/2014/main" id="{E9A2F387-AF61-4B81-A021-1C2E6128E798}"/>
+                <a16:creationId xmlns:a16="http://schemas.microsoft.com/office/drawing/2014/main" id="{FDB06848-5E39-47EE-AEA5-C8EAE4AFDB54}"/>
               </a:ext>
             </a:extLst>
           </p:cNvPr>
@@ -9047,7 +10138,7 @@
           <p:cNvPr id="6" name="">
             <a:extLst xmlns:a="http://schemas.openxmlformats.org/drawingml/2006/main">
               <a:ext uri="{FF2B5EF4-FFF2-40B4-BE49-F238E27FC236}">
-                <a16:creationId xmlns:a16="http://schemas.microsoft.com/office/drawing/2014/main" id="{47694219-A1E1-4025-9B42-745265D7A151}"/>
+                <a16:creationId xmlns:a16="http://schemas.microsoft.com/office/drawing/2014/main" id="{2CAEA665-8F55-43C6-BB28-C8F254DC50CD}"/>
               </a:ext>
             </a:extLst>
           </p:cNvPr>
@@ -9097,7 +10188,7 @@
           <p:cNvPr id="7" name="">
             <a:extLst xmlns:a="http://schemas.openxmlformats.org/drawingml/2006/main">
               <a:ext uri="{FF2B5EF4-FFF2-40B4-BE49-F238E27FC236}">
-                <a16:creationId xmlns:a16="http://schemas.microsoft.com/office/drawing/2014/main" id="{19F80CD0-3630-407C-A51B-2A670EA72FA6}"/>
+                <a16:creationId xmlns:a16="http://schemas.microsoft.com/office/drawing/2014/main" id="{3E828B4A-6B8E-485D-AB3F-900165E7D29C}"/>
               </a:ext>
             </a:extLst>
           </p:cNvPr>
@@ -9147,7 +10238,7 @@
           <p:cNvPr id="8" name="">
             <a:extLst xmlns:a="http://schemas.openxmlformats.org/drawingml/2006/main">
               <a:ext uri="{FF2B5EF4-FFF2-40B4-BE49-F238E27FC236}">
-                <a16:creationId xmlns:a16="http://schemas.microsoft.com/office/drawing/2014/main" id="{3AA4F72D-13B4-429C-8FE3-5D1FCF4E7B0A}"/>
+                <a16:creationId xmlns:a16="http://schemas.microsoft.com/office/drawing/2014/main" id="{1CCE602D-BBD0-4F55-A0F1-1DC2F91D4CFB}"/>
               </a:ext>
             </a:extLst>
           </p:cNvPr>
@@ -9182,7 +10273,7 @@
           <p:cNvPr id="9" name="">
             <a:extLst xmlns:a="http://schemas.openxmlformats.org/drawingml/2006/main">
               <a:ext uri="{FF2B5EF4-FFF2-40B4-BE49-F238E27FC236}">
-                <a16:creationId xmlns:a16="http://schemas.microsoft.com/office/drawing/2014/main" id="{7CF9B0F5-CD2D-4E76-9BAE-87B450D564A0}"/>
+                <a16:creationId xmlns:a16="http://schemas.microsoft.com/office/drawing/2014/main" id="{48B061E7-22E9-4E8A-BF0C-97C05CC89A39}"/>
               </a:ext>
             </a:extLst>
           </p:cNvPr>
@@ -9215,7 +10306,7 @@
           <p:cNvPr id="10" name="">
             <a:extLst xmlns:a="http://schemas.openxmlformats.org/drawingml/2006/main">
               <a:ext uri="{FF2B5EF4-FFF2-40B4-BE49-F238E27FC236}">
-                <a16:creationId xmlns:a16="http://schemas.microsoft.com/office/drawing/2014/main" id="{0C541B2C-9CD6-4393-AE3C-67ED64DA87B2}"/>
+                <a16:creationId xmlns:a16="http://schemas.microsoft.com/office/drawing/2014/main" id="{7E4286E8-A97E-409F-A664-0B0CAFDD533A}"/>
               </a:ext>
             </a:extLst>
           </p:cNvPr>
@@ -9265,7 +10356,7 @@
           <p:cNvPr id="11" name="">
             <a:extLst xmlns:a="http://schemas.openxmlformats.org/drawingml/2006/main">
               <a:ext uri="{FF2B5EF4-FFF2-40B4-BE49-F238E27FC236}">
-                <a16:creationId xmlns:a16="http://schemas.microsoft.com/office/drawing/2014/main" id="{C71B10A8-96D5-4E60-A4C3-F44CBC2B12DD}"/>
+                <a16:creationId xmlns:a16="http://schemas.microsoft.com/office/drawing/2014/main" id="{30911832-8980-4F17-82B4-1CBC1871A216}"/>
               </a:ext>
             </a:extLst>
           </p:cNvPr>
@@ -9315,7 +10406,7 @@
           <p:cNvPr id="12" name="">
             <a:extLst xmlns:a="http://schemas.openxmlformats.org/drawingml/2006/main">
               <a:ext uri="{FF2B5EF4-FFF2-40B4-BE49-F238E27FC236}">
-                <a16:creationId xmlns:a16="http://schemas.microsoft.com/office/drawing/2014/main" id="{7EE9BF2E-46A4-4176-A40B-95FD71DDF0A7}"/>
+                <a16:creationId xmlns:a16="http://schemas.microsoft.com/office/drawing/2014/main" id="{1C353DF3-D1B8-4709-AF95-E76A8CE0D4B9}"/>
               </a:ext>
             </a:extLst>
           </p:cNvPr>
@@ -9365,7 +10456,7 @@
           <p:cNvPr id="13" name="">
             <a:extLst xmlns:a="http://schemas.openxmlformats.org/drawingml/2006/main">
               <a:ext uri="{FF2B5EF4-FFF2-40B4-BE49-F238E27FC236}">
-                <a16:creationId xmlns:a16="http://schemas.microsoft.com/office/drawing/2014/main" id="{A2C76B52-C369-4F75-AA0B-2486F3BCD0E7}"/>
+                <a16:creationId xmlns:a16="http://schemas.microsoft.com/office/drawing/2014/main" id="{CAE1CE3B-D073-4384-ACC9-16B2BD041BBF}"/>
               </a:ext>
             </a:extLst>
           </p:cNvPr>
@@ -9396,7 +10487,7 @@
           <p:cNvPr id="14" name="">
             <a:extLst xmlns:a="http://schemas.openxmlformats.org/drawingml/2006/main">
               <a:ext uri="{FF2B5EF4-FFF2-40B4-BE49-F238E27FC236}">
-                <a16:creationId xmlns:a16="http://schemas.microsoft.com/office/drawing/2014/main" id="{A90A5628-FF65-4040-86F8-903AD26E0E80}"/>
+                <a16:creationId xmlns:a16="http://schemas.microsoft.com/office/drawing/2014/main" id="{1899A93F-D4F5-4530-88FC-B90655AB7C35}"/>
               </a:ext>
             </a:extLst>
           </p:cNvPr>
@@ -9446,7 +10537,7 @@
           <p:cNvPr id="15" name="">
             <a:extLst xmlns:a="http://schemas.openxmlformats.org/drawingml/2006/main">
               <a:ext uri="{FF2B5EF4-FFF2-40B4-BE49-F238E27FC236}">
-                <a16:creationId xmlns:a16="http://schemas.microsoft.com/office/drawing/2014/main" id="{6261F001-B63F-4FB2-8631-C482637E4733}"/>
+                <a16:creationId xmlns:a16="http://schemas.microsoft.com/office/drawing/2014/main" id="{067776E9-B415-4414-B7D6-53C75912AC25}"/>
               </a:ext>
             </a:extLst>
           </p:cNvPr>
@@ -9496,7 +10587,7 @@
           <p:cNvPr id="16" name="">
             <a:extLst xmlns:a="http://schemas.openxmlformats.org/drawingml/2006/main">
               <a:ext uri="{FF2B5EF4-FFF2-40B4-BE49-F238E27FC236}">
-                <a16:creationId xmlns:a16="http://schemas.microsoft.com/office/drawing/2014/main" id="{F0F5F9C4-FE11-401D-9DFD-3364283F04E3}"/>
+                <a16:creationId xmlns:a16="http://schemas.microsoft.com/office/drawing/2014/main" id="{5CCFCF11-8D14-4AA2-A498-3CA419891E51}"/>
               </a:ext>
             </a:extLst>
           </p:cNvPr>
@@ -9531,7 +10622,7 @@
           <p:cNvPr id="17" name="">
             <a:extLst xmlns:a="http://schemas.openxmlformats.org/drawingml/2006/main">
               <a:ext uri="{FF2B5EF4-FFF2-40B4-BE49-F238E27FC236}">
-                <a16:creationId xmlns:a16="http://schemas.microsoft.com/office/drawing/2014/main" id="{A404E6B2-B936-4409-9630-EAE5A7B03259}"/>
+                <a16:creationId xmlns:a16="http://schemas.microsoft.com/office/drawing/2014/main" id="{FCE009BE-292F-4A35-A4A5-362E91A288A2}"/>
               </a:ext>
             </a:extLst>
           </p:cNvPr>
@@ -9564,7 +10655,7 @@
           <p:cNvPr id="18" name="">
             <a:extLst xmlns:a="http://schemas.openxmlformats.org/drawingml/2006/main">
               <a:ext uri="{FF2B5EF4-FFF2-40B4-BE49-F238E27FC236}">
-                <a16:creationId xmlns:a16="http://schemas.microsoft.com/office/drawing/2014/main" id="{2AC59F59-747E-4DB4-8779-F3F76AB5CD2E}"/>
+                <a16:creationId xmlns:a16="http://schemas.microsoft.com/office/drawing/2014/main" id="{82AB5932-C33D-4593-8AD4-04D67FCDD23A}"/>
               </a:ext>
             </a:extLst>
           </p:cNvPr>
@@ -9614,7 +10705,7 @@
           <p:cNvPr id="19" name="">
             <a:extLst xmlns:a="http://schemas.openxmlformats.org/drawingml/2006/main">
               <a:ext uri="{FF2B5EF4-FFF2-40B4-BE49-F238E27FC236}">
-                <a16:creationId xmlns:a16="http://schemas.microsoft.com/office/drawing/2014/main" id="{617E077B-0909-4526-9B55-6CA568FDE415}"/>
+                <a16:creationId xmlns:a16="http://schemas.microsoft.com/office/drawing/2014/main" id="{BB6FDD04-3908-450D-9D1B-1E5874738B44}"/>
               </a:ext>
             </a:extLst>
           </p:cNvPr>
@@ -9664,7 +10755,7 @@
           <p:cNvPr id="20" name="">
             <a:extLst xmlns:a="http://schemas.openxmlformats.org/drawingml/2006/main">
               <a:ext uri="{FF2B5EF4-FFF2-40B4-BE49-F238E27FC236}">
-                <a16:creationId xmlns:a16="http://schemas.microsoft.com/office/drawing/2014/main" id="{DB5C822B-E69B-4819-A87D-EF97D568EE7F}"/>
+                <a16:creationId xmlns:a16="http://schemas.microsoft.com/office/drawing/2014/main" id="{E54B5E38-A810-4195-A010-B193756EAB14}"/>
               </a:ext>
             </a:extLst>
           </p:cNvPr>
@@ -9714,7 +10805,7 @@
           <p:cNvPr id="21" name="">
             <a:extLst xmlns:a="http://schemas.openxmlformats.org/drawingml/2006/main">
               <a:ext uri="{FF2B5EF4-FFF2-40B4-BE49-F238E27FC236}">
-                <a16:creationId xmlns:a16="http://schemas.microsoft.com/office/drawing/2014/main" id="{907AB9C1-3329-40E7-8801-C800B4B41611}"/>
+                <a16:creationId xmlns:a16="http://schemas.microsoft.com/office/drawing/2014/main" id="{5D36F61F-412A-40FA-A00E-9A6E79024E50}"/>
               </a:ext>
             </a:extLst>
           </p:cNvPr>
@@ -9745,7 +10836,7 @@
           <p:cNvPr id="22" name="">
             <a:extLst xmlns:a="http://schemas.openxmlformats.org/drawingml/2006/main">
               <a:ext uri="{FF2B5EF4-FFF2-40B4-BE49-F238E27FC236}">
-                <a16:creationId xmlns:a16="http://schemas.microsoft.com/office/drawing/2014/main" id="{716F6664-DAF3-4475-89AE-3BD2CF888436}"/>
+                <a16:creationId xmlns:a16="http://schemas.microsoft.com/office/drawing/2014/main" id="{51F1B06B-E448-4EB0-9F34-CA24CC90E096}"/>
               </a:ext>
             </a:extLst>
           </p:cNvPr>
@@ -9795,7 +10886,7 @@
           <p:cNvPr id="23" name="">
             <a:extLst xmlns:a="http://schemas.openxmlformats.org/drawingml/2006/main">
               <a:ext uri="{FF2B5EF4-FFF2-40B4-BE49-F238E27FC236}">
-                <a16:creationId xmlns:a16="http://schemas.microsoft.com/office/drawing/2014/main" id="{5B47F24C-8C9F-40E6-8E5A-C5E6BA4C1238}"/>
+                <a16:creationId xmlns:a16="http://schemas.microsoft.com/office/drawing/2014/main" id="{E4294517-5A25-4319-B52F-1390EC185F16}"/>
               </a:ext>
             </a:extLst>
           </p:cNvPr>
@@ -9845,7 +10936,7 @@
           <p:cNvPr id="24" name="">
             <a:extLst xmlns:a="http://schemas.openxmlformats.org/drawingml/2006/main">
               <a:ext uri="{FF2B5EF4-FFF2-40B4-BE49-F238E27FC236}">
-                <a16:creationId xmlns:a16="http://schemas.microsoft.com/office/drawing/2014/main" id="{4D8818F5-7811-4848-BDAB-6B155C5103EB}"/>
+                <a16:creationId xmlns:a16="http://schemas.microsoft.com/office/drawing/2014/main" id="{1DDE1D28-32DB-4D08-A7A7-EE7302DAC146}"/>
               </a:ext>
             </a:extLst>
           </p:cNvPr>
@@ -9880,7 +10971,7 @@
           <p:cNvPr id="25" name="">
             <a:extLst xmlns:a="http://schemas.openxmlformats.org/drawingml/2006/main">
               <a:ext uri="{FF2B5EF4-FFF2-40B4-BE49-F238E27FC236}">
-                <a16:creationId xmlns:a16="http://schemas.microsoft.com/office/drawing/2014/main" id="{EE1D6B65-5BFC-4171-AF56-20874D76E971}"/>
+                <a16:creationId xmlns:a16="http://schemas.microsoft.com/office/drawing/2014/main" id="{19BADBA2-5F5F-4E11-A7F1-48EA0A8A81BF}"/>
               </a:ext>
             </a:extLst>
           </p:cNvPr>
@@ -9913,7 +11004,7 @@
           <p:cNvPr id="26" name="">
             <a:extLst xmlns:a="http://schemas.openxmlformats.org/drawingml/2006/main">
               <a:ext uri="{FF2B5EF4-FFF2-40B4-BE49-F238E27FC236}">
-                <a16:creationId xmlns:a16="http://schemas.microsoft.com/office/drawing/2014/main" id="{728481CA-226B-4A75-8C74-56E81F5AFB85}"/>
+                <a16:creationId xmlns:a16="http://schemas.microsoft.com/office/drawing/2014/main" id="{DE55131C-2885-479A-AF0C-2A76733B2965}"/>
               </a:ext>
             </a:extLst>
           </p:cNvPr>
@@ -9963,7 +11054,7 @@
           <p:cNvPr id="27" name="">
             <a:extLst xmlns:a="http://schemas.openxmlformats.org/drawingml/2006/main">
               <a:ext uri="{FF2B5EF4-FFF2-40B4-BE49-F238E27FC236}">
-                <a16:creationId xmlns:a16="http://schemas.microsoft.com/office/drawing/2014/main" id="{3CDCE293-FF9F-4874-B972-A779F91E650D}"/>
+                <a16:creationId xmlns:a16="http://schemas.microsoft.com/office/drawing/2014/main" id="{0F1F1F44-1E4D-4581-BD80-29841829A181}"/>
               </a:ext>
             </a:extLst>
           </p:cNvPr>
@@ -10013,7 +11104,7 @@
           <p:cNvPr id="28" name="">
             <a:extLst xmlns:a="http://schemas.openxmlformats.org/drawingml/2006/main">
               <a:ext uri="{FF2B5EF4-FFF2-40B4-BE49-F238E27FC236}">
-                <a16:creationId xmlns:a16="http://schemas.microsoft.com/office/drawing/2014/main" id="{64E65F25-4E55-4104-B4E0-D5369B578962}"/>
+                <a16:creationId xmlns:a16="http://schemas.microsoft.com/office/drawing/2014/main" id="{E50D8911-BFD7-4410-9139-0A1957456DF9}"/>
               </a:ext>
             </a:extLst>
           </p:cNvPr>
@@ -10063,7 +11154,7 @@
           <p:cNvPr id="29" name="">
             <a:extLst xmlns:a="http://schemas.openxmlformats.org/drawingml/2006/main">
               <a:ext uri="{FF2B5EF4-FFF2-40B4-BE49-F238E27FC236}">
-                <a16:creationId xmlns:a16="http://schemas.microsoft.com/office/drawing/2014/main" id="{BFBAD827-A5C2-4817-8D72-FBA31330C42D}"/>
+                <a16:creationId xmlns:a16="http://schemas.microsoft.com/office/drawing/2014/main" id="{6B57F998-C56D-4737-AA30-C45D61F98001}"/>
               </a:ext>
             </a:extLst>
           </p:cNvPr>
@@ -10094,7 +11185,7 @@
           <p:cNvPr id="30" name="">
             <a:extLst xmlns:a="http://schemas.openxmlformats.org/drawingml/2006/main">
               <a:ext uri="{FF2B5EF4-FFF2-40B4-BE49-F238E27FC236}">
-                <a16:creationId xmlns:a16="http://schemas.microsoft.com/office/drawing/2014/main" id="{E2FD58FC-8C82-4FE5-ADCF-49211796B06D}"/>
+                <a16:creationId xmlns:a16="http://schemas.microsoft.com/office/drawing/2014/main" id="{D65D2200-BB0C-4D87-8550-4A34449709EE}"/>
               </a:ext>
             </a:extLst>
           </p:cNvPr>
@@ -10144,7 +11235,7 @@
           <p:cNvPr id="31" name="">
             <a:extLst xmlns:a="http://schemas.openxmlformats.org/drawingml/2006/main">
               <a:ext uri="{FF2B5EF4-FFF2-40B4-BE49-F238E27FC236}">
-                <a16:creationId xmlns:a16="http://schemas.microsoft.com/office/drawing/2014/main" id="{4C06354F-EFD6-4017-9849-C30B97D1DB7B}"/>
+                <a16:creationId xmlns:a16="http://schemas.microsoft.com/office/drawing/2014/main" id="{9F71E56E-4239-40C2-BF4E-88831C7C9099}"/>
               </a:ext>
             </a:extLst>
           </p:cNvPr>
@@ -10192,7 +11283,7 @@
     </p:spTree>
     <p:extLst>
       <p:ext uri="{BB962C8B-B14F-4D97-AF65-F5344CB8AC3E}">
-        <p14:creationId xmlns:p14="http://schemas.microsoft.com/office/powerpoint/2010/main" val="643507263"/>
+        <p14:creationId xmlns:p14="http://schemas.microsoft.com/office/powerpoint/2010/main" val="1987505269"/>
       </p:ext>
     </p:extLst>
   </p:cSld>
@@ -10223,7 +11314,7 @@
           <p:cNvPr id="1" name="">
             <a:extLst xmlns:a="http://schemas.openxmlformats.org/drawingml/2006/main">
               <a:ext uri="{FF2B5EF4-FFF2-40B4-BE49-F238E27FC236}">
-                <a16:creationId xmlns:a16="http://schemas.microsoft.com/office/drawing/2014/main" id="{9ABFF5B5-565A-4980-8E47-226DD44A2DE7}"/>
+                <a16:creationId xmlns:a16="http://schemas.microsoft.com/office/drawing/2014/main" id="{565BFBCA-4527-49FE-BE23-26ABD45EEE3B}"/>
               </a:ext>
             </a:extLst>
           </p:cNvPr>
@@ -10258,7 +11349,7 @@
           <p:nvPr/>
         </p:nvPicPr>
         <p:blipFill>
-          <a:blip xmlns:r="http://schemas.openxmlformats.org/officeDocument/2006/relationships" xmlns:a="http://schemas.openxmlformats.org/drawingml/2006/main" r:embed="R89286b4d032c47cb"/>
+          <a:blip xmlns:r="http://schemas.openxmlformats.org/officeDocument/2006/relationships" xmlns:a="http://schemas.openxmlformats.org/drawingml/2006/main" r:embed="Rfdb3dade7b8d48a1"/>
           <a:stretch xmlns:a="http://schemas.openxmlformats.org/drawingml/2006/main"/>
         </p:blipFill>
         <p:spPr>
@@ -10276,7 +11367,7 @@
           <p:cNvPr id="3" name="">
             <a:extLst xmlns:a="http://schemas.openxmlformats.org/drawingml/2006/main">
               <a:ext uri="{FF2B5EF4-FFF2-40B4-BE49-F238E27FC236}">
-                <a16:creationId xmlns:a16="http://schemas.microsoft.com/office/drawing/2014/main" id="{7356C67F-540D-4A46-8612-A7B17A72D74C}"/>
+                <a16:creationId xmlns:a16="http://schemas.microsoft.com/office/drawing/2014/main" id="{3AACFE41-D00E-4F1C-AD70-0EB8C29ED55C}"/>
               </a:ext>
             </a:extLst>
           </p:cNvPr>
@@ -10326,7 +11417,7 @@
           <p:cNvPr id="4" name="">
             <a:extLst xmlns:a="http://schemas.openxmlformats.org/drawingml/2006/main">
               <a:ext uri="{FF2B5EF4-FFF2-40B4-BE49-F238E27FC236}">
-                <a16:creationId xmlns:a16="http://schemas.microsoft.com/office/drawing/2014/main" id="{F196AA98-4C64-4D3C-9959-9AFD8D59D889}"/>
+                <a16:creationId xmlns:a16="http://schemas.microsoft.com/office/drawing/2014/main" id="{0008B6D1-42A4-4831-BB5D-8FEBA5D0C738}"/>
               </a:ext>
             </a:extLst>
           </p:cNvPr>
@@ -10359,7 +11450,7 @@
           <p:cNvPr id="5" name="">
             <a:extLst xmlns:a="http://schemas.openxmlformats.org/drawingml/2006/main">
               <a:ext uri="{FF2B5EF4-FFF2-40B4-BE49-F238E27FC236}">
-                <a16:creationId xmlns:a16="http://schemas.microsoft.com/office/drawing/2014/main" id="{F1266970-0E04-47CE-B1A8-99C45DE2BDEF}"/>
+                <a16:creationId xmlns:a16="http://schemas.microsoft.com/office/drawing/2014/main" id="{FD907F74-CA6A-4F07-B308-DE024C3B2FEE}"/>
               </a:ext>
             </a:extLst>
           </p:cNvPr>
@@ -10390,7 +11481,7 @@
           <p:cNvPr id="6" name="">
             <a:extLst xmlns:a="http://schemas.openxmlformats.org/drawingml/2006/main">
               <a:ext uri="{FF2B5EF4-FFF2-40B4-BE49-F238E27FC236}">
-                <a16:creationId xmlns:a16="http://schemas.microsoft.com/office/drawing/2014/main" id="{CFA4211D-57E1-4CA0-99E3-5E7FC58E1BA1}"/>
+                <a16:creationId xmlns:a16="http://schemas.microsoft.com/office/drawing/2014/main" id="{AAD9366F-C6AA-4306-9AC5-7A2FC6876205}"/>
               </a:ext>
             </a:extLst>
           </p:cNvPr>
@@ -10440,7 +11531,7 @@
           <p:cNvPr id="7" name="">
             <a:extLst xmlns:a="http://schemas.openxmlformats.org/drawingml/2006/main">
               <a:ext uri="{FF2B5EF4-FFF2-40B4-BE49-F238E27FC236}">
-                <a16:creationId xmlns:a16="http://schemas.microsoft.com/office/drawing/2014/main" id="{24004E4F-9C0F-4395-8025-9D4EBC4EA818}"/>
+                <a16:creationId xmlns:a16="http://schemas.microsoft.com/office/drawing/2014/main" id="{D553DD6F-A36F-42D6-AECA-0C07ED07146F}"/>
               </a:ext>
             </a:extLst>
           </p:cNvPr>
@@ -10490,7 +11581,7 @@
           <p:cNvPr id="8" name="">
             <a:extLst xmlns:a="http://schemas.openxmlformats.org/drawingml/2006/main">
               <a:ext uri="{FF2B5EF4-FFF2-40B4-BE49-F238E27FC236}">
-                <a16:creationId xmlns:a16="http://schemas.microsoft.com/office/drawing/2014/main" id="{C56EB38C-6109-4153-BADB-EAD7FA9B0729}"/>
+                <a16:creationId xmlns:a16="http://schemas.microsoft.com/office/drawing/2014/main" id="{29F28C12-FA33-49F4-9C85-FA3C4B3762E4}"/>
               </a:ext>
             </a:extLst>
           </p:cNvPr>
@@ -10540,7 +11631,7 @@
           <p:cNvPr id="9" name="">
             <a:extLst xmlns:a="http://schemas.openxmlformats.org/drawingml/2006/main">
               <a:ext uri="{FF2B5EF4-FFF2-40B4-BE49-F238E27FC236}">
-                <a16:creationId xmlns:a16="http://schemas.microsoft.com/office/drawing/2014/main" id="{B085A384-A693-48C6-8190-D63FCBB5007D}"/>
+                <a16:creationId xmlns:a16="http://schemas.microsoft.com/office/drawing/2014/main" id="{5E93E676-B2A4-4C72-9B83-EA965BA9FA99}"/>
               </a:ext>
             </a:extLst>
           </p:cNvPr>
@@ -10590,7 +11681,7 @@
           <p:cNvPr id="10" name="">
             <a:extLst xmlns:a="http://schemas.openxmlformats.org/drawingml/2006/main">
               <a:ext uri="{FF2B5EF4-FFF2-40B4-BE49-F238E27FC236}">
-                <a16:creationId xmlns:a16="http://schemas.microsoft.com/office/drawing/2014/main" id="{BF458661-09ED-4D1A-9083-8A56050E1E7A}"/>
+                <a16:creationId xmlns:a16="http://schemas.microsoft.com/office/drawing/2014/main" id="{4D6CB055-A031-4CAF-AD0F-D4276354D556}"/>
               </a:ext>
             </a:extLst>
           </p:cNvPr>
@@ -10621,7 +11712,7 @@
           <p:cNvPr id="11" name="">
             <a:extLst xmlns:a="http://schemas.openxmlformats.org/drawingml/2006/main">
               <a:ext uri="{FF2B5EF4-FFF2-40B4-BE49-F238E27FC236}">
-                <a16:creationId xmlns:a16="http://schemas.microsoft.com/office/drawing/2014/main" id="{7C39BD80-4727-4581-9F84-3F8CDF21C1C9}"/>
+                <a16:creationId xmlns:a16="http://schemas.microsoft.com/office/drawing/2014/main" id="{2A0FD992-737B-479A-8707-57EB137B757B}"/>
               </a:ext>
             </a:extLst>
           </p:cNvPr>
@@ -10671,7 +11762,7 @@
           <p:cNvPr id="12" name="">
             <a:extLst xmlns:a="http://schemas.openxmlformats.org/drawingml/2006/main">
               <a:ext uri="{FF2B5EF4-FFF2-40B4-BE49-F238E27FC236}">
-                <a16:creationId xmlns:a16="http://schemas.microsoft.com/office/drawing/2014/main" id="{8666F9AF-11A0-4FBC-AC27-50A6A6E12C43}"/>
+                <a16:creationId xmlns:a16="http://schemas.microsoft.com/office/drawing/2014/main" id="{2DF8BADD-C804-4F00-8F6E-EE2DE55D1C3B}"/>
               </a:ext>
             </a:extLst>
           </p:cNvPr>
@@ -10721,7 +11812,7 @@
           <p:cNvPr id="13" name="">
             <a:extLst xmlns:a="http://schemas.openxmlformats.org/drawingml/2006/main">
               <a:ext uri="{FF2B5EF4-FFF2-40B4-BE49-F238E27FC236}">
-                <a16:creationId xmlns:a16="http://schemas.microsoft.com/office/drawing/2014/main" id="{62CA21D2-2503-4560-9B72-16C10E2BA59E}"/>
+                <a16:creationId xmlns:a16="http://schemas.microsoft.com/office/drawing/2014/main" id="{21C08689-8264-440C-B3EB-1A30EB027C6E}"/>
               </a:ext>
             </a:extLst>
           </p:cNvPr>
@@ -10752,7 +11843,7 @@
           <p:cNvPr id="14" name="">
             <a:extLst xmlns:a="http://schemas.openxmlformats.org/drawingml/2006/main">
               <a:ext uri="{FF2B5EF4-FFF2-40B4-BE49-F238E27FC236}">
-                <a16:creationId xmlns:a16="http://schemas.microsoft.com/office/drawing/2014/main" id="{7CC93F91-1485-4F91-9517-F5C1F6B2586B}"/>
+                <a16:creationId xmlns:a16="http://schemas.microsoft.com/office/drawing/2014/main" id="{BC403214-1023-41DE-94AD-95C904120196}"/>
               </a:ext>
             </a:extLst>
           </p:cNvPr>
@@ -10802,7 +11893,7 @@
           <p:cNvPr id="15" name="">
             <a:extLst xmlns:a="http://schemas.openxmlformats.org/drawingml/2006/main">
               <a:ext uri="{FF2B5EF4-FFF2-40B4-BE49-F238E27FC236}">
-                <a16:creationId xmlns:a16="http://schemas.microsoft.com/office/drawing/2014/main" id="{03915FF4-35CE-4848-A47C-8027C9DE16AC}"/>
+                <a16:creationId xmlns:a16="http://schemas.microsoft.com/office/drawing/2014/main" id="{8D04C838-D699-4A29-806F-513BE24F921F}"/>
               </a:ext>
             </a:extLst>
           </p:cNvPr>
@@ -10852,7 +11943,7 @@
           <p:cNvPr id="16" name="">
             <a:extLst xmlns:a="http://schemas.openxmlformats.org/drawingml/2006/main">
               <a:ext uri="{FF2B5EF4-FFF2-40B4-BE49-F238E27FC236}">
-                <a16:creationId xmlns:a16="http://schemas.microsoft.com/office/drawing/2014/main" id="{D9EEB2FD-F3A0-45C6-8D1B-3A18FC485B28}"/>
+                <a16:creationId xmlns:a16="http://schemas.microsoft.com/office/drawing/2014/main" id="{33D3111F-705F-4437-9A0F-9F0A92E8ED0C}"/>
               </a:ext>
             </a:extLst>
           </p:cNvPr>
@@ -10883,7 +11974,7 @@
           <p:cNvPr id="17" name="">
             <a:extLst xmlns:a="http://schemas.openxmlformats.org/drawingml/2006/main">
               <a:ext uri="{FF2B5EF4-FFF2-40B4-BE49-F238E27FC236}">
-                <a16:creationId xmlns:a16="http://schemas.microsoft.com/office/drawing/2014/main" id="{6CB58F33-709A-4E8C-9C7F-E5A349A38D97}"/>
+                <a16:creationId xmlns:a16="http://schemas.microsoft.com/office/drawing/2014/main" id="{2CE05929-7E37-4D58-8B1B-5DB21245031B}"/>
               </a:ext>
             </a:extLst>
           </p:cNvPr>
@@ -10933,7 +12024,7 @@
           <p:cNvPr id="18" name="">
             <a:extLst xmlns:a="http://schemas.openxmlformats.org/drawingml/2006/main">
               <a:ext uri="{FF2B5EF4-FFF2-40B4-BE49-F238E27FC236}">
-                <a16:creationId xmlns:a16="http://schemas.microsoft.com/office/drawing/2014/main" id="{989698DC-22EC-4EAF-8D6D-265005503CDD}"/>
+                <a16:creationId xmlns:a16="http://schemas.microsoft.com/office/drawing/2014/main" id="{6F145E9D-9FA3-407A-A6FD-92329F96D447}"/>
               </a:ext>
             </a:extLst>
           </p:cNvPr>
@@ -10983,7 +12074,7 @@
           <p:cNvPr id="19" name="">
             <a:extLst xmlns:a="http://schemas.openxmlformats.org/drawingml/2006/main">
               <a:ext uri="{FF2B5EF4-FFF2-40B4-BE49-F238E27FC236}">
-                <a16:creationId xmlns:a16="http://schemas.microsoft.com/office/drawing/2014/main" id="{C9B5C3D2-6CE5-4350-A7AE-CA3D45C1391B}"/>
+                <a16:creationId xmlns:a16="http://schemas.microsoft.com/office/drawing/2014/main" id="{42AA1801-2C9D-4D9F-BD93-D9B5362F0B16}"/>
               </a:ext>
             </a:extLst>
           </p:cNvPr>
@@ -11018,7 +12109,7 @@
           <p:cNvPr id="20" name="">
             <a:extLst xmlns:a="http://schemas.openxmlformats.org/drawingml/2006/main">
               <a:ext uri="{FF2B5EF4-FFF2-40B4-BE49-F238E27FC236}">
-                <a16:creationId xmlns:a16="http://schemas.microsoft.com/office/drawing/2014/main" id="{D332004F-604A-4207-BB17-3E9D2306A507}"/>
+                <a16:creationId xmlns:a16="http://schemas.microsoft.com/office/drawing/2014/main" id="{00B72C0C-02AF-40CE-BF1F-AB617D571DCB}"/>
               </a:ext>
             </a:extLst>
           </p:cNvPr>
@@ -11068,7 +12159,7 @@
           <p:cNvPr id="21" name="">
             <a:extLst xmlns:a="http://schemas.openxmlformats.org/drawingml/2006/main">
               <a:ext uri="{FF2B5EF4-FFF2-40B4-BE49-F238E27FC236}">
-                <a16:creationId xmlns:a16="http://schemas.microsoft.com/office/drawing/2014/main" id="{8481B602-E3C2-4896-BEC9-8EB34F5C1B6E}"/>
+                <a16:creationId xmlns:a16="http://schemas.microsoft.com/office/drawing/2014/main" id="{E23B4A62-572A-4BCF-A11D-B702DE8C8E06}"/>
               </a:ext>
             </a:extLst>
           </p:cNvPr>
@@ -11122,7 +12213,7 @@
           <p:nvPr/>
         </p:nvPicPr>
         <p:blipFill>
-          <a:blip xmlns:r="http://schemas.openxmlformats.org/officeDocument/2006/relationships" xmlns:a="http://schemas.openxmlformats.org/drawingml/2006/main" r:embed="R188b775082614d2f"/>
+          <a:blip xmlns:r="http://schemas.openxmlformats.org/officeDocument/2006/relationships" xmlns:a="http://schemas.openxmlformats.org/drawingml/2006/main" r:embed="R129038fa2c0040b1"/>
           <a:stretch xmlns:a="http://schemas.openxmlformats.org/drawingml/2006/main"/>
         </p:blipFill>
         <p:spPr>
@@ -11140,7 +12231,7 @@
           <p:cNvPr id="23" name="">
             <a:extLst xmlns:a="http://schemas.openxmlformats.org/drawingml/2006/main">
               <a:ext uri="{FF2B5EF4-FFF2-40B4-BE49-F238E27FC236}">
-                <a16:creationId xmlns:a16="http://schemas.microsoft.com/office/drawing/2014/main" id="{AF962E50-1266-4A72-925A-825FF83B792A}"/>
+                <a16:creationId xmlns:a16="http://schemas.microsoft.com/office/drawing/2014/main" id="{CA178F05-E474-4280-AB93-2CE369D4550C}"/>
               </a:ext>
             </a:extLst>
           </p:cNvPr>
@@ -11190,7 +12281,7 @@
           <p:cNvPr id="24" name="">
             <a:extLst xmlns:a="http://schemas.openxmlformats.org/drawingml/2006/main">
               <a:ext uri="{FF2B5EF4-FFF2-40B4-BE49-F238E27FC236}">
-                <a16:creationId xmlns:a16="http://schemas.microsoft.com/office/drawing/2014/main" id="{86140A10-9A04-4DDA-8306-20A8D7CA251C}"/>
+                <a16:creationId xmlns:a16="http://schemas.microsoft.com/office/drawing/2014/main" id="{9A6D936B-022C-4253-8E76-A96EB71A16FA}"/>
               </a:ext>
             </a:extLst>
           </p:cNvPr>
@@ -11240,7 +12331,7 @@
           <p:cNvPr id="25" name="">
             <a:extLst xmlns:a="http://schemas.openxmlformats.org/drawingml/2006/main">
               <a:ext uri="{FF2B5EF4-FFF2-40B4-BE49-F238E27FC236}">
-                <a16:creationId xmlns:a16="http://schemas.microsoft.com/office/drawing/2014/main" id="{D9DCEE38-1996-4686-BF52-AB9FDB0EFE29}"/>
+                <a16:creationId xmlns:a16="http://schemas.microsoft.com/office/drawing/2014/main" id="{C25F745C-17BA-4F85-BA32-ED5CBFEF87C5}"/>
               </a:ext>
             </a:extLst>
           </p:cNvPr>
@@ -11288,7 +12379,7 @@
     </p:spTree>
     <p:extLst>
       <p:ext uri="{BB962C8B-B14F-4D97-AF65-F5344CB8AC3E}">
-        <p14:creationId xmlns:p14="http://schemas.microsoft.com/office/powerpoint/2010/main" val="1394581934"/>
+        <p14:creationId xmlns:p14="http://schemas.microsoft.com/office/powerpoint/2010/main" val="1028742228"/>
       </p:ext>
     </p:extLst>
   </p:cSld>

--- a/static/audit_presentation_khalil.pptx
+++ b/static/audit_presentation_khalil.pptx
@@ -2,21 +2,21 @@
 <file path=ppt/presentation.xml><?xml version="1.0" encoding="utf-8"?>
 <p:presentation xmlns:p="http://schemas.openxmlformats.org/presentationml/2006/main">
   <p:sldMasterIdLst>
-    <p:sldMasterId xmlns:r="http://schemas.openxmlformats.org/officeDocument/2006/relationships" id="2147483648" r:id="Ra9dbad107f67432f"/>
+    <p:sldMasterId xmlns:r="http://schemas.openxmlformats.org/officeDocument/2006/relationships" id="2147483648" r:id="Rf165a408820a4352"/>
   </p:sldMasterIdLst>
   <p:notesMasterIdLst>
-    <p:notesMasterId xmlns:r="http://schemas.openxmlformats.org/officeDocument/2006/relationships" r:id="Rf713c8a21ed14691"/>
+    <p:notesMasterId xmlns:r="http://schemas.openxmlformats.org/officeDocument/2006/relationships" r:id="R071e839c7eb34252"/>
   </p:notesMasterIdLst>
   <p:sldIdLst>
-    <p:sldId xmlns:r="http://schemas.openxmlformats.org/officeDocument/2006/relationships" id="256" r:id="R821552e203d44978"/>
-    <p:sldId xmlns:r="http://schemas.openxmlformats.org/officeDocument/2006/relationships" id="257" r:id="Rd4f2d96854454e01"/>
-    <p:sldId xmlns:r="http://schemas.openxmlformats.org/officeDocument/2006/relationships" id="258" r:id="Rd302317e44c04ca0"/>
-    <p:sldId xmlns:r="http://schemas.openxmlformats.org/officeDocument/2006/relationships" id="259" r:id="Rccda32b1ef5e4c0b"/>
-    <p:sldId xmlns:r="http://schemas.openxmlformats.org/officeDocument/2006/relationships" id="260" r:id="R33b9cd0360a2496b"/>
-    <p:sldId xmlns:r="http://schemas.openxmlformats.org/officeDocument/2006/relationships" id="261" r:id="R3e142058cffc4831"/>
-    <p:sldId xmlns:r="http://schemas.openxmlformats.org/officeDocument/2006/relationships" id="262" r:id="Rc66a33bf25be42e9"/>
-    <p:sldId xmlns:r="http://schemas.openxmlformats.org/officeDocument/2006/relationships" id="263" r:id="Rbebc2a73e1ad45a5"/>
-    <p:sldId xmlns:r="http://schemas.openxmlformats.org/officeDocument/2006/relationships" id="264" r:id="Rc4b3130e17124292"/>
+    <p:sldId xmlns:r="http://schemas.openxmlformats.org/officeDocument/2006/relationships" id="256" r:id="Rbccfe001072c4479"/>
+    <p:sldId xmlns:r="http://schemas.openxmlformats.org/officeDocument/2006/relationships" id="257" r:id="R08e41f6390cb4eca"/>
+    <p:sldId xmlns:r="http://schemas.openxmlformats.org/officeDocument/2006/relationships" id="258" r:id="Rf378df2ebe9e4ea2"/>
+    <p:sldId xmlns:r="http://schemas.openxmlformats.org/officeDocument/2006/relationships" id="259" r:id="R296c29a2d44840b0"/>
+    <p:sldId xmlns:r="http://schemas.openxmlformats.org/officeDocument/2006/relationships" id="260" r:id="Rc2257fe1994d484d"/>
+    <p:sldId xmlns:r="http://schemas.openxmlformats.org/officeDocument/2006/relationships" id="261" r:id="R1a6c416faf8946f0"/>
+    <p:sldId xmlns:r="http://schemas.openxmlformats.org/officeDocument/2006/relationships" id="262" r:id="Re665722590c84823"/>
+    <p:sldId xmlns:r="http://schemas.openxmlformats.org/officeDocument/2006/relationships" id="263" r:id="Rd319c06b5e5c4b15"/>
+    <p:sldId xmlns:r="http://schemas.openxmlformats.org/officeDocument/2006/relationships" id="264" r:id="R7d8daf28ee7944f6"/>
   </p:sldIdLst>
   <p:sldSz cx="12192000" cy="6858000"/>
   <p:notesSz cx="6858000" cy="9144000"/>
@@ -1137,7 +1137,7 @@
   </p:cSld>
   <p:clrMap bg1="lt1" tx1="dk1" bg2="lt2" tx2="dk2" accent1="accent1" accent2="accent2" accent3="accent3" accent4="accent4" accent5="accent5" accent6="accent6" hlink="hlink" folHlink="folHlink"/>
   <p:sldLayoutIdLst>
-    <p:sldLayoutId xmlns:r="http://schemas.openxmlformats.org/officeDocument/2006/relationships" id="2147483649" r:id="Rf106b35794804165"/>
+    <p:sldLayoutId xmlns:r="http://schemas.openxmlformats.org/officeDocument/2006/relationships" id="2147483649" r:id="R7084cf4363c6481d"/>
   </p:sldLayoutIdLst>
   <p:txStyles>
     <p:titleStyle>
@@ -1688,7 +1688,7 @@
           <p:cNvPr id="1" name="">
             <a:extLst xmlns:a="http://schemas.openxmlformats.org/drawingml/2006/main">
               <a:ext uri="{FF2B5EF4-FFF2-40B4-BE49-F238E27FC236}">
-                <a16:creationId xmlns:a16="http://schemas.microsoft.com/office/drawing/2014/main" id="{8DAACF7E-1401-41E3-8E41-548715A7F61F}"/>
+                <a16:creationId xmlns:a16="http://schemas.microsoft.com/office/drawing/2014/main" id="{84490A35-009F-4ADF-B39A-38740A856651}"/>
               </a:ext>
             </a:extLst>
           </p:cNvPr>
@@ -1719,7 +1719,7 @@
           <p:cNvPr id="2" name="">
             <a:extLst xmlns:a="http://schemas.openxmlformats.org/drawingml/2006/main">
               <a:ext uri="{FF2B5EF4-FFF2-40B4-BE49-F238E27FC236}">
-                <a16:creationId xmlns:a16="http://schemas.microsoft.com/office/drawing/2014/main" id="{60135EB6-9CF8-433E-BD7E-5A19C1DE9E5A}"/>
+                <a16:creationId xmlns:a16="http://schemas.microsoft.com/office/drawing/2014/main" id="{C2CED7F4-E3B2-4CD2-9200-076260C02F0E}"/>
               </a:ext>
             </a:extLst>
           </p:cNvPr>
@@ -1754,7 +1754,7 @@
           <p:nvPr/>
         </p:nvPicPr>
         <p:blipFill>
-          <a:blip xmlns:r="http://schemas.openxmlformats.org/officeDocument/2006/relationships" xmlns:a="http://schemas.openxmlformats.org/drawingml/2006/main" r:embed="R997a5fe79e014904"/>
+          <a:blip xmlns:r="http://schemas.openxmlformats.org/officeDocument/2006/relationships" xmlns:a="http://schemas.openxmlformats.org/drawingml/2006/main" r:embed="Rfeb0aafd2fa8493b"/>
           <a:stretch xmlns:a="http://schemas.openxmlformats.org/drawingml/2006/main"/>
         </p:blipFill>
         <p:spPr>
@@ -1772,7 +1772,7 @@
           <p:cNvPr id="4" name="">
             <a:extLst xmlns:a="http://schemas.openxmlformats.org/drawingml/2006/main">
               <a:ext uri="{FF2B5EF4-FFF2-40B4-BE49-F238E27FC236}">
-                <a16:creationId xmlns:a16="http://schemas.microsoft.com/office/drawing/2014/main" id="{EEE2C672-6416-4C65-B438-DEE6074BC461}"/>
+                <a16:creationId xmlns:a16="http://schemas.microsoft.com/office/drawing/2014/main" id="{D4E942E7-3D6F-40B8-8F7E-F1ABC39A1F1B}"/>
               </a:ext>
             </a:extLst>
           </p:cNvPr>
@@ -1822,7 +1822,7 @@
           <p:cNvPr id="5" name="">
             <a:extLst xmlns:a="http://schemas.openxmlformats.org/drawingml/2006/main">
               <a:ext uri="{FF2B5EF4-FFF2-40B4-BE49-F238E27FC236}">
-                <a16:creationId xmlns:a16="http://schemas.microsoft.com/office/drawing/2014/main" id="{880E04AD-B6EE-439F-9F65-8BC5CC1F82E8}"/>
+                <a16:creationId xmlns:a16="http://schemas.microsoft.com/office/drawing/2014/main" id="{5FEBBF98-CFF0-4BEC-A577-E99A84A762DA}"/>
               </a:ext>
             </a:extLst>
           </p:cNvPr>
@@ -1872,7 +1872,7 @@
           <p:cNvPr id="6" name="">
             <a:extLst xmlns:a="http://schemas.openxmlformats.org/drawingml/2006/main">
               <a:ext uri="{FF2B5EF4-FFF2-40B4-BE49-F238E27FC236}">
-                <a16:creationId xmlns:a16="http://schemas.microsoft.com/office/drawing/2014/main" id="{5639B438-5D9C-4B24-8DF4-9B0F428103FA}"/>
+                <a16:creationId xmlns:a16="http://schemas.microsoft.com/office/drawing/2014/main" id="{940DAEDC-833E-4D08-B028-C9F925EF13FE}"/>
               </a:ext>
             </a:extLst>
           </p:cNvPr>
@@ -1922,7 +1922,7 @@
           <p:cNvPr id="7" name="">
             <a:extLst xmlns:a="http://schemas.openxmlformats.org/drawingml/2006/main">
               <a:ext uri="{FF2B5EF4-FFF2-40B4-BE49-F238E27FC236}">
-                <a16:creationId xmlns:a16="http://schemas.microsoft.com/office/drawing/2014/main" id="{3DCFA36A-971A-4708-ABDB-85DBBA88A358}"/>
+                <a16:creationId xmlns:a16="http://schemas.microsoft.com/office/drawing/2014/main" id="{FFFE912E-5494-499A-92FF-B9EE5DB0E2A4}"/>
               </a:ext>
             </a:extLst>
           </p:cNvPr>
@@ -1955,7 +1955,7 @@
           <p:cNvPr id="8" name="">
             <a:extLst xmlns:a="http://schemas.openxmlformats.org/drawingml/2006/main">
               <a:ext uri="{FF2B5EF4-FFF2-40B4-BE49-F238E27FC236}">
-                <a16:creationId xmlns:a16="http://schemas.microsoft.com/office/drawing/2014/main" id="{1ECE216D-1F27-45D9-BCFF-A13F9C4A2929}"/>
+                <a16:creationId xmlns:a16="http://schemas.microsoft.com/office/drawing/2014/main" id="{1CEEBC91-80CA-4B48-9661-B6C049886F82}"/>
               </a:ext>
             </a:extLst>
           </p:cNvPr>
@@ -2005,7 +2005,7 @@
           <p:cNvPr id="9" name="">
             <a:extLst xmlns:a="http://schemas.openxmlformats.org/drawingml/2006/main">
               <a:ext uri="{FF2B5EF4-FFF2-40B4-BE49-F238E27FC236}">
-                <a16:creationId xmlns:a16="http://schemas.microsoft.com/office/drawing/2014/main" id="{9FEA833A-AD21-46E9-A048-C3D0A848B627}"/>
+                <a16:creationId xmlns:a16="http://schemas.microsoft.com/office/drawing/2014/main" id="{3508C2F6-96A1-4658-B16F-D3BA41839347}"/>
               </a:ext>
             </a:extLst>
           </p:cNvPr>
@@ -2055,7 +2055,7 @@
           <p:cNvPr id="10" name="">
             <a:extLst xmlns:a="http://schemas.openxmlformats.org/drawingml/2006/main">
               <a:ext uri="{FF2B5EF4-FFF2-40B4-BE49-F238E27FC236}">
-                <a16:creationId xmlns:a16="http://schemas.microsoft.com/office/drawing/2014/main" id="{4C500165-8365-4AF5-96D6-D88C8B651B76}"/>
+                <a16:creationId xmlns:a16="http://schemas.microsoft.com/office/drawing/2014/main" id="{67F65785-BBDB-4037-9779-50F2534635FC}"/>
               </a:ext>
             </a:extLst>
           </p:cNvPr>
@@ -2088,7 +2088,7 @@
           <p:cNvPr id="11" name="">
             <a:extLst xmlns:a="http://schemas.openxmlformats.org/drawingml/2006/main">
               <a:ext uri="{FF2B5EF4-FFF2-40B4-BE49-F238E27FC236}">
-                <a16:creationId xmlns:a16="http://schemas.microsoft.com/office/drawing/2014/main" id="{94F534F4-43F3-494B-B33A-B64BE256DB93}"/>
+                <a16:creationId xmlns:a16="http://schemas.microsoft.com/office/drawing/2014/main" id="{E8C71717-316D-4C8C-9EA5-10EA27EDEA54}"/>
               </a:ext>
             </a:extLst>
           </p:cNvPr>
@@ -2138,7 +2138,7 @@
           <p:cNvPr id="12" name="">
             <a:extLst xmlns:a="http://schemas.openxmlformats.org/drawingml/2006/main">
               <a:ext uri="{FF2B5EF4-FFF2-40B4-BE49-F238E27FC236}">
-                <a16:creationId xmlns:a16="http://schemas.microsoft.com/office/drawing/2014/main" id="{C0983737-CDA2-4F89-B80D-CA3BCA44E39B}"/>
+                <a16:creationId xmlns:a16="http://schemas.microsoft.com/office/drawing/2014/main" id="{ACDA93B1-6DAD-4BE0-ACA3-C572EE4C68C7}"/>
               </a:ext>
             </a:extLst>
           </p:cNvPr>
@@ -2188,7 +2188,7 @@
           <p:cNvPr id="13" name="">
             <a:extLst xmlns:a="http://schemas.openxmlformats.org/drawingml/2006/main">
               <a:ext uri="{FF2B5EF4-FFF2-40B4-BE49-F238E27FC236}">
-                <a16:creationId xmlns:a16="http://schemas.microsoft.com/office/drawing/2014/main" id="{A8B6FF56-2615-4FC5-BB75-B4338561A914}"/>
+                <a16:creationId xmlns:a16="http://schemas.microsoft.com/office/drawing/2014/main" id="{AB032D80-C470-426A-BC3D-05BB15450304}"/>
               </a:ext>
             </a:extLst>
           </p:cNvPr>
@@ -2242,7 +2242,7 @@
           <p:nvPr/>
         </p:nvPicPr>
         <p:blipFill>
-          <a:blip xmlns:r="http://schemas.openxmlformats.org/officeDocument/2006/relationships" xmlns:a="http://schemas.openxmlformats.org/drawingml/2006/main" r:embed="R6f75b59bedd74cbb"/>
+          <a:blip xmlns:r="http://schemas.openxmlformats.org/officeDocument/2006/relationships" xmlns:a="http://schemas.openxmlformats.org/drawingml/2006/main" r:embed="Re993176abfbf4959"/>
           <a:srcRect xmlns:a="http://schemas.openxmlformats.org/drawingml/2006/main" l="5453" t="0" r="5453" b="0"/>
           <a:stretch xmlns:a="http://schemas.openxmlformats.org/drawingml/2006/main">
             <a:fillRect l="0" t="0" r="0" b="0"/>
@@ -2263,7 +2263,7 @@
           <p:cNvPr id="15" name="">
             <a:extLst xmlns:a="http://schemas.openxmlformats.org/drawingml/2006/main">
               <a:ext uri="{FF2B5EF4-FFF2-40B4-BE49-F238E27FC236}">
-                <a16:creationId xmlns:a16="http://schemas.microsoft.com/office/drawing/2014/main" id="{A6A70E2B-06F7-4644-ABEF-6D66853DBF4D}"/>
+                <a16:creationId xmlns:a16="http://schemas.microsoft.com/office/drawing/2014/main" id="{96A8D3B0-A70F-48AA-A45A-65CEC5ED6337}"/>
               </a:ext>
             </a:extLst>
           </p:cNvPr>
@@ -2294,7 +2294,7 @@
           <p:cNvPr id="16" name="">
             <a:extLst xmlns:a="http://schemas.openxmlformats.org/drawingml/2006/main">
               <a:ext uri="{FF2B5EF4-FFF2-40B4-BE49-F238E27FC236}">
-                <a16:creationId xmlns:a16="http://schemas.microsoft.com/office/drawing/2014/main" id="{7E1F551E-A716-47AF-B1AD-A5ED9B8AC600}"/>
+                <a16:creationId xmlns:a16="http://schemas.microsoft.com/office/drawing/2014/main" id="{BF20CB19-EBC2-40FD-A20C-1211A5982A1E}"/>
               </a:ext>
             </a:extLst>
           </p:cNvPr>
@@ -2342,7 +2342,7 @@
     </p:spTree>
     <p:extLst>
       <p:ext uri="{BB962C8B-B14F-4D97-AF65-F5344CB8AC3E}">
-        <p14:creationId xmlns:p14="http://schemas.microsoft.com/office/powerpoint/2010/main" val="1093358206"/>
+        <p14:creationId xmlns:p14="http://schemas.microsoft.com/office/powerpoint/2010/main" val="2060713028"/>
       </p:ext>
     </p:extLst>
   </p:cSld>
@@ -2373,7 +2373,7 @@
           <p:cNvPr id="1" name="">
             <a:extLst xmlns:a="http://schemas.openxmlformats.org/drawingml/2006/main">
               <a:ext uri="{FF2B5EF4-FFF2-40B4-BE49-F238E27FC236}">
-                <a16:creationId xmlns:a16="http://schemas.microsoft.com/office/drawing/2014/main" id="{A804A6C7-4179-4280-9431-076655CE27D8}"/>
+                <a16:creationId xmlns:a16="http://schemas.microsoft.com/office/drawing/2014/main" id="{4E1D6F2E-6856-4056-94A0-54D27996997E}"/>
               </a:ext>
             </a:extLst>
           </p:cNvPr>
@@ -2408,7 +2408,7 @@
           <p:nvPr/>
         </p:nvPicPr>
         <p:blipFill>
-          <a:blip xmlns:r="http://schemas.openxmlformats.org/officeDocument/2006/relationships" xmlns:a="http://schemas.openxmlformats.org/drawingml/2006/main" r:embed="R8d1fce88bb1e46e0"/>
+          <a:blip xmlns:r="http://schemas.openxmlformats.org/officeDocument/2006/relationships" xmlns:a="http://schemas.openxmlformats.org/drawingml/2006/main" r:embed="R234c230a33eb4a4d"/>
           <a:stretch xmlns:a="http://schemas.openxmlformats.org/drawingml/2006/main"/>
         </p:blipFill>
         <p:spPr>
@@ -2426,7 +2426,7 @@
           <p:cNvPr id="3" name="">
             <a:extLst xmlns:a="http://schemas.openxmlformats.org/drawingml/2006/main">
               <a:ext uri="{FF2B5EF4-FFF2-40B4-BE49-F238E27FC236}">
-                <a16:creationId xmlns:a16="http://schemas.microsoft.com/office/drawing/2014/main" id="{43FC2DE7-4667-4F29-8367-C56127950D12}"/>
+                <a16:creationId xmlns:a16="http://schemas.microsoft.com/office/drawing/2014/main" id="{B3A8ACB2-D9C5-48A8-AB8D-A274ED5981F7}"/>
               </a:ext>
             </a:extLst>
           </p:cNvPr>
@@ -2476,7 +2476,7 @@
           <p:cNvPr id="4" name="">
             <a:extLst xmlns:a="http://schemas.openxmlformats.org/drawingml/2006/main">
               <a:ext uri="{FF2B5EF4-FFF2-40B4-BE49-F238E27FC236}">
-                <a16:creationId xmlns:a16="http://schemas.microsoft.com/office/drawing/2014/main" id="{37E27733-B137-4C68-B706-44889CD2C1EF}"/>
+                <a16:creationId xmlns:a16="http://schemas.microsoft.com/office/drawing/2014/main" id="{67EF9ECE-0F13-4556-A2BB-522F5C34075C}"/>
               </a:ext>
             </a:extLst>
           </p:cNvPr>
@@ -2509,7 +2509,7 @@
           <p:cNvPr id="5" name="">
             <a:extLst xmlns:a="http://schemas.openxmlformats.org/drawingml/2006/main">
               <a:ext uri="{FF2B5EF4-FFF2-40B4-BE49-F238E27FC236}">
-                <a16:creationId xmlns:a16="http://schemas.microsoft.com/office/drawing/2014/main" id="{D1F75A22-2BB9-40C9-AE75-100AE47FF22C}"/>
+                <a16:creationId xmlns:a16="http://schemas.microsoft.com/office/drawing/2014/main" id="{73445BB9-BFA0-4A1D-AB58-9C457F9F1D95}"/>
               </a:ext>
             </a:extLst>
           </p:cNvPr>
@@ -2540,7 +2540,7 @@
           <p:cNvPr id="6" name="">
             <a:extLst xmlns:a="http://schemas.openxmlformats.org/drawingml/2006/main">
               <a:ext uri="{FF2B5EF4-FFF2-40B4-BE49-F238E27FC236}">
-                <a16:creationId xmlns:a16="http://schemas.microsoft.com/office/drawing/2014/main" id="{16105BD8-86EB-40B8-A90E-DCCA3E98D680}"/>
+                <a16:creationId xmlns:a16="http://schemas.microsoft.com/office/drawing/2014/main" id="{CEAFBF84-DBE1-40FE-B4F4-29602198B10D}"/>
               </a:ext>
             </a:extLst>
           </p:cNvPr>
@@ -2590,7 +2590,7 @@
           <p:cNvPr id="7" name="">
             <a:extLst xmlns:a="http://schemas.openxmlformats.org/drawingml/2006/main">
               <a:ext uri="{FF2B5EF4-FFF2-40B4-BE49-F238E27FC236}">
-                <a16:creationId xmlns:a16="http://schemas.microsoft.com/office/drawing/2014/main" id="{7BA0EE4D-F329-417F-9644-1EDCD3B4A9C9}"/>
+                <a16:creationId xmlns:a16="http://schemas.microsoft.com/office/drawing/2014/main" id="{2EE34B64-A40B-41F8-B622-7CC6E04D3EFE}"/>
               </a:ext>
             </a:extLst>
           </p:cNvPr>
@@ -2640,7 +2640,7 @@
           <p:cNvPr id="8" name="">
             <a:extLst xmlns:a="http://schemas.openxmlformats.org/drawingml/2006/main">
               <a:ext uri="{FF2B5EF4-FFF2-40B4-BE49-F238E27FC236}">
-                <a16:creationId xmlns:a16="http://schemas.microsoft.com/office/drawing/2014/main" id="{1CDD1A08-7DF0-454A-9E6C-01A8AB4F96B5}"/>
+                <a16:creationId xmlns:a16="http://schemas.microsoft.com/office/drawing/2014/main" id="{756B3AEE-4BFA-4C17-A4FA-8F5EC853E608}"/>
               </a:ext>
             </a:extLst>
           </p:cNvPr>
@@ -2690,7 +2690,7 @@
           <p:cNvPr id="9" name="">
             <a:extLst xmlns:a="http://schemas.openxmlformats.org/drawingml/2006/main">
               <a:ext uri="{FF2B5EF4-FFF2-40B4-BE49-F238E27FC236}">
-                <a16:creationId xmlns:a16="http://schemas.microsoft.com/office/drawing/2014/main" id="{715CBDD7-0733-4EB3-8A70-B1244BD05E6E}"/>
+                <a16:creationId xmlns:a16="http://schemas.microsoft.com/office/drawing/2014/main" id="{68716AFC-7B6E-49D0-989D-EC135159BEEE}"/>
               </a:ext>
             </a:extLst>
           </p:cNvPr>
@@ -2740,7 +2740,7 @@
           <p:cNvPr id="10" name="">
             <a:extLst xmlns:a="http://schemas.openxmlformats.org/drawingml/2006/main">
               <a:ext uri="{FF2B5EF4-FFF2-40B4-BE49-F238E27FC236}">
-                <a16:creationId xmlns:a16="http://schemas.microsoft.com/office/drawing/2014/main" id="{699B3EB9-92A8-4864-8A51-43A08FB6DDF1}"/>
+                <a16:creationId xmlns:a16="http://schemas.microsoft.com/office/drawing/2014/main" id="{DA4E9B05-AB41-4411-BC37-21C68E6887F5}"/>
               </a:ext>
             </a:extLst>
           </p:cNvPr>
@@ -2790,7 +2790,7 @@
           <p:cNvPr id="11" name="">
             <a:extLst xmlns:a="http://schemas.openxmlformats.org/drawingml/2006/main">
               <a:ext uri="{FF2B5EF4-FFF2-40B4-BE49-F238E27FC236}">
-                <a16:creationId xmlns:a16="http://schemas.microsoft.com/office/drawing/2014/main" id="{C42C0932-5AFF-4285-BD82-E002AEAEECB3}"/>
+                <a16:creationId xmlns:a16="http://schemas.microsoft.com/office/drawing/2014/main" id="{67451097-39EE-43D6-B476-BAF1B154A233}"/>
               </a:ext>
             </a:extLst>
           </p:cNvPr>
@@ -2820,14 +2820,14 @@
             <a:pPr>
               <a:defRPr sz="2325" b="1">
                 <a:solidFill>
-                  <a:srgbClr val="FF6412"/>
+                  <a:srgbClr val="161616"/>
                 </a:solidFill>
               </a:defRPr>
             </a:pPr>
             <a:r>
               <a:rPr sz="2325" b="1">
                 <a:solidFill>
-                  <a:srgbClr val="FF6412"/>
+                  <a:srgbClr val="161616"/>
                 </a:solidFill>
               </a:rPr>
               <a:t>2019</a:t>
@@ -2840,7 +2840,7 @@
           <p:cNvPr id="12" name="">
             <a:extLst xmlns:a="http://schemas.openxmlformats.org/drawingml/2006/main">
               <a:ext uri="{FF2B5EF4-FFF2-40B4-BE49-F238E27FC236}">
-                <a16:creationId xmlns:a16="http://schemas.microsoft.com/office/drawing/2014/main" id="{56026C9A-5F91-41C8-B2A3-89CDC93D2EDC}"/>
+                <a16:creationId xmlns:a16="http://schemas.microsoft.com/office/drawing/2014/main" id="{4C421D04-5822-4D1C-ADA6-BE7477BDD0F4}"/>
               </a:ext>
             </a:extLst>
           </p:cNvPr>
@@ -2852,7 +2852,7 @@
         <p:spPr>
           <a:xfrm xmlns:a="http://schemas.openxmlformats.org/drawingml/2006/main">
             <a:off x="552450" y="4581525"/>
-            <a:ext cx="1409700" cy="457200"/>
+            <a:ext cx="1409700" cy="590550"/>
           </a:xfrm>
           <a:prstGeom xmlns:a="http://schemas.openxmlformats.org/drawingml/2006/main" prst="rect">
             <a:avLst/>
@@ -2890,7 +2890,7 @@
           <p:cNvPr id="13" name="">
             <a:extLst xmlns:a="http://schemas.openxmlformats.org/drawingml/2006/main">
               <a:ext uri="{FF2B5EF4-FFF2-40B4-BE49-F238E27FC236}">
-                <a16:creationId xmlns:a16="http://schemas.microsoft.com/office/drawing/2014/main" id="{A08CC2DD-DCF7-4FCD-842C-0E4DCF2F4053}"/>
+                <a16:creationId xmlns:a16="http://schemas.microsoft.com/office/drawing/2014/main" id="{5B8C7915-A91C-41F1-AC2F-FE686FD5A56B}"/>
               </a:ext>
             </a:extLst>
           </p:cNvPr>
@@ -2918,16 +2918,16 @@
           <a:lstStyle xmlns:a="http://schemas.openxmlformats.org/drawingml/2006/main"/>
           <a:p xmlns:a="http://schemas.openxmlformats.org/drawingml/2006/main">
             <a:pPr>
-              <a:defRPr sz="2325" b="1">
-                <a:solidFill>
-                  <a:srgbClr val="161616"/>
-                </a:solidFill>
-              </a:defRPr>
-            </a:pPr>
-            <a:r>
-              <a:rPr sz="2325" b="1">
-                <a:solidFill>
-                  <a:srgbClr val="161616"/>
+              <a:defRPr sz="2700" b="1">
+                <a:solidFill>
+                  <a:srgbClr val="FF6412"/>
+                </a:solidFill>
+              </a:defRPr>
+            </a:pPr>
+            <a:r>
+              <a:rPr sz="2700" b="1">
+                <a:solidFill>
+                  <a:srgbClr val="FF6412"/>
                 </a:solidFill>
               </a:rPr>
               <a:t>70+</a:t>
@@ -2940,7 +2940,7 @@
           <p:cNvPr id="14" name="">
             <a:extLst xmlns:a="http://schemas.openxmlformats.org/drawingml/2006/main">
               <a:ext uri="{FF2B5EF4-FFF2-40B4-BE49-F238E27FC236}">
-                <a16:creationId xmlns:a16="http://schemas.microsoft.com/office/drawing/2014/main" id="{3D308060-4CB1-4F76-9150-5C86420BB502}"/>
+                <a16:creationId xmlns:a16="http://schemas.microsoft.com/office/drawing/2014/main" id="{305A5153-123D-4B54-8EBB-F7B3698D0877}"/>
               </a:ext>
             </a:extLst>
           </p:cNvPr>
@@ -2952,7 +2952,7 @@
         <p:spPr>
           <a:xfrm xmlns:a="http://schemas.openxmlformats.org/drawingml/2006/main">
             <a:off x="2247900" y="4581525"/>
-            <a:ext cx="1409700" cy="457200"/>
+            <a:ext cx="1409700" cy="590550"/>
           </a:xfrm>
           <a:prstGeom xmlns:a="http://schemas.openxmlformats.org/drawingml/2006/main" prst="rect">
             <a:avLst/>
@@ -2980,7 +2980,7 @@
                   <a:srgbClr val="667085"/>
                 </a:solidFill>
               </a:rPr>
-              <a:t>реализованных проектов</a:t>
+              <a:t>крупных ИТ-проектов</a:t>
             </a:r>
           </a:p>
         </p:txBody>
@@ -2990,7 +2990,7 @@
           <p:cNvPr id="15" name="">
             <a:extLst xmlns:a="http://schemas.openxmlformats.org/drawingml/2006/main">
               <a:ext uri="{FF2B5EF4-FFF2-40B4-BE49-F238E27FC236}">
-                <a16:creationId xmlns:a16="http://schemas.microsoft.com/office/drawing/2014/main" id="{3BF545A2-53A6-43A9-8F7E-7602D642A48D}"/>
+                <a16:creationId xmlns:a16="http://schemas.microsoft.com/office/drawing/2014/main" id="{62975D6D-990D-4688-9D2A-586FECA11C03}"/>
               </a:ext>
             </a:extLst>
           </p:cNvPr>
@@ -3040,7 +3040,7 @@
           <p:cNvPr id="16" name="">
             <a:extLst xmlns:a="http://schemas.openxmlformats.org/drawingml/2006/main">
               <a:ext uri="{FF2B5EF4-FFF2-40B4-BE49-F238E27FC236}">
-                <a16:creationId xmlns:a16="http://schemas.microsoft.com/office/drawing/2014/main" id="{8D59CABC-FC5D-48F2-A488-5715C8E43F4F}"/>
+                <a16:creationId xmlns:a16="http://schemas.microsoft.com/office/drawing/2014/main" id="{A541E1B2-E9C5-4C36-9454-85D2DEE28D48}"/>
               </a:ext>
             </a:extLst>
           </p:cNvPr>
@@ -3052,7 +3052,7 @@
         <p:spPr>
           <a:xfrm xmlns:a="http://schemas.openxmlformats.org/drawingml/2006/main">
             <a:off x="3943350" y="4581525"/>
-            <a:ext cx="1409700" cy="457200"/>
+            <a:ext cx="1409700" cy="590550"/>
           </a:xfrm>
           <a:prstGeom xmlns:a="http://schemas.openxmlformats.org/drawingml/2006/main" prst="rect">
             <a:avLst/>
@@ -3090,7 +3090,7 @@
           <p:cNvPr id="17" name="">
             <a:extLst xmlns:a="http://schemas.openxmlformats.org/drawingml/2006/main">
               <a:ext uri="{FF2B5EF4-FFF2-40B4-BE49-F238E27FC236}">
-                <a16:creationId xmlns:a16="http://schemas.microsoft.com/office/drawing/2014/main" id="{A52F99D6-9B00-44D2-94D3-D4C18EDF2F29}"/>
+                <a16:creationId xmlns:a16="http://schemas.microsoft.com/office/drawing/2014/main" id="{8F541A74-9BFE-45B9-A5EC-3D08D63B742C}"/>
               </a:ext>
             </a:extLst>
           </p:cNvPr>
@@ -3125,7 +3125,7 @@
           <p:cNvPr id="18" name="">
             <a:extLst xmlns:a="http://schemas.openxmlformats.org/drawingml/2006/main">
               <a:ext uri="{FF2B5EF4-FFF2-40B4-BE49-F238E27FC236}">
-                <a16:creationId xmlns:a16="http://schemas.microsoft.com/office/drawing/2014/main" id="{23E657CD-14A6-4BFC-8B72-3D494C3A63CA}"/>
+                <a16:creationId xmlns:a16="http://schemas.microsoft.com/office/drawing/2014/main" id="{EABAB432-35CC-4D72-9982-069CF7510442}"/>
               </a:ext>
             </a:extLst>
           </p:cNvPr>
@@ -3175,7 +3175,7 @@
           <p:cNvPr id="19" name="">
             <a:extLst xmlns:a="http://schemas.openxmlformats.org/drawingml/2006/main">
               <a:ext uri="{FF2B5EF4-FFF2-40B4-BE49-F238E27FC236}">
-                <a16:creationId xmlns:a16="http://schemas.microsoft.com/office/drawing/2014/main" id="{C48ED413-169F-4415-9844-27F700FD475D}"/>
+                <a16:creationId xmlns:a16="http://schemas.microsoft.com/office/drawing/2014/main" id="{A5F51FA6-E1F3-4693-B337-C2BAD2FE7ECF}"/>
               </a:ext>
             </a:extLst>
           </p:cNvPr>
@@ -3225,7 +3225,7 @@
           <p:cNvPr id="20" name="">
             <a:extLst xmlns:a="http://schemas.openxmlformats.org/drawingml/2006/main">
               <a:ext uri="{FF2B5EF4-FFF2-40B4-BE49-F238E27FC236}">
-                <a16:creationId xmlns:a16="http://schemas.microsoft.com/office/drawing/2014/main" id="{A72EA8D5-89A5-40A1-AF2E-FBA79F950537}"/>
+                <a16:creationId xmlns:a16="http://schemas.microsoft.com/office/drawing/2014/main" id="{6B579094-DBD3-49AE-8FDD-2F3B593791EF}"/>
               </a:ext>
             </a:extLst>
           </p:cNvPr>
@@ -3275,7 +3275,7 @@
           <p:cNvPr id="21" name="">
             <a:extLst xmlns:a="http://schemas.openxmlformats.org/drawingml/2006/main">
               <a:ext uri="{FF2B5EF4-FFF2-40B4-BE49-F238E27FC236}">
-                <a16:creationId xmlns:a16="http://schemas.microsoft.com/office/drawing/2014/main" id="{8EC80177-DB2B-4C24-8AE7-1359974E4A0D}"/>
+                <a16:creationId xmlns:a16="http://schemas.microsoft.com/office/drawing/2014/main" id="{5A4ADAC3-24F9-4F79-86E0-0A6B48610ED6}"/>
               </a:ext>
             </a:extLst>
           </p:cNvPr>
@@ -3325,7 +3325,7 @@
           <p:cNvPr id="22" name="">
             <a:extLst xmlns:a="http://schemas.openxmlformats.org/drawingml/2006/main">
               <a:ext uri="{FF2B5EF4-FFF2-40B4-BE49-F238E27FC236}">
-                <a16:creationId xmlns:a16="http://schemas.microsoft.com/office/drawing/2014/main" id="{65E618FE-8271-465F-8242-1897D9EB32BF}"/>
+                <a16:creationId xmlns:a16="http://schemas.microsoft.com/office/drawing/2014/main" id="{7954A335-D17F-485F-88AE-8CDF0F012C43}"/>
               </a:ext>
             </a:extLst>
           </p:cNvPr>
@@ -3356,7 +3356,7 @@
           <p:cNvPr id="23" name="">
             <a:extLst xmlns:a="http://schemas.openxmlformats.org/drawingml/2006/main">
               <a:ext uri="{FF2B5EF4-FFF2-40B4-BE49-F238E27FC236}">
-                <a16:creationId xmlns:a16="http://schemas.microsoft.com/office/drawing/2014/main" id="{B5F64A61-8E50-4F9B-9963-79BA7825BA11}"/>
+                <a16:creationId xmlns:a16="http://schemas.microsoft.com/office/drawing/2014/main" id="{B7E97CA7-EC82-45D7-BBD2-A050E63A5E4C}"/>
               </a:ext>
             </a:extLst>
           </p:cNvPr>
@@ -3406,7 +3406,7 @@
           <p:cNvPr id="24" name="">
             <a:extLst xmlns:a="http://schemas.openxmlformats.org/drawingml/2006/main">
               <a:ext uri="{FF2B5EF4-FFF2-40B4-BE49-F238E27FC236}">
-                <a16:creationId xmlns:a16="http://schemas.microsoft.com/office/drawing/2014/main" id="{E4F30710-3CD9-4333-8CB0-03D4B7DE45C9}"/>
+                <a16:creationId xmlns:a16="http://schemas.microsoft.com/office/drawing/2014/main" id="{3BDC8802-0D3F-4F20-8D66-1D14BAE0FD97}"/>
               </a:ext>
             </a:extLst>
           </p:cNvPr>
@@ -3456,7 +3456,7 @@
           <p:cNvPr id="25" name="">
             <a:extLst xmlns:a="http://schemas.openxmlformats.org/drawingml/2006/main">
               <a:ext uri="{FF2B5EF4-FFF2-40B4-BE49-F238E27FC236}">
-                <a16:creationId xmlns:a16="http://schemas.microsoft.com/office/drawing/2014/main" id="{4DE72231-14B4-4297-9EF7-4953BA2984F5}"/>
+                <a16:creationId xmlns:a16="http://schemas.microsoft.com/office/drawing/2014/main" id="{9FC239C3-14AE-4B17-B0EF-2DBD175003F5}"/>
               </a:ext>
             </a:extLst>
           </p:cNvPr>
@@ -3506,7 +3506,7 @@
           <p:cNvPr id="26" name="">
             <a:extLst xmlns:a="http://schemas.openxmlformats.org/drawingml/2006/main">
               <a:ext uri="{FF2B5EF4-FFF2-40B4-BE49-F238E27FC236}">
-                <a16:creationId xmlns:a16="http://schemas.microsoft.com/office/drawing/2014/main" id="{4C172821-6161-48DB-8308-A563848F6FD4}"/>
+                <a16:creationId xmlns:a16="http://schemas.microsoft.com/office/drawing/2014/main" id="{FFAA03EC-F2DC-4B37-A3DB-03943DD57A98}"/>
               </a:ext>
             </a:extLst>
           </p:cNvPr>
@@ -3537,7 +3537,7 @@
           <p:cNvPr id="27" name="">
             <a:extLst xmlns:a="http://schemas.openxmlformats.org/drawingml/2006/main">
               <a:ext uri="{FF2B5EF4-FFF2-40B4-BE49-F238E27FC236}">
-                <a16:creationId xmlns:a16="http://schemas.microsoft.com/office/drawing/2014/main" id="{96C70764-D9BE-44ED-8416-137178470A7D}"/>
+                <a16:creationId xmlns:a16="http://schemas.microsoft.com/office/drawing/2014/main" id="{0333D535-A7C6-4652-A635-4808339F4BBB}"/>
               </a:ext>
             </a:extLst>
           </p:cNvPr>
@@ -3587,7 +3587,7 @@
           <p:cNvPr id="28" name="">
             <a:extLst xmlns:a="http://schemas.openxmlformats.org/drawingml/2006/main">
               <a:ext uri="{FF2B5EF4-FFF2-40B4-BE49-F238E27FC236}">
-                <a16:creationId xmlns:a16="http://schemas.microsoft.com/office/drawing/2014/main" id="{17B3A7B7-A53E-43DA-B451-F791B8BAB5EE}"/>
+                <a16:creationId xmlns:a16="http://schemas.microsoft.com/office/drawing/2014/main" id="{1FD07A0E-ABBA-4FB3-9112-960CD49249C1}"/>
               </a:ext>
             </a:extLst>
           </p:cNvPr>
@@ -3637,7 +3637,7 @@
           <p:cNvPr id="29" name="">
             <a:extLst xmlns:a="http://schemas.openxmlformats.org/drawingml/2006/main">
               <a:ext uri="{FF2B5EF4-FFF2-40B4-BE49-F238E27FC236}">
-                <a16:creationId xmlns:a16="http://schemas.microsoft.com/office/drawing/2014/main" id="{256D9684-AFA9-4B6D-A425-4176351CEA68}"/>
+                <a16:creationId xmlns:a16="http://schemas.microsoft.com/office/drawing/2014/main" id="{37FDD083-4195-4304-8AE5-87E9AFA834F2}"/>
               </a:ext>
             </a:extLst>
           </p:cNvPr>
@@ -3687,7 +3687,7 @@
           <p:cNvPr id="30" name="">
             <a:extLst xmlns:a="http://schemas.openxmlformats.org/drawingml/2006/main">
               <a:ext uri="{FF2B5EF4-FFF2-40B4-BE49-F238E27FC236}">
-                <a16:creationId xmlns:a16="http://schemas.microsoft.com/office/drawing/2014/main" id="{3D52328F-DE7D-453D-AEB7-EFC42F458BD6}"/>
+                <a16:creationId xmlns:a16="http://schemas.microsoft.com/office/drawing/2014/main" id="{1DB77C50-1195-452B-8BAF-66D624269C94}"/>
               </a:ext>
             </a:extLst>
           </p:cNvPr>
@@ -3718,7 +3718,7 @@
           <p:cNvPr id="31" name="">
             <a:extLst xmlns:a="http://schemas.openxmlformats.org/drawingml/2006/main">
               <a:ext uri="{FF2B5EF4-FFF2-40B4-BE49-F238E27FC236}">
-                <a16:creationId xmlns:a16="http://schemas.microsoft.com/office/drawing/2014/main" id="{64193F05-96E5-4E85-8199-973D643D0187}"/>
+                <a16:creationId xmlns:a16="http://schemas.microsoft.com/office/drawing/2014/main" id="{46D06045-6BE7-405E-991F-BFA798C9E3CE}"/>
               </a:ext>
             </a:extLst>
           </p:cNvPr>
@@ -3768,7 +3768,7 @@
           <p:cNvPr id="32" name="">
             <a:extLst xmlns:a="http://schemas.openxmlformats.org/drawingml/2006/main">
               <a:ext uri="{FF2B5EF4-FFF2-40B4-BE49-F238E27FC236}">
-                <a16:creationId xmlns:a16="http://schemas.microsoft.com/office/drawing/2014/main" id="{509BBFDD-69A5-487E-B2E7-A1E933E6E9DF}"/>
+                <a16:creationId xmlns:a16="http://schemas.microsoft.com/office/drawing/2014/main" id="{64BA67D0-CEA7-4D42-91F2-3B8A77E5830D}"/>
               </a:ext>
             </a:extLst>
           </p:cNvPr>
@@ -3818,7 +3818,7 @@
           <p:cNvPr id="33" name="">
             <a:extLst xmlns:a="http://schemas.openxmlformats.org/drawingml/2006/main">
               <a:ext uri="{FF2B5EF4-FFF2-40B4-BE49-F238E27FC236}">
-                <a16:creationId xmlns:a16="http://schemas.microsoft.com/office/drawing/2014/main" id="{CD0F8206-E428-47E4-BDD5-B0915D22E0D7}"/>
+                <a16:creationId xmlns:a16="http://schemas.microsoft.com/office/drawing/2014/main" id="{8B149757-9423-40D3-BA6E-BC66749ADB54}"/>
               </a:ext>
             </a:extLst>
           </p:cNvPr>
@@ -3866,7 +3866,7 @@
     </p:spTree>
     <p:extLst>
       <p:ext uri="{BB962C8B-B14F-4D97-AF65-F5344CB8AC3E}">
-        <p14:creationId xmlns:p14="http://schemas.microsoft.com/office/powerpoint/2010/main" val="70331113"/>
+        <p14:creationId xmlns:p14="http://schemas.microsoft.com/office/powerpoint/2010/main" val="1531571721"/>
       </p:ext>
     </p:extLst>
   </p:cSld>
@@ -3897,7 +3897,7 @@
           <p:cNvPr id="1" name="">
             <a:extLst xmlns:a="http://schemas.openxmlformats.org/drawingml/2006/main">
               <a:ext uri="{FF2B5EF4-FFF2-40B4-BE49-F238E27FC236}">
-                <a16:creationId xmlns:a16="http://schemas.microsoft.com/office/drawing/2014/main" id="{355126AF-A906-40B9-A291-F294B5AF573D}"/>
+                <a16:creationId xmlns:a16="http://schemas.microsoft.com/office/drawing/2014/main" id="{CC7660BA-A441-4A58-A78C-A16F80B2DBA2}"/>
               </a:ext>
             </a:extLst>
           </p:cNvPr>
@@ -3932,7 +3932,7 @@
           <p:nvPr/>
         </p:nvPicPr>
         <p:blipFill>
-          <a:blip xmlns:r="http://schemas.openxmlformats.org/officeDocument/2006/relationships" xmlns:a="http://schemas.openxmlformats.org/drawingml/2006/main" r:embed="R67bb45f219be48ba"/>
+          <a:blip xmlns:r="http://schemas.openxmlformats.org/officeDocument/2006/relationships" xmlns:a="http://schemas.openxmlformats.org/drawingml/2006/main" r:embed="R3b621757138447d6"/>
           <a:stretch xmlns:a="http://schemas.openxmlformats.org/drawingml/2006/main"/>
         </p:blipFill>
         <p:spPr>
@@ -3950,7 +3950,7 @@
           <p:cNvPr id="3" name="">
             <a:extLst xmlns:a="http://schemas.openxmlformats.org/drawingml/2006/main">
               <a:ext uri="{FF2B5EF4-FFF2-40B4-BE49-F238E27FC236}">
-                <a16:creationId xmlns:a16="http://schemas.microsoft.com/office/drawing/2014/main" id="{BCE61C3C-0326-489A-801E-A47E74D62803}"/>
+                <a16:creationId xmlns:a16="http://schemas.microsoft.com/office/drawing/2014/main" id="{33167174-D258-4058-8AE1-5F9750F95C78}"/>
               </a:ext>
             </a:extLst>
           </p:cNvPr>
@@ -4000,7 +4000,7 @@
           <p:cNvPr id="4" name="">
             <a:extLst xmlns:a="http://schemas.openxmlformats.org/drawingml/2006/main">
               <a:ext uri="{FF2B5EF4-FFF2-40B4-BE49-F238E27FC236}">
-                <a16:creationId xmlns:a16="http://schemas.microsoft.com/office/drawing/2014/main" id="{C8062C49-590B-4624-8C3C-1C2ABD72DBA1}"/>
+                <a16:creationId xmlns:a16="http://schemas.microsoft.com/office/drawing/2014/main" id="{81345AED-713A-4A11-AB57-89D1CC2BE4F4}"/>
               </a:ext>
             </a:extLst>
           </p:cNvPr>
@@ -4033,7 +4033,7 @@
           <p:cNvPr id="5" name="">
             <a:extLst xmlns:a="http://schemas.openxmlformats.org/drawingml/2006/main">
               <a:ext uri="{FF2B5EF4-FFF2-40B4-BE49-F238E27FC236}">
-                <a16:creationId xmlns:a16="http://schemas.microsoft.com/office/drawing/2014/main" id="{23CED586-F357-42E9-B83D-63CAFCB504F5}"/>
+                <a16:creationId xmlns:a16="http://schemas.microsoft.com/office/drawing/2014/main" id="{75B1946A-CA93-45AF-8DB9-581162F9FC6B}"/>
               </a:ext>
             </a:extLst>
           </p:cNvPr>
@@ -4064,7 +4064,7 @@
           <p:cNvPr id="6" name="">
             <a:extLst xmlns:a="http://schemas.openxmlformats.org/drawingml/2006/main">
               <a:ext uri="{FF2B5EF4-FFF2-40B4-BE49-F238E27FC236}">
-                <a16:creationId xmlns:a16="http://schemas.microsoft.com/office/drawing/2014/main" id="{15A53B24-B193-4888-AFE6-4B8D52E3045E}"/>
+                <a16:creationId xmlns:a16="http://schemas.microsoft.com/office/drawing/2014/main" id="{1EC5C248-E334-4F19-B39C-C5676230AEE6}"/>
               </a:ext>
             </a:extLst>
           </p:cNvPr>
@@ -4114,7 +4114,7 @@
           <p:cNvPr id="7" name="">
             <a:extLst xmlns:a="http://schemas.openxmlformats.org/drawingml/2006/main">
               <a:ext uri="{FF2B5EF4-FFF2-40B4-BE49-F238E27FC236}">
-                <a16:creationId xmlns:a16="http://schemas.microsoft.com/office/drawing/2014/main" id="{3A7DE0FC-D9F5-4C1B-8B1B-06EC5E40E099}"/>
+                <a16:creationId xmlns:a16="http://schemas.microsoft.com/office/drawing/2014/main" id="{D998A00E-6E8E-42DC-AB55-68AA6B4E5D3B}"/>
               </a:ext>
             </a:extLst>
           </p:cNvPr>
@@ -4164,7 +4164,7 @@
           <p:cNvPr id="8" name="">
             <a:extLst xmlns:a="http://schemas.openxmlformats.org/drawingml/2006/main">
               <a:ext uri="{FF2B5EF4-FFF2-40B4-BE49-F238E27FC236}">
-                <a16:creationId xmlns:a16="http://schemas.microsoft.com/office/drawing/2014/main" id="{5A004285-34C2-4A10-96F2-582092A8C461}"/>
+                <a16:creationId xmlns:a16="http://schemas.microsoft.com/office/drawing/2014/main" id="{7ED9EA0C-D90B-43BE-8354-517F15FDCABE}"/>
               </a:ext>
             </a:extLst>
           </p:cNvPr>
@@ -4214,7 +4214,7 @@
           <p:cNvPr id="9" name="">
             <a:extLst xmlns:a="http://schemas.openxmlformats.org/drawingml/2006/main">
               <a:ext uri="{FF2B5EF4-FFF2-40B4-BE49-F238E27FC236}">
-                <a16:creationId xmlns:a16="http://schemas.microsoft.com/office/drawing/2014/main" id="{D6B7C89D-0D78-4226-B7D8-D3922DB82690}"/>
+                <a16:creationId xmlns:a16="http://schemas.microsoft.com/office/drawing/2014/main" id="{7A6CACFC-BA0F-4027-92A1-9EFDF8222A7C}"/>
               </a:ext>
             </a:extLst>
           </p:cNvPr>
@@ -4264,7 +4264,7 @@
           <p:cNvPr id="10" name="">
             <a:extLst xmlns:a="http://schemas.openxmlformats.org/drawingml/2006/main">
               <a:ext uri="{FF2B5EF4-FFF2-40B4-BE49-F238E27FC236}">
-                <a16:creationId xmlns:a16="http://schemas.microsoft.com/office/drawing/2014/main" id="{C4B8B828-C24F-4476-8D4D-E8F0F940B31E}"/>
+                <a16:creationId xmlns:a16="http://schemas.microsoft.com/office/drawing/2014/main" id="{68CA1CF4-771F-427B-B6C1-6BA4589097E6}"/>
               </a:ext>
             </a:extLst>
           </p:cNvPr>
@@ -4314,7 +4314,7 @@
           <p:cNvPr id="11" name="">
             <a:extLst xmlns:a="http://schemas.openxmlformats.org/drawingml/2006/main">
               <a:ext uri="{FF2B5EF4-FFF2-40B4-BE49-F238E27FC236}">
-                <a16:creationId xmlns:a16="http://schemas.microsoft.com/office/drawing/2014/main" id="{D925E670-41B3-4723-AE9C-FE418A5DF161}"/>
+                <a16:creationId xmlns:a16="http://schemas.microsoft.com/office/drawing/2014/main" id="{E412BAB7-A363-4058-803C-C90079BEFAF1}"/>
               </a:ext>
             </a:extLst>
           </p:cNvPr>
@@ -4345,7 +4345,7 @@
           <p:cNvPr id="12" name="">
             <a:extLst xmlns:a="http://schemas.openxmlformats.org/drawingml/2006/main">
               <a:ext uri="{FF2B5EF4-FFF2-40B4-BE49-F238E27FC236}">
-                <a16:creationId xmlns:a16="http://schemas.microsoft.com/office/drawing/2014/main" id="{98CDCEEC-4139-4E3D-80AB-CEAA0040D289}"/>
+                <a16:creationId xmlns:a16="http://schemas.microsoft.com/office/drawing/2014/main" id="{4BB8DB60-E2F2-4480-A8AB-405967CE69CF}"/>
               </a:ext>
             </a:extLst>
           </p:cNvPr>
@@ -4395,7 +4395,7 @@
           <p:cNvPr id="13" name="">
             <a:extLst xmlns:a="http://schemas.openxmlformats.org/drawingml/2006/main">
               <a:ext uri="{FF2B5EF4-FFF2-40B4-BE49-F238E27FC236}">
-                <a16:creationId xmlns:a16="http://schemas.microsoft.com/office/drawing/2014/main" id="{F0025FC7-E59B-4771-A8FD-E763ACBA8A54}"/>
+                <a16:creationId xmlns:a16="http://schemas.microsoft.com/office/drawing/2014/main" id="{8338BB21-4DE3-4093-8D02-B512B8FC2F58}"/>
               </a:ext>
             </a:extLst>
           </p:cNvPr>
@@ -4445,7 +4445,7 @@
           <p:cNvPr id="14" name="">
             <a:extLst xmlns:a="http://schemas.openxmlformats.org/drawingml/2006/main">
               <a:ext uri="{FF2B5EF4-FFF2-40B4-BE49-F238E27FC236}">
-                <a16:creationId xmlns:a16="http://schemas.microsoft.com/office/drawing/2014/main" id="{BBFBE2AC-EC66-4F05-9310-6ECEC77D8820}"/>
+                <a16:creationId xmlns:a16="http://schemas.microsoft.com/office/drawing/2014/main" id="{E5961DD8-144E-4AD7-9F13-0B856C8C21D1}"/>
               </a:ext>
             </a:extLst>
           </p:cNvPr>
@@ -4476,7 +4476,7 @@
           <p:cNvPr id="15" name="">
             <a:extLst xmlns:a="http://schemas.openxmlformats.org/drawingml/2006/main">
               <a:ext uri="{FF2B5EF4-FFF2-40B4-BE49-F238E27FC236}">
-                <a16:creationId xmlns:a16="http://schemas.microsoft.com/office/drawing/2014/main" id="{96F4E7C3-CEBB-4CCD-80A8-6315750C56E2}"/>
+                <a16:creationId xmlns:a16="http://schemas.microsoft.com/office/drawing/2014/main" id="{1C8835B4-739E-459E-B69A-32DEF4E354E3}"/>
               </a:ext>
             </a:extLst>
           </p:cNvPr>
@@ -4526,7 +4526,7 @@
           <p:cNvPr id="16" name="">
             <a:extLst xmlns:a="http://schemas.openxmlformats.org/drawingml/2006/main">
               <a:ext uri="{FF2B5EF4-FFF2-40B4-BE49-F238E27FC236}">
-                <a16:creationId xmlns:a16="http://schemas.microsoft.com/office/drawing/2014/main" id="{288BF528-3CC6-417D-9FCF-C6AAD8A1C64E}"/>
+                <a16:creationId xmlns:a16="http://schemas.microsoft.com/office/drawing/2014/main" id="{AFF1F61D-19DD-461E-B57F-D90826DAACDE}"/>
               </a:ext>
             </a:extLst>
           </p:cNvPr>
@@ -4576,7 +4576,7 @@
           <p:cNvPr id="17" name="">
             <a:extLst xmlns:a="http://schemas.openxmlformats.org/drawingml/2006/main">
               <a:ext uri="{FF2B5EF4-FFF2-40B4-BE49-F238E27FC236}">
-                <a16:creationId xmlns:a16="http://schemas.microsoft.com/office/drawing/2014/main" id="{C2B0F74B-4A9B-4C13-BD5D-79D1C3683517}"/>
+                <a16:creationId xmlns:a16="http://schemas.microsoft.com/office/drawing/2014/main" id="{1CC987B1-CAB2-4BA5-AFB7-927C083D14E0}"/>
               </a:ext>
             </a:extLst>
           </p:cNvPr>
@@ -4607,7 +4607,7 @@
           <p:cNvPr id="18" name="">
             <a:extLst xmlns:a="http://schemas.openxmlformats.org/drawingml/2006/main">
               <a:ext uri="{FF2B5EF4-FFF2-40B4-BE49-F238E27FC236}">
-                <a16:creationId xmlns:a16="http://schemas.microsoft.com/office/drawing/2014/main" id="{C7281F52-EEE7-4BE8-8651-21F13575256E}"/>
+                <a16:creationId xmlns:a16="http://schemas.microsoft.com/office/drawing/2014/main" id="{A45E6CBC-DD61-4174-AD26-1059C7B00FB1}"/>
               </a:ext>
             </a:extLst>
           </p:cNvPr>
@@ -4657,7 +4657,7 @@
           <p:cNvPr id="19" name="">
             <a:extLst xmlns:a="http://schemas.openxmlformats.org/drawingml/2006/main">
               <a:ext uri="{FF2B5EF4-FFF2-40B4-BE49-F238E27FC236}">
-                <a16:creationId xmlns:a16="http://schemas.microsoft.com/office/drawing/2014/main" id="{019761D6-5025-441F-B1C3-375708F0CCCA}"/>
+                <a16:creationId xmlns:a16="http://schemas.microsoft.com/office/drawing/2014/main" id="{2DE070C1-607E-4D74-B931-6E8B0B26CFCF}"/>
               </a:ext>
             </a:extLst>
           </p:cNvPr>
@@ -4705,7 +4705,7 @@
     </p:spTree>
     <p:extLst>
       <p:ext uri="{BB962C8B-B14F-4D97-AF65-F5344CB8AC3E}">
-        <p14:creationId xmlns:p14="http://schemas.microsoft.com/office/powerpoint/2010/main" val="1782424413"/>
+        <p14:creationId xmlns:p14="http://schemas.microsoft.com/office/powerpoint/2010/main" val="1380326375"/>
       </p:ext>
     </p:extLst>
   </p:cSld>
@@ -4736,7 +4736,7 @@
           <p:cNvPr id="1" name="">
             <a:extLst xmlns:a="http://schemas.openxmlformats.org/drawingml/2006/main">
               <a:ext uri="{FF2B5EF4-FFF2-40B4-BE49-F238E27FC236}">
-                <a16:creationId xmlns:a16="http://schemas.microsoft.com/office/drawing/2014/main" id="{617E8EDF-213A-467A-BB19-6B9662928B3E}"/>
+                <a16:creationId xmlns:a16="http://schemas.microsoft.com/office/drawing/2014/main" id="{D196E728-761E-4270-9ACD-BD9AC5AC413B}"/>
               </a:ext>
             </a:extLst>
           </p:cNvPr>
@@ -4771,7 +4771,7 @@
           <p:nvPr/>
         </p:nvPicPr>
         <p:blipFill>
-          <a:blip xmlns:r="http://schemas.openxmlformats.org/officeDocument/2006/relationships" xmlns:a="http://schemas.openxmlformats.org/drawingml/2006/main" r:embed="R52400b4903dc4859"/>
+          <a:blip xmlns:r="http://schemas.openxmlformats.org/officeDocument/2006/relationships" xmlns:a="http://schemas.openxmlformats.org/drawingml/2006/main" r:embed="Rb3da67be4ecf436b"/>
           <a:stretch xmlns:a="http://schemas.openxmlformats.org/drawingml/2006/main"/>
         </p:blipFill>
         <p:spPr>
@@ -4789,7 +4789,7 @@
           <p:cNvPr id="3" name="">
             <a:extLst xmlns:a="http://schemas.openxmlformats.org/drawingml/2006/main">
               <a:ext uri="{FF2B5EF4-FFF2-40B4-BE49-F238E27FC236}">
-                <a16:creationId xmlns:a16="http://schemas.microsoft.com/office/drawing/2014/main" id="{790385F1-D029-43E2-9637-DF70FB370AC7}"/>
+                <a16:creationId xmlns:a16="http://schemas.microsoft.com/office/drawing/2014/main" id="{1675E668-217D-4AF1-995D-084C970C397F}"/>
               </a:ext>
             </a:extLst>
           </p:cNvPr>
@@ -4839,7 +4839,7 @@
           <p:cNvPr id="4" name="">
             <a:extLst xmlns:a="http://schemas.openxmlformats.org/drawingml/2006/main">
               <a:ext uri="{FF2B5EF4-FFF2-40B4-BE49-F238E27FC236}">
-                <a16:creationId xmlns:a16="http://schemas.microsoft.com/office/drawing/2014/main" id="{D1DA0B0B-A618-486D-B43E-D62AB903E380}"/>
+                <a16:creationId xmlns:a16="http://schemas.microsoft.com/office/drawing/2014/main" id="{CF89A5E1-660C-45B5-9F39-8FE82903945B}"/>
               </a:ext>
             </a:extLst>
           </p:cNvPr>
@@ -4872,7 +4872,7 @@
           <p:cNvPr id="5" name="">
             <a:extLst xmlns:a="http://schemas.openxmlformats.org/drawingml/2006/main">
               <a:ext uri="{FF2B5EF4-FFF2-40B4-BE49-F238E27FC236}">
-                <a16:creationId xmlns:a16="http://schemas.microsoft.com/office/drawing/2014/main" id="{F1435D6C-82CD-42CA-BB39-9156826B1D13}"/>
+                <a16:creationId xmlns:a16="http://schemas.microsoft.com/office/drawing/2014/main" id="{D4F4DC09-12AC-48D4-808B-9796E8FB8952}"/>
               </a:ext>
             </a:extLst>
           </p:cNvPr>
@@ -4903,7 +4903,7 @@
           <p:cNvPr id="6" name="">
             <a:extLst xmlns:a="http://schemas.openxmlformats.org/drawingml/2006/main">
               <a:ext uri="{FF2B5EF4-FFF2-40B4-BE49-F238E27FC236}">
-                <a16:creationId xmlns:a16="http://schemas.microsoft.com/office/drawing/2014/main" id="{89DF4794-22E2-455B-BACD-FDF7E89BA14D}"/>
+                <a16:creationId xmlns:a16="http://schemas.microsoft.com/office/drawing/2014/main" id="{0CCC11E6-9A4C-4CB3-8124-77A2442CD52F}"/>
               </a:ext>
             </a:extLst>
           </p:cNvPr>
@@ -4953,7 +4953,7 @@
           <p:cNvPr id="7" name="">
             <a:extLst xmlns:a="http://schemas.openxmlformats.org/drawingml/2006/main">
               <a:ext uri="{FF2B5EF4-FFF2-40B4-BE49-F238E27FC236}">
-                <a16:creationId xmlns:a16="http://schemas.microsoft.com/office/drawing/2014/main" id="{072225E2-84BC-4656-B727-1147C720B8E7}"/>
+                <a16:creationId xmlns:a16="http://schemas.microsoft.com/office/drawing/2014/main" id="{1C6DA219-3243-4CCE-9F8A-F61A763086A1}"/>
               </a:ext>
             </a:extLst>
           </p:cNvPr>
@@ -5003,7 +5003,7 @@
           <p:cNvPr id="8" name="">
             <a:extLst xmlns:a="http://schemas.openxmlformats.org/drawingml/2006/main">
               <a:ext uri="{FF2B5EF4-FFF2-40B4-BE49-F238E27FC236}">
-                <a16:creationId xmlns:a16="http://schemas.microsoft.com/office/drawing/2014/main" id="{DFDCACF2-A3C4-41A7-9911-B252D4468901}"/>
+                <a16:creationId xmlns:a16="http://schemas.microsoft.com/office/drawing/2014/main" id="{BF60589F-FB97-4BBE-B790-9E14F9C10518}"/>
               </a:ext>
             </a:extLst>
           </p:cNvPr>
@@ -5038,7 +5038,7 @@
           <p:cNvPr id="9" name="">
             <a:extLst xmlns:a="http://schemas.openxmlformats.org/drawingml/2006/main">
               <a:ext uri="{FF2B5EF4-FFF2-40B4-BE49-F238E27FC236}">
-                <a16:creationId xmlns:a16="http://schemas.microsoft.com/office/drawing/2014/main" id="{EB34FDE4-E6D5-4E53-A842-203409DD1356}"/>
+                <a16:creationId xmlns:a16="http://schemas.microsoft.com/office/drawing/2014/main" id="{4338BC8C-93A0-49C7-8F9B-BEAA28BC616E}"/>
               </a:ext>
             </a:extLst>
           </p:cNvPr>
@@ -5088,7 +5088,7 @@
           <p:cNvPr id="10" name="">
             <a:extLst xmlns:a="http://schemas.openxmlformats.org/drawingml/2006/main">
               <a:ext uri="{FF2B5EF4-FFF2-40B4-BE49-F238E27FC236}">
-                <a16:creationId xmlns:a16="http://schemas.microsoft.com/office/drawing/2014/main" id="{ADEEB075-AF98-446F-B384-B7BD8BA3C9C6}"/>
+                <a16:creationId xmlns:a16="http://schemas.microsoft.com/office/drawing/2014/main" id="{AD9A232D-B4E6-48DC-9992-22514A93A9DC}"/>
               </a:ext>
             </a:extLst>
           </p:cNvPr>
@@ -5138,7 +5138,7 @@
           <p:cNvPr id="11" name="">
             <a:extLst xmlns:a="http://schemas.openxmlformats.org/drawingml/2006/main">
               <a:ext uri="{FF2B5EF4-FFF2-40B4-BE49-F238E27FC236}">
-                <a16:creationId xmlns:a16="http://schemas.microsoft.com/office/drawing/2014/main" id="{A4E57F99-F581-478B-8E89-1E6B3CBF6659}"/>
+                <a16:creationId xmlns:a16="http://schemas.microsoft.com/office/drawing/2014/main" id="{2F5113F8-9FCA-4590-8255-7BDC40EDF47B}"/>
               </a:ext>
             </a:extLst>
           </p:cNvPr>
@@ -5173,7 +5173,7 @@
           <p:cNvPr id="12" name="">
             <a:extLst xmlns:a="http://schemas.openxmlformats.org/drawingml/2006/main">
               <a:ext uri="{FF2B5EF4-FFF2-40B4-BE49-F238E27FC236}">
-                <a16:creationId xmlns:a16="http://schemas.microsoft.com/office/drawing/2014/main" id="{8430BF83-F82F-4831-BE0D-065C5583197E}"/>
+                <a16:creationId xmlns:a16="http://schemas.microsoft.com/office/drawing/2014/main" id="{80B45E96-B8C0-45D8-820A-693659925E30}"/>
               </a:ext>
             </a:extLst>
           </p:cNvPr>
@@ -5223,7 +5223,7 @@
           <p:cNvPr id="13" name="">
             <a:extLst xmlns:a="http://schemas.openxmlformats.org/drawingml/2006/main">
               <a:ext uri="{FF2B5EF4-FFF2-40B4-BE49-F238E27FC236}">
-                <a16:creationId xmlns:a16="http://schemas.microsoft.com/office/drawing/2014/main" id="{7788936D-E912-495C-9B19-BD0138CEE4FA}"/>
+                <a16:creationId xmlns:a16="http://schemas.microsoft.com/office/drawing/2014/main" id="{3DD395BD-FF46-418C-AA98-201F750A9BFE}"/>
               </a:ext>
             </a:extLst>
           </p:cNvPr>
@@ -5273,7 +5273,7 @@
           <p:cNvPr id="14" name="">
             <a:extLst xmlns:a="http://schemas.openxmlformats.org/drawingml/2006/main">
               <a:ext uri="{FF2B5EF4-FFF2-40B4-BE49-F238E27FC236}">
-                <a16:creationId xmlns:a16="http://schemas.microsoft.com/office/drawing/2014/main" id="{3C8520A8-2B30-4747-AD79-7BF3379BEB7C}"/>
+                <a16:creationId xmlns:a16="http://schemas.microsoft.com/office/drawing/2014/main" id="{01216055-20DD-49F8-B462-8C319FABB4D6}"/>
               </a:ext>
             </a:extLst>
           </p:cNvPr>
@@ -5308,7 +5308,7 @@
           <p:cNvPr id="15" name="">
             <a:extLst xmlns:a="http://schemas.openxmlformats.org/drawingml/2006/main">
               <a:ext uri="{FF2B5EF4-FFF2-40B4-BE49-F238E27FC236}">
-                <a16:creationId xmlns:a16="http://schemas.microsoft.com/office/drawing/2014/main" id="{E4BE6427-8F23-431B-8466-ADC7D5E81004}"/>
+                <a16:creationId xmlns:a16="http://schemas.microsoft.com/office/drawing/2014/main" id="{A3481E4B-E0B3-4E12-83DD-29AA83A030DB}"/>
               </a:ext>
             </a:extLst>
           </p:cNvPr>
@@ -5358,7 +5358,7 @@
           <p:cNvPr id="16" name="">
             <a:extLst xmlns:a="http://schemas.openxmlformats.org/drawingml/2006/main">
               <a:ext uri="{FF2B5EF4-FFF2-40B4-BE49-F238E27FC236}">
-                <a16:creationId xmlns:a16="http://schemas.microsoft.com/office/drawing/2014/main" id="{44BCC0DF-9973-415C-9C12-7BBDA79619F2}"/>
+                <a16:creationId xmlns:a16="http://schemas.microsoft.com/office/drawing/2014/main" id="{6F0C2B9D-B8A5-4A05-98F3-A7DA53E6BC9D}"/>
               </a:ext>
             </a:extLst>
           </p:cNvPr>
@@ -5408,7 +5408,7 @@
           <p:cNvPr id="17" name="">
             <a:extLst xmlns:a="http://schemas.openxmlformats.org/drawingml/2006/main">
               <a:ext uri="{FF2B5EF4-FFF2-40B4-BE49-F238E27FC236}">
-                <a16:creationId xmlns:a16="http://schemas.microsoft.com/office/drawing/2014/main" id="{54138F96-7B0B-47C5-A5C1-A33970E898BB}"/>
+                <a16:creationId xmlns:a16="http://schemas.microsoft.com/office/drawing/2014/main" id="{A8AEC9B6-2C91-4583-8E94-24A19D833888}"/>
               </a:ext>
             </a:extLst>
           </p:cNvPr>
@@ -5443,7 +5443,7 @@
           <p:cNvPr id="18" name="">
             <a:extLst xmlns:a="http://schemas.openxmlformats.org/drawingml/2006/main">
               <a:ext uri="{FF2B5EF4-FFF2-40B4-BE49-F238E27FC236}">
-                <a16:creationId xmlns:a16="http://schemas.microsoft.com/office/drawing/2014/main" id="{A6B367DE-6EEB-481E-ACDE-1655BED4E271}"/>
+                <a16:creationId xmlns:a16="http://schemas.microsoft.com/office/drawing/2014/main" id="{8E6B4702-BD1F-4C67-9066-8667A6CC8C23}"/>
               </a:ext>
             </a:extLst>
           </p:cNvPr>
@@ -5493,7 +5493,7 @@
           <p:cNvPr id="19" name="">
             <a:extLst xmlns:a="http://schemas.openxmlformats.org/drawingml/2006/main">
               <a:ext uri="{FF2B5EF4-FFF2-40B4-BE49-F238E27FC236}">
-                <a16:creationId xmlns:a16="http://schemas.microsoft.com/office/drawing/2014/main" id="{2581769E-5753-480B-BF1E-AA310BA6C5CD}"/>
+                <a16:creationId xmlns:a16="http://schemas.microsoft.com/office/drawing/2014/main" id="{BE9838F9-06FC-41F8-8D4D-6154E00D7F36}"/>
               </a:ext>
             </a:extLst>
           </p:cNvPr>
@@ -5543,7 +5543,7 @@
           <p:cNvPr id="20" name="">
             <a:extLst xmlns:a="http://schemas.openxmlformats.org/drawingml/2006/main">
               <a:ext uri="{FF2B5EF4-FFF2-40B4-BE49-F238E27FC236}">
-                <a16:creationId xmlns:a16="http://schemas.microsoft.com/office/drawing/2014/main" id="{D238A1EC-78D7-4C91-8A62-F96FE1F5D132}"/>
+                <a16:creationId xmlns:a16="http://schemas.microsoft.com/office/drawing/2014/main" id="{524E808D-3488-480F-8C3C-E166E039AC03}"/>
               </a:ext>
             </a:extLst>
           </p:cNvPr>
@@ -5593,7 +5593,7 @@
           <p:cNvPr id="21" name="">
             <a:extLst xmlns:a="http://schemas.openxmlformats.org/drawingml/2006/main">
               <a:ext uri="{FF2B5EF4-FFF2-40B4-BE49-F238E27FC236}">
-                <a16:creationId xmlns:a16="http://schemas.microsoft.com/office/drawing/2014/main" id="{CF876719-F2C1-4D23-A4BE-741469C717EF}"/>
+                <a16:creationId xmlns:a16="http://schemas.microsoft.com/office/drawing/2014/main" id="{FEA8EF92-924A-49D9-B9E1-4AE9559A16F3}"/>
               </a:ext>
             </a:extLst>
           </p:cNvPr>
@@ -5643,7 +5643,7 @@
           <p:cNvPr id="22" name="">
             <a:extLst xmlns:a="http://schemas.openxmlformats.org/drawingml/2006/main">
               <a:ext uri="{FF2B5EF4-FFF2-40B4-BE49-F238E27FC236}">
-                <a16:creationId xmlns:a16="http://schemas.microsoft.com/office/drawing/2014/main" id="{D38F299F-ADA3-448A-8415-80521514ED66}"/>
+                <a16:creationId xmlns:a16="http://schemas.microsoft.com/office/drawing/2014/main" id="{8FB52CEC-1F79-4357-BC48-42D1B7FDDA7D}"/>
               </a:ext>
             </a:extLst>
           </p:cNvPr>
@@ -5693,7 +5693,7 @@
           <p:cNvPr id="23" name="">
             <a:extLst xmlns:a="http://schemas.openxmlformats.org/drawingml/2006/main">
               <a:ext uri="{FF2B5EF4-FFF2-40B4-BE49-F238E27FC236}">
-                <a16:creationId xmlns:a16="http://schemas.microsoft.com/office/drawing/2014/main" id="{8DFAD902-41C4-4554-912B-A827EC2E6CBB}"/>
+                <a16:creationId xmlns:a16="http://schemas.microsoft.com/office/drawing/2014/main" id="{9CD5E8A1-8C9A-4925-81F3-8949F2DDDCF0}"/>
               </a:ext>
             </a:extLst>
           </p:cNvPr>
@@ -5726,7 +5726,7 @@
           <p:cNvPr id="24" name="">
             <a:extLst xmlns:a="http://schemas.openxmlformats.org/drawingml/2006/main">
               <a:ext uri="{FF2B5EF4-FFF2-40B4-BE49-F238E27FC236}">
-                <a16:creationId xmlns:a16="http://schemas.microsoft.com/office/drawing/2014/main" id="{04036ADE-481B-49E6-B8F4-A9863EE4D2EC}"/>
+                <a16:creationId xmlns:a16="http://schemas.microsoft.com/office/drawing/2014/main" id="{EC2E07E2-4FB5-49F2-ADC1-EF18AFEBE23B}"/>
               </a:ext>
             </a:extLst>
           </p:cNvPr>
@@ -5776,7 +5776,7 @@
           <p:cNvPr id="25" name="">
             <a:extLst xmlns:a="http://schemas.openxmlformats.org/drawingml/2006/main">
               <a:ext uri="{FF2B5EF4-FFF2-40B4-BE49-F238E27FC236}">
-                <a16:creationId xmlns:a16="http://schemas.microsoft.com/office/drawing/2014/main" id="{99CE9DF8-CF03-4439-9194-4ED516C595F8}"/>
+                <a16:creationId xmlns:a16="http://schemas.microsoft.com/office/drawing/2014/main" id="{A48A1C52-D8BC-4053-89E1-18B27FD46E27}"/>
               </a:ext>
             </a:extLst>
           </p:cNvPr>
@@ -5826,7 +5826,7 @@
           <p:cNvPr id="26" name="">
             <a:extLst xmlns:a="http://schemas.openxmlformats.org/drawingml/2006/main">
               <a:ext uri="{FF2B5EF4-FFF2-40B4-BE49-F238E27FC236}">
-                <a16:creationId xmlns:a16="http://schemas.microsoft.com/office/drawing/2014/main" id="{45989299-360E-4B11-94A0-DC4B0110259C}"/>
+                <a16:creationId xmlns:a16="http://schemas.microsoft.com/office/drawing/2014/main" id="{85CD8EBD-3180-4EE5-AE57-0865ED92B9B4}"/>
               </a:ext>
             </a:extLst>
           </p:cNvPr>
@@ -5859,7 +5859,7 @@
           <p:cNvPr id="27" name="">
             <a:extLst xmlns:a="http://schemas.openxmlformats.org/drawingml/2006/main">
               <a:ext uri="{FF2B5EF4-FFF2-40B4-BE49-F238E27FC236}">
-                <a16:creationId xmlns:a16="http://schemas.microsoft.com/office/drawing/2014/main" id="{760B1C91-4B80-4FD6-A288-EDE2CB1FBF60}"/>
+                <a16:creationId xmlns:a16="http://schemas.microsoft.com/office/drawing/2014/main" id="{EDBACF4E-4FC3-4E78-8F33-42A9B66C55DD}"/>
               </a:ext>
             </a:extLst>
           </p:cNvPr>
@@ -5909,7 +5909,7 @@
           <p:cNvPr id="28" name="">
             <a:extLst xmlns:a="http://schemas.openxmlformats.org/drawingml/2006/main">
               <a:ext uri="{FF2B5EF4-FFF2-40B4-BE49-F238E27FC236}">
-                <a16:creationId xmlns:a16="http://schemas.microsoft.com/office/drawing/2014/main" id="{0E75B8EB-684A-4F65-929D-FA94973D80AB}"/>
+                <a16:creationId xmlns:a16="http://schemas.microsoft.com/office/drawing/2014/main" id="{218A48F6-CF7C-43F2-99DA-E9C5640920D8}"/>
               </a:ext>
             </a:extLst>
           </p:cNvPr>
@@ -5959,7 +5959,7 @@
           <p:cNvPr id="29" name="">
             <a:extLst xmlns:a="http://schemas.openxmlformats.org/drawingml/2006/main">
               <a:ext uri="{FF2B5EF4-FFF2-40B4-BE49-F238E27FC236}">
-                <a16:creationId xmlns:a16="http://schemas.microsoft.com/office/drawing/2014/main" id="{70B102BD-FD01-4A25-80A8-D522DC45B6FE}"/>
+                <a16:creationId xmlns:a16="http://schemas.microsoft.com/office/drawing/2014/main" id="{873538B5-1A85-45ED-8F77-84D504D6D7BC}"/>
               </a:ext>
             </a:extLst>
           </p:cNvPr>
@@ -5992,7 +5992,7 @@
           <p:cNvPr id="30" name="">
             <a:extLst xmlns:a="http://schemas.openxmlformats.org/drawingml/2006/main">
               <a:ext uri="{FF2B5EF4-FFF2-40B4-BE49-F238E27FC236}">
-                <a16:creationId xmlns:a16="http://schemas.microsoft.com/office/drawing/2014/main" id="{03D1E54E-4097-41B1-A44E-FEB535A8BD50}"/>
+                <a16:creationId xmlns:a16="http://schemas.microsoft.com/office/drawing/2014/main" id="{A34FFD62-25DC-4E58-B46D-402D2092826D}"/>
               </a:ext>
             </a:extLst>
           </p:cNvPr>
@@ -6042,7 +6042,7 @@
           <p:cNvPr id="31" name="">
             <a:extLst xmlns:a="http://schemas.openxmlformats.org/drawingml/2006/main">
               <a:ext uri="{FF2B5EF4-FFF2-40B4-BE49-F238E27FC236}">
-                <a16:creationId xmlns:a16="http://schemas.microsoft.com/office/drawing/2014/main" id="{241A2880-1B20-41E1-B123-3AAD6E73B87B}"/>
+                <a16:creationId xmlns:a16="http://schemas.microsoft.com/office/drawing/2014/main" id="{803CFED4-5936-4B7D-A0E6-59D6AE08186A}"/>
               </a:ext>
             </a:extLst>
           </p:cNvPr>
@@ -6090,7 +6090,7 @@
     </p:spTree>
     <p:extLst>
       <p:ext uri="{BB962C8B-B14F-4D97-AF65-F5344CB8AC3E}">
-        <p14:creationId xmlns:p14="http://schemas.microsoft.com/office/powerpoint/2010/main" val="870171579"/>
+        <p14:creationId xmlns:p14="http://schemas.microsoft.com/office/powerpoint/2010/main" val="1520205222"/>
       </p:ext>
     </p:extLst>
   </p:cSld>
@@ -6121,7 +6121,7 @@
           <p:cNvPr id="1" name="">
             <a:extLst xmlns:a="http://schemas.openxmlformats.org/drawingml/2006/main">
               <a:ext uri="{FF2B5EF4-FFF2-40B4-BE49-F238E27FC236}">
-                <a16:creationId xmlns:a16="http://schemas.microsoft.com/office/drawing/2014/main" id="{6EF16A02-ED68-4022-9801-48BD16317CFD}"/>
+                <a16:creationId xmlns:a16="http://schemas.microsoft.com/office/drawing/2014/main" id="{9A53A15B-CA0A-4F5A-BC73-E0E7CAA4ABA2}"/>
               </a:ext>
             </a:extLst>
           </p:cNvPr>
@@ -6156,7 +6156,7 @@
           <p:nvPr/>
         </p:nvPicPr>
         <p:blipFill>
-          <a:blip xmlns:r="http://schemas.openxmlformats.org/officeDocument/2006/relationships" xmlns:a="http://schemas.openxmlformats.org/drawingml/2006/main" r:embed="R5ed1599d876e4c7a"/>
+          <a:blip xmlns:r="http://schemas.openxmlformats.org/officeDocument/2006/relationships" xmlns:a="http://schemas.openxmlformats.org/drawingml/2006/main" r:embed="Reb165285930a4336"/>
           <a:stretch xmlns:a="http://schemas.openxmlformats.org/drawingml/2006/main"/>
         </p:blipFill>
         <p:spPr>
@@ -6174,7 +6174,7 @@
           <p:cNvPr id="3" name="">
             <a:extLst xmlns:a="http://schemas.openxmlformats.org/drawingml/2006/main">
               <a:ext uri="{FF2B5EF4-FFF2-40B4-BE49-F238E27FC236}">
-                <a16:creationId xmlns:a16="http://schemas.microsoft.com/office/drawing/2014/main" id="{291F5E10-5E00-44FF-913C-B83CAB8DC722}"/>
+                <a16:creationId xmlns:a16="http://schemas.microsoft.com/office/drawing/2014/main" id="{7DA0A961-6C6E-4FBF-B965-141731DE2BAC}"/>
               </a:ext>
             </a:extLst>
           </p:cNvPr>
@@ -6224,7 +6224,7 @@
           <p:cNvPr id="4" name="">
             <a:extLst xmlns:a="http://schemas.openxmlformats.org/drawingml/2006/main">
               <a:ext uri="{FF2B5EF4-FFF2-40B4-BE49-F238E27FC236}">
-                <a16:creationId xmlns:a16="http://schemas.microsoft.com/office/drawing/2014/main" id="{FB3E2008-D150-4612-8281-10CA5C8D6D7A}"/>
+                <a16:creationId xmlns:a16="http://schemas.microsoft.com/office/drawing/2014/main" id="{140E2543-4A38-47B7-8726-44EF2BFC3188}"/>
               </a:ext>
             </a:extLst>
           </p:cNvPr>
@@ -6257,7 +6257,7 @@
           <p:cNvPr id="5" name="">
             <a:extLst xmlns:a="http://schemas.openxmlformats.org/drawingml/2006/main">
               <a:ext uri="{FF2B5EF4-FFF2-40B4-BE49-F238E27FC236}">
-                <a16:creationId xmlns:a16="http://schemas.microsoft.com/office/drawing/2014/main" id="{7A0D6372-D639-4602-9A4F-438D20C58E77}"/>
+                <a16:creationId xmlns:a16="http://schemas.microsoft.com/office/drawing/2014/main" id="{B499E67E-6929-45B8-80FF-D8BDACBA37B2}"/>
               </a:ext>
             </a:extLst>
           </p:cNvPr>
@@ -6288,7 +6288,7 @@
           <p:cNvPr id="6" name="">
             <a:extLst xmlns:a="http://schemas.openxmlformats.org/drawingml/2006/main">
               <a:ext uri="{FF2B5EF4-FFF2-40B4-BE49-F238E27FC236}">
-                <a16:creationId xmlns:a16="http://schemas.microsoft.com/office/drawing/2014/main" id="{FADF7812-AA26-4682-9424-224B5EC613E5}"/>
+                <a16:creationId xmlns:a16="http://schemas.microsoft.com/office/drawing/2014/main" id="{0DDB7D58-FDC2-4C69-8C2D-D2480A062540}"/>
               </a:ext>
             </a:extLst>
           </p:cNvPr>
@@ -6338,7 +6338,7 @@
           <p:cNvPr id="7" name="">
             <a:extLst xmlns:a="http://schemas.openxmlformats.org/drawingml/2006/main">
               <a:ext uri="{FF2B5EF4-FFF2-40B4-BE49-F238E27FC236}">
-                <a16:creationId xmlns:a16="http://schemas.microsoft.com/office/drawing/2014/main" id="{813D9436-93D2-4BA6-8A6D-8D704BFC4AE2}"/>
+                <a16:creationId xmlns:a16="http://schemas.microsoft.com/office/drawing/2014/main" id="{7C1022E1-2AC4-40AB-8A31-892E0CB5FEDF}"/>
               </a:ext>
             </a:extLst>
           </p:cNvPr>
@@ -6388,7 +6388,7 @@
           <p:cNvPr id="8" name="">
             <a:extLst xmlns:a="http://schemas.openxmlformats.org/drawingml/2006/main">
               <a:ext uri="{FF2B5EF4-FFF2-40B4-BE49-F238E27FC236}">
-                <a16:creationId xmlns:a16="http://schemas.microsoft.com/office/drawing/2014/main" id="{ACE2B761-DA3F-40C6-A303-BB3624C09928}"/>
+                <a16:creationId xmlns:a16="http://schemas.microsoft.com/office/drawing/2014/main" id="{E5222021-312C-4481-8244-8E2684807186}"/>
               </a:ext>
             </a:extLst>
           </p:cNvPr>
@@ -6421,7 +6421,7 @@
           <p:cNvPr id="9" name="">
             <a:extLst xmlns:a="http://schemas.openxmlformats.org/drawingml/2006/main">
               <a:ext uri="{FF2B5EF4-FFF2-40B4-BE49-F238E27FC236}">
-                <a16:creationId xmlns:a16="http://schemas.microsoft.com/office/drawing/2014/main" id="{646885F5-9F5F-43E0-B5FF-6EEDD23B9AEB}"/>
+                <a16:creationId xmlns:a16="http://schemas.microsoft.com/office/drawing/2014/main" id="{158AA6F1-2668-4F29-AB67-746029A4D275}"/>
               </a:ext>
             </a:extLst>
           </p:cNvPr>
@@ -6471,7 +6471,7 @@
           <p:cNvPr id="10" name="">
             <a:extLst xmlns:a="http://schemas.openxmlformats.org/drawingml/2006/main">
               <a:ext uri="{FF2B5EF4-FFF2-40B4-BE49-F238E27FC236}">
-                <a16:creationId xmlns:a16="http://schemas.microsoft.com/office/drawing/2014/main" id="{A6A87ADD-ED2A-4196-9A20-B5E1A589D979}"/>
+                <a16:creationId xmlns:a16="http://schemas.microsoft.com/office/drawing/2014/main" id="{5E42A43F-2F02-4315-A681-48585CF4327C}"/>
               </a:ext>
             </a:extLst>
           </p:cNvPr>
@@ -6521,7 +6521,7 @@
           <p:cNvPr id="11" name="">
             <a:extLst xmlns:a="http://schemas.openxmlformats.org/drawingml/2006/main">
               <a:ext uri="{FF2B5EF4-FFF2-40B4-BE49-F238E27FC236}">
-                <a16:creationId xmlns:a16="http://schemas.microsoft.com/office/drawing/2014/main" id="{5F86A166-AC9A-4123-9ED0-1CBBDA0B9829}"/>
+                <a16:creationId xmlns:a16="http://schemas.microsoft.com/office/drawing/2014/main" id="{7FDE897C-C38D-428D-8AC9-0DBC52A9381A}"/>
               </a:ext>
             </a:extLst>
           </p:cNvPr>
@@ -6571,7 +6571,7 @@
           <p:cNvPr id="12" name="">
             <a:extLst xmlns:a="http://schemas.openxmlformats.org/drawingml/2006/main">
               <a:ext uri="{FF2B5EF4-FFF2-40B4-BE49-F238E27FC236}">
-                <a16:creationId xmlns:a16="http://schemas.microsoft.com/office/drawing/2014/main" id="{F60BCC1F-57DA-4F7C-81A8-E1FCC02DF388}"/>
+                <a16:creationId xmlns:a16="http://schemas.microsoft.com/office/drawing/2014/main" id="{E007C3F7-EB47-4771-97F1-A664A78286CB}"/>
               </a:ext>
             </a:extLst>
           </p:cNvPr>
@@ -6621,7 +6621,7 @@
           <p:cNvPr id="13" name="">
             <a:extLst xmlns:a="http://schemas.openxmlformats.org/drawingml/2006/main">
               <a:ext uri="{FF2B5EF4-FFF2-40B4-BE49-F238E27FC236}">
-                <a16:creationId xmlns:a16="http://schemas.microsoft.com/office/drawing/2014/main" id="{8549ECFD-7221-4811-B90B-15B8752A3402}"/>
+                <a16:creationId xmlns:a16="http://schemas.microsoft.com/office/drawing/2014/main" id="{28E76321-AF99-498C-9ED5-10CBE1F1C8A7}"/>
               </a:ext>
             </a:extLst>
           </p:cNvPr>
@@ -6671,7 +6671,7 @@
           <p:cNvPr id="14" name="">
             <a:extLst xmlns:a="http://schemas.openxmlformats.org/drawingml/2006/main">
               <a:ext uri="{FF2B5EF4-FFF2-40B4-BE49-F238E27FC236}">
-                <a16:creationId xmlns:a16="http://schemas.microsoft.com/office/drawing/2014/main" id="{36C6180E-47AA-4445-B137-8240123A3C1B}"/>
+                <a16:creationId xmlns:a16="http://schemas.microsoft.com/office/drawing/2014/main" id="{A1A59975-D6D3-47CD-B7F1-F42DD4292370}"/>
               </a:ext>
             </a:extLst>
           </p:cNvPr>
@@ -6702,7 +6702,7 @@
           <p:cNvPr id="15" name="">
             <a:extLst xmlns:a="http://schemas.openxmlformats.org/drawingml/2006/main">
               <a:ext uri="{FF2B5EF4-FFF2-40B4-BE49-F238E27FC236}">
-                <a16:creationId xmlns:a16="http://schemas.microsoft.com/office/drawing/2014/main" id="{22D30CB7-8F91-4571-A90D-B9920841CA86}"/>
+                <a16:creationId xmlns:a16="http://schemas.microsoft.com/office/drawing/2014/main" id="{96325E7D-3FDE-41CD-93C0-D4ACF39B8E02}"/>
               </a:ext>
             </a:extLst>
           </p:cNvPr>
@@ -6735,7 +6735,7 @@
           <p:cNvPr id="16" name="">
             <a:extLst xmlns:a="http://schemas.openxmlformats.org/drawingml/2006/main">
               <a:ext uri="{FF2B5EF4-FFF2-40B4-BE49-F238E27FC236}">
-                <a16:creationId xmlns:a16="http://schemas.microsoft.com/office/drawing/2014/main" id="{1CC84B50-8D5C-4702-A39C-FA027F436B9A}"/>
+                <a16:creationId xmlns:a16="http://schemas.microsoft.com/office/drawing/2014/main" id="{1303B9C3-693B-4ADD-9F28-7C8BF7784D32}"/>
               </a:ext>
             </a:extLst>
           </p:cNvPr>
@@ -6785,7 +6785,7 @@
           <p:cNvPr id="17" name="">
             <a:extLst xmlns:a="http://schemas.openxmlformats.org/drawingml/2006/main">
               <a:ext uri="{FF2B5EF4-FFF2-40B4-BE49-F238E27FC236}">
-                <a16:creationId xmlns:a16="http://schemas.microsoft.com/office/drawing/2014/main" id="{92AC57D0-9416-4E84-B7BE-C7A58E72C3C6}"/>
+                <a16:creationId xmlns:a16="http://schemas.microsoft.com/office/drawing/2014/main" id="{BBE52B1D-8A18-41C4-9544-AD9E415CF2A1}"/>
               </a:ext>
             </a:extLst>
           </p:cNvPr>
@@ -6835,7 +6835,7 @@
           <p:cNvPr id="18" name="">
             <a:extLst xmlns:a="http://schemas.openxmlformats.org/drawingml/2006/main">
               <a:ext uri="{FF2B5EF4-FFF2-40B4-BE49-F238E27FC236}">
-                <a16:creationId xmlns:a16="http://schemas.microsoft.com/office/drawing/2014/main" id="{7FA3A9FA-2E05-4B0B-8BB3-57540E541862}"/>
+                <a16:creationId xmlns:a16="http://schemas.microsoft.com/office/drawing/2014/main" id="{E5E40CB4-BE3A-407A-84C7-561906F20944}"/>
               </a:ext>
             </a:extLst>
           </p:cNvPr>
@@ -6885,7 +6885,7 @@
           <p:cNvPr id="19" name="">
             <a:extLst xmlns:a="http://schemas.openxmlformats.org/drawingml/2006/main">
               <a:ext uri="{FF2B5EF4-FFF2-40B4-BE49-F238E27FC236}">
-                <a16:creationId xmlns:a16="http://schemas.microsoft.com/office/drawing/2014/main" id="{1BA89D86-9B73-45B2-A067-A274338F3BFE}"/>
+                <a16:creationId xmlns:a16="http://schemas.microsoft.com/office/drawing/2014/main" id="{6F2F7A9B-FA58-4F6A-B0FD-B2A7BAB48E21}"/>
               </a:ext>
             </a:extLst>
           </p:cNvPr>
@@ -6935,7 +6935,7 @@
           <p:cNvPr id="20" name="">
             <a:extLst xmlns:a="http://schemas.openxmlformats.org/drawingml/2006/main">
               <a:ext uri="{FF2B5EF4-FFF2-40B4-BE49-F238E27FC236}">
-                <a16:creationId xmlns:a16="http://schemas.microsoft.com/office/drawing/2014/main" id="{F2A159CA-8228-4E0D-808A-98E9614DF5A7}"/>
+                <a16:creationId xmlns:a16="http://schemas.microsoft.com/office/drawing/2014/main" id="{C0D82B98-B3F0-45D1-AE33-9C6536FE74FA}"/>
               </a:ext>
             </a:extLst>
           </p:cNvPr>
@@ -6985,7 +6985,7 @@
           <p:cNvPr id="21" name="">
             <a:extLst xmlns:a="http://schemas.openxmlformats.org/drawingml/2006/main">
               <a:ext uri="{FF2B5EF4-FFF2-40B4-BE49-F238E27FC236}">
-                <a16:creationId xmlns:a16="http://schemas.microsoft.com/office/drawing/2014/main" id="{02A28533-949B-420A-A076-BF887651E598}"/>
+                <a16:creationId xmlns:a16="http://schemas.microsoft.com/office/drawing/2014/main" id="{01FE8D99-A682-4C19-8B38-70EB4C845A1B}"/>
               </a:ext>
             </a:extLst>
           </p:cNvPr>
@@ -7016,7 +7016,7 @@
           <p:cNvPr id="22" name="">
             <a:extLst xmlns:a="http://schemas.openxmlformats.org/drawingml/2006/main">
               <a:ext uri="{FF2B5EF4-FFF2-40B4-BE49-F238E27FC236}">
-                <a16:creationId xmlns:a16="http://schemas.microsoft.com/office/drawing/2014/main" id="{FFD7DD04-0A27-4C5D-89F2-E9FBEB75ECFC}"/>
+                <a16:creationId xmlns:a16="http://schemas.microsoft.com/office/drawing/2014/main" id="{72482BD9-DC82-4746-90FB-642E837BD481}"/>
               </a:ext>
             </a:extLst>
           </p:cNvPr>
@@ -7049,7 +7049,7 @@
           <p:cNvPr id="23" name="">
             <a:extLst xmlns:a="http://schemas.openxmlformats.org/drawingml/2006/main">
               <a:ext uri="{FF2B5EF4-FFF2-40B4-BE49-F238E27FC236}">
-                <a16:creationId xmlns:a16="http://schemas.microsoft.com/office/drawing/2014/main" id="{45296D8E-EB5C-4F6B-84EB-54F025E1A978}"/>
+                <a16:creationId xmlns:a16="http://schemas.microsoft.com/office/drawing/2014/main" id="{27266A84-4B6B-44BE-BCD1-77A139DF780D}"/>
               </a:ext>
             </a:extLst>
           </p:cNvPr>
@@ -7099,7 +7099,7 @@
           <p:cNvPr id="24" name="">
             <a:extLst xmlns:a="http://schemas.openxmlformats.org/drawingml/2006/main">
               <a:ext uri="{FF2B5EF4-FFF2-40B4-BE49-F238E27FC236}">
-                <a16:creationId xmlns:a16="http://schemas.microsoft.com/office/drawing/2014/main" id="{19EB7473-2573-4067-833D-9BDEF8A80C2D}"/>
+                <a16:creationId xmlns:a16="http://schemas.microsoft.com/office/drawing/2014/main" id="{242E7B8A-4391-4FD4-AFBC-D31D6D72E4AF}"/>
               </a:ext>
             </a:extLst>
           </p:cNvPr>
@@ -7149,7 +7149,7 @@
           <p:cNvPr id="25" name="">
             <a:extLst xmlns:a="http://schemas.openxmlformats.org/drawingml/2006/main">
               <a:ext uri="{FF2B5EF4-FFF2-40B4-BE49-F238E27FC236}">
-                <a16:creationId xmlns:a16="http://schemas.microsoft.com/office/drawing/2014/main" id="{CD61EF9B-9141-4A2B-B78A-B30DD76914FC}"/>
+                <a16:creationId xmlns:a16="http://schemas.microsoft.com/office/drawing/2014/main" id="{2FB30736-2D5D-48EE-B0BE-BE745B65C8D8}"/>
               </a:ext>
             </a:extLst>
           </p:cNvPr>
@@ -7199,7 +7199,7 @@
           <p:cNvPr id="26" name="">
             <a:extLst xmlns:a="http://schemas.openxmlformats.org/drawingml/2006/main">
               <a:ext uri="{FF2B5EF4-FFF2-40B4-BE49-F238E27FC236}">
-                <a16:creationId xmlns:a16="http://schemas.microsoft.com/office/drawing/2014/main" id="{124B878E-9657-4B16-A1F0-03C29959651C}"/>
+                <a16:creationId xmlns:a16="http://schemas.microsoft.com/office/drawing/2014/main" id="{3FF140F7-45BB-42DE-BEBD-30A5BA0BA307}"/>
               </a:ext>
             </a:extLst>
           </p:cNvPr>
@@ -7249,7 +7249,7 @@
           <p:cNvPr id="27" name="">
             <a:extLst xmlns:a="http://schemas.openxmlformats.org/drawingml/2006/main">
               <a:ext uri="{FF2B5EF4-FFF2-40B4-BE49-F238E27FC236}">
-                <a16:creationId xmlns:a16="http://schemas.microsoft.com/office/drawing/2014/main" id="{7C66414C-08E8-40D2-989E-EC781B8E7AF0}"/>
+                <a16:creationId xmlns:a16="http://schemas.microsoft.com/office/drawing/2014/main" id="{5367F916-EEC8-4800-9E02-FA41832E31C9}"/>
               </a:ext>
             </a:extLst>
           </p:cNvPr>
@@ -7299,7 +7299,7 @@
           <p:cNvPr id="28" name="">
             <a:extLst xmlns:a="http://schemas.openxmlformats.org/drawingml/2006/main">
               <a:ext uri="{FF2B5EF4-FFF2-40B4-BE49-F238E27FC236}">
-                <a16:creationId xmlns:a16="http://schemas.microsoft.com/office/drawing/2014/main" id="{9ECA5362-C1A8-4126-8C5D-59E2E4E9B348}"/>
+                <a16:creationId xmlns:a16="http://schemas.microsoft.com/office/drawing/2014/main" id="{FB5D512D-23F7-4371-9E35-312411D22EAA}"/>
               </a:ext>
             </a:extLst>
           </p:cNvPr>
@@ -7330,7 +7330,7 @@
           <p:cNvPr id="29" name="">
             <a:extLst xmlns:a="http://schemas.openxmlformats.org/drawingml/2006/main">
               <a:ext uri="{FF2B5EF4-FFF2-40B4-BE49-F238E27FC236}">
-                <a16:creationId xmlns:a16="http://schemas.microsoft.com/office/drawing/2014/main" id="{204B2D46-2873-42FF-915A-C6ED52334795}"/>
+                <a16:creationId xmlns:a16="http://schemas.microsoft.com/office/drawing/2014/main" id="{32BC8BD4-F032-446D-9A93-61607486F786}"/>
               </a:ext>
             </a:extLst>
           </p:cNvPr>
@@ -7363,7 +7363,7 @@
           <p:cNvPr id="30" name="">
             <a:extLst xmlns:a="http://schemas.openxmlformats.org/drawingml/2006/main">
               <a:ext uri="{FF2B5EF4-FFF2-40B4-BE49-F238E27FC236}">
-                <a16:creationId xmlns:a16="http://schemas.microsoft.com/office/drawing/2014/main" id="{08381922-834D-4CB6-8130-606AC26135BD}"/>
+                <a16:creationId xmlns:a16="http://schemas.microsoft.com/office/drawing/2014/main" id="{A5BE8E01-1293-4573-B098-A70764DAF7EB}"/>
               </a:ext>
             </a:extLst>
           </p:cNvPr>
@@ -7413,7 +7413,7 @@
           <p:cNvPr id="31" name="">
             <a:extLst xmlns:a="http://schemas.openxmlformats.org/drawingml/2006/main">
               <a:ext uri="{FF2B5EF4-FFF2-40B4-BE49-F238E27FC236}">
-                <a16:creationId xmlns:a16="http://schemas.microsoft.com/office/drawing/2014/main" id="{614AB62B-CC61-4645-B0DD-10E6BD69ECB9}"/>
+                <a16:creationId xmlns:a16="http://schemas.microsoft.com/office/drawing/2014/main" id="{BE919CB5-B692-4221-A28F-506219451904}"/>
               </a:ext>
             </a:extLst>
           </p:cNvPr>
@@ -7463,7 +7463,7 @@
           <p:cNvPr id="32" name="">
             <a:extLst xmlns:a="http://schemas.openxmlformats.org/drawingml/2006/main">
               <a:ext uri="{FF2B5EF4-FFF2-40B4-BE49-F238E27FC236}">
-                <a16:creationId xmlns:a16="http://schemas.microsoft.com/office/drawing/2014/main" id="{DC8D5C0A-C638-4144-884D-19D697C2DF2D}"/>
+                <a16:creationId xmlns:a16="http://schemas.microsoft.com/office/drawing/2014/main" id="{FBE17A45-5E15-43A5-B468-EF54177B6435}"/>
               </a:ext>
             </a:extLst>
           </p:cNvPr>
@@ -7513,7 +7513,7 @@
           <p:cNvPr id="33" name="">
             <a:extLst xmlns:a="http://schemas.openxmlformats.org/drawingml/2006/main">
               <a:ext uri="{FF2B5EF4-FFF2-40B4-BE49-F238E27FC236}">
-                <a16:creationId xmlns:a16="http://schemas.microsoft.com/office/drawing/2014/main" id="{18A1D1E8-B9D4-4772-89DC-2AB565B0A624}"/>
+                <a16:creationId xmlns:a16="http://schemas.microsoft.com/office/drawing/2014/main" id="{B45955FA-0C28-4D98-86C2-49B443678F48}"/>
               </a:ext>
             </a:extLst>
           </p:cNvPr>
@@ -7563,7 +7563,7 @@
           <p:cNvPr id="34" name="">
             <a:extLst xmlns:a="http://schemas.openxmlformats.org/drawingml/2006/main">
               <a:ext uri="{FF2B5EF4-FFF2-40B4-BE49-F238E27FC236}">
-                <a16:creationId xmlns:a16="http://schemas.microsoft.com/office/drawing/2014/main" id="{D6B24043-4F3F-40F1-8B3D-3143A7EF7553}"/>
+                <a16:creationId xmlns:a16="http://schemas.microsoft.com/office/drawing/2014/main" id="{BD97F84A-2747-4B8D-993C-76C7CF8462CB}"/>
               </a:ext>
             </a:extLst>
           </p:cNvPr>
@@ -7611,7 +7611,7 @@
     </p:spTree>
     <p:extLst>
       <p:ext uri="{BB962C8B-B14F-4D97-AF65-F5344CB8AC3E}">
-        <p14:creationId xmlns:p14="http://schemas.microsoft.com/office/powerpoint/2010/main" val="1672746611"/>
+        <p14:creationId xmlns:p14="http://schemas.microsoft.com/office/powerpoint/2010/main" val="2071525094"/>
       </p:ext>
     </p:extLst>
   </p:cSld>
@@ -7642,7 +7642,7 @@
           <p:cNvPr id="1" name="">
             <a:extLst xmlns:a="http://schemas.openxmlformats.org/drawingml/2006/main">
               <a:ext uri="{FF2B5EF4-FFF2-40B4-BE49-F238E27FC236}">
-                <a16:creationId xmlns:a16="http://schemas.microsoft.com/office/drawing/2014/main" id="{9E00BEC3-728F-40D5-ACAF-A78155A3C0CF}"/>
+                <a16:creationId xmlns:a16="http://schemas.microsoft.com/office/drawing/2014/main" id="{6986C3AE-D2DF-4FC9-ADDA-8F4FA4F818EB}"/>
               </a:ext>
             </a:extLst>
           </p:cNvPr>
@@ -7677,7 +7677,7 @@
           <p:nvPr/>
         </p:nvPicPr>
         <p:blipFill>
-          <a:blip xmlns:r="http://schemas.openxmlformats.org/officeDocument/2006/relationships" xmlns:a="http://schemas.openxmlformats.org/drawingml/2006/main" r:embed="R9c1fa10ee2414ad3"/>
+          <a:blip xmlns:r="http://schemas.openxmlformats.org/officeDocument/2006/relationships" xmlns:a="http://schemas.openxmlformats.org/drawingml/2006/main" r:embed="Rc09be64f6b0e4782"/>
           <a:stretch xmlns:a="http://schemas.openxmlformats.org/drawingml/2006/main"/>
         </p:blipFill>
         <p:spPr>
@@ -7695,7 +7695,7 @@
           <p:cNvPr id="3" name="">
             <a:extLst xmlns:a="http://schemas.openxmlformats.org/drawingml/2006/main">
               <a:ext uri="{FF2B5EF4-FFF2-40B4-BE49-F238E27FC236}">
-                <a16:creationId xmlns:a16="http://schemas.microsoft.com/office/drawing/2014/main" id="{23A1F6BD-2773-477A-8731-7DD3826C0625}"/>
+                <a16:creationId xmlns:a16="http://schemas.microsoft.com/office/drawing/2014/main" id="{0EA3CF34-4ACD-4529-8822-D61928450AAD}"/>
               </a:ext>
             </a:extLst>
           </p:cNvPr>
@@ -7745,7 +7745,7 @@
           <p:cNvPr id="4" name="">
             <a:extLst xmlns:a="http://schemas.openxmlformats.org/drawingml/2006/main">
               <a:ext uri="{FF2B5EF4-FFF2-40B4-BE49-F238E27FC236}">
-                <a16:creationId xmlns:a16="http://schemas.microsoft.com/office/drawing/2014/main" id="{346219CC-7149-435A-BA55-8252CECE2F4B}"/>
+                <a16:creationId xmlns:a16="http://schemas.microsoft.com/office/drawing/2014/main" id="{067438E2-8973-4D7E-AFFE-A973DBF98FB7}"/>
               </a:ext>
             </a:extLst>
           </p:cNvPr>
@@ -7778,7 +7778,7 @@
           <p:cNvPr id="5" name="">
             <a:extLst xmlns:a="http://schemas.openxmlformats.org/drawingml/2006/main">
               <a:ext uri="{FF2B5EF4-FFF2-40B4-BE49-F238E27FC236}">
-                <a16:creationId xmlns:a16="http://schemas.microsoft.com/office/drawing/2014/main" id="{94AC82F5-D4C3-4218-A69C-82C188B48D56}"/>
+                <a16:creationId xmlns:a16="http://schemas.microsoft.com/office/drawing/2014/main" id="{1265068F-575A-4FD3-8E8C-D8315C80F478}"/>
               </a:ext>
             </a:extLst>
           </p:cNvPr>
@@ -7809,7 +7809,7 @@
           <p:cNvPr id="6" name="">
             <a:extLst xmlns:a="http://schemas.openxmlformats.org/drawingml/2006/main">
               <a:ext uri="{FF2B5EF4-FFF2-40B4-BE49-F238E27FC236}">
-                <a16:creationId xmlns:a16="http://schemas.microsoft.com/office/drawing/2014/main" id="{466489E9-F7CD-4057-AB80-179F7A79EED9}"/>
+                <a16:creationId xmlns:a16="http://schemas.microsoft.com/office/drawing/2014/main" id="{1501AB6A-68DF-4B48-96C2-80ACBFC55417}"/>
               </a:ext>
             </a:extLst>
           </p:cNvPr>
@@ -7859,7 +7859,7 @@
           <p:cNvPr id="7" name="">
             <a:extLst xmlns:a="http://schemas.openxmlformats.org/drawingml/2006/main">
               <a:ext uri="{FF2B5EF4-FFF2-40B4-BE49-F238E27FC236}">
-                <a16:creationId xmlns:a16="http://schemas.microsoft.com/office/drawing/2014/main" id="{CE050108-2996-43D1-B20A-ABEE95C7F0ED}"/>
+                <a16:creationId xmlns:a16="http://schemas.microsoft.com/office/drawing/2014/main" id="{99DB7E4E-9C6A-450A-9515-2C8F6BB4BDC6}"/>
               </a:ext>
             </a:extLst>
           </p:cNvPr>
@@ -7909,7 +7909,7 @@
           <p:cNvPr id="8" name="">
             <a:extLst xmlns:a="http://schemas.openxmlformats.org/drawingml/2006/main">
               <a:ext uri="{FF2B5EF4-FFF2-40B4-BE49-F238E27FC236}">
-                <a16:creationId xmlns:a16="http://schemas.microsoft.com/office/drawing/2014/main" id="{9590DD6C-CD11-4A1A-873F-FE7CE9FA4EF6}"/>
+                <a16:creationId xmlns:a16="http://schemas.microsoft.com/office/drawing/2014/main" id="{8B1FA093-B518-4B5A-A2CD-B8AF2E815869}"/>
               </a:ext>
             </a:extLst>
           </p:cNvPr>
@@ -7944,7 +7944,7 @@
           <p:cNvPr id="9" name="">
             <a:extLst xmlns:a="http://schemas.openxmlformats.org/drawingml/2006/main">
               <a:ext uri="{FF2B5EF4-FFF2-40B4-BE49-F238E27FC236}">
-                <a16:creationId xmlns:a16="http://schemas.microsoft.com/office/drawing/2014/main" id="{584C3C41-A843-4844-BEC9-084EFA3CFA44}"/>
+                <a16:creationId xmlns:a16="http://schemas.microsoft.com/office/drawing/2014/main" id="{AE62C747-47ED-4907-B2D4-E36245741F31}"/>
               </a:ext>
             </a:extLst>
           </p:cNvPr>
@@ -7994,7 +7994,7 @@
           <p:cNvPr id="10" name="">
             <a:extLst xmlns:a="http://schemas.openxmlformats.org/drawingml/2006/main">
               <a:ext uri="{FF2B5EF4-FFF2-40B4-BE49-F238E27FC236}">
-                <a16:creationId xmlns:a16="http://schemas.microsoft.com/office/drawing/2014/main" id="{7854A503-D175-47E8-B56E-90DA0CFE4F40}"/>
+                <a16:creationId xmlns:a16="http://schemas.microsoft.com/office/drawing/2014/main" id="{58D28A38-3A44-482C-AB8C-1F9C0B79B1F0}"/>
               </a:ext>
             </a:extLst>
           </p:cNvPr>
@@ -8044,7 +8044,7 @@
           <p:cNvPr id="11" name="">
             <a:extLst xmlns:a="http://schemas.openxmlformats.org/drawingml/2006/main">
               <a:ext uri="{FF2B5EF4-FFF2-40B4-BE49-F238E27FC236}">
-                <a16:creationId xmlns:a16="http://schemas.microsoft.com/office/drawing/2014/main" id="{10417910-2E04-4891-A108-EB9C093D8492}"/>
+                <a16:creationId xmlns:a16="http://schemas.microsoft.com/office/drawing/2014/main" id="{50BC1984-367E-4B2D-B63C-2CDC8F8BFBBC}"/>
               </a:ext>
             </a:extLst>
           </p:cNvPr>
@@ -8094,7 +8094,7 @@
           <p:cNvPr id="12" name="">
             <a:extLst xmlns:a="http://schemas.openxmlformats.org/drawingml/2006/main">
               <a:ext uri="{FF2B5EF4-FFF2-40B4-BE49-F238E27FC236}">
-                <a16:creationId xmlns:a16="http://schemas.microsoft.com/office/drawing/2014/main" id="{CFAEF4D7-F57E-4F1F-9E46-0C07C6210A6F}"/>
+                <a16:creationId xmlns:a16="http://schemas.microsoft.com/office/drawing/2014/main" id="{E3BD7251-0124-4731-B86C-B6DDAB12882C}"/>
               </a:ext>
             </a:extLst>
           </p:cNvPr>
@@ -8125,7 +8125,7 @@
           <p:cNvPr id="13" name="">
             <a:extLst xmlns:a="http://schemas.openxmlformats.org/drawingml/2006/main">
               <a:ext uri="{FF2B5EF4-FFF2-40B4-BE49-F238E27FC236}">
-                <a16:creationId xmlns:a16="http://schemas.microsoft.com/office/drawing/2014/main" id="{D8617682-7FA0-445E-9F88-5119F38F0547}"/>
+                <a16:creationId xmlns:a16="http://schemas.microsoft.com/office/drawing/2014/main" id="{C3495BC9-30FD-43F8-BE50-F9C58729F6D5}"/>
               </a:ext>
             </a:extLst>
           </p:cNvPr>
@@ -8175,7 +8175,7 @@
           <p:cNvPr id="14" name="">
             <a:extLst xmlns:a="http://schemas.openxmlformats.org/drawingml/2006/main">
               <a:ext uri="{FF2B5EF4-FFF2-40B4-BE49-F238E27FC236}">
-                <a16:creationId xmlns:a16="http://schemas.microsoft.com/office/drawing/2014/main" id="{2C9E7E38-FD88-44D0-BC59-3604940FA33E}"/>
+                <a16:creationId xmlns:a16="http://schemas.microsoft.com/office/drawing/2014/main" id="{7B7E36C6-22AC-43F5-B986-13789E21000A}"/>
               </a:ext>
             </a:extLst>
           </p:cNvPr>
@@ -8225,7 +8225,7 @@
           <p:cNvPr id="15" name="">
             <a:extLst xmlns:a="http://schemas.openxmlformats.org/drawingml/2006/main">
               <a:ext uri="{FF2B5EF4-FFF2-40B4-BE49-F238E27FC236}">
-                <a16:creationId xmlns:a16="http://schemas.microsoft.com/office/drawing/2014/main" id="{51F179AC-57E0-4261-93D6-5A74F3DC2087}"/>
+                <a16:creationId xmlns:a16="http://schemas.microsoft.com/office/drawing/2014/main" id="{43F7598E-933A-45E6-8041-4A6B674AC39E}"/>
               </a:ext>
             </a:extLst>
           </p:cNvPr>
@@ -8275,7 +8275,7 @@
           <p:cNvPr id="16" name="">
             <a:extLst xmlns:a="http://schemas.openxmlformats.org/drawingml/2006/main">
               <a:ext uri="{FF2B5EF4-FFF2-40B4-BE49-F238E27FC236}">
-                <a16:creationId xmlns:a16="http://schemas.microsoft.com/office/drawing/2014/main" id="{7ABAAB61-4E15-409B-884E-61B49124E237}"/>
+                <a16:creationId xmlns:a16="http://schemas.microsoft.com/office/drawing/2014/main" id="{AE03BA0D-7518-4DA1-89CB-62E9B26E673F}"/>
               </a:ext>
             </a:extLst>
           </p:cNvPr>
@@ -8325,7 +8325,7 @@
           <p:cNvPr id="17" name="">
             <a:extLst xmlns:a="http://schemas.openxmlformats.org/drawingml/2006/main">
               <a:ext uri="{FF2B5EF4-FFF2-40B4-BE49-F238E27FC236}">
-                <a16:creationId xmlns:a16="http://schemas.microsoft.com/office/drawing/2014/main" id="{DAA0B440-6B81-4EEC-BB22-15D3B4B8CF31}"/>
+                <a16:creationId xmlns:a16="http://schemas.microsoft.com/office/drawing/2014/main" id="{99D68C1B-4503-47BC-B448-6C73FB33F87C}"/>
               </a:ext>
             </a:extLst>
           </p:cNvPr>
@@ -8360,7 +8360,7 @@
           <p:cNvPr id="18" name="">
             <a:extLst xmlns:a="http://schemas.openxmlformats.org/drawingml/2006/main">
               <a:ext uri="{FF2B5EF4-FFF2-40B4-BE49-F238E27FC236}">
-                <a16:creationId xmlns:a16="http://schemas.microsoft.com/office/drawing/2014/main" id="{9D1B57FA-D8B6-472B-BDDA-09E9CA4DAE9D}"/>
+                <a16:creationId xmlns:a16="http://schemas.microsoft.com/office/drawing/2014/main" id="{EB2C2485-1441-4EFD-9E38-528CDF07A616}"/>
               </a:ext>
             </a:extLst>
           </p:cNvPr>
@@ -8410,7 +8410,7 @@
           <p:cNvPr id="19" name="">
             <a:extLst xmlns:a="http://schemas.openxmlformats.org/drawingml/2006/main">
               <a:ext uri="{FF2B5EF4-FFF2-40B4-BE49-F238E27FC236}">
-                <a16:creationId xmlns:a16="http://schemas.microsoft.com/office/drawing/2014/main" id="{4D362878-042D-44BF-A97A-BEC95D093E31}"/>
+                <a16:creationId xmlns:a16="http://schemas.microsoft.com/office/drawing/2014/main" id="{C317CFE2-2B2D-42EA-BE21-1F4E4AD7D382}"/>
               </a:ext>
             </a:extLst>
           </p:cNvPr>
@@ -8460,7 +8460,7 @@
           <p:cNvPr id="20" name="">
             <a:extLst xmlns:a="http://schemas.openxmlformats.org/drawingml/2006/main">
               <a:ext uri="{FF2B5EF4-FFF2-40B4-BE49-F238E27FC236}">
-                <a16:creationId xmlns:a16="http://schemas.microsoft.com/office/drawing/2014/main" id="{35E3751D-B2D4-4D29-8829-1A2610D27ABE}"/>
+                <a16:creationId xmlns:a16="http://schemas.microsoft.com/office/drawing/2014/main" id="{C05CDD2F-1D34-4958-A449-348A12B99684}"/>
               </a:ext>
             </a:extLst>
           </p:cNvPr>
@@ -8510,7 +8510,7 @@
           <p:cNvPr id="21" name="">
             <a:extLst xmlns:a="http://schemas.openxmlformats.org/drawingml/2006/main">
               <a:ext uri="{FF2B5EF4-FFF2-40B4-BE49-F238E27FC236}">
-                <a16:creationId xmlns:a16="http://schemas.microsoft.com/office/drawing/2014/main" id="{D35E94C4-A02D-4D8A-8754-D1C7E94F7A93}"/>
+                <a16:creationId xmlns:a16="http://schemas.microsoft.com/office/drawing/2014/main" id="{A11ABA0E-8CA6-4C19-BCDE-1ED1CCCD2C18}"/>
               </a:ext>
             </a:extLst>
           </p:cNvPr>
@@ -8541,7 +8541,7 @@
           <p:cNvPr id="22" name="">
             <a:extLst xmlns:a="http://schemas.openxmlformats.org/drawingml/2006/main">
               <a:ext uri="{FF2B5EF4-FFF2-40B4-BE49-F238E27FC236}">
-                <a16:creationId xmlns:a16="http://schemas.microsoft.com/office/drawing/2014/main" id="{0DE95226-E11E-4A58-8994-B0674C21A2C4}"/>
+                <a16:creationId xmlns:a16="http://schemas.microsoft.com/office/drawing/2014/main" id="{7E9F6227-5794-450F-B88F-8457A9B40086}"/>
               </a:ext>
             </a:extLst>
           </p:cNvPr>
@@ -8591,7 +8591,7 @@
           <p:cNvPr id="23" name="">
             <a:extLst xmlns:a="http://schemas.openxmlformats.org/drawingml/2006/main">
               <a:ext uri="{FF2B5EF4-FFF2-40B4-BE49-F238E27FC236}">
-                <a16:creationId xmlns:a16="http://schemas.microsoft.com/office/drawing/2014/main" id="{45A14624-F1DA-457C-B1B3-46F60EE8D5AC}"/>
+                <a16:creationId xmlns:a16="http://schemas.microsoft.com/office/drawing/2014/main" id="{A3AF865E-4EA5-4004-9E7D-769C57335B91}"/>
               </a:ext>
             </a:extLst>
           </p:cNvPr>
@@ -8641,7 +8641,7 @@
           <p:cNvPr id="24" name="">
             <a:extLst xmlns:a="http://schemas.openxmlformats.org/drawingml/2006/main">
               <a:ext uri="{FF2B5EF4-FFF2-40B4-BE49-F238E27FC236}">
-                <a16:creationId xmlns:a16="http://schemas.microsoft.com/office/drawing/2014/main" id="{46EAE813-0E39-40B2-9C10-EBFCE0718E4C}"/>
+                <a16:creationId xmlns:a16="http://schemas.microsoft.com/office/drawing/2014/main" id="{B3C9626E-912B-4B47-895C-DE85D088E1DF}"/>
               </a:ext>
             </a:extLst>
           </p:cNvPr>
@@ -8691,7 +8691,7 @@
           <p:cNvPr id="25" name="">
             <a:extLst xmlns:a="http://schemas.openxmlformats.org/drawingml/2006/main">
               <a:ext uri="{FF2B5EF4-FFF2-40B4-BE49-F238E27FC236}">
-                <a16:creationId xmlns:a16="http://schemas.microsoft.com/office/drawing/2014/main" id="{6E3F6458-97EB-423F-80E1-3576737BB86D}"/>
+                <a16:creationId xmlns:a16="http://schemas.microsoft.com/office/drawing/2014/main" id="{F93D7128-C0AC-4E87-B3AE-2098102BEC28}"/>
               </a:ext>
             </a:extLst>
           </p:cNvPr>
@@ -8741,7 +8741,7 @@
           <p:cNvPr id="26" name="">
             <a:extLst xmlns:a="http://schemas.openxmlformats.org/drawingml/2006/main">
               <a:ext uri="{FF2B5EF4-FFF2-40B4-BE49-F238E27FC236}">
-                <a16:creationId xmlns:a16="http://schemas.microsoft.com/office/drawing/2014/main" id="{14B718C6-4111-48BD-BB8A-FDF4D1E86C0E}"/>
+                <a16:creationId xmlns:a16="http://schemas.microsoft.com/office/drawing/2014/main" id="{2B7E9670-0F47-42A8-A4F5-CCC13BD10231}"/>
               </a:ext>
             </a:extLst>
           </p:cNvPr>
@@ -8776,7 +8776,7 @@
           <p:cNvPr id="27" name="">
             <a:extLst xmlns:a="http://schemas.openxmlformats.org/drawingml/2006/main">
               <a:ext uri="{FF2B5EF4-FFF2-40B4-BE49-F238E27FC236}">
-                <a16:creationId xmlns:a16="http://schemas.microsoft.com/office/drawing/2014/main" id="{DCF72710-3DC3-4C28-A597-D83666026E4C}"/>
+                <a16:creationId xmlns:a16="http://schemas.microsoft.com/office/drawing/2014/main" id="{F0F2062A-FF07-47C5-8322-BC17631760B5}"/>
               </a:ext>
             </a:extLst>
           </p:cNvPr>
@@ -8826,7 +8826,7 @@
           <p:cNvPr id="28" name="">
             <a:extLst xmlns:a="http://schemas.openxmlformats.org/drawingml/2006/main">
               <a:ext uri="{FF2B5EF4-FFF2-40B4-BE49-F238E27FC236}">
-                <a16:creationId xmlns:a16="http://schemas.microsoft.com/office/drawing/2014/main" id="{991BA444-5435-4AAD-AE82-46E67ED0AE2E}"/>
+                <a16:creationId xmlns:a16="http://schemas.microsoft.com/office/drawing/2014/main" id="{F84CC5A8-7E5F-4F26-86BA-ADA72418ED31}"/>
               </a:ext>
             </a:extLst>
           </p:cNvPr>
@@ -8876,7 +8876,7 @@
           <p:cNvPr id="29" name="">
             <a:extLst xmlns:a="http://schemas.openxmlformats.org/drawingml/2006/main">
               <a:ext uri="{FF2B5EF4-FFF2-40B4-BE49-F238E27FC236}">
-                <a16:creationId xmlns:a16="http://schemas.microsoft.com/office/drawing/2014/main" id="{B91A97CE-1524-4391-BB75-66C1832E710D}"/>
+                <a16:creationId xmlns:a16="http://schemas.microsoft.com/office/drawing/2014/main" id="{6ED6A20F-162E-4F1B-9245-87FA8E27F424}"/>
               </a:ext>
             </a:extLst>
           </p:cNvPr>
@@ -8926,7 +8926,7 @@
           <p:cNvPr id="30" name="">
             <a:extLst xmlns:a="http://schemas.openxmlformats.org/drawingml/2006/main">
               <a:ext uri="{FF2B5EF4-FFF2-40B4-BE49-F238E27FC236}">
-                <a16:creationId xmlns:a16="http://schemas.microsoft.com/office/drawing/2014/main" id="{9724411A-B2FD-4990-BD2A-F2A0B2D0E1EF}"/>
+                <a16:creationId xmlns:a16="http://schemas.microsoft.com/office/drawing/2014/main" id="{D36CF555-E5D4-4994-856F-E1E0DC94A2C7}"/>
               </a:ext>
             </a:extLst>
           </p:cNvPr>
@@ -8957,7 +8957,7 @@
           <p:cNvPr id="31" name="">
             <a:extLst xmlns:a="http://schemas.openxmlformats.org/drawingml/2006/main">
               <a:ext uri="{FF2B5EF4-FFF2-40B4-BE49-F238E27FC236}">
-                <a16:creationId xmlns:a16="http://schemas.microsoft.com/office/drawing/2014/main" id="{C2716E2D-0BC7-4AE0-89F5-105FA483E32B}"/>
+                <a16:creationId xmlns:a16="http://schemas.microsoft.com/office/drawing/2014/main" id="{97F712AE-E7FE-4BA5-A774-E364E0C16814}"/>
               </a:ext>
             </a:extLst>
           </p:cNvPr>
@@ -9007,7 +9007,7 @@
           <p:cNvPr id="32" name="">
             <a:extLst xmlns:a="http://schemas.openxmlformats.org/drawingml/2006/main">
               <a:ext uri="{FF2B5EF4-FFF2-40B4-BE49-F238E27FC236}">
-                <a16:creationId xmlns:a16="http://schemas.microsoft.com/office/drawing/2014/main" id="{13988A0A-AE2F-41C9-B787-A1400F3BED0C}"/>
+                <a16:creationId xmlns:a16="http://schemas.microsoft.com/office/drawing/2014/main" id="{6E4A5F34-8760-469A-B13D-E6845D417F1C}"/>
               </a:ext>
             </a:extLst>
           </p:cNvPr>
@@ -9057,7 +9057,7 @@
           <p:cNvPr id="33" name="">
             <a:extLst xmlns:a="http://schemas.openxmlformats.org/drawingml/2006/main">
               <a:ext uri="{FF2B5EF4-FFF2-40B4-BE49-F238E27FC236}">
-                <a16:creationId xmlns:a16="http://schemas.microsoft.com/office/drawing/2014/main" id="{AB22308E-B0CB-4C93-8A74-DCBD1BE35D9B}"/>
+                <a16:creationId xmlns:a16="http://schemas.microsoft.com/office/drawing/2014/main" id="{87D5BC20-9B05-4DE4-B053-94F939D0BC61}"/>
               </a:ext>
             </a:extLst>
           </p:cNvPr>
@@ -9107,7 +9107,7 @@
           <p:cNvPr id="34" name="">
             <a:extLst xmlns:a="http://schemas.openxmlformats.org/drawingml/2006/main">
               <a:ext uri="{FF2B5EF4-FFF2-40B4-BE49-F238E27FC236}">
-                <a16:creationId xmlns:a16="http://schemas.microsoft.com/office/drawing/2014/main" id="{D5F0746A-7208-4DDB-9C54-9A223F6C0C64}"/>
+                <a16:creationId xmlns:a16="http://schemas.microsoft.com/office/drawing/2014/main" id="{5F2534AA-2F79-4903-87EA-0E132735B25C}"/>
               </a:ext>
             </a:extLst>
           </p:cNvPr>
@@ -9157,7 +9157,7 @@
           <p:cNvPr id="35" name="">
             <a:extLst xmlns:a="http://schemas.openxmlformats.org/drawingml/2006/main">
               <a:ext uri="{FF2B5EF4-FFF2-40B4-BE49-F238E27FC236}">
-                <a16:creationId xmlns:a16="http://schemas.microsoft.com/office/drawing/2014/main" id="{44C415E4-3953-4B76-86C5-D70D54B1AAA7}"/>
+                <a16:creationId xmlns:a16="http://schemas.microsoft.com/office/drawing/2014/main" id="{DF543A5F-8295-40A3-81F3-1C107DAA1F82}"/>
               </a:ext>
             </a:extLst>
           </p:cNvPr>
@@ -9192,7 +9192,7 @@
           <p:cNvPr id="36" name="">
             <a:extLst xmlns:a="http://schemas.openxmlformats.org/drawingml/2006/main">
               <a:ext uri="{FF2B5EF4-FFF2-40B4-BE49-F238E27FC236}">
-                <a16:creationId xmlns:a16="http://schemas.microsoft.com/office/drawing/2014/main" id="{155E37DD-0F37-4B30-BCF9-4D34E050E5C1}"/>
+                <a16:creationId xmlns:a16="http://schemas.microsoft.com/office/drawing/2014/main" id="{8F99DA0D-CA47-455C-9869-7AD035122DAF}"/>
               </a:ext>
             </a:extLst>
           </p:cNvPr>
@@ -9242,7 +9242,7 @@
           <p:cNvPr id="37" name="">
             <a:extLst xmlns:a="http://schemas.openxmlformats.org/drawingml/2006/main">
               <a:ext uri="{FF2B5EF4-FFF2-40B4-BE49-F238E27FC236}">
-                <a16:creationId xmlns:a16="http://schemas.microsoft.com/office/drawing/2014/main" id="{84562E18-48B7-4672-944A-DD636311F684}"/>
+                <a16:creationId xmlns:a16="http://schemas.microsoft.com/office/drawing/2014/main" id="{7AD7A722-9E9A-4D2D-A00D-E8315D85E89D}"/>
               </a:ext>
             </a:extLst>
           </p:cNvPr>
@@ -9292,7 +9292,7 @@
           <p:cNvPr id="38" name="">
             <a:extLst xmlns:a="http://schemas.openxmlformats.org/drawingml/2006/main">
               <a:ext uri="{FF2B5EF4-FFF2-40B4-BE49-F238E27FC236}">
-                <a16:creationId xmlns:a16="http://schemas.microsoft.com/office/drawing/2014/main" id="{27C9FDA7-DB99-441F-B96F-2A40ACD0C316}"/>
+                <a16:creationId xmlns:a16="http://schemas.microsoft.com/office/drawing/2014/main" id="{8AAE9DA1-BFEE-4A77-AA1A-38455F7CCC81}"/>
               </a:ext>
             </a:extLst>
           </p:cNvPr>
@@ -9342,7 +9342,7 @@
           <p:cNvPr id="39" name="">
             <a:extLst xmlns:a="http://schemas.openxmlformats.org/drawingml/2006/main">
               <a:ext uri="{FF2B5EF4-FFF2-40B4-BE49-F238E27FC236}">
-                <a16:creationId xmlns:a16="http://schemas.microsoft.com/office/drawing/2014/main" id="{788896D9-0C1E-45CC-8C5B-DEF4C464F59A}"/>
+                <a16:creationId xmlns:a16="http://schemas.microsoft.com/office/drawing/2014/main" id="{EFEB6F86-76D5-4A54-B7DB-9E3922678081}"/>
               </a:ext>
             </a:extLst>
           </p:cNvPr>
@@ -9373,7 +9373,7 @@
           <p:cNvPr id="40" name="">
             <a:extLst xmlns:a="http://schemas.openxmlformats.org/drawingml/2006/main">
               <a:ext uri="{FF2B5EF4-FFF2-40B4-BE49-F238E27FC236}">
-                <a16:creationId xmlns:a16="http://schemas.microsoft.com/office/drawing/2014/main" id="{B2CE497D-8378-42E8-939D-99EDD9E2043C}"/>
+                <a16:creationId xmlns:a16="http://schemas.microsoft.com/office/drawing/2014/main" id="{3600EC42-FC83-44BE-AE12-CDBB110B7A1C}"/>
               </a:ext>
             </a:extLst>
           </p:cNvPr>
@@ -9423,7 +9423,7 @@
           <p:cNvPr id="41" name="">
             <a:extLst xmlns:a="http://schemas.openxmlformats.org/drawingml/2006/main">
               <a:ext uri="{FF2B5EF4-FFF2-40B4-BE49-F238E27FC236}">
-                <a16:creationId xmlns:a16="http://schemas.microsoft.com/office/drawing/2014/main" id="{0928C311-7604-4778-A609-AF592121529D}"/>
+                <a16:creationId xmlns:a16="http://schemas.microsoft.com/office/drawing/2014/main" id="{6B1D3FDC-003A-4059-A4BF-FA46D36F8F83}"/>
               </a:ext>
             </a:extLst>
           </p:cNvPr>
@@ -9473,7 +9473,7 @@
           <p:cNvPr id="42" name="">
             <a:extLst xmlns:a="http://schemas.openxmlformats.org/drawingml/2006/main">
               <a:ext uri="{FF2B5EF4-FFF2-40B4-BE49-F238E27FC236}">
-                <a16:creationId xmlns:a16="http://schemas.microsoft.com/office/drawing/2014/main" id="{177BA175-D6C0-4577-9B4E-76A45D1DF1BF}"/>
+                <a16:creationId xmlns:a16="http://schemas.microsoft.com/office/drawing/2014/main" id="{A293322C-8F30-4FC1-8A4F-A6339D247D7F}"/>
               </a:ext>
             </a:extLst>
           </p:cNvPr>
@@ -9523,7 +9523,7 @@
           <p:cNvPr id="43" name="">
             <a:extLst xmlns:a="http://schemas.openxmlformats.org/drawingml/2006/main">
               <a:ext uri="{FF2B5EF4-FFF2-40B4-BE49-F238E27FC236}">
-                <a16:creationId xmlns:a16="http://schemas.microsoft.com/office/drawing/2014/main" id="{7E64F3E0-1F56-4A85-8975-138831D2F244}"/>
+                <a16:creationId xmlns:a16="http://schemas.microsoft.com/office/drawing/2014/main" id="{9AFBF806-AE06-42E2-A0F2-6D6E8F65CDDA}"/>
               </a:ext>
             </a:extLst>
           </p:cNvPr>
@@ -9571,7 +9571,7 @@
     </p:spTree>
     <p:extLst>
       <p:ext uri="{BB962C8B-B14F-4D97-AF65-F5344CB8AC3E}">
-        <p14:creationId xmlns:p14="http://schemas.microsoft.com/office/powerpoint/2010/main" val="453697686"/>
+        <p14:creationId xmlns:p14="http://schemas.microsoft.com/office/powerpoint/2010/main" val="86013513"/>
       </p:ext>
     </p:extLst>
   </p:cSld>
@@ -9602,7 +9602,7 @@
           <p:cNvPr id="1" name="">
             <a:extLst xmlns:a="http://schemas.openxmlformats.org/drawingml/2006/main">
               <a:ext uri="{FF2B5EF4-FFF2-40B4-BE49-F238E27FC236}">
-                <a16:creationId xmlns:a16="http://schemas.microsoft.com/office/drawing/2014/main" id="{AF43DC19-F0E3-42C2-A6E4-963AFD9A5469}"/>
+                <a16:creationId xmlns:a16="http://schemas.microsoft.com/office/drawing/2014/main" id="{0CFC59F1-4B8B-4320-941D-511E855286CF}"/>
               </a:ext>
             </a:extLst>
           </p:cNvPr>
@@ -9637,7 +9637,7 @@
           <p:nvPr/>
         </p:nvPicPr>
         <p:blipFill>
-          <a:blip xmlns:r="http://schemas.openxmlformats.org/officeDocument/2006/relationships" xmlns:a="http://schemas.openxmlformats.org/drawingml/2006/main" r:embed="R822ec3d631d6444c"/>
+          <a:blip xmlns:r="http://schemas.openxmlformats.org/officeDocument/2006/relationships" xmlns:a="http://schemas.openxmlformats.org/drawingml/2006/main" r:embed="R745791cb48004881"/>
           <a:stretch xmlns:a="http://schemas.openxmlformats.org/drawingml/2006/main"/>
         </p:blipFill>
         <p:spPr>
@@ -9655,7 +9655,7 @@
           <p:cNvPr id="3" name="">
             <a:extLst xmlns:a="http://schemas.openxmlformats.org/drawingml/2006/main">
               <a:ext uri="{FF2B5EF4-FFF2-40B4-BE49-F238E27FC236}">
-                <a16:creationId xmlns:a16="http://schemas.microsoft.com/office/drawing/2014/main" id="{0229100F-BA26-4EE3-AFE9-3E88665C5191}"/>
+                <a16:creationId xmlns:a16="http://schemas.microsoft.com/office/drawing/2014/main" id="{FBCED016-A0EA-4019-8555-F5015A77C2AF}"/>
               </a:ext>
             </a:extLst>
           </p:cNvPr>
@@ -9705,7 +9705,7 @@
           <p:cNvPr id="4" name="">
             <a:extLst xmlns:a="http://schemas.openxmlformats.org/drawingml/2006/main">
               <a:ext uri="{FF2B5EF4-FFF2-40B4-BE49-F238E27FC236}">
-                <a16:creationId xmlns:a16="http://schemas.microsoft.com/office/drawing/2014/main" id="{59DA2BAA-DF61-4F63-90ED-7F8F39EA1DF7}"/>
+                <a16:creationId xmlns:a16="http://schemas.microsoft.com/office/drawing/2014/main" id="{3649F5BD-1098-4B0A-BC1F-86A2A2C78C2E}"/>
               </a:ext>
             </a:extLst>
           </p:cNvPr>
@@ -9738,7 +9738,7 @@
           <p:cNvPr id="5" name="">
             <a:extLst xmlns:a="http://schemas.openxmlformats.org/drawingml/2006/main">
               <a:ext uri="{FF2B5EF4-FFF2-40B4-BE49-F238E27FC236}">
-                <a16:creationId xmlns:a16="http://schemas.microsoft.com/office/drawing/2014/main" id="{5196886D-6AA6-481E-A810-DF53368D25EC}"/>
+                <a16:creationId xmlns:a16="http://schemas.microsoft.com/office/drawing/2014/main" id="{1AA58761-0CBE-4442-9D9B-16BE5F653027}"/>
               </a:ext>
             </a:extLst>
           </p:cNvPr>
@@ -9769,7 +9769,7 @@
           <p:cNvPr id="6" name="">
             <a:extLst xmlns:a="http://schemas.openxmlformats.org/drawingml/2006/main">
               <a:ext uri="{FF2B5EF4-FFF2-40B4-BE49-F238E27FC236}">
-                <a16:creationId xmlns:a16="http://schemas.microsoft.com/office/drawing/2014/main" id="{6F4281C2-BB10-485F-B79D-7EB3DD6A220C}"/>
+                <a16:creationId xmlns:a16="http://schemas.microsoft.com/office/drawing/2014/main" id="{EF0F898F-FA60-4F78-9AAE-AEAE931704C6}"/>
               </a:ext>
             </a:extLst>
           </p:cNvPr>
@@ -9819,7 +9819,7 @@
           <p:cNvPr id="7" name="">
             <a:extLst xmlns:a="http://schemas.openxmlformats.org/drawingml/2006/main">
               <a:ext uri="{FF2B5EF4-FFF2-40B4-BE49-F238E27FC236}">
-                <a16:creationId xmlns:a16="http://schemas.microsoft.com/office/drawing/2014/main" id="{69A643E3-C6AE-4F35-AA9E-696BD35B719B}"/>
+                <a16:creationId xmlns:a16="http://schemas.microsoft.com/office/drawing/2014/main" id="{1FE3D21E-5ED4-4319-AE7B-FFED5512951F}"/>
               </a:ext>
             </a:extLst>
           </p:cNvPr>
@@ -9869,7 +9869,7 @@
           <p:cNvPr id="8" name="">
             <a:extLst xmlns:a="http://schemas.openxmlformats.org/drawingml/2006/main">
               <a:ext uri="{FF2B5EF4-FFF2-40B4-BE49-F238E27FC236}">
-                <a16:creationId xmlns:a16="http://schemas.microsoft.com/office/drawing/2014/main" id="{229ED16A-5441-495D-8D86-E22410B0F9EB}"/>
+                <a16:creationId xmlns:a16="http://schemas.microsoft.com/office/drawing/2014/main" id="{FEB04B77-A36F-4E7B-BCBF-61B72B99AEE3}"/>
               </a:ext>
             </a:extLst>
           </p:cNvPr>
@@ -9904,7 +9904,7 @@
           <p:cNvPr id="9" name="">
             <a:extLst xmlns:a="http://schemas.openxmlformats.org/drawingml/2006/main">
               <a:ext uri="{FF2B5EF4-FFF2-40B4-BE49-F238E27FC236}">
-                <a16:creationId xmlns:a16="http://schemas.microsoft.com/office/drawing/2014/main" id="{1635D46C-5E35-43A1-B0CB-2DD857AE99F1}"/>
+                <a16:creationId xmlns:a16="http://schemas.microsoft.com/office/drawing/2014/main" id="{5A919467-AB07-49B6-9FB3-67440CDDC3B3}"/>
               </a:ext>
             </a:extLst>
           </p:cNvPr>
@@ -9954,7 +9954,7 @@
           <p:cNvPr id="10" name="">
             <a:extLst xmlns:a="http://schemas.openxmlformats.org/drawingml/2006/main">
               <a:ext uri="{FF2B5EF4-FFF2-40B4-BE49-F238E27FC236}">
-                <a16:creationId xmlns:a16="http://schemas.microsoft.com/office/drawing/2014/main" id="{B3F85D88-DAD0-47A7-B73D-9FE4BC67A138}"/>
+                <a16:creationId xmlns:a16="http://schemas.microsoft.com/office/drawing/2014/main" id="{4F7F635A-74F0-456F-A371-C341DF974C4B}"/>
               </a:ext>
             </a:extLst>
           </p:cNvPr>
@@ -10004,7 +10004,7 @@
           <p:cNvPr id="11" name="">
             <a:extLst xmlns:a="http://schemas.openxmlformats.org/drawingml/2006/main">
               <a:ext uri="{FF2B5EF4-FFF2-40B4-BE49-F238E27FC236}">
-                <a16:creationId xmlns:a16="http://schemas.microsoft.com/office/drawing/2014/main" id="{B1809F38-BF6C-4E47-92E1-1224EA5439B3}"/>
+                <a16:creationId xmlns:a16="http://schemas.microsoft.com/office/drawing/2014/main" id="{3E3438C0-9E2B-4F90-B65C-2C192B4D5508}"/>
               </a:ext>
             </a:extLst>
           </p:cNvPr>
@@ -10054,7 +10054,7 @@
           <p:cNvPr id="12" name="">
             <a:extLst xmlns:a="http://schemas.openxmlformats.org/drawingml/2006/main">
               <a:ext uri="{FF2B5EF4-FFF2-40B4-BE49-F238E27FC236}">
-                <a16:creationId xmlns:a16="http://schemas.microsoft.com/office/drawing/2014/main" id="{C7228EDB-BBA2-4BBB-9E43-601DB0DCC70E}"/>
+                <a16:creationId xmlns:a16="http://schemas.microsoft.com/office/drawing/2014/main" id="{FDB5AB2F-8D81-498D-8DBB-F39ABBD8E583}"/>
               </a:ext>
             </a:extLst>
           </p:cNvPr>
@@ -10085,7 +10085,7 @@
           <p:cNvPr id="13" name="">
             <a:extLst xmlns:a="http://schemas.openxmlformats.org/drawingml/2006/main">
               <a:ext uri="{FF2B5EF4-FFF2-40B4-BE49-F238E27FC236}">
-                <a16:creationId xmlns:a16="http://schemas.microsoft.com/office/drawing/2014/main" id="{65F87CEB-D84F-41C2-918E-FA1AFE9A5700}"/>
+                <a16:creationId xmlns:a16="http://schemas.microsoft.com/office/drawing/2014/main" id="{5C992FCC-C2B6-4E68-81FD-5E1B3AFDD808}"/>
               </a:ext>
             </a:extLst>
           </p:cNvPr>
@@ -10135,7 +10135,7 @@
           <p:cNvPr id="14" name="">
             <a:extLst xmlns:a="http://schemas.openxmlformats.org/drawingml/2006/main">
               <a:ext uri="{FF2B5EF4-FFF2-40B4-BE49-F238E27FC236}">
-                <a16:creationId xmlns:a16="http://schemas.microsoft.com/office/drawing/2014/main" id="{FC2685E8-CA3F-42C7-90F3-EFA5B3F9FAB0}"/>
+                <a16:creationId xmlns:a16="http://schemas.microsoft.com/office/drawing/2014/main" id="{7E4CFE56-83C7-4A2D-A2F6-C54ED453ED39}"/>
               </a:ext>
             </a:extLst>
           </p:cNvPr>
@@ -10185,7 +10185,7 @@
           <p:cNvPr id="15" name="">
             <a:extLst xmlns:a="http://schemas.openxmlformats.org/drawingml/2006/main">
               <a:ext uri="{FF2B5EF4-FFF2-40B4-BE49-F238E27FC236}">
-                <a16:creationId xmlns:a16="http://schemas.microsoft.com/office/drawing/2014/main" id="{83B3C6FA-8EC3-4090-8459-208F54EB0E5E}"/>
+                <a16:creationId xmlns:a16="http://schemas.microsoft.com/office/drawing/2014/main" id="{9B1E745C-4EC8-4151-A356-D7F58B40CAAD}"/>
               </a:ext>
             </a:extLst>
           </p:cNvPr>
@@ -10235,7 +10235,7 @@
           <p:cNvPr id="16" name="">
             <a:extLst xmlns:a="http://schemas.openxmlformats.org/drawingml/2006/main">
               <a:ext uri="{FF2B5EF4-FFF2-40B4-BE49-F238E27FC236}">
-                <a16:creationId xmlns:a16="http://schemas.microsoft.com/office/drawing/2014/main" id="{EC1B741B-6FC4-40B4-9A44-B41433982687}"/>
+                <a16:creationId xmlns:a16="http://schemas.microsoft.com/office/drawing/2014/main" id="{544857D5-0CF0-4983-8454-B855D0D7CDCF}"/>
               </a:ext>
             </a:extLst>
           </p:cNvPr>
@@ -10285,7 +10285,7 @@
           <p:cNvPr id="17" name="">
             <a:extLst xmlns:a="http://schemas.openxmlformats.org/drawingml/2006/main">
               <a:ext uri="{FF2B5EF4-FFF2-40B4-BE49-F238E27FC236}">
-                <a16:creationId xmlns:a16="http://schemas.microsoft.com/office/drawing/2014/main" id="{44B370E2-2136-4051-9A6E-8AB644463089}"/>
+                <a16:creationId xmlns:a16="http://schemas.microsoft.com/office/drawing/2014/main" id="{F74E670E-A139-4B40-9245-7E4F44AB6224}"/>
               </a:ext>
             </a:extLst>
           </p:cNvPr>
@@ -10320,7 +10320,7 @@
           <p:cNvPr id="18" name="">
             <a:extLst xmlns:a="http://schemas.openxmlformats.org/drawingml/2006/main">
               <a:ext uri="{FF2B5EF4-FFF2-40B4-BE49-F238E27FC236}">
-                <a16:creationId xmlns:a16="http://schemas.microsoft.com/office/drawing/2014/main" id="{D34DDB43-3D6C-4C41-A61F-6634FB155392}"/>
+                <a16:creationId xmlns:a16="http://schemas.microsoft.com/office/drawing/2014/main" id="{B2248341-DDC1-4951-A97B-B3E76468616F}"/>
               </a:ext>
             </a:extLst>
           </p:cNvPr>
@@ -10370,7 +10370,7 @@
           <p:cNvPr id="19" name="">
             <a:extLst xmlns:a="http://schemas.openxmlformats.org/drawingml/2006/main">
               <a:ext uri="{FF2B5EF4-FFF2-40B4-BE49-F238E27FC236}">
-                <a16:creationId xmlns:a16="http://schemas.microsoft.com/office/drawing/2014/main" id="{6B3E0C0D-EB0B-4C5A-A69A-8FA45C18D0E9}"/>
+                <a16:creationId xmlns:a16="http://schemas.microsoft.com/office/drawing/2014/main" id="{4927237C-99B4-4797-872B-E2AE72B99B5B}"/>
               </a:ext>
             </a:extLst>
           </p:cNvPr>
@@ -10420,7 +10420,7 @@
           <p:cNvPr id="20" name="">
             <a:extLst xmlns:a="http://schemas.openxmlformats.org/drawingml/2006/main">
               <a:ext uri="{FF2B5EF4-FFF2-40B4-BE49-F238E27FC236}">
-                <a16:creationId xmlns:a16="http://schemas.microsoft.com/office/drawing/2014/main" id="{D7FA3B74-201C-4330-A97E-C8EC420EF499}"/>
+                <a16:creationId xmlns:a16="http://schemas.microsoft.com/office/drawing/2014/main" id="{859519CE-C325-408B-BF3F-A47CD623A4A0}"/>
               </a:ext>
             </a:extLst>
           </p:cNvPr>
@@ -10470,7 +10470,7 @@
           <p:cNvPr id="21" name="">
             <a:extLst xmlns:a="http://schemas.openxmlformats.org/drawingml/2006/main">
               <a:ext uri="{FF2B5EF4-FFF2-40B4-BE49-F238E27FC236}">
-                <a16:creationId xmlns:a16="http://schemas.microsoft.com/office/drawing/2014/main" id="{A2F4E930-E782-4FD6-82B9-7F5D5902EBD3}"/>
+                <a16:creationId xmlns:a16="http://schemas.microsoft.com/office/drawing/2014/main" id="{86CBDD25-C792-4646-8497-56BFEE3A63F5}"/>
               </a:ext>
             </a:extLst>
           </p:cNvPr>
@@ -10501,7 +10501,7 @@
           <p:cNvPr id="22" name="">
             <a:extLst xmlns:a="http://schemas.openxmlformats.org/drawingml/2006/main">
               <a:ext uri="{FF2B5EF4-FFF2-40B4-BE49-F238E27FC236}">
-                <a16:creationId xmlns:a16="http://schemas.microsoft.com/office/drawing/2014/main" id="{A42570D1-4964-4FA3-8BA9-1C8BC97EB952}"/>
+                <a16:creationId xmlns:a16="http://schemas.microsoft.com/office/drawing/2014/main" id="{6957E8EF-4B14-4C91-A899-120080A751CF}"/>
               </a:ext>
             </a:extLst>
           </p:cNvPr>
@@ -10551,7 +10551,7 @@
           <p:cNvPr id="23" name="">
             <a:extLst xmlns:a="http://schemas.openxmlformats.org/drawingml/2006/main">
               <a:ext uri="{FF2B5EF4-FFF2-40B4-BE49-F238E27FC236}">
-                <a16:creationId xmlns:a16="http://schemas.microsoft.com/office/drawing/2014/main" id="{6DD5561E-7E4D-49B9-938F-7C732910E1E3}"/>
+                <a16:creationId xmlns:a16="http://schemas.microsoft.com/office/drawing/2014/main" id="{1E24EAD3-DA83-411E-AE57-BEEA37B3D76F}"/>
               </a:ext>
             </a:extLst>
           </p:cNvPr>
@@ -10601,7 +10601,7 @@
           <p:cNvPr id="24" name="">
             <a:extLst xmlns:a="http://schemas.openxmlformats.org/drawingml/2006/main">
               <a:ext uri="{FF2B5EF4-FFF2-40B4-BE49-F238E27FC236}">
-                <a16:creationId xmlns:a16="http://schemas.microsoft.com/office/drawing/2014/main" id="{E3275355-29FD-468E-800B-AD478AEDB2F4}"/>
+                <a16:creationId xmlns:a16="http://schemas.microsoft.com/office/drawing/2014/main" id="{6EA43F86-1E7B-4EAB-AC8A-31E53AD413C4}"/>
               </a:ext>
             </a:extLst>
           </p:cNvPr>
@@ -10651,7 +10651,7 @@
           <p:cNvPr id="25" name="">
             <a:extLst xmlns:a="http://schemas.openxmlformats.org/drawingml/2006/main">
               <a:ext uri="{FF2B5EF4-FFF2-40B4-BE49-F238E27FC236}">
-                <a16:creationId xmlns:a16="http://schemas.microsoft.com/office/drawing/2014/main" id="{72114F20-9C5E-42E7-A2B7-06F811241FD1}"/>
+                <a16:creationId xmlns:a16="http://schemas.microsoft.com/office/drawing/2014/main" id="{245D514D-9DBC-4A31-93B9-D4CAEC6BC1FF}"/>
               </a:ext>
             </a:extLst>
           </p:cNvPr>
@@ -10701,7 +10701,7 @@
           <p:cNvPr id="26" name="">
             <a:extLst xmlns:a="http://schemas.openxmlformats.org/drawingml/2006/main">
               <a:ext uri="{FF2B5EF4-FFF2-40B4-BE49-F238E27FC236}">
-                <a16:creationId xmlns:a16="http://schemas.microsoft.com/office/drawing/2014/main" id="{FF3F3F3C-DC78-46BC-B07C-2A6BB69FFB80}"/>
+                <a16:creationId xmlns:a16="http://schemas.microsoft.com/office/drawing/2014/main" id="{8118DD2E-FFD2-40AB-9929-809E88E91559}"/>
               </a:ext>
             </a:extLst>
           </p:cNvPr>
@@ -10736,7 +10736,7 @@
           <p:cNvPr id="27" name="">
             <a:extLst xmlns:a="http://schemas.openxmlformats.org/drawingml/2006/main">
               <a:ext uri="{FF2B5EF4-FFF2-40B4-BE49-F238E27FC236}">
-                <a16:creationId xmlns:a16="http://schemas.microsoft.com/office/drawing/2014/main" id="{88639A33-8B95-40C8-A8B3-68337B540EE7}"/>
+                <a16:creationId xmlns:a16="http://schemas.microsoft.com/office/drawing/2014/main" id="{0CB7FA74-ABA6-475A-A4F1-7964B0987D84}"/>
               </a:ext>
             </a:extLst>
           </p:cNvPr>
@@ -10786,7 +10786,7 @@
           <p:cNvPr id="28" name="">
             <a:extLst xmlns:a="http://schemas.openxmlformats.org/drawingml/2006/main">
               <a:ext uri="{FF2B5EF4-FFF2-40B4-BE49-F238E27FC236}">
-                <a16:creationId xmlns:a16="http://schemas.microsoft.com/office/drawing/2014/main" id="{96623A53-C51E-4665-859B-5E9F54BB3029}"/>
+                <a16:creationId xmlns:a16="http://schemas.microsoft.com/office/drawing/2014/main" id="{C8673E5F-6F72-4519-818E-43F826C24C64}"/>
               </a:ext>
             </a:extLst>
           </p:cNvPr>
@@ -10836,7 +10836,7 @@
           <p:cNvPr id="29" name="">
             <a:extLst xmlns:a="http://schemas.openxmlformats.org/drawingml/2006/main">
               <a:ext uri="{FF2B5EF4-FFF2-40B4-BE49-F238E27FC236}">
-                <a16:creationId xmlns:a16="http://schemas.microsoft.com/office/drawing/2014/main" id="{2F2E49E0-A9FF-4784-9C47-7D7972096264}"/>
+                <a16:creationId xmlns:a16="http://schemas.microsoft.com/office/drawing/2014/main" id="{68193A12-88A2-4897-B702-F9B56126D080}"/>
               </a:ext>
             </a:extLst>
           </p:cNvPr>
@@ -10886,7 +10886,7 @@
           <p:cNvPr id="30" name="">
             <a:extLst xmlns:a="http://schemas.openxmlformats.org/drawingml/2006/main">
               <a:ext uri="{FF2B5EF4-FFF2-40B4-BE49-F238E27FC236}">
-                <a16:creationId xmlns:a16="http://schemas.microsoft.com/office/drawing/2014/main" id="{FB6352E9-D768-469F-9BA1-972E3E92241F}"/>
+                <a16:creationId xmlns:a16="http://schemas.microsoft.com/office/drawing/2014/main" id="{4003D6EA-C565-4F9A-B657-2594594AA3F1}"/>
               </a:ext>
             </a:extLst>
           </p:cNvPr>
@@ -10917,7 +10917,7 @@
           <p:cNvPr id="31" name="">
             <a:extLst xmlns:a="http://schemas.openxmlformats.org/drawingml/2006/main">
               <a:ext uri="{FF2B5EF4-FFF2-40B4-BE49-F238E27FC236}">
-                <a16:creationId xmlns:a16="http://schemas.microsoft.com/office/drawing/2014/main" id="{ACFEB53C-DFB7-467A-BE14-90D8B496B881}"/>
+                <a16:creationId xmlns:a16="http://schemas.microsoft.com/office/drawing/2014/main" id="{DC835A9E-42C7-4CA6-8B42-C215054C4EEC}"/>
               </a:ext>
             </a:extLst>
           </p:cNvPr>
@@ -10967,7 +10967,7 @@
           <p:cNvPr id="32" name="">
             <a:extLst xmlns:a="http://schemas.openxmlformats.org/drawingml/2006/main">
               <a:ext uri="{FF2B5EF4-FFF2-40B4-BE49-F238E27FC236}">
-                <a16:creationId xmlns:a16="http://schemas.microsoft.com/office/drawing/2014/main" id="{6791C443-D363-422B-B23A-92D96A77715E}"/>
+                <a16:creationId xmlns:a16="http://schemas.microsoft.com/office/drawing/2014/main" id="{3ADF8118-E340-4C1E-A16D-03A575A87DC5}"/>
               </a:ext>
             </a:extLst>
           </p:cNvPr>
@@ -11017,7 +11017,7 @@
           <p:cNvPr id="33" name="">
             <a:extLst xmlns:a="http://schemas.openxmlformats.org/drawingml/2006/main">
               <a:ext uri="{FF2B5EF4-FFF2-40B4-BE49-F238E27FC236}">
-                <a16:creationId xmlns:a16="http://schemas.microsoft.com/office/drawing/2014/main" id="{CF5F48F4-4DFB-4A55-8DBF-EE2CBBA79ABA}"/>
+                <a16:creationId xmlns:a16="http://schemas.microsoft.com/office/drawing/2014/main" id="{99826F9A-1A84-4F1A-AD90-9DF8AE2E778C}"/>
               </a:ext>
             </a:extLst>
           </p:cNvPr>
@@ -11067,7 +11067,7 @@
           <p:cNvPr id="34" name="">
             <a:extLst xmlns:a="http://schemas.openxmlformats.org/drawingml/2006/main">
               <a:ext uri="{FF2B5EF4-FFF2-40B4-BE49-F238E27FC236}">
-                <a16:creationId xmlns:a16="http://schemas.microsoft.com/office/drawing/2014/main" id="{849410F2-70B0-4D80-90D1-645ED2254CE4}"/>
+                <a16:creationId xmlns:a16="http://schemas.microsoft.com/office/drawing/2014/main" id="{EC1412F0-7E97-4F0D-8586-048E8843C3A3}"/>
               </a:ext>
             </a:extLst>
           </p:cNvPr>
@@ -11117,7 +11117,7 @@
           <p:cNvPr id="35" name="">
             <a:extLst xmlns:a="http://schemas.openxmlformats.org/drawingml/2006/main">
               <a:ext uri="{FF2B5EF4-FFF2-40B4-BE49-F238E27FC236}">
-                <a16:creationId xmlns:a16="http://schemas.microsoft.com/office/drawing/2014/main" id="{E47CED75-B1B0-4CB6-9494-F3871DF6763F}"/>
+                <a16:creationId xmlns:a16="http://schemas.microsoft.com/office/drawing/2014/main" id="{88112020-F3B6-4173-926D-C45AE22D0CAA}"/>
               </a:ext>
             </a:extLst>
           </p:cNvPr>
@@ -11152,7 +11152,7 @@
           <p:cNvPr id="36" name="">
             <a:extLst xmlns:a="http://schemas.openxmlformats.org/drawingml/2006/main">
               <a:ext uri="{FF2B5EF4-FFF2-40B4-BE49-F238E27FC236}">
-                <a16:creationId xmlns:a16="http://schemas.microsoft.com/office/drawing/2014/main" id="{BBCFF248-B7F3-491A-9224-EDB2F63DCA3C}"/>
+                <a16:creationId xmlns:a16="http://schemas.microsoft.com/office/drawing/2014/main" id="{AAE5B4B8-9389-4BD6-8C7B-837D1D184FD2}"/>
               </a:ext>
             </a:extLst>
           </p:cNvPr>
@@ -11202,7 +11202,7 @@
           <p:cNvPr id="37" name="">
             <a:extLst xmlns:a="http://schemas.openxmlformats.org/drawingml/2006/main">
               <a:ext uri="{FF2B5EF4-FFF2-40B4-BE49-F238E27FC236}">
-                <a16:creationId xmlns:a16="http://schemas.microsoft.com/office/drawing/2014/main" id="{4BD361C1-2788-4186-8429-67172CBAA312}"/>
+                <a16:creationId xmlns:a16="http://schemas.microsoft.com/office/drawing/2014/main" id="{42B94934-5E82-416D-8074-DBF3C44521CC}"/>
               </a:ext>
             </a:extLst>
           </p:cNvPr>
@@ -11252,7 +11252,7 @@
           <p:cNvPr id="38" name="">
             <a:extLst xmlns:a="http://schemas.openxmlformats.org/drawingml/2006/main">
               <a:ext uri="{FF2B5EF4-FFF2-40B4-BE49-F238E27FC236}">
-                <a16:creationId xmlns:a16="http://schemas.microsoft.com/office/drawing/2014/main" id="{9BC3B6B9-7647-4D32-B791-71FE9CA368E0}"/>
+                <a16:creationId xmlns:a16="http://schemas.microsoft.com/office/drawing/2014/main" id="{321796FA-B35B-4C0A-BEB5-BCD4F4D387B8}"/>
               </a:ext>
             </a:extLst>
           </p:cNvPr>
@@ -11302,7 +11302,7 @@
           <p:cNvPr id="39" name="">
             <a:extLst xmlns:a="http://schemas.openxmlformats.org/drawingml/2006/main">
               <a:ext uri="{FF2B5EF4-FFF2-40B4-BE49-F238E27FC236}">
-                <a16:creationId xmlns:a16="http://schemas.microsoft.com/office/drawing/2014/main" id="{E8C184C6-3F18-4A61-9E40-0C7CAF84E823}"/>
+                <a16:creationId xmlns:a16="http://schemas.microsoft.com/office/drawing/2014/main" id="{73F3937C-4089-43BF-9508-6BC965E345B6}"/>
               </a:ext>
             </a:extLst>
           </p:cNvPr>
@@ -11333,7 +11333,7 @@
           <p:cNvPr id="40" name="">
             <a:extLst xmlns:a="http://schemas.openxmlformats.org/drawingml/2006/main">
               <a:ext uri="{FF2B5EF4-FFF2-40B4-BE49-F238E27FC236}">
-                <a16:creationId xmlns:a16="http://schemas.microsoft.com/office/drawing/2014/main" id="{BAF18B5D-0869-4DED-906C-32B6C2E3C2B8}"/>
+                <a16:creationId xmlns:a16="http://schemas.microsoft.com/office/drawing/2014/main" id="{18F98EBC-7910-44CE-B0FF-94E40A4CEE57}"/>
               </a:ext>
             </a:extLst>
           </p:cNvPr>
@@ -11383,7 +11383,7 @@
           <p:cNvPr id="41" name="">
             <a:extLst xmlns:a="http://schemas.openxmlformats.org/drawingml/2006/main">
               <a:ext uri="{FF2B5EF4-FFF2-40B4-BE49-F238E27FC236}">
-                <a16:creationId xmlns:a16="http://schemas.microsoft.com/office/drawing/2014/main" id="{AD201C5C-2E89-49EE-AC4F-2565FD1AB87C}"/>
+                <a16:creationId xmlns:a16="http://schemas.microsoft.com/office/drawing/2014/main" id="{8A4D246C-BD6F-499E-ABE1-AFC015DAFC84}"/>
               </a:ext>
             </a:extLst>
           </p:cNvPr>
@@ -11433,7 +11433,7 @@
           <p:cNvPr id="42" name="">
             <a:extLst xmlns:a="http://schemas.openxmlformats.org/drawingml/2006/main">
               <a:ext uri="{FF2B5EF4-FFF2-40B4-BE49-F238E27FC236}">
-                <a16:creationId xmlns:a16="http://schemas.microsoft.com/office/drawing/2014/main" id="{13A1D695-A977-4220-834E-E89569B0F9A8}"/>
+                <a16:creationId xmlns:a16="http://schemas.microsoft.com/office/drawing/2014/main" id="{9169B915-8526-4B16-831E-C7AE8D2C7327}"/>
               </a:ext>
             </a:extLst>
           </p:cNvPr>
@@ -11483,7 +11483,7 @@
           <p:cNvPr id="43" name="">
             <a:extLst xmlns:a="http://schemas.openxmlformats.org/drawingml/2006/main">
               <a:ext uri="{FF2B5EF4-FFF2-40B4-BE49-F238E27FC236}">
-                <a16:creationId xmlns:a16="http://schemas.microsoft.com/office/drawing/2014/main" id="{B472983B-AFEA-4FFD-8733-1ECB46641B57}"/>
+                <a16:creationId xmlns:a16="http://schemas.microsoft.com/office/drawing/2014/main" id="{E058E5DB-7995-417B-8C16-2D5496382BF0}"/>
               </a:ext>
             </a:extLst>
           </p:cNvPr>
@@ -11531,7 +11531,7 @@
     </p:spTree>
     <p:extLst>
       <p:ext uri="{BB962C8B-B14F-4D97-AF65-F5344CB8AC3E}">
-        <p14:creationId xmlns:p14="http://schemas.microsoft.com/office/powerpoint/2010/main" val="1497292610"/>
+        <p14:creationId xmlns:p14="http://schemas.microsoft.com/office/powerpoint/2010/main" val="1020422276"/>
       </p:ext>
     </p:extLst>
   </p:cSld>
@@ -11562,7 +11562,7 @@
           <p:cNvPr id="1" name="">
             <a:extLst xmlns:a="http://schemas.openxmlformats.org/drawingml/2006/main">
               <a:ext uri="{FF2B5EF4-FFF2-40B4-BE49-F238E27FC236}">
-                <a16:creationId xmlns:a16="http://schemas.microsoft.com/office/drawing/2014/main" id="{26136659-E003-41E1-B2EA-63A2B66E7242}"/>
+                <a16:creationId xmlns:a16="http://schemas.microsoft.com/office/drawing/2014/main" id="{99A78478-137E-452F-9B0E-59DD8E581AF9}"/>
               </a:ext>
             </a:extLst>
           </p:cNvPr>
@@ -11597,7 +11597,7 @@
           <p:nvPr/>
         </p:nvPicPr>
         <p:blipFill>
-          <a:blip xmlns:r="http://schemas.openxmlformats.org/officeDocument/2006/relationships" xmlns:a="http://schemas.openxmlformats.org/drawingml/2006/main" r:embed="R6ab600df85af4d31"/>
+          <a:blip xmlns:r="http://schemas.openxmlformats.org/officeDocument/2006/relationships" xmlns:a="http://schemas.openxmlformats.org/drawingml/2006/main" r:embed="Rd615955c7fa84c70"/>
           <a:stretch xmlns:a="http://schemas.openxmlformats.org/drawingml/2006/main"/>
         </p:blipFill>
         <p:spPr>
@@ -11615,7 +11615,7 @@
           <p:cNvPr id="3" name="">
             <a:extLst xmlns:a="http://schemas.openxmlformats.org/drawingml/2006/main">
               <a:ext uri="{FF2B5EF4-FFF2-40B4-BE49-F238E27FC236}">
-                <a16:creationId xmlns:a16="http://schemas.microsoft.com/office/drawing/2014/main" id="{E36D6F15-0584-4DC4-9B24-1E95B7654DFE}"/>
+                <a16:creationId xmlns:a16="http://schemas.microsoft.com/office/drawing/2014/main" id="{9548C1A1-0F95-404C-A4DB-5AB9BDEA86B1}"/>
               </a:ext>
             </a:extLst>
           </p:cNvPr>
@@ -11665,7 +11665,7 @@
           <p:cNvPr id="4" name="">
             <a:extLst xmlns:a="http://schemas.openxmlformats.org/drawingml/2006/main">
               <a:ext uri="{FF2B5EF4-FFF2-40B4-BE49-F238E27FC236}">
-                <a16:creationId xmlns:a16="http://schemas.microsoft.com/office/drawing/2014/main" id="{F8500285-DBAD-4D0D-B733-46E129EB9AA7}"/>
+                <a16:creationId xmlns:a16="http://schemas.microsoft.com/office/drawing/2014/main" id="{31A954F4-2819-4AA4-9A54-4D3C12DED6C6}"/>
               </a:ext>
             </a:extLst>
           </p:cNvPr>
@@ -11698,7 +11698,7 @@
           <p:cNvPr id="5" name="">
             <a:extLst xmlns:a="http://schemas.openxmlformats.org/drawingml/2006/main">
               <a:ext uri="{FF2B5EF4-FFF2-40B4-BE49-F238E27FC236}">
-                <a16:creationId xmlns:a16="http://schemas.microsoft.com/office/drawing/2014/main" id="{F430A174-5003-4ACF-BEB1-DFBF16C77919}"/>
+                <a16:creationId xmlns:a16="http://schemas.microsoft.com/office/drawing/2014/main" id="{83115B97-46FC-4CAB-B8AA-29066E2BCCE5}"/>
               </a:ext>
             </a:extLst>
           </p:cNvPr>
@@ -11729,7 +11729,7 @@
           <p:cNvPr id="6" name="">
             <a:extLst xmlns:a="http://schemas.openxmlformats.org/drawingml/2006/main">
               <a:ext uri="{FF2B5EF4-FFF2-40B4-BE49-F238E27FC236}">
-                <a16:creationId xmlns:a16="http://schemas.microsoft.com/office/drawing/2014/main" id="{0F25EC55-5B50-4C78-96D2-F4A2AD5BDA65}"/>
+                <a16:creationId xmlns:a16="http://schemas.microsoft.com/office/drawing/2014/main" id="{4DFC2A1D-86C0-4B4D-8A6A-01F2447BF30F}"/>
               </a:ext>
             </a:extLst>
           </p:cNvPr>
@@ -11779,7 +11779,7 @@
           <p:cNvPr id="7" name="">
             <a:extLst xmlns:a="http://schemas.openxmlformats.org/drawingml/2006/main">
               <a:ext uri="{FF2B5EF4-FFF2-40B4-BE49-F238E27FC236}">
-                <a16:creationId xmlns:a16="http://schemas.microsoft.com/office/drawing/2014/main" id="{4819B657-2DD5-41F5-918D-10E51F0ED9C7}"/>
+                <a16:creationId xmlns:a16="http://schemas.microsoft.com/office/drawing/2014/main" id="{F91B27EA-8AE2-424E-BEF6-72ED98DF6581}"/>
               </a:ext>
             </a:extLst>
           </p:cNvPr>
@@ -11829,7 +11829,7 @@
           <p:cNvPr id="8" name="">
             <a:extLst xmlns:a="http://schemas.openxmlformats.org/drawingml/2006/main">
               <a:ext uri="{FF2B5EF4-FFF2-40B4-BE49-F238E27FC236}">
-                <a16:creationId xmlns:a16="http://schemas.microsoft.com/office/drawing/2014/main" id="{E6870836-C29D-4F9F-9515-1617FCFA3DBF}"/>
+                <a16:creationId xmlns:a16="http://schemas.microsoft.com/office/drawing/2014/main" id="{50B1695A-C49E-4625-B525-FB3F1E795E0D}"/>
               </a:ext>
             </a:extLst>
           </p:cNvPr>
@@ -11864,7 +11864,7 @@
           <p:cNvPr id="9" name="">
             <a:extLst xmlns:a="http://schemas.openxmlformats.org/drawingml/2006/main">
               <a:ext uri="{FF2B5EF4-FFF2-40B4-BE49-F238E27FC236}">
-                <a16:creationId xmlns:a16="http://schemas.microsoft.com/office/drawing/2014/main" id="{F3B2363E-7B78-4D51-AEDE-4A0FE891E56E}"/>
+                <a16:creationId xmlns:a16="http://schemas.microsoft.com/office/drawing/2014/main" id="{333C39C6-75CF-45D6-9602-63F5A5A66F04}"/>
               </a:ext>
             </a:extLst>
           </p:cNvPr>
@@ -11897,7 +11897,7 @@
           <p:cNvPr id="10" name="">
             <a:extLst xmlns:a="http://schemas.openxmlformats.org/drawingml/2006/main">
               <a:ext uri="{FF2B5EF4-FFF2-40B4-BE49-F238E27FC236}">
-                <a16:creationId xmlns:a16="http://schemas.microsoft.com/office/drawing/2014/main" id="{0CBC1215-DC88-4EB4-9304-19A85E95229E}"/>
+                <a16:creationId xmlns:a16="http://schemas.microsoft.com/office/drawing/2014/main" id="{A1139C15-C36D-4957-9D54-2FBDC722CC89}"/>
               </a:ext>
             </a:extLst>
           </p:cNvPr>
@@ -11947,7 +11947,7 @@
           <p:cNvPr id="11" name="">
             <a:extLst xmlns:a="http://schemas.openxmlformats.org/drawingml/2006/main">
               <a:ext uri="{FF2B5EF4-FFF2-40B4-BE49-F238E27FC236}">
-                <a16:creationId xmlns:a16="http://schemas.microsoft.com/office/drawing/2014/main" id="{20C64606-C59C-4A3A-BFA9-7F2FCB563C46}"/>
+                <a16:creationId xmlns:a16="http://schemas.microsoft.com/office/drawing/2014/main" id="{69F8477B-BA40-4D7F-979E-2CB664DA98B0}"/>
               </a:ext>
             </a:extLst>
           </p:cNvPr>
@@ -11997,7 +11997,7 @@
           <p:cNvPr id="12" name="">
             <a:extLst xmlns:a="http://schemas.openxmlformats.org/drawingml/2006/main">
               <a:ext uri="{FF2B5EF4-FFF2-40B4-BE49-F238E27FC236}">
-                <a16:creationId xmlns:a16="http://schemas.microsoft.com/office/drawing/2014/main" id="{EEAA9448-ECAC-4255-AB32-648C00FE1C33}"/>
+                <a16:creationId xmlns:a16="http://schemas.microsoft.com/office/drawing/2014/main" id="{1AEF5975-36B5-4EC0-8911-DAD0340717F5}"/>
               </a:ext>
             </a:extLst>
           </p:cNvPr>
@@ -12047,7 +12047,7 @@
           <p:cNvPr id="13" name="">
             <a:extLst xmlns:a="http://schemas.openxmlformats.org/drawingml/2006/main">
               <a:ext uri="{FF2B5EF4-FFF2-40B4-BE49-F238E27FC236}">
-                <a16:creationId xmlns:a16="http://schemas.microsoft.com/office/drawing/2014/main" id="{F319887B-177C-4CBA-B1FC-7C805253B920}"/>
+                <a16:creationId xmlns:a16="http://schemas.microsoft.com/office/drawing/2014/main" id="{BA433D33-D097-493D-8D74-70EFAB3CE7B0}"/>
               </a:ext>
             </a:extLst>
           </p:cNvPr>
@@ -12078,7 +12078,7 @@
           <p:cNvPr id="14" name="">
             <a:extLst xmlns:a="http://schemas.openxmlformats.org/drawingml/2006/main">
               <a:ext uri="{FF2B5EF4-FFF2-40B4-BE49-F238E27FC236}">
-                <a16:creationId xmlns:a16="http://schemas.microsoft.com/office/drawing/2014/main" id="{0843285E-BF2A-48CF-919F-D115492CE3B7}"/>
+                <a16:creationId xmlns:a16="http://schemas.microsoft.com/office/drawing/2014/main" id="{52E9EAE6-2E50-4C54-8108-F9EA90814A6B}"/>
               </a:ext>
             </a:extLst>
           </p:cNvPr>
@@ -12128,7 +12128,7 @@
           <p:cNvPr id="15" name="">
             <a:extLst xmlns:a="http://schemas.openxmlformats.org/drawingml/2006/main">
               <a:ext uri="{FF2B5EF4-FFF2-40B4-BE49-F238E27FC236}">
-                <a16:creationId xmlns:a16="http://schemas.microsoft.com/office/drawing/2014/main" id="{1EBA88B5-B2EF-4F01-AEE5-72770F486427}"/>
+                <a16:creationId xmlns:a16="http://schemas.microsoft.com/office/drawing/2014/main" id="{9516F0CF-A052-429A-99D2-7F82F067EBFF}"/>
               </a:ext>
             </a:extLst>
           </p:cNvPr>
@@ -12178,7 +12178,7 @@
           <p:cNvPr id="16" name="">
             <a:extLst xmlns:a="http://schemas.openxmlformats.org/drawingml/2006/main">
               <a:ext uri="{FF2B5EF4-FFF2-40B4-BE49-F238E27FC236}">
-                <a16:creationId xmlns:a16="http://schemas.microsoft.com/office/drawing/2014/main" id="{9B3128A1-5F0E-48C4-B24E-09F8C2179F2A}"/>
+                <a16:creationId xmlns:a16="http://schemas.microsoft.com/office/drawing/2014/main" id="{CC8F383A-AFEF-4344-B8A7-A59CD4CD07A6}"/>
               </a:ext>
             </a:extLst>
           </p:cNvPr>
@@ -12213,7 +12213,7 @@
           <p:cNvPr id="17" name="">
             <a:extLst xmlns:a="http://schemas.openxmlformats.org/drawingml/2006/main">
               <a:ext uri="{FF2B5EF4-FFF2-40B4-BE49-F238E27FC236}">
-                <a16:creationId xmlns:a16="http://schemas.microsoft.com/office/drawing/2014/main" id="{52E5BCD7-92E4-4A3E-8703-700D2E48581C}"/>
+                <a16:creationId xmlns:a16="http://schemas.microsoft.com/office/drawing/2014/main" id="{44F71691-8084-4207-922B-0420A024DEB8}"/>
               </a:ext>
             </a:extLst>
           </p:cNvPr>
@@ -12246,7 +12246,7 @@
           <p:cNvPr id="18" name="">
             <a:extLst xmlns:a="http://schemas.openxmlformats.org/drawingml/2006/main">
               <a:ext uri="{FF2B5EF4-FFF2-40B4-BE49-F238E27FC236}">
-                <a16:creationId xmlns:a16="http://schemas.microsoft.com/office/drawing/2014/main" id="{FEE00323-2BE9-4FE8-90B7-58E044975F5B}"/>
+                <a16:creationId xmlns:a16="http://schemas.microsoft.com/office/drawing/2014/main" id="{11F8C4D5-D676-4F32-8FD4-387EA0EBC9E1}"/>
               </a:ext>
             </a:extLst>
           </p:cNvPr>
@@ -12296,7 +12296,7 @@
           <p:cNvPr id="19" name="">
             <a:extLst xmlns:a="http://schemas.openxmlformats.org/drawingml/2006/main">
               <a:ext uri="{FF2B5EF4-FFF2-40B4-BE49-F238E27FC236}">
-                <a16:creationId xmlns:a16="http://schemas.microsoft.com/office/drawing/2014/main" id="{174F1180-C2D3-4925-AE85-7624C27B3B1C}"/>
+                <a16:creationId xmlns:a16="http://schemas.microsoft.com/office/drawing/2014/main" id="{25B794E7-1476-4F14-9D4B-4F215DC16D96}"/>
               </a:ext>
             </a:extLst>
           </p:cNvPr>
@@ -12346,7 +12346,7 @@
           <p:cNvPr id="20" name="">
             <a:extLst xmlns:a="http://schemas.openxmlformats.org/drawingml/2006/main">
               <a:ext uri="{FF2B5EF4-FFF2-40B4-BE49-F238E27FC236}">
-                <a16:creationId xmlns:a16="http://schemas.microsoft.com/office/drawing/2014/main" id="{D509E5C5-3952-40D4-8329-7591AC0C155E}"/>
+                <a16:creationId xmlns:a16="http://schemas.microsoft.com/office/drawing/2014/main" id="{7D835DCA-0B91-4BCA-9B1C-B3B494E6C74E}"/>
               </a:ext>
             </a:extLst>
           </p:cNvPr>
@@ -12396,7 +12396,7 @@
           <p:cNvPr id="21" name="">
             <a:extLst xmlns:a="http://schemas.openxmlformats.org/drawingml/2006/main">
               <a:ext uri="{FF2B5EF4-FFF2-40B4-BE49-F238E27FC236}">
-                <a16:creationId xmlns:a16="http://schemas.microsoft.com/office/drawing/2014/main" id="{A0064D03-F31C-488F-9282-A2A2B180BAEF}"/>
+                <a16:creationId xmlns:a16="http://schemas.microsoft.com/office/drawing/2014/main" id="{DB5A93B9-68DE-4097-BC7E-80A08E43EF72}"/>
               </a:ext>
             </a:extLst>
           </p:cNvPr>
@@ -12427,7 +12427,7 @@
           <p:cNvPr id="22" name="">
             <a:extLst xmlns:a="http://schemas.openxmlformats.org/drawingml/2006/main">
               <a:ext uri="{FF2B5EF4-FFF2-40B4-BE49-F238E27FC236}">
-                <a16:creationId xmlns:a16="http://schemas.microsoft.com/office/drawing/2014/main" id="{5F35E165-5DFD-4B1A-88B9-64C373439135}"/>
+                <a16:creationId xmlns:a16="http://schemas.microsoft.com/office/drawing/2014/main" id="{492C8F90-D3A0-41A1-992C-BC6DB5EA7CAE}"/>
               </a:ext>
             </a:extLst>
           </p:cNvPr>
@@ -12477,7 +12477,7 @@
           <p:cNvPr id="23" name="">
             <a:extLst xmlns:a="http://schemas.openxmlformats.org/drawingml/2006/main">
               <a:ext uri="{FF2B5EF4-FFF2-40B4-BE49-F238E27FC236}">
-                <a16:creationId xmlns:a16="http://schemas.microsoft.com/office/drawing/2014/main" id="{C03DBE2B-B1B5-49A6-94EC-9E9395B9A9C9}"/>
+                <a16:creationId xmlns:a16="http://schemas.microsoft.com/office/drawing/2014/main" id="{CB17453B-D3F6-492B-B35F-E7470D3D3945}"/>
               </a:ext>
             </a:extLst>
           </p:cNvPr>
@@ -12527,7 +12527,7 @@
           <p:cNvPr id="24" name="">
             <a:extLst xmlns:a="http://schemas.openxmlformats.org/drawingml/2006/main">
               <a:ext uri="{FF2B5EF4-FFF2-40B4-BE49-F238E27FC236}">
-                <a16:creationId xmlns:a16="http://schemas.microsoft.com/office/drawing/2014/main" id="{094BA134-20D6-43AD-8268-84F668F1C4E6}"/>
+                <a16:creationId xmlns:a16="http://schemas.microsoft.com/office/drawing/2014/main" id="{E0BB928F-AA96-4DE7-B438-27221EA59718}"/>
               </a:ext>
             </a:extLst>
           </p:cNvPr>
@@ -12562,7 +12562,7 @@
           <p:cNvPr id="25" name="">
             <a:extLst xmlns:a="http://schemas.openxmlformats.org/drawingml/2006/main">
               <a:ext uri="{FF2B5EF4-FFF2-40B4-BE49-F238E27FC236}">
-                <a16:creationId xmlns:a16="http://schemas.microsoft.com/office/drawing/2014/main" id="{7026A582-52B9-44D5-B1F1-7CEF01F4A58E}"/>
+                <a16:creationId xmlns:a16="http://schemas.microsoft.com/office/drawing/2014/main" id="{EB85A370-D3AD-465E-AA1A-B216609468EE}"/>
               </a:ext>
             </a:extLst>
           </p:cNvPr>
@@ -12595,7 +12595,7 @@
           <p:cNvPr id="26" name="">
             <a:extLst xmlns:a="http://schemas.openxmlformats.org/drawingml/2006/main">
               <a:ext uri="{FF2B5EF4-FFF2-40B4-BE49-F238E27FC236}">
-                <a16:creationId xmlns:a16="http://schemas.microsoft.com/office/drawing/2014/main" id="{1DC49025-DBFB-4FFB-A9BA-BB36B7117D94}"/>
+                <a16:creationId xmlns:a16="http://schemas.microsoft.com/office/drawing/2014/main" id="{04EFDD0C-9DD1-4D5F-9BC6-A948C8750296}"/>
               </a:ext>
             </a:extLst>
           </p:cNvPr>
@@ -12645,7 +12645,7 @@
           <p:cNvPr id="27" name="">
             <a:extLst xmlns:a="http://schemas.openxmlformats.org/drawingml/2006/main">
               <a:ext uri="{FF2B5EF4-FFF2-40B4-BE49-F238E27FC236}">
-                <a16:creationId xmlns:a16="http://schemas.microsoft.com/office/drawing/2014/main" id="{C0C56B87-91D7-445D-956A-18E2496C83E7}"/>
+                <a16:creationId xmlns:a16="http://schemas.microsoft.com/office/drawing/2014/main" id="{303DC65C-0427-48FE-924A-6CF4B99BCC77}"/>
               </a:ext>
             </a:extLst>
           </p:cNvPr>
@@ -12695,7 +12695,7 @@
           <p:cNvPr id="28" name="">
             <a:extLst xmlns:a="http://schemas.openxmlformats.org/drawingml/2006/main">
               <a:ext uri="{FF2B5EF4-FFF2-40B4-BE49-F238E27FC236}">
-                <a16:creationId xmlns:a16="http://schemas.microsoft.com/office/drawing/2014/main" id="{52106A5F-E6D6-4E95-A938-1819FBB5CA6B}"/>
+                <a16:creationId xmlns:a16="http://schemas.microsoft.com/office/drawing/2014/main" id="{E34DD81C-CCEC-4DF1-89CB-8D6D6418AF26}"/>
               </a:ext>
             </a:extLst>
           </p:cNvPr>
@@ -12745,7 +12745,7 @@
           <p:cNvPr id="29" name="">
             <a:extLst xmlns:a="http://schemas.openxmlformats.org/drawingml/2006/main">
               <a:ext uri="{FF2B5EF4-FFF2-40B4-BE49-F238E27FC236}">
-                <a16:creationId xmlns:a16="http://schemas.microsoft.com/office/drawing/2014/main" id="{8CC0170F-18A2-48A1-9E7C-C927CF80A2D5}"/>
+                <a16:creationId xmlns:a16="http://schemas.microsoft.com/office/drawing/2014/main" id="{80D71B5A-D4C4-447D-AF7B-ABFC9A3371F5}"/>
               </a:ext>
             </a:extLst>
           </p:cNvPr>
@@ -12776,7 +12776,7 @@
           <p:cNvPr id="30" name="">
             <a:extLst xmlns:a="http://schemas.openxmlformats.org/drawingml/2006/main">
               <a:ext uri="{FF2B5EF4-FFF2-40B4-BE49-F238E27FC236}">
-                <a16:creationId xmlns:a16="http://schemas.microsoft.com/office/drawing/2014/main" id="{50C7E9C6-C08F-448F-AE53-75F617C536AA}"/>
+                <a16:creationId xmlns:a16="http://schemas.microsoft.com/office/drawing/2014/main" id="{981B40A0-686A-4722-9CF6-BBE10D8FCE26}"/>
               </a:ext>
             </a:extLst>
           </p:cNvPr>
@@ -12826,7 +12826,7 @@
           <p:cNvPr id="31" name="">
             <a:extLst xmlns:a="http://schemas.openxmlformats.org/drawingml/2006/main">
               <a:ext uri="{FF2B5EF4-FFF2-40B4-BE49-F238E27FC236}">
-                <a16:creationId xmlns:a16="http://schemas.microsoft.com/office/drawing/2014/main" id="{241B839D-BD2D-4E39-BEFA-62DB0113855C}"/>
+                <a16:creationId xmlns:a16="http://schemas.microsoft.com/office/drawing/2014/main" id="{65D395AF-A0FE-429C-BF6C-12715F2C0D14}"/>
               </a:ext>
             </a:extLst>
           </p:cNvPr>
@@ -12874,7 +12874,7 @@
     </p:spTree>
     <p:extLst>
       <p:ext uri="{BB962C8B-B14F-4D97-AF65-F5344CB8AC3E}">
-        <p14:creationId xmlns:p14="http://schemas.microsoft.com/office/powerpoint/2010/main" val="747985884"/>
+        <p14:creationId xmlns:p14="http://schemas.microsoft.com/office/powerpoint/2010/main" val="135445347"/>
       </p:ext>
     </p:extLst>
   </p:cSld>
@@ -12905,7 +12905,7 @@
           <p:cNvPr id="1" name="">
             <a:extLst xmlns:a="http://schemas.openxmlformats.org/drawingml/2006/main">
               <a:ext uri="{FF2B5EF4-FFF2-40B4-BE49-F238E27FC236}">
-                <a16:creationId xmlns:a16="http://schemas.microsoft.com/office/drawing/2014/main" id="{CB80A9AC-19EF-4BE0-8CF4-7E3DE113ABF2}"/>
+                <a16:creationId xmlns:a16="http://schemas.microsoft.com/office/drawing/2014/main" id="{E1AECCE9-A947-46E3-9845-A356DC251C14}"/>
               </a:ext>
             </a:extLst>
           </p:cNvPr>
@@ -12940,7 +12940,7 @@
           <p:nvPr/>
         </p:nvPicPr>
         <p:blipFill>
-          <a:blip xmlns:r="http://schemas.openxmlformats.org/officeDocument/2006/relationships" xmlns:a="http://schemas.openxmlformats.org/drawingml/2006/main" r:embed="Rf69283f6efd14088"/>
+          <a:blip xmlns:r="http://schemas.openxmlformats.org/officeDocument/2006/relationships" xmlns:a="http://schemas.openxmlformats.org/drawingml/2006/main" r:embed="Rf7d05b7b266d4431"/>
           <a:stretch xmlns:a="http://schemas.openxmlformats.org/drawingml/2006/main"/>
         </p:blipFill>
         <p:spPr>
@@ -12958,7 +12958,7 @@
           <p:cNvPr id="3" name="">
             <a:extLst xmlns:a="http://schemas.openxmlformats.org/drawingml/2006/main">
               <a:ext uri="{FF2B5EF4-FFF2-40B4-BE49-F238E27FC236}">
-                <a16:creationId xmlns:a16="http://schemas.microsoft.com/office/drawing/2014/main" id="{01D1222A-893D-449F-841A-6F75475DD4BD}"/>
+                <a16:creationId xmlns:a16="http://schemas.microsoft.com/office/drawing/2014/main" id="{FF9A7185-0529-4EC1-B4C6-D678FD23F45F}"/>
               </a:ext>
             </a:extLst>
           </p:cNvPr>
@@ -13008,7 +13008,7 @@
           <p:cNvPr id="4" name="">
             <a:extLst xmlns:a="http://schemas.openxmlformats.org/drawingml/2006/main">
               <a:ext uri="{FF2B5EF4-FFF2-40B4-BE49-F238E27FC236}">
-                <a16:creationId xmlns:a16="http://schemas.microsoft.com/office/drawing/2014/main" id="{24FCF932-70C8-4C82-B580-B38F1576D631}"/>
+                <a16:creationId xmlns:a16="http://schemas.microsoft.com/office/drawing/2014/main" id="{0792C794-8D0F-4ED4-B332-CA190F9392FE}"/>
               </a:ext>
             </a:extLst>
           </p:cNvPr>
@@ -13041,7 +13041,7 @@
           <p:cNvPr id="5" name="">
             <a:extLst xmlns:a="http://schemas.openxmlformats.org/drawingml/2006/main">
               <a:ext uri="{FF2B5EF4-FFF2-40B4-BE49-F238E27FC236}">
-                <a16:creationId xmlns:a16="http://schemas.microsoft.com/office/drawing/2014/main" id="{EF4CFDBF-7B08-41FC-B3AB-3883A850208C}"/>
+                <a16:creationId xmlns:a16="http://schemas.microsoft.com/office/drawing/2014/main" id="{A20A7B10-6999-41C4-9112-369589DDF711}"/>
               </a:ext>
             </a:extLst>
           </p:cNvPr>
@@ -13072,7 +13072,7 @@
           <p:cNvPr id="6" name="">
             <a:extLst xmlns:a="http://schemas.openxmlformats.org/drawingml/2006/main">
               <a:ext uri="{FF2B5EF4-FFF2-40B4-BE49-F238E27FC236}">
-                <a16:creationId xmlns:a16="http://schemas.microsoft.com/office/drawing/2014/main" id="{23E10D28-7F03-4D72-A53C-61EDE3C6CC84}"/>
+                <a16:creationId xmlns:a16="http://schemas.microsoft.com/office/drawing/2014/main" id="{14AAA9CF-8A3A-43A7-A01D-3BC86DD883DC}"/>
               </a:ext>
             </a:extLst>
           </p:cNvPr>
@@ -13122,7 +13122,7 @@
           <p:cNvPr id="7" name="">
             <a:extLst xmlns:a="http://schemas.openxmlformats.org/drawingml/2006/main">
               <a:ext uri="{FF2B5EF4-FFF2-40B4-BE49-F238E27FC236}">
-                <a16:creationId xmlns:a16="http://schemas.microsoft.com/office/drawing/2014/main" id="{F1D023D0-C3AC-4859-8951-D0AB2A1D35C0}"/>
+                <a16:creationId xmlns:a16="http://schemas.microsoft.com/office/drawing/2014/main" id="{ACFD73A9-7A6B-4C05-BB84-A07F68445210}"/>
               </a:ext>
             </a:extLst>
           </p:cNvPr>
@@ -13172,7 +13172,7 @@
           <p:cNvPr id="8" name="">
             <a:extLst xmlns:a="http://schemas.openxmlformats.org/drawingml/2006/main">
               <a:ext uri="{FF2B5EF4-FFF2-40B4-BE49-F238E27FC236}">
-                <a16:creationId xmlns:a16="http://schemas.microsoft.com/office/drawing/2014/main" id="{C3A0F5DA-4817-4D1C-96A8-B2B02E6E25D3}"/>
+                <a16:creationId xmlns:a16="http://schemas.microsoft.com/office/drawing/2014/main" id="{A872049E-288D-40F2-ADD4-68B3A05FF3C4}"/>
               </a:ext>
             </a:extLst>
           </p:cNvPr>
@@ -13222,7 +13222,7 @@
           <p:cNvPr id="9" name="">
             <a:extLst xmlns:a="http://schemas.openxmlformats.org/drawingml/2006/main">
               <a:ext uri="{FF2B5EF4-FFF2-40B4-BE49-F238E27FC236}">
-                <a16:creationId xmlns:a16="http://schemas.microsoft.com/office/drawing/2014/main" id="{A15E1A04-C61F-4568-99BE-55A33973288C}"/>
+                <a16:creationId xmlns:a16="http://schemas.microsoft.com/office/drawing/2014/main" id="{94F7B22C-CD09-40F8-A25F-5F330557AB89}"/>
               </a:ext>
             </a:extLst>
           </p:cNvPr>
@@ -13272,7 +13272,7 @@
           <p:cNvPr id="10" name="">
             <a:extLst xmlns:a="http://schemas.openxmlformats.org/drawingml/2006/main">
               <a:ext uri="{FF2B5EF4-FFF2-40B4-BE49-F238E27FC236}">
-                <a16:creationId xmlns:a16="http://schemas.microsoft.com/office/drawing/2014/main" id="{2F944C47-D639-4FF7-B46C-B0BD77DE15BD}"/>
+                <a16:creationId xmlns:a16="http://schemas.microsoft.com/office/drawing/2014/main" id="{4032A402-53F8-4907-96C7-F5CD2ACDCEAF}"/>
               </a:ext>
             </a:extLst>
           </p:cNvPr>
@@ -13303,7 +13303,7 @@
           <p:cNvPr id="11" name="">
             <a:extLst xmlns:a="http://schemas.openxmlformats.org/drawingml/2006/main">
               <a:ext uri="{FF2B5EF4-FFF2-40B4-BE49-F238E27FC236}">
-                <a16:creationId xmlns:a16="http://schemas.microsoft.com/office/drawing/2014/main" id="{F37BC5BC-2D9B-4193-9957-8D1AC8E5E0EA}"/>
+                <a16:creationId xmlns:a16="http://schemas.microsoft.com/office/drawing/2014/main" id="{C7EACBF4-4C33-4D11-8512-2FE98119C6A9}"/>
               </a:ext>
             </a:extLst>
           </p:cNvPr>
@@ -13353,7 +13353,7 @@
           <p:cNvPr id="12" name="">
             <a:extLst xmlns:a="http://schemas.openxmlformats.org/drawingml/2006/main">
               <a:ext uri="{FF2B5EF4-FFF2-40B4-BE49-F238E27FC236}">
-                <a16:creationId xmlns:a16="http://schemas.microsoft.com/office/drawing/2014/main" id="{EC842DCB-7D70-48F6-BE75-455B3ECED466}"/>
+                <a16:creationId xmlns:a16="http://schemas.microsoft.com/office/drawing/2014/main" id="{081A77A3-EE58-4283-BFBE-04A2C654017D}"/>
               </a:ext>
             </a:extLst>
           </p:cNvPr>
@@ -13403,7 +13403,7 @@
           <p:cNvPr id="13" name="">
             <a:extLst xmlns:a="http://schemas.openxmlformats.org/drawingml/2006/main">
               <a:ext uri="{FF2B5EF4-FFF2-40B4-BE49-F238E27FC236}">
-                <a16:creationId xmlns:a16="http://schemas.microsoft.com/office/drawing/2014/main" id="{087229A8-BADA-462A-84A0-28060942D48A}"/>
+                <a16:creationId xmlns:a16="http://schemas.microsoft.com/office/drawing/2014/main" id="{8E817157-ACE0-4F49-9C7E-C5E2F5E96849}"/>
               </a:ext>
             </a:extLst>
           </p:cNvPr>
@@ -13434,7 +13434,7 @@
           <p:cNvPr id="14" name="">
             <a:extLst xmlns:a="http://schemas.openxmlformats.org/drawingml/2006/main">
               <a:ext uri="{FF2B5EF4-FFF2-40B4-BE49-F238E27FC236}">
-                <a16:creationId xmlns:a16="http://schemas.microsoft.com/office/drawing/2014/main" id="{750DC662-1ABE-405F-9821-71E443A9F022}"/>
+                <a16:creationId xmlns:a16="http://schemas.microsoft.com/office/drawing/2014/main" id="{2BA7F6F0-EA18-4E7E-8357-94DA368A30F8}"/>
               </a:ext>
             </a:extLst>
           </p:cNvPr>
@@ -13484,7 +13484,7 @@
           <p:cNvPr id="15" name="">
             <a:extLst xmlns:a="http://schemas.openxmlformats.org/drawingml/2006/main">
               <a:ext uri="{FF2B5EF4-FFF2-40B4-BE49-F238E27FC236}">
-                <a16:creationId xmlns:a16="http://schemas.microsoft.com/office/drawing/2014/main" id="{2780A684-1DE9-4BE3-8D15-6760512ECF4B}"/>
+                <a16:creationId xmlns:a16="http://schemas.microsoft.com/office/drawing/2014/main" id="{1A8ECBC4-B0EB-42B7-BDD2-F33358B001C5}"/>
               </a:ext>
             </a:extLst>
           </p:cNvPr>
@@ -13534,7 +13534,7 @@
           <p:cNvPr id="16" name="">
             <a:extLst xmlns:a="http://schemas.openxmlformats.org/drawingml/2006/main">
               <a:ext uri="{FF2B5EF4-FFF2-40B4-BE49-F238E27FC236}">
-                <a16:creationId xmlns:a16="http://schemas.microsoft.com/office/drawing/2014/main" id="{B18B3EA5-7CE1-498D-91AD-27AD28014BDE}"/>
+                <a16:creationId xmlns:a16="http://schemas.microsoft.com/office/drawing/2014/main" id="{C1E41177-C953-40CB-899B-71B7FC35F71E}"/>
               </a:ext>
             </a:extLst>
           </p:cNvPr>
@@ -13565,7 +13565,7 @@
           <p:cNvPr id="17" name="">
             <a:extLst xmlns:a="http://schemas.openxmlformats.org/drawingml/2006/main">
               <a:ext uri="{FF2B5EF4-FFF2-40B4-BE49-F238E27FC236}">
-                <a16:creationId xmlns:a16="http://schemas.microsoft.com/office/drawing/2014/main" id="{EF604DA1-A314-4E9E-B682-62D043773633}"/>
+                <a16:creationId xmlns:a16="http://schemas.microsoft.com/office/drawing/2014/main" id="{07B89BBC-FDE1-43F1-9B20-885A08C89673}"/>
               </a:ext>
             </a:extLst>
           </p:cNvPr>
@@ -13615,7 +13615,7 @@
           <p:cNvPr id="18" name="">
             <a:extLst xmlns:a="http://schemas.openxmlformats.org/drawingml/2006/main">
               <a:ext uri="{FF2B5EF4-FFF2-40B4-BE49-F238E27FC236}">
-                <a16:creationId xmlns:a16="http://schemas.microsoft.com/office/drawing/2014/main" id="{79D5AEED-92A0-4B70-B72A-E1A88EF672F4}"/>
+                <a16:creationId xmlns:a16="http://schemas.microsoft.com/office/drawing/2014/main" id="{41F6B47E-3587-4D44-B56D-2C6A0531A353}"/>
               </a:ext>
             </a:extLst>
           </p:cNvPr>
@@ -13665,7 +13665,7 @@
           <p:cNvPr id="19" name="">
             <a:extLst xmlns:a="http://schemas.openxmlformats.org/drawingml/2006/main">
               <a:ext uri="{FF2B5EF4-FFF2-40B4-BE49-F238E27FC236}">
-                <a16:creationId xmlns:a16="http://schemas.microsoft.com/office/drawing/2014/main" id="{F5CC9922-4293-4995-99F5-6B34BC848950}"/>
+                <a16:creationId xmlns:a16="http://schemas.microsoft.com/office/drawing/2014/main" id="{16880A7E-4697-44D7-A6E7-72DB0FAFF439}"/>
               </a:ext>
             </a:extLst>
           </p:cNvPr>
@@ -13700,7 +13700,7 @@
           <p:cNvPr id="20" name="">
             <a:extLst xmlns:a="http://schemas.openxmlformats.org/drawingml/2006/main">
               <a:ext uri="{FF2B5EF4-FFF2-40B4-BE49-F238E27FC236}">
-                <a16:creationId xmlns:a16="http://schemas.microsoft.com/office/drawing/2014/main" id="{634CD6B9-EFF0-46AB-9596-F6049B8ACDDC}"/>
+                <a16:creationId xmlns:a16="http://schemas.microsoft.com/office/drawing/2014/main" id="{D59480D8-74EC-41D1-95C0-1848094AA4ED}"/>
               </a:ext>
             </a:extLst>
           </p:cNvPr>
@@ -13750,7 +13750,7 @@
           <p:cNvPr id="21" name="">
             <a:extLst xmlns:a="http://schemas.openxmlformats.org/drawingml/2006/main">
               <a:ext uri="{FF2B5EF4-FFF2-40B4-BE49-F238E27FC236}">
-                <a16:creationId xmlns:a16="http://schemas.microsoft.com/office/drawing/2014/main" id="{6C7C1612-C052-4D85-8C8E-50BD5693C7DB}"/>
+                <a16:creationId xmlns:a16="http://schemas.microsoft.com/office/drawing/2014/main" id="{70B4FF83-5D89-4524-B572-121ADB510842}"/>
               </a:ext>
             </a:extLst>
           </p:cNvPr>
@@ -13804,7 +13804,7 @@
           <p:nvPr/>
         </p:nvPicPr>
         <p:blipFill>
-          <a:blip xmlns:r="http://schemas.openxmlformats.org/officeDocument/2006/relationships" xmlns:a="http://schemas.openxmlformats.org/drawingml/2006/main" r:embed="Ra4967b66519348df"/>
+          <a:blip xmlns:r="http://schemas.openxmlformats.org/officeDocument/2006/relationships" xmlns:a="http://schemas.openxmlformats.org/drawingml/2006/main" r:embed="R2c32324e5bef4a22"/>
           <a:stretch xmlns:a="http://schemas.openxmlformats.org/drawingml/2006/main"/>
         </p:blipFill>
         <p:spPr>
@@ -13822,7 +13822,7 @@
           <p:cNvPr id="23" name="">
             <a:extLst xmlns:a="http://schemas.openxmlformats.org/drawingml/2006/main">
               <a:ext uri="{FF2B5EF4-FFF2-40B4-BE49-F238E27FC236}">
-                <a16:creationId xmlns:a16="http://schemas.microsoft.com/office/drawing/2014/main" id="{D604C0CC-81E0-4165-998F-428146A3910F}"/>
+                <a16:creationId xmlns:a16="http://schemas.microsoft.com/office/drawing/2014/main" id="{88A99F16-EA71-47D9-9FC1-C95B5D1E7A09}"/>
               </a:ext>
             </a:extLst>
           </p:cNvPr>
@@ -13872,7 +13872,7 @@
           <p:cNvPr id="24" name="">
             <a:extLst xmlns:a="http://schemas.openxmlformats.org/drawingml/2006/main">
               <a:ext uri="{FF2B5EF4-FFF2-40B4-BE49-F238E27FC236}">
-                <a16:creationId xmlns:a16="http://schemas.microsoft.com/office/drawing/2014/main" id="{25D4FC8C-00FF-4760-AB20-F40522C2A700}"/>
+                <a16:creationId xmlns:a16="http://schemas.microsoft.com/office/drawing/2014/main" id="{FABF7A98-1D1E-4CA4-8CD0-20F27DE68545}"/>
               </a:ext>
             </a:extLst>
           </p:cNvPr>
@@ -13922,7 +13922,7 @@
           <p:cNvPr id="25" name="">
             <a:extLst xmlns:a="http://schemas.openxmlformats.org/drawingml/2006/main">
               <a:ext uri="{FF2B5EF4-FFF2-40B4-BE49-F238E27FC236}">
-                <a16:creationId xmlns:a16="http://schemas.microsoft.com/office/drawing/2014/main" id="{F14FEECF-CDBB-4648-99FB-C0A8084BB9BF}"/>
+                <a16:creationId xmlns:a16="http://schemas.microsoft.com/office/drawing/2014/main" id="{1A7CF64A-6959-4319-B9D5-36AC77229889}"/>
               </a:ext>
             </a:extLst>
           </p:cNvPr>
@@ -13970,7 +13970,7 @@
     </p:spTree>
     <p:extLst>
       <p:ext uri="{BB962C8B-B14F-4D97-AF65-F5344CB8AC3E}">
-        <p14:creationId xmlns:p14="http://schemas.microsoft.com/office/powerpoint/2010/main" val="20944361"/>
+        <p14:creationId xmlns:p14="http://schemas.microsoft.com/office/powerpoint/2010/main" val="2044957081"/>
       </p:ext>
     </p:extLst>
   </p:cSld>

--- a/static/audit_presentation_khalil.pptx
+++ b/static/audit_presentation_khalil.pptx
@@ -2,21 +2,21 @@
 <file path=ppt/presentation.xml><?xml version="1.0" encoding="utf-8"?>
 <p:presentation xmlns:p="http://schemas.openxmlformats.org/presentationml/2006/main">
   <p:sldMasterIdLst>
-    <p:sldMasterId xmlns:r="http://schemas.openxmlformats.org/officeDocument/2006/relationships" id="2147483648" r:id="Rf165a408820a4352"/>
+    <p:sldMasterId xmlns:r="http://schemas.openxmlformats.org/officeDocument/2006/relationships" id="2147483648" r:id="R75068c1915e5460d"/>
   </p:sldMasterIdLst>
   <p:notesMasterIdLst>
-    <p:notesMasterId xmlns:r="http://schemas.openxmlformats.org/officeDocument/2006/relationships" r:id="R071e839c7eb34252"/>
+    <p:notesMasterId xmlns:r="http://schemas.openxmlformats.org/officeDocument/2006/relationships" r:id="R53f6ad45fe5f4e24"/>
   </p:notesMasterIdLst>
   <p:sldIdLst>
-    <p:sldId xmlns:r="http://schemas.openxmlformats.org/officeDocument/2006/relationships" id="256" r:id="Rbccfe001072c4479"/>
-    <p:sldId xmlns:r="http://schemas.openxmlformats.org/officeDocument/2006/relationships" id="257" r:id="R08e41f6390cb4eca"/>
-    <p:sldId xmlns:r="http://schemas.openxmlformats.org/officeDocument/2006/relationships" id="258" r:id="Rf378df2ebe9e4ea2"/>
-    <p:sldId xmlns:r="http://schemas.openxmlformats.org/officeDocument/2006/relationships" id="259" r:id="R296c29a2d44840b0"/>
-    <p:sldId xmlns:r="http://schemas.openxmlformats.org/officeDocument/2006/relationships" id="260" r:id="Rc2257fe1994d484d"/>
-    <p:sldId xmlns:r="http://schemas.openxmlformats.org/officeDocument/2006/relationships" id="261" r:id="R1a6c416faf8946f0"/>
-    <p:sldId xmlns:r="http://schemas.openxmlformats.org/officeDocument/2006/relationships" id="262" r:id="Re665722590c84823"/>
-    <p:sldId xmlns:r="http://schemas.openxmlformats.org/officeDocument/2006/relationships" id="263" r:id="Rd319c06b5e5c4b15"/>
-    <p:sldId xmlns:r="http://schemas.openxmlformats.org/officeDocument/2006/relationships" id="264" r:id="R7d8daf28ee7944f6"/>
+    <p:sldId xmlns:r="http://schemas.openxmlformats.org/officeDocument/2006/relationships" id="256" r:id="R61426e7fa3e845bd"/>
+    <p:sldId xmlns:r="http://schemas.openxmlformats.org/officeDocument/2006/relationships" id="257" r:id="Rbf55226d8b1e4b8f"/>
+    <p:sldId xmlns:r="http://schemas.openxmlformats.org/officeDocument/2006/relationships" id="258" r:id="R075637b44ce34827"/>
+    <p:sldId xmlns:r="http://schemas.openxmlformats.org/officeDocument/2006/relationships" id="259" r:id="Rafbe4dca2fa54a13"/>
+    <p:sldId xmlns:r="http://schemas.openxmlformats.org/officeDocument/2006/relationships" id="260" r:id="R0f1cd35069de424c"/>
+    <p:sldId xmlns:r="http://schemas.openxmlformats.org/officeDocument/2006/relationships" id="261" r:id="Rc9eb6d9fc87045a5"/>
+    <p:sldId xmlns:r="http://schemas.openxmlformats.org/officeDocument/2006/relationships" id="262" r:id="R175791b530724b78"/>
+    <p:sldId xmlns:r="http://schemas.openxmlformats.org/officeDocument/2006/relationships" id="263" r:id="Rf87f676c8ab54ac5"/>
+    <p:sldId xmlns:r="http://schemas.openxmlformats.org/officeDocument/2006/relationships" id="264" r:id="Rdbd8287508d542ca"/>
   </p:sldIdLst>
   <p:sldSz cx="12192000" cy="6858000"/>
   <p:notesSz cx="6858000" cy="9144000"/>
@@ -1137,7 +1137,7 @@
   </p:cSld>
   <p:clrMap bg1="lt1" tx1="dk1" bg2="lt2" tx2="dk2" accent1="accent1" accent2="accent2" accent3="accent3" accent4="accent4" accent5="accent5" accent6="accent6" hlink="hlink" folHlink="folHlink"/>
   <p:sldLayoutIdLst>
-    <p:sldLayoutId xmlns:r="http://schemas.openxmlformats.org/officeDocument/2006/relationships" id="2147483649" r:id="R7084cf4363c6481d"/>
+    <p:sldLayoutId xmlns:r="http://schemas.openxmlformats.org/officeDocument/2006/relationships" id="2147483649" r:id="Rfdc2a9f0196048f4"/>
   </p:sldLayoutIdLst>
   <p:txStyles>
     <p:titleStyle>
@@ -1688,7 +1688,7 @@
           <p:cNvPr id="1" name="">
             <a:extLst xmlns:a="http://schemas.openxmlformats.org/drawingml/2006/main">
               <a:ext uri="{FF2B5EF4-FFF2-40B4-BE49-F238E27FC236}">
-                <a16:creationId xmlns:a16="http://schemas.microsoft.com/office/drawing/2014/main" id="{84490A35-009F-4ADF-B39A-38740A856651}"/>
+                <a16:creationId xmlns:a16="http://schemas.microsoft.com/office/drawing/2014/main" id="{75E56073-67B5-479C-98A6-94484F97E0A8}"/>
               </a:ext>
             </a:extLst>
           </p:cNvPr>
@@ -1719,7 +1719,7 @@
           <p:cNvPr id="2" name="">
             <a:extLst xmlns:a="http://schemas.openxmlformats.org/drawingml/2006/main">
               <a:ext uri="{FF2B5EF4-FFF2-40B4-BE49-F238E27FC236}">
-                <a16:creationId xmlns:a16="http://schemas.microsoft.com/office/drawing/2014/main" id="{C2CED7F4-E3B2-4CD2-9200-076260C02F0E}"/>
+                <a16:creationId xmlns:a16="http://schemas.microsoft.com/office/drawing/2014/main" id="{5A7EC5D6-1A59-4C3A-B09D-224C07374064}"/>
               </a:ext>
             </a:extLst>
           </p:cNvPr>
@@ -1754,7 +1754,7 @@
           <p:nvPr/>
         </p:nvPicPr>
         <p:blipFill>
-          <a:blip xmlns:r="http://schemas.openxmlformats.org/officeDocument/2006/relationships" xmlns:a="http://schemas.openxmlformats.org/drawingml/2006/main" r:embed="Rfeb0aafd2fa8493b"/>
+          <a:blip xmlns:r="http://schemas.openxmlformats.org/officeDocument/2006/relationships" xmlns:a="http://schemas.openxmlformats.org/drawingml/2006/main" r:embed="Rccb0839927ad45fa"/>
           <a:stretch xmlns:a="http://schemas.openxmlformats.org/drawingml/2006/main"/>
         </p:blipFill>
         <p:spPr>
@@ -1772,7 +1772,7 @@
           <p:cNvPr id="4" name="">
             <a:extLst xmlns:a="http://schemas.openxmlformats.org/drawingml/2006/main">
               <a:ext uri="{FF2B5EF4-FFF2-40B4-BE49-F238E27FC236}">
-                <a16:creationId xmlns:a16="http://schemas.microsoft.com/office/drawing/2014/main" id="{D4E942E7-3D6F-40B8-8F7E-F1ABC39A1F1B}"/>
+                <a16:creationId xmlns:a16="http://schemas.microsoft.com/office/drawing/2014/main" id="{65F656AC-9EF6-4345-9626-5B99A6BC0CB1}"/>
               </a:ext>
             </a:extLst>
           </p:cNvPr>
@@ -1822,7 +1822,7 @@
           <p:cNvPr id="5" name="">
             <a:extLst xmlns:a="http://schemas.openxmlformats.org/drawingml/2006/main">
               <a:ext uri="{FF2B5EF4-FFF2-40B4-BE49-F238E27FC236}">
-                <a16:creationId xmlns:a16="http://schemas.microsoft.com/office/drawing/2014/main" id="{5FEBBF98-CFF0-4BEC-A577-E99A84A762DA}"/>
+                <a16:creationId xmlns:a16="http://schemas.microsoft.com/office/drawing/2014/main" id="{DF9E114C-8A02-4515-BAC1-12DDF461025B}"/>
               </a:ext>
             </a:extLst>
           </p:cNvPr>
@@ -1872,7 +1872,7 @@
           <p:cNvPr id="6" name="">
             <a:extLst xmlns:a="http://schemas.openxmlformats.org/drawingml/2006/main">
               <a:ext uri="{FF2B5EF4-FFF2-40B4-BE49-F238E27FC236}">
-                <a16:creationId xmlns:a16="http://schemas.microsoft.com/office/drawing/2014/main" id="{940DAEDC-833E-4D08-B028-C9F925EF13FE}"/>
+                <a16:creationId xmlns:a16="http://schemas.microsoft.com/office/drawing/2014/main" id="{62DBCAF9-F835-4092-9617-73EEF9498823}"/>
               </a:ext>
             </a:extLst>
           </p:cNvPr>
@@ -1922,7 +1922,7 @@
           <p:cNvPr id="7" name="">
             <a:extLst xmlns:a="http://schemas.openxmlformats.org/drawingml/2006/main">
               <a:ext uri="{FF2B5EF4-FFF2-40B4-BE49-F238E27FC236}">
-                <a16:creationId xmlns:a16="http://schemas.microsoft.com/office/drawing/2014/main" id="{FFFE912E-5494-499A-92FF-B9EE5DB0E2A4}"/>
+                <a16:creationId xmlns:a16="http://schemas.microsoft.com/office/drawing/2014/main" id="{DE90590F-99EF-4F8F-9F46-FC73CCB9DB64}"/>
               </a:ext>
             </a:extLst>
           </p:cNvPr>
@@ -1955,7 +1955,7 @@
           <p:cNvPr id="8" name="">
             <a:extLst xmlns:a="http://schemas.openxmlformats.org/drawingml/2006/main">
               <a:ext uri="{FF2B5EF4-FFF2-40B4-BE49-F238E27FC236}">
-                <a16:creationId xmlns:a16="http://schemas.microsoft.com/office/drawing/2014/main" id="{1CEEBC91-80CA-4B48-9661-B6C049886F82}"/>
+                <a16:creationId xmlns:a16="http://schemas.microsoft.com/office/drawing/2014/main" id="{56F8C0B7-A3C4-494A-ADEF-8D09C868CB5D}"/>
               </a:ext>
             </a:extLst>
           </p:cNvPr>
@@ -2005,7 +2005,7 @@
           <p:cNvPr id="9" name="">
             <a:extLst xmlns:a="http://schemas.openxmlformats.org/drawingml/2006/main">
               <a:ext uri="{FF2B5EF4-FFF2-40B4-BE49-F238E27FC236}">
-                <a16:creationId xmlns:a16="http://schemas.microsoft.com/office/drawing/2014/main" id="{3508C2F6-96A1-4658-B16F-D3BA41839347}"/>
+                <a16:creationId xmlns:a16="http://schemas.microsoft.com/office/drawing/2014/main" id="{1C62EB84-D88B-4093-B7E4-E2505C8A77E6}"/>
               </a:ext>
             </a:extLst>
           </p:cNvPr>
@@ -2055,7 +2055,7 @@
           <p:cNvPr id="10" name="">
             <a:extLst xmlns:a="http://schemas.openxmlformats.org/drawingml/2006/main">
               <a:ext uri="{FF2B5EF4-FFF2-40B4-BE49-F238E27FC236}">
-                <a16:creationId xmlns:a16="http://schemas.microsoft.com/office/drawing/2014/main" id="{67F65785-BBDB-4037-9779-50F2534635FC}"/>
+                <a16:creationId xmlns:a16="http://schemas.microsoft.com/office/drawing/2014/main" id="{1616B46B-75FD-4E3A-BF1B-E0F68EB48793}"/>
               </a:ext>
             </a:extLst>
           </p:cNvPr>
@@ -2088,7 +2088,7 @@
           <p:cNvPr id="11" name="">
             <a:extLst xmlns:a="http://schemas.openxmlformats.org/drawingml/2006/main">
               <a:ext uri="{FF2B5EF4-FFF2-40B4-BE49-F238E27FC236}">
-                <a16:creationId xmlns:a16="http://schemas.microsoft.com/office/drawing/2014/main" id="{E8C71717-316D-4C8C-9EA5-10EA27EDEA54}"/>
+                <a16:creationId xmlns:a16="http://schemas.microsoft.com/office/drawing/2014/main" id="{75711ED7-6B66-4E4A-9D38-75794CF350E9}"/>
               </a:ext>
             </a:extLst>
           </p:cNvPr>
@@ -2138,7 +2138,7 @@
           <p:cNvPr id="12" name="">
             <a:extLst xmlns:a="http://schemas.openxmlformats.org/drawingml/2006/main">
               <a:ext uri="{FF2B5EF4-FFF2-40B4-BE49-F238E27FC236}">
-                <a16:creationId xmlns:a16="http://schemas.microsoft.com/office/drawing/2014/main" id="{ACDA93B1-6DAD-4BE0-ACA3-C572EE4C68C7}"/>
+                <a16:creationId xmlns:a16="http://schemas.microsoft.com/office/drawing/2014/main" id="{533FF95B-5907-43D2-A473-B75E98ACC01E}"/>
               </a:ext>
             </a:extLst>
           </p:cNvPr>
@@ -2188,7 +2188,7 @@
           <p:cNvPr id="13" name="">
             <a:extLst xmlns:a="http://schemas.openxmlformats.org/drawingml/2006/main">
               <a:ext uri="{FF2B5EF4-FFF2-40B4-BE49-F238E27FC236}">
-                <a16:creationId xmlns:a16="http://schemas.microsoft.com/office/drawing/2014/main" id="{AB032D80-C470-426A-BC3D-05BB15450304}"/>
+                <a16:creationId xmlns:a16="http://schemas.microsoft.com/office/drawing/2014/main" id="{D965EBED-FCAB-462C-9826-AB6C67A312CC}"/>
               </a:ext>
             </a:extLst>
           </p:cNvPr>
@@ -2242,7 +2242,7 @@
           <p:nvPr/>
         </p:nvPicPr>
         <p:blipFill>
-          <a:blip xmlns:r="http://schemas.openxmlformats.org/officeDocument/2006/relationships" xmlns:a="http://schemas.openxmlformats.org/drawingml/2006/main" r:embed="Re993176abfbf4959"/>
+          <a:blip xmlns:r="http://schemas.openxmlformats.org/officeDocument/2006/relationships" xmlns:a="http://schemas.openxmlformats.org/drawingml/2006/main" r:embed="R20fb43df97f246a2"/>
           <a:srcRect xmlns:a="http://schemas.openxmlformats.org/drawingml/2006/main" l="5453" t="0" r="5453" b="0"/>
           <a:stretch xmlns:a="http://schemas.openxmlformats.org/drawingml/2006/main">
             <a:fillRect l="0" t="0" r="0" b="0"/>
@@ -2263,7 +2263,7 @@
           <p:cNvPr id="15" name="">
             <a:extLst xmlns:a="http://schemas.openxmlformats.org/drawingml/2006/main">
               <a:ext uri="{FF2B5EF4-FFF2-40B4-BE49-F238E27FC236}">
-                <a16:creationId xmlns:a16="http://schemas.microsoft.com/office/drawing/2014/main" id="{96A8D3B0-A70F-48AA-A45A-65CEC5ED6337}"/>
+                <a16:creationId xmlns:a16="http://schemas.microsoft.com/office/drawing/2014/main" id="{F2D2B97B-600F-4E3D-A68C-8C9A3A7550CF}"/>
               </a:ext>
             </a:extLst>
           </p:cNvPr>
@@ -2294,7 +2294,7 @@
           <p:cNvPr id="16" name="">
             <a:extLst xmlns:a="http://schemas.openxmlformats.org/drawingml/2006/main">
               <a:ext uri="{FF2B5EF4-FFF2-40B4-BE49-F238E27FC236}">
-                <a16:creationId xmlns:a16="http://schemas.microsoft.com/office/drawing/2014/main" id="{BF20CB19-EBC2-40FD-A20C-1211A5982A1E}"/>
+                <a16:creationId xmlns:a16="http://schemas.microsoft.com/office/drawing/2014/main" id="{19B527BC-94F0-4137-8D41-F647973811AE}"/>
               </a:ext>
             </a:extLst>
           </p:cNvPr>
@@ -2342,7 +2342,7 @@
     </p:spTree>
     <p:extLst>
       <p:ext uri="{BB962C8B-B14F-4D97-AF65-F5344CB8AC3E}">
-        <p14:creationId xmlns:p14="http://schemas.microsoft.com/office/powerpoint/2010/main" val="2060713028"/>
+        <p14:creationId xmlns:p14="http://schemas.microsoft.com/office/powerpoint/2010/main" val="1731201360"/>
       </p:ext>
     </p:extLst>
   </p:cSld>
@@ -2373,7 +2373,7 @@
           <p:cNvPr id="1" name="">
             <a:extLst xmlns:a="http://schemas.openxmlformats.org/drawingml/2006/main">
               <a:ext uri="{FF2B5EF4-FFF2-40B4-BE49-F238E27FC236}">
-                <a16:creationId xmlns:a16="http://schemas.microsoft.com/office/drawing/2014/main" id="{4E1D6F2E-6856-4056-94A0-54D27996997E}"/>
+                <a16:creationId xmlns:a16="http://schemas.microsoft.com/office/drawing/2014/main" id="{E3E8ED8B-4D55-4E0D-A90B-091E24C491CF}"/>
               </a:ext>
             </a:extLst>
           </p:cNvPr>
@@ -2408,7 +2408,7 @@
           <p:nvPr/>
         </p:nvPicPr>
         <p:blipFill>
-          <a:blip xmlns:r="http://schemas.openxmlformats.org/officeDocument/2006/relationships" xmlns:a="http://schemas.openxmlformats.org/drawingml/2006/main" r:embed="R234c230a33eb4a4d"/>
+          <a:blip xmlns:r="http://schemas.openxmlformats.org/officeDocument/2006/relationships" xmlns:a="http://schemas.openxmlformats.org/drawingml/2006/main" r:embed="R5be8e0c9e5864056"/>
           <a:stretch xmlns:a="http://schemas.openxmlformats.org/drawingml/2006/main"/>
         </p:blipFill>
         <p:spPr>
@@ -2426,7 +2426,7 @@
           <p:cNvPr id="3" name="">
             <a:extLst xmlns:a="http://schemas.openxmlformats.org/drawingml/2006/main">
               <a:ext uri="{FF2B5EF4-FFF2-40B4-BE49-F238E27FC236}">
-                <a16:creationId xmlns:a16="http://schemas.microsoft.com/office/drawing/2014/main" id="{B3A8ACB2-D9C5-48A8-AB8D-A274ED5981F7}"/>
+                <a16:creationId xmlns:a16="http://schemas.microsoft.com/office/drawing/2014/main" id="{C4D3DC13-48E1-42A0-B9E4-8E9637B5E735}"/>
               </a:ext>
             </a:extLst>
           </p:cNvPr>
@@ -2476,7 +2476,7 @@
           <p:cNvPr id="4" name="">
             <a:extLst xmlns:a="http://schemas.openxmlformats.org/drawingml/2006/main">
               <a:ext uri="{FF2B5EF4-FFF2-40B4-BE49-F238E27FC236}">
-                <a16:creationId xmlns:a16="http://schemas.microsoft.com/office/drawing/2014/main" id="{67EF9ECE-0F13-4556-A2BB-522F5C34075C}"/>
+                <a16:creationId xmlns:a16="http://schemas.microsoft.com/office/drawing/2014/main" id="{A48748C5-4B5B-4636-9AD1-440799C3EF83}"/>
               </a:ext>
             </a:extLst>
           </p:cNvPr>
@@ -2509,7 +2509,7 @@
           <p:cNvPr id="5" name="">
             <a:extLst xmlns:a="http://schemas.openxmlformats.org/drawingml/2006/main">
               <a:ext uri="{FF2B5EF4-FFF2-40B4-BE49-F238E27FC236}">
-                <a16:creationId xmlns:a16="http://schemas.microsoft.com/office/drawing/2014/main" id="{73445BB9-BFA0-4A1D-AB58-9C457F9F1D95}"/>
+                <a16:creationId xmlns:a16="http://schemas.microsoft.com/office/drawing/2014/main" id="{FA7A4CDF-9578-4705-A743-25418E4D7CCD}"/>
               </a:ext>
             </a:extLst>
           </p:cNvPr>
@@ -2540,7 +2540,7 @@
           <p:cNvPr id="6" name="">
             <a:extLst xmlns:a="http://schemas.openxmlformats.org/drawingml/2006/main">
               <a:ext uri="{FF2B5EF4-FFF2-40B4-BE49-F238E27FC236}">
-                <a16:creationId xmlns:a16="http://schemas.microsoft.com/office/drawing/2014/main" id="{CEAFBF84-DBE1-40FE-B4F4-29602198B10D}"/>
+                <a16:creationId xmlns:a16="http://schemas.microsoft.com/office/drawing/2014/main" id="{85F9DCE1-74E6-43EB-B5B0-42F937575528}"/>
               </a:ext>
             </a:extLst>
           </p:cNvPr>
@@ -2590,7 +2590,7 @@
           <p:cNvPr id="7" name="">
             <a:extLst xmlns:a="http://schemas.openxmlformats.org/drawingml/2006/main">
               <a:ext uri="{FF2B5EF4-FFF2-40B4-BE49-F238E27FC236}">
-                <a16:creationId xmlns:a16="http://schemas.microsoft.com/office/drawing/2014/main" id="{2EE34B64-A40B-41F8-B622-7CC6E04D3EFE}"/>
+                <a16:creationId xmlns:a16="http://schemas.microsoft.com/office/drawing/2014/main" id="{7153451F-198B-4BC9-9D72-0B6E1D3E0485}"/>
               </a:ext>
             </a:extLst>
           </p:cNvPr>
@@ -2640,7 +2640,7 @@
           <p:cNvPr id="8" name="">
             <a:extLst xmlns:a="http://schemas.openxmlformats.org/drawingml/2006/main">
               <a:ext uri="{FF2B5EF4-FFF2-40B4-BE49-F238E27FC236}">
-                <a16:creationId xmlns:a16="http://schemas.microsoft.com/office/drawing/2014/main" id="{756B3AEE-4BFA-4C17-A4FA-8F5EC853E608}"/>
+                <a16:creationId xmlns:a16="http://schemas.microsoft.com/office/drawing/2014/main" id="{8E350708-3CDE-44B4-B9B6-7FBEB69F10F5}"/>
               </a:ext>
             </a:extLst>
           </p:cNvPr>
@@ -2690,7 +2690,7 @@
           <p:cNvPr id="9" name="">
             <a:extLst xmlns:a="http://schemas.openxmlformats.org/drawingml/2006/main">
               <a:ext uri="{FF2B5EF4-FFF2-40B4-BE49-F238E27FC236}">
-                <a16:creationId xmlns:a16="http://schemas.microsoft.com/office/drawing/2014/main" id="{68716AFC-7B6E-49D0-989D-EC135159BEEE}"/>
+                <a16:creationId xmlns:a16="http://schemas.microsoft.com/office/drawing/2014/main" id="{9C791ED1-3269-4975-B01D-005915A83F6D}"/>
               </a:ext>
             </a:extLst>
           </p:cNvPr>
@@ -2740,7 +2740,7 @@
           <p:cNvPr id="10" name="">
             <a:extLst xmlns:a="http://schemas.openxmlformats.org/drawingml/2006/main">
               <a:ext uri="{FF2B5EF4-FFF2-40B4-BE49-F238E27FC236}">
-                <a16:creationId xmlns:a16="http://schemas.microsoft.com/office/drawing/2014/main" id="{DA4E9B05-AB41-4411-BC37-21C68E6887F5}"/>
+                <a16:creationId xmlns:a16="http://schemas.microsoft.com/office/drawing/2014/main" id="{2E83D7AA-1421-4433-B5ED-6EDD28520F7F}"/>
               </a:ext>
             </a:extLst>
           </p:cNvPr>
@@ -2790,7 +2790,7 @@
           <p:cNvPr id="11" name="">
             <a:extLst xmlns:a="http://schemas.openxmlformats.org/drawingml/2006/main">
               <a:ext uri="{FF2B5EF4-FFF2-40B4-BE49-F238E27FC236}">
-                <a16:creationId xmlns:a16="http://schemas.microsoft.com/office/drawing/2014/main" id="{67451097-39EE-43D6-B476-BAF1B154A233}"/>
+                <a16:creationId xmlns:a16="http://schemas.microsoft.com/office/drawing/2014/main" id="{A6AE3351-1FCF-42BF-99B0-FAE2FF8A0D04}"/>
               </a:ext>
             </a:extLst>
           </p:cNvPr>
@@ -2830,7 +2830,7 @@
                   <a:srgbClr val="161616"/>
                 </a:solidFill>
               </a:rPr>
-              <a:t>2019</a:t>
+              <a:t>2020</a:t>
             </a:r>
           </a:p>
         </p:txBody>
@@ -2840,7 +2840,7 @@
           <p:cNvPr id="12" name="">
             <a:extLst xmlns:a="http://schemas.openxmlformats.org/drawingml/2006/main">
               <a:ext uri="{FF2B5EF4-FFF2-40B4-BE49-F238E27FC236}">
-                <a16:creationId xmlns:a16="http://schemas.microsoft.com/office/drawing/2014/main" id="{4C421D04-5822-4D1C-ADA6-BE7477BDD0F4}"/>
+                <a16:creationId xmlns:a16="http://schemas.microsoft.com/office/drawing/2014/main" id="{7EE94F35-3121-4CF0-90FA-88164460C3E8}"/>
               </a:ext>
             </a:extLst>
           </p:cNvPr>
@@ -2890,7 +2890,7 @@
           <p:cNvPr id="13" name="">
             <a:extLst xmlns:a="http://schemas.openxmlformats.org/drawingml/2006/main">
               <a:ext uri="{FF2B5EF4-FFF2-40B4-BE49-F238E27FC236}">
-                <a16:creationId xmlns:a16="http://schemas.microsoft.com/office/drawing/2014/main" id="{5B8C7915-A91C-41F1-AC2F-FE686FD5A56B}"/>
+                <a16:creationId xmlns:a16="http://schemas.microsoft.com/office/drawing/2014/main" id="{18736DD1-9C37-45CC-85BF-F3ED245EF8F1}"/>
               </a:ext>
             </a:extLst>
           </p:cNvPr>
@@ -2940,7 +2940,7 @@
           <p:cNvPr id="14" name="">
             <a:extLst xmlns:a="http://schemas.openxmlformats.org/drawingml/2006/main">
               <a:ext uri="{FF2B5EF4-FFF2-40B4-BE49-F238E27FC236}">
-                <a16:creationId xmlns:a16="http://schemas.microsoft.com/office/drawing/2014/main" id="{305A5153-123D-4B54-8EBB-F7B3698D0877}"/>
+                <a16:creationId xmlns:a16="http://schemas.microsoft.com/office/drawing/2014/main" id="{4739F3AC-CC3F-408D-915E-C56E0F0A996D}"/>
               </a:ext>
             </a:extLst>
           </p:cNvPr>
@@ -2980,7 +2980,7 @@
                   <a:srgbClr val="667085"/>
                 </a:solidFill>
               </a:rPr>
-              <a:t>крупных ИТ-проектов</a:t>
+              <a:t>крупных проектов</a:t>
             </a:r>
           </a:p>
         </p:txBody>
@@ -2990,7 +2990,7 @@
           <p:cNvPr id="15" name="">
             <a:extLst xmlns:a="http://schemas.openxmlformats.org/drawingml/2006/main">
               <a:ext uri="{FF2B5EF4-FFF2-40B4-BE49-F238E27FC236}">
-                <a16:creationId xmlns:a16="http://schemas.microsoft.com/office/drawing/2014/main" id="{62975D6D-990D-4688-9D2A-586FECA11C03}"/>
+                <a16:creationId xmlns:a16="http://schemas.microsoft.com/office/drawing/2014/main" id="{11041C32-C09D-48CC-935A-AE558A757B30}"/>
               </a:ext>
             </a:extLst>
           </p:cNvPr>
@@ -3040,7 +3040,7 @@
           <p:cNvPr id="16" name="">
             <a:extLst xmlns:a="http://schemas.openxmlformats.org/drawingml/2006/main">
               <a:ext uri="{FF2B5EF4-FFF2-40B4-BE49-F238E27FC236}">
-                <a16:creationId xmlns:a16="http://schemas.microsoft.com/office/drawing/2014/main" id="{A541E1B2-E9C5-4C36-9454-85D2DEE28D48}"/>
+                <a16:creationId xmlns:a16="http://schemas.microsoft.com/office/drawing/2014/main" id="{26995863-116E-4582-874F-F098282A51DF}"/>
               </a:ext>
             </a:extLst>
           </p:cNvPr>
@@ -3090,7 +3090,7 @@
           <p:cNvPr id="17" name="">
             <a:extLst xmlns:a="http://schemas.openxmlformats.org/drawingml/2006/main">
               <a:ext uri="{FF2B5EF4-FFF2-40B4-BE49-F238E27FC236}">
-                <a16:creationId xmlns:a16="http://schemas.microsoft.com/office/drawing/2014/main" id="{8F541A74-9BFE-45B9-A5EC-3D08D63B742C}"/>
+                <a16:creationId xmlns:a16="http://schemas.microsoft.com/office/drawing/2014/main" id="{9004027D-23C7-4A13-83BB-059C99C71007}"/>
               </a:ext>
             </a:extLst>
           </p:cNvPr>
@@ -3125,7 +3125,7 @@
           <p:cNvPr id="18" name="">
             <a:extLst xmlns:a="http://schemas.openxmlformats.org/drawingml/2006/main">
               <a:ext uri="{FF2B5EF4-FFF2-40B4-BE49-F238E27FC236}">
-                <a16:creationId xmlns:a16="http://schemas.microsoft.com/office/drawing/2014/main" id="{EABAB432-35CC-4D72-9982-069CF7510442}"/>
+                <a16:creationId xmlns:a16="http://schemas.microsoft.com/office/drawing/2014/main" id="{6012C107-1CD0-4771-8724-8F6E802C51D1}"/>
               </a:ext>
             </a:extLst>
           </p:cNvPr>
@@ -3175,7 +3175,7 @@
           <p:cNvPr id="19" name="">
             <a:extLst xmlns:a="http://schemas.openxmlformats.org/drawingml/2006/main">
               <a:ext uri="{FF2B5EF4-FFF2-40B4-BE49-F238E27FC236}">
-                <a16:creationId xmlns:a16="http://schemas.microsoft.com/office/drawing/2014/main" id="{A5F51FA6-E1F3-4693-B337-C2BAD2FE7ECF}"/>
+                <a16:creationId xmlns:a16="http://schemas.microsoft.com/office/drawing/2014/main" id="{2A407A83-AE28-4CBC-B35F-4FF315B3ADE3}"/>
               </a:ext>
             </a:extLst>
           </p:cNvPr>
@@ -3225,7 +3225,7 @@
           <p:cNvPr id="20" name="">
             <a:extLst xmlns:a="http://schemas.openxmlformats.org/drawingml/2006/main">
               <a:ext uri="{FF2B5EF4-FFF2-40B4-BE49-F238E27FC236}">
-                <a16:creationId xmlns:a16="http://schemas.microsoft.com/office/drawing/2014/main" id="{6B579094-DBD3-49AE-8FDD-2F3B593791EF}"/>
+                <a16:creationId xmlns:a16="http://schemas.microsoft.com/office/drawing/2014/main" id="{42BB2D63-EA61-46CB-9808-A12CE1C52F7B}"/>
               </a:ext>
             </a:extLst>
           </p:cNvPr>
@@ -3275,7 +3275,7 @@
           <p:cNvPr id="21" name="">
             <a:extLst xmlns:a="http://schemas.openxmlformats.org/drawingml/2006/main">
               <a:ext uri="{FF2B5EF4-FFF2-40B4-BE49-F238E27FC236}">
-                <a16:creationId xmlns:a16="http://schemas.microsoft.com/office/drawing/2014/main" id="{5A4ADAC3-24F9-4F79-86E0-0A6B48610ED6}"/>
+                <a16:creationId xmlns:a16="http://schemas.microsoft.com/office/drawing/2014/main" id="{3854CDC7-D193-4698-8A6E-2906CDA019F3}"/>
               </a:ext>
             </a:extLst>
           </p:cNvPr>
@@ -3325,7 +3325,7 @@
           <p:cNvPr id="22" name="">
             <a:extLst xmlns:a="http://schemas.openxmlformats.org/drawingml/2006/main">
               <a:ext uri="{FF2B5EF4-FFF2-40B4-BE49-F238E27FC236}">
-                <a16:creationId xmlns:a16="http://schemas.microsoft.com/office/drawing/2014/main" id="{7954A335-D17F-485F-88AE-8CDF0F012C43}"/>
+                <a16:creationId xmlns:a16="http://schemas.microsoft.com/office/drawing/2014/main" id="{E0473C83-1778-436A-80BE-2DF5DA9B3D9B}"/>
               </a:ext>
             </a:extLst>
           </p:cNvPr>
@@ -3356,7 +3356,7 @@
           <p:cNvPr id="23" name="">
             <a:extLst xmlns:a="http://schemas.openxmlformats.org/drawingml/2006/main">
               <a:ext uri="{FF2B5EF4-FFF2-40B4-BE49-F238E27FC236}">
-                <a16:creationId xmlns:a16="http://schemas.microsoft.com/office/drawing/2014/main" id="{B7E97CA7-EC82-45D7-BBD2-A050E63A5E4C}"/>
+                <a16:creationId xmlns:a16="http://schemas.microsoft.com/office/drawing/2014/main" id="{17C01B43-84F1-4E8B-8F41-339C0BBE9002}"/>
               </a:ext>
             </a:extLst>
           </p:cNvPr>
@@ -3406,7 +3406,7 @@
           <p:cNvPr id="24" name="">
             <a:extLst xmlns:a="http://schemas.openxmlformats.org/drawingml/2006/main">
               <a:ext uri="{FF2B5EF4-FFF2-40B4-BE49-F238E27FC236}">
-                <a16:creationId xmlns:a16="http://schemas.microsoft.com/office/drawing/2014/main" id="{3BDC8802-0D3F-4F20-8D66-1D14BAE0FD97}"/>
+                <a16:creationId xmlns:a16="http://schemas.microsoft.com/office/drawing/2014/main" id="{C5810877-6E2B-4D0D-9BDE-C9E6F67689EE}"/>
               </a:ext>
             </a:extLst>
           </p:cNvPr>
@@ -3456,7 +3456,7 @@
           <p:cNvPr id="25" name="">
             <a:extLst xmlns:a="http://schemas.openxmlformats.org/drawingml/2006/main">
               <a:ext uri="{FF2B5EF4-FFF2-40B4-BE49-F238E27FC236}">
-                <a16:creationId xmlns:a16="http://schemas.microsoft.com/office/drawing/2014/main" id="{9FC239C3-14AE-4B17-B0EF-2DBD175003F5}"/>
+                <a16:creationId xmlns:a16="http://schemas.microsoft.com/office/drawing/2014/main" id="{36094F7E-D7F9-4262-A460-D26E217A27B8}"/>
               </a:ext>
             </a:extLst>
           </p:cNvPr>
@@ -3506,7 +3506,7 @@
           <p:cNvPr id="26" name="">
             <a:extLst xmlns:a="http://schemas.openxmlformats.org/drawingml/2006/main">
               <a:ext uri="{FF2B5EF4-FFF2-40B4-BE49-F238E27FC236}">
-                <a16:creationId xmlns:a16="http://schemas.microsoft.com/office/drawing/2014/main" id="{FFAA03EC-F2DC-4B37-A3DB-03943DD57A98}"/>
+                <a16:creationId xmlns:a16="http://schemas.microsoft.com/office/drawing/2014/main" id="{67821A77-BA90-4138-A842-3427737444E4}"/>
               </a:ext>
             </a:extLst>
           </p:cNvPr>
@@ -3537,7 +3537,7 @@
           <p:cNvPr id="27" name="">
             <a:extLst xmlns:a="http://schemas.openxmlformats.org/drawingml/2006/main">
               <a:ext uri="{FF2B5EF4-FFF2-40B4-BE49-F238E27FC236}">
-                <a16:creationId xmlns:a16="http://schemas.microsoft.com/office/drawing/2014/main" id="{0333D535-A7C6-4652-A635-4808339F4BBB}"/>
+                <a16:creationId xmlns:a16="http://schemas.microsoft.com/office/drawing/2014/main" id="{4DBF571B-4ECB-4DC8-BF53-EF475806A2D1}"/>
               </a:ext>
             </a:extLst>
           </p:cNvPr>
@@ -3587,7 +3587,7 @@
           <p:cNvPr id="28" name="">
             <a:extLst xmlns:a="http://schemas.openxmlformats.org/drawingml/2006/main">
               <a:ext uri="{FF2B5EF4-FFF2-40B4-BE49-F238E27FC236}">
-                <a16:creationId xmlns:a16="http://schemas.microsoft.com/office/drawing/2014/main" id="{1FD07A0E-ABBA-4FB3-9112-960CD49249C1}"/>
+                <a16:creationId xmlns:a16="http://schemas.microsoft.com/office/drawing/2014/main" id="{6216432A-2722-4B98-88FF-F751F518278A}"/>
               </a:ext>
             </a:extLst>
           </p:cNvPr>
@@ -3637,7 +3637,7 @@
           <p:cNvPr id="29" name="">
             <a:extLst xmlns:a="http://schemas.openxmlformats.org/drawingml/2006/main">
               <a:ext uri="{FF2B5EF4-FFF2-40B4-BE49-F238E27FC236}">
-                <a16:creationId xmlns:a16="http://schemas.microsoft.com/office/drawing/2014/main" id="{37FDD083-4195-4304-8AE5-87E9AFA834F2}"/>
+                <a16:creationId xmlns:a16="http://schemas.microsoft.com/office/drawing/2014/main" id="{83952712-C6F8-4546-9D72-47456E1679DF}"/>
               </a:ext>
             </a:extLst>
           </p:cNvPr>
@@ -3687,7 +3687,7 @@
           <p:cNvPr id="30" name="">
             <a:extLst xmlns:a="http://schemas.openxmlformats.org/drawingml/2006/main">
               <a:ext uri="{FF2B5EF4-FFF2-40B4-BE49-F238E27FC236}">
-                <a16:creationId xmlns:a16="http://schemas.microsoft.com/office/drawing/2014/main" id="{1DB77C50-1195-452B-8BAF-66D624269C94}"/>
+                <a16:creationId xmlns:a16="http://schemas.microsoft.com/office/drawing/2014/main" id="{13D515DB-1F87-4014-AD9B-62012978687F}"/>
               </a:ext>
             </a:extLst>
           </p:cNvPr>
@@ -3718,7 +3718,7 @@
           <p:cNvPr id="31" name="">
             <a:extLst xmlns:a="http://schemas.openxmlformats.org/drawingml/2006/main">
               <a:ext uri="{FF2B5EF4-FFF2-40B4-BE49-F238E27FC236}">
-                <a16:creationId xmlns:a16="http://schemas.microsoft.com/office/drawing/2014/main" id="{46D06045-6BE7-405E-991F-BFA798C9E3CE}"/>
+                <a16:creationId xmlns:a16="http://schemas.microsoft.com/office/drawing/2014/main" id="{87694CE1-0F8F-4FF6-93BA-7B44801D853B}"/>
               </a:ext>
             </a:extLst>
           </p:cNvPr>
@@ -3768,7 +3768,7 @@
           <p:cNvPr id="32" name="">
             <a:extLst xmlns:a="http://schemas.openxmlformats.org/drawingml/2006/main">
               <a:ext uri="{FF2B5EF4-FFF2-40B4-BE49-F238E27FC236}">
-                <a16:creationId xmlns:a16="http://schemas.microsoft.com/office/drawing/2014/main" id="{64BA67D0-CEA7-4D42-91F2-3B8A77E5830D}"/>
+                <a16:creationId xmlns:a16="http://schemas.microsoft.com/office/drawing/2014/main" id="{EF07D124-9FFB-4D77-A6B6-C316BE6A4320}"/>
               </a:ext>
             </a:extLst>
           </p:cNvPr>
@@ -3818,7 +3818,7 @@
           <p:cNvPr id="33" name="">
             <a:extLst xmlns:a="http://schemas.openxmlformats.org/drawingml/2006/main">
               <a:ext uri="{FF2B5EF4-FFF2-40B4-BE49-F238E27FC236}">
-                <a16:creationId xmlns:a16="http://schemas.microsoft.com/office/drawing/2014/main" id="{8B149757-9423-40D3-BA6E-BC66749ADB54}"/>
+                <a16:creationId xmlns:a16="http://schemas.microsoft.com/office/drawing/2014/main" id="{49911D75-B6B3-4091-9EF4-3AF385F0AB45}"/>
               </a:ext>
             </a:extLst>
           </p:cNvPr>
@@ -3866,7 +3866,7 @@
     </p:spTree>
     <p:extLst>
       <p:ext uri="{BB962C8B-B14F-4D97-AF65-F5344CB8AC3E}">
-        <p14:creationId xmlns:p14="http://schemas.microsoft.com/office/powerpoint/2010/main" val="1531571721"/>
+        <p14:creationId xmlns:p14="http://schemas.microsoft.com/office/powerpoint/2010/main" val="183752776"/>
       </p:ext>
     </p:extLst>
   </p:cSld>
@@ -3897,7 +3897,7 @@
           <p:cNvPr id="1" name="">
             <a:extLst xmlns:a="http://schemas.openxmlformats.org/drawingml/2006/main">
               <a:ext uri="{FF2B5EF4-FFF2-40B4-BE49-F238E27FC236}">
-                <a16:creationId xmlns:a16="http://schemas.microsoft.com/office/drawing/2014/main" id="{CC7660BA-A441-4A58-A78C-A16F80B2DBA2}"/>
+                <a16:creationId xmlns:a16="http://schemas.microsoft.com/office/drawing/2014/main" id="{6D0910FD-5EA6-41E2-957A-A28CE52B8601}"/>
               </a:ext>
             </a:extLst>
           </p:cNvPr>
@@ -3932,7 +3932,7 @@
           <p:nvPr/>
         </p:nvPicPr>
         <p:blipFill>
-          <a:blip xmlns:r="http://schemas.openxmlformats.org/officeDocument/2006/relationships" xmlns:a="http://schemas.openxmlformats.org/drawingml/2006/main" r:embed="R3b621757138447d6"/>
+          <a:blip xmlns:r="http://schemas.openxmlformats.org/officeDocument/2006/relationships" xmlns:a="http://schemas.openxmlformats.org/drawingml/2006/main" r:embed="R9ef4c897b92a41b7"/>
           <a:stretch xmlns:a="http://schemas.openxmlformats.org/drawingml/2006/main"/>
         </p:blipFill>
         <p:spPr>
@@ -3950,7 +3950,7 @@
           <p:cNvPr id="3" name="">
             <a:extLst xmlns:a="http://schemas.openxmlformats.org/drawingml/2006/main">
               <a:ext uri="{FF2B5EF4-FFF2-40B4-BE49-F238E27FC236}">
-                <a16:creationId xmlns:a16="http://schemas.microsoft.com/office/drawing/2014/main" id="{33167174-D258-4058-8AE1-5F9750F95C78}"/>
+                <a16:creationId xmlns:a16="http://schemas.microsoft.com/office/drawing/2014/main" id="{81C660C3-5E92-4504-BD33-5333D2CE5DD9}"/>
               </a:ext>
             </a:extLst>
           </p:cNvPr>
@@ -4000,7 +4000,7 @@
           <p:cNvPr id="4" name="">
             <a:extLst xmlns:a="http://schemas.openxmlformats.org/drawingml/2006/main">
               <a:ext uri="{FF2B5EF4-FFF2-40B4-BE49-F238E27FC236}">
-                <a16:creationId xmlns:a16="http://schemas.microsoft.com/office/drawing/2014/main" id="{81345AED-713A-4A11-AB57-89D1CC2BE4F4}"/>
+                <a16:creationId xmlns:a16="http://schemas.microsoft.com/office/drawing/2014/main" id="{0CE2C098-5812-47ED-8ED8-881F6A4EE8BE}"/>
               </a:ext>
             </a:extLst>
           </p:cNvPr>
@@ -4033,7 +4033,7 @@
           <p:cNvPr id="5" name="">
             <a:extLst xmlns:a="http://schemas.openxmlformats.org/drawingml/2006/main">
               <a:ext uri="{FF2B5EF4-FFF2-40B4-BE49-F238E27FC236}">
-                <a16:creationId xmlns:a16="http://schemas.microsoft.com/office/drawing/2014/main" id="{75B1946A-CA93-45AF-8DB9-581162F9FC6B}"/>
+                <a16:creationId xmlns:a16="http://schemas.microsoft.com/office/drawing/2014/main" id="{F93669C3-7F44-4437-A2D0-773EFBFAD0CC}"/>
               </a:ext>
             </a:extLst>
           </p:cNvPr>
@@ -4064,7 +4064,7 @@
           <p:cNvPr id="6" name="">
             <a:extLst xmlns:a="http://schemas.openxmlformats.org/drawingml/2006/main">
               <a:ext uri="{FF2B5EF4-FFF2-40B4-BE49-F238E27FC236}">
-                <a16:creationId xmlns:a16="http://schemas.microsoft.com/office/drawing/2014/main" id="{1EC5C248-E334-4F19-B39C-C5676230AEE6}"/>
+                <a16:creationId xmlns:a16="http://schemas.microsoft.com/office/drawing/2014/main" id="{5D03AEE5-B623-4E2B-A0DE-10D72BF76868}"/>
               </a:ext>
             </a:extLst>
           </p:cNvPr>
@@ -4114,7 +4114,7 @@
           <p:cNvPr id="7" name="">
             <a:extLst xmlns:a="http://schemas.openxmlformats.org/drawingml/2006/main">
               <a:ext uri="{FF2B5EF4-FFF2-40B4-BE49-F238E27FC236}">
-                <a16:creationId xmlns:a16="http://schemas.microsoft.com/office/drawing/2014/main" id="{D998A00E-6E8E-42DC-AB55-68AA6B4E5D3B}"/>
+                <a16:creationId xmlns:a16="http://schemas.microsoft.com/office/drawing/2014/main" id="{FE351D43-EDE8-4DC3-AD31-3C49F39A8F5A}"/>
               </a:ext>
             </a:extLst>
           </p:cNvPr>
@@ -4164,7 +4164,7 @@
           <p:cNvPr id="8" name="">
             <a:extLst xmlns:a="http://schemas.openxmlformats.org/drawingml/2006/main">
               <a:ext uri="{FF2B5EF4-FFF2-40B4-BE49-F238E27FC236}">
-                <a16:creationId xmlns:a16="http://schemas.microsoft.com/office/drawing/2014/main" id="{7ED9EA0C-D90B-43BE-8354-517F15FDCABE}"/>
+                <a16:creationId xmlns:a16="http://schemas.microsoft.com/office/drawing/2014/main" id="{25646449-E113-452C-AB9B-F96BDF4B8759}"/>
               </a:ext>
             </a:extLst>
           </p:cNvPr>
@@ -4214,7 +4214,7 @@
           <p:cNvPr id="9" name="">
             <a:extLst xmlns:a="http://schemas.openxmlformats.org/drawingml/2006/main">
               <a:ext uri="{FF2B5EF4-FFF2-40B4-BE49-F238E27FC236}">
-                <a16:creationId xmlns:a16="http://schemas.microsoft.com/office/drawing/2014/main" id="{7A6CACFC-BA0F-4027-92A1-9EFDF8222A7C}"/>
+                <a16:creationId xmlns:a16="http://schemas.microsoft.com/office/drawing/2014/main" id="{CFFB3179-7D44-47BB-A77E-7870394D07D6}"/>
               </a:ext>
             </a:extLst>
           </p:cNvPr>
@@ -4264,7 +4264,7 @@
           <p:cNvPr id="10" name="">
             <a:extLst xmlns:a="http://schemas.openxmlformats.org/drawingml/2006/main">
               <a:ext uri="{FF2B5EF4-FFF2-40B4-BE49-F238E27FC236}">
-                <a16:creationId xmlns:a16="http://schemas.microsoft.com/office/drawing/2014/main" id="{68CA1CF4-771F-427B-B6C1-6BA4589097E6}"/>
+                <a16:creationId xmlns:a16="http://schemas.microsoft.com/office/drawing/2014/main" id="{4F9F0161-0B48-4027-A8FF-6B005A9BDE8E}"/>
               </a:ext>
             </a:extLst>
           </p:cNvPr>
@@ -4314,7 +4314,7 @@
           <p:cNvPr id="11" name="">
             <a:extLst xmlns:a="http://schemas.openxmlformats.org/drawingml/2006/main">
               <a:ext uri="{FF2B5EF4-FFF2-40B4-BE49-F238E27FC236}">
-                <a16:creationId xmlns:a16="http://schemas.microsoft.com/office/drawing/2014/main" id="{E412BAB7-A363-4058-803C-C90079BEFAF1}"/>
+                <a16:creationId xmlns:a16="http://schemas.microsoft.com/office/drawing/2014/main" id="{81E9D4E0-420D-42A7-82FF-69DE1D45F882}"/>
               </a:ext>
             </a:extLst>
           </p:cNvPr>
@@ -4345,7 +4345,7 @@
           <p:cNvPr id="12" name="">
             <a:extLst xmlns:a="http://schemas.openxmlformats.org/drawingml/2006/main">
               <a:ext uri="{FF2B5EF4-FFF2-40B4-BE49-F238E27FC236}">
-                <a16:creationId xmlns:a16="http://schemas.microsoft.com/office/drawing/2014/main" id="{4BB8DB60-E2F2-4480-A8AB-405967CE69CF}"/>
+                <a16:creationId xmlns:a16="http://schemas.microsoft.com/office/drawing/2014/main" id="{3D9D328A-4605-41D6-A41C-A819A3E847B3}"/>
               </a:ext>
             </a:extLst>
           </p:cNvPr>
@@ -4395,7 +4395,7 @@
           <p:cNvPr id="13" name="">
             <a:extLst xmlns:a="http://schemas.openxmlformats.org/drawingml/2006/main">
               <a:ext uri="{FF2B5EF4-FFF2-40B4-BE49-F238E27FC236}">
-                <a16:creationId xmlns:a16="http://schemas.microsoft.com/office/drawing/2014/main" id="{8338BB21-4DE3-4093-8D02-B512B8FC2F58}"/>
+                <a16:creationId xmlns:a16="http://schemas.microsoft.com/office/drawing/2014/main" id="{E4D82DA9-EBD5-4B94-8850-3A8587B384DC}"/>
               </a:ext>
             </a:extLst>
           </p:cNvPr>
@@ -4445,7 +4445,7 @@
           <p:cNvPr id="14" name="">
             <a:extLst xmlns:a="http://schemas.openxmlformats.org/drawingml/2006/main">
               <a:ext uri="{FF2B5EF4-FFF2-40B4-BE49-F238E27FC236}">
-                <a16:creationId xmlns:a16="http://schemas.microsoft.com/office/drawing/2014/main" id="{E5961DD8-144E-4AD7-9F13-0B856C8C21D1}"/>
+                <a16:creationId xmlns:a16="http://schemas.microsoft.com/office/drawing/2014/main" id="{4DB67A9E-4F9B-4237-BB27-1F0AF6DDEB47}"/>
               </a:ext>
             </a:extLst>
           </p:cNvPr>
@@ -4476,7 +4476,7 @@
           <p:cNvPr id="15" name="">
             <a:extLst xmlns:a="http://schemas.openxmlformats.org/drawingml/2006/main">
               <a:ext uri="{FF2B5EF4-FFF2-40B4-BE49-F238E27FC236}">
-                <a16:creationId xmlns:a16="http://schemas.microsoft.com/office/drawing/2014/main" id="{1C8835B4-739E-459E-B69A-32DEF4E354E3}"/>
+                <a16:creationId xmlns:a16="http://schemas.microsoft.com/office/drawing/2014/main" id="{376B6F2B-67C9-4514-ABA8-9431AB4D2CEF}"/>
               </a:ext>
             </a:extLst>
           </p:cNvPr>
@@ -4526,7 +4526,7 @@
           <p:cNvPr id="16" name="">
             <a:extLst xmlns:a="http://schemas.openxmlformats.org/drawingml/2006/main">
               <a:ext uri="{FF2B5EF4-FFF2-40B4-BE49-F238E27FC236}">
-                <a16:creationId xmlns:a16="http://schemas.microsoft.com/office/drawing/2014/main" id="{AFF1F61D-19DD-461E-B57F-D90826DAACDE}"/>
+                <a16:creationId xmlns:a16="http://schemas.microsoft.com/office/drawing/2014/main" id="{20FD1D6D-AD39-429E-9CD1-EC76BFF0C45C}"/>
               </a:ext>
             </a:extLst>
           </p:cNvPr>
@@ -4576,7 +4576,7 @@
           <p:cNvPr id="17" name="">
             <a:extLst xmlns:a="http://schemas.openxmlformats.org/drawingml/2006/main">
               <a:ext uri="{FF2B5EF4-FFF2-40B4-BE49-F238E27FC236}">
-                <a16:creationId xmlns:a16="http://schemas.microsoft.com/office/drawing/2014/main" id="{1CC987B1-CAB2-4BA5-AFB7-927C083D14E0}"/>
+                <a16:creationId xmlns:a16="http://schemas.microsoft.com/office/drawing/2014/main" id="{369F68E7-A11A-4CC6-930A-A3047FC0CD52}"/>
               </a:ext>
             </a:extLst>
           </p:cNvPr>
@@ -4607,7 +4607,7 @@
           <p:cNvPr id="18" name="">
             <a:extLst xmlns:a="http://schemas.openxmlformats.org/drawingml/2006/main">
               <a:ext uri="{FF2B5EF4-FFF2-40B4-BE49-F238E27FC236}">
-                <a16:creationId xmlns:a16="http://schemas.microsoft.com/office/drawing/2014/main" id="{A45E6CBC-DD61-4174-AD26-1059C7B00FB1}"/>
+                <a16:creationId xmlns:a16="http://schemas.microsoft.com/office/drawing/2014/main" id="{052B68E1-707B-4176-A5BC-4977EADC54FC}"/>
               </a:ext>
             </a:extLst>
           </p:cNvPr>
@@ -4657,7 +4657,7 @@
           <p:cNvPr id="19" name="">
             <a:extLst xmlns:a="http://schemas.openxmlformats.org/drawingml/2006/main">
               <a:ext uri="{FF2B5EF4-FFF2-40B4-BE49-F238E27FC236}">
-                <a16:creationId xmlns:a16="http://schemas.microsoft.com/office/drawing/2014/main" id="{2DE070C1-607E-4D74-B931-6E8B0B26CFCF}"/>
+                <a16:creationId xmlns:a16="http://schemas.microsoft.com/office/drawing/2014/main" id="{856E7084-FDC4-473D-B114-559C4F1D285B}"/>
               </a:ext>
             </a:extLst>
           </p:cNvPr>
@@ -4705,7 +4705,7 @@
     </p:spTree>
     <p:extLst>
       <p:ext uri="{BB962C8B-B14F-4D97-AF65-F5344CB8AC3E}">
-        <p14:creationId xmlns:p14="http://schemas.microsoft.com/office/powerpoint/2010/main" val="1380326375"/>
+        <p14:creationId xmlns:p14="http://schemas.microsoft.com/office/powerpoint/2010/main" val="1991598389"/>
       </p:ext>
     </p:extLst>
   </p:cSld>
@@ -4736,7 +4736,7 @@
           <p:cNvPr id="1" name="">
             <a:extLst xmlns:a="http://schemas.openxmlformats.org/drawingml/2006/main">
               <a:ext uri="{FF2B5EF4-FFF2-40B4-BE49-F238E27FC236}">
-                <a16:creationId xmlns:a16="http://schemas.microsoft.com/office/drawing/2014/main" id="{D196E728-761E-4270-9ACD-BD9AC5AC413B}"/>
+                <a16:creationId xmlns:a16="http://schemas.microsoft.com/office/drawing/2014/main" id="{3B742AD6-C072-465E-9FF6-ECD1A691635D}"/>
               </a:ext>
             </a:extLst>
           </p:cNvPr>
@@ -4771,7 +4771,7 @@
           <p:nvPr/>
         </p:nvPicPr>
         <p:blipFill>
-          <a:blip xmlns:r="http://schemas.openxmlformats.org/officeDocument/2006/relationships" xmlns:a="http://schemas.openxmlformats.org/drawingml/2006/main" r:embed="Rb3da67be4ecf436b"/>
+          <a:blip xmlns:r="http://schemas.openxmlformats.org/officeDocument/2006/relationships" xmlns:a="http://schemas.openxmlformats.org/drawingml/2006/main" r:embed="R4e6cfd9322cc46bc"/>
           <a:stretch xmlns:a="http://schemas.openxmlformats.org/drawingml/2006/main"/>
         </p:blipFill>
         <p:spPr>
@@ -4789,7 +4789,7 @@
           <p:cNvPr id="3" name="">
             <a:extLst xmlns:a="http://schemas.openxmlformats.org/drawingml/2006/main">
               <a:ext uri="{FF2B5EF4-FFF2-40B4-BE49-F238E27FC236}">
-                <a16:creationId xmlns:a16="http://schemas.microsoft.com/office/drawing/2014/main" id="{1675E668-217D-4AF1-995D-084C970C397F}"/>
+                <a16:creationId xmlns:a16="http://schemas.microsoft.com/office/drawing/2014/main" id="{213F715A-AF56-4820-99BB-663651A1564C}"/>
               </a:ext>
             </a:extLst>
           </p:cNvPr>
@@ -4839,7 +4839,7 @@
           <p:cNvPr id="4" name="">
             <a:extLst xmlns:a="http://schemas.openxmlformats.org/drawingml/2006/main">
               <a:ext uri="{FF2B5EF4-FFF2-40B4-BE49-F238E27FC236}">
-                <a16:creationId xmlns:a16="http://schemas.microsoft.com/office/drawing/2014/main" id="{CF89A5E1-660C-45B5-9F39-8FE82903945B}"/>
+                <a16:creationId xmlns:a16="http://schemas.microsoft.com/office/drawing/2014/main" id="{D0A2E0D5-361B-4F35-A677-18945C16CE43}"/>
               </a:ext>
             </a:extLst>
           </p:cNvPr>
@@ -4872,7 +4872,7 @@
           <p:cNvPr id="5" name="">
             <a:extLst xmlns:a="http://schemas.openxmlformats.org/drawingml/2006/main">
               <a:ext uri="{FF2B5EF4-FFF2-40B4-BE49-F238E27FC236}">
-                <a16:creationId xmlns:a16="http://schemas.microsoft.com/office/drawing/2014/main" id="{D4F4DC09-12AC-48D4-808B-9796E8FB8952}"/>
+                <a16:creationId xmlns:a16="http://schemas.microsoft.com/office/drawing/2014/main" id="{D487B2DE-21BB-46E5-A1E3-60BC415D5871}"/>
               </a:ext>
             </a:extLst>
           </p:cNvPr>
@@ -4903,7 +4903,7 @@
           <p:cNvPr id="6" name="">
             <a:extLst xmlns:a="http://schemas.openxmlformats.org/drawingml/2006/main">
               <a:ext uri="{FF2B5EF4-FFF2-40B4-BE49-F238E27FC236}">
-                <a16:creationId xmlns:a16="http://schemas.microsoft.com/office/drawing/2014/main" id="{0CCC11E6-9A4C-4CB3-8124-77A2442CD52F}"/>
+                <a16:creationId xmlns:a16="http://schemas.microsoft.com/office/drawing/2014/main" id="{30E13963-906B-444B-A61A-CB9022739924}"/>
               </a:ext>
             </a:extLst>
           </p:cNvPr>
@@ -4953,7 +4953,7 @@
           <p:cNvPr id="7" name="">
             <a:extLst xmlns:a="http://schemas.openxmlformats.org/drawingml/2006/main">
               <a:ext uri="{FF2B5EF4-FFF2-40B4-BE49-F238E27FC236}">
-                <a16:creationId xmlns:a16="http://schemas.microsoft.com/office/drawing/2014/main" id="{1C6DA219-3243-4CCE-9F8A-F61A763086A1}"/>
+                <a16:creationId xmlns:a16="http://schemas.microsoft.com/office/drawing/2014/main" id="{FC95E4AB-4BA3-4BEC-B6AA-904163B13E80}"/>
               </a:ext>
             </a:extLst>
           </p:cNvPr>
@@ -5003,7 +5003,7 @@
           <p:cNvPr id="8" name="">
             <a:extLst xmlns:a="http://schemas.openxmlformats.org/drawingml/2006/main">
               <a:ext uri="{FF2B5EF4-FFF2-40B4-BE49-F238E27FC236}">
-                <a16:creationId xmlns:a16="http://schemas.microsoft.com/office/drawing/2014/main" id="{BF60589F-FB97-4BBE-B790-9E14F9C10518}"/>
+                <a16:creationId xmlns:a16="http://schemas.microsoft.com/office/drawing/2014/main" id="{DC78BB5E-44F4-4329-8897-19ED684EA99E}"/>
               </a:ext>
             </a:extLst>
           </p:cNvPr>
@@ -5038,7 +5038,7 @@
           <p:cNvPr id="9" name="">
             <a:extLst xmlns:a="http://schemas.openxmlformats.org/drawingml/2006/main">
               <a:ext uri="{FF2B5EF4-FFF2-40B4-BE49-F238E27FC236}">
-                <a16:creationId xmlns:a16="http://schemas.microsoft.com/office/drawing/2014/main" id="{4338BC8C-93A0-49C7-8F9B-BEAA28BC616E}"/>
+                <a16:creationId xmlns:a16="http://schemas.microsoft.com/office/drawing/2014/main" id="{E2F80A7F-6438-435C-B0BC-482FC31ADBC1}"/>
               </a:ext>
             </a:extLst>
           </p:cNvPr>
@@ -5088,7 +5088,7 @@
           <p:cNvPr id="10" name="">
             <a:extLst xmlns:a="http://schemas.openxmlformats.org/drawingml/2006/main">
               <a:ext uri="{FF2B5EF4-FFF2-40B4-BE49-F238E27FC236}">
-                <a16:creationId xmlns:a16="http://schemas.microsoft.com/office/drawing/2014/main" id="{AD9A232D-B4E6-48DC-9992-22514A93A9DC}"/>
+                <a16:creationId xmlns:a16="http://schemas.microsoft.com/office/drawing/2014/main" id="{883416A5-E8CE-4E33-A70F-52F81849C22E}"/>
               </a:ext>
             </a:extLst>
           </p:cNvPr>
@@ -5138,7 +5138,7 @@
           <p:cNvPr id="11" name="">
             <a:extLst xmlns:a="http://schemas.openxmlformats.org/drawingml/2006/main">
               <a:ext uri="{FF2B5EF4-FFF2-40B4-BE49-F238E27FC236}">
-                <a16:creationId xmlns:a16="http://schemas.microsoft.com/office/drawing/2014/main" id="{2F5113F8-9FCA-4590-8255-7BDC40EDF47B}"/>
+                <a16:creationId xmlns:a16="http://schemas.microsoft.com/office/drawing/2014/main" id="{2ECE400E-ECF6-4A4B-AB68-27A20CC51751}"/>
               </a:ext>
             </a:extLst>
           </p:cNvPr>
@@ -5173,7 +5173,7 @@
           <p:cNvPr id="12" name="">
             <a:extLst xmlns:a="http://schemas.openxmlformats.org/drawingml/2006/main">
               <a:ext uri="{FF2B5EF4-FFF2-40B4-BE49-F238E27FC236}">
-                <a16:creationId xmlns:a16="http://schemas.microsoft.com/office/drawing/2014/main" id="{80B45E96-B8C0-45D8-820A-693659925E30}"/>
+                <a16:creationId xmlns:a16="http://schemas.microsoft.com/office/drawing/2014/main" id="{30A196C9-7120-4ED0-A572-EB76856134BF}"/>
               </a:ext>
             </a:extLst>
           </p:cNvPr>
@@ -5223,7 +5223,7 @@
           <p:cNvPr id="13" name="">
             <a:extLst xmlns:a="http://schemas.openxmlformats.org/drawingml/2006/main">
               <a:ext uri="{FF2B5EF4-FFF2-40B4-BE49-F238E27FC236}">
-                <a16:creationId xmlns:a16="http://schemas.microsoft.com/office/drawing/2014/main" id="{3DD395BD-FF46-418C-AA98-201F750A9BFE}"/>
+                <a16:creationId xmlns:a16="http://schemas.microsoft.com/office/drawing/2014/main" id="{085E9A5E-CEFE-4A28-9CCA-9E30F2EEAC8F}"/>
               </a:ext>
             </a:extLst>
           </p:cNvPr>
@@ -5273,7 +5273,7 @@
           <p:cNvPr id="14" name="">
             <a:extLst xmlns:a="http://schemas.openxmlformats.org/drawingml/2006/main">
               <a:ext uri="{FF2B5EF4-FFF2-40B4-BE49-F238E27FC236}">
-                <a16:creationId xmlns:a16="http://schemas.microsoft.com/office/drawing/2014/main" id="{01216055-20DD-49F8-B462-8C319FABB4D6}"/>
+                <a16:creationId xmlns:a16="http://schemas.microsoft.com/office/drawing/2014/main" id="{883C9D46-2718-4AAC-BB05-1DB1EF502D31}"/>
               </a:ext>
             </a:extLst>
           </p:cNvPr>
@@ -5308,7 +5308,7 @@
           <p:cNvPr id="15" name="">
             <a:extLst xmlns:a="http://schemas.openxmlformats.org/drawingml/2006/main">
               <a:ext uri="{FF2B5EF4-FFF2-40B4-BE49-F238E27FC236}">
-                <a16:creationId xmlns:a16="http://schemas.microsoft.com/office/drawing/2014/main" id="{A3481E4B-E0B3-4E12-83DD-29AA83A030DB}"/>
+                <a16:creationId xmlns:a16="http://schemas.microsoft.com/office/drawing/2014/main" id="{DDAD5A17-D4D8-4FFB-BB58-F270769C9621}"/>
               </a:ext>
             </a:extLst>
           </p:cNvPr>
@@ -5358,7 +5358,7 @@
           <p:cNvPr id="16" name="">
             <a:extLst xmlns:a="http://schemas.openxmlformats.org/drawingml/2006/main">
               <a:ext uri="{FF2B5EF4-FFF2-40B4-BE49-F238E27FC236}">
-                <a16:creationId xmlns:a16="http://schemas.microsoft.com/office/drawing/2014/main" id="{6F0C2B9D-B8A5-4A05-98F3-A7DA53E6BC9D}"/>
+                <a16:creationId xmlns:a16="http://schemas.microsoft.com/office/drawing/2014/main" id="{E1E56D7F-A198-4EC2-A44F-72471D4A53F9}"/>
               </a:ext>
             </a:extLst>
           </p:cNvPr>
@@ -5408,7 +5408,7 @@
           <p:cNvPr id="17" name="">
             <a:extLst xmlns:a="http://schemas.openxmlformats.org/drawingml/2006/main">
               <a:ext uri="{FF2B5EF4-FFF2-40B4-BE49-F238E27FC236}">
-                <a16:creationId xmlns:a16="http://schemas.microsoft.com/office/drawing/2014/main" id="{A8AEC9B6-2C91-4583-8E94-24A19D833888}"/>
+                <a16:creationId xmlns:a16="http://schemas.microsoft.com/office/drawing/2014/main" id="{C12CE722-13F9-473E-8675-BCDAD2552F0F}"/>
               </a:ext>
             </a:extLst>
           </p:cNvPr>
@@ -5443,7 +5443,7 @@
           <p:cNvPr id="18" name="">
             <a:extLst xmlns:a="http://schemas.openxmlformats.org/drawingml/2006/main">
               <a:ext uri="{FF2B5EF4-FFF2-40B4-BE49-F238E27FC236}">
-                <a16:creationId xmlns:a16="http://schemas.microsoft.com/office/drawing/2014/main" id="{8E6B4702-BD1F-4C67-9066-8667A6CC8C23}"/>
+                <a16:creationId xmlns:a16="http://schemas.microsoft.com/office/drawing/2014/main" id="{3F4BBBEA-57DB-499D-8633-496128399079}"/>
               </a:ext>
             </a:extLst>
           </p:cNvPr>
@@ -5493,7 +5493,7 @@
           <p:cNvPr id="19" name="">
             <a:extLst xmlns:a="http://schemas.openxmlformats.org/drawingml/2006/main">
               <a:ext uri="{FF2B5EF4-FFF2-40B4-BE49-F238E27FC236}">
-                <a16:creationId xmlns:a16="http://schemas.microsoft.com/office/drawing/2014/main" id="{BE9838F9-06FC-41F8-8D4D-6154E00D7F36}"/>
+                <a16:creationId xmlns:a16="http://schemas.microsoft.com/office/drawing/2014/main" id="{62060D47-9BF6-4C59-A104-8B397FA93A1C}"/>
               </a:ext>
             </a:extLst>
           </p:cNvPr>
@@ -5543,7 +5543,7 @@
           <p:cNvPr id="20" name="">
             <a:extLst xmlns:a="http://schemas.openxmlformats.org/drawingml/2006/main">
               <a:ext uri="{FF2B5EF4-FFF2-40B4-BE49-F238E27FC236}">
-                <a16:creationId xmlns:a16="http://schemas.microsoft.com/office/drawing/2014/main" id="{524E808D-3488-480F-8C3C-E166E039AC03}"/>
+                <a16:creationId xmlns:a16="http://schemas.microsoft.com/office/drawing/2014/main" id="{E1AE75ED-3606-49E2-B1A5-B84F19CAA9CA}"/>
               </a:ext>
             </a:extLst>
           </p:cNvPr>
@@ -5593,7 +5593,7 @@
           <p:cNvPr id="21" name="">
             <a:extLst xmlns:a="http://schemas.openxmlformats.org/drawingml/2006/main">
               <a:ext uri="{FF2B5EF4-FFF2-40B4-BE49-F238E27FC236}">
-                <a16:creationId xmlns:a16="http://schemas.microsoft.com/office/drawing/2014/main" id="{FEA8EF92-924A-49D9-B9E1-4AE9559A16F3}"/>
+                <a16:creationId xmlns:a16="http://schemas.microsoft.com/office/drawing/2014/main" id="{13255B7B-5916-4BE5-8260-1E4E3F530723}"/>
               </a:ext>
             </a:extLst>
           </p:cNvPr>
@@ -5643,7 +5643,7 @@
           <p:cNvPr id="22" name="">
             <a:extLst xmlns:a="http://schemas.openxmlformats.org/drawingml/2006/main">
               <a:ext uri="{FF2B5EF4-FFF2-40B4-BE49-F238E27FC236}">
-                <a16:creationId xmlns:a16="http://schemas.microsoft.com/office/drawing/2014/main" id="{8FB52CEC-1F79-4357-BC48-42D1B7FDDA7D}"/>
+                <a16:creationId xmlns:a16="http://schemas.microsoft.com/office/drawing/2014/main" id="{A46F2778-3B2C-4B8C-9FB1-5342DD99F27D}"/>
               </a:ext>
             </a:extLst>
           </p:cNvPr>
@@ -5693,7 +5693,7 @@
           <p:cNvPr id="23" name="">
             <a:extLst xmlns:a="http://schemas.openxmlformats.org/drawingml/2006/main">
               <a:ext uri="{FF2B5EF4-FFF2-40B4-BE49-F238E27FC236}">
-                <a16:creationId xmlns:a16="http://schemas.microsoft.com/office/drawing/2014/main" id="{9CD5E8A1-8C9A-4925-81F3-8949F2DDDCF0}"/>
+                <a16:creationId xmlns:a16="http://schemas.microsoft.com/office/drawing/2014/main" id="{4A09E1EA-FD2A-40D6-A06B-A0A88173064F}"/>
               </a:ext>
             </a:extLst>
           </p:cNvPr>
@@ -5726,7 +5726,7 @@
           <p:cNvPr id="24" name="">
             <a:extLst xmlns:a="http://schemas.openxmlformats.org/drawingml/2006/main">
               <a:ext uri="{FF2B5EF4-FFF2-40B4-BE49-F238E27FC236}">
-                <a16:creationId xmlns:a16="http://schemas.microsoft.com/office/drawing/2014/main" id="{EC2E07E2-4FB5-49F2-ADC1-EF18AFEBE23B}"/>
+                <a16:creationId xmlns:a16="http://schemas.microsoft.com/office/drawing/2014/main" id="{D2A6E59A-3D95-4544-878B-E9B69C987D5D}"/>
               </a:ext>
             </a:extLst>
           </p:cNvPr>
@@ -5776,7 +5776,7 @@
           <p:cNvPr id="25" name="">
             <a:extLst xmlns:a="http://schemas.openxmlformats.org/drawingml/2006/main">
               <a:ext uri="{FF2B5EF4-FFF2-40B4-BE49-F238E27FC236}">
-                <a16:creationId xmlns:a16="http://schemas.microsoft.com/office/drawing/2014/main" id="{A48A1C52-D8BC-4053-89E1-18B27FD46E27}"/>
+                <a16:creationId xmlns:a16="http://schemas.microsoft.com/office/drawing/2014/main" id="{09457471-F97A-447C-AE0A-153C60545A93}"/>
               </a:ext>
             </a:extLst>
           </p:cNvPr>
@@ -5826,7 +5826,7 @@
           <p:cNvPr id="26" name="">
             <a:extLst xmlns:a="http://schemas.openxmlformats.org/drawingml/2006/main">
               <a:ext uri="{FF2B5EF4-FFF2-40B4-BE49-F238E27FC236}">
-                <a16:creationId xmlns:a16="http://schemas.microsoft.com/office/drawing/2014/main" id="{85CD8EBD-3180-4EE5-AE57-0865ED92B9B4}"/>
+                <a16:creationId xmlns:a16="http://schemas.microsoft.com/office/drawing/2014/main" id="{B5D47228-4B67-4515-AD77-E1600888A9A7}"/>
               </a:ext>
             </a:extLst>
           </p:cNvPr>
@@ -5859,7 +5859,7 @@
           <p:cNvPr id="27" name="">
             <a:extLst xmlns:a="http://schemas.openxmlformats.org/drawingml/2006/main">
               <a:ext uri="{FF2B5EF4-FFF2-40B4-BE49-F238E27FC236}">
-                <a16:creationId xmlns:a16="http://schemas.microsoft.com/office/drawing/2014/main" id="{EDBACF4E-4FC3-4E78-8F33-42A9B66C55DD}"/>
+                <a16:creationId xmlns:a16="http://schemas.microsoft.com/office/drawing/2014/main" id="{5CA98B69-4A20-4775-86A9-4CAA363D845F}"/>
               </a:ext>
             </a:extLst>
           </p:cNvPr>
@@ -5909,7 +5909,7 @@
           <p:cNvPr id="28" name="">
             <a:extLst xmlns:a="http://schemas.openxmlformats.org/drawingml/2006/main">
               <a:ext uri="{FF2B5EF4-FFF2-40B4-BE49-F238E27FC236}">
-                <a16:creationId xmlns:a16="http://schemas.microsoft.com/office/drawing/2014/main" id="{218A48F6-CF7C-43F2-99DA-E9C5640920D8}"/>
+                <a16:creationId xmlns:a16="http://schemas.microsoft.com/office/drawing/2014/main" id="{85AC80E1-141B-41F7-878C-4A4E8170ABC0}"/>
               </a:ext>
             </a:extLst>
           </p:cNvPr>
@@ -5959,7 +5959,7 @@
           <p:cNvPr id="29" name="">
             <a:extLst xmlns:a="http://schemas.openxmlformats.org/drawingml/2006/main">
               <a:ext uri="{FF2B5EF4-FFF2-40B4-BE49-F238E27FC236}">
-                <a16:creationId xmlns:a16="http://schemas.microsoft.com/office/drawing/2014/main" id="{873538B5-1A85-45ED-8F77-84D504D6D7BC}"/>
+                <a16:creationId xmlns:a16="http://schemas.microsoft.com/office/drawing/2014/main" id="{586CBF71-677E-42FC-8F6B-762BCC4E51D0}"/>
               </a:ext>
             </a:extLst>
           </p:cNvPr>
@@ -5992,7 +5992,7 @@
           <p:cNvPr id="30" name="">
             <a:extLst xmlns:a="http://schemas.openxmlformats.org/drawingml/2006/main">
               <a:ext uri="{FF2B5EF4-FFF2-40B4-BE49-F238E27FC236}">
-                <a16:creationId xmlns:a16="http://schemas.microsoft.com/office/drawing/2014/main" id="{A34FFD62-25DC-4E58-B46D-402D2092826D}"/>
+                <a16:creationId xmlns:a16="http://schemas.microsoft.com/office/drawing/2014/main" id="{5B8A9AB9-ADEE-4791-AFA4-01D046051D0A}"/>
               </a:ext>
             </a:extLst>
           </p:cNvPr>
@@ -6042,7 +6042,7 @@
           <p:cNvPr id="31" name="">
             <a:extLst xmlns:a="http://schemas.openxmlformats.org/drawingml/2006/main">
               <a:ext uri="{FF2B5EF4-FFF2-40B4-BE49-F238E27FC236}">
-                <a16:creationId xmlns:a16="http://schemas.microsoft.com/office/drawing/2014/main" id="{803CFED4-5936-4B7D-A0E6-59D6AE08186A}"/>
+                <a16:creationId xmlns:a16="http://schemas.microsoft.com/office/drawing/2014/main" id="{23379D7B-4846-439E-B89F-4660279C24B1}"/>
               </a:ext>
             </a:extLst>
           </p:cNvPr>
@@ -6090,7 +6090,7 @@
     </p:spTree>
     <p:extLst>
       <p:ext uri="{BB962C8B-B14F-4D97-AF65-F5344CB8AC3E}">
-        <p14:creationId xmlns:p14="http://schemas.microsoft.com/office/powerpoint/2010/main" val="1520205222"/>
+        <p14:creationId xmlns:p14="http://schemas.microsoft.com/office/powerpoint/2010/main" val="1365752"/>
       </p:ext>
     </p:extLst>
   </p:cSld>
@@ -6121,7 +6121,7 @@
           <p:cNvPr id="1" name="">
             <a:extLst xmlns:a="http://schemas.openxmlformats.org/drawingml/2006/main">
               <a:ext uri="{FF2B5EF4-FFF2-40B4-BE49-F238E27FC236}">
-                <a16:creationId xmlns:a16="http://schemas.microsoft.com/office/drawing/2014/main" id="{9A53A15B-CA0A-4F5A-BC73-E0E7CAA4ABA2}"/>
+                <a16:creationId xmlns:a16="http://schemas.microsoft.com/office/drawing/2014/main" id="{3601B6A3-856B-44EE-9BCC-F84F027CAC5F}"/>
               </a:ext>
             </a:extLst>
           </p:cNvPr>
@@ -6156,7 +6156,7 @@
           <p:nvPr/>
         </p:nvPicPr>
         <p:blipFill>
-          <a:blip xmlns:r="http://schemas.openxmlformats.org/officeDocument/2006/relationships" xmlns:a="http://schemas.openxmlformats.org/drawingml/2006/main" r:embed="Reb165285930a4336"/>
+          <a:blip xmlns:r="http://schemas.openxmlformats.org/officeDocument/2006/relationships" xmlns:a="http://schemas.openxmlformats.org/drawingml/2006/main" r:embed="R567e3ca6fac1476e"/>
           <a:stretch xmlns:a="http://schemas.openxmlformats.org/drawingml/2006/main"/>
         </p:blipFill>
         <p:spPr>
@@ -6174,7 +6174,7 @@
           <p:cNvPr id="3" name="">
             <a:extLst xmlns:a="http://schemas.openxmlformats.org/drawingml/2006/main">
               <a:ext uri="{FF2B5EF4-FFF2-40B4-BE49-F238E27FC236}">
-                <a16:creationId xmlns:a16="http://schemas.microsoft.com/office/drawing/2014/main" id="{7DA0A961-6C6E-4FBF-B965-141731DE2BAC}"/>
+                <a16:creationId xmlns:a16="http://schemas.microsoft.com/office/drawing/2014/main" id="{04746235-3B31-438B-BBBE-8CE6694B5C5B}"/>
               </a:ext>
             </a:extLst>
           </p:cNvPr>
@@ -6224,7 +6224,7 @@
           <p:cNvPr id="4" name="">
             <a:extLst xmlns:a="http://schemas.openxmlformats.org/drawingml/2006/main">
               <a:ext uri="{FF2B5EF4-FFF2-40B4-BE49-F238E27FC236}">
-                <a16:creationId xmlns:a16="http://schemas.microsoft.com/office/drawing/2014/main" id="{140E2543-4A38-47B7-8726-44EF2BFC3188}"/>
+                <a16:creationId xmlns:a16="http://schemas.microsoft.com/office/drawing/2014/main" id="{347FB999-A37A-4916-8EB4-2D362BF7FCDD}"/>
               </a:ext>
             </a:extLst>
           </p:cNvPr>
@@ -6257,7 +6257,7 @@
           <p:cNvPr id="5" name="">
             <a:extLst xmlns:a="http://schemas.openxmlformats.org/drawingml/2006/main">
               <a:ext uri="{FF2B5EF4-FFF2-40B4-BE49-F238E27FC236}">
-                <a16:creationId xmlns:a16="http://schemas.microsoft.com/office/drawing/2014/main" id="{B499E67E-6929-45B8-80FF-D8BDACBA37B2}"/>
+                <a16:creationId xmlns:a16="http://schemas.microsoft.com/office/drawing/2014/main" id="{FE97C7AA-558D-4C42-954B-62F51224EB6B}"/>
               </a:ext>
             </a:extLst>
           </p:cNvPr>
@@ -6288,7 +6288,7 @@
           <p:cNvPr id="6" name="">
             <a:extLst xmlns:a="http://schemas.openxmlformats.org/drawingml/2006/main">
               <a:ext uri="{FF2B5EF4-FFF2-40B4-BE49-F238E27FC236}">
-                <a16:creationId xmlns:a16="http://schemas.microsoft.com/office/drawing/2014/main" id="{0DDB7D58-FDC2-4C69-8C2D-D2480A062540}"/>
+                <a16:creationId xmlns:a16="http://schemas.microsoft.com/office/drawing/2014/main" id="{0FE2075C-010D-4E1A-A2B6-5E2A5FB808B5}"/>
               </a:ext>
             </a:extLst>
           </p:cNvPr>
@@ -6338,7 +6338,7 @@
           <p:cNvPr id="7" name="">
             <a:extLst xmlns:a="http://schemas.openxmlformats.org/drawingml/2006/main">
               <a:ext uri="{FF2B5EF4-FFF2-40B4-BE49-F238E27FC236}">
-                <a16:creationId xmlns:a16="http://schemas.microsoft.com/office/drawing/2014/main" id="{7C1022E1-2AC4-40AB-8A31-892E0CB5FEDF}"/>
+                <a16:creationId xmlns:a16="http://schemas.microsoft.com/office/drawing/2014/main" id="{FB42FEB9-3E30-4088-B7C1-30E3F58393E6}"/>
               </a:ext>
             </a:extLst>
           </p:cNvPr>
@@ -6388,7 +6388,7 @@
           <p:cNvPr id="8" name="">
             <a:extLst xmlns:a="http://schemas.openxmlformats.org/drawingml/2006/main">
               <a:ext uri="{FF2B5EF4-FFF2-40B4-BE49-F238E27FC236}">
-                <a16:creationId xmlns:a16="http://schemas.microsoft.com/office/drawing/2014/main" id="{E5222021-312C-4481-8244-8E2684807186}"/>
+                <a16:creationId xmlns:a16="http://schemas.microsoft.com/office/drawing/2014/main" id="{BC46BE19-009E-433C-9537-E5F304798D0F}"/>
               </a:ext>
             </a:extLst>
           </p:cNvPr>
@@ -6421,7 +6421,7 @@
           <p:cNvPr id="9" name="">
             <a:extLst xmlns:a="http://schemas.openxmlformats.org/drawingml/2006/main">
               <a:ext uri="{FF2B5EF4-FFF2-40B4-BE49-F238E27FC236}">
-                <a16:creationId xmlns:a16="http://schemas.microsoft.com/office/drawing/2014/main" id="{158AA6F1-2668-4F29-AB67-746029A4D275}"/>
+                <a16:creationId xmlns:a16="http://schemas.microsoft.com/office/drawing/2014/main" id="{D2DBCD57-B534-4DFE-99AC-E591F4CFB207}"/>
               </a:ext>
             </a:extLst>
           </p:cNvPr>
@@ -6471,7 +6471,7 @@
           <p:cNvPr id="10" name="">
             <a:extLst xmlns:a="http://schemas.openxmlformats.org/drawingml/2006/main">
               <a:ext uri="{FF2B5EF4-FFF2-40B4-BE49-F238E27FC236}">
-                <a16:creationId xmlns:a16="http://schemas.microsoft.com/office/drawing/2014/main" id="{5E42A43F-2F02-4315-A681-48585CF4327C}"/>
+                <a16:creationId xmlns:a16="http://schemas.microsoft.com/office/drawing/2014/main" id="{A94068D5-5C45-416B-B361-EBCC010A9C6D}"/>
               </a:ext>
             </a:extLst>
           </p:cNvPr>
@@ -6521,7 +6521,7 @@
           <p:cNvPr id="11" name="">
             <a:extLst xmlns:a="http://schemas.openxmlformats.org/drawingml/2006/main">
               <a:ext uri="{FF2B5EF4-FFF2-40B4-BE49-F238E27FC236}">
-                <a16:creationId xmlns:a16="http://schemas.microsoft.com/office/drawing/2014/main" id="{7FDE897C-C38D-428D-8AC9-0DBC52A9381A}"/>
+                <a16:creationId xmlns:a16="http://schemas.microsoft.com/office/drawing/2014/main" id="{69BB9246-1ABB-4172-BE47-891D0B02C3DB}"/>
               </a:ext>
             </a:extLst>
           </p:cNvPr>
@@ -6571,7 +6571,7 @@
           <p:cNvPr id="12" name="">
             <a:extLst xmlns:a="http://schemas.openxmlformats.org/drawingml/2006/main">
               <a:ext uri="{FF2B5EF4-FFF2-40B4-BE49-F238E27FC236}">
-                <a16:creationId xmlns:a16="http://schemas.microsoft.com/office/drawing/2014/main" id="{E007C3F7-EB47-4771-97F1-A664A78286CB}"/>
+                <a16:creationId xmlns:a16="http://schemas.microsoft.com/office/drawing/2014/main" id="{BC310157-CFB9-4F77-9F1F-9BB9C8006988}"/>
               </a:ext>
             </a:extLst>
           </p:cNvPr>
@@ -6621,7 +6621,7 @@
           <p:cNvPr id="13" name="">
             <a:extLst xmlns:a="http://schemas.openxmlformats.org/drawingml/2006/main">
               <a:ext uri="{FF2B5EF4-FFF2-40B4-BE49-F238E27FC236}">
-                <a16:creationId xmlns:a16="http://schemas.microsoft.com/office/drawing/2014/main" id="{28E76321-AF99-498C-9ED5-10CBE1F1C8A7}"/>
+                <a16:creationId xmlns:a16="http://schemas.microsoft.com/office/drawing/2014/main" id="{C8A8C2AA-3043-4E8D-9F95-0FF52C77EB43}"/>
               </a:ext>
             </a:extLst>
           </p:cNvPr>
@@ -6671,7 +6671,7 @@
           <p:cNvPr id="14" name="">
             <a:extLst xmlns:a="http://schemas.openxmlformats.org/drawingml/2006/main">
               <a:ext uri="{FF2B5EF4-FFF2-40B4-BE49-F238E27FC236}">
-                <a16:creationId xmlns:a16="http://schemas.microsoft.com/office/drawing/2014/main" id="{A1A59975-D6D3-47CD-B7F1-F42DD4292370}"/>
+                <a16:creationId xmlns:a16="http://schemas.microsoft.com/office/drawing/2014/main" id="{4C113D33-2F0C-44EF-B4FE-2B78803C81AA}"/>
               </a:ext>
             </a:extLst>
           </p:cNvPr>
@@ -6702,7 +6702,7 @@
           <p:cNvPr id="15" name="">
             <a:extLst xmlns:a="http://schemas.openxmlformats.org/drawingml/2006/main">
               <a:ext uri="{FF2B5EF4-FFF2-40B4-BE49-F238E27FC236}">
-                <a16:creationId xmlns:a16="http://schemas.microsoft.com/office/drawing/2014/main" id="{96325E7D-3FDE-41CD-93C0-D4ACF39B8E02}"/>
+                <a16:creationId xmlns:a16="http://schemas.microsoft.com/office/drawing/2014/main" id="{7265F382-71B1-44B4-A1BB-9E1430BD946F}"/>
               </a:ext>
             </a:extLst>
           </p:cNvPr>
@@ -6735,7 +6735,7 @@
           <p:cNvPr id="16" name="">
             <a:extLst xmlns:a="http://schemas.openxmlformats.org/drawingml/2006/main">
               <a:ext uri="{FF2B5EF4-FFF2-40B4-BE49-F238E27FC236}">
-                <a16:creationId xmlns:a16="http://schemas.microsoft.com/office/drawing/2014/main" id="{1303B9C3-693B-4ADD-9F28-7C8BF7784D32}"/>
+                <a16:creationId xmlns:a16="http://schemas.microsoft.com/office/drawing/2014/main" id="{CD0C5A36-AB01-41F9-84A7-09EECD7CB23D}"/>
               </a:ext>
             </a:extLst>
           </p:cNvPr>
@@ -6785,7 +6785,7 @@
           <p:cNvPr id="17" name="">
             <a:extLst xmlns:a="http://schemas.openxmlformats.org/drawingml/2006/main">
               <a:ext uri="{FF2B5EF4-FFF2-40B4-BE49-F238E27FC236}">
-                <a16:creationId xmlns:a16="http://schemas.microsoft.com/office/drawing/2014/main" id="{BBE52B1D-8A18-41C4-9544-AD9E415CF2A1}"/>
+                <a16:creationId xmlns:a16="http://schemas.microsoft.com/office/drawing/2014/main" id="{44DCCB68-10BA-4AB8-9512-85BEB2562632}"/>
               </a:ext>
             </a:extLst>
           </p:cNvPr>
@@ -6835,7 +6835,7 @@
           <p:cNvPr id="18" name="">
             <a:extLst xmlns:a="http://schemas.openxmlformats.org/drawingml/2006/main">
               <a:ext uri="{FF2B5EF4-FFF2-40B4-BE49-F238E27FC236}">
-                <a16:creationId xmlns:a16="http://schemas.microsoft.com/office/drawing/2014/main" id="{E5E40CB4-BE3A-407A-84C7-561906F20944}"/>
+                <a16:creationId xmlns:a16="http://schemas.microsoft.com/office/drawing/2014/main" id="{79EAEA33-A487-4938-99BB-F1C290D361EC}"/>
               </a:ext>
             </a:extLst>
           </p:cNvPr>
@@ -6885,7 +6885,7 @@
           <p:cNvPr id="19" name="">
             <a:extLst xmlns:a="http://schemas.openxmlformats.org/drawingml/2006/main">
               <a:ext uri="{FF2B5EF4-FFF2-40B4-BE49-F238E27FC236}">
-                <a16:creationId xmlns:a16="http://schemas.microsoft.com/office/drawing/2014/main" id="{6F2F7A9B-FA58-4F6A-B0FD-B2A7BAB48E21}"/>
+                <a16:creationId xmlns:a16="http://schemas.microsoft.com/office/drawing/2014/main" id="{1C2FE898-2A27-4251-8C23-4A725D473314}"/>
               </a:ext>
             </a:extLst>
           </p:cNvPr>
@@ -6935,7 +6935,7 @@
           <p:cNvPr id="20" name="">
             <a:extLst xmlns:a="http://schemas.openxmlformats.org/drawingml/2006/main">
               <a:ext uri="{FF2B5EF4-FFF2-40B4-BE49-F238E27FC236}">
-                <a16:creationId xmlns:a16="http://schemas.microsoft.com/office/drawing/2014/main" id="{C0D82B98-B3F0-45D1-AE33-9C6536FE74FA}"/>
+                <a16:creationId xmlns:a16="http://schemas.microsoft.com/office/drawing/2014/main" id="{BFB23590-04AE-4324-B124-C9ABB5CD925F}"/>
               </a:ext>
             </a:extLst>
           </p:cNvPr>
@@ -6985,7 +6985,7 @@
           <p:cNvPr id="21" name="">
             <a:extLst xmlns:a="http://schemas.openxmlformats.org/drawingml/2006/main">
               <a:ext uri="{FF2B5EF4-FFF2-40B4-BE49-F238E27FC236}">
-                <a16:creationId xmlns:a16="http://schemas.microsoft.com/office/drawing/2014/main" id="{01FE8D99-A682-4C19-8B38-70EB4C845A1B}"/>
+                <a16:creationId xmlns:a16="http://schemas.microsoft.com/office/drawing/2014/main" id="{D108F062-8D84-4A4A-BFC1-123662EA45F3}"/>
               </a:ext>
             </a:extLst>
           </p:cNvPr>
@@ -7016,7 +7016,7 @@
           <p:cNvPr id="22" name="">
             <a:extLst xmlns:a="http://schemas.openxmlformats.org/drawingml/2006/main">
               <a:ext uri="{FF2B5EF4-FFF2-40B4-BE49-F238E27FC236}">
-                <a16:creationId xmlns:a16="http://schemas.microsoft.com/office/drawing/2014/main" id="{72482BD9-DC82-4746-90FB-642E837BD481}"/>
+                <a16:creationId xmlns:a16="http://schemas.microsoft.com/office/drawing/2014/main" id="{B9600002-F335-4EC6-BC15-EFDE29649105}"/>
               </a:ext>
             </a:extLst>
           </p:cNvPr>
@@ -7049,7 +7049,7 @@
           <p:cNvPr id="23" name="">
             <a:extLst xmlns:a="http://schemas.openxmlformats.org/drawingml/2006/main">
               <a:ext uri="{FF2B5EF4-FFF2-40B4-BE49-F238E27FC236}">
-                <a16:creationId xmlns:a16="http://schemas.microsoft.com/office/drawing/2014/main" id="{27266A84-4B6B-44BE-BCD1-77A139DF780D}"/>
+                <a16:creationId xmlns:a16="http://schemas.microsoft.com/office/drawing/2014/main" id="{63501B0D-7EAF-4C4E-B196-CD0B29E6EC9A}"/>
               </a:ext>
             </a:extLst>
           </p:cNvPr>
@@ -7099,7 +7099,7 @@
           <p:cNvPr id="24" name="">
             <a:extLst xmlns:a="http://schemas.openxmlformats.org/drawingml/2006/main">
               <a:ext uri="{FF2B5EF4-FFF2-40B4-BE49-F238E27FC236}">
-                <a16:creationId xmlns:a16="http://schemas.microsoft.com/office/drawing/2014/main" id="{242E7B8A-4391-4FD4-AFBC-D31D6D72E4AF}"/>
+                <a16:creationId xmlns:a16="http://schemas.microsoft.com/office/drawing/2014/main" id="{C971BFDF-565C-4F46-9322-E858C2706883}"/>
               </a:ext>
             </a:extLst>
           </p:cNvPr>
@@ -7149,7 +7149,7 @@
           <p:cNvPr id="25" name="">
             <a:extLst xmlns:a="http://schemas.openxmlformats.org/drawingml/2006/main">
               <a:ext uri="{FF2B5EF4-FFF2-40B4-BE49-F238E27FC236}">
-                <a16:creationId xmlns:a16="http://schemas.microsoft.com/office/drawing/2014/main" id="{2FB30736-2D5D-48EE-B0BE-BE745B65C8D8}"/>
+                <a16:creationId xmlns:a16="http://schemas.microsoft.com/office/drawing/2014/main" id="{293E034D-69BE-4B0A-958D-8DF87A165A73}"/>
               </a:ext>
             </a:extLst>
           </p:cNvPr>
@@ -7199,7 +7199,7 @@
           <p:cNvPr id="26" name="">
             <a:extLst xmlns:a="http://schemas.openxmlformats.org/drawingml/2006/main">
               <a:ext uri="{FF2B5EF4-FFF2-40B4-BE49-F238E27FC236}">
-                <a16:creationId xmlns:a16="http://schemas.microsoft.com/office/drawing/2014/main" id="{3FF140F7-45BB-42DE-BEBD-30A5BA0BA307}"/>
+                <a16:creationId xmlns:a16="http://schemas.microsoft.com/office/drawing/2014/main" id="{CA79BF18-70FB-4E8F-AD2D-06956E59D3E5}"/>
               </a:ext>
             </a:extLst>
           </p:cNvPr>
@@ -7249,7 +7249,7 @@
           <p:cNvPr id="27" name="">
             <a:extLst xmlns:a="http://schemas.openxmlformats.org/drawingml/2006/main">
               <a:ext uri="{FF2B5EF4-FFF2-40B4-BE49-F238E27FC236}">
-                <a16:creationId xmlns:a16="http://schemas.microsoft.com/office/drawing/2014/main" id="{5367F916-EEC8-4800-9E02-FA41832E31C9}"/>
+                <a16:creationId xmlns:a16="http://schemas.microsoft.com/office/drawing/2014/main" id="{D5512927-6CD5-4A56-8590-814372098AB0}"/>
               </a:ext>
             </a:extLst>
           </p:cNvPr>
@@ -7299,7 +7299,7 @@
           <p:cNvPr id="28" name="">
             <a:extLst xmlns:a="http://schemas.openxmlformats.org/drawingml/2006/main">
               <a:ext uri="{FF2B5EF4-FFF2-40B4-BE49-F238E27FC236}">
-                <a16:creationId xmlns:a16="http://schemas.microsoft.com/office/drawing/2014/main" id="{FB5D512D-23F7-4371-9E35-312411D22EAA}"/>
+                <a16:creationId xmlns:a16="http://schemas.microsoft.com/office/drawing/2014/main" id="{D69EAC24-B633-4C3E-9B2B-8E4012B0EEE9}"/>
               </a:ext>
             </a:extLst>
           </p:cNvPr>
@@ -7330,7 +7330,7 @@
           <p:cNvPr id="29" name="">
             <a:extLst xmlns:a="http://schemas.openxmlformats.org/drawingml/2006/main">
               <a:ext uri="{FF2B5EF4-FFF2-40B4-BE49-F238E27FC236}">
-                <a16:creationId xmlns:a16="http://schemas.microsoft.com/office/drawing/2014/main" id="{32BC8BD4-F032-446D-9A93-61607486F786}"/>
+                <a16:creationId xmlns:a16="http://schemas.microsoft.com/office/drawing/2014/main" id="{EE4B1753-5BC7-4CC1-A715-F1F1831E7B83}"/>
               </a:ext>
             </a:extLst>
           </p:cNvPr>
@@ -7363,7 +7363,7 @@
           <p:cNvPr id="30" name="">
             <a:extLst xmlns:a="http://schemas.openxmlformats.org/drawingml/2006/main">
               <a:ext uri="{FF2B5EF4-FFF2-40B4-BE49-F238E27FC236}">
-                <a16:creationId xmlns:a16="http://schemas.microsoft.com/office/drawing/2014/main" id="{A5BE8E01-1293-4573-B098-A70764DAF7EB}"/>
+                <a16:creationId xmlns:a16="http://schemas.microsoft.com/office/drawing/2014/main" id="{AB8514C4-F84C-4DF1-9CCC-676AF1A995B6}"/>
               </a:ext>
             </a:extLst>
           </p:cNvPr>
@@ -7413,7 +7413,7 @@
           <p:cNvPr id="31" name="">
             <a:extLst xmlns:a="http://schemas.openxmlformats.org/drawingml/2006/main">
               <a:ext uri="{FF2B5EF4-FFF2-40B4-BE49-F238E27FC236}">
-                <a16:creationId xmlns:a16="http://schemas.microsoft.com/office/drawing/2014/main" id="{BE919CB5-B692-4221-A28F-506219451904}"/>
+                <a16:creationId xmlns:a16="http://schemas.microsoft.com/office/drawing/2014/main" id="{F19E7CCE-0B73-465D-A618-F869BC97D5E5}"/>
               </a:ext>
             </a:extLst>
           </p:cNvPr>
@@ -7463,7 +7463,7 @@
           <p:cNvPr id="32" name="">
             <a:extLst xmlns:a="http://schemas.openxmlformats.org/drawingml/2006/main">
               <a:ext uri="{FF2B5EF4-FFF2-40B4-BE49-F238E27FC236}">
-                <a16:creationId xmlns:a16="http://schemas.microsoft.com/office/drawing/2014/main" id="{FBE17A45-5E15-43A5-B468-EF54177B6435}"/>
+                <a16:creationId xmlns:a16="http://schemas.microsoft.com/office/drawing/2014/main" id="{305B96F3-FD7A-491F-B1AE-115B8E3C5F76}"/>
               </a:ext>
             </a:extLst>
           </p:cNvPr>
@@ -7513,7 +7513,7 @@
           <p:cNvPr id="33" name="">
             <a:extLst xmlns:a="http://schemas.openxmlformats.org/drawingml/2006/main">
               <a:ext uri="{FF2B5EF4-FFF2-40B4-BE49-F238E27FC236}">
-                <a16:creationId xmlns:a16="http://schemas.microsoft.com/office/drawing/2014/main" id="{B45955FA-0C28-4D98-86C2-49B443678F48}"/>
+                <a16:creationId xmlns:a16="http://schemas.microsoft.com/office/drawing/2014/main" id="{9CFBE9D6-F29B-49DF-94DB-DD99C9E76D49}"/>
               </a:ext>
             </a:extLst>
           </p:cNvPr>
@@ -7563,7 +7563,7 @@
           <p:cNvPr id="34" name="">
             <a:extLst xmlns:a="http://schemas.openxmlformats.org/drawingml/2006/main">
               <a:ext uri="{FF2B5EF4-FFF2-40B4-BE49-F238E27FC236}">
-                <a16:creationId xmlns:a16="http://schemas.microsoft.com/office/drawing/2014/main" id="{BD97F84A-2747-4B8D-993C-76C7CF8462CB}"/>
+                <a16:creationId xmlns:a16="http://schemas.microsoft.com/office/drawing/2014/main" id="{175613AA-3342-43EE-94BD-D30D07476B46}"/>
               </a:ext>
             </a:extLst>
           </p:cNvPr>
@@ -7611,7 +7611,7 @@
     </p:spTree>
     <p:extLst>
       <p:ext uri="{BB962C8B-B14F-4D97-AF65-F5344CB8AC3E}">
-        <p14:creationId xmlns:p14="http://schemas.microsoft.com/office/powerpoint/2010/main" val="2071525094"/>
+        <p14:creationId xmlns:p14="http://schemas.microsoft.com/office/powerpoint/2010/main" val="1036150422"/>
       </p:ext>
     </p:extLst>
   </p:cSld>
@@ -7642,7 +7642,7 @@
           <p:cNvPr id="1" name="">
             <a:extLst xmlns:a="http://schemas.openxmlformats.org/drawingml/2006/main">
               <a:ext uri="{FF2B5EF4-FFF2-40B4-BE49-F238E27FC236}">
-                <a16:creationId xmlns:a16="http://schemas.microsoft.com/office/drawing/2014/main" id="{6986C3AE-D2DF-4FC9-ADDA-8F4FA4F818EB}"/>
+                <a16:creationId xmlns:a16="http://schemas.microsoft.com/office/drawing/2014/main" id="{2F8432A6-BA6F-4C53-8E9B-75FA2B7AEE95}"/>
               </a:ext>
             </a:extLst>
           </p:cNvPr>
@@ -7677,7 +7677,7 @@
           <p:nvPr/>
         </p:nvPicPr>
         <p:blipFill>
-          <a:blip xmlns:r="http://schemas.openxmlformats.org/officeDocument/2006/relationships" xmlns:a="http://schemas.openxmlformats.org/drawingml/2006/main" r:embed="Rc09be64f6b0e4782"/>
+          <a:blip xmlns:r="http://schemas.openxmlformats.org/officeDocument/2006/relationships" xmlns:a="http://schemas.openxmlformats.org/drawingml/2006/main" r:embed="R7f666f20b1b14169"/>
           <a:stretch xmlns:a="http://schemas.openxmlformats.org/drawingml/2006/main"/>
         </p:blipFill>
         <p:spPr>
@@ -7695,7 +7695,7 @@
           <p:cNvPr id="3" name="">
             <a:extLst xmlns:a="http://schemas.openxmlformats.org/drawingml/2006/main">
               <a:ext uri="{FF2B5EF4-FFF2-40B4-BE49-F238E27FC236}">
-                <a16:creationId xmlns:a16="http://schemas.microsoft.com/office/drawing/2014/main" id="{0EA3CF34-4ACD-4529-8822-D61928450AAD}"/>
+                <a16:creationId xmlns:a16="http://schemas.microsoft.com/office/drawing/2014/main" id="{10ED865D-F168-42E3-ACE6-71CACDCE56FC}"/>
               </a:ext>
             </a:extLst>
           </p:cNvPr>
@@ -7745,7 +7745,7 @@
           <p:cNvPr id="4" name="">
             <a:extLst xmlns:a="http://schemas.openxmlformats.org/drawingml/2006/main">
               <a:ext uri="{FF2B5EF4-FFF2-40B4-BE49-F238E27FC236}">
-                <a16:creationId xmlns:a16="http://schemas.microsoft.com/office/drawing/2014/main" id="{067438E2-8973-4D7E-AFFE-A973DBF98FB7}"/>
+                <a16:creationId xmlns:a16="http://schemas.microsoft.com/office/drawing/2014/main" id="{19B374C2-4119-47B1-A029-31D66E43DB7B}"/>
               </a:ext>
             </a:extLst>
           </p:cNvPr>
@@ -7778,7 +7778,7 @@
           <p:cNvPr id="5" name="">
             <a:extLst xmlns:a="http://schemas.openxmlformats.org/drawingml/2006/main">
               <a:ext uri="{FF2B5EF4-FFF2-40B4-BE49-F238E27FC236}">
-                <a16:creationId xmlns:a16="http://schemas.microsoft.com/office/drawing/2014/main" id="{1265068F-575A-4FD3-8E8C-D8315C80F478}"/>
+                <a16:creationId xmlns:a16="http://schemas.microsoft.com/office/drawing/2014/main" id="{A0C7D77E-A0B7-41A3-B7D8-AB4E2E9C2A31}"/>
               </a:ext>
             </a:extLst>
           </p:cNvPr>
@@ -7809,7 +7809,7 @@
           <p:cNvPr id="6" name="">
             <a:extLst xmlns:a="http://schemas.openxmlformats.org/drawingml/2006/main">
               <a:ext uri="{FF2B5EF4-FFF2-40B4-BE49-F238E27FC236}">
-                <a16:creationId xmlns:a16="http://schemas.microsoft.com/office/drawing/2014/main" id="{1501AB6A-68DF-4B48-96C2-80ACBFC55417}"/>
+                <a16:creationId xmlns:a16="http://schemas.microsoft.com/office/drawing/2014/main" id="{B69B1C33-556F-4B83-BED8-46E02CF29B58}"/>
               </a:ext>
             </a:extLst>
           </p:cNvPr>
@@ -7859,7 +7859,7 @@
           <p:cNvPr id="7" name="">
             <a:extLst xmlns:a="http://schemas.openxmlformats.org/drawingml/2006/main">
               <a:ext uri="{FF2B5EF4-FFF2-40B4-BE49-F238E27FC236}">
-                <a16:creationId xmlns:a16="http://schemas.microsoft.com/office/drawing/2014/main" id="{99DB7E4E-9C6A-450A-9515-2C8F6BB4BDC6}"/>
+                <a16:creationId xmlns:a16="http://schemas.microsoft.com/office/drawing/2014/main" id="{1B6F26B6-3C6A-4676-8BC3-1CEEB6695794}"/>
               </a:ext>
             </a:extLst>
           </p:cNvPr>
@@ -7909,7 +7909,7 @@
           <p:cNvPr id="8" name="">
             <a:extLst xmlns:a="http://schemas.openxmlformats.org/drawingml/2006/main">
               <a:ext uri="{FF2B5EF4-FFF2-40B4-BE49-F238E27FC236}">
-                <a16:creationId xmlns:a16="http://schemas.microsoft.com/office/drawing/2014/main" id="{8B1FA093-B518-4B5A-A2CD-B8AF2E815869}"/>
+                <a16:creationId xmlns:a16="http://schemas.microsoft.com/office/drawing/2014/main" id="{67835497-1531-4B3E-8E40-0B1DA2433D37}"/>
               </a:ext>
             </a:extLst>
           </p:cNvPr>
@@ -7944,7 +7944,7 @@
           <p:cNvPr id="9" name="">
             <a:extLst xmlns:a="http://schemas.openxmlformats.org/drawingml/2006/main">
               <a:ext uri="{FF2B5EF4-FFF2-40B4-BE49-F238E27FC236}">
-                <a16:creationId xmlns:a16="http://schemas.microsoft.com/office/drawing/2014/main" id="{AE62C747-47ED-4907-B2D4-E36245741F31}"/>
+                <a16:creationId xmlns:a16="http://schemas.microsoft.com/office/drawing/2014/main" id="{DA79E959-E60E-4999-941E-F3946F6C558C}"/>
               </a:ext>
             </a:extLst>
           </p:cNvPr>
@@ -7994,7 +7994,7 @@
           <p:cNvPr id="10" name="">
             <a:extLst xmlns:a="http://schemas.openxmlformats.org/drawingml/2006/main">
               <a:ext uri="{FF2B5EF4-FFF2-40B4-BE49-F238E27FC236}">
-                <a16:creationId xmlns:a16="http://schemas.microsoft.com/office/drawing/2014/main" id="{58D28A38-3A44-482C-AB8C-1F9C0B79B1F0}"/>
+                <a16:creationId xmlns:a16="http://schemas.microsoft.com/office/drawing/2014/main" id="{EEDDDA7B-E4F2-411D-AD53-C8F69DD86535}"/>
               </a:ext>
             </a:extLst>
           </p:cNvPr>
@@ -8044,7 +8044,7 @@
           <p:cNvPr id="11" name="">
             <a:extLst xmlns:a="http://schemas.openxmlformats.org/drawingml/2006/main">
               <a:ext uri="{FF2B5EF4-FFF2-40B4-BE49-F238E27FC236}">
-                <a16:creationId xmlns:a16="http://schemas.microsoft.com/office/drawing/2014/main" id="{50BC1984-367E-4B2D-B63C-2CDC8F8BFBBC}"/>
+                <a16:creationId xmlns:a16="http://schemas.microsoft.com/office/drawing/2014/main" id="{F5C3BA58-7C1D-4826-96F3-517D5D7C4CB1}"/>
               </a:ext>
             </a:extLst>
           </p:cNvPr>
@@ -8094,7 +8094,7 @@
           <p:cNvPr id="12" name="">
             <a:extLst xmlns:a="http://schemas.openxmlformats.org/drawingml/2006/main">
               <a:ext uri="{FF2B5EF4-FFF2-40B4-BE49-F238E27FC236}">
-                <a16:creationId xmlns:a16="http://schemas.microsoft.com/office/drawing/2014/main" id="{E3BD7251-0124-4731-B86C-B6DDAB12882C}"/>
+                <a16:creationId xmlns:a16="http://schemas.microsoft.com/office/drawing/2014/main" id="{57A6CC37-4597-4362-A44F-0E26A1F32806}"/>
               </a:ext>
             </a:extLst>
           </p:cNvPr>
@@ -8125,7 +8125,7 @@
           <p:cNvPr id="13" name="">
             <a:extLst xmlns:a="http://schemas.openxmlformats.org/drawingml/2006/main">
               <a:ext uri="{FF2B5EF4-FFF2-40B4-BE49-F238E27FC236}">
-                <a16:creationId xmlns:a16="http://schemas.microsoft.com/office/drawing/2014/main" id="{C3495BC9-30FD-43F8-BE50-F9C58729F6D5}"/>
+                <a16:creationId xmlns:a16="http://schemas.microsoft.com/office/drawing/2014/main" id="{1382465B-A72B-42E1-9391-B82F1D43C5F2}"/>
               </a:ext>
             </a:extLst>
           </p:cNvPr>
@@ -8175,7 +8175,7 @@
           <p:cNvPr id="14" name="">
             <a:extLst xmlns:a="http://schemas.openxmlformats.org/drawingml/2006/main">
               <a:ext uri="{FF2B5EF4-FFF2-40B4-BE49-F238E27FC236}">
-                <a16:creationId xmlns:a16="http://schemas.microsoft.com/office/drawing/2014/main" id="{7B7E36C6-22AC-43F5-B986-13789E21000A}"/>
+                <a16:creationId xmlns:a16="http://schemas.microsoft.com/office/drawing/2014/main" id="{ECB76D31-8DDB-4F83-81E9-3066CB0E4690}"/>
               </a:ext>
             </a:extLst>
           </p:cNvPr>
@@ -8225,7 +8225,7 @@
           <p:cNvPr id="15" name="">
             <a:extLst xmlns:a="http://schemas.openxmlformats.org/drawingml/2006/main">
               <a:ext uri="{FF2B5EF4-FFF2-40B4-BE49-F238E27FC236}">
-                <a16:creationId xmlns:a16="http://schemas.microsoft.com/office/drawing/2014/main" id="{43F7598E-933A-45E6-8041-4A6B674AC39E}"/>
+                <a16:creationId xmlns:a16="http://schemas.microsoft.com/office/drawing/2014/main" id="{6FB296F4-72D5-4278-96B4-7A67F13D15E0}"/>
               </a:ext>
             </a:extLst>
           </p:cNvPr>
@@ -8275,7 +8275,7 @@
           <p:cNvPr id="16" name="">
             <a:extLst xmlns:a="http://schemas.openxmlformats.org/drawingml/2006/main">
               <a:ext uri="{FF2B5EF4-FFF2-40B4-BE49-F238E27FC236}">
-                <a16:creationId xmlns:a16="http://schemas.microsoft.com/office/drawing/2014/main" id="{AE03BA0D-7518-4DA1-89CB-62E9B26E673F}"/>
+                <a16:creationId xmlns:a16="http://schemas.microsoft.com/office/drawing/2014/main" id="{4067FE88-B21D-4F43-9E01-3134E1B07D32}"/>
               </a:ext>
             </a:extLst>
           </p:cNvPr>
@@ -8325,7 +8325,7 @@
           <p:cNvPr id="17" name="">
             <a:extLst xmlns:a="http://schemas.openxmlformats.org/drawingml/2006/main">
               <a:ext uri="{FF2B5EF4-FFF2-40B4-BE49-F238E27FC236}">
-                <a16:creationId xmlns:a16="http://schemas.microsoft.com/office/drawing/2014/main" id="{99D68C1B-4503-47BC-B448-6C73FB33F87C}"/>
+                <a16:creationId xmlns:a16="http://schemas.microsoft.com/office/drawing/2014/main" id="{6E45A93B-9CDC-40F4-8BB3-0A2E498AD090}"/>
               </a:ext>
             </a:extLst>
           </p:cNvPr>
@@ -8360,7 +8360,7 @@
           <p:cNvPr id="18" name="">
             <a:extLst xmlns:a="http://schemas.openxmlformats.org/drawingml/2006/main">
               <a:ext uri="{FF2B5EF4-FFF2-40B4-BE49-F238E27FC236}">
-                <a16:creationId xmlns:a16="http://schemas.microsoft.com/office/drawing/2014/main" id="{EB2C2485-1441-4EFD-9E38-528CDF07A616}"/>
+                <a16:creationId xmlns:a16="http://schemas.microsoft.com/office/drawing/2014/main" id="{A713EC2E-0DF2-4CCB-9AC9-4298145EBE81}"/>
               </a:ext>
             </a:extLst>
           </p:cNvPr>
@@ -8410,7 +8410,7 @@
           <p:cNvPr id="19" name="">
             <a:extLst xmlns:a="http://schemas.openxmlformats.org/drawingml/2006/main">
               <a:ext uri="{FF2B5EF4-FFF2-40B4-BE49-F238E27FC236}">
-                <a16:creationId xmlns:a16="http://schemas.microsoft.com/office/drawing/2014/main" id="{C317CFE2-2B2D-42EA-BE21-1F4E4AD7D382}"/>
+                <a16:creationId xmlns:a16="http://schemas.microsoft.com/office/drawing/2014/main" id="{62014147-D97B-48FC-834D-C67981D8DE51}"/>
               </a:ext>
             </a:extLst>
           </p:cNvPr>
@@ -8460,7 +8460,7 @@
           <p:cNvPr id="20" name="">
             <a:extLst xmlns:a="http://schemas.openxmlformats.org/drawingml/2006/main">
               <a:ext uri="{FF2B5EF4-FFF2-40B4-BE49-F238E27FC236}">
-                <a16:creationId xmlns:a16="http://schemas.microsoft.com/office/drawing/2014/main" id="{C05CDD2F-1D34-4958-A449-348A12B99684}"/>
+                <a16:creationId xmlns:a16="http://schemas.microsoft.com/office/drawing/2014/main" id="{18AD6679-8C83-4F14-A699-9DF3C7C05687}"/>
               </a:ext>
             </a:extLst>
           </p:cNvPr>
@@ -8510,7 +8510,7 @@
           <p:cNvPr id="21" name="">
             <a:extLst xmlns:a="http://schemas.openxmlformats.org/drawingml/2006/main">
               <a:ext uri="{FF2B5EF4-FFF2-40B4-BE49-F238E27FC236}">
-                <a16:creationId xmlns:a16="http://schemas.microsoft.com/office/drawing/2014/main" id="{A11ABA0E-8CA6-4C19-BCDE-1ED1CCCD2C18}"/>
+                <a16:creationId xmlns:a16="http://schemas.microsoft.com/office/drawing/2014/main" id="{C8041FE5-DC93-4515-BFB8-9B3E24A427B0}"/>
               </a:ext>
             </a:extLst>
           </p:cNvPr>
@@ -8541,7 +8541,7 @@
           <p:cNvPr id="22" name="">
             <a:extLst xmlns:a="http://schemas.openxmlformats.org/drawingml/2006/main">
               <a:ext uri="{FF2B5EF4-FFF2-40B4-BE49-F238E27FC236}">
-                <a16:creationId xmlns:a16="http://schemas.microsoft.com/office/drawing/2014/main" id="{7E9F6227-5794-450F-B88F-8457A9B40086}"/>
+                <a16:creationId xmlns:a16="http://schemas.microsoft.com/office/drawing/2014/main" id="{D142A0EF-3934-4D64-B509-2EF5B0BBA53B}"/>
               </a:ext>
             </a:extLst>
           </p:cNvPr>
@@ -8591,7 +8591,7 @@
           <p:cNvPr id="23" name="">
             <a:extLst xmlns:a="http://schemas.openxmlformats.org/drawingml/2006/main">
               <a:ext uri="{FF2B5EF4-FFF2-40B4-BE49-F238E27FC236}">
-                <a16:creationId xmlns:a16="http://schemas.microsoft.com/office/drawing/2014/main" id="{A3AF865E-4EA5-4004-9E7D-769C57335B91}"/>
+                <a16:creationId xmlns:a16="http://schemas.microsoft.com/office/drawing/2014/main" id="{6595A062-ABA5-4FEB-AAAF-078C67A9E90D}"/>
               </a:ext>
             </a:extLst>
           </p:cNvPr>
@@ -8641,7 +8641,7 @@
           <p:cNvPr id="24" name="">
             <a:extLst xmlns:a="http://schemas.openxmlformats.org/drawingml/2006/main">
               <a:ext uri="{FF2B5EF4-FFF2-40B4-BE49-F238E27FC236}">
-                <a16:creationId xmlns:a16="http://schemas.microsoft.com/office/drawing/2014/main" id="{B3C9626E-912B-4B47-895C-DE85D088E1DF}"/>
+                <a16:creationId xmlns:a16="http://schemas.microsoft.com/office/drawing/2014/main" id="{5E9988D8-804E-4C7D-8D86-A07C9AEEB6BD}"/>
               </a:ext>
             </a:extLst>
           </p:cNvPr>
@@ -8691,7 +8691,7 @@
           <p:cNvPr id="25" name="">
             <a:extLst xmlns:a="http://schemas.openxmlformats.org/drawingml/2006/main">
               <a:ext uri="{FF2B5EF4-FFF2-40B4-BE49-F238E27FC236}">
-                <a16:creationId xmlns:a16="http://schemas.microsoft.com/office/drawing/2014/main" id="{F93D7128-C0AC-4E87-B3AE-2098102BEC28}"/>
+                <a16:creationId xmlns:a16="http://schemas.microsoft.com/office/drawing/2014/main" id="{B27DD719-292F-46CD-8293-C45E7BDAABD1}"/>
               </a:ext>
             </a:extLst>
           </p:cNvPr>
@@ -8741,7 +8741,7 @@
           <p:cNvPr id="26" name="">
             <a:extLst xmlns:a="http://schemas.openxmlformats.org/drawingml/2006/main">
               <a:ext uri="{FF2B5EF4-FFF2-40B4-BE49-F238E27FC236}">
-                <a16:creationId xmlns:a16="http://schemas.microsoft.com/office/drawing/2014/main" id="{2B7E9670-0F47-42A8-A4F5-CCC13BD10231}"/>
+                <a16:creationId xmlns:a16="http://schemas.microsoft.com/office/drawing/2014/main" id="{AAAB48DC-127F-4564-A76C-4A34CF991661}"/>
               </a:ext>
             </a:extLst>
           </p:cNvPr>
@@ -8776,7 +8776,7 @@
           <p:cNvPr id="27" name="">
             <a:extLst xmlns:a="http://schemas.openxmlformats.org/drawingml/2006/main">
               <a:ext uri="{FF2B5EF4-FFF2-40B4-BE49-F238E27FC236}">
-                <a16:creationId xmlns:a16="http://schemas.microsoft.com/office/drawing/2014/main" id="{F0F2062A-FF07-47C5-8322-BC17631760B5}"/>
+                <a16:creationId xmlns:a16="http://schemas.microsoft.com/office/drawing/2014/main" id="{4FB477D6-E116-4A7C-B35C-CB656C8E0A75}"/>
               </a:ext>
             </a:extLst>
           </p:cNvPr>
@@ -8826,7 +8826,7 @@
           <p:cNvPr id="28" name="">
             <a:extLst xmlns:a="http://schemas.openxmlformats.org/drawingml/2006/main">
               <a:ext uri="{FF2B5EF4-FFF2-40B4-BE49-F238E27FC236}">
-                <a16:creationId xmlns:a16="http://schemas.microsoft.com/office/drawing/2014/main" id="{F84CC5A8-7E5F-4F26-86BA-ADA72418ED31}"/>
+                <a16:creationId xmlns:a16="http://schemas.microsoft.com/office/drawing/2014/main" id="{08FDAD6F-B2F1-45E8-B4C3-13F3F7D77BCF}"/>
               </a:ext>
             </a:extLst>
           </p:cNvPr>
@@ -8876,7 +8876,7 @@
           <p:cNvPr id="29" name="">
             <a:extLst xmlns:a="http://schemas.openxmlformats.org/drawingml/2006/main">
               <a:ext uri="{FF2B5EF4-FFF2-40B4-BE49-F238E27FC236}">
-                <a16:creationId xmlns:a16="http://schemas.microsoft.com/office/drawing/2014/main" id="{6ED6A20F-162E-4F1B-9245-87FA8E27F424}"/>
+                <a16:creationId xmlns:a16="http://schemas.microsoft.com/office/drawing/2014/main" id="{9DA1B32E-BED8-43DD-A1B2-29B45719400D}"/>
               </a:ext>
             </a:extLst>
           </p:cNvPr>
@@ -8926,7 +8926,7 @@
           <p:cNvPr id="30" name="">
             <a:extLst xmlns:a="http://schemas.openxmlformats.org/drawingml/2006/main">
               <a:ext uri="{FF2B5EF4-FFF2-40B4-BE49-F238E27FC236}">
-                <a16:creationId xmlns:a16="http://schemas.microsoft.com/office/drawing/2014/main" id="{D36CF555-E5D4-4994-856F-E1E0DC94A2C7}"/>
+                <a16:creationId xmlns:a16="http://schemas.microsoft.com/office/drawing/2014/main" id="{632EA6FC-76CA-45A6-B527-8649CF1BBD87}"/>
               </a:ext>
             </a:extLst>
           </p:cNvPr>
@@ -8957,7 +8957,7 @@
           <p:cNvPr id="31" name="">
             <a:extLst xmlns:a="http://schemas.openxmlformats.org/drawingml/2006/main">
               <a:ext uri="{FF2B5EF4-FFF2-40B4-BE49-F238E27FC236}">
-                <a16:creationId xmlns:a16="http://schemas.microsoft.com/office/drawing/2014/main" id="{97F712AE-E7FE-4BA5-A774-E364E0C16814}"/>
+                <a16:creationId xmlns:a16="http://schemas.microsoft.com/office/drawing/2014/main" id="{D0B6261C-8070-4212-916E-D43FDAA97EB2}"/>
               </a:ext>
             </a:extLst>
           </p:cNvPr>
@@ -9007,7 +9007,7 @@
           <p:cNvPr id="32" name="">
             <a:extLst xmlns:a="http://schemas.openxmlformats.org/drawingml/2006/main">
               <a:ext uri="{FF2B5EF4-FFF2-40B4-BE49-F238E27FC236}">
-                <a16:creationId xmlns:a16="http://schemas.microsoft.com/office/drawing/2014/main" id="{6E4A5F34-8760-469A-B13D-E6845D417F1C}"/>
+                <a16:creationId xmlns:a16="http://schemas.microsoft.com/office/drawing/2014/main" id="{D146F02F-454D-4D83-A393-70635E508AD3}"/>
               </a:ext>
             </a:extLst>
           </p:cNvPr>
@@ -9057,7 +9057,7 @@
           <p:cNvPr id="33" name="">
             <a:extLst xmlns:a="http://schemas.openxmlformats.org/drawingml/2006/main">
               <a:ext uri="{FF2B5EF4-FFF2-40B4-BE49-F238E27FC236}">
-                <a16:creationId xmlns:a16="http://schemas.microsoft.com/office/drawing/2014/main" id="{87D5BC20-9B05-4DE4-B053-94F939D0BC61}"/>
+                <a16:creationId xmlns:a16="http://schemas.microsoft.com/office/drawing/2014/main" id="{F1E94BC0-2765-44D3-820C-D4F133B4899C}"/>
               </a:ext>
             </a:extLst>
           </p:cNvPr>
@@ -9107,7 +9107,7 @@
           <p:cNvPr id="34" name="">
             <a:extLst xmlns:a="http://schemas.openxmlformats.org/drawingml/2006/main">
               <a:ext uri="{FF2B5EF4-FFF2-40B4-BE49-F238E27FC236}">
-                <a16:creationId xmlns:a16="http://schemas.microsoft.com/office/drawing/2014/main" id="{5F2534AA-2F79-4903-87EA-0E132735B25C}"/>
+                <a16:creationId xmlns:a16="http://schemas.microsoft.com/office/drawing/2014/main" id="{EE7B733B-38F5-46BF-8111-FD0CF484780F}"/>
               </a:ext>
             </a:extLst>
           </p:cNvPr>
@@ -9157,7 +9157,7 @@
           <p:cNvPr id="35" name="">
             <a:extLst xmlns:a="http://schemas.openxmlformats.org/drawingml/2006/main">
               <a:ext uri="{FF2B5EF4-FFF2-40B4-BE49-F238E27FC236}">
-                <a16:creationId xmlns:a16="http://schemas.microsoft.com/office/drawing/2014/main" id="{DF543A5F-8295-40A3-81F3-1C107DAA1F82}"/>
+                <a16:creationId xmlns:a16="http://schemas.microsoft.com/office/drawing/2014/main" id="{F8434C4D-293B-4152-BBE4-DCD1FD58C257}"/>
               </a:ext>
             </a:extLst>
           </p:cNvPr>
@@ -9192,7 +9192,7 @@
           <p:cNvPr id="36" name="">
             <a:extLst xmlns:a="http://schemas.openxmlformats.org/drawingml/2006/main">
               <a:ext uri="{FF2B5EF4-FFF2-40B4-BE49-F238E27FC236}">
-                <a16:creationId xmlns:a16="http://schemas.microsoft.com/office/drawing/2014/main" id="{8F99DA0D-CA47-455C-9869-7AD035122DAF}"/>
+                <a16:creationId xmlns:a16="http://schemas.microsoft.com/office/drawing/2014/main" id="{7870068B-CF35-4D94-9748-726D9E90C540}"/>
               </a:ext>
             </a:extLst>
           </p:cNvPr>
@@ -9242,7 +9242,7 @@
           <p:cNvPr id="37" name="">
             <a:extLst xmlns:a="http://schemas.openxmlformats.org/drawingml/2006/main">
               <a:ext uri="{FF2B5EF4-FFF2-40B4-BE49-F238E27FC236}">
-                <a16:creationId xmlns:a16="http://schemas.microsoft.com/office/drawing/2014/main" id="{7AD7A722-9E9A-4D2D-A00D-E8315D85E89D}"/>
+                <a16:creationId xmlns:a16="http://schemas.microsoft.com/office/drawing/2014/main" id="{48C729FA-C03D-412F-ABF8-AC0BCA82FD50}"/>
               </a:ext>
             </a:extLst>
           </p:cNvPr>
@@ -9292,7 +9292,7 @@
           <p:cNvPr id="38" name="">
             <a:extLst xmlns:a="http://schemas.openxmlformats.org/drawingml/2006/main">
               <a:ext uri="{FF2B5EF4-FFF2-40B4-BE49-F238E27FC236}">
-                <a16:creationId xmlns:a16="http://schemas.microsoft.com/office/drawing/2014/main" id="{8AAE9DA1-BFEE-4A77-AA1A-38455F7CCC81}"/>
+                <a16:creationId xmlns:a16="http://schemas.microsoft.com/office/drawing/2014/main" id="{AF3DBA1B-E438-40A4-A4CC-CED18B91F464}"/>
               </a:ext>
             </a:extLst>
           </p:cNvPr>
@@ -9342,7 +9342,7 @@
           <p:cNvPr id="39" name="">
             <a:extLst xmlns:a="http://schemas.openxmlformats.org/drawingml/2006/main">
               <a:ext uri="{FF2B5EF4-FFF2-40B4-BE49-F238E27FC236}">
-                <a16:creationId xmlns:a16="http://schemas.microsoft.com/office/drawing/2014/main" id="{EFEB6F86-76D5-4A54-B7DB-9E3922678081}"/>
+                <a16:creationId xmlns:a16="http://schemas.microsoft.com/office/drawing/2014/main" id="{E1A5A174-9155-4E18-B0E4-B37C9FB527E9}"/>
               </a:ext>
             </a:extLst>
           </p:cNvPr>
@@ -9373,7 +9373,7 @@
           <p:cNvPr id="40" name="">
             <a:extLst xmlns:a="http://schemas.openxmlformats.org/drawingml/2006/main">
               <a:ext uri="{FF2B5EF4-FFF2-40B4-BE49-F238E27FC236}">
-                <a16:creationId xmlns:a16="http://schemas.microsoft.com/office/drawing/2014/main" id="{3600EC42-FC83-44BE-AE12-CDBB110B7A1C}"/>
+                <a16:creationId xmlns:a16="http://schemas.microsoft.com/office/drawing/2014/main" id="{07447FA0-0D04-4C8B-9EF5-192DA1988451}"/>
               </a:ext>
             </a:extLst>
           </p:cNvPr>
@@ -9423,7 +9423,7 @@
           <p:cNvPr id="41" name="">
             <a:extLst xmlns:a="http://schemas.openxmlformats.org/drawingml/2006/main">
               <a:ext uri="{FF2B5EF4-FFF2-40B4-BE49-F238E27FC236}">
-                <a16:creationId xmlns:a16="http://schemas.microsoft.com/office/drawing/2014/main" id="{6B1D3FDC-003A-4059-A4BF-FA46D36F8F83}"/>
+                <a16:creationId xmlns:a16="http://schemas.microsoft.com/office/drawing/2014/main" id="{81228415-E52F-4615-B9A7-DC2964FAFDD6}"/>
               </a:ext>
             </a:extLst>
           </p:cNvPr>
@@ -9473,7 +9473,7 @@
           <p:cNvPr id="42" name="">
             <a:extLst xmlns:a="http://schemas.openxmlformats.org/drawingml/2006/main">
               <a:ext uri="{FF2B5EF4-FFF2-40B4-BE49-F238E27FC236}">
-                <a16:creationId xmlns:a16="http://schemas.microsoft.com/office/drawing/2014/main" id="{A293322C-8F30-4FC1-8A4F-A6339D247D7F}"/>
+                <a16:creationId xmlns:a16="http://schemas.microsoft.com/office/drawing/2014/main" id="{8A075D40-9039-4FE4-9AC6-2388D3DA62E9}"/>
               </a:ext>
             </a:extLst>
           </p:cNvPr>
@@ -9523,7 +9523,7 @@
           <p:cNvPr id="43" name="">
             <a:extLst xmlns:a="http://schemas.openxmlformats.org/drawingml/2006/main">
               <a:ext uri="{FF2B5EF4-FFF2-40B4-BE49-F238E27FC236}">
-                <a16:creationId xmlns:a16="http://schemas.microsoft.com/office/drawing/2014/main" id="{9AFBF806-AE06-42E2-A0F2-6D6E8F65CDDA}"/>
+                <a16:creationId xmlns:a16="http://schemas.microsoft.com/office/drawing/2014/main" id="{EF7E5844-E5F6-4097-9050-FB0FE4C6D01E}"/>
               </a:ext>
             </a:extLst>
           </p:cNvPr>
@@ -9571,7 +9571,7 @@
     </p:spTree>
     <p:extLst>
       <p:ext uri="{BB962C8B-B14F-4D97-AF65-F5344CB8AC3E}">
-        <p14:creationId xmlns:p14="http://schemas.microsoft.com/office/powerpoint/2010/main" val="86013513"/>
+        <p14:creationId xmlns:p14="http://schemas.microsoft.com/office/powerpoint/2010/main" val="19954553"/>
       </p:ext>
     </p:extLst>
   </p:cSld>
@@ -9602,7 +9602,7 @@
           <p:cNvPr id="1" name="">
             <a:extLst xmlns:a="http://schemas.openxmlformats.org/drawingml/2006/main">
               <a:ext uri="{FF2B5EF4-FFF2-40B4-BE49-F238E27FC236}">
-                <a16:creationId xmlns:a16="http://schemas.microsoft.com/office/drawing/2014/main" id="{0CFC59F1-4B8B-4320-941D-511E855286CF}"/>
+                <a16:creationId xmlns:a16="http://schemas.microsoft.com/office/drawing/2014/main" id="{0AF8DAEC-1BD1-4572-8A5E-B9636088C003}"/>
               </a:ext>
             </a:extLst>
           </p:cNvPr>
@@ -9637,7 +9637,7 @@
           <p:nvPr/>
         </p:nvPicPr>
         <p:blipFill>
-          <a:blip xmlns:r="http://schemas.openxmlformats.org/officeDocument/2006/relationships" xmlns:a="http://schemas.openxmlformats.org/drawingml/2006/main" r:embed="R745791cb48004881"/>
+          <a:blip xmlns:r="http://schemas.openxmlformats.org/officeDocument/2006/relationships" xmlns:a="http://schemas.openxmlformats.org/drawingml/2006/main" r:embed="R22f1e195a05e43fe"/>
           <a:stretch xmlns:a="http://schemas.openxmlformats.org/drawingml/2006/main"/>
         </p:blipFill>
         <p:spPr>
@@ -9655,7 +9655,7 @@
           <p:cNvPr id="3" name="">
             <a:extLst xmlns:a="http://schemas.openxmlformats.org/drawingml/2006/main">
               <a:ext uri="{FF2B5EF4-FFF2-40B4-BE49-F238E27FC236}">
-                <a16:creationId xmlns:a16="http://schemas.microsoft.com/office/drawing/2014/main" id="{FBCED016-A0EA-4019-8555-F5015A77C2AF}"/>
+                <a16:creationId xmlns:a16="http://schemas.microsoft.com/office/drawing/2014/main" id="{1AE31968-ABC6-4A3F-ABE3-FAABCFCE0EA2}"/>
               </a:ext>
             </a:extLst>
           </p:cNvPr>
@@ -9705,7 +9705,7 @@
           <p:cNvPr id="4" name="">
             <a:extLst xmlns:a="http://schemas.openxmlformats.org/drawingml/2006/main">
               <a:ext uri="{FF2B5EF4-FFF2-40B4-BE49-F238E27FC236}">
-                <a16:creationId xmlns:a16="http://schemas.microsoft.com/office/drawing/2014/main" id="{3649F5BD-1098-4B0A-BC1F-86A2A2C78C2E}"/>
+                <a16:creationId xmlns:a16="http://schemas.microsoft.com/office/drawing/2014/main" id="{C39364CF-90EA-41B3-99D5-39C9D087651D}"/>
               </a:ext>
             </a:extLst>
           </p:cNvPr>
@@ -9738,7 +9738,7 @@
           <p:cNvPr id="5" name="">
             <a:extLst xmlns:a="http://schemas.openxmlformats.org/drawingml/2006/main">
               <a:ext uri="{FF2B5EF4-FFF2-40B4-BE49-F238E27FC236}">
-                <a16:creationId xmlns:a16="http://schemas.microsoft.com/office/drawing/2014/main" id="{1AA58761-0CBE-4442-9D9B-16BE5F653027}"/>
+                <a16:creationId xmlns:a16="http://schemas.microsoft.com/office/drawing/2014/main" id="{1B4DBEFB-98B6-43DB-8258-6DA6FC7549F4}"/>
               </a:ext>
             </a:extLst>
           </p:cNvPr>
@@ -9769,7 +9769,7 @@
           <p:cNvPr id="6" name="">
             <a:extLst xmlns:a="http://schemas.openxmlformats.org/drawingml/2006/main">
               <a:ext uri="{FF2B5EF4-FFF2-40B4-BE49-F238E27FC236}">
-                <a16:creationId xmlns:a16="http://schemas.microsoft.com/office/drawing/2014/main" id="{EF0F898F-FA60-4F78-9AAE-AEAE931704C6}"/>
+                <a16:creationId xmlns:a16="http://schemas.microsoft.com/office/drawing/2014/main" id="{1C724B38-2502-4E79-BD17-3F2594CB0717}"/>
               </a:ext>
             </a:extLst>
           </p:cNvPr>
@@ -9819,7 +9819,7 @@
           <p:cNvPr id="7" name="">
             <a:extLst xmlns:a="http://schemas.openxmlformats.org/drawingml/2006/main">
               <a:ext uri="{FF2B5EF4-FFF2-40B4-BE49-F238E27FC236}">
-                <a16:creationId xmlns:a16="http://schemas.microsoft.com/office/drawing/2014/main" id="{1FE3D21E-5ED4-4319-AE7B-FFED5512951F}"/>
+                <a16:creationId xmlns:a16="http://schemas.microsoft.com/office/drawing/2014/main" id="{C29CAC24-DF30-47C8-9985-7B9F35044E6E}"/>
               </a:ext>
             </a:extLst>
           </p:cNvPr>
@@ -9869,7 +9869,7 @@
           <p:cNvPr id="8" name="">
             <a:extLst xmlns:a="http://schemas.openxmlformats.org/drawingml/2006/main">
               <a:ext uri="{FF2B5EF4-FFF2-40B4-BE49-F238E27FC236}">
-                <a16:creationId xmlns:a16="http://schemas.microsoft.com/office/drawing/2014/main" id="{FEB04B77-A36F-4E7B-BCBF-61B72B99AEE3}"/>
+                <a16:creationId xmlns:a16="http://schemas.microsoft.com/office/drawing/2014/main" id="{0E729CC3-6EC9-4F4E-9D12-75E7B7A81659}"/>
               </a:ext>
             </a:extLst>
           </p:cNvPr>
@@ -9904,7 +9904,7 @@
           <p:cNvPr id="9" name="">
             <a:extLst xmlns:a="http://schemas.openxmlformats.org/drawingml/2006/main">
               <a:ext uri="{FF2B5EF4-FFF2-40B4-BE49-F238E27FC236}">
-                <a16:creationId xmlns:a16="http://schemas.microsoft.com/office/drawing/2014/main" id="{5A919467-AB07-49B6-9FB3-67440CDDC3B3}"/>
+                <a16:creationId xmlns:a16="http://schemas.microsoft.com/office/drawing/2014/main" id="{E3174E95-2D56-423E-8CAD-7F039C6CD69E}"/>
               </a:ext>
             </a:extLst>
           </p:cNvPr>
@@ -9954,7 +9954,7 @@
           <p:cNvPr id="10" name="">
             <a:extLst xmlns:a="http://schemas.openxmlformats.org/drawingml/2006/main">
               <a:ext uri="{FF2B5EF4-FFF2-40B4-BE49-F238E27FC236}">
-                <a16:creationId xmlns:a16="http://schemas.microsoft.com/office/drawing/2014/main" id="{4F7F635A-74F0-456F-A371-C341DF974C4B}"/>
+                <a16:creationId xmlns:a16="http://schemas.microsoft.com/office/drawing/2014/main" id="{48B4E14E-AC65-4B95-BCF0-86EBF30565A7}"/>
               </a:ext>
             </a:extLst>
           </p:cNvPr>
@@ -10004,7 +10004,7 @@
           <p:cNvPr id="11" name="">
             <a:extLst xmlns:a="http://schemas.openxmlformats.org/drawingml/2006/main">
               <a:ext uri="{FF2B5EF4-FFF2-40B4-BE49-F238E27FC236}">
-                <a16:creationId xmlns:a16="http://schemas.microsoft.com/office/drawing/2014/main" id="{3E3438C0-9E2B-4F90-B65C-2C192B4D5508}"/>
+                <a16:creationId xmlns:a16="http://schemas.microsoft.com/office/drawing/2014/main" id="{0D2A909D-C2C4-48BF-A46F-5D740E6F3CB8}"/>
               </a:ext>
             </a:extLst>
           </p:cNvPr>
@@ -10054,7 +10054,7 @@
           <p:cNvPr id="12" name="">
             <a:extLst xmlns:a="http://schemas.openxmlformats.org/drawingml/2006/main">
               <a:ext uri="{FF2B5EF4-FFF2-40B4-BE49-F238E27FC236}">
-                <a16:creationId xmlns:a16="http://schemas.microsoft.com/office/drawing/2014/main" id="{FDB5AB2F-8D81-498D-8DBB-F39ABBD8E583}"/>
+                <a16:creationId xmlns:a16="http://schemas.microsoft.com/office/drawing/2014/main" id="{81B8E7F5-76F6-43D3-8BAD-310B52027C0F}"/>
               </a:ext>
             </a:extLst>
           </p:cNvPr>
@@ -10085,7 +10085,7 @@
           <p:cNvPr id="13" name="">
             <a:extLst xmlns:a="http://schemas.openxmlformats.org/drawingml/2006/main">
               <a:ext uri="{FF2B5EF4-FFF2-40B4-BE49-F238E27FC236}">
-                <a16:creationId xmlns:a16="http://schemas.microsoft.com/office/drawing/2014/main" id="{5C992FCC-C2B6-4E68-81FD-5E1B3AFDD808}"/>
+                <a16:creationId xmlns:a16="http://schemas.microsoft.com/office/drawing/2014/main" id="{4150038F-95AD-445A-8D0E-85CC68558742}"/>
               </a:ext>
             </a:extLst>
           </p:cNvPr>
@@ -10135,7 +10135,7 @@
           <p:cNvPr id="14" name="">
             <a:extLst xmlns:a="http://schemas.openxmlformats.org/drawingml/2006/main">
               <a:ext uri="{FF2B5EF4-FFF2-40B4-BE49-F238E27FC236}">
-                <a16:creationId xmlns:a16="http://schemas.microsoft.com/office/drawing/2014/main" id="{7E4CFE56-83C7-4A2D-A2F6-C54ED453ED39}"/>
+                <a16:creationId xmlns:a16="http://schemas.microsoft.com/office/drawing/2014/main" id="{D555EB94-7A76-47BB-B524-51FCD87EBA4C}"/>
               </a:ext>
             </a:extLst>
           </p:cNvPr>
@@ -10185,7 +10185,7 @@
           <p:cNvPr id="15" name="">
             <a:extLst xmlns:a="http://schemas.openxmlformats.org/drawingml/2006/main">
               <a:ext uri="{FF2B5EF4-FFF2-40B4-BE49-F238E27FC236}">
-                <a16:creationId xmlns:a16="http://schemas.microsoft.com/office/drawing/2014/main" id="{9B1E745C-4EC8-4151-A356-D7F58B40CAAD}"/>
+                <a16:creationId xmlns:a16="http://schemas.microsoft.com/office/drawing/2014/main" id="{E998BA3C-F140-4AF6-9A89-EC9D928E9388}"/>
               </a:ext>
             </a:extLst>
           </p:cNvPr>
@@ -10235,7 +10235,7 @@
           <p:cNvPr id="16" name="">
             <a:extLst xmlns:a="http://schemas.openxmlformats.org/drawingml/2006/main">
               <a:ext uri="{FF2B5EF4-FFF2-40B4-BE49-F238E27FC236}">
-                <a16:creationId xmlns:a16="http://schemas.microsoft.com/office/drawing/2014/main" id="{544857D5-0CF0-4983-8454-B855D0D7CDCF}"/>
+                <a16:creationId xmlns:a16="http://schemas.microsoft.com/office/drawing/2014/main" id="{D76FE7A5-42BD-4111-B7D0-86F158D59382}"/>
               </a:ext>
             </a:extLst>
           </p:cNvPr>
@@ -10285,7 +10285,7 @@
           <p:cNvPr id="17" name="">
             <a:extLst xmlns:a="http://schemas.openxmlformats.org/drawingml/2006/main">
               <a:ext uri="{FF2B5EF4-FFF2-40B4-BE49-F238E27FC236}">
-                <a16:creationId xmlns:a16="http://schemas.microsoft.com/office/drawing/2014/main" id="{F74E670E-A139-4B40-9245-7E4F44AB6224}"/>
+                <a16:creationId xmlns:a16="http://schemas.microsoft.com/office/drawing/2014/main" id="{C6767916-24AB-4C14-A36A-545AE3149062}"/>
               </a:ext>
             </a:extLst>
           </p:cNvPr>
@@ -10320,7 +10320,7 @@
           <p:cNvPr id="18" name="">
             <a:extLst xmlns:a="http://schemas.openxmlformats.org/drawingml/2006/main">
               <a:ext uri="{FF2B5EF4-FFF2-40B4-BE49-F238E27FC236}">
-                <a16:creationId xmlns:a16="http://schemas.microsoft.com/office/drawing/2014/main" id="{B2248341-DDC1-4951-A97B-B3E76468616F}"/>
+                <a16:creationId xmlns:a16="http://schemas.microsoft.com/office/drawing/2014/main" id="{4EF8F617-067C-47A4-957B-0255C0B8C481}"/>
               </a:ext>
             </a:extLst>
           </p:cNvPr>
@@ -10370,7 +10370,7 @@
           <p:cNvPr id="19" name="">
             <a:extLst xmlns:a="http://schemas.openxmlformats.org/drawingml/2006/main">
               <a:ext uri="{FF2B5EF4-FFF2-40B4-BE49-F238E27FC236}">
-                <a16:creationId xmlns:a16="http://schemas.microsoft.com/office/drawing/2014/main" id="{4927237C-99B4-4797-872B-E2AE72B99B5B}"/>
+                <a16:creationId xmlns:a16="http://schemas.microsoft.com/office/drawing/2014/main" id="{D02FBEAE-E423-4AC3-8BE3-3B66660ACEE0}"/>
               </a:ext>
             </a:extLst>
           </p:cNvPr>
@@ -10420,7 +10420,7 @@
           <p:cNvPr id="20" name="">
             <a:extLst xmlns:a="http://schemas.openxmlformats.org/drawingml/2006/main">
               <a:ext uri="{FF2B5EF4-FFF2-40B4-BE49-F238E27FC236}">
-                <a16:creationId xmlns:a16="http://schemas.microsoft.com/office/drawing/2014/main" id="{859519CE-C325-408B-BF3F-A47CD623A4A0}"/>
+                <a16:creationId xmlns:a16="http://schemas.microsoft.com/office/drawing/2014/main" id="{7D5373D1-46A2-4103-A9AD-5822FE271C25}"/>
               </a:ext>
             </a:extLst>
           </p:cNvPr>
@@ -10470,7 +10470,7 @@
           <p:cNvPr id="21" name="">
             <a:extLst xmlns:a="http://schemas.openxmlformats.org/drawingml/2006/main">
               <a:ext uri="{FF2B5EF4-FFF2-40B4-BE49-F238E27FC236}">
-                <a16:creationId xmlns:a16="http://schemas.microsoft.com/office/drawing/2014/main" id="{86CBDD25-C792-4646-8497-56BFEE3A63F5}"/>
+                <a16:creationId xmlns:a16="http://schemas.microsoft.com/office/drawing/2014/main" id="{BE335895-2FB3-4D5C-BE8F-0311E899BE99}"/>
               </a:ext>
             </a:extLst>
           </p:cNvPr>
@@ -10501,7 +10501,7 @@
           <p:cNvPr id="22" name="">
             <a:extLst xmlns:a="http://schemas.openxmlformats.org/drawingml/2006/main">
               <a:ext uri="{FF2B5EF4-FFF2-40B4-BE49-F238E27FC236}">
-                <a16:creationId xmlns:a16="http://schemas.microsoft.com/office/drawing/2014/main" id="{6957E8EF-4B14-4C91-A899-120080A751CF}"/>
+                <a16:creationId xmlns:a16="http://schemas.microsoft.com/office/drawing/2014/main" id="{CC68E67A-6A99-4052-8D3D-D7C8DB77B849}"/>
               </a:ext>
             </a:extLst>
           </p:cNvPr>
@@ -10551,7 +10551,7 @@
           <p:cNvPr id="23" name="">
             <a:extLst xmlns:a="http://schemas.openxmlformats.org/drawingml/2006/main">
               <a:ext uri="{FF2B5EF4-FFF2-40B4-BE49-F238E27FC236}">
-                <a16:creationId xmlns:a16="http://schemas.microsoft.com/office/drawing/2014/main" id="{1E24EAD3-DA83-411E-AE57-BEEA37B3D76F}"/>
+                <a16:creationId xmlns:a16="http://schemas.microsoft.com/office/drawing/2014/main" id="{61B114F2-2A20-4487-82B2-6E3DE7815960}"/>
               </a:ext>
             </a:extLst>
           </p:cNvPr>
@@ -10601,7 +10601,7 @@
           <p:cNvPr id="24" name="">
             <a:extLst xmlns:a="http://schemas.openxmlformats.org/drawingml/2006/main">
               <a:ext uri="{FF2B5EF4-FFF2-40B4-BE49-F238E27FC236}">
-                <a16:creationId xmlns:a16="http://schemas.microsoft.com/office/drawing/2014/main" id="{6EA43F86-1E7B-4EAB-AC8A-31E53AD413C4}"/>
+                <a16:creationId xmlns:a16="http://schemas.microsoft.com/office/drawing/2014/main" id="{6C71D8DE-3131-4532-B49E-A907DB368E6E}"/>
               </a:ext>
             </a:extLst>
           </p:cNvPr>
@@ -10651,7 +10651,7 @@
           <p:cNvPr id="25" name="">
             <a:extLst xmlns:a="http://schemas.openxmlformats.org/drawingml/2006/main">
               <a:ext uri="{FF2B5EF4-FFF2-40B4-BE49-F238E27FC236}">
-                <a16:creationId xmlns:a16="http://schemas.microsoft.com/office/drawing/2014/main" id="{245D514D-9DBC-4A31-93B9-D4CAEC6BC1FF}"/>
+                <a16:creationId xmlns:a16="http://schemas.microsoft.com/office/drawing/2014/main" id="{5A79406B-76E8-47A8-B507-494236DD1EB2}"/>
               </a:ext>
             </a:extLst>
           </p:cNvPr>
@@ -10701,7 +10701,7 @@
           <p:cNvPr id="26" name="">
             <a:extLst xmlns:a="http://schemas.openxmlformats.org/drawingml/2006/main">
               <a:ext uri="{FF2B5EF4-FFF2-40B4-BE49-F238E27FC236}">
-                <a16:creationId xmlns:a16="http://schemas.microsoft.com/office/drawing/2014/main" id="{8118DD2E-FFD2-40AB-9929-809E88E91559}"/>
+                <a16:creationId xmlns:a16="http://schemas.microsoft.com/office/drawing/2014/main" id="{A4F3EA60-3E19-4B5D-AC01-3122A7152678}"/>
               </a:ext>
             </a:extLst>
           </p:cNvPr>
@@ -10736,7 +10736,7 @@
           <p:cNvPr id="27" name="">
             <a:extLst xmlns:a="http://schemas.openxmlformats.org/drawingml/2006/main">
               <a:ext uri="{FF2B5EF4-FFF2-40B4-BE49-F238E27FC236}">
-                <a16:creationId xmlns:a16="http://schemas.microsoft.com/office/drawing/2014/main" id="{0CB7FA74-ABA6-475A-A4F1-7964B0987D84}"/>
+                <a16:creationId xmlns:a16="http://schemas.microsoft.com/office/drawing/2014/main" id="{62AFF799-E16D-48AF-BA33-6A47C6E7F8F6}"/>
               </a:ext>
             </a:extLst>
           </p:cNvPr>
@@ -10786,7 +10786,7 @@
           <p:cNvPr id="28" name="">
             <a:extLst xmlns:a="http://schemas.openxmlformats.org/drawingml/2006/main">
               <a:ext uri="{FF2B5EF4-FFF2-40B4-BE49-F238E27FC236}">
-                <a16:creationId xmlns:a16="http://schemas.microsoft.com/office/drawing/2014/main" id="{C8673E5F-6F72-4519-818E-43F826C24C64}"/>
+                <a16:creationId xmlns:a16="http://schemas.microsoft.com/office/drawing/2014/main" id="{8D473F35-C25C-4364-B354-E64C24E88276}"/>
               </a:ext>
             </a:extLst>
           </p:cNvPr>
@@ -10836,7 +10836,7 @@
           <p:cNvPr id="29" name="">
             <a:extLst xmlns:a="http://schemas.openxmlformats.org/drawingml/2006/main">
               <a:ext uri="{FF2B5EF4-FFF2-40B4-BE49-F238E27FC236}">
-                <a16:creationId xmlns:a16="http://schemas.microsoft.com/office/drawing/2014/main" id="{68193A12-88A2-4897-B702-F9B56126D080}"/>
+                <a16:creationId xmlns:a16="http://schemas.microsoft.com/office/drawing/2014/main" id="{A2B246C6-18C8-4F04-B7F7-0C4346C0599A}"/>
               </a:ext>
             </a:extLst>
           </p:cNvPr>
@@ -10886,7 +10886,7 @@
           <p:cNvPr id="30" name="">
             <a:extLst xmlns:a="http://schemas.openxmlformats.org/drawingml/2006/main">
               <a:ext uri="{FF2B5EF4-FFF2-40B4-BE49-F238E27FC236}">
-                <a16:creationId xmlns:a16="http://schemas.microsoft.com/office/drawing/2014/main" id="{4003D6EA-C565-4F9A-B657-2594594AA3F1}"/>
+                <a16:creationId xmlns:a16="http://schemas.microsoft.com/office/drawing/2014/main" id="{1DF6F662-2F0C-44E3-B56D-8659FA21C3BD}"/>
               </a:ext>
             </a:extLst>
           </p:cNvPr>
@@ -10917,7 +10917,7 @@
           <p:cNvPr id="31" name="">
             <a:extLst xmlns:a="http://schemas.openxmlformats.org/drawingml/2006/main">
               <a:ext uri="{FF2B5EF4-FFF2-40B4-BE49-F238E27FC236}">
-                <a16:creationId xmlns:a16="http://schemas.microsoft.com/office/drawing/2014/main" id="{DC835A9E-42C7-4CA6-8B42-C215054C4EEC}"/>
+                <a16:creationId xmlns:a16="http://schemas.microsoft.com/office/drawing/2014/main" id="{AE79A551-70AF-4450-B0F6-07FD883197B6}"/>
               </a:ext>
             </a:extLst>
           </p:cNvPr>
@@ -10967,7 +10967,7 @@
           <p:cNvPr id="32" name="">
             <a:extLst xmlns:a="http://schemas.openxmlformats.org/drawingml/2006/main">
               <a:ext uri="{FF2B5EF4-FFF2-40B4-BE49-F238E27FC236}">
-                <a16:creationId xmlns:a16="http://schemas.microsoft.com/office/drawing/2014/main" id="{3ADF8118-E340-4C1E-A16D-03A575A87DC5}"/>
+                <a16:creationId xmlns:a16="http://schemas.microsoft.com/office/drawing/2014/main" id="{2D9FB0A5-1FE7-44E6-82E8-4F12742C93DF}"/>
               </a:ext>
             </a:extLst>
           </p:cNvPr>
@@ -11017,7 +11017,7 @@
           <p:cNvPr id="33" name="">
             <a:extLst xmlns:a="http://schemas.openxmlformats.org/drawingml/2006/main">
               <a:ext uri="{FF2B5EF4-FFF2-40B4-BE49-F238E27FC236}">
-                <a16:creationId xmlns:a16="http://schemas.microsoft.com/office/drawing/2014/main" id="{99826F9A-1A84-4F1A-AD90-9DF8AE2E778C}"/>
+                <a16:creationId xmlns:a16="http://schemas.microsoft.com/office/drawing/2014/main" id="{ECA7D851-E1EC-44FD-98AA-BE6C8AEC7A8D}"/>
               </a:ext>
             </a:extLst>
           </p:cNvPr>
@@ -11067,7 +11067,7 @@
           <p:cNvPr id="34" name="">
             <a:extLst xmlns:a="http://schemas.openxmlformats.org/drawingml/2006/main">
               <a:ext uri="{FF2B5EF4-FFF2-40B4-BE49-F238E27FC236}">
-                <a16:creationId xmlns:a16="http://schemas.microsoft.com/office/drawing/2014/main" id="{EC1412F0-7E97-4F0D-8586-048E8843C3A3}"/>
+                <a16:creationId xmlns:a16="http://schemas.microsoft.com/office/drawing/2014/main" id="{F57F3A35-4509-48CA-969C-A8A29CA26D87}"/>
               </a:ext>
             </a:extLst>
           </p:cNvPr>
@@ -11117,7 +11117,7 @@
           <p:cNvPr id="35" name="">
             <a:extLst xmlns:a="http://schemas.openxmlformats.org/drawingml/2006/main">
               <a:ext uri="{FF2B5EF4-FFF2-40B4-BE49-F238E27FC236}">
-                <a16:creationId xmlns:a16="http://schemas.microsoft.com/office/drawing/2014/main" id="{88112020-F3B6-4173-926D-C45AE22D0CAA}"/>
+                <a16:creationId xmlns:a16="http://schemas.microsoft.com/office/drawing/2014/main" id="{316A467E-8793-4D46-9DE2-90DB32377C90}"/>
               </a:ext>
             </a:extLst>
           </p:cNvPr>
@@ -11152,7 +11152,7 @@
           <p:cNvPr id="36" name="">
             <a:extLst xmlns:a="http://schemas.openxmlformats.org/drawingml/2006/main">
               <a:ext uri="{FF2B5EF4-FFF2-40B4-BE49-F238E27FC236}">
-                <a16:creationId xmlns:a16="http://schemas.microsoft.com/office/drawing/2014/main" id="{AAE5B4B8-9389-4BD6-8C7B-837D1D184FD2}"/>
+                <a16:creationId xmlns:a16="http://schemas.microsoft.com/office/drawing/2014/main" id="{BD2FF769-5C08-44B8-82CB-15FF0B850D38}"/>
               </a:ext>
             </a:extLst>
           </p:cNvPr>
@@ -11202,7 +11202,7 @@
           <p:cNvPr id="37" name="">
             <a:extLst xmlns:a="http://schemas.openxmlformats.org/drawingml/2006/main">
               <a:ext uri="{FF2B5EF4-FFF2-40B4-BE49-F238E27FC236}">
-                <a16:creationId xmlns:a16="http://schemas.microsoft.com/office/drawing/2014/main" id="{42B94934-5E82-416D-8074-DBF3C44521CC}"/>
+                <a16:creationId xmlns:a16="http://schemas.microsoft.com/office/drawing/2014/main" id="{5D7F4DE2-8E3F-4D42-AA3A-93C374A78552}"/>
               </a:ext>
             </a:extLst>
           </p:cNvPr>
@@ -11252,7 +11252,7 @@
           <p:cNvPr id="38" name="">
             <a:extLst xmlns:a="http://schemas.openxmlformats.org/drawingml/2006/main">
               <a:ext uri="{FF2B5EF4-FFF2-40B4-BE49-F238E27FC236}">
-                <a16:creationId xmlns:a16="http://schemas.microsoft.com/office/drawing/2014/main" id="{321796FA-B35B-4C0A-BEB5-BCD4F4D387B8}"/>
+                <a16:creationId xmlns:a16="http://schemas.microsoft.com/office/drawing/2014/main" id="{18D4E373-9FDC-4650-883B-7AB916A77F63}"/>
               </a:ext>
             </a:extLst>
           </p:cNvPr>
@@ -11302,7 +11302,7 @@
           <p:cNvPr id="39" name="">
             <a:extLst xmlns:a="http://schemas.openxmlformats.org/drawingml/2006/main">
               <a:ext uri="{FF2B5EF4-FFF2-40B4-BE49-F238E27FC236}">
-                <a16:creationId xmlns:a16="http://schemas.microsoft.com/office/drawing/2014/main" id="{73F3937C-4089-43BF-9508-6BC965E345B6}"/>
+                <a16:creationId xmlns:a16="http://schemas.microsoft.com/office/drawing/2014/main" id="{87FFB5A9-1CBC-429D-BE0E-B6BFA9EDB098}"/>
               </a:ext>
             </a:extLst>
           </p:cNvPr>
@@ -11333,7 +11333,7 @@
           <p:cNvPr id="40" name="">
             <a:extLst xmlns:a="http://schemas.openxmlformats.org/drawingml/2006/main">
               <a:ext uri="{FF2B5EF4-FFF2-40B4-BE49-F238E27FC236}">
-                <a16:creationId xmlns:a16="http://schemas.microsoft.com/office/drawing/2014/main" id="{18F98EBC-7910-44CE-B0FF-94E40A4CEE57}"/>
+                <a16:creationId xmlns:a16="http://schemas.microsoft.com/office/drawing/2014/main" id="{73639FB9-7949-4929-952A-23777796872F}"/>
               </a:ext>
             </a:extLst>
           </p:cNvPr>
@@ -11383,7 +11383,7 @@
           <p:cNvPr id="41" name="">
             <a:extLst xmlns:a="http://schemas.openxmlformats.org/drawingml/2006/main">
               <a:ext uri="{FF2B5EF4-FFF2-40B4-BE49-F238E27FC236}">
-                <a16:creationId xmlns:a16="http://schemas.microsoft.com/office/drawing/2014/main" id="{8A4D246C-BD6F-499E-ABE1-AFC015DAFC84}"/>
+                <a16:creationId xmlns:a16="http://schemas.microsoft.com/office/drawing/2014/main" id="{5F06082F-70FF-4465-B057-0F66340C3BD4}"/>
               </a:ext>
             </a:extLst>
           </p:cNvPr>
@@ -11433,7 +11433,7 @@
           <p:cNvPr id="42" name="">
             <a:extLst xmlns:a="http://schemas.openxmlformats.org/drawingml/2006/main">
               <a:ext uri="{FF2B5EF4-FFF2-40B4-BE49-F238E27FC236}">
-                <a16:creationId xmlns:a16="http://schemas.microsoft.com/office/drawing/2014/main" id="{9169B915-8526-4B16-831E-C7AE8D2C7327}"/>
+                <a16:creationId xmlns:a16="http://schemas.microsoft.com/office/drawing/2014/main" id="{88030A90-0500-48A8-8ADA-94F2CA80D31D}"/>
               </a:ext>
             </a:extLst>
           </p:cNvPr>
@@ -11483,7 +11483,7 @@
           <p:cNvPr id="43" name="">
             <a:extLst xmlns:a="http://schemas.openxmlformats.org/drawingml/2006/main">
               <a:ext uri="{FF2B5EF4-FFF2-40B4-BE49-F238E27FC236}">
-                <a16:creationId xmlns:a16="http://schemas.microsoft.com/office/drawing/2014/main" id="{E058E5DB-7995-417B-8C16-2D5496382BF0}"/>
+                <a16:creationId xmlns:a16="http://schemas.microsoft.com/office/drawing/2014/main" id="{FC797EE6-F45D-45B9-A83E-20F458917394}"/>
               </a:ext>
             </a:extLst>
           </p:cNvPr>
@@ -11531,7 +11531,7 @@
     </p:spTree>
     <p:extLst>
       <p:ext uri="{BB962C8B-B14F-4D97-AF65-F5344CB8AC3E}">
-        <p14:creationId xmlns:p14="http://schemas.microsoft.com/office/powerpoint/2010/main" val="1020422276"/>
+        <p14:creationId xmlns:p14="http://schemas.microsoft.com/office/powerpoint/2010/main" val="1968854674"/>
       </p:ext>
     </p:extLst>
   </p:cSld>
@@ -11562,7 +11562,7 @@
           <p:cNvPr id="1" name="">
             <a:extLst xmlns:a="http://schemas.openxmlformats.org/drawingml/2006/main">
               <a:ext uri="{FF2B5EF4-FFF2-40B4-BE49-F238E27FC236}">
-                <a16:creationId xmlns:a16="http://schemas.microsoft.com/office/drawing/2014/main" id="{99A78478-137E-452F-9B0E-59DD8E581AF9}"/>
+                <a16:creationId xmlns:a16="http://schemas.microsoft.com/office/drawing/2014/main" id="{826F3BB0-C6FC-494F-8377-E303D81C4206}"/>
               </a:ext>
             </a:extLst>
           </p:cNvPr>
@@ -11597,7 +11597,7 @@
           <p:nvPr/>
         </p:nvPicPr>
         <p:blipFill>
-          <a:blip xmlns:r="http://schemas.openxmlformats.org/officeDocument/2006/relationships" xmlns:a="http://schemas.openxmlformats.org/drawingml/2006/main" r:embed="Rd615955c7fa84c70"/>
+          <a:blip xmlns:r="http://schemas.openxmlformats.org/officeDocument/2006/relationships" xmlns:a="http://schemas.openxmlformats.org/drawingml/2006/main" r:embed="R64f5077f08f44310"/>
           <a:stretch xmlns:a="http://schemas.openxmlformats.org/drawingml/2006/main"/>
         </p:blipFill>
         <p:spPr>
@@ -11615,7 +11615,7 @@
           <p:cNvPr id="3" name="">
             <a:extLst xmlns:a="http://schemas.openxmlformats.org/drawingml/2006/main">
               <a:ext uri="{FF2B5EF4-FFF2-40B4-BE49-F238E27FC236}">
-                <a16:creationId xmlns:a16="http://schemas.microsoft.com/office/drawing/2014/main" id="{9548C1A1-0F95-404C-A4DB-5AB9BDEA86B1}"/>
+                <a16:creationId xmlns:a16="http://schemas.microsoft.com/office/drawing/2014/main" id="{A048728C-CC13-48FA-90AE-A145FDFD070A}"/>
               </a:ext>
             </a:extLst>
           </p:cNvPr>
@@ -11665,7 +11665,7 @@
           <p:cNvPr id="4" name="">
             <a:extLst xmlns:a="http://schemas.openxmlformats.org/drawingml/2006/main">
               <a:ext uri="{FF2B5EF4-FFF2-40B4-BE49-F238E27FC236}">
-                <a16:creationId xmlns:a16="http://schemas.microsoft.com/office/drawing/2014/main" id="{31A954F4-2819-4AA4-9A54-4D3C12DED6C6}"/>
+                <a16:creationId xmlns:a16="http://schemas.microsoft.com/office/drawing/2014/main" id="{E597A0ED-70CC-4BFA-AD03-3F7B8BC9AD19}"/>
               </a:ext>
             </a:extLst>
           </p:cNvPr>
@@ -11698,7 +11698,7 @@
           <p:cNvPr id="5" name="">
             <a:extLst xmlns:a="http://schemas.openxmlformats.org/drawingml/2006/main">
               <a:ext uri="{FF2B5EF4-FFF2-40B4-BE49-F238E27FC236}">
-                <a16:creationId xmlns:a16="http://schemas.microsoft.com/office/drawing/2014/main" id="{83115B97-46FC-4CAB-B8AA-29066E2BCCE5}"/>
+                <a16:creationId xmlns:a16="http://schemas.microsoft.com/office/drawing/2014/main" id="{B96E0F10-3DEA-4B05-985B-510346A6B7C5}"/>
               </a:ext>
             </a:extLst>
           </p:cNvPr>
@@ -11729,7 +11729,7 @@
           <p:cNvPr id="6" name="">
             <a:extLst xmlns:a="http://schemas.openxmlformats.org/drawingml/2006/main">
               <a:ext uri="{FF2B5EF4-FFF2-40B4-BE49-F238E27FC236}">
-                <a16:creationId xmlns:a16="http://schemas.microsoft.com/office/drawing/2014/main" id="{4DFC2A1D-86C0-4B4D-8A6A-01F2447BF30F}"/>
+                <a16:creationId xmlns:a16="http://schemas.microsoft.com/office/drawing/2014/main" id="{B043CCA3-7EB1-4BCE-9909-E1B8384B02B7}"/>
               </a:ext>
             </a:extLst>
           </p:cNvPr>
@@ -11779,7 +11779,7 @@
           <p:cNvPr id="7" name="">
             <a:extLst xmlns:a="http://schemas.openxmlformats.org/drawingml/2006/main">
               <a:ext uri="{FF2B5EF4-FFF2-40B4-BE49-F238E27FC236}">
-                <a16:creationId xmlns:a16="http://schemas.microsoft.com/office/drawing/2014/main" id="{F91B27EA-8AE2-424E-BEF6-72ED98DF6581}"/>
+                <a16:creationId xmlns:a16="http://schemas.microsoft.com/office/drawing/2014/main" id="{D286B98F-6086-4FC9-B584-C50B55235C47}"/>
               </a:ext>
             </a:extLst>
           </p:cNvPr>
@@ -11829,7 +11829,7 @@
           <p:cNvPr id="8" name="">
             <a:extLst xmlns:a="http://schemas.openxmlformats.org/drawingml/2006/main">
               <a:ext uri="{FF2B5EF4-FFF2-40B4-BE49-F238E27FC236}">
-                <a16:creationId xmlns:a16="http://schemas.microsoft.com/office/drawing/2014/main" id="{50B1695A-C49E-4625-B525-FB3F1E795E0D}"/>
+                <a16:creationId xmlns:a16="http://schemas.microsoft.com/office/drawing/2014/main" id="{DAE11871-782B-4EAA-97D2-9E4231E4A173}"/>
               </a:ext>
             </a:extLst>
           </p:cNvPr>
@@ -11864,7 +11864,7 @@
           <p:cNvPr id="9" name="">
             <a:extLst xmlns:a="http://schemas.openxmlformats.org/drawingml/2006/main">
               <a:ext uri="{FF2B5EF4-FFF2-40B4-BE49-F238E27FC236}">
-                <a16:creationId xmlns:a16="http://schemas.microsoft.com/office/drawing/2014/main" id="{333C39C6-75CF-45D6-9602-63F5A5A66F04}"/>
+                <a16:creationId xmlns:a16="http://schemas.microsoft.com/office/drawing/2014/main" id="{209F8227-85BC-4506-9E16-6557AD78F250}"/>
               </a:ext>
             </a:extLst>
           </p:cNvPr>
@@ -11897,7 +11897,7 @@
           <p:cNvPr id="10" name="">
             <a:extLst xmlns:a="http://schemas.openxmlformats.org/drawingml/2006/main">
               <a:ext uri="{FF2B5EF4-FFF2-40B4-BE49-F238E27FC236}">
-                <a16:creationId xmlns:a16="http://schemas.microsoft.com/office/drawing/2014/main" id="{A1139C15-C36D-4957-9D54-2FBDC722CC89}"/>
+                <a16:creationId xmlns:a16="http://schemas.microsoft.com/office/drawing/2014/main" id="{0824F0CA-1EE6-4819-8605-054AEA2E2394}"/>
               </a:ext>
             </a:extLst>
           </p:cNvPr>
@@ -11947,7 +11947,7 @@
           <p:cNvPr id="11" name="">
             <a:extLst xmlns:a="http://schemas.openxmlformats.org/drawingml/2006/main">
               <a:ext uri="{FF2B5EF4-FFF2-40B4-BE49-F238E27FC236}">
-                <a16:creationId xmlns:a16="http://schemas.microsoft.com/office/drawing/2014/main" id="{69F8477B-BA40-4D7F-979E-2CB664DA98B0}"/>
+                <a16:creationId xmlns:a16="http://schemas.microsoft.com/office/drawing/2014/main" id="{15EA1BCF-97DA-44E3-96D8-5E60E27FC131}"/>
               </a:ext>
             </a:extLst>
           </p:cNvPr>
@@ -11997,7 +11997,7 @@
           <p:cNvPr id="12" name="">
             <a:extLst xmlns:a="http://schemas.openxmlformats.org/drawingml/2006/main">
               <a:ext uri="{FF2B5EF4-FFF2-40B4-BE49-F238E27FC236}">
-                <a16:creationId xmlns:a16="http://schemas.microsoft.com/office/drawing/2014/main" id="{1AEF5975-36B5-4EC0-8911-DAD0340717F5}"/>
+                <a16:creationId xmlns:a16="http://schemas.microsoft.com/office/drawing/2014/main" id="{70E73E5D-2D6A-4D5E-A4A2-6442EF96AD00}"/>
               </a:ext>
             </a:extLst>
           </p:cNvPr>
@@ -12047,7 +12047,7 @@
           <p:cNvPr id="13" name="">
             <a:extLst xmlns:a="http://schemas.openxmlformats.org/drawingml/2006/main">
               <a:ext uri="{FF2B5EF4-FFF2-40B4-BE49-F238E27FC236}">
-                <a16:creationId xmlns:a16="http://schemas.microsoft.com/office/drawing/2014/main" id="{BA433D33-D097-493D-8D74-70EFAB3CE7B0}"/>
+                <a16:creationId xmlns:a16="http://schemas.microsoft.com/office/drawing/2014/main" id="{8A337966-C042-48C7-8169-CC08DDD860B6}"/>
               </a:ext>
             </a:extLst>
           </p:cNvPr>
@@ -12078,7 +12078,7 @@
           <p:cNvPr id="14" name="">
             <a:extLst xmlns:a="http://schemas.openxmlformats.org/drawingml/2006/main">
               <a:ext uri="{FF2B5EF4-FFF2-40B4-BE49-F238E27FC236}">
-                <a16:creationId xmlns:a16="http://schemas.microsoft.com/office/drawing/2014/main" id="{52E9EAE6-2E50-4C54-8108-F9EA90814A6B}"/>
+                <a16:creationId xmlns:a16="http://schemas.microsoft.com/office/drawing/2014/main" id="{0B2D97B3-8EE8-41A2-B878-FCCA813ECE57}"/>
               </a:ext>
             </a:extLst>
           </p:cNvPr>
@@ -12128,7 +12128,7 @@
           <p:cNvPr id="15" name="">
             <a:extLst xmlns:a="http://schemas.openxmlformats.org/drawingml/2006/main">
               <a:ext uri="{FF2B5EF4-FFF2-40B4-BE49-F238E27FC236}">
-                <a16:creationId xmlns:a16="http://schemas.microsoft.com/office/drawing/2014/main" id="{9516F0CF-A052-429A-99D2-7F82F067EBFF}"/>
+                <a16:creationId xmlns:a16="http://schemas.microsoft.com/office/drawing/2014/main" id="{E41D97B1-345B-4CB3-8F6B-15CDFF45FDAD}"/>
               </a:ext>
             </a:extLst>
           </p:cNvPr>
@@ -12178,7 +12178,7 @@
           <p:cNvPr id="16" name="">
             <a:extLst xmlns:a="http://schemas.openxmlformats.org/drawingml/2006/main">
               <a:ext uri="{FF2B5EF4-FFF2-40B4-BE49-F238E27FC236}">
-                <a16:creationId xmlns:a16="http://schemas.microsoft.com/office/drawing/2014/main" id="{CC8F383A-AFEF-4344-B8A7-A59CD4CD07A6}"/>
+                <a16:creationId xmlns:a16="http://schemas.microsoft.com/office/drawing/2014/main" id="{D301BEAB-9F62-40FE-BF80-4A693DD70564}"/>
               </a:ext>
             </a:extLst>
           </p:cNvPr>
@@ -12213,7 +12213,7 @@
           <p:cNvPr id="17" name="">
             <a:extLst xmlns:a="http://schemas.openxmlformats.org/drawingml/2006/main">
               <a:ext uri="{FF2B5EF4-FFF2-40B4-BE49-F238E27FC236}">
-                <a16:creationId xmlns:a16="http://schemas.microsoft.com/office/drawing/2014/main" id="{44F71691-8084-4207-922B-0420A024DEB8}"/>
+                <a16:creationId xmlns:a16="http://schemas.microsoft.com/office/drawing/2014/main" id="{53023C02-AB14-4094-8E8A-9C6F39914F5D}"/>
               </a:ext>
             </a:extLst>
           </p:cNvPr>
@@ -12246,7 +12246,7 @@
           <p:cNvPr id="18" name="">
             <a:extLst xmlns:a="http://schemas.openxmlformats.org/drawingml/2006/main">
               <a:ext uri="{FF2B5EF4-FFF2-40B4-BE49-F238E27FC236}">
-                <a16:creationId xmlns:a16="http://schemas.microsoft.com/office/drawing/2014/main" id="{11F8C4D5-D676-4F32-8FD4-387EA0EBC9E1}"/>
+                <a16:creationId xmlns:a16="http://schemas.microsoft.com/office/drawing/2014/main" id="{F1DBCF54-FFB3-4E36-8AAB-2D19C892302A}"/>
               </a:ext>
             </a:extLst>
           </p:cNvPr>
@@ -12296,7 +12296,7 @@
           <p:cNvPr id="19" name="">
             <a:extLst xmlns:a="http://schemas.openxmlformats.org/drawingml/2006/main">
               <a:ext uri="{FF2B5EF4-FFF2-40B4-BE49-F238E27FC236}">
-                <a16:creationId xmlns:a16="http://schemas.microsoft.com/office/drawing/2014/main" id="{25B794E7-1476-4F14-9D4B-4F215DC16D96}"/>
+                <a16:creationId xmlns:a16="http://schemas.microsoft.com/office/drawing/2014/main" id="{B2E5583D-AEC7-4C67-84E8-327D2E89CDCB}"/>
               </a:ext>
             </a:extLst>
           </p:cNvPr>
@@ -12346,7 +12346,7 @@
           <p:cNvPr id="20" name="">
             <a:extLst xmlns:a="http://schemas.openxmlformats.org/drawingml/2006/main">
               <a:ext uri="{FF2B5EF4-FFF2-40B4-BE49-F238E27FC236}">
-                <a16:creationId xmlns:a16="http://schemas.microsoft.com/office/drawing/2014/main" id="{7D835DCA-0B91-4BCA-9B1C-B3B494E6C74E}"/>
+                <a16:creationId xmlns:a16="http://schemas.microsoft.com/office/drawing/2014/main" id="{FC82E972-3925-4A16-9734-897BA17E2703}"/>
               </a:ext>
             </a:extLst>
           </p:cNvPr>
@@ -12396,7 +12396,7 @@
           <p:cNvPr id="21" name="">
             <a:extLst xmlns:a="http://schemas.openxmlformats.org/drawingml/2006/main">
               <a:ext uri="{FF2B5EF4-FFF2-40B4-BE49-F238E27FC236}">
-                <a16:creationId xmlns:a16="http://schemas.microsoft.com/office/drawing/2014/main" id="{DB5A93B9-68DE-4097-BC7E-80A08E43EF72}"/>
+                <a16:creationId xmlns:a16="http://schemas.microsoft.com/office/drawing/2014/main" id="{C36FC08C-2D41-4429-9E98-D2C61D00F9A1}"/>
               </a:ext>
             </a:extLst>
           </p:cNvPr>
@@ -12427,7 +12427,7 @@
           <p:cNvPr id="22" name="">
             <a:extLst xmlns:a="http://schemas.openxmlformats.org/drawingml/2006/main">
               <a:ext uri="{FF2B5EF4-FFF2-40B4-BE49-F238E27FC236}">
-                <a16:creationId xmlns:a16="http://schemas.microsoft.com/office/drawing/2014/main" id="{492C8F90-D3A0-41A1-992C-BC6DB5EA7CAE}"/>
+                <a16:creationId xmlns:a16="http://schemas.microsoft.com/office/drawing/2014/main" id="{207367B8-0008-44E7-B7F6-244CB9E5F248}"/>
               </a:ext>
             </a:extLst>
           </p:cNvPr>
@@ -12477,7 +12477,7 @@
           <p:cNvPr id="23" name="">
             <a:extLst xmlns:a="http://schemas.openxmlformats.org/drawingml/2006/main">
               <a:ext uri="{FF2B5EF4-FFF2-40B4-BE49-F238E27FC236}">
-                <a16:creationId xmlns:a16="http://schemas.microsoft.com/office/drawing/2014/main" id="{CB17453B-D3F6-492B-B35F-E7470D3D3945}"/>
+                <a16:creationId xmlns:a16="http://schemas.microsoft.com/office/drawing/2014/main" id="{5DB6C679-D534-47F9-97B9-D395111650C9}"/>
               </a:ext>
             </a:extLst>
           </p:cNvPr>
@@ -12527,7 +12527,7 @@
           <p:cNvPr id="24" name="">
             <a:extLst xmlns:a="http://schemas.openxmlformats.org/drawingml/2006/main">
               <a:ext uri="{FF2B5EF4-FFF2-40B4-BE49-F238E27FC236}">
-                <a16:creationId xmlns:a16="http://schemas.microsoft.com/office/drawing/2014/main" id="{E0BB928F-AA96-4DE7-B438-27221EA59718}"/>
+                <a16:creationId xmlns:a16="http://schemas.microsoft.com/office/drawing/2014/main" id="{70B7F056-AD62-4D5B-8A5B-FAFED0344649}"/>
               </a:ext>
             </a:extLst>
           </p:cNvPr>
@@ -12562,7 +12562,7 @@
           <p:cNvPr id="25" name="">
             <a:extLst xmlns:a="http://schemas.openxmlformats.org/drawingml/2006/main">
               <a:ext uri="{FF2B5EF4-FFF2-40B4-BE49-F238E27FC236}">
-                <a16:creationId xmlns:a16="http://schemas.microsoft.com/office/drawing/2014/main" id="{EB85A370-D3AD-465E-AA1A-B216609468EE}"/>
+                <a16:creationId xmlns:a16="http://schemas.microsoft.com/office/drawing/2014/main" id="{A03E35A4-62FE-43E8-A777-9330B997B582}"/>
               </a:ext>
             </a:extLst>
           </p:cNvPr>
@@ -12595,7 +12595,7 @@
           <p:cNvPr id="26" name="">
             <a:extLst xmlns:a="http://schemas.openxmlformats.org/drawingml/2006/main">
               <a:ext uri="{FF2B5EF4-FFF2-40B4-BE49-F238E27FC236}">
-                <a16:creationId xmlns:a16="http://schemas.microsoft.com/office/drawing/2014/main" id="{04EFDD0C-9DD1-4D5F-9BC6-A948C8750296}"/>
+                <a16:creationId xmlns:a16="http://schemas.microsoft.com/office/drawing/2014/main" id="{4CD4B641-0459-4AA3-BE15-C0C60C71D47D}"/>
               </a:ext>
             </a:extLst>
           </p:cNvPr>
@@ -12645,7 +12645,7 @@
           <p:cNvPr id="27" name="">
             <a:extLst xmlns:a="http://schemas.openxmlformats.org/drawingml/2006/main">
               <a:ext uri="{FF2B5EF4-FFF2-40B4-BE49-F238E27FC236}">
-                <a16:creationId xmlns:a16="http://schemas.microsoft.com/office/drawing/2014/main" id="{303DC65C-0427-48FE-924A-6CF4B99BCC77}"/>
+                <a16:creationId xmlns:a16="http://schemas.microsoft.com/office/drawing/2014/main" id="{C5BD8461-1C37-4E71-B7B6-41D50FF70D54}"/>
               </a:ext>
             </a:extLst>
           </p:cNvPr>
@@ -12695,7 +12695,7 @@
           <p:cNvPr id="28" name="">
             <a:extLst xmlns:a="http://schemas.openxmlformats.org/drawingml/2006/main">
               <a:ext uri="{FF2B5EF4-FFF2-40B4-BE49-F238E27FC236}">
-                <a16:creationId xmlns:a16="http://schemas.microsoft.com/office/drawing/2014/main" id="{E34DD81C-CCEC-4DF1-89CB-8D6D6418AF26}"/>
+                <a16:creationId xmlns:a16="http://schemas.microsoft.com/office/drawing/2014/main" id="{7830FCF0-4EDC-4DBE-9EFD-4E24175E5879}"/>
               </a:ext>
             </a:extLst>
           </p:cNvPr>
@@ -12745,7 +12745,7 @@
           <p:cNvPr id="29" name="">
             <a:extLst xmlns:a="http://schemas.openxmlformats.org/drawingml/2006/main">
               <a:ext uri="{FF2B5EF4-FFF2-40B4-BE49-F238E27FC236}">
-                <a16:creationId xmlns:a16="http://schemas.microsoft.com/office/drawing/2014/main" id="{80D71B5A-D4C4-447D-AF7B-ABFC9A3371F5}"/>
+                <a16:creationId xmlns:a16="http://schemas.microsoft.com/office/drawing/2014/main" id="{8A86C709-E54B-4A06-B30F-B8EA9FD363C6}"/>
               </a:ext>
             </a:extLst>
           </p:cNvPr>
@@ -12776,7 +12776,7 @@
           <p:cNvPr id="30" name="">
             <a:extLst xmlns:a="http://schemas.openxmlformats.org/drawingml/2006/main">
               <a:ext uri="{FF2B5EF4-FFF2-40B4-BE49-F238E27FC236}">
-                <a16:creationId xmlns:a16="http://schemas.microsoft.com/office/drawing/2014/main" id="{981B40A0-686A-4722-9CF6-BBE10D8FCE26}"/>
+                <a16:creationId xmlns:a16="http://schemas.microsoft.com/office/drawing/2014/main" id="{E5FB2226-B382-4B65-A211-B7DFC99A0923}"/>
               </a:ext>
             </a:extLst>
           </p:cNvPr>
@@ -12826,7 +12826,7 @@
           <p:cNvPr id="31" name="">
             <a:extLst xmlns:a="http://schemas.openxmlformats.org/drawingml/2006/main">
               <a:ext uri="{FF2B5EF4-FFF2-40B4-BE49-F238E27FC236}">
-                <a16:creationId xmlns:a16="http://schemas.microsoft.com/office/drawing/2014/main" id="{65D395AF-A0FE-429C-BF6C-12715F2C0D14}"/>
+                <a16:creationId xmlns:a16="http://schemas.microsoft.com/office/drawing/2014/main" id="{E43CB1B2-7AC5-42F9-AC9E-FC3879AD6F5B}"/>
               </a:ext>
             </a:extLst>
           </p:cNvPr>
@@ -12874,7 +12874,7 @@
     </p:spTree>
     <p:extLst>
       <p:ext uri="{BB962C8B-B14F-4D97-AF65-F5344CB8AC3E}">
-        <p14:creationId xmlns:p14="http://schemas.microsoft.com/office/powerpoint/2010/main" val="135445347"/>
+        <p14:creationId xmlns:p14="http://schemas.microsoft.com/office/powerpoint/2010/main" val="1602129237"/>
       </p:ext>
     </p:extLst>
   </p:cSld>
@@ -12905,7 +12905,7 @@
           <p:cNvPr id="1" name="">
             <a:extLst xmlns:a="http://schemas.openxmlformats.org/drawingml/2006/main">
               <a:ext uri="{FF2B5EF4-FFF2-40B4-BE49-F238E27FC236}">
-                <a16:creationId xmlns:a16="http://schemas.microsoft.com/office/drawing/2014/main" id="{E1AECCE9-A947-46E3-9845-A356DC251C14}"/>
+                <a16:creationId xmlns:a16="http://schemas.microsoft.com/office/drawing/2014/main" id="{278004FB-C60F-41E7-93B1-00541F478D09}"/>
               </a:ext>
             </a:extLst>
           </p:cNvPr>
@@ -12940,7 +12940,7 @@
           <p:nvPr/>
         </p:nvPicPr>
         <p:blipFill>
-          <a:blip xmlns:r="http://schemas.openxmlformats.org/officeDocument/2006/relationships" xmlns:a="http://schemas.openxmlformats.org/drawingml/2006/main" r:embed="Rf7d05b7b266d4431"/>
+          <a:blip xmlns:r="http://schemas.openxmlformats.org/officeDocument/2006/relationships" xmlns:a="http://schemas.openxmlformats.org/drawingml/2006/main" r:embed="R78913d2947234515"/>
           <a:stretch xmlns:a="http://schemas.openxmlformats.org/drawingml/2006/main"/>
         </p:blipFill>
         <p:spPr>
@@ -12958,7 +12958,7 @@
           <p:cNvPr id="3" name="">
             <a:extLst xmlns:a="http://schemas.openxmlformats.org/drawingml/2006/main">
               <a:ext uri="{FF2B5EF4-FFF2-40B4-BE49-F238E27FC236}">
-                <a16:creationId xmlns:a16="http://schemas.microsoft.com/office/drawing/2014/main" id="{FF9A7185-0529-4EC1-B4C6-D678FD23F45F}"/>
+                <a16:creationId xmlns:a16="http://schemas.microsoft.com/office/drawing/2014/main" id="{74C42346-1508-49D1-90FD-9BD0C11E16FA}"/>
               </a:ext>
             </a:extLst>
           </p:cNvPr>
@@ -13008,7 +13008,7 @@
           <p:cNvPr id="4" name="">
             <a:extLst xmlns:a="http://schemas.openxmlformats.org/drawingml/2006/main">
               <a:ext uri="{FF2B5EF4-FFF2-40B4-BE49-F238E27FC236}">
-                <a16:creationId xmlns:a16="http://schemas.microsoft.com/office/drawing/2014/main" id="{0792C794-8D0F-4ED4-B332-CA190F9392FE}"/>
+                <a16:creationId xmlns:a16="http://schemas.microsoft.com/office/drawing/2014/main" id="{DF8F5B10-FC99-4EFC-9D66-42FCFF57C1D4}"/>
               </a:ext>
             </a:extLst>
           </p:cNvPr>
@@ -13041,7 +13041,7 @@
           <p:cNvPr id="5" name="">
             <a:extLst xmlns:a="http://schemas.openxmlformats.org/drawingml/2006/main">
               <a:ext uri="{FF2B5EF4-FFF2-40B4-BE49-F238E27FC236}">
-                <a16:creationId xmlns:a16="http://schemas.microsoft.com/office/drawing/2014/main" id="{A20A7B10-6999-41C4-9112-369589DDF711}"/>
+                <a16:creationId xmlns:a16="http://schemas.microsoft.com/office/drawing/2014/main" id="{F3BD1CAB-364A-4070-BC11-31D4EC559942}"/>
               </a:ext>
             </a:extLst>
           </p:cNvPr>
@@ -13072,7 +13072,7 @@
           <p:cNvPr id="6" name="">
             <a:extLst xmlns:a="http://schemas.openxmlformats.org/drawingml/2006/main">
               <a:ext uri="{FF2B5EF4-FFF2-40B4-BE49-F238E27FC236}">
-                <a16:creationId xmlns:a16="http://schemas.microsoft.com/office/drawing/2014/main" id="{14AAA9CF-8A3A-43A7-A01D-3BC86DD883DC}"/>
+                <a16:creationId xmlns:a16="http://schemas.microsoft.com/office/drawing/2014/main" id="{593A6D33-7F6E-4730-A022-8D2D24DB774F}"/>
               </a:ext>
             </a:extLst>
           </p:cNvPr>
@@ -13122,7 +13122,7 @@
           <p:cNvPr id="7" name="">
             <a:extLst xmlns:a="http://schemas.openxmlformats.org/drawingml/2006/main">
               <a:ext uri="{FF2B5EF4-FFF2-40B4-BE49-F238E27FC236}">
-                <a16:creationId xmlns:a16="http://schemas.microsoft.com/office/drawing/2014/main" id="{ACFD73A9-7A6B-4C05-BB84-A07F68445210}"/>
+                <a16:creationId xmlns:a16="http://schemas.microsoft.com/office/drawing/2014/main" id="{E6E2F6E7-D2B1-4646-B892-F5EF7D9826EF}"/>
               </a:ext>
             </a:extLst>
           </p:cNvPr>
@@ -13172,7 +13172,7 @@
           <p:cNvPr id="8" name="">
             <a:extLst xmlns:a="http://schemas.openxmlformats.org/drawingml/2006/main">
               <a:ext uri="{FF2B5EF4-FFF2-40B4-BE49-F238E27FC236}">
-                <a16:creationId xmlns:a16="http://schemas.microsoft.com/office/drawing/2014/main" id="{A872049E-288D-40F2-ADD4-68B3A05FF3C4}"/>
+                <a16:creationId xmlns:a16="http://schemas.microsoft.com/office/drawing/2014/main" id="{B187D63C-DC85-4FB3-82EA-C9591B58FA61}"/>
               </a:ext>
             </a:extLst>
           </p:cNvPr>
@@ -13222,7 +13222,7 @@
           <p:cNvPr id="9" name="">
             <a:extLst xmlns:a="http://schemas.openxmlformats.org/drawingml/2006/main">
               <a:ext uri="{FF2B5EF4-FFF2-40B4-BE49-F238E27FC236}">
-                <a16:creationId xmlns:a16="http://schemas.microsoft.com/office/drawing/2014/main" id="{94F7B22C-CD09-40F8-A25F-5F330557AB89}"/>
+                <a16:creationId xmlns:a16="http://schemas.microsoft.com/office/drawing/2014/main" id="{95DCE38C-E76C-41B1-86F9-3EDC811D58F7}"/>
               </a:ext>
             </a:extLst>
           </p:cNvPr>
@@ -13272,7 +13272,7 @@
           <p:cNvPr id="10" name="">
             <a:extLst xmlns:a="http://schemas.openxmlformats.org/drawingml/2006/main">
               <a:ext uri="{FF2B5EF4-FFF2-40B4-BE49-F238E27FC236}">
-                <a16:creationId xmlns:a16="http://schemas.microsoft.com/office/drawing/2014/main" id="{4032A402-53F8-4907-96C7-F5CD2ACDCEAF}"/>
+                <a16:creationId xmlns:a16="http://schemas.microsoft.com/office/drawing/2014/main" id="{AF9BED18-6DDE-4FE8-9D30-B53487DF6C63}"/>
               </a:ext>
             </a:extLst>
           </p:cNvPr>
@@ -13303,7 +13303,7 @@
           <p:cNvPr id="11" name="">
             <a:extLst xmlns:a="http://schemas.openxmlformats.org/drawingml/2006/main">
               <a:ext uri="{FF2B5EF4-FFF2-40B4-BE49-F238E27FC236}">
-                <a16:creationId xmlns:a16="http://schemas.microsoft.com/office/drawing/2014/main" id="{C7EACBF4-4C33-4D11-8512-2FE98119C6A9}"/>
+                <a16:creationId xmlns:a16="http://schemas.microsoft.com/office/drawing/2014/main" id="{6262D20D-C7D1-4046-AF12-758D5D85BFD3}"/>
               </a:ext>
             </a:extLst>
           </p:cNvPr>
@@ -13353,7 +13353,7 @@
           <p:cNvPr id="12" name="">
             <a:extLst xmlns:a="http://schemas.openxmlformats.org/drawingml/2006/main">
               <a:ext uri="{FF2B5EF4-FFF2-40B4-BE49-F238E27FC236}">
-                <a16:creationId xmlns:a16="http://schemas.microsoft.com/office/drawing/2014/main" id="{081A77A3-EE58-4283-BFBE-04A2C654017D}"/>
+                <a16:creationId xmlns:a16="http://schemas.microsoft.com/office/drawing/2014/main" id="{CCBC8AFE-56D8-41DD-BC7E-D0AEFF006CC3}"/>
               </a:ext>
             </a:extLst>
           </p:cNvPr>
@@ -13403,7 +13403,7 @@
           <p:cNvPr id="13" name="">
             <a:extLst xmlns:a="http://schemas.openxmlformats.org/drawingml/2006/main">
               <a:ext uri="{FF2B5EF4-FFF2-40B4-BE49-F238E27FC236}">
-                <a16:creationId xmlns:a16="http://schemas.microsoft.com/office/drawing/2014/main" id="{8E817157-ACE0-4F49-9C7E-C5E2F5E96849}"/>
+                <a16:creationId xmlns:a16="http://schemas.microsoft.com/office/drawing/2014/main" id="{73B5BFC9-C386-4B78-83EB-B8C34D057872}"/>
               </a:ext>
             </a:extLst>
           </p:cNvPr>
@@ -13434,7 +13434,7 @@
           <p:cNvPr id="14" name="">
             <a:extLst xmlns:a="http://schemas.openxmlformats.org/drawingml/2006/main">
               <a:ext uri="{FF2B5EF4-FFF2-40B4-BE49-F238E27FC236}">
-                <a16:creationId xmlns:a16="http://schemas.microsoft.com/office/drawing/2014/main" id="{2BA7F6F0-EA18-4E7E-8357-94DA368A30F8}"/>
+                <a16:creationId xmlns:a16="http://schemas.microsoft.com/office/drawing/2014/main" id="{AF6D8969-4431-4C29-87E3-3D77A451084F}"/>
               </a:ext>
             </a:extLst>
           </p:cNvPr>
@@ -13484,7 +13484,7 @@
           <p:cNvPr id="15" name="">
             <a:extLst xmlns:a="http://schemas.openxmlformats.org/drawingml/2006/main">
               <a:ext uri="{FF2B5EF4-FFF2-40B4-BE49-F238E27FC236}">
-                <a16:creationId xmlns:a16="http://schemas.microsoft.com/office/drawing/2014/main" id="{1A8ECBC4-B0EB-42B7-BDD2-F33358B001C5}"/>
+                <a16:creationId xmlns:a16="http://schemas.microsoft.com/office/drawing/2014/main" id="{79ADB0A7-89B7-41A7-8026-0B1B214C93CC}"/>
               </a:ext>
             </a:extLst>
           </p:cNvPr>
@@ -13534,7 +13534,7 @@
           <p:cNvPr id="16" name="">
             <a:extLst xmlns:a="http://schemas.openxmlformats.org/drawingml/2006/main">
               <a:ext uri="{FF2B5EF4-FFF2-40B4-BE49-F238E27FC236}">
-                <a16:creationId xmlns:a16="http://schemas.microsoft.com/office/drawing/2014/main" id="{C1E41177-C953-40CB-899B-71B7FC35F71E}"/>
+                <a16:creationId xmlns:a16="http://schemas.microsoft.com/office/drawing/2014/main" id="{0EC8BB8E-EDC3-4F8D-9177-6A1DAC3524BE}"/>
               </a:ext>
             </a:extLst>
           </p:cNvPr>
@@ -13565,7 +13565,7 @@
           <p:cNvPr id="17" name="">
             <a:extLst xmlns:a="http://schemas.openxmlformats.org/drawingml/2006/main">
               <a:ext uri="{FF2B5EF4-FFF2-40B4-BE49-F238E27FC236}">
-                <a16:creationId xmlns:a16="http://schemas.microsoft.com/office/drawing/2014/main" id="{07B89BBC-FDE1-43F1-9B20-885A08C89673}"/>
+                <a16:creationId xmlns:a16="http://schemas.microsoft.com/office/drawing/2014/main" id="{2A7907F2-4511-4AE8-A17A-8A56E69715E7}"/>
               </a:ext>
             </a:extLst>
           </p:cNvPr>
@@ -13615,7 +13615,7 @@
           <p:cNvPr id="18" name="">
             <a:extLst xmlns:a="http://schemas.openxmlformats.org/drawingml/2006/main">
               <a:ext uri="{FF2B5EF4-FFF2-40B4-BE49-F238E27FC236}">
-                <a16:creationId xmlns:a16="http://schemas.microsoft.com/office/drawing/2014/main" id="{41F6B47E-3587-4D44-B56D-2C6A0531A353}"/>
+                <a16:creationId xmlns:a16="http://schemas.microsoft.com/office/drawing/2014/main" id="{2871D3FC-20CB-4447-AD44-A22554762867}"/>
               </a:ext>
             </a:extLst>
           </p:cNvPr>
@@ -13665,7 +13665,7 @@
           <p:cNvPr id="19" name="">
             <a:extLst xmlns:a="http://schemas.openxmlformats.org/drawingml/2006/main">
               <a:ext uri="{FF2B5EF4-FFF2-40B4-BE49-F238E27FC236}">
-                <a16:creationId xmlns:a16="http://schemas.microsoft.com/office/drawing/2014/main" id="{16880A7E-4697-44D7-A6E7-72DB0FAFF439}"/>
+                <a16:creationId xmlns:a16="http://schemas.microsoft.com/office/drawing/2014/main" id="{1AD6B9B9-7416-4625-93CB-104FB4ADF848}"/>
               </a:ext>
             </a:extLst>
           </p:cNvPr>
@@ -13700,7 +13700,7 @@
           <p:cNvPr id="20" name="">
             <a:extLst xmlns:a="http://schemas.openxmlformats.org/drawingml/2006/main">
               <a:ext uri="{FF2B5EF4-FFF2-40B4-BE49-F238E27FC236}">
-                <a16:creationId xmlns:a16="http://schemas.microsoft.com/office/drawing/2014/main" id="{D59480D8-74EC-41D1-95C0-1848094AA4ED}"/>
+                <a16:creationId xmlns:a16="http://schemas.microsoft.com/office/drawing/2014/main" id="{5389F95D-A28B-437E-93F0-D445C590C62D}"/>
               </a:ext>
             </a:extLst>
           </p:cNvPr>
@@ -13750,7 +13750,7 @@
           <p:cNvPr id="21" name="">
             <a:extLst xmlns:a="http://schemas.openxmlformats.org/drawingml/2006/main">
               <a:ext uri="{FF2B5EF4-FFF2-40B4-BE49-F238E27FC236}">
-                <a16:creationId xmlns:a16="http://schemas.microsoft.com/office/drawing/2014/main" id="{70B4FF83-5D89-4524-B572-121ADB510842}"/>
+                <a16:creationId xmlns:a16="http://schemas.microsoft.com/office/drawing/2014/main" id="{5AED36E7-3969-46D8-B5E8-186C23D9120A}"/>
               </a:ext>
             </a:extLst>
           </p:cNvPr>
@@ -13804,7 +13804,7 @@
           <p:nvPr/>
         </p:nvPicPr>
         <p:blipFill>
-          <a:blip xmlns:r="http://schemas.openxmlformats.org/officeDocument/2006/relationships" xmlns:a="http://schemas.openxmlformats.org/drawingml/2006/main" r:embed="R2c32324e5bef4a22"/>
+          <a:blip xmlns:r="http://schemas.openxmlformats.org/officeDocument/2006/relationships" xmlns:a="http://schemas.openxmlformats.org/drawingml/2006/main" r:embed="Rce28474f17934560"/>
           <a:stretch xmlns:a="http://schemas.openxmlformats.org/drawingml/2006/main"/>
         </p:blipFill>
         <p:spPr>
@@ -13822,7 +13822,7 @@
           <p:cNvPr id="23" name="">
             <a:extLst xmlns:a="http://schemas.openxmlformats.org/drawingml/2006/main">
               <a:ext uri="{FF2B5EF4-FFF2-40B4-BE49-F238E27FC236}">
-                <a16:creationId xmlns:a16="http://schemas.microsoft.com/office/drawing/2014/main" id="{88A99F16-EA71-47D9-9FC1-C95B5D1E7A09}"/>
+                <a16:creationId xmlns:a16="http://schemas.microsoft.com/office/drawing/2014/main" id="{71C3E92D-FC8C-4C9D-95DD-BD22BF70D8C8}"/>
               </a:ext>
             </a:extLst>
           </p:cNvPr>
@@ -13872,7 +13872,7 @@
           <p:cNvPr id="24" name="">
             <a:extLst xmlns:a="http://schemas.openxmlformats.org/drawingml/2006/main">
               <a:ext uri="{FF2B5EF4-FFF2-40B4-BE49-F238E27FC236}">
-                <a16:creationId xmlns:a16="http://schemas.microsoft.com/office/drawing/2014/main" id="{FABF7A98-1D1E-4CA4-8CD0-20F27DE68545}"/>
+                <a16:creationId xmlns:a16="http://schemas.microsoft.com/office/drawing/2014/main" id="{2A0A95D8-E828-4787-BE89-17EC546FCA24}"/>
               </a:ext>
             </a:extLst>
           </p:cNvPr>
@@ -13922,7 +13922,7 @@
           <p:cNvPr id="25" name="">
             <a:extLst xmlns:a="http://schemas.openxmlformats.org/drawingml/2006/main">
               <a:ext uri="{FF2B5EF4-FFF2-40B4-BE49-F238E27FC236}">
-                <a16:creationId xmlns:a16="http://schemas.microsoft.com/office/drawing/2014/main" id="{1A7CF64A-6959-4319-B9D5-36AC77229889}"/>
+                <a16:creationId xmlns:a16="http://schemas.microsoft.com/office/drawing/2014/main" id="{AF14AA21-CB74-4E18-BA1A-6462AEE23F6E}"/>
               </a:ext>
             </a:extLst>
           </p:cNvPr>
@@ -13970,7 +13970,7 @@
     </p:spTree>
     <p:extLst>
       <p:ext uri="{BB962C8B-B14F-4D97-AF65-F5344CB8AC3E}">
-        <p14:creationId xmlns:p14="http://schemas.microsoft.com/office/powerpoint/2010/main" val="2044957081"/>
+        <p14:creationId xmlns:p14="http://schemas.microsoft.com/office/powerpoint/2010/main" val="1341276363"/>
       </p:ext>
     </p:extLst>
   </p:cSld>

--- a/static/audit_presentation_khalil.pptx
+++ b/static/audit_presentation_khalil.pptx
@@ -2,21 +2,21 @@
 <file path=ppt/presentation.xml><?xml version="1.0" encoding="utf-8"?>
 <p:presentation xmlns:p="http://schemas.openxmlformats.org/presentationml/2006/main">
   <p:sldMasterIdLst>
-    <p:sldMasterId xmlns:r="http://schemas.openxmlformats.org/officeDocument/2006/relationships" id="2147483648" r:id="R75068c1915e5460d"/>
+    <p:sldMasterId xmlns:r="http://schemas.openxmlformats.org/officeDocument/2006/relationships" id="2147483648" r:id="Rf0dfc94158b84073"/>
   </p:sldMasterIdLst>
   <p:notesMasterIdLst>
-    <p:notesMasterId xmlns:r="http://schemas.openxmlformats.org/officeDocument/2006/relationships" r:id="R53f6ad45fe5f4e24"/>
+    <p:notesMasterId xmlns:r="http://schemas.openxmlformats.org/officeDocument/2006/relationships" r:id="Rc194b5bb05314a74"/>
   </p:notesMasterIdLst>
   <p:sldIdLst>
-    <p:sldId xmlns:r="http://schemas.openxmlformats.org/officeDocument/2006/relationships" id="256" r:id="R61426e7fa3e845bd"/>
-    <p:sldId xmlns:r="http://schemas.openxmlformats.org/officeDocument/2006/relationships" id="257" r:id="Rbf55226d8b1e4b8f"/>
-    <p:sldId xmlns:r="http://schemas.openxmlformats.org/officeDocument/2006/relationships" id="258" r:id="R075637b44ce34827"/>
-    <p:sldId xmlns:r="http://schemas.openxmlformats.org/officeDocument/2006/relationships" id="259" r:id="Rafbe4dca2fa54a13"/>
-    <p:sldId xmlns:r="http://schemas.openxmlformats.org/officeDocument/2006/relationships" id="260" r:id="R0f1cd35069de424c"/>
-    <p:sldId xmlns:r="http://schemas.openxmlformats.org/officeDocument/2006/relationships" id="261" r:id="Rc9eb6d9fc87045a5"/>
-    <p:sldId xmlns:r="http://schemas.openxmlformats.org/officeDocument/2006/relationships" id="262" r:id="R175791b530724b78"/>
-    <p:sldId xmlns:r="http://schemas.openxmlformats.org/officeDocument/2006/relationships" id="263" r:id="Rf87f676c8ab54ac5"/>
-    <p:sldId xmlns:r="http://schemas.openxmlformats.org/officeDocument/2006/relationships" id="264" r:id="Rdbd8287508d542ca"/>
+    <p:sldId xmlns:r="http://schemas.openxmlformats.org/officeDocument/2006/relationships" id="256" r:id="R3611fdde12314d2a"/>
+    <p:sldId xmlns:r="http://schemas.openxmlformats.org/officeDocument/2006/relationships" id="257" r:id="R612def26c3904535"/>
+    <p:sldId xmlns:r="http://schemas.openxmlformats.org/officeDocument/2006/relationships" id="258" r:id="R421d5f74b1da4a4e"/>
+    <p:sldId xmlns:r="http://schemas.openxmlformats.org/officeDocument/2006/relationships" id="259" r:id="Rce19a3e198cb4830"/>
+    <p:sldId xmlns:r="http://schemas.openxmlformats.org/officeDocument/2006/relationships" id="260" r:id="Rafcee7c8a85f4247"/>
+    <p:sldId xmlns:r="http://schemas.openxmlformats.org/officeDocument/2006/relationships" id="261" r:id="Rbf3257a256f34237"/>
+    <p:sldId xmlns:r="http://schemas.openxmlformats.org/officeDocument/2006/relationships" id="262" r:id="Rfd7395deb9e9417a"/>
+    <p:sldId xmlns:r="http://schemas.openxmlformats.org/officeDocument/2006/relationships" id="263" r:id="R08d4c52504bd4a21"/>
+    <p:sldId xmlns:r="http://schemas.openxmlformats.org/officeDocument/2006/relationships" id="264" r:id="R4399eb57d1624cc6"/>
   </p:sldIdLst>
   <p:sldSz cx="12192000" cy="6858000"/>
   <p:notesSz cx="6858000" cy="9144000"/>
@@ -1137,7 +1137,7 @@
   </p:cSld>
   <p:clrMap bg1="lt1" tx1="dk1" bg2="lt2" tx2="dk2" accent1="accent1" accent2="accent2" accent3="accent3" accent4="accent4" accent5="accent5" accent6="accent6" hlink="hlink" folHlink="folHlink"/>
   <p:sldLayoutIdLst>
-    <p:sldLayoutId xmlns:r="http://schemas.openxmlformats.org/officeDocument/2006/relationships" id="2147483649" r:id="Rfdc2a9f0196048f4"/>
+    <p:sldLayoutId xmlns:r="http://schemas.openxmlformats.org/officeDocument/2006/relationships" id="2147483649" r:id="Re89d655fda904aa1"/>
   </p:sldLayoutIdLst>
   <p:txStyles>
     <p:titleStyle>
@@ -1688,7 +1688,7 @@
           <p:cNvPr id="1" name="">
             <a:extLst xmlns:a="http://schemas.openxmlformats.org/drawingml/2006/main">
               <a:ext uri="{FF2B5EF4-FFF2-40B4-BE49-F238E27FC236}">
-                <a16:creationId xmlns:a16="http://schemas.microsoft.com/office/drawing/2014/main" id="{75E56073-67B5-479C-98A6-94484F97E0A8}"/>
+                <a16:creationId xmlns:a16="http://schemas.microsoft.com/office/drawing/2014/main" id="{08DE33E2-51A8-4228-9EFA-F1612DFEF31C}"/>
               </a:ext>
             </a:extLst>
           </p:cNvPr>
@@ -1719,7 +1719,7 @@
           <p:cNvPr id="2" name="">
             <a:extLst xmlns:a="http://schemas.openxmlformats.org/drawingml/2006/main">
               <a:ext uri="{FF2B5EF4-FFF2-40B4-BE49-F238E27FC236}">
-                <a16:creationId xmlns:a16="http://schemas.microsoft.com/office/drawing/2014/main" id="{5A7EC5D6-1A59-4C3A-B09D-224C07374064}"/>
+                <a16:creationId xmlns:a16="http://schemas.microsoft.com/office/drawing/2014/main" id="{9FF56248-63EC-4D1D-B774-A7520D07208C}"/>
               </a:ext>
             </a:extLst>
           </p:cNvPr>
@@ -1754,7 +1754,7 @@
           <p:nvPr/>
         </p:nvPicPr>
         <p:blipFill>
-          <a:blip xmlns:r="http://schemas.openxmlformats.org/officeDocument/2006/relationships" xmlns:a="http://schemas.openxmlformats.org/drawingml/2006/main" r:embed="Rccb0839927ad45fa"/>
+          <a:blip xmlns:r="http://schemas.openxmlformats.org/officeDocument/2006/relationships" xmlns:a="http://schemas.openxmlformats.org/drawingml/2006/main" r:embed="R911043a9bd7542f7"/>
           <a:stretch xmlns:a="http://schemas.openxmlformats.org/drawingml/2006/main"/>
         </p:blipFill>
         <p:spPr>
@@ -1772,7 +1772,7 @@
           <p:cNvPr id="4" name="">
             <a:extLst xmlns:a="http://schemas.openxmlformats.org/drawingml/2006/main">
               <a:ext uri="{FF2B5EF4-FFF2-40B4-BE49-F238E27FC236}">
-                <a16:creationId xmlns:a16="http://schemas.microsoft.com/office/drawing/2014/main" id="{65F656AC-9EF6-4345-9626-5B99A6BC0CB1}"/>
+                <a16:creationId xmlns:a16="http://schemas.microsoft.com/office/drawing/2014/main" id="{21D5D245-5A30-4806-9781-BC4F3DDB91D0}"/>
               </a:ext>
             </a:extLst>
           </p:cNvPr>
@@ -1822,7 +1822,7 @@
           <p:cNvPr id="5" name="">
             <a:extLst xmlns:a="http://schemas.openxmlformats.org/drawingml/2006/main">
               <a:ext uri="{FF2B5EF4-FFF2-40B4-BE49-F238E27FC236}">
-                <a16:creationId xmlns:a16="http://schemas.microsoft.com/office/drawing/2014/main" id="{DF9E114C-8A02-4515-BAC1-12DDF461025B}"/>
+                <a16:creationId xmlns:a16="http://schemas.microsoft.com/office/drawing/2014/main" id="{196DF56E-F241-4C14-9339-B632DB7331A0}"/>
               </a:ext>
             </a:extLst>
           </p:cNvPr>
@@ -1872,7 +1872,7 @@
           <p:cNvPr id="6" name="">
             <a:extLst xmlns:a="http://schemas.openxmlformats.org/drawingml/2006/main">
               <a:ext uri="{FF2B5EF4-FFF2-40B4-BE49-F238E27FC236}">
-                <a16:creationId xmlns:a16="http://schemas.microsoft.com/office/drawing/2014/main" id="{62DBCAF9-F835-4092-9617-73EEF9498823}"/>
+                <a16:creationId xmlns:a16="http://schemas.microsoft.com/office/drawing/2014/main" id="{35FD3D70-5731-4F84-B4BF-C99CCE0C8F38}"/>
               </a:ext>
             </a:extLst>
           </p:cNvPr>
@@ -1922,7 +1922,7 @@
           <p:cNvPr id="7" name="">
             <a:extLst xmlns:a="http://schemas.openxmlformats.org/drawingml/2006/main">
               <a:ext uri="{FF2B5EF4-FFF2-40B4-BE49-F238E27FC236}">
-                <a16:creationId xmlns:a16="http://schemas.microsoft.com/office/drawing/2014/main" id="{DE90590F-99EF-4F8F-9F46-FC73CCB9DB64}"/>
+                <a16:creationId xmlns:a16="http://schemas.microsoft.com/office/drawing/2014/main" id="{3F5BAFBD-EBFF-44DD-BFF1-596420521887}"/>
               </a:ext>
             </a:extLst>
           </p:cNvPr>
@@ -1955,7 +1955,7 @@
           <p:cNvPr id="8" name="">
             <a:extLst xmlns:a="http://schemas.openxmlformats.org/drawingml/2006/main">
               <a:ext uri="{FF2B5EF4-FFF2-40B4-BE49-F238E27FC236}">
-                <a16:creationId xmlns:a16="http://schemas.microsoft.com/office/drawing/2014/main" id="{56F8C0B7-A3C4-494A-ADEF-8D09C868CB5D}"/>
+                <a16:creationId xmlns:a16="http://schemas.microsoft.com/office/drawing/2014/main" id="{7CF2C414-4CDC-4489-82EA-1682BA9D78E0}"/>
               </a:ext>
             </a:extLst>
           </p:cNvPr>
@@ -2005,7 +2005,7 @@
           <p:cNvPr id="9" name="">
             <a:extLst xmlns:a="http://schemas.openxmlformats.org/drawingml/2006/main">
               <a:ext uri="{FF2B5EF4-FFF2-40B4-BE49-F238E27FC236}">
-                <a16:creationId xmlns:a16="http://schemas.microsoft.com/office/drawing/2014/main" id="{1C62EB84-D88B-4093-B7E4-E2505C8A77E6}"/>
+                <a16:creationId xmlns:a16="http://schemas.microsoft.com/office/drawing/2014/main" id="{EE0F51D7-4ACD-4AFB-A70D-FE913A21D611}"/>
               </a:ext>
             </a:extLst>
           </p:cNvPr>
@@ -2055,7 +2055,7 @@
           <p:cNvPr id="10" name="">
             <a:extLst xmlns:a="http://schemas.openxmlformats.org/drawingml/2006/main">
               <a:ext uri="{FF2B5EF4-FFF2-40B4-BE49-F238E27FC236}">
-                <a16:creationId xmlns:a16="http://schemas.microsoft.com/office/drawing/2014/main" id="{1616B46B-75FD-4E3A-BF1B-E0F68EB48793}"/>
+                <a16:creationId xmlns:a16="http://schemas.microsoft.com/office/drawing/2014/main" id="{A45674FF-576C-4A48-9F39-789F0DB98869}"/>
               </a:ext>
             </a:extLst>
           </p:cNvPr>
@@ -2088,7 +2088,7 @@
           <p:cNvPr id="11" name="">
             <a:extLst xmlns:a="http://schemas.openxmlformats.org/drawingml/2006/main">
               <a:ext uri="{FF2B5EF4-FFF2-40B4-BE49-F238E27FC236}">
-                <a16:creationId xmlns:a16="http://schemas.microsoft.com/office/drawing/2014/main" id="{75711ED7-6B66-4E4A-9D38-75794CF350E9}"/>
+                <a16:creationId xmlns:a16="http://schemas.microsoft.com/office/drawing/2014/main" id="{60F5AF45-3B5B-46F1-B961-24386AB06F35}"/>
               </a:ext>
             </a:extLst>
           </p:cNvPr>
@@ -2138,7 +2138,7 @@
           <p:cNvPr id="12" name="">
             <a:extLst xmlns:a="http://schemas.openxmlformats.org/drawingml/2006/main">
               <a:ext uri="{FF2B5EF4-FFF2-40B4-BE49-F238E27FC236}">
-                <a16:creationId xmlns:a16="http://schemas.microsoft.com/office/drawing/2014/main" id="{533FF95B-5907-43D2-A473-B75E98ACC01E}"/>
+                <a16:creationId xmlns:a16="http://schemas.microsoft.com/office/drawing/2014/main" id="{963FDD88-32F0-4031-A01F-934F75128990}"/>
               </a:ext>
             </a:extLst>
           </p:cNvPr>
@@ -2188,7 +2188,7 @@
           <p:cNvPr id="13" name="">
             <a:extLst xmlns:a="http://schemas.openxmlformats.org/drawingml/2006/main">
               <a:ext uri="{FF2B5EF4-FFF2-40B4-BE49-F238E27FC236}">
-                <a16:creationId xmlns:a16="http://schemas.microsoft.com/office/drawing/2014/main" id="{D965EBED-FCAB-462C-9826-AB6C67A312CC}"/>
+                <a16:creationId xmlns:a16="http://schemas.microsoft.com/office/drawing/2014/main" id="{E0EB35C7-F7BF-4B51-A945-FFF58C5A9961}"/>
               </a:ext>
             </a:extLst>
           </p:cNvPr>
@@ -2242,7 +2242,7 @@
           <p:nvPr/>
         </p:nvPicPr>
         <p:blipFill>
-          <a:blip xmlns:r="http://schemas.openxmlformats.org/officeDocument/2006/relationships" xmlns:a="http://schemas.openxmlformats.org/drawingml/2006/main" r:embed="R20fb43df97f246a2"/>
+          <a:blip xmlns:r="http://schemas.openxmlformats.org/officeDocument/2006/relationships" xmlns:a="http://schemas.openxmlformats.org/drawingml/2006/main" r:embed="Rbed2715e8a1c42bf"/>
           <a:srcRect xmlns:a="http://schemas.openxmlformats.org/drawingml/2006/main" l="5453" t="0" r="5453" b="0"/>
           <a:stretch xmlns:a="http://schemas.openxmlformats.org/drawingml/2006/main">
             <a:fillRect l="0" t="0" r="0" b="0"/>
@@ -2263,7 +2263,7 @@
           <p:cNvPr id="15" name="">
             <a:extLst xmlns:a="http://schemas.openxmlformats.org/drawingml/2006/main">
               <a:ext uri="{FF2B5EF4-FFF2-40B4-BE49-F238E27FC236}">
-                <a16:creationId xmlns:a16="http://schemas.microsoft.com/office/drawing/2014/main" id="{F2D2B97B-600F-4E3D-A68C-8C9A3A7550CF}"/>
+                <a16:creationId xmlns:a16="http://schemas.microsoft.com/office/drawing/2014/main" id="{8C200EE7-7952-4195-964E-CA1F6561CBD3}"/>
               </a:ext>
             </a:extLst>
           </p:cNvPr>
@@ -2294,7 +2294,7 @@
           <p:cNvPr id="16" name="">
             <a:extLst xmlns:a="http://schemas.openxmlformats.org/drawingml/2006/main">
               <a:ext uri="{FF2B5EF4-FFF2-40B4-BE49-F238E27FC236}">
-                <a16:creationId xmlns:a16="http://schemas.microsoft.com/office/drawing/2014/main" id="{19B527BC-94F0-4137-8D41-F647973811AE}"/>
+                <a16:creationId xmlns:a16="http://schemas.microsoft.com/office/drawing/2014/main" id="{186DFE5E-DAF7-40ED-AD34-6C899A1DE7C3}"/>
               </a:ext>
             </a:extLst>
           </p:cNvPr>
@@ -2342,7 +2342,7 @@
     </p:spTree>
     <p:extLst>
       <p:ext uri="{BB962C8B-B14F-4D97-AF65-F5344CB8AC3E}">
-        <p14:creationId xmlns:p14="http://schemas.microsoft.com/office/powerpoint/2010/main" val="1731201360"/>
+        <p14:creationId xmlns:p14="http://schemas.microsoft.com/office/powerpoint/2010/main" val="2116749810"/>
       </p:ext>
     </p:extLst>
   </p:cSld>
@@ -2373,7 +2373,7 @@
           <p:cNvPr id="1" name="">
             <a:extLst xmlns:a="http://schemas.openxmlformats.org/drawingml/2006/main">
               <a:ext uri="{FF2B5EF4-FFF2-40B4-BE49-F238E27FC236}">
-                <a16:creationId xmlns:a16="http://schemas.microsoft.com/office/drawing/2014/main" id="{E3E8ED8B-4D55-4E0D-A90B-091E24C491CF}"/>
+                <a16:creationId xmlns:a16="http://schemas.microsoft.com/office/drawing/2014/main" id="{C66E0B11-01C1-4BE5-8BF9-5CA0BF6A6C35}"/>
               </a:ext>
             </a:extLst>
           </p:cNvPr>
@@ -2408,7 +2408,7 @@
           <p:nvPr/>
         </p:nvPicPr>
         <p:blipFill>
-          <a:blip xmlns:r="http://schemas.openxmlformats.org/officeDocument/2006/relationships" xmlns:a="http://schemas.openxmlformats.org/drawingml/2006/main" r:embed="R5be8e0c9e5864056"/>
+          <a:blip xmlns:r="http://schemas.openxmlformats.org/officeDocument/2006/relationships" xmlns:a="http://schemas.openxmlformats.org/drawingml/2006/main" r:embed="R841ef76d5e184844"/>
           <a:stretch xmlns:a="http://schemas.openxmlformats.org/drawingml/2006/main"/>
         </p:blipFill>
         <p:spPr>
@@ -2426,7 +2426,7 @@
           <p:cNvPr id="3" name="">
             <a:extLst xmlns:a="http://schemas.openxmlformats.org/drawingml/2006/main">
               <a:ext uri="{FF2B5EF4-FFF2-40B4-BE49-F238E27FC236}">
-                <a16:creationId xmlns:a16="http://schemas.microsoft.com/office/drawing/2014/main" id="{C4D3DC13-48E1-42A0-B9E4-8E9637B5E735}"/>
+                <a16:creationId xmlns:a16="http://schemas.microsoft.com/office/drawing/2014/main" id="{852080A3-3D37-46B1-B7A1-790C097B70DA}"/>
               </a:ext>
             </a:extLst>
           </p:cNvPr>
@@ -2476,7 +2476,7 @@
           <p:cNvPr id="4" name="">
             <a:extLst xmlns:a="http://schemas.openxmlformats.org/drawingml/2006/main">
               <a:ext uri="{FF2B5EF4-FFF2-40B4-BE49-F238E27FC236}">
-                <a16:creationId xmlns:a16="http://schemas.microsoft.com/office/drawing/2014/main" id="{A48748C5-4B5B-4636-9AD1-440799C3EF83}"/>
+                <a16:creationId xmlns:a16="http://schemas.microsoft.com/office/drawing/2014/main" id="{4297F2FC-EA17-4F2F-8677-CF1C00287BA1}"/>
               </a:ext>
             </a:extLst>
           </p:cNvPr>
@@ -2509,7 +2509,7 @@
           <p:cNvPr id="5" name="">
             <a:extLst xmlns:a="http://schemas.openxmlformats.org/drawingml/2006/main">
               <a:ext uri="{FF2B5EF4-FFF2-40B4-BE49-F238E27FC236}">
-                <a16:creationId xmlns:a16="http://schemas.microsoft.com/office/drawing/2014/main" id="{FA7A4CDF-9578-4705-A743-25418E4D7CCD}"/>
+                <a16:creationId xmlns:a16="http://schemas.microsoft.com/office/drawing/2014/main" id="{6AD82B6E-7DC6-4948-934E-FA76591BB087}"/>
               </a:ext>
             </a:extLst>
           </p:cNvPr>
@@ -2540,7 +2540,7 @@
           <p:cNvPr id="6" name="">
             <a:extLst xmlns:a="http://schemas.openxmlformats.org/drawingml/2006/main">
               <a:ext uri="{FF2B5EF4-FFF2-40B4-BE49-F238E27FC236}">
-                <a16:creationId xmlns:a16="http://schemas.microsoft.com/office/drawing/2014/main" id="{85F9DCE1-74E6-43EB-B5B0-42F937575528}"/>
+                <a16:creationId xmlns:a16="http://schemas.microsoft.com/office/drawing/2014/main" id="{BD4DD853-EA70-4F83-B54F-3F35356CD1D8}"/>
               </a:ext>
             </a:extLst>
           </p:cNvPr>
@@ -2590,7 +2590,7 @@
           <p:cNvPr id="7" name="">
             <a:extLst xmlns:a="http://schemas.openxmlformats.org/drawingml/2006/main">
               <a:ext uri="{FF2B5EF4-FFF2-40B4-BE49-F238E27FC236}">
-                <a16:creationId xmlns:a16="http://schemas.microsoft.com/office/drawing/2014/main" id="{7153451F-198B-4BC9-9D72-0B6E1D3E0485}"/>
+                <a16:creationId xmlns:a16="http://schemas.microsoft.com/office/drawing/2014/main" id="{03BFBF28-DC31-4B91-B97C-2A5B2A59A36B}"/>
               </a:ext>
             </a:extLst>
           </p:cNvPr>
@@ -2640,7 +2640,7 @@
           <p:cNvPr id="8" name="">
             <a:extLst xmlns:a="http://schemas.openxmlformats.org/drawingml/2006/main">
               <a:ext uri="{FF2B5EF4-FFF2-40B4-BE49-F238E27FC236}">
-                <a16:creationId xmlns:a16="http://schemas.microsoft.com/office/drawing/2014/main" id="{8E350708-3CDE-44B4-B9B6-7FBEB69F10F5}"/>
+                <a16:creationId xmlns:a16="http://schemas.microsoft.com/office/drawing/2014/main" id="{6910A9DF-326C-4C6B-BF71-8C2A605D0A36}"/>
               </a:ext>
             </a:extLst>
           </p:cNvPr>
@@ -2690,7 +2690,7 @@
           <p:cNvPr id="9" name="">
             <a:extLst xmlns:a="http://schemas.openxmlformats.org/drawingml/2006/main">
               <a:ext uri="{FF2B5EF4-FFF2-40B4-BE49-F238E27FC236}">
-                <a16:creationId xmlns:a16="http://schemas.microsoft.com/office/drawing/2014/main" id="{9C791ED1-3269-4975-B01D-005915A83F6D}"/>
+                <a16:creationId xmlns:a16="http://schemas.microsoft.com/office/drawing/2014/main" id="{85BCD15E-B7B5-4993-98C6-F80CFB4B33A2}"/>
               </a:ext>
             </a:extLst>
           </p:cNvPr>
@@ -2740,7 +2740,7 @@
           <p:cNvPr id="10" name="">
             <a:extLst xmlns:a="http://schemas.openxmlformats.org/drawingml/2006/main">
               <a:ext uri="{FF2B5EF4-FFF2-40B4-BE49-F238E27FC236}">
-                <a16:creationId xmlns:a16="http://schemas.microsoft.com/office/drawing/2014/main" id="{2E83D7AA-1421-4433-B5ED-6EDD28520F7F}"/>
+                <a16:creationId xmlns:a16="http://schemas.microsoft.com/office/drawing/2014/main" id="{6FB57F04-8025-442A-BD7D-DD88075ABA66}"/>
               </a:ext>
             </a:extLst>
           </p:cNvPr>
@@ -2790,7 +2790,7 @@
           <p:cNvPr id="11" name="">
             <a:extLst xmlns:a="http://schemas.openxmlformats.org/drawingml/2006/main">
               <a:ext uri="{FF2B5EF4-FFF2-40B4-BE49-F238E27FC236}">
-                <a16:creationId xmlns:a16="http://schemas.microsoft.com/office/drawing/2014/main" id="{A6AE3351-1FCF-42BF-99B0-FAE2FF8A0D04}"/>
+                <a16:creationId xmlns:a16="http://schemas.microsoft.com/office/drawing/2014/main" id="{0D6B61EE-B1BF-4634-B129-3732BA257C0F}"/>
               </a:ext>
             </a:extLst>
           </p:cNvPr>
@@ -2840,7 +2840,7 @@
           <p:cNvPr id="12" name="">
             <a:extLst xmlns:a="http://schemas.openxmlformats.org/drawingml/2006/main">
               <a:ext uri="{FF2B5EF4-FFF2-40B4-BE49-F238E27FC236}">
-                <a16:creationId xmlns:a16="http://schemas.microsoft.com/office/drawing/2014/main" id="{7EE94F35-3121-4CF0-90FA-88164460C3E8}"/>
+                <a16:creationId xmlns:a16="http://schemas.microsoft.com/office/drawing/2014/main" id="{723DEB39-F4DB-42A6-8040-BE0638C4C969}"/>
               </a:ext>
             </a:extLst>
           </p:cNvPr>
@@ -2890,7 +2890,7 @@
           <p:cNvPr id="13" name="">
             <a:extLst xmlns:a="http://schemas.openxmlformats.org/drawingml/2006/main">
               <a:ext uri="{FF2B5EF4-FFF2-40B4-BE49-F238E27FC236}">
-                <a16:creationId xmlns:a16="http://schemas.microsoft.com/office/drawing/2014/main" id="{18736DD1-9C37-45CC-85BF-F3ED245EF8F1}"/>
+                <a16:creationId xmlns:a16="http://schemas.microsoft.com/office/drawing/2014/main" id="{DCBFB0A5-2942-44AD-A1DA-7624F68AE570}"/>
               </a:ext>
             </a:extLst>
           </p:cNvPr>
@@ -2920,14 +2920,14 @@
             <a:pPr>
               <a:defRPr sz="2700" b="1">
                 <a:solidFill>
-                  <a:srgbClr val="FF6412"/>
+                  <a:srgbClr val="161616"/>
                 </a:solidFill>
               </a:defRPr>
             </a:pPr>
             <a:r>
               <a:rPr sz="2700" b="1">
                 <a:solidFill>
-                  <a:srgbClr val="FF6412"/>
+                  <a:srgbClr val="161616"/>
                 </a:solidFill>
               </a:rPr>
               <a:t>70+</a:t>
@@ -2940,7 +2940,7 @@
           <p:cNvPr id="14" name="">
             <a:extLst xmlns:a="http://schemas.openxmlformats.org/drawingml/2006/main">
               <a:ext uri="{FF2B5EF4-FFF2-40B4-BE49-F238E27FC236}">
-                <a16:creationId xmlns:a16="http://schemas.microsoft.com/office/drawing/2014/main" id="{4739F3AC-CC3F-408D-915E-C56E0F0A996D}"/>
+                <a16:creationId xmlns:a16="http://schemas.microsoft.com/office/drawing/2014/main" id="{074AEC4A-7EFA-4AFD-BC6C-B05F1F28EE2A}"/>
               </a:ext>
             </a:extLst>
           </p:cNvPr>
@@ -2990,7 +2990,7 @@
           <p:cNvPr id="15" name="">
             <a:extLst xmlns:a="http://schemas.openxmlformats.org/drawingml/2006/main">
               <a:ext uri="{FF2B5EF4-FFF2-40B4-BE49-F238E27FC236}">
-                <a16:creationId xmlns:a16="http://schemas.microsoft.com/office/drawing/2014/main" id="{11041C32-C09D-48CC-935A-AE558A757B30}"/>
+                <a16:creationId xmlns:a16="http://schemas.microsoft.com/office/drawing/2014/main" id="{E03DC1FD-DA60-409C-A1FF-158A383288E1}"/>
               </a:ext>
             </a:extLst>
           </p:cNvPr>
@@ -3040,7 +3040,7 @@
           <p:cNvPr id="16" name="">
             <a:extLst xmlns:a="http://schemas.openxmlformats.org/drawingml/2006/main">
               <a:ext uri="{FF2B5EF4-FFF2-40B4-BE49-F238E27FC236}">
-                <a16:creationId xmlns:a16="http://schemas.microsoft.com/office/drawing/2014/main" id="{26995863-116E-4582-874F-F098282A51DF}"/>
+                <a16:creationId xmlns:a16="http://schemas.microsoft.com/office/drawing/2014/main" id="{DE90A0DF-1DBE-48C9-BD53-0DF21818C33D}"/>
               </a:ext>
             </a:extLst>
           </p:cNvPr>
@@ -3090,7 +3090,7 @@
           <p:cNvPr id="17" name="">
             <a:extLst xmlns:a="http://schemas.openxmlformats.org/drawingml/2006/main">
               <a:ext uri="{FF2B5EF4-FFF2-40B4-BE49-F238E27FC236}">
-                <a16:creationId xmlns:a16="http://schemas.microsoft.com/office/drawing/2014/main" id="{9004027D-23C7-4A13-83BB-059C99C71007}"/>
+                <a16:creationId xmlns:a16="http://schemas.microsoft.com/office/drawing/2014/main" id="{0F90267E-1598-4F99-9D29-54B0A03FD58D}"/>
               </a:ext>
             </a:extLst>
           </p:cNvPr>
@@ -3125,7 +3125,7 @@
           <p:cNvPr id="18" name="">
             <a:extLst xmlns:a="http://schemas.openxmlformats.org/drawingml/2006/main">
               <a:ext uri="{FF2B5EF4-FFF2-40B4-BE49-F238E27FC236}">
-                <a16:creationId xmlns:a16="http://schemas.microsoft.com/office/drawing/2014/main" id="{6012C107-1CD0-4771-8724-8F6E802C51D1}"/>
+                <a16:creationId xmlns:a16="http://schemas.microsoft.com/office/drawing/2014/main" id="{C4FB3936-1338-4FA5-B174-796FE209111C}"/>
               </a:ext>
             </a:extLst>
           </p:cNvPr>
@@ -3175,7 +3175,7 @@
           <p:cNvPr id="19" name="">
             <a:extLst xmlns:a="http://schemas.openxmlformats.org/drawingml/2006/main">
               <a:ext uri="{FF2B5EF4-FFF2-40B4-BE49-F238E27FC236}">
-                <a16:creationId xmlns:a16="http://schemas.microsoft.com/office/drawing/2014/main" id="{2A407A83-AE28-4CBC-B35F-4FF315B3ADE3}"/>
+                <a16:creationId xmlns:a16="http://schemas.microsoft.com/office/drawing/2014/main" id="{76C947C7-A796-4BF4-B13C-EE63F43CF615}"/>
               </a:ext>
             </a:extLst>
           </p:cNvPr>
@@ -3225,7 +3225,7 @@
           <p:cNvPr id="20" name="">
             <a:extLst xmlns:a="http://schemas.openxmlformats.org/drawingml/2006/main">
               <a:ext uri="{FF2B5EF4-FFF2-40B4-BE49-F238E27FC236}">
-                <a16:creationId xmlns:a16="http://schemas.microsoft.com/office/drawing/2014/main" id="{42BB2D63-EA61-46CB-9808-A12CE1C52F7B}"/>
+                <a16:creationId xmlns:a16="http://schemas.microsoft.com/office/drawing/2014/main" id="{478826C1-B784-4086-8FC3-B67043788D6B}"/>
               </a:ext>
             </a:extLst>
           </p:cNvPr>
@@ -3275,7 +3275,7 @@
           <p:cNvPr id="21" name="">
             <a:extLst xmlns:a="http://schemas.openxmlformats.org/drawingml/2006/main">
               <a:ext uri="{FF2B5EF4-FFF2-40B4-BE49-F238E27FC236}">
-                <a16:creationId xmlns:a16="http://schemas.microsoft.com/office/drawing/2014/main" id="{3854CDC7-D193-4698-8A6E-2906CDA019F3}"/>
+                <a16:creationId xmlns:a16="http://schemas.microsoft.com/office/drawing/2014/main" id="{E979E1F7-02DC-4E32-9F97-F2D5B899F38E}"/>
               </a:ext>
             </a:extLst>
           </p:cNvPr>
@@ -3325,7 +3325,7 @@
           <p:cNvPr id="22" name="">
             <a:extLst xmlns:a="http://schemas.openxmlformats.org/drawingml/2006/main">
               <a:ext uri="{FF2B5EF4-FFF2-40B4-BE49-F238E27FC236}">
-                <a16:creationId xmlns:a16="http://schemas.microsoft.com/office/drawing/2014/main" id="{E0473C83-1778-436A-80BE-2DF5DA9B3D9B}"/>
+                <a16:creationId xmlns:a16="http://schemas.microsoft.com/office/drawing/2014/main" id="{9DEDCDA5-0757-4342-8CB2-01936CCF8CA6}"/>
               </a:ext>
             </a:extLst>
           </p:cNvPr>
@@ -3356,7 +3356,7 @@
           <p:cNvPr id="23" name="">
             <a:extLst xmlns:a="http://schemas.openxmlformats.org/drawingml/2006/main">
               <a:ext uri="{FF2B5EF4-FFF2-40B4-BE49-F238E27FC236}">
-                <a16:creationId xmlns:a16="http://schemas.microsoft.com/office/drawing/2014/main" id="{17C01B43-84F1-4E8B-8F41-339C0BBE9002}"/>
+                <a16:creationId xmlns:a16="http://schemas.microsoft.com/office/drawing/2014/main" id="{2C61E008-2523-44D8-B041-39B896FCFA8F}"/>
               </a:ext>
             </a:extLst>
           </p:cNvPr>
@@ -3406,7 +3406,7 @@
           <p:cNvPr id="24" name="">
             <a:extLst xmlns:a="http://schemas.openxmlformats.org/drawingml/2006/main">
               <a:ext uri="{FF2B5EF4-FFF2-40B4-BE49-F238E27FC236}">
-                <a16:creationId xmlns:a16="http://schemas.microsoft.com/office/drawing/2014/main" id="{C5810877-6E2B-4D0D-9BDE-C9E6F67689EE}"/>
+                <a16:creationId xmlns:a16="http://schemas.microsoft.com/office/drawing/2014/main" id="{D05489C3-B3E3-4CAC-A511-FFCE8B9316C7}"/>
               </a:ext>
             </a:extLst>
           </p:cNvPr>
@@ -3456,7 +3456,7 @@
           <p:cNvPr id="25" name="">
             <a:extLst xmlns:a="http://schemas.openxmlformats.org/drawingml/2006/main">
               <a:ext uri="{FF2B5EF4-FFF2-40B4-BE49-F238E27FC236}">
-                <a16:creationId xmlns:a16="http://schemas.microsoft.com/office/drawing/2014/main" id="{36094F7E-D7F9-4262-A460-D26E217A27B8}"/>
+                <a16:creationId xmlns:a16="http://schemas.microsoft.com/office/drawing/2014/main" id="{DA95C7EB-5D86-48DD-B7B5-CD8D7999E94C}"/>
               </a:ext>
             </a:extLst>
           </p:cNvPr>
@@ -3506,7 +3506,7 @@
           <p:cNvPr id="26" name="">
             <a:extLst xmlns:a="http://schemas.openxmlformats.org/drawingml/2006/main">
               <a:ext uri="{FF2B5EF4-FFF2-40B4-BE49-F238E27FC236}">
-                <a16:creationId xmlns:a16="http://schemas.microsoft.com/office/drawing/2014/main" id="{67821A77-BA90-4138-A842-3427737444E4}"/>
+                <a16:creationId xmlns:a16="http://schemas.microsoft.com/office/drawing/2014/main" id="{DB60A343-E6AB-4DCC-988C-7E759117585E}"/>
               </a:ext>
             </a:extLst>
           </p:cNvPr>
@@ -3537,7 +3537,7 @@
           <p:cNvPr id="27" name="">
             <a:extLst xmlns:a="http://schemas.openxmlformats.org/drawingml/2006/main">
               <a:ext uri="{FF2B5EF4-FFF2-40B4-BE49-F238E27FC236}">
-                <a16:creationId xmlns:a16="http://schemas.microsoft.com/office/drawing/2014/main" id="{4DBF571B-4ECB-4DC8-BF53-EF475806A2D1}"/>
+                <a16:creationId xmlns:a16="http://schemas.microsoft.com/office/drawing/2014/main" id="{AC3AC949-440F-41F2-B53E-1428203D51DC}"/>
               </a:ext>
             </a:extLst>
           </p:cNvPr>
@@ -3587,7 +3587,7 @@
           <p:cNvPr id="28" name="">
             <a:extLst xmlns:a="http://schemas.openxmlformats.org/drawingml/2006/main">
               <a:ext uri="{FF2B5EF4-FFF2-40B4-BE49-F238E27FC236}">
-                <a16:creationId xmlns:a16="http://schemas.microsoft.com/office/drawing/2014/main" id="{6216432A-2722-4B98-88FF-F751F518278A}"/>
+                <a16:creationId xmlns:a16="http://schemas.microsoft.com/office/drawing/2014/main" id="{19E454DA-A618-4ED7-A851-89004C3ACE6A}"/>
               </a:ext>
             </a:extLst>
           </p:cNvPr>
@@ -3637,7 +3637,7 @@
           <p:cNvPr id="29" name="">
             <a:extLst xmlns:a="http://schemas.openxmlformats.org/drawingml/2006/main">
               <a:ext uri="{FF2B5EF4-FFF2-40B4-BE49-F238E27FC236}">
-                <a16:creationId xmlns:a16="http://schemas.microsoft.com/office/drawing/2014/main" id="{83952712-C6F8-4546-9D72-47456E1679DF}"/>
+                <a16:creationId xmlns:a16="http://schemas.microsoft.com/office/drawing/2014/main" id="{89BDF052-7ECA-46B4-B42A-1FA1A474B16F}"/>
               </a:ext>
             </a:extLst>
           </p:cNvPr>
@@ -3687,7 +3687,7 @@
           <p:cNvPr id="30" name="">
             <a:extLst xmlns:a="http://schemas.openxmlformats.org/drawingml/2006/main">
               <a:ext uri="{FF2B5EF4-FFF2-40B4-BE49-F238E27FC236}">
-                <a16:creationId xmlns:a16="http://schemas.microsoft.com/office/drawing/2014/main" id="{13D515DB-1F87-4014-AD9B-62012978687F}"/>
+                <a16:creationId xmlns:a16="http://schemas.microsoft.com/office/drawing/2014/main" id="{ACDF3277-1BD5-41BF-B436-AAA509F776BE}"/>
               </a:ext>
             </a:extLst>
           </p:cNvPr>
@@ -3718,7 +3718,7 @@
           <p:cNvPr id="31" name="">
             <a:extLst xmlns:a="http://schemas.openxmlformats.org/drawingml/2006/main">
               <a:ext uri="{FF2B5EF4-FFF2-40B4-BE49-F238E27FC236}">
-                <a16:creationId xmlns:a16="http://schemas.microsoft.com/office/drawing/2014/main" id="{87694CE1-0F8F-4FF6-93BA-7B44801D853B}"/>
+                <a16:creationId xmlns:a16="http://schemas.microsoft.com/office/drawing/2014/main" id="{F4126601-D69D-461E-8245-B5B785B198C8}"/>
               </a:ext>
             </a:extLst>
           </p:cNvPr>
@@ -3768,7 +3768,7 @@
           <p:cNvPr id="32" name="">
             <a:extLst xmlns:a="http://schemas.openxmlformats.org/drawingml/2006/main">
               <a:ext uri="{FF2B5EF4-FFF2-40B4-BE49-F238E27FC236}">
-                <a16:creationId xmlns:a16="http://schemas.microsoft.com/office/drawing/2014/main" id="{EF07D124-9FFB-4D77-A6B6-C316BE6A4320}"/>
+                <a16:creationId xmlns:a16="http://schemas.microsoft.com/office/drawing/2014/main" id="{DFB7323B-C7FC-4574-A020-9E0F1990A4EE}"/>
               </a:ext>
             </a:extLst>
           </p:cNvPr>
@@ -3818,7 +3818,7 @@
           <p:cNvPr id="33" name="">
             <a:extLst xmlns:a="http://schemas.openxmlformats.org/drawingml/2006/main">
               <a:ext uri="{FF2B5EF4-FFF2-40B4-BE49-F238E27FC236}">
-                <a16:creationId xmlns:a16="http://schemas.microsoft.com/office/drawing/2014/main" id="{49911D75-B6B3-4091-9EF4-3AF385F0AB45}"/>
+                <a16:creationId xmlns:a16="http://schemas.microsoft.com/office/drawing/2014/main" id="{FEB68CC3-75B7-4B4C-AAE0-E2A28B871121}"/>
               </a:ext>
             </a:extLst>
           </p:cNvPr>
@@ -3866,7 +3866,7 @@
     </p:spTree>
     <p:extLst>
       <p:ext uri="{BB962C8B-B14F-4D97-AF65-F5344CB8AC3E}">
-        <p14:creationId xmlns:p14="http://schemas.microsoft.com/office/powerpoint/2010/main" val="183752776"/>
+        <p14:creationId xmlns:p14="http://schemas.microsoft.com/office/powerpoint/2010/main" val="1522778489"/>
       </p:ext>
     </p:extLst>
   </p:cSld>
@@ -3897,7 +3897,7 @@
           <p:cNvPr id="1" name="">
             <a:extLst xmlns:a="http://schemas.openxmlformats.org/drawingml/2006/main">
               <a:ext uri="{FF2B5EF4-FFF2-40B4-BE49-F238E27FC236}">
-                <a16:creationId xmlns:a16="http://schemas.microsoft.com/office/drawing/2014/main" id="{6D0910FD-5EA6-41E2-957A-A28CE52B8601}"/>
+                <a16:creationId xmlns:a16="http://schemas.microsoft.com/office/drawing/2014/main" id="{BE42EFF1-E3F9-41FF-9D70-80489FBBBEBD}"/>
               </a:ext>
             </a:extLst>
           </p:cNvPr>
@@ -3932,7 +3932,7 @@
           <p:nvPr/>
         </p:nvPicPr>
         <p:blipFill>
-          <a:blip xmlns:r="http://schemas.openxmlformats.org/officeDocument/2006/relationships" xmlns:a="http://schemas.openxmlformats.org/drawingml/2006/main" r:embed="R9ef4c897b92a41b7"/>
+          <a:blip xmlns:r="http://schemas.openxmlformats.org/officeDocument/2006/relationships" xmlns:a="http://schemas.openxmlformats.org/drawingml/2006/main" r:embed="Rf92bf0eaf7254365"/>
           <a:stretch xmlns:a="http://schemas.openxmlformats.org/drawingml/2006/main"/>
         </p:blipFill>
         <p:spPr>
@@ -3950,7 +3950,7 @@
           <p:cNvPr id="3" name="">
             <a:extLst xmlns:a="http://schemas.openxmlformats.org/drawingml/2006/main">
               <a:ext uri="{FF2B5EF4-FFF2-40B4-BE49-F238E27FC236}">
-                <a16:creationId xmlns:a16="http://schemas.microsoft.com/office/drawing/2014/main" id="{81C660C3-5E92-4504-BD33-5333D2CE5DD9}"/>
+                <a16:creationId xmlns:a16="http://schemas.microsoft.com/office/drawing/2014/main" id="{68AF4923-AFA1-4D40-8C2A-1EC16D017B12}"/>
               </a:ext>
             </a:extLst>
           </p:cNvPr>
@@ -4000,7 +4000,7 @@
           <p:cNvPr id="4" name="">
             <a:extLst xmlns:a="http://schemas.openxmlformats.org/drawingml/2006/main">
               <a:ext uri="{FF2B5EF4-FFF2-40B4-BE49-F238E27FC236}">
-                <a16:creationId xmlns:a16="http://schemas.microsoft.com/office/drawing/2014/main" id="{0CE2C098-5812-47ED-8ED8-881F6A4EE8BE}"/>
+                <a16:creationId xmlns:a16="http://schemas.microsoft.com/office/drawing/2014/main" id="{E75B3517-22B3-4072-904F-D6F5C212F69F}"/>
               </a:ext>
             </a:extLst>
           </p:cNvPr>
@@ -4033,7 +4033,7 @@
           <p:cNvPr id="5" name="">
             <a:extLst xmlns:a="http://schemas.openxmlformats.org/drawingml/2006/main">
               <a:ext uri="{FF2B5EF4-FFF2-40B4-BE49-F238E27FC236}">
-                <a16:creationId xmlns:a16="http://schemas.microsoft.com/office/drawing/2014/main" id="{F93669C3-7F44-4437-A2D0-773EFBFAD0CC}"/>
+                <a16:creationId xmlns:a16="http://schemas.microsoft.com/office/drawing/2014/main" id="{459B9BF5-AAB7-46CC-8772-E3A1A76B304C}"/>
               </a:ext>
             </a:extLst>
           </p:cNvPr>
@@ -4064,7 +4064,7 @@
           <p:cNvPr id="6" name="">
             <a:extLst xmlns:a="http://schemas.openxmlformats.org/drawingml/2006/main">
               <a:ext uri="{FF2B5EF4-FFF2-40B4-BE49-F238E27FC236}">
-                <a16:creationId xmlns:a16="http://schemas.microsoft.com/office/drawing/2014/main" id="{5D03AEE5-B623-4E2B-A0DE-10D72BF76868}"/>
+                <a16:creationId xmlns:a16="http://schemas.microsoft.com/office/drawing/2014/main" id="{B8886A05-87FA-40A5-8E43-74ED6E59C039}"/>
               </a:ext>
             </a:extLst>
           </p:cNvPr>
@@ -4114,7 +4114,7 @@
           <p:cNvPr id="7" name="">
             <a:extLst xmlns:a="http://schemas.openxmlformats.org/drawingml/2006/main">
               <a:ext uri="{FF2B5EF4-FFF2-40B4-BE49-F238E27FC236}">
-                <a16:creationId xmlns:a16="http://schemas.microsoft.com/office/drawing/2014/main" id="{FE351D43-EDE8-4DC3-AD31-3C49F39A8F5A}"/>
+                <a16:creationId xmlns:a16="http://schemas.microsoft.com/office/drawing/2014/main" id="{DACE0CB4-A71B-4759-A2FF-7892EFE6E944}"/>
               </a:ext>
             </a:extLst>
           </p:cNvPr>
@@ -4164,7 +4164,7 @@
           <p:cNvPr id="8" name="">
             <a:extLst xmlns:a="http://schemas.openxmlformats.org/drawingml/2006/main">
               <a:ext uri="{FF2B5EF4-FFF2-40B4-BE49-F238E27FC236}">
-                <a16:creationId xmlns:a16="http://schemas.microsoft.com/office/drawing/2014/main" id="{25646449-E113-452C-AB9B-F96BDF4B8759}"/>
+                <a16:creationId xmlns:a16="http://schemas.microsoft.com/office/drawing/2014/main" id="{CCE6246B-B528-4146-B110-6B15737EB391}"/>
               </a:ext>
             </a:extLst>
           </p:cNvPr>
@@ -4214,7 +4214,7 @@
           <p:cNvPr id="9" name="">
             <a:extLst xmlns:a="http://schemas.openxmlformats.org/drawingml/2006/main">
               <a:ext uri="{FF2B5EF4-FFF2-40B4-BE49-F238E27FC236}">
-                <a16:creationId xmlns:a16="http://schemas.microsoft.com/office/drawing/2014/main" id="{CFFB3179-7D44-47BB-A77E-7870394D07D6}"/>
+                <a16:creationId xmlns:a16="http://schemas.microsoft.com/office/drawing/2014/main" id="{6FD85E2C-F793-4CCD-A268-B4C4F091145E}"/>
               </a:ext>
             </a:extLst>
           </p:cNvPr>
@@ -4264,7 +4264,7 @@
           <p:cNvPr id="10" name="">
             <a:extLst xmlns:a="http://schemas.openxmlformats.org/drawingml/2006/main">
               <a:ext uri="{FF2B5EF4-FFF2-40B4-BE49-F238E27FC236}">
-                <a16:creationId xmlns:a16="http://schemas.microsoft.com/office/drawing/2014/main" id="{4F9F0161-0B48-4027-A8FF-6B005A9BDE8E}"/>
+                <a16:creationId xmlns:a16="http://schemas.microsoft.com/office/drawing/2014/main" id="{311680D9-DFED-473D-94B7-657BFDB8A817}"/>
               </a:ext>
             </a:extLst>
           </p:cNvPr>
@@ -4314,7 +4314,7 @@
           <p:cNvPr id="11" name="">
             <a:extLst xmlns:a="http://schemas.openxmlformats.org/drawingml/2006/main">
               <a:ext uri="{FF2B5EF4-FFF2-40B4-BE49-F238E27FC236}">
-                <a16:creationId xmlns:a16="http://schemas.microsoft.com/office/drawing/2014/main" id="{81E9D4E0-420D-42A7-82FF-69DE1D45F882}"/>
+                <a16:creationId xmlns:a16="http://schemas.microsoft.com/office/drawing/2014/main" id="{C15ECA32-FFF4-4A76-B86F-248FE903E556}"/>
               </a:ext>
             </a:extLst>
           </p:cNvPr>
@@ -4345,7 +4345,7 @@
           <p:cNvPr id="12" name="">
             <a:extLst xmlns:a="http://schemas.openxmlformats.org/drawingml/2006/main">
               <a:ext uri="{FF2B5EF4-FFF2-40B4-BE49-F238E27FC236}">
-                <a16:creationId xmlns:a16="http://schemas.microsoft.com/office/drawing/2014/main" id="{3D9D328A-4605-41D6-A41C-A819A3E847B3}"/>
+                <a16:creationId xmlns:a16="http://schemas.microsoft.com/office/drawing/2014/main" id="{5429DC7F-ABF6-40C6-AB88-0820E1003560}"/>
               </a:ext>
             </a:extLst>
           </p:cNvPr>
@@ -4395,7 +4395,7 @@
           <p:cNvPr id="13" name="">
             <a:extLst xmlns:a="http://schemas.openxmlformats.org/drawingml/2006/main">
               <a:ext uri="{FF2B5EF4-FFF2-40B4-BE49-F238E27FC236}">
-                <a16:creationId xmlns:a16="http://schemas.microsoft.com/office/drawing/2014/main" id="{E4D82DA9-EBD5-4B94-8850-3A8587B384DC}"/>
+                <a16:creationId xmlns:a16="http://schemas.microsoft.com/office/drawing/2014/main" id="{3D80A954-189F-4229-AE47-E9AD4A1D4FF0}"/>
               </a:ext>
             </a:extLst>
           </p:cNvPr>
@@ -4445,7 +4445,7 @@
           <p:cNvPr id="14" name="">
             <a:extLst xmlns:a="http://schemas.openxmlformats.org/drawingml/2006/main">
               <a:ext uri="{FF2B5EF4-FFF2-40B4-BE49-F238E27FC236}">
-                <a16:creationId xmlns:a16="http://schemas.microsoft.com/office/drawing/2014/main" id="{4DB67A9E-4F9B-4237-BB27-1F0AF6DDEB47}"/>
+                <a16:creationId xmlns:a16="http://schemas.microsoft.com/office/drawing/2014/main" id="{5298ED51-6EB9-49C5-B841-13B5EF38E83E}"/>
               </a:ext>
             </a:extLst>
           </p:cNvPr>
@@ -4476,7 +4476,7 @@
           <p:cNvPr id="15" name="">
             <a:extLst xmlns:a="http://schemas.openxmlformats.org/drawingml/2006/main">
               <a:ext uri="{FF2B5EF4-FFF2-40B4-BE49-F238E27FC236}">
-                <a16:creationId xmlns:a16="http://schemas.microsoft.com/office/drawing/2014/main" id="{376B6F2B-67C9-4514-ABA8-9431AB4D2CEF}"/>
+                <a16:creationId xmlns:a16="http://schemas.microsoft.com/office/drawing/2014/main" id="{840E7E0B-E05F-4DF5-8846-8E442016AE03}"/>
               </a:ext>
             </a:extLst>
           </p:cNvPr>
@@ -4526,7 +4526,7 @@
           <p:cNvPr id="16" name="">
             <a:extLst xmlns:a="http://schemas.openxmlformats.org/drawingml/2006/main">
               <a:ext uri="{FF2B5EF4-FFF2-40B4-BE49-F238E27FC236}">
-                <a16:creationId xmlns:a16="http://schemas.microsoft.com/office/drawing/2014/main" id="{20FD1D6D-AD39-429E-9CD1-EC76BFF0C45C}"/>
+                <a16:creationId xmlns:a16="http://schemas.microsoft.com/office/drawing/2014/main" id="{EE7BEBAD-3742-4BD5-9B9F-BD362739E5AA}"/>
               </a:ext>
             </a:extLst>
           </p:cNvPr>
@@ -4576,7 +4576,7 @@
           <p:cNvPr id="17" name="">
             <a:extLst xmlns:a="http://schemas.openxmlformats.org/drawingml/2006/main">
               <a:ext uri="{FF2B5EF4-FFF2-40B4-BE49-F238E27FC236}">
-                <a16:creationId xmlns:a16="http://schemas.microsoft.com/office/drawing/2014/main" id="{369F68E7-A11A-4CC6-930A-A3047FC0CD52}"/>
+                <a16:creationId xmlns:a16="http://schemas.microsoft.com/office/drawing/2014/main" id="{FF5364D4-C27A-4D99-B34E-6D2B81E1FBDE}"/>
               </a:ext>
             </a:extLst>
           </p:cNvPr>
@@ -4607,7 +4607,7 @@
           <p:cNvPr id="18" name="">
             <a:extLst xmlns:a="http://schemas.openxmlformats.org/drawingml/2006/main">
               <a:ext uri="{FF2B5EF4-FFF2-40B4-BE49-F238E27FC236}">
-                <a16:creationId xmlns:a16="http://schemas.microsoft.com/office/drawing/2014/main" id="{052B68E1-707B-4176-A5BC-4977EADC54FC}"/>
+                <a16:creationId xmlns:a16="http://schemas.microsoft.com/office/drawing/2014/main" id="{AEB75776-EB0C-436A-8B25-3248A3305AB7}"/>
               </a:ext>
             </a:extLst>
           </p:cNvPr>
@@ -4657,7 +4657,7 @@
           <p:cNvPr id="19" name="">
             <a:extLst xmlns:a="http://schemas.openxmlformats.org/drawingml/2006/main">
               <a:ext uri="{FF2B5EF4-FFF2-40B4-BE49-F238E27FC236}">
-                <a16:creationId xmlns:a16="http://schemas.microsoft.com/office/drawing/2014/main" id="{856E7084-FDC4-473D-B114-559C4F1D285B}"/>
+                <a16:creationId xmlns:a16="http://schemas.microsoft.com/office/drawing/2014/main" id="{D8F259AD-BACA-4657-80E5-F6E3DF4A7498}"/>
               </a:ext>
             </a:extLst>
           </p:cNvPr>
@@ -4705,7 +4705,7 @@
     </p:spTree>
     <p:extLst>
       <p:ext uri="{BB962C8B-B14F-4D97-AF65-F5344CB8AC3E}">
-        <p14:creationId xmlns:p14="http://schemas.microsoft.com/office/powerpoint/2010/main" val="1991598389"/>
+        <p14:creationId xmlns:p14="http://schemas.microsoft.com/office/powerpoint/2010/main" val="1472432869"/>
       </p:ext>
     </p:extLst>
   </p:cSld>
@@ -4736,7 +4736,7 @@
           <p:cNvPr id="1" name="">
             <a:extLst xmlns:a="http://schemas.openxmlformats.org/drawingml/2006/main">
               <a:ext uri="{FF2B5EF4-FFF2-40B4-BE49-F238E27FC236}">
-                <a16:creationId xmlns:a16="http://schemas.microsoft.com/office/drawing/2014/main" id="{3B742AD6-C072-465E-9FF6-ECD1A691635D}"/>
+                <a16:creationId xmlns:a16="http://schemas.microsoft.com/office/drawing/2014/main" id="{ED71514D-B1A8-4AF0-ADC7-292CDFD1241F}"/>
               </a:ext>
             </a:extLst>
           </p:cNvPr>
@@ -4771,7 +4771,7 @@
           <p:nvPr/>
         </p:nvPicPr>
         <p:blipFill>
-          <a:blip xmlns:r="http://schemas.openxmlformats.org/officeDocument/2006/relationships" xmlns:a="http://schemas.openxmlformats.org/drawingml/2006/main" r:embed="R4e6cfd9322cc46bc"/>
+          <a:blip xmlns:r="http://schemas.openxmlformats.org/officeDocument/2006/relationships" xmlns:a="http://schemas.openxmlformats.org/drawingml/2006/main" r:embed="Rfd9679b908794864"/>
           <a:stretch xmlns:a="http://schemas.openxmlformats.org/drawingml/2006/main"/>
         </p:blipFill>
         <p:spPr>
@@ -4789,7 +4789,7 @@
           <p:cNvPr id="3" name="">
             <a:extLst xmlns:a="http://schemas.openxmlformats.org/drawingml/2006/main">
               <a:ext uri="{FF2B5EF4-FFF2-40B4-BE49-F238E27FC236}">
-                <a16:creationId xmlns:a16="http://schemas.microsoft.com/office/drawing/2014/main" id="{213F715A-AF56-4820-99BB-663651A1564C}"/>
+                <a16:creationId xmlns:a16="http://schemas.microsoft.com/office/drawing/2014/main" id="{41AA94A2-A436-4C84-92E9-ECB86201D083}"/>
               </a:ext>
             </a:extLst>
           </p:cNvPr>
@@ -4839,7 +4839,7 @@
           <p:cNvPr id="4" name="">
             <a:extLst xmlns:a="http://schemas.openxmlformats.org/drawingml/2006/main">
               <a:ext uri="{FF2B5EF4-FFF2-40B4-BE49-F238E27FC236}">
-                <a16:creationId xmlns:a16="http://schemas.microsoft.com/office/drawing/2014/main" id="{D0A2E0D5-361B-4F35-A677-18945C16CE43}"/>
+                <a16:creationId xmlns:a16="http://schemas.microsoft.com/office/drawing/2014/main" id="{8EF4F908-0FC4-4BCD-AE21-EB3404CAB076}"/>
               </a:ext>
             </a:extLst>
           </p:cNvPr>
@@ -4872,7 +4872,7 @@
           <p:cNvPr id="5" name="">
             <a:extLst xmlns:a="http://schemas.openxmlformats.org/drawingml/2006/main">
               <a:ext uri="{FF2B5EF4-FFF2-40B4-BE49-F238E27FC236}">
-                <a16:creationId xmlns:a16="http://schemas.microsoft.com/office/drawing/2014/main" id="{D487B2DE-21BB-46E5-A1E3-60BC415D5871}"/>
+                <a16:creationId xmlns:a16="http://schemas.microsoft.com/office/drawing/2014/main" id="{7050BFA0-009E-444A-99A4-BADC9C52D969}"/>
               </a:ext>
             </a:extLst>
           </p:cNvPr>
@@ -4903,7 +4903,7 @@
           <p:cNvPr id="6" name="">
             <a:extLst xmlns:a="http://schemas.openxmlformats.org/drawingml/2006/main">
               <a:ext uri="{FF2B5EF4-FFF2-40B4-BE49-F238E27FC236}">
-                <a16:creationId xmlns:a16="http://schemas.microsoft.com/office/drawing/2014/main" id="{30E13963-906B-444B-A61A-CB9022739924}"/>
+                <a16:creationId xmlns:a16="http://schemas.microsoft.com/office/drawing/2014/main" id="{E385AF79-7EFC-45F8-9D3F-6F8412D452C1}"/>
               </a:ext>
             </a:extLst>
           </p:cNvPr>
@@ -4953,7 +4953,7 @@
           <p:cNvPr id="7" name="">
             <a:extLst xmlns:a="http://schemas.openxmlformats.org/drawingml/2006/main">
               <a:ext uri="{FF2B5EF4-FFF2-40B4-BE49-F238E27FC236}">
-                <a16:creationId xmlns:a16="http://schemas.microsoft.com/office/drawing/2014/main" id="{FC95E4AB-4BA3-4BEC-B6AA-904163B13E80}"/>
+                <a16:creationId xmlns:a16="http://schemas.microsoft.com/office/drawing/2014/main" id="{B08B6E93-EE71-43B8-818B-D64578FEADF1}"/>
               </a:ext>
             </a:extLst>
           </p:cNvPr>
@@ -5003,7 +5003,7 @@
           <p:cNvPr id="8" name="">
             <a:extLst xmlns:a="http://schemas.openxmlformats.org/drawingml/2006/main">
               <a:ext uri="{FF2B5EF4-FFF2-40B4-BE49-F238E27FC236}">
-                <a16:creationId xmlns:a16="http://schemas.microsoft.com/office/drawing/2014/main" id="{DC78BB5E-44F4-4329-8897-19ED684EA99E}"/>
+                <a16:creationId xmlns:a16="http://schemas.microsoft.com/office/drawing/2014/main" id="{60EF041F-796E-4B9B-86F7-A78D2671DED1}"/>
               </a:ext>
             </a:extLst>
           </p:cNvPr>
@@ -5038,7 +5038,7 @@
           <p:cNvPr id="9" name="">
             <a:extLst xmlns:a="http://schemas.openxmlformats.org/drawingml/2006/main">
               <a:ext uri="{FF2B5EF4-FFF2-40B4-BE49-F238E27FC236}">
-                <a16:creationId xmlns:a16="http://schemas.microsoft.com/office/drawing/2014/main" id="{E2F80A7F-6438-435C-B0BC-482FC31ADBC1}"/>
+                <a16:creationId xmlns:a16="http://schemas.microsoft.com/office/drawing/2014/main" id="{41B25447-06E1-47A8-B880-443F05069531}"/>
               </a:ext>
             </a:extLst>
           </p:cNvPr>
@@ -5088,7 +5088,7 @@
           <p:cNvPr id="10" name="">
             <a:extLst xmlns:a="http://schemas.openxmlformats.org/drawingml/2006/main">
               <a:ext uri="{FF2B5EF4-FFF2-40B4-BE49-F238E27FC236}">
-                <a16:creationId xmlns:a16="http://schemas.microsoft.com/office/drawing/2014/main" id="{883416A5-E8CE-4E33-A70F-52F81849C22E}"/>
+                <a16:creationId xmlns:a16="http://schemas.microsoft.com/office/drawing/2014/main" id="{4881AFD2-F6DA-41EF-B8A9-29F6D667E64E}"/>
               </a:ext>
             </a:extLst>
           </p:cNvPr>
@@ -5138,7 +5138,7 @@
           <p:cNvPr id="11" name="">
             <a:extLst xmlns:a="http://schemas.openxmlformats.org/drawingml/2006/main">
               <a:ext uri="{FF2B5EF4-FFF2-40B4-BE49-F238E27FC236}">
-                <a16:creationId xmlns:a16="http://schemas.microsoft.com/office/drawing/2014/main" id="{2ECE400E-ECF6-4A4B-AB68-27A20CC51751}"/>
+                <a16:creationId xmlns:a16="http://schemas.microsoft.com/office/drawing/2014/main" id="{1B465010-2F9B-479A-AC68-0FBE91B4C914}"/>
               </a:ext>
             </a:extLst>
           </p:cNvPr>
@@ -5173,7 +5173,7 @@
           <p:cNvPr id="12" name="">
             <a:extLst xmlns:a="http://schemas.openxmlformats.org/drawingml/2006/main">
               <a:ext uri="{FF2B5EF4-FFF2-40B4-BE49-F238E27FC236}">
-                <a16:creationId xmlns:a16="http://schemas.microsoft.com/office/drawing/2014/main" id="{30A196C9-7120-4ED0-A572-EB76856134BF}"/>
+                <a16:creationId xmlns:a16="http://schemas.microsoft.com/office/drawing/2014/main" id="{45E40482-2501-4E21-A404-59DB5A1A33D4}"/>
               </a:ext>
             </a:extLst>
           </p:cNvPr>
@@ -5223,7 +5223,7 @@
           <p:cNvPr id="13" name="">
             <a:extLst xmlns:a="http://schemas.openxmlformats.org/drawingml/2006/main">
               <a:ext uri="{FF2B5EF4-FFF2-40B4-BE49-F238E27FC236}">
-                <a16:creationId xmlns:a16="http://schemas.microsoft.com/office/drawing/2014/main" id="{085E9A5E-CEFE-4A28-9CCA-9E30F2EEAC8F}"/>
+                <a16:creationId xmlns:a16="http://schemas.microsoft.com/office/drawing/2014/main" id="{D096244D-9D6F-4865-92F0-F31A300F0E34}"/>
               </a:ext>
             </a:extLst>
           </p:cNvPr>
@@ -5273,7 +5273,7 @@
           <p:cNvPr id="14" name="">
             <a:extLst xmlns:a="http://schemas.openxmlformats.org/drawingml/2006/main">
               <a:ext uri="{FF2B5EF4-FFF2-40B4-BE49-F238E27FC236}">
-                <a16:creationId xmlns:a16="http://schemas.microsoft.com/office/drawing/2014/main" id="{883C9D46-2718-4AAC-BB05-1DB1EF502D31}"/>
+                <a16:creationId xmlns:a16="http://schemas.microsoft.com/office/drawing/2014/main" id="{356B58C9-3122-4419-BFBC-00E0165A396E}"/>
               </a:ext>
             </a:extLst>
           </p:cNvPr>
@@ -5308,7 +5308,7 @@
           <p:cNvPr id="15" name="">
             <a:extLst xmlns:a="http://schemas.openxmlformats.org/drawingml/2006/main">
               <a:ext uri="{FF2B5EF4-FFF2-40B4-BE49-F238E27FC236}">
-                <a16:creationId xmlns:a16="http://schemas.microsoft.com/office/drawing/2014/main" id="{DDAD5A17-D4D8-4FFB-BB58-F270769C9621}"/>
+                <a16:creationId xmlns:a16="http://schemas.microsoft.com/office/drawing/2014/main" id="{D817A825-11DC-4427-A009-1D93C23C7435}"/>
               </a:ext>
             </a:extLst>
           </p:cNvPr>
@@ -5358,7 +5358,7 @@
           <p:cNvPr id="16" name="">
             <a:extLst xmlns:a="http://schemas.openxmlformats.org/drawingml/2006/main">
               <a:ext uri="{FF2B5EF4-FFF2-40B4-BE49-F238E27FC236}">
-                <a16:creationId xmlns:a16="http://schemas.microsoft.com/office/drawing/2014/main" id="{E1E56D7F-A198-4EC2-A44F-72471D4A53F9}"/>
+                <a16:creationId xmlns:a16="http://schemas.microsoft.com/office/drawing/2014/main" id="{AFE7D2E2-4EE6-48B5-9C55-0F3009BA3A57}"/>
               </a:ext>
             </a:extLst>
           </p:cNvPr>
@@ -5408,7 +5408,7 @@
           <p:cNvPr id="17" name="">
             <a:extLst xmlns:a="http://schemas.openxmlformats.org/drawingml/2006/main">
               <a:ext uri="{FF2B5EF4-FFF2-40B4-BE49-F238E27FC236}">
-                <a16:creationId xmlns:a16="http://schemas.microsoft.com/office/drawing/2014/main" id="{C12CE722-13F9-473E-8675-BCDAD2552F0F}"/>
+                <a16:creationId xmlns:a16="http://schemas.microsoft.com/office/drawing/2014/main" id="{56018D64-373A-4110-89D1-C2239520B005}"/>
               </a:ext>
             </a:extLst>
           </p:cNvPr>
@@ -5443,7 +5443,7 @@
           <p:cNvPr id="18" name="">
             <a:extLst xmlns:a="http://schemas.openxmlformats.org/drawingml/2006/main">
               <a:ext uri="{FF2B5EF4-FFF2-40B4-BE49-F238E27FC236}">
-                <a16:creationId xmlns:a16="http://schemas.microsoft.com/office/drawing/2014/main" id="{3F4BBBEA-57DB-499D-8633-496128399079}"/>
+                <a16:creationId xmlns:a16="http://schemas.microsoft.com/office/drawing/2014/main" id="{17444E15-3714-462B-9A8C-CB6E4997AD84}"/>
               </a:ext>
             </a:extLst>
           </p:cNvPr>
@@ -5493,7 +5493,7 @@
           <p:cNvPr id="19" name="">
             <a:extLst xmlns:a="http://schemas.openxmlformats.org/drawingml/2006/main">
               <a:ext uri="{FF2B5EF4-FFF2-40B4-BE49-F238E27FC236}">
-                <a16:creationId xmlns:a16="http://schemas.microsoft.com/office/drawing/2014/main" id="{62060D47-9BF6-4C59-A104-8B397FA93A1C}"/>
+                <a16:creationId xmlns:a16="http://schemas.microsoft.com/office/drawing/2014/main" id="{9ED23301-88DE-412B-A618-114E3196ABEB}"/>
               </a:ext>
             </a:extLst>
           </p:cNvPr>
@@ -5543,7 +5543,7 @@
           <p:cNvPr id="20" name="">
             <a:extLst xmlns:a="http://schemas.openxmlformats.org/drawingml/2006/main">
               <a:ext uri="{FF2B5EF4-FFF2-40B4-BE49-F238E27FC236}">
-                <a16:creationId xmlns:a16="http://schemas.microsoft.com/office/drawing/2014/main" id="{E1AE75ED-3606-49E2-B1A5-B84F19CAA9CA}"/>
+                <a16:creationId xmlns:a16="http://schemas.microsoft.com/office/drawing/2014/main" id="{14E26A83-7FF2-4E19-ADD7-959A8FF879B2}"/>
               </a:ext>
             </a:extLst>
           </p:cNvPr>
@@ -5593,7 +5593,7 @@
           <p:cNvPr id="21" name="">
             <a:extLst xmlns:a="http://schemas.openxmlformats.org/drawingml/2006/main">
               <a:ext uri="{FF2B5EF4-FFF2-40B4-BE49-F238E27FC236}">
-                <a16:creationId xmlns:a16="http://schemas.microsoft.com/office/drawing/2014/main" id="{13255B7B-5916-4BE5-8260-1E4E3F530723}"/>
+                <a16:creationId xmlns:a16="http://schemas.microsoft.com/office/drawing/2014/main" id="{8C260BE0-3247-4199-80EA-BB33B9322EA3}"/>
               </a:ext>
             </a:extLst>
           </p:cNvPr>
@@ -5643,7 +5643,7 @@
           <p:cNvPr id="22" name="">
             <a:extLst xmlns:a="http://schemas.openxmlformats.org/drawingml/2006/main">
               <a:ext uri="{FF2B5EF4-FFF2-40B4-BE49-F238E27FC236}">
-                <a16:creationId xmlns:a16="http://schemas.microsoft.com/office/drawing/2014/main" id="{A46F2778-3B2C-4B8C-9FB1-5342DD99F27D}"/>
+                <a16:creationId xmlns:a16="http://schemas.microsoft.com/office/drawing/2014/main" id="{BA6C70B6-0395-44BD-8751-FF1999BC73A0}"/>
               </a:ext>
             </a:extLst>
           </p:cNvPr>
@@ -5693,7 +5693,7 @@
           <p:cNvPr id="23" name="">
             <a:extLst xmlns:a="http://schemas.openxmlformats.org/drawingml/2006/main">
               <a:ext uri="{FF2B5EF4-FFF2-40B4-BE49-F238E27FC236}">
-                <a16:creationId xmlns:a16="http://schemas.microsoft.com/office/drawing/2014/main" id="{4A09E1EA-FD2A-40D6-A06B-A0A88173064F}"/>
+                <a16:creationId xmlns:a16="http://schemas.microsoft.com/office/drawing/2014/main" id="{7A5EA8E5-7503-49C6-B209-2E84E53928A4}"/>
               </a:ext>
             </a:extLst>
           </p:cNvPr>
@@ -5726,7 +5726,7 @@
           <p:cNvPr id="24" name="">
             <a:extLst xmlns:a="http://schemas.openxmlformats.org/drawingml/2006/main">
               <a:ext uri="{FF2B5EF4-FFF2-40B4-BE49-F238E27FC236}">
-                <a16:creationId xmlns:a16="http://schemas.microsoft.com/office/drawing/2014/main" id="{D2A6E59A-3D95-4544-878B-E9B69C987D5D}"/>
+                <a16:creationId xmlns:a16="http://schemas.microsoft.com/office/drawing/2014/main" id="{FEDCA40E-4B0F-4AD0-8972-55E1755A65A5}"/>
               </a:ext>
             </a:extLst>
           </p:cNvPr>
@@ -5776,7 +5776,7 @@
           <p:cNvPr id="25" name="">
             <a:extLst xmlns:a="http://schemas.openxmlformats.org/drawingml/2006/main">
               <a:ext uri="{FF2B5EF4-FFF2-40B4-BE49-F238E27FC236}">
-                <a16:creationId xmlns:a16="http://schemas.microsoft.com/office/drawing/2014/main" id="{09457471-F97A-447C-AE0A-153C60545A93}"/>
+                <a16:creationId xmlns:a16="http://schemas.microsoft.com/office/drawing/2014/main" id="{FA82194A-2A04-4674-976F-90AB93D24364}"/>
               </a:ext>
             </a:extLst>
           </p:cNvPr>
@@ -5826,7 +5826,7 @@
           <p:cNvPr id="26" name="">
             <a:extLst xmlns:a="http://schemas.openxmlformats.org/drawingml/2006/main">
               <a:ext uri="{FF2B5EF4-FFF2-40B4-BE49-F238E27FC236}">
-                <a16:creationId xmlns:a16="http://schemas.microsoft.com/office/drawing/2014/main" id="{B5D47228-4B67-4515-AD77-E1600888A9A7}"/>
+                <a16:creationId xmlns:a16="http://schemas.microsoft.com/office/drawing/2014/main" id="{DD4E5DC5-F79F-4D3A-9101-4F71F2ABDEA1}"/>
               </a:ext>
             </a:extLst>
           </p:cNvPr>
@@ -5859,7 +5859,7 @@
           <p:cNvPr id="27" name="">
             <a:extLst xmlns:a="http://schemas.openxmlformats.org/drawingml/2006/main">
               <a:ext uri="{FF2B5EF4-FFF2-40B4-BE49-F238E27FC236}">
-                <a16:creationId xmlns:a16="http://schemas.microsoft.com/office/drawing/2014/main" id="{5CA98B69-4A20-4775-86A9-4CAA363D845F}"/>
+                <a16:creationId xmlns:a16="http://schemas.microsoft.com/office/drawing/2014/main" id="{1AA9E2E8-AA13-4187-ACFC-BCB545FCE8FC}"/>
               </a:ext>
             </a:extLst>
           </p:cNvPr>
@@ -5909,7 +5909,7 @@
           <p:cNvPr id="28" name="">
             <a:extLst xmlns:a="http://schemas.openxmlformats.org/drawingml/2006/main">
               <a:ext uri="{FF2B5EF4-FFF2-40B4-BE49-F238E27FC236}">
-                <a16:creationId xmlns:a16="http://schemas.microsoft.com/office/drawing/2014/main" id="{85AC80E1-141B-41F7-878C-4A4E8170ABC0}"/>
+                <a16:creationId xmlns:a16="http://schemas.microsoft.com/office/drawing/2014/main" id="{99244211-1EB8-41BD-84EF-EC717F111205}"/>
               </a:ext>
             </a:extLst>
           </p:cNvPr>
@@ -5959,7 +5959,7 @@
           <p:cNvPr id="29" name="">
             <a:extLst xmlns:a="http://schemas.openxmlformats.org/drawingml/2006/main">
               <a:ext uri="{FF2B5EF4-FFF2-40B4-BE49-F238E27FC236}">
-                <a16:creationId xmlns:a16="http://schemas.microsoft.com/office/drawing/2014/main" id="{586CBF71-677E-42FC-8F6B-762BCC4E51D0}"/>
+                <a16:creationId xmlns:a16="http://schemas.microsoft.com/office/drawing/2014/main" id="{22FB666C-743E-4251-99DC-980B112312E3}"/>
               </a:ext>
             </a:extLst>
           </p:cNvPr>
@@ -5992,7 +5992,7 @@
           <p:cNvPr id="30" name="">
             <a:extLst xmlns:a="http://schemas.openxmlformats.org/drawingml/2006/main">
               <a:ext uri="{FF2B5EF4-FFF2-40B4-BE49-F238E27FC236}">
-                <a16:creationId xmlns:a16="http://schemas.microsoft.com/office/drawing/2014/main" id="{5B8A9AB9-ADEE-4791-AFA4-01D046051D0A}"/>
+                <a16:creationId xmlns:a16="http://schemas.microsoft.com/office/drawing/2014/main" id="{00F35301-AAE6-43F2-BEE8-F36E68AF8364}"/>
               </a:ext>
             </a:extLst>
           </p:cNvPr>
@@ -6042,7 +6042,7 @@
           <p:cNvPr id="31" name="">
             <a:extLst xmlns:a="http://schemas.openxmlformats.org/drawingml/2006/main">
               <a:ext uri="{FF2B5EF4-FFF2-40B4-BE49-F238E27FC236}">
-                <a16:creationId xmlns:a16="http://schemas.microsoft.com/office/drawing/2014/main" id="{23379D7B-4846-439E-B89F-4660279C24B1}"/>
+                <a16:creationId xmlns:a16="http://schemas.microsoft.com/office/drawing/2014/main" id="{105F8010-823A-4601-B2ED-90A830F80BCA}"/>
               </a:ext>
             </a:extLst>
           </p:cNvPr>
@@ -6090,7 +6090,7 @@
     </p:spTree>
     <p:extLst>
       <p:ext uri="{BB962C8B-B14F-4D97-AF65-F5344CB8AC3E}">
-        <p14:creationId xmlns:p14="http://schemas.microsoft.com/office/powerpoint/2010/main" val="1365752"/>
+        <p14:creationId xmlns:p14="http://schemas.microsoft.com/office/powerpoint/2010/main" val="22483480"/>
       </p:ext>
     </p:extLst>
   </p:cSld>
@@ -6121,7 +6121,7 @@
           <p:cNvPr id="1" name="">
             <a:extLst xmlns:a="http://schemas.openxmlformats.org/drawingml/2006/main">
               <a:ext uri="{FF2B5EF4-FFF2-40B4-BE49-F238E27FC236}">
-                <a16:creationId xmlns:a16="http://schemas.microsoft.com/office/drawing/2014/main" id="{3601B6A3-856B-44EE-9BCC-F84F027CAC5F}"/>
+                <a16:creationId xmlns:a16="http://schemas.microsoft.com/office/drawing/2014/main" id="{DC987FD6-6167-4DC0-AA18-68265B75FE89}"/>
               </a:ext>
             </a:extLst>
           </p:cNvPr>
@@ -6156,7 +6156,7 @@
           <p:nvPr/>
         </p:nvPicPr>
         <p:blipFill>
-          <a:blip xmlns:r="http://schemas.openxmlformats.org/officeDocument/2006/relationships" xmlns:a="http://schemas.openxmlformats.org/drawingml/2006/main" r:embed="R567e3ca6fac1476e"/>
+          <a:blip xmlns:r="http://schemas.openxmlformats.org/officeDocument/2006/relationships" xmlns:a="http://schemas.openxmlformats.org/drawingml/2006/main" r:embed="Rf15d0e1ead0b4980"/>
           <a:stretch xmlns:a="http://schemas.openxmlformats.org/drawingml/2006/main"/>
         </p:blipFill>
         <p:spPr>
@@ -6174,7 +6174,7 @@
           <p:cNvPr id="3" name="">
             <a:extLst xmlns:a="http://schemas.openxmlformats.org/drawingml/2006/main">
               <a:ext uri="{FF2B5EF4-FFF2-40B4-BE49-F238E27FC236}">
-                <a16:creationId xmlns:a16="http://schemas.microsoft.com/office/drawing/2014/main" id="{04746235-3B31-438B-BBBE-8CE6694B5C5B}"/>
+                <a16:creationId xmlns:a16="http://schemas.microsoft.com/office/drawing/2014/main" id="{09A5B3BF-FA9F-4A73-BEC6-41A98DE98BF6}"/>
               </a:ext>
             </a:extLst>
           </p:cNvPr>
@@ -6224,7 +6224,7 @@
           <p:cNvPr id="4" name="">
             <a:extLst xmlns:a="http://schemas.openxmlformats.org/drawingml/2006/main">
               <a:ext uri="{FF2B5EF4-FFF2-40B4-BE49-F238E27FC236}">
-                <a16:creationId xmlns:a16="http://schemas.microsoft.com/office/drawing/2014/main" id="{347FB999-A37A-4916-8EB4-2D362BF7FCDD}"/>
+                <a16:creationId xmlns:a16="http://schemas.microsoft.com/office/drawing/2014/main" id="{2AA748E7-B9CF-4051-AA9A-BD4982A773F7}"/>
               </a:ext>
             </a:extLst>
           </p:cNvPr>
@@ -6257,7 +6257,7 @@
           <p:cNvPr id="5" name="">
             <a:extLst xmlns:a="http://schemas.openxmlformats.org/drawingml/2006/main">
               <a:ext uri="{FF2B5EF4-FFF2-40B4-BE49-F238E27FC236}">
-                <a16:creationId xmlns:a16="http://schemas.microsoft.com/office/drawing/2014/main" id="{FE97C7AA-558D-4C42-954B-62F51224EB6B}"/>
+                <a16:creationId xmlns:a16="http://schemas.microsoft.com/office/drawing/2014/main" id="{DDE25866-111D-450F-A8B8-8E0DAFCE8E39}"/>
               </a:ext>
             </a:extLst>
           </p:cNvPr>
@@ -6288,7 +6288,7 @@
           <p:cNvPr id="6" name="">
             <a:extLst xmlns:a="http://schemas.openxmlformats.org/drawingml/2006/main">
               <a:ext uri="{FF2B5EF4-FFF2-40B4-BE49-F238E27FC236}">
-                <a16:creationId xmlns:a16="http://schemas.microsoft.com/office/drawing/2014/main" id="{0FE2075C-010D-4E1A-A2B6-5E2A5FB808B5}"/>
+                <a16:creationId xmlns:a16="http://schemas.microsoft.com/office/drawing/2014/main" id="{232F9688-DAB1-4D72-AF43-D8976660B7A4}"/>
               </a:ext>
             </a:extLst>
           </p:cNvPr>
@@ -6338,7 +6338,7 @@
           <p:cNvPr id="7" name="">
             <a:extLst xmlns:a="http://schemas.openxmlformats.org/drawingml/2006/main">
               <a:ext uri="{FF2B5EF4-FFF2-40B4-BE49-F238E27FC236}">
-                <a16:creationId xmlns:a16="http://schemas.microsoft.com/office/drawing/2014/main" id="{FB42FEB9-3E30-4088-B7C1-30E3F58393E6}"/>
+                <a16:creationId xmlns:a16="http://schemas.microsoft.com/office/drawing/2014/main" id="{3B4D7561-D46D-402F-9886-2E00486F9B2F}"/>
               </a:ext>
             </a:extLst>
           </p:cNvPr>
@@ -6388,7 +6388,7 @@
           <p:cNvPr id="8" name="">
             <a:extLst xmlns:a="http://schemas.openxmlformats.org/drawingml/2006/main">
               <a:ext uri="{FF2B5EF4-FFF2-40B4-BE49-F238E27FC236}">
-                <a16:creationId xmlns:a16="http://schemas.microsoft.com/office/drawing/2014/main" id="{BC46BE19-009E-433C-9537-E5F304798D0F}"/>
+                <a16:creationId xmlns:a16="http://schemas.microsoft.com/office/drawing/2014/main" id="{3DCDA889-7039-4E2E-917A-69E2244521AC}"/>
               </a:ext>
             </a:extLst>
           </p:cNvPr>
@@ -6421,7 +6421,7 @@
           <p:cNvPr id="9" name="">
             <a:extLst xmlns:a="http://schemas.openxmlformats.org/drawingml/2006/main">
               <a:ext uri="{FF2B5EF4-FFF2-40B4-BE49-F238E27FC236}">
-                <a16:creationId xmlns:a16="http://schemas.microsoft.com/office/drawing/2014/main" id="{D2DBCD57-B534-4DFE-99AC-E591F4CFB207}"/>
+                <a16:creationId xmlns:a16="http://schemas.microsoft.com/office/drawing/2014/main" id="{A6733C9C-EB85-44B8-9C34-23B8F101ED53}"/>
               </a:ext>
             </a:extLst>
           </p:cNvPr>
@@ -6471,7 +6471,7 @@
           <p:cNvPr id="10" name="">
             <a:extLst xmlns:a="http://schemas.openxmlformats.org/drawingml/2006/main">
               <a:ext uri="{FF2B5EF4-FFF2-40B4-BE49-F238E27FC236}">
-                <a16:creationId xmlns:a16="http://schemas.microsoft.com/office/drawing/2014/main" id="{A94068D5-5C45-416B-B361-EBCC010A9C6D}"/>
+                <a16:creationId xmlns:a16="http://schemas.microsoft.com/office/drawing/2014/main" id="{EA947180-4EB1-4CB3-AE79-940B39246160}"/>
               </a:ext>
             </a:extLst>
           </p:cNvPr>
@@ -6521,7 +6521,7 @@
           <p:cNvPr id="11" name="">
             <a:extLst xmlns:a="http://schemas.openxmlformats.org/drawingml/2006/main">
               <a:ext uri="{FF2B5EF4-FFF2-40B4-BE49-F238E27FC236}">
-                <a16:creationId xmlns:a16="http://schemas.microsoft.com/office/drawing/2014/main" id="{69BB9246-1ABB-4172-BE47-891D0B02C3DB}"/>
+                <a16:creationId xmlns:a16="http://schemas.microsoft.com/office/drawing/2014/main" id="{35BD2236-13CA-478E-9DCC-8D6A25C2D421}"/>
               </a:ext>
             </a:extLst>
           </p:cNvPr>
@@ -6571,7 +6571,7 @@
           <p:cNvPr id="12" name="">
             <a:extLst xmlns:a="http://schemas.openxmlformats.org/drawingml/2006/main">
               <a:ext uri="{FF2B5EF4-FFF2-40B4-BE49-F238E27FC236}">
-                <a16:creationId xmlns:a16="http://schemas.microsoft.com/office/drawing/2014/main" id="{BC310157-CFB9-4F77-9F1F-9BB9C8006988}"/>
+                <a16:creationId xmlns:a16="http://schemas.microsoft.com/office/drawing/2014/main" id="{A1E2E979-5104-4FF8-AFC9-39B00D022D69}"/>
               </a:ext>
             </a:extLst>
           </p:cNvPr>
@@ -6621,7 +6621,7 @@
           <p:cNvPr id="13" name="">
             <a:extLst xmlns:a="http://schemas.openxmlformats.org/drawingml/2006/main">
               <a:ext uri="{FF2B5EF4-FFF2-40B4-BE49-F238E27FC236}">
-                <a16:creationId xmlns:a16="http://schemas.microsoft.com/office/drawing/2014/main" id="{C8A8C2AA-3043-4E8D-9F95-0FF52C77EB43}"/>
+                <a16:creationId xmlns:a16="http://schemas.microsoft.com/office/drawing/2014/main" id="{5E90E828-1A9E-4F62-A5B6-5BFAA2421F25}"/>
               </a:ext>
             </a:extLst>
           </p:cNvPr>
@@ -6671,7 +6671,7 @@
           <p:cNvPr id="14" name="">
             <a:extLst xmlns:a="http://schemas.openxmlformats.org/drawingml/2006/main">
               <a:ext uri="{FF2B5EF4-FFF2-40B4-BE49-F238E27FC236}">
-                <a16:creationId xmlns:a16="http://schemas.microsoft.com/office/drawing/2014/main" id="{4C113D33-2F0C-44EF-B4FE-2B78803C81AA}"/>
+                <a16:creationId xmlns:a16="http://schemas.microsoft.com/office/drawing/2014/main" id="{50E84A01-192C-42C8-B980-F01608F992EF}"/>
               </a:ext>
             </a:extLst>
           </p:cNvPr>
@@ -6702,7 +6702,7 @@
           <p:cNvPr id="15" name="">
             <a:extLst xmlns:a="http://schemas.openxmlformats.org/drawingml/2006/main">
               <a:ext uri="{FF2B5EF4-FFF2-40B4-BE49-F238E27FC236}">
-                <a16:creationId xmlns:a16="http://schemas.microsoft.com/office/drawing/2014/main" id="{7265F382-71B1-44B4-A1BB-9E1430BD946F}"/>
+                <a16:creationId xmlns:a16="http://schemas.microsoft.com/office/drawing/2014/main" id="{3011DC3F-DB8F-4B99-8AE3-A5C316377E55}"/>
               </a:ext>
             </a:extLst>
           </p:cNvPr>
@@ -6735,7 +6735,7 @@
           <p:cNvPr id="16" name="">
             <a:extLst xmlns:a="http://schemas.openxmlformats.org/drawingml/2006/main">
               <a:ext uri="{FF2B5EF4-FFF2-40B4-BE49-F238E27FC236}">
-                <a16:creationId xmlns:a16="http://schemas.microsoft.com/office/drawing/2014/main" id="{CD0C5A36-AB01-41F9-84A7-09EECD7CB23D}"/>
+                <a16:creationId xmlns:a16="http://schemas.microsoft.com/office/drawing/2014/main" id="{8D37EE34-6CE6-426C-A450-D11428F74743}"/>
               </a:ext>
             </a:extLst>
           </p:cNvPr>
@@ -6785,7 +6785,7 @@
           <p:cNvPr id="17" name="">
             <a:extLst xmlns:a="http://schemas.openxmlformats.org/drawingml/2006/main">
               <a:ext uri="{FF2B5EF4-FFF2-40B4-BE49-F238E27FC236}">
-                <a16:creationId xmlns:a16="http://schemas.microsoft.com/office/drawing/2014/main" id="{44DCCB68-10BA-4AB8-9512-85BEB2562632}"/>
+                <a16:creationId xmlns:a16="http://schemas.microsoft.com/office/drawing/2014/main" id="{4901CE12-2E85-4837-8C9E-8FF4D836EA1F}"/>
               </a:ext>
             </a:extLst>
           </p:cNvPr>
@@ -6835,7 +6835,7 @@
           <p:cNvPr id="18" name="">
             <a:extLst xmlns:a="http://schemas.openxmlformats.org/drawingml/2006/main">
               <a:ext uri="{FF2B5EF4-FFF2-40B4-BE49-F238E27FC236}">
-                <a16:creationId xmlns:a16="http://schemas.microsoft.com/office/drawing/2014/main" id="{79EAEA33-A487-4938-99BB-F1C290D361EC}"/>
+                <a16:creationId xmlns:a16="http://schemas.microsoft.com/office/drawing/2014/main" id="{42057AD5-EFF9-4BD8-84D6-4666589B384C}"/>
               </a:ext>
             </a:extLst>
           </p:cNvPr>
@@ -6885,7 +6885,7 @@
           <p:cNvPr id="19" name="">
             <a:extLst xmlns:a="http://schemas.openxmlformats.org/drawingml/2006/main">
               <a:ext uri="{FF2B5EF4-FFF2-40B4-BE49-F238E27FC236}">
-                <a16:creationId xmlns:a16="http://schemas.microsoft.com/office/drawing/2014/main" id="{1C2FE898-2A27-4251-8C23-4A725D473314}"/>
+                <a16:creationId xmlns:a16="http://schemas.microsoft.com/office/drawing/2014/main" id="{28005AE3-0C9F-453A-B7BA-0EFB8CD0347F}"/>
               </a:ext>
             </a:extLst>
           </p:cNvPr>
@@ -6935,7 +6935,7 @@
           <p:cNvPr id="20" name="">
             <a:extLst xmlns:a="http://schemas.openxmlformats.org/drawingml/2006/main">
               <a:ext uri="{FF2B5EF4-FFF2-40B4-BE49-F238E27FC236}">
-                <a16:creationId xmlns:a16="http://schemas.microsoft.com/office/drawing/2014/main" id="{BFB23590-04AE-4324-B124-C9ABB5CD925F}"/>
+                <a16:creationId xmlns:a16="http://schemas.microsoft.com/office/drawing/2014/main" id="{9D99D9EF-D28D-44BD-A7D9-862BD4F4447D}"/>
               </a:ext>
             </a:extLst>
           </p:cNvPr>
@@ -6985,7 +6985,7 @@
           <p:cNvPr id="21" name="">
             <a:extLst xmlns:a="http://schemas.openxmlformats.org/drawingml/2006/main">
               <a:ext uri="{FF2B5EF4-FFF2-40B4-BE49-F238E27FC236}">
-                <a16:creationId xmlns:a16="http://schemas.microsoft.com/office/drawing/2014/main" id="{D108F062-8D84-4A4A-BFC1-123662EA45F3}"/>
+                <a16:creationId xmlns:a16="http://schemas.microsoft.com/office/drawing/2014/main" id="{938BF061-E567-4D9B-BCEA-66C24464B6C8}"/>
               </a:ext>
             </a:extLst>
           </p:cNvPr>
@@ -7016,7 +7016,7 @@
           <p:cNvPr id="22" name="">
             <a:extLst xmlns:a="http://schemas.openxmlformats.org/drawingml/2006/main">
               <a:ext uri="{FF2B5EF4-FFF2-40B4-BE49-F238E27FC236}">
-                <a16:creationId xmlns:a16="http://schemas.microsoft.com/office/drawing/2014/main" id="{B9600002-F335-4EC6-BC15-EFDE29649105}"/>
+                <a16:creationId xmlns:a16="http://schemas.microsoft.com/office/drawing/2014/main" id="{7B3962F8-B3B7-4E5E-A897-1F97735EA121}"/>
               </a:ext>
             </a:extLst>
           </p:cNvPr>
@@ -7049,7 +7049,7 @@
           <p:cNvPr id="23" name="">
             <a:extLst xmlns:a="http://schemas.openxmlformats.org/drawingml/2006/main">
               <a:ext uri="{FF2B5EF4-FFF2-40B4-BE49-F238E27FC236}">
-                <a16:creationId xmlns:a16="http://schemas.microsoft.com/office/drawing/2014/main" id="{63501B0D-7EAF-4C4E-B196-CD0B29E6EC9A}"/>
+                <a16:creationId xmlns:a16="http://schemas.microsoft.com/office/drawing/2014/main" id="{1BD21463-1C88-4110-B2A9-016D8EC644CD}"/>
               </a:ext>
             </a:extLst>
           </p:cNvPr>
@@ -7099,7 +7099,7 @@
           <p:cNvPr id="24" name="">
             <a:extLst xmlns:a="http://schemas.openxmlformats.org/drawingml/2006/main">
               <a:ext uri="{FF2B5EF4-FFF2-40B4-BE49-F238E27FC236}">
-                <a16:creationId xmlns:a16="http://schemas.microsoft.com/office/drawing/2014/main" id="{C971BFDF-565C-4F46-9322-E858C2706883}"/>
+                <a16:creationId xmlns:a16="http://schemas.microsoft.com/office/drawing/2014/main" id="{D9792BBA-9B05-4528-9925-71B884423993}"/>
               </a:ext>
             </a:extLst>
           </p:cNvPr>
@@ -7149,7 +7149,7 @@
           <p:cNvPr id="25" name="">
             <a:extLst xmlns:a="http://schemas.openxmlformats.org/drawingml/2006/main">
               <a:ext uri="{FF2B5EF4-FFF2-40B4-BE49-F238E27FC236}">
-                <a16:creationId xmlns:a16="http://schemas.microsoft.com/office/drawing/2014/main" id="{293E034D-69BE-4B0A-958D-8DF87A165A73}"/>
+                <a16:creationId xmlns:a16="http://schemas.microsoft.com/office/drawing/2014/main" id="{CDC34251-DD61-47AF-B264-0BD962178524}"/>
               </a:ext>
             </a:extLst>
           </p:cNvPr>
@@ -7199,7 +7199,7 @@
           <p:cNvPr id="26" name="">
             <a:extLst xmlns:a="http://schemas.openxmlformats.org/drawingml/2006/main">
               <a:ext uri="{FF2B5EF4-FFF2-40B4-BE49-F238E27FC236}">
-                <a16:creationId xmlns:a16="http://schemas.microsoft.com/office/drawing/2014/main" id="{CA79BF18-70FB-4E8F-AD2D-06956E59D3E5}"/>
+                <a16:creationId xmlns:a16="http://schemas.microsoft.com/office/drawing/2014/main" id="{0D59D916-FB51-4164-8538-B552C788BC70}"/>
               </a:ext>
             </a:extLst>
           </p:cNvPr>
@@ -7249,7 +7249,7 @@
           <p:cNvPr id="27" name="">
             <a:extLst xmlns:a="http://schemas.openxmlformats.org/drawingml/2006/main">
               <a:ext uri="{FF2B5EF4-FFF2-40B4-BE49-F238E27FC236}">
-                <a16:creationId xmlns:a16="http://schemas.microsoft.com/office/drawing/2014/main" id="{D5512927-6CD5-4A56-8590-814372098AB0}"/>
+                <a16:creationId xmlns:a16="http://schemas.microsoft.com/office/drawing/2014/main" id="{894DE70C-B44A-4989-85BB-DD441F887371}"/>
               </a:ext>
             </a:extLst>
           </p:cNvPr>
@@ -7299,7 +7299,7 @@
           <p:cNvPr id="28" name="">
             <a:extLst xmlns:a="http://schemas.openxmlformats.org/drawingml/2006/main">
               <a:ext uri="{FF2B5EF4-FFF2-40B4-BE49-F238E27FC236}">
-                <a16:creationId xmlns:a16="http://schemas.microsoft.com/office/drawing/2014/main" id="{D69EAC24-B633-4C3E-9B2B-8E4012B0EEE9}"/>
+                <a16:creationId xmlns:a16="http://schemas.microsoft.com/office/drawing/2014/main" id="{C7994914-9330-45B6-A642-3619CB25E113}"/>
               </a:ext>
             </a:extLst>
           </p:cNvPr>
@@ -7330,7 +7330,7 @@
           <p:cNvPr id="29" name="">
             <a:extLst xmlns:a="http://schemas.openxmlformats.org/drawingml/2006/main">
               <a:ext uri="{FF2B5EF4-FFF2-40B4-BE49-F238E27FC236}">
-                <a16:creationId xmlns:a16="http://schemas.microsoft.com/office/drawing/2014/main" id="{EE4B1753-5BC7-4CC1-A715-F1F1831E7B83}"/>
+                <a16:creationId xmlns:a16="http://schemas.microsoft.com/office/drawing/2014/main" id="{3D6F096D-D634-4E9B-AFA5-5B11D92DC924}"/>
               </a:ext>
             </a:extLst>
           </p:cNvPr>
@@ -7363,7 +7363,7 @@
           <p:cNvPr id="30" name="">
             <a:extLst xmlns:a="http://schemas.openxmlformats.org/drawingml/2006/main">
               <a:ext uri="{FF2B5EF4-FFF2-40B4-BE49-F238E27FC236}">
-                <a16:creationId xmlns:a16="http://schemas.microsoft.com/office/drawing/2014/main" id="{AB8514C4-F84C-4DF1-9CCC-676AF1A995B6}"/>
+                <a16:creationId xmlns:a16="http://schemas.microsoft.com/office/drawing/2014/main" id="{06A85B45-5FC9-4C20-BCE3-B1719DF78430}"/>
               </a:ext>
             </a:extLst>
           </p:cNvPr>
@@ -7413,7 +7413,7 @@
           <p:cNvPr id="31" name="">
             <a:extLst xmlns:a="http://schemas.openxmlformats.org/drawingml/2006/main">
               <a:ext uri="{FF2B5EF4-FFF2-40B4-BE49-F238E27FC236}">
-                <a16:creationId xmlns:a16="http://schemas.microsoft.com/office/drawing/2014/main" id="{F19E7CCE-0B73-465D-A618-F869BC97D5E5}"/>
+                <a16:creationId xmlns:a16="http://schemas.microsoft.com/office/drawing/2014/main" id="{28280AF3-6CC8-44C2-8C43-630373A1F2C1}"/>
               </a:ext>
             </a:extLst>
           </p:cNvPr>
@@ -7463,7 +7463,7 @@
           <p:cNvPr id="32" name="">
             <a:extLst xmlns:a="http://schemas.openxmlformats.org/drawingml/2006/main">
               <a:ext uri="{FF2B5EF4-FFF2-40B4-BE49-F238E27FC236}">
-                <a16:creationId xmlns:a16="http://schemas.microsoft.com/office/drawing/2014/main" id="{305B96F3-FD7A-491F-B1AE-115B8E3C5F76}"/>
+                <a16:creationId xmlns:a16="http://schemas.microsoft.com/office/drawing/2014/main" id="{CA69AC72-9089-4020-96B4-8206354D8BBE}"/>
               </a:ext>
             </a:extLst>
           </p:cNvPr>
@@ -7513,7 +7513,7 @@
           <p:cNvPr id="33" name="">
             <a:extLst xmlns:a="http://schemas.openxmlformats.org/drawingml/2006/main">
               <a:ext uri="{FF2B5EF4-FFF2-40B4-BE49-F238E27FC236}">
-                <a16:creationId xmlns:a16="http://schemas.microsoft.com/office/drawing/2014/main" id="{9CFBE9D6-F29B-49DF-94DB-DD99C9E76D49}"/>
+                <a16:creationId xmlns:a16="http://schemas.microsoft.com/office/drawing/2014/main" id="{38BD3524-FEB6-43AC-BEEE-12762241D38B}"/>
               </a:ext>
             </a:extLst>
           </p:cNvPr>
@@ -7563,7 +7563,7 @@
           <p:cNvPr id="34" name="">
             <a:extLst xmlns:a="http://schemas.openxmlformats.org/drawingml/2006/main">
               <a:ext uri="{FF2B5EF4-FFF2-40B4-BE49-F238E27FC236}">
-                <a16:creationId xmlns:a16="http://schemas.microsoft.com/office/drawing/2014/main" id="{175613AA-3342-43EE-94BD-D30D07476B46}"/>
+                <a16:creationId xmlns:a16="http://schemas.microsoft.com/office/drawing/2014/main" id="{770C91EE-9D85-4219-8EA4-54FA1F7A4B96}"/>
               </a:ext>
             </a:extLst>
           </p:cNvPr>
@@ -7611,7 +7611,7 @@
     </p:spTree>
     <p:extLst>
       <p:ext uri="{BB962C8B-B14F-4D97-AF65-F5344CB8AC3E}">
-        <p14:creationId xmlns:p14="http://schemas.microsoft.com/office/powerpoint/2010/main" val="1036150422"/>
+        <p14:creationId xmlns:p14="http://schemas.microsoft.com/office/powerpoint/2010/main" val="1034138581"/>
       </p:ext>
     </p:extLst>
   </p:cSld>
@@ -7642,7 +7642,7 @@
           <p:cNvPr id="1" name="">
             <a:extLst xmlns:a="http://schemas.openxmlformats.org/drawingml/2006/main">
               <a:ext uri="{FF2B5EF4-FFF2-40B4-BE49-F238E27FC236}">
-                <a16:creationId xmlns:a16="http://schemas.microsoft.com/office/drawing/2014/main" id="{2F8432A6-BA6F-4C53-8E9B-75FA2B7AEE95}"/>
+                <a16:creationId xmlns:a16="http://schemas.microsoft.com/office/drawing/2014/main" id="{9B83E276-F386-4070-BFCC-F37FEB51C97B}"/>
               </a:ext>
             </a:extLst>
           </p:cNvPr>
@@ -7677,7 +7677,7 @@
           <p:nvPr/>
         </p:nvPicPr>
         <p:blipFill>
-          <a:blip xmlns:r="http://schemas.openxmlformats.org/officeDocument/2006/relationships" xmlns:a="http://schemas.openxmlformats.org/drawingml/2006/main" r:embed="R7f666f20b1b14169"/>
+          <a:blip xmlns:r="http://schemas.openxmlformats.org/officeDocument/2006/relationships" xmlns:a="http://schemas.openxmlformats.org/drawingml/2006/main" r:embed="Re3bc7a4d0ca34379"/>
           <a:stretch xmlns:a="http://schemas.openxmlformats.org/drawingml/2006/main"/>
         </p:blipFill>
         <p:spPr>
@@ -7695,7 +7695,7 @@
           <p:cNvPr id="3" name="">
             <a:extLst xmlns:a="http://schemas.openxmlformats.org/drawingml/2006/main">
               <a:ext uri="{FF2B5EF4-FFF2-40B4-BE49-F238E27FC236}">
-                <a16:creationId xmlns:a16="http://schemas.microsoft.com/office/drawing/2014/main" id="{10ED865D-F168-42E3-ACE6-71CACDCE56FC}"/>
+                <a16:creationId xmlns:a16="http://schemas.microsoft.com/office/drawing/2014/main" id="{0E98E32A-9F32-462C-A9C8-3CE8A1ED429E}"/>
               </a:ext>
             </a:extLst>
           </p:cNvPr>
@@ -7745,7 +7745,7 @@
           <p:cNvPr id="4" name="">
             <a:extLst xmlns:a="http://schemas.openxmlformats.org/drawingml/2006/main">
               <a:ext uri="{FF2B5EF4-FFF2-40B4-BE49-F238E27FC236}">
-                <a16:creationId xmlns:a16="http://schemas.microsoft.com/office/drawing/2014/main" id="{19B374C2-4119-47B1-A029-31D66E43DB7B}"/>
+                <a16:creationId xmlns:a16="http://schemas.microsoft.com/office/drawing/2014/main" id="{2E6D84A9-CB45-4663-AEDD-B69DC2C709D3}"/>
               </a:ext>
             </a:extLst>
           </p:cNvPr>
@@ -7778,7 +7778,7 @@
           <p:cNvPr id="5" name="">
             <a:extLst xmlns:a="http://schemas.openxmlformats.org/drawingml/2006/main">
               <a:ext uri="{FF2B5EF4-FFF2-40B4-BE49-F238E27FC236}">
-                <a16:creationId xmlns:a16="http://schemas.microsoft.com/office/drawing/2014/main" id="{A0C7D77E-A0B7-41A3-B7D8-AB4E2E9C2A31}"/>
+                <a16:creationId xmlns:a16="http://schemas.microsoft.com/office/drawing/2014/main" id="{E985BED3-1A60-4D0B-BC54-48A3FD3CDAC2}"/>
               </a:ext>
             </a:extLst>
           </p:cNvPr>
@@ -7809,7 +7809,7 @@
           <p:cNvPr id="6" name="">
             <a:extLst xmlns:a="http://schemas.openxmlformats.org/drawingml/2006/main">
               <a:ext uri="{FF2B5EF4-FFF2-40B4-BE49-F238E27FC236}">
-                <a16:creationId xmlns:a16="http://schemas.microsoft.com/office/drawing/2014/main" id="{B69B1C33-556F-4B83-BED8-46E02CF29B58}"/>
+                <a16:creationId xmlns:a16="http://schemas.microsoft.com/office/drawing/2014/main" id="{F9A4DEA1-BBC6-49CF-B4BB-19981EC6D650}"/>
               </a:ext>
             </a:extLst>
           </p:cNvPr>
@@ -7859,7 +7859,7 @@
           <p:cNvPr id="7" name="">
             <a:extLst xmlns:a="http://schemas.openxmlformats.org/drawingml/2006/main">
               <a:ext uri="{FF2B5EF4-FFF2-40B4-BE49-F238E27FC236}">
-                <a16:creationId xmlns:a16="http://schemas.microsoft.com/office/drawing/2014/main" id="{1B6F26B6-3C6A-4676-8BC3-1CEEB6695794}"/>
+                <a16:creationId xmlns:a16="http://schemas.microsoft.com/office/drawing/2014/main" id="{027F49F5-E031-421A-A397-759A1A0D6A02}"/>
               </a:ext>
             </a:extLst>
           </p:cNvPr>
@@ -7909,7 +7909,7 @@
           <p:cNvPr id="8" name="">
             <a:extLst xmlns:a="http://schemas.openxmlformats.org/drawingml/2006/main">
               <a:ext uri="{FF2B5EF4-FFF2-40B4-BE49-F238E27FC236}">
-                <a16:creationId xmlns:a16="http://schemas.microsoft.com/office/drawing/2014/main" id="{67835497-1531-4B3E-8E40-0B1DA2433D37}"/>
+                <a16:creationId xmlns:a16="http://schemas.microsoft.com/office/drawing/2014/main" id="{8E288DCC-EDAA-40E3-BBFD-4388576C91F6}"/>
               </a:ext>
             </a:extLst>
           </p:cNvPr>
@@ -7944,7 +7944,7 @@
           <p:cNvPr id="9" name="">
             <a:extLst xmlns:a="http://schemas.openxmlformats.org/drawingml/2006/main">
               <a:ext uri="{FF2B5EF4-FFF2-40B4-BE49-F238E27FC236}">
-                <a16:creationId xmlns:a16="http://schemas.microsoft.com/office/drawing/2014/main" id="{DA79E959-E60E-4999-941E-F3946F6C558C}"/>
+                <a16:creationId xmlns:a16="http://schemas.microsoft.com/office/drawing/2014/main" id="{2472504B-09DD-450F-A1FB-3AF142532A96}"/>
               </a:ext>
             </a:extLst>
           </p:cNvPr>
@@ -7994,7 +7994,7 @@
           <p:cNvPr id="10" name="">
             <a:extLst xmlns:a="http://schemas.openxmlformats.org/drawingml/2006/main">
               <a:ext uri="{FF2B5EF4-FFF2-40B4-BE49-F238E27FC236}">
-                <a16:creationId xmlns:a16="http://schemas.microsoft.com/office/drawing/2014/main" id="{EEDDDA7B-E4F2-411D-AD53-C8F69DD86535}"/>
+                <a16:creationId xmlns:a16="http://schemas.microsoft.com/office/drawing/2014/main" id="{673B14B0-4285-4FD6-B776-8845E3CE81B5}"/>
               </a:ext>
             </a:extLst>
           </p:cNvPr>
@@ -8044,7 +8044,7 @@
           <p:cNvPr id="11" name="">
             <a:extLst xmlns:a="http://schemas.openxmlformats.org/drawingml/2006/main">
               <a:ext uri="{FF2B5EF4-FFF2-40B4-BE49-F238E27FC236}">
-                <a16:creationId xmlns:a16="http://schemas.microsoft.com/office/drawing/2014/main" id="{F5C3BA58-7C1D-4826-96F3-517D5D7C4CB1}"/>
+                <a16:creationId xmlns:a16="http://schemas.microsoft.com/office/drawing/2014/main" id="{DD5D50E5-DDCF-4EED-8816-5989A66E4A37}"/>
               </a:ext>
             </a:extLst>
           </p:cNvPr>
@@ -8094,7 +8094,7 @@
           <p:cNvPr id="12" name="">
             <a:extLst xmlns:a="http://schemas.openxmlformats.org/drawingml/2006/main">
               <a:ext uri="{FF2B5EF4-FFF2-40B4-BE49-F238E27FC236}">
-                <a16:creationId xmlns:a16="http://schemas.microsoft.com/office/drawing/2014/main" id="{57A6CC37-4597-4362-A44F-0E26A1F32806}"/>
+                <a16:creationId xmlns:a16="http://schemas.microsoft.com/office/drawing/2014/main" id="{861F394B-400B-46A9-BF52-8F698B4D50B2}"/>
               </a:ext>
             </a:extLst>
           </p:cNvPr>
@@ -8125,7 +8125,7 @@
           <p:cNvPr id="13" name="">
             <a:extLst xmlns:a="http://schemas.openxmlformats.org/drawingml/2006/main">
               <a:ext uri="{FF2B5EF4-FFF2-40B4-BE49-F238E27FC236}">
-                <a16:creationId xmlns:a16="http://schemas.microsoft.com/office/drawing/2014/main" id="{1382465B-A72B-42E1-9391-B82F1D43C5F2}"/>
+                <a16:creationId xmlns:a16="http://schemas.microsoft.com/office/drawing/2014/main" id="{A8227C6C-16C6-4027-850E-1504DF203F03}"/>
               </a:ext>
             </a:extLst>
           </p:cNvPr>
@@ -8175,7 +8175,7 @@
           <p:cNvPr id="14" name="">
             <a:extLst xmlns:a="http://schemas.openxmlformats.org/drawingml/2006/main">
               <a:ext uri="{FF2B5EF4-FFF2-40B4-BE49-F238E27FC236}">
-                <a16:creationId xmlns:a16="http://schemas.microsoft.com/office/drawing/2014/main" id="{ECB76D31-8DDB-4F83-81E9-3066CB0E4690}"/>
+                <a16:creationId xmlns:a16="http://schemas.microsoft.com/office/drawing/2014/main" id="{23F42B42-F9F4-4DB4-A368-D14BC16C60E0}"/>
               </a:ext>
             </a:extLst>
           </p:cNvPr>
@@ -8225,7 +8225,7 @@
           <p:cNvPr id="15" name="">
             <a:extLst xmlns:a="http://schemas.openxmlformats.org/drawingml/2006/main">
               <a:ext uri="{FF2B5EF4-FFF2-40B4-BE49-F238E27FC236}">
-                <a16:creationId xmlns:a16="http://schemas.microsoft.com/office/drawing/2014/main" id="{6FB296F4-72D5-4278-96B4-7A67F13D15E0}"/>
+                <a16:creationId xmlns:a16="http://schemas.microsoft.com/office/drawing/2014/main" id="{16BD4206-C984-4BDF-BA4D-4D7D4A44D96A}"/>
               </a:ext>
             </a:extLst>
           </p:cNvPr>
@@ -8275,7 +8275,7 @@
           <p:cNvPr id="16" name="">
             <a:extLst xmlns:a="http://schemas.openxmlformats.org/drawingml/2006/main">
               <a:ext uri="{FF2B5EF4-FFF2-40B4-BE49-F238E27FC236}">
-                <a16:creationId xmlns:a16="http://schemas.microsoft.com/office/drawing/2014/main" id="{4067FE88-B21D-4F43-9E01-3134E1B07D32}"/>
+                <a16:creationId xmlns:a16="http://schemas.microsoft.com/office/drawing/2014/main" id="{8E0F3959-FDFA-43AC-A70A-328356AB24F3}"/>
               </a:ext>
             </a:extLst>
           </p:cNvPr>
@@ -8325,7 +8325,7 @@
           <p:cNvPr id="17" name="">
             <a:extLst xmlns:a="http://schemas.openxmlformats.org/drawingml/2006/main">
               <a:ext uri="{FF2B5EF4-FFF2-40B4-BE49-F238E27FC236}">
-                <a16:creationId xmlns:a16="http://schemas.microsoft.com/office/drawing/2014/main" id="{6E45A93B-9CDC-40F4-8BB3-0A2E498AD090}"/>
+                <a16:creationId xmlns:a16="http://schemas.microsoft.com/office/drawing/2014/main" id="{C4DD1C43-8182-4B80-B829-1A114A8351BA}"/>
               </a:ext>
             </a:extLst>
           </p:cNvPr>
@@ -8360,7 +8360,7 @@
           <p:cNvPr id="18" name="">
             <a:extLst xmlns:a="http://schemas.openxmlformats.org/drawingml/2006/main">
               <a:ext uri="{FF2B5EF4-FFF2-40B4-BE49-F238E27FC236}">
-                <a16:creationId xmlns:a16="http://schemas.microsoft.com/office/drawing/2014/main" id="{A713EC2E-0DF2-4CCB-9AC9-4298145EBE81}"/>
+                <a16:creationId xmlns:a16="http://schemas.microsoft.com/office/drawing/2014/main" id="{06C3B98A-7768-4D1C-8694-CE01FFED8CF5}"/>
               </a:ext>
             </a:extLst>
           </p:cNvPr>
@@ -8410,7 +8410,7 @@
           <p:cNvPr id="19" name="">
             <a:extLst xmlns:a="http://schemas.openxmlformats.org/drawingml/2006/main">
               <a:ext uri="{FF2B5EF4-FFF2-40B4-BE49-F238E27FC236}">
-                <a16:creationId xmlns:a16="http://schemas.microsoft.com/office/drawing/2014/main" id="{62014147-D97B-48FC-834D-C67981D8DE51}"/>
+                <a16:creationId xmlns:a16="http://schemas.microsoft.com/office/drawing/2014/main" id="{220AA06F-CAD5-4093-B006-2C718748CED5}"/>
               </a:ext>
             </a:extLst>
           </p:cNvPr>
@@ -8460,7 +8460,7 @@
           <p:cNvPr id="20" name="">
             <a:extLst xmlns:a="http://schemas.openxmlformats.org/drawingml/2006/main">
               <a:ext uri="{FF2B5EF4-FFF2-40B4-BE49-F238E27FC236}">
-                <a16:creationId xmlns:a16="http://schemas.microsoft.com/office/drawing/2014/main" id="{18AD6679-8C83-4F14-A699-9DF3C7C05687}"/>
+                <a16:creationId xmlns:a16="http://schemas.microsoft.com/office/drawing/2014/main" id="{E9CB1109-4A80-4A4D-B96B-78C1EE7AA919}"/>
               </a:ext>
             </a:extLst>
           </p:cNvPr>
@@ -8510,7 +8510,7 @@
           <p:cNvPr id="21" name="">
             <a:extLst xmlns:a="http://schemas.openxmlformats.org/drawingml/2006/main">
               <a:ext uri="{FF2B5EF4-FFF2-40B4-BE49-F238E27FC236}">
-                <a16:creationId xmlns:a16="http://schemas.microsoft.com/office/drawing/2014/main" id="{C8041FE5-DC93-4515-BFB8-9B3E24A427B0}"/>
+                <a16:creationId xmlns:a16="http://schemas.microsoft.com/office/drawing/2014/main" id="{17FA5470-7808-4E4F-8829-EF18D6C3D47D}"/>
               </a:ext>
             </a:extLst>
           </p:cNvPr>
@@ -8541,7 +8541,7 @@
           <p:cNvPr id="22" name="">
             <a:extLst xmlns:a="http://schemas.openxmlformats.org/drawingml/2006/main">
               <a:ext uri="{FF2B5EF4-FFF2-40B4-BE49-F238E27FC236}">
-                <a16:creationId xmlns:a16="http://schemas.microsoft.com/office/drawing/2014/main" id="{D142A0EF-3934-4D64-B509-2EF5B0BBA53B}"/>
+                <a16:creationId xmlns:a16="http://schemas.microsoft.com/office/drawing/2014/main" id="{7CD4B6CB-65EE-49C5-BEE2-A9D3F437718A}"/>
               </a:ext>
             </a:extLst>
           </p:cNvPr>
@@ -8591,7 +8591,7 @@
           <p:cNvPr id="23" name="">
             <a:extLst xmlns:a="http://schemas.openxmlformats.org/drawingml/2006/main">
               <a:ext uri="{FF2B5EF4-FFF2-40B4-BE49-F238E27FC236}">
-                <a16:creationId xmlns:a16="http://schemas.microsoft.com/office/drawing/2014/main" id="{6595A062-ABA5-4FEB-AAAF-078C67A9E90D}"/>
+                <a16:creationId xmlns:a16="http://schemas.microsoft.com/office/drawing/2014/main" id="{D7A7B5C4-8C5B-43C4-8EAA-9A2B0F5B8776}"/>
               </a:ext>
             </a:extLst>
           </p:cNvPr>
@@ -8641,7 +8641,7 @@
           <p:cNvPr id="24" name="">
             <a:extLst xmlns:a="http://schemas.openxmlformats.org/drawingml/2006/main">
               <a:ext uri="{FF2B5EF4-FFF2-40B4-BE49-F238E27FC236}">
-                <a16:creationId xmlns:a16="http://schemas.microsoft.com/office/drawing/2014/main" id="{5E9988D8-804E-4C7D-8D86-A07C9AEEB6BD}"/>
+                <a16:creationId xmlns:a16="http://schemas.microsoft.com/office/drawing/2014/main" id="{C9DB6BDE-07A1-4ABD-B7EE-93FB1DF84F54}"/>
               </a:ext>
             </a:extLst>
           </p:cNvPr>
@@ -8691,7 +8691,7 @@
           <p:cNvPr id="25" name="">
             <a:extLst xmlns:a="http://schemas.openxmlformats.org/drawingml/2006/main">
               <a:ext uri="{FF2B5EF4-FFF2-40B4-BE49-F238E27FC236}">
-                <a16:creationId xmlns:a16="http://schemas.microsoft.com/office/drawing/2014/main" id="{B27DD719-292F-46CD-8293-C45E7BDAABD1}"/>
+                <a16:creationId xmlns:a16="http://schemas.microsoft.com/office/drawing/2014/main" id="{1D6BA7E1-C551-4619-B197-31CDBC331A0A}"/>
               </a:ext>
             </a:extLst>
           </p:cNvPr>
@@ -8741,7 +8741,7 @@
           <p:cNvPr id="26" name="">
             <a:extLst xmlns:a="http://schemas.openxmlformats.org/drawingml/2006/main">
               <a:ext uri="{FF2B5EF4-FFF2-40B4-BE49-F238E27FC236}">
-                <a16:creationId xmlns:a16="http://schemas.microsoft.com/office/drawing/2014/main" id="{AAAB48DC-127F-4564-A76C-4A34CF991661}"/>
+                <a16:creationId xmlns:a16="http://schemas.microsoft.com/office/drawing/2014/main" id="{1E1FC562-9737-4F87-899B-66362772502C}"/>
               </a:ext>
             </a:extLst>
           </p:cNvPr>
@@ -8776,7 +8776,7 @@
           <p:cNvPr id="27" name="">
             <a:extLst xmlns:a="http://schemas.openxmlformats.org/drawingml/2006/main">
               <a:ext uri="{FF2B5EF4-FFF2-40B4-BE49-F238E27FC236}">
-                <a16:creationId xmlns:a16="http://schemas.microsoft.com/office/drawing/2014/main" id="{4FB477D6-E116-4A7C-B35C-CB656C8E0A75}"/>
+                <a16:creationId xmlns:a16="http://schemas.microsoft.com/office/drawing/2014/main" id="{3A159094-0708-4FAB-BEBE-BC34F0EC4CB1}"/>
               </a:ext>
             </a:extLst>
           </p:cNvPr>
@@ -8826,7 +8826,7 @@
           <p:cNvPr id="28" name="">
             <a:extLst xmlns:a="http://schemas.openxmlformats.org/drawingml/2006/main">
               <a:ext uri="{FF2B5EF4-FFF2-40B4-BE49-F238E27FC236}">
-                <a16:creationId xmlns:a16="http://schemas.microsoft.com/office/drawing/2014/main" id="{08FDAD6F-B2F1-45E8-B4C3-13F3F7D77BCF}"/>
+                <a16:creationId xmlns:a16="http://schemas.microsoft.com/office/drawing/2014/main" id="{52B96DD9-6EC4-4D82-8F47-D52FC5BABB4D}"/>
               </a:ext>
             </a:extLst>
           </p:cNvPr>
@@ -8876,7 +8876,7 @@
           <p:cNvPr id="29" name="">
             <a:extLst xmlns:a="http://schemas.openxmlformats.org/drawingml/2006/main">
               <a:ext uri="{FF2B5EF4-FFF2-40B4-BE49-F238E27FC236}">
-                <a16:creationId xmlns:a16="http://schemas.microsoft.com/office/drawing/2014/main" id="{9DA1B32E-BED8-43DD-A1B2-29B45719400D}"/>
+                <a16:creationId xmlns:a16="http://schemas.microsoft.com/office/drawing/2014/main" id="{FF2FBD4C-A178-419F-AEDF-1FA2643DF0F7}"/>
               </a:ext>
             </a:extLst>
           </p:cNvPr>
@@ -8926,7 +8926,7 @@
           <p:cNvPr id="30" name="">
             <a:extLst xmlns:a="http://schemas.openxmlformats.org/drawingml/2006/main">
               <a:ext uri="{FF2B5EF4-FFF2-40B4-BE49-F238E27FC236}">
-                <a16:creationId xmlns:a16="http://schemas.microsoft.com/office/drawing/2014/main" id="{632EA6FC-76CA-45A6-B527-8649CF1BBD87}"/>
+                <a16:creationId xmlns:a16="http://schemas.microsoft.com/office/drawing/2014/main" id="{D2078623-A0C1-46B5-9DA1-85267060E8D0}"/>
               </a:ext>
             </a:extLst>
           </p:cNvPr>
@@ -8957,7 +8957,7 @@
           <p:cNvPr id="31" name="">
             <a:extLst xmlns:a="http://schemas.openxmlformats.org/drawingml/2006/main">
               <a:ext uri="{FF2B5EF4-FFF2-40B4-BE49-F238E27FC236}">
-                <a16:creationId xmlns:a16="http://schemas.microsoft.com/office/drawing/2014/main" id="{D0B6261C-8070-4212-916E-D43FDAA97EB2}"/>
+                <a16:creationId xmlns:a16="http://schemas.microsoft.com/office/drawing/2014/main" id="{341671E5-1B19-4264-8236-353992186F3D}"/>
               </a:ext>
             </a:extLst>
           </p:cNvPr>
@@ -9007,7 +9007,7 @@
           <p:cNvPr id="32" name="">
             <a:extLst xmlns:a="http://schemas.openxmlformats.org/drawingml/2006/main">
               <a:ext uri="{FF2B5EF4-FFF2-40B4-BE49-F238E27FC236}">
-                <a16:creationId xmlns:a16="http://schemas.microsoft.com/office/drawing/2014/main" id="{D146F02F-454D-4D83-A393-70635E508AD3}"/>
+                <a16:creationId xmlns:a16="http://schemas.microsoft.com/office/drawing/2014/main" id="{3564EFA1-785A-4649-BC1F-EB7C823ECCAD}"/>
               </a:ext>
             </a:extLst>
           </p:cNvPr>
@@ -9057,7 +9057,7 @@
           <p:cNvPr id="33" name="">
             <a:extLst xmlns:a="http://schemas.openxmlformats.org/drawingml/2006/main">
               <a:ext uri="{FF2B5EF4-FFF2-40B4-BE49-F238E27FC236}">
-                <a16:creationId xmlns:a16="http://schemas.microsoft.com/office/drawing/2014/main" id="{F1E94BC0-2765-44D3-820C-D4F133B4899C}"/>
+                <a16:creationId xmlns:a16="http://schemas.microsoft.com/office/drawing/2014/main" id="{7D4D82D3-94DC-4D89-9C70-0E17699FC7D0}"/>
               </a:ext>
             </a:extLst>
           </p:cNvPr>
@@ -9107,7 +9107,7 @@
           <p:cNvPr id="34" name="">
             <a:extLst xmlns:a="http://schemas.openxmlformats.org/drawingml/2006/main">
               <a:ext uri="{FF2B5EF4-FFF2-40B4-BE49-F238E27FC236}">
-                <a16:creationId xmlns:a16="http://schemas.microsoft.com/office/drawing/2014/main" id="{EE7B733B-38F5-46BF-8111-FD0CF484780F}"/>
+                <a16:creationId xmlns:a16="http://schemas.microsoft.com/office/drawing/2014/main" id="{378F17BE-88A4-42A9-898B-4333817E6F6A}"/>
               </a:ext>
             </a:extLst>
           </p:cNvPr>
@@ -9157,7 +9157,7 @@
           <p:cNvPr id="35" name="">
             <a:extLst xmlns:a="http://schemas.openxmlformats.org/drawingml/2006/main">
               <a:ext uri="{FF2B5EF4-FFF2-40B4-BE49-F238E27FC236}">
-                <a16:creationId xmlns:a16="http://schemas.microsoft.com/office/drawing/2014/main" id="{F8434C4D-293B-4152-BBE4-DCD1FD58C257}"/>
+                <a16:creationId xmlns:a16="http://schemas.microsoft.com/office/drawing/2014/main" id="{1A1495E1-6721-4A38-8C44-853208B5FA40}"/>
               </a:ext>
             </a:extLst>
           </p:cNvPr>
@@ -9192,7 +9192,7 @@
           <p:cNvPr id="36" name="">
             <a:extLst xmlns:a="http://schemas.openxmlformats.org/drawingml/2006/main">
               <a:ext uri="{FF2B5EF4-FFF2-40B4-BE49-F238E27FC236}">
-                <a16:creationId xmlns:a16="http://schemas.microsoft.com/office/drawing/2014/main" id="{7870068B-CF35-4D94-9748-726D9E90C540}"/>
+                <a16:creationId xmlns:a16="http://schemas.microsoft.com/office/drawing/2014/main" id="{CD8516E7-3C9F-42BF-9BD9-9659DE3414DF}"/>
               </a:ext>
             </a:extLst>
           </p:cNvPr>
@@ -9242,7 +9242,7 @@
           <p:cNvPr id="37" name="">
             <a:extLst xmlns:a="http://schemas.openxmlformats.org/drawingml/2006/main">
               <a:ext uri="{FF2B5EF4-FFF2-40B4-BE49-F238E27FC236}">
-                <a16:creationId xmlns:a16="http://schemas.microsoft.com/office/drawing/2014/main" id="{48C729FA-C03D-412F-ABF8-AC0BCA82FD50}"/>
+                <a16:creationId xmlns:a16="http://schemas.microsoft.com/office/drawing/2014/main" id="{8D2C002D-938A-45AC-88A7-F82FBAD96094}"/>
               </a:ext>
             </a:extLst>
           </p:cNvPr>
@@ -9292,7 +9292,7 @@
           <p:cNvPr id="38" name="">
             <a:extLst xmlns:a="http://schemas.openxmlformats.org/drawingml/2006/main">
               <a:ext uri="{FF2B5EF4-FFF2-40B4-BE49-F238E27FC236}">
-                <a16:creationId xmlns:a16="http://schemas.microsoft.com/office/drawing/2014/main" id="{AF3DBA1B-E438-40A4-A4CC-CED18B91F464}"/>
+                <a16:creationId xmlns:a16="http://schemas.microsoft.com/office/drawing/2014/main" id="{0DB7C8B4-136B-4050-9115-0F5302F2B432}"/>
               </a:ext>
             </a:extLst>
           </p:cNvPr>
@@ -9342,7 +9342,7 @@
           <p:cNvPr id="39" name="">
             <a:extLst xmlns:a="http://schemas.openxmlformats.org/drawingml/2006/main">
               <a:ext uri="{FF2B5EF4-FFF2-40B4-BE49-F238E27FC236}">
-                <a16:creationId xmlns:a16="http://schemas.microsoft.com/office/drawing/2014/main" id="{E1A5A174-9155-4E18-B0E4-B37C9FB527E9}"/>
+                <a16:creationId xmlns:a16="http://schemas.microsoft.com/office/drawing/2014/main" id="{E5F7A687-7C3A-423C-8E01-EA703495F7EC}"/>
               </a:ext>
             </a:extLst>
           </p:cNvPr>
@@ -9373,7 +9373,7 @@
           <p:cNvPr id="40" name="">
             <a:extLst xmlns:a="http://schemas.openxmlformats.org/drawingml/2006/main">
               <a:ext uri="{FF2B5EF4-FFF2-40B4-BE49-F238E27FC236}">
-                <a16:creationId xmlns:a16="http://schemas.microsoft.com/office/drawing/2014/main" id="{07447FA0-0D04-4C8B-9EF5-192DA1988451}"/>
+                <a16:creationId xmlns:a16="http://schemas.microsoft.com/office/drawing/2014/main" id="{FE4AD996-9A7D-4A4A-9890-6B4ACDF4D7AB}"/>
               </a:ext>
             </a:extLst>
           </p:cNvPr>
@@ -9423,7 +9423,7 @@
           <p:cNvPr id="41" name="">
             <a:extLst xmlns:a="http://schemas.openxmlformats.org/drawingml/2006/main">
               <a:ext uri="{FF2B5EF4-FFF2-40B4-BE49-F238E27FC236}">
-                <a16:creationId xmlns:a16="http://schemas.microsoft.com/office/drawing/2014/main" id="{81228415-E52F-4615-B9A7-DC2964FAFDD6}"/>
+                <a16:creationId xmlns:a16="http://schemas.microsoft.com/office/drawing/2014/main" id="{A7B997A9-3ADD-402F-B083-A8D9A6616C6B}"/>
               </a:ext>
             </a:extLst>
           </p:cNvPr>
@@ -9473,7 +9473,7 @@
           <p:cNvPr id="42" name="">
             <a:extLst xmlns:a="http://schemas.openxmlformats.org/drawingml/2006/main">
               <a:ext uri="{FF2B5EF4-FFF2-40B4-BE49-F238E27FC236}">
-                <a16:creationId xmlns:a16="http://schemas.microsoft.com/office/drawing/2014/main" id="{8A075D40-9039-4FE4-9AC6-2388D3DA62E9}"/>
+                <a16:creationId xmlns:a16="http://schemas.microsoft.com/office/drawing/2014/main" id="{2A682A15-2880-442A-8193-2F1A063B23C2}"/>
               </a:ext>
             </a:extLst>
           </p:cNvPr>
@@ -9523,7 +9523,7 @@
           <p:cNvPr id="43" name="">
             <a:extLst xmlns:a="http://schemas.openxmlformats.org/drawingml/2006/main">
               <a:ext uri="{FF2B5EF4-FFF2-40B4-BE49-F238E27FC236}">
-                <a16:creationId xmlns:a16="http://schemas.microsoft.com/office/drawing/2014/main" id="{EF7E5844-E5F6-4097-9050-FB0FE4C6D01E}"/>
+                <a16:creationId xmlns:a16="http://schemas.microsoft.com/office/drawing/2014/main" id="{66A3C123-9C36-4952-973C-3747E8D65C1B}"/>
               </a:ext>
             </a:extLst>
           </p:cNvPr>
@@ -9571,7 +9571,7 @@
     </p:spTree>
     <p:extLst>
       <p:ext uri="{BB962C8B-B14F-4D97-AF65-F5344CB8AC3E}">
-        <p14:creationId xmlns:p14="http://schemas.microsoft.com/office/powerpoint/2010/main" val="19954553"/>
+        <p14:creationId xmlns:p14="http://schemas.microsoft.com/office/powerpoint/2010/main" val="460331086"/>
       </p:ext>
     </p:extLst>
   </p:cSld>
@@ -9602,7 +9602,7 @@
           <p:cNvPr id="1" name="">
             <a:extLst xmlns:a="http://schemas.openxmlformats.org/drawingml/2006/main">
               <a:ext uri="{FF2B5EF4-FFF2-40B4-BE49-F238E27FC236}">
-                <a16:creationId xmlns:a16="http://schemas.microsoft.com/office/drawing/2014/main" id="{0AF8DAEC-1BD1-4572-8A5E-B9636088C003}"/>
+                <a16:creationId xmlns:a16="http://schemas.microsoft.com/office/drawing/2014/main" id="{90A160AC-8466-4B60-8678-434B31BEB044}"/>
               </a:ext>
             </a:extLst>
           </p:cNvPr>
@@ -9637,7 +9637,7 @@
           <p:nvPr/>
         </p:nvPicPr>
         <p:blipFill>
-          <a:blip xmlns:r="http://schemas.openxmlformats.org/officeDocument/2006/relationships" xmlns:a="http://schemas.openxmlformats.org/drawingml/2006/main" r:embed="R22f1e195a05e43fe"/>
+          <a:blip xmlns:r="http://schemas.openxmlformats.org/officeDocument/2006/relationships" xmlns:a="http://schemas.openxmlformats.org/drawingml/2006/main" r:embed="R560ae3fda3b84d2a"/>
           <a:stretch xmlns:a="http://schemas.openxmlformats.org/drawingml/2006/main"/>
         </p:blipFill>
         <p:spPr>
@@ -9655,7 +9655,7 @@
           <p:cNvPr id="3" name="">
             <a:extLst xmlns:a="http://schemas.openxmlformats.org/drawingml/2006/main">
               <a:ext uri="{FF2B5EF4-FFF2-40B4-BE49-F238E27FC236}">
-                <a16:creationId xmlns:a16="http://schemas.microsoft.com/office/drawing/2014/main" id="{1AE31968-ABC6-4A3F-ABE3-FAABCFCE0EA2}"/>
+                <a16:creationId xmlns:a16="http://schemas.microsoft.com/office/drawing/2014/main" id="{54472B7E-47A7-4C26-AB60-D81013D4F9BB}"/>
               </a:ext>
             </a:extLst>
           </p:cNvPr>
@@ -9705,7 +9705,7 @@
           <p:cNvPr id="4" name="">
             <a:extLst xmlns:a="http://schemas.openxmlformats.org/drawingml/2006/main">
               <a:ext uri="{FF2B5EF4-FFF2-40B4-BE49-F238E27FC236}">
-                <a16:creationId xmlns:a16="http://schemas.microsoft.com/office/drawing/2014/main" id="{C39364CF-90EA-41B3-99D5-39C9D087651D}"/>
+                <a16:creationId xmlns:a16="http://schemas.microsoft.com/office/drawing/2014/main" id="{9D255F3A-AD15-43EF-A3DF-309FB2BFA1C1}"/>
               </a:ext>
             </a:extLst>
           </p:cNvPr>
@@ -9738,7 +9738,7 @@
           <p:cNvPr id="5" name="">
             <a:extLst xmlns:a="http://schemas.openxmlformats.org/drawingml/2006/main">
               <a:ext uri="{FF2B5EF4-FFF2-40B4-BE49-F238E27FC236}">
-                <a16:creationId xmlns:a16="http://schemas.microsoft.com/office/drawing/2014/main" id="{1B4DBEFB-98B6-43DB-8258-6DA6FC7549F4}"/>
+                <a16:creationId xmlns:a16="http://schemas.microsoft.com/office/drawing/2014/main" id="{61B3DB99-3525-4FC8-B67D-14D4DFB2CE3F}"/>
               </a:ext>
             </a:extLst>
           </p:cNvPr>
@@ -9769,7 +9769,7 @@
           <p:cNvPr id="6" name="">
             <a:extLst xmlns:a="http://schemas.openxmlformats.org/drawingml/2006/main">
               <a:ext uri="{FF2B5EF4-FFF2-40B4-BE49-F238E27FC236}">
-                <a16:creationId xmlns:a16="http://schemas.microsoft.com/office/drawing/2014/main" id="{1C724B38-2502-4E79-BD17-3F2594CB0717}"/>
+                <a16:creationId xmlns:a16="http://schemas.microsoft.com/office/drawing/2014/main" id="{AFD14DD5-6553-4C63-9CC5-7E3AE2A4F57F}"/>
               </a:ext>
             </a:extLst>
           </p:cNvPr>
@@ -9819,7 +9819,7 @@
           <p:cNvPr id="7" name="">
             <a:extLst xmlns:a="http://schemas.openxmlformats.org/drawingml/2006/main">
               <a:ext uri="{FF2B5EF4-FFF2-40B4-BE49-F238E27FC236}">
-                <a16:creationId xmlns:a16="http://schemas.microsoft.com/office/drawing/2014/main" id="{C29CAC24-DF30-47C8-9985-7B9F35044E6E}"/>
+                <a16:creationId xmlns:a16="http://schemas.microsoft.com/office/drawing/2014/main" id="{7C70BD4A-D6E1-4AE1-81A9-350946F8F0AD}"/>
               </a:ext>
             </a:extLst>
           </p:cNvPr>
@@ -9869,7 +9869,7 @@
           <p:cNvPr id="8" name="">
             <a:extLst xmlns:a="http://schemas.openxmlformats.org/drawingml/2006/main">
               <a:ext uri="{FF2B5EF4-FFF2-40B4-BE49-F238E27FC236}">
-                <a16:creationId xmlns:a16="http://schemas.microsoft.com/office/drawing/2014/main" id="{0E729CC3-6EC9-4F4E-9D12-75E7B7A81659}"/>
+                <a16:creationId xmlns:a16="http://schemas.microsoft.com/office/drawing/2014/main" id="{BE0EBF97-B0BB-4963-B2BC-BD6FE757CB25}"/>
               </a:ext>
             </a:extLst>
           </p:cNvPr>
@@ -9904,7 +9904,7 @@
           <p:cNvPr id="9" name="">
             <a:extLst xmlns:a="http://schemas.openxmlformats.org/drawingml/2006/main">
               <a:ext uri="{FF2B5EF4-FFF2-40B4-BE49-F238E27FC236}">
-                <a16:creationId xmlns:a16="http://schemas.microsoft.com/office/drawing/2014/main" id="{E3174E95-2D56-423E-8CAD-7F039C6CD69E}"/>
+                <a16:creationId xmlns:a16="http://schemas.microsoft.com/office/drawing/2014/main" id="{E59E2A7C-89C4-4808-88C7-6D22061501A1}"/>
               </a:ext>
             </a:extLst>
           </p:cNvPr>
@@ -9954,7 +9954,7 @@
           <p:cNvPr id="10" name="">
             <a:extLst xmlns:a="http://schemas.openxmlformats.org/drawingml/2006/main">
               <a:ext uri="{FF2B5EF4-FFF2-40B4-BE49-F238E27FC236}">
-                <a16:creationId xmlns:a16="http://schemas.microsoft.com/office/drawing/2014/main" id="{48B4E14E-AC65-4B95-BCF0-86EBF30565A7}"/>
+                <a16:creationId xmlns:a16="http://schemas.microsoft.com/office/drawing/2014/main" id="{0D452FC1-13C2-4588-B620-5D74E91B11E1}"/>
               </a:ext>
             </a:extLst>
           </p:cNvPr>
@@ -10004,7 +10004,7 @@
           <p:cNvPr id="11" name="">
             <a:extLst xmlns:a="http://schemas.openxmlformats.org/drawingml/2006/main">
               <a:ext uri="{FF2B5EF4-FFF2-40B4-BE49-F238E27FC236}">
-                <a16:creationId xmlns:a16="http://schemas.microsoft.com/office/drawing/2014/main" id="{0D2A909D-C2C4-48BF-A46F-5D740E6F3CB8}"/>
+                <a16:creationId xmlns:a16="http://schemas.microsoft.com/office/drawing/2014/main" id="{C53ACF42-AC97-4883-BE07-531D92D98AE1}"/>
               </a:ext>
             </a:extLst>
           </p:cNvPr>
@@ -10054,7 +10054,7 @@
           <p:cNvPr id="12" name="">
             <a:extLst xmlns:a="http://schemas.openxmlformats.org/drawingml/2006/main">
               <a:ext uri="{FF2B5EF4-FFF2-40B4-BE49-F238E27FC236}">
-                <a16:creationId xmlns:a16="http://schemas.microsoft.com/office/drawing/2014/main" id="{81B8E7F5-76F6-43D3-8BAD-310B52027C0F}"/>
+                <a16:creationId xmlns:a16="http://schemas.microsoft.com/office/drawing/2014/main" id="{3D31FDC9-A639-4AB5-9E8F-CB4190D40872}"/>
               </a:ext>
             </a:extLst>
           </p:cNvPr>
@@ -10085,7 +10085,7 @@
           <p:cNvPr id="13" name="">
             <a:extLst xmlns:a="http://schemas.openxmlformats.org/drawingml/2006/main">
               <a:ext uri="{FF2B5EF4-FFF2-40B4-BE49-F238E27FC236}">
-                <a16:creationId xmlns:a16="http://schemas.microsoft.com/office/drawing/2014/main" id="{4150038F-95AD-445A-8D0E-85CC68558742}"/>
+                <a16:creationId xmlns:a16="http://schemas.microsoft.com/office/drawing/2014/main" id="{F463E02A-AD16-420E-AFB0-C24AAD47DF32}"/>
               </a:ext>
             </a:extLst>
           </p:cNvPr>
@@ -10135,7 +10135,7 @@
           <p:cNvPr id="14" name="">
             <a:extLst xmlns:a="http://schemas.openxmlformats.org/drawingml/2006/main">
               <a:ext uri="{FF2B5EF4-FFF2-40B4-BE49-F238E27FC236}">
-                <a16:creationId xmlns:a16="http://schemas.microsoft.com/office/drawing/2014/main" id="{D555EB94-7A76-47BB-B524-51FCD87EBA4C}"/>
+                <a16:creationId xmlns:a16="http://schemas.microsoft.com/office/drawing/2014/main" id="{6543454C-1C91-4DF0-AEE0-5AC8DB319208}"/>
               </a:ext>
             </a:extLst>
           </p:cNvPr>
@@ -10185,7 +10185,7 @@
           <p:cNvPr id="15" name="">
             <a:extLst xmlns:a="http://schemas.openxmlformats.org/drawingml/2006/main">
               <a:ext uri="{FF2B5EF4-FFF2-40B4-BE49-F238E27FC236}">
-                <a16:creationId xmlns:a16="http://schemas.microsoft.com/office/drawing/2014/main" id="{E998BA3C-F140-4AF6-9A89-EC9D928E9388}"/>
+                <a16:creationId xmlns:a16="http://schemas.microsoft.com/office/drawing/2014/main" id="{AE3300FE-84C5-4B89-8FA7-E60C05B34264}"/>
               </a:ext>
             </a:extLst>
           </p:cNvPr>
@@ -10235,7 +10235,7 @@
           <p:cNvPr id="16" name="">
             <a:extLst xmlns:a="http://schemas.openxmlformats.org/drawingml/2006/main">
               <a:ext uri="{FF2B5EF4-FFF2-40B4-BE49-F238E27FC236}">
-                <a16:creationId xmlns:a16="http://schemas.microsoft.com/office/drawing/2014/main" id="{D76FE7A5-42BD-4111-B7D0-86F158D59382}"/>
+                <a16:creationId xmlns:a16="http://schemas.microsoft.com/office/drawing/2014/main" id="{E59347B9-2B97-4DF8-B928-72F1EA84C193}"/>
               </a:ext>
             </a:extLst>
           </p:cNvPr>
@@ -10285,7 +10285,7 @@
           <p:cNvPr id="17" name="">
             <a:extLst xmlns:a="http://schemas.openxmlformats.org/drawingml/2006/main">
               <a:ext uri="{FF2B5EF4-FFF2-40B4-BE49-F238E27FC236}">
-                <a16:creationId xmlns:a16="http://schemas.microsoft.com/office/drawing/2014/main" id="{C6767916-24AB-4C14-A36A-545AE3149062}"/>
+                <a16:creationId xmlns:a16="http://schemas.microsoft.com/office/drawing/2014/main" id="{41A9945E-8112-4963-8BE0-F5AFAD8AD09D}"/>
               </a:ext>
             </a:extLst>
           </p:cNvPr>
@@ -10320,7 +10320,7 @@
           <p:cNvPr id="18" name="">
             <a:extLst xmlns:a="http://schemas.openxmlformats.org/drawingml/2006/main">
               <a:ext uri="{FF2B5EF4-FFF2-40B4-BE49-F238E27FC236}">
-                <a16:creationId xmlns:a16="http://schemas.microsoft.com/office/drawing/2014/main" id="{4EF8F617-067C-47A4-957B-0255C0B8C481}"/>
+                <a16:creationId xmlns:a16="http://schemas.microsoft.com/office/drawing/2014/main" id="{AE67AE51-456D-4460-985F-AC7105DFFDE8}"/>
               </a:ext>
             </a:extLst>
           </p:cNvPr>
@@ -10370,7 +10370,7 @@
           <p:cNvPr id="19" name="">
             <a:extLst xmlns:a="http://schemas.openxmlformats.org/drawingml/2006/main">
               <a:ext uri="{FF2B5EF4-FFF2-40B4-BE49-F238E27FC236}">
-                <a16:creationId xmlns:a16="http://schemas.microsoft.com/office/drawing/2014/main" id="{D02FBEAE-E423-4AC3-8BE3-3B66660ACEE0}"/>
+                <a16:creationId xmlns:a16="http://schemas.microsoft.com/office/drawing/2014/main" id="{1CF7300A-C253-4CDA-AF15-012ADAD9301B}"/>
               </a:ext>
             </a:extLst>
           </p:cNvPr>
@@ -10420,7 +10420,7 @@
           <p:cNvPr id="20" name="">
             <a:extLst xmlns:a="http://schemas.openxmlformats.org/drawingml/2006/main">
               <a:ext uri="{FF2B5EF4-FFF2-40B4-BE49-F238E27FC236}">
-                <a16:creationId xmlns:a16="http://schemas.microsoft.com/office/drawing/2014/main" id="{7D5373D1-46A2-4103-A9AD-5822FE271C25}"/>
+                <a16:creationId xmlns:a16="http://schemas.microsoft.com/office/drawing/2014/main" id="{B9BA8A63-C6A6-464A-84C9-5E97FB88BDCD}"/>
               </a:ext>
             </a:extLst>
           </p:cNvPr>
@@ -10470,7 +10470,7 @@
           <p:cNvPr id="21" name="">
             <a:extLst xmlns:a="http://schemas.openxmlformats.org/drawingml/2006/main">
               <a:ext uri="{FF2B5EF4-FFF2-40B4-BE49-F238E27FC236}">
-                <a16:creationId xmlns:a16="http://schemas.microsoft.com/office/drawing/2014/main" id="{BE335895-2FB3-4D5C-BE8F-0311E899BE99}"/>
+                <a16:creationId xmlns:a16="http://schemas.microsoft.com/office/drawing/2014/main" id="{87D067EE-1F6B-4E9B-B98D-2709D8443D4F}"/>
               </a:ext>
             </a:extLst>
           </p:cNvPr>
@@ -10501,7 +10501,7 @@
           <p:cNvPr id="22" name="">
             <a:extLst xmlns:a="http://schemas.openxmlformats.org/drawingml/2006/main">
               <a:ext uri="{FF2B5EF4-FFF2-40B4-BE49-F238E27FC236}">
-                <a16:creationId xmlns:a16="http://schemas.microsoft.com/office/drawing/2014/main" id="{CC68E67A-6A99-4052-8D3D-D7C8DB77B849}"/>
+                <a16:creationId xmlns:a16="http://schemas.microsoft.com/office/drawing/2014/main" id="{DB1953F9-16EA-45C0-AC50-52945EF5D656}"/>
               </a:ext>
             </a:extLst>
           </p:cNvPr>
@@ -10551,7 +10551,7 @@
           <p:cNvPr id="23" name="">
             <a:extLst xmlns:a="http://schemas.openxmlformats.org/drawingml/2006/main">
               <a:ext uri="{FF2B5EF4-FFF2-40B4-BE49-F238E27FC236}">
-                <a16:creationId xmlns:a16="http://schemas.microsoft.com/office/drawing/2014/main" id="{61B114F2-2A20-4487-82B2-6E3DE7815960}"/>
+                <a16:creationId xmlns:a16="http://schemas.microsoft.com/office/drawing/2014/main" id="{C85AD7DE-7726-4243-A418-A81AB19F50BD}"/>
               </a:ext>
             </a:extLst>
           </p:cNvPr>
@@ -10601,7 +10601,7 @@
           <p:cNvPr id="24" name="">
             <a:extLst xmlns:a="http://schemas.openxmlformats.org/drawingml/2006/main">
               <a:ext uri="{FF2B5EF4-FFF2-40B4-BE49-F238E27FC236}">
-                <a16:creationId xmlns:a16="http://schemas.microsoft.com/office/drawing/2014/main" id="{6C71D8DE-3131-4532-B49E-A907DB368E6E}"/>
+                <a16:creationId xmlns:a16="http://schemas.microsoft.com/office/drawing/2014/main" id="{649E876B-64AE-461A-A961-98C1166D6B94}"/>
               </a:ext>
             </a:extLst>
           </p:cNvPr>
@@ -10651,7 +10651,7 @@
           <p:cNvPr id="25" name="">
             <a:extLst xmlns:a="http://schemas.openxmlformats.org/drawingml/2006/main">
               <a:ext uri="{FF2B5EF4-FFF2-40B4-BE49-F238E27FC236}">
-                <a16:creationId xmlns:a16="http://schemas.microsoft.com/office/drawing/2014/main" id="{5A79406B-76E8-47A8-B507-494236DD1EB2}"/>
+                <a16:creationId xmlns:a16="http://schemas.microsoft.com/office/drawing/2014/main" id="{55FA457E-2EF6-48FF-801C-C256EF99C316}"/>
               </a:ext>
             </a:extLst>
           </p:cNvPr>
@@ -10701,7 +10701,7 @@
           <p:cNvPr id="26" name="">
             <a:extLst xmlns:a="http://schemas.openxmlformats.org/drawingml/2006/main">
               <a:ext uri="{FF2B5EF4-FFF2-40B4-BE49-F238E27FC236}">
-                <a16:creationId xmlns:a16="http://schemas.microsoft.com/office/drawing/2014/main" id="{A4F3EA60-3E19-4B5D-AC01-3122A7152678}"/>
+                <a16:creationId xmlns:a16="http://schemas.microsoft.com/office/drawing/2014/main" id="{E6D3473B-7D3B-4A37-8325-465CCAD75FF0}"/>
               </a:ext>
             </a:extLst>
           </p:cNvPr>
@@ -10736,7 +10736,7 @@
           <p:cNvPr id="27" name="">
             <a:extLst xmlns:a="http://schemas.openxmlformats.org/drawingml/2006/main">
               <a:ext uri="{FF2B5EF4-FFF2-40B4-BE49-F238E27FC236}">
-                <a16:creationId xmlns:a16="http://schemas.microsoft.com/office/drawing/2014/main" id="{62AFF799-E16D-48AF-BA33-6A47C6E7F8F6}"/>
+                <a16:creationId xmlns:a16="http://schemas.microsoft.com/office/drawing/2014/main" id="{8020A0A0-73B8-41B2-A974-0AF111C9B4A8}"/>
               </a:ext>
             </a:extLst>
           </p:cNvPr>
@@ -10786,7 +10786,7 @@
           <p:cNvPr id="28" name="">
             <a:extLst xmlns:a="http://schemas.openxmlformats.org/drawingml/2006/main">
               <a:ext uri="{FF2B5EF4-FFF2-40B4-BE49-F238E27FC236}">
-                <a16:creationId xmlns:a16="http://schemas.microsoft.com/office/drawing/2014/main" id="{8D473F35-C25C-4364-B354-E64C24E88276}"/>
+                <a16:creationId xmlns:a16="http://schemas.microsoft.com/office/drawing/2014/main" id="{3987EDC2-28B2-4BF7-97B0-18311BE6472A}"/>
               </a:ext>
             </a:extLst>
           </p:cNvPr>
@@ -10836,7 +10836,7 @@
           <p:cNvPr id="29" name="">
             <a:extLst xmlns:a="http://schemas.openxmlformats.org/drawingml/2006/main">
               <a:ext uri="{FF2B5EF4-FFF2-40B4-BE49-F238E27FC236}">
-                <a16:creationId xmlns:a16="http://schemas.microsoft.com/office/drawing/2014/main" id="{A2B246C6-18C8-4F04-B7F7-0C4346C0599A}"/>
+                <a16:creationId xmlns:a16="http://schemas.microsoft.com/office/drawing/2014/main" id="{EF09A38F-D3CA-4C7F-9F37-4767A16AAEA2}"/>
               </a:ext>
             </a:extLst>
           </p:cNvPr>
@@ -10886,7 +10886,7 @@
           <p:cNvPr id="30" name="">
             <a:extLst xmlns:a="http://schemas.openxmlformats.org/drawingml/2006/main">
               <a:ext uri="{FF2B5EF4-FFF2-40B4-BE49-F238E27FC236}">
-                <a16:creationId xmlns:a16="http://schemas.microsoft.com/office/drawing/2014/main" id="{1DF6F662-2F0C-44E3-B56D-8659FA21C3BD}"/>
+                <a16:creationId xmlns:a16="http://schemas.microsoft.com/office/drawing/2014/main" id="{4661B1BC-0055-454C-B78F-B0683C163830}"/>
               </a:ext>
             </a:extLst>
           </p:cNvPr>
@@ -10917,7 +10917,7 @@
           <p:cNvPr id="31" name="">
             <a:extLst xmlns:a="http://schemas.openxmlformats.org/drawingml/2006/main">
               <a:ext uri="{FF2B5EF4-FFF2-40B4-BE49-F238E27FC236}">
-                <a16:creationId xmlns:a16="http://schemas.microsoft.com/office/drawing/2014/main" id="{AE79A551-70AF-4450-B0F6-07FD883197B6}"/>
+                <a16:creationId xmlns:a16="http://schemas.microsoft.com/office/drawing/2014/main" id="{3B16380D-6887-42FF-972D-51606D1BCFED}"/>
               </a:ext>
             </a:extLst>
           </p:cNvPr>
@@ -10967,7 +10967,7 @@
           <p:cNvPr id="32" name="">
             <a:extLst xmlns:a="http://schemas.openxmlformats.org/drawingml/2006/main">
               <a:ext uri="{FF2B5EF4-FFF2-40B4-BE49-F238E27FC236}">
-                <a16:creationId xmlns:a16="http://schemas.microsoft.com/office/drawing/2014/main" id="{2D9FB0A5-1FE7-44E6-82E8-4F12742C93DF}"/>
+                <a16:creationId xmlns:a16="http://schemas.microsoft.com/office/drawing/2014/main" id="{C560B169-1218-4953-B396-213EEE491F66}"/>
               </a:ext>
             </a:extLst>
           </p:cNvPr>
@@ -11017,7 +11017,7 @@
           <p:cNvPr id="33" name="">
             <a:extLst xmlns:a="http://schemas.openxmlformats.org/drawingml/2006/main">
               <a:ext uri="{FF2B5EF4-FFF2-40B4-BE49-F238E27FC236}">
-                <a16:creationId xmlns:a16="http://schemas.microsoft.com/office/drawing/2014/main" id="{ECA7D851-E1EC-44FD-98AA-BE6C8AEC7A8D}"/>
+                <a16:creationId xmlns:a16="http://schemas.microsoft.com/office/drawing/2014/main" id="{1ED06254-B378-4B3C-A315-84BFA09622FB}"/>
               </a:ext>
             </a:extLst>
           </p:cNvPr>
@@ -11067,7 +11067,7 @@
           <p:cNvPr id="34" name="">
             <a:extLst xmlns:a="http://schemas.openxmlformats.org/drawingml/2006/main">
               <a:ext uri="{FF2B5EF4-FFF2-40B4-BE49-F238E27FC236}">
-                <a16:creationId xmlns:a16="http://schemas.microsoft.com/office/drawing/2014/main" id="{F57F3A35-4509-48CA-969C-A8A29CA26D87}"/>
+                <a16:creationId xmlns:a16="http://schemas.microsoft.com/office/drawing/2014/main" id="{45A89328-EA5A-4925-B331-7FC346E762A4}"/>
               </a:ext>
             </a:extLst>
           </p:cNvPr>
@@ -11117,7 +11117,7 @@
           <p:cNvPr id="35" name="">
             <a:extLst xmlns:a="http://schemas.openxmlformats.org/drawingml/2006/main">
               <a:ext uri="{FF2B5EF4-FFF2-40B4-BE49-F238E27FC236}">
-                <a16:creationId xmlns:a16="http://schemas.microsoft.com/office/drawing/2014/main" id="{316A467E-8793-4D46-9DE2-90DB32377C90}"/>
+                <a16:creationId xmlns:a16="http://schemas.microsoft.com/office/drawing/2014/main" id="{0F66613B-7421-4203-969B-A7D5392A9679}"/>
               </a:ext>
             </a:extLst>
           </p:cNvPr>
@@ -11152,7 +11152,7 @@
           <p:cNvPr id="36" name="">
             <a:extLst xmlns:a="http://schemas.openxmlformats.org/drawingml/2006/main">
               <a:ext uri="{FF2B5EF4-FFF2-40B4-BE49-F238E27FC236}">
-                <a16:creationId xmlns:a16="http://schemas.microsoft.com/office/drawing/2014/main" id="{BD2FF769-5C08-44B8-82CB-15FF0B850D38}"/>
+                <a16:creationId xmlns:a16="http://schemas.microsoft.com/office/drawing/2014/main" id="{E3A9E951-7CCB-4153-A5BB-69CF0517B2AE}"/>
               </a:ext>
             </a:extLst>
           </p:cNvPr>
@@ -11202,7 +11202,7 @@
           <p:cNvPr id="37" name="">
             <a:extLst xmlns:a="http://schemas.openxmlformats.org/drawingml/2006/main">
               <a:ext uri="{FF2B5EF4-FFF2-40B4-BE49-F238E27FC236}">
-                <a16:creationId xmlns:a16="http://schemas.microsoft.com/office/drawing/2014/main" id="{5D7F4DE2-8E3F-4D42-AA3A-93C374A78552}"/>
+                <a16:creationId xmlns:a16="http://schemas.microsoft.com/office/drawing/2014/main" id="{830E15EC-A1E0-43A2-90E5-26B2D337D24E}"/>
               </a:ext>
             </a:extLst>
           </p:cNvPr>
@@ -11252,7 +11252,7 @@
           <p:cNvPr id="38" name="">
             <a:extLst xmlns:a="http://schemas.openxmlformats.org/drawingml/2006/main">
               <a:ext uri="{FF2B5EF4-FFF2-40B4-BE49-F238E27FC236}">
-                <a16:creationId xmlns:a16="http://schemas.microsoft.com/office/drawing/2014/main" id="{18D4E373-9FDC-4650-883B-7AB916A77F63}"/>
+                <a16:creationId xmlns:a16="http://schemas.microsoft.com/office/drawing/2014/main" id="{68C7ADFD-F91F-4BDB-A6FA-B511649F74DE}"/>
               </a:ext>
             </a:extLst>
           </p:cNvPr>
@@ -11302,7 +11302,7 @@
           <p:cNvPr id="39" name="">
             <a:extLst xmlns:a="http://schemas.openxmlformats.org/drawingml/2006/main">
               <a:ext uri="{FF2B5EF4-FFF2-40B4-BE49-F238E27FC236}">
-                <a16:creationId xmlns:a16="http://schemas.microsoft.com/office/drawing/2014/main" id="{87FFB5A9-1CBC-429D-BE0E-B6BFA9EDB098}"/>
+                <a16:creationId xmlns:a16="http://schemas.microsoft.com/office/drawing/2014/main" id="{7C25972F-3385-407A-A70A-4C89427692A1}"/>
               </a:ext>
             </a:extLst>
           </p:cNvPr>
@@ -11333,7 +11333,7 @@
           <p:cNvPr id="40" name="">
             <a:extLst xmlns:a="http://schemas.openxmlformats.org/drawingml/2006/main">
               <a:ext uri="{FF2B5EF4-FFF2-40B4-BE49-F238E27FC236}">
-                <a16:creationId xmlns:a16="http://schemas.microsoft.com/office/drawing/2014/main" id="{73639FB9-7949-4929-952A-23777796872F}"/>
+                <a16:creationId xmlns:a16="http://schemas.microsoft.com/office/drawing/2014/main" id="{C878C373-8C3C-4E31-A950-FCB0EC6EF862}"/>
               </a:ext>
             </a:extLst>
           </p:cNvPr>
@@ -11383,7 +11383,7 @@
           <p:cNvPr id="41" name="">
             <a:extLst xmlns:a="http://schemas.openxmlformats.org/drawingml/2006/main">
               <a:ext uri="{FF2B5EF4-FFF2-40B4-BE49-F238E27FC236}">
-                <a16:creationId xmlns:a16="http://schemas.microsoft.com/office/drawing/2014/main" id="{5F06082F-70FF-4465-B057-0F66340C3BD4}"/>
+                <a16:creationId xmlns:a16="http://schemas.microsoft.com/office/drawing/2014/main" id="{7E36469F-FDD6-4D2A-AE2F-455114E6C873}"/>
               </a:ext>
             </a:extLst>
           </p:cNvPr>
@@ -11433,7 +11433,7 @@
           <p:cNvPr id="42" name="">
             <a:extLst xmlns:a="http://schemas.openxmlformats.org/drawingml/2006/main">
               <a:ext uri="{FF2B5EF4-FFF2-40B4-BE49-F238E27FC236}">
-                <a16:creationId xmlns:a16="http://schemas.microsoft.com/office/drawing/2014/main" id="{88030A90-0500-48A8-8ADA-94F2CA80D31D}"/>
+                <a16:creationId xmlns:a16="http://schemas.microsoft.com/office/drawing/2014/main" id="{87E2358F-714E-461B-B068-7588A9EC1626}"/>
               </a:ext>
             </a:extLst>
           </p:cNvPr>
@@ -11483,7 +11483,7 @@
           <p:cNvPr id="43" name="">
             <a:extLst xmlns:a="http://schemas.openxmlformats.org/drawingml/2006/main">
               <a:ext uri="{FF2B5EF4-FFF2-40B4-BE49-F238E27FC236}">
-                <a16:creationId xmlns:a16="http://schemas.microsoft.com/office/drawing/2014/main" id="{FC797EE6-F45D-45B9-A83E-20F458917394}"/>
+                <a16:creationId xmlns:a16="http://schemas.microsoft.com/office/drawing/2014/main" id="{BF21FA6D-91E6-4A11-A499-E2F81EB398D5}"/>
               </a:ext>
             </a:extLst>
           </p:cNvPr>
@@ -11531,7 +11531,7 @@
     </p:spTree>
     <p:extLst>
       <p:ext uri="{BB962C8B-B14F-4D97-AF65-F5344CB8AC3E}">
-        <p14:creationId xmlns:p14="http://schemas.microsoft.com/office/powerpoint/2010/main" val="1968854674"/>
+        <p14:creationId xmlns:p14="http://schemas.microsoft.com/office/powerpoint/2010/main" val="1589936623"/>
       </p:ext>
     </p:extLst>
   </p:cSld>
@@ -11562,7 +11562,7 @@
           <p:cNvPr id="1" name="">
             <a:extLst xmlns:a="http://schemas.openxmlformats.org/drawingml/2006/main">
               <a:ext uri="{FF2B5EF4-FFF2-40B4-BE49-F238E27FC236}">
-                <a16:creationId xmlns:a16="http://schemas.microsoft.com/office/drawing/2014/main" id="{826F3BB0-C6FC-494F-8377-E303D81C4206}"/>
+                <a16:creationId xmlns:a16="http://schemas.microsoft.com/office/drawing/2014/main" id="{72CE9856-4DFA-4C85-ADB1-AAC82BE8EF0F}"/>
               </a:ext>
             </a:extLst>
           </p:cNvPr>
@@ -11597,7 +11597,7 @@
           <p:nvPr/>
         </p:nvPicPr>
         <p:blipFill>
-          <a:blip xmlns:r="http://schemas.openxmlformats.org/officeDocument/2006/relationships" xmlns:a="http://schemas.openxmlformats.org/drawingml/2006/main" r:embed="R64f5077f08f44310"/>
+          <a:blip xmlns:r="http://schemas.openxmlformats.org/officeDocument/2006/relationships" xmlns:a="http://schemas.openxmlformats.org/drawingml/2006/main" r:embed="R3c790e6a36a7405b"/>
           <a:stretch xmlns:a="http://schemas.openxmlformats.org/drawingml/2006/main"/>
         </p:blipFill>
         <p:spPr>
@@ -11615,7 +11615,7 @@
           <p:cNvPr id="3" name="">
             <a:extLst xmlns:a="http://schemas.openxmlformats.org/drawingml/2006/main">
               <a:ext uri="{FF2B5EF4-FFF2-40B4-BE49-F238E27FC236}">
-                <a16:creationId xmlns:a16="http://schemas.microsoft.com/office/drawing/2014/main" id="{A048728C-CC13-48FA-90AE-A145FDFD070A}"/>
+                <a16:creationId xmlns:a16="http://schemas.microsoft.com/office/drawing/2014/main" id="{86626EA8-A0CD-432E-89EB-3735D80813D6}"/>
               </a:ext>
             </a:extLst>
           </p:cNvPr>
@@ -11665,7 +11665,7 @@
           <p:cNvPr id="4" name="">
             <a:extLst xmlns:a="http://schemas.openxmlformats.org/drawingml/2006/main">
               <a:ext uri="{FF2B5EF4-FFF2-40B4-BE49-F238E27FC236}">
-                <a16:creationId xmlns:a16="http://schemas.microsoft.com/office/drawing/2014/main" id="{E597A0ED-70CC-4BFA-AD03-3F7B8BC9AD19}"/>
+                <a16:creationId xmlns:a16="http://schemas.microsoft.com/office/drawing/2014/main" id="{3919F8C5-6C81-410E-868D-F872282F770E}"/>
               </a:ext>
             </a:extLst>
           </p:cNvPr>
@@ -11698,7 +11698,7 @@
           <p:cNvPr id="5" name="">
             <a:extLst xmlns:a="http://schemas.openxmlformats.org/drawingml/2006/main">
               <a:ext uri="{FF2B5EF4-FFF2-40B4-BE49-F238E27FC236}">
-                <a16:creationId xmlns:a16="http://schemas.microsoft.com/office/drawing/2014/main" id="{B96E0F10-3DEA-4B05-985B-510346A6B7C5}"/>
+                <a16:creationId xmlns:a16="http://schemas.microsoft.com/office/drawing/2014/main" id="{12D9AAAC-A447-477E-8618-B97139B43F35}"/>
               </a:ext>
             </a:extLst>
           </p:cNvPr>
@@ -11729,7 +11729,7 @@
           <p:cNvPr id="6" name="">
             <a:extLst xmlns:a="http://schemas.openxmlformats.org/drawingml/2006/main">
               <a:ext uri="{FF2B5EF4-FFF2-40B4-BE49-F238E27FC236}">
-                <a16:creationId xmlns:a16="http://schemas.microsoft.com/office/drawing/2014/main" id="{B043CCA3-7EB1-4BCE-9909-E1B8384B02B7}"/>
+                <a16:creationId xmlns:a16="http://schemas.microsoft.com/office/drawing/2014/main" id="{10D434A0-8EEB-4D5B-802D-1F9339C9685B}"/>
               </a:ext>
             </a:extLst>
           </p:cNvPr>
@@ -11779,7 +11779,7 @@
           <p:cNvPr id="7" name="">
             <a:extLst xmlns:a="http://schemas.openxmlformats.org/drawingml/2006/main">
               <a:ext uri="{FF2B5EF4-FFF2-40B4-BE49-F238E27FC236}">
-                <a16:creationId xmlns:a16="http://schemas.microsoft.com/office/drawing/2014/main" id="{D286B98F-6086-4FC9-B584-C50B55235C47}"/>
+                <a16:creationId xmlns:a16="http://schemas.microsoft.com/office/drawing/2014/main" id="{FB12B214-2AF8-49E9-9810-7EAC7305B46A}"/>
               </a:ext>
             </a:extLst>
           </p:cNvPr>
@@ -11829,7 +11829,7 @@
           <p:cNvPr id="8" name="">
             <a:extLst xmlns:a="http://schemas.openxmlformats.org/drawingml/2006/main">
               <a:ext uri="{FF2B5EF4-FFF2-40B4-BE49-F238E27FC236}">
-                <a16:creationId xmlns:a16="http://schemas.microsoft.com/office/drawing/2014/main" id="{DAE11871-782B-4EAA-97D2-9E4231E4A173}"/>
+                <a16:creationId xmlns:a16="http://schemas.microsoft.com/office/drawing/2014/main" id="{AF7091BD-56A5-4188-811A-84FB9257F18D}"/>
               </a:ext>
             </a:extLst>
           </p:cNvPr>
@@ -11864,7 +11864,7 @@
           <p:cNvPr id="9" name="">
             <a:extLst xmlns:a="http://schemas.openxmlformats.org/drawingml/2006/main">
               <a:ext uri="{FF2B5EF4-FFF2-40B4-BE49-F238E27FC236}">
-                <a16:creationId xmlns:a16="http://schemas.microsoft.com/office/drawing/2014/main" id="{209F8227-85BC-4506-9E16-6557AD78F250}"/>
+                <a16:creationId xmlns:a16="http://schemas.microsoft.com/office/drawing/2014/main" id="{45CB2086-66B4-44AF-A606-BCDDD1B68468}"/>
               </a:ext>
             </a:extLst>
           </p:cNvPr>
@@ -11897,7 +11897,7 @@
           <p:cNvPr id="10" name="">
             <a:extLst xmlns:a="http://schemas.openxmlformats.org/drawingml/2006/main">
               <a:ext uri="{FF2B5EF4-FFF2-40B4-BE49-F238E27FC236}">
-                <a16:creationId xmlns:a16="http://schemas.microsoft.com/office/drawing/2014/main" id="{0824F0CA-1EE6-4819-8605-054AEA2E2394}"/>
+                <a16:creationId xmlns:a16="http://schemas.microsoft.com/office/drawing/2014/main" id="{C8E143D1-D99B-4824-A6CD-68E19E5603A1}"/>
               </a:ext>
             </a:extLst>
           </p:cNvPr>
@@ -11947,7 +11947,7 @@
           <p:cNvPr id="11" name="">
             <a:extLst xmlns:a="http://schemas.openxmlformats.org/drawingml/2006/main">
               <a:ext uri="{FF2B5EF4-FFF2-40B4-BE49-F238E27FC236}">
-                <a16:creationId xmlns:a16="http://schemas.microsoft.com/office/drawing/2014/main" id="{15EA1BCF-97DA-44E3-96D8-5E60E27FC131}"/>
+                <a16:creationId xmlns:a16="http://schemas.microsoft.com/office/drawing/2014/main" id="{32E67B8A-5FEC-4A2D-841A-EA9CF26AFCEF}"/>
               </a:ext>
             </a:extLst>
           </p:cNvPr>
@@ -11997,7 +11997,7 @@
           <p:cNvPr id="12" name="">
             <a:extLst xmlns:a="http://schemas.openxmlformats.org/drawingml/2006/main">
               <a:ext uri="{FF2B5EF4-FFF2-40B4-BE49-F238E27FC236}">
-                <a16:creationId xmlns:a16="http://schemas.microsoft.com/office/drawing/2014/main" id="{70E73E5D-2D6A-4D5E-A4A2-6442EF96AD00}"/>
+                <a16:creationId xmlns:a16="http://schemas.microsoft.com/office/drawing/2014/main" id="{281965A1-20AE-418F-92E1-B68FABEB7626}"/>
               </a:ext>
             </a:extLst>
           </p:cNvPr>
@@ -12047,7 +12047,7 @@
           <p:cNvPr id="13" name="">
             <a:extLst xmlns:a="http://schemas.openxmlformats.org/drawingml/2006/main">
               <a:ext uri="{FF2B5EF4-FFF2-40B4-BE49-F238E27FC236}">
-                <a16:creationId xmlns:a16="http://schemas.microsoft.com/office/drawing/2014/main" id="{8A337966-C042-48C7-8169-CC08DDD860B6}"/>
+                <a16:creationId xmlns:a16="http://schemas.microsoft.com/office/drawing/2014/main" id="{F4441DE5-F084-4184-B4AE-B06A4B8DD1F0}"/>
               </a:ext>
             </a:extLst>
           </p:cNvPr>
@@ -12078,7 +12078,7 @@
           <p:cNvPr id="14" name="">
             <a:extLst xmlns:a="http://schemas.openxmlformats.org/drawingml/2006/main">
               <a:ext uri="{FF2B5EF4-FFF2-40B4-BE49-F238E27FC236}">
-                <a16:creationId xmlns:a16="http://schemas.microsoft.com/office/drawing/2014/main" id="{0B2D97B3-8EE8-41A2-B878-FCCA813ECE57}"/>
+                <a16:creationId xmlns:a16="http://schemas.microsoft.com/office/drawing/2014/main" id="{5BA112A3-881E-4266-A436-8E34A10B53EA}"/>
               </a:ext>
             </a:extLst>
           </p:cNvPr>
@@ -12128,7 +12128,7 @@
           <p:cNvPr id="15" name="">
             <a:extLst xmlns:a="http://schemas.openxmlformats.org/drawingml/2006/main">
               <a:ext uri="{FF2B5EF4-FFF2-40B4-BE49-F238E27FC236}">
-                <a16:creationId xmlns:a16="http://schemas.microsoft.com/office/drawing/2014/main" id="{E41D97B1-345B-4CB3-8F6B-15CDFF45FDAD}"/>
+                <a16:creationId xmlns:a16="http://schemas.microsoft.com/office/drawing/2014/main" id="{4CF07C51-EEF8-4878-B564-42676B4C4305}"/>
               </a:ext>
             </a:extLst>
           </p:cNvPr>
@@ -12178,7 +12178,7 @@
           <p:cNvPr id="16" name="">
             <a:extLst xmlns:a="http://schemas.openxmlformats.org/drawingml/2006/main">
               <a:ext uri="{FF2B5EF4-FFF2-40B4-BE49-F238E27FC236}">
-                <a16:creationId xmlns:a16="http://schemas.microsoft.com/office/drawing/2014/main" id="{D301BEAB-9F62-40FE-BF80-4A693DD70564}"/>
+                <a16:creationId xmlns:a16="http://schemas.microsoft.com/office/drawing/2014/main" id="{679DFDED-372C-4A84-9B9D-1AD45485771A}"/>
               </a:ext>
             </a:extLst>
           </p:cNvPr>
@@ -12213,7 +12213,7 @@
           <p:cNvPr id="17" name="">
             <a:extLst xmlns:a="http://schemas.openxmlformats.org/drawingml/2006/main">
               <a:ext uri="{FF2B5EF4-FFF2-40B4-BE49-F238E27FC236}">
-                <a16:creationId xmlns:a16="http://schemas.microsoft.com/office/drawing/2014/main" id="{53023C02-AB14-4094-8E8A-9C6F39914F5D}"/>
+                <a16:creationId xmlns:a16="http://schemas.microsoft.com/office/drawing/2014/main" id="{05A9AD6F-C761-4174-BEFA-49ACF1A6BB08}"/>
               </a:ext>
             </a:extLst>
           </p:cNvPr>
@@ -12246,7 +12246,7 @@
           <p:cNvPr id="18" name="">
             <a:extLst xmlns:a="http://schemas.openxmlformats.org/drawingml/2006/main">
               <a:ext uri="{FF2B5EF4-FFF2-40B4-BE49-F238E27FC236}">
-                <a16:creationId xmlns:a16="http://schemas.microsoft.com/office/drawing/2014/main" id="{F1DBCF54-FFB3-4E36-8AAB-2D19C892302A}"/>
+                <a16:creationId xmlns:a16="http://schemas.microsoft.com/office/drawing/2014/main" id="{54610FB2-8D80-4076-BF54-A7AEBDE4DAC0}"/>
               </a:ext>
             </a:extLst>
           </p:cNvPr>
@@ -12296,7 +12296,7 @@
           <p:cNvPr id="19" name="">
             <a:extLst xmlns:a="http://schemas.openxmlformats.org/drawingml/2006/main">
               <a:ext uri="{FF2B5EF4-FFF2-40B4-BE49-F238E27FC236}">
-                <a16:creationId xmlns:a16="http://schemas.microsoft.com/office/drawing/2014/main" id="{B2E5583D-AEC7-4C67-84E8-327D2E89CDCB}"/>
+                <a16:creationId xmlns:a16="http://schemas.microsoft.com/office/drawing/2014/main" id="{05B4761F-24AC-47F9-AD17-4B1FB41F3670}"/>
               </a:ext>
             </a:extLst>
           </p:cNvPr>
@@ -12346,7 +12346,7 @@
           <p:cNvPr id="20" name="">
             <a:extLst xmlns:a="http://schemas.openxmlformats.org/drawingml/2006/main">
               <a:ext uri="{FF2B5EF4-FFF2-40B4-BE49-F238E27FC236}">
-                <a16:creationId xmlns:a16="http://schemas.microsoft.com/office/drawing/2014/main" id="{FC82E972-3925-4A16-9734-897BA17E2703}"/>
+                <a16:creationId xmlns:a16="http://schemas.microsoft.com/office/drawing/2014/main" id="{35595808-1EB6-4BF1-B7FC-A01DF2C505F0}"/>
               </a:ext>
             </a:extLst>
           </p:cNvPr>
@@ -12396,7 +12396,7 @@
           <p:cNvPr id="21" name="">
             <a:extLst xmlns:a="http://schemas.openxmlformats.org/drawingml/2006/main">
               <a:ext uri="{FF2B5EF4-FFF2-40B4-BE49-F238E27FC236}">
-                <a16:creationId xmlns:a16="http://schemas.microsoft.com/office/drawing/2014/main" id="{C36FC08C-2D41-4429-9E98-D2C61D00F9A1}"/>
+                <a16:creationId xmlns:a16="http://schemas.microsoft.com/office/drawing/2014/main" id="{80F9F02E-FEAD-4C00-9142-AE4CE835A653}"/>
               </a:ext>
             </a:extLst>
           </p:cNvPr>
@@ -12427,7 +12427,7 @@
           <p:cNvPr id="22" name="">
             <a:extLst xmlns:a="http://schemas.openxmlformats.org/drawingml/2006/main">
               <a:ext uri="{FF2B5EF4-FFF2-40B4-BE49-F238E27FC236}">
-                <a16:creationId xmlns:a16="http://schemas.microsoft.com/office/drawing/2014/main" id="{207367B8-0008-44E7-B7F6-244CB9E5F248}"/>
+                <a16:creationId xmlns:a16="http://schemas.microsoft.com/office/drawing/2014/main" id="{F4D9DE44-C191-4E37-9144-7993ABCB4830}"/>
               </a:ext>
             </a:extLst>
           </p:cNvPr>
@@ -12477,7 +12477,7 @@
           <p:cNvPr id="23" name="">
             <a:extLst xmlns:a="http://schemas.openxmlformats.org/drawingml/2006/main">
               <a:ext uri="{FF2B5EF4-FFF2-40B4-BE49-F238E27FC236}">
-                <a16:creationId xmlns:a16="http://schemas.microsoft.com/office/drawing/2014/main" id="{5DB6C679-D534-47F9-97B9-D395111650C9}"/>
+                <a16:creationId xmlns:a16="http://schemas.microsoft.com/office/drawing/2014/main" id="{5F25E0A9-26DF-4EA5-A3BE-320E8030E674}"/>
               </a:ext>
             </a:extLst>
           </p:cNvPr>
@@ -12527,7 +12527,7 @@
           <p:cNvPr id="24" name="">
             <a:extLst xmlns:a="http://schemas.openxmlformats.org/drawingml/2006/main">
               <a:ext uri="{FF2B5EF4-FFF2-40B4-BE49-F238E27FC236}">
-                <a16:creationId xmlns:a16="http://schemas.microsoft.com/office/drawing/2014/main" id="{70B7F056-AD62-4D5B-8A5B-FAFED0344649}"/>
+                <a16:creationId xmlns:a16="http://schemas.microsoft.com/office/drawing/2014/main" id="{3A371558-8340-4839-B610-40ED968F73C3}"/>
               </a:ext>
             </a:extLst>
           </p:cNvPr>
@@ -12562,7 +12562,7 @@
           <p:cNvPr id="25" name="">
             <a:extLst xmlns:a="http://schemas.openxmlformats.org/drawingml/2006/main">
               <a:ext uri="{FF2B5EF4-FFF2-40B4-BE49-F238E27FC236}">
-                <a16:creationId xmlns:a16="http://schemas.microsoft.com/office/drawing/2014/main" id="{A03E35A4-62FE-43E8-A777-9330B997B582}"/>
+                <a16:creationId xmlns:a16="http://schemas.microsoft.com/office/drawing/2014/main" id="{B57EC86F-67E3-4345-AA59-B086EE1EB277}"/>
               </a:ext>
             </a:extLst>
           </p:cNvPr>
@@ -12595,7 +12595,7 @@
           <p:cNvPr id="26" name="">
             <a:extLst xmlns:a="http://schemas.openxmlformats.org/drawingml/2006/main">
               <a:ext uri="{FF2B5EF4-FFF2-40B4-BE49-F238E27FC236}">
-                <a16:creationId xmlns:a16="http://schemas.microsoft.com/office/drawing/2014/main" id="{4CD4B641-0459-4AA3-BE15-C0C60C71D47D}"/>
+                <a16:creationId xmlns:a16="http://schemas.microsoft.com/office/drawing/2014/main" id="{984C94D5-4DB4-46E5-9E8D-B9DE2DA59B63}"/>
               </a:ext>
             </a:extLst>
           </p:cNvPr>
@@ -12645,7 +12645,7 @@
           <p:cNvPr id="27" name="">
             <a:extLst xmlns:a="http://schemas.openxmlformats.org/drawingml/2006/main">
               <a:ext uri="{FF2B5EF4-FFF2-40B4-BE49-F238E27FC236}">
-                <a16:creationId xmlns:a16="http://schemas.microsoft.com/office/drawing/2014/main" id="{C5BD8461-1C37-4E71-B7B6-41D50FF70D54}"/>
+                <a16:creationId xmlns:a16="http://schemas.microsoft.com/office/drawing/2014/main" id="{DD1B4DFE-E9E7-4232-8EDA-083118EE632D}"/>
               </a:ext>
             </a:extLst>
           </p:cNvPr>
@@ -12695,7 +12695,7 @@
           <p:cNvPr id="28" name="">
             <a:extLst xmlns:a="http://schemas.openxmlformats.org/drawingml/2006/main">
               <a:ext uri="{FF2B5EF4-FFF2-40B4-BE49-F238E27FC236}">
-                <a16:creationId xmlns:a16="http://schemas.microsoft.com/office/drawing/2014/main" id="{7830FCF0-4EDC-4DBE-9EFD-4E24175E5879}"/>
+                <a16:creationId xmlns:a16="http://schemas.microsoft.com/office/drawing/2014/main" id="{25D850FA-C489-4945-9138-4926E44C6907}"/>
               </a:ext>
             </a:extLst>
           </p:cNvPr>
@@ -12745,7 +12745,7 @@
           <p:cNvPr id="29" name="">
             <a:extLst xmlns:a="http://schemas.openxmlformats.org/drawingml/2006/main">
               <a:ext uri="{FF2B5EF4-FFF2-40B4-BE49-F238E27FC236}">
-                <a16:creationId xmlns:a16="http://schemas.microsoft.com/office/drawing/2014/main" id="{8A86C709-E54B-4A06-B30F-B8EA9FD363C6}"/>
+                <a16:creationId xmlns:a16="http://schemas.microsoft.com/office/drawing/2014/main" id="{B9C7D129-340F-4009-BE48-DE65B06F3307}"/>
               </a:ext>
             </a:extLst>
           </p:cNvPr>
@@ -12776,7 +12776,7 @@
           <p:cNvPr id="30" name="">
             <a:extLst xmlns:a="http://schemas.openxmlformats.org/drawingml/2006/main">
               <a:ext uri="{FF2B5EF4-FFF2-40B4-BE49-F238E27FC236}">
-                <a16:creationId xmlns:a16="http://schemas.microsoft.com/office/drawing/2014/main" id="{E5FB2226-B382-4B65-A211-B7DFC99A0923}"/>
+                <a16:creationId xmlns:a16="http://schemas.microsoft.com/office/drawing/2014/main" id="{43ECC6A1-4C9E-4C1C-8FEA-7D6733DBCE5C}"/>
               </a:ext>
             </a:extLst>
           </p:cNvPr>
@@ -12826,7 +12826,7 @@
           <p:cNvPr id="31" name="">
             <a:extLst xmlns:a="http://schemas.openxmlformats.org/drawingml/2006/main">
               <a:ext uri="{FF2B5EF4-FFF2-40B4-BE49-F238E27FC236}">
-                <a16:creationId xmlns:a16="http://schemas.microsoft.com/office/drawing/2014/main" id="{E43CB1B2-7AC5-42F9-AC9E-FC3879AD6F5B}"/>
+                <a16:creationId xmlns:a16="http://schemas.microsoft.com/office/drawing/2014/main" id="{24B45501-CABB-4FB6-AEE3-4F1199172A20}"/>
               </a:ext>
             </a:extLst>
           </p:cNvPr>
@@ -12874,7 +12874,7 @@
     </p:spTree>
     <p:extLst>
       <p:ext uri="{BB962C8B-B14F-4D97-AF65-F5344CB8AC3E}">
-        <p14:creationId xmlns:p14="http://schemas.microsoft.com/office/powerpoint/2010/main" val="1602129237"/>
+        <p14:creationId xmlns:p14="http://schemas.microsoft.com/office/powerpoint/2010/main" val="1140640012"/>
       </p:ext>
     </p:extLst>
   </p:cSld>
@@ -12905,7 +12905,7 @@
           <p:cNvPr id="1" name="">
             <a:extLst xmlns:a="http://schemas.openxmlformats.org/drawingml/2006/main">
               <a:ext uri="{FF2B5EF4-FFF2-40B4-BE49-F238E27FC236}">
-                <a16:creationId xmlns:a16="http://schemas.microsoft.com/office/drawing/2014/main" id="{278004FB-C60F-41E7-93B1-00541F478D09}"/>
+                <a16:creationId xmlns:a16="http://schemas.microsoft.com/office/drawing/2014/main" id="{3B410A4D-5C38-4B74-AC86-04D641009833}"/>
               </a:ext>
             </a:extLst>
           </p:cNvPr>
@@ -12940,7 +12940,7 @@
           <p:nvPr/>
         </p:nvPicPr>
         <p:blipFill>
-          <a:blip xmlns:r="http://schemas.openxmlformats.org/officeDocument/2006/relationships" xmlns:a="http://schemas.openxmlformats.org/drawingml/2006/main" r:embed="R78913d2947234515"/>
+          <a:blip xmlns:r="http://schemas.openxmlformats.org/officeDocument/2006/relationships" xmlns:a="http://schemas.openxmlformats.org/drawingml/2006/main" r:embed="Re3ecd16c9e544c4f"/>
           <a:stretch xmlns:a="http://schemas.openxmlformats.org/drawingml/2006/main"/>
         </p:blipFill>
         <p:spPr>
@@ -12958,7 +12958,7 @@
           <p:cNvPr id="3" name="">
             <a:extLst xmlns:a="http://schemas.openxmlformats.org/drawingml/2006/main">
               <a:ext uri="{FF2B5EF4-FFF2-40B4-BE49-F238E27FC236}">
-                <a16:creationId xmlns:a16="http://schemas.microsoft.com/office/drawing/2014/main" id="{74C42346-1508-49D1-90FD-9BD0C11E16FA}"/>
+                <a16:creationId xmlns:a16="http://schemas.microsoft.com/office/drawing/2014/main" id="{AB4600B3-852E-4C20-8AFB-E65CBA386820}"/>
               </a:ext>
             </a:extLst>
           </p:cNvPr>
@@ -13008,7 +13008,7 @@
           <p:cNvPr id="4" name="">
             <a:extLst xmlns:a="http://schemas.openxmlformats.org/drawingml/2006/main">
               <a:ext uri="{FF2B5EF4-FFF2-40B4-BE49-F238E27FC236}">
-                <a16:creationId xmlns:a16="http://schemas.microsoft.com/office/drawing/2014/main" id="{DF8F5B10-FC99-4EFC-9D66-42FCFF57C1D4}"/>
+                <a16:creationId xmlns:a16="http://schemas.microsoft.com/office/drawing/2014/main" id="{B5295B77-E63C-471A-A83B-0EBAD180E347}"/>
               </a:ext>
             </a:extLst>
           </p:cNvPr>
@@ -13041,7 +13041,7 @@
           <p:cNvPr id="5" name="">
             <a:extLst xmlns:a="http://schemas.openxmlformats.org/drawingml/2006/main">
               <a:ext uri="{FF2B5EF4-FFF2-40B4-BE49-F238E27FC236}">
-                <a16:creationId xmlns:a16="http://schemas.microsoft.com/office/drawing/2014/main" id="{F3BD1CAB-364A-4070-BC11-31D4EC559942}"/>
+                <a16:creationId xmlns:a16="http://schemas.microsoft.com/office/drawing/2014/main" id="{3BD0053F-DC5B-45C4-9330-474C7E4EF806}"/>
               </a:ext>
             </a:extLst>
           </p:cNvPr>
@@ -13072,7 +13072,7 @@
           <p:cNvPr id="6" name="">
             <a:extLst xmlns:a="http://schemas.openxmlformats.org/drawingml/2006/main">
               <a:ext uri="{FF2B5EF4-FFF2-40B4-BE49-F238E27FC236}">
-                <a16:creationId xmlns:a16="http://schemas.microsoft.com/office/drawing/2014/main" id="{593A6D33-7F6E-4730-A022-8D2D24DB774F}"/>
+                <a16:creationId xmlns:a16="http://schemas.microsoft.com/office/drawing/2014/main" id="{2EB122AD-D3DD-44C3-A45F-70A4F9BF332E}"/>
               </a:ext>
             </a:extLst>
           </p:cNvPr>
@@ -13122,7 +13122,7 @@
           <p:cNvPr id="7" name="">
             <a:extLst xmlns:a="http://schemas.openxmlformats.org/drawingml/2006/main">
               <a:ext uri="{FF2B5EF4-FFF2-40B4-BE49-F238E27FC236}">
-                <a16:creationId xmlns:a16="http://schemas.microsoft.com/office/drawing/2014/main" id="{E6E2F6E7-D2B1-4646-B892-F5EF7D9826EF}"/>
+                <a16:creationId xmlns:a16="http://schemas.microsoft.com/office/drawing/2014/main" id="{DF2E447F-07A7-4F16-98F0-AFC372763C06}"/>
               </a:ext>
             </a:extLst>
           </p:cNvPr>
@@ -13172,7 +13172,7 @@
           <p:cNvPr id="8" name="">
             <a:extLst xmlns:a="http://schemas.openxmlformats.org/drawingml/2006/main">
               <a:ext uri="{FF2B5EF4-FFF2-40B4-BE49-F238E27FC236}">
-                <a16:creationId xmlns:a16="http://schemas.microsoft.com/office/drawing/2014/main" id="{B187D63C-DC85-4FB3-82EA-C9591B58FA61}"/>
+                <a16:creationId xmlns:a16="http://schemas.microsoft.com/office/drawing/2014/main" id="{27BD7FC8-C6DC-439E-99B5-7BB961AC9FFE}"/>
               </a:ext>
             </a:extLst>
           </p:cNvPr>
@@ -13222,7 +13222,7 @@
           <p:cNvPr id="9" name="">
             <a:extLst xmlns:a="http://schemas.openxmlformats.org/drawingml/2006/main">
               <a:ext uri="{FF2B5EF4-FFF2-40B4-BE49-F238E27FC236}">
-                <a16:creationId xmlns:a16="http://schemas.microsoft.com/office/drawing/2014/main" id="{95DCE38C-E76C-41B1-86F9-3EDC811D58F7}"/>
+                <a16:creationId xmlns:a16="http://schemas.microsoft.com/office/drawing/2014/main" id="{D8DB9BA2-05F7-46E2-8947-EBAF40BAEABC}"/>
               </a:ext>
             </a:extLst>
           </p:cNvPr>
@@ -13272,7 +13272,7 @@
           <p:cNvPr id="10" name="">
             <a:extLst xmlns:a="http://schemas.openxmlformats.org/drawingml/2006/main">
               <a:ext uri="{FF2B5EF4-FFF2-40B4-BE49-F238E27FC236}">
-                <a16:creationId xmlns:a16="http://schemas.microsoft.com/office/drawing/2014/main" id="{AF9BED18-6DDE-4FE8-9D30-B53487DF6C63}"/>
+                <a16:creationId xmlns:a16="http://schemas.microsoft.com/office/drawing/2014/main" id="{E473A79B-79FB-428E-A777-831AAD019C86}"/>
               </a:ext>
             </a:extLst>
           </p:cNvPr>
@@ -13303,7 +13303,7 @@
           <p:cNvPr id="11" name="">
             <a:extLst xmlns:a="http://schemas.openxmlformats.org/drawingml/2006/main">
               <a:ext uri="{FF2B5EF4-FFF2-40B4-BE49-F238E27FC236}">
-                <a16:creationId xmlns:a16="http://schemas.microsoft.com/office/drawing/2014/main" id="{6262D20D-C7D1-4046-AF12-758D5D85BFD3}"/>
+                <a16:creationId xmlns:a16="http://schemas.microsoft.com/office/drawing/2014/main" id="{A63F07FF-2142-4AC2-992B-3EFBDC58AFCC}"/>
               </a:ext>
             </a:extLst>
           </p:cNvPr>
@@ -13353,7 +13353,7 @@
           <p:cNvPr id="12" name="">
             <a:extLst xmlns:a="http://schemas.openxmlformats.org/drawingml/2006/main">
               <a:ext uri="{FF2B5EF4-FFF2-40B4-BE49-F238E27FC236}">
-                <a16:creationId xmlns:a16="http://schemas.microsoft.com/office/drawing/2014/main" id="{CCBC8AFE-56D8-41DD-BC7E-D0AEFF006CC3}"/>
+                <a16:creationId xmlns:a16="http://schemas.microsoft.com/office/drawing/2014/main" id="{88A522B4-B771-43AD-B12B-72794943138C}"/>
               </a:ext>
             </a:extLst>
           </p:cNvPr>
@@ -13403,7 +13403,7 @@
           <p:cNvPr id="13" name="">
             <a:extLst xmlns:a="http://schemas.openxmlformats.org/drawingml/2006/main">
               <a:ext uri="{FF2B5EF4-FFF2-40B4-BE49-F238E27FC236}">
-                <a16:creationId xmlns:a16="http://schemas.microsoft.com/office/drawing/2014/main" id="{73B5BFC9-C386-4B78-83EB-B8C34D057872}"/>
+                <a16:creationId xmlns:a16="http://schemas.microsoft.com/office/drawing/2014/main" id="{BD09E4C8-5DC7-493A-B7DB-1926B684B365}"/>
               </a:ext>
             </a:extLst>
           </p:cNvPr>
@@ -13434,7 +13434,7 @@
           <p:cNvPr id="14" name="">
             <a:extLst xmlns:a="http://schemas.openxmlformats.org/drawingml/2006/main">
               <a:ext uri="{FF2B5EF4-FFF2-40B4-BE49-F238E27FC236}">
-                <a16:creationId xmlns:a16="http://schemas.microsoft.com/office/drawing/2014/main" id="{AF6D8969-4431-4C29-87E3-3D77A451084F}"/>
+                <a16:creationId xmlns:a16="http://schemas.microsoft.com/office/drawing/2014/main" id="{49982310-A363-4E4A-A026-13C953183AF2}"/>
               </a:ext>
             </a:extLst>
           </p:cNvPr>
@@ -13484,7 +13484,7 @@
           <p:cNvPr id="15" name="">
             <a:extLst xmlns:a="http://schemas.openxmlformats.org/drawingml/2006/main">
               <a:ext uri="{FF2B5EF4-FFF2-40B4-BE49-F238E27FC236}">
-                <a16:creationId xmlns:a16="http://schemas.microsoft.com/office/drawing/2014/main" id="{79ADB0A7-89B7-41A7-8026-0B1B214C93CC}"/>
+                <a16:creationId xmlns:a16="http://schemas.microsoft.com/office/drawing/2014/main" id="{6C38B11B-57E7-4D9F-8226-BFBE47C2A8B5}"/>
               </a:ext>
             </a:extLst>
           </p:cNvPr>
@@ -13534,7 +13534,7 @@
           <p:cNvPr id="16" name="">
             <a:extLst xmlns:a="http://schemas.openxmlformats.org/drawingml/2006/main">
               <a:ext uri="{FF2B5EF4-FFF2-40B4-BE49-F238E27FC236}">
-                <a16:creationId xmlns:a16="http://schemas.microsoft.com/office/drawing/2014/main" id="{0EC8BB8E-EDC3-4F8D-9177-6A1DAC3524BE}"/>
+                <a16:creationId xmlns:a16="http://schemas.microsoft.com/office/drawing/2014/main" id="{071F0408-115D-46A6-A955-75F6E2E40ECF}"/>
               </a:ext>
             </a:extLst>
           </p:cNvPr>
@@ -13565,7 +13565,7 @@
           <p:cNvPr id="17" name="">
             <a:extLst xmlns:a="http://schemas.openxmlformats.org/drawingml/2006/main">
               <a:ext uri="{FF2B5EF4-FFF2-40B4-BE49-F238E27FC236}">
-                <a16:creationId xmlns:a16="http://schemas.microsoft.com/office/drawing/2014/main" id="{2A7907F2-4511-4AE8-A17A-8A56E69715E7}"/>
+                <a16:creationId xmlns:a16="http://schemas.microsoft.com/office/drawing/2014/main" id="{0D281C8F-AEA2-4FC0-9D40-43BB012DE894}"/>
               </a:ext>
             </a:extLst>
           </p:cNvPr>
@@ -13615,7 +13615,7 @@
           <p:cNvPr id="18" name="">
             <a:extLst xmlns:a="http://schemas.openxmlformats.org/drawingml/2006/main">
               <a:ext uri="{FF2B5EF4-FFF2-40B4-BE49-F238E27FC236}">
-                <a16:creationId xmlns:a16="http://schemas.microsoft.com/office/drawing/2014/main" id="{2871D3FC-20CB-4447-AD44-A22554762867}"/>
+                <a16:creationId xmlns:a16="http://schemas.microsoft.com/office/drawing/2014/main" id="{03C49E93-9055-45BD-AE58-966305482AA1}"/>
               </a:ext>
             </a:extLst>
           </p:cNvPr>
@@ -13665,7 +13665,7 @@
           <p:cNvPr id="19" name="">
             <a:extLst xmlns:a="http://schemas.openxmlformats.org/drawingml/2006/main">
               <a:ext uri="{FF2B5EF4-FFF2-40B4-BE49-F238E27FC236}">
-                <a16:creationId xmlns:a16="http://schemas.microsoft.com/office/drawing/2014/main" id="{1AD6B9B9-7416-4625-93CB-104FB4ADF848}"/>
+                <a16:creationId xmlns:a16="http://schemas.microsoft.com/office/drawing/2014/main" id="{E5A542C5-FFE9-4CFA-927B-4F6D5EAB3B14}"/>
               </a:ext>
             </a:extLst>
           </p:cNvPr>
@@ -13700,7 +13700,7 @@
           <p:cNvPr id="20" name="">
             <a:extLst xmlns:a="http://schemas.openxmlformats.org/drawingml/2006/main">
               <a:ext uri="{FF2B5EF4-FFF2-40B4-BE49-F238E27FC236}">
-                <a16:creationId xmlns:a16="http://schemas.microsoft.com/office/drawing/2014/main" id="{5389F95D-A28B-437E-93F0-D445C590C62D}"/>
+                <a16:creationId xmlns:a16="http://schemas.microsoft.com/office/drawing/2014/main" id="{55C218A8-0D59-4C50-ABF3-140C9874463A}"/>
               </a:ext>
             </a:extLst>
           </p:cNvPr>
@@ -13750,7 +13750,7 @@
           <p:cNvPr id="21" name="">
             <a:extLst xmlns:a="http://schemas.openxmlformats.org/drawingml/2006/main">
               <a:ext uri="{FF2B5EF4-FFF2-40B4-BE49-F238E27FC236}">
-                <a16:creationId xmlns:a16="http://schemas.microsoft.com/office/drawing/2014/main" id="{5AED36E7-3969-46D8-B5E8-186C23D9120A}"/>
+                <a16:creationId xmlns:a16="http://schemas.microsoft.com/office/drawing/2014/main" id="{F7B27433-C554-4D86-A1C9-20BB299C1E79}"/>
               </a:ext>
             </a:extLst>
           </p:cNvPr>
@@ -13804,7 +13804,7 @@
           <p:nvPr/>
         </p:nvPicPr>
         <p:blipFill>
-          <a:blip xmlns:r="http://schemas.openxmlformats.org/officeDocument/2006/relationships" xmlns:a="http://schemas.openxmlformats.org/drawingml/2006/main" r:embed="Rce28474f17934560"/>
+          <a:blip xmlns:r="http://schemas.openxmlformats.org/officeDocument/2006/relationships" xmlns:a="http://schemas.openxmlformats.org/drawingml/2006/main" r:embed="R8c80900c3e0a43ea"/>
           <a:stretch xmlns:a="http://schemas.openxmlformats.org/drawingml/2006/main"/>
         </p:blipFill>
         <p:spPr>
@@ -13822,7 +13822,7 @@
           <p:cNvPr id="23" name="">
             <a:extLst xmlns:a="http://schemas.openxmlformats.org/drawingml/2006/main">
               <a:ext uri="{FF2B5EF4-FFF2-40B4-BE49-F238E27FC236}">
-                <a16:creationId xmlns:a16="http://schemas.microsoft.com/office/drawing/2014/main" id="{71C3E92D-FC8C-4C9D-95DD-BD22BF70D8C8}"/>
+                <a16:creationId xmlns:a16="http://schemas.microsoft.com/office/drawing/2014/main" id="{F45677B9-E858-4C07-BCD2-E4AF7300C98D}"/>
               </a:ext>
             </a:extLst>
           </p:cNvPr>
@@ -13872,7 +13872,7 @@
           <p:cNvPr id="24" name="">
             <a:extLst xmlns:a="http://schemas.openxmlformats.org/drawingml/2006/main">
               <a:ext uri="{FF2B5EF4-FFF2-40B4-BE49-F238E27FC236}">
-                <a16:creationId xmlns:a16="http://schemas.microsoft.com/office/drawing/2014/main" id="{2A0A95D8-E828-4787-BE89-17EC546FCA24}"/>
+                <a16:creationId xmlns:a16="http://schemas.microsoft.com/office/drawing/2014/main" id="{51ECBF31-A638-49D4-BF49-5CA07E24D24D}"/>
               </a:ext>
             </a:extLst>
           </p:cNvPr>
@@ -13922,7 +13922,7 @@
           <p:cNvPr id="25" name="">
             <a:extLst xmlns:a="http://schemas.openxmlformats.org/drawingml/2006/main">
               <a:ext uri="{FF2B5EF4-FFF2-40B4-BE49-F238E27FC236}">
-                <a16:creationId xmlns:a16="http://schemas.microsoft.com/office/drawing/2014/main" id="{AF14AA21-CB74-4E18-BA1A-6462AEE23F6E}"/>
+                <a16:creationId xmlns:a16="http://schemas.microsoft.com/office/drawing/2014/main" id="{6A363764-8D99-4B3D-9C87-2CEDA0B5D802}"/>
               </a:ext>
             </a:extLst>
           </p:cNvPr>
@@ -13970,7 +13970,7 @@
     </p:spTree>
     <p:extLst>
       <p:ext uri="{BB962C8B-B14F-4D97-AF65-F5344CB8AC3E}">
-        <p14:creationId xmlns:p14="http://schemas.microsoft.com/office/powerpoint/2010/main" val="1341276363"/>
+        <p14:creationId xmlns:p14="http://schemas.microsoft.com/office/powerpoint/2010/main" val="94013489"/>
       </p:ext>
     </p:extLst>
   </p:cSld>

--- a/static/audit_presentation_khalil.pptx
+++ b/static/audit_presentation_khalil.pptx
@@ -2,25 +2,25 @@
 <file path=ppt/presentation.xml><?xml version="1.0" encoding="utf-8"?>
 <p:presentation xmlns:p="http://schemas.openxmlformats.org/presentationml/2006/main">
   <p:sldMasterIdLst>
-    <p:sldMasterId xmlns:r="http://schemas.openxmlformats.org/officeDocument/2006/relationships" id="2147483648" r:id="R0af69b07ab284892"/>
+    <p:sldMasterId xmlns:r="http://schemas.openxmlformats.org/officeDocument/2006/relationships" id="2147483648" r:id="Rc49e67b6107c4459"/>
   </p:sldMasterIdLst>
   <p:notesMasterIdLst>
-    <p:notesMasterId xmlns:r="http://schemas.openxmlformats.org/officeDocument/2006/relationships" r:id="R5d8b11a077cf4bd3"/>
+    <p:notesMasterId xmlns:r="http://schemas.openxmlformats.org/officeDocument/2006/relationships" r:id="Rf14e5a019c254229"/>
   </p:notesMasterIdLst>
   <p:sldIdLst>
-    <p:sldId xmlns:r="http://schemas.openxmlformats.org/officeDocument/2006/relationships" id="256" r:id="R864b67e53cd3493e"/>
-    <p:sldId xmlns:r="http://schemas.openxmlformats.org/officeDocument/2006/relationships" id="257" r:id="R24c29a92693a4db7"/>
-    <p:sldId xmlns:r="http://schemas.openxmlformats.org/officeDocument/2006/relationships" id="258" r:id="R51f33f0bdd634b13"/>
-    <p:sldId xmlns:r="http://schemas.openxmlformats.org/officeDocument/2006/relationships" id="259" r:id="R9fa745b91b0142bb"/>
-    <p:sldId xmlns:r="http://schemas.openxmlformats.org/officeDocument/2006/relationships" id="260" r:id="R9f2e4736d4804a53"/>
-    <p:sldId xmlns:r="http://schemas.openxmlformats.org/officeDocument/2006/relationships" id="261" r:id="Rd7e68d93c7f84aab"/>
-    <p:sldId xmlns:r="http://schemas.openxmlformats.org/officeDocument/2006/relationships" id="262" r:id="R2246eea4933b4ae6"/>
-    <p:sldId xmlns:r="http://schemas.openxmlformats.org/officeDocument/2006/relationships" id="263" r:id="R30f603dfeeed474a"/>
-    <p:sldId xmlns:r="http://schemas.openxmlformats.org/officeDocument/2006/relationships" id="264" r:id="Ra83caeed769e4488"/>
-    <p:sldId xmlns:r="http://schemas.openxmlformats.org/officeDocument/2006/relationships" id="265" r:id="R18606f114bec4bfc"/>
-    <p:sldId xmlns:r="http://schemas.openxmlformats.org/officeDocument/2006/relationships" id="266" r:id="R374cb4873fcf48aa"/>
-    <p:sldId xmlns:r="http://schemas.openxmlformats.org/officeDocument/2006/relationships" id="267" r:id="R9c4244b1b7ba40bf"/>
-    <p:sldId xmlns:r="http://schemas.openxmlformats.org/officeDocument/2006/relationships" id="268" r:id="R61d95a60abc4451e"/>
+    <p:sldId xmlns:r="http://schemas.openxmlformats.org/officeDocument/2006/relationships" id="256" r:id="R91c332032cba45be"/>
+    <p:sldId xmlns:r="http://schemas.openxmlformats.org/officeDocument/2006/relationships" id="257" r:id="R5b1519344b13476e"/>
+    <p:sldId xmlns:r="http://schemas.openxmlformats.org/officeDocument/2006/relationships" id="258" r:id="R63544cd9cc5148ae"/>
+    <p:sldId xmlns:r="http://schemas.openxmlformats.org/officeDocument/2006/relationships" id="259" r:id="Rec38b5e185ae44c3"/>
+    <p:sldId xmlns:r="http://schemas.openxmlformats.org/officeDocument/2006/relationships" id="260" r:id="Rdd708a1a7ba34e4e"/>
+    <p:sldId xmlns:r="http://schemas.openxmlformats.org/officeDocument/2006/relationships" id="261" r:id="Rc8e41e2155c24800"/>
+    <p:sldId xmlns:r="http://schemas.openxmlformats.org/officeDocument/2006/relationships" id="262" r:id="Rcd478b1993fe4da1"/>
+    <p:sldId xmlns:r="http://schemas.openxmlformats.org/officeDocument/2006/relationships" id="263" r:id="Rcaf8c626bfc748d1"/>
+    <p:sldId xmlns:r="http://schemas.openxmlformats.org/officeDocument/2006/relationships" id="264" r:id="R08c3a7ac0fd8431d"/>
+    <p:sldId xmlns:r="http://schemas.openxmlformats.org/officeDocument/2006/relationships" id="265" r:id="R2dd08e2acc0346d8"/>
+    <p:sldId xmlns:r="http://schemas.openxmlformats.org/officeDocument/2006/relationships" id="266" r:id="R0ee9bc4a49c948f4"/>
+    <p:sldId xmlns:r="http://schemas.openxmlformats.org/officeDocument/2006/relationships" id="267" r:id="Rd17dd1b7a4b24ac6"/>
+    <p:sldId xmlns:r="http://schemas.openxmlformats.org/officeDocument/2006/relationships" id="268" r:id="R36052396f4bf4b5e"/>
   </p:sldIdLst>
   <p:sldSz cx="12192000" cy="6858000"/>
   <p:notesSz cx="6858000" cy="9144000"/>
@@ -1405,7 +1405,7 @@
   </p:cSld>
   <p:clrMap bg1="lt1" tx1="dk1" bg2="lt2" tx2="dk2" accent1="accent1" accent2="accent2" accent3="accent3" accent4="accent4" accent5="accent5" accent6="accent6" hlink="hlink" folHlink="folHlink"/>
   <p:sldLayoutIdLst>
-    <p:sldLayoutId xmlns:r="http://schemas.openxmlformats.org/officeDocument/2006/relationships" id="2147483649" r:id="R9c27e470e8ab477f"/>
+    <p:sldLayoutId xmlns:r="http://schemas.openxmlformats.org/officeDocument/2006/relationships" id="2147483649" r:id="R2f3dcdada9174ca1"/>
   </p:sldLayoutIdLst>
   <p:txStyles>
     <p:titleStyle>
@@ -1956,7 +1956,7 @@
           <p:cNvPr id="1" name="">
             <a:extLst xmlns:a="http://schemas.openxmlformats.org/drawingml/2006/main">
               <a:ext uri="{FF2B5EF4-FFF2-40B4-BE49-F238E27FC236}">
-                <a16:creationId xmlns:a16="http://schemas.microsoft.com/office/drawing/2014/main" id="{0AC4F07F-17C1-4A53-984D-B3815E5329C7}"/>
+                <a16:creationId xmlns:a16="http://schemas.microsoft.com/office/drawing/2014/main" id="{4BCFD994-D3A8-44B5-851F-5CEC93081D9C}"/>
               </a:ext>
             </a:extLst>
           </p:cNvPr>
@@ -1987,7 +1987,7 @@
           <p:cNvPr id="2" name="">
             <a:extLst xmlns:a="http://schemas.openxmlformats.org/drawingml/2006/main">
               <a:ext uri="{FF2B5EF4-FFF2-40B4-BE49-F238E27FC236}">
-                <a16:creationId xmlns:a16="http://schemas.microsoft.com/office/drawing/2014/main" id="{870EAC63-385F-4080-BAFF-1CC0C85078D5}"/>
+                <a16:creationId xmlns:a16="http://schemas.microsoft.com/office/drawing/2014/main" id="{436CB630-AC0D-416D-98A1-CE23AC3A70F3}"/>
               </a:ext>
             </a:extLst>
           </p:cNvPr>
@@ -2022,7 +2022,7 @@
           <p:nvPr/>
         </p:nvPicPr>
         <p:blipFill>
-          <a:blip xmlns:r="http://schemas.openxmlformats.org/officeDocument/2006/relationships" xmlns:a="http://schemas.openxmlformats.org/drawingml/2006/main" r:embed="Rce01c1e543334859"/>
+          <a:blip xmlns:r="http://schemas.openxmlformats.org/officeDocument/2006/relationships" xmlns:a="http://schemas.openxmlformats.org/drawingml/2006/main" r:embed="R85d4810ab63243ad"/>
           <a:srcRect xmlns:a="http://schemas.openxmlformats.org/drawingml/2006/main" l="0" t="11037" r="0" b="11037"/>
           <a:stretch xmlns:a="http://schemas.openxmlformats.org/drawingml/2006/main">
             <a:fillRect l="0" t="0" r="0" b="0"/>
@@ -2043,7 +2043,7 @@
           <p:cNvPr id="4" name="">
             <a:extLst xmlns:a="http://schemas.openxmlformats.org/drawingml/2006/main">
               <a:ext uri="{FF2B5EF4-FFF2-40B4-BE49-F238E27FC236}">
-                <a16:creationId xmlns:a16="http://schemas.microsoft.com/office/drawing/2014/main" id="{5011F944-6156-43DE-B41D-69C41166B7BA}"/>
+                <a16:creationId xmlns:a16="http://schemas.microsoft.com/office/drawing/2014/main" id="{4FEFB138-B965-4B30-9E1C-54ED6B8FC7E1}"/>
               </a:ext>
             </a:extLst>
           </p:cNvPr>
@@ -2078,7 +2078,7 @@
           <p:nvPr/>
         </p:nvPicPr>
         <p:blipFill>
-          <a:blip xmlns:r="http://schemas.openxmlformats.org/officeDocument/2006/relationships" xmlns:a="http://schemas.openxmlformats.org/drawingml/2006/main" r:embed="R88472fcca2d147f9"/>
+          <a:blip xmlns:r="http://schemas.openxmlformats.org/officeDocument/2006/relationships" xmlns:a="http://schemas.openxmlformats.org/drawingml/2006/main" r:embed="R470b3534e3ce4f11"/>
           <a:stretch xmlns:a="http://schemas.openxmlformats.org/drawingml/2006/main"/>
         </p:blipFill>
         <p:spPr>
@@ -2096,7 +2096,7 @@
           <p:cNvPr id="6" name="">
             <a:extLst xmlns:a="http://schemas.openxmlformats.org/drawingml/2006/main">
               <a:ext uri="{FF2B5EF4-FFF2-40B4-BE49-F238E27FC236}">
-                <a16:creationId xmlns:a16="http://schemas.microsoft.com/office/drawing/2014/main" id="{8B2D82B2-8DFC-4B5E-8E9D-A4DC1E2D4F81}"/>
+                <a16:creationId xmlns:a16="http://schemas.microsoft.com/office/drawing/2014/main" id="{EEAE2DC1-39EF-4CE2-BB59-5E0664B4178A}"/>
               </a:ext>
             </a:extLst>
           </p:cNvPr>
@@ -2146,7 +2146,7 @@
           <p:cNvPr id="7" name="">
             <a:extLst xmlns:a="http://schemas.openxmlformats.org/drawingml/2006/main">
               <a:ext uri="{FF2B5EF4-FFF2-40B4-BE49-F238E27FC236}">
-                <a16:creationId xmlns:a16="http://schemas.microsoft.com/office/drawing/2014/main" id="{35BEE5A3-0C12-412D-BBAD-2701DD353744}"/>
+                <a16:creationId xmlns:a16="http://schemas.microsoft.com/office/drawing/2014/main" id="{1649A08F-D069-4DF0-A2A8-A6055CC330CE}"/>
               </a:ext>
             </a:extLst>
           </p:cNvPr>
@@ -2196,7 +2196,7 @@
           <p:cNvPr id="8" name="">
             <a:extLst xmlns:a="http://schemas.openxmlformats.org/drawingml/2006/main">
               <a:ext uri="{FF2B5EF4-FFF2-40B4-BE49-F238E27FC236}">
-                <a16:creationId xmlns:a16="http://schemas.microsoft.com/office/drawing/2014/main" id="{3C587601-D4D6-471E-AB05-208625660B4C}"/>
+                <a16:creationId xmlns:a16="http://schemas.microsoft.com/office/drawing/2014/main" id="{DC1BD8CA-FF79-4923-9C7B-F7646A4A952E}"/>
               </a:ext>
             </a:extLst>
           </p:cNvPr>
@@ -2246,7 +2246,7 @@
           <p:cNvPr id="9" name="">
             <a:extLst xmlns:a="http://schemas.openxmlformats.org/drawingml/2006/main">
               <a:ext uri="{FF2B5EF4-FFF2-40B4-BE49-F238E27FC236}">
-                <a16:creationId xmlns:a16="http://schemas.microsoft.com/office/drawing/2014/main" id="{44C35822-2E31-42A1-8B68-395839791C99}"/>
+                <a16:creationId xmlns:a16="http://schemas.microsoft.com/office/drawing/2014/main" id="{97D2C361-D15D-4859-8F7F-8F7438BF37E5}"/>
               </a:ext>
             </a:extLst>
           </p:cNvPr>
@@ -2281,7 +2281,7 @@
           <p:cNvPr id="10" name="">
             <a:extLst xmlns:a="http://schemas.openxmlformats.org/drawingml/2006/main">
               <a:ext uri="{FF2B5EF4-FFF2-40B4-BE49-F238E27FC236}">
-                <a16:creationId xmlns:a16="http://schemas.microsoft.com/office/drawing/2014/main" id="{78702D17-C65B-4AEF-A94B-827933298E12}"/>
+                <a16:creationId xmlns:a16="http://schemas.microsoft.com/office/drawing/2014/main" id="{EC5952AB-A482-442A-9AF6-66BBE7742F3D}"/>
               </a:ext>
             </a:extLst>
           </p:cNvPr>
@@ -2331,7 +2331,7 @@
           <p:cNvPr id="11" name="">
             <a:extLst xmlns:a="http://schemas.openxmlformats.org/drawingml/2006/main">
               <a:ext uri="{FF2B5EF4-FFF2-40B4-BE49-F238E27FC236}">
-                <a16:creationId xmlns:a16="http://schemas.microsoft.com/office/drawing/2014/main" id="{65F67304-7F61-481D-A75F-41BA5CCE0AF7}"/>
+                <a16:creationId xmlns:a16="http://schemas.microsoft.com/office/drawing/2014/main" id="{166E3A16-3ADC-4977-9C60-BABCB18AB619}"/>
               </a:ext>
             </a:extLst>
           </p:cNvPr>
@@ -2381,7 +2381,7 @@
           <p:cNvPr id="12" name="">
             <a:extLst xmlns:a="http://schemas.openxmlformats.org/drawingml/2006/main">
               <a:ext uri="{FF2B5EF4-FFF2-40B4-BE49-F238E27FC236}">
-                <a16:creationId xmlns:a16="http://schemas.microsoft.com/office/drawing/2014/main" id="{1D2E329B-F074-401D-B5AB-33225D7C7319}"/>
+                <a16:creationId xmlns:a16="http://schemas.microsoft.com/office/drawing/2014/main" id="{8D326307-7FA2-4AEE-9417-3F8A6FD87531}"/>
               </a:ext>
             </a:extLst>
           </p:cNvPr>
@@ -2416,7 +2416,7 @@
           <p:cNvPr id="13" name="">
             <a:extLst xmlns:a="http://schemas.openxmlformats.org/drawingml/2006/main">
               <a:ext uri="{FF2B5EF4-FFF2-40B4-BE49-F238E27FC236}">
-                <a16:creationId xmlns:a16="http://schemas.microsoft.com/office/drawing/2014/main" id="{5FD021D4-D507-40CC-BB19-2D65CEEE0B93}"/>
+                <a16:creationId xmlns:a16="http://schemas.microsoft.com/office/drawing/2014/main" id="{EA67AC39-634E-4341-BBE3-94F10B81BE4C}"/>
               </a:ext>
             </a:extLst>
           </p:cNvPr>
@@ -2466,7 +2466,7 @@
           <p:cNvPr id="14" name="">
             <a:extLst xmlns:a="http://schemas.openxmlformats.org/drawingml/2006/main">
               <a:ext uri="{FF2B5EF4-FFF2-40B4-BE49-F238E27FC236}">
-                <a16:creationId xmlns:a16="http://schemas.microsoft.com/office/drawing/2014/main" id="{16FC91A8-C4ED-4D25-8E84-4BA232B1CA5A}"/>
+                <a16:creationId xmlns:a16="http://schemas.microsoft.com/office/drawing/2014/main" id="{EFDF2D94-08E9-440E-B5A7-C3CAFE804AE8}"/>
               </a:ext>
             </a:extLst>
           </p:cNvPr>
@@ -2516,7 +2516,7 @@
           <p:cNvPr id="15" name="">
             <a:extLst xmlns:a="http://schemas.openxmlformats.org/drawingml/2006/main">
               <a:ext uri="{FF2B5EF4-FFF2-40B4-BE49-F238E27FC236}">
-                <a16:creationId xmlns:a16="http://schemas.microsoft.com/office/drawing/2014/main" id="{BAF1FC26-ADFF-4CBC-B957-0FB00FFAEFC4}"/>
+                <a16:creationId xmlns:a16="http://schemas.microsoft.com/office/drawing/2014/main" id="{AFFB74C4-1F38-41F5-8618-141CA04824EE}"/>
               </a:ext>
             </a:extLst>
           </p:cNvPr>
@@ -2566,7 +2566,7 @@
           <p:cNvPr id="16" name="">
             <a:extLst xmlns:a="http://schemas.openxmlformats.org/drawingml/2006/main">
               <a:ext uri="{FF2B5EF4-FFF2-40B4-BE49-F238E27FC236}">
-                <a16:creationId xmlns:a16="http://schemas.microsoft.com/office/drawing/2014/main" id="{D53D98D0-2804-45C2-A34F-1D79A061471A}"/>
+                <a16:creationId xmlns:a16="http://schemas.microsoft.com/office/drawing/2014/main" id="{73E89E6B-EFAB-4F0D-8752-AC0B32DCA9EB}"/>
               </a:ext>
             </a:extLst>
           </p:cNvPr>
@@ -2614,7 +2614,7 @@
     </p:spTree>
     <p:extLst>
       <p:ext uri="{BB962C8B-B14F-4D97-AF65-F5344CB8AC3E}">
-        <p14:creationId xmlns:p14="http://schemas.microsoft.com/office/powerpoint/2010/main" val="796399684"/>
+        <p14:creationId xmlns:p14="http://schemas.microsoft.com/office/powerpoint/2010/main" val="1365010904"/>
       </p:ext>
     </p:extLst>
   </p:cSld>
@@ -2645,7 +2645,7 @@
           <p:cNvPr id="1" name="">
             <a:extLst xmlns:a="http://schemas.openxmlformats.org/drawingml/2006/main">
               <a:ext uri="{FF2B5EF4-FFF2-40B4-BE49-F238E27FC236}">
-                <a16:creationId xmlns:a16="http://schemas.microsoft.com/office/drawing/2014/main" id="{D03F4900-501E-4FC9-856A-F948CF4C13C6}"/>
+                <a16:creationId xmlns:a16="http://schemas.microsoft.com/office/drawing/2014/main" id="{0B9F86F7-3180-4120-AFA3-D4518E000C65}"/>
               </a:ext>
             </a:extLst>
           </p:cNvPr>
@@ -2680,7 +2680,7 @@
           <p:nvPr/>
         </p:nvPicPr>
         <p:blipFill>
-          <a:blip xmlns:r="http://schemas.openxmlformats.org/officeDocument/2006/relationships" xmlns:a="http://schemas.openxmlformats.org/drawingml/2006/main" r:embed="Rf4de30e079024ecc"/>
+          <a:blip xmlns:r="http://schemas.openxmlformats.org/officeDocument/2006/relationships" xmlns:a="http://schemas.openxmlformats.org/drawingml/2006/main" r:embed="Rf101702623fe44e6"/>
           <a:stretch xmlns:a="http://schemas.openxmlformats.org/drawingml/2006/main"/>
         </p:blipFill>
         <p:spPr>
@@ -2698,7 +2698,7 @@
           <p:cNvPr id="3" name="">
             <a:extLst xmlns:a="http://schemas.openxmlformats.org/drawingml/2006/main">
               <a:ext uri="{FF2B5EF4-FFF2-40B4-BE49-F238E27FC236}">
-                <a16:creationId xmlns:a16="http://schemas.microsoft.com/office/drawing/2014/main" id="{AF0F6348-490E-41BC-807B-07114E9BB11C}"/>
+                <a16:creationId xmlns:a16="http://schemas.microsoft.com/office/drawing/2014/main" id="{8D7F9245-4653-4B66-826A-5D403A78DBD0}"/>
               </a:ext>
             </a:extLst>
           </p:cNvPr>
@@ -2748,7 +2748,7 @@
           <p:cNvPr id="4" name="">
             <a:extLst xmlns:a="http://schemas.openxmlformats.org/drawingml/2006/main">
               <a:ext uri="{FF2B5EF4-FFF2-40B4-BE49-F238E27FC236}">
-                <a16:creationId xmlns:a16="http://schemas.microsoft.com/office/drawing/2014/main" id="{A1F5925B-A2C8-41DE-A777-035178F2ADAF}"/>
+                <a16:creationId xmlns:a16="http://schemas.microsoft.com/office/drawing/2014/main" id="{21586675-3B25-4382-BE52-B7C8B66A6320}"/>
               </a:ext>
             </a:extLst>
           </p:cNvPr>
@@ -2781,7 +2781,7 @@
           <p:cNvPr id="5" name="">
             <a:extLst xmlns:a="http://schemas.openxmlformats.org/drawingml/2006/main">
               <a:ext uri="{FF2B5EF4-FFF2-40B4-BE49-F238E27FC236}">
-                <a16:creationId xmlns:a16="http://schemas.microsoft.com/office/drawing/2014/main" id="{6EE5DE98-B52C-493D-A7B6-FB5640E74161}"/>
+                <a16:creationId xmlns:a16="http://schemas.microsoft.com/office/drawing/2014/main" id="{53B60340-E1DB-4FE1-9716-2104E12633B1}"/>
               </a:ext>
             </a:extLst>
           </p:cNvPr>
@@ -2812,7 +2812,7 @@
           <p:cNvPr id="6" name="">
             <a:extLst xmlns:a="http://schemas.openxmlformats.org/drawingml/2006/main">
               <a:ext uri="{FF2B5EF4-FFF2-40B4-BE49-F238E27FC236}">
-                <a16:creationId xmlns:a16="http://schemas.microsoft.com/office/drawing/2014/main" id="{14F95574-1BF1-498C-85C6-3808930EF052}"/>
+                <a16:creationId xmlns:a16="http://schemas.microsoft.com/office/drawing/2014/main" id="{65D2D70C-FFD5-4999-ABF5-A97A397DFBCD}"/>
               </a:ext>
             </a:extLst>
           </p:cNvPr>
@@ -2862,7 +2862,7 @@
           <p:cNvPr id="7" name="">
             <a:extLst xmlns:a="http://schemas.openxmlformats.org/drawingml/2006/main">
               <a:ext uri="{FF2B5EF4-FFF2-40B4-BE49-F238E27FC236}">
-                <a16:creationId xmlns:a16="http://schemas.microsoft.com/office/drawing/2014/main" id="{CBDEDB6B-74E6-43FF-B7A0-4C304F856C07}"/>
+                <a16:creationId xmlns:a16="http://schemas.microsoft.com/office/drawing/2014/main" id="{33B4022F-0EAE-4ED8-A6CC-04F79497AD2C}"/>
               </a:ext>
             </a:extLst>
           </p:cNvPr>
@@ -2912,7 +2912,7 @@
           <p:cNvPr id="8" name="">
             <a:extLst xmlns:a="http://schemas.openxmlformats.org/drawingml/2006/main">
               <a:ext uri="{FF2B5EF4-FFF2-40B4-BE49-F238E27FC236}">
-                <a16:creationId xmlns:a16="http://schemas.microsoft.com/office/drawing/2014/main" id="{B1ED250D-0EE4-4C0D-B0C3-93866AA5F27F}"/>
+                <a16:creationId xmlns:a16="http://schemas.microsoft.com/office/drawing/2014/main" id="{77DC68F7-983B-4461-9892-0BFDBCDF0860}"/>
               </a:ext>
             </a:extLst>
           </p:cNvPr>
@@ -2947,7 +2947,7 @@
           <p:cNvPr id="9" name="">
             <a:extLst xmlns:a="http://schemas.openxmlformats.org/drawingml/2006/main">
               <a:ext uri="{FF2B5EF4-FFF2-40B4-BE49-F238E27FC236}">
-                <a16:creationId xmlns:a16="http://schemas.microsoft.com/office/drawing/2014/main" id="{BFDF393A-64AF-47FB-9E65-BB2D35AA4220}"/>
+                <a16:creationId xmlns:a16="http://schemas.microsoft.com/office/drawing/2014/main" id="{C1BC0898-2706-4F93-ABD7-7E566AA3D794}"/>
               </a:ext>
             </a:extLst>
           </p:cNvPr>
@@ -2980,7 +2980,7 @@
           <p:cNvPr id="10" name="">
             <a:extLst xmlns:a="http://schemas.openxmlformats.org/drawingml/2006/main">
               <a:ext uri="{FF2B5EF4-FFF2-40B4-BE49-F238E27FC236}">
-                <a16:creationId xmlns:a16="http://schemas.microsoft.com/office/drawing/2014/main" id="{EE79DC58-9EF0-4EE3-A27A-8E29BD5FA726}"/>
+                <a16:creationId xmlns:a16="http://schemas.microsoft.com/office/drawing/2014/main" id="{79B05C82-EFC5-4D1D-A680-330559AE2DED}"/>
               </a:ext>
             </a:extLst>
           </p:cNvPr>
@@ -3030,7 +3030,7 @@
           <p:cNvPr id="11" name="">
             <a:extLst xmlns:a="http://schemas.openxmlformats.org/drawingml/2006/main">
               <a:ext uri="{FF2B5EF4-FFF2-40B4-BE49-F238E27FC236}">
-                <a16:creationId xmlns:a16="http://schemas.microsoft.com/office/drawing/2014/main" id="{662DB09D-E39C-42A3-9601-007317BE7F19}"/>
+                <a16:creationId xmlns:a16="http://schemas.microsoft.com/office/drawing/2014/main" id="{EF8C3235-EDA1-48F3-93B4-EAB9CF0214D6}"/>
               </a:ext>
             </a:extLst>
           </p:cNvPr>
@@ -3080,7 +3080,7 @@
           <p:cNvPr id="12" name="">
             <a:extLst xmlns:a="http://schemas.openxmlformats.org/drawingml/2006/main">
               <a:ext uri="{FF2B5EF4-FFF2-40B4-BE49-F238E27FC236}">
-                <a16:creationId xmlns:a16="http://schemas.microsoft.com/office/drawing/2014/main" id="{89A269D8-AF5A-4A22-8B65-3042BFF7499E}"/>
+                <a16:creationId xmlns:a16="http://schemas.microsoft.com/office/drawing/2014/main" id="{3CC0F641-107A-4BAA-92B8-5C27327540B6}"/>
               </a:ext>
             </a:extLst>
           </p:cNvPr>
@@ -3130,7 +3130,7 @@
           <p:cNvPr id="13" name="">
             <a:extLst xmlns:a="http://schemas.openxmlformats.org/drawingml/2006/main">
               <a:ext uri="{FF2B5EF4-FFF2-40B4-BE49-F238E27FC236}">
-                <a16:creationId xmlns:a16="http://schemas.microsoft.com/office/drawing/2014/main" id="{54C6E8AF-B962-440B-8E25-FF7DA3B2F23D}"/>
+                <a16:creationId xmlns:a16="http://schemas.microsoft.com/office/drawing/2014/main" id="{43D920BE-5B0F-4E2D-86B4-2191EC3B2A5A}"/>
               </a:ext>
             </a:extLst>
           </p:cNvPr>
@@ -3180,7 +3180,7 @@
           <p:cNvPr id="14" name="">
             <a:extLst xmlns:a="http://schemas.openxmlformats.org/drawingml/2006/main">
               <a:ext uri="{FF2B5EF4-FFF2-40B4-BE49-F238E27FC236}">
-                <a16:creationId xmlns:a16="http://schemas.microsoft.com/office/drawing/2014/main" id="{A09A8A5F-7845-4A1E-9FAB-428EE7AC9B7D}"/>
+                <a16:creationId xmlns:a16="http://schemas.microsoft.com/office/drawing/2014/main" id="{2B3B5333-BBEF-4200-8F70-90482C697E82}"/>
               </a:ext>
             </a:extLst>
           </p:cNvPr>
@@ -3230,7 +3230,7 @@
           <p:cNvPr id="15" name="">
             <a:extLst xmlns:a="http://schemas.openxmlformats.org/drawingml/2006/main">
               <a:ext uri="{FF2B5EF4-FFF2-40B4-BE49-F238E27FC236}">
-                <a16:creationId xmlns:a16="http://schemas.microsoft.com/office/drawing/2014/main" id="{DCC7F4A9-2755-424D-A658-6A086CF76765}"/>
+                <a16:creationId xmlns:a16="http://schemas.microsoft.com/office/drawing/2014/main" id="{BB70C19B-2583-475F-A385-846E69A4A241}"/>
               </a:ext>
             </a:extLst>
           </p:cNvPr>
@@ -3280,7 +3280,7 @@
           <p:cNvPr id="16" name="">
             <a:extLst xmlns:a="http://schemas.openxmlformats.org/drawingml/2006/main">
               <a:ext uri="{FF2B5EF4-FFF2-40B4-BE49-F238E27FC236}">
-                <a16:creationId xmlns:a16="http://schemas.microsoft.com/office/drawing/2014/main" id="{2308CA34-AFF5-4C2C-A8AB-6284454DD389}"/>
+                <a16:creationId xmlns:a16="http://schemas.microsoft.com/office/drawing/2014/main" id="{8D7FBB3D-64A3-4630-AE32-AAAB19B0BA61}"/>
               </a:ext>
             </a:extLst>
           </p:cNvPr>
@@ -3330,7 +3330,7 @@
           <p:cNvPr id="17" name="">
             <a:extLst xmlns:a="http://schemas.openxmlformats.org/drawingml/2006/main">
               <a:ext uri="{FF2B5EF4-FFF2-40B4-BE49-F238E27FC236}">
-                <a16:creationId xmlns:a16="http://schemas.microsoft.com/office/drawing/2014/main" id="{6EB6616D-DE17-497C-8032-B3E2D02B75FF}"/>
+                <a16:creationId xmlns:a16="http://schemas.microsoft.com/office/drawing/2014/main" id="{E19E67BB-8167-4E3C-B1F7-FD9B67B9F93A}"/>
               </a:ext>
             </a:extLst>
           </p:cNvPr>
@@ -3361,7 +3361,7 @@
           <p:cNvPr id="18" name="">
             <a:extLst xmlns:a="http://schemas.openxmlformats.org/drawingml/2006/main">
               <a:ext uri="{FF2B5EF4-FFF2-40B4-BE49-F238E27FC236}">
-                <a16:creationId xmlns:a16="http://schemas.microsoft.com/office/drawing/2014/main" id="{8621C956-2E76-40F2-9CF3-37BB98ED33E6}"/>
+                <a16:creationId xmlns:a16="http://schemas.microsoft.com/office/drawing/2014/main" id="{2AA0ADC7-DCFC-48D6-9EF9-92207F6606D7}"/>
               </a:ext>
             </a:extLst>
           </p:cNvPr>
@@ -3411,7 +3411,7 @@
           <p:cNvPr id="19" name="">
             <a:extLst xmlns:a="http://schemas.openxmlformats.org/drawingml/2006/main">
               <a:ext uri="{FF2B5EF4-FFF2-40B4-BE49-F238E27FC236}">
-                <a16:creationId xmlns:a16="http://schemas.microsoft.com/office/drawing/2014/main" id="{237E2D48-3C03-4201-9A99-AFB8B54D4923}"/>
+                <a16:creationId xmlns:a16="http://schemas.microsoft.com/office/drawing/2014/main" id="{455CAE30-DFC9-473C-A0ED-0F91D656B153}"/>
               </a:ext>
             </a:extLst>
           </p:cNvPr>
@@ -3461,7 +3461,7 @@
           <p:cNvPr id="20" name="">
             <a:extLst xmlns:a="http://schemas.openxmlformats.org/drawingml/2006/main">
               <a:ext uri="{FF2B5EF4-FFF2-40B4-BE49-F238E27FC236}">
-                <a16:creationId xmlns:a16="http://schemas.microsoft.com/office/drawing/2014/main" id="{E2435778-60CB-4768-B551-DB4E6F2F5934}"/>
+                <a16:creationId xmlns:a16="http://schemas.microsoft.com/office/drawing/2014/main" id="{767408C7-C72E-4C5E-8CCB-8B4C995FCA64}"/>
               </a:ext>
             </a:extLst>
           </p:cNvPr>
@@ -3511,7 +3511,7 @@
           <p:cNvPr id="21" name="">
             <a:extLst xmlns:a="http://schemas.openxmlformats.org/drawingml/2006/main">
               <a:ext uri="{FF2B5EF4-FFF2-40B4-BE49-F238E27FC236}">
-                <a16:creationId xmlns:a16="http://schemas.microsoft.com/office/drawing/2014/main" id="{8B9C1981-E634-4952-AE9B-72CED6B8AF3F}"/>
+                <a16:creationId xmlns:a16="http://schemas.microsoft.com/office/drawing/2014/main" id="{B85A2870-97CF-4CAA-8E35-613993EFC2F1}"/>
               </a:ext>
             </a:extLst>
           </p:cNvPr>
@@ -3561,7 +3561,7 @@
           <p:cNvPr id="22" name="">
             <a:extLst xmlns:a="http://schemas.openxmlformats.org/drawingml/2006/main">
               <a:ext uri="{FF2B5EF4-FFF2-40B4-BE49-F238E27FC236}">
-                <a16:creationId xmlns:a16="http://schemas.microsoft.com/office/drawing/2014/main" id="{2E17A7E5-41DC-46AE-84F6-E06E464D41F4}"/>
+                <a16:creationId xmlns:a16="http://schemas.microsoft.com/office/drawing/2014/main" id="{2C3A24B6-733A-4DF0-AD53-92A302ECA01F}"/>
               </a:ext>
             </a:extLst>
           </p:cNvPr>
@@ -3611,7 +3611,7 @@
           <p:cNvPr id="23" name="">
             <a:extLst xmlns:a="http://schemas.openxmlformats.org/drawingml/2006/main">
               <a:ext uri="{FF2B5EF4-FFF2-40B4-BE49-F238E27FC236}">
-                <a16:creationId xmlns:a16="http://schemas.microsoft.com/office/drawing/2014/main" id="{5B5C4703-07F5-4010-843E-0C3DD0251CB1}"/>
+                <a16:creationId xmlns:a16="http://schemas.microsoft.com/office/drawing/2014/main" id="{E731190D-A255-4B42-9AC0-3768DFBA19BC}"/>
               </a:ext>
             </a:extLst>
           </p:cNvPr>
@@ -3661,7 +3661,7 @@
           <p:cNvPr id="24" name="">
             <a:extLst xmlns:a="http://schemas.openxmlformats.org/drawingml/2006/main">
               <a:ext uri="{FF2B5EF4-FFF2-40B4-BE49-F238E27FC236}">
-                <a16:creationId xmlns:a16="http://schemas.microsoft.com/office/drawing/2014/main" id="{84BD99BC-C867-433B-A669-3311119FF908}"/>
+                <a16:creationId xmlns:a16="http://schemas.microsoft.com/office/drawing/2014/main" id="{CDAE6698-449B-4E11-A00F-5FC8B54C4779}"/>
               </a:ext>
             </a:extLst>
           </p:cNvPr>
@@ -3696,7 +3696,7 @@
           <p:cNvPr id="25" name="">
             <a:extLst xmlns:a="http://schemas.openxmlformats.org/drawingml/2006/main">
               <a:ext uri="{FF2B5EF4-FFF2-40B4-BE49-F238E27FC236}">
-                <a16:creationId xmlns:a16="http://schemas.microsoft.com/office/drawing/2014/main" id="{D47F00BC-3975-4209-9556-466554DF4EF1}"/>
+                <a16:creationId xmlns:a16="http://schemas.microsoft.com/office/drawing/2014/main" id="{8B1BD5D1-4B03-47E0-8F46-3F036ECE060D}"/>
               </a:ext>
             </a:extLst>
           </p:cNvPr>
@@ -3729,7 +3729,7 @@
           <p:cNvPr id="26" name="">
             <a:extLst xmlns:a="http://schemas.openxmlformats.org/drawingml/2006/main">
               <a:ext uri="{FF2B5EF4-FFF2-40B4-BE49-F238E27FC236}">
-                <a16:creationId xmlns:a16="http://schemas.microsoft.com/office/drawing/2014/main" id="{21D6F31F-8FAC-4D9B-AA80-0D9D9ABD66AA}"/>
+                <a16:creationId xmlns:a16="http://schemas.microsoft.com/office/drawing/2014/main" id="{F1407524-6733-45A5-A9CA-1CDC397115C4}"/>
               </a:ext>
             </a:extLst>
           </p:cNvPr>
@@ -3779,7 +3779,7 @@
           <p:cNvPr id="27" name="">
             <a:extLst xmlns:a="http://schemas.openxmlformats.org/drawingml/2006/main">
               <a:ext uri="{FF2B5EF4-FFF2-40B4-BE49-F238E27FC236}">
-                <a16:creationId xmlns:a16="http://schemas.microsoft.com/office/drawing/2014/main" id="{2ED0C140-807E-4378-984D-B42B95784352}"/>
+                <a16:creationId xmlns:a16="http://schemas.microsoft.com/office/drawing/2014/main" id="{55B92D38-8ECA-4A57-9A39-9B3426E2A4F5}"/>
               </a:ext>
             </a:extLst>
           </p:cNvPr>
@@ -3829,7 +3829,7 @@
           <p:cNvPr id="28" name="">
             <a:extLst xmlns:a="http://schemas.openxmlformats.org/drawingml/2006/main">
               <a:ext uri="{FF2B5EF4-FFF2-40B4-BE49-F238E27FC236}">
-                <a16:creationId xmlns:a16="http://schemas.microsoft.com/office/drawing/2014/main" id="{90D4AB45-3E4F-4AA3-B9E7-7A46A02650AA}"/>
+                <a16:creationId xmlns:a16="http://schemas.microsoft.com/office/drawing/2014/main" id="{10508745-3C7E-42CB-B8C6-EB620879E038}"/>
               </a:ext>
             </a:extLst>
           </p:cNvPr>
@@ -3879,7 +3879,7 @@
           <p:cNvPr id="29" name="">
             <a:extLst xmlns:a="http://schemas.openxmlformats.org/drawingml/2006/main">
               <a:ext uri="{FF2B5EF4-FFF2-40B4-BE49-F238E27FC236}">
-                <a16:creationId xmlns:a16="http://schemas.microsoft.com/office/drawing/2014/main" id="{84AC7D45-A6F5-4272-8B49-15E564A566F7}"/>
+                <a16:creationId xmlns:a16="http://schemas.microsoft.com/office/drawing/2014/main" id="{A3DC3661-2DFB-43FE-B4DC-1ABB32FAE15E}"/>
               </a:ext>
             </a:extLst>
           </p:cNvPr>
@@ -3929,7 +3929,7 @@
           <p:cNvPr id="30" name="">
             <a:extLst xmlns:a="http://schemas.openxmlformats.org/drawingml/2006/main">
               <a:ext uri="{FF2B5EF4-FFF2-40B4-BE49-F238E27FC236}">
-                <a16:creationId xmlns:a16="http://schemas.microsoft.com/office/drawing/2014/main" id="{A9C1953B-F773-4D3A-B96A-CA61F96CE191}"/>
+                <a16:creationId xmlns:a16="http://schemas.microsoft.com/office/drawing/2014/main" id="{01047A1B-C477-4209-900F-729EA13B9CE0}"/>
               </a:ext>
             </a:extLst>
           </p:cNvPr>
@@ -3979,7 +3979,7 @@
           <p:cNvPr id="31" name="">
             <a:extLst xmlns:a="http://schemas.openxmlformats.org/drawingml/2006/main">
               <a:ext uri="{FF2B5EF4-FFF2-40B4-BE49-F238E27FC236}">
-                <a16:creationId xmlns:a16="http://schemas.microsoft.com/office/drawing/2014/main" id="{3472AA6A-BBE9-41C3-A7E7-89A1270666E3}"/>
+                <a16:creationId xmlns:a16="http://schemas.microsoft.com/office/drawing/2014/main" id="{72828C0D-022D-4D35-9BCE-895D0C712A39}"/>
               </a:ext>
             </a:extLst>
           </p:cNvPr>
@@ -4029,7 +4029,7 @@
           <p:cNvPr id="32" name="">
             <a:extLst xmlns:a="http://schemas.openxmlformats.org/drawingml/2006/main">
               <a:ext uri="{FF2B5EF4-FFF2-40B4-BE49-F238E27FC236}">
-                <a16:creationId xmlns:a16="http://schemas.microsoft.com/office/drawing/2014/main" id="{CDCCAEB3-6DBD-43D7-99AD-321D4C454E5D}"/>
+                <a16:creationId xmlns:a16="http://schemas.microsoft.com/office/drawing/2014/main" id="{61F6164B-8DCF-4A75-8B65-3382422F14C2}"/>
               </a:ext>
             </a:extLst>
           </p:cNvPr>
@@ -4079,7 +4079,7 @@
           <p:cNvPr id="33" name="">
             <a:extLst xmlns:a="http://schemas.openxmlformats.org/drawingml/2006/main">
               <a:ext uri="{FF2B5EF4-FFF2-40B4-BE49-F238E27FC236}">
-                <a16:creationId xmlns:a16="http://schemas.microsoft.com/office/drawing/2014/main" id="{9153C490-6A1D-4D0A-9693-E26D7358F339}"/>
+                <a16:creationId xmlns:a16="http://schemas.microsoft.com/office/drawing/2014/main" id="{5EB116C0-17CF-4A7E-9F27-A0661650C5EE}"/>
               </a:ext>
             </a:extLst>
           </p:cNvPr>
@@ -4110,7 +4110,7 @@
           <p:cNvPr id="34" name="">
             <a:extLst xmlns:a="http://schemas.openxmlformats.org/drawingml/2006/main">
               <a:ext uri="{FF2B5EF4-FFF2-40B4-BE49-F238E27FC236}">
-                <a16:creationId xmlns:a16="http://schemas.microsoft.com/office/drawing/2014/main" id="{C5BD69D7-B9D3-40B3-9A68-722C725334E1}"/>
+                <a16:creationId xmlns:a16="http://schemas.microsoft.com/office/drawing/2014/main" id="{22B5D5E1-5729-4107-9AC2-DE0AF91CA1E0}"/>
               </a:ext>
             </a:extLst>
           </p:cNvPr>
@@ -4160,7 +4160,7 @@
           <p:cNvPr id="35" name="">
             <a:extLst xmlns:a="http://schemas.openxmlformats.org/drawingml/2006/main">
               <a:ext uri="{FF2B5EF4-FFF2-40B4-BE49-F238E27FC236}">
-                <a16:creationId xmlns:a16="http://schemas.microsoft.com/office/drawing/2014/main" id="{72D4A0AA-5B08-498F-B6A6-D973E4554BEB}"/>
+                <a16:creationId xmlns:a16="http://schemas.microsoft.com/office/drawing/2014/main" id="{9EAE72CB-BF4E-420C-BF3A-E6F4AE05941E}"/>
               </a:ext>
             </a:extLst>
           </p:cNvPr>
@@ -4210,7 +4210,7 @@
           <p:cNvPr id="36" name="">
             <a:extLst xmlns:a="http://schemas.openxmlformats.org/drawingml/2006/main">
               <a:ext uri="{FF2B5EF4-FFF2-40B4-BE49-F238E27FC236}">
-                <a16:creationId xmlns:a16="http://schemas.microsoft.com/office/drawing/2014/main" id="{1E2CF958-2C87-42DF-9128-F2B233BB15B7}"/>
+                <a16:creationId xmlns:a16="http://schemas.microsoft.com/office/drawing/2014/main" id="{95747773-D27D-40F3-B047-8DA874250243}"/>
               </a:ext>
             </a:extLst>
           </p:cNvPr>
@@ -4260,7 +4260,7 @@
           <p:cNvPr id="37" name="">
             <a:extLst xmlns:a="http://schemas.openxmlformats.org/drawingml/2006/main">
               <a:ext uri="{FF2B5EF4-FFF2-40B4-BE49-F238E27FC236}">
-                <a16:creationId xmlns:a16="http://schemas.microsoft.com/office/drawing/2014/main" id="{D3BF21A4-77E1-4BED-B496-0E74E69C0775}"/>
+                <a16:creationId xmlns:a16="http://schemas.microsoft.com/office/drawing/2014/main" id="{BD828791-9A72-4AAF-A352-70CD606BE417}"/>
               </a:ext>
             </a:extLst>
           </p:cNvPr>
@@ -4310,7 +4310,7 @@
           <p:cNvPr id="38" name="">
             <a:extLst xmlns:a="http://schemas.openxmlformats.org/drawingml/2006/main">
               <a:ext uri="{FF2B5EF4-FFF2-40B4-BE49-F238E27FC236}">
-                <a16:creationId xmlns:a16="http://schemas.microsoft.com/office/drawing/2014/main" id="{98422129-99DE-42EA-8C1F-B4104EF4BC3C}"/>
+                <a16:creationId xmlns:a16="http://schemas.microsoft.com/office/drawing/2014/main" id="{4A7FA05A-D014-43DE-94A3-ED0857E72D48}"/>
               </a:ext>
             </a:extLst>
           </p:cNvPr>
@@ -4360,7 +4360,7 @@
           <p:cNvPr id="39" name="">
             <a:extLst xmlns:a="http://schemas.openxmlformats.org/drawingml/2006/main">
               <a:ext uri="{FF2B5EF4-FFF2-40B4-BE49-F238E27FC236}">
-                <a16:creationId xmlns:a16="http://schemas.microsoft.com/office/drawing/2014/main" id="{668AF536-C932-4C78-8D0C-FFEACA49A5DA}"/>
+                <a16:creationId xmlns:a16="http://schemas.microsoft.com/office/drawing/2014/main" id="{C8A92931-C91B-415D-B106-2AAD2950F1B8}"/>
               </a:ext>
             </a:extLst>
           </p:cNvPr>
@@ -4408,7 +4408,7 @@
     </p:spTree>
     <p:extLst>
       <p:ext uri="{BB962C8B-B14F-4D97-AF65-F5344CB8AC3E}">
-        <p14:creationId xmlns:p14="http://schemas.microsoft.com/office/powerpoint/2010/main" val="1879660419"/>
+        <p14:creationId xmlns:p14="http://schemas.microsoft.com/office/powerpoint/2010/main" val="591946797"/>
       </p:ext>
     </p:extLst>
   </p:cSld>
@@ -4439,7 +4439,7 @@
           <p:cNvPr id="1" name="">
             <a:extLst xmlns:a="http://schemas.openxmlformats.org/drawingml/2006/main">
               <a:ext uri="{FF2B5EF4-FFF2-40B4-BE49-F238E27FC236}">
-                <a16:creationId xmlns:a16="http://schemas.microsoft.com/office/drawing/2014/main" id="{D1ADE308-4427-47F3-BD76-FB56008EF628}"/>
+                <a16:creationId xmlns:a16="http://schemas.microsoft.com/office/drawing/2014/main" id="{84BD784B-EAAA-41AE-8468-1F8D6AC966DD}"/>
               </a:ext>
             </a:extLst>
           </p:cNvPr>
@@ -4467,14 +4467,14 @@
       </p:sp>
       <p:pic>
         <p:nvPicPr>
-          <p:cNvPr id="46" name=""/>
+          <p:cNvPr id="47" name=""/>
           <p:cNvPicPr>
             <a:picLocks xmlns:a="http://schemas.openxmlformats.org/drawingml/2006/main" noChangeAspect="1"/>
           </p:cNvPicPr>
           <p:nvPr/>
         </p:nvPicPr>
         <p:blipFill>
-          <a:blip xmlns:r="http://schemas.openxmlformats.org/officeDocument/2006/relationships" xmlns:a="http://schemas.openxmlformats.org/drawingml/2006/main" r:embed="Ra5e1e44a3fea483c"/>
+          <a:blip xmlns:r="http://schemas.openxmlformats.org/officeDocument/2006/relationships" xmlns:a="http://schemas.openxmlformats.org/drawingml/2006/main" r:embed="R48d8fca5b2764ba7"/>
           <a:stretch xmlns:a="http://schemas.openxmlformats.org/drawingml/2006/main"/>
         </p:blipFill>
         <p:spPr>
@@ -4492,7 +4492,7 @@
           <p:cNvPr id="3" name="">
             <a:extLst xmlns:a="http://schemas.openxmlformats.org/drawingml/2006/main">
               <a:ext uri="{FF2B5EF4-FFF2-40B4-BE49-F238E27FC236}">
-                <a16:creationId xmlns:a16="http://schemas.microsoft.com/office/drawing/2014/main" id="{AAFC4377-C9D1-48D2-91F2-445A0E58C1A8}"/>
+                <a16:creationId xmlns:a16="http://schemas.microsoft.com/office/drawing/2014/main" id="{9653AB26-2719-47DA-BE6F-5AB4CFBD0A36}"/>
               </a:ext>
             </a:extLst>
           </p:cNvPr>
@@ -4542,7 +4542,7 @@
           <p:cNvPr id="4" name="">
             <a:extLst xmlns:a="http://schemas.openxmlformats.org/drawingml/2006/main">
               <a:ext uri="{FF2B5EF4-FFF2-40B4-BE49-F238E27FC236}">
-                <a16:creationId xmlns:a16="http://schemas.microsoft.com/office/drawing/2014/main" id="{D2BBCE17-2EF5-4752-B194-5DA2A852E7FB}"/>
+                <a16:creationId xmlns:a16="http://schemas.microsoft.com/office/drawing/2014/main" id="{8A5B70C4-B8C8-4ED1-8C32-D75922CDAE7E}"/>
               </a:ext>
             </a:extLst>
           </p:cNvPr>
@@ -4575,7 +4575,7 @@
           <p:cNvPr id="5" name="">
             <a:extLst xmlns:a="http://schemas.openxmlformats.org/drawingml/2006/main">
               <a:ext uri="{FF2B5EF4-FFF2-40B4-BE49-F238E27FC236}">
-                <a16:creationId xmlns:a16="http://schemas.microsoft.com/office/drawing/2014/main" id="{67A018F8-40A7-4181-BB0A-5A5299C8986F}"/>
+                <a16:creationId xmlns:a16="http://schemas.microsoft.com/office/drawing/2014/main" id="{3F39CDE2-77C5-4317-8179-1B3AA7271525}"/>
               </a:ext>
             </a:extLst>
           </p:cNvPr>
@@ -4606,7 +4606,7 @@
           <p:cNvPr id="6" name="">
             <a:extLst xmlns:a="http://schemas.openxmlformats.org/drawingml/2006/main">
               <a:ext uri="{FF2B5EF4-FFF2-40B4-BE49-F238E27FC236}">
-                <a16:creationId xmlns:a16="http://schemas.microsoft.com/office/drawing/2014/main" id="{CC794758-6892-4363-BEF6-E41B0F7041E7}"/>
+                <a16:creationId xmlns:a16="http://schemas.microsoft.com/office/drawing/2014/main" id="{B14D7665-D4A1-4260-9981-AFBB281C724B}"/>
               </a:ext>
             </a:extLst>
           </p:cNvPr>
@@ -4656,7 +4656,7 @@
           <p:cNvPr id="7" name="">
             <a:extLst xmlns:a="http://schemas.openxmlformats.org/drawingml/2006/main">
               <a:ext uri="{FF2B5EF4-FFF2-40B4-BE49-F238E27FC236}">
-                <a16:creationId xmlns:a16="http://schemas.microsoft.com/office/drawing/2014/main" id="{E3558649-7F8C-4EB3-B88D-9CD99F0C6D14}"/>
+                <a16:creationId xmlns:a16="http://schemas.microsoft.com/office/drawing/2014/main" id="{64313E20-C0E5-43B8-B623-FA41E4B9D85E}"/>
               </a:ext>
             </a:extLst>
           </p:cNvPr>
@@ -4706,19 +4706,19 @@
           <p:cNvPr id="8" name="">
             <a:extLst xmlns:a="http://schemas.openxmlformats.org/drawingml/2006/main">
               <a:ext uri="{FF2B5EF4-FFF2-40B4-BE49-F238E27FC236}">
-                <a16:creationId xmlns:a16="http://schemas.microsoft.com/office/drawing/2014/main" id="{3B634AE4-765A-49C9-A967-679917FE267D}"/>
-              </a:ext>
-            </a:extLst>
-          </p:cNvPr>
-          <p:cNvSpPr>
-            <a:spLocks xmlns:a="http://schemas.openxmlformats.org/drawingml/2006/main" noGrp="1"/>
-          </p:cNvSpPr>
-          <p:nvPr/>
-        </p:nvSpPr>
-        <p:spPr>
-          <a:xfrm xmlns:a="http://schemas.openxmlformats.org/drawingml/2006/main">
-            <a:off x="552450" y="1352550"/>
-            <a:ext cx="10648950" cy="323850"/>
+                <a16:creationId xmlns:a16="http://schemas.microsoft.com/office/drawing/2014/main" id="{93D73E32-F6F0-484D-924E-7DE39206D874}"/>
+              </a:ext>
+            </a:extLst>
+          </p:cNvPr>
+          <p:cNvSpPr>
+            <a:spLocks xmlns:a="http://schemas.openxmlformats.org/drawingml/2006/main" noGrp="1"/>
+          </p:cNvSpPr>
+          <p:nvPr/>
+        </p:nvSpPr>
+        <p:spPr>
+          <a:xfrm xmlns:a="http://schemas.openxmlformats.org/drawingml/2006/main">
+            <a:off x="552450" y="1333500"/>
+            <a:ext cx="10648950" cy="285750"/>
           </a:xfrm>
           <a:prstGeom xmlns:a="http://schemas.openxmlformats.org/drawingml/2006/main" prst="rect">
             <a:avLst/>
@@ -4734,14 +4734,14 @@
           <a:lstStyle xmlns:a="http://schemas.openxmlformats.org/drawingml/2006/main"/>
           <a:p xmlns:a="http://schemas.openxmlformats.org/drawingml/2006/main">
             <a:pPr>
-              <a:defRPr sz="1350">
+              <a:defRPr sz="1275">
                 <a:solidFill>
                   <a:srgbClr val="667085"/>
                 </a:solidFill>
               </a:defRPr>
             </a:pPr>
             <a:r>
-              <a:rPr sz="1350">
+              <a:rPr sz="1275">
                 <a:solidFill>
                   <a:srgbClr val="667085"/>
                 </a:solidFill>
@@ -4756,19 +4756,19 @@
           <p:cNvPr id="9" name="">
             <a:extLst xmlns:a="http://schemas.openxmlformats.org/drawingml/2006/main">
               <a:ext uri="{FF2B5EF4-FFF2-40B4-BE49-F238E27FC236}">
-                <a16:creationId xmlns:a16="http://schemas.microsoft.com/office/drawing/2014/main" id="{F72224AA-32F1-4CD4-ADDC-98D457F24E44}"/>
-              </a:ext>
-            </a:extLst>
-          </p:cNvPr>
-          <p:cNvSpPr>
-            <a:spLocks xmlns:a="http://schemas.openxmlformats.org/drawingml/2006/main" noGrp="1"/>
-          </p:cNvSpPr>
-          <p:nvPr/>
-        </p:nvSpPr>
-        <p:spPr>
-          <a:xfrm xmlns:a="http://schemas.openxmlformats.org/drawingml/2006/main">
-            <a:off x="1428750" y="2152650"/>
-            <a:ext cx="8763000" cy="47625"/>
+                <a16:creationId xmlns:a16="http://schemas.microsoft.com/office/drawing/2014/main" id="{3973E15B-AFF6-4B94-8E00-720A8CE47A60}"/>
+              </a:ext>
+            </a:extLst>
+          </p:cNvPr>
+          <p:cNvSpPr>
+            <a:spLocks xmlns:a="http://schemas.openxmlformats.org/drawingml/2006/main" noGrp="1"/>
+          </p:cNvSpPr>
+          <p:nvPr/>
+        </p:nvSpPr>
+        <p:spPr>
+          <a:xfrm xmlns:a="http://schemas.openxmlformats.org/drawingml/2006/main">
+            <a:off x="847725" y="1943100"/>
+            <a:ext cx="38100" cy="3790950"/>
           </a:xfrm>
           <a:prstGeom xmlns:a="http://schemas.openxmlformats.org/drawingml/2006/main" prst="rect">
             <a:avLst/>
@@ -4787,69 +4787,19 @@
           <p:cNvPr id="10" name="">
             <a:extLst xmlns:a="http://schemas.openxmlformats.org/drawingml/2006/main">
               <a:ext uri="{FF2B5EF4-FFF2-40B4-BE49-F238E27FC236}">
-                <a16:creationId xmlns:a16="http://schemas.microsoft.com/office/drawing/2014/main" id="{10424101-FA58-4D5A-A7C3-D750ADC2ABCE}"/>
-              </a:ext>
-            </a:extLst>
-          </p:cNvPr>
-          <p:cNvSpPr>
-            <a:spLocks xmlns:a="http://schemas.openxmlformats.org/drawingml/2006/main" noGrp="1"/>
-          </p:cNvSpPr>
-          <p:nvPr/>
-        </p:nvSpPr>
-        <p:spPr>
-          <a:xfrm xmlns:a="http://schemas.openxmlformats.org/drawingml/2006/main">
-            <a:off x="552450" y="1752600"/>
-            <a:ext cx="3371850" cy="266700"/>
-          </a:xfrm>
-          <a:prstGeom xmlns:a="http://schemas.openxmlformats.org/drawingml/2006/main" prst="rect">
-            <a:avLst/>
-          </a:prstGeom>
-          <a:noFill xmlns:a="http://schemas.openxmlformats.org/drawingml/2006/main"/>
-          <a:ln xmlns:a="http://schemas.openxmlformats.org/drawingml/2006/main" w="0">
-            <a:noFill/>
-            <a:prstDash val="solid"/>
-          </a:ln>
-        </p:spPr>
-        <p:txBody>
-          <a:bodyPr xmlns:a="http://schemas.openxmlformats.org/drawingml/2006/main"/>
-          <a:lstStyle xmlns:a="http://schemas.openxmlformats.org/drawingml/2006/main"/>
-          <a:p xmlns:a="http://schemas.openxmlformats.org/drawingml/2006/main">
-            <a:pPr algn="ctr">
-              <a:defRPr sz="1275" b="1">
-                <a:solidFill>
-                  <a:srgbClr val="FF6412"/>
-                </a:solidFill>
-              </a:defRPr>
-            </a:pPr>
-            <a:r>
-              <a:rPr sz="1275" b="1">
-                <a:solidFill>
-                  <a:srgbClr val="FF6412"/>
-                </a:solidFill>
-              </a:rPr>
-              <a:t>0–30 дней</a:t>
-            </a:r>
-          </a:p>
-        </p:txBody>
-      </p:sp>
-      <p:sp>
-        <p:nvSpPr>
-          <p:cNvPr id="11" name="">
-            <a:extLst xmlns:a="http://schemas.openxmlformats.org/drawingml/2006/main">
-              <a:ext uri="{FF2B5EF4-FFF2-40B4-BE49-F238E27FC236}">
-                <a16:creationId xmlns:a16="http://schemas.microsoft.com/office/drawing/2014/main" id="{54C93DC6-B57C-4783-8B7E-A19D63D64782}"/>
-              </a:ext>
-            </a:extLst>
-          </p:cNvPr>
-          <p:cNvSpPr>
-            <a:spLocks xmlns:a="http://schemas.openxmlformats.org/drawingml/2006/main" noGrp="1"/>
-          </p:cNvSpPr>
-          <p:nvPr/>
-        </p:nvSpPr>
-        <p:spPr>
-          <a:xfrm xmlns:a="http://schemas.openxmlformats.org/drawingml/2006/main">
-            <a:off x="1990725" y="1924050"/>
-            <a:ext cx="495300" cy="495300"/>
+                <a16:creationId xmlns:a16="http://schemas.microsoft.com/office/drawing/2014/main" id="{746A61C7-6CDD-4F28-93C1-D7823C1FACAB}"/>
+              </a:ext>
+            </a:extLst>
+          </p:cNvPr>
+          <p:cNvSpPr>
+            <a:spLocks xmlns:a="http://schemas.openxmlformats.org/drawingml/2006/main" noGrp="1"/>
+          </p:cNvSpPr>
+          <p:nvPr/>
+        </p:nvSpPr>
+        <p:spPr>
+          <a:xfrm xmlns:a="http://schemas.openxmlformats.org/drawingml/2006/main">
+            <a:off x="609600" y="2114550"/>
+            <a:ext cx="514350" cy="514350"/>
           </a:xfrm>
           <a:prstGeom xmlns:a="http://schemas.openxmlformats.org/drawingml/2006/main" prst="ellipse">
             <a:avLst/>
@@ -4865,22 +4815,22 @@
       </p:sp>
       <p:sp>
         <p:nvSpPr>
-          <p:cNvPr id="12" name="">
-            <a:extLst xmlns:a="http://schemas.openxmlformats.org/drawingml/2006/main">
-              <a:ext uri="{FF2B5EF4-FFF2-40B4-BE49-F238E27FC236}">
-                <a16:creationId xmlns:a16="http://schemas.microsoft.com/office/drawing/2014/main" id="{F6CE3502-C3A1-45B7-8986-298167EB51C8}"/>
-              </a:ext>
-            </a:extLst>
-          </p:cNvPr>
-          <p:cNvSpPr>
-            <a:spLocks xmlns:a="http://schemas.openxmlformats.org/drawingml/2006/main" noGrp="1"/>
-          </p:cNvSpPr>
-          <p:nvPr/>
-        </p:nvSpPr>
-        <p:spPr>
-          <a:xfrm xmlns:a="http://schemas.openxmlformats.org/drawingml/2006/main">
-            <a:off x="2076450" y="2028825"/>
-            <a:ext cx="323850" cy="247650"/>
+          <p:cNvPr id="11" name="">
+            <a:extLst xmlns:a="http://schemas.openxmlformats.org/drawingml/2006/main">
+              <a:ext uri="{FF2B5EF4-FFF2-40B4-BE49-F238E27FC236}">
+                <a16:creationId xmlns:a16="http://schemas.microsoft.com/office/drawing/2014/main" id="{CCE58A84-2C0D-4EF9-A80C-EA001111EF91}"/>
+              </a:ext>
+            </a:extLst>
+          </p:cNvPr>
+          <p:cNvSpPr>
+            <a:spLocks xmlns:a="http://schemas.openxmlformats.org/drawingml/2006/main" noGrp="1"/>
+          </p:cNvSpPr>
+          <p:nvPr/>
+        </p:nvSpPr>
+        <p:spPr>
+          <a:xfrm xmlns:a="http://schemas.openxmlformats.org/drawingml/2006/main">
+            <a:off x="704850" y="2238375"/>
+            <a:ext cx="323850" cy="228600"/>
           </a:xfrm>
           <a:prstGeom xmlns:a="http://schemas.openxmlformats.org/drawingml/2006/main" prst="rect">
             <a:avLst/>
@@ -4915,276 +4865,26 @@
       </p:sp>
       <p:sp>
         <p:nvSpPr>
-          <p:cNvPr id="13" name="">
-            <a:extLst xmlns:a="http://schemas.openxmlformats.org/drawingml/2006/main">
-              <a:ext uri="{FF2B5EF4-FFF2-40B4-BE49-F238E27FC236}">
-                <a16:creationId xmlns:a16="http://schemas.microsoft.com/office/drawing/2014/main" id="{FB057113-38E8-4D45-9246-4F5FC165CE73}"/>
-              </a:ext>
-            </a:extLst>
-          </p:cNvPr>
-          <p:cNvSpPr>
-            <a:spLocks xmlns:a="http://schemas.openxmlformats.org/drawingml/2006/main" noGrp="1"/>
-          </p:cNvSpPr>
-          <p:nvPr/>
-        </p:nvSpPr>
-        <p:spPr>
-          <a:xfrm xmlns:a="http://schemas.openxmlformats.org/drawingml/2006/main">
-            <a:off x="647700" y="2628900"/>
-            <a:ext cx="3181350" cy="438150"/>
-          </a:xfrm>
-          <a:prstGeom xmlns:a="http://schemas.openxmlformats.org/drawingml/2006/main" prst="rect">
-            <a:avLst/>
-          </a:prstGeom>
-          <a:noFill xmlns:a="http://schemas.openxmlformats.org/drawingml/2006/main"/>
-          <a:ln xmlns:a="http://schemas.openxmlformats.org/drawingml/2006/main" w="0">
-            <a:noFill/>
-            <a:prstDash val="solid"/>
-          </a:ln>
-        </p:spPr>
-        <p:txBody>
-          <a:bodyPr xmlns:a="http://schemas.openxmlformats.org/drawingml/2006/main"/>
-          <a:lstStyle xmlns:a="http://schemas.openxmlformats.org/drawingml/2006/main"/>
-          <a:p xmlns:a="http://schemas.openxmlformats.org/drawingml/2006/main">
-            <a:pPr algn="ctr">
-              <a:defRPr sz="975" b="1">
-                <a:solidFill>
-                  <a:srgbClr val="FF6412"/>
-                </a:solidFill>
-              </a:defRPr>
-            </a:pPr>
-            <a:r>
-              <a:rPr sz="975" b="1">
-                <a:solidFill>
-                  <a:srgbClr val="FF6412"/>
-                </a:solidFill>
-              </a:rPr>
-              <a:t>ПРИОРИТЕТЫ И БЫСТРЫЕ МЕРЫ</a:t>
-            </a:r>
-          </a:p>
-        </p:txBody>
-      </p:sp>
-      <p:sp>
-        <p:nvSpPr>
-          <p:cNvPr id="14" name="">
-            <a:extLst xmlns:a="http://schemas.openxmlformats.org/drawingml/2006/main">
-              <a:ext uri="{FF2B5EF4-FFF2-40B4-BE49-F238E27FC236}">
-                <a16:creationId xmlns:a16="http://schemas.microsoft.com/office/drawing/2014/main" id="{4DC1F6E8-63CC-4EFE-AA2F-6BC620A0DFBF}"/>
-              </a:ext>
-            </a:extLst>
-          </p:cNvPr>
-          <p:cNvSpPr>
-            <a:spLocks xmlns:a="http://schemas.openxmlformats.org/drawingml/2006/main" noGrp="1"/>
-          </p:cNvSpPr>
-          <p:nvPr/>
-        </p:nvSpPr>
-        <p:spPr>
-          <a:xfrm xmlns:a="http://schemas.openxmlformats.org/drawingml/2006/main">
-            <a:off x="647700" y="3257550"/>
-            <a:ext cx="323850" cy="228600"/>
-          </a:xfrm>
-          <a:prstGeom xmlns:a="http://schemas.openxmlformats.org/drawingml/2006/main" prst="rect">
-            <a:avLst/>
-          </a:prstGeom>
-          <a:noFill xmlns:a="http://schemas.openxmlformats.org/drawingml/2006/main"/>
-          <a:ln xmlns:a="http://schemas.openxmlformats.org/drawingml/2006/main" w="0">
-            <a:noFill/>
-            <a:prstDash val="solid"/>
-          </a:ln>
-        </p:spPr>
-        <p:txBody>
-          <a:bodyPr xmlns:a="http://schemas.openxmlformats.org/drawingml/2006/main"/>
-          <a:lstStyle xmlns:a="http://schemas.openxmlformats.org/drawingml/2006/main"/>
-          <a:p xmlns:a="http://schemas.openxmlformats.org/drawingml/2006/main">
-            <a:pPr>
-              <a:defRPr sz="975" b="1">
-                <a:solidFill>
-                  <a:srgbClr val="FF6412"/>
-                </a:solidFill>
-              </a:defRPr>
-            </a:pPr>
-            <a:r>
-              <a:rPr sz="975" b="1">
-                <a:solidFill>
-                  <a:srgbClr val="FF6412"/>
-                </a:solidFill>
-              </a:rPr>
-              <a:t>01</a:t>
-            </a:r>
-          </a:p>
-        </p:txBody>
-      </p:sp>
-      <p:sp>
-        <p:nvSpPr>
-          <p:cNvPr id="15" name="">
-            <a:extLst xmlns:a="http://schemas.openxmlformats.org/drawingml/2006/main">
-              <a:ext uri="{FF2B5EF4-FFF2-40B4-BE49-F238E27FC236}">
-                <a16:creationId xmlns:a16="http://schemas.microsoft.com/office/drawing/2014/main" id="{A82468CF-A260-4881-B331-FAAD3B75461A}"/>
-              </a:ext>
-            </a:extLst>
-          </p:cNvPr>
-          <p:cNvSpPr>
-            <a:spLocks xmlns:a="http://schemas.openxmlformats.org/drawingml/2006/main" noGrp="1"/>
-          </p:cNvSpPr>
-          <p:nvPr/>
-        </p:nvSpPr>
-        <p:spPr>
-          <a:xfrm xmlns:a="http://schemas.openxmlformats.org/drawingml/2006/main">
-            <a:off x="1047750" y="3200400"/>
-            <a:ext cx="2781300" cy="819150"/>
-          </a:xfrm>
-          <a:prstGeom xmlns:a="http://schemas.openxmlformats.org/drawingml/2006/main" prst="rect">
-            <a:avLst/>
-          </a:prstGeom>
-          <a:noFill xmlns:a="http://schemas.openxmlformats.org/drawingml/2006/main"/>
-          <a:ln xmlns:a="http://schemas.openxmlformats.org/drawingml/2006/main" w="0">
-            <a:noFill/>
-            <a:prstDash val="solid"/>
-          </a:ln>
-        </p:spPr>
-        <p:txBody>
-          <a:bodyPr xmlns:a="http://schemas.openxmlformats.org/drawingml/2006/main"/>
-          <a:lstStyle xmlns:a="http://schemas.openxmlformats.org/drawingml/2006/main"/>
-          <a:p xmlns:a="http://schemas.openxmlformats.org/drawingml/2006/main">
-            <a:pPr>
-              <a:defRPr sz="1125">
-                <a:solidFill>
-                  <a:srgbClr val="161616"/>
-                </a:solidFill>
-              </a:defRPr>
-            </a:pPr>
-            <a:r>
-              <a:rPr sz="1125">
-                <a:solidFill>
-                  <a:srgbClr val="161616"/>
-                </a:solidFill>
-              </a:rPr>
-              <a:t>{{ROADMAP_1_1}}</a:t>
-            </a:r>
-          </a:p>
-        </p:txBody>
-      </p:sp>
-      <p:sp>
-        <p:nvSpPr>
-          <p:cNvPr id="16" name="">
-            <a:extLst xmlns:a="http://schemas.openxmlformats.org/drawingml/2006/main">
-              <a:ext uri="{FF2B5EF4-FFF2-40B4-BE49-F238E27FC236}">
-                <a16:creationId xmlns:a16="http://schemas.microsoft.com/office/drawing/2014/main" id="{D92EF81D-CF19-49C8-B685-2FF55CE67139}"/>
-              </a:ext>
-            </a:extLst>
-          </p:cNvPr>
-          <p:cNvSpPr>
-            <a:spLocks xmlns:a="http://schemas.openxmlformats.org/drawingml/2006/main" noGrp="1"/>
-          </p:cNvSpPr>
-          <p:nvPr/>
-        </p:nvSpPr>
-        <p:spPr>
-          <a:xfrm xmlns:a="http://schemas.openxmlformats.org/drawingml/2006/main">
-            <a:off x="647700" y="4171950"/>
-            <a:ext cx="323850" cy="228600"/>
-          </a:xfrm>
-          <a:prstGeom xmlns:a="http://schemas.openxmlformats.org/drawingml/2006/main" prst="rect">
-            <a:avLst/>
-          </a:prstGeom>
-          <a:noFill xmlns:a="http://schemas.openxmlformats.org/drawingml/2006/main"/>
-          <a:ln xmlns:a="http://schemas.openxmlformats.org/drawingml/2006/main" w="0">
-            <a:noFill/>
-            <a:prstDash val="solid"/>
-          </a:ln>
-        </p:spPr>
-        <p:txBody>
-          <a:bodyPr xmlns:a="http://schemas.openxmlformats.org/drawingml/2006/main"/>
-          <a:lstStyle xmlns:a="http://schemas.openxmlformats.org/drawingml/2006/main"/>
-          <a:p xmlns:a="http://schemas.openxmlformats.org/drawingml/2006/main">
-            <a:pPr>
-              <a:defRPr sz="975" b="1">
-                <a:solidFill>
-                  <a:srgbClr val="FF6412"/>
-                </a:solidFill>
-              </a:defRPr>
-            </a:pPr>
-            <a:r>
-              <a:rPr sz="975" b="1">
-                <a:solidFill>
-                  <a:srgbClr val="FF6412"/>
-                </a:solidFill>
-              </a:rPr>
-              <a:t>02</a:t>
-            </a:r>
-          </a:p>
-        </p:txBody>
-      </p:sp>
-      <p:sp>
-        <p:nvSpPr>
-          <p:cNvPr id="17" name="">
-            <a:extLst xmlns:a="http://schemas.openxmlformats.org/drawingml/2006/main">
-              <a:ext uri="{FF2B5EF4-FFF2-40B4-BE49-F238E27FC236}">
-                <a16:creationId xmlns:a16="http://schemas.microsoft.com/office/drawing/2014/main" id="{22677A2A-EE85-43F4-B8BB-7DD440A2B73C}"/>
-              </a:ext>
-            </a:extLst>
-          </p:cNvPr>
-          <p:cNvSpPr>
-            <a:spLocks xmlns:a="http://schemas.openxmlformats.org/drawingml/2006/main" noGrp="1"/>
-          </p:cNvSpPr>
-          <p:nvPr/>
-        </p:nvSpPr>
-        <p:spPr>
-          <a:xfrm xmlns:a="http://schemas.openxmlformats.org/drawingml/2006/main">
-            <a:off x="1047750" y="4114800"/>
-            <a:ext cx="2781300" cy="819150"/>
-          </a:xfrm>
-          <a:prstGeom xmlns:a="http://schemas.openxmlformats.org/drawingml/2006/main" prst="rect">
-            <a:avLst/>
-          </a:prstGeom>
-          <a:noFill xmlns:a="http://schemas.openxmlformats.org/drawingml/2006/main"/>
-          <a:ln xmlns:a="http://schemas.openxmlformats.org/drawingml/2006/main" w="0">
-            <a:noFill/>
-            <a:prstDash val="solid"/>
-          </a:ln>
-        </p:spPr>
-        <p:txBody>
-          <a:bodyPr xmlns:a="http://schemas.openxmlformats.org/drawingml/2006/main"/>
-          <a:lstStyle xmlns:a="http://schemas.openxmlformats.org/drawingml/2006/main"/>
-          <a:p xmlns:a="http://schemas.openxmlformats.org/drawingml/2006/main">
-            <a:pPr>
-              <a:defRPr sz="1125">
-                <a:solidFill>
-                  <a:srgbClr val="161616"/>
-                </a:solidFill>
-              </a:defRPr>
-            </a:pPr>
-            <a:r>
-              <a:rPr sz="1125">
-                <a:solidFill>
-                  <a:srgbClr val="161616"/>
-                </a:solidFill>
-              </a:rPr>
-              <a:t>{{ROADMAP_1_2}}</a:t>
-            </a:r>
-          </a:p>
-        </p:txBody>
-      </p:sp>
-      <p:sp>
-        <p:nvSpPr>
-          <p:cNvPr id="18" name="">
-            <a:extLst xmlns:a="http://schemas.openxmlformats.org/drawingml/2006/main">
-              <a:ext uri="{FF2B5EF4-FFF2-40B4-BE49-F238E27FC236}">
-                <a16:creationId xmlns:a16="http://schemas.microsoft.com/office/drawing/2014/main" id="{26027772-8494-4969-9639-9BA336841667}"/>
-              </a:ext>
-            </a:extLst>
-          </p:cNvPr>
-          <p:cNvSpPr>
-            <a:spLocks xmlns:a="http://schemas.openxmlformats.org/drawingml/2006/main" noGrp="1"/>
-          </p:cNvSpPr>
-          <p:nvPr/>
-        </p:nvSpPr>
-        <p:spPr>
-          <a:xfrm xmlns:a="http://schemas.openxmlformats.org/drawingml/2006/main">
-            <a:off x="647700" y="5162550"/>
-            <a:ext cx="3181350" cy="762000"/>
+          <p:cNvPr id="12" name="">
+            <a:extLst xmlns:a="http://schemas.openxmlformats.org/drawingml/2006/main">
+              <a:ext uri="{FF2B5EF4-FFF2-40B4-BE49-F238E27FC236}">
+                <a16:creationId xmlns:a16="http://schemas.microsoft.com/office/drawing/2014/main" id="{09DB66B4-F109-4644-B5A9-7592833D4AE0}"/>
+              </a:ext>
+            </a:extLst>
+          </p:cNvPr>
+          <p:cNvSpPr>
+            <a:spLocks xmlns:a="http://schemas.openxmlformats.org/drawingml/2006/main" noGrp="1"/>
+          </p:cNvSpPr>
+          <p:nvPr/>
+        </p:nvSpPr>
+        <p:spPr>
+          <a:xfrm xmlns:a="http://schemas.openxmlformats.org/drawingml/2006/main">
+            <a:off x="1390650" y="1752600"/>
+            <a:ext cx="9810750" cy="1257300"/>
           </a:xfrm>
           <a:prstGeom xmlns:a="http://schemas.openxmlformats.org/drawingml/2006/main" prst="roundRect">
             <a:avLst>
-              <a:gd name="adj" fmla="val 10000"/>
+              <a:gd name="adj" fmla="val 6061"/>
             </a:avLst>
           </a:prstGeom>
           <a:solidFill xmlns:a="http://schemas.openxmlformats.org/drawingml/2006/main">
@@ -5200,542 +4900,330 @@
       </p:sp>
       <p:sp>
         <p:nvSpPr>
+          <p:cNvPr id="13" name="">
+            <a:extLst xmlns:a="http://schemas.openxmlformats.org/drawingml/2006/main">
+              <a:ext uri="{FF2B5EF4-FFF2-40B4-BE49-F238E27FC236}">
+                <a16:creationId xmlns:a16="http://schemas.microsoft.com/office/drawing/2014/main" id="{5F2E25EC-88BE-4302-97A5-188EAD00B5BE}"/>
+              </a:ext>
+            </a:extLst>
+          </p:cNvPr>
+          <p:cNvSpPr>
+            <a:spLocks xmlns:a="http://schemas.openxmlformats.org/drawingml/2006/main" noGrp="1"/>
+          </p:cNvSpPr>
+          <p:nvPr/>
+        </p:nvSpPr>
+        <p:spPr>
+          <a:xfrm xmlns:a="http://schemas.openxmlformats.org/drawingml/2006/main">
+            <a:off x="1619250" y="1905000"/>
+            <a:ext cx="1409700" cy="228600"/>
+          </a:xfrm>
+          <a:prstGeom xmlns:a="http://schemas.openxmlformats.org/drawingml/2006/main" prst="rect">
+            <a:avLst/>
+          </a:prstGeom>
+          <a:noFill xmlns:a="http://schemas.openxmlformats.org/drawingml/2006/main"/>
+          <a:ln xmlns:a="http://schemas.openxmlformats.org/drawingml/2006/main" w="0">
+            <a:noFill/>
+            <a:prstDash val="solid"/>
+          </a:ln>
+        </p:spPr>
+        <p:txBody>
+          <a:bodyPr xmlns:a="http://schemas.openxmlformats.org/drawingml/2006/main"/>
+          <a:lstStyle xmlns:a="http://schemas.openxmlformats.org/drawingml/2006/main"/>
+          <a:p xmlns:a="http://schemas.openxmlformats.org/drawingml/2006/main">
+            <a:pPr>
+              <a:defRPr sz="1125" b="1">
+                <a:solidFill>
+                  <a:srgbClr val="FF6412"/>
+                </a:solidFill>
+              </a:defRPr>
+            </a:pPr>
+            <a:r>
+              <a:rPr sz="1125" b="1">
+                <a:solidFill>
+                  <a:srgbClr val="FF6412"/>
+                </a:solidFill>
+              </a:rPr>
+              <a:t>0–30 дней</a:t>
+            </a:r>
+          </a:p>
+        </p:txBody>
+      </p:sp>
+      <p:sp>
+        <p:nvSpPr>
+          <p:cNvPr id="14" name="">
+            <a:extLst xmlns:a="http://schemas.openxmlformats.org/drawingml/2006/main">
+              <a:ext uri="{FF2B5EF4-FFF2-40B4-BE49-F238E27FC236}">
+                <a16:creationId xmlns:a16="http://schemas.microsoft.com/office/drawing/2014/main" id="{612E00B7-0ECC-43A2-8D87-08032F505170}"/>
+              </a:ext>
+            </a:extLst>
+          </p:cNvPr>
+          <p:cNvSpPr>
+            <a:spLocks xmlns:a="http://schemas.openxmlformats.org/drawingml/2006/main" noGrp="1"/>
+          </p:cNvSpPr>
+          <p:nvPr/>
+        </p:nvSpPr>
+        <p:spPr>
+          <a:xfrm xmlns:a="http://schemas.openxmlformats.org/drawingml/2006/main">
+            <a:off x="1619250" y="2190750"/>
+            <a:ext cx="2381250" cy="495300"/>
+          </a:xfrm>
+          <a:prstGeom xmlns:a="http://schemas.openxmlformats.org/drawingml/2006/main" prst="rect">
+            <a:avLst/>
+          </a:prstGeom>
+          <a:noFill xmlns:a="http://schemas.openxmlformats.org/drawingml/2006/main"/>
+          <a:ln xmlns:a="http://schemas.openxmlformats.org/drawingml/2006/main" w="0">
+            <a:noFill/>
+            <a:prstDash val="solid"/>
+          </a:ln>
+        </p:spPr>
+        <p:txBody>
+          <a:bodyPr xmlns:a="http://schemas.openxmlformats.org/drawingml/2006/main"/>
+          <a:lstStyle xmlns:a="http://schemas.openxmlformats.org/drawingml/2006/main"/>
+          <a:p xmlns:a="http://schemas.openxmlformats.org/drawingml/2006/main">
+            <a:pPr>
+              <a:defRPr sz="1125" b="1">
+                <a:solidFill>
+                  <a:srgbClr val="161616"/>
+                </a:solidFill>
+              </a:defRPr>
+            </a:pPr>
+            <a:r>
+              <a:rPr sz="1125" b="1">
+                <a:solidFill>
+                  <a:srgbClr val="161616"/>
+                </a:solidFill>
+              </a:rPr>
+              <a:t>ПРИОРИТЕТЫ И БЫСТРЫЕ МЕРЫ</a:t>
+            </a:r>
+          </a:p>
+        </p:txBody>
+      </p:sp>
+      <p:sp>
+        <p:nvSpPr>
+          <p:cNvPr id="15" name="">
+            <a:extLst xmlns:a="http://schemas.openxmlformats.org/drawingml/2006/main">
+              <a:ext uri="{FF2B5EF4-FFF2-40B4-BE49-F238E27FC236}">
+                <a16:creationId xmlns:a16="http://schemas.microsoft.com/office/drawing/2014/main" id="{B3728966-779F-435B-83BA-D80131FEBEAE}"/>
+              </a:ext>
+            </a:extLst>
+          </p:cNvPr>
+          <p:cNvSpPr>
+            <a:spLocks xmlns:a="http://schemas.openxmlformats.org/drawingml/2006/main" noGrp="1"/>
+          </p:cNvSpPr>
+          <p:nvPr/>
+        </p:nvSpPr>
+        <p:spPr>
+          <a:xfrm xmlns:a="http://schemas.openxmlformats.org/drawingml/2006/main">
+            <a:off x="4210050" y="1952625"/>
+            <a:ext cx="304800" cy="190500"/>
+          </a:xfrm>
+          <a:prstGeom xmlns:a="http://schemas.openxmlformats.org/drawingml/2006/main" prst="rect">
+            <a:avLst/>
+          </a:prstGeom>
+          <a:noFill xmlns:a="http://schemas.openxmlformats.org/drawingml/2006/main"/>
+          <a:ln xmlns:a="http://schemas.openxmlformats.org/drawingml/2006/main" w="0">
+            <a:noFill/>
+            <a:prstDash val="solid"/>
+          </a:ln>
+        </p:spPr>
+        <p:txBody>
+          <a:bodyPr xmlns:a="http://schemas.openxmlformats.org/drawingml/2006/main"/>
+          <a:lstStyle xmlns:a="http://schemas.openxmlformats.org/drawingml/2006/main"/>
+          <a:p xmlns:a="http://schemas.openxmlformats.org/drawingml/2006/main">
+            <a:pPr>
+              <a:defRPr sz="825" b="1">
+                <a:solidFill>
+                  <a:srgbClr val="FF6412"/>
+                </a:solidFill>
+              </a:defRPr>
+            </a:pPr>
+            <a:r>
+              <a:rPr sz="825" b="1">
+                <a:solidFill>
+                  <a:srgbClr val="FF6412"/>
+                </a:solidFill>
+              </a:rPr>
+              <a:t>01</a:t>
+            </a:r>
+          </a:p>
+        </p:txBody>
+      </p:sp>
+      <p:sp>
+        <p:nvSpPr>
+          <p:cNvPr id="16" name="">
+            <a:extLst xmlns:a="http://schemas.openxmlformats.org/drawingml/2006/main">
+              <a:ext uri="{FF2B5EF4-FFF2-40B4-BE49-F238E27FC236}">
+                <a16:creationId xmlns:a16="http://schemas.microsoft.com/office/drawing/2014/main" id="{85AF4D9E-A90C-4951-AB66-96D45365D7E7}"/>
+              </a:ext>
+            </a:extLst>
+          </p:cNvPr>
+          <p:cNvSpPr>
+            <a:spLocks xmlns:a="http://schemas.openxmlformats.org/drawingml/2006/main" noGrp="1"/>
+          </p:cNvSpPr>
+          <p:nvPr/>
+        </p:nvSpPr>
+        <p:spPr>
+          <a:xfrm xmlns:a="http://schemas.openxmlformats.org/drawingml/2006/main">
+            <a:off x="4572000" y="1895475"/>
+            <a:ext cx="2362200" cy="895350"/>
+          </a:xfrm>
+          <a:prstGeom xmlns:a="http://schemas.openxmlformats.org/drawingml/2006/main" prst="rect">
+            <a:avLst/>
+          </a:prstGeom>
+          <a:noFill xmlns:a="http://schemas.openxmlformats.org/drawingml/2006/main"/>
+          <a:ln xmlns:a="http://schemas.openxmlformats.org/drawingml/2006/main" w="0">
+            <a:noFill/>
+            <a:prstDash val="solid"/>
+          </a:ln>
+        </p:spPr>
+        <p:txBody>
+          <a:bodyPr xmlns:a="http://schemas.openxmlformats.org/drawingml/2006/main"/>
+          <a:lstStyle xmlns:a="http://schemas.openxmlformats.org/drawingml/2006/main"/>
+          <a:p xmlns:a="http://schemas.openxmlformats.org/drawingml/2006/main">
+            <a:pPr>
+              <a:defRPr sz="975">
+                <a:solidFill>
+                  <a:srgbClr val="161616"/>
+                </a:solidFill>
+              </a:defRPr>
+            </a:pPr>
+            <a:r>
+              <a:rPr sz="975">
+                <a:solidFill>
+                  <a:srgbClr val="161616"/>
+                </a:solidFill>
+              </a:rPr>
+              <a:t>{{ROADMAP_1_1}}</a:t>
+            </a:r>
+          </a:p>
+        </p:txBody>
+      </p:sp>
+      <p:sp>
+        <p:nvSpPr>
+          <p:cNvPr id="17" name="">
+            <a:extLst xmlns:a="http://schemas.openxmlformats.org/drawingml/2006/main">
+              <a:ext uri="{FF2B5EF4-FFF2-40B4-BE49-F238E27FC236}">
+                <a16:creationId xmlns:a16="http://schemas.microsoft.com/office/drawing/2014/main" id="{C6C84CB6-E623-4C9A-A454-D48F3E2A0D61}"/>
+              </a:ext>
+            </a:extLst>
+          </p:cNvPr>
+          <p:cNvSpPr>
+            <a:spLocks xmlns:a="http://schemas.openxmlformats.org/drawingml/2006/main" noGrp="1"/>
+          </p:cNvSpPr>
+          <p:nvPr/>
+        </p:nvSpPr>
+        <p:spPr>
+          <a:xfrm xmlns:a="http://schemas.openxmlformats.org/drawingml/2006/main">
+            <a:off x="7124700" y="1952625"/>
+            <a:ext cx="304800" cy="190500"/>
+          </a:xfrm>
+          <a:prstGeom xmlns:a="http://schemas.openxmlformats.org/drawingml/2006/main" prst="rect">
+            <a:avLst/>
+          </a:prstGeom>
+          <a:noFill xmlns:a="http://schemas.openxmlformats.org/drawingml/2006/main"/>
+          <a:ln xmlns:a="http://schemas.openxmlformats.org/drawingml/2006/main" w="0">
+            <a:noFill/>
+            <a:prstDash val="solid"/>
+          </a:ln>
+        </p:spPr>
+        <p:txBody>
+          <a:bodyPr xmlns:a="http://schemas.openxmlformats.org/drawingml/2006/main"/>
+          <a:lstStyle xmlns:a="http://schemas.openxmlformats.org/drawingml/2006/main"/>
+          <a:p xmlns:a="http://schemas.openxmlformats.org/drawingml/2006/main">
+            <a:pPr>
+              <a:defRPr sz="825" b="1">
+                <a:solidFill>
+                  <a:srgbClr val="FF6412"/>
+                </a:solidFill>
+              </a:defRPr>
+            </a:pPr>
+            <a:r>
+              <a:rPr sz="825" b="1">
+                <a:solidFill>
+                  <a:srgbClr val="FF6412"/>
+                </a:solidFill>
+              </a:rPr>
+              <a:t>02</a:t>
+            </a:r>
+          </a:p>
+        </p:txBody>
+      </p:sp>
+      <p:sp>
+        <p:nvSpPr>
+          <p:cNvPr id="18" name="">
+            <a:extLst xmlns:a="http://schemas.openxmlformats.org/drawingml/2006/main">
+              <a:ext uri="{FF2B5EF4-FFF2-40B4-BE49-F238E27FC236}">
+                <a16:creationId xmlns:a16="http://schemas.microsoft.com/office/drawing/2014/main" id="{C4B7352C-A1AB-44D1-96F7-26490FA8997A}"/>
+              </a:ext>
+            </a:extLst>
+          </p:cNvPr>
+          <p:cNvSpPr>
+            <a:spLocks xmlns:a="http://schemas.openxmlformats.org/drawingml/2006/main" noGrp="1"/>
+          </p:cNvSpPr>
+          <p:nvPr/>
+        </p:nvSpPr>
+        <p:spPr>
+          <a:xfrm xmlns:a="http://schemas.openxmlformats.org/drawingml/2006/main">
+            <a:off x="7486650" y="1895475"/>
+            <a:ext cx="1847850" cy="895350"/>
+          </a:xfrm>
+          <a:prstGeom xmlns:a="http://schemas.openxmlformats.org/drawingml/2006/main" prst="rect">
+            <a:avLst/>
+          </a:prstGeom>
+          <a:noFill xmlns:a="http://schemas.openxmlformats.org/drawingml/2006/main"/>
+          <a:ln xmlns:a="http://schemas.openxmlformats.org/drawingml/2006/main" w="0">
+            <a:noFill/>
+            <a:prstDash val="solid"/>
+          </a:ln>
+        </p:spPr>
+        <p:txBody>
+          <a:bodyPr xmlns:a="http://schemas.openxmlformats.org/drawingml/2006/main"/>
+          <a:lstStyle xmlns:a="http://schemas.openxmlformats.org/drawingml/2006/main"/>
+          <a:p xmlns:a="http://schemas.openxmlformats.org/drawingml/2006/main">
+            <a:pPr>
+              <a:defRPr sz="975">
+                <a:solidFill>
+                  <a:srgbClr val="161616"/>
+                </a:solidFill>
+              </a:defRPr>
+            </a:pPr>
+            <a:r>
+              <a:rPr sz="975">
+                <a:solidFill>
+                  <a:srgbClr val="161616"/>
+                </a:solidFill>
+              </a:rPr>
+              <a:t>{{ROADMAP_1_2}}</a:t>
+            </a:r>
+          </a:p>
+        </p:txBody>
+      </p:sp>
+      <p:sp>
+        <p:nvSpPr>
           <p:cNvPr id="19" name="">
             <a:extLst xmlns:a="http://schemas.openxmlformats.org/drawingml/2006/main">
               <a:ext uri="{FF2B5EF4-FFF2-40B4-BE49-F238E27FC236}">
-                <a16:creationId xmlns:a16="http://schemas.microsoft.com/office/drawing/2014/main" id="{205BB709-BBD1-4AB9-93FD-05F2C24A5A12}"/>
-              </a:ext>
-            </a:extLst>
-          </p:cNvPr>
-          <p:cNvSpPr>
-            <a:spLocks xmlns:a="http://schemas.openxmlformats.org/drawingml/2006/main" noGrp="1"/>
-          </p:cNvSpPr>
-          <p:nvPr/>
-        </p:nvSpPr>
-        <p:spPr>
-          <a:xfrm xmlns:a="http://schemas.openxmlformats.org/drawingml/2006/main">
-            <a:off x="800100" y="5286375"/>
-            <a:ext cx="2876550" cy="171450"/>
-          </a:xfrm>
-          <a:prstGeom xmlns:a="http://schemas.openxmlformats.org/drawingml/2006/main" prst="rect">
-            <a:avLst/>
-          </a:prstGeom>
-          <a:noFill xmlns:a="http://schemas.openxmlformats.org/drawingml/2006/main"/>
-          <a:ln xmlns:a="http://schemas.openxmlformats.org/drawingml/2006/main" w="0">
-            <a:noFill/>
-            <a:prstDash val="solid"/>
-          </a:ln>
-        </p:spPr>
-        <p:txBody>
-          <a:bodyPr xmlns:a="http://schemas.openxmlformats.org/drawingml/2006/main"/>
-          <a:lstStyle xmlns:a="http://schemas.openxmlformats.org/drawingml/2006/main"/>
-          <a:p xmlns:a="http://schemas.openxmlformats.org/drawingml/2006/main">
-            <a:pPr>
-              <a:defRPr sz="750" b="1">
-                <a:solidFill>
-                  <a:srgbClr val="FF6412"/>
-                </a:solidFill>
-              </a:defRPr>
-            </a:pPr>
-            <a:r>
-              <a:rPr sz="750" b="1">
-                <a:solidFill>
-                  <a:srgbClr val="FF6412"/>
-                </a:solidFill>
-              </a:rPr>
-              <a:t>ЧТО ДАСТ ЭТАП</a:t>
-            </a:r>
-          </a:p>
-        </p:txBody>
-      </p:sp>
-      <p:sp>
-        <p:nvSpPr>
-          <p:cNvPr id="20" name="">
-            <a:extLst xmlns:a="http://schemas.openxmlformats.org/drawingml/2006/main">
-              <a:ext uri="{FF2B5EF4-FFF2-40B4-BE49-F238E27FC236}">
-                <a16:creationId xmlns:a16="http://schemas.microsoft.com/office/drawing/2014/main" id="{E983DC77-6951-4981-92D5-79BD9C4F565F}"/>
-              </a:ext>
-            </a:extLst>
-          </p:cNvPr>
-          <p:cNvSpPr>
-            <a:spLocks xmlns:a="http://schemas.openxmlformats.org/drawingml/2006/main" noGrp="1"/>
-          </p:cNvSpPr>
-          <p:nvPr/>
-        </p:nvSpPr>
-        <p:spPr>
-          <a:xfrm xmlns:a="http://schemas.openxmlformats.org/drawingml/2006/main">
-            <a:off x="800100" y="5514975"/>
-            <a:ext cx="2876550" cy="323850"/>
-          </a:xfrm>
-          <a:prstGeom xmlns:a="http://schemas.openxmlformats.org/drawingml/2006/main" prst="rect">
-            <a:avLst/>
-          </a:prstGeom>
-          <a:noFill xmlns:a="http://schemas.openxmlformats.org/drawingml/2006/main"/>
-          <a:ln xmlns:a="http://schemas.openxmlformats.org/drawingml/2006/main" w="0">
-            <a:noFill/>
-            <a:prstDash val="solid"/>
-          </a:ln>
-        </p:spPr>
-        <p:txBody>
-          <a:bodyPr xmlns:a="http://schemas.openxmlformats.org/drawingml/2006/main"/>
-          <a:lstStyle xmlns:a="http://schemas.openxmlformats.org/drawingml/2006/main"/>
-          <a:p xmlns:a="http://schemas.openxmlformats.org/drawingml/2006/main">
-            <a:pPr>
-              <a:defRPr sz="975" b="1">
-                <a:solidFill>
-                  <a:srgbClr val="161616"/>
-                </a:solidFill>
-              </a:defRPr>
-            </a:pPr>
-            <a:r>
-              <a:rPr sz="975" b="1">
-                <a:solidFill>
-                  <a:srgbClr val="161616"/>
-                </a:solidFill>
-              </a:rPr>
-              <a:t>{{ROADMAP_1_RESULT}}</a:t>
-            </a:r>
-          </a:p>
-        </p:txBody>
-      </p:sp>
-      <p:sp>
-        <p:nvSpPr>
-          <p:cNvPr id="21" name="">
-            <a:extLst xmlns:a="http://schemas.openxmlformats.org/drawingml/2006/main">
-              <a:ext uri="{FF2B5EF4-FFF2-40B4-BE49-F238E27FC236}">
-                <a16:creationId xmlns:a16="http://schemas.microsoft.com/office/drawing/2014/main" id="{F63AF778-2DAA-401C-A726-45286CFDD498}"/>
-              </a:ext>
-            </a:extLst>
-          </p:cNvPr>
-          <p:cNvSpPr>
-            <a:spLocks xmlns:a="http://schemas.openxmlformats.org/drawingml/2006/main" noGrp="1"/>
-          </p:cNvSpPr>
-          <p:nvPr/>
-        </p:nvSpPr>
-        <p:spPr>
-          <a:xfrm xmlns:a="http://schemas.openxmlformats.org/drawingml/2006/main">
-            <a:off x="4067175" y="2628900"/>
-            <a:ext cx="9525" cy="3295650"/>
-          </a:xfrm>
-          <a:prstGeom xmlns:a="http://schemas.openxmlformats.org/drawingml/2006/main" prst="rect">
-            <a:avLst/>
-          </a:prstGeom>
-          <a:solidFill xmlns:a="http://schemas.openxmlformats.org/drawingml/2006/main">
-            <a:srgbClr val="E4E7EC"/>
-          </a:solidFill>
-          <a:ln xmlns:a="http://schemas.openxmlformats.org/drawingml/2006/main" w="0">
-            <a:noFill/>
-            <a:prstDash val="solid"/>
-          </a:ln>
-        </p:spPr>
-      </p:sp>
-      <p:sp>
-        <p:nvSpPr>
-          <p:cNvPr id="22" name="">
-            <a:extLst xmlns:a="http://schemas.openxmlformats.org/drawingml/2006/main">
-              <a:ext uri="{FF2B5EF4-FFF2-40B4-BE49-F238E27FC236}">
-                <a16:creationId xmlns:a16="http://schemas.microsoft.com/office/drawing/2014/main" id="{ECE752B3-70CB-49DB-AED2-EA9C5E2655FF}"/>
-              </a:ext>
-            </a:extLst>
-          </p:cNvPr>
-          <p:cNvSpPr>
-            <a:spLocks xmlns:a="http://schemas.openxmlformats.org/drawingml/2006/main" noGrp="1"/>
-          </p:cNvSpPr>
-          <p:nvPr/>
-        </p:nvSpPr>
-        <p:spPr>
-          <a:xfrm xmlns:a="http://schemas.openxmlformats.org/drawingml/2006/main">
-            <a:off x="4191000" y="1752600"/>
-            <a:ext cx="3371850" cy="266700"/>
-          </a:xfrm>
-          <a:prstGeom xmlns:a="http://schemas.openxmlformats.org/drawingml/2006/main" prst="rect">
-            <a:avLst/>
-          </a:prstGeom>
-          <a:noFill xmlns:a="http://schemas.openxmlformats.org/drawingml/2006/main"/>
-          <a:ln xmlns:a="http://schemas.openxmlformats.org/drawingml/2006/main" w="0">
-            <a:noFill/>
-            <a:prstDash val="solid"/>
-          </a:ln>
-        </p:spPr>
-        <p:txBody>
-          <a:bodyPr xmlns:a="http://schemas.openxmlformats.org/drawingml/2006/main"/>
-          <a:lstStyle xmlns:a="http://schemas.openxmlformats.org/drawingml/2006/main"/>
-          <a:p xmlns:a="http://schemas.openxmlformats.org/drawingml/2006/main">
-            <a:pPr algn="ctr">
-              <a:defRPr sz="1275" b="1">
-                <a:solidFill>
-                  <a:srgbClr val="161616"/>
-                </a:solidFill>
-              </a:defRPr>
-            </a:pPr>
-            <a:r>
-              <a:rPr sz="1275" b="1">
-                <a:solidFill>
-                  <a:srgbClr val="161616"/>
-                </a:solidFill>
-              </a:rPr>
-              <a:t>31–60 дней</a:t>
-            </a:r>
-          </a:p>
-        </p:txBody>
-      </p:sp>
-      <p:sp>
-        <p:nvSpPr>
-          <p:cNvPr id="23" name="">
-            <a:extLst xmlns:a="http://schemas.openxmlformats.org/drawingml/2006/main">
-              <a:ext uri="{FF2B5EF4-FFF2-40B4-BE49-F238E27FC236}">
-                <a16:creationId xmlns:a16="http://schemas.microsoft.com/office/drawing/2014/main" id="{3165C9E7-C223-41F0-A82A-F883529C6207}"/>
-              </a:ext>
-            </a:extLst>
-          </p:cNvPr>
-          <p:cNvSpPr>
-            <a:spLocks xmlns:a="http://schemas.openxmlformats.org/drawingml/2006/main" noGrp="1"/>
-          </p:cNvSpPr>
-          <p:nvPr/>
-        </p:nvSpPr>
-        <p:spPr>
-          <a:xfrm xmlns:a="http://schemas.openxmlformats.org/drawingml/2006/main">
-            <a:off x="5629275" y="1924050"/>
-            <a:ext cx="495300" cy="495300"/>
-          </a:xfrm>
-          <a:prstGeom xmlns:a="http://schemas.openxmlformats.org/drawingml/2006/main" prst="ellipse">
-            <a:avLst/>
-          </a:prstGeom>
-          <a:solidFill xmlns:a="http://schemas.openxmlformats.org/drawingml/2006/main">
-            <a:srgbClr val="161616"/>
-          </a:solidFill>
-          <a:ln xmlns:a="http://schemas.openxmlformats.org/drawingml/2006/main" w="0">
-            <a:noFill/>
-            <a:prstDash val="solid"/>
-          </a:ln>
-        </p:spPr>
-      </p:sp>
-      <p:sp>
-        <p:nvSpPr>
-          <p:cNvPr id="24" name="">
-            <a:extLst xmlns:a="http://schemas.openxmlformats.org/drawingml/2006/main">
-              <a:ext uri="{FF2B5EF4-FFF2-40B4-BE49-F238E27FC236}">
-                <a16:creationId xmlns:a16="http://schemas.microsoft.com/office/drawing/2014/main" id="{3457E365-6EDE-4849-BAAB-BDCB4A756708}"/>
-              </a:ext>
-            </a:extLst>
-          </p:cNvPr>
-          <p:cNvSpPr>
-            <a:spLocks xmlns:a="http://schemas.openxmlformats.org/drawingml/2006/main" noGrp="1"/>
-          </p:cNvSpPr>
-          <p:nvPr/>
-        </p:nvSpPr>
-        <p:spPr>
-          <a:xfrm xmlns:a="http://schemas.openxmlformats.org/drawingml/2006/main">
-            <a:off x="5715000" y="2028825"/>
-            <a:ext cx="323850" cy="247650"/>
-          </a:xfrm>
-          <a:prstGeom xmlns:a="http://schemas.openxmlformats.org/drawingml/2006/main" prst="rect">
-            <a:avLst/>
-          </a:prstGeom>
-          <a:noFill xmlns:a="http://schemas.openxmlformats.org/drawingml/2006/main"/>
-          <a:ln xmlns:a="http://schemas.openxmlformats.org/drawingml/2006/main" w="0">
-            <a:noFill/>
-            <a:prstDash val="solid"/>
-          </a:ln>
-        </p:spPr>
-        <p:txBody>
-          <a:bodyPr xmlns:a="http://schemas.openxmlformats.org/drawingml/2006/main"/>
-          <a:lstStyle xmlns:a="http://schemas.openxmlformats.org/drawingml/2006/main"/>
-          <a:p xmlns:a="http://schemas.openxmlformats.org/drawingml/2006/main">
-            <a:pPr algn="ctr">
-              <a:defRPr sz="1200" b="1">
-                <a:solidFill>
-                  <a:srgbClr val="FFFFFF"/>
-                </a:solidFill>
-              </a:defRPr>
-            </a:pPr>
-            <a:r>
-              <a:rPr sz="1200" b="1">
-                <a:solidFill>
-                  <a:srgbClr val="FFFFFF"/>
-                </a:solidFill>
-              </a:rPr>
-              <a:t>2</a:t>
-            </a:r>
-          </a:p>
-        </p:txBody>
-      </p:sp>
-      <p:sp>
-        <p:nvSpPr>
-          <p:cNvPr id="25" name="">
-            <a:extLst xmlns:a="http://schemas.openxmlformats.org/drawingml/2006/main">
-              <a:ext uri="{FF2B5EF4-FFF2-40B4-BE49-F238E27FC236}">
-                <a16:creationId xmlns:a16="http://schemas.microsoft.com/office/drawing/2014/main" id="{49F173A5-50FA-4078-99C2-09D5D8127A8B}"/>
-              </a:ext>
-            </a:extLst>
-          </p:cNvPr>
-          <p:cNvSpPr>
-            <a:spLocks xmlns:a="http://schemas.openxmlformats.org/drawingml/2006/main" noGrp="1"/>
-          </p:cNvSpPr>
-          <p:nvPr/>
-        </p:nvSpPr>
-        <p:spPr>
-          <a:xfrm xmlns:a="http://schemas.openxmlformats.org/drawingml/2006/main">
-            <a:off x="4286250" y="2628900"/>
-            <a:ext cx="3181350" cy="438150"/>
-          </a:xfrm>
-          <a:prstGeom xmlns:a="http://schemas.openxmlformats.org/drawingml/2006/main" prst="rect">
-            <a:avLst/>
-          </a:prstGeom>
-          <a:noFill xmlns:a="http://schemas.openxmlformats.org/drawingml/2006/main"/>
-          <a:ln xmlns:a="http://schemas.openxmlformats.org/drawingml/2006/main" w="0">
-            <a:noFill/>
-            <a:prstDash val="solid"/>
-          </a:ln>
-        </p:spPr>
-        <p:txBody>
-          <a:bodyPr xmlns:a="http://schemas.openxmlformats.org/drawingml/2006/main"/>
-          <a:lstStyle xmlns:a="http://schemas.openxmlformats.org/drawingml/2006/main"/>
-          <a:p xmlns:a="http://schemas.openxmlformats.org/drawingml/2006/main">
-            <a:pPr algn="ctr">
-              <a:defRPr sz="975" b="1">
-                <a:solidFill>
-                  <a:srgbClr val="FF6412"/>
-                </a:solidFill>
-              </a:defRPr>
-            </a:pPr>
-            <a:r>
-              <a:rPr sz="975" b="1">
-                <a:solidFill>
-                  <a:srgbClr val="FF6412"/>
-                </a:solidFill>
-              </a:rPr>
-              <a:t>ПИЛОТЫ И РЕГЛАМЕНТЫ</a:t>
-            </a:r>
-          </a:p>
-        </p:txBody>
-      </p:sp>
-      <p:sp>
-        <p:nvSpPr>
-          <p:cNvPr id="26" name="">
-            <a:extLst xmlns:a="http://schemas.openxmlformats.org/drawingml/2006/main">
-              <a:ext uri="{FF2B5EF4-FFF2-40B4-BE49-F238E27FC236}">
-                <a16:creationId xmlns:a16="http://schemas.microsoft.com/office/drawing/2014/main" id="{5F3D6E51-C521-4A17-9A25-75F16A7BB836}"/>
-              </a:ext>
-            </a:extLst>
-          </p:cNvPr>
-          <p:cNvSpPr>
-            <a:spLocks xmlns:a="http://schemas.openxmlformats.org/drawingml/2006/main" noGrp="1"/>
-          </p:cNvSpPr>
-          <p:nvPr/>
-        </p:nvSpPr>
-        <p:spPr>
-          <a:xfrm xmlns:a="http://schemas.openxmlformats.org/drawingml/2006/main">
-            <a:off x="4286250" y="3257550"/>
-            <a:ext cx="323850" cy="228600"/>
-          </a:xfrm>
-          <a:prstGeom xmlns:a="http://schemas.openxmlformats.org/drawingml/2006/main" prst="rect">
-            <a:avLst/>
-          </a:prstGeom>
-          <a:noFill xmlns:a="http://schemas.openxmlformats.org/drawingml/2006/main"/>
-          <a:ln xmlns:a="http://schemas.openxmlformats.org/drawingml/2006/main" w="0">
-            <a:noFill/>
-            <a:prstDash val="solid"/>
-          </a:ln>
-        </p:spPr>
-        <p:txBody>
-          <a:bodyPr xmlns:a="http://schemas.openxmlformats.org/drawingml/2006/main"/>
-          <a:lstStyle xmlns:a="http://schemas.openxmlformats.org/drawingml/2006/main"/>
-          <a:p xmlns:a="http://schemas.openxmlformats.org/drawingml/2006/main">
-            <a:pPr>
-              <a:defRPr sz="975" b="1">
-                <a:solidFill>
-                  <a:srgbClr val="FF6412"/>
-                </a:solidFill>
-              </a:defRPr>
-            </a:pPr>
-            <a:r>
-              <a:rPr sz="975" b="1">
-                <a:solidFill>
-                  <a:srgbClr val="FF6412"/>
-                </a:solidFill>
-              </a:rPr>
-              <a:t>01</a:t>
-            </a:r>
-          </a:p>
-        </p:txBody>
-      </p:sp>
-      <p:sp>
-        <p:nvSpPr>
-          <p:cNvPr id="27" name="">
-            <a:extLst xmlns:a="http://schemas.openxmlformats.org/drawingml/2006/main">
-              <a:ext uri="{FF2B5EF4-FFF2-40B4-BE49-F238E27FC236}">
-                <a16:creationId xmlns:a16="http://schemas.microsoft.com/office/drawing/2014/main" id="{66328EB4-938A-4BFE-BAA5-7C82CDDF2A35}"/>
-              </a:ext>
-            </a:extLst>
-          </p:cNvPr>
-          <p:cNvSpPr>
-            <a:spLocks xmlns:a="http://schemas.openxmlformats.org/drawingml/2006/main" noGrp="1"/>
-          </p:cNvSpPr>
-          <p:nvPr/>
-        </p:nvSpPr>
-        <p:spPr>
-          <a:xfrm xmlns:a="http://schemas.openxmlformats.org/drawingml/2006/main">
-            <a:off x="4686300" y="3200400"/>
-            <a:ext cx="2781300" cy="819150"/>
-          </a:xfrm>
-          <a:prstGeom xmlns:a="http://schemas.openxmlformats.org/drawingml/2006/main" prst="rect">
-            <a:avLst/>
-          </a:prstGeom>
-          <a:noFill xmlns:a="http://schemas.openxmlformats.org/drawingml/2006/main"/>
-          <a:ln xmlns:a="http://schemas.openxmlformats.org/drawingml/2006/main" w="0">
-            <a:noFill/>
-            <a:prstDash val="solid"/>
-          </a:ln>
-        </p:spPr>
-        <p:txBody>
-          <a:bodyPr xmlns:a="http://schemas.openxmlformats.org/drawingml/2006/main"/>
-          <a:lstStyle xmlns:a="http://schemas.openxmlformats.org/drawingml/2006/main"/>
-          <a:p xmlns:a="http://schemas.openxmlformats.org/drawingml/2006/main">
-            <a:pPr>
-              <a:defRPr sz="1125">
-                <a:solidFill>
-                  <a:srgbClr val="161616"/>
-                </a:solidFill>
-              </a:defRPr>
-            </a:pPr>
-            <a:r>
-              <a:rPr sz="1125">
-                <a:solidFill>
-                  <a:srgbClr val="161616"/>
-                </a:solidFill>
-              </a:rPr>
-              <a:t>{{ROADMAP_2_1}}</a:t>
-            </a:r>
-          </a:p>
-        </p:txBody>
-      </p:sp>
-      <p:sp>
-        <p:nvSpPr>
-          <p:cNvPr id="28" name="">
-            <a:extLst xmlns:a="http://schemas.openxmlformats.org/drawingml/2006/main">
-              <a:ext uri="{FF2B5EF4-FFF2-40B4-BE49-F238E27FC236}">
-                <a16:creationId xmlns:a16="http://schemas.microsoft.com/office/drawing/2014/main" id="{05183359-1EB6-48A3-B04D-EDCE75BA59BE}"/>
-              </a:ext>
-            </a:extLst>
-          </p:cNvPr>
-          <p:cNvSpPr>
-            <a:spLocks xmlns:a="http://schemas.openxmlformats.org/drawingml/2006/main" noGrp="1"/>
-          </p:cNvSpPr>
-          <p:nvPr/>
-        </p:nvSpPr>
-        <p:spPr>
-          <a:xfrm xmlns:a="http://schemas.openxmlformats.org/drawingml/2006/main">
-            <a:off x="4286250" y="4171950"/>
-            <a:ext cx="323850" cy="228600"/>
-          </a:xfrm>
-          <a:prstGeom xmlns:a="http://schemas.openxmlformats.org/drawingml/2006/main" prst="rect">
-            <a:avLst/>
-          </a:prstGeom>
-          <a:noFill xmlns:a="http://schemas.openxmlformats.org/drawingml/2006/main"/>
-          <a:ln xmlns:a="http://schemas.openxmlformats.org/drawingml/2006/main" w="0">
-            <a:noFill/>
-            <a:prstDash val="solid"/>
-          </a:ln>
-        </p:spPr>
-        <p:txBody>
-          <a:bodyPr xmlns:a="http://schemas.openxmlformats.org/drawingml/2006/main"/>
-          <a:lstStyle xmlns:a="http://schemas.openxmlformats.org/drawingml/2006/main"/>
-          <a:p xmlns:a="http://schemas.openxmlformats.org/drawingml/2006/main">
-            <a:pPr>
-              <a:defRPr sz="975" b="1">
-                <a:solidFill>
-                  <a:srgbClr val="FF6412"/>
-                </a:solidFill>
-              </a:defRPr>
-            </a:pPr>
-            <a:r>
-              <a:rPr sz="975" b="1">
-                <a:solidFill>
-                  <a:srgbClr val="FF6412"/>
-                </a:solidFill>
-              </a:rPr>
-              <a:t>02</a:t>
-            </a:r>
-          </a:p>
-        </p:txBody>
-      </p:sp>
-      <p:sp>
-        <p:nvSpPr>
-          <p:cNvPr id="29" name="">
-            <a:extLst xmlns:a="http://schemas.openxmlformats.org/drawingml/2006/main">
-              <a:ext uri="{FF2B5EF4-FFF2-40B4-BE49-F238E27FC236}">
-                <a16:creationId xmlns:a16="http://schemas.microsoft.com/office/drawing/2014/main" id="{740FEB1C-471E-43E0-B23B-51C81F4334EF}"/>
-              </a:ext>
-            </a:extLst>
-          </p:cNvPr>
-          <p:cNvSpPr>
-            <a:spLocks xmlns:a="http://schemas.openxmlformats.org/drawingml/2006/main" noGrp="1"/>
-          </p:cNvSpPr>
-          <p:nvPr/>
-        </p:nvSpPr>
-        <p:spPr>
-          <a:xfrm xmlns:a="http://schemas.openxmlformats.org/drawingml/2006/main">
-            <a:off x="4686300" y="4114800"/>
-            <a:ext cx="2781300" cy="819150"/>
-          </a:xfrm>
-          <a:prstGeom xmlns:a="http://schemas.openxmlformats.org/drawingml/2006/main" prst="rect">
-            <a:avLst/>
-          </a:prstGeom>
-          <a:noFill xmlns:a="http://schemas.openxmlformats.org/drawingml/2006/main"/>
-          <a:ln xmlns:a="http://schemas.openxmlformats.org/drawingml/2006/main" w="0">
-            <a:noFill/>
-            <a:prstDash val="solid"/>
-          </a:ln>
-        </p:spPr>
-        <p:txBody>
-          <a:bodyPr xmlns:a="http://schemas.openxmlformats.org/drawingml/2006/main"/>
-          <a:lstStyle xmlns:a="http://schemas.openxmlformats.org/drawingml/2006/main"/>
-          <a:p xmlns:a="http://schemas.openxmlformats.org/drawingml/2006/main">
-            <a:pPr>
-              <a:defRPr sz="1125">
-                <a:solidFill>
-                  <a:srgbClr val="161616"/>
-                </a:solidFill>
-              </a:defRPr>
-            </a:pPr>
-            <a:r>
-              <a:rPr sz="1125">
-                <a:solidFill>
-                  <a:srgbClr val="161616"/>
-                </a:solidFill>
-              </a:rPr>
-              <a:t>{{ROADMAP_2_2}}</a:t>
-            </a:r>
-          </a:p>
-        </p:txBody>
-      </p:sp>
-      <p:sp>
-        <p:nvSpPr>
-          <p:cNvPr id="30" name="">
-            <a:extLst xmlns:a="http://schemas.openxmlformats.org/drawingml/2006/main">
-              <a:ext uri="{FF2B5EF4-FFF2-40B4-BE49-F238E27FC236}">
-                <a16:creationId xmlns:a16="http://schemas.microsoft.com/office/drawing/2014/main" id="{7581329F-9C2B-4188-90C7-469DA97AFFC2}"/>
-              </a:ext>
-            </a:extLst>
-          </p:cNvPr>
-          <p:cNvSpPr>
-            <a:spLocks xmlns:a="http://schemas.openxmlformats.org/drawingml/2006/main" noGrp="1"/>
-          </p:cNvSpPr>
-          <p:nvPr/>
-        </p:nvSpPr>
-        <p:spPr>
-          <a:xfrm xmlns:a="http://schemas.openxmlformats.org/drawingml/2006/main">
-            <a:off x="4286250" y="5162550"/>
-            <a:ext cx="3181350" cy="762000"/>
+                <a16:creationId xmlns:a16="http://schemas.microsoft.com/office/drawing/2014/main" id="{E0C2543B-E057-4A8B-AB2F-DC5252BE73A3}"/>
+              </a:ext>
+            </a:extLst>
+          </p:cNvPr>
+          <p:cNvSpPr>
+            <a:spLocks xmlns:a="http://schemas.openxmlformats.org/drawingml/2006/main" noGrp="1"/>
+          </p:cNvSpPr>
+          <p:nvPr/>
+        </p:nvSpPr>
+        <p:spPr>
+          <a:xfrm xmlns:a="http://schemas.openxmlformats.org/drawingml/2006/main">
+            <a:off x="9505950" y="1885950"/>
+            <a:ext cx="1524000" cy="990600"/>
           </a:xfrm>
           <a:prstGeom xmlns:a="http://schemas.openxmlformats.org/drawingml/2006/main" prst="roundRect">
             <a:avLst>
-              <a:gd name="adj" fmla="val 10000"/>
+              <a:gd name="adj" fmla="val 7692"/>
             </a:avLst>
           </a:prstGeom>
           <a:solidFill xmlns:a="http://schemas.openxmlformats.org/drawingml/2006/main">
-            <a:srgbClr val="FFF3EB"/>
+            <a:srgbClr val="FFFFFF"/>
           </a:solidFill>
           <a:ln xmlns:a="http://schemas.openxmlformats.org/drawingml/2006/main" w="9525">
             <a:solidFill>
@@ -5747,203 +5235,122 @@
       </p:sp>
       <p:sp>
         <p:nvSpPr>
-          <p:cNvPr id="31" name="">
-            <a:extLst xmlns:a="http://schemas.openxmlformats.org/drawingml/2006/main">
-              <a:ext uri="{FF2B5EF4-FFF2-40B4-BE49-F238E27FC236}">
-                <a16:creationId xmlns:a16="http://schemas.microsoft.com/office/drawing/2014/main" id="{43FD790F-49E4-4D08-AA70-87BC4F9126E7}"/>
-              </a:ext>
-            </a:extLst>
-          </p:cNvPr>
-          <p:cNvSpPr>
-            <a:spLocks xmlns:a="http://schemas.openxmlformats.org/drawingml/2006/main" noGrp="1"/>
-          </p:cNvSpPr>
-          <p:nvPr/>
-        </p:nvSpPr>
-        <p:spPr>
-          <a:xfrm xmlns:a="http://schemas.openxmlformats.org/drawingml/2006/main">
-            <a:off x="4438650" y="5286375"/>
-            <a:ext cx="2876550" cy="171450"/>
-          </a:xfrm>
-          <a:prstGeom xmlns:a="http://schemas.openxmlformats.org/drawingml/2006/main" prst="rect">
-            <a:avLst/>
-          </a:prstGeom>
-          <a:noFill xmlns:a="http://schemas.openxmlformats.org/drawingml/2006/main"/>
-          <a:ln xmlns:a="http://schemas.openxmlformats.org/drawingml/2006/main" w="0">
-            <a:noFill/>
-            <a:prstDash val="solid"/>
-          </a:ln>
-        </p:spPr>
-        <p:txBody>
-          <a:bodyPr xmlns:a="http://schemas.openxmlformats.org/drawingml/2006/main"/>
-          <a:lstStyle xmlns:a="http://schemas.openxmlformats.org/drawingml/2006/main"/>
-          <a:p xmlns:a="http://schemas.openxmlformats.org/drawingml/2006/main">
-            <a:pPr>
+          <p:cNvPr id="20" name="">
+            <a:extLst xmlns:a="http://schemas.openxmlformats.org/drawingml/2006/main">
+              <a:ext uri="{FF2B5EF4-FFF2-40B4-BE49-F238E27FC236}">
+                <a16:creationId xmlns:a16="http://schemas.microsoft.com/office/drawing/2014/main" id="{BBBB8230-C3DE-4394-8D54-B57F3B8FBF34}"/>
+              </a:ext>
+            </a:extLst>
+          </p:cNvPr>
+          <p:cNvSpPr>
+            <a:spLocks xmlns:a="http://schemas.openxmlformats.org/drawingml/2006/main" noGrp="1"/>
+          </p:cNvSpPr>
+          <p:nvPr/>
+        </p:nvSpPr>
+        <p:spPr>
+          <a:xfrm xmlns:a="http://schemas.openxmlformats.org/drawingml/2006/main">
+            <a:off x="9620250" y="1981200"/>
+            <a:ext cx="1295400" cy="171450"/>
+          </a:xfrm>
+          <a:prstGeom xmlns:a="http://schemas.openxmlformats.org/drawingml/2006/main" prst="rect">
+            <a:avLst/>
+          </a:prstGeom>
+          <a:noFill xmlns:a="http://schemas.openxmlformats.org/drawingml/2006/main"/>
+          <a:ln xmlns:a="http://schemas.openxmlformats.org/drawingml/2006/main" w="0">
+            <a:noFill/>
+            <a:prstDash val="solid"/>
+          </a:ln>
+        </p:spPr>
+        <p:txBody>
+          <a:bodyPr xmlns:a="http://schemas.openxmlformats.org/drawingml/2006/main"/>
+          <a:lstStyle xmlns:a="http://schemas.openxmlformats.org/drawingml/2006/main"/>
+          <a:p xmlns:a="http://schemas.openxmlformats.org/drawingml/2006/main">
+            <a:pPr algn="ctr">
+              <a:defRPr sz="675" b="1">
+                <a:solidFill>
+                  <a:srgbClr val="FF6412"/>
+                </a:solidFill>
+              </a:defRPr>
+            </a:pPr>
+            <a:r>
+              <a:rPr sz="675" b="1">
+                <a:solidFill>
+                  <a:srgbClr val="FF6412"/>
+                </a:solidFill>
+              </a:rPr>
+              <a:t>РЕЗУЛЬТАТ</a:t>
+            </a:r>
+          </a:p>
+        </p:txBody>
+      </p:sp>
+      <p:sp>
+        <p:nvSpPr>
+          <p:cNvPr id="21" name="">
+            <a:extLst xmlns:a="http://schemas.openxmlformats.org/drawingml/2006/main">
+              <a:ext uri="{FF2B5EF4-FFF2-40B4-BE49-F238E27FC236}">
+                <a16:creationId xmlns:a16="http://schemas.microsoft.com/office/drawing/2014/main" id="{CA720A26-6F4C-4F4A-81C1-FAA7A541CA6F}"/>
+              </a:ext>
+            </a:extLst>
+          </p:cNvPr>
+          <p:cNvSpPr>
+            <a:spLocks xmlns:a="http://schemas.openxmlformats.org/drawingml/2006/main" noGrp="1"/>
+          </p:cNvSpPr>
+          <p:nvPr/>
+        </p:nvSpPr>
+        <p:spPr>
+          <a:xfrm xmlns:a="http://schemas.openxmlformats.org/drawingml/2006/main">
+            <a:off x="9620250" y="2190750"/>
+            <a:ext cx="1295400" cy="609600"/>
+          </a:xfrm>
+          <a:prstGeom xmlns:a="http://schemas.openxmlformats.org/drawingml/2006/main" prst="rect">
+            <a:avLst/>
+          </a:prstGeom>
+          <a:noFill xmlns:a="http://schemas.openxmlformats.org/drawingml/2006/main"/>
+          <a:ln xmlns:a="http://schemas.openxmlformats.org/drawingml/2006/main" w="0">
+            <a:noFill/>
+            <a:prstDash val="solid"/>
+          </a:ln>
+        </p:spPr>
+        <p:txBody>
+          <a:bodyPr xmlns:a="http://schemas.openxmlformats.org/drawingml/2006/main"/>
+          <a:lstStyle xmlns:a="http://schemas.openxmlformats.org/drawingml/2006/main"/>
+          <a:p xmlns:a="http://schemas.openxmlformats.org/drawingml/2006/main">
+            <a:pPr algn="ctr">
               <a:defRPr sz="750" b="1">
                 <a:solidFill>
-                  <a:srgbClr val="FF6412"/>
+                  <a:srgbClr val="161616"/>
                 </a:solidFill>
               </a:defRPr>
             </a:pPr>
             <a:r>
               <a:rPr sz="750" b="1">
                 <a:solidFill>
-                  <a:srgbClr val="FF6412"/>
-                </a:solidFill>
-              </a:rPr>
-              <a:t>ЧТО ДАСТ ЭТАП</a:t>
-            </a:r>
-          </a:p>
-        </p:txBody>
-      </p:sp>
-      <p:sp>
-        <p:nvSpPr>
-          <p:cNvPr id="32" name="">
-            <a:extLst xmlns:a="http://schemas.openxmlformats.org/drawingml/2006/main">
-              <a:ext uri="{FF2B5EF4-FFF2-40B4-BE49-F238E27FC236}">
-                <a16:creationId xmlns:a16="http://schemas.microsoft.com/office/drawing/2014/main" id="{47E7F23E-0332-4994-BF1E-676AB070BB73}"/>
-              </a:ext>
-            </a:extLst>
-          </p:cNvPr>
-          <p:cNvSpPr>
-            <a:spLocks xmlns:a="http://schemas.openxmlformats.org/drawingml/2006/main" noGrp="1"/>
-          </p:cNvSpPr>
-          <p:nvPr/>
-        </p:nvSpPr>
-        <p:spPr>
-          <a:xfrm xmlns:a="http://schemas.openxmlformats.org/drawingml/2006/main">
-            <a:off x="4438650" y="5514975"/>
-            <a:ext cx="2876550" cy="323850"/>
-          </a:xfrm>
-          <a:prstGeom xmlns:a="http://schemas.openxmlformats.org/drawingml/2006/main" prst="rect">
-            <a:avLst/>
-          </a:prstGeom>
-          <a:noFill xmlns:a="http://schemas.openxmlformats.org/drawingml/2006/main"/>
-          <a:ln xmlns:a="http://schemas.openxmlformats.org/drawingml/2006/main" w="0">
-            <a:noFill/>
-            <a:prstDash val="solid"/>
-          </a:ln>
-        </p:spPr>
-        <p:txBody>
-          <a:bodyPr xmlns:a="http://schemas.openxmlformats.org/drawingml/2006/main"/>
-          <a:lstStyle xmlns:a="http://schemas.openxmlformats.org/drawingml/2006/main"/>
-          <a:p xmlns:a="http://schemas.openxmlformats.org/drawingml/2006/main">
-            <a:pPr>
-              <a:defRPr sz="975" b="1">
-                <a:solidFill>
-                  <a:srgbClr val="161616"/>
-                </a:solidFill>
-              </a:defRPr>
-            </a:pPr>
-            <a:r>
-              <a:rPr sz="975" b="1">
-                <a:solidFill>
-                  <a:srgbClr val="161616"/>
-                </a:solidFill>
-              </a:rPr>
-              <a:t>{{ROADMAP_2_RESULT}}</a:t>
-            </a:r>
-          </a:p>
-        </p:txBody>
-      </p:sp>
-      <p:sp>
-        <p:nvSpPr>
-          <p:cNvPr id="33" name="">
-            <a:extLst xmlns:a="http://schemas.openxmlformats.org/drawingml/2006/main">
-              <a:ext uri="{FF2B5EF4-FFF2-40B4-BE49-F238E27FC236}">
-                <a16:creationId xmlns:a16="http://schemas.microsoft.com/office/drawing/2014/main" id="{66760AB1-0944-4D77-BA40-C42019BE57E2}"/>
-              </a:ext>
-            </a:extLst>
-          </p:cNvPr>
-          <p:cNvSpPr>
-            <a:spLocks xmlns:a="http://schemas.openxmlformats.org/drawingml/2006/main" noGrp="1"/>
-          </p:cNvSpPr>
-          <p:nvPr/>
-        </p:nvSpPr>
-        <p:spPr>
-          <a:xfrm xmlns:a="http://schemas.openxmlformats.org/drawingml/2006/main">
-            <a:off x="7705725" y="2628900"/>
-            <a:ext cx="9525" cy="3295650"/>
-          </a:xfrm>
-          <a:prstGeom xmlns:a="http://schemas.openxmlformats.org/drawingml/2006/main" prst="rect">
-            <a:avLst/>
-          </a:prstGeom>
-          <a:solidFill xmlns:a="http://schemas.openxmlformats.org/drawingml/2006/main">
-            <a:srgbClr val="E4E7EC"/>
-          </a:solidFill>
-          <a:ln xmlns:a="http://schemas.openxmlformats.org/drawingml/2006/main" w="0">
-            <a:noFill/>
-            <a:prstDash val="solid"/>
-          </a:ln>
-        </p:spPr>
-      </p:sp>
-      <p:sp>
-        <p:nvSpPr>
-          <p:cNvPr id="34" name="">
-            <a:extLst xmlns:a="http://schemas.openxmlformats.org/drawingml/2006/main">
-              <a:ext uri="{FF2B5EF4-FFF2-40B4-BE49-F238E27FC236}">
-                <a16:creationId xmlns:a16="http://schemas.microsoft.com/office/drawing/2014/main" id="{B179FAE5-0219-479B-B379-250C27C7BFAD}"/>
-              </a:ext>
-            </a:extLst>
-          </p:cNvPr>
-          <p:cNvSpPr>
-            <a:spLocks xmlns:a="http://schemas.openxmlformats.org/drawingml/2006/main" noGrp="1"/>
-          </p:cNvSpPr>
-          <p:nvPr/>
-        </p:nvSpPr>
-        <p:spPr>
-          <a:xfrm xmlns:a="http://schemas.openxmlformats.org/drawingml/2006/main">
-            <a:off x="7829550" y="1752600"/>
-            <a:ext cx="3371850" cy="266700"/>
-          </a:xfrm>
-          <a:prstGeom xmlns:a="http://schemas.openxmlformats.org/drawingml/2006/main" prst="rect">
-            <a:avLst/>
-          </a:prstGeom>
-          <a:noFill xmlns:a="http://schemas.openxmlformats.org/drawingml/2006/main"/>
-          <a:ln xmlns:a="http://schemas.openxmlformats.org/drawingml/2006/main" w="0">
-            <a:noFill/>
-            <a:prstDash val="solid"/>
-          </a:ln>
-        </p:spPr>
-        <p:txBody>
-          <a:bodyPr xmlns:a="http://schemas.openxmlformats.org/drawingml/2006/main"/>
-          <a:lstStyle xmlns:a="http://schemas.openxmlformats.org/drawingml/2006/main"/>
-          <a:p xmlns:a="http://schemas.openxmlformats.org/drawingml/2006/main">
-            <a:pPr algn="ctr">
-              <a:defRPr sz="1275" b="1">
-                <a:solidFill>
-                  <a:srgbClr val="161616"/>
-                </a:solidFill>
-              </a:defRPr>
-            </a:pPr>
-            <a:r>
-              <a:rPr sz="1275" b="1">
-                <a:solidFill>
-                  <a:srgbClr val="161616"/>
-                </a:solidFill>
-              </a:rPr>
-              <a:t>61–90 дней</a:t>
-            </a:r>
-          </a:p>
-        </p:txBody>
-      </p:sp>
-      <p:sp>
-        <p:nvSpPr>
-          <p:cNvPr id="35" name="">
-            <a:extLst xmlns:a="http://schemas.openxmlformats.org/drawingml/2006/main">
-              <a:ext uri="{FF2B5EF4-FFF2-40B4-BE49-F238E27FC236}">
-                <a16:creationId xmlns:a16="http://schemas.microsoft.com/office/drawing/2014/main" id="{11FC3819-26F5-481A-B3DF-5041B7CB1D31}"/>
-              </a:ext>
-            </a:extLst>
-          </p:cNvPr>
-          <p:cNvSpPr>
-            <a:spLocks xmlns:a="http://schemas.openxmlformats.org/drawingml/2006/main" noGrp="1"/>
-          </p:cNvSpPr>
-          <p:nvPr/>
-        </p:nvSpPr>
-        <p:spPr>
-          <a:xfrm xmlns:a="http://schemas.openxmlformats.org/drawingml/2006/main">
-            <a:off x="9267825" y="1924050"/>
-            <a:ext cx="495300" cy="495300"/>
+                  <a:srgbClr val="161616"/>
+                </a:solidFill>
+              </a:rPr>
+              <a:t>{{ROADMAP_1_RESULT}}</a:t>
+            </a:r>
+          </a:p>
+        </p:txBody>
+      </p:sp>
+      <p:sp>
+        <p:nvSpPr>
+          <p:cNvPr id="22" name="">
+            <a:extLst xmlns:a="http://schemas.openxmlformats.org/drawingml/2006/main">
+              <a:ext uri="{FF2B5EF4-FFF2-40B4-BE49-F238E27FC236}">
+                <a16:creationId xmlns:a16="http://schemas.microsoft.com/office/drawing/2014/main" id="{ED7BCE37-39D3-4563-BB5A-E7F078AB89E0}"/>
+              </a:ext>
+            </a:extLst>
+          </p:cNvPr>
+          <p:cNvSpPr>
+            <a:spLocks xmlns:a="http://schemas.openxmlformats.org/drawingml/2006/main" noGrp="1"/>
+          </p:cNvSpPr>
+          <p:nvPr/>
+        </p:nvSpPr>
+        <p:spPr>
+          <a:xfrm xmlns:a="http://schemas.openxmlformats.org/drawingml/2006/main">
+            <a:off x="609600" y="3581400"/>
+            <a:ext cx="514350" cy="514350"/>
           </a:xfrm>
           <a:prstGeom xmlns:a="http://schemas.openxmlformats.org/drawingml/2006/main" prst="ellipse">
             <a:avLst/>
@@ -5959,22 +5366,22 @@
       </p:sp>
       <p:sp>
         <p:nvSpPr>
-          <p:cNvPr id="36" name="">
-            <a:extLst xmlns:a="http://schemas.openxmlformats.org/drawingml/2006/main">
-              <a:ext uri="{FF2B5EF4-FFF2-40B4-BE49-F238E27FC236}">
-                <a16:creationId xmlns:a16="http://schemas.microsoft.com/office/drawing/2014/main" id="{064DC81E-6070-47FF-8747-CC7588C29DD7}"/>
-              </a:ext>
-            </a:extLst>
-          </p:cNvPr>
-          <p:cNvSpPr>
-            <a:spLocks xmlns:a="http://schemas.openxmlformats.org/drawingml/2006/main" noGrp="1"/>
-          </p:cNvSpPr>
-          <p:nvPr/>
-        </p:nvSpPr>
-        <p:spPr>
-          <a:xfrm xmlns:a="http://schemas.openxmlformats.org/drawingml/2006/main">
-            <a:off x="9353550" y="2028825"/>
-            <a:ext cx="323850" cy="247650"/>
+          <p:cNvPr id="23" name="">
+            <a:extLst xmlns:a="http://schemas.openxmlformats.org/drawingml/2006/main">
+              <a:ext uri="{FF2B5EF4-FFF2-40B4-BE49-F238E27FC236}">
+                <a16:creationId xmlns:a16="http://schemas.microsoft.com/office/drawing/2014/main" id="{96D059FE-00D2-4720-9710-D6FC6556ABB9}"/>
+              </a:ext>
+            </a:extLst>
+          </p:cNvPr>
+          <p:cNvSpPr>
+            <a:spLocks xmlns:a="http://schemas.openxmlformats.org/drawingml/2006/main" noGrp="1"/>
+          </p:cNvSpPr>
+          <p:nvPr/>
+        </p:nvSpPr>
+        <p:spPr>
+          <a:xfrm xmlns:a="http://schemas.openxmlformats.org/drawingml/2006/main">
+            <a:off x="704850" y="3705225"/>
+            <a:ext cx="323850" cy="228600"/>
           </a:xfrm>
           <a:prstGeom xmlns:a="http://schemas.openxmlformats.org/drawingml/2006/main" prst="rect">
             <a:avLst/>
@@ -6002,287 +5409,37 @@
                   <a:srgbClr val="FFFFFF"/>
                 </a:solidFill>
               </a:rPr>
-              <a:t>3</a:t>
-            </a:r>
-          </a:p>
-        </p:txBody>
-      </p:sp>
-      <p:sp>
-        <p:nvSpPr>
-          <p:cNvPr id="37" name="">
-            <a:extLst xmlns:a="http://schemas.openxmlformats.org/drawingml/2006/main">
-              <a:ext uri="{FF2B5EF4-FFF2-40B4-BE49-F238E27FC236}">
-                <a16:creationId xmlns:a16="http://schemas.microsoft.com/office/drawing/2014/main" id="{25206C03-B144-4055-95F4-976641D2B7A7}"/>
-              </a:ext>
-            </a:extLst>
-          </p:cNvPr>
-          <p:cNvSpPr>
-            <a:spLocks xmlns:a="http://schemas.openxmlformats.org/drawingml/2006/main" noGrp="1"/>
-          </p:cNvSpPr>
-          <p:nvPr/>
-        </p:nvSpPr>
-        <p:spPr>
-          <a:xfrm xmlns:a="http://schemas.openxmlformats.org/drawingml/2006/main">
-            <a:off x="7924800" y="2628900"/>
-            <a:ext cx="3181350" cy="438150"/>
-          </a:xfrm>
-          <a:prstGeom xmlns:a="http://schemas.openxmlformats.org/drawingml/2006/main" prst="rect">
-            <a:avLst/>
-          </a:prstGeom>
-          <a:noFill xmlns:a="http://schemas.openxmlformats.org/drawingml/2006/main"/>
-          <a:ln xmlns:a="http://schemas.openxmlformats.org/drawingml/2006/main" w="0">
-            <a:noFill/>
-            <a:prstDash val="solid"/>
-          </a:ln>
-        </p:spPr>
-        <p:txBody>
-          <a:bodyPr xmlns:a="http://schemas.openxmlformats.org/drawingml/2006/main"/>
-          <a:lstStyle xmlns:a="http://schemas.openxmlformats.org/drawingml/2006/main"/>
-          <a:p xmlns:a="http://schemas.openxmlformats.org/drawingml/2006/main">
-            <a:pPr algn="ctr">
-              <a:defRPr sz="975" b="1">
-                <a:solidFill>
-                  <a:srgbClr val="FF6412"/>
-                </a:solidFill>
-              </a:defRPr>
-            </a:pPr>
-            <a:r>
-              <a:rPr sz="975" b="1">
-                <a:solidFill>
-                  <a:srgbClr val="FF6412"/>
-                </a:solidFill>
-              </a:rPr>
-              <a:t>МАСШТАБИРОВАНИЕ И КОНТРОЛЬ</a:t>
-            </a:r>
-          </a:p>
-        </p:txBody>
-      </p:sp>
-      <p:sp>
-        <p:nvSpPr>
-          <p:cNvPr id="38" name="">
-            <a:extLst xmlns:a="http://schemas.openxmlformats.org/drawingml/2006/main">
-              <a:ext uri="{FF2B5EF4-FFF2-40B4-BE49-F238E27FC236}">
-                <a16:creationId xmlns:a16="http://schemas.microsoft.com/office/drawing/2014/main" id="{FF68555C-8724-46A2-A549-4F356F15C384}"/>
-              </a:ext>
-            </a:extLst>
-          </p:cNvPr>
-          <p:cNvSpPr>
-            <a:spLocks xmlns:a="http://schemas.openxmlformats.org/drawingml/2006/main" noGrp="1"/>
-          </p:cNvSpPr>
-          <p:nvPr/>
-        </p:nvSpPr>
-        <p:spPr>
-          <a:xfrm xmlns:a="http://schemas.openxmlformats.org/drawingml/2006/main">
-            <a:off x="7924800" y="3257550"/>
-            <a:ext cx="323850" cy="228600"/>
-          </a:xfrm>
-          <a:prstGeom xmlns:a="http://schemas.openxmlformats.org/drawingml/2006/main" prst="rect">
-            <a:avLst/>
-          </a:prstGeom>
-          <a:noFill xmlns:a="http://schemas.openxmlformats.org/drawingml/2006/main"/>
-          <a:ln xmlns:a="http://schemas.openxmlformats.org/drawingml/2006/main" w="0">
-            <a:noFill/>
-            <a:prstDash val="solid"/>
-          </a:ln>
-        </p:spPr>
-        <p:txBody>
-          <a:bodyPr xmlns:a="http://schemas.openxmlformats.org/drawingml/2006/main"/>
-          <a:lstStyle xmlns:a="http://schemas.openxmlformats.org/drawingml/2006/main"/>
-          <a:p xmlns:a="http://schemas.openxmlformats.org/drawingml/2006/main">
-            <a:pPr>
-              <a:defRPr sz="975" b="1">
-                <a:solidFill>
-                  <a:srgbClr val="FF6412"/>
-                </a:solidFill>
-              </a:defRPr>
-            </a:pPr>
-            <a:r>
-              <a:rPr sz="975" b="1">
-                <a:solidFill>
-                  <a:srgbClr val="FF6412"/>
-                </a:solidFill>
-              </a:rPr>
-              <a:t>01</a:t>
-            </a:r>
-          </a:p>
-        </p:txBody>
-      </p:sp>
-      <p:sp>
-        <p:nvSpPr>
-          <p:cNvPr id="39" name="">
-            <a:extLst xmlns:a="http://schemas.openxmlformats.org/drawingml/2006/main">
-              <a:ext uri="{FF2B5EF4-FFF2-40B4-BE49-F238E27FC236}">
-                <a16:creationId xmlns:a16="http://schemas.microsoft.com/office/drawing/2014/main" id="{5BF43A6C-658B-4B91-A2FB-CA0B4B00442D}"/>
-              </a:ext>
-            </a:extLst>
-          </p:cNvPr>
-          <p:cNvSpPr>
-            <a:spLocks xmlns:a="http://schemas.openxmlformats.org/drawingml/2006/main" noGrp="1"/>
-          </p:cNvSpPr>
-          <p:nvPr/>
-        </p:nvSpPr>
-        <p:spPr>
-          <a:xfrm xmlns:a="http://schemas.openxmlformats.org/drawingml/2006/main">
-            <a:off x="8324850" y="3200400"/>
-            <a:ext cx="2781300" cy="819150"/>
-          </a:xfrm>
-          <a:prstGeom xmlns:a="http://schemas.openxmlformats.org/drawingml/2006/main" prst="rect">
-            <a:avLst/>
-          </a:prstGeom>
-          <a:noFill xmlns:a="http://schemas.openxmlformats.org/drawingml/2006/main"/>
-          <a:ln xmlns:a="http://schemas.openxmlformats.org/drawingml/2006/main" w="0">
-            <a:noFill/>
-            <a:prstDash val="solid"/>
-          </a:ln>
-        </p:spPr>
-        <p:txBody>
-          <a:bodyPr xmlns:a="http://schemas.openxmlformats.org/drawingml/2006/main"/>
-          <a:lstStyle xmlns:a="http://schemas.openxmlformats.org/drawingml/2006/main"/>
-          <a:p xmlns:a="http://schemas.openxmlformats.org/drawingml/2006/main">
-            <a:pPr>
-              <a:defRPr sz="1125">
-                <a:solidFill>
-                  <a:srgbClr val="161616"/>
-                </a:solidFill>
-              </a:defRPr>
-            </a:pPr>
-            <a:r>
-              <a:rPr sz="1125">
-                <a:solidFill>
-                  <a:srgbClr val="161616"/>
-                </a:solidFill>
-              </a:rPr>
-              <a:t>{{ROADMAP_3_1}}</a:t>
-            </a:r>
-          </a:p>
-        </p:txBody>
-      </p:sp>
-      <p:sp>
-        <p:nvSpPr>
-          <p:cNvPr id="40" name="">
-            <a:extLst xmlns:a="http://schemas.openxmlformats.org/drawingml/2006/main">
-              <a:ext uri="{FF2B5EF4-FFF2-40B4-BE49-F238E27FC236}">
-                <a16:creationId xmlns:a16="http://schemas.microsoft.com/office/drawing/2014/main" id="{C9FC33A1-545F-4BE4-A862-68D866200D8F}"/>
-              </a:ext>
-            </a:extLst>
-          </p:cNvPr>
-          <p:cNvSpPr>
-            <a:spLocks xmlns:a="http://schemas.openxmlformats.org/drawingml/2006/main" noGrp="1"/>
-          </p:cNvSpPr>
-          <p:nvPr/>
-        </p:nvSpPr>
-        <p:spPr>
-          <a:xfrm xmlns:a="http://schemas.openxmlformats.org/drawingml/2006/main">
-            <a:off x="7924800" y="4171950"/>
-            <a:ext cx="323850" cy="228600"/>
-          </a:xfrm>
-          <a:prstGeom xmlns:a="http://schemas.openxmlformats.org/drawingml/2006/main" prst="rect">
-            <a:avLst/>
-          </a:prstGeom>
-          <a:noFill xmlns:a="http://schemas.openxmlformats.org/drawingml/2006/main"/>
-          <a:ln xmlns:a="http://schemas.openxmlformats.org/drawingml/2006/main" w="0">
-            <a:noFill/>
-            <a:prstDash val="solid"/>
-          </a:ln>
-        </p:spPr>
-        <p:txBody>
-          <a:bodyPr xmlns:a="http://schemas.openxmlformats.org/drawingml/2006/main"/>
-          <a:lstStyle xmlns:a="http://schemas.openxmlformats.org/drawingml/2006/main"/>
-          <a:p xmlns:a="http://schemas.openxmlformats.org/drawingml/2006/main">
-            <a:pPr>
-              <a:defRPr sz="975" b="1">
-                <a:solidFill>
-                  <a:srgbClr val="FF6412"/>
-                </a:solidFill>
-              </a:defRPr>
-            </a:pPr>
-            <a:r>
-              <a:rPr sz="975" b="1">
-                <a:solidFill>
-                  <a:srgbClr val="FF6412"/>
-                </a:solidFill>
-              </a:rPr>
-              <a:t>02</a:t>
-            </a:r>
-          </a:p>
-        </p:txBody>
-      </p:sp>
-      <p:sp>
-        <p:nvSpPr>
-          <p:cNvPr id="41" name="">
-            <a:extLst xmlns:a="http://schemas.openxmlformats.org/drawingml/2006/main">
-              <a:ext uri="{FF2B5EF4-FFF2-40B4-BE49-F238E27FC236}">
-                <a16:creationId xmlns:a16="http://schemas.microsoft.com/office/drawing/2014/main" id="{9001AD3B-7BB7-4FC0-8DA1-F16B6B0B6BF9}"/>
-              </a:ext>
-            </a:extLst>
-          </p:cNvPr>
-          <p:cNvSpPr>
-            <a:spLocks xmlns:a="http://schemas.openxmlformats.org/drawingml/2006/main" noGrp="1"/>
-          </p:cNvSpPr>
-          <p:nvPr/>
-        </p:nvSpPr>
-        <p:spPr>
-          <a:xfrm xmlns:a="http://schemas.openxmlformats.org/drawingml/2006/main">
-            <a:off x="8324850" y="4114800"/>
-            <a:ext cx="2781300" cy="819150"/>
-          </a:xfrm>
-          <a:prstGeom xmlns:a="http://schemas.openxmlformats.org/drawingml/2006/main" prst="rect">
-            <a:avLst/>
-          </a:prstGeom>
-          <a:noFill xmlns:a="http://schemas.openxmlformats.org/drawingml/2006/main"/>
-          <a:ln xmlns:a="http://schemas.openxmlformats.org/drawingml/2006/main" w="0">
-            <a:noFill/>
-            <a:prstDash val="solid"/>
-          </a:ln>
-        </p:spPr>
-        <p:txBody>
-          <a:bodyPr xmlns:a="http://schemas.openxmlformats.org/drawingml/2006/main"/>
-          <a:lstStyle xmlns:a="http://schemas.openxmlformats.org/drawingml/2006/main"/>
-          <a:p xmlns:a="http://schemas.openxmlformats.org/drawingml/2006/main">
-            <a:pPr>
-              <a:defRPr sz="1125">
-                <a:solidFill>
-                  <a:srgbClr val="161616"/>
-                </a:solidFill>
-              </a:defRPr>
-            </a:pPr>
-            <a:r>
-              <a:rPr sz="1125">
-                <a:solidFill>
-                  <a:srgbClr val="161616"/>
-                </a:solidFill>
-              </a:rPr>
-              <a:t>{{ROADMAP_3_2}}</a:t>
-            </a:r>
-          </a:p>
-        </p:txBody>
-      </p:sp>
-      <p:sp>
-        <p:nvSpPr>
-          <p:cNvPr id="42" name="">
-            <a:extLst xmlns:a="http://schemas.openxmlformats.org/drawingml/2006/main">
-              <a:ext uri="{FF2B5EF4-FFF2-40B4-BE49-F238E27FC236}">
-                <a16:creationId xmlns:a16="http://schemas.microsoft.com/office/drawing/2014/main" id="{3EA0D391-81DE-43BA-98A1-DDDA79E294B5}"/>
-              </a:ext>
-            </a:extLst>
-          </p:cNvPr>
-          <p:cNvSpPr>
-            <a:spLocks xmlns:a="http://schemas.openxmlformats.org/drawingml/2006/main" noGrp="1"/>
-          </p:cNvSpPr>
-          <p:nvPr/>
-        </p:nvSpPr>
-        <p:spPr>
-          <a:xfrm xmlns:a="http://schemas.openxmlformats.org/drawingml/2006/main">
-            <a:off x="7924800" y="5162550"/>
-            <a:ext cx="3181350" cy="762000"/>
+              <a:t>2</a:t>
+            </a:r>
+          </a:p>
+        </p:txBody>
+      </p:sp>
+      <p:sp>
+        <p:nvSpPr>
+          <p:cNvPr id="24" name="">
+            <a:extLst xmlns:a="http://schemas.openxmlformats.org/drawingml/2006/main">
+              <a:ext uri="{FF2B5EF4-FFF2-40B4-BE49-F238E27FC236}">
+                <a16:creationId xmlns:a16="http://schemas.microsoft.com/office/drawing/2014/main" id="{25F79F60-96D2-4FC7-99F1-A76C7EFD04A9}"/>
+              </a:ext>
+            </a:extLst>
+          </p:cNvPr>
+          <p:cNvSpPr>
+            <a:spLocks xmlns:a="http://schemas.openxmlformats.org/drawingml/2006/main" noGrp="1"/>
+          </p:cNvSpPr>
+          <p:nvPr/>
+        </p:nvSpPr>
+        <p:spPr>
+          <a:xfrm xmlns:a="http://schemas.openxmlformats.org/drawingml/2006/main">
+            <a:off x="1390650" y="3219450"/>
+            <a:ext cx="9810750" cy="1257300"/>
           </a:xfrm>
           <a:prstGeom xmlns:a="http://schemas.openxmlformats.org/drawingml/2006/main" prst="roundRect">
             <a:avLst>
-              <a:gd name="adj" fmla="val 10000"/>
+              <a:gd name="adj" fmla="val 6061"/>
             </a:avLst>
           </a:prstGeom>
           <a:solidFill xmlns:a="http://schemas.openxmlformats.org/drawingml/2006/main">
-            <a:srgbClr val="FFF3EB"/>
+            <a:srgbClr val="FFFFFF"/>
           </a:solidFill>
           <a:ln xmlns:a="http://schemas.openxmlformats.org/drawingml/2006/main" w="9525">
             <a:solidFill>
@@ -6294,95 +5451,981 @@
       </p:sp>
       <p:sp>
         <p:nvSpPr>
+          <p:cNvPr id="25" name="">
+            <a:extLst xmlns:a="http://schemas.openxmlformats.org/drawingml/2006/main">
+              <a:ext uri="{FF2B5EF4-FFF2-40B4-BE49-F238E27FC236}">
+                <a16:creationId xmlns:a16="http://schemas.microsoft.com/office/drawing/2014/main" id="{C9BE4A4C-EFD4-49CC-9DBA-9E34CE182D05}"/>
+              </a:ext>
+            </a:extLst>
+          </p:cNvPr>
+          <p:cNvSpPr>
+            <a:spLocks xmlns:a="http://schemas.openxmlformats.org/drawingml/2006/main" noGrp="1"/>
+          </p:cNvSpPr>
+          <p:nvPr/>
+        </p:nvSpPr>
+        <p:spPr>
+          <a:xfrm xmlns:a="http://schemas.openxmlformats.org/drawingml/2006/main">
+            <a:off x="1619250" y="3371850"/>
+            <a:ext cx="1409700" cy="228600"/>
+          </a:xfrm>
+          <a:prstGeom xmlns:a="http://schemas.openxmlformats.org/drawingml/2006/main" prst="rect">
+            <a:avLst/>
+          </a:prstGeom>
+          <a:noFill xmlns:a="http://schemas.openxmlformats.org/drawingml/2006/main"/>
+          <a:ln xmlns:a="http://schemas.openxmlformats.org/drawingml/2006/main" w="0">
+            <a:noFill/>
+            <a:prstDash val="solid"/>
+          </a:ln>
+        </p:spPr>
+        <p:txBody>
+          <a:bodyPr xmlns:a="http://schemas.openxmlformats.org/drawingml/2006/main"/>
+          <a:lstStyle xmlns:a="http://schemas.openxmlformats.org/drawingml/2006/main"/>
+          <a:p xmlns:a="http://schemas.openxmlformats.org/drawingml/2006/main">
+            <a:pPr>
+              <a:defRPr sz="1125" b="1">
+                <a:solidFill>
+                  <a:srgbClr val="FF6412"/>
+                </a:solidFill>
+              </a:defRPr>
+            </a:pPr>
+            <a:r>
+              <a:rPr sz="1125" b="1">
+                <a:solidFill>
+                  <a:srgbClr val="FF6412"/>
+                </a:solidFill>
+              </a:rPr>
+              <a:t>31–60 дней</a:t>
+            </a:r>
+          </a:p>
+        </p:txBody>
+      </p:sp>
+      <p:sp>
+        <p:nvSpPr>
+          <p:cNvPr id="26" name="">
+            <a:extLst xmlns:a="http://schemas.openxmlformats.org/drawingml/2006/main">
+              <a:ext uri="{FF2B5EF4-FFF2-40B4-BE49-F238E27FC236}">
+                <a16:creationId xmlns:a16="http://schemas.microsoft.com/office/drawing/2014/main" id="{837F4EF2-C991-4DFC-A8A5-B2929FCFC1E9}"/>
+              </a:ext>
+            </a:extLst>
+          </p:cNvPr>
+          <p:cNvSpPr>
+            <a:spLocks xmlns:a="http://schemas.openxmlformats.org/drawingml/2006/main" noGrp="1"/>
+          </p:cNvSpPr>
+          <p:nvPr/>
+        </p:nvSpPr>
+        <p:spPr>
+          <a:xfrm xmlns:a="http://schemas.openxmlformats.org/drawingml/2006/main">
+            <a:off x="1619250" y="3657600"/>
+            <a:ext cx="2381250" cy="495300"/>
+          </a:xfrm>
+          <a:prstGeom xmlns:a="http://schemas.openxmlformats.org/drawingml/2006/main" prst="rect">
+            <a:avLst/>
+          </a:prstGeom>
+          <a:noFill xmlns:a="http://schemas.openxmlformats.org/drawingml/2006/main"/>
+          <a:ln xmlns:a="http://schemas.openxmlformats.org/drawingml/2006/main" w="0">
+            <a:noFill/>
+            <a:prstDash val="solid"/>
+          </a:ln>
+        </p:spPr>
+        <p:txBody>
+          <a:bodyPr xmlns:a="http://schemas.openxmlformats.org/drawingml/2006/main"/>
+          <a:lstStyle xmlns:a="http://schemas.openxmlformats.org/drawingml/2006/main"/>
+          <a:p xmlns:a="http://schemas.openxmlformats.org/drawingml/2006/main">
+            <a:pPr>
+              <a:defRPr sz="1125" b="1">
+                <a:solidFill>
+                  <a:srgbClr val="161616"/>
+                </a:solidFill>
+              </a:defRPr>
+            </a:pPr>
+            <a:r>
+              <a:rPr sz="1125" b="1">
+                <a:solidFill>
+                  <a:srgbClr val="161616"/>
+                </a:solidFill>
+              </a:rPr>
+              <a:t>ПИЛОТЫ И РЕГЛАМЕНТЫ</a:t>
+            </a:r>
+          </a:p>
+        </p:txBody>
+      </p:sp>
+      <p:sp>
+        <p:nvSpPr>
+          <p:cNvPr id="27" name="">
+            <a:extLst xmlns:a="http://schemas.openxmlformats.org/drawingml/2006/main">
+              <a:ext uri="{FF2B5EF4-FFF2-40B4-BE49-F238E27FC236}">
+                <a16:creationId xmlns:a16="http://schemas.microsoft.com/office/drawing/2014/main" id="{2F1C3D32-4D80-47F5-A7FE-56C761913525}"/>
+              </a:ext>
+            </a:extLst>
+          </p:cNvPr>
+          <p:cNvSpPr>
+            <a:spLocks xmlns:a="http://schemas.openxmlformats.org/drawingml/2006/main" noGrp="1"/>
+          </p:cNvSpPr>
+          <p:nvPr/>
+        </p:nvSpPr>
+        <p:spPr>
+          <a:xfrm xmlns:a="http://schemas.openxmlformats.org/drawingml/2006/main">
+            <a:off x="4210050" y="3419475"/>
+            <a:ext cx="304800" cy="190500"/>
+          </a:xfrm>
+          <a:prstGeom xmlns:a="http://schemas.openxmlformats.org/drawingml/2006/main" prst="rect">
+            <a:avLst/>
+          </a:prstGeom>
+          <a:noFill xmlns:a="http://schemas.openxmlformats.org/drawingml/2006/main"/>
+          <a:ln xmlns:a="http://schemas.openxmlformats.org/drawingml/2006/main" w="0">
+            <a:noFill/>
+            <a:prstDash val="solid"/>
+          </a:ln>
+        </p:spPr>
+        <p:txBody>
+          <a:bodyPr xmlns:a="http://schemas.openxmlformats.org/drawingml/2006/main"/>
+          <a:lstStyle xmlns:a="http://schemas.openxmlformats.org/drawingml/2006/main"/>
+          <a:p xmlns:a="http://schemas.openxmlformats.org/drawingml/2006/main">
+            <a:pPr>
+              <a:defRPr sz="825" b="1">
+                <a:solidFill>
+                  <a:srgbClr val="FF6412"/>
+                </a:solidFill>
+              </a:defRPr>
+            </a:pPr>
+            <a:r>
+              <a:rPr sz="825" b="1">
+                <a:solidFill>
+                  <a:srgbClr val="FF6412"/>
+                </a:solidFill>
+              </a:rPr>
+              <a:t>01</a:t>
+            </a:r>
+          </a:p>
+        </p:txBody>
+      </p:sp>
+      <p:sp>
+        <p:nvSpPr>
+          <p:cNvPr id="28" name="">
+            <a:extLst xmlns:a="http://schemas.openxmlformats.org/drawingml/2006/main">
+              <a:ext uri="{FF2B5EF4-FFF2-40B4-BE49-F238E27FC236}">
+                <a16:creationId xmlns:a16="http://schemas.microsoft.com/office/drawing/2014/main" id="{AE4E8800-75F4-4FCC-B10F-2503B88D8043}"/>
+              </a:ext>
+            </a:extLst>
+          </p:cNvPr>
+          <p:cNvSpPr>
+            <a:spLocks xmlns:a="http://schemas.openxmlformats.org/drawingml/2006/main" noGrp="1"/>
+          </p:cNvSpPr>
+          <p:nvPr/>
+        </p:nvSpPr>
+        <p:spPr>
+          <a:xfrm xmlns:a="http://schemas.openxmlformats.org/drawingml/2006/main">
+            <a:off x="4572000" y="3362325"/>
+            <a:ext cx="2362200" cy="895350"/>
+          </a:xfrm>
+          <a:prstGeom xmlns:a="http://schemas.openxmlformats.org/drawingml/2006/main" prst="rect">
+            <a:avLst/>
+          </a:prstGeom>
+          <a:noFill xmlns:a="http://schemas.openxmlformats.org/drawingml/2006/main"/>
+          <a:ln xmlns:a="http://schemas.openxmlformats.org/drawingml/2006/main" w="0">
+            <a:noFill/>
+            <a:prstDash val="solid"/>
+          </a:ln>
+        </p:spPr>
+        <p:txBody>
+          <a:bodyPr xmlns:a="http://schemas.openxmlformats.org/drawingml/2006/main"/>
+          <a:lstStyle xmlns:a="http://schemas.openxmlformats.org/drawingml/2006/main"/>
+          <a:p xmlns:a="http://schemas.openxmlformats.org/drawingml/2006/main">
+            <a:pPr>
+              <a:defRPr sz="975">
+                <a:solidFill>
+                  <a:srgbClr val="161616"/>
+                </a:solidFill>
+              </a:defRPr>
+            </a:pPr>
+            <a:r>
+              <a:rPr sz="975">
+                <a:solidFill>
+                  <a:srgbClr val="161616"/>
+                </a:solidFill>
+              </a:rPr>
+              <a:t>{{ROADMAP_2_1}}</a:t>
+            </a:r>
+          </a:p>
+        </p:txBody>
+      </p:sp>
+      <p:sp>
+        <p:nvSpPr>
+          <p:cNvPr id="29" name="">
+            <a:extLst xmlns:a="http://schemas.openxmlformats.org/drawingml/2006/main">
+              <a:ext uri="{FF2B5EF4-FFF2-40B4-BE49-F238E27FC236}">
+                <a16:creationId xmlns:a16="http://schemas.microsoft.com/office/drawing/2014/main" id="{8E7E08FD-78A7-462D-AF2B-69EBD5D2AE7B}"/>
+              </a:ext>
+            </a:extLst>
+          </p:cNvPr>
+          <p:cNvSpPr>
+            <a:spLocks xmlns:a="http://schemas.openxmlformats.org/drawingml/2006/main" noGrp="1"/>
+          </p:cNvSpPr>
+          <p:nvPr/>
+        </p:nvSpPr>
+        <p:spPr>
+          <a:xfrm xmlns:a="http://schemas.openxmlformats.org/drawingml/2006/main">
+            <a:off x="7124700" y="3419475"/>
+            <a:ext cx="304800" cy="190500"/>
+          </a:xfrm>
+          <a:prstGeom xmlns:a="http://schemas.openxmlformats.org/drawingml/2006/main" prst="rect">
+            <a:avLst/>
+          </a:prstGeom>
+          <a:noFill xmlns:a="http://schemas.openxmlformats.org/drawingml/2006/main"/>
+          <a:ln xmlns:a="http://schemas.openxmlformats.org/drawingml/2006/main" w="0">
+            <a:noFill/>
+            <a:prstDash val="solid"/>
+          </a:ln>
+        </p:spPr>
+        <p:txBody>
+          <a:bodyPr xmlns:a="http://schemas.openxmlformats.org/drawingml/2006/main"/>
+          <a:lstStyle xmlns:a="http://schemas.openxmlformats.org/drawingml/2006/main"/>
+          <a:p xmlns:a="http://schemas.openxmlformats.org/drawingml/2006/main">
+            <a:pPr>
+              <a:defRPr sz="825" b="1">
+                <a:solidFill>
+                  <a:srgbClr val="FF6412"/>
+                </a:solidFill>
+              </a:defRPr>
+            </a:pPr>
+            <a:r>
+              <a:rPr sz="825" b="1">
+                <a:solidFill>
+                  <a:srgbClr val="FF6412"/>
+                </a:solidFill>
+              </a:rPr>
+              <a:t>02</a:t>
+            </a:r>
+          </a:p>
+        </p:txBody>
+      </p:sp>
+      <p:sp>
+        <p:nvSpPr>
+          <p:cNvPr id="30" name="">
+            <a:extLst xmlns:a="http://schemas.openxmlformats.org/drawingml/2006/main">
+              <a:ext uri="{FF2B5EF4-FFF2-40B4-BE49-F238E27FC236}">
+                <a16:creationId xmlns:a16="http://schemas.microsoft.com/office/drawing/2014/main" id="{CA075544-D867-49FD-A8A4-D337197DCCB6}"/>
+              </a:ext>
+            </a:extLst>
+          </p:cNvPr>
+          <p:cNvSpPr>
+            <a:spLocks xmlns:a="http://schemas.openxmlformats.org/drawingml/2006/main" noGrp="1"/>
+          </p:cNvSpPr>
+          <p:nvPr/>
+        </p:nvSpPr>
+        <p:spPr>
+          <a:xfrm xmlns:a="http://schemas.openxmlformats.org/drawingml/2006/main">
+            <a:off x="7486650" y="3362325"/>
+            <a:ext cx="1847850" cy="895350"/>
+          </a:xfrm>
+          <a:prstGeom xmlns:a="http://schemas.openxmlformats.org/drawingml/2006/main" prst="rect">
+            <a:avLst/>
+          </a:prstGeom>
+          <a:noFill xmlns:a="http://schemas.openxmlformats.org/drawingml/2006/main"/>
+          <a:ln xmlns:a="http://schemas.openxmlformats.org/drawingml/2006/main" w="0">
+            <a:noFill/>
+            <a:prstDash val="solid"/>
+          </a:ln>
+        </p:spPr>
+        <p:txBody>
+          <a:bodyPr xmlns:a="http://schemas.openxmlformats.org/drawingml/2006/main"/>
+          <a:lstStyle xmlns:a="http://schemas.openxmlformats.org/drawingml/2006/main"/>
+          <a:p xmlns:a="http://schemas.openxmlformats.org/drawingml/2006/main">
+            <a:pPr>
+              <a:defRPr sz="975">
+                <a:solidFill>
+                  <a:srgbClr val="161616"/>
+                </a:solidFill>
+              </a:defRPr>
+            </a:pPr>
+            <a:r>
+              <a:rPr sz="975">
+                <a:solidFill>
+                  <a:srgbClr val="161616"/>
+                </a:solidFill>
+              </a:rPr>
+              <a:t>{{ROADMAP_2_2}}</a:t>
+            </a:r>
+          </a:p>
+        </p:txBody>
+      </p:sp>
+      <p:sp>
+        <p:nvSpPr>
+          <p:cNvPr id="31" name="">
+            <a:extLst xmlns:a="http://schemas.openxmlformats.org/drawingml/2006/main">
+              <a:ext uri="{FF2B5EF4-FFF2-40B4-BE49-F238E27FC236}">
+                <a16:creationId xmlns:a16="http://schemas.microsoft.com/office/drawing/2014/main" id="{3A003997-1FB5-4D3F-B2C9-9CBD3C3D6F97}"/>
+              </a:ext>
+            </a:extLst>
+          </p:cNvPr>
+          <p:cNvSpPr>
+            <a:spLocks xmlns:a="http://schemas.openxmlformats.org/drawingml/2006/main" noGrp="1"/>
+          </p:cNvSpPr>
+          <p:nvPr/>
+        </p:nvSpPr>
+        <p:spPr>
+          <a:xfrm xmlns:a="http://schemas.openxmlformats.org/drawingml/2006/main">
+            <a:off x="9505950" y="3352800"/>
+            <a:ext cx="1524000" cy="990600"/>
+          </a:xfrm>
+          <a:prstGeom xmlns:a="http://schemas.openxmlformats.org/drawingml/2006/main" prst="roundRect">
+            <a:avLst>
+              <a:gd name="adj" fmla="val 7692"/>
+            </a:avLst>
+          </a:prstGeom>
+          <a:solidFill xmlns:a="http://schemas.openxmlformats.org/drawingml/2006/main">
+            <a:srgbClr val="FFFFFF"/>
+          </a:solidFill>
+          <a:ln xmlns:a="http://schemas.openxmlformats.org/drawingml/2006/main" w="9525">
+            <a:solidFill>
+              <a:srgbClr val="E4E7EC"/>
+            </a:solidFill>
+            <a:prstDash val="solid"/>
+          </a:ln>
+        </p:spPr>
+      </p:sp>
+      <p:sp>
+        <p:nvSpPr>
+          <p:cNvPr id="32" name="">
+            <a:extLst xmlns:a="http://schemas.openxmlformats.org/drawingml/2006/main">
+              <a:ext uri="{FF2B5EF4-FFF2-40B4-BE49-F238E27FC236}">
+                <a16:creationId xmlns:a16="http://schemas.microsoft.com/office/drawing/2014/main" id="{7EA09651-1576-4C85-9FB0-A0F5E5AAE7F5}"/>
+              </a:ext>
+            </a:extLst>
+          </p:cNvPr>
+          <p:cNvSpPr>
+            <a:spLocks xmlns:a="http://schemas.openxmlformats.org/drawingml/2006/main" noGrp="1"/>
+          </p:cNvSpPr>
+          <p:nvPr/>
+        </p:nvSpPr>
+        <p:spPr>
+          <a:xfrm xmlns:a="http://schemas.openxmlformats.org/drawingml/2006/main">
+            <a:off x="9620250" y="3448050"/>
+            <a:ext cx="1295400" cy="171450"/>
+          </a:xfrm>
+          <a:prstGeom xmlns:a="http://schemas.openxmlformats.org/drawingml/2006/main" prst="rect">
+            <a:avLst/>
+          </a:prstGeom>
+          <a:noFill xmlns:a="http://schemas.openxmlformats.org/drawingml/2006/main"/>
+          <a:ln xmlns:a="http://schemas.openxmlformats.org/drawingml/2006/main" w="0">
+            <a:noFill/>
+            <a:prstDash val="solid"/>
+          </a:ln>
+        </p:spPr>
+        <p:txBody>
+          <a:bodyPr xmlns:a="http://schemas.openxmlformats.org/drawingml/2006/main"/>
+          <a:lstStyle xmlns:a="http://schemas.openxmlformats.org/drawingml/2006/main"/>
+          <a:p xmlns:a="http://schemas.openxmlformats.org/drawingml/2006/main">
+            <a:pPr algn="ctr">
+              <a:defRPr sz="675" b="1">
+                <a:solidFill>
+                  <a:srgbClr val="FF6412"/>
+                </a:solidFill>
+              </a:defRPr>
+            </a:pPr>
+            <a:r>
+              <a:rPr sz="675" b="1">
+                <a:solidFill>
+                  <a:srgbClr val="FF6412"/>
+                </a:solidFill>
+              </a:rPr>
+              <a:t>РЕЗУЛЬТАТ</a:t>
+            </a:r>
+          </a:p>
+        </p:txBody>
+      </p:sp>
+      <p:sp>
+        <p:nvSpPr>
+          <p:cNvPr id="33" name="">
+            <a:extLst xmlns:a="http://schemas.openxmlformats.org/drawingml/2006/main">
+              <a:ext uri="{FF2B5EF4-FFF2-40B4-BE49-F238E27FC236}">
+                <a16:creationId xmlns:a16="http://schemas.microsoft.com/office/drawing/2014/main" id="{72EB3CD9-9257-4165-9F94-5C50EC19C93B}"/>
+              </a:ext>
+            </a:extLst>
+          </p:cNvPr>
+          <p:cNvSpPr>
+            <a:spLocks xmlns:a="http://schemas.openxmlformats.org/drawingml/2006/main" noGrp="1"/>
+          </p:cNvSpPr>
+          <p:nvPr/>
+        </p:nvSpPr>
+        <p:spPr>
+          <a:xfrm xmlns:a="http://schemas.openxmlformats.org/drawingml/2006/main">
+            <a:off x="9620250" y="3657600"/>
+            <a:ext cx="1295400" cy="609600"/>
+          </a:xfrm>
+          <a:prstGeom xmlns:a="http://schemas.openxmlformats.org/drawingml/2006/main" prst="rect">
+            <a:avLst/>
+          </a:prstGeom>
+          <a:noFill xmlns:a="http://schemas.openxmlformats.org/drawingml/2006/main"/>
+          <a:ln xmlns:a="http://schemas.openxmlformats.org/drawingml/2006/main" w="0">
+            <a:noFill/>
+            <a:prstDash val="solid"/>
+          </a:ln>
+        </p:spPr>
+        <p:txBody>
+          <a:bodyPr xmlns:a="http://schemas.openxmlformats.org/drawingml/2006/main"/>
+          <a:lstStyle xmlns:a="http://schemas.openxmlformats.org/drawingml/2006/main"/>
+          <a:p xmlns:a="http://schemas.openxmlformats.org/drawingml/2006/main">
+            <a:pPr algn="ctr">
+              <a:defRPr sz="750" b="1">
+                <a:solidFill>
+                  <a:srgbClr val="161616"/>
+                </a:solidFill>
+              </a:defRPr>
+            </a:pPr>
+            <a:r>
+              <a:rPr sz="750" b="1">
+                <a:solidFill>
+                  <a:srgbClr val="161616"/>
+                </a:solidFill>
+              </a:rPr>
+              <a:t>{{ROADMAP_2_RESULT}}</a:t>
+            </a:r>
+          </a:p>
+        </p:txBody>
+      </p:sp>
+      <p:sp>
+        <p:nvSpPr>
+          <p:cNvPr id="34" name="">
+            <a:extLst xmlns:a="http://schemas.openxmlformats.org/drawingml/2006/main">
+              <a:ext uri="{FF2B5EF4-FFF2-40B4-BE49-F238E27FC236}">
+                <a16:creationId xmlns:a16="http://schemas.microsoft.com/office/drawing/2014/main" id="{E69A8841-3E5E-43F6-A6E2-1194A0F8D159}"/>
+              </a:ext>
+            </a:extLst>
+          </p:cNvPr>
+          <p:cNvSpPr>
+            <a:spLocks xmlns:a="http://schemas.openxmlformats.org/drawingml/2006/main" noGrp="1"/>
+          </p:cNvSpPr>
+          <p:nvPr/>
+        </p:nvSpPr>
+        <p:spPr>
+          <a:xfrm xmlns:a="http://schemas.openxmlformats.org/drawingml/2006/main">
+            <a:off x="609600" y="5048250"/>
+            <a:ext cx="514350" cy="514350"/>
+          </a:xfrm>
+          <a:prstGeom xmlns:a="http://schemas.openxmlformats.org/drawingml/2006/main" prst="ellipse">
+            <a:avLst/>
+          </a:prstGeom>
+          <a:solidFill xmlns:a="http://schemas.openxmlformats.org/drawingml/2006/main">
+            <a:srgbClr val="161616"/>
+          </a:solidFill>
+          <a:ln xmlns:a="http://schemas.openxmlformats.org/drawingml/2006/main" w="0">
+            <a:noFill/>
+            <a:prstDash val="solid"/>
+          </a:ln>
+        </p:spPr>
+      </p:sp>
+      <p:sp>
+        <p:nvSpPr>
+          <p:cNvPr id="35" name="">
+            <a:extLst xmlns:a="http://schemas.openxmlformats.org/drawingml/2006/main">
+              <a:ext uri="{FF2B5EF4-FFF2-40B4-BE49-F238E27FC236}">
+                <a16:creationId xmlns:a16="http://schemas.microsoft.com/office/drawing/2014/main" id="{F8A5F240-8344-46A8-8BE4-19C85B6FC546}"/>
+              </a:ext>
+            </a:extLst>
+          </p:cNvPr>
+          <p:cNvSpPr>
+            <a:spLocks xmlns:a="http://schemas.openxmlformats.org/drawingml/2006/main" noGrp="1"/>
+          </p:cNvSpPr>
+          <p:nvPr/>
+        </p:nvSpPr>
+        <p:spPr>
+          <a:xfrm xmlns:a="http://schemas.openxmlformats.org/drawingml/2006/main">
+            <a:off x="704850" y="5172075"/>
+            <a:ext cx="323850" cy="228600"/>
+          </a:xfrm>
+          <a:prstGeom xmlns:a="http://schemas.openxmlformats.org/drawingml/2006/main" prst="rect">
+            <a:avLst/>
+          </a:prstGeom>
+          <a:noFill xmlns:a="http://schemas.openxmlformats.org/drawingml/2006/main"/>
+          <a:ln xmlns:a="http://schemas.openxmlformats.org/drawingml/2006/main" w="0">
+            <a:noFill/>
+            <a:prstDash val="solid"/>
+          </a:ln>
+        </p:spPr>
+        <p:txBody>
+          <a:bodyPr xmlns:a="http://schemas.openxmlformats.org/drawingml/2006/main"/>
+          <a:lstStyle xmlns:a="http://schemas.openxmlformats.org/drawingml/2006/main"/>
+          <a:p xmlns:a="http://schemas.openxmlformats.org/drawingml/2006/main">
+            <a:pPr algn="ctr">
+              <a:defRPr sz="1200" b="1">
+                <a:solidFill>
+                  <a:srgbClr val="FFFFFF"/>
+                </a:solidFill>
+              </a:defRPr>
+            </a:pPr>
+            <a:r>
+              <a:rPr sz="1200" b="1">
+                <a:solidFill>
+                  <a:srgbClr val="FFFFFF"/>
+                </a:solidFill>
+              </a:rPr>
+              <a:t>3</a:t>
+            </a:r>
+          </a:p>
+        </p:txBody>
+      </p:sp>
+      <p:sp>
+        <p:nvSpPr>
+          <p:cNvPr id="36" name="">
+            <a:extLst xmlns:a="http://schemas.openxmlformats.org/drawingml/2006/main">
+              <a:ext uri="{FF2B5EF4-FFF2-40B4-BE49-F238E27FC236}">
+                <a16:creationId xmlns:a16="http://schemas.microsoft.com/office/drawing/2014/main" id="{781CA71C-2B85-4128-A5A1-06979865BF43}"/>
+              </a:ext>
+            </a:extLst>
+          </p:cNvPr>
+          <p:cNvSpPr>
+            <a:spLocks xmlns:a="http://schemas.openxmlformats.org/drawingml/2006/main" noGrp="1"/>
+          </p:cNvSpPr>
+          <p:nvPr/>
+        </p:nvSpPr>
+        <p:spPr>
+          <a:xfrm xmlns:a="http://schemas.openxmlformats.org/drawingml/2006/main">
+            <a:off x="1390650" y="4686300"/>
+            <a:ext cx="9810750" cy="1257300"/>
+          </a:xfrm>
+          <a:prstGeom xmlns:a="http://schemas.openxmlformats.org/drawingml/2006/main" prst="roundRect">
+            <a:avLst>
+              <a:gd name="adj" fmla="val 6061"/>
+            </a:avLst>
+          </a:prstGeom>
+          <a:solidFill xmlns:a="http://schemas.openxmlformats.org/drawingml/2006/main">
+            <a:srgbClr val="FFFFFF"/>
+          </a:solidFill>
+          <a:ln xmlns:a="http://schemas.openxmlformats.org/drawingml/2006/main" w="9525">
+            <a:solidFill>
+              <a:srgbClr val="E4E7EC"/>
+            </a:solidFill>
+            <a:prstDash val="solid"/>
+          </a:ln>
+        </p:spPr>
+      </p:sp>
+      <p:sp>
+        <p:nvSpPr>
+          <p:cNvPr id="37" name="">
+            <a:extLst xmlns:a="http://schemas.openxmlformats.org/drawingml/2006/main">
+              <a:ext uri="{FF2B5EF4-FFF2-40B4-BE49-F238E27FC236}">
+                <a16:creationId xmlns:a16="http://schemas.microsoft.com/office/drawing/2014/main" id="{7AF78BD0-4467-4C92-8543-1BF2758BE1D5}"/>
+              </a:ext>
+            </a:extLst>
+          </p:cNvPr>
+          <p:cNvSpPr>
+            <a:spLocks xmlns:a="http://schemas.openxmlformats.org/drawingml/2006/main" noGrp="1"/>
+          </p:cNvSpPr>
+          <p:nvPr/>
+        </p:nvSpPr>
+        <p:spPr>
+          <a:xfrm xmlns:a="http://schemas.openxmlformats.org/drawingml/2006/main">
+            <a:off x="1619250" y="4838700"/>
+            <a:ext cx="1409700" cy="228600"/>
+          </a:xfrm>
+          <a:prstGeom xmlns:a="http://schemas.openxmlformats.org/drawingml/2006/main" prst="rect">
+            <a:avLst/>
+          </a:prstGeom>
+          <a:noFill xmlns:a="http://schemas.openxmlformats.org/drawingml/2006/main"/>
+          <a:ln xmlns:a="http://schemas.openxmlformats.org/drawingml/2006/main" w="0">
+            <a:noFill/>
+            <a:prstDash val="solid"/>
+          </a:ln>
+        </p:spPr>
+        <p:txBody>
+          <a:bodyPr xmlns:a="http://schemas.openxmlformats.org/drawingml/2006/main"/>
+          <a:lstStyle xmlns:a="http://schemas.openxmlformats.org/drawingml/2006/main"/>
+          <a:p xmlns:a="http://schemas.openxmlformats.org/drawingml/2006/main">
+            <a:pPr>
+              <a:defRPr sz="1125" b="1">
+                <a:solidFill>
+                  <a:srgbClr val="FF6412"/>
+                </a:solidFill>
+              </a:defRPr>
+            </a:pPr>
+            <a:r>
+              <a:rPr sz="1125" b="1">
+                <a:solidFill>
+                  <a:srgbClr val="FF6412"/>
+                </a:solidFill>
+              </a:rPr>
+              <a:t>61–90 дней</a:t>
+            </a:r>
+          </a:p>
+        </p:txBody>
+      </p:sp>
+      <p:sp>
+        <p:nvSpPr>
+          <p:cNvPr id="38" name="">
+            <a:extLst xmlns:a="http://schemas.openxmlformats.org/drawingml/2006/main">
+              <a:ext uri="{FF2B5EF4-FFF2-40B4-BE49-F238E27FC236}">
+                <a16:creationId xmlns:a16="http://schemas.microsoft.com/office/drawing/2014/main" id="{B03CFDB0-3983-4EBC-8CF3-1A25659B5FB0}"/>
+              </a:ext>
+            </a:extLst>
+          </p:cNvPr>
+          <p:cNvSpPr>
+            <a:spLocks xmlns:a="http://schemas.openxmlformats.org/drawingml/2006/main" noGrp="1"/>
+          </p:cNvSpPr>
+          <p:nvPr/>
+        </p:nvSpPr>
+        <p:spPr>
+          <a:xfrm xmlns:a="http://schemas.openxmlformats.org/drawingml/2006/main">
+            <a:off x="1619250" y="5124450"/>
+            <a:ext cx="2381250" cy="495300"/>
+          </a:xfrm>
+          <a:prstGeom xmlns:a="http://schemas.openxmlformats.org/drawingml/2006/main" prst="rect">
+            <a:avLst/>
+          </a:prstGeom>
+          <a:noFill xmlns:a="http://schemas.openxmlformats.org/drawingml/2006/main"/>
+          <a:ln xmlns:a="http://schemas.openxmlformats.org/drawingml/2006/main" w="0">
+            <a:noFill/>
+            <a:prstDash val="solid"/>
+          </a:ln>
+        </p:spPr>
+        <p:txBody>
+          <a:bodyPr xmlns:a="http://schemas.openxmlformats.org/drawingml/2006/main"/>
+          <a:lstStyle xmlns:a="http://schemas.openxmlformats.org/drawingml/2006/main"/>
+          <a:p xmlns:a="http://schemas.openxmlformats.org/drawingml/2006/main">
+            <a:pPr>
+              <a:defRPr sz="1125" b="1">
+                <a:solidFill>
+                  <a:srgbClr val="161616"/>
+                </a:solidFill>
+              </a:defRPr>
+            </a:pPr>
+            <a:r>
+              <a:rPr sz="1125" b="1">
+                <a:solidFill>
+                  <a:srgbClr val="161616"/>
+                </a:solidFill>
+              </a:rPr>
+              <a:t>МАСШТАБИРОВАНИЕ И КОНТРОЛЬ</a:t>
+            </a:r>
+          </a:p>
+        </p:txBody>
+      </p:sp>
+      <p:sp>
+        <p:nvSpPr>
+          <p:cNvPr id="39" name="">
+            <a:extLst xmlns:a="http://schemas.openxmlformats.org/drawingml/2006/main">
+              <a:ext uri="{FF2B5EF4-FFF2-40B4-BE49-F238E27FC236}">
+                <a16:creationId xmlns:a16="http://schemas.microsoft.com/office/drawing/2014/main" id="{CF59B6B9-4273-4035-9583-3771DA89AC03}"/>
+              </a:ext>
+            </a:extLst>
+          </p:cNvPr>
+          <p:cNvSpPr>
+            <a:spLocks xmlns:a="http://schemas.openxmlformats.org/drawingml/2006/main" noGrp="1"/>
+          </p:cNvSpPr>
+          <p:nvPr/>
+        </p:nvSpPr>
+        <p:spPr>
+          <a:xfrm xmlns:a="http://schemas.openxmlformats.org/drawingml/2006/main">
+            <a:off x="4210050" y="4886325"/>
+            <a:ext cx="304800" cy="190500"/>
+          </a:xfrm>
+          <a:prstGeom xmlns:a="http://schemas.openxmlformats.org/drawingml/2006/main" prst="rect">
+            <a:avLst/>
+          </a:prstGeom>
+          <a:noFill xmlns:a="http://schemas.openxmlformats.org/drawingml/2006/main"/>
+          <a:ln xmlns:a="http://schemas.openxmlformats.org/drawingml/2006/main" w="0">
+            <a:noFill/>
+            <a:prstDash val="solid"/>
+          </a:ln>
+        </p:spPr>
+        <p:txBody>
+          <a:bodyPr xmlns:a="http://schemas.openxmlformats.org/drawingml/2006/main"/>
+          <a:lstStyle xmlns:a="http://schemas.openxmlformats.org/drawingml/2006/main"/>
+          <a:p xmlns:a="http://schemas.openxmlformats.org/drawingml/2006/main">
+            <a:pPr>
+              <a:defRPr sz="825" b="1">
+                <a:solidFill>
+                  <a:srgbClr val="FF6412"/>
+                </a:solidFill>
+              </a:defRPr>
+            </a:pPr>
+            <a:r>
+              <a:rPr sz="825" b="1">
+                <a:solidFill>
+                  <a:srgbClr val="FF6412"/>
+                </a:solidFill>
+              </a:rPr>
+              <a:t>01</a:t>
+            </a:r>
+          </a:p>
+        </p:txBody>
+      </p:sp>
+      <p:sp>
+        <p:nvSpPr>
+          <p:cNvPr id="40" name="">
+            <a:extLst xmlns:a="http://schemas.openxmlformats.org/drawingml/2006/main">
+              <a:ext uri="{FF2B5EF4-FFF2-40B4-BE49-F238E27FC236}">
+                <a16:creationId xmlns:a16="http://schemas.microsoft.com/office/drawing/2014/main" id="{BC7F9F8C-3D37-436C-A7E6-53D779DA726F}"/>
+              </a:ext>
+            </a:extLst>
+          </p:cNvPr>
+          <p:cNvSpPr>
+            <a:spLocks xmlns:a="http://schemas.openxmlformats.org/drawingml/2006/main" noGrp="1"/>
+          </p:cNvSpPr>
+          <p:nvPr/>
+        </p:nvSpPr>
+        <p:spPr>
+          <a:xfrm xmlns:a="http://schemas.openxmlformats.org/drawingml/2006/main">
+            <a:off x="4572000" y="4829175"/>
+            <a:ext cx="2362200" cy="895350"/>
+          </a:xfrm>
+          <a:prstGeom xmlns:a="http://schemas.openxmlformats.org/drawingml/2006/main" prst="rect">
+            <a:avLst/>
+          </a:prstGeom>
+          <a:noFill xmlns:a="http://schemas.openxmlformats.org/drawingml/2006/main"/>
+          <a:ln xmlns:a="http://schemas.openxmlformats.org/drawingml/2006/main" w="0">
+            <a:noFill/>
+            <a:prstDash val="solid"/>
+          </a:ln>
+        </p:spPr>
+        <p:txBody>
+          <a:bodyPr xmlns:a="http://schemas.openxmlformats.org/drawingml/2006/main"/>
+          <a:lstStyle xmlns:a="http://schemas.openxmlformats.org/drawingml/2006/main"/>
+          <a:p xmlns:a="http://schemas.openxmlformats.org/drawingml/2006/main">
+            <a:pPr>
+              <a:defRPr sz="975">
+                <a:solidFill>
+                  <a:srgbClr val="161616"/>
+                </a:solidFill>
+              </a:defRPr>
+            </a:pPr>
+            <a:r>
+              <a:rPr sz="975">
+                <a:solidFill>
+                  <a:srgbClr val="161616"/>
+                </a:solidFill>
+              </a:rPr>
+              <a:t>{{ROADMAP_3_1}}</a:t>
+            </a:r>
+          </a:p>
+        </p:txBody>
+      </p:sp>
+      <p:sp>
+        <p:nvSpPr>
+          <p:cNvPr id="41" name="">
+            <a:extLst xmlns:a="http://schemas.openxmlformats.org/drawingml/2006/main">
+              <a:ext uri="{FF2B5EF4-FFF2-40B4-BE49-F238E27FC236}">
+                <a16:creationId xmlns:a16="http://schemas.microsoft.com/office/drawing/2014/main" id="{5A245226-036E-4F34-9D48-EFB48D1EDF57}"/>
+              </a:ext>
+            </a:extLst>
+          </p:cNvPr>
+          <p:cNvSpPr>
+            <a:spLocks xmlns:a="http://schemas.openxmlformats.org/drawingml/2006/main" noGrp="1"/>
+          </p:cNvSpPr>
+          <p:nvPr/>
+        </p:nvSpPr>
+        <p:spPr>
+          <a:xfrm xmlns:a="http://schemas.openxmlformats.org/drawingml/2006/main">
+            <a:off x="7124700" y="4886325"/>
+            <a:ext cx="304800" cy="190500"/>
+          </a:xfrm>
+          <a:prstGeom xmlns:a="http://schemas.openxmlformats.org/drawingml/2006/main" prst="rect">
+            <a:avLst/>
+          </a:prstGeom>
+          <a:noFill xmlns:a="http://schemas.openxmlformats.org/drawingml/2006/main"/>
+          <a:ln xmlns:a="http://schemas.openxmlformats.org/drawingml/2006/main" w="0">
+            <a:noFill/>
+            <a:prstDash val="solid"/>
+          </a:ln>
+        </p:spPr>
+        <p:txBody>
+          <a:bodyPr xmlns:a="http://schemas.openxmlformats.org/drawingml/2006/main"/>
+          <a:lstStyle xmlns:a="http://schemas.openxmlformats.org/drawingml/2006/main"/>
+          <a:p xmlns:a="http://schemas.openxmlformats.org/drawingml/2006/main">
+            <a:pPr>
+              <a:defRPr sz="825" b="1">
+                <a:solidFill>
+                  <a:srgbClr val="FF6412"/>
+                </a:solidFill>
+              </a:defRPr>
+            </a:pPr>
+            <a:r>
+              <a:rPr sz="825" b="1">
+                <a:solidFill>
+                  <a:srgbClr val="FF6412"/>
+                </a:solidFill>
+              </a:rPr>
+              <a:t>02</a:t>
+            </a:r>
+          </a:p>
+        </p:txBody>
+      </p:sp>
+      <p:sp>
+        <p:nvSpPr>
+          <p:cNvPr id="42" name="">
+            <a:extLst xmlns:a="http://schemas.openxmlformats.org/drawingml/2006/main">
+              <a:ext uri="{FF2B5EF4-FFF2-40B4-BE49-F238E27FC236}">
+                <a16:creationId xmlns:a16="http://schemas.microsoft.com/office/drawing/2014/main" id="{09EF42E9-E985-4C42-A077-87DCA969096F}"/>
+              </a:ext>
+            </a:extLst>
+          </p:cNvPr>
+          <p:cNvSpPr>
+            <a:spLocks xmlns:a="http://schemas.openxmlformats.org/drawingml/2006/main" noGrp="1"/>
+          </p:cNvSpPr>
+          <p:nvPr/>
+        </p:nvSpPr>
+        <p:spPr>
+          <a:xfrm xmlns:a="http://schemas.openxmlformats.org/drawingml/2006/main">
+            <a:off x="7486650" y="4829175"/>
+            <a:ext cx="1847850" cy="895350"/>
+          </a:xfrm>
+          <a:prstGeom xmlns:a="http://schemas.openxmlformats.org/drawingml/2006/main" prst="rect">
+            <a:avLst/>
+          </a:prstGeom>
+          <a:noFill xmlns:a="http://schemas.openxmlformats.org/drawingml/2006/main"/>
+          <a:ln xmlns:a="http://schemas.openxmlformats.org/drawingml/2006/main" w="0">
+            <a:noFill/>
+            <a:prstDash val="solid"/>
+          </a:ln>
+        </p:spPr>
+        <p:txBody>
+          <a:bodyPr xmlns:a="http://schemas.openxmlformats.org/drawingml/2006/main"/>
+          <a:lstStyle xmlns:a="http://schemas.openxmlformats.org/drawingml/2006/main"/>
+          <a:p xmlns:a="http://schemas.openxmlformats.org/drawingml/2006/main">
+            <a:pPr>
+              <a:defRPr sz="975">
+                <a:solidFill>
+                  <a:srgbClr val="161616"/>
+                </a:solidFill>
+              </a:defRPr>
+            </a:pPr>
+            <a:r>
+              <a:rPr sz="975">
+                <a:solidFill>
+                  <a:srgbClr val="161616"/>
+                </a:solidFill>
+              </a:rPr>
+              <a:t>{{ROADMAP_3_2}}</a:t>
+            </a:r>
+          </a:p>
+        </p:txBody>
+      </p:sp>
+      <p:sp>
+        <p:nvSpPr>
           <p:cNvPr id="43" name="">
             <a:extLst xmlns:a="http://schemas.openxmlformats.org/drawingml/2006/main">
               <a:ext uri="{FF2B5EF4-FFF2-40B4-BE49-F238E27FC236}">
-                <a16:creationId xmlns:a16="http://schemas.microsoft.com/office/drawing/2014/main" id="{A7B1ED3B-22FA-4F0D-A7D4-FF75EC7C9E4A}"/>
-              </a:ext>
-            </a:extLst>
-          </p:cNvPr>
-          <p:cNvSpPr>
-            <a:spLocks xmlns:a="http://schemas.openxmlformats.org/drawingml/2006/main" noGrp="1"/>
-          </p:cNvSpPr>
-          <p:nvPr/>
-        </p:nvSpPr>
-        <p:spPr>
-          <a:xfrm xmlns:a="http://schemas.openxmlformats.org/drawingml/2006/main">
-            <a:off x="8077200" y="5286375"/>
-            <a:ext cx="2876550" cy="171450"/>
-          </a:xfrm>
-          <a:prstGeom xmlns:a="http://schemas.openxmlformats.org/drawingml/2006/main" prst="rect">
-            <a:avLst/>
-          </a:prstGeom>
-          <a:noFill xmlns:a="http://schemas.openxmlformats.org/drawingml/2006/main"/>
-          <a:ln xmlns:a="http://schemas.openxmlformats.org/drawingml/2006/main" w="0">
-            <a:noFill/>
-            <a:prstDash val="solid"/>
-          </a:ln>
-        </p:spPr>
-        <p:txBody>
-          <a:bodyPr xmlns:a="http://schemas.openxmlformats.org/drawingml/2006/main"/>
-          <a:lstStyle xmlns:a="http://schemas.openxmlformats.org/drawingml/2006/main"/>
-          <a:p xmlns:a="http://schemas.openxmlformats.org/drawingml/2006/main">
-            <a:pPr>
+                <a16:creationId xmlns:a16="http://schemas.microsoft.com/office/drawing/2014/main" id="{2746123F-5869-40B5-8DEA-42D133C911F0}"/>
+              </a:ext>
+            </a:extLst>
+          </p:cNvPr>
+          <p:cNvSpPr>
+            <a:spLocks xmlns:a="http://schemas.openxmlformats.org/drawingml/2006/main" noGrp="1"/>
+          </p:cNvSpPr>
+          <p:nvPr/>
+        </p:nvSpPr>
+        <p:spPr>
+          <a:xfrm xmlns:a="http://schemas.openxmlformats.org/drawingml/2006/main">
+            <a:off x="9505950" y="4819650"/>
+            <a:ext cx="1524000" cy="990600"/>
+          </a:xfrm>
+          <a:prstGeom xmlns:a="http://schemas.openxmlformats.org/drawingml/2006/main" prst="roundRect">
+            <a:avLst>
+              <a:gd name="adj" fmla="val 7692"/>
+            </a:avLst>
+          </a:prstGeom>
+          <a:solidFill xmlns:a="http://schemas.openxmlformats.org/drawingml/2006/main">
+            <a:srgbClr val="FFFFFF"/>
+          </a:solidFill>
+          <a:ln xmlns:a="http://schemas.openxmlformats.org/drawingml/2006/main" w="9525">
+            <a:solidFill>
+              <a:srgbClr val="E4E7EC"/>
+            </a:solidFill>
+            <a:prstDash val="solid"/>
+          </a:ln>
+        </p:spPr>
+      </p:sp>
+      <p:sp>
+        <p:nvSpPr>
+          <p:cNvPr id="44" name="">
+            <a:extLst xmlns:a="http://schemas.openxmlformats.org/drawingml/2006/main">
+              <a:ext uri="{FF2B5EF4-FFF2-40B4-BE49-F238E27FC236}">
+                <a16:creationId xmlns:a16="http://schemas.microsoft.com/office/drawing/2014/main" id="{7E14E16A-F6B5-48EF-B781-D4426FC19DC4}"/>
+              </a:ext>
+            </a:extLst>
+          </p:cNvPr>
+          <p:cNvSpPr>
+            <a:spLocks xmlns:a="http://schemas.openxmlformats.org/drawingml/2006/main" noGrp="1"/>
+          </p:cNvSpPr>
+          <p:nvPr/>
+        </p:nvSpPr>
+        <p:spPr>
+          <a:xfrm xmlns:a="http://schemas.openxmlformats.org/drawingml/2006/main">
+            <a:off x="9620250" y="4914900"/>
+            <a:ext cx="1295400" cy="171450"/>
+          </a:xfrm>
+          <a:prstGeom xmlns:a="http://schemas.openxmlformats.org/drawingml/2006/main" prst="rect">
+            <a:avLst/>
+          </a:prstGeom>
+          <a:noFill xmlns:a="http://schemas.openxmlformats.org/drawingml/2006/main"/>
+          <a:ln xmlns:a="http://schemas.openxmlformats.org/drawingml/2006/main" w="0">
+            <a:noFill/>
+            <a:prstDash val="solid"/>
+          </a:ln>
+        </p:spPr>
+        <p:txBody>
+          <a:bodyPr xmlns:a="http://schemas.openxmlformats.org/drawingml/2006/main"/>
+          <a:lstStyle xmlns:a="http://schemas.openxmlformats.org/drawingml/2006/main"/>
+          <a:p xmlns:a="http://schemas.openxmlformats.org/drawingml/2006/main">
+            <a:pPr algn="ctr">
+              <a:defRPr sz="675" b="1">
+                <a:solidFill>
+                  <a:srgbClr val="FF6412"/>
+                </a:solidFill>
+              </a:defRPr>
+            </a:pPr>
+            <a:r>
+              <a:rPr sz="675" b="1">
+                <a:solidFill>
+                  <a:srgbClr val="FF6412"/>
+                </a:solidFill>
+              </a:rPr>
+              <a:t>РЕЗУЛЬТАТ</a:t>
+            </a:r>
+          </a:p>
+        </p:txBody>
+      </p:sp>
+      <p:sp>
+        <p:nvSpPr>
+          <p:cNvPr id="45" name="">
+            <a:extLst xmlns:a="http://schemas.openxmlformats.org/drawingml/2006/main">
+              <a:ext uri="{FF2B5EF4-FFF2-40B4-BE49-F238E27FC236}">
+                <a16:creationId xmlns:a16="http://schemas.microsoft.com/office/drawing/2014/main" id="{83F4F02C-02E9-41A9-A3D9-D7409DB5A388}"/>
+              </a:ext>
+            </a:extLst>
+          </p:cNvPr>
+          <p:cNvSpPr>
+            <a:spLocks xmlns:a="http://schemas.openxmlformats.org/drawingml/2006/main" noGrp="1"/>
+          </p:cNvSpPr>
+          <p:nvPr/>
+        </p:nvSpPr>
+        <p:spPr>
+          <a:xfrm xmlns:a="http://schemas.openxmlformats.org/drawingml/2006/main">
+            <a:off x="9620250" y="5124450"/>
+            <a:ext cx="1295400" cy="609600"/>
+          </a:xfrm>
+          <a:prstGeom xmlns:a="http://schemas.openxmlformats.org/drawingml/2006/main" prst="rect">
+            <a:avLst/>
+          </a:prstGeom>
+          <a:noFill xmlns:a="http://schemas.openxmlformats.org/drawingml/2006/main"/>
+          <a:ln xmlns:a="http://schemas.openxmlformats.org/drawingml/2006/main" w="0">
+            <a:noFill/>
+            <a:prstDash val="solid"/>
+          </a:ln>
+        </p:spPr>
+        <p:txBody>
+          <a:bodyPr xmlns:a="http://schemas.openxmlformats.org/drawingml/2006/main"/>
+          <a:lstStyle xmlns:a="http://schemas.openxmlformats.org/drawingml/2006/main"/>
+          <a:p xmlns:a="http://schemas.openxmlformats.org/drawingml/2006/main">
+            <a:pPr algn="ctr">
               <a:defRPr sz="750" b="1">
                 <a:solidFill>
-                  <a:srgbClr val="FF6412"/>
+                  <a:srgbClr val="161616"/>
                 </a:solidFill>
               </a:defRPr>
             </a:pPr>
             <a:r>
               <a:rPr sz="750" b="1">
-                <a:solidFill>
-                  <a:srgbClr val="FF6412"/>
-                </a:solidFill>
-              </a:rPr>
-              <a:t>ЧТО ДАСТ ЭТАП</a:t>
-            </a:r>
-          </a:p>
-        </p:txBody>
-      </p:sp>
-      <p:sp>
-        <p:nvSpPr>
-          <p:cNvPr id="44" name="">
-            <a:extLst xmlns:a="http://schemas.openxmlformats.org/drawingml/2006/main">
-              <a:ext uri="{FF2B5EF4-FFF2-40B4-BE49-F238E27FC236}">
-                <a16:creationId xmlns:a16="http://schemas.microsoft.com/office/drawing/2014/main" id="{234E7032-1E41-435C-B96F-D0040605C75D}"/>
-              </a:ext>
-            </a:extLst>
-          </p:cNvPr>
-          <p:cNvSpPr>
-            <a:spLocks xmlns:a="http://schemas.openxmlformats.org/drawingml/2006/main" noGrp="1"/>
-          </p:cNvSpPr>
-          <p:nvPr/>
-        </p:nvSpPr>
-        <p:spPr>
-          <a:xfrm xmlns:a="http://schemas.openxmlformats.org/drawingml/2006/main">
-            <a:off x="8077200" y="5514975"/>
-            <a:ext cx="2876550" cy="323850"/>
-          </a:xfrm>
-          <a:prstGeom xmlns:a="http://schemas.openxmlformats.org/drawingml/2006/main" prst="rect">
-            <a:avLst/>
-          </a:prstGeom>
-          <a:noFill xmlns:a="http://schemas.openxmlformats.org/drawingml/2006/main"/>
-          <a:ln xmlns:a="http://schemas.openxmlformats.org/drawingml/2006/main" w="0">
-            <a:noFill/>
-            <a:prstDash val="solid"/>
-          </a:ln>
-        </p:spPr>
-        <p:txBody>
-          <a:bodyPr xmlns:a="http://schemas.openxmlformats.org/drawingml/2006/main"/>
-          <a:lstStyle xmlns:a="http://schemas.openxmlformats.org/drawingml/2006/main"/>
-          <a:p xmlns:a="http://schemas.openxmlformats.org/drawingml/2006/main">
-            <a:pPr>
-              <a:defRPr sz="975" b="1">
-                <a:solidFill>
-                  <a:srgbClr val="161616"/>
-                </a:solidFill>
-              </a:defRPr>
-            </a:pPr>
-            <a:r>
-              <a:rPr sz="975" b="1">
                 <a:solidFill>
                   <a:srgbClr val="161616"/>
                 </a:solidFill>
@@ -6395,7 +6438,7 @@
     </p:spTree>
     <p:extLst>
       <p:ext uri="{BB962C8B-B14F-4D97-AF65-F5344CB8AC3E}">
-        <p14:creationId xmlns:p14="http://schemas.microsoft.com/office/powerpoint/2010/main" val="1058197824"/>
+        <p14:creationId xmlns:p14="http://schemas.microsoft.com/office/powerpoint/2010/main" val="1665526817"/>
       </p:ext>
     </p:extLst>
   </p:cSld>
@@ -6426,7 +6469,7 @@
           <p:cNvPr id="1" name="">
             <a:extLst xmlns:a="http://schemas.openxmlformats.org/drawingml/2006/main">
               <a:ext uri="{FF2B5EF4-FFF2-40B4-BE49-F238E27FC236}">
-                <a16:creationId xmlns:a16="http://schemas.microsoft.com/office/drawing/2014/main" id="{6213B66E-BC2B-45D2-AF30-4842AEFE3075}"/>
+                <a16:creationId xmlns:a16="http://schemas.microsoft.com/office/drawing/2014/main" id="{4FE9A11D-2280-4BF8-A21C-FFFAAAD8E57F}"/>
               </a:ext>
             </a:extLst>
           </p:cNvPr>
@@ -6461,7 +6504,7 @@
           <p:nvPr/>
         </p:nvPicPr>
         <p:blipFill>
-          <a:blip xmlns:r="http://schemas.openxmlformats.org/officeDocument/2006/relationships" xmlns:a="http://schemas.openxmlformats.org/drawingml/2006/main" r:embed="Rc1c6be9a33cc4926"/>
+          <a:blip xmlns:r="http://schemas.openxmlformats.org/officeDocument/2006/relationships" xmlns:a="http://schemas.openxmlformats.org/drawingml/2006/main" r:embed="R70b475b9ead84141"/>
           <a:stretch xmlns:a="http://schemas.openxmlformats.org/drawingml/2006/main"/>
         </p:blipFill>
         <p:spPr>
@@ -6479,7 +6522,7 @@
           <p:cNvPr id="3" name="">
             <a:extLst xmlns:a="http://schemas.openxmlformats.org/drawingml/2006/main">
               <a:ext uri="{FF2B5EF4-FFF2-40B4-BE49-F238E27FC236}">
-                <a16:creationId xmlns:a16="http://schemas.microsoft.com/office/drawing/2014/main" id="{E68E759B-67F2-47C5-9909-CE97A076A853}"/>
+                <a16:creationId xmlns:a16="http://schemas.microsoft.com/office/drawing/2014/main" id="{35B165CB-D235-417B-AA95-1E4FBA14C642}"/>
               </a:ext>
             </a:extLst>
           </p:cNvPr>
@@ -6529,7 +6572,7 @@
           <p:cNvPr id="4" name="">
             <a:extLst xmlns:a="http://schemas.openxmlformats.org/drawingml/2006/main">
               <a:ext uri="{FF2B5EF4-FFF2-40B4-BE49-F238E27FC236}">
-                <a16:creationId xmlns:a16="http://schemas.microsoft.com/office/drawing/2014/main" id="{C28916FF-FAEA-4CD0-AEE8-EABC37F662A7}"/>
+                <a16:creationId xmlns:a16="http://schemas.microsoft.com/office/drawing/2014/main" id="{0559063C-7EA4-4E76-B689-12BAF13A8FFF}"/>
               </a:ext>
             </a:extLst>
           </p:cNvPr>
@@ -6562,7 +6605,7 @@
           <p:cNvPr id="5" name="">
             <a:extLst xmlns:a="http://schemas.openxmlformats.org/drawingml/2006/main">
               <a:ext uri="{FF2B5EF4-FFF2-40B4-BE49-F238E27FC236}">
-                <a16:creationId xmlns:a16="http://schemas.microsoft.com/office/drawing/2014/main" id="{967B8866-DC0A-4622-9B61-DB67DCBF0623}"/>
+                <a16:creationId xmlns:a16="http://schemas.microsoft.com/office/drawing/2014/main" id="{591C09A9-CD94-4D99-B916-623BB5ADA6CD}"/>
               </a:ext>
             </a:extLst>
           </p:cNvPr>
@@ -6593,7 +6636,7 @@
           <p:cNvPr id="6" name="">
             <a:extLst xmlns:a="http://schemas.openxmlformats.org/drawingml/2006/main">
               <a:ext uri="{FF2B5EF4-FFF2-40B4-BE49-F238E27FC236}">
-                <a16:creationId xmlns:a16="http://schemas.microsoft.com/office/drawing/2014/main" id="{B8EE9B67-9932-4624-A7F5-2F737EA5949C}"/>
+                <a16:creationId xmlns:a16="http://schemas.microsoft.com/office/drawing/2014/main" id="{5F0DBB2F-F5E9-4F10-95E7-1B5A0770B825}"/>
               </a:ext>
             </a:extLst>
           </p:cNvPr>
@@ -6643,7 +6686,7 @@
           <p:cNvPr id="7" name="">
             <a:extLst xmlns:a="http://schemas.openxmlformats.org/drawingml/2006/main">
               <a:ext uri="{FF2B5EF4-FFF2-40B4-BE49-F238E27FC236}">
-                <a16:creationId xmlns:a16="http://schemas.microsoft.com/office/drawing/2014/main" id="{2804C0C8-B2A6-479D-AF06-4B365E2DCEDE}"/>
+                <a16:creationId xmlns:a16="http://schemas.microsoft.com/office/drawing/2014/main" id="{4A2AC2E2-5466-4BB6-A7F6-BDA54B39F3D1}"/>
               </a:ext>
             </a:extLst>
           </p:cNvPr>
@@ -6693,7 +6736,7 @@
           <p:cNvPr id="8" name="">
             <a:extLst xmlns:a="http://schemas.openxmlformats.org/drawingml/2006/main">
               <a:ext uri="{FF2B5EF4-FFF2-40B4-BE49-F238E27FC236}">
-                <a16:creationId xmlns:a16="http://schemas.microsoft.com/office/drawing/2014/main" id="{42FF0BAF-FDAF-4BDA-90D3-711C1F73563A}"/>
+                <a16:creationId xmlns:a16="http://schemas.microsoft.com/office/drawing/2014/main" id="{0675D19B-88C7-4362-8924-D6BD258225EB}"/>
               </a:ext>
             </a:extLst>
           </p:cNvPr>
@@ -6743,7 +6786,7 @@
           <p:cNvPr id="9" name="">
             <a:extLst xmlns:a="http://schemas.openxmlformats.org/drawingml/2006/main">
               <a:ext uri="{FF2B5EF4-FFF2-40B4-BE49-F238E27FC236}">
-                <a16:creationId xmlns:a16="http://schemas.microsoft.com/office/drawing/2014/main" id="{38102504-7185-4935-AD70-9972BA7668D7}"/>
+                <a16:creationId xmlns:a16="http://schemas.microsoft.com/office/drawing/2014/main" id="{18F3CC68-EF93-4914-A0EB-15895C7A1879}"/>
               </a:ext>
             </a:extLst>
           </p:cNvPr>
@@ -6793,7 +6836,7 @@
           <p:cNvPr id="10" name="">
             <a:extLst xmlns:a="http://schemas.openxmlformats.org/drawingml/2006/main">
               <a:ext uri="{FF2B5EF4-FFF2-40B4-BE49-F238E27FC236}">
-                <a16:creationId xmlns:a16="http://schemas.microsoft.com/office/drawing/2014/main" id="{8745C9E2-6D8A-48F4-9798-6785C1308B8D}"/>
+                <a16:creationId xmlns:a16="http://schemas.microsoft.com/office/drawing/2014/main" id="{DFDC2DDF-45E5-41B2-B777-1A05ED624D9E}"/>
               </a:ext>
             </a:extLst>
           </p:cNvPr>
@@ -6843,7 +6886,7 @@
           <p:cNvPr id="11" name="">
             <a:extLst xmlns:a="http://schemas.openxmlformats.org/drawingml/2006/main">
               <a:ext uri="{FF2B5EF4-FFF2-40B4-BE49-F238E27FC236}">
-                <a16:creationId xmlns:a16="http://schemas.microsoft.com/office/drawing/2014/main" id="{12561B0D-65C7-4259-B39C-AA06D0985B48}"/>
+                <a16:creationId xmlns:a16="http://schemas.microsoft.com/office/drawing/2014/main" id="{87C61B9C-C552-4689-BC14-878DA0164237}"/>
               </a:ext>
             </a:extLst>
           </p:cNvPr>
@@ -6893,7 +6936,7 @@
           <p:cNvPr id="12" name="">
             <a:extLst xmlns:a="http://schemas.openxmlformats.org/drawingml/2006/main">
               <a:ext uri="{FF2B5EF4-FFF2-40B4-BE49-F238E27FC236}">
-                <a16:creationId xmlns:a16="http://schemas.microsoft.com/office/drawing/2014/main" id="{E1B62FB4-FA16-4E9B-9D36-C56E28F882A7}"/>
+                <a16:creationId xmlns:a16="http://schemas.microsoft.com/office/drawing/2014/main" id="{987A33BB-95FC-48A5-9A74-0C090F825E50}"/>
               </a:ext>
             </a:extLst>
           </p:cNvPr>
@@ -6943,7 +6986,7 @@
           <p:cNvPr id="13" name="">
             <a:extLst xmlns:a="http://schemas.openxmlformats.org/drawingml/2006/main">
               <a:ext uri="{FF2B5EF4-FFF2-40B4-BE49-F238E27FC236}">
-                <a16:creationId xmlns:a16="http://schemas.microsoft.com/office/drawing/2014/main" id="{1213AF1C-8FED-4031-BD0A-8770D1A304BE}"/>
+                <a16:creationId xmlns:a16="http://schemas.microsoft.com/office/drawing/2014/main" id="{397BE56F-5FEC-4894-9331-91989FF38C16}"/>
               </a:ext>
             </a:extLst>
           </p:cNvPr>
@@ -6993,7 +7036,7 @@
           <p:cNvPr id="14" name="">
             <a:extLst xmlns:a="http://schemas.openxmlformats.org/drawingml/2006/main">
               <a:ext uri="{FF2B5EF4-FFF2-40B4-BE49-F238E27FC236}">
-                <a16:creationId xmlns:a16="http://schemas.microsoft.com/office/drawing/2014/main" id="{C11A8CC0-E865-4F85-A7EE-CC5377C3642A}"/>
+                <a16:creationId xmlns:a16="http://schemas.microsoft.com/office/drawing/2014/main" id="{F2C7361D-6A1B-40D6-874F-B05444F995A9}"/>
               </a:ext>
             </a:extLst>
           </p:cNvPr>
@@ -7043,7 +7086,7 @@
           <p:cNvPr id="15" name="">
             <a:extLst xmlns:a="http://schemas.openxmlformats.org/drawingml/2006/main">
               <a:ext uri="{FF2B5EF4-FFF2-40B4-BE49-F238E27FC236}">
-                <a16:creationId xmlns:a16="http://schemas.microsoft.com/office/drawing/2014/main" id="{95DB5E98-A233-4CF0-895A-7309D37CE8ED}"/>
+                <a16:creationId xmlns:a16="http://schemas.microsoft.com/office/drawing/2014/main" id="{ABC7E46E-83EA-44B5-9D2F-F06BA4CC49D8}"/>
               </a:ext>
             </a:extLst>
           </p:cNvPr>
@@ -7093,7 +7136,7 @@
           <p:cNvPr id="16" name="">
             <a:extLst xmlns:a="http://schemas.openxmlformats.org/drawingml/2006/main">
               <a:ext uri="{FF2B5EF4-FFF2-40B4-BE49-F238E27FC236}">
-                <a16:creationId xmlns:a16="http://schemas.microsoft.com/office/drawing/2014/main" id="{BCC27D87-5556-43F8-87B2-00285CB1E0D7}"/>
+                <a16:creationId xmlns:a16="http://schemas.microsoft.com/office/drawing/2014/main" id="{DAC990FB-A8D2-47C0-8224-42F7F03A25F0}"/>
               </a:ext>
             </a:extLst>
           </p:cNvPr>
@@ -7143,7 +7186,7 @@
           <p:cNvPr id="17" name="">
             <a:extLst xmlns:a="http://schemas.openxmlformats.org/drawingml/2006/main">
               <a:ext uri="{FF2B5EF4-FFF2-40B4-BE49-F238E27FC236}">
-                <a16:creationId xmlns:a16="http://schemas.microsoft.com/office/drawing/2014/main" id="{E440D177-65C1-42DE-A618-5349E9DBFC23}"/>
+                <a16:creationId xmlns:a16="http://schemas.microsoft.com/office/drawing/2014/main" id="{3A1DF108-3D60-4FFC-AEA1-47D35793F8BF}"/>
               </a:ext>
             </a:extLst>
           </p:cNvPr>
@@ -7176,7 +7219,7 @@
           <p:cNvPr id="18" name="">
             <a:extLst xmlns:a="http://schemas.openxmlformats.org/drawingml/2006/main">
               <a:ext uri="{FF2B5EF4-FFF2-40B4-BE49-F238E27FC236}">
-                <a16:creationId xmlns:a16="http://schemas.microsoft.com/office/drawing/2014/main" id="{0E36FA4A-0380-458D-8373-A7D084A759D5}"/>
+                <a16:creationId xmlns:a16="http://schemas.microsoft.com/office/drawing/2014/main" id="{B54FF9E6-F632-4770-A0F4-D1D5EB59DDFF}"/>
               </a:ext>
             </a:extLst>
           </p:cNvPr>
@@ -7226,7 +7269,7 @@
           <p:cNvPr id="19" name="">
             <a:extLst xmlns:a="http://schemas.openxmlformats.org/drawingml/2006/main">
               <a:ext uri="{FF2B5EF4-FFF2-40B4-BE49-F238E27FC236}">
-                <a16:creationId xmlns:a16="http://schemas.microsoft.com/office/drawing/2014/main" id="{954281A4-FDE7-4EF1-8AFC-EA5BFEA750AA}"/>
+                <a16:creationId xmlns:a16="http://schemas.microsoft.com/office/drawing/2014/main" id="{8A7FAA85-2E93-4429-B93C-CE7AA51CCE90}"/>
               </a:ext>
             </a:extLst>
           </p:cNvPr>
@@ -7276,7 +7319,7 @@
           <p:cNvPr id="20" name="">
             <a:extLst xmlns:a="http://schemas.openxmlformats.org/drawingml/2006/main">
               <a:ext uri="{FF2B5EF4-FFF2-40B4-BE49-F238E27FC236}">
-                <a16:creationId xmlns:a16="http://schemas.microsoft.com/office/drawing/2014/main" id="{EAB35724-3323-483E-A04A-5A56E082E3ED}"/>
+                <a16:creationId xmlns:a16="http://schemas.microsoft.com/office/drawing/2014/main" id="{228F0B15-36EC-49AF-9F63-A731C65EE920}"/>
               </a:ext>
             </a:extLst>
           </p:cNvPr>
@@ -7326,7 +7369,7 @@
           <p:cNvPr id="21" name="">
             <a:extLst xmlns:a="http://schemas.openxmlformats.org/drawingml/2006/main">
               <a:ext uri="{FF2B5EF4-FFF2-40B4-BE49-F238E27FC236}">
-                <a16:creationId xmlns:a16="http://schemas.microsoft.com/office/drawing/2014/main" id="{46E7009D-4DCE-4F05-A656-2B4D70727D90}"/>
+                <a16:creationId xmlns:a16="http://schemas.microsoft.com/office/drawing/2014/main" id="{59CCD027-62B7-4086-BEF0-9C2145112ED1}"/>
               </a:ext>
             </a:extLst>
           </p:cNvPr>
@@ -7376,7 +7419,7 @@
           <p:cNvPr id="22" name="">
             <a:extLst xmlns:a="http://schemas.openxmlformats.org/drawingml/2006/main">
               <a:ext uri="{FF2B5EF4-FFF2-40B4-BE49-F238E27FC236}">
-                <a16:creationId xmlns:a16="http://schemas.microsoft.com/office/drawing/2014/main" id="{C797DE4D-F0B1-40A1-95E0-2904F2467074}"/>
+                <a16:creationId xmlns:a16="http://schemas.microsoft.com/office/drawing/2014/main" id="{D3FF1882-5B31-4CBD-9C66-8B31E60398FA}"/>
               </a:ext>
             </a:extLst>
           </p:cNvPr>
@@ -7426,7 +7469,7 @@
           <p:cNvPr id="23" name="">
             <a:extLst xmlns:a="http://schemas.openxmlformats.org/drawingml/2006/main">
               <a:ext uri="{FF2B5EF4-FFF2-40B4-BE49-F238E27FC236}">
-                <a16:creationId xmlns:a16="http://schemas.microsoft.com/office/drawing/2014/main" id="{57C5EF58-BF60-4BFA-8DE1-1258268A8644}"/>
+                <a16:creationId xmlns:a16="http://schemas.microsoft.com/office/drawing/2014/main" id="{2EBBAAC8-E388-46A5-BB4F-C1A790598790}"/>
               </a:ext>
             </a:extLst>
           </p:cNvPr>
@@ -7476,7 +7519,7 @@
           <p:cNvPr id="24" name="">
             <a:extLst xmlns:a="http://schemas.openxmlformats.org/drawingml/2006/main">
               <a:ext uri="{FF2B5EF4-FFF2-40B4-BE49-F238E27FC236}">
-                <a16:creationId xmlns:a16="http://schemas.microsoft.com/office/drawing/2014/main" id="{EE5F4707-110A-455E-90C1-39D5BB79519E}"/>
+                <a16:creationId xmlns:a16="http://schemas.microsoft.com/office/drawing/2014/main" id="{FC5B377C-DBBB-45E6-9678-4F1CA6199CDB}"/>
               </a:ext>
             </a:extLst>
           </p:cNvPr>
@@ -7526,7 +7569,7 @@
           <p:cNvPr id="25" name="">
             <a:extLst xmlns:a="http://schemas.openxmlformats.org/drawingml/2006/main">
               <a:ext uri="{FF2B5EF4-FFF2-40B4-BE49-F238E27FC236}">
-                <a16:creationId xmlns:a16="http://schemas.microsoft.com/office/drawing/2014/main" id="{F5A4C0F9-252B-4A4B-9569-CA66426F93C9}"/>
+                <a16:creationId xmlns:a16="http://schemas.microsoft.com/office/drawing/2014/main" id="{EBCCACF1-E977-489C-8852-27693271BCBC}"/>
               </a:ext>
             </a:extLst>
           </p:cNvPr>
@@ -7576,7 +7619,7 @@
           <p:cNvPr id="26" name="">
             <a:extLst xmlns:a="http://schemas.openxmlformats.org/drawingml/2006/main">
               <a:ext uri="{FF2B5EF4-FFF2-40B4-BE49-F238E27FC236}">
-                <a16:creationId xmlns:a16="http://schemas.microsoft.com/office/drawing/2014/main" id="{6265FCF8-0223-476A-A064-E0DA82B5BE1C}"/>
+                <a16:creationId xmlns:a16="http://schemas.microsoft.com/office/drawing/2014/main" id="{B721E96E-14DA-4537-9181-4E18F942DAA4}"/>
               </a:ext>
             </a:extLst>
           </p:cNvPr>
@@ -7624,7 +7667,7 @@
     </p:spTree>
     <p:extLst>
       <p:ext uri="{BB962C8B-B14F-4D97-AF65-F5344CB8AC3E}">
-        <p14:creationId xmlns:p14="http://schemas.microsoft.com/office/powerpoint/2010/main" val="1959044470"/>
+        <p14:creationId xmlns:p14="http://schemas.microsoft.com/office/powerpoint/2010/main" val="173857940"/>
       </p:ext>
     </p:extLst>
   </p:cSld>
@@ -7655,7 +7698,7 @@
           <p:cNvPr id="1" name="">
             <a:extLst xmlns:a="http://schemas.openxmlformats.org/drawingml/2006/main">
               <a:ext uri="{FF2B5EF4-FFF2-40B4-BE49-F238E27FC236}">
-                <a16:creationId xmlns:a16="http://schemas.microsoft.com/office/drawing/2014/main" id="{7D7116F1-C659-4952-BF81-72ECA6BAE9F9}"/>
+                <a16:creationId xmlns:a16="http://schemas.microsoft.com/office/drawing/2014/main" id="{ACE62689-791F-46EA-A5A6-D2D368D3E23D}"/>
               </a:ext>
             </a:extLst>
           </p:cNvPr>
@@ -7690,7 +7733,7 @@
           <p:nvPr/>
         </p:nvPicPr>
         <p:blipFill>
-          <a:blip xmlns:r="http://schemas.openxmlformats.org/officeDocument/2006/relationships" xmlns:a="http://schemas.openxmlformats.org/drawingml/2006/main" r:embed="R2fed1c53c8124456"/>
+          <a:blip xmlns:r="http://schemas.openxmlformats.org/officeDocument/2006/relationships" xmlns:a="http://schemas.openxmlformats.org/drawingml/2006/main" r:embed="Rd035fb96003a4ee1"/>
           <a:stretch xmlns:a="http://schemas.openxmlformats.org/drawingml/2006/main"/>
         </p:blipFill>
         <p:spPr>
@@ -7708,7 +7751,7 @@
           <p:cNvPr id="3" name="">
             <a:extLst xmlns:a="http://schemas.openxmlformats.org/drawingml/2006/main">
               <a:ext uri="{FF2B5EF4-FFF2-40B4-BE49-F238E27FC236}">
-                <a16:creationId xmlns:a16="http://schemas.microsoft.com/office/drawing/2014/main" id="{72901A31-5259-426E-B0BC-B08D4B28AB67}"/>
+                <a16:creationId xmlns:a16="http://schemas.microsoft.com/office/drawing/2014/main" id="{249F9616-0108-4AF6-A1A4-AFAF2314DD2D}"/>
               </a:ext>
             </a:extLst>
           </p:cNvPr>
@@ -7758,7 +7801,7 @@
           <p:cNvPr id="4" name="">
             <a:extLst xmlns:a="http://schemas.openxmlformats.org/drawingml/2006/main">
               <a:ext uri="{FF2B5EF4-FFF2-40B4-BE49-F238E27FC236}">
-                <a16:creationId xmlns:a16="http://schemas.microsoft.com/office/drawing/2014/main" id="{7F4AB6CB-13E1-4AC5-A900-7C28E071BDEB}"/>
+                <a16:creationId xmlns:a16="http://schemas.microsoft.com/office/drawing/2014/main" id="{4E714C15-E0C0-41C3-A2A1-A914DAF07EE9}"/>
               </a:ext>
             </a:extLst>
           </p:cNvPr>
@@ -7791,7 +7834,7 @@
           <p:cNvPr id="5" name="">
             <a:extLst xmlns:a="http://schemas.openxmlformats.org/drawingml/2006/main">
               <a:ext uri="{FF2B5EF4-FFF2-40B4-BE49-F238E27FC236}">
-                <a16:creationId xmlns:a16="http://schemas.microsoft.com/office/drawing/2014/main" id="{6ECC7305-2A1C-4B41-BFFD-C7ED69C533B6}"/>
+                <a16:creationId xmlns:a16="http://schemas.microsoft.com/office/drawing/2014/main" id="{80615044-6767-436D-B2B0-674C36FD0447}"/>
               </a:ext>
             </a:extLst>
           </p:cNvPr>
@@ -7822,7 +7865,7 @@
           <p:cNvPr id="6" name="">
             <a:extLst xmlns:a="http://schemas.openxmlformats.org/drawingml/2006/main">
               <a:ext uri="{FF2B5EF4-FFF2-40B4-BE49-F238E27FC236}">
-                <a16:creationId xmlns:a16="http://schemas.microsoft.com/office/drawing/2014/main" id="{D4F21ED4-F2A9-455C-AA1A-F5AA4A87ABE4}"/>
+                <a16:creationId xmlns:a16="http://schemas.microsoft.com/office/drawing/2014/main" id="{CF6F433A-39B6-454E-AE6D-FEBB98012951}"/>
               </a:ext>
             </a:extLst>
           </p:cNvPr>
@@ -7872,7 +7915,7 @@
           <p:cNvPr id="7" name="">
             <a:extLst xmlns:a="http://schemas.openxmlformats.org/drawingml/2006/main">
               <a:ext uri="{FF2B5EF4-FFF2-40B4-BE49-F238E27FC236}">
-                <a16:creationId xmlns:a16="http://schemas.microsoft.com/office/drawing/2014/main" id="{0A000F48-6F05-4B59-B457-B1E36E9A22F4}"/>
+                <a16:creationId xmlns:a16="http://schemas.microsoft.com/office/drawing/2014/main" id="{9F372FB6-628D-4508-9750-91006ED88D89}"/>
               </a:ext>
             </a:extLst>
           </p:cNvPr>
@@ -7922,7 +7965,7 @@
           <p:cNvPr id="8" name="">
             <a:extLst xmlns:a="http://schemas.openxmlformats.org/drawingml/2006/main">
               <a:ext uri="{FF2B5EF4-FFF2-40B4-BE49-F238E27FC236}">
-                <a16:creationId xmlns:a16="http://schemas.microsoft.com/office/drawing/2014/main" id="{4E8CA4C1-2FDC-43B1-BAB8-1154EB2ABDAF}"/>
+                <a16:creationId xmlns:a16="http://schemas.microsoft.com/office/drawing/2014/main" id="{988FAC10-9B06-4C13-BC38-FDAE47CAA869}"/>
               </a:ext>
             </a:extLst>
           </p:cNvPr>
@@ -7972,7 +8015,7 @@
           <p:cNvPr id="9" name="">
             <a:extLst xmlns:a="http://schemas.openxmlformats.org/drawingml/2006/main">
               <a:ext uri="{FF2B5EF4-FFF2-40B4-BE49-F238E27FC236}">
-                <a16:creationId xmlns:a16="http://schemas.microsoft.com/office/drawing/2014/main" id="{DC51858C-65CA-442B-8D2D-79FE68A1A974}"/>
+                <a16:creationId xmlns:a16="http://schemas.microsoft.com/office/drawing/2014/main" id="{F520D460-27B8-4006-AEFD-1BAB912DCD3E}"/>
               </a:ext>
             </a:extLst>
           </p:cNvPr>
@@ -8022,7 +8065,7 @@
           <p:cNvPr id="10" name="">
             <a:extLst xmlns:a="http://schemas.openxmlformats.org/drawingml/2006/main">
               <a:ext uri="{FF2B5EF4-FFF2-40B4-BE49-F238E27FC236}">
-                <a16:creationId xmlns:a16="http://schemas.microsoft.com/office/drawing/2014/main" id="{328BB0FA-AAFA-40E8-9A80-7F91BD0D81EB}"/>
+                <a16:creationId xmlns:a16="http://schemas.microsoft.com/office/drawing/2014/main" id="{934B3CE3-D955-4AE3-B6DC-C5E9F153E0BF}"/>
               </a:ext>
             </a:extLst>
           </p:cNvPr>
@@ -8053,7 +8096,7 @@
           <p:cNvPr id="11" name="">
             <a:extLst xmlns:a="http://schemas.openxmlformats.org/drawingml/2006/main">
               <a:ext uri="{FF2B5EF4-FFF2-40B4-BE49-F238E27FC236}">
-                <a16:creationId xmlns:a16="http://schemas.microsoft.com/office/drawing/2014/main" id="{9AB5057E-945D-4C9C-AE2C-1B036BB3C6DC}"/>
+                <a16:creationId xmlns:a16="http://schemas.microsoft.com/office/drawing/2014/main" id="{A3A73E77-C8CD-4CCE-A900-88EA478522CA}"/>
               </a:ext>
             </a:extLst>
           </p:cNvPr>
@@ -8103,7 +8146,7 @@
           <p:cNvPr id="12" name="">
             <a:extLst xmlns:a="http://schemas.openxmlformats.org/drawingml/2006/main">
               <a:ext uri="{FF2B5EF4-FFF2-40B4-BE49-F238E27FC236}">
-                <a16:creationId xmlns:a16="http://schemas.microsoft.com/office/drawing/2014/main" id="{08F41AB4-65B6-457B-BBD3-17028855B969}"/>
+                <a16:creationId xmlns:a16="http://schemas.microsoft.com/office/drawing/2014/main" id="{AD1F8A65-F47C-4F28-B7B5-E5E5831F245C}"/>
               </a:ext>
             </a:extLst>
           </p:cNvPr>
@@ -8153,7 +8196,7 @@
           <p:cNvPr id="13" name="">
             <a:extLst xmlns:a="http://schemas.openxmlformats.org/drawingml/2006/main">
               <a:ext uri="{FF2B5EF4-FFF2-40B4-BE49-F238E27FC236}">
-                <a16:creationId xmlns:a16="http://schemas.microsoft.com/office/drawing/2014/main" id="{D00E4E6F-F4B5-4F9D-9A8F-2C2D58B71416}"/>
+                <a16:creationId xmlns:a16="http://schemas.microsoft.com/office/drawing/2014/main" id="{B11F5CF0-20F7-4A0D-96BD-4DCE7ED08598}"/>
               </a:ext>
             </a:extLst>
           </p:cNvPr>
@@ -8184,7 +8227,7 @@
           <p:cNvPr id="14" name="">
             <a:extLst xmlns:a="http://schemas.openxmlformats.org/drawingml/2006/main">
               <a:ext uri="{FF2B5EF4-FFF2-40B4-BE49-F238E27FC236}">
-                <a16:creationId xmlns:a16="http://schemas.microsoft.com/office/drawing/2014/main" id="{506672F4-F9A8-4E68-9332-F8673B5A5A65}"/>
+                <a16:creationId xmlns:a16="http://schemas.microsoft.com/office/drawing/2014/main" id="{C93255FA-9D86-46C4-87DB-5AF308E90A41}"/>
               </a:ext>
             </a:extLst>
           </p:cNvPr>
@@ -8234,7 +8277,7 @@
           <p:cNvPr id="15" name="">
             <a:extLst xmlns:a="http://schemas.openxmlformats.org/drawingml/2006/main">
               <a:ext uri="{FF2B5EF4-FFF2-40B4-BE49-F238E27FC236}">
-                <a16:creationId xmlns:a16="http://schemas.microsoft.com/office/drawing/2014/main" id="{177D37CA-41C8-459F-B475-7D77AD5873AF}"/>
+                <a16:creationId xmlns:a16="http://schemas.microsoft.com/office/drawing/2014/main" id="{AD6C8295-CBF4-42F5-B03E-E987027ABD10}"/>
               </a:ext>
             </a:extLst>
           </p:cNvPr>
@@ -8284,7 +8327,7 @@
           <p:cNvPr id="16" name="">
             <a:extLst xmlns:a="http://schemas.openxmlformats.org/drawingml/2006/main">
               <a:ext uri="{FF2B5EF4-FFF2-40B4-BE49-F238E27FC236}">
-                <a16:creationId xmlns:a16="http://schemas.microsoft.com/office/drawing/2014/main" id="{E6C87964-E6EE-419F-BCA0-FEE28D9968D8}"/>
+                <a16:creationId xmlns:a16="http://schemas.microsoft.com/office/drawing/2014/main" id="{02092E59-EACF-4DE5-B922-935216C93AC7}"/>
               </a:ext>
             </a:extLst>
           </p:cNvPr>
@@ -8315,7 +8358,7 @@
           <p:cNvPr id="17" name="">
             <a:extLst xmlns:a="http://schemas.openxmlformats.org/drawingml/2006/main">
               <a:ext uri="{FF2B5EF4-FFF2-40B4-BE49-F238E27FC236}">
-                <a16:creationId xmlns:a16="http://schemas.microsoft.com/office/drawing/2014/main" id="{42C48159-5F28-45F3-9B9D-093151F0AB28}"/>
+                <a16:creationId xmlns:a16="http://schemas.microsoft.com/office/drawing/2014/main" id="{E5F9583E-643D-49C3-BADA-B644CC9DB988}"/>
               </a:ext>
             </a:extLst>
           </p:cNvPr>
@@ -8365,7 +8408,7 @@
           <p:cNvPr id="18" name="">
             <a:extLst xmlns:a="http://schemas.openxmlformats.org/drawingml/2006/main">
               <a:ext uri="{FF2B5EF4-FFF2-40B4-BE49-F238E27FC236}">
-                <a16:creationId xmlns:a16="http://schemas.microsoft.com/office/drawing/2014/main" id="{19556A49-CCE9-45F4-8849-274EB5083915}"/>
+                <a16:creationId xmlns:a16="http://schemas.microsoft.com/office/drawing/2014/main" id="{1AFAB87D-F19E-4E65-98E0-53340CCD1A76}"/>
               </a:ext>
             </a:extLst>
           </p:cNvPr>
@@ -8415,7 +8458,7 @@
           <p:cNvPr id="19" name="">
             <a:extLst xmlns:a="http://schemas.openxmlformats.org/drawingml/2006/main">
               <a:ext uri="{FF2B5EF4-FFF2-40B4-BE49-F238E27FC236}">
-                <a16:creationId xmlns:a16="http://schemas.microsoft.com/office/drawing/2014/main" id="{247DE605-C0F1-4AF4-A271-ADA3095BC606}"/>
+                <a16:creationId xmlns:a16="http://schemas.microsoft.com/office/drawing/2014/main" id="{45E97428-DE69-471D-9217-CD4B4B8156B6}"/>
               </a:ext>
             </a:extLst>
           </p:cNvPr>
@@ -8450,7 +8493,7 @@
           <p:cNvPr id="20" name="">
             <a:extLst xmlns:a="http://schemas.openxmlformats.org/drawingml/2006/main">
               <a:ext uri="{FF2B5EF4-FFF2-40B4-BE49-F238E27FC236}">
-                <a16:creationId xmlns:a16="http://schemas.microsoft.com/office/drawing/2014/main" id="{6A19D255-D72D-4E38-9590-0E479DAA1A9F}"/>
+                <a16:creationId xmlns:a16="http://schemas.microsoft.com/office/drawing/2014/main" id="{A8994800-6C6D-4F0A-A213-76FDF8CB99BA}"/>
               </a:ext>
             </a:extLst>
           </p:cNvPr>
@@ -8500,7 +8543,7 @@
           <p:cNvPr id="21" name="">
             <a:extLst xmlns:a="http://schemas.openxmlformats.org/drawingml/2006/main">
               <a:ext uri="{FF2B5EF4-FFF2-40B4-BE49-F238E27FC236}">
-                <a16:creationId xmlns:a16="http://schemas.microsoft.com/office/drawing/2014/main" id="{E1DF746F-390A-4DC4-A513-73B64AB77499}"/>
+                <a16:creationId xmlns:a16="http://schemas.microsoft.com/office/drawing/2014/main" id="{F705B87D-2ABC-4EB8-B866-2B5B54F97F63}"/>
               </a:ext>
             </a:extLst>
           </p:cNvPr>
@@ -8554,7 +8597,7 @@
           <p:nvPr/>
         </p:nvPicPr>
         <p:blipFill>
-          <a:blip xmlns:r="http://schemas.openxmlformats.org/officeDocument/2006/relationships" xmlns:a="http://schemas.openxmlformats.org/drawingml/2006/main" r:embed="Rba22ffe696e1496d"/>
+          <a:blip xmlns:r="http://schemas.openxmlformats.org/officeDocument/2006/relationships" xmlns:a="http://schemas.openxmlformats.org/drawingml/2006/main" r:embed="R4325c8278ed84b6f"/>
           <a:stretch xmlns:a="http://schemas.openxmlformats.org/drawingml/2006/main"/>
         </p:blipFill>
         <p:spPr>
@@ -8572,7 +8615,7 @@
           <p:cNvPr id="23" name="">
             <a:extLst xmlns:a="http://schemas.openxmlformats.org/drawingml/2006/main">
               <a:ext uri="{FF2B5EF4-FFF2-40B4-BE49-F238E27FC236}">
-                <a16:creationId xmlns:a16="http://schemas.microsoft.com/office/drawing/2014/main" id="{6DAA7A32-F968-4505-9B33-127A6B7EDE3B}"/>
+                <a16:creationId xmlns:a16="http://schemas.microsoft.com/office/drawing/2014/main" id="{01141B8A-DB4A-4A34-B982-325299A0AF06}"/>
               </a:ext>
             </a:extLst>
           </p:cNvPr>
@@ -8622,7 +8665,7 @@
           <p:cNvPr id="24" name="">
             <a:extLst xmlns:a="http://schemas.openxmlformats.org/drawingml/2006/main">
               <a:ext uri="{FF2B5EF4-FFF2-40B4-BE49-F238E27FC236}">
-                <a16:creationId xmlns:a16="http://schemas.microsoft.com/office/drawing/2014/main" id="{9A77DAEB-C3DD-47F5-A552-57E94523FCF9}"/>
+                <a16:creationId xmlns:a16="http://schemas.microsoft.com/office/drawing/2014/main" id="{2D200418-A0A5-4959-9463-FED2441CBB6F}"/>
               </a:ext>
             </a:extLst>
           </p:cNvPr>
@@ -8672,7 +8715,7 @@
           <p:cNvPr id="25" name="">
             <a:extLst xmlns:a="http://schemas.openxmlformats.org/drawingml/2006/main">
               <a:ext uri="{FF2B5EF4-FFF2-40B4-BE49-F238E27FC236}">
-                <a16:creationId xmlns:a16="http://schemas.microsoft.com/office/drawing/2014/main" id="{BEF3BAA1-D8A7-4903-B9CA-B6CF82C608D6}"/>
+                <a16:creationId xmlns:a16="http://schemas.microsoft.com/office/drawing/2014/main" id="{0E285735-6E27-4BF6-B37B-AF338A58F36A}"/>
               </a:ext>
             </a:extLst>
           </p:cNvPr>
@@ -8720,7 +8763,7 @@
     </p:spTree>
     <p:extLst>
       <p:ext uri="{BB962C8B-B14F-4D97-AF65-F5344CB8AC3E}">
-        <p14:creationId xmlns:p14="http://schemas.microsoft.com/office/powerpoint/2010/main" val="652851930"/>
+        <p14:creationId xmlns:p14="http://schemas.microsoft.com/office/powerpoint/2010/main" val="1615220753"/>
       </p:ext>
     </p:extLst>
   </p:cSld>
@@ -8751,7 +8794,7 @@
           <p:cNvPr id="1" name="">
             <a:extLst xmlns:a="http://schemas.openxmlformats.org/drawingml/2006/main">
               <a:ext uri="{FF2B5EF4-FFF2-40B4-BE49-F238E27FC236}">
-                <a16:creationId xmlns:a16="http://schemas.microsoft.com/office/drawing/2014/main" id="{15D442D6-EE93-4C7E-9FBF-96F487771879}"/>
+                <a16:creationId xmlns:a16="http://schemas.microsoft.com/office/drawing/2014/main" id="{DB049769-9221-405A-A52E-2F9E5D333E07}"/>
               </a:ext>
             </a:extLst>
           </p:cNvPr>
@@ -8786,7 +8829,7 @@
           <p:nvPr/>
         </p:nvPicPr>
         <p:blipFill>
-          <a:blip xmlns:r="http://schemas.openxmlformats.org/officeDocument/2006/relationships" xmlns:a="http://schemas.openxmlformats.org/drawingml/2006/main" r:embed="R0f3784872cf54bfa"/>
+          <a:blip xmlns:r="http://schemas.openxmlformats.org/officeDocument/2006/relationships" xmlns:a="http://schemas.openxmlformats.org/drawingml/2006/main" r:embed="Re91870f2ecbe4cd3"/>
           <a:stretch xmlns:a="http://schemas.openxmlformats.org/drawingml/2006/main"/>
         </p:blipFill>
         <p:spPr>
@@ -8804,7 +8847,7 @@
           <p:cNvPr id="3" name="">
             <a:extLst xmlns:a="http://schemas.openxmlformats.org/drawingml/2006/main">
               <a:ext uri="{FF2B5EF4-FFF2-40B4-BE49-F238E27FC236}">
-                <a16:creationId xmlns:a16="http://schemas.microsoft.com/office/drawing/2014/main" id="{A02BEBC7-1B9F-418F-82D8-7AAB827DAA01}"/>
+                <a16:creationId xmlns:a16="http://schemas.microsoft.com/office/drawing/2014/main" id="{EEE025BC-8E5E-4BE1-B502-C27B2BC5FCC3}"/>
               </a:ext>
             </a:extLst>
           </p:cNvPr>
@@ -8854,7 +8897,7 @@
           <p:cNvPr id="4" name="">
             <a:extLst xmlns:a="http://schemas.openxmlformats.org/drawingml/2006/main">
               <a:ext uri="{FF2B5EF4-FFF2-40B4-BE49-F238E27FC236}">
-                <a16:creationId xmlns:a16="http://schemas.microsoft.com/office/drawing/2014/main" id="{D8124B26-7FAD-4384-8EB5-4AEEA497F9D1}"/>
+                <a16:creationId xmlns:a16="http://schemas.microsoft.com/office/drawing/2014/main" id="{8EE408EE-3105-4F79-AFFD-7E909122BDBC}"/>
               </a:ext>
             </a:extLst>
           </p:cNvPr>
@@ -8887,7 +8930,7 @@
           <p:cNvPr id="5" name="">
             <a:extLst xmlns:a="http://schemas.openxmlformats.org/drawingml/2006/main">
               <a:ext uri="{FF2B5EF4-FFF2-40B4-BE49-F238E27FC236}">
-                <a16:creationId xmlns:a16="http://schemas.microsoft.com/office/drawing/2014/main" id="{A5C4FE44-28D5-45C6-96EB-4188481CF375}"/>
+                <a16:creationId xmlns:a16="http://schemas.microsoft.com/office/drawing/2014/main" id="{F76928FE-B14F-400C-BC5B-C29E00022F18}"/>
               </a:ext>
             </a:extLst>
           </p:cNvPr>
@@ -8918,7 +8961,7 @@
           <p:cNvPr id="6" name="">
             <a:extLst xmlns:a="http://schemas.openxmlformats.org/drawingml/2006/main">
               <a:ext uri="{FF2B5EF4-FFF2-40B4-BE49-F238E27FC236}">
-                <a16:creationId xmlns:a16="http://schemas.microsoft.com/office/drawing/2014/main" id="{D78BE45D-E747-4D4D-9808-67173E839351}"/>
+                <a16:creationId xmlns:a16="http://schemas.microsoft.com/office/drawing/2014/main" id="{DFBD6163-6A8D-49AB-B232-EC2C5A0C3DDE}"/>
               </a:ext>
             </a:extLst>
           </p:cNvPr>
@@ -8968,7 +9011,7 @@
           <p:cNvPr id="7" name="">
             <a:extLst xmlns:a="http://schemas.openxmlformats.org/drawingml/2006/main">
               <a:ext uri="{FF2B5EF4-FFF2-40B4-BE49-F238E27FC236}">
-                <a16:creationId xmlns:a16="http://schemas.microsoft.com/office/drawing/2014/main" id="{7EC64567-FF93-49E6-B22F-AD2148DFF581}"/>
+                <a16:creationId xmlns:a16="http://schemas.microsoft.com/office/drawing/2014/main" id="{FCB5B748-F142-4C9D-A25C-643349204929}"/>
               </a:ext>
             </a:extLst>
           </p:cNvPr>
@@ -9018,7 +9061,7 @@
           <p:cNvPr id="8" name="">
             <a:extLst xmlns:a="http://schemas.openxmlformats.org/drawingml/2006/main">
               <a:ext uri="{FF2B5EF4-FFF2-40B4-BE49-F238E27FC236}">
-                <a16:creationId xmlns:a16="http://schemas.microsoft.com/office/drawing/2014/main" id="{FF69B9E5-F88D-47B5-8007-A628F66775EE}"/>
+                <a16:creationId xmlns:a16="http://schemas.microsoft.com/office/drawing/2014/main" id="{120C1B93-1F78-425F-A9CC-AB5746494249}"/>
               </a:ext>
             </a:extLst>
           </p:cNvPr>
@@ -9068,7 +9111,7 @@
           <p:cNvPr id="9" name="">
             <a:extLst xmlns:a="http://schemas.openxmlformats.org/drawingml/2006/main">
               <a:ext uri="{FF2B5EF4-FFF2-40B4-BE49-F238E27FC236}">
-                <a16:creationId xmlns:a16="http://schemas.microsoft.com/office/drawing/2014/main" id="{F4995E1A-6F30-439C-93FC-A701CC81C8D3}"/>
+                <a16:creationId xmlns:a16="http://schemas.microsoft.com/office/drawing/2014/main" id="{84947EBB-0C63-4EFB-8BB7-C6988110FE86}"/>
               </a:ext>
             </a:extLst>
           </p:cNvPr>
@@ -9118,7 +9161,7 @@
           <p:cNvPr id="10" name="">
             <a:extLst xmlns:a="http://schemas.openxmlformats.org/drawingml/2006/main">
               <a:ext uri="{FF2B5EF4-FFF2-40B4-BE49-F238E27FC236}">
-                <a16:creationId xmlns:a16="http://schemas.microsoft.com/office/drawing/2014/main" id="{E58FF976-0AF4-4192-B2DB-A93E76EB02B9}"/>
+                <a16:creationId xmlns:a16="http://schemas.microsoft.com/office/drawing/2014/main" id="{3FA355B4-5397-48F4-94DB-211A58A2A25F}"/>
               </a:ext>
             </a:extLst>
           </p:cNvPr>
@@ -9168,7 +9211,7 @@
           <p:cNvPr id="11" name="">
             <a:extLst xmlns:a="http://schemas.openxmlformats.org/drawingml/2006/main">
               <a:ext uri="{FF2B5EF4-FFF2-40B4-BE49-F238E27FC236}">
-                <a16:creationId xmlns:a16="http://schemas.microsoft.com/office/drawing/2014/main" id="{DD72442E-C88C-40DE-AD12-B2DAAD7D87A8}"/>
+                <a16:creationId xmlns:a16="http://schemas.microsoft.com/office/drawing/2014/main" id="{2219AFA0-B996-4126-A233-616883B87DA4}"/>
               </a:ext>
             </a:extLst>
           </p:cNvPr>
@@ -9218,7 +9261,7 @@
           <p:cNvPr id="12" name="">
             <a:extLst xmlns:a="http://schemas.openxmlformats.org/drawingml/2006/main">
               <a:ext uri="{FF2B5EF4-FFF2-40B4-BE49-F238E27FC236}">
-                <a16:creationId xmlns:a16="http://schemas.microsoft.com/office/drawing/2014/main" id="{FA73C9F1-393F-4D6E-9485-E8CD2F3DB8A7}"/>
+                <a16:creationId xmlns:a16="http://schemas.microsoft.com/office/drawing/2014/main" id="{AF03634F-FA17-4A82-8C74-994CC627F800}"/>
               </a:ext>
             </a:extLst>
           </p:cNvPr>
@@ -9268,7 +9311,7 @@
           <p:cNvPr id="13" name="">
             <a:extLst xmlns:a="http://schemas.openxmlformats.org/drawingml/2006/main">
               <a:ext uri="{FF2B5EF4-FFF2-40B4-BE49-F238E27FC236}">
-                <a16:creationId xmlns:a16="http://schemas.microsoft.com/office/drawing/2014/main" id="{206E2336-7962-48BB-81DD-7AD0D82292D7}"/>
+                <a16:creationId xmlns:a16="http://schemas.microsoft.com/office/drawing/2014/main" id="{75BF49B1-2BF3-4B45-8C52-649387858B00}"/>
               </a:ext>
             </a:extLst>
           </p:cNvPr>
@@ -9318,7 +9361,7 @@
           <p:cNvPr id="14" name="">
             <a:extLst xmlns:a="http://schemas.openxmlformats.org/drawingml/2006/main">
               <a:ext uri="{FF2B5EF4-FFF2-40B4-BE49-F238E27FC236}">
-                <a16:creationId xmlns:a16="http://schemas.microsoft.com/office/drawing/2014/main" id="{91756BF3-8D7A-45B8-B38D-0C70A2246399}"/>
+                <a16:creationId xmlns:a16="http://schemas.microsoft.com/office/drawing/2014/main" id="{84D13CD4-7A48-43E6-809F-B1E88CDC50DC}"/>
               </a:ext>
             </a:extLst>
           </p:cNvPr>
@@ -9368,7 +9411,7 @@
           <p:cNvPr id="15" name="">
             <a:extLst xmlns:a="http://schemas.openxmlformats.org/drawingml/2006/main">
               <a:ext uri="{FF2B5EF4-FFF2-40B4-BE49-F238E27FC236}">
-                <a16:creationId xmlns:a16="http://schemas.microsoft.com/office/drawing/2014/main" id="{45B104DA-3EF4-4744-9600-9AC38D5AC817}"/>
+                <a16:creationId xmlns:a16="http://schemas.microsoft.com/office/drawing/2014/main" id="{C18DCC0F-3B1F-46D9-9E27-CA8A999A79AE}"/>
               </a:ext>
             </a:extLst>
           </p:cNvPr>
@@ -9418,7 +9461,7 @@
           <p:cNvPr id="16" name="">
             <a:extLst xmlns:a="http://schemas.openxmlformats.org/drawingml/2006/main">
               <a:ext uri="{FF2B5EF4-FFF2-40B4-BE49-F238E27FC236}">
-                <a16:creationId xmlns:a16="http://schemas.microsoft.com/office/drawing/2014/main" id="{A489D7DC-8120-497A-9902-1D37530DE8B5}"/>
+                <a16:creationId xmlns:a16="http://schemas.microsoft.com/office/drawing/2014/main" id="{34A8ACDE-E53B-46B1-8313-FA2B54878D50}"/>
               </a:ext>
             </a:extLst>
           </p:cNvPr>
@@ -9468,7 +9511,7 @@
           <p:cNvPr id="17" name="">
             <a:extLst xmlns:a="http://schemas.openxmlformats.org/drawingml/2006/main">
               <a:ext uri="{FF2B5EF4-FFF2-40B4-BE49-F238E27FC236}">
-                <a16:creationId xmlns:a16="http://schemas.microsoft.com/office/drawing/2014/main" id="{85476983-3C79-49FD-BE57-306DB168834C}"/>
+                <a16:creationId xmlns:a16="http://schemas.microsoft.com/office/drawing/2014/main" id="{8D71E7CE-4664-4BF6-8D55-0B4C51806B1C}"/>
               </a:ext>
             </a:extLst>
           </p:cNvPr>
@@ -9503,7 +9546,7 @@
           <p:cNvPr id="18" name="">
             <a:extLst xmlns:a="http://schemas.openxmlformats.org/drawingml/2006/main">
               <a:ext uri="{FF2B5EF4-FFF2-40B4-BE49-F238E27FC236}">
-                <a16:creationId xmlns:a16="http://schemas.microsoft.com/office/drawing/2014/main" id="{C7CFEAEA-9590-4007-8652-E86441861EB1}"/>
+                <a16:creationId xmlns:a16="http://schemas.microsoft.com/office/drawing/2014/main" id="{BC0C20E9-76B9-49DD-A0E9-BF3B3B1D1BD8}"/>
               </a:ext>
             </a:extLst>
           </p:cNvPr>
@@ -9553,7 +9596,7 @@
           <p:cNvPr id="19" name="">
             <a:extLst xmlns:a="http://schemas.openxmlformats.org/drawingml/2006/main">
               <a:ext uri="{FF2B5EF4-FFF2-40B4-BE49-F238E27FC236}">
-                <a16:creationId xmlns:a16="http://schemas.microsoft.com/office/drawing/2014/main" id="{5914EF44-3BDC-4CE7-9809-F2A1C2C3391F}"/>
+                <a16:creationId xmlns:a16="http://schemas.microsoft.com/office/drawing/2014/main" id="{B3C0CE0A-B709-4BBA-9E9E-7B85BCCBE98C}"/>
               </a:ext>
             </a:extLst>
           </p:cNvPr>
@@ -9603,7 +9646,7 @@
           <p:cNvPr id="20" name="">
             <a:extLst xmlns:a="http://schemas.openxmlformats.org/drawingml/2006/main">
               <a:ext uri="{FF2B5EF4-FFF2-40B4-BE49-F238E27FC236}">
-                <a16:creationId xmlns:a16="http://schemas.microsoft.com/office/drawing/2014/main" id="{D3532D41-D84D-42EA-98B5-8356B0467D90}"/>
+                <a16:creationId xmlns:a16="http://schemas.microsoft.com/office/drawing/2014/main" id="{DB9A59E1-9E9A-465D-89DD-FF12A77FA427}"/>
               </a:ext>
             </a:extLst>
           </p:cNvPr>
@@ -9653,7 +9696,7 @@
           <p:cNvPr id="21" name="">
             <a:extLst xmlns:a="http://schemas.openxmlformats.org/drawingml/2006/main">
               <a:ext uri="{FF2B5EF4-FFF2-40B4-BE49-F238E27FC236}">
-                <a16:creationId xmlns:a16="http://schemas.microsoft.com/office/drawing/2014/main" id="{BC49FBF1-DEA6-4C35-B66E-297FFF39DAE2}"/>
+                <a16:creationId xmlns:a16="http://schemas.microsoft.com/office/drawing/2014/main" id="{90653A26-F3F7-4C19-9EBE-EB83F594BD26}"/>
               </a:ext>
             </a:extLst>
           </p:cNvPr>
@@ -9703,7 +9746,7 @@
           <p:cNvPr id="22" name="">
             <a:extLst xmlns:a="http://schemas.openxmlformats.org/drawingml/2006/main">
               <a:ext uri="{FF2B5EF4-FFF2-40B4-BE49-F238E27FC236}">
-                <a16:creationId xmlns:a16="http://schemas.microsoft.com/office/drawing/2014/main" id="{9AFB4296-B999-4FC6-AC08-508C3EE9BDD7}"/>
+                <a16:creationId xmlns:a16="http://schemas.microsoft.com/office/drawing/2014/main" id="{C0DD8F4F-1BBC-42BC-A69C-6AF4F0FD3389}"/>
               </a:ext>
             </a:extLst>
           </p:cNvPr>
@@ -9734,7 +9777,7 @@
           <p:cNvPr id="23" name="">
             <a:extLst xmlns:a="http://schemas.openxmlformats.org/drawingml/2006/main">
               <a:ext uri="{FF2B5EF4-FFF2-40B4-BE49-F238E27FC236}">
-                <a16:creationId xmlns:a16="http://schemas.microsoft.com/office/drawing/2014/main" id="{6E7FFD95-D622-4C9C-ACF3-32761B0BDC64}"/>
+                <a16:creationId xmlns:a16="http://schemas.microsoft.com/office/drawing/2014/main" id="{1ACEA1FA-6836-48F6-A414-73F59263EA90}"/>
               </a:ext>
             </a:extLst>
           </p:cNvPr>
@@ -9784,7 +9827,7 @@
           <p:cNvPr id="24" name="">
             <a:extLst xmlns:a="http://schemas.openxmlformats.org/drawingml/2006/main">
               <a:ext uri="{FF2B5EF4-FFF2-40B4-BE49-F238E27FC236}">
-                <a16:creationId xmlns:a16="http://schemas.microsoft.com/office/drawing/2014/main" id="{31B662F5-F5D4-4DC5-BA9C-B816F2157633}"/>
+                <a16:creationId xmlns:a16="http://schemas.microsoft.com/office/drawing/2014/main" id="{B7DFB10E-B96B-4DAF-A96B-3C1B48E0D8C7}"/>
               </a:ext>
             </a:extLst>
           </p:cNvPr>
@@ -9834,7 +9877,7 @@
           <p:cNvPr id="25" name="">
             <a:extLst xmlns:a="http://schemas.openxmlformats.org/drawingml/2006/main">
               <a:ext uri="{FF2B5EF4-FFF2-40B4-BE49-F238E27FC236}">
-                <a16:creationId xmlns:a16="http://schemas.microsoft.com/office/drawing/2014/main" id="{90797BA2-F66A-4797-A658-85EF5C6AA3C1}"/>
+                <a16:creationId xmlns:a16="http://schemas.microsoft.com/office/drawing/2014/main" id="{FF22009B-0A2C-449D-BAD8-41B58381FAAD}"/>
               </a:ext>
             </a:extLst>
           </p:cNvPr>
@@ -9884,7 +9927,7 @@
           <p:cNvPr id="26" name="">
             <a:extLst xmlns:a="http://schemas.openxmlformats.org/drawingml/2006/main">
               <a:ext uri="{FF2B5EF4-FFF2-40B4-BE49-F238E27FC236}">
-                <a16:creationId xmlns:a16="http://schemas.microsoft.com/office/drawing/2014/main" id="{D4AB104B-223F-4E17-AA98-73B6EC001617}"/>
+                <a16:creationId xmlns:a16="http://schemas.microsoft.com/office/drawing/2014/main" id="{4729C461-E4AE-4DED-A721-18BE60D0F99E}"/>
               </a:ext>
             </a:extLst>
           </p:cNvPr>
@@ -9915,7 +9958,7 @@
           <p:cNvPr id="27" name="">
             <a:extLst xmlns:a="http://schemas.openxmlformats.org/drawingml/2006/main">
               <a:ext uri="{FF2B5EF4-FFF2-40B4-BE49-F238E27FC236}">
-                <a16:creationId xmlns:a16="http://schemas.microsoft.com/office/drawing/2014/main" id="{11818774-CEA5-4361-A60F-489700018442}"/>
+                <a16:creationId xmlns:a16="http://schemas.microsoft.com/office/drawing/2014/main" id="{0AADA8C3-0569-421A-822E-708FE638863A}"/>
               </a:ext>
             </a:extLst>
           </p:cNvPr>
@@ -9965,7 +10008,7 @@
           <p:cNvPr id="28" name="">
             <a:extLst xmlns:a="http://schemas.openxmlformats.org/drawingml/2006/main">
               <a:ext uri="{FF2B5EF4-FFF2-40B4-BE49-F238E27FC236}">
-                <a16:creationId xmlns:a16="http://schemas.microsoft.com/office/drawing/2014/main" id="{1A2F5127-3587-4EF6-9A8E-7E157FC50163}"/>
+                <a16:creationId xmlns:a16="http://schemas.microsoft.com/office/drawing/2014/main" id="{79462ECB-C36A-4739-8D59-6E7F293ACE9A}"/>
               </a:ext>
             </a:extLst>
           </p:cNvPr>
@@ -10015,7 +10058,7 @@
           <p:cNvPr id="29" name="">
             <a:extLst xmlns:a="http://schemas.openxmlformats.org/drawingml/2006/main">
               <a:ext uri="{FF2B5EF4-FFF2-40B4-BE49-F238E27FC236}">
-                <a16:creationId xmlns:a16="http://schemas.microsoft.com/office/drawing/2014/main" id="{D4D61EDD-7F10-466A-A83B-363BAFB670EC}"/>
+                <a16:creationId xmlns:a16="http://schemas.microsoft.com/office/drawing/2014/main" id="{AD26A559-9F55-48C4-947F-FAC998FC10A3}"/>
               </a:ext>
             </a:extLst>
           </p:cNvPr>
@@ -10065,7 +10108,7 @@
           <p:cNvPr id="30" name="">
             <a:extLst xmlns:a="http://schemas.openxmlformats.org/drawingml/2006/main">
               <a:ext uri="{FF2B5EF4-FFF2-40B4-BE49-F238E27FC236}">
-                <a16:creationId xmlns:a16="http://schemas.microsoft.com/office/drawing/2014/main" id="{714ADB09-46EF-48C5-9069-466514776434}"/>
+                <a16:creationId xmlns:a16="http://schemas.microsoft.com/office/drawing/2014/main" id="{BF37FC7B-7824-4BCA-98E7-617A6463F749}"/>
               </a:ext>
             </a:extLst>
           </p:cNvPr>
@@ -10096,7 +10139,7 @@
           <p:cNvPr id="31" name="">
             <a:extLst xmlns:a="http://schemas.openxmlformats.org/drawingml/2006/main">
               <a:ext uri="{FF2B5EF4-FFF2-40B4-BE49-F238E27FC236}">
-                <a16:creationId xmlns:a16="http://schemas.microsoft.com/office/drawing/2014/main" id="{1ECE1B10-40C8-4BC9-B48D-07F7437D8389}"/>
+                <a16:creationId xmlns:a16="http://schemas.microsoft.com/office/drawing/2014/main" id="{EE038EF9-A4B0-4DC2-9ACC-4D464DA4F968}"/>
               </a:ext>
             </a:extLst>
           </p:cNvPr>
@@ -10146,7 +10189,7 @@
           <p:cNvPr id="32" name="">
             <a:extLst xmlns:a="http://schemas.openxmlformats.org/drawingml/2006/main">
               <a:ext uri="{FF2B5EF4-FFF2-40B4-BE49-F238E27FC236}">
-                <a16:creationId xmlns:a16="http://schemas.microsoft.com/office/drawing/2014/main" id="{702EF525-6837-49A2-A698-54087A904F84}"/>
+                <a16:creationId xmlns:a16="http://schemas.microsoft.com/office/drawing/2014/main" id="{763FBBE3-65AE-4CA3-91ED-59134D7B4345}"/>
               </a:ext>
             </a:extLst>
           </p:cNvPr>
@@ -10196,7 +10239,7 @@
           <p:cNvPr id="33" name="">
             <a:extLst xmlns:a="http://schemas.openxmlformats.org/drawingml/2006/main">
               <a:ext uri="{FF2B5EF4-FFF2-40B4-BE49-F238E27FC236}">
-                <a16:creationId xmlns:a16="http://schemas.microsoft.com/office/drawing/2014/main" id="{B0E25B4E-97BD-4214-847D-01B403046320}"/>
+                <a16:creationId xmlns:a16="http://schemas.microsoft.com/office/drawing/2014/main" id="{A539A7AE-48CB-481C-84AD-7E7C5B01C9D9}"/>
               </a:ext>
             </a:extLst>
           </p:cNvPr>
@@ -10246,7 +10289,7 @@
           <p:cNvPr id="34" name="">
             <a:extLst xmlns:a="http://schemas.openxmlformats.org/drawingml/2006/main">
               <a:ext uri="{FF2B5EF4-FFF2-40B4-BE49-F238E27FC236}">
-                <a16:creationId xmlns:a16="http://schemas.microsoft.com/office/drawing/2014/main" id="{82EAFC32-C495-464D-8018-D0F79638A301}"/>
+                <a16:creationId xmlns:a16="http://schemas.microsoft.com/office/drawing/2014/main" id="{E22F6D0F-3828-4817-B86C-156FED63B9E9}"/>
               </a:ext>
             </a:extLst>
           </p:cNvPr>
@@ -10277,7 +10320,7 @@
           <p:cNvPr id="35" name="">
             <a:extLst xmlns:a="http://schemas.openxmlformats.org/drawingml/2006/main">
               <a:ext uri="{FF2B5EF4-FFF2-40B4-BE49-F238E27FC236}">
-                <a16:creationId xmlns:a16="http://schemas.microsoft.com/office/drawing/2014/main" id="{07F35FB1-9DA4-460F-BB72-4EF622416B92}"/>
+                <a16:creationId xmlns:a16="http://schemas.microsoft.com/office/drawing/2014/main" id="{DE9EE3E2-8CFC-497D-93C0-2BAB934A19A9}"/>
               </a:ext>
             </a:extLst>
           </p:cNvPr>
@@ -10312,7 +10355,7 @@
           <p:nvPr/>
         </p:nvPicPr>
         <p:blipFill>
-          <a:blip xmlns:r="http://schemas.openxmlformats.org/officeDocument/2006/relationships" xmlns:a="http://schemas.openxmlformats.org/drawingml/2006/main" r:embed="Rd78358faebbc4783"/>
+          <a:blip xmlns:r="http://schemas.openxmlformats.org/officeDocument/2006/relationships" xmlns:a="http://schemas.openxmlformats.org/drawingml/2006/main" r:embed="Rc1e19d0ee2574ab8"/>
           <a:stretch xmlns:a="http://schemas.openxmlformats.org/drawingml/2006/main"/>
         </p:blipFill>
         <p:spPr>
@@ -10330,7 +10373,7 @@
           <p:cNvPr id="37" name="">
             <a:extLst xmlns:a="http://schemas.openxmlformats.org/drawingml/2006/main">
               <a:ext uri="{FF2B5EF4-FFF2-40B4-BE49-F238E27FC236}">
-                <a16:creationId xmlns:a16="http://schemas.microsoft.com/office/drawing/2014/main" id="{62B6FC3A-1025-4B05-AC67-84E87CD264A4}"/>
+                <a16:creationId xmlns:a16="http://schemas.microsoft.com/office/drawing/2014/main" id="{989586D3-4A31-43B3-BC05-A8669370CA5A}"/>
               </a:ext>
             </a:extLst>
           </p:cNvPr>
@@ -10380,7 +10423,7 @@
           <p:cNvPr id="38" name="">
             <a:extLst xmlns:a="http://schemas.openxmlformats.org/drawingml/2006/main">
               <a:ext uri="{FF2B5EF4-FFF2-40B4-BE49-F238E27FC236}">
-                <a16:creationId xmlns:a16="http://schemas.microsoft.com/office/drawing/2014/main" id="{E378D2A1-6831-4A17-9037-0259B0E3CFD6}"/>
+                <a16:creationId xmlns:a16="http://schemas.microsoft.com/office/drawing/2014/main" id="{6EA86CF0-2530-4BF9-B000-21244784B04D}"/>
               </a:ext>
             </a:extLst>
           </p:cNvPr>
@@ -10413,7 +10456,7 @@
           <p:cNvPr id="39" name="">
             <a:extLst xmlns:a="http://schemas.openxmlformats.org/drawingml/2006/main">
               <a:ext uri="{FF2B5EF4-FFF2-40B4-BE49-F238E27FC236}">
-                <a16:creationId xmlns:a16="http://schemas.microsoft.com/office/drawing/2014/main" id="{91CF04E5-85C0-4A7E-9762-EC1D918A2A0C}"/>
+                <a16:creationId xmlns:a16="http://schemas.microsoft.com/office/drawing/2014/main" id="{72072BBE-E1EC-448B-A281-DE5C3759BF4C}"/>
               </a:ext>
             </a:extLst>
           </p:cNvPr>
@@ -10444,7 +10487,7 @@
           <p:cNvPr id="40" name="">
             <a:extLst xmlns:a="http://schemas.openxmlformats.org/drawingml/2006/main">
               <a:ext uri="{FF2B5EF4-FFF2-40B4-BE49-F238E27FC236}">
-                <a16:creationId xmlns:a16="http://schemas.microsoft.com/office/drawing/2014/main" id="{96E372FC-C6B2-4523-A658-A71723BFE03F}"/>
+                <a16:creationId xmlns:a16="http://schemas.microsoft.com/office/drawing/2014/main" id="{2DECF964-02F5-4EAA-ACE6-1E7E742D4984}"/>
               </a:ext>
             </a:extLst>
           </p:cNvPr>
@@ -10494,7 +10537,7 @@
           <p:cNvPr id="41" name="">
             <a:extLst xmlns:a="http://schemas.openxmlformats.org/drawingml/2006/main">
               <a:ext uri="{FF2B5EF4-FFF2-40B4-BE49-F238E27FC236}">
-                <a16:creationId xmlns:a16="http://schemas.microsoft.com/office/drawing/2014/main" id="{65DAFCC9-47D5-4A77-A98A-752701DA3EDB}"/>
+                <a16:creationId xmlns:a16="http://schemas.microsoft.com/office/drawing/2014/main" id="{CA815130-77F1-4C7D-B6A4-AFEFA74B1AB4}"/>
               </a:ext>
             </a:extLst>
           </p:cNvPr>
@@ -10544,7 +10587,7 @@
           <p:cNvPr id="42" name="">
             <a:extLst xmlns:a="http://schemas.openxmlformats.org/drawingml/2006/main">
               <a:ext uri="{FF2B5EF4-FFF2-40B4-BE49-F238E27FC236}">
-                <a16:creationId xmlns:a16="http://schemas.microsoft.com/office/drawing/2014/main" id="{969CD5CC-CC90-46ED-9585-8C5F911236C2}"/>
+                <a16:creationId xmlns:a16="http://schemas.microsoft.com/office/drawing/2014/main" id="{80025C5B-607D-43D5-9036-85C0EFD7CDD7}"/>
               </a:ext>
             </a:extLst>
           </p:cNvPr>
@@ -10594,7 +10637,7 @@
           <p:cNvPr id="43" name="">
             <a:extLst xmlns:a="http://schemas.openxmlformats.org/drawingml/2006/main">
               <a:ext uri="{FF2B5EF4-FFF2-40B4-BE49-F238E27FC236}">
-                <a16:creationId xmlns:a16="http://schemas.microsoft.com/office/drawing/2014/main" id="{6350B5B6-73C8-49AB-9B5A-998B9154F4EB}"/>
+                <a16:creationId xmlns:a16="http://schemas.microsoft.com/office/drawing/2014/main" id="{539C52F8-EE6F-4D1E-81AE-807EBFF6B9B3}"/>
               </a:ext>
             </a:extLst>
           </p:cNvPr>
@@ -10627,7 +10670,7 @@
           <p:cNvPr id="44" name="">
             <a:extLst xmlns:a="http://schemas.openxmlformats.org/drawingml/2006/main">
               <a:ext uri="{FF2B5EF4-FFF2-40B4-BE49-F238E27FC236}">
-                <a16:creationId xmlns:a16="http://schemas.microsoft.com/office/drawing/2014/main" id="{B0ADB008-4E3B-41CA-AAC2-71327DC4D60E}"/>
+                <a16:creationId xmlns:a16="http://schemas.microsoft.com/office/drawing/2014/main" id="{F96DD3BB-E514-4000-A35C-25431FF6F8BF}"/>
               </a:ext>
             </a:extLst>
           </p:cNvPr>
@@ -10677,7 +10720,7 @@
           <p:cNvPr id="45" name="">
             <a:extLst xmlns:a="http://schemas.openxmlformats.org/drawingml/2006/main">
               <a:ext uri="{FF2B5EF4-FFF2-40B4-BE49-F238E27FC236}">
-                <a16:creationId xmlns:a16="http://schemas.microsoft.com/office/drawing/2014/main" id="{6DF81C83-8EC1-4226-9F8C-6F46002063F9}"/>
+                <a16:creationId xmlns:a16="http://schemas.microsoft.com/office/drawing/2014/main" id="{D9A564C4-4647-4F3B-84AC-1446901DAFEF}"/>
               </a:ext>
             </a:extLst>
           </p:cNvPr>
@@ -10727,7 +10770,7 @@
           <p:cNvPr id="46" name="">
             <a:extLst xmlns:a="http://schemas.openxmlformats.org/drawingml/2006/main">
               <a:ext uri="{FF2B5EF4-FFF2-40B4-BE49-F238E27FC236}">
-                <a16:creationId xmlns:a16="http://schemas.microsoft.com/office/drawing/2014/main" id="{D7CD290B-E20D-4FFF-B95D-D180956A344F}"/>
+                <a16:creationId xmlns:a16="http://schemas.microsoft.com/office/drawing/2014/main" id="{AF6CE96B-2BA9-410A-A46D-650FDE349178}"/>
               </a:ext>
             </a:extLst>
           </p:cNvPr>
@@ -10760,7 +10803,7 @@
           <p:cNvPr id="47" name="">
             <a:extLst xmlns:a="http://schemas.openxmlformats.org/drawingml/2006/main">
               <a:ext uri="{FF2B5EF4-FFF2-40B4-BE49-F238E27FC236}">
-                <a16:creationId xmlns:a16="http://schemas.microsoft.com/office/drawing/2014/main" id="{9B301372-F3A7-4ACB-9BF1-8B9FB883AC6A}"/>
+                <a16:creationId xmlns:a16="http://schemas.microsoft.com/office/drawing/2014/main" id="{F57D19AC-9E37-42DB-8BB8-979B14D0AAC6}"/>
               </a:ext>
             </a:extLst>
           </p:cNvPr>
@@ -10810,7 +10853,7 @@
           <p:cNvPr id="48" name="">
             <a:extLst xmlns:a="http://schemas.openxmlformats.org/drawingml/2006/main">
               <a:ext uri="{FF2B5EF4-FFF2-40B4-BE49-F238E27FC236}">
-                <a16:creationId xmlns:a16="http://schemas.microsoft.com/office/drawing/2014/main" id="{18EE8B5D-1E4F-469E-BF0D-80CB9D853AC5}"/>
+                <a16:creationId xmlns:a16="http://schemas.microsoft.com/office/drawing/2014/main" id="{844BADA2-EDDE-4952-A8CC-43C76418A6E5}"/>
               </a:ext>
             </a:extLst>
           </p:cNvPr>
@@ -10860,7 +10903,7 @@
           <p:cNvPr id="49" name="">
             <a:extLst xmlns:a="http://schemas.openxmlformats.org/drawingml/2006/main">
               <a:ext uri="{FF2B5EF4-FFF2-40B4-BE49-F238E27FC236}">
-                <a16:creationId xmlns:a16="http://schemas.microsoft.com/office/drawing/2014/main" id="{0284680D-E48E-4678-807E-70C1BBA63ED1}"/>
+                <a16:creationId xmlns:a16="http://schemas.microsoft.com/office/drawing/2014/main" id="{60027154-2AE3-4CBC-860E-14A9CAC57A4A}"/>
               </a:ext>
             </a:extLst>
           </p:cNvPr>
@@ -10910,7 +10953,7 @@
           <p:cNvPr id="50" name="">
             <a:extLst xmlns:a="http://schemas.openxmlformats.org/drawingml/2006/main">
               <a:ext uri="{FF2B5EF4-FFF2-40B4-BE49-F238E27FC236}">
-                <a16:creationId xmlns:a16="http://schemas.microsoft.com/office/drawing/2014/main" id="{AD3001B9-723E-4F22-9E08-710479A9E404}"/>
+                <a16:creationId xmlns:a16="http://schemas.microsoft.com/office/drawing/2014/main" id="{28D17894-C557-4962-AA5D-4E1D3E80D6C4}"/>
               </a:ext>
             </a:extLst>
           </p:cNvPr>
@@ -10960,7 +11003,7 @@
           <p:cNvPr id="51" name="">
             <a:extLst xmlns:a="http://schemas.openxmlformats.org/drawingml/2006/main">
               <a:ext uri="{FF2B5EF4-FFF2-40B4-BE49-F238E27FC236}">
-                <a16:creationId xmlns:a16="http://schemas.microsoft.com/office/drawing/2014/main" id="{53278A97-0D5A-45D0-A107-99B7C3C2FA36}"/>
+                <a16:creationId xmlns:a16="http://schemas.microsoft.com/office/drawing/2014/main" id="{768F80BB-51E5-4D9D-8C79-D8C46853CE62}"/>
               </a:ext>
             </a:extLst>
           </p:cNvPr>
@@ -11010,7 +11053,7 @@
           <p:cNvPr id="52" name="">
             <a:extLst xmlns:a="http://schemas.openxmlformats.org/drawingml/2006/main">
               <a:ext uri="{FF2B5EF4-FFF2-40B4-BE49-F238E27FC236}">
-                <a16:creationId xmlns:a16="http://schemas.microsoft.com/office/drawing/2014/main" id="{37A04A2D-4AA6-40F4-9952-3FFD036BA21F}"/>
+                <a16:creationId xmlns:a16="http://schemas.microsoft.com/office/drawing/2014/main" id="{EA963663-7532-4129-8178-E6D490A3D3FF}"/>
               </a:ext>
             </a:extLst>
           </p:cNvPr>
@@ -11041,7 +11084,7 @@
           <p:cNvPr id="53" name="">
             <a:extLst xmlns:a="http://schemas.openxmlformats.org/drawingml/2006/main">
               <a:ext uri="{FF2B5EF4-FFF2-40B4-BE49-F238E27FC236}">
-                <a16:creationId xmlns:a16="http://schemas.microsoft.com/office/drawing/2014/main" id="{389730B8-F8E5-432A-9702-667C278F50AC}"/>
+                <a16:creationId xmlns:a16="http://schemas.microsoft.com/office/drawing/2014/main" id="{F966F198-EE5D-4694-8BF3-B85E85E2377A}"/>
               </a:ext>
             </a:extLst>
           </p:cNvPr>
@@ -11091,7 +11134,7 @@
           <p:cNvPr id="54" name="">
             <a:extLst xmlns:a="http://schemas.openxmlformats.org/drawingml/2006/main">
               <a:ext uri="{FF2B5EF4-FFF2-40B4-BE49-F238E27FC236}">
-                <a16:creationId xmlns:a16="http://schemas.microsoft.com/office/drawing/2014/main" id="{27B4BD2C-55DB-4008-A497-B9F40BEF9A3A}"/>
+                <a16:creationId xmlns:a16="http://schemas.microsoft.com/office/drawing/2014/main" id="{E04CF933-58A4-4CA0-9876-9293C86709C3}"/>
               </a:ext>
             </a:extLst>
           </p:cNvPr>
@@ -11141,7 +11184,7 @@
           <p:cNvPr id="55" name="">
             <a:extLst xmlns:a="http://schemas.openxmlformats.org/drawingml/2006/main">
               <a:ext uri="{FF2B5EF4-FFF2-40B4-BE49-F238E27FC236}">
-                <a16:creationId xmlns:a16="http://schemas.microsoft.com/office/drawing/2014/main" id="{43C7524D-163A-4E93-942F-E558F128C7D1}"/>
+                <a16:creationId xmlns:a16="http://schemas.microsoft.com/office/drawing/2014/main" id="{3EFD8F9B-3C4B-4AC3-A1D2-5D46FC2EFBBB}"/>
               </a:ext>
             </a:extLst>
           </p:cNvPr>
@@ -11172,7 +11215,7 @@
           <p:cNvPr id="56" name="">
             <a:extLst xmlns:a="http://schemas.openxmlformats.org/drawingml/2006/main">
               <a:ext uri="{FF2B5EF4-FFF2-40B4-BE49-F238E27FC236}">
-                <a16:creationId xmlns:a16="http://schemas.microsoft.com/office/drawing/2014/main" id="{A59BA586-FD9B-4487-AEAD-186D11B3D48F}"/>
+                <a16:creationId xmlns:a16="http://schemas.microsoft.com/office/drawing/2014/main" id="{3927BD25-B25B-467B-91ED-863B3452FF02}"/>
               </a:ext>
             </a:extLst>
           </p:cNvPr>
@@ -11222,7 +11265,7 @@
           <p:cNvPr id="57" name="">
             <a:extLst xmlns:a="http://schemas.openxmlformats.org/drawingml/2006/main">
               <a:ext uri="{FF2B5EF4-FFF2-40B4-BE49-F238E27FC236}">
-                <a16:creationId xmlns:a16="http://schemas.microsoft.com/office/drawing/2014/main" id="{96C28309-0F3B-44A1-8846-B18A7DEAD078}"/>
+                <a16:creationId xmlns:a16="http://schemas.microsoft.com/office/drawing/2014/main" id="{5ECF5B02-BF40-451B-A29B-03EDFA927D41}"/>
               </a:ext>
             </a:extLst>
           </p:cNvPr>
@@ -11270,7 +11313,7 @@
     </p:spTree>
     <p:extLst>
       <p:ext uri="{BB962C8B-B14F-4D97-AF65-F5344CB8AC3E}">
-        <p14:creationId xmlns:p14="http://schemas.microsoft.com/office/powerpoint/2010/main" val="214470828"/>
+        <p14:creationId xmlns:p14="http://schemas.microsoft.com/office/powerpoint/2010/main" val="1136938782"/>
       </p:ext>
     </p:extLst>
   </p:cSld>
@@ -11301,7 +11344,7 @@
           <p:cNvPr id="1" name="">
             <a:extLst xmlns:a="http://schemas.openxmlformats.org/drawingml/2006/main">
               <a:ext uri="{FF2B5EF4-FFF2-40B4-BE49-F238E27FC236}">
-                <a16:creationId xmlns:a16="http://schemas.microsoft.com/office/drawing/2014/main" id="{FE224227-DE2C-4785-832D-438D64A1B359}"/>
+                <a16:creationId xmlns:a16="http://schemas.microsoft.com/office/drawing/2014/main" id="{75FE978F-3FA8-486C-8D1B-86BA97D1CA54}"/>
               </a:ext>
             </a:extLst>
           </p:cNvPr>
@@ -11329,14 +11372,14 @@
       </p:sp>
       <p:pic>
         <p:nvPicPr>
-          <p:cNvPr id="36" name=""/>
+          <p:cNvPr id="41" name=""/>
           <p:cNvPicPr>
             <a:picLocks xmlns:a="http://schemas.openxmlformats.org/drawingml/2006/main" noChangeAspect="1"/>
           </p:cNvPicPr>
           <p:nvPr/>
         </p:nvPicPr>
         <p:blipFill>
-          <a:blip xmlns:r="http://schemas.openxmlformats.org/officeDocument/2006/relationships" xmlns:a="http://schemas.openxmlformats.org/drawingml/2006/main" r:embed="Rbfb8b02324164ce9"/>
+          <a:blip xmlns:r="http://schemas.openxmlformats.org/officeDocument/2006/relationships" xmlns:a="http://schemas.openxmlformats.org/drawingml/2006/main" r:embed="Rfde0ccccdf5540c5"/>
           <a:stretch xmlns:a="http://schemas.openxmlformats.org/drawingml/2006/main"/>
         </p:blipFill>
         <p:spPr>
@@ -11354,7 +11397,7 @@
           <p:cNvPr id="3" name="">
             <a:extLst xmlns:a="http://schemas.openxmlformats.org/drawingml/2006/main">
               <a:ext uri="{FF2B5EF4-FFF2-40B4-BE49-F238E27FC236}">
-                <a16:creationId xmlns:a16="http://schemas.microsoft.com/office/drawing/2014/main" id="{207A1432-1007-4FA8-8E6F-2AE119952C33}"/>
+                <a16:creationId xmlns:a16="http://schemas.microsoft.com/office/drawing/2014/main" id="{0EA316D9-C83C-4E26-9853-DBC31FCC2005}"/>
               </a:ext>
             </a:extLst>
           </p:cNvPr>
@@ -11394,7 +11437,7 @@
                   <a:srgbClr val="161616"/>
                 </a:solidFill>
               </a:rPr>
-              <a:t>Что должно измениться за первые 90 дней</a:t>
+              <a:t>Профиль угроз и разрывов контроля</a:t>
             </a:r>
           </a:p>
         </p:txBody>
@@ -11404,7 +11447,7 @@
           <p:cNvPr id="4" name="">
             <a:extLst xmlns:a="http://schemas.openxmlformats.org/drawingml/2006/main">
               <a:ext uri="{FF2B5EF4-FFF2-40B4-BE49-F238E27FC236}">
-                <a16:creationId xmlns:a16="http://schemas.microsoft.com/office/drawing/2014/main" id="{852FF6A1-472C-46DB-B864-E39D0D3635A9}"/>
+                <a16:creationId xmlns:a16="http://schemas.microsoft.com/office/drawing/2014/main" id="{972027BB-3628-41F3-948B-1CBAF2AD95E0}"/>
               </a:ext>
             </a:extLst>
           </p:cNvPr>
@@ -11437,7 +11480,7 @@
           <p:cNvPr id="5" name="">
             <a:extLst xmlns:a="http://schemas.openxmlformats.org/drawingml/2006/main">
               <a:ext uri="{FF2B5EF4-FFF2-40B4-BE49-F238E27FC236}">
-                <a16:creationId xmlns:a16="http://schemas.microsoft.com/office/drawing/2014/main" id="{BA8E3F2E-BACC-4556-B325-3426DC66C4AA}"/>
+                <a16:creationId xmlns:a16="http://schemas.microsoft.com/office/drawing/2014/main" id="{F93B76BD-DC35-4416-8A32-680FE63BA229}"/>
               </a:ext>
             </a:extLst>
           </p:cNvPr>
@@ -11468,7 +11511,7 @@
           <p:cNvPr id="6" name="">
             <a:extLst xmlns:a="http://schemas.openxmlformats.org/drawingml/2006/main">
               <a:ext uri="{FF2B5EF4-FFF2-40B4-BE49-F238E27FC236}">
-                <a16:creationId xmlns:a16="http://schemas.microsoft.com/office/drawing/2014/main" id="{0AE5C563-9E98-4E8C-8015-492E2FB9529A}"/>
+                <a16:creationId xmlns:a16="http://schemas.microsoft.com/office/drawing/2014/main" id="{158BF54D-32C6-4859-9CC3-A79D512A791F}"/>
               </a:ext>
             </a:extLst>
           </p:cNvPr>
@@ -11518,7 +11561,7 @@
           <p:cNvPr id="7" name="">
             <a:extLst xmlns:a="http://schemas.openxmlformats.org/drawingml/2006/main">
               <a:ext uri="{FF2B5EF4-FFF2-40B4-BE49-F238E27FC236}">
-                <a16:creationId xmlns:a16="http://schemas.microsoft.com/office/drawing/2014/main" id="{535CDF3F-9450-4C24-AD2B-02338AB7FB24}"/>
+                <a16:creationId xmlns:a16="http://schemas.microsoft.com/office/drawing/2014/main" id="{5396AC5F-3073-445D-8ADA-F6A6C672C9D6}"/>
               </a:ext>
             </a:extLst>
           </p:cNvPr>
@@ -11568,7 +11611,7 @@
           <p:cNvPr id="8" name="">
             <a:extLst xmlns:a="http://schemas.openxmlformats.org/drawingml/2006/main">
               <a:ext uri="{FF2B5EF4-FFF2-40B4-BE49-F238E27FC236}">
-                <a16:creationId xmlns:a16="http://schemas.microsoft.com/office/drawing/2014/main" id="{C4533EF5-D04E-453F-B7C6-E9DEE23A57C4}"/>
+                <a16:creationId xmlns:a16="http://schemas.microsoft.com/office/drawing/2014/main" id="{0095517D-ABEE-4E2B-BE58-623231442FC0}"/>
               </a:ext>
             </a:extLst>
           </p:cNvPr>
@@ -11580,7 +11623,7 @@
         <p:spPr>
           <a:xfrm xmlns:a="http://schemas.openxmlformats.org/drawingml/2006/main">
             <a:off x="552450" y="1333500"/>
-            <a:ext cx="10648950" cy="400050"/>
+            <a:ext cx="10648950" cy="323850"/>
           </a:xfrm>
           <a:prstGeom xmlns:a="http://schemas.openxmlformats.org/drawingml/2006/main" prst="rect">
             <a:avLst/>
@@ -11596,19 +11639,19 @@
           <a:lstStyle xmlns:a="http://schemas.openxmlformats.org/drawingml/2006/main"/>
           <a:p xmlns:a="http://schemas.openxmlformats.org/drawingml/2006/main">
             <a:pPr>
-              <a:defRPr sz="1500" b="1">
+              <a:defRPr sz="1425" b="1">
                 <a:solidFill>
                   <a:srgbClr val="FF6412"/>
                 </a:solidFill>
               </a:defRPr>
             </a:pPr>
             <a:r>
-              <a:rPr sz="1500" b="1">
+              <a:rPr sz="1425" b="1">
                 <a:solidFill>
                   <a:srgbClr val="FF6412"/>
                 </a:solidFill>
               </a:rPr>
-              <a:t>Четыре приоритета связывают факты анкеты с измеримым результатом</a:t>
+              <a:t>Доля незакрытых контрольных зон по данным анкеты</a:t>
             </a:r>
           </a:p>
         </p:txBody>
@@ -11618,269 +11661,19 @@
           <p:cNvPr id="9" name="">
             <a:extLst xmlns:a="http://schemas.openxmlformats.org/drawingml/2006/main">
               <a:ext uri="{FF2B5EF4-FFF2-40B4-BE49-F238E27FC236}">
-                <a16:creationId xmlns:a16="http://schemas.microsoft.com/office/drawing/2014/main" id="{76EF129E-1D10-4422-91FB-AAAEA930877E}"/>
-              </a:ext>
-            </a:extLst>
-          </p:cNvPr>
-          <p:cNvSpPr>
-            <a:spLocks xmlns:a="http://schemas.openxmlformats.org/drawingml/2006/main" noGrp="1"/>
-          </p:cNvSpPr>
-          <p:nvPr/>
-        </p:nvSpPr>
-        <p:spPr>
-          <a:xfrm xmlns:a="http://schemas.openxmlformats.org/drawingml/2006/main">
-            <a:off x="552450" y="1809750"/>
-            <a:ext cx="2571750" cy="209550"/>
-          </a:xfrm>
-          <a:prstGeom xmlns:a="http://schemas.openxmlformats.org/drawingml/2006/main" prst="rect">
-            <a:avLst/>
-          </a:prstGeom>
-          <a:noFill xmlns:a="http://schemas.openxmlformats.org/drawingml/2006/main"/>
-          <a:ln xmlns:a="http://schemas.openxmlformats.org/drawingml/2006/main" w="0">
-            <a:noFill/>
-            <a:prstDash val="solid"/>
-          </a:ln>
-        </p:spPr>
-        <p:txBody>
-          <a:bodyPr xmlns:a="http://schemas.openxmlformats.org/drawingml/2006/main"/>
-          <a:lstStyle xmlns:a="http://schemas.openxmlformats.org/drawingml/2006/main"/>
-          <a:p xmlns:a="http://schemas.openxmlformats.org/drawingml/2006/main">
-            <a:pPr>
-              <a:defRPr sz="825" b="1">
-                <a:solidFill>
-                  <a:srgbClr val="667085"/>
-                </a:solidFill>
-              </a:defRPr>
-            </a:pPr>
-            <a:r>
-              <a:rPr sz="825" b="1">
-                <a:solidFill>
-                  <a:srgbClr val="667085"/>
-                </a:solidFill>
-              </a:rPr>
-              <a:t>ПРИОРИТЕТ</a:t>
-            </a:r>
-          </a:p>
-        </p:txBody>
-      </p:sp>
-      <p:sp>
-        <p:nvSpPr>
-          <p:cNvPr id="10" name="">
-            <a:extLst xmlns:a="http://schemas.openxmlformats.org/drawingml/2006/main">
-              <a:ext uri="{FF2B5EF4-FFF2-40B4-BE49-F238E27FC236}">
-                <a16:creationId xmlns:a16="http://schemas.microsoft.com/office/drawing/2014/main" id="{14821E53-8912-4D27-8C42-D506FF178E77}"/>
-              </a:ext>
-            </a:extLst>
-          </p:cNvPr>
-          <p:cNvSpPr>
-            <a:spLocks xmlns:a="http://schemas.openxmlformats.org/drawingml/2006/main" noGrp="1"/>
-          </p:cNvSpPr>
-          <p:nvPr/>
-        </p:nvSpPr>
-        <p:spPr>
-          <a:xfrm xmlns:a="http://schemas.openxmlformats.org/drawingml/2006/main">
-            <a:off x="3333750" y="1809750"/>
-            <a:ext cx="3143250" cy="209550"/>
-          </a:xfrm>
-          <a:prstGeom xmlns:a="http://schemas.openxmlformats.org/drawingml/2006/main" prst="rect">
-            <a:avLst/>
-          </a:prstGeom>
-          <a:noFill xmlns:a="http://schemas.openxmlformats.org/drawingml/2006/main"/>
-          <a:ln xmlns:a="http://schemas.openxmlformats.org/drawingml/2006/main" w="0">
-            <a:noFill/>
-            <a:prstDash val="solid"/>
-          </a:ln>
-        </p:spPr>
-        <p:txBody>
-          <a:bodyPr xmlns:a="http://schemas.openxmlformats.org/drawingml/2006/main"/>
-          <a:lstStyle xmlns:a="http://schemas.openxmlformats.org/drawingml/2006/main"/>
-          <a:p xmlns:a="http://schemas.openxmlformats.org/drawingml/2006/main">
-            <a:pPr>
-              <a:defRPr sz="825" b="1">
-                <a:solidFill>
-                  <a:srgbClr val="667085"/>
-                </a:solidFill>
-              </a:defRPr>
-            </a:pPr>
-            <a:r>
-              <a:rPr sz="825" b="1">
-                <a:solidFill>
-                  <a:srgbClr val="667085"/>
-                </a:solidFill>
-              </a:rPr>
-              <a:t>СЕЙЧАС</a:t>
-            </a:r>
-          </a:p>
-        </p:txBody>
-      </p:sp>
-      <p:sp>
-        <p:nvSpPr>
-          <p:cNvPr id="11" name="">
-            <a:extLst xmlns:a="http://schemas.openxmlformats.org/drawingml/2006/main">
-              <a:ext uri="{FF2B5EF4-FFF2-40B4-BE49-F238E27FC236}">
-                <a16:creationId xmlns:a16="http://schemas.microsoft.com/office/drawing/2014/main" id="{095DA742-6BCD-47D5-9ACE-F9D55E8DFC73}"/>
-              </a:ext>
-            </a:extLst>
-          </p:cNvPr>
-          <p:cNvSpPr>
-            <a:spLocks xmlns:a="http://schemas.openxmlformats.org/drawingml/2006/main" noGrp="1"/>
-          </p:cNvSpPr>
-          <p:nvPr/>
-        </p:nvSpPr>
-        <p:spPr>
-          <a:xfrm xmlns:a="http://schemas.openxmlformats.org/drawingml/2006/main">
-            <a:off x="7239000" y="1809750"/>
-            <a:ext cx="3962400" cy="209550"/>
-          </a:xfrm>
-          <a:prstGeom xmlns:a="http://schemas.openxmlformats.org/drawingml/2006/main" prst="rect">
-            <a:avLst/>
-          </a:prstGeom>
-          <a:noFill xmlns:a="http://schemas.openxmlformats.org/drawingml/2006/main"/>
-          <a:ln xmlns:a="http://schemas.openxmlformats.org/drawingml/2006/main" w="0">
-            <a:noFill/>
-            <a:prstDash val="solid"/>
-          </a:ln>
-        </p:spPr>
-        <p:txBody>
-          <a:bodyPr xmlns:a="http://schemas.openxmlformats.org/drawingml/2006/main"/>
-          <a:lstStyle xmlns:a="http://schemas.openxmlformats.org/drawingml/2006/main"/>
-          <a:p xmlns:a="http://schemas.openxmlformats.org/drawingml/2006/main">
-            <a:pPr>
-              <a:defRPr sz="825" b="1">
-                <a:solidFill>
-                  <a:srgbClr val="667085"/>
-                </a:solidFill>
-              </a:defRPr>
-            </a:pPr>
-            <a:r>
-              <a:rPr sz="825" b="1">
-                <a:solidFill>
-                  <a:srgbClr val="667085"/>
-                </a:solidFill>
-              </a:rPr>
-              <a:t>ЦЕЛЬ 90 ДНЕЙ</a:t>
-            </a:r>
-          </a:p>
-        </p:txBody>
-      </p:sp>
-      <p:sp>
-        <p:nvSpPr>
-          <p:cNvPr id="12" name="">
-            <a:extLst xmlns:a="http://schemas.openxmlformats.org/drawingml/2006/main">
-              <a:ext uri="{FF2B5EF4-FFF2-40B4-BE49-F238E27FC236}">
-                <a16:creationId xmlns:a16="http://schemas.microsoft.com/office/drawing/2014/main" id="{03B0356C-DD5D-445C-BFA3-B8F183501D80}"/>
-              </a:ext>
-            </a:extLst>
-          </p:cNvPr>
-          <p:cNvSpPr>
-            <a:spLocks xmlns:a="http://schemas.openxmlformats.org/drawingml/2006/main" noGrp="1"/>
-          </p:cNvSpPr>
-          <p:nvPr/>
-        </p:nvSpPr>
-        <p:spPr>
-          <a:xfrm xmlns:a="http://schemas.openxmlformats.org/drawingml/2006/main">
-            <a:off x="552450" y="2190750"/>
-            <a:ext cx="419100" cy="266700"/>
-          </a:xfrm>
-          <a:prstGeom xmlns:a="http://schemas.openxmlformats.org/drawingml/2006/main" prst="rect">
-            <a:avLst/>
-          </a:prstGeom>
-          <a:noFill xmlns:a="http://schemas.openxmlformats.org/drawingml/2006/main"/>
-          <a:ln xmlns:a="http://schemas.openxmlformats.org/drawingml/2006/main" w="0">
-            <a:noFill/>
-            <a:prstDash val="solid"/>
-          </a:ln>
-        </p:spPr>
-        <p:txBody>
-          <a:bodyPr xmlns:a="http://schemas.openxmlformats.org/drawingml/2006/main"/>
-          <a:lstStyle xmlns:a="http://schemas.openxmlformats.org/drawingml/2006/main"/>
-          <a:p xmlns:a="http://schemas.openxmlformats.org/drawingml/2006/main">
-            <a:pPr>
-              <a:defRPr sz="1125" b="1">
-                <a:solidFill>
-                  <a:srgbClr val="FF6412"/>
-                </a:solidFill>
-              </a:defRPr>
-            </a:pPr>
-            <a:r>
-              <a:rPr sz="1125" b="1">
-                <a:solidFill>
-                  <a:srgbClr val="FF6412"/>
-                </a:solidFill>
-              </a:rPr>
-              <a:t>01</a:t>
-            </a:r>
-          </a:p>
-        </p:txBody>
-      </p:sp>
-      <p:sp>
-        <p:nvSpPr>
-          <p:cNvPr id="13" name="">
-            <a:extLst xmlns:a="http://schemas.openxmlformats.org/drawingml/2006/main">
-              <a:ext uri="{FF2B5EF4-FFF2-40B4-BE49-F238E27FC236}">
-                <a16:creationId xmlns:a16="http://schemas.microsoft.com/office/drawing/2014/main" id="{CF23BB12-5952-4B1B-9C49-349B1692EC24}"/>
-              </a:ext>
-            </a:extLst>
-          </p:cNvPr>
-          <p:cNvSpPr>
-            <a:spLocks xmlns:a="http://schemas.openxmlformats.org/drawingml/2006/main" noGrp="1"/>
-          </p:cNvSpPr>
-          <p:nvPr/>
-        </p:nvSpPr>
-        <p:spPr>
-          <a:xfrm xmlns:a="http://schemas.openxmlformats.org/drawingml/2006/main">
-            <a:off x="1047750" y="2152650"/>
-            <a:ext cx="2076450" cy="647700"/>
-          </a:xfrm>
-          <a:prstGeom xmlns:a="http://schemas.openxmlformats.org/drawingml/2006/main" prst="rect">
-            <a:avLst/>
-          </a:prstGeom>
-          <a:noFill xmlns:a="http://schemas.openxmlformats.org/drawingml/2006/main"/>
-          <a:ln xmlns:a="http://schemas.openxmlformats.org/drawingml/2006/main" w="0">
-            <a:noFill/>
-            <a:prstDash val="solid"/>
-          </a:ln>
-        </p:spPr>
-        <p:txBody>
-          <a:bodyPr xmlns:a="http://schemas.openxmlformats.org/drawingml/2006/main"/>
-          <a:lstStyle xmlns:a="http://schemas.openxmlformats.org/drawingml/2006/main"/>
-          <a:p xmlns:a="http://schemas.openxmlformats.org/drawingml/2006/main">
-            <a:pPr>
-              <a:defRPr sz="1275" b="1">
-                <a:solidFill>
-                  <a:srgbClr val="161616"/>
-                </a:solidFill>
-              </a:defRPr>
-            </a:pPr>
-            <a:r>
-              <a:rPr sz="1275" b="1">
-                <a:solidFill>
-                  <a:srgbClr val="161616"/>
-                </a:solidFill>
-              </a:rPr>
-              <a:t>{{OUTCOME_1_TITLE}}</a:t>
-            </a:r>
-          </a:p>
-        </p:txBody>
-      </p:sp>
-      <p:sp>
-        <p:nvSpPr>
-          <p:cNvPr id="14" name="">
-            <a:extLst xmlns:a="http://schemas.openxmlformats.org/drawingml/2006/main">
-              <a:ext uri="{FF2B5EF4-FFF2-40B4-BE49-F238E27FC236}">
-                <a16:creationId xmlns:a16="http://schemas.microsoft.com/office/drawing/2014/main" id="{BCB47251-7CBD-430F-8DE7-3A7E02A0EFCA}"/>
-              </a:ext>
-            </a:extLst>
-          </p:cNvPr>
-          <p:cNvSpPr>
-            <a:spLocks xmlns:a="http://schemas.openxmlformats.org/drawingml/2006/main" noGrp="1"/>
-          </p:cNvSpPr>
-          <p:nvPr/>
-        </p:nvSpPr>
-        <p:spPr>
-          <a:xfrm xmlns:a="http://schemas.openxmlformats.org/drawingml/2006/main">
-            <a:off x="3333750" y="2152650"/>
-            <a:ext cx="3143250" cy="685800"/>
+                <a16:creationId xmlns:a16="http://schemas.microsoft.com/office/drawing/2014/main" id="{6FF7B63D-C33F-481A-8638-DB5FFECCDDD0}"/>
+              </a:ext>
+            </a:extLst>
+          </p:cNvPr>
+          <p:cNvSpPr>
+            <a:spLocks xmlns:a="http://schemas.openxmlformats.org/drawingml/2006/main" noGrp="1"/>
+          </p:cNvSpPr>
+          <p:nvPr/>
+        </p:nvSpPr>
+        <p:spPr>
+          <a:xfrm xmlns:a="http://schemas.openxmlformats.org/drawingml/2006/main">
+            <a:off x="552450" y="1695450"/>
+            <a:ext cx="10648950" cy="266700"/>
           </a:xfrm>
           <a:prstGeom xmlns:a="http://schemas.openxmlformats.org/drawingml/2006/main" prst="rect">
             <a:avLst/>
@@ -11908,7 +11701,219 @@
                   <a:srgbClr val="667085"/>
                 </a:solidFill>
               </a:rPr>
-              <a:t>{{OUTCOME_1_FROM}}</a:t>
+              <a:t>Красный требует первоочередного решения, желтый — управляемого плана, зеленый — контроля эффективности.</a:t>
+            </a:r>
+          </a:p>
+        </p:txBody>
+      </p:sp>
+      <p:sp>
+        <p:nvSpPr>
+          <p:cNvPr id="10" name="">
+            <a:extLst xmlns:a="http://schemas.openxmlformats.org/drawingml/2006/main">
+              <a:ext uri="{FF2B5EF4-FFF2-40B4-BE49-F238E27FC236}">
+                <a16:creationId xmlns:a16="http://schemas.microsoft.com/office/drawing/2014/main" id="{4601222F-5E32-457C-86D1-6DA65DF216D5}"/>
+              </a:ext>
+            </a:extLst>
+          </p:cNvPr>
+          <p:cNvSpPr>
+            <a:spLocks xmlns:a="http://schemas.openxmlformats.org/drawingml/2006/main" noGrp="1"/>
+          </p:cNvSpPr>
+          <p:nvPr/>
+        </p:nvSpPr>
+        <p:spPr>
+          <a:xfrm xmlns:a="http://schemas.openxmlformats.org/drawingml/2006/main">
+            <a:off x="1085850" y="2247900"/>
+            <a:ext cx="1257300" cy="1257300"/>
+          </a:xfrm>
+          <a:prstGeom xmlns:a="http://schemas.openxmlformats.org/drawingml/2006/main" prst="ellipse">
+            <a:avLst/>
+          </a:prstGeom>
+          <a:solidFill xmlns:a="http://schemas.openxmlformats.org/drawingml/2006/main">
+            <a:srgbClr val="B30001"/>
+          </a:solidFill>
+          <a:ln xmlns:a="http://schemas.openxmlformats.org/drawingml/2006/main" w="0">
+            <a:noFill/>
+            <a:prstDash val="solid"/>
+          </a:ln>
+        </p:spPr>
+      </p:sp>
+      <p:sp>
+        <p:nvSpPr>
+          <p:cNvPr id="11" name="">
+            <a:extLst xmlns:a="http://schemas.openxmlformats.org/drawingml/2006/main">
+              <a:ext uri="{FF2B5EF4-FFF2-40B4-BE49-F238E27FC236}">
+                <a16:creationId xmlns:a16="http://schemas.microsoft.com/office/drawing/2014/main" id="{22FA9057-38BA-4504-B8C6-D1318D920222}"/>
+              </a:ext>
+            </a:extLst>
+          </p:cNvPr>
+          <p:cNvSpPr>
+            <a:spLocks xmlns:a="http://schemas.openxmlformats.org/drawingml/2006/main" noGrp="1"/>
+          </p:cNvSpPr>
+          <p:nvPr/>
+        </p:nvSpPr>
+        <p:spPr>
+          <a:xfrm xmlns:a="http://schemas.openxmlformats.org/drawingml/2006/main">
+            <a:off x="1257300" y="2419350"/>
+            <a:ext cx="914400" cy="914400"/>
+          </a:xfrm>
+          <a:prstGeom xmlns:a="http://schemas.openxmlformats.org/drawingml/2006/main" prst="ellipse">
+            <a:avLst/>
+          </a:prstGeom>
+          <a:solidFill xmlns:a="http://schemas.openxmlformats.org/drawingml/2006/main">
+            <a:srgbClr val="FFFFFF"/>
+          </a:solidFill>
+          <a:ln xmlns:a="http://schemas.openxmlformats.org/drawingml/2006/main" w="0">
+            <a:noFill/>
+            <a:prstDash val="solid"/>
+          </a:ln>
+        </p:spPr>
+      </p:sp>
+      <p:sp>
+        <p:nvSpPr>
+          <p:cNvPr id="12" name="">
+            <a:extLst xmlns:a="http://schemas.openxmlformats.org/drawingml/2006/main">
+              <a:ext uri="{FF2B5EF4-FFF2-40B4-BE49-F238E27FC236}">
+                <a16:creationId xmlns:a16="http://schemas.microsoft.com/office/drawing/2014/main" id="{627BFC9B-B91C-4219-828C-E82B38F1FC7E}"/>
+              </a:ext>
+            </a:extLst>
+          </p:cNvPr>
+          <p:cNvSpPr>
+            <a:spLocks xmlns:a="http://schemas.openxmlformats.org/drawingml/2006/main" noGrp="1"/>
+          </p:cNvSpPr>
+          <p:nvPr/>
+        </p:nvSpPr>
+        <p:spPr>
+          <a:xfrm xmlns:a="http://schemas.openxmlformats.org/drawingml/2006/main">
+            <a:off x="1295400" y="2695575"/>
+            <a:ext cx="838200" cy="361950"/>
+          </a:xfrm>
+          <a:prstGeom xmlns:a="http://schemas.openxmlformats.org/drawingml/2006/main" prst="rect">
+            <a:avLst/>
+          </a:prstGeom>
+          <a:noFill xmlns:a="http://schemas.openxmlformats.org/drawingml/2006/main"/>
+          <a:ln xmlns:a="http://schemas.openxmlformats.org/drawingml/2006/main" w="0">
+            <a:noFill/>
+            <a:prstDash val="solid"/>
+          </a:ln>
+        </p:spPr>
+        <p:txBody>
+          <a:bodyPr xmlns:a="http://schemas.openxmlformats.org/drawingml/2006/main"/>
+          <a:lstStyle xmlns:a="http://schemas.openxmlformats.org/drawingml/2006/main"/>
+          <a:p xmlns:a="http://schemas.openxmlformats.org/drawingml/2006/main">
+            <a:pPr algn="ctr">
+              <a:defRPr sz="1800" b="1">
+                <a:solidFill>
+                  <a:srgbClr val="161616"/>
+                </a:solidFill>
+              </a:defRPr>
+            </a:pPr>
+            <a:r>
+              <a:rPr sz="1800" b="1">
+                <a:solidFill>
+                  <a:srgbClr val="161616"/>
+                </a:solidFill>
+              </a:rPr>
+              <a:t>{{THREAT_1_VALUE}}%</a:t>
+            </a:r>
+          </a:p>
+        </p:txBody>
+      </p:sp>
+      <p:sp>
+        <p:nvSpPr>
+          <p:cNvPr id="13" name="">
+            <a:extLst xmlns:a="http://schemas.openxmlformats.org/drawingml/2006/main">
+              <a:ext uri="{FF2B5EF4-FFF2-40B4-BE49-F238E27FC236}">
+                <a16:creationId xmlns:a16="http://schemas.microsoft.com/office/drawing/2014/main" id="{6CE8753B-1D9E-48A5-A1E6-79CEEF9A4C05}"/>
+              </a:ext>
+            </a:extLst>
+          </p:cNvPr>
+          <p:cNvSpPr>
+            <a:spLocks xmlns:a="http://schemas.openxmlformats.org/drawingml/2006/main" noGrp="1"/>
+          </p:cNvSpPr>
+          <p:nvPr/>
+        </p:nvSpPr>
+        <p:spPr>
+          <a:xfrm xmlns:a="http://schemas.openxmlformats.org/drawingml/2006/main">
+            <a:off x="590550" y="3638550"/>
+            <a:ext cx="2247900" cy="323850"/>
+          </a:xfrm>
+          <a:prstGeom xmlns:a="http://schemas.openxmlformats.org/drawingml/2006/main" prst="rect">
+            <a:avLst/>
+          </a:prstGeom>
+          <a:noFill xmlns:a="http://schemas.openxmlformats.org/drawingml/2006/main"/>
+          <a:ln xmlns:a="http://schemas.openxmlformats.org/drawingml/2006/main" w="0">
+            <a:noFill/>
+            <a:prstDash val="solid"/>
+          </a:ln>
+        </p:spPr>
+        <p:txBody>
+          <a:bodyPr xmlns:a="http://schemas.openxmlformats.org/drawingml/2006/main"/>
+          <a:lstStyle xmlns:a="http://schemas.openxmlformats.org/drawingml/2006/main"/>
+          <a:p xmlns:a="http://schemas.openxmlformats.org/drawingml/2006/main">
+            <a:pPr algn="ctr">
+              <a:defRPr sz="1200" b="1">
+                <a:solidFill>
+                  <a:srgbClr val="161616"/>
+                </a:solidFill>
+              </a:defRPr>
+            </a:pPr>
+            <a:r>
+              <a:rPr sz="1200" b="1">
+                <a:solidFill>
+                  <a:srgbClr val="161616"/>
+                </a:solidFill>
+              </a:rPr>
+              <a:t>{{THREAT_1_LABEL}}</a:t>
+            </a:r>
+          </a:p>
+        </p:txBody>
+      </p:sp>
+      <p:sp>
+        <p:nvSpPr>
+          <p:cNvPr id="14" name="">
+            <a:extLst xmlns:a="http://schemas.openxmlformats.org/drawingml/2006/main">
+              <a:ext uri="{FF2B5EF4-FFF2-40B4-BE49-F238E27FC236}">
+                <a16:creationId xmlns:a16="http://schemas.microsoft.com/office/drawing/2014/main" id="{9EEBDDED-42CE-41DB-9C68-0E1383A2E388}"/>
+              </a:ext>
+            </a:extLst>
+          </p:cNvPr>
+          <p:cNvSpPr>
+            <a:spLocks xmlns:a="http://schemas.openxmlformats.org/drawingml/2006/main" noGrp="1"/>
+          </p:cNvSpPr>
+          <p:nvPr/>
+        </p:nvSpPr>
+        <p:spPr>
+          <a:xfrm xmlns:a="http://schemas.openxmlformats.org/drawingml/2006/main">
+            <a:off x="590550" y="3933825"/>
+            <a:ext cx="2247900" cy="209550"/>
+          </a:xfrm>
+          <a:prstGeom xmlns:a="http://schemas.openxmlformats.org/drawingml/2006/main" prst="rect">
+            <a:avLst/>
+          </a:prstGeom>
+          <a:noFill xmlns:a="http://schemas.openxmlformats.org/drawingml/2006/main"/>
+          <a:ln xmlns:a="http://schemas.openxmlformats.org/drawingml/2006/main" w="0">
+            <a:noFill/>
+            <a:prstDash val="solid"/>
+          </a:ln>
+        </p:spPr>
+        <p:txBody>
+          <a:bodyPr xmlns:a="http://schemas.openxmlformats.org/drawingml/2006/main"/>
+          <a:lstStyle xmlns:a="http://schemas.openxmlformats.org/drawingml/2006/main"/>
+          <a:p xmlns:a="http://schemas.openxmlformats.org/drawingml/2006/main">
+            <a:pPr algn="ctr">
+              <a:defRPr sz="900">
+                <a:solidFill>
+                  <a:srgbClr val="667085"/>
+                </a:solidFill>
+              </a:defRPr>
+            </a:pPr>
+            <a:r>
+              <a:rPr sz="900">
+                <a:solidFill>
+                  <a:srgbClr val="667085"/>
+                </a:solidFill>
+              </a:rPr>
+              <a:t>разрыв контроля</a:t>
             </a:r>
           </a:p>
         </p:txBody>
@@ -11918,19 +11923,81 @@
           <p:cNvPr id="15" name="">
             <a:extLst xmlns:a="http://schemas.openxmlformats.org/drawingml/2006/main">
               <a:ext uri="{FF2B5EF4-FFF2-40B4-BE49-F238E27FC236}">
-                <a16:creationId xmlns:a16="http://schemas.microsoft.com/office/drawing/2014/main" id="{48F7CDC6-7851-44A7-9689-64BF3D7285BB}"/>
-              </a:ext>
-            </a:extLst>
-          </p:cNvPr>
-          <p:cNvSpPr>
-            <a:spLocks xmlns:a="http://schemas.openxmlformats.org/drawingml/2006/main" noGrp="1"/>
-          </p:cNvSpPr>
-          <p:nvPr/>
-        </p:nvSpPr>
-        <p:spPr>
-          <a:xfrm xmlns:a="http://schemas.openxmlformats.org/drawingml/2006/main">
-            <a:off x="6667500" y="2266950"/>
-            <a:ext cx="381000" cy="342900"/>
+                <a16:creationId xmlns:a16="http://schemas.microsoft.com/office/drawing/2014/main" id="{672ABB74-099F-44D3-95ED-843FDD6F90E6}"/>
+              </a:ext>
+            </a:extLst>
+          </p:cNvPr>
+          <p:cNvSpPr>
+            <a:spLocks xmlns:a="http://schemas.openxmlformats.org/drawingml/2006/main" noGrp="1"/>
+          </p:cNvSpPr>
+          <p:nvPr/>
+        </p:nvSpPr>
+        <p:spPr>
+          <a:xfrm xmlns:a="http://schemas.openxmlformats.org/drawingml/2006/main">
+            <a:off x="4724400" y="2247900"/>
+            <a:ext cx="1257300" cy="1257300"/>
+          </a:xfrm>
+          <a:prstGeom xmlns:a="http://schemas.openxmlformats.org/drawingml/2006/main" prst="ellipse">
+            <a:avLst/>
+          </a:prstGeom>
+          <a:solidFill xmlns:a="http://schemas.openxmlformats.org/drawingml/2006/main">
+            <a:srgbClr val="B30002"/>
+          </a:solidFill>
+          <a:ln xmlns:a="http://schemas.openxmlformats.org/drawingml/2006/main" w="0">
+            <a:noFill/>
+            <a:prstDash val="solid"/>
+          </a:ln>
+        </p:spPr>
+      </p:sp>
+      <p:sp>
+        <p:nvSpPr>
+          <p:cNvPr id="16" name="">
+            <a:extLst xmlns:a="http://schemas.openxmlformats.org/drawingml/2006/main">
+              <a:ext uri="{FF2B5EF4-FFF2-40B4-BE49-F238E27FC236}">
+                <a16:creationId xmlns:a16="http://schemas.microsoft.com/office/drawing/2014/main" id="{74D76DB6-8678-4C0C-A172-7CE44E0A4AE6}"/>
+              </a:ext>
+            </a:extLst>
+          </p:cNvPr>
+          <p:cNvSpPr>
+            <a:spLocks xmlns:a="http://schemas.openxmlformats.org/drawingml/2006/main" noGrp="1"/>
+          </p:cNvSpPr>
+          <p:nvPr/>
+        </p:nvSpPr>
+        <p:spPr>
+          <a:xfrm xmlns:a="http://schemas.openxmlformats.org/drawingml/2006/main">
+            <a:off x="4895850" y="2419350"/>
+            <a:ext cx="914400" cy="914400"/>
+          </a:xfrm>
+          <a:prstGeom xmlns:a="http://schemas.openxmlformats.org/drawingml/2006/main" prst="ellipse">
+            <a:avLst/>
+          </a:prstGeom>
+          <a:solidFill xmlns:a="http://schemas.openxmlformats.org/drawingml/2006/main">
+            <a:srgbClr val="FFFFFF"/>
+          </a:solidFill>
+          <a:ln xmlns:a="http://schemas.openxmlformats.org/drawingml/2006/main" w="0">
+            <a:noFill/>
+            <a:prstDash val="solid"/>
+          </a:ln>
+        </p:spPr>
+      </p:sp>
+      <p:sp>
+        <p:nvSpPr>
+          <p:cNvPr id="17" name="">
+            <a:extLst xmlns:a="http://schemas.openxmlformats.org/drawingml/2006/main">
+              <a:ext uri="{FF2B5EF4-FFF2-40B4-BE49-F238E27FC236}">
+                <a16:creationId xmlns:a16="http://schemas.microsoft.com/office/drawing/2014/main" id="{8C55DAA6-0B43-4CB6-A0DF-E51629351401}"/>
+              </a:ext>
+            </a:extLst>
+          </p:cNvPr>
+          <p:cNvSpPr>
+            <a:spLocks xmlns:a="http://schemas.openxmlformats.org/drawingml/2006/main" noGrp="1"/>
+          </p:cNvSpPr>
+          <p:nvPr/>
+        </p:nvSpPr>
+        <p:spPr>
+          <a:xfrm xmlns:a="http://schemas.openxmlformats.org/drawingml/2006/main">
+            <a:off x="4933950" y="2695575"/>
+            <a:ext cx="838200" cy="361950"/>
           </a:xfrm>
           <a:prstGeom xmlns:a="http://schemas.openxmlformats.org/drawingml/2006/main" prst="rect">
             <a:avLst/>
@@ -11946,97 +12013,147 @@
           <a:lstStyle xmlns:a="http://schemas.openxmlformats.org/drawingml/2006/main"/>
           <a:p xmlns:a="http://schemas.openxmlformats.org/drawingml/2006/main">
             <a:pPr algn="ctr">
-              <a:defRPr sz="1950" b="1">
-                <a:solidFill>
-                  <a:srgbClr val="FF6412"/>
-                </a:solidFill>
-              </a:defRPr>
-            </a:pPr>
-            <a:r>
-              <a:rPr sz="1950" b="1">
-                <a:solidFill>
-                  <a:srgbClr val="FF6412"/>
-                </a:solidFill>
-              </a:rPr>
-              <a:t>→</a:t>
-            </a:r>
-          </a:p>
-        </p:txBody>
-      </p:sp>
-      <p:sp>
-        <p:nvSpPr>
-          <p:cNvPr id="16" name="">
-            <a:extLst xmlns:a="http://schemas.openxmlformats.org/drawingml/2006/main">
-              <a:ext uri="{FF2B5EF4-FFF2-40B4-BE49-F238E27FC236}">
-                <a16:creationId xmlns:a16="http://schemas.microsoft.com/office/drawing/2014/main" id="{388325A0-6669-4B04-92A7-E04E6E9FF975}"/>
-              </a:ext>
-            </a:extLst>
-          </p:cNvPr>
-          <p:cNvSpPr>
-            <a:spLocks xmlns:a="http://schemas.openxmlformats.org/drawingml/2006/main" noGrp="1"/>
-          </p:cNvSpPr>
-          <p:nvPr/>
-        </p:nvSpPr>
-        <p:spPr>
-          <a:xfrm xmlns:a="http://schemas.openxmlformats.org/drawingml/2006/main">
-            <a:off x="7239000" y="2152650"/>
-            <a:ext cx="3962400" cy="685800"/>
-          </a:xfrm>
-          <a:prstGeom xmlns:a="http://schemas.openxmlformats.org/drawingml/2006/main" prst="rect">
-            <a:avLst/>
-          </a:prstGeom>
-          <a:noFill xmlns:a="http://schemas.openxmlformats.org/drawingml/2006/main"/>
-          <a:ln xmlns:a="http://schemas.openxmlformats.org/drawingml/2006/main" w="0">
-            <a:noFill/>
-            <a:prstDash val="solid"/>
-          </a:ln>
-        </p:spPr>
-        <p:txBody>
-          <a:bodyPr xmlns:a="http://schemas.openxmlformats.org/drawingml/2006/main"/>
-          <a:lstStyle xmlns:a="http://schemas.openxmlformats.org/drawingml/2006/main"/>
-          <a:p xmlns:a="http://schemas.openxmlformats.org/drawingml/2006/main">
-            <a:pPr>
-              <a:defRPr sz="1125" b="1">
-                <a:solidFill>
-                  <a:srgbClr val="161616"/>
-                </a:solidFill>
-              </a:defRPr>
-            </a:pPr>
-            <a:r>
-              <a:rPr sz="1125" b="1">
-                <a:solidFill>
-                  <a:srgbClr val="161616"/>
-                </a:solidFill>
-              </a:rPr>
-              <a:t>{{OUTCOME_1_TO}}</a:t>
-            </a:r>
-          </a:p>
-        </p:txBody>
-      </p:sp>
-      <p:sp>
-        <p:nvSpPr>
-          <p:cNvPr id="17" name="">
-            <a:extLst xmlns:a="http://schemas.openxmlformats.org/drawingml/2006/main">
-              <a:ext uri="{FF2B5EF4-FFF2-40B4-BE49-F238E27FC236}">
-                <a16:creationId xmlns:a16="http://schemas.microsoft.com/office/drawing/2014/main" id="{19CC5106-11D8-4105-8683-DF98ED121B9A}"/>
-              </a:ext>
-            </a:extLst>
-          </p:cNvPr>
-          <p:cNvSpPr>
-            <a:spLocks xmlns:a="http://schemas.openxmlformats.org/drawingml/2006/main" noGrp="1"/>
-          </p:cNvSpPr>
-          <p:nvPr/>
-        </p:nvSpPr>
-        <p:spPr>
-          <a:xfrm xmlns:a="http://schemas.openxmlformats.org/drawingml/2006/main">
-            <a:off x="552450" y="2990850"/>
-            <a:ext cx="10648950" cy="9525"/>
-          </a:xfrm>
-          <a:prstGeom xmlns:a="http://schemas.openxmlformats.org/drawingml/2006/main" prst="rect">
+              <a:defRPr sz="1800" b="1">
+                <a:solidFill>
+                  <a:srgbClr val="161616"/>
+                </a:solidFill>
+              </a:defRPr>
+            </a:pPr>
+            <a:r>
+              <a:rPr sz="1800" b="1">
+                <a:solidFill>
+                  <a:srgbClr val="161616"/>
+                </a:solidFill>
+              </a:rPr>
+              <a:t>{{THREAT_2_VALUE}}%</a:t>
+            </a:r>
+          </a:p>
+        </p:txBody>
+      </p:sp>
+      <p:sp>
+        <p:nvSpPr>
+          <p:cNvPr id="18" name="">
+            <a:extLst xmlns:a="http://schemas.openxmlformats.org/drawingml/2006/main">
+              <a:ext uri="{FF2B5EF4-FFF2-40B4-BE49-F238E27FC236}">
+                <a16:creationId xmlns:a16="http://schemas.microsoft.com/office/drawing/2014/main" id="{A7777C4B-A570-46EE-B916-9E1B0DACC8A2}"/>
+              </a:ext>
+            </a:extLst>
+          </p:cNvPr>
+          <p:cNvSpPr>
+            <a:spLocks xmlns:a="http://schemas.openxmlformats.org/drawingml/2006/main" noGrp="1"/>
+          </p:cNvSpPr>
+          <p:nvPr/>
+        </p:nvSpPr>
+        <p:spPr>
+          <a:xfrm xmlns:a="http://schemas.openxmlformats.org/drawingml/2006/main">
+            <a:off x="4229100" y="3638550"/>
+            <a:ext cx="2247900" cy="323850"/>
+          </a:xfrm>
+          <a:prstGeom xmlns:a="http://schemas.openxmlformats.org/drawingml/2006/main" prst="rect">
+            <a:avLst/>
+          </a:prstGeom>
+          <a:noFill xmlns:a="http://schemas.openxmlformats.org/drawingml/2006/main"/>
+          <a:ln xmlns:a="http://schemas.openxmlformats.org/drawingml/2006/main" w="0">
+            <a:noFill/>
+            <a:prstDash val="solid"/>
+          </a:ln>
+        </p:spPr>
+        <p:txBody>
+          <a:bodyPr xmlns:a="http://schemas.openxmlformats.org/drawingml/2006/main"/>
+          <a:lstStyle xmlns:a="http://schemas.openxmlformats.org/drawingml/2006/main"/>
+          <a:p xmlns:a="http://schemas.openxmlformats.org/drawingml/2006/main">
+            <a:pPr algn="ctr">
+              <a:defRPr sz="1200" b="1">
+                <a:solidFill>
+                  <a:srgbClr val="161616"/>
+                </a:solidFill>
+              </a:defRPr>
+            </a:pPr>
+            <a:r>
+              <a:rPr sz="1200" b="1">
+                <a:solidFill>
+                  <a:srgbClr val="161616"/>
+                </a:solidFill>
+              </a:rPr>
+              <a:t>{{THREAT_2_LABEL}}</a:t>
+            </a:r>
+          </a:p>
+        </p:txBody>
+      </p:sp>
+      <p:sp>
+        <p:nvSpPr>
+          <p:cNvPr id="19" name="">
+            <a:extLst xmlns:a="http://schemas.openxmlformats.org/drawingml/2006/main">
+              <a:ext uri="{FF2B5EF4-FFF2-40B4-BE49-F238E27FC236}">
+                <a16:creationId xmlns:a16="http://schemas.microsoft.com/office/drawing/2014/main" id="{A9017ACF-5F21-4987-B2D4-494760D947D3}"/>
+              </a:ext>
+            </a:extLst>
+          </p:cNvPr>
+          <p:cNvSpPr>
+            <a:spLocks xmlns:a="http://schemas.openxmlformats.org/drawingml/2006/main" noGrp="1"/>
+          </p:cNvSpPr>
+          <p:nvPr/>
+        </p:nvSpPr>
+        <p:spPr>
+          <a:xfrm xmlns:a="http://schemas.openxmlformats.org/drawingml/2006/main">
+            <a:off x="4229100" y="3933825"/>
+            <a:ext cx="2247900" cy="209550"/>
+          </a:xfrm>
+          <a:prstGeom xmlns:a="http://schemas.openxmlformats.org/drawingml/2006/main" prst="rect">
+            <a:avLst/>
+          </a:prstGeom>
+          <a:noFill xmlns:a="http://schemas.openxmlformats.org/drawingml/2006/main"/>
+          <a:ln xmlns:a="http://schemas.openxmlformats.org/drawingml/2006/main" w="0">
+            <a:noFill/>
+            <a:prstDash val="solid"/>
+          </a:ln>
+        </p:spPr>
+        <p:txBody>
+          <a:bodyPr xmlns:a="http://schemas.openxmlformats.org/drawingml/2006/main"/>
+          <a:lstStyle xmlns:a="http://schemas.openxmlformats.org/drawingml/2006/main"/>
+          <a:p xmlns:a="http://schemas.openxmlformats.org/drawingml/2006/main">
+            <a:pPr algn="ctr">
+              <a:defRPr sz="900">
+                <a:solidFill>
+                  <a:srgbClr val="667085"/>
+                </a:solidFill>
+              </a:defRPr>
+            </a:pPr>
+            <a:r>
+              <a:rPr sz="900">
+                <a:solidFill>
+                  <a:srgbClr val="667085"/>
+                </a:solidFill>
+              </a:rPr>
+              <a:t>разрыв контроля</a:t>
+            </a:r>
+          </a:p>
+        </p:txBody>
+      </p:sp>
+      <p:sp>
+        <p:nvSpPr>
+          <p:cNvPr id="20" name="">
+            <a:extLst xmlns:a="http://schemas.openxmlformats.org/drawingml/2006/main">
+              <a:ext uri="{FF2B5EF4-FFF2-40B4-BE49-F238E27FC236}">
+                <a16:creationId xmlns:a16="http://schemas.microsoft.com/office/drawing/2014/main" id="{887D1A55-E53B-43AB-B1FF-CD5EAA348C77}"/>
+              </a:ext>
+            </a:extLst>
+          </p:cNvPr>
+          <p:cNvSpPr>
+            <a:spLocks xmlns:a="http://schemas.openxmlformats.org/drawingml/2006/main" noGrp="1"/>
+          </p:cNvSpPr>
+          <p:nvPr/>
+        </p:nvSpPr>
+        <p:spPr>
+          <a:xfrm xmlns:a="http://schemas.openxmlformats.org/drawingml/2006/main">
+            <a:off x="8362950" y="2247900"/>
+            <a:ext cx="1257300" cy="1257300"/>
+          </a:xfrm>
+          <a:prstGeom xmlns:a="http://schemas.openxmlformats.org/drawingml/2006/main" prst="ellipse">
             <a:avLst/>
           </a:prstGeom>
           <a:solidFill xmlns:a="http://schemas.openxmlformats.org/drawingml/2006/main">
-            <a:srgbClr val="E4E7EC"/>
+            <a:srgbClr val="B30003"/>
           </a:solidFill>
           <a:ln xmlns:a="http://schemas.openxmlformats.org/drawingml/2006/main" w="0">
             <a:noFill/>
@@ -12046,172 +12163,265 @@
       </p:sp>
       <p:sp>
         <p:nvSpPr>
-          <p:cNvPr id="18" name="">
-            <a:extLst xmlns:a="http://schemas.openxmlformats.org/drawingml/2006/main">
-              <a:ext uri="{FF2B5EF4-FFF2-40B4-BE49-F238E27FC236}">
-                <a16:creationId xmlns:a16="http://schemas.microsoft.com/office/drawing/2014/main" id="{F2D0A1C5-83DD-4D70-B708-35BC4A97399A}"/>
-              </a:ext>
-            </a:extLst>
-          </p:cNvPr>
-          <p:cNvSpPr>
-            <a:spLocks xmlns:a="http://schemas.openxmlformats.org/drawingml/2006/main" noGrp="1"/>
-          </p:cNvSpPr>
-          <p:nvPr/>
-        </p:nvSpPr>
-        <p:spPr>
-          <a:xfrm xmlns:a="http://schemas.openxmlformats.org/drawingml/2006/main">
-            <a:off x="552450" y="3219450"/>
-            <a:ext cx="419100" cy="266700"/>
-          </a:xfrm>
-          <a:prstGeom xmlns:a="http://schemas.openxmlformats.org/drawingml/2006/main" prst="rect">
-            <a:avLst/>
-          </a:prstGeom>
-          <a:noFill xmlns:a="http://schemas.openxmlformats.org/drawingml/2006/main"/>
-          <a:ln xmlns:a="http://schemas.openxmlformats.org/drawingml/2006/main" w="0">
-            <a:noFill/>
-            <a:prstDash val="solid"/>
-          </a:ln>
-        </p:spPr>
-        <p:txBody>
-          <a:bodyPr xmlns:a="http://schemas.openxmlformats.org/drawingml/2006/main"/>
-          <a:lstStyle xmlns:a="http://schemas.openxmlformats.org/drawingml/2006/main"/>
-          <a:p xmlns:a="http://schemas.openxmlformats.org/drawingml/2006/main">
-            <a:pPr>
-              <a:defRPr sz="1125" b="1">
-                <a:solidFill>
-                  <a:srgbClr val="FF6412"/>
-                </a:solidFill>
-              </a:defRPr>
-            </a:pPr>
-            <a:r>
-              <a:rPr sz="1125" b="1">
-                <a:solidFill>
-                  <a:srgbClr val="FF6412"/>
-                </a:solidFill>
-              </a:rPr>
-              <a:t>02</a:t>
-            </a:r>
-          </a:p>
-        </p:txBody>
-      </p:sp>
-      <p:sp>
-        <p:nvSpPr>
-          <p:cNvPr id="19" name="">
-            <a:extLst xmlns:a="http://schemas.openxmlformats.org/drawingml/2006/main">
-              <a:ext uri="{FF2B5EF4-FFF2-40B4-BE49-F238E27FC236}">
-                <a16:creationId xmlns:a16="http://schemas.microsoft.com/office/drawing/2014/main" id="{B6E81436-11BC-4D66-9D5D-B75D09633F38}"/>
-              </a:ext>
-            </a:extLst>
-          </p:cNvPr>
-          <p:cNvSpPr>
-            <a:spLocks xmlns:a="http://schemas.openxmlformats.org/drawingml/2006/main" noGrp="1"/>
-          </p:cNvSpPr>
-          <p:nvPr/>
-        </p:nvSpPr>
-        <p:spPr>
-          <a:xfrm xmlns:a="http://schemas.openxmlformats.org/drawingml/2006/main">
-            <a:off x="1047750" y="3181350"/>
-            <a:ext cx="2076450" cy="647700"/>
-          </a:xfrm>
-          <a:prstGeom xmlns:a="http://schemas.openxmlformats.org/drawingml/2006/main" prst="rect">
-            <a:avLst/>
-          </a:prstGeom>
-          <a:noFill xmlns:a="http://schemas.openxmlformats.org/drawingml/2006/main"/>
-          <a:ln xmlns:a="http://schemas.openxmlformats.org/drawingml/2006/main" w="0">
-            <a:noFill/>
-            <a:prstDash val="solid"/>
-          </a:ln>
-        </p:spPr>
-        <p:txBody>
-          <a:bodyPr xmlns:a="http://schemas.openxmlformats.org/drawingml/2006/main"/>
-          <a:lstStyle xmlns:a="http://schemas.openxmlformats.org/drawingml/2006/main"/>
-          <a:p xmlns:a="http://schemas.openxmlformats.org/drawingml/2006/main">
-            <a:pPr>
-              <a:defRPr sz="1275" b="1">
-                <a:solidFill>
-                  <a:srgbClr val="161616"/>
-                </a:solidFill>
-              </a:defRPr>
-            </a:pPr>
-            <a:r>
-              <a:rPr sz="1275" b="1">
-                <a:solidFill>
-                  <a:srgbClr val="161616"/>
-                </a:solidFill>
-              </a:rPr>
-              <a:t>{{OUTCOME_2_TITLE}}</a:t>
-            </a:r>
-          </a:p>
-        </p:txBody>
-      </p:sp>
-      <p:sp>
-        <p:nvSpPr>
-          <p:cNvPr id="20" name="">
-            <a:extLst xmlns:a="http://schemas.openxmlformats.org/drawingml/2006/main">
-              <a:ext uri="{FF2B5EF4-FFF2-40B4-BE49-F238E27FC236}">
-                <a16:creationId xmlns:a16="http://schemas.microsoft.com/office/drawing/2014/main" id="{10BBFF18-F0F0-4FEE-A2AA-282785854CE6}"/>
-              </a:ext>
-            </a:extLst>
-          </p:cNvPr>
-          <p:cNvSpPr>
-            <a:spLocks xmlns:a="http://schemas.openxmlformats.org/drawingml/2006/main" noGrp="1"/>
-          </p:cNvSpPr>
-          <p:nvPr/>
-        </p:nvSpPr>
-        <p:spPr>
-          <a:xfrm xmlns:a="http://schemas.openxmlformats.org/drawingml/2006/main">
-            <a:off x="3333750" y="3181350"/>
-            <a:ext cx="3143250" cy="685800"/>
-          </a:xfrm>
-          <a:prstGeom xmlns:a="http://schemas.openxmlformats.org/drawingml/2006/main" prst="rect">
-            <a:avLst/>
-          </a:prstGeom>
-          <a:noFill xmlns:a="http://schemas.openxmlformats.org/drawingml/2006/main"/>
-          <a:ln xmlns:a="http://schemas.openxmlformats.org/drawingml/2006/main" w="0">
-            <a:noFill/>
-            <a:prstDash val="solid"/>
-          </a:ln>
-        </p:spPr>
-        <p:txBody>
-          <a:bodyPr xmlns:a="http://schemas.openxmlformats.org/drawingml/2006/main"/>
-          <a:lstStyle xmlns:a="http://schemas.openxmlformats.org/drawingml/2006/main"/>
-          <a:p xmlns:a="http://schemas.openxmlformats.org/drawingml/2006/main">
-            <a:pPr>
-              <a:defRPr sz="1050">
+          <p:cNvPr id="21" name="">
+            <a:extLst xmlns:a="http://schemas.openxmlformats.org/drawingml/2006/main">
+              <a:ext uri="{FF2B5EF4-FFF2-40B4-BE49-F238E27FC236}">
+                <a16:creationId xmlns:a16="http://schemas.microsoft.com/office/drawing/2014/main" id="{4B412591-1B3C-4573-8E11-E18A882B37DC}"/>
+              </a:ext>
+            </a:extLst>
+          </p:cNvPr>
+          <p:cNvSpPr>
+            <a:spLocks xmlns:a="http://schemas.openxmlformats.org/drawingml/2006/main" noGrp="1"/>
+          </p:cNvSpPr>
+          <p:nvPr/>
+        </p:nvSpPr>
+        <p:spPr>
+          <a:xfrm xmlns:a="http://schemas.openxmlformats.org/drawingml/2006/main">
+            <a:off x="8534400" y="2419350"/>
+            <a:ext cx="914400" cy="914400"/>
+          </a:xfrm>
+          <a:prstGeom xmlns:a="http://schemas.openxmlformats.org/drawingml/2006/main" prst="ellipse">
+            <a:avLst/>
+          </a:prstGeom>
+          <a:solidFill xmlns:a="http://schemas.openxmlformats.org/drawingml/2006/main">
+            <a:srgbClr val="FFFFFF"/>
+          </a:solidFill>
+          <a:ln xmlns:a="http://schemas.openxmlformats.org/drawingml/2006/main" w="0">
+            <a:noFill/>
+            <a:prstDash val="solid"/>
+          </a:ln>
+        </p:spPr>
+      </p:sp>
+      <p:sp>
+        <p:nvSpPr>
+          <p:cNvPr id="22" name="">
+            <a:extLst xmlns:a="http://schemas.openxmlformats.org/drawingml/2006/main">
+              <a:ext uri="{FF2B5EF4-FFF2-40B4-BE49-F238E27FC236}">
+                <a16:creationId xmlns:a16="http://schemas.microsoft.com/office/drawing/2014/main" id="{9F7ED941-B15E-4AC8-9F38-86BF1F2F5F1E}"/>
+              </a:ext>
+            </a:extLst>
+          </p:cNvPr>
+          <p:cNvSpPr>
+            <a:spLocks xmlns:a="http://schemas.openxmlformats.org/drawingml/2006/main" noGrp="1"/>
+          </p:cNvSpPr>
+          <p:nvPr/>
+        </p:nvSpPr>
+        <p:spPr>
+          <a:xfrm xmlns:a="http://schemas.openxmlformats.org/drawingml/2006/main">
+            <a:off x="8572500" y="2695575"/>
+            <a:ext cx="838200" cy="361950"/>
+          </a:xfrm>
+          <a:prstGeom xmlns:a="http://schemas.openxmlformats.org/drawingml/2006/main" prst="rect">
+            <a:avLst/>
+          </a:prstGeom>
+          <a:noFill xmlns:a="http://schemas.openxmlformats.org/drawingml/2006/main"/>
+          <a:ln xmlns:a="http://schemas.openxmlformats.org/drawingml/2006/main" w="0">
+            <a:noFill/>
+            <a:prstDash val="solid"/>
+          </a:ln>
+        </p:spPr>
+        <p:txBody>
+          <a:bodyPr xmlns:a="http://schemas.openxmlformats.org/drawingml/2006/main"/>
+          <a:lstStyle xmlns:a="http://schemas.openxmlformats.org/drawingml/2006/main"/>
+          <a:p xmlns:a="http://schemas.openxmlformats.org/drawingml/2006/main">
+            <a:pPr algn="ctr">
+              <a:defRPr sz="1800" b="1">
+                <a:solidFill>
+                  <a:srgbClr val="161616"/>
+                </a:solidFill>
+              </a:defRPr>
+            </a:pPr>
+            <a:r>
+              <a:rPr sz="1800" b="1">
+                <a:solidFill>
+                  <a:srgbClr val="161616"/>
+                </a:solidFill>
+              </a:rPr>
+              <a:t>{{THREAT_3_VALUE}}%</a:t>
+            </a:r>
+          </a:p>
+        </p:txBody>
+      </p:sp>
+      <p:sp>
+        <p:nvSpPr>
+          <p:cNvPr id="23" name="">
+            <a:extLst xmlns:a="http://schemas.openxmlformats.org/drawingml/2006/main">
+              <a:ext uri="{FF2B5EF4-FFF2-40B4-BE49-F238E27FC236}">
+                <a16:creationId xmlns:a16="http://schemas.microsoft.com/office/drawing/2014/main" id="{2D5D781E-2CB7-4CE1-B363-5F0C383D0B28}"/>
+              </a:ext>
+            </a:extLst>
+          </p:cNvPr>
+          <p:cNvSpPr>
+            <a:spLocks xmlns:a="http://schemas.openxmlformats.org/drawingml/2006/main" noGrp="1"/>
+          </p:cNvSpPr>
+          <p:nvPr/>
+        </p:nvSpPr>
+        <p:spPr>
+          <a:xfrm xmlns:a="http://schemas.openxmlformats.org/drawingml/2006/main">
+            <a:off x="7867650" y="3638550"/>
+            <a:ext cx="2247900" cy="323850"/>
+          </a:xfrm>
+          <a:prstGeom xmlns:a="http://schemas.openxmlformats.org/drawingml/2006/main" prst="rect">
+            <a:avLst/>
+          </a:prstGeom>
+          <a:noFill xmlns:a="http://schemas.openxmlformats.org/drawingml/2006/main"/>
+          <a:ln xmlns:a="http://schemas.openxmlformats.org/drawingml/2006/main" w="0">
+            <a:noFill/>
+            <a:prstDash val="solid"/>
+          </a:ln>
+        </p:spPr>
+        <p:txBody>
+          <a:bodyPr xmlns:a="http://schemas.openxmlformats.org/drawingml/2006/main"/>
+          <a:lstStyle xmlns:a="http://schemas.openxmlformats.org/drawingml/2006/main"/>
+          <a:p xmlns:a="http://schemas.openxmlformats.org/drawingml/2006/main">
+            <a:pPr algn="ctr">
+              <a:defRPr sz="1200" b="1">
+                <a:solidFill>
+                  <a:srgbClr val="161616"/>
+                </a:solidFill>
+              </a:defRPr>
+            </a:pPr>
+            <a:r>
+              <a:rPr sz="1200" b="1">
+                <a:solidFill>
+                  <a:srgbClr val="161616"/>
+                </a:solidFill>
+              </a:rPr>
+              <a:t>{{THREAT_3_LABEL}}</a:t>
+            </a:r>
+          </a:p>
+        </p:txBody>
+      </p:sp>
+      <p:sp>
+        <p:nvSpPr>
+          <p:cNvPr id="24" name="">
+            <a:extLst xmlns:a="http://schemas.openxmlformats.org/drawingml/2006/main">
+              <a:ext uri="{FF2B5EF4-FFF2-40B4-BE49-F238E27FC236}">
+                <a16:creationId xmlns:a16="http://schemas.microsoft.com/office/drawing/2014/main" id="{6EA4F4A5-208E-485A-9672-6785350E120E}"/>
+              </a:ext>
+            </a:extLst>
+          </p:cNvPr>
+          <p:cNvSpPr>
+            <a:spLocks xmlns:a="http://schemas.openxmlformats.org/drawingml/2006/main" noGrp="1"/>
+          </p:cNvSpPr>
+          <p:nvPr/>
+        </p:nvSpPr>
+        <p:spPr>
+          <a:xfrm xmlns:a="http://schemas.openxmlformats.org/drawingml/2006/main">
+            <a:off x="7867650" y="3933825"/>
+            <a:ext cx="2247900" cy="209550"/>
+          </a:xfrm>
+          <a:prstGeom xmlns:a="http://schemas.openxmlformats.org/drawingml/2006/main" prst="rect">
+            <a:avLst/>
+          </a:prstGeom>
+          <a:noFill xmlns:a="http://schemas.openxmlformats.org/drawingml/2006/main"/>
+          <a:ln xmlns:a="http://schemas.openxmlformats.org/drawingml/2006/main" w="0">
+            <a:noFill/>
+            <a:prstDash val="solid"/>
+          </a:ln>
+        </p:spPr>
+        <p:txBody>
+          <a:bodyPr xmlns:a="http://schemas.openxmlformats.org/drawingml/2006/main"/>
+          <a:lstStyle xmlns:a="http://schemas.openxmlformats.org/drawingml/2006/main"/>
+          <a:p xmlns:a="http://schemas.openxmlformats.org/drawingml/2006/main">
+            <a:pPr algn="ctr">
+              <a:defRPr sz="900">
                 <a:solidFill>
                   <a:srgbClr val="667085"/>
                 </a:solidFill>
               </a:defRPr>
             </a:pPr>
             <a:r>
-              <a:rPr sz="1050">
+              <a:rPr sz="900">
                 <a:solidFill>
                   <a:srgbClr val="667085"/>
                 </a:solidFill>
               </a:rPr>
-              <a:t>{{OUTCOME_2_FROM}}</a:t>
-            </a:r>
-          </a:p>
-        </p:txBody>
-      </p:sp>
-      <p:sp>
-        <p:nvSpPr>
-          <p:cNvPr id="21" name="">
-            <a:extLst xmlns:a="http://schemas.openxmlformats.org/drawingml/2006/main">
-              <a:ext uri="{FF2B5EF4-FFF2-40B4-BE49-F238E27FC236}">
-                <a16:creationId xmlns:a16="http://schemas.microsoft.com/office/drawing/2014/main" id="{E451CD59-C176-4939-AD4E-A782A74EC5F8}"/>
-              </a:ext>
-            </a:extLst>
-          </p:cNvPr>
-          <p:cNvSpPr>
-            <a:spLocks xmlns:a="http://schemas.openxmlformats.org/drawingml/2006/main" noGrp="1"/>
-          </p:cNvSpPr>
-          <p:nvPr/>
-        </p:nvSpPr>
-        <p:spPr>
-          <a:xfrm xmlns:a="http://schemas.openxmlformats.org/drawingml/2006/main">
-            <a:off x="6667500" y="3295650"/>
-            <a:ext cx="381000" cy="342900"/>
+              <a:t>разрыв контроля</a:t>
+            </a:r>
+          </a:p>
+        </p:txBody>
+      </p:sp>
+      <p:sp>
+        <p:nvSpPr>
+          <p:cNvPr id="25" name="">
+            <a:extLst xmlns:a="http://schemas.openxmlformats.org/drawingml/2006/main">
+              <a:ext uri="{FF2B5EF4-FFF2-40B4-BE49-F238E27FC236}">
+                <a16:creationId xmlns:a16="http://schemas.microsoft.com/office/drawing/2014/main" id="{E90E1A50-CEA1-4A92-8BE7-893525F1D11D}"/>
+              </a:ext>
+            </a:extLst>
+          </p:cNvPr>
+          <p:cNvSpPr>
+            <a:spLocks xmlns:a="http://schemas.openxmlformats.org/drawingml/2006/main" noGrp="1"/>
+          </p:cNvSpPr>
+          <p:nvPr/>
+        </p:nvSpPr>
+        <p:spPr>
+          <a:xfrm xmlns:a="http://schemas.openxmlformats.org/drawingml/2006/main">
+            <a:off x="1085850" y="4248150"/>
+            <a:ext cx="1257300" cy="1257300"/>
+          </a:xfrm>
+          <a:prstGeom xmlns:a="http://schemas.openxmlformats.org/drawingml/2006/main" prst="ellipse">
+            <a:avLst/>
+          </a:prstGeom>
+          <a:solidFill xmlns:a="http://schemas.openxmlformats.org/drawingml/2006/main">
+            <a:srgbClr val="B30004"/>
+          </a:solidFill>
+          <a:ln xmlns:a="http://schemas.openxmlformats.org/drawingml/2006/main" w="0">
+            <a:noFill/>
+            <a:prstDash val="solid"/>
+          </a:ln>
+        </p:spPr>
+      </p:sp>
+      <p:sp>
+        <p:nvSpPr>
+          <p:cNvPr id="26" name="">
+            <a:extLst xmlns:a="http://schemas.openxmlformats.org/drawingml/2006/main">
+              <a:ext uri="{FF2B5EF4-FFF2-40B4-BE49-F238E27FC236}">
+                <a16:creationId xmlns:a16="http://schemas.microsoft.com/office/drawing/2014/main" id="{10B30B7C-3C37-4EA3-B0B9-15FF63808F58}"/>
+              </a:ext>
+            </a:extLst>
+          </p:cNvPr>
+          <p:cNvSpPr>
+            <a:spLocks xmlns:a="http://schemas.openxmlformats.org/drawingml/2006/main" noGrp="1"/>
+          </p:cNvSpPr>
+          <p:nvPr/>
+        </p:nvSpPr>
+        <p:spPr>
+          <a:xfrm xmlns:a="http://schemas.openxmlformats.org/drawingml/2006/main">
+            <a:off x="1257300" y="4419600"/>
+            <a:ext cx="914400" cy="914400"/>
+          </a:xfrm>
+          <a:prstGeom xmlns:a="http://schemas.openxmlformats.org/drawingml/2006/main" prst="ellipse">
+            <a:avLst/>
+          </a:prstGeom>
+          <a:solidFill xmlns:a="http://schemas.openxmlformats.org/drawingml/2006/main">
+            <a:srgbClr val="FFFFFF"/>
+          </a:solidFill>
+          <a:ln xmlns:a="http://schemas.openxmlformats.org/drawingml/2006/main" w="0">
+            <a:noFill/>
+            <a:prstDash val="solid"/>
+          </a:ln>
+        </p:spPr>
+      </p:sp>
+      <p:sp>
+        <p:nvSpPr>
+          <p:cNvPr id="27" name="">
+            <a:extLst xmlns:a="http://schemas.openxmlformats.org/drawingml/2006/main">
+              <a:ext uri="{FF2B5EF4-FFF2-40B4-BE49-F238E27FC236}">
+                <a16:creationId xmlns:a16="http://schemas.microsoft.com/office/drawing/2014/main" id="{9A0FDA89-3B2C-45F2-AD6B-2A3602E5BE47}"/>
+              </a:ext>
+            </a:extLst>
+          </p:cNvPr>
+          <p:cNvSpPr>
+            <a:spLocks xmlns:a="http://schemas.openxmlformats.org/drawingml/2006/main" noGrp="1"/>
+          </p:cNvSpPr>
+          <p:nvPr/>
+        </p:nvSpPr>
+        <p:spPr>
+          <a:xfrm xmlns:a="http://schemas.openxmlformats.org/drawingml/2006/main">
+            <a:off x="1295400" y="4695825"/>
+            <a:ext cx="838200" cy="361950"/>
           </a:xfrm>
           <a:prstGeom xmlns:a="http://schemas.openxmlformats.org/drawingml/2006/main" prst="rect">
             <a:avLst/>
@@ -12227,97 +12437,147 @@
           <a:lstStyle xmlns:a="http://schemas.openxmlformats.org/drawingml/2006/main"/>
           <a:p xmlns:a="http://schemas.openxmlformats.org/drawingml/2006/main">
             <a:pPr algn="ctr">
-              <a:defRPr sz="1950" b="1">
-                <a:solidFill>
-                  <a:srgbClr val="FF6412"/>
-                </a:solidFill>
-              </a:defRPr>
-            </a:pPr>
-            <a:r>
-              <a:rPr sz="1950" b="1">
-                <a:solidFill>
-                  <a:srgbClr val="FF6412"/>
-                </a:solidFill>
-              </a:rPr>
-              <a:t>→</a:t>
-            </a:r>
-          </a:p>
-        </p:txBody>
-      </p:sp>
-      <p:sp>
-        <p:nvSpPr>
-          <p:cNvPr id="22" name="">
-            <a:extLst xmlns:a="http://schemas.openxmlformats.org/drawingml/2006/main">
-              <a:ext uri="{FF2B5EF4-FFF2-40B4-BE49-F238E27FC236}">
-                <a16:creationId xmlns:a16="http://schemas.microsoft.com/office/drawing/2014/main" id="{E88075CE-5D48-44DC-92AE-72001820F90D}"/>
-              </a:ext>
-            </a:extLst>
-          </p:cNvPr>
-          <p:cNvSpPr>
-            <a:spLocks xmlns:a="http://schemas.openxmlformats.org/drawingml/2006/main" noGrp="1"/>
-          </p:cNvSpPr>
-          <p:nvPr/>
-        </p:nvSpPr>
-        <p:spPr>
-          <a:xfrm xmlns:a="http://schemas.openxmlformats.org/drawingml/2006/main">
-            <a:off x="7239000" y="3181350"/>
-            <a:ext cx="3962400" cy="685800"/>
-          </a:xfrm>
-          <a:prstGeom xmlns:a="http://schemas.openxmlformats.org/drawingml/2006/main" prst="rect">
-            <a:avLst/>
-          </a:prstGeom>
-          <a:noFill xmlns:a="http://schemas.openxmlformats.org/drawingml/2006/main"/>
-          <a:ln xmlns:a="http://schemas.openxmlformats.org/drawingml/2006/main" w="0">
-            <a:noFill/>
-            <a:prstDash val="solid"/>
-          </a:ln>
-        </p:spPr>
-        <p:txBody>
-          <a:bodyPr xmlns:a="http://schemas.openxmlformats.org/drawingml/2006/main"/>
-          <a:lstStyle xmlns:a="http://schemas.openxmlformats.org/drawingml/2006/main"/>
-          <a:p xmlns:a="http://schemas.openxmlformats.org/drawingml/2006/main">
-            <a:pPr>
-              <a:defRPr sz="1125" b="1">
-                <a:solidFill>
-                  <a:srgbClr val="161616"/>
-                </a:solidFill>
-              </a:defRPr>
-            </a:pPr>
-            <a:r>
-              <a:rPr sz="1125" b="1">
-                <a:solidFill>
-                  <a:srgbClr val="161616"/>
-                </a:solidFill>
-              </a:rPr>
-              <a:t>{{OUTCOME_2_TO}}</a:t>
-            </a:r>
-          </a:p>
-        </p:txBody>
-      </p:sp>
-      <p:sp>
-        <p:nvSpPr>
-          <p:cNvPr id="23" name="">
-            <a:extLst xmlns:a="http://schemas.openxmlformats.org/drawingml/2006/main">
-              <a:ext uri="{FF2B5EF4-FFF2-40B4-BE49-F238E27FC236}">
-                <a16:creationId xmlns:a16="http://schemas.microsoft.com/office/drawing/2014/main" id="{B697B298-515F-44B5-AF06-F2DCF0C14A40}"/>
-              </a:ext>
-            </a:extLst>
-          </p:cNvPr>
-          <p:cNvSpPr>
-            <a:spLocks xmlns:a="http://schemas.openxmlformats.org/drawingml/2006/main" noGrp="1"/>
-          </p:cNvSpPr>
-          <p:nvPr/>
-        </p:nvSpPr>
-        <p:spPr>
-          <a:xfrm xmlns:a="http://schemas.openxmlformats.org/drawingml/2006/main">
-            <a:off x="552450" y="4019550"/>
-            <a:ext cx="10648950" cy="9525"/>
-          </a:xfrm>
-          <a:prstGeom xmlns:a="http://schemas.openxmlformats.org/drawingml/2006/main" prst="rect">
+              <a:defRPr sz="1800" b="1">
+                <a:solidFill>
+                  <a:srgbClr val="161616"/>
+                </a:solidFill>
+              </a:defRPr>
+            </a:pPr>
+            <a:r>
+              <a:rPr sz="1800" b="1">
+                <a:solidFill>
+                  <a:srgbClr val="161616"/>
+                </a:solidFill>
+              </a:rPr>
+              <a:t>{{THREAT_4_VALUE}}%</a:t>
+            </a:r>
+          </a:p>
+        </p:txBody>
+      </p:sp>
+      <p:sp>
+        <p:nvSpPr>
+          <p:cNvPr id="28" name="">
+            <a:extLst xmlns:a="http://schemas.openxmlformats.org/drawingml/2006/main">
+              <a:ext uri="{FF2B5EF4-FFF2-40B4-BE49-F238E27FC236}">
+                <a16:creationId xmlns:a16="http://schemas.microsoft.com/office/drawing/2014/main" id="{4E489D4D-0297-49FD-A306-687B14ABAC92}"/>
+              </a:ext>
+            </a:extLst>
+          </p:cNvPr>
+          <p:cNvSpPr>
+            <a:spLocks xmlns:a="http://schemas.openxmlformats.org/drawingml/2006/main" noGrp="1"/>
+          </p:cNvSpPr>
+          <p:nvPr/>
+        </p:nvSpPr>
+        <p:spPr>
+          <a:xfrm xmlns:a="http://schemas.openxmlformats.org/drawingml/2006/main">
+            <a:off x="590550" y="5638800"/>
+            <a:ext cx="2247900" cy="323850"/>
+          </a:xfrm>
+          <a:prstGeom xmlns:a="http://schemas.openxmlformats.org/drawingml/2006/main" prst="rect">
+            <a:avLst/>
+          </a:prstGeom>
+          <a:noFill xmlns:a="http://schemas.openxmlformats.org/drawingml/2006/main"/>
+          <a:ln xmlns:a="http://schemas.openxmlformats.org/drawingml/2006/main" w="0">
+            <a:noFill/>
+            <a:prstDash val="solid"/>
+          </a:ln>
+        </p:spPr>
+        <p:txBody>
+          <a:bodyPr xmlns:a="http://schemas.openxmlformats.org/drawingml/2006/main"/>
+          <a:lstStyle xmlns:a="http://schemas.openxmlformats.org/drawingml/2006/main"/>
+          <a:p xmlns:a="http://schemas.openxmlformats.org/drawingml/2006/main">
+            <a:pPr algn="ctr">
+              <a:defRPr sz="1200" b="1">
+                <a:solidFill>
+                  <a:srgbClr val="161616"/>
+                </a:solidFill>
+              </a:defRPr>
+            </a:pPr>
+            <a:r>
+              <a:rPr sz="1200" b="1">
+                <a:solidFill>
+                  <a:srgbClr val="161616"/>
+                </a:solidFill>
+              </a:rPr>
+              <a:t>{{THREAT_4_LABEL}}</a:t>
+            </a:r>
+          </a:p>
+        </p:txBody>
+      </p:sp>
+      <p:sp>
+        <p:nvSpPr>
+          <p:cNvPr id="29" name="">
+            <a:extLst xmlns:a="http://schemas.openxmlformats.org/drawingml/2006/main">
+              <a:ext uri="{FF2B5EF4-FFF2-40B4-BE49-F238E27FC236}">
+                <a16:creationId xmlns:a16="http://schemas.microsoft.com/office/drawing/2014/main" id="{FDD596EB-CEED-4232-8105-74AD9FCC5185}"/>
+              </a:ext>
+            </a:extLst>
+          </p:cNvPr>
+          <p:cNvSpPr>
+            <a:spLocks xmlns:a="http://schemas.openxmlformats.org/drawingml/2006/main" noGrp="1"/>
+          </p:cNvSpPr>
+          <p:nvPr/>
+        </p:nvSpPr>
+        <p:spPr>
+          <a:xfrm xmlns:a="http://schemas.openxmlformats.org/drawingml/2006/main">
+            <a:off x="590550" y="5934075"/>
+            <a:ext cx="2247900" cy="209550"/>
+          </a:xfrm>
+          <a:prstGeom xmlns:a="http://schemas.openxmlformats.org/drawingml/2006/main" prst="rect">
+            <a:avLst/>
+          </a:prstGeom>
+          <a:noFill xmlns:a="http://schemas.openxmlformats.org/drawingml/2006/main"/>
+          <a:ln xmlns:a="http://schemas.openxmlformats.org/drawingml/2006/main" w="0">
+            <a:noFill/>
+            <a:prstDash val="solid"/>
+          </a:ln>
+        </p:spPr>
+        <p:txBody>
+          <a:bodyPr xmlns:a="http://schemas.openxmlformats.org/drawingml/2006/main"/>
+          <a:lstStyle xmlns:a="http://schemas.openxmlformats.org/drawingml/2006/main"/>
+          <a:p xmlns:a="http://schemas.openxmlformats.org/drawingml/2006/main">
+            <a:pPr algn="ctr">
+              <a:defRPr sz="900">
+                <a:solidFill>
+                  <a:srgbClr val="667085"/>
+                </a:solidFill>
+              </a:defRPr>
+            </a:pPr>
+            <a:r>
+              <a:rPr sz="900">
+                <a:solidFill>
+                  <a:srgbClr val="667085"/>
+                </a:solidFill>
+              </a:rPr>
+              <a:t>разрыв контроля</a:t>
+            </a:r>
+          </a:p>
+        </p:txBody>
+      </p:sp>
+      <p:sp>
+        <p:nvSpPr>
+          <p:cNvPr id="30" name="">
+            <a:extLst xmlns:a="http://schemas.openxmlformats.org/drawingml/2006/main">
+              <a:ext uri="{FF2B5EF4-FFF2-40B4-BE49-F238E27FC236}">
+                <a16:creationId xmlns:a16="http://schemas.microsoft.com/office/drawing/2014/main" id="{F31B82F6-07D5-4364-A91C-E61A84B61A95}"/>
+              </a:ext>
+            </a:extLst>
+          </p:cNvPr>
+          <p:cNvSpPr>
+            <a:spLocks xmlns:a="http://schemas.openxmlformats.org/drawingml/2006/main" noGrp="1"/>
+          </p:cNvSpPr>
+          <p:nvPr/>
+        </p:nvSpPr>
+        <p:spPr>
+          <a:xfrm xmlns:a="http://schemas.openxmlformats.org/drawingml/2006/main">
+            <a:off x="4724400" y="4248150"/>
+            <a:ext cx="1257300" cy="1257300"/>
+          </a:xfrm>
+          <a:prstGeom xmlns:a="http://schemas.openxmlformats.org/drawingml/2006/main" prst="ellipse">
             <a:avLst/>
           </a:prstGeom>
           <a:solidFill xmlns:a="http://schemas.openxmlformats.org/drawingml/2006/main">
-            <a:srgbClr val="E4E7EC"/>
+            <a:srgbClr val="B30005"/>
           </a:solidFill>
           <a:ln xmlns:a="http://schemas.openxmlformats.org/drawingml/2006/main" w="0">
             <a:noFill/>
@@ -12327,172 +12587,265 @@
       </p:sp>
       <p:sp>
         <p:nvSpPr>
-          <p:cNvPr id="24" name="">
-            <a:extLst xmlns:a="http://schemas.openxmlformats.org/drawingml/2006/main">
-              <a:ext uri="{FF2B5EF4-FFF2-40B4-BE49-F238E27FC236}">
-                <a16:creationId xmlns:a16="http://schemas.microsoft.com/office/drawing/2014/main" id="{EC479DB2-4DB4-4D77-A910-50520C26705F}"/>
-              </a:ext>
-            </a:extLst>
-          </p:cNvPr>
-          <p:cNvSpPr>
-            <a:spLocks xmlns:a="http://schemas.openxmlformats.org/drawingml/2006/main" noGrp="1"/>
-          </p:cNvSpPr>
-          <p:nvPr/>
-        </p:nvSpPr>
-        <p:spPr>
-          <a:xfrm xmlns:a="http://schemas.openxmlformats.org/drawingml/2006/main">
-            <a:off x="552450" y="4248150"/>
-            <a:ext cx="419100" cy="266700"/>
-          </a:xfrm>
-          <a:prstGeom xmlns:a="http://schemas.openxmlformats.org/drawingml/2006/main" prst="rect">
-            <a:avLst/>
-          </a:prstGeom>
-          <a:noFill xmlns:a="http://schemas.openxmlformats.org/drawingml/2006/main"/>
-          <a:ln xmlns:a="http://schemas.openxmlformats.org/drawingml/2006/main" w="0">
-            <a:noFill/>
-            <a:prstDash val="solid"/>
-          </a:ln>
-        </p:spPr>
-        <p:txBody>
-          <a:bodyPr xmlns:a="http://schemas.openxmlformats.org/drawingml/2006/main"/>
-          <a:lstStyle xmlns:a="http://schemas.openxmlformats.org/drawingml/2006/main"/>
-          <a:p xmlns:a="http://schemas.openxmlformats.org/drawingml/2006/main">
-            <a:pPr>
-              <a:defRPr sz="1125" b="1">
-                <a:solidFill>
-                  <a:srgbClr val="FF6412"/>
-                </a:solidFill>
-              </a:defRPr>
-            </a:pPr>
-            <a:r>
-              <a:rPr sz="1125" b="1">
-                <a:solidFill>
-                  <a:srgbClr val="FF6412"/>
-                </a:solidFill>
-              </a:rPr>
-              <a:t>03</a:t>
-            </a:r>
-          </a:p>
-        </p:txBody>
-      </p:sp>
-      <p:sp>
-        <p:nvSpPr>
-          <p:cNvPr id="25" name="">
-            <a:extLst xmlns:a="http://schemas.openxmlformats.org/drawingml/2006/main">
-              <a:ext uri="{FF2B5EF4-FFF2-40B4-BE49-F238E27FC236}">
-                <a16:creationId xmlns:a16="http://schemas.microsoft.com/office/drawing/2014/main" id="{6C4BA4FB-D174-4895-BA84-8132D65A2F63}"/>
-              </a:ext>
-            </a:extLst>
-          </p:cNvPr>
-          <p:cNvSpPr>
-            <a:spLocks xmlns:a="http://schemas.openxmlformats.org/drawingml/2006/main" noGrp="1"/>
-          </p:cNvSpPr>
-          <p:nvPr/>
-        </p:nvSpPr>
-        <p:spPr>
-          <a:xfrm xmlns:a="http://schemas.openxmlformats.org/drawingml/2006/main">
-            <a:off x="1047750" y="4210050"/>
-            <a:ext cx="2076450" cy="647700"/>
-          </a:xfrm>
-          <a:prstGeom xmlns:a="http://schemas.openxmlformats.org/drawingml/2006/main" prst="rect">
-            <a:avLst/>
-          </a:prstGeom>
-          <a:noFill xmlns:a="http://schemas.openxmlformats.org/drawingml/2006/main"/>
-          <a:ln xmlns:a="http://schemas.openxmlformats.org/drawingml/2006/main" w="0">
-            <a:noFill/>
-            <a:prstDash val="solid"/>
-          </a:ln>
-        </p:spPr>
-        <p:txBody>
-          <a:bodyPr xmlns:a="http://schemas.openxmlformats.org/drawingml/2006/main"/>
-          <a:lstStyle xmlns:a="http://schemas.openxmlformats.org/drawingml/2006/main"/>
-          <a:p xmlns:a="http://schemas.openxmlformats.org/drawingml/2006/main">
-            <a:pPr>
-              <a:defRPr sz="1275" b="1">
-                <a:solidFill>
-                  <a:srgbClr val="161616"/>
-                </a:solidFill>
-              </a:defRPr>
-            </a:pPr>
-            <a:r>
-              <a:rPr sz="1275" b="1">
-                <a:solidFill>
-                  <a:srgbClr val="161616"/>
-                </a:solidFill>
-              </a:rPr>
-              <a:t>{{OUTCOME_3_TITLE}}</a:t>
-            </a:r>
-          </a:p>
-        </p:txBody>
-      </p:sp>
-      <p:sp>
-        <p:nvSpPr>
-          <p:cNvPr id="26" name="">
-            <a:extLst xmlns:a="http://schemas.openxmlformats.org/drawingml/2006/main">
-              <a:ext uri="{FF2B5EF4-FFF2-40B4-BE49-F238E27FC236}">
-                <a16:creationId xmlns:a16="http://schemas.microsoft.com/office/drawing/2014/main" id="{08E2B636-2238-408D-BD28-0C7678E12B26}"/>
-              </a:ext>
-            </a:extLst>
-          </p:cNvPr>
-          <p:cNvSpPr>
-            <a:spLocks xmlns:a="http://schemas.openxmlformats.org/drawingml/2006/main" noGrp="1"/>
-          </p:cNvSpPr>
-          <p:nvPr/>
-        </p:nvSpPr>
-        <p:spPr>
-          <a:xfrm xmlns:a="http://schemas.openxmlformats.org/drawingml/2006/main">
-            <a:off x="3333750" y="4210050"/>
-            <a:ext cx="3143250" cy="685800"/>
-          </a:xfrm>
-          <a:prstGeom xmlns:a="http://schemas.openxmlformats.org/drawingml/2006/main" prst="rect">
-            <a:avLst/>
-          </a:prstGeom>
-          <a:noFill xmlns:a="http://schemas.openxmlformats.org/drawingml/2006/main"/>
-          <a:ln xmlns:a="http://schemas.openxmlformats.org/drawingml/2006/main" w="0">
-            <a:noFill/>
-            <a:prstDash val="solid"/>
-          </a:ln>
-        </p:spPr>
-        <p:txBody>
-          <a:bodyPr xmlns:a="http://schemas.openxmlformats.org/drawingml/2006/main"/>
-          <a:lstStyle xmlns:a="http://schemas.openxmlformats.org/drawingml/2006/main"/>
-          <a:p xmlns:a="http://schemas.openxmlformats.org/drawingml/2006/main">
-            <a:pPr>
-              <a:defRPr sz="1050">
+          <p:cNvPr id="31" name="">
+            <a:extLst xmlns:a="http://schemas.openxmlformats.org/drawingml/2006/main">
+              <a:ext uri="{FF2B5EF4-FFF2-40B4-BE49-F238E27FC236}">
+                <a16:creationId xmlns:a16="http://schemas.microsoft.com/office/drawing/2014/main" id="{6DD7559E-4E8D-4752-8969-C60321DA1CEC}"/>
+              </a:ext>
+            </a:extLst>
+          </p:cNvPr>
+          <p:cNvSpPr>
+            <a:spLocks xmlns:a="http://schemas.openxmlformats.org/drawingml/2006/main" noGrp="1"/>
+          </p:cNvSpPr>
+          <p:nvPr/>
+        </p:nvSpPr>
+        <p:spPr>
+          <a:xfrm xmlns:a="http://schemas.openxmlformats.org/drawingml/2006/main">
+            <a:off x="4895850" y="4419600"/>
+            <a:ext cx="914400" cy="914400"/>
+          </a:xfrm>
+          <a:prstGeom xmlns:a="http://schemas.openxmlformats.org/drawingml/2006/main" prst="ellipse">
+            <a:avLst/>
+          </a:prstGeom>
+          <a:solidFill xmlns:a="http://schemas.openxmlformats.org/drawingml/2006/main">
+            <a:srgbClr val="FFFFFF"/>
+          </a:solidFill>
+          <a:ln xmlns:a="http://schemas.openxmlformats.org/drawingml/2006/main" w="0">
+            <a:noFill/>
+            <a:prstDash val="solid"/>
+          </a:ln>
+        </p:spPr>
+      </p:sp>
+      <p:sp>
+        <p:nvSpPr>
+          <p:cNvPr id="32" name="">
+            <a:extLst xmlns:a="http://schemas.openxmlformats.org/drawingml/2006/main">
+              <a:ext uri="{FF2B5EF4-FFF2-40B4-BE49-F238E27FC236}">
+                <a16:creationId xmlns:a16="http://schemas.microsoft.com/office/drawing/2014/main" id="{80B23412-F58C-407F-88CD-BD0E1D12EC55}"/>
+              </a:ext>
+            </a:extLst>
+          </p:cNvPr>
+          <p:cNvSpPr>
+            <a:spLocks xmlns:a="http://schemas.openxmlformats.org/drawingml/2006/main" noGrp="1"/>
+          </p:cNvSpPr>
+          <p:nvPr/>
+        </p:nvSpPr>
+        <p:spPr>
+          <a:xfrm xmlns:a="http://schemas.openxmlformats.org/drawingml/2006/main">
+            <a:off x="4933950" y="4695825"/>
+            <a:ext cx="838200" cy="361950"/>
+          </a:xfrm>
+          <a:prstGeom xmlns:a="http://schemas.openxmlformats.org/drawingml/2006/main" prst="rect">
+            <a:avLst/>
+          </a:prstGeom>
+          <a:noFill xmlns:a="http://schemas.openxmlformats.org/drawingml/2006/main"/>
+          <a:ln xmlns:a="http://schemas.openxmlformats.org/drawingml/2006/main" w="0">
+            <a:noFill/>
+            <a:prstDash val="solid"/>
+          </a:ln>
+        </p:spPr>
+        <p:txBody>
+          <a:bodyPr xmlns:a="http://schemas.openxmlformats.org/drawingml/2006/main"/>
+          <a:lstStyle xmlns:a="http://schemas.openxmlformats.org/drawingml/2006/main"/>
+          <a:p xmlns:a="http://schemas.openxmlformats.org/drawingml/2006/main">
+            <a:pPr algn="ctr">
+              <a:defRPr sz="1800" b="1">
+                <a:solidFill>
+                  <a:srgbClr val="161616"/>
+                </a:solidFill>
+              </a:defRPr>
+            </a:pPr>
+            <a:r>
+              <a:rPr sz="1800" b="1">
+                <a:solidFill>
+                  <a:srgbClr val="161616"/>
+                </a:solidFill>
+              </a:rPr>
+              <a:t>{{THREAT_5_VALUE}}%</a:t>
+            </a:r>
+          </a:p>
+        </p:txBody>
+      </p:sp>
+      <p:sp>
+        <p:nvSpPr>
+          <p:cNvPr id="33" name="">
+            <a:extLst xmlns:a="http://schemas.openxmlformats.org/drawingml/2006/main">
+              <a:ext uri="{FF2B5EF4-FFF2-40B4-BE49-F238E27FC236}">
+                <a16:creationId xmlns:a16="http://schemas.microsoft.com/office/drawing/2014/main" id="{EF4D466E-148E-4A60-B2FB-18836F0CAA9E}"/>
+              </a:ext>
+            </a:extLst>
+          </p:cNvPr>
+          <p:cNvSpPr>
+            <a:spLocks xmlns:a="http://schemas.openxmlformats.org/drawingml/2006/main" noGrp="1"/>
+          </p:cNvSpPr>
+          <p:nvPr/>
+        </p:nvSpPr>
+        <p:spPr>
+          <a:xfrm xmlns:a="http://schemas.openxmlformats.org/drawingml/2006/main">
+            <a:off x="4229100" y="5638800"/>
+            <a:ext cx="2247900" cy="323850"/>
+          </a:xfrm>
+          <a:prstGeom xmlns:a="http://schemas.openxmlformats.org/drawingml/2006/main" prst="rect">
+            <a:avLst/>
+          </a:prstGeom>
+          <a:noFill xmlns:a="http://schemas.openxmlformats.org/drawingml/2006/main"/>
+          <a:ln xmlns:a="http://schemas.openxmlformats.org/drawingml/2006/main" w="0">
+            <a:noFill/>
+            <a:prstDash val="solid"/>
+          </a:ln>
+        </p:spPr>
+        <p:txBody>
+          <a:bodyPr xmlns:a="http://schemas.openxmlformats.org/drawingml/2006/main"/>
+          <a:lstStyle xmlns:a="http://schemas.openxmlformats.org/drawingml/2006/main"/>
+          <a:p xmlns:a="http://schemas.openxmlformats.org/drawingml/2006/main">
+            <a:pPr algn="ctr">
+              <a:defRPr sz="1200" b="1">
+                <a:solidFill>
+                  <a:srgbClr val="161616"/>
+                </a:solidFill>
+              </a:defRPr>
+            </a:pPr>
+            <a:r>
+              <a:rPr sz="1200" b="1">
+                <a:solidFill>
+                  <a:srgbClr val="161616"/>
+                </a:solidFill>
+              </a:rPr>
+              <a:t>{{THREAT_5_LABEL}}</a:t>
+            </a:r>
+          </a:p>
+        </p:txBody>
+      </p:sp>
+      <p:sp>
+        <p:nvSpPr>
+          <p:cNvPr id="34" name="">
+            <a:extLst xmlns:a="http://schemas.openxmlformats.org/drawingml/2006/main">
+              <a:ext uri="{FF2B5EF4-FFF2-40B4-BE49-F238E27FC236}">
+                <a16:creationId xmlns:a16="http://schemas.microsoft.com/office/drawing/2014/main" id="{6CF89F8C-B16E-43E8-B73C-2DB66F36588F}"/>
+              </a:ext>
+            </a:extLst>
+          </p:cNvPr>
+          <p:cNvSpPr>
+            <a:spLocks xmlns:a="http://schemas.openxmlformats.org/drawingml/2006/main" noGrp="1"/>
+          </p:cNvSpPr>
+          <p:nvPr/>
+        </p:nvSpPr>
+        <p:spPr>
+          <a:xfrm xmlns:a="http://schemas.openxmlformats.org/drawingml/2006/main">
+            <a:off x="4229100" y="5934075"/>
+            <a:ext cx="2247900" cy="209550"/>
+          </a:xfrm>
+          <a:prstGeom xmlns:a="http://schemas.openxmlformats.org/drawingml/2006/main" prst="rect">
+            <a:avLst/>
+          </a:prstGeom>
+          <a:noFill xmlns:a="http://schemas.openxmlformats.org/drawingml/2006/main"/>
+          <a:ln xmlns:a="http://schemas.openxmlformats.org/drawingml/2006/main" w="0">
+            <a:noFill/>
+            <a:prstDash val="solid"/>
+          </a:ln>
+        </p:spPr>
+        <p:txBody>
+          <a:bodyPr xmlns:a="http://schemas.openxmlformats.org/drawingml/2006/main"/>
+          <a:lstStyle xmlns:a="http://schemas.openxmlformats.org/drawingml/2006/main"/>
+          <a:p xmlns:a="http://schemas.openxmlformats.org/drawingml/2006/main">
+            <a:pPr algn="ctr">
+              <a:defRPr sz="900">
                 <a:solidFill>
                   <a:srgbClr val="667085"/>
                 </a:solidFill>
               </a:defRPr>
             </a:pPr>
             <a:r>
-              <a:rPr sz="1050">
+              <a:rPr sz="900">
                 <a:solidFill>
                   <a:srgbClr val="667085"/>
                 </a:solidFill>
               </a:rPr>
-              <a:t>{{OUTCOME_3_FROM}}</a:t>
-            </a:r>
-          </a:p>
-        </p:txBody>
-      </p:sp>
-      <p:sp>
-        <p:nvSpPr>
-          <p:cNvPr id="27" name="">
-            <a:extLst xmlns:a="http://schemas.openxmlformats.org/drawingml/2006/main">
-              <a:ext uri="{FF2B5EF4-FFF2-40B4-BE49-F238E27FC236}">
-                <a16:creationId xmlns:a16="http://schemas.microsoft.com/office/drawing/2014/main" id="{77575D56-D6F0-44ED-A731-67E7A751DD92}"/>
-              </a:ext>
-            </a:extLst>
-          </p:cNvPr>
-          <p:cNvSpPr>
-            <a:spLocks xmlns:a="http://schemas.openxmlformats.org/drawingml/2006/main" noGrp="1"/>
-          </p:cNvSpPr>
-          <p:nvPr/>
-        </p:nvSpPr>
-        <p:spPr>
-          <a:xfrm xmlns:a="http://schemas.openxmlformats.org/drawingml/2006/main">
-            <a:off x="6667500" y="4324350"/>
-            <a:ext cx="381000" cy="342900"/>
+              <a:t>разрыв контроля</a:t>
+            </a:r>
+          </a:p>
+        </p:txBody>
+      </p:sp>
+      <p:sp>
+        <p:nvSpPr>
+          <p:cNvPr id="35" name="">
+            <a:extLst xmlns:a="http://schemas.openxmlformats.org/drawingml/2006/main">
+              <a:ext uri="{FF2B5EF4-FFF2-40B4-BE49-F238E27FC236}">
+                <a16:creationId xmlns:a16="http://schemas.microsoft.com/office/drawing/2014/main" id="{8D6F7C90-7D80-4F0D-8CE3-09BD8FD0C8EB}"/>
+              </a:ext>
+            </a:extLst>
+          </p:cNvPr>
+          <p:cNvSpPr>
+            <a:spLocks xmlns:a="http://schemas.openxmlformats.org/drawingml/2006/main" noGrp="1"/>
+          </p:cNvSpPr>
+          <p:nvPr/>
+        </p:nvSpPr>
+        <p:spPr>
+          <a:xfrm xmlns:a="http://schemas.openxmlformats.org/drawingml/2006/main">
+            <a:off x="8362950" y="4248150"/>
+            <a:ext cx="1257300" cy="1257300"/>
+          </a:xfrm>
+          <a:prstGeom xmlns:a="http://schemas.openxmlformats.org/drawingml/2006/main" prst="ellipse">
+            <a:avLst/>
+          </a:prstGeom>
+          <a:solidFill xmlns:a="http://schemas.openxmlformats.org/drawingml/2006/main">
+            <a:srgbClr val="B30006"/>
+          </a:solidFill>
+          <a:ln xmlns:a="http://schemas.openxmlformats.org/drawingml/2006/main" w="0">
+            <a:noFill/>
+            <a:prstDash val="solid"/>
+          </a:ln>
+        </p:spPr>
+      </p:sp>
+      <p:sp>
+        <p:nvSpPr>
+          <p:cNvPr id="36" name="">
+            <a:extLst xmlns:a="http://schemas.openxmlformats.org/drawingml/2006/main">
+              <a:ext uri="{FF2B5EF4-FFF2-40B4-BE49-F238E27FC236}">
+                <a16:creationId xmlns:a16="http://schemas.microsoft.com/office/drawing/2014/main" id="{9D9A19A0-D38C-4B04-96C0-09F5F98CF8D5}"/>
+              </a:ext>
+            </a:extLst>
+          </p:cNvPr>
+          <p:cNvSpPr>
+            <a:spLocks xmlns:a="http://schemas.openxmlformats.org/drawingml/2006/main" noGrp="1"/>
+          </p:cNvSpPr>
+          <p:nvPr/>
+        </p:nvSpPr>
+        <p:spPr>
+          <a:xfrm xmlns:a="http://schemas.openxmlformats.org/drawingml/2006/main">
+            <a:off x="8534400" y="4419600"/>
+            <a:ext cx="914400" cy="914400"/>
+          </a:xfrm>
+          <a:prstGeom xmlns:a="http://schemas.openxmlformats.org/drawingml/2006/main" prst="ellipse">
+            <a:avLst/>
+          </a:prstGeom>
+          <a:solidFill xmlns:a="http://schemas.openxmlformats.org/drawingml/2006/main">
+            <a:srgbClr val="FFFFFF"/>
+          </a:solidFill>
+          <a:ln xmlns:a="http://schemas.openxmlformats.org/drawingml/2006/main" w="0">
+            <a:noFill/>
+            <a:prstDash val="solid"/>
+          </a:ln>
+        </p:spPr>
+      </p:sp>
+      <p:sp>
+        <p:nvSpPr>
+          <p:cNvPr id="37" name="">
+            <a:extLst xmlns:a="http://schemas.openxmlformats.org/drawingml/2006/main">
+              <a:ext uri="{FF2B5EF4-FFF2-40B4-BE49-F238E27FC236}">
+                <a16:creationId xmlns:a16="http://schemas.microsoft.com/office/drawing/2014/main" id="{FA304725-A77F-47BF-9DE8-C67FE539EDBC}"/>
+              </a:ext>
+            </a:extLst>
+          </p:cNvPr>
+          <p:cNvSpPr>
+            <a:spLocks xmlns:a="http://schemas.openxmlformats.org/drawingml/2006/main" noGrp="1"/>
+          </p:cNvSpPr>
+          <p:nvPr/>
+        </p:nvSpPr>
+        <p:spPr>
+          <a:xfrm xmlns:a="http://schemas.openxmlformats.org/drawingml/2006/main">
+            <a:off x="8572500" y="4695825"/>
+            <a:ext cx="838200" cy="361950"/>
           </a:xfrm>
           <a:prstGeom xmlns:a="http://schemas.openxmlformats.org/drawingml/2006/main" prst="rect">
             <a:avLst/>
@@ -12508,350 +12861,119 @@
           <a:lstStyle xmlns:a="http://schemas.openxmlformats.org/drawingml/2006/main"/>
           <a:p xmlns:a="http://schemas.openxmlformats.org/drawingml/2006/main">
             <a:pPr algn="ctr">
-              <a:defRPr sz="1950" b="1">
-                <a:solidFill>
-                  <a:srgbClr val="FF6412"/>
-                </a:solidFill>
-              </a:defRPr>
-            </a:pPr>
-            <a:r>
-              <a:rPr sz="1950" b="1">
-                <a:solidFill>
-                  <a:srgbClr val="FF6412"/>
-                </a:solidFill>
-              </a:rPr>
-              <a:t>→</a:t>
-            </a:r>
-          </a:p>
-        </p:txBody>
-      </p:sp>
-      <p:sp>
-        <p:nvSpPr>
-          <p:cNvPr id="28" name="">
-            <a:extLst xmlns:a="http://schemas.openxmlformats.org/drawingml/2006/main">
-              <a:ext uri="{FF2B5EF4-FFF2-40B4-BE49-F238E27FC236}">
-                <a16:creationId xmlns:a16="http://schemas.microsoft.com/office/drawing/2014/main" id="{B81065AF-D8A1-4244-80D8-8CB1EFDB3C34}"/>
-              </a:ext>
-            </a:extLst>
-          </p:cNvPr>
-          <p:cNvSpPr>
-            <a:spLocks xmlns:a="http://schemas.openxmlformats.org/drawingml/2006/main" noGrp="1"/>
-          </p:cNvSpPr>
-          <p:nvPr/>
-        </p:nvSpPr>
-        <p:spPr>
-          <a:xfrm xmlns:a="http://schemas.openxmlformats.org/drawingml/2006/main">
-            <a:off x="7239000" y="4210050"/>
-            <a:ext cx="3962400" cy="685800"/>
-          </a:xfrm>
-          <a:prstGeom xmlns:a="http://schemas.openxmlformats.org/drawingml/2006/main" prst="rect">
-            <a:avLst/>
-          </a:prstGeom>
-          <a:noFill xmlns:a="http://schemas.openxmlformats.org/drawingml/2006/main"/>
-          <a:ln xmlns:a="http://schemas.openxmlformats.org/drawingml/2006/main" w="0">
-            <a:noFill/>
-            <a:prstDash val="solid"/>
-          </a:ln>
-        </p:spPr>
-        <p:txBody>
-          <a:bodyPr xmlns:a="http://schemas.openxmlformats.org/drawingml/2006/main"/>
-          <a:lstStyle xmlns:a="http://schemas.openxmlformats.org/drawingml/2006/main"/>
-          <a:p xmlns:a="http://schemas.openxmlformats.org/drawingml/2006/main">
-            <a:pPr>
-              <a:defRPr sz="1125" b="1">
-                <a:solidFill>
-                  <a:srgbClr val="161616"/>
-                </a:solidFill>
-              </a:defRPr>
-            </a:pPr>
-            <a:r>
-              <a:rPr sz="1125" b="1">
-                <a:solidFill>
-                  <a:srgbClr val="161616"/>
-                </a:solidFill>
-              </a:rPr>
-              <a:t>{{OUTCOME_3_TO}}</a:t>
-            </a:r>
-          </a:p>
-        </p:txBody>
-      </p:sp>
-      <p:sp>
-        <p:nvSpPr>
-          <p:cNvPr id="29" name="">
-            <a:extLst xmlns:a="http://schemas.openxmlformats.org/drawingml/2006/main">
-              <a:ext uri="{FF2B5EF4-FFF2-40B4-BE49-F238E27FC236}">
-                <a16:creationId xmlns:a16="http://schemas.microsoft.com/office/drawing/2014/main" id="{35C4C56D-786C-4AFB-AB71-307E8C7F2226}"/>
-              </a:ext>
-            </a:extLst>
-          </p:cNvPr>
-          <p:cNvSpPr>
-            <a:spLocks xmlns:a="http://schemas.openxmlformats.org/drawingml/2006/main" noGrp="1"/>
-          </p:cNvSpPr>
-          <p:nvPr/>
-        </p:nvSpPr>
-        <p:spPr>
-          <a:xfrm xmlns:a="http://schemas.openxmlformats.org/drawingml/2006/main">
-            <a:off x="552450" y="5048250"/>
-            <a:ext cx="10648950" cy="9525"/>
-          </a:xfrm>
-          <a:prstGeom xmlns:a="http://schemas.openxmlformats.org/drawingml/2006/main" prst="rect">
-            <a:avLst/>
-          </a:prstGeom>
-          <a:solidFill xmlns:a="http://schemas.openxmlformats.org/drawingml/2006/main">
-            <a:srgbClr val="E4E7EC"/>
-          </a:solidFill>
-          <a:ln xmlns:a="http://schemas.openxmlformats.org/drawingml/2006/main" w="0">
-            <a:noFill/>
-            <a:prstDash val="solid"/>
-          </a:ln>
-        </p:spPr>
-      </p:sp>
-      <p:sp>
-        <p:nvSpPr>
-          <p:cNvPr id="30" name="">
-            <a:extLst xmlns:a="http://schemas.openxmlformats.org/drawingml/2006/main">
-              <a:ext uri="{FF2B5EF4-FFF2-40B4-BE49-F238E27FC236}">
-                <a16:creationId xmlns:a16="http://schemas.microsoft.com/office/drawing/2014/main" id="{DC2FCB11-276C-427D-929F-5560E6D4B0CE}"/>
-              </a:ext>
-            </a:extLst>
-          </p:cNvPr>
-          <p:cNvSpPr>
-            <a:spLocks xmlns:a="http://schemas.openxmlformats.org/drawingml/2006/main" noGrp="1"/>
-          </p:cNvSpPr>
-          <p:nvPr/>
-        </p:nvSpPr>
-        <p:spPr>
-          <a:xfrm xmlns:a="http://schemas.openxmlformats.org/drawingml/2006/main">
-            <a:off x="552450" y="5276850"/>
-            <a:ext cx="419100" cy="266700"/>
-          </a:xfrm>
-          <a:prstGeom xmlns:a="http://schemas.openxmlformats.org/drawingml/2006/main" prst="rect">
-            <a:avLst/>
-          </a:prstGeom>
-          <a:noFill xmlns:a="http://schemas.openxmlformats.org/drawingml/2006/main"/>
-          <a:ln xmlns:a="http://schemas.openxmlformats.org/drawingml/2006/main" w="0">
-            <a:noFill/>
-            <a:prstDash val="solid"/>
-          </a:ln>
-        </p:spPr>
-        <p:txBody>
-          <a:bodyPr xmlns:a="http://schemas.openxmlformats.org/drawingml/2006/main"/>
-          <a:lstStyle xmlns:a="http://schemas.openxmlformats.org/drawingml/2006/main"/>
-          <a:p xmlns:a="http://schemas.openxmlformats.org/drawingml/2006/main">
-            <a:pPr>
-              <a:defRPr sz="1125" b="1">
-                <a:solidFill>
-                  <a:srgbClr val="FF6412"/>
-                </a:solidFill>
-              </a:defRPr>
-            </a:pPr>
-            <a:r>
-              <a:rPr sz="1125" b="1">
-                <a:solidFill>
-                  <a:srgbClr val="FF6412"/>
-                </a:solidFill>
-              </a:rPr>
-              <a:t>04</a:t>
-            </a:r>
-          </a:p>
-        </p:txBody>
-      </p:sp>
-      <p:sp>
-        <p:nvSpPr>
-          <p:cNvPr id="31" name="">
-            <a:extLst xmlns:a="http://schemas.openxmlformats.org/drawingml/2006/main">
-              <a:ext uri="{FF2B5EF4-FFF2-40B4-BE49-F238E27FC236}">
-                <a16:creationId xmlns:a16="http://schemas.microsoft.com/office/drawing/2014/main" id="{C1DA5FF5-15CC-4E8A-89A4-626B6985C932}"/>
-              </a:ext>
-            </a:extLst>
-          </p:cNvPr>
-          <p:cNvSpPr>
-            <a:spLocks xmlns:a="http://schemas.openxmlformats.org/drawingml/2006/main" noGrp="1"/>
-          </p:cNvSpPr>
-          <p:nvPr/>
-        </p:nvSpPr>
-        <p:spPr>
-          <a:xfrm xmlns:a="http://schemas.openxmlformats.org/drawingml/2006/main">
-            <a:off x="1047750" y="5238750"/>
-            <a:ext cx="2076450" cy="647700"/>
-          </a:xfrm>
-          <a:prstGeom xmlns:a="http://schemas.openxmlformats.org/drawingml/2006/main" prst="rect">
-            <a:avLst/>
-          </a:prstGeom>
-          <a:noFill xmlns:a="http://schemas.openxmlformats.org/drawingml/2006/main"/>
-          <a:ln xmlns:a="http://schemas.openxmlformats.org/drawingml/2006/main" w="0">
-            <a:noFill/>
-            <a:prstDash val="solid"/>
-          </a:ln>
-        </p:spPr>
-        <p:txBody>
-          <a:bodyPr xmlns:a="http://schemas.openxmlformats.org/drawingml/2006/main"/>
-          <a:lstStyle xmlns:a="http://schemas.openxmlformats.org/drawingml/2006/main"/>
-          <a:p xmlns:a="http://schemas.openxmlformats.org/drawingml/2006/main">
-            <a:pPr>
-              <a:defRPr sz="1275" b="1">
-                <a:solidFill>
-                  <a:srgbClr val="161616"/>
-                </a:solidFill>
-              </a:defRPr>
-            </a:pPr>
-            <a:r>
-              <a:rPr sz="1275" b="1">
-                <a:solidFill>
-                  <a:srgbClr val="161616"/>
-                </a:solidFill>
-              </a:rPr>
-              <a:t>{{OUTCOME_4_TITLE}}</a:t>
-            </a:r>
-          </a:p>
-        </p:txBody>
-      </p:sp>
-      <p:sp>
-        <p:nvSpPr>
-          <p:cNvPr id="32" name="">
-            <a:extLst xmlns:a="http://schemas.openxmlformats.org/drawingml/2006/main">
-              <a:ext uri="{FF2B5EF4-FFF2-40B4-BE49-F238E27FC236}">
-                <a16:creationId xmlns:a16="http://schemas.microsoft.com/office/drawing/2014/main" id="{4FF29442-FBDC-4848-91D8-8AA74A4504C7}"/>
-              </a:ext>
-            </a:extLst>
-          </p:cNvPr>
-          <p:cNvSpPr>
-            <a:spLocks xmlns:a="http://schemas.openxmlformats.org/drawingml/2006/main" noGrp="1"/>
-          </p:cNvSpPr>
-          <p:nvPr/>
-        </p:nvSpPr>
-        <p:spPr>
-          <a:xfrm xmlns:a="http://schemas.openxmlformats.org/drawingml/2006/main">
-            <a:off x="3333750" y="5238750"/>
-            <a:ext cx="3143250" cy="685800"/>
-          </a:xfrm>
-          <a:prstGeom xmlns:a="http://schemas.openxmlformats.org/drawingml/2006/main" prst="rect">
-            <a:avLst/>
-          </a:prstGeom>
-          <a:noFill xmlns:a="http://schemas.openxmlformats.org/drawingml/2006/main"/>
-          <a:ln xmlns:a="http://schemas.openxmlformats.org/drawingml/2006/main" w="0">
-            <a:noFill/>
-            <a:prstDash val="solid"/>
-          </a:ln>
-        </p:spPr>
-        <p:txBody>
-          <a:bodyPr xmlns:a="http://schemas.openxmlformats.org/drawingml/2006/main"/>
-          <a:lstStyle xmlns:a="http://schemas.openxmlformats.org/drawingml/2006/main"/>
-          <a:p xmlns:a="http://schemas.openxmlformats.org/drawingml/2006/main">
-            <a:pPr>
-              <a:defRPr sz="1050">
+              <a:defRPr sz="1800" b="1">
+                <a:solidFill>
+                  <a:srgbClr val="161616"/>
+                </a:solidFill>
+              </a:defRPr>
+            </a:pPr>
+            <a:r>
+              <a:rPr sz="1800" b="1">
+                <a:solidFill>
+                  <a:srgbClr val="161616"/>
+                </a:solidFill>
+              </a:rPr>
+              <a:t>{{THREAT_6_VALUE}}%</a:t>
+            </a:r>
+          </a:p>
+        </p:txBody>
+      </p:sp>
+      <p:sp>
+        <p:nvSpPr>
+          <p:cNvPr id="38" name="">
+            <a:extLst xmlns:a="http://schemas.openxmlformats.org/drawingml/2006/main">
+              <a:ext uri="{FF2B5EF4-FFF2-40B4-BE49-F238E27FC236}">
+                <a16:creationId xmlns:a16="http://schemas.microsoft.com/office/drawing/2014/main" id="{7B251EE8-1984-43C8-9537-F3A2F07F5E68}"/>
+              </a:ext>
+            </a:extLst>
+          </p:cNvPr>
+          <p:cNvSpPr>
+            <a:spLocks xmlns:a="http://schemas.openxmlformats.org/drawingml/2006/main" noGrp="1"/>
+          </p:cNvSpPr>
+          <p:nvPr/>
+        </p:nvSpPr>
+        <p:spPr>
+          <a:xfrm xmlns:a="http://schemas.openxmlformats.org/drawingml/2006/main">
+            <a:off x="7867650" y="5638800"/>
+            <a:ext cx="2247900" cy="323850"/>
+          </a:xfrm>
+          <a:prstGeom xmlns:a="http://schemas.openxmlformats.org/drawingml/2006/main" prst="rect">
+            <a:avLst/>
+          </a:prstGeom>
+          <a:noFill xmlns:a="http://schemas.openxmlformats.org/drawingml/2006/main"/>
+          <a:ln xmlns:a="http://schemas.openxmlformats.org/drawingml/2006/main" w="0">
+            <a:noFill/>
+            <a:prstDash val="solid"/>
+          </a:ln>
+        </p:spPr>
+        <p:txBody>
+          <a:bodyPr xmlns:a="http://schemas.openxmlformats.org/drawingml/2006/main"/>
+          <a:lstStyle xmlns:a="http://schemas.openxmlformats.org/drawingml/2006/main"/>
+          <a:p xmlns:a="http://schemas.openxmlformats.org/drawingml/2006/main">
+            <a:pPr algn="ctr">
+              <a:defRPr sz="1200" b="1">
+                <a:solidFill>
+                  <a:srgbClr val="161616"/>
+                </a:solidFill>
+              </a:defRPr>
+            </a:pPr>
+            <a:r>
+              <a:rPr sz="1200" b="1">
+                <a:solidFill>
+                  <a:srgbClr val="161616"/>
+                </a:solidFill>
+              </a:rPr>
+              <a:t>{{THREAT_6_LABEL}}</a:t>
+            </a:r>
+          </a:p>
+        </p:txBody>
+      </p:sp>
+      <p:sp>
+        <p:nvSpPr>
+          <p:cNvPr id="39" name="">
+            <a:extLst xmlns:a="http://schemas.openxmlformats.org/drawingml/2006/main">
+              <a:ext uri="{FF2B5EF4-FFF2-40B4-BE49-F238E27FC236}">
+                <a16:creationId xmlns:a16="http://schemas.microsoft.com/office/drawing/2014/main" id="{AEC1C500-F7EB-425F-B5EA-413137EF6D3A}"/>
+              </a:ext>
+            </a:extLst>
+          </p:cNvPr>
+          <p:cNvSpPr>
+            <a:spLocks xmlns:a="http://schemas.openxmlformats.org/drawingml/2006/main" noGrp="1"/>
+          </p:cNvSpPr>
+          <p:nvPr/>
+        </p:nvSpPr>
+        <p:spPr>
+          <a:xfrm xmlns:a="http://schemas.openxmlformats.org/drawingml/2006/main">
+            <a:off x="7867650" y="5934075"/>
+            <a:ext cx="2247900" cy="209550"/>
+          </a:xfrm>
+          <a:prstGeom xmlns:a="http://schemas.openxmlformats.org/drawingml/2006/main" prst="rect">
+            <a:avLst/>
+          </a:prstGeom>
+          <a:noFill xmlns:a="http://schemas.openxmlformats.org/drawingml/2006/main"/>
+          <a:ln xmlns:a="http://schemas.openxmlformats.org/drawingml/2006/main" w="0">
+            <a:noFill/>
+            <a:prstDash val="solid"/>
+          </a:ln>
+        </p:spPr>
+        <p:txBody>
+          <a:bodyPr xmlns:a="http://schemas.openxmlformats.org/drawingml/2006/main"/>
+          <a:lstStyle xmlns:a="http://schemas.openxmlformats.org/drawingml/2006/main"/>
+          <a:p xmlns:a="http://schemas.openxmlformats.org/drawingml/2006/main">
+            <a:pPr algn="ctr">
+              <a:defRPr sz="900">
                 <a:solidFill>
                   <a:srgbClr val="667085"/>
                 </a:solidFill>
               </a:defRPr>
             </a:pPr>
             <a:r>
-              <a:rPr sz="1050">
+              <a:rPr sz="900">
                 <a:solidFill>
                   <a:srgbClr val="667085"/>
                 </a:solidFill>
               </a:rPr>
-              <a:t>{{OUTCOME_4_FROM}}</a:t>
-            </a:r>
-          </a:p>
-        </p:txBody>
-      </p:sp>
-      <p:sp>
-        <p:nvSpPr>
-          <p:cNvPr id="33" name="">
-            <a:extLst xmlns:a="http://schemas.openxmlformats.org/drawingml/2006/main">
-              <a:ext uri="{FF2B5EF4-FFF2-40B4-BE49-F238E27FC236}">
-                <a16:creationId xmlns:a16="http://schemas.microsoft.com/office/drawing/2014/main" id="{28BC0BE7-5EA6-459A-A1E7-3A60A7FE9BA9}"/>
-              </a:ext>
-            </a:extLst>
-          </p:cNvPr>
-          <p:cNvSpPr>
-            <a:spLocks xmlns:a="http://schemas.openxmlformats.org/drawingml/2006/main" noGrp="1"/>
-          </p:cNvSpPr>
-          <p:nvPr/>
-        </p:nvSpPr>
-        <p:spPr>
-          <a:xfrm xmlns:a="http://schemas.openxmlformats.org/drawingml/2006/main">
-            <a:off x="6667500" y="5353050"/>
-            <a:ext cx="381000" cy="342900"/>
-          </a:xfrm>
-          <a:prstGeom xmlns:a="http://schemas.openxmlformats.org/drawingml/2006/main" prst="rect">
-            <a:avLst/>
-          </a:prstGeom>
-          <a:noFill xmlns:a="http://schemas.openxmlformats.org/drawingml/2006/main"/>
-          <a:ln xmlns:a="http://schemas.openxmlformats.org/drawingml/2006/main" w="0">
-            <a:noFill/>
-            <a:prstDash val="solid"/>
-          </a:ln>
-        </p:spPr>
-        <p:txBody>
-          <a:bodyPr xmlns:a="http://schemas.openxmlformats.org/drawingml/2006/main"/>
-          <a:lstStyle xmlns:a="http://schemas.openxmlformats.org/drawingml/2006/main"/>
-          <a:p xmlns:a="http://schemas.openxmlformats.org/drawingml/2006/main">
-            <a:pPr algn="ctr">
-              <a:defRPr sz="1950" b="1">
-                <a:solidFill>
-                  <a:srgbClr val="FF6412"/>
-                </a:solidFill>
-              </a:defRPr>
-            </a:pPr>
-            <a:r>
-              <a:rPr sz="1950" b="1">
-                <a:solidFill>
-                  <a:srgbClr val="FF6412"/>
-                </a:solidFill>
-              </a:rPr>
-              <a:t>→</a:t>
-            </a:r>
-          </a:p>
-        </p:txBody>
-      </p:sp>
-      <p:sp>
-        <p:nvSpPr>
-          <p:cNvPr id="34" name="">
-            <a:extLst xmlns:a="http://schemas.openxmlformats.org/drawingml/2006/main">
-              <a:ext uri="{FF2B5EF4-FFF2-40B4-BE49-F238E27FC236}">
-                <a16:creationId xmlns:a16="http://schemas.microsoft.com/office/drawing/2014/main" id="{C3FDF836-F6FD-42A0-94E9-721BB8B5D2D6}"/>
-              </a:ext>
-            </a:extLst>
-          </p:cNvPr>
-          <p:cNvSpPr>
-            <a:spLocks xmlns:a="http://schemas.openxmlformats.org/drawingml/2006/main" noGrp="1"/>
-          </p:cNvSpPr>
-          <p:nvPr/>
-        </p:nvSpPr>
-        <p:spPr>
-          <a:xfrm xmlns:a="http://schemas.openxmlformats.org/drawingml/2006/main">
-            <a:off x="7239000" y="5238750"/>
-            <a:ext cx="3962400" cy="685800"/>
-          </a:xfrm>
-          <a:prstGeom xmlns:a="http://schemas.openxmlformats.org/drawingml/2006/main" prst="rect">
-            <a:avLst/>
-          </a:prstGeom>
-          <a:noFill xmlns:a="http://schemas.openxmlformats.org/drawingml/2006/main"/>
-          <a:ln xmlns:a="http://schemas.openxmlformats.org/drawingml/2006/main" w="0">
-            <a:noFill/>
-            <a:prstDash val="solid"/>
-          </a:ln>
-        </p:spPr>
-        <p:txBody>
-          <a:bodyPr xmlns:a="http://schemas.openxmlformats.org/drawingml/2006/main"/>
-          <a:lstStyle xmlns:a="http://schemas.openxmlformats.org/drawingml/2006/main"/>
-          <a:p xmlns:a="http://schemas.openxmlformats.org/drawingml/2006/main">
-            <a:pPr>
-              <a:defRPr sz="1125" b="1">
-                <a:solidFill>
-                  <a:srgbClr val="161616"/>
-                </a:solidFill>
-              </a:defRPr>
-            </a:pPr>
-            <a:r>
-              <a:rPr sz="1125" b="1">
-                <a:solidFill>
-                  <a:srgbClr val="161616"/>
-                </a:solidFill>
-              </a:rPr>
-              <a:t>{{OUTCOME_4_TO}}</a:t>
+              <a:t>разрыв контроля</a:t>
             </a:r>
           </a:p>
         </p:txBody>
@@ -12859,7 +12981,7 @@
     </p:spTree>
     <p:extLst>
       <p:ext uri="{BB962C8B-B14F-4D97-AF65-F5344CB8AC3E}">
-        <p14:creationId xmlns:p14="http://schemas.microsoft.com/office/powerpoint/2010/main" val="1910144163"/>
+        <p14:creationId xmlns:p14="http://schemas.microsoft.com/office/powerpoint/2010/main" val="2008045257"/>
       </p:ext>
     </p:extLst>
   </p:cSld>
@@ -12890,7 +13012,7 @@
           <p:cNvPr id="1" name="">
             <a:extLst xmlns:a="http://schemas.openxmlformats.org/drawingml/2006/main">
               <a:ext uri="{FF2B5EF4-FFF2-40B4-BE49-F238E27FC236}">
-                <a16:creationId xmlns:a16="http://schemas.microsoft.com/office/drawing/2014/main" id="{8E3B3F96-3E7F-4C2C-913B-17B3FAC6AA1E}"/>
+                <a16:creationId xmlns:a16="http://schemas.microsoft.com/office/drawing/2014/main" id="{20619A96-3FD5-4531-BFAA-95FCFA5192C1}"/>
               </a:ext>
             </a:extLst>
           </p:cNvPr>
@@ -12925,7 +13047,7 @@
           <p:nvPr/>
         </p:nvPicPr>
         <p:blipFill>
-          <a:blip xmlns:r="http://schemas.openxmlformats.org/officeDocument/2006/relationships" xmlns:a="http://schemas.openxmlformats.org/drawingml/2006/main" r:embed="R53448915ab624cec"/>
+          <a:blip xmlns:r="http://schemas.openxmlformats.org/officeDocument/2006/relationships" xmlns:a="http://schemas.openxmlformats.org/drawingml/2006/main" r:embed="R05ed4ae72f2d408d"/>
           <a:stretch xmlns:a="http://schemas.openxmlformats.org/drawingml/2006/main"/>
         </p:blipFill>
         <p:spPr>
@@ -12943,7 +13065,7 @@
           <p:cNvPr id="3" name="">
             <a:extLst xmlns:a="http://schemas.openxmlformats.org/drawingml/2006/main">
               <a:ext uri="{FF2B5EF4-FFF2-40B4-BE49-F238E27FC236}">
-                <a16:creationId xmlns:a16="http://schemas.microsoft.com/office/drawing/2014/main" id="{6EF8D13E-3B9C-478D-9D5C-B051D6984C8F}"/>
+                <a16:creationId xmlns:a16="http://schemas.microsoft.com/office/drawing/2014/main" id="{A49DFC2F-CEEC-4E9F-A5E2-EB0967EBB6B4}"/>
               </a:ext>
             </a:extLst>
           </p:cNvPr>
@@ -12993,7 +13115,7 @@
           <p:cNvPr id="4" name="">
             <a:extLst xmlns:a="http://schemas.openxmlformats.org/drawingml/2006/main">
               <a:ext uri="{FF2B5EF4-FFF2-40B4-BE49-F238E27FC236}">
-                <a16:creationId xmlns:a16="http://schemas.microsoft.com/office/drawing/2014/main" id="{B030EDB7-B48D-42F1-90C5-440FB3A18424}"/>
+                <a16:creationId xmlns:a16="http://schemas.microsoft.com/office/drawing/2014/main" id="{C36D5111-6941-4B24-B26D-AAE566588177}"/>
               </a:ext>
             </a:extLst>
           </p:cNvPr>
@@ -13026,7 +13148,7 @@
           <p:cNvPr id="5" name="">
             <a:extLst xmlns:a="http://schemas.openxmlformats.org/drawingml/2006/main">
               <a:ext uri="{FF2B5EF4-FFF2-40B4-BE49-F238E27FC236}">
-                <a16:creationId xmlns:a16="http://schemas.microsoft.com/office/drawing/2014/main" id="{9F3B3EC6-BCFB-457F-88DC-464940D63E83}"/>
+                <a16:creationId xmlns:a16="http://schemas.microsoft.com/office/drawing/2014/main" id="{061AB70F-4997-4444-9381-660052FA882E}"/>
               </a:ext>
             </a:extLst>
           </p:cNvPr>
@@ -13057,7 +13179,7 @@
           <p:cNvPr id="6" name="">
             <a:extLst xmlns:a="http://schemas.openxmlformats.org/drawingml/2006/main">
               <a:ext uri="{FF2B5EF4-FFF2-40B4-BE49-F238E27FC236}">
-                <a16:creationId xmlns:a16="http://schemas.microsoft.com/office/drawing/2014/main" id="{E8F31EBF-5C95-4493-B776-1A6829280DF1}"/>
+                <a16:creationId xmlns:a16="http://schemas.microsoft.com/office/drawing/2014/main" id="{38087E10-2AA9-43C9-8CF5-092DFEB2E0AD}"/>
               </a:ext>
             </a:extLst>
           </p:cNvPr>
@@ -13107,7 +13229,7 @@
           <p:cNvPr id="7" name="">
             <a:extLst xmlns:a="http://schemas.openxmlformats.org/drawingml/2006/main">
               <a:ext uri="{FF2B5EF4-FFF2-40B4-BE49-F238E27FC236}">
-                <a16:creationId xmlns:a16="http://schemas.microsoft.com/office/drawing/2014/main" id="{2BE85FBC-8425-4370-9C47-561358964538}"/>
+                <a16:creationId xmlns:a16="http://schemas.microsoft.com/office/drawing/2014/main" id="{032B2CFB-1740-4646-B20C-930E90F47902}"/>
               </a:ext>
             </a:extLst>
           </p:cNvPr>
@@ -13157,7 +13279,7 @@
           <p:cNvPr id="8" name="">
             <a:extLst xmlns:a="http://schemas.openxmlformats.org/drawingml/2006/main">
               <a:ext uri="{FF2B5EF4-FFF2-40B4-BE49-F238E27FC236}">
-                <a16:creationId xmlns:a16="http://schemas.microsoft.com/office/drawing/2014/main" id="{F8EF5F6B-8FFB-401C-8A2E-11EA87622497}"/>
+                <a16:creationId xmlns:a16="http://schemas.microsoft.com/office/drawing/2014/main" id="{B0FE9179-F5B6-4008-92BD-7CC9D7A0340E}"/>
               </a:ext>
             </a:extLst>
           </p:cNvPr>
@@ -13192,7 +13314,7 @@
           <p:cNvPr id="9" name="">
             <a:extLst xmlns:a="http://schemas.openxmlformats.org/drawingml/2006/main">
               <a:ext uri="{FF2B5EF4-FFF2-40B4-BE49-F238E27FC236}">
-                <a16:creationId xmlns:a16="http://schemas.microsoft.com/office/drawing/2014/main" id="{D81DFAE6-7CDE-4085-8282-28E7CDB6A645}"/>
+                <a16:creationId xmlns:a16="http://schemas.microsoft.com/office/drawing/2014/main" id="{4B57C9C1-05BA-42DD-8326-21C4263F6508}"/>
               </a:ext>
             </a:extLst>
           </p:cNvPr>
@@ -13242,7 +13364,7 @@
           <p:cNvPr id="10" name="">
             <a:extLst xmlns:a="http://schemas.openxmlformats.org/drawingml/2006/main">
               <a:ext uri="{FF2B5EF4-FFF2-40B4-BE49-F238E27FC236}">
-                <a16:creationId xmlns:a16="http://schemas.microsoft.com/office/drawing/2014/main" id="{877FA07D-B852-435A-A264-22B7BBD82D8D}"/>
+                <a16:creationId xmlns:a16="http://schemas.microsoft.com/office/drawing/2014/main" id="{09E28755-467C-465A-A897-AB505DA329EA}"/>
               </a:ext>
             </a:extLst>
           </p:cNvPr>
@@ -13292,7 +13414,7 @@
           <p:cNvPr id="11" name="">
             <a:extLst xmlns:a="http://schemas.openxmlformats.org/drawingml/2006/main">
               <a:ext uri="{FF2B5EF4-FFF2-40B4-BE49-F238E27FC236}">
-                <a16:creationId xmlns:a16="http://schemas.microsoft.com/office/drawing/2014/main" id="{718C9CAC-2771-4776-BE89-F24B51D3F3DA}"/>
+                <a16:creationId xmlns:a16="http://schemas.microsoft.com/office/drawing/2014/main" id="{5AFFC21C-CED3-4F6F-8731-84CB39D081FD}"/>
               </a:ext>
             </a:extLst>
           </p:cNvPr>
@@ -13327,7 +13449,7 @@
           <p:cNvPr id="12" name="">
             <a:extLst xmlns:a="http://schemas.openxmlformats.org/drawingml/2006/main">
               <a:ext uri="{FF2B5EF4-FFF2-40B4-BE49-F238E27FC236}">
-                <a16:creationId xmlns:a16="http://schemas.microsoft.com/office/drawing/2014/main" id="{20BF0B06-ACFC-4630-B1CE-1CEDA530D1AC}"/>
+                <a16:creationId xmlns:a16="http://schemas.microsoft.com/office/drawing/2014/main" id="{239002FD-CF61-4C24-A40C-6454E1384579}"/>
               </a:ext>
             </a:extLst>
           </p:cNvPr>
@@ -13377,7 +13499,7 @@
           <p:cNvPr id="13" name="">
             <a:extLst xmlns:a="http://schemas.openxmlformats.org/drawingml/2006/main">
               <a:ext uri="{FF2B5EF4-FFF2-40B4-BE49-F238E27FC236}">
-                <a16:creationId xmlns:a16="http://schemas.microsoft.com/office/drawing/2014/main" id="{718942FA-A3A4-4C40-9A64-23BFECC8EE8D}"/>
+                <a16:creationId xmlns:a16="http://schemas.microsoft.com/office/drawing/2014/main" id="{98874392-E19F-4CB9-9133-E9D724ECB4F2}"/>
               </a:ext>
             </a:extLst>
           </p:cNvPr>
@@ -13427,7 +13549,7 @@
           <p:cNvPr id="14" name="">
             <a:extLst xmlns:a="http://schemas.openxmlformats.org/drawingml/2006/main">
               <a:ext uri="{FF2B5EF4-FFF2-40B4-BE49-F238E27FC236}">
-                <a16:creationId xmlns:a16="http://schemas.microsoft.com/office/drawing/2014/main" id="{BAB74547-E281-4573-8325-69E7D85B2F9D}"/>
+                <a16:creationId xmlns:a16="http://schemas.microsoft.com/office/drawing/2014/main" id="{3FB8054B-B0ED-4500-BCDC-3B83C6FB6058}"/>
               </a:ext>
             </a:extLst>
           </p:cNvPr>
@@ -13462,7 +13584,7 @@
           <p:cNvPr id="15" name="">
             <a:extLst xmlns:a="http://schemas.openxmlformats.org/drawingml/2006/main">
               <a:ext uri="{FF2B5EF4-FFF2-40B4-BE49-F238E27FC236}">
-                <a16:creationId xmlns:a16="http://schemas.microsoft.com/office/drawing/2014/main" id="{0AED12AA-53D1-4D60-B4EC-6442369695A0}"/>
+                <a16:creationId xmlns:a16="http://schemas.microsoft.com/office/drawing/2014/main" id="{4D9BA60F-40D0-4A8F-9B2B-3348855E4457}"/>
               </a:ext>
             </a:extLst>
           </p:cNvPr>
@@ -13512,7 +13634,7 @@
           <p:cNvPr id="16" name="">
             <a:extLst xmlns:a="http://schemas.openxmlformats.org/drawingml/2006/main">
               <a:ext uri="{FF2B5EF4-FFF2-40B4-BE49-F238E27FC236}">
-                <a16:creationId xmlns:a16="http://schemas.microsoft.com/office/drawing/2014/main" id="{E9ECADD2-B70A-4FC6-A029-66D0D80009FE}"/>
+                <a16:creationId xmlns:a16="http://schemas.microsoft.com/office/drawing/2014/main" id="{1FBAD5DA-90D4-42C2-B465-96ECF9B90CB5}"/>
               </a:ext>
             </a:extLst>
           </p:cNvPr>
@@ -13562,7 +13684,7 @@
           <p:cNvPr id="17" name="">
             <a:extLst xmlns:a="http://schemas.openxmlformats.org/drawingml/2006/main">
               <a:ext uri="{FF2B5EF4-FFF2-40B4-BE49-F238E27FC236}">
-                <a16:creationId xmlns:a16="http://schemas.microsoft.com/office/drawing/2014/main" id="{67EAF537-60B0-4FCF-87F7-5176BC728A01}"/>
+                <a16:creationId xmlns:a16="http://schemas.microsoft.com/office/drawing/2014/main" id="{D7AD8A8B-D89D-4430-8662-570493896CC6}"/>
               </a:ext>
             </a:extLst>
           </p:cNvPr>
@@ -13597,7 +13719,7 @@
           <p:cNvPr id="18" name="">
             <a:extLst xmlns:a="http://schemas.openxmlformats.org/drawingml/2006/main">
               <a:ext uri="{FF2B5EF4-FFF2-40B4-BE49-F238E27FC236}">
-                <a16:creationId xmlns:a16="http://schemas.microsoft.com/office/drawing/2014/main" id="{DC2062E3-40D2-4274-B2D1-6CE8DE9A03CB}"/>
+                <a16:creationId xmlns:a16="http://schemas.microsoft.com/office/drawing/2014/main" id="{023DA70B-F768-44AC-A58D-5156BE2661CD}"/>
               </a:ext>
             </a:extLst>
           </p:cNvPr>
@@ -13647,7 +13769,7 @@
           <p:cNvPr id="19" name="">
             <a:extLst xmlns:a="http://schemas.openxmlformats.org/drawingml/2006/main">
               <a:ext uri="{FF2B5EF4-FFF2-40B4-BE49-F238E27FC236}">
-                <a16:creationId xmlns:a16="http://schemas.microsoft.com/office/drawing/2014/main" id="{0B1C67DF-8CFB-4CA9-918F-561BC9294271}"/>
+                <a16:creationId xmlns:a16="http://schemas.microsoft.com/office/drawing/2014/main" id="{96900ADA-D18D-403B-A65E-D16278B4CCDE}"/>
               </a:ext>
             </a:extLst>
           </p:cNvPr>
@@ -13697,7 +13819,7 @@
           <p:cNvPr id="20" name="">
             <a:extLst xmlns:a="http://schemas.openxmlformats.org/drawingml/2006/main">
               <a:ext uri="{FF2B5EF4-FFF2-40B4-BE49-F238E27FC236}">
-                <a16:creationId xmlns:a16="http://schemas.microsoft.com/office/drawing/2014/main" id="{51718DFF-D77A-42CC-9E1E-8A4C6E7DF79F}"/>
+                <a16:creationId xmlns:a16="http://schemas.microsoft.com/office/drawing/2014/main" id="{AF8ED842-9C56-45FF-A1FD-7D60491BCA15}"/>
               </a:ext>
             </a:extLst>
           </p:cNvPr>
@@ -13747,7 +13869,7 @@
           <p:cNvPr id="21" name="">
             <a:extLst xmlns:a="http://schemas.openxmlformats.org/drawingml/2006/main">
               <a:ext uri="{FF2B5EF4-FFF2-40B4-BE49-F238E27FC236}">
-                <a16:creationId xmlns:a16="http://schemas.microsoft.com/office/drawing/2014/main" id="{EDC8831A-C492-44B6-AE74-CCFF84B945FB}"/>
+                <a16:creationId xmlns:a16="http://schemas.microsoft.com/office/drawing/2014/main" id="{3F5C8D25-4283-48C9-A338-809516B1865C}"/>
               </a:ext>
             </a:extLst>
           </p:cNvPr>
@@ -13797,7 +13919,7 @@
           <p:cNvPr id="22" name="">
             <a:extLst xmlns:a="http://schemas.openxmlformats.org/drawingml/2006/main">
               <a:ext uri="{FF2B5EF4-FFF2-40B4-BE49-F238E27FC236}">
-                <a16:creationId xmlns:a16="http://schemas.microsoft.com/office/drawing/2014/main" id="{0BBAB738-5208-4714-A566-B575BFCD0491}"/>
+                <a16:creationId xmlns:a16="http://schemas.microsoft.com/office/drawing/2014/main" id="{74474F6B-E209-4622-9815-769F7AD23600}"/>
               </a:ext>
             </a:extLst>
           </p:cNvPr>
@@ -13847,7 +13969,7 @@
           <p:cNvPr id="23" name="">
             <a:extLst xmlns:a="http://schemas.openxmlformats.org/drawingml/2006/main">
               <a:ext uri="{FF2B5EF4-FFF2-40B4-BE49-F238E27FC236}">
-                <a16:creationId xmlns:a16="http://schemas.microsoft.com/office/drawing/2014/main" id="{7F0B13E6-2F0D-4CA1-ABC4-CEA98E5566F3}"/>
+                <a16:creationId xmlns:a16="http://schemas.microsoft.com/office/drawing/2014/main" id="{86F436B3-82C8-4A95-ACF8-A75EDAF52A8E}"/>
               </a:ext>
             </a:extLst>
           </p:cNvPr>
@@ -13880,7 +14002,7 @@
           <p:cNvPr id="24" name="">
             <a:extLst xmlns:a="http://schemas.openxmlformats.org/drawingml/2006/main">
               <a:ext uri="{FF2B5EF4-FFF2-40B4-BE49-F238E27FC236}">
-                <a16:creationId xmlns:a16="http://schemas.microsoft.com/office/drawing/2014/main" id="{04F13390-BD2E-4641-BC83-8B7DCD6B59EB}"/>
+                <a16:creationId xmlns:a16="http://schemas.microsoft.com/office/drawing/2014/main" id="{62AB8DA0-CAB6-479E-A560-E48631D0E7E4}"/>
               </a:ext>
             </a:extLst>
           </p:cNvPr>
@@ -13930,7 +14052,7 @@
           <p:cNvPr id="25" name="">
             <a:extLst xmlns:a="http://schemas.openxmlformats.org/drawingml/2006/main">
               <a:ext uri="{FF2B5EF4-FFF2-40B4-BE49-F238E27FC236}">
-                <a16:creationId xmlns:a16="http://schemas.microsoft.com/office/drawing/2014/main" id="{636E9AF1-5069-42A4-A10B-DA7A6353AF16}"/>
+                <a16:creationId xmlns:a16="http://schemas.microsoft.com/office/drawing/2014/main" id="{2871C055-AF9B-4C15-957A-DF216E6CF3F2}"/>
               </a:ext>
             </a:extLst>
           </p:cNvPr>
@@ -13963,7 +14085,7 @@
           <p:cNvPr id="26" name="">
             <a:extLst xmlns:a="http://schemas.openxmlformats.org/drawingml/2006/main">
               <a:ext uri="{FF2B5EF4-FFF2-40B4-BE49-F238E27FC236}">
-                <a16:creationId xmlns:a16="http://schemas.microsoft.com/office/drawing/2014/main" id="{225FD827-AF41-4B5B-B00C-248EE96D9A96}"/>
+                <a16:creationId xmlns:a16="http://schemas.microsoft.com/office/drawing/2014/main" id="{CD6C0DDE-C583-4CDE-840A-6A7B3BCAD4C2}"/>
               </a:ext>
             </a:extLst>
           </p:cNvPr>
@@ -14013,7 +14135,7 @@
           <p:cNvPr id="27" name="">
             <a:extLst xmlns:a="http://schemas.openxmlformats.org/drawingml/2006/main">
               <a:ext uri="{FF2B5EF4-FFF2-40B4-BE49-F238E27FC236}">
-                <a16:creationId xmlns:a16="http://schemas.microsoft.com/office/drawing/2014/main" id="{0FA0C8B7-16F7-4C8B-80FC-905E9AD7C5C7}"/>
+                <a16:creationId xmlns:a16="http://schemas.microsoft.com/office/drawing/2014/main" id="{D87FB19B-2B23-45CB-B274-F8257F200ADB}"/>
               </a:ext>
             </a:extLst>
           </p:cNvPr>
@@ -14046,7 +14168,7 @@
           <p:cNvPr id="28" name="">
             <a:extLst xmlns:a="http://schemas.openxmlformats.org/drawingml/2006/main">
               <a:ext uri="{FF2B5EF4-FFF2-40B4-BE49-F238E27FC236}">
-                <a16:creationId xmlns:a16="http://schemas.microsoft.com/office/drawing/2014/main" id="{448DFEB1-656B-4C81-B8BF-360B3B90D7FC}"/>
+                <a16:creationId xmlns:a16="http://schemas.microsoft.com/office/drawing/2014/main" id="{FD0E9338-E88E-4923-B9A4-DBACE30D556B}"/>
               </a:ext>
             </a:extLst>
           </p:cNvPr>
@@ -14094,7 +14216,7 @@
     </p:spTree>
     <p:extLst>
       <p:ext uri="{BB962C8B-B14F-4D97-AF65-F5344CB8AC3E}">
-        <p14:creationId xmlns:p14="http://schemas.microsoft.com/office/powerpoint/2010/main" val="1989508886"/>
+        <p14:creationId xmlns:p14="http://schemas.microsoft.com/office/powerpoint/2010/main" val="1951951231"/>
       </p:ext>
     </p:extLst>
   </p:cSld>
@@ -14125,7 +14247,7 @@
           <p:cNvPr id="1" name="">
             <a:extLst xmlns:a="http://schemas.openxmlformats.org/drawingml/2006/main">
               <a:ext uri="{FF2B5EF4-FFF2-40B4-BE49-F238E27FC236}">
-                <a16:creationId xmlns:a16="http://schemas.microsoft.com/office/drawing/2014/main" id="{FCC80DA7-F741-41DB-A811-F92457E8BC57}"/>
+                <a16:creationId xmlns:a16="http://schemas.microsoft.com/office/drawing/2014/main" id="{36FF5E19-D1DB-483F-9749-98FBEA39B636}"/>
               </a:ext>
             </a:extLst>
           </p:cNvPr>
@@ -14160,7 +14282,7 @@
           <p:nvPr/>
         </p:nvPicPr>
         <p:blipFill>
-          <a:blip xmlns:r="http://schemas.openxmlformats.org/officeDocument/2006/relationships" xmlns:a="http://schemas.openxmlformats.org/drawingml/2006/main" r:embed="R92f39de8e9f54909"/>
+          <a:blip xmlns:r="http://schemas.openxmlformats.org/officeDocument/2006/relationships" xmlns:a="http://schemas.openxmlformats.org/drawingml/2006/main" r:embed="R84c1b4b94bff4234"/>
           <a:stretch xmlns:a="http://schemas.openxmlformats.org/drawingml/2006/main"/>
         </p:blipFill>
         <p:spPr>
@@ -14178,7 +14300,7 @@
           <p:cNvPr id="3" name="">
             <a:extLst xmlns:a="http://schemas.openxmlformats.org/drawingml/2006/main">
               <a:ext uri="{FF2B5EF4-FFF2-40B4-BE49-F238E27FC236}">
-                <a16:creationId xmlns:a16="http://schemas.microsoft.com/office/drawing/2014/main" id="{41C5EDA6-B11A-4603-834E-93A177473E44}"/>
+                <a16:creationId xmlns:a16="http://schemas.microsoft.com/office/drawing/2014/main" id="{23CBBAB5-9619-40C2-A7BC-8FFE729D7203}"/>
               </a:ext>
             </a:extLst>
           </p:cNvPr>
@@ -14228,7 +14350,7 @@
           <p:cNvPr id="4" name="">
             <a:extLst xmlns:a="http://schemas.openxmlformats.org/drawingml/2006/main">
               <a:ext uri="{FF2B5EF4-FFF2-40B4-BE49-F238E27FC236}">
-                <a16:creationId xmlns:a16="http://schemas.microsoft.com/office/drawing/2014/main" id="{2DB07F88-EF4E-4E2B-BE43-DE2AF4CF8BEF}"/>
+                <a16:creationId xmlns:a16="http://schemas.microsoft.com/office/drawing/2014/main" id="{9FEBD1B6-104A-4945-A379-EDEE92212053}"/>
               </a:ext>
             </a:extLst>
           </p:cNvPr>
@@ -14261,7 +14383,7 @@
           <p:cNvPr id="5" name="">
             <a:extLst xmlns:a="http://schemas.openxmlformats.org/drawingml/2006/main">
               <a:ext uri="{FF2B5EF4-FFF2-40B4-BE49-F238E27FC236}">
-                <a16:creationId xmlns:a16="http://schemas.microsoft.com/office/drawing/2014/main" id="{EEA5D9CA-8557-4EB5-B1B1-5553694E4A4B}"/>
+                <a16:creationId xmlns:a16="http://schemas.microsoft.com/office/drawing/2014/main" id="{901B2070-7250-4CFE-AFA5-E6EAED682545}"/>
               </a:ext>
             </a:extLst>
           </p:cNvPr>
@@ -14292,7 +14414,7 @@
           <p:cNvPr id="6" name="">
             <a:extLst xmlns:a="http://schemas.openxmlformats.org/drawingml/2006/main">
               <a:ext uri="{FF2B5EF4-FFF2-40B4-BE49-F238E27FC236}">
-                <a16:creationId xmlns:a16="http://schemas.microsoft.com/office/drawing/2014/main" id="{BCA2CE24-F5C6-4EFE-A052-6FE348BAB3C4}"/>
+                <a16:creationId xmlns:a16="http://schemas.microsoft.com/office/drawing/2014/main" id="{4EEE430F-082D-4DDA-B715-368421E2C40B}"/>
               </a:ext>
             </a:extLst>
           </p:cNvPr>
@@ -14342,7 +14464,7 @@
           <p:cNvPr id="7" name="">
             <a:extLst xmlns:a="http://schemas.openxmlformats.org/drawingml/2006/main">
               <a:ext uri="{FF2B5EF4-FFF2-40B4-BE49-F238E27FC236}">
-                <a16:creationId xmlns:a16="http://schemas.microsoft.com/office/drawing/2014/main" id="{EF0E804F-1575-4FCB-B193-161155FC002B}"/>
+                <a16:creationId xmlns:a16="http://schemas.microsoft.com/office/drawing/2014/main" id="{610E5504-FCD4-4120-8636-400CF9D34623}"/>
               </a:ext>
             </a:extLst>
           </p:cNvPr>
@@ -14392,7 +14514,7 @@
           <p:cNvPr id="8" name="">
             <a:extLst xmlns:a="http://schemas.openxmlformats.org/drawingml/2006/main">
               <a:ext uri="{FF2B5EF4-FFF2-40B4-BE49-F238E27FC236}">
-                <a16:creationId xmlns:a16="http://schemas.microsoft.com/office/drawing/2014/main" id="{67834D24-8F7B-4501-8A37-F4ADF9C003BC}"/>
+                <a16:creationId xmlns:a16="http://schemas.microsoft.com/office/drawing/2014/main" id="{170C575D-32FC-4FC6-9996-1EDB889F3AA2}"/>
               </a:ext>
             </a:extLst>
           </p:cNvPr>
@@ -14427,7 +14549,7 @@
           <p:cNvPr id="9" name="">
             <a:extLst xmlns:a="http://schemas.openxmlformats.org/drawingml/2006/main">
               <a:ext uri="{FF2B5EF4-FFF2-40B4-BE49-F238E27FC236}">
-                <a16:creationId xmlns:a16="http://schemas.microsoft.com/office/drawing/2014/main" id="{1D24989C-5816-4DCA-91F4-89C2253393E3}"/>
+                <a16:creationId xmlns:a16="http://schemas.microsoft.com/office/drawing/2014/main" id="{BD814B60-C103-4B92-9E7A-40FDC0E82299}"/>
               </a:ext>
             </a:extLst>
           </p:cNvPr>
@@ -14460,7 +14582,7 @@
           <p:cNvPr id="10" name="">
             <a:extLst xmlns:a="http://schemas.openxmlformats.org/drawingml/2006/main">
               <a:ext uri="{FF2B5EF4-FFF2-40B4-BE49-F238E27FC236}">
-                <a16:creationId xmlns:a16="http://schemas.microsoft.com/office/drawing/2014/main" id="{1517DD7A-D918-4A4A-9C68-743A6FDF4D8D}"/>
+                <a16:creationId xmlns:a16="http://schemas.microsoft.com/office/drawing/2014/main" id="{9971C5A2-B66A-407C-A0F5-8789338C5189}"/>
               </a:ext>
             </a:extLst>
           </p:cNvPr>
@@ -14510,7 +14632,7 @@
           <p:cNvPr id="11" name="">
             <a:extLst xmlns:a="http://schemas.openxmlformats.org/drawingml/2006/main">
               <a:ext uri="{FF2B5EF4-FFF2-40B4-BE49-F238E27FC236}">
-                <a16:creationId xmlns:a16="http://schemas.microsoft.com/office/drawing/2014/main" id="{AF68350B-70D7-4E73-B146-7055A835F4C2}"/>
+                <a16:creationId xmlns:a16="http://schemas.microsoft.com/office/drawing/2014/main" id="{47EA86FA-78CF-4BCC-9C02-A480AC745FC1}"/>
               </a:ext>
             </a:extLst>
           </p:cNvPr>
@@ -14560,7 +14682,7 @@
           <p:cNvPr id="12" name="">
             <a:extLst xmlns:a="http://schemas.openxmlformats.org/drawingml/2006/main">
               <a:ext uri="{FF2B5EF4-FFF2-40B4-BE49-F238E27FC236}">
-                <a16:creationId xmlns:a16="http://schemas.microsoft.com/office/drawing/2014/main" id="{A83E7506-3A9C-4A23-899A-4B6160A67921}"/>
+                <a16:creationId xmlns:a16="http://schemas.microsoft.com/office/drawing/2014/main" id="{F52E76C1-5B96-42AD-AFFD-60B28FAB244C}"/>
               </a:ext>
             </a:extLst>
           </p:cNvPr>
@@ -14610,7 +14732,7 @@
           <p:cNvPr id="13" name="">
             <a:extLst xmlns:a="http://schemas.openxmlformats.org/drawingml/2006/main">
               <a:ext uri="{FF2B5EF4-FFF2-40B4-BE49-F238E27FC236}">
-                <a16:creationId xmlns:a16="http://schemas.microsoft.com/office/drawing/2014/main" id="{0A23BFD7-9249-41A3-9244-8DE8CCBD419C}"/>
+                <a16:creationId xmlns:a16="http://schemas.microsoft.com/office/drawing/2014/main" id="{42F3AB2A-2313-4334-A63D-24C2559023EF}"/>
               </a:ext>
             </a:extLst>
           </p:cNvPr>
@@ -14645,7 +14767,7 @@
           <p:cNvPr id="14" name="">
             <a:extLst xmlns:a="http://schemas.openxmlformats.org/drawingml/2006/main">
               <a:ext uri="{FF2B5EF4-FFF2-40B4-BE49-F238E27FC236}">
-                <a16:creationId xmlns:a16="http://schemas.microsoft.com/office/drawing/2014/main" id="{6ED6FB27-09EE-4B2E-A6AF-5F6639E7968F}"/>
+                <a16:creationId xmlns:a16="http://schemas.microsoft.com/office/drawing/2014/main" id="{993C9A50-1189-4F31-8CA0-277B300F5316}"/>
               </a:ext>
             </a:extLst>
           </p:cNvPr>
@@ -14678,7 +14800,7 @@
           <p:cNvPr id="15" name="">
             <a:extLst xmlns:a="http://schemas.openxmlformats.org/drawingml/2006/main">
               <a:ext uri="{FF2B5EF4-FFF2-40B4-BE49-F238E27FC236}">
-                <a16:creationId xmlns:a16="http://schemas.microsoft.com/office/drawing/2014/main" id="{1564E088-2F52-4F40-AA78-B3680BEE3B54}"/>
+                <a16:creationId xmlns:a16="http://schemas.microsoft.com/office/drawing/2014/main" id="{7E03E379-6FC0-478A-A0EF-1085EEF04EEB}"/>
               </a:ext>
             </a:extLst>
           </p:cNvPr>
@@ -14728,7 +14850,7 @@
           <p:cNvPr id="16" name="">
             <a:extLst xmlns:a="http://schemas.openxmlformats.org/drawingml/2006/main">
               <a:ext uri="{FF2B5EF4-FFF2-40B4-BE49-F238E27FC236}">
-                <a16:creationId xmlns:a16="http://schemas.microsoft.com/office/drawing/2014/main" id="{68FA0AF5-CC63-46BC-885D-649526BFE4D8}"/>
+                <a16:creationId xmlns:a16="http://schemas.microsoft.com/office/drawing/2014/main" id="{BE7044CE-AED8-4134-9F47-C547763F978A}"/>
               </a:ext>
             </a:extLst>
           </p:cNvPr>
@@ -14778,7 +14900,7 @@
           <p:cNvPr id="17" name="">
             <a:extLst xmlns:a="http://schemas.openxmlformats.org/drawingml/2006/main">
               <a:ext uri="{FF2B5EF4-FFF2-40B4-BE49-F238E27FC236}">
-                <a16:creationId xmlns:a16="http://schemas.microsoft.com/office/drawing/2014/main" id="{A79CCCEA-9D98-43DD-8EA5-AA538B3D931C}"/>
+                <a16:creationId xmlns:a16="http://schemas.microsoft.com/office/drawing/2014/main" id="{1C99C4B3-C27A-4C15-B412-717C33284074}"/>
               </a:ext>
             </a:extLst>
           </p:cNvPr>
@@ -14828,7 +14950,7 @@
           <p:cNvPr id="18" name="">
             <a:extLst xmlns:a="http://schemas.openxmlformats.org/drawingml/2006/main">
               <a:ext uri="{FF2B5EF4-FFF2-40B4-BE49-F238E27FC236}">
-                <a16:creationId xmlns:a16="http://schemas.microsoft.com/office/drawing/2014/main" id="{AF89EFE0-3BEB-4C33-88C9-2A2C9080245D}"/>
+                <a16:creationId xmlns:a16="http://schemas.microsoft.com/office/drawing/2014/main" id="{25B33A60-3671-4F87-A957-A5DB0613DEED}"/>
               </a:ext>
             </a:extLst>
           </p:cNvPr>
@@ -14863,7 +14985,7 @@
           <p:cNvPr id="19" name="">
             <a:extLst xmlns:a="http://schemas.openxmlformats.org/drawingml/2006/main">
               <a:ext uri="{FF2B5EF4-FFF2-40B4-BE49-F238E27FC236}">
-                <a16:creationId xmlns:a16="http://schemas.microsoft.com/office/drawing/2014/main" id="{1AE1711D-D319-4E8C-9DD9-B3A1D95E75E1}"/>
+                <a16:creationId xmlns:a16="http://schemas.microsoft.com/office/drawing/2014/main" id="{BFDBCAF4-FFA6-45DF-BCD4-34BC9B2CE55D}"/>
               </a:ext>
             </a:extLst>
           </p:cNvPr>
@@ -14896,7 +15018,7 @@
           <p:cNvPr id="20" name="">
             <a:extLst xmlns:a="http://schemas.openxmlformats.org/drawingml/2006/main">
               <a:ext uri="{FF2B5EF4-FFF2-40B4-BE49-F238E27FC236}">
-                <a16:creationId xmlns:a16="http://schemas.microsoft.com/office/drawing/2014/main" id="{6B221ED9-211D-4E57-A780-25D45FBFFC8C}"/>
+                <a16:creationId xmlns:a16="http://schemas.microsoft.com/office/drawing/2014/main" id="{9E873E5B-B73E-40E7-8C1A-897CADFBDB6C}"/>
               </a:ext>
             </a:extLst>
           </p:cNvPr>
@@ -14946,7 +15068,7 @@
           <p:cNvPr id="21" name="">
             <a:extLst xmlns:a="http://schemas.openxmlformats.org/drawingml/2006/main">
               <a:ext uri="{FF2B5EF4-FFF2-40B4-BE49-F238E27FC236}">
-                <a16:creationId xmlns:a16="http://schemas.microsoft.com/office/drawing/2014/main" id="{D442D542-2139-46D3-853D-B8094624768C}"/>
+                <a16:creationId xmlns:a16="http://schemas.microsoft.com/office/drawing/2014/main" id="{C3F88E35-DE5D-412B-890E-4E36116862F5}"/>
               </a:ext>
             </a:extLst>
           </p:cNvPr>
@@ -14996,7 +15118,7 @@
           <p:cNvPr id="22" name="">
             <a:extLst xmlns:a="http://schemas.openxmlformats.org/drawingml/2006/main">
               <a:ext uri="{FF2B5EF4-FFF2-40B4-BE49-F238E27FC236}">
-                <a16:creationId xmlns:a16="http://schemas.microsoft.com/office/drawing/2014/main" id="{6D635FD7-2B90-404B-8DB0-28DA69447421}"/>
+                <a16:creationId xmlns:a16="http://schemas.microsoft.com/office/drawing/2014/main" id="{AADF4C9B-9870-461B-A9DE-2BF050D192E3}"/>
               </a:ext>
             </a:extLst>
           </p:cNvPr>
@@ -15046,7 +15168,7 @@
           <p:cNvPr id="23" name="">
             <a:extLst xmlns:a="http://schemas.openxmlformats.org/drawingml/2006/main">
               <a:ext uri="{FF2B5EF4-FFF2-40B4-BE49-F238E27FC236}">
-                <a16:creationId xmlns:a16="http://schemas.microsoft.com/office/drawing/2014/main" id="{873F88DD-CB33-4900-BD07-95C0ACF33684}"/>
+                <a16:creationId xmlns:a16="http://schemas.microsoft.com/office/drawing/2014/main" id="{8B70591C-0121-485D-A52B-AAFE839A18DF}"/>
               </a:ext>
             </a:extLst>
           </p:cNvPr>
@@ -15081,7 +15203,7 @@
           <p:cNvPr id="24" name="">
             <a:extLst xmlns:a="http://schemas.openxmlformats.org/drawingml/2006/main">
               <a:ext uri="{FF2B5EF4-FFF2-40B4-BE49-F238E27FC236}">
-                <a16:creationId xmlns:a16="http://schemas.microsoft.com/office/drawing/2014/main" id="{7EF74A70-D96C-4493-9AF5-B82CE072036B}"/>
+                <a16:creationId xmlns:a16="http://schemas.microsoft.com/office/drawing/2014/main" id="{36056F5C-F6A3-4059-9A4E-C98E39A4057F}"/>
               </a:ext>
             </a:extLst>
           </p:cNvPr>
@@ -15114,7 +15236,7 @@
           <p:cNvPr id="25" name="">
             <a:extLst xmlns:a="http://schemas.openxmlformats.org/drawingml/2006/main">
               <a:ext uri="{FF2B5EF4-FFF2-40B4-BE49-F238E27FC236}">
-                <a16:creationId xmlns:a16="http://schemas.microsoft.com/office/drawing/2014/main" id="{E1E54FE3-5733-48E6-9D27-C0C9BA54D545}"/>
+                <a16:creationId xmlns:a16="http://schemas.microsoft.com/office/drawing/2014/main" id="{D6ABB99A-909C-4A60-BE12-5FB16578CD85}"/>
               </a:ext>
             </a:extLst>
           </p:cNvPr>
@@ -15164,7 +15286,7 @@
           <p:cNvPr id="26" name="">
             <a:extLst xmlns:a="http://schemas.openxmlformats.org/drawingml/2006/main">
               <a:ext uri="{FF2B5EF4-FFF2-40B4-BE49-F238E27FC236}">
-                <a16:creationId xmlns:a16="http://schemas.microsoft.com/office/drawing/2014/main" id="{32C4E5E9-BAF0-43D1-BE19-80794943F477}"/>
+                <a16:creationId xmlns:a16="http://schemas.microsoft.com/office/drawing/2014/main" id="{B1B3DFB9-1CC9-4008-B021-1286D7545B3A}"/>
               </a:ext>
             </a:extLst>
           </p:cNvPr>
@@ -15214,7 +15336,7 @@
           <p:cNvPr id="27" name="">
             <a:extLst xmlns:a="http://schemas.openxmlformats.org/drawingml/2006/main">
               <a:ext uri="{FF2B5EF4-FFF2-40B4-BE49-F238E27FC236}">
-                <a16:creationId xmlns:a16="http://schemas.microsoft.com/office/drawing/2014/main" id="{14097B3B-2C86-4B26-9B5E-D3E9171CF0EF}"/>
+                <a16:creationId xmlns:a16="http://schemas.microsoft.com/office/drawing/2014/main" id="{C6237989-F4E3-4611-9237-6A280586E623}"/>
               </a:ext>
             </a:extLst>
           </p:cNvPr>
@@ -15264,7 +15386,7 @@
           <p:cNvPr id="28" name="">
             <a:extLst xmlns:a="http://schemas.openxmlformats.org/drawingml/2006/main">
               <a:ext uri="{FF2B5EF4-FFF2-40B4-BE49-F238E27FC236}">
-                <a16:creationId xmlns:a16="http://schemas.microsoft.com/office/drawing/2014/main" id="{080D885F-AE43-48C2-9D73-EBBDEF70477A}"/>
+                <a16:creationId xmlns:a16="http://schemas.microsoft.com/office/drawing/2014/main" id="{E971635C-1A8A-44E9-BCE0-251C3197881B}"/>
               </a:ext>
             </a:extLst>
           </p:cNvPr>
@@ -15299,7 +15421,7 @@
           <p:cNvPr id="29" name="">
             <a:extLst xmlns:a="http://schemas.openxmlformats.org/drawingml/2006/main">
               <a:ext uri="{FF2B5EF4-FFF2-40B4-BE49-F238E27FC236}">
-                <a16:creationId xmlns:a16="http://schemas.microsoft.com/office/drawing/2014/main" id="{EEBB842B-79EA-43DB-97DA-B6750C895563}"/>
+                <a16:creationId xmlns:a16="http://schemas.microsoft.com/office/drawing/2014/main" id="{9D4417F2-DA0F-4909-8111-8CD504CC85DE}"/>
               </a:ext>
             </a:extLst>
           </p:cNvPr>
@@ -15332,7 +15454,7 @@
           <p:cNvPr id="30" name="">
             <a:extLst xmlns:a="http://schemas.openxmlformats.org/drawingml/2006/main">
               <a:ext uri="{FF2B5EF4-FFF2-40B4-BE49-F238E27FC236}">
-                <a16:creationId xmlns:a16="http://schemas.microsoft.com/office/drawing/2014/main" id="{84443252-CB6D-4B65-ABB4-CEF47D8F640B}"/>
+                <a16:creationId xmlns:a16="http://schemas.microsoft.com/office/drawing/2014/main" id="{EAA7590D-1EA6-4D4E-9201-6AECBC7BFC43}"/>
               </a:ext>
             </a:extLst>
           </p:cNvPr>
@@ -15382,7 +15504,7 @@
           <p:cNvPr id="31" name="">
             <a:extLst xmlns:a="http://schemas.openxmlformats.org/drawingml/2006/main">
               <a:ext uri="{FF2B5EF4-FFF2-40B4-BE49-F238E27FC236}">
-                <a16:creationId xmlns:a16="http://schemas.microsoft.com/office/drawing/2014/main" id="{71DCA9D6-2F67-4C40-B804-51D4F74B4EB3}"/>
+                <a16:creationId xmlns:a16="http://schemas.microsoft.com/office/drawing/2014/main" id="{CF8EF6FF-1340-4060-B4D5-68862AEACFBE}"/>
               </a:ext>
             </a:extLst>
           </p:cNvPr>
@@ -15432,7 +15554,7 @@
           <p:cNvPr id="32" name="">
             <a:extLst xmlns:a="http://schemas.openxmlformats.org/drawingml/2006/main">
               <a:ext uri="{FF2B5EF4-FFF2-40B4-BE49-F238E27FC236}">
-                <a16:creationId xmlns:a16="http://schemas.microsoft.com/office/drawing/2014/main" id="{F0AA547A-644A-414D-ACCF-CCA84AD06688}"/>
+                <a16:creationId xmlns:a16="http://schemas.microsoft.com/office/drawing/2014/main" id="{1AEDE12C-592A-416A-803A-EDDEBF497CA2}"/>
               </a:ext>
             </a:extLst>
           </p:cNvPr>
@@ -15482,7 +15604,7 @@
           <p:cNvPr id="33" name="">
             <a:extLst xmlns:a="http://schemas.openxmlformats.org/drawingml/2006/main">
               <a:ext uri="{FF2B5EF4-FFF2-40B4-BE49-F238E27FC236}">
-                <a16:creationId xmlns:a16="http://schemas.microsoft.com/office/drawing/2014/main" id="{835EB1A8-97AC-41AA-879B-34AD61FC9272}"/>
+                <a16:creationId xmlns:a16="http://schemas.microsoft.com/office/drawing/2014/main" id="{D46C22B9-D648-44F9-8806-C61085BC6B15}"/>
               </a:ext>
             </a:extLst>
           </p:cNvPr>
@@ -15517,7 +15639,7 @@
           <p:cNvPr id="34" name="">
             <a:extLst xmlns:a="http://schemas.openxmlformats.org/drawingml/2006/main">
               <a:ext uri="{FF2B5EF4-FFF2-40B4-BE49-F238E27FC236}">
-                <a16:creationId xmlns:a16="http://schemas.microsoft.com/office/drawing/2014/main" id="{B4523A3A-BAC1-4186-8A88-B99D99CF3467}"/>
+                <a16:creationId xmlns:a16="http://schemas.microsoft.com/office/drawing/2014/main" id="{73CA634B-9773-4797-AE80-A11D677A717F}"/>
               </a:ext>
             </a:extLst>
           </p:cNvPr>
@@ -15550,7 +15672,7 @@
           <p:cNvPr id="35" name="">
             <a:extLst xmlns:a="http://schemas.openxmlformats.org/drawingml/2006/main">
               <a:ext uri="{FF2B5EF4-FFF2-40B4-BE49-F238E27FC236}">
-                <a16:creationId xmlns:a16="http://schemas.microsoft.com/office/drawing/2014/main" id="{C75409C4-F7B7-45EA-A06F-DFBD185DC875}"/>
+                <a16:creationId xmlns:a16="http://schemas.microsoft.com/office/drawing/2014/main" id="{9D90AF49-9630-4ABE-9D26-D2476D972DE6}"/>
               </a:ext>
             </a:extLst>
           </p:cNvPr>
@@ -15600,7 +15722,7 @@
           <p:cNvPr id="36" name="">
             <a:extLst xmlns:a="http://schemas.openxmlformats.org/drawingml/2006/main">
               <a:ext uri="{FF2B5EF4-FFF2-40B4-BE49-F238E27FC236}">
-                <a16:creationId xmlns:a16="http://schemas.microsoft.com/office/drawing/2014/main" id="{FA4C39D3-4CA8-4866-9411-CD3DD59989C0}"/>
+                <a16:creationId xmlns:a16="http://schemas.microsoft.com/office/drawing/2014/main" id="{5834D678-C570-453D-89F7-445B5525088E}"/>
               </a:ext>
             </a:extLst>
           </p:cNvPr>
@@ -15650,7 +15772,7 @@
           <p:cNvPr id="37" name="">
             <a:extLst xmlns:a="http://schemas.openxmlformats.org/drawingml/2006/main">
               <a:ext uri="{FF2B5EF4-FFF2-40B4-BE49-F238E27FC236}">
-                <a16:creationId xmlns:a16="http://schemas.microsoft.com/office/drawing/2014/main" id="{A62903AC-ECAD-435A-A721-41149D899379}"/>
+                <a16:creationId xmlns:a16="http://schemas.microsoft.com/office/drawing/2014/main" id="{57438686-2FC9-47E2-830F-5F403C1E6E7C}"/>
               </a:ext>
             </a:extLst>
           </p:cNvPr>
@@ -15698,7 +15820,7 @@
     </p:spTree>
     <p:extLst>
       <p:ext uri="{BB962C8B-B14F-4D97-AF65-F5344CB8AC3E}">
-        <p14:creationId xmlns:p14="http://schemas.microsoft.com/office/powerpoint/2010/main" val="1124517256"/>
+        <p14:creationId xmlns:p14="http://schemas.microsoft.com/office/powerpoint/2010/main" val="996968560"/>
       </p:ext>
     </p:extLst>
   </p:cSld>
@@ -15729,7 +15851,7 @@
           <p:cNvPr id="1" name="">
             <a:extLst xmlns:a="http://schemas.openxmlformats.org/drawingml/2006/main">
               <a:ext uri="{FF2B5EF4-FFF2-40B4-BE49-F238E27FC236}">
-                <a16:creationId xmlns:a16="http://schemas.microsoft.com/office/drawing/2014/main" id="{2EB6F091-AB3D-4048-9806-C6FEF8AC06F3}"/>
+                <a16:creationId xmlns:a16="http://schemas.microsoft.com/office/drawing/2014/main" id="{8A17C798-6A1A-43CC-B42D-5DDDA9797291}"/>
               </a:ext>
             </a:extLst>
           </p:cNvPr>
@@ -15764,7 +15886,7 @@
           <p:nvPr/>
         </p:nvPicPr>
         <p:blipFill>
-          <a:blip xmlns:r="http://schemas.openxmlformats.org/officeDocument/2006/relationships" xmlns:a="http://schemas.openxmlformats.org/drawingml/2006/main" r:embed="Rbb62aeab3fbb4631"/>
+          <a:blip xmlns:r="http://schemas.openxmlformats.org/officeDocument/2006/relationships" xmlns:a="http://schemas.openxmlformats.org/drawingml/2006/main" r:embed="R4fdddceec39a4bc3"/>
           <a:stretch xmlns:a="http://schemas.openxmlformats.org/drawingml/2006/main"/>
         </p:blipFill>
         <p:spPr>
@@ -15782,7 +15904,7 @@
           <p:cNvPr id="3" name="">
             <a:extLst xmlns:a="http://schemas.openxmlformats.org/drawingml/2006/main">
               <a:ext uri="{FF2B5EF4-FFF2-40B4-BE49-F238E27FC236}">
-                <a16:creationId xmlns:a16="http://schemas.microsoft.com/office/drawing/2014/main" id="{53F836C0-52D2-40B0-BE7F-FFBB62FBE1B5}"/>
+                <a16:creationId xmlns:a16="http://schemas.microsoft.com/office/drawing/2014/main" id="{6815B1FE-7473-4326-B7CF-5DF39B80EC3C}"/>
               </a:ext>
             </a:extLst>
           </p:cNvPr>
@@ -15832,7 +15954,7 @@
           <p:cNvPr id="4" name="">
             <a:extLst xmlns:a="http://schemas.openxmlformats.org/drawingml/2006/main">
               <a:ext uri="{FF2B5EF4-FFF2-40B4-BE49-F238E27FC236}">
-                <a16:creationId xmlns:a16="http://schemas.microsoft.com/office/drawing/2014/main" id="{B2D109BA-4DA8-4E7D-B952-0E76A9E1B58D}"/>
+                <a16:creationId xmlns:a16="http://schemas.microsoft.com/office/drawing/2014/main" id="{1FA59360-9FBC-43BD-B93E-14D870550D9A}"/>
               </a:ext>
             </a:extLst>
           </p:cNvPr>
@@ -15865,7 +15987,7 @@
           <p:cNvPr id="5" name="">
             <a:extLst xmlns:a="http://schemas.openxmlformats.org/drawingml/2006/main">
               <a:ext uri="{FF2B5EF4-FFF2-40B4-BE49-F238E27FC236}">
-                <a16:creationId xmlns:a16="http://schemas.microsoft.com/office/drawing/2014/main" id="{00FC8EA6-0041-458A-B7FE-AB76B1926FE7}"/>
+                <a16:creationId xmlns:a16="http://schemas.microsoft.com/office/drawing/2014/main" id="{A1B76E0E-D42B-4D6C-803C-7112E084FBE3}"/>
               </a:ext>
             </a:extLst>
           </p:cNvPr>
@@ -15896,7 +16018,7 @@
           <p:cNvPr id="6" name="">
             <a:extLst xmlns:a="http://schemas.openxmlformats.org/drawingml/2006/main">
               <a:ext uri="{FF2B5EF4-FFF2-40B4-BE49-F238E27FC236}">
-                <a16:creationId xmlns:a16="http://schemas.microsoft.com/office/drawing/2014/main" id="{A8914929-3FF3-4A45-8D7B-706CEBBB9F5C}"/>
+                <a16:creationId xmlns:a16="http://schemas.microsoft.com/office/drawing/2014/main" id="{9C7B7875-0281-4C9C-B2A1-BA00F8CBFABB}"/>
               </a:ext>
             </a:extLst>
           </p:cNvPr>
@@ -15946,7 +16068,7 @@
           <p:cNvPr id="7" name="">
             <a:extLst xmlns:a="http://schemas.openxmlformats.org/drawingml/2006/main">
               <a:ext uri="{FF2B5EF4-FFF2-40B4-BE49-F238E27FC236}">
-                <a16:creationId xmlns:a16="http://schemas.microsoft.com/office/drawing/2014/main" id="{03FEF9B6-F647-40E2-A942-327A361252C6}"/>
+                <a16:creationId xmlns:a16="http://schemas.microsoft.com/office/drawing/2014/main" id="{EE08165F-B04C-4FAE-AD6E-99DF768A131A}"/>
               </a:ext>
             </a:extLst>
           </p:cNvPr>
@@ -15996,7 +16118,7 @@
           <p:cNvPr id="8" name="">
             <a:extLst xmlns:a="http://schemas.openxmlformats.org/drawingml/2006/main">
               <a:ext uri="{FF2B5EF4-FFF2-40B4-BE49-F238E27FC236}">
-                <a16:creationId xmlns:a16="http://schemas.microsoft.com/office/drawing/2014/main" id="{E71B3222-CF54-45DC-A7DF-911F75496592}"/>
+                <a16:creationId xmlns:a16="http://schemas.microsoft.com/office/drawing/2014/main" id="{291E1EBC-195D-47B3-A515-6F658703644B}"/>
               </a:ext>
             </a:extLst>
           </p:cNvPr>
@@ -16046,7 +16168,7 @@
           <p:cNvPr id="9" name="">
             <a:extLst xmlns:a="http://schemas.openxmlformats.org/drawingml/2006/main">
               <a:ext uri="{FF2B5EF4-FFF2-40B4-BE49-F238E27FC236}">
-                <a16:creationId xmlns:a16="http://schemas.microsoft.com/office/drawing/2014/main" id="{2196FFCB-00CB-41A4-99FA-5D3B584FF1A7}"/>
+                <a16:creationId xmlns:a16="http://schemas.microsoft.com/office/drawing/2014/main" id="{B248F031-DCFD-4BD3-926A-7395AB9917D3}"/>
               </a:ext>
             </a:extLst>
           </p:cNvPr>
@@ -16096,7 +16218,7 @@
           <p:cNvPr id="10" name="">
             <a:extLst xmlns:a="http://schemas.openxmlformats.org/drawingml/2006/main">
               <a:ext uri="{FF2B5EF4-FFF2-40B4-BE49-F238E27FC236}">
-                <a16:creationId xmlns:a16="http://schemas.microsoft.com/office/drawing/2014/main" id="{D447F531-94BC-4AB4-A1A4-098DC62E6002}"/>
+                <a16:creationId xmlns:a16="http://schemas.microsoft.com/office/drawing/2014/main" id="{3BC4A397-CED8-4D47-BB0E-A847F7292DA6}"/>
               </a:ext>
             </a:extLst>
           </p:cNvPr>
@@ -16146,7 +16268,7 @@
           <p:cNvPr id="11" name="">
             <a:extLst xmlns:a="http://schemas.openxmlformats.org/drawingml/2006/main">
               <a:ext uri="{FF2B5EF4-FFF2-40B4-BE49-F238E27FC236}">
-                <a16:creationId xmlns:a16="http://schemas.microsoft.com/office/drawing/2014/main" id="{07B61225-B54F-441F-8299-B14B861A62B5}"/>
+                <a16:creationId xmlns:a16="http://schemas.microsoft.com/office/drawing/2014/main" id="{9963F6FF-78A5-426C-93D0-6EE58E5F4B5B}"/>
               </a:ext>
             </a:extLst>
           </p:cNvPr>
@@ -16196,7 +16318,7 @@
           <p:cNvPr id="12" name="">
             <a:extLst xmlns:a="http://schemas.openxmlformats.org/drawingml/2006/main">
               <a:ext uri="{FF2B5EF4-FFF2-40B4-BE49-F238E27FC236}">
-                <a16:creationId xmlns:a16="http://schemas.microsoft.com/office/drawing/2014/main" id="{14EBBD85-098C-454B-9E09-24BAD907707F}"/>
+                <a16:creationId xmlns:a16="http://schemas.microsoft.com/office/drawing/2014/main" id="{04F8B94E-8AD7-4577-A2D7-DC02A0A95641}"/>
               </a:ext>
             </a:extLst>
           </p:cNvPr>
@@ -16227,7 +16349,7 @@
           <p:cNvPr id="13" name="">
             <a:extLst xmlns:a="http://schemas.openxmlformats.org/drawingml/2006/main">
               <a:ext uri="{FF2B5EF4-FFF2-40B4-BE49-F238E27FC236}">
-                <a16:creationId xmlns:a16="http://schemas.microsoft.com/office/drawing/2014/main" id="{FF07AD50-0B02-45A5-A85D-FB70C8F17795}"/>
+                <a16:creationId xmlns:a16="http://schemas.microsoft.com/office/drawing/2014/main" id="{1A00470E-B9C7-4125-AE65-CA275059B80A}"/>
               </a:ext>
             </a:extLst>
           </p:cNvPr>
@@ -16277,7 +16399,7 @@
           <p:cNvPr id="14" name="">
             <a:extLst xmlns:a="http://schemas.openxmlformats.org/drawingml/2006/main">
               <a:ext uri="{FF2B5EF4-FFF2-40B4-BE49-F238E27FC236}">
-                <a16:creationId xmlns:a16="http://schemas.microsoft.com/office/drawing/2014/main" id="{48D531E1-D9FA-40C7-970C-087439B3D150}"/>
+                <a16:creationId xmlns:a16="http://schemas.microsoft.com/office/drawing/2014/main" id="{60FD7D5F-9239-485E-B49C-ED8526886746}"/>
               </a:ext>
             </a:extLst>
           </p:cNvPr>
@@ -16327,7 +16449,7 @@
           <p:cNvPr id="15" name="">
             <a:extLst xmlns:a="http://schemas.openxmlformats.org/drawingml/2006/main">
               <a:ext uri="{FF2B5EF4-FFF2-40B4-BE49-F238E27FC236}">
-                <a16:creationId xmlns:a16="http://schemas.microsoft.com/office/drawing/2014/main" id="{CF631974-25DC-4D11-B4C6-8DE21C5F9B7F}"/>
+                <a16:creationId xmlns:a16="http://schemas.microsoft.com/office/drawing/2014/main" id="{36DF2797-0DEB-46B8-B8C6-99C8C2E174EF}"/>
               </a:ext>
             </a:extLst>
           </p:cNvPr>
@@ -16377,7 +16499,7 @@
           <p:cNvPr id="16" name="">
             <a:extLst xmlns:a="http://schemas.openxmlformats.org/drawingml/2006/main">
               <a:ext uri="{FF2B5EF4-FFF2-40B4-BE49-F238E27FC236}">
-                <a16:creationId xmlns:a16="http://schemas.microsoft.com/office/drawing/2014/main" id="{FE721252-9BE5-403D-95E2-3F4700557E6D}"/>
+                <a16:creationId xmlns:a16="http://schemas.microsoft.com/office/drawing/2014/main" id="{0ED387BC-432B-4BC1-B644-1D560117843A}"/>
               </a:ext>
             </a:extLst>
           </p:cNvPr>
@@ -16408,7 +16530,7 @@
           <p:cNvPr id="17" name="">
             <a:extLst xmlns:a="http://schemas.openxmlformats.org/drawingml/2006/main">
               <a:ext uri="{FF2B5EF4-FFF2-40B4-BE49-F238E27FC236}">
-                <a16:creationId xmlns:a16="http://schemas.microsoft.com/office/drawing/2014/main" id="{DBFBFD61-8B4B-4C94-8922-C81523B14CA1}"/>
+                <a16:creationId xmlns:a16="http://schemas.microsoft.com/office/drawing/2014/main" id="{62F2F4B7-0A4D-451C-858B-F4A883EE94B7}"/>
               </a:ext>
             </a:extLst>
           </p:cNvPr>
@@ -16458,7 +16580,7 @@
           <p:cNvPr id="18" name="">
             <a:extLst xmlns:a="http://schemas.openxmlformats.org/drawingml/2006/main">
               <a:ext uri="{FF2B5EF4-FFF2-40B4-BE49-F238E27FC236}">
-                <a16:creationId xmlns:a16="http://schemas.microsoft.com/office/drawing/2014/main" id="{8555A751-1EFC-4591-A795-EC80036A628F}"/>
+                <a16:creationId xmlns:a16="http://schemas.microsoft.com/office/drawing/2014/main" id="{80600BF5-C6F6-45E0-8C6C-20AC484CC3C9}"/>
               </a:ext>
             </a:extLst>
           </p:cNvPr>
@@ -16508,7 +16630,7 @@
           <p:cNvPr id="19" name="">
             <a:extLst xmlns:a="http://schemas.openxmlformats.org/drawingml/2006/main">
               <a:ext uri="{FF2B5EF4-FFF2-40B4-BE49-F238E27FC236}">
-                <a16:creationId xmlns:a16="http://schemas.microsoft.com/office/drawing/2014/main" id="{DE12B464-A8E5-4EDE-BBD8-6A694A9666B6}"/>
+                <a16:creationId xmlns:a16="http://schemas.microsoft.com/office/drawing/2014/main" id="{24B1FA81-6D6A-4947-A7C3-53582AD67F27}"/>
               </a:ext>
             </a:extLst>
           </p:cNvPr>
@@ -16558,7 +16680,7 @@
           <p:cNvPr id="20" name="">
             <a:extLst xmlns:a="http://schemas.openxmlformats.org/drawingml/2006/main">
               <a:ext uri="{FF2B5EF4-FFF2-40B4-BE49-F238E27FC236}">
-                <a16:creationId xmlns:a16="http://schemas.microsoft.com/office/drawing/2014/main" id="{3B43EF06-4031-4C34-8D6F-1CB98632CF2D}"/>
+                <a16:creationId xmlns:a16="http://schemas.microsoft.com/office/drawing/2014/main" id="{303AD103-A087-4BCC-B322-005C52644498}"/>
               </a:ext>
             </a:extLst>
           </p:cNvPr>
@@ -16593,7 +16715,7 @@
           <p:cNvPr id="21" name="">
             <a:extLst xmlns:a="http://schemas.openxmlformats.org/drawingml/2006/main">
               <a:ext uri="{FF2B5EF4-FFF2-40B4-BE49-F238E27FC236}">
-                <a16:creationId xmlns:a16="http://schemas.microsoft.com/office/drawing/2014/main" id="{C699F5A9-530B-4641-B60D-B2DE9C1F152B}"/>
+                <a16:creationId xmlns:a16="http://schemas.microsoft.com/office/drawing/2014/main" id="{AF362A46-E5E8-4F20-9249-63C9C3ABD68F}"/>
               </a:ext>
             </a:extLst>
           </p:cNvPr>
@@ -16643,7 +16765,7 @@
           <p:cNvPr id="22" name="">
             <a:extLst xmlns:a="http://schemas.openxmlformats.org/drawingml/2006/main">
               <a:ext uri="{FF2B5EF4-FFF2-40B4-BE49-F238E27FC236}">
-                <a16:creationId xmlns:a16="http://schemas.microsoft.com/office/drawing/2014/main" id="{5CB6A872-D8E6-4400-8A4D-FB429E7007AC}"/>
+                <a16:creationId xmlns:a16="http://schemas.microsoft.com/office/drawing/2014/main" id="{6B42C116-202E-4D98-934A-592E2C2C5A98}"/>
               </a:ext>
             </a:extLst>
           </p:cNvPr>
@@ -16693,7 +16815,7 @@
           <p:cNvPr id="23" name="">
             <a:extLst xmlns:a="http://schemas.openxmlformats.org/drawingml/2006/main">
               <a:ext uri="{FF2B5EF4-FFF2-40B4-BE49-F238E27FC236}">
-                <a16:creationId xmlns:a16="http://schemas.microsoft.com/office/drawing/2014/main" id="{9F51705D-FD86-44C8-821E-1C2C576A8390}"/>
+                <a16:creationId xmlns:a16="http://schemas.microsoft.com/office/drawing/2014/main" id="{579B8B9C-4F0F-4AE9-9C66-9ABE81103D17}"/>
               </a:ext>
             </a:extLst>
           </p:cNvPr>
@@ -16728,7 +16850,7 @@
           <p:cNvPr id="24" name="">
             <a:extLst xmlns:a="http://schemas.openxmlformats.org/drawingml/2006/main">
               <a:ext uri="{FF2B5EF4-FFF2-40B4-BE49-F238E27FC236}">
-                <a16:creationId xmlns:a16="http://schemas.microsoft.com/office/drawing/2014/main" id="{F4A44838-8EB8-4227-8733-5CCD10D6A2A5}"/>
+                <a16:creationId xmlns:a16="http://schemas.microsoft.com/office/drawing/2014/main" id="{C6575E81-7EF3-4934-8A0B-44A8A49527B0}"/>
               </a:ext>
             </a:extLst>
           </p:cNvPr>
@@ -16778,7 +16900,7 @@
           <p:cNvPr id="25" name="">
             <a:extLst xmlns:a="http://schemas.openxmlformats.org/drawingml/2006/main">
               <a:ext uri="{FF2B5EF4-FFF2-40B4-BE49-F238E27FC236}">
-                <a16:creationId xmlns:a16="http://schemas.microsoft.com/office/drawing/2014/main" id="{8A670CAC-BCB7-47B8-9898-BDA82268C59E}"/>
+                <a16:creationId xmlns:a16="http://schemas.microsoft.com/office/drawing/2014/main" id="{832B6AA9-106A-4F93-8B42-2AADC8271B74}"/>
               </a:ext>
             </a:extLst>
           </p:cNvPr>
@@ -16828,7 +16950,7 @@
           <p:cNvPr id="26" name="">
             <a:extLst xmlns:a="http://schemas.openxmlformats.org/drawingml/2006/main">
               <a:ext uri="{FF2B5EF4-FFF2-40B4-BE49-F238E27FC236}">
-                <a16:creationId xmlns:a16="http://schemas.microsoft.com/office/drawing/2014/main" id="{E28E4A0F-DE58-46AF-A78E-29543306978B}"/>
+                <a16:creationId xmlns:a16="http://schemas.microsoft.com/office/drawing/2014/main" id="{FA8DD0A9-419E-4521-8636-3C4C76194255}"/>
               </a:ext>
             </a:extLst>
           </p:cNvPr>
@@ -16876,7 +16998,7 @@
     </p:spTree>
     <p:extLst>
       <p:ext uri="{BB962C8B-B14F-4D97-AF65-F5344CB8AC3E}">
-        <p14:creationId xmlns:p14="http://schemas.microsoft.com/office/powerpoint/2010/main" val="443081055"/>
+        <p14:creationId xmlns:p14="http://schemas.microsoft.com/office/powerpoint/2010/main" val="396931761"/>
       </p:ext>
     </p:extLst>
   </p:cSld>
@@ -16907,7 +17029,7 @@
           <p:cNvPr id="1" name="">
             <a:extLst xmlns:a="http://schemas.openxmlformats.org/drawingml/2006/main">
               <a:ext uri="{FF2B5EF4-FFF2-40B4-BE49-F238E27FC236}">
-                <a16:creationId xmlns:a16="http://schemas.microsoft.com/office/drawing/2014/main" id="{FDC78711-8571-4846-A0B1-DB3E29E77984}"/>
+                <a16:creationId xmlns:a16="http://schemas.microsoft.com/office/drawing/2014/main" id="{299DEC48-D6EE-4AC5-9ECC-FDEB1EFE14DD}"/>
               </a:ext>
             </a:extLst>
           </p:cNvPr>
@@ -16942,7 +17064,7 @@
           <p:nvPr/>
         </p:nvPicPr>
         <p:blipFill>
-          <a:blip xmlns:r="http://schemas.openxmlformats.org/officeDocument/2006/relationships" xmlns:a="http://schemas.openxmlformats.org/drawingml/2006/main" r:embed="R0906560de1f34806"/>
+          <a:blip xmlns:r="http://schemas.openxmlformats.org/officeDocument/2006/relationships" xmlns:a="http://schemas.openxmlformats.org/drawingml/2006/main" r:embed="Ree190270a3c54207"/>
           <a:stretch xmlns:a="http://schemas.openxmlformats.org/drawingml/2006/main"/>
         </p:blipFill>
         <p:spPr>
@@ -16960,7 +17082,7 @@
           <p:cNvPr id="3" name="">
             <a:extLst xmlns:a="http://schemas.openxmlformats.org/drawingml/2006/main">
               <a:ext uri="{FF2B5EF4-FFF2-40B4-BE49-F238E27FC236}">
-                <a16:creationId xmlns:a16="http://schemas.microsoft.com/office/drawing/2014/main" id="{94595CBF-FD0E-4C32-82F6-935518D265A8}"/>
+                <a16:creationId xmlns:a16="http://schemas.microsoft.com/office/drawing/2014/main" id="{FA4991B6-0F5A-45E6-A600-FD1C42ADC069}"/>
               </a:ext>
             </a:extLst>
           </p:cNvPr>
@@ -17010,7 +17132,7 @@
           <p:cNvPr id="4" name="">
             <a:extLst xmlns:a="http://schemas.openxmlformats.org/drawingml/2006/main">
               <a:ext uri="{FF2B5EF4-FFF2-40B4-BE49-F238E27FC236}">
-                <a16:creationId xmlns:a16="http://schemas.microsoft.com/office/drawing/2014/main" id="{E336FA0B-EC37-4278-BFE9-842A15DF1E20}"/>
+                <a16:creationId xmlns:a16="http://schemas.microsoft.com/office/drawing/2014/main" id="{5F12ED18-A009-4918-A874-FD232E54DF71}"/>
               </a:ext>
             </a:extLst>
           </p:cNvPr>
@@ -17043,7 +17165,7 @@
           <p:cNvPr id="5" name="">
             <a:extLst xmlns:a="http://schemas.openxmlformats.org/drawingml/2006/main">
               <a:ext uri="{FF2B5EF4-FFF2-40B4-BE49-F238E27FC236}">
-                <a16:creationId xmlns:a16="http://schemas.microsoft.com/office/drawing/2014/main" id="{AFAF1488-CC7B-4C81-989E-E735242472D6}"/>
+                <a16:creationId xmlns:a16="http://schemas.microsoft.com/office/drawing/2014/main" id="{9FB5A36A-7CBE-4297-B86A-73CC24B76C3E}"/>
               </a:ext>
             </a:extLst>
           </p:cNvPr>
@@ -17074,7 +17196,7 @@
           <p:cNvPr id="6" name="">
             <a:extLst xmlns:a="http://schemas.openxmlformats.org/drawingml/2006/main">
               <a:ext uri="{FF2B5EF4-FFF2-40B4-BE49-F238E27FC236}">
-                <a16:creationId xmlns:a16="http://schemas.microsoft.com/office/drawing/2014/main" id="{8487FCAE-BB28-4100-B818-F4E00094CF3A}"/>
+                <a16:creationId xmlns:a16="http://schemas.microsoft.com/office/drawing/2014/main" id="{A370485E-FE86-4A28-9E74-D1BC37E4CC85}"/>
               </a:ext>
             </a:extLst>
           </p:cNvPr>
@@ -17124,7 +17246,7 @@
           <p:cNvPr id="7" name="">
             <a:extLst xmlns:a="http://schemas.openxmlformats.org/drawingml/2006/main">
               <a:ext uri="{FF2B5EF4-FFF2-40B4-BE49-F238E27FC236}">
-                <a16:creationId xmlns:a16="http://schemas.microsoft.com/office/drawing/2014/main" id="{70E99881-30FE-4DEA-8A9E-C69FA0BC2C81}"/>
+                <a16:creationId xmlns:a16="http://schemas.microsoft.com/office/drawing/2014/main" id="{11A5A785-603D-4FCC-B273-371001432A8C}"/>
               </a:ext>
             </a:extLst>
           </p:cNvPr>
@@ -17174,7 +17296,7 @@
           <p:cNvPr id="8" name="">
             <a:extLst xmlns:a="http://schemas.openxmlformats.org/drawingml/2006/main">
               <a:ext uri="{FF2B5EF4-FFF2-40B4-BE49-F238E27FC236}">
-                <a16:creationId xmlns:a16="http://schemas.microsoft.com/office/drawing/2014/main" id="{E3336D72-6EC4-4A2C-B09A-132A8605103A}"/>
+                <a16:creationId xmlns:a16="http://schemas.microsoft.com/office/drawing/2014/main" id="{82BFDE67-8722-450E-B18B-A9DF397566A2}"/>
               </a:ext>
             </a:extLst>
           </p:cNvPr>
@@ -17209,7 +17331,7 @@
           <p:cNvPr id="9" name="">
             <a:extLst xmlns:a="http://schemas.openxmlformats.org/drawingml/2006/main">
               <a:ext uri="{FF2B5EF4-FFF2-40B4-BE49-F238E27FC236}">
-                <a16:creationId xmlns:a16="http://schemas.microsoft.com/office/drawing/2014/main" id="{12E40425-4157-401A-A8A2-17DDD3669968}"/>
+                <a16:creationId xmlns:a16="http://schemas.microsoft.com/office/drawing/2014/main" id="{64A2B7CC-EC07-4A19-9646-3CCF51549C16}"/>
               </a:ext>
             </a:extLst>
           </p:cNvPr>
@@ -17242,7 +17364,7 @@
           <p:cNvPr id="10" name="">
             <a:extLst xmlns:a="http://schemas.openxmlformats.org/drawingml/2006/main">
               <a:ext uri="{FF2B5EF4-FFF2-40B4-BE49-F238E27FC236}">
-                <a16:creationId xmlns:a16="http://schemas.microsoft.com/office/drawing/2014/main" id="{17F53CD7-890F-431F-8A02-83F1593002FC}"/>
+                <a16:creationId xmlns:a16="http://schemas.microsoft.com/office/drawing/2014/main" id="{B946DC38-0CC0-48DF-A580-4EEA33892692}"/>
               </a:ext>
             </a:extLst>
           </p:cNvPr>
@@ -17292,7 +17414,7 @@
           <p:cNvPr id="11" name="">
             <a:extLst xmlns:a="http://schemas.openxmlformats.org/drawingml/2006/main">
               <a:ext uri="{FF2B5EF4-FFF2-40B4-BE49-F238E27FC236}">
-                <a16:creationId xmlns:a16="http://schemas.microsoft.com/office/drawing/2014/main" id="{CEFF4699-9AB6-492F-AAD0-A77174C47FB7}"/>
+                <a16:creationId xmlns:a16="http://schemas.microsoft.com/office/drawing/2014/main" id="{F5BCAD3C-4D41-46BB-B8DA-48FF68DE6103}"/>
               </a:ext>
             </a:extLst>
           </p:cNvPr>
@@ -17342,7 +17464,7 @@
           <p:cNvPr id="12" name="">
             <a:extLst xmlns:a="http://schemas.openxmlformats.org/drawingml/2006/main">
               <a:ext uri="{FF2B5EF4-FFF2-40B4-BE49-F238E27FC236}">
-                <a16:creationId xmlns:a16="http://schemas.microsoft.com/office/drawing/2014/main" id="{FEA01D2E-A60D-4FF3-B231-2EF57BF8D757}"/>
+                <a16:creationId xmlns:a16="http://schemas.microsoft.com/office/drawing/2014/main" id="{6DFB8754-95E4-4B18-806D-BC7DFBF9FEAB}"/>
               </a:ext>
             </a:extLst>
           </p:cNvPr>
@@ -17392,7 +17514,7 @@
           <p:cNvPr id="13" name="">
             <a:extLst xmlns:a="http://schemas.openxmlformats.org/drawingml/2006/main">
               <a:ext uri="{FF2B5EF4-FFF2-40B4-BE49-F238E27FC236}">
-                <a16:creationId xmlns:a16="http://schemas.microsoft.com/office/drawing/2014/main" id="{1CD0989B-692B-4C08-BF83-88288B101308}"/>
+                <a16:creationId xmlns:a16="http://schemas.microsoft.com/office/drawing/2014/main" id="{77272FA5-6742-4C1E-9EDE-2A130511D67D}"/>
               </a:ext>
             </a:extLst>
           </p:cNvPr>
@@ -17442,7 +17564,7 @@
           <p:cNvPr id="14" name="">
             <a:extLst xmlns:a="http://schemas.openxmlformats.org/drawingml/2006/main">
               <a:ext uri="{FF2B5EF4-FFF2-40B4-BE49-F238E27FC236}">
-                <a16:creationId xmlns:a16="http://schemas.microsoft.com/office/drawing/2014/main" id="{6C12A214-8493-40B8-847E-91088743BF85}"/>
+                <a16:creationId xmlns:a16="http://schemas.microsoft.com/office/drawing/2014/main" id="{82055EB2-D21E-4DA2-9040-0F516A104BA9}"/>
               </a:ext>
             </a:extLst>
           </p:cNvPr>
@@ -17492,7 +17614,7 @@
           <p:cNvPr id="15" name="">
             <a:extLst xmlns:a="http://schemas.openxmlformats.org/drawingml/2006/main">
               <a:ext uri="{FF2B5EF4-FFF2-40B4-BE49-F238E27FC236}">
-                <a16:creationId xmlns:a16="http://schemas.microsoft.com/office/drawing/2014/main" id="{BD2021BE-534A-423B-AE47-8449DF442CC6}"/>
+                <a16:creationId xmlns:a16="http://schemas.microsoft.com/office/drawing/2014/main" id="{36AABE41-876C-42D2-9F05-7AE0912E2DF3}"/>
               </a:ext>
             </a:extLst>
           </p:cNvPr>
@@ -17542,7 +17664,7 @@
           <p:cNvPr id="16" name="">
             <a:extLst xmlns:a="http://schemas.openxmlformats.org/drawingml/2006/main">
               <a:ext uri="{FF2B5EF4-FFF2-40B4-BE49-F238E27FC236}">
-                <a16:creationId xmlns:a16="http://schemas.microsoft.com/office/drawing/2014/main" id="{0CA3435F-A511-49EB-892E-75E04296141A}"/>
+                <a16:creationId xmlns:a16="http://schemas.microsoft.com/office/drawing/2014/main" id="{2480F43D-79C9-4497-8EC0-78A3304571B3}"/>
               </a:ext>
             </a:extLst>
           </p:cNvPr>
@@ -17592,7 +17714,7 @@
           <p:cNvPr id="17" name="">
             <a:extLst xmlns:a="http://schemas.openxmlformats.org/drawingml/2006/main">
               <a:ext uri="{FF2B5EF4-FFF2-40B4-BE49-F238E27FC236}">
-                <a16:creationId xmlns:a16="http://schemas.microsoft.com/office/drawing/2014/main" id="{EC369C08-8FE8-4A2B-9457-2313FFF3FCB6}"/>
+                <a16:creationId xmlns:a16="http://schemas.microsoft.com/office/drawing/2014/main" id="{B8EEA417-8D61-4BE7-B215-F2DCD9D60AFD}"/>
               </a:ext>
             </a:extLst>
           </p:cNvPr>
@@ -17623,7 +17745,7 @@
           <p:cNvPr id="18" name="">
             <a:extLst xmlns:a="http://schemas.openxmlformats.org/drawingml/2006/main">
               <a:ext uri="{FF2B5EF4-FFF2-40B4-BE49-F238E27FC236}">
-                <a16:creationId xmlns:a16="http://schemas.microsoft.com/office/drawing/2014/main" id="{E9E5DF71-E8C5-43D8-A1C9-F6B75F7762A6}"/>
+                <a16:creationId xmlns:a16="http://schemas.microsoft.com/office/drawing/2014/main" id="{591E95F2-3DF1-43E9-8630-E87286A0B50F}"/>
               </a:ext>
             </a:extLst>
           </p:cNvPr>
@@ -17673,7 +17795,7 @@
           <p:cNvPr id="19" name="">
             <a:extLst xmlns:a="http://schemas.openxmlformats.org/drawingml/2006/main">
               <a:ext uri="{FF2B5EF4-FFF2-40B4-BE49-F238E27FC236}">
-                <a16:creationId xmlns:a16="http://schemas.microsoft.com/office/drawing/2014/main" id="{4229BD4A-9FAE-4810-86EA-AD86B835A1F6}"/>
+                <a16:creationId xmlns:a16="http://schemas.microsoft.com/office/drawing/2014/main" id="{7EAEFE46-1735-437B-889E-D0274DA8FBDA}"/>
               </a:ext>
             </a:extLst>
           </p:cNvPr>
@@ -17723,7 +17845,7 @@
           <p:cNvPr id="20" name="">
             <a:extLst xmlns:a="http://schemas.openxmlformats.org/drawingml/2006/main">
               <a:ext uri="{FF2B5EF4-FFF2-40B4-BE49-F238E27FC236}">
-                <a16:creationId xmlns:a16="http://schemas.microsoft.com/office/drawing/2014/main" id="{A4A4B2D7-AF26-4500-B31D-F080DA68D5BD}"/>
+                <a16:creationId xmlns:a16="http://schemas.microsoft.com/office/drawing/2014/main" id="{C2CA9037-2C89-4912-B9BC-A67035A79352}"/>
               </a:ext>
             </a:extLst>
           </p:cNvPr>
@@ -17773,7 +17895,7 @@
           <p:cNvPr id="21" name="">
             <a:extLst xmlns:a="http://schemas.openxmlformats.org/drawingml/2006/main">
               <a:ext uri="{FF2B5EF4-FFF2-40B4-BE49-F238E27FC236}">
-                <a16:creationId xmlns:a16="http://schemas.microsoft.com/office/drawing/2014/main" id="{A862CD3B-82BB-47EA-B9E7-0ECA13F43233}"/>
+                <a16:creationId xmlns:a16="http://schemas.microsoft.com/office/drawing/2014/main" id="{911A7BC7-6000-4E0C-9D98-FD15DE44BDF7}"/>
               </a:ext>
             </a:extLst>
           </p:cNvPr>
@@ -17823,7 +17945,7 @@
           <p:cNvPr id="22" name="">
             <a:extLst xmlns:a="http://schemas.openxmlformats.org/drawingml/2006/main">
               <a:ext uri="{FF2B5EF4-FFF2-40B4-BE49-F238E27FC236}">
-                <a16:creationId xmlns:a16="http://schemas.microsoft.com/office/drawing/2014/main" id="{79628850-3AA0-403A-8B27-B25C1FE820B9}"/>
+                <a16:creationId xmlns:a16="http://schemas.microsoft.com/office/drawing/2014/main" id="{F4936B83-833E-4C54-9279-C4D455276AAB}"/>
               </a:ext>
             </a:extLst>
           </p:cNvPr>
@@ -17873,7 +17995,7 @@
           <p:cNvPr id="23" name="">
             <a:extLst xmlns:a="http://schemas.openxmlformats.org/drawingml/2006/main">
               <a:ext uri="{FF2B5EF4-FFF2-40B4-BE49-F238E27FC236}">
-                <a16:creationId xmlns:a16="http://schemas.microsoft.com/office/drawing/2014/main" id="{A047F358-C136-4C40-8085-CF7002974102}"/>
+                <a16:creationId xmlns:a16="http://schemas.microsoft.com/office/drawing/2014/main" id="{E16F17B9-2972-450F-81CA-CACA1EAF5DF2}"/>
               </a:ext>
             </a:extLst>
           </p:cNvPr>
@@ -17923,7 +18045,7 @@
           <p:cNvPr id="24" name="">
             <a:extLst xmlns:a="http://schemas.openxmlformats.org/drawingml/2006/main">
               <a:ext uri="{FF2B5EF4-FFF2-40B4-BE49-F238E27FC236}">
-                <a16:creationId xmlns:a16="http://schemas.microsoft.com/office/drawing/2014/main" id="{D60B08C4-49CF-4E11-8DDA-FFD7AC82152E}"/>
+                <a16:creationId xmlns:a16="http://schemas.microsoft.com/office/drawing/2014/main" id="{73C01E59-5F20-4BCE-8E43-E2B9A444FF2B}"/>
               </a:ext>
             </a:extLst>
           </p:cNvPr>
@@ -17958,7 +18080,7 @@
           <p:cNvPr id="25" name="">
             <a:extLst xmlns:a="http://schemas.openxmlformats.org/drawingml/2006/main">
               <a:ext uri="{FF2B5EF4-FFF2-40B4-BE49-F238E27FC236}">
-                <a16:creationId xmlns:a16="http://schemas.microsoft.com/office/drawing/2014/main" id="{F9C11BC9-593C-4F48-9584-2F99243FB7D7}"/>
+                <a16:creationId xmlns:a16="http://schemas.microsoft.com/office/drawing/2014/main" id="{59805983-3F93-4992-8CA4-161D88CCD691}"/>
               </a:ext>
             </a:extLst>
           </p:cNvPr>
@@ -17991,7 +18113,7 @@
           <p:cNvPr id="26" name="">
             <a:extLst xmlns:a="http://schemas.openxmlformats.org/drawingml/2006/main">
               <a:ext uri="{FF2B5EF4-FFF2-40B4-BE49-F238E27FC236}">
-                <a16:creationId xmlns:a16="http://schemas.microsoft.com/office/drawing/2014/main" id="{1EDB37C6-0C2C-4FDB-B34D-B307787718BF}"/>
+                <a16:creationId xmlns:a16="http://schemas.microsoft.com/office/drawing/2014/main" id="{59396C19-CA87-4B3B-9A0F-9099B937D195}"/>
               </a:ext>
             </a:extLst>
           </p:cNvPr>
@@ -18041,7 +18163,7 @@
           <p:cNvPr id="27" name="">
             <a:extLst xmlns:a="http://schemas.openxmlformats.org/drawingml/2006/main">
               <a:ext uri="{FF2B5EF4-FFF2-40B4-BE49-F238E27FC236}">
-                <a16:creationId xmlns:a16="http://schemas.microsoft.com/office/drawing/2014/main" id="{5C7B0848-4781-42E6-969A-F88848D02126}"/>
+                <a16:creationId xmlns:a16="http://schemas.microsoft.com/office/drawing/2014/main" id="{88EE367D-6164-4258-9751-39BCE33BE100}"/>
               </a:ext>
             </a:extLst>
           </p:cNvPr>
@@ -18091,7 +18213,7 @@
           <p:cNvPr id="28" name="">
             <a:extLst xmlns:a="http://schemas.openxmlformats.org/drawingml/2006/main">
               <a:ext uri="{FF2B5EF4-FFF2-40B4-BE49-F238E27FC236}">
-                <a16:creationId xmlns:a16="http://schemas.microsoft.com/office/drawing/2014/main" id="{E9BA296B-F326-4D62-BC3E-528FD99524CD}"/>
+                <a16:creationId xmlns:a16="http://schemas.microsoft.com/office/drawing/2014/main" id="{A56D8B4D-3F63-47A1-8DC3-6047262959B2}"/>
               </a:ext>
             </a:extLst>
           </p:cNvPr>
@@ -18141,7 +18263,7 @@
           <p:cNvPr id="29" name="">
             <a:extLst xmlns:a="http://schemas.openxmlformats.org/drawingml/2006/main">
               <a:ext uri="{FF2B5EF4-FFF2-40B4-BE49-F238E27FC236}">
-                <a16:creationId xmlns:a16="http://schemas.microsoft.com/office/drawing/2014/main" id="{1667AD41-0E4C-4D0D-9255-8FBCD79CE91F}"/>
+                <a16:creationId xmlns:a16="http://schemas.microsoft.com/office/drawing/2014/main" id="{F2E0DF85-CCA3-45FE-8DF9-B5E095E5E42F}"/>
               </a:ext>
             </a:extLst>
           </p:cNvPr>
@@ -18191,7 +18313,7 @@
           <p:cNvPr id="30" name="">
             <a:extLst xmlns:a="http://schemas.openxmlformats.org/drawingml/2006/main">
               <a:ext uri="{FF2B5EF4-FFF2-40B4-BE49-F238E27FC236}">
-                <a16:creationId xmlns:a16="http://schemas.microsoft.com/office/drawing/2014/main" id="{CD43FE20-A5F9-4E82-B83E-707D51B5A085}"/>
+                <a16:creationId xmlns:a16="http://schemas.microsoft.com/office/drawing/2014/main" id="{503C480C-B983-47E3-BBC3-40C2DB1947AC}"/>
               </a:ext>
             </a:extLst>
           </p:cNvPr>
@@ -18241,7 +18363,7 @@
           <p:cNvPr id="31" name="">
             <a:extLst xmlns:a="http://schemas.openxmlformats.org/drawingml/2006/main">
               <a:ext uri="{FF2B5EF4-FFF2-40B4-BE49-F238E27FC236}">
-                <a16:creationId xmlns:a16="http://schemas.microsoft.com/office/drawing/2014/main" id="{64F592A1-42F7-451B-AB5B-DAE8353AE502}"/>
+                <a16:creationId xmlns:a16="http://schemas.microsoft.com/office/drawing/2014/main" id="{51BFA739-36D5-4D74-A2F1-6C3225F627DC}"/>
               </a:ext>
             </a:extLst>
           </p:cNvPr>
@@ -18291,7 +18413,7 @@
           <p:cNvPr id="32" name="">
             <a:extLst xmlns:a="http://schemas.openxmlformats.org/drawingml/2006/main">
               <a:ext uri="{FF2B5EF4-FFF2-40B4-BE49-F238E27FC236}">
-                <a16:creationId xmlns:a16="http://schemas.microsoft.com/office/drawing/2014/main" id="{BDFCF298-6F25-44DB-879B-406147987D4E}"/>
+                <a16:creationId xmlns:a16="http://schemas.microsoft.com/office/drawing/2014/main" id="{5FC6AE76-FDC5-49B1-82DB-2AD51C27743A}"/>
               </a:ext>
             </a:extLst>
           </p:cNvPr>
@@ -18341,7 +18463,7 @@
           <p:cNvPr id="33" name="">
             <a:extLst xmlns:a="http://schemas.openxmlformats.org/drawingml/2006/main">
               <a:ext uri="{FF2B5EF4-FFF2-40B4-BE49-F238E27FC236}">
-                <a16:creationId xmlns:a16="http://schemas.microsoft.com/office/drawing/2014/main" id="{7326C44F-B053-4923-AB85-C9123DAE8270}"/>
+                <a16:creationId xmlns:a16="http://schemas.microsoft.com/office/drawing/2014/main" id="{5DB7232F-9CE7-47BF-A85A-5E0709E0EEEB}"/>
               </a:ext>
             </a:extLst>
           </p:cNvPr>
@@ -18372,7 +18494,7 @@
           <p:cNvPr id="34" name="">
             <a:extLst xmlns:a="http://schemas.openxmlformats.org/drawingml/2006/main">
               <a:ext uri="{FF2B5EF4-FFF2-40B4-BE49-F238E27FC236}">
-                <a16:creationId xmlns:a16="http://schemas.microsoft.com/office/drawing/2014/main" id="{20C6095B-3C20-4A58-873A-92774F5102F4}"/>
+                <a16:creationId xmlns:a16="http://schemas.microsoft.com/office/drawing/2014/main" id="{1643B384-EE66-4ECE-8786-D8A503ECCD8F}"/>
               </a:ext>
             </a:extLst>
           </p:cNvPr>
@@ -18422,7 +18544,7 @@
           <p:cNvPr id="35" name="">
             <a:extLst xmlns:a="http://schemas.openxmlformats.org/drawingml/2006/main">
               <a:ext uri="{FF2B5EF4-FFF2-40B4-BE49-F238E27FC236}">
-                <a16:creationId xmlns:a16="http://schemas.microsoft.com/office/drawing/2014/main" id="{DBA7DF0B-CECA-49F3-B630-8CE82EA17ABD}"/>
+                <a16:creationId xmlns:a16="http://schemas.microsoft.com/office/drawing/2014/main" id="{C393399F-42DA-4526-B3E1-B188A9B78350}"/>
               </a:ext>
             </a:extLst>
           </p:cNvPr>
@@ -18472,7 +18594,7 @@
           <p:cNvPr id="36" name="">
             <a:extLst xmlns:a="http://schemas.openxmlformats.org/drawingml/2006/main">
               <a:ext uri="{FF2B5EF4-FFF2-40B4-BE49-F238E27FC236}">
-                <a16:creationId xmlns:a16="http://schemas.microsoft.com/office/drawing/2014/main" id="{039AD8C4-A281-423F-9D56-7E9C91C34482}"/>
+                <a16:creationId xmlns:a16="http://schemas.microsoft.com/office/drawing/2014/main" id="{DF8BDE0F-83FC-4761-9EA4-CF8E4F96448B}"/>
               </a:ext>
             </a:extLst>
           </p:cNvPr>
@@ -18522,7 +18644,7 @@
           <p:cNvPr id="37" name="">
             <a:extLst xmlns:a="http://schemas.openxmlformats.org/drawingml/2006/main">
               <a:ext uri="{FF2B5EF4-FFF2-40B4-BE49-F238E27FC236}">
-                <a16:creationId xmlns:a16="http://schemas.microsoft.com/office/drawing/2014/main" id="{CA4B4086-6C6C-4E64-A05C-9175DE82EFB9}"/>
+                <a16:creationId xmlns:a16="http://schemas.microsoft.com/office/drawing/2014/main" id="{763C71A8-B71A-4829-B953-89DCC77A5043}"/>
               </a:ext>
             </a:extLst>
           </p:cNvPr>
@@ -18572,7 +18694,7 @@
           <p:cNvPr id="38" name="">
             <a:extLst xmlns:a="http://schemas.openxmlformats.org/drawingml/2006/main">
               <a:ext uri="{FF2B5EF4-FFF2-40B4-BE49-F238E27FC236}">
-                <a16:creationId xmlns:a16="http://schemas.microsoft.com/office/drawing/2014/main" id="{BC31DE63-2FD9-4970-8EFB-948B21E1F4E3}"/>
+                <a16:creationId xmlns:a16="http://schemas.microsoft.com/office/drawing/2014/main" id="{3061BCC7-0F8E-4C2D-AAFE-54E44666DB4E}"/>
               </a:ext>
             </a:extLst>
           </p:cNvPr>
@@ -18622,7 +18744,7 @@
           <p:cNvPr id="39" name="">
             <a:extLst xmlns:a="http://schemas.openxmlformats.org/drawingml/2006/main">
               <a:ext uri="{FF2B5EF4-FFF2-40B4-BE49-F238E27FC236}">
-                <a16:creationId xmlns:a16="http://schemas.microsoft.com/office/drawing/2014/main" id="{BDD1DCBC-9BEA-4298-AFD1-02FEFB65A4AD}"/>
+                <a16:creationId xmlns:a16="http://schemas.microsoft.com/office/drawing/2014/main" id="{13F8D418-7ED9-433A-A405-53120B1CDF4A}"/>
               </a:ext>
             </a:extLst>
           </p:cNvPr>
@@ -18670,7 +18792,7 @@
     </p:spTree>
     <p:extLst>
       <p:ext uri="{BB962C8B-B14F-4D97-AF65-F5344CB8AC3E}">
-        <p14:creationId xmlns:p14="http://schemas.microsoft.com/office/powerpoint/2010/main" val="1820813674"/>
+        <p14:creationId xmlns:p14="http://schemas.microsoft.com/office/powerpoint/2010/main" val="786600195"/>
       </p:ext>
     </p:extLst>
   </p:cSld>
@@ -18701,7 +18823,7 @@
           <p:cNvPr id="1" name="">
             <a:extLst xmlns:a="http://schemas.openxmlformats.org/drawingml/2006/main">
               <a:ext uri="{FF2B5EF4-FFF2-40B4-BE49-F238E27FC236}">
-                <a16:creationId xmlns:a16="http://schemas.microsoft.com/office/drawing/2014/main" id="{EB43DF02-8041-418A-A374-25C4DF4E221D}"/>
+                <a16:creationId xmlns:a16="http://schemas.microsoft.com/office/drawing/2014/main" id="{0C807019-7557-421B-AE91-A1C019E923CC}"/>
               </a:ext>
             </a:extLst>
           </p:cNvPr>
@@ -18736,7 +18858,7 @@
           <p:nvPr/>
         </p:nvPicPr>
         <p:blipFill>
-          <a:blip xmlns:r="http://schemas.openxmlformats.org/officeDocument/2006/relationships" xmlns:a="http://schemas.openxmlformats.org/drawingml/2006/main" r:embed="R38a5135ebabd4f64"/>
+          <a:blip xmlns:r="http://schemas.openxmlformats.org/officeDocument/2006/relationships" xmlns:a="http://schemas.openxmlformats.org/drawingml/2006/main" r:embed="R27c0c3cc5e1f4e62"/>
           <a:stretch xmlns:a="http://schemas.openxmlformats.org/drawingml/2006/main"/>
         </p:blipFill>
         <p:spPr>
@@ -18754,7 +18876,7 @@
           <p:cNvPr id="3" name="">
             <a:extLst xmlns:a="http://schemas.openxmlformats.org/drawingml/2006/main">
               <a:ext uri="{FF2B5EF4-FFF2-40B4-BE49-F238E27FC236}">
-                <a16:creationId xmlns:a16="http://schemas.microsoft.com/office/drawing/2014/main" id="{73EBE2A6-AA60-4437-A173-8B1EF3F19B43}"/>
+                <a16:creationId xmlns:a16="http://schemas.microsoft.com/office/drawing/2014/main" id="{FF741A29-FCBC-488E-8CE4-5E2E1670EC86}"/>
               </a:ext>
             </a:extLst>
           </p:cNvPr>
@@ -18804,7 +18926,7 @@
           <p:cNvPr id="4" name="">
             <a:extLst xmlns:a="http://schemas.openxmlformats.org/drawingml/2006/main">
               <a:ext uri="{FF2B5EF4-FFF2-40B4-BE49-F238E27FC236}">
-                <a16:creationId xmlns:a16="http://schemas.microsoft.com/office/drawing/2014/main" id="{01FB0AC0-A22A-43D9-A243-48D43BAE4F87}"/>
+                <a16:creationId xmlns:a16="http://schemas.microsoft.com/office/drawing/2014/main" id="{C77C5DBC-F19E-4255-AF45-EC63A33AEA04}"/>
               </a:ext>
             </a:extLst>
           </p:cNvPr>
@@ -18837,7 +18959,7 @@
           <p:cNvPr id="5" name="">
             <a:extLst xmlns:a="http://schemas.openxmlformats.org/drawingml/2006/main">
               <a:ext uri="{FF2B5EF4-FFF2-40B4-BE49-F238E27FC236}">
-                <a16:creationId xmlns:a16="http://schemas.microsoft.com/office/drawing/2014/main" id="{73BCE62A-6872-482C-A78B-8BD70D9C6BD0}"/>
+                <a16:creationId xmlns:a16="http://schemas.microsoft.com/office/drawing/2014/main" id="{6F66776A-479E-47C9-A497-7411137FA637}"/>
               </a:ext>
             </a:extLst>
           </p:cNvPr>
@@ -18868,7 +18990,7 @@
           <p:cNvPr id="6" name="">
             <a:extLst xmlns:a="http://schemas.openxmlformats.org/drawingml/2006/main">
               <a:ext uri="{FF2B5EF4-FFF2-40B4-BE49-F238E27FC236}">
-                <a16:creationId xmlns:a16="http://schemas.microsoft.com/office/drawing/2014/main" id="{DDC08D5E-E5F4-4CCB-BE6D-62E8F46CC0DA}"/>
+                <a16:creationId xmlns:a16="http://schemas.microsoft.com/office/drawing/2014/main" id="{D5090230-61EB-4E1B-B08F-0E2D4F777F48}"/>
               </a:ext>
             </a:extLst>
           </p:cNvPr>
@@ -18918,7 +19040,7 @@
           <p:cNvPr id="7" name="">
             <a:extLst xmlns:a="http://schemas.openxmlformats.org/drawingml/2006/main">
               <a:ext uri="{FF2B5EF4-FFF2-40B4-BE49-F238E27FC236}">
-                <a16:creationId xmlns:a16="http://schemas.microsoft.com/office/drawing/2014/main" id="{61D8F9B4-94FC-4266-A625-F6E53F717A59}"/>
+                <a16:creationId xmlns:a16="http://schemas.microsoft.com/office/drawing/2014/main" id="{B8E3CF6E-A3F4-4E9B-BFE4-63B3A6B1ADA2}"/>
               </a:ext>
             </a:extLst>
           </p:cNvPr>
@@ -18968,7 +19090,7 @@
           <p:cNvPr id="8" name="">
             <a:extLst xmlns:a="http://schemas.openxmlformats.org/drawingml/2006/main">
               <a:ext uri="{FF2B5EF4-FFF2-40B4-BE49-F238E27FC236}">
-                <a16:creationId xmlns:a16="http://schemas.microsoft.com/office/drawing/2014/main" id="{A402B740-C365-4B02-BB5D-A23CD98DF87E}"/>
+                <a16:creationId xmlns:a16="http://schemas.microsoft.com/office/drawing/2014/main" id="{88107149-BF28-4F13-B521-8B7C15477E48}"/>
               </a:ext>
             </a:extLst>
           </p:cNvPr>
@@ -19003,7 +19125,7 @@
           <p:cNvPr id="9" name="">
             <a:extLst xmlns:a="http://schemas.openxmlformats.org/drawingml/2006/main">
               <a:ext uri="{FF2B5EF4-FFF2-40B4-BE49-F238E27FC236}">
-                <a16:creationId xmlns:a16="http://schemas.microsoft.com/office/drawing/2014/main" id="{803A5D12-1CE2-448F-894B-CEEB10B28742}"/>
+                <a16:creationId xmlns:a16="http://schemas.microsoft.com/office/drawing/2014/main" id="{DFCE3ECB-78FE-4FD4-82F2-8C571D2614B2}"/>
               </a:ext>
             </a:extLst>
           </p:cNvPr>
@@ -19036,7 +19158,7 @@
           <p:cNvPr id="10" name="">
             <a:extLst xmlns:a="http://schemas.openxmlformats.org/drawingml/2006/main">
               <a:ext uri="{FF2B5EF4-FFF2-40B4-BE49-F238E27FC236}">
-                <a16:creationId xmlns:a16="http://schemas.microsoft.com/office/drawing/2014/main" id="{7D4B721E-17AE-4A14-9CCC-4659F114088C}"/>
+                <a16:creationId xmlns:a16="http://schemas.microsoft.com/office/drawing/2014/main" id="{E31732B2-AA4A-4467-9C72-19DD0318E0C2}"/>
               </a:ext>
             </a:extLst>
           </p:cNvPr>
@@ -19086,7 +19208,7 @@
           <p:cNvPr id="11" name="">
             <a:extLst xmlns:a="http://schemas.openxmlformats.org/drawingml/2006/main">
               <a:ext uri="{FF2B5EF4-FFF2-40B4-BE49-F238E27FC236}">
-                <a16:creationId xmlns:a16="http://schemas.microsoft.com/office/drawing/2014/main" id="{56B84BC5-8FCA-41C4-A2E1-E8013DAE714A}"/>
+                <a16:creationId xmlns:a16="http://schemas.microsoft.com/office/drawing/2014/main" id="{9EC6F545-CBF1-4904-98AF-D7BFE556D09B}"/>
               </a:ext>
             </a:extLst>
           </p:cNvPr>
@@ -19136,7 +19258,7 @@
           <p:cNvPr id="12" name="">
             <a:extLst xmlns:a="http://schemas.openxmlformats.org/drawingml/2006/main">
               <a:ext uri="{FF2B5EF4-FFF2-40B4-BE49-F238E27FC236}">
-                <a16:creationId xmlns:a16="http://schemas.microsoft.com/office/drawing/2014/main" id="{4BC31CED-0CE0-40EA-9E17-CEC9B127C756}"/>
+                <a16:creationId xmlns:a16="http://schemas.microsoft.com/office/drawing/2014/main" id="{29E4114F-8532-4222-A7DE-DB9CF7161539}"/>
               </a:ext>
             </a:extLst>
           </p:cNvPr>
@@ -19186,7 +19308,7 @@
           <p:cNvPr id="13" name="">
             <a:extLst xmlns:a="http://schemas.openxmlformats.org/drawingml/2006/main">
               <a:ext uri="{FF2B5EF4-FFF2-40B4-BE49-F238E27FC236}">
-                <a16:creationId xmlns:a16="http://schemas.microsoft.com/office/drawing/2014/main" id="{EBF2474A-7C13-40B1-B567-83B678863D28}"/>
+                <a16:creationId xmlns:a16="http://schemas.microsoft.com/office/drawing/2014/main" id="{E28D12E7-1D15-4588-8DE8-BE17275839E6}"/>
               </a:ext>
             </a:extLst>
           </p:cNvPr>
@@ -19236,7 +19358,7 @@
           <p:cNvPr id="14" name="">
             <a:extLst xmlns:a="http://schemas.openxmlformats.org/drawingml/2006/main">
               <a:ext uri="{FF2B5EF4-FFF2-40B4-BE49-F238E27FC236}">
-                <a16:creationId xmlns:a16="http://schemas.microsoft.com/office/drawing/2014/main" id="{63C0FD3D-68F8-421B-9B4F-867F0A9D614C}"/>
+                <a16:creationId xmlns:a16="http://schemas.microsoft.com/office/drawing/2014/main" id="{AA3E5692-F623-4CE5-9955-FF9DEC84BD47}"/>
               </a:ext>
             </a:extLst>
           </p:cNvPr>
@@ -19286,7 +19408,7 @@
           <p:cNvPr id="15" name="">
             <a:extLst xmlns:a="http://schemas.openxmlformats.org/drawingml/2006/main">
               <a:ext uri="{FF2B5EF4-FFF2-40B4-BE49-F238E27FC236}">
-                <a16:creationId xmlns:a16="http://schemas.microsoft.com/office/drawing/2014/main" id="{33AC25A6-7BBC-4785-A988-674EE0C85F46}"/>
+                <a16:creationId xmlns:a16="http://schemas.microsoft.com/office/drawing/2014/main" id="{777AC041-AD94-44D2-835E-B5604F195F95}"/>
               </a:ext>
             </a:extLst>
           </p:cNvPr>
@@ -19336,7 +19458,7 @@
           <p:cNvPr id="16" name="">
             <a:extLst xmlns:a="http://schemas.openxmlformats.org/drawingml/2006/main">
               <a:ext uri="{FF2B5EF4-FFF2-40B4-BE49-F238E27FC236}">
-                <a16:creationId xmlns:a16="http://schemas.microsoft.com/office/drawing/2014/main" id="{9C2450B8-E3F0-4AA4-BC28-99E710E0EC7B}"/>
+                <a16:creationId xmlns:a16="http://schemas.microsoft.com/office/drawing/2014/main" id="{AF1A2026-0303-48B3-96B0-4FEB707C01C5}"/>
               </a:ext>
             </a:extLst>
           </p:cNvPr>
@@ -19386,7 +19508,7 @@
           <p:cNvPr id="17" name="">
             <a:extLst xmlns:a="http://schemas.openxmlformats.org/drawingml/2006/main">
               <a:ext uri="{FF2B5EF4-FFF2-40B4-BE49-F238E27FC236}">
-                <a16:creationId xmlns:a16="http://schemas.microsoft.com/office/drawing/2014/main" id="{67B97AF2-8E8F-4696-BDA1-B10B07D6A0D0}"/>
+                <a16:creationId xmlns:a16="http://schemas.microsoft.com/office/drawing/2014/main" id="{8373387C-B74C-42AF-B495-75D1A081441A}"/>
               </a:ext>
             </a:extLst>
           </p:cNvPr>
@@ -19417,7 +19539,7 @@
           <p:cNvPr id="18" name="">
             <a:extLst xmlns:a="http://schemas.openxmlformats.org/drawingml/2006/main">
               <a:ext uri="{FF2B5EF4-FFF2-40B4-BE49-F238E27FC236}">
-                <a16:creationId xmlns:a16="http://schemas.microsoft.com/office/drawing/2014/main" id="{B697251D-C5C5-421E-A8C9-50AEFB27C426}"/>
+                <a16:creationId xmlns:a16="http://schemas.microsoft.com/office/drawing/2014/main" id="{4CF84B5F-29C5-4728-AE55-C97A1C55DDD7}"/>
               </a:ext>
             </a:extLst>
           </p:cNvPr>
@@ -19467,7 +19589,7 @@
           <p:cNvPr id="19" name="">
             <a:extLst xmlns:a="http://schemas.openxmlformats.org/drawingml/2006/main">
               <a:ext uri="{FF2B5EF4-FFF2-40B4-BE49-F238E27FC236}">
-                <a16:creationId xmlns:a16="http://schemas.microsoft.com/office/drawing/2014/main" id="{1F690FAE-0E46-4E69-9871-1EE5D250CABE}"/>
+                <a16:creationId xmlns:a16="http://schemas.microsoft.com/office/drawing/2014/main" id="{855737E9-F7ED-4FD5-8131-A350206CEA2C}"/>
               </a:ext>
             </a:extLst>
           </p:cNvPr>
@@ -19517,7 +19639,7 @@
           <p:cNvPr id="20" name="">
             <a:extLst xmlns:a="http://schemas.openxmlformats.org/drawingml/2006/main">
               <a:ext uri="{FF2B5EF4-FFF2-40B4-BE49-F238E27FC236}">
-                <a16:creationId xmlns:a16="http://schemas.microsoft.com/office/drawing/2014/main" id="{36649514-D1C0-41A0-8E93-DBDA50BD3C88}"/>
+                <a16:creationId xmlns:a16="http://schemas.microsoft.com/office/drawing/2014/main" id="{BA9F8CB7-3503-48FD-8145-06DD7F44352E}"/>
               </a:ext>
             </a:extLst>
           </p:cNvPr>
@@ -19567,7 +19689,7 @@
           <p:cNvPr id="21" name="">
             <a:extLst xmlns:a="http://schemas.openxmlformats.org/drawingml/2006/main">
               <a:ext uri="{FF2B5EF4-FFF2-40B4-BE49-F238E27FC236}">
-                <a16:creationId xmlns:a16="http://schemas.microsoft.com/office/drawing/2014/main" id="{114FDFB7-A4B1-46AB-805B-98C0CE96D538}"/>
+                <a16:creationId xmlns:a16="http://schemas.microsoft.com/office/drawing/2014/main" id="{0D851788-D652-449D-899E-190BB94E8A26}"/>
               </a:ext>
             </a:extLst>
           </p:cNvPr>
@@ -19617,7 +19739,7 @@
           <p:cNvPr id="22" name="">
             <a:extLst xmlns:a="http://schemas.openxmlformats.org/drawingml/2006/main">
               <a:ext uri="{FF2B5EF4-FFF2-40B4-BE49-F238E27FC236}">
-                <a16:creationId xmlns:a16="http://schemas.microsoft.com/office/drawing/2014/main" id="{DE3F61D6-FFF4-40CA-82D6-E3925C3CA3A4}"/>
+                <a16:creationId xmlns:a16="http://schemas.microsoft.com/office/drawing/2014/main" id="{C212A5B8-9CA1-4A45-BEAB-3C8B3D24319E}"/>
               </a:ext>
             </a:extLst>
           </p:cNvPr>
@@ -19667,7 +19789,7 @@
           <p:cNvPr id="23" name="">
             <a:extLst xmlns:a="http://schemas.openxmlformats.org/drawingml/2006/main">
               <a:ext uri="{FF2B5EF4-FFF2-40B4-BE49-F238E27FC236}">
-                <a16:creationId xmlns:a16="http://schemas.microsoft.com/office/drawing/2014/main" id="{BE51FFA0-E99F-41E5-A578-EB25B3FE2342}"/>
+                <a16:creationId xmlns:a16="http://schemas.microsoft.com/office/drawing/2014/main" id="{083D5918-2413-4970-87C9-D102696D6B0C}"/>
               </a:ext>
             </a:extLst>
           </p:cNvPr>
@@ -19717,7 +19839,7 @@
           <p:cNvPr id="24" name="">
             <a:extLst xmlns:a="http://schemas.openxmlformats.org/drawingml/2006/main">
               <a:ext uri="{FF2B5EF4-FFF2-40B4-BE49-F238E27FC236}">
-                <a16:creationId xmlns:a16="http://schemas.microsoft.com/office/drawing/2014/main" id="{AA7B2F5D-26DA-4A81-BE3D-B32B4DF1A825}"/>
+                <a16:creationId xmlns:a16="http://schemas.microsoft.com/office/drawing/2014/main" id="{9345C5E2-01AD-4D16-8A5F-78B3BEBF8F17}"/>
               </a:ext>
             </a:extLst>
           </p:cNvPr>
@@ -19752,7 +19874,7 @@
           <p:cNvPr id="25" name="">
             <a:extLst xmlns:a="http://schemas.openxmlformats.org/drawingml/2006/main">
               <a:ext uri="{FF2B5EF4-FFF2-40B4-BE49-F238E27FC236}">
-                <a16:creationId xmlns:a16="http://schemas.microsoft.com/office/drawing/2014/main" id="{C9B352F7-044A-4BA1-AFAF-DF4ED01AFA4E}"/>
+                <a16:creationId xmlns:a16="http://schemas.microsoft.com/office/drawing/2014/main" id="{C8A041C3-3AFD-49EC-B57E-99C7E5736F4E}"/>
               </a:ext>
             </a:extLst>
           </p:cNvPr>
@@ -19785,7 +19907,7 @@
           <p:cNvPr id="26" name="">
             <a:extLst xmlns:a="http://schemas.openxmlformats.org/drawingml/2006/main">
               <a:ext uri="{FF2B5EF4-FFF2-40B4-BE49-F238E27FC236}">
-                <a16:creationId xmlns:a16="http://schemas.microsoft.com/office/drawing/2014/main" id="{C2640E73-40FA-44E7-AA43-AB09B1F3B219}"/>
+                <a16:creationId xmlns:a16="http://schemas.microsoft.com/office/drawing/2014/main" id="{AC5C2693-DE60-434B-B913-A02CBD57DD61}"/>
               </a:ext>
             </a:extLst>
           </p:cNvPr>
@@ -19835,7 +19957,7 @@
           <p:cNvPr id="27" name="">
             <a:extLst xmlns:a="http://schemas.openxmlformats.org/drawingml/2006/main">
               <a:ext uri="{FF2B5EF4-FFF2-40B4-BE49-F238E27FC236}">
-                <a16:creationId xmlns:a16="http://schemas.microsoft.com/office/drawing/2014/main" id="{93CAE111-C8D1-46C9-897C-61BADC71E5D4}"/>
+                <a16:creationId xmlns:a16="http://schemas.microsoft.com/office/drawing/2014/main" id="{A79AB834-1B7A-476F-88C2-6E340EBF91BD}"/>
               </a:ext>
             </a:extLst>
           </p:cNvPr>
@@ -19885,7 +20007,7 @@
           <p:cNvPr id="28" name="">
             <a:extLst xmlns:a="http://schemas.openxmlformats.org/drawingml/2006/main">
               <a:ext uri="{FF2B5EF4-FFF2-40B4-BE49-F238E27FC236}">
-                <a16:creationId xmlns:a16="http://schemas.microsoft.com/office/drawing/2014/main" id="{54214735-BC38-4884-9AC7-9B2715127741}"/>
+                <a16:creationId xmlns:a16="http://schemas.microsoft.com/office/drawing/2014/main" id="{B98C5461-9CD4-4E10-820D-F7CBB7C7E220}"/>
               </a:ext>
             </a:extLst>
           </p:cNvPr>
@@ -19935,7 +20057,7 @@
           <p:cNvPr id="29" name="">
             <a:extLst xmlns:a="http://schemas.openxmlformats.org/drawingml/2006/main">
               <a:ext uri="{FF2B5EF4-FFF2-40B4-BE49-F238E27FC236}">
-                <a16:creationId xmlns:a16="http://schemas.microsoft.com/office/drawing/2014/main" id="{CD59CAD5-4C37-4BD8-B572-9BAA85CCD082}"/>
+                <a16:creationId xmlns:a16="http://schemas.microsoft.com/office/drawing/2014/main" id="{C5D3C147-A227-4FDE-8E21-2E2071CAABC3}"/>
               </a:ext>
             </a:extLst>
           </p:cNvPr>
@@ -19985,7 +20107,7 @@
           <p:cNvPr id="30" name="">
             <a:extLst xmlns:a="http://schemas.openxmlformats.org/drawingml/2006/main">
               <a:ext uri="{FF2B5EF4-FFF2-40B4-BE49-F238E27FC236}">
-                <a16:creationId xmlns:a16="http://schemas.microsoft.com/office/drawing/2014/main" id="{CB06110D-8A07-4ACA-AFC2-94C0FCE02EE0}"/>
+                <a16:creationId xmlns:a16="http://schemas.microsoft.com/office/drawing/2014/main" id="{DC5822AE-F70B-401E-BF34-1B1288763497}"/>
               </a:ext>
             </a:extLst>
           </p:cNvPr>
@@ -20035,7 +20157,7 @@
           <p:cNvPr id="31" name="">
             <a:extLst xmlns:a="http://schemas.openxmlformats.org/drawingml/2006/main">
               <a:ext uri="{FF2B5EF4-FFF2-40B4-BE49-F238E27FC236}">
-                <a16:creationId xmlns:a16="http://schemas.microsoft.com/office/drawing/2014/main" id="{D6A55A0C-71AE-4257-9F50-49B8B6827FBF}"/>
+                <a16:creationId xmlns:a16="http://schemas.microsoft.com/office/drawing/2014/main" id="{26B74832-BFAC-49BE-822C-97A5B79D6549}"/>
               </a:ext>
             </a:extLst>
           </p:cNvPr>
@@ -20085,7 +20207,7 @@
           <p:cNvPr id="32" name="">
             <a:extLst xmlns:a="http://schemas.openxmlformats.org/drawingml/2006/main">
               <a:ext uri="{FF2B5EF4-FFF2-40B4-BE49-F238E27FC236}">
-                <a16:creationId xmlns:a16="http://schemas.microsoft.com/office/drawing/2014/main" id="{A4E0EC60-55F3-4136-94AF-F56C77B5FF2B}"/>
+                <a16:creationId xmlns:a16="http://schemas.microsoft.com/office/drawing/2014/main" id="{D92545A5-5699-4633-ABCB-710B43DECDC1}"/>
               </a:ext>
             </a:extLst>
           </p:cNvPr>
@@ -20135,7 +20257,7 @@
           <p:cNvPr id="33" name="">
             <a:extLst xmlns:a="http://schemas.openxmlformats.org/drawingml/2006/main">
               <a:ext uri="{FF2B5EF4-FFF2-40B4-BE49-F238E27FC236}">
-                <a16:creationId xmlns:a16="http://schemas.microsoft.com/office/drawing/2014/main" id="{247F9D9A-D86B-43A5-99BA-65F6BD1FEAD8}"/>
+                <a16:creationId xmlns:a16="http://schemas.microsoft.com/office/drawing/2014/main" id="{9B296E79-D11F-46D3-8381-1841F4F35075}"/>
               </a:ext>
             </a:extLst>
           </p:cNvPr>
@@ -20166,7 +20288,7 @@
           <p:cNvPr id="34" name="">
             <a:extLst xmlns:a="http://schemas.openxmlformats.org/drawingml/2006/main">
               <a:ext uri="{FF2B5EF4-FFF2-40B4-BE49-F238E27FC236}">
-                <a16:creationId xmlns:a16="http://schemas.microsoft.com/office/drawing/2014/main" id="{EE8F1465-D8E4-4B50-8AE3-C87B71613C4C}"/>
+                <a16:creationId xmlns:a16="http://schemas.microsoft.com/office/drawing/2014/main" id="{19A4754E-0AF7-42C6-B7BE-F5FB82E43F03}"/>
               </a:ext>
             </a:extLst>
           </p:cNvPr>
@@ -20216,7 +20338,7 @@
           <p:cNvPr id="35" name="">
             <a:extLst xmlns:a="http://schemas.openxmlformats.org/drawingml/2006/main">
               <a:ext uri="{FF2B5EF4-FFF2-40B4-BE49-F238E27FC236}">
-                <a16:creationId xmlns:a16="http://schemas.microsoft.com/office/drawing/2014/main" id="{D7A01757-33E2-48F5-B9EA-4F72A95DE623}"/>
+                <a16:creationId xmlns:a16="http://schemas.microsoft.com/office/drawing/2014/main" id="{0E628227-8BEA-43DC-A940-D35388A8BB08}"/>
               </a:ext>
             </a:extLst>
           </p:cNvPr>
@@ -20266,7 +20388,7 @@
           <p:cNvPr id="36" name="">
             <a:extLst xmlns:a="http://schemas.openxmlformats.org/drawingml/2006/main">
               <a:ext uri="{FF2B5EF4-FFF2-40B4-BE49-F238E27FC236}">
-                <a16:creationId xmlns:a16="http://schemas.microsoft.com/office/drawing/2014/main" id="{57E7EE4B-360B-4B85-A2E9-6C011BDD15D8}"/>
+                <a16:creationId xmlns:a16="http://schemas.microsoft.com/office/drawing/2014/main" id="{3AF63A4C-8FFA-4F4E-9F2A-E79A710F0746}"/>
               </a:ext>
             </a:extLst>
           </p:cNvPr>
@@ -20316,7 +20438,7 @@
           <p:cNvPr id="37" name="">
             <a:extLst xmlns:a="http://schemas.openxmlformats.org/drawingml/2006/main">
               <a:ext uri="{FF2B5EF4-FFF2-40B4-BE49-F238E27FC236}">
-                <a16:creationId xmlns:a16="http://schemas.microsoft.com/office/drawing/2014/main" id="{A6BB6C91-6191-41FB-8682-B2E94E698EE1}"/>
+                <a16:creationId xmlns:a16="http://schemas.microsoft.com/office/drawing/2014/main" id="{80754742-F160-4152-8AFC-843A293160A4}"/>
               </a:ext>
             </a:extLst>
           </p:cNvPr>
@@ -20366,7 +20488,7 @@
           <p:cNvPr id="38" name="">
             <a:extLst xmlns:a="http://schemas.openxmlformats.org/drawingml/2006/main">
               <a:ext uri="{FF2B5EF4-FFF2-40B4-BE49-F238E27FC236}">
-                <a16:creationId xmlns:a16="http://schemas.microsoft.com/office/drawing/2014/main" id="{3A519A58-A359-4228-AC04-7221498F637B}"/>
+                <a16:creationId xmlns:a16="http://schemas.microsoft.com/office/drawing/2014/main" id="{09C6BE1B-3013-47F9-A5FB-BD86388C46DA}"/>
               </a:ext>
             </a:extLst>
           </p:cNvPr>
@@ -20416,7 +20538,7 @@
           <p:cNvPr id="39" name="">
             <a:extLst xmlns:a="http://schemas.openxmlformats.org/drawingml/2006/main">
               <a:ext uri="{FF2B5EF4-FFF2-40B4-BE49-F238E27FC236}">
-                <a16:creationId xmlns:a16="http://schemas.microsoft.com/office/drawing/2014/main" id="{B478A2E7-2729-4EEF-9127-B85F50DCBBDF}"/>
+                <a16:creationId xmlns:a16="http://schemas.microsoft.com/office/drawing/2014/main" id="{B7B3FF22-7827-4ECD-A5E6-A2943D18C384}"/>
               </a:ext>
             </a:extLst>
           </p:cNvPr>
@@ -20464,7 +20586,7 @@
     </p:spTree>
     <p:extLst>
       <p:ext uri="{BB962C8B-B14F-4D97-AF65-F5344CB8AC3E}">
-        <p14:creationId xmlns:p14="http://schemas.microsoft.com/office/powerpoint/2010/main" val="1569933398"/>
+        <p14:creationId xmlns:p14="http://schemas.microsoft.com/office/powerpoint/2010/main" val="1696080567"/>
       </p:ext>
     </p:extLst>
   </p:cSld>
@@ -20495,7 +20617,7 @@
           <p:cNvPr id="1" name="">
             <a:extLst xmlns:a="http://schemas.openxmlformats.org/drawingml/2006/main">
               <a:ext uri="{FF2B5EF4-FFF2-40B4-BE49-F238E27FC236}">
-                <a16:creationId xmlns:a16="http://schemas.microsoft.com/office/drawing/2014/main" id="{0C895F08-7329-4659-9F4E-A8FC2F848839}"/>
+                <a16:creationId xmlns:a16="http://schemas.microsoft.com/office/drawing/2014/main" id="{38AF8D39-3B69-4E10-BECF-19C0F9E1F4AF}"/>
               </a:ext>
             </a:extLst>
           </p:cNvPr>
@@ -20530,7 +20652,7 @@
           <p:nvPr/>
         </p:nvPicPr>
         <p:blipFill>
-          <a:blip xmlns:r="http://schemas.openxmlformats.org/officeDocument/2006/relationships" xmlns:a="http://schemas.openxmlformats.org/drawingml/2006/main" r:embed="Re64246207faa41e7"/>
+          <a:blip xmlns:r="http://schemas.openxmlformats.org/officeDocument/2006/relationships" xmlns:a="http://schemas.openxmlformats.org/drawingml/2006/main" r:embed="R88668ab9163d4998"/>
           <a:stretch xmlns:a="http://schemas.openxmlformats.org/drawingml/2006/main"/>
         </p:blipFill>
         <p:spPr>
@@ -20548,7 +20670,7 @@
           <p:cNvPr id="3" name="">
             <a:extLst xmlns:a="http://schemas.openxmlformats.org/drawingml/2006/main">
               <a:ext uri="{FF2B5EF4-FFF2-40B4-BE49-F238E27FC236}">
-                <a16:creationId xmlns:a16="http://schemas.microsoft.com/office/drawing/2014/main" id="{E3985F3B-F97F-43F5-8F2A-4C113B835F36}"/>
+                <a16:creationId xmlns:a16="http://schemas.microsoft.com/office/drawing/2014/main" id="{0117FADF-8EFA-41AE-869F-50F5DF8E8FCF}"/>
               </a:ext>
             </a:extLst>
           </p:cNvPr>
@@ -20598,7 +20720,7 @@
           <p:cNvPr id="4" name="">
             <a:extLst xmlns:a="http://schemas.openxmlformats.org/drawingml/2006/main">
               <a:ext uri="{FF2B5EF4-FFF2-40B4-BE49-F238E27FC236}">
-                <a16:creationId xmlns:a16="http://schemas.microsoft.com/office/drawing/2014/main" id="{12FE38B5-C47C-4A6F-95E7-88011AE68BE4}"/>
+                <a16:creationId xmlns:a16="http://schemas.microsoft.com/office/drawing/2014/main" id="{26D54B80-CC02-4405-97F5-D61729A209FD}"/>
               </a:ext>
             </a:extLst>
           </p:cNvPr>
@@ -20631,7 +20753,7 @@
           <p:cNvPr id="5" name="">
             <a:extLst xmlns:a="http://schemas.openxmlformats.org/drawingml/2006/main">
               <a:ext uri="{FF2B5EF4-FFF2-40B4-BE49-F238E27FC236}">
-                <a16:creationId xmlns:a16="http://schemas.microsoft.com/office/drawing/2014/main" id="{43579237-D278-43E0-9B57-0B936E7A5F70}"/>
+                <a16:creationId xmlns:a16="http://schemas.microsoft.com/office/drawing/2014/main" id="{1A711522-778B-41C6-8E6B-A8FB21EA7F3B}"/>
               </a:ext>
             </a:extLst>
           </p:cNvPr>
@@ -20662,7 +20784,7 @@
           <p:cNvPr id="6" name="">
             <a:extLst xmlns:a="http://schemas.openxmlformats.org/drawingml/2006/main">
               <a:ext uri="{FF2B5EF4-FFF2-40B4-BE49-F238E27FC236}">
-                <a16:creationId xmlns:a16="http://schemas.microsoft.com/office/drawing/2014/main" id="{F93EB76E-BC1D-4B55-8517-469F872A61A8}"/>
+                <a16:creationId xmlns:a16="http://schemas.microsoft.com/office/drawing/2014/main" id="{2B6A6958-D371-495B-9468-8E002728BECC}"/>
               </a:ext>
             </a:extLst>
           </p:cNvPr>
@@ -20712,7 +20834,7 @@
           <p:cNvPr id="7" name="">
             <a:extLst xmlns:a="http://schemas.openxmlformats.org/drawingml/2006/main">
               <a:ext uri="{FF2B5EF4-FFF2-40B4-BE49-F238E27FC236}">
-                <a16:creationId xmlns:a16="http://schemas.microsoft.com/office/drawing/2014/main" id="{5E0D7F54-B30D-4F95-A82D-18773C41EB85}"/>
+                <a16:creationId xmlns:a16="http://schemas.microsoft.com/office/drawing/2014/main" id="{B61EB582-12CA-4C8E-9F0D-AD11CD0FC188}"/>
               </a:ext>
             </a:extLst>
           </p:cNvPr>
@@ -20762,7 +20884,7 @@
           <p:cNvPr id="8" name="">
             <a:extLst xmlns:a="http://schemas.openxmlformats.org/drawingml/2006/main">
               <a:ext uri="{FF2B5EF4-FFF2-40B4-BE49-F238E27FC236}">
-                <a16:creationId xmlns:a16="http://schemas.microsoft.com/office/drawing/2014/main" id="{C399C28A-5106-4FE3-9005-DC2571192B08}"/>
+                <a16:creationId xmlns:a16="http://schemas.microsoft.com/office/drawing/2014/main" id="{4850EA51-4028-40BD-BD4F-1DB50E85548A}"/>
               </a:ext>
             </a:extLst>
           </p:cNvPr>
@@ -20797,7 +20919,7 @@
           <p:cNvPr id="9" name="">
             <a:extLst xmlns:a="http://schemas.openxmlformats.org/drawingml/2006/main">
               <a:ext uri="{FF2B5EF4-FFF2-40B4-BE49-F238E27FC236}">
-                <a16:creationId xmlns:a16="http://schemas.microsoft.com/office/drawing/2014/main" id="{8E9882B3-0F1D-4503-8D2E-DEFCA02A1D61}"/>
+                <a16:creationId xmlns:a16="http://schemas.microsoft.com/office/drawing/2014/main" id="{92407740-65E2-4408-A95E-E8F30FE7FCF8}"/>
               </a:ext>
             </a:extLst>
           </p:cNvPr>
@@ -20830,7 +20952,7 @@
           <p:cNvPr id="10" name="">
             <a:extLst xmlns:a="http://schemas.openxmlformats.org/drawingml/2006/main">
               <a:ext uri="{FF2B5EF4-FFF2-40B4-BE49-F238E27FC236}">
-                <a16:creationId xmlns:a16="http://schemas.microsoft.com/office/drawing/2014/main" id="{FA5B94C2-676D-4F46-8E91-2A05F4F6A009}"/>
+                <a16:creationId xmlns:a16="http://schemas.microsoft.com/office/drawing/2014/main" id="{4D02782C-5A9E-4EC2-9361-DFF64DAFB639}"/>
               </a:ext>
             </a:extLst>
           </p:cNvPr>
@@ -20880,7 +21002,7 @@
           <p:cNvPr id="11" name="">
             <a:extLst xmlns:a="http://schemas.openxmlformats.org/drawingml/2006/main">
               <a:ext uri="{FF2B5EF4-FFF2-40B4-BE49-F238E27FC236}">
-                <a16:creationId xmlns:a16="http://schemas.microsoft.com/office/drawing/2014/main" id="{C5301DA0-5B49-42B1-AA9F-B32B75C7450C}"/>
+                <a16:creationId xmlns:a16="http://schemas.microsoft.com/office/drawing/2014/main" id="{AFA1C7B9-9599-4A17-9CE7-06699C957015}"/>
               </a:ext>
             </a:extLst>
           </p:cNvPr>
@@ -20930,7 +21052,7 @@
           <p:cNvPr id="12" name="">
             <a:extLst xmlns:a="http://schemas.openxmlformats.org/drawingml/2006/main">
               <a:ext uri="{FF2B5EF4-FFF2-40B4-BE49-F238E27FC236}">
-                <a16:creationId xmlns:a16="http://schemas.microsoft.com/office/drawing/2014/main" id="{7E16813C-DC8D-4128-8712-D69999BD326F}"/>
+                <a16:creationId xmlns:a16="http://schemas.microsoft.com/office/drawing/2014/main" id="{963059F9-CF2C-473B-8988-4AE0727FEF98}"/>
               </a:ext>
             </a:extLst>
           </p:cNvPr>
@@ -20980,7 +21102,7 @@
           <p:cNvPr id="13" name="">
             <a:extLst xmlns:a="http://schemas.openxmlformats.org/drawingml/2006/main">
               <a:ext uri="{FF2B5EF4-FFF2-40B4-BE49-F238E27FC236}">
-                <a16:creationId xmlns:a16="http://schemas.microsoft.com/office/drawing/2014/main" id="{124AFE25-C9DC-4348-8845-96183C12C74A}"/>
+                <a16:creationId xmlns:a16="http://schemas.microsoft.com/office/drawing/2014/main" id="{50B365C3-CCE8-432B-B477-2FA51A80AF1F}"/>
               </a:ext>
             </a:extLst>
           </p:cNvPr>
@@ -21030,7 +21152,7 @@
           <p:cNvPr id="14" name="">
             <a:extLst xmlns:a="http://schemas.openxmlformats.org/drawingml/2006/main">
               <a:ext uri="{FF2B5EF4-FFF2-40B4-BE49-F238E27FC236}">
-                <a16:creationId xmlns:a16="http://schemas.microsoft.com/office/drawing/2014/main" id="{ECB54A13-D617-4C7A-B6B9-6FF521E77C3C}"/>
+                <a16:creationId xmlns:a16="http://schemas.microsoft.com/office/drawing/2014/main" id="{6A5193AB-4578-49A2-87DC-34183A0B31DF}"/>
               </a:ext>
             </a:extLst>
           </p:cNvPr>
@@ -21080,7 +21202,7 @@
           <p:cNvPr id="15" name="">
             <a:extLst xmlns:a="http://schemas.openxmlformats.org/drawingml/2006/main">
               <a:ext uri="{FF2B5EF4-FFF2-40B4-BE49-F238E27FC236}">
-                <a16:creationId xmlns:a16="http://schemas.microsoft.com/office/drawing/2014/main" id="{61AE007E-BE40-470B-9532-1EF1C763D910}"/>
+                <a16:creationId xmlns:a16="http://schemas.microsoft.com/office/drawing/2014/main" id="{832EB4E1-4149-4651-A90D-5671EAB46062}"/>
               </a:ext>
             </a:extLst>
           </p:cNvPr>
@@ -21130,7 +21252,7 @@
           <p:cNvPr id="16" name="">
             <a:extLst xmlns:a="http://schemas.openxmlformats.org/drawingml/2006/main">
               <a:ext uri="{FF2B5EF4-FFF2-40B4-BE49-F238E27FC236}">
-                <a16:creationId xmlns:a16="http://schemas.microsoft.com/office/drawing/2014/main" id="{C09C5BF8-4E06-4E10-95C7-C1C630F3BCC0}"/>
+                <a16:creationId xmlns:a16="http://schemas.microsoft.com/office/drawing/2014/main" id="{06D1CE1D-AF4E-45AE-A3D7-E08BAEF72AB9}"/>
               </a:ext>
             </a:extLst>
           </p:cNvPr>
@@ -21180,7 +21302,7 @@
           <p:cNvPr id="17" name="">
             <a:extLst xmlns:a="http://schemas.openxmlformats.org/drawingml/2006/main">
               <a:ext uri="{FF2B5EF4-FFF2-40B4-BE49-F238E27FC236}">
-                <a16:creationId xmlns:a16="http://schemas.microsoft.com/office/drawing/2014/main" id="{357F4ADB-A9F3-4F16-A714-44D24C41CCF8}"/>
+                <a16:creationId xmlns:a16="http://schemas.microsoft.com/office/drawing/2014/main" id="{16BBB851-0575-4A57-B53A-431D240632B8}"/>
               </a:ext>
             </a:extLst>
           </p:cNvPr>
@@ -21211,7 +21333,7 @@
           <p:cNvPr id="18" name="">
             <a:extLst xmlns:a="http://schemas.openxmlformats.org/drawingml/2006/main">
               <a:ext uri="{FF2B5EF4-FFF2-40B4-BE49-F238E27FC236}">
-                <a16:creationId xmlns:a16="http://schemas.microsoft.com/office/drawing/2014/main" id="{EF0F4466-727C-4CA6-83B2-D1B9254A451C}"/>
+                <a16:creationId xmlns:a16="http://schemas.microsoft.com/office/drawing/2014/main" id="{D6893818-ADE5-48DC-813E-EDF2D96E3794}"/>
               </a:ext>
             </a:extLst>
           </p:cNvPr>
@@ -21261,7 +21383,7 @@
           <p:cNvPr id="19" name="">
             <a:extLst xmlns:a="http://schemas.openxmlformats.org/drawingml/2006/main">
               <a:ext uri="{FF2B5EF4-FFF2-40B4-BE49-F238E27FC236}">
-                <a16:creationId xmlns:a16="http://schemas.microsoft.com/office/drawing/2014/main" id="{61963A3D-CC98-4F66-967F-C3EB11018699}"/>
+                <a16:creationId xmlns:a16="http://schemas.microsoft.com/office/drawing/2014/main" id="{58ECE3C8-F281-4AEC-AB54-AB5139369203}"/>
               </a:ext>
             </a:extLst>
           </p:cNvPr>
@@ -21311,7 +21433,7 @@
           <p:cNvPr id="20" name="">
             <a:extLst xmlns:a="http://schemas.openxmlformats.org/drawingml/2006/main">
               <a:ext uri="{FF2B5EF4-FFF2-40B4-BE49-F238E27FC236}">
-                <a16:creationId xmlns:a16="http://schemas.microsoft.com/office/drawing/2014/main" id="{D93AA9A8-D678-46CC-933F-E6C3BD94836C}"/>
+                <a16:creationId xmlns:a16="http://schemas.microsoft.com/office/drawing/2014/main" id="{BE90D700-A0D8-42BE-97BA-A195396E8588}"/>
               </a:ext>
             </a:extLst>
           </p:cNvPr>
@@ -21361,7 +21483,7 @@
           <p:cNvPr id="21" name="">
             <a:extLst xmlns:a="http://schemas.openxmlformats.org/drawingml/2006/main">
               <a:ext uri="{FF2B5EF4-FFF2-40B4-BE49-F238E27FC236}">
-                <a16:creationId xmlns:a16="http://schemas.microsoft.com/office/drawing/2014/main" id="{B7480916-63C6-4DAA-9FD3-E78E9B65A1C4}"/>
+                <a16:creationId xmlns:a16="http://schemas.microsoft.com/office/drawing/2014/main" id="{8FE76DE5-71E0-4D31-9273-667B3CF3362F}"/>
               </a:ext>
             </a:extLst>
           </p:cNvPr>
@@ -21411,7 +21533,7 @@
           <p:cNvPr id="22" name="">
             <a:extLst xmlns:a="http://schemas.openxmlformats.org/drawingml/2006/main">
               <a:ext uri="{FF2B5EF4-FFF2-40B4-BE49-F238E27FC236}">
-                <a16:creationId xmlns:a16="http://schemas.microsoft.com/office/drawing/2014/main" id="{52925296-B3BA-47D6-8091-E5ED2827B47F}"/>
+                <a16:creationId xmlns:a16="http://schemas.microsoft.com/office/drawing/2014/main" id="{94FF2A14-A237-4028-A670-89BF977410D7}"/>
               </a:ext>
             </a:extLst>
           </p:cNvPr>
@@ -21461,7 +21583,7 @@
           <p:cNvPr id="23" name="">
             <a:extLst xmlns:a="http://schemas.openxmlformats.org/drawingml/2006/main">
               <a:ext uri="{FF2B5EF4-FFF2-40B4-BE49-F238E27FC236}">
-                <a16:creationId xmlns:a16="http://schemas.microsoft.com/office/drawing/2014/main" id="{17E57D86-5775-40AD-8295-BACB501B4384}"/>
+                <a16:creationId xmlns:a16="http://schemas.microsoft.com/office/drawing/2014/main" id="{C18B55FB-5591-4795-96C9-99401A801CE4}"/>
               </a:ext>
             </a:extLst>
           </p:cNvPr>
@@ -21511,7 +21633,7 @@
           <p:cNvPr id="24" name="">
             <a:extLst xmlns:a="http://schemas.openxmlformats.org/drawingml/2006/main">
               <a:ext uri="{FF2B5EF4-FFF2-40B4-BE49-F238E27FC236}">
-                <a16:creationId xmlns:a16="http://schemas.microsoft.com/office/drawing/2014/main" id="{F8C8F7E5-5023-45F3-83E3-8893E36BA667}"/>
+                <a16:creationId xmlns:a16="http://schemas.microsoft.com/office/drawing/2014/main" id="{D2D4AC51-1E93-4805-91B3-01B7D1DBBAA7}"/>
               </a:ext>
             </a:extLst>
           </p:cNvPr>
@@ -21546,7 +21668,7 @@
           <p:cNvPr id="25" name="">
             <a:extLst xmlns:a="http://schemas.openxmlformats.org/drawingml/2006/main">
               <a:ext uri="{FF2B5EF4-FFF2-40B4-BE49-F238E27FC236}">
-                <a16:creationId xmlns:a16="http://schemas.microsoft.com/office/drawing/2014/main" id="{3D30FE1E-0AD4-4349-A49F-D14D3C1769E3}"/>
+                <a16:creationId xmlns:a16="http://schemas.microsoft.com/office/drawing/2014/main" id="{9F584B23-940E-4B7F-A8A7-0F7023ACF214}"/>
               </a:ext>
             </a:extLst>
           </p:cNvPr>
@@ -21579,7 +21701,7 @@
           <p:cNvPr id="26" name="">
             <a:extLst xmlns:a="http://schemas.openxmlformats.org/drawingml/2006/main">
               <a:ext uri="{FF2B5EF4-FFF2-40B4-BE49-F238E27FC236}">
-                <a16:creationId xmlns:a16="http://schemas.microsoft.com/office/drawing/2014/main" id="{90A81FCB-08B9-4B87-96A0-573090671FAC}"/>
+                <a16:creationId xmlns:a16="http://schemas.microsoft.com/office/drawing/2014/main" id="{FF0ACFA6-2390-4D49-9EAF-DE60AFDE4766}"/>
               </a:ext>
             </a:extLst>
           </p:cNvPr>
@@ -21629,7 +21751,7 @@
           <p:cNvPr id="27" name="">
             <a:extLst xmlns:a="http://schemas.openxmlformats.org/drawingml/2006/main">
               <a:ext uri="{FF2B5EF4-FFF2-40B4-BE49-F238E27FC236}">
-                <a16:creationId xmlns:a16="http://schemas.microsoft.com/office/drawing/2014/main" id="{CB874769-00C2-44C5-9B80-F4EC03C96184}"/>
+                <a16:creationId xmlns:a16="http://schemas.microsoft.com/office/drawing/2014/main" id="{0C0B6AF3-FA61-44E3-BD42-DEEF92269B9E}"/>
               </a:ext>
             </a:extLst>
           </p:cNvPr>
@@ -21679,7 +21801,7 @@
           <p:cNvPr id="28" name="">
             <a:extLst xmlns:a="http://schemas.openxmlformats.org/drawingml/2006/main">
               <a:ext uri="{FF2B5EF4-FFF2-40B4-BE49-F238E27FC236}">
-                <a16:creationId xmlns:a16="http://schemas.microsoft.com/office/drawing/2014/main" id="{A39E7505-50B7-4B45-B069-581F2A3312DB}"/>
+                <a16:creationId xmlns:a16="http://schemas.microsoft.com/office/drawing/2014/main" id="{281D8EA9-FA87-4AAF-AB50-20CB9B9CCD9E}"/>
               </a:ext>
             </a:extLst>
           </p:cNvPr>
@@ -21729,7 +21851,7 @@
           <p:cNvPr id="29" name="">
             <a:extLst xmlns:a="http://schemas.openxmlformats.org/drawingml/2006/main">
               <a:ext uri="{FF2B5EF4-FFF2-40B4-BE49-F238E27FC236}">
-                <a16:creationId xmlns:a16="http://schemas.microsoft.com/office/drawing/2014/main" id="{67D1CD7C-B91A-4FBA-95D0-9CEEE63A9E72}"/>
+                <a16:creationId xmlns:a16="http://schemas.microsoft.com/office/drawing/2014/main" id="{120FB69C-94F9-4E7D-B005-9DC6CCDA3517}"/>
               </a:ext>
             </a:extLst>
           </p:cNvPr>
@@ -21779,7 +21901,7 @@
           <p:cNvPr id="30" name="">
             <a:extLst xmlns:a="http://schemas.openxmlformats.org/drawingml/2006/main">
               <a:ext uri="{FF2B5EF4-FFF2-40B4-BE49-F238E27FC236}">
-                <a16:creationId xmlns:a16="http://schemas.microsoft.com/office/drawing/2014/main" id="{D8B26E52-F79F-40F6-8AD3-43C77BDE12AB}"/>
+                <a16:creationId xmlns:a16="http://schemas.microsoft.com/office/drawing/2014/main" id="{F6D20C34-5B19-49C9-BDA2-C87C4C68EF1B}"/>
               </a:ext>
             </a:extLst>
           </p:cNvPr>
@@ -21829,7 +21951,7 @@
           <p:cNvPr id="31" name="">
             <a:extLst xmlns:a="http://schemas.openxmlformats.org/drawingml/2006/main">
               <a:ext uri="{FF2B5EF4-FFF2-40B4-BE49-F238E27FC236}">
-                <a16:creationId xmlns:a16="http://schemas.microsoft.com/office/drawing/2014/main" id="{1B0CE971-8B81-4BD6-954E-801DB049FB91}"/>
+                <a16:creationId xmlns:a16="http://schemas.microsoft.com/office/drawing/2014/main" id="{C20CA806-E161-4DDA-95AF-6CDF67C290EB}"/>
               </a:ext>
             </a:extLst>
           </p:cNvPr>
@@ -21879,7 +22001,7 @@
           <p:cNvPr id="32" name="">
             <a:extLst xmlns:a="http://schemas.openxmlformats.org/drawingml/2006/main">
               <a:ext uri="{FF2B5EF4-FFF2-40B4-BE49-F238E27FC236}">
-                <a16:creationId xmlns:a16="http://schemas.microsoft.com/office/drawing/2014/main" id="{B2FBCF6C-662A-4A8C-84A3-65120084F4D8}"/>
+                <a16:creationId xmlns:a16="http://schemas.microsoft.com/office/drawing/2014/main" id="{ADAD71A5-6CC7-456E-8219-4E29A59325F9}"/>
               </a:ext>
             </a:extLst>
           </p:cNvPr>
@@ -21929,7 +22051,7 @@
           <p:cNvPr id="33" name="">
             <a:extLst xmlns:a="http://schemas.openxmlformats.org/drawingml/2006/main">
               <a:ext uri="{FF2B5EF4-FFF2-40B4-BE49-F238E27FC236}">
-                <a16:creationId xmlns:a16="http://schemas.microsoft.com/office/drawing/2014/main" id="{78425614-8C31-4585-A442-4EF17FB927D0}"/>
+                <a16:creationId xmlns:a16="http://schemas.microsoft.com/office/drawing/2014/main" id="{CD2838D4-91D9-4045-94C3-09353314C151}"/>
               </a:ext>
             </a:extLst>
           </p:cNvPr>
@@ -21960,7 +22082,7 @@
           <p:cNvPr id="34" name="">
             <a:extLst xmlns:a="http://schemas.openxmlformats.org/drawingml/2006/main">
               <a:ext uri="{FF2B5EF4-FFF2-40B4-BE49-F238E27FC236}">
-                <a16:creationId xmlns:a16="http://schemas.microsoft.com/office/drawing/2014/main" id="{FF3D2785-762D-4418-A13B-71DF06A0970F}"/>
+                <a16:creationId xmlns:a16="http://schemas.microsoft.com/office/drawing/2014/main" id="{2F577AE1-0E5A-462B-BEB7-CE4533917E8B}"/>
               </a:ext>
             </a:extLst>
           </p:cNvPr>
@@ -22010,7 +22132,7 @@
           <p:cNvPr id="35" name="">
             <a:extLst xmlns:a="http://schemas.openxmlformats.org/drawingml/2006/main">
               <a:ext uri="{FF2B5EF4-FFF2-40B4-BE49-F238E27FC236}">
-                <a16:creationId xmlns:a16="http://schemas.microsoft.com/office/drawing/2014/main" id="{C581770D-3965-4BCE-BB92-E3F746F12ADA}"/>
+                <a16:creationId xmlns:a16="http://schemas.microsoft.com/office/drawing/2014/main" id="{700299DA-E905-4CAA-9CD6-3D5FFE9D150F}"/>
               </a:ext>
             </a:extLst>
           </p:cNvPr>
@@ -22060,7 +22182,7 @@
           <p:cNvPr id="36" name="">
             <a:extLst xmlns:a="http://schemas.openxmlformats.org/drawingml/2006/main">
               <a:ext uri="{FF2B5EF4-FFF2-40B4-BE49-F238E27FC236}">
-                <a16:creationId xmlns:a16="http://schemas.microsoft.com/office/drawing/2014/main" id="{0753ED1A-097B-4D76-9CE0-002AC2E5935A}"/>
+                <a16:creationId xmlns:a16="http://schemas.microsoft.com/office/drawing/2014/main" id="{FA35CCA0-6986-4272-902D-D9DDDFEFF059}"/>
               </a:ext>
             </a:extLst>
           </p:cNvPr>
@@ -22110,7 +22232,7 @@
           <p:cNvPr id="37" name="">
             <a:extLst xmlns:a="http://schemas.openxmlformats.org/drawingml/2006/main">
               <a:ext uri="{FF2B5EF4-FFF2-40B4-BE49-F238E27FC236}">
-                <a16:creationId xmlns:a16="http://schemas.microsoft.com/office/drawing/2014/main" id="{43311183-5DA8-41C0-BD46-801DC11E2A3F}"/>
+                <a16:creationId xmlns:a16="http://schemas.microsoft.com/office/drawing/2014/main" id="{C7FEC948-7EF7-4187-9666-FE710DE755C8}"/>
               </a:ext>
             </a:extLst>
           </p:cNvPr>
@@ -22160,7 +22282,7 @@
           <p:cNvPr id="38" name="">
             <a:extLst xmlns:a="http://schemas.openxmlformats.org/drawingml/2006/main">
               <a:ext uri="{FF2B5EF4-FFF2-40B4-BE49-F238E27FC236}">
-                <a16:creationId xmlns:a16="http://schemas.microsoft.com/office/drawing/2014/main" id="{2E480913-63B1-4568-AC4C-1CAE12B70844}"/>
+                <a16:creationId xmlns:a16="http://schemas.microsoft.com/office/drawing/2014/main" id="{BDE13500-D498-4C14-A5CC-0E8BCEF8331B}"/>
               </a:ext>
             </a:extLst>
           </p:cNvPr>
@@ -22210,7 +22332,7 @@
           <p:cNvPr id="39" name="">
             <a:extLst xmlns:a="http://schemas.openxmlformats.org/drawingml/2006/main">
               <a:ext uri="{FF2B5EF4-FFF2-40B4-BE49-F238E27FC236}">
-                <a16:creationId xmlns:a16="http://schemas.microsoft.com/office/drawing/2014/main" id="{2F5B1B1E-1808-4046-8CDD-CABAE1A2BCE0}"/>
+                <a16:creationId xmlns:a16="http://schemas.microsoft.com/office/drawing/2014/main" id="{6F542E4E-844F-473B-B1E3-153760E15EA3}"/>
               </a:ext>
             </a:extLst>
           </p:cNvPr>
@@ -22258,7 +22380,7 @@
     </p:spTree>
     <p:extLst>
       <p:ext uri="{BB962C8B-B14F-4D97-AF65-F5344CB8AC3E}">
-        <p14:creationId xmlns:p14="http://schemas.microsoft.com/office/powerpoint/2010/main" val="1873994428"/>
+        <p14:creationId xmlns:p14="http://schemas.microsoft.com/office/powerpoint/2010/main" val="1358259253"/>
       </p:ext>
     </p:extLst>
   </p:cSld>

--- a/static/audit_presentation_khalil.pptx
+++ b/static/audit_presentation_khalil.pptx
@@ -2,25 +2,25 @@
 <file path=ppt/presentation.xml><?xml version="1.0" encoding="utf-8"?>
 <p:presentation xmlns:p="http://schemas.openxmlformats.org/presentationml/2006/main">
   <p:sldMasterIdLst>
-    <p:sldMasterId xmlns:r="http://schemas.openxmlformats.org/officeDocument/2006/relationships" id="2147483648" r:id="Rc49e67b6107c4459"/>
+    <p:sldMasterId xmlns:r="http://schemas.openxmlformats.org/officeDocument/2006/relationships" id="2147483648" r:id="R9158e667f0e94219"/>
   </p:sldMasterIdLst>
   <p:notesMasterIdLst>
-    <p:notesMasterId xmlns:r="http://schemas.openxmlformats.org/officeDocument/2006/relationships" r:id="Rf14e5a019c254229"/>
+    <p:notesMasterId xmlns:r="http://schemas.openxmlformats.org/officeDocument/2006/relationships" r:id="Reb12ba5f2508449e"/>
   </p:notesMasterIdLst>
   <p:sldIdLst>
-    <p:sldId xmlns:r="http://schemas.openxmlformats.org/officeDocument/2006/relationships" id="256" r:id="R91c332032cba45be"/>
-    <p:sldId xmlns:r="http://schemas.openxmlformats.org/officeDocument/2006/relationships" id="257" r:id="R5b1519344b13476e"/>
-    <p:sldId xmlns:r="http://schemas.openxmlformats.org/officeDocument/2006/relationships" id="258" r:id="R63544cd9cc5148ae"/>
-    <p:sldId xmlns:r="http://schemas.openxmlformats.org/officeDocument/2006/relationships" id="259" r:id="Rec38b5e185ae44c3"/>
-    <p:sldId xmlns:r="http://schemas.openxmlformats.org/officeDocument/2006/relationships" id="260" r:id="Rdd708a1a7ba34e4e"/>
-    <p:sldId xmlns:r="http://schemas.openxmlformats.org/officeDocument/2006/relationships" id="261" r:id="Rc8e41e2155c24800"/>
-    <p:sldId xmlns:r="http://schemas.openxmlformats.org/officeDocument/2006/relationships" id="262" r:id="Rcd478b1993fe4da1"/>
-    <p:sldId xmlns:r="http://schemas.openxmlformats.org/officeDocument/2006/relationships" id="263" r:id="Rcaf8c626bfc748d1"/>
-    <p:sldId xmlns:r="http://schemas.openxmlformats.org/officeDocument/2006/relationships" id="264" r:id="R08c3a7ac0fd8431d"/>
-    <p:sldId xmlns:r="http://schemas.openxmlformats.org/officeDocument/2006/relationships" id="265" r:id="R2dd08e2acc0346d8"/>
-    <p:sldId xmlns:r="http://schemas.openxmlformats.org/officeDocument/2006/relationships" id="266" r:id="R0ee9bc4a49c948f4"/>
-    <p:sldId xmlns:r="http://schemas.openxmlformats.org/officeDocument/2006/relationships" id="267" r:id="Rd17dd1b7a4b24ac6"/>
-    <p:sldId xmlns:r="http://schemas.openxmlformats.org/officeDocument/2006/relationships" id="268" r:id="R36052396f4bf4b5e"/>
+    <p:sldId xmlns:r="http://schemas.openxmlformats.org/officeDocument/2006/relationships" id="256" r:id="Rb7f25a49de0d4217"/>
+    <p:sldId xmlns:r="http://schemas.openxmlformats.org/officeDocument/2006/relationships" id="257" r:id="Ra26e001f5b2b450f"/>
+    <p:sldId xmlns:r="http://schemas.openxmlformats.org/officeDocument/2006/relationships" id="258" r:id="R5ff1ec516b954efa"/>
+    <p:sldId xmlns:r="http://schemas.openxmlformats.org/officeDocument/2006/relationships" id="259" r:id="R2489c54c120c45b2"/>
+    <p:sldId xmlns:r="http://schemas.openxmlformats.org/officeDocument/2006/relationships" id="260" r:id="R9ac910a12f694cb4"/>
+    <p:sldId xmlns:r="http://schemas.openxmlformats.org/officeDocument/2006/relationships" id="261" r:id="R34d95a290f874f3d"/>
+    <p:sldId xmlns:r="http://schemas.openxmlformats.org/officeDocument/2006/relationships" id="262" r:id="R9d8d79dd70054fa3"/>
+    <p:sldId xmlns:r="http://schemas.openxmlformats.org/officeDocument/2006/relationships" id="263" r:id="R8efaed0e33a1480a"/>
+    <p:sldId xmlns:r="http://schemas.openxmlformats.org/officeDocument/2006/relationships" id="264" r:id="R8173fbc3adcc485e"/>
+    <p:sldId xmlns:r="http://schemas.openxmlformats.org/officeDocument/2006/relationships" id="265" r:id="R9d8b4e66b8f84a87"/>
+    <p:sldId xmlns:r="http://schemas.openxmlformats.org/officeDocument/2006/relationships" id="266" r:id="Ra1a9acc6e42d405d"/>
+    <p:sldId xmlns:r="http://schemas.openxmlformats.org/officeDocument/2006/relationships" id="267" r:id="Rf48e69c29d4e4cbe"/>
+    <p:sldId xmlns:r="http://schemas.openxmlformats.org/officeDocument/2006/relationships" id="268" r:id="Rab36f525d22f43e3"/>
   </p:sldIdLst>
   <p:sldSz cx="12192000" cy="6858000"/>
   <p:notesSz cx="6858000" cy="9144000"/>
@@ -1405,7 +1405,7 @@
   </p:cSld>
   <p:clrMap bg1="lt1" tx1="dk1" bg2="lt2" tx2="dk2" accent1="accent1" accent2="accent2" accent3="accent3" accent4="accent4" accent5="accent5" accent6="accent6" hlink="hlink" folHlink="folHlink"/>
   <p:sldLayoutIdLst>
-    <p:sldLayoutId xmlns:r="http://schemas.openxmlformats.org/officeDocument/2006/relationships" id="2147483649" r:id="R2f3dcdada9174ca1"/>
+    <p:sldLayoutId xmlns:r="http://schemas.openxmlformats.org/officeDocument/2006/relationships" id="2147483649" r:id="Rc85c700ae52f45e2"/>
   </p:sldLayoutIdLst>
   <p:txStyles>
     <p:titleStyle>
@@ -1956,7 +1956,7 @@
           <p:cNvPr id="1" name="">
             <a:extLst xmlns:a="http://schemas.openxmlformats.org/drawingml/2006/main">
               <a:ext uri="{FF2B5EF4-FFF2-40B4-BE49-F238E27FC236}">
-                <a16:creationId xmlns:a16="http://schemas.microsoft.com/office/drawing/2014/main" id="{4BCFD994-D3A8-44B5-851F-5CEC93081D9C}"/>
+                <a16:creationId xmlns:a16="http://schemas.microsoft.com/office/drawing/2014/main" id="{DF296CD0-00B8-45CF-AB2F-FA5441C3D318}"/>
               </a:ext>
             </a:extLst>
           </p:cNvPr>
@@ -1987,7 +1987,7 @@
           <p:cNvPr id="2" name="">
             <a:extLst xmlns:a="http://schemas.openxmlformats.org/drawingml/2006/main">
               <a:ext uri="{FF2B5EF4-FFF2-40B4-BE49-F238E27FC236}">
-                <a16:creationId xmlns:a16="http://schemas.microsoft.com/office/drawing/2014/main" id="{436CB630-AC0D-416D-98A1-CE23AC3A70F3}"/>
+                <a16:creationId xmlns:a16="http://schemas.microsoft.com/office/drawing/2014/main" id="{D0D34B09-0D00-4E3B-BE34-58A5071B4098}"/>
               </a:ext>
             </a:extLst>
           </p:cNvPr>
@@ -2022,7 +2022,7 @@
           <p:nvPr/>
         </p:nvPicPr>
         <p:blipFill>
-          <a:blip xmlns:r="http://schemas.openxmlformats.org/officeDocument/2006/relationships" xmlns:a="http://schemas.openxmlformats.org/drawingml/2006/main" r:embed="R85d4810ab63243ad"/>
+          <a:blip xmlns:r="http://schemas.openxmlformats.org/officeDocument/2006/relationships" xmlns:a="http://schemas.openxmlformats.org/drawingml/2006/main" r:embed="R6d21b34dc551414b"/>
           <a:srcRect xmlns:a="http://schemas.openxmlformats.org/drawingml/2006/main" l="0" t="11037" r="0" b="11037"/>
           <a:stretch xmlns:a="http://schemas.openxmlformats.org/drawingml/2006/main">
             <a:fillRect l="0" t="0" r="0" b="0"/>
@@ -2043,7 +2043,7 @@
           <p:cNvPr id="4" name="">
             <a:extLst xmlns:a="http://schemas.openxmlformats.org/drawingml/2006/main">
               <a:ext uri="{FF2B5EF4-FFF2-40B4-BE49-F238E27FC236}">
-                <a16:creationId xmlns:a16="http://schemas.microsoft.com/office/drawing/2014/main" id="{4FEFB138-B965-4B30-9E1C-54ED6B8FC7E1}"/>
+                <a16:creationId xmlns:a16="http://schemas.microsoft.com/office/drawing/2014/main" id="{E4367BB2-CF29-4289-803B-9B6198F8C1C5}"/>
               </a:ext>
             </a:extLst>
           </p:cNvPr>
@@ -2078,7 +2078,7 @@
           <p:nvPr/>
         </p:nvPicPr>
         <p:blipFill>
-          <a:blip xmlns:r="http://schemas.openxmlformats.org/officeDocument/2006/relationships" xmlns:a="http://schemas.openxmlformats.org/drawingml/2006/main" r:embed="R470b3534e3ce4f11"/>
+          <a:blip xmlns:r="http://schemas.openxmlformats.org/officeDocument/2006/relationships" xmlns:a="http://schemas.openxmlformats.org/drawingml/2006/main" r:embed="Rbfe4f36c756f447c"/>
           <a:stretch xmlns:a="http://schemas.openxmlformats.org/drawingml/2006/main"/>
         </p:blipFill>
         <p:spPr>
@@ -2096,7 +2096,7 @@
           <p:cNvPr id="6" name="">
             <a:extLst xmlns:a="http://schemas.openxmlformats.org/drawingml/2006/main">
               <a:ext uri="{FF2B5EF4-FFF2-40B4-BE49-F238E27FC236}">
-                <a16:creationId xmlns:a16="http://schemas.microsoft.com/office/drawing/2014/main" id="{EEAE2DC1-39EF-4CE2-BB59-5E0664B4178A}"/>
+                <a16:creationId xmlns:a16="http://schemas.microsoft.com/office/drawing/2014/main" id="{E80DFB00-FD80-4A07-A973-6B98188E7EA7}"/>
               </a:ext>
             </a:extLst>
           </p:cNvPr>
@@ -2146,7 +2146,7 @@
           <p:cNvPr id="7" name="">
             <a:extLst xmlns:a="http://schemas.openxmlformats.org/drawingml/2006/main">
               <a:ext uri="{FF2B5EF4-FFF2-40B4-BE49-F238E27FC236}">
-                <a16:creationId xmlns:a16="http://schemas.microsoft.com/office/drawing/2014/main" id="{1649A08F-D069-4DF0-A2A8-A6055CC330CE}"/>
+                <a16:creationId xmlns:a16="http://schemas.microsoft.com/office/drawing/2014/main" id="{59CA653B-3802-4D1B-AA49-DBD6ED46C29B}"/>
               </a:ext>
             </a:extLst>
           </p:cNvPr>
@@ -2196,7 +2196,7 @@
           <p:cNvPr id="8" name="">
             <a:extLst xmlns:a="http://schemas.openxmlformats.org/drawingml/2006/main">
               <a:ext uri="{FF2B5EF4-FFF2-40B4-BE49-F238E27FC236}">
-                <a16:creationId xmlns:a16="http://schemas.microsoft.com/office/drawing/2014/main" id="{DC1BD8CA-FF79-4923-9C7B-F7646A4A952E}"/>
+                <a16:creationId xmlns:a16="http://schemas.microsoft.com/office/drawing/2014/main" id="{B6AC5B73-E879-4B0D-8B70-05C290F24B64}"/>
               </a:ext>
             </a:extLst>
           </p:cNvPr>
@@ -2246,7 +2246,7 @@
           <p:cNvPr id="9" name="">
             <a:extLst xmlns:a="http://schemas.openxmlformats.org/drawingml/2006/main">
               <a:ext uri="{FF2B5EF4-FFF2-40B4-BE49-F238E27FC236}">
-                <a16:creationId xmlns:a16="http://schemas.microsoft.com/office/drawing/2014/main" id="{97D2C361-D15D-4859-8F7F-8F7438BF37E5}"/>
+                <a16:creationId xmlns:a16="http://schemas.microsoft.com/office/drawing/2014/main" id="{CBBA05A3-ADCF-415B-8252-010F36ABD135}"/>
               </a:ext>
             </a:extLst>
           </p:cNvPr>
@@ -2281,7 +2281,7 @@
           <p:cNvPr id="10" name="">
             <a:extLst xmlns:a="http://schemas.openxmlformats.org/drawingml/2006/main">
               <a:ext uri="{FF2B5EF4-FFF2-40B4-BE49-F238E27FC236}">
-                <a16:creationId xmlns:a16="http://schemas.microsoft.com/office/drawing/2014/main" id="{EC5952AB-A482-442A-9AF6-66BBE7742F3D}"/>
+                <a16:creationId xmlns:a16="http://schemas.microsoft.com/office/drawing/2014/main" id="{DD2561AC-A634-4EEE-B660-90BF9AA4CD8D}"/>
               </a:ext>
             </a:extLst>
           </p:cNvPr>
@@ -2331,7 +2331,7 @@
           <p:cNvPr id="11" name="">
             <a:extLst xmlns:a="http://schemas.openxmlformats.org/drawingml/2006/main">
               <a:ext uri="{FF2B5EF4-FFF2-40B4-BE49-F238E27FC236}">
-                <a16:creationId xmlns:a16="http://schemas.microsoft.com/office/drawing/2014/main" id="{166E3A16-3ADC-4977-9C60-BABCB18AB619}"/>
+                <a16:creationId xmlns:a16="http://schemas.microsoft.com/office/drawing/2014/main" id="{63C1CBE9-D646-44FF-9A16-EEFBC19206E1}"/>
               </a:ext>
             </a:extLst>
           </p:cNvPr>
@@ -2381,7 +2381,7 @@
           <p:cNvPr id="12" name="">
             <a:extLst xmlns:a="http://schemas.openxmlformats.org/drawingml/2006/main">
               <a:ext uri="{FF2B5EF4-FFF2-40B4-BE49-F238E27FC236}">
-                <a16:creationId xmlns:a16="http://schemas.microsoft.com/office/drawing/2014/main" id="{8D326307-7FA2-4AEE-9417-3F8A6FD87531}"/>
+                <a16:creationId xmlns:a16="http://schemas.microsoft.com/office/drawing/2014/main" id="{C3901AE4-CFDB-431B-A39F-9D9F365FE9CE}"/>
               </a:ext>
             </a:extLst>
           </p:cNvPr>
@@ -2416,7 +2416,7 @@
           <p:cNvPr id="13" name="">
             <a:extLst xmlns:a="http://schemas.openxmlformats.org/drawingml/2006/main">
               <a:ext uri="{FF2B5EF4-FFF2-40B4-BE49-F238E27FC236}">
-                <a16:creationId xmlns:a16="http://schemas.microsoft.com/office/drawing/2014/main" id="{EA67AC39-634E-4341-BBE3-94F10B81BE4C}"/>
+                <a16:creationId xmlns:a16="http://schemas.microsoft.com/office/drawing/2014/main" id="{F572D759-D720-4277-B3B4-7AF9F6CBA70A}"/>
               </a:ext>
             </a:extLst>
           </p:cNvPr>
@@ -2466,7 +2466,7 @@
           <p:cNvPr id="14" name="">
             <a:extLst xmlns:a="http://schemas.openxmlformats.org/drawingml/2006/main">
               <a:ext uri="{FF2B5EF4-FFF2-40B4-BE49-F238E27FC236}">
-                <a16:creationId xmlns:a16="http://schemas.microsoft.com/office/drawing/2014/main" id="{EFDF2D94-08E9-440E-B5A7-C3CAFE804AE8}"/>
+                <a16:creationId xmlns:a16="http://schemas.microsoft.com/office/drawing/2014/main" id="{3352A3E2-AE13-4CFC-96F2-537D40AAD4D1}"/>
               </a:ext>
             </a:extLst>
           </p:cNvPr>
@@ -2516,7 +2516,7 @@
           <p:cNvPr id="15" name="">
             <a:extLst xmlns:a="http://schemas.openxmlformats.org/drawingml/2006/main">
               <a:ext uri="{FF2B5EF4-FFF2-40B4-BE49-F238E27FC236}">
-                <a16:creationId xmlns:a16="http://schemas.microsoft.com/office/drawing/2014/main" id="{AFFB74C4-1F38-41F5-8618-141CA04824EE}"/>
+                <a16:creationId xmlns:a16="http://schemas.microsoft.com/office/drawing/2014/main" id="{FB94B4E1-C677-47CC-AA8D-8E4266B72C5B}"/>
               </a:ext>
             </a:extLst>
           </p:cNvPr>
@@ -2566,7 +2566,7 @@
           <p:cNvPr id="16" name="">
             <a:extLst xmlns:a="http://schemas.openxmlformats.org/drawingml/2006/main">
               <a:ext uri="{FF2B5EF4-FFF2-40B4-BE49-F238E27FC236}">
-                <a16:creationId xmlns:a16="http://schemas.microsoft.com/office/drawing/2014/main" id="{73E89E6B-EFAB-4F0D-8752-AC0B32DCA9EB}"/>
+                <a16:creationId xmlns:a16="http://schemas.microsoft.com/office/drawing/2014/main" id="{58E63AB7-4DC8-454A-8BAF-25EA7C706C0F}"/>
               </a:ext>
             </a:extLst>
           </p:cNvPr>
@@ -2614,7 +2614,7 @@
     </p:spTree>
     <p:extLst>
       <p:ext uri="{BB962C8B-B14F-4D97-AF65-F5344CB8AC3E}">
-        <p14:creationId xmlns:p14="http://schemas.microsoft.com/office/powerpoint/2010/main" val="1365010904"/>
+        <p14:creationId xmlns:p14="http://schemas.microsoft.com/office/powerpoint/2010/main" val="158920344"/>
       </p:ext>
     </p:extLst>
   </p:cSld>
@@ -2645,7 +2645,7 @@
           <p:cNvPr id="1" name="">
             <a:extLst xmlns:a="http://schemas.openxmlformats.org/drawingml/2006/main">
               <a:ext uri="{FF2B5EF4-FFF2-40B4-BE49-F238E27FC236}">
-                <a16:creationId xmlns:a16="http://schemas.microsoft.com/office/drawing/2014/main" id="{0B9F86F7-3180-4120-AFA3-D4518E000C65}"/>
+                <a16:creationId xmlns:a16="http://schemas.microsoft.com/office/drawing/2014/main" id="{2350A495-4F76-47DF-B911-C066D9F2F8B3}"/>
               </a:ext>
             </a:extLst>
           </p:cNvPr>
@@ -2680,7 +2680,7 @@
           <p:nvPr/>
         </p:nvPicPr>
         <p:blipFill>
-          <a:blip xmlns:r="http://schemas.openxmlformats.org/officeDocument/2006/relationships" xmlns:a="http://schemas.openxmlformats.org/drawingml/2006/main" r:embed="Rf101702623fe44e6"/>
+          <a:blip xmlns:r="http://schemas.openxmlformats.org/officeDocument/2006/relationships" xmlns:a="http://schemas.openxmlformats.org/drawingml/2006/main" r:embed="R47912e33362e4e57"/>
           <a:stretch xmlns:a="http://schemas.openxmlformats.org/drawingml/2006/main"/>
         </p:blipFill>
         <p:spPr>
@@ -2698,7 +2698,7 @@
           <p:cNvPr id="3" name="">
             <a:extLst xmlns:a="http://schemas.openxmlformats.org/drawingml/2006/main">
               <a:ext uri="{FF2B5EF4-FFF2-40B4-BE49-F238E27FC236}">
-                <a16:creationId xmlns:a16="http://schemas.microsoft.com/office/drawing/2014/main" id="{8D7F9245-4653-4B66-826A-5D403A78DBD0}"/>
+                <a16:creationId xmlns:a16="http://schemas.microsoft.com/office/drawing/2014/main" id="{02BBD87B-8EBB-4FBC-A523-9C8393E7DFC6}"/>
               </a:ext>
             </a:extLst>
           </p:cNvPr>
@@ -2748,7 +2748,7 @@
           <p:cNvPr id="4" name="">
             <a:extLst xmlns:a="http://schemas.openxmlformats.org/drawingml/2006/main">
               <a:ext uri="{FF2B5EF4-FFF2-40B4-BE49-F238E27FC236}">
-                <a16:creationId xmlns:a16="http://schemas.microsoft.com/office/drawing/2014/main" id="{21586675-3B25-4382-BE52-B7C8B66A6320}"/>
+                <a16:creationId xmlns:a16="http://schemas.microsoft.com/office/drawing/2014/main" id="{91788E9D-223E-4A4A-907F-EB872ABA6DCA}"/>
               </a:ext>
             </a:extLst>
           </p:cNvPr>
@@ -2781,7 +2781,7 @@
           <p:cNvPr id="5" name="">
             <a:extLst xmlns:a="http://schemas.openxmlformats.org/drawingml/2006/main">
               <a:ext uri="{FF2B5EF4-FFF2-40B4-BE49-F238E27FC236}">
-                <a16:creationId xmlns:a16="http://schemas.microsoft.com/office/drawing/2014/main" id="{53B60340-E1DB-4FE1-9716-2104E12633B1}"/>
+                <a16:creationId xmlns:a16="http://schemas.microsoft.com/office/drawing/2014/main" id="{41F719DF-8F1E-460D-8372-9DC55FCF7A92}"/>
               </a:ext>
             </a:extLst>
           </p:cNvPr>
@@ -2812,7 +2812,7 @@
           <p:cNvPr id="6" name="">
             <a:extLst xmlns:a="http://schemas.openxmlformats.org/drawingml/2006/main">
               <a:ext uri="{FF2B5EF4-FFF2-40B4-BE49-F238E27FC236}">
-                <a16:creationId xmlns:a16="http://schemas.microsoft.com/office/drawing/2014/main" id="{65D2D70C-FFD5-4999-ABF5-A97A397DFBCD}"/>
+                <a16:creationId xmlns:a16="http://schemas.microsoft.com/office/drawing/2014/main" id="{C368AD00-F9C3-4117-A1FA-48DC93B96C26}"/>
               </a:ext>
             </a:extLst>
           </p:cNvPr>
@@ -2862,7 +2862,7 @@
           <p:cNvPr id="7" name="">
             <a:extLst xmlns:a="http://schemas.openxmlformats.org/drawingml/2006/main">
               <a:ext uri="{FF2B5EF4-FFF2-40B4-BE49-F238E27FC236}">
-                <a16:creationId xmlns:a16="http://schemas.microsoft.com/office/drawing/2014/main" id="{33B4022F-0EAE-4ED8-A6CC-04F79497AD2C}"/>
+                <a16:creationId xmlns:a16="http://schemas.microsoft.com/office/drawing/2014/main" id="{549F6116-C3BE-4458-9A6D-3F160C9C8CFD}"/>
               </a:ext>
             </a:extLst>
           </p:cNvPr>
@@ -2912,7 +2912,7 @@
           <p:cNvPr id="8" name="">
             <a:extLst xmlns:a="http://schemas.openxmlformats.org/drawingml/2006/main">
               <a:ext uri="{FF2B5EF4-FFF2-40B4-BE49-F238E27FC236}">
-                <a16:creationId xmlns:a16="http://schemas.microsoft.com/office/drawing/2014/main" id="{77DC68F7-983B-4461-9892-0BFDBCDF0860}"/>
+                <a16:creationId xmlns:a16="http://schemas.microsoft.com/office/drawing/2014/main" id="{D6B5FB30-CEC0-4690-91E3-F156802C1860}"/>
               </a:ext>
             </a:extLst>
           </p:cNvPr>
@@ -2947,7 +2947,7 @@
           <p:cNvPr id="9" name="">
             <a:extLst xmlns:a="http://schemas.openxmlformats.org/drawingml/2006/main">
               <a:ext uri="{FF2B5EF4-FFF2-40B4-BE49-F238E27FC236}">
-                <a16:creationId xmlns:a16="http://schemas.microsoft.com/office/drawing/2014/main" id="{C1BC0898-2706-4F93-ABD7-7E566AA3D794}"/>
+                <a16:creationId xmlns:a16="http://schemas.microsoft.com/office/drawing/2014/main" id="{AD2AAFF3-7744-478F-B30E-BEBED9192231}"/>
               </a:ext>
             </a:extLst>
           </p:cNvPr>
@@ -2980,7 +2980,7 @@
           <p:cNvPr id="10" name="">
             <a:extLst xmlns:a="http://schemas.openxmlformats.org/drawingml/2006/main">
               <a:ext uri="{FF2B5EF4-FFF2-40B4-BE49-F238E27FC236}">
-                <a16:creationId xmlns:a16="http://schemas.microsoft.com/office/drawing/2014/main" id="{79B05C82-EFC5-4D1D-A680-330559AE2DED}"/>
+                <a16:creationId xmlns:a16="http://schemas.microsoft.com/office/drawing/2014/main" id="{DD8A00A3-F30A-4D8C-90AC-A6EC0DC6AE42}"/>
               </a:ext>
             </a:extLst>
           </p:cNvPr>
@@ -3030,7 +3030,7 @@
           <p:cNvPr id="11" name="">
             <a:extLst xmlns:a="http://schemas.openxmlformats.org/drawingml/2006/main">
               <a:ext uri="{FF2B5EF4-FFF2-40B4-BE49-F238E27FC236}">
-                <a16:creationId xmlns:a16="http://schemas.microsoft.com/office/drawing/2014/main" id="{EF8C3235-EDA1-48F3-93B4-EAB9CF0214D6}"/>
+                <a16:creationId xmlns:a16="http://schemas.microsoft.com/office/drawing/2014/main" id="{CCCD703B-BF62-44D9-BD87-11ABCA2EEC4F}"/>
               </a:ext>
             </a:extLst>
           </p:cNvPr>
@@ -3080,7 +3080,7 @@
           <p:cNvPr id="12" name="">
             <a:extLst xmlns:a="http://schemas.openxmlformats.org/drawingml/2006/main">
               <a:ext uri="{FF2B5EF4-FFF2-40B4-BE49-F238E27FC236}">
-                <a16:creationId xmlns:a16="http://schemas.microsoft.com/office/drawing/2014/main" id="{3CC0F641-107A-4BAA-92B8-5C27327540B6}"/>
+                <a16:creationId xmlns:a16="http://schemas.microsoft.com/office/drawing/2014/main" id="{280F6874-7621-4A79-A408-9088D7E135B3}"/>
               </a:ext>
             </a:extLst>
           </p:cNvPr>
@@ -3130,7 +3130,7 @@
           <p:cNvPr id="13" name="">
             <a:extLst xmlns:a="http://schemas.openxmlformats.org/drawingml/2006/main">
               <a:ext uri="{FF2B5EF4-FFF2-40B4-BE49-F238E27FC236}">
-                <a16:creationId xmlns:a16="http://schemas.microsoft.com/office/drawing/2014/main" id="{43D920BE-5B0F-4E2D-86B4-2191EC3B2A5A}"/>
+                <a16:creationId xmlns:a16="http://schemas.microsoft.com/office/drawing/2014/main" id="{D924FD25-3C3F-4F46-B940-E66961982819}"/>
               </a:ext>
             </a:extLst>
           </p:cNvPr>
@@ -3180,7 +3180,7 @@
           <p:cNvPr id="14" name="">
             <a:extLst xmlns:a="http://schemas.openxmlformats.org/drawingml/2006/main">
               <a:ext uri="{FF2B5EF4-FFF2-40B4-BE49-F238E27FC236}">
-                <a16:creationId xmlns:a16="http://schemas.microsoft.com/office/drawing/2014/main" id="{2B3B5333-BBEF-4200-8F70-90482C697E82}"/>
+                <a16:creationId xmlns:a16="http://schemas.microsoft.com/office/drawing/2014/main" id="{2D87FCD4-79CF-4E50-AF59-DFEF95953AA1}"/>
               </a:ext>
             </a:extLst>
           </p:cNvPr>
@@ -3230,7 +3230,7 @@
           <p:cNvPr id="15" name="">
             <a:extLst xmlns:a="http://schemas.openxmlformats.org/drawingml/2006/main">
               <a:ext uri="{FF2B5EF4-FFF2-40B4-BE49-F238E27FC236}">
-                <a16:creationId xmlns:a16="http://schemas.microsoft.com/office/drawing/2014/main" id="{BB70C19B-2583-475F-A385-846E69A4A241}"/>
+                <a16:creationId xmlns:a16="http://schemas.microsoft.com/office/drawing/2014/main" id="{3FC72EB8-C4C3-40E7-9B24-35121BE57D5F}"/>
               </a:ext>
             </a:extLst>
           </p:cNvPr>
@@ -3280,7 +3280,7 @@
           <p:cNvPr id="16" name="">
             <a:extLst xmlns:a="http://schemas.openxmlformats.org/drawingml/2006/main">
               <a:ext uri="{FF2B5EF4-FFF2-40B4-BE49-F238E27FC236}">
-                <a16:creationId xmlns:a16="http://schemas.microsoft.com/office/drawing/2014/main" id="{8D7FBB3D-64A3-4630-AE32-AAAB19B0BA61}"/>
+                <a16:creationId xmlns:a16="http://schemas.microsoft.com/office/drawing/2014/main" id="{D0950644-BC3A-4C84-9303-EFBC74293C4B}"/>
               </a:ext>
             </a:extLst>
           </p:cNvPr>
@@ -3330,7 +3330,7 @@
           <p:cNvPr id="17" name="">
             <a:extLst xmlns:a="http://schemas.openxmlformats.org/drawingml/2006/main">
               <a:ext uri="{FF2B5EF4-FFF2-40B4-BE49-F238E27FC236}">
-                <a16:creationId xmlns:a16="http://schemas.microsoft.com/office/drawing/2014/main" id="{E19E67BB-8167-4E3C-B1F7-FD9B67B9F93A}"/>
+                <a16:creationId xmlns:a16="http://schemas.microsoft.com/office/drawing/2014/main" id="{602AF254-0A9D-4538-933F-6DD9F5743AAB}"/>
               </a:ext>
             </a:extLst>
           </p:cNvPr>
@@ -3361,7 +3361,7 @@
           <p:cNvPr id="18" name="">
             <a:extLst xmlns:a="http://schemas.openxmlformats.org/drawingml/2006/main">
               <a:ext uri="{FF2B5EF4-FFF2-40B4-BE49-F238E27FC236}">
-                <a16:creationId xmlns:a16="http://schemas.microsoft.com/office/drawing/2014/main" id="{2AA0ADC7-DCFC-48D6-9EF9-92207F6606D7}"/>
+                <a16:creationId xmlns:a16="http://schemas.microsoft.com/office/drawing/2014/main" id="{AA1E3E60-1E5A-4710-AD80-6BE88E135012}"/>
               </a:ext>
             </a:extLst>
           </p:cNvPr>
@@ -3411,7 +3411,7 @@
           <p:cNvPr id="19" name="">
             <a:extLst xmlns:a="http://schemas.openxmlformats.org/drawingml/2006/main">
               <a:ext uri="{FF2B5EF4-FFF2-40B4-BE49-F238E27FC236}">
-                <a16:creationId xmlns:a16="http://schemas.microsoft.com/office/drawing/2014/main" id="{455CAE30-DFC9-473C-A0ED-0F91D656B153}"/>
+                <a16:creationId xmlns:a16="http://schemas.microsoft.com/office/drawing/2014/main" id="{DE39979A-0581-4546-AC75-8CB50D9B037C}"/>
               </a:ext>
             </a:extLst>
           </p:cNvPr>
@@ -3461,7 +3461,7 @@
           <p:cNvPr id="20" name="">
             <a:extLst xmlns:a="http://schemas.openxmlformats.org/drawingml/2006/main">
               <a:ext uri="{FF2B5EF4-FFF2-40B4-BE49-F238E27FC236}">
-                <a16:creationId xmlns:a16="http://schemas.microsoft.com/office/drawing/2014/main" id="{767408C7-C72E-4C5E-8CCB-8B4C995FCA64}"/>
+                <a16:creationId xmlns:a16="http://schemas.microsoft.com/office/drawing/2014/main" id="{68C24FE8-6430-44CD-AC96-A2BEF9F13219}"/>
               </a:ext>
             </a:extLst>
           </p:cNvPr>
@@ -3511,7 +3511,7 @@
           <p:cNvPr id="21" name="">
             <a:extLst xmlns:a="http://schemas.openxmlformats.org/drawingml/2006/main">
               <a:ext uri="{FF2B5EF4-FFF2-40B4-BE49-F238E27FC236}">
-                <a16:creationId xmlns:a16="http://schemas.microsoft.com/office/drawing/2014/main" id="{B85A2870-97CF-4CAA-8E35-613993EFC2F1}"/>
+                <a16:creationId xmlns:a16="http://schemas.microsoft.com/office/drawing/2014/main" id="{529D96DA-F044-4E59-BAE7-EA9A771C6E9E}"/>
               </a:ext>
             </a:extLst>
           </p:cNvPr>
@@ -3561,7 +3561,7 @@
           <p:cNvPr id="22" name="">
             <a:extLst xmlns:a="http://schemas.openxmlformats.org/drawingml/2006/main">
               <a:ext uri="{FF2B5EF4-FFF2-40B4-BE49-F238E27FC236}">
-                <a16:creationId xmlns:a16="http://schemas.microsoft.com/office/drawing/2014/main" id="{2C3A24B6-733A-4DF0-AD53-92A302ECA01F}"/>
+                <a16:creationId xmlns:a16="http://schemas.microsoft.com/office/drawing/2014/main" id="{86E01D2E-94E0-4FEA-879B-EE956128465A}"/>
               </a:ext>
             </a:extLst>
           </p:cNvPr>
@@ -3611,7 +3611,7 @@
           <p:cNvPr id="23" name="">
             <a:extLst xmlns:a="http://schemas.openxmlformats.org/drawingml/2006/main">
               <a:ext uri="{FF2B5EF4-FFF2-40B4-BE49-F238E27FC236}">
-                <a16:creationId xmlns:a16="http://schemas.microsoft.com/office/drawing/2014/main" id="{E731190D-A255-4B42-9AC0-3768DFBA19BC}"/>
+                <a16:creationId xmlns:a16="http://schemas.microsoft.com/office/drawing/2014/main" id="{7DA75D20-93DF-40A6-BAD5-A2BEDBB4D75E}"/>
               </a:ext>
             </a:extLst>
           </p:cNvPr>
@@ -3661,7 +3661,7 @@
           <p:cNvPr id="24" name="">
             <a:extLst xmlns:a="http://schemas.openxmlformats.org/drawingml/2006/main">
               <a:ext uri="{FF2B5EF4-FFF2-40B4-BE49-F238E27FC236}">
-                <a16:creationId xmlns:a16="http://schemas.microsoft.com/office/drawing/2014/main" id="{CDAE6698-449B-4E11-A00F-5FC8B54C4779}"/>
+                <a16:creationId xmlns:a16="http://schemas.microsoft.com/office/drawing/2014/main" id="{181CC6A0-127D-4FC7-BE59-7FF25243FCEC}"/>
               </a:ext>
             </a:extLst>
           </p:cNvPr>
@@ -3696,7 +3696,7 @@
           <p:cNvPr id="25" name="">
             <a:extLst xmlns:a="http://schemas.openxmlformats.org/drawingml/2006/main">
               <a:ext uri="{FF2B5EF4-FFF2-40B4-BE49-F238E27FC236}">
-                <a16:creationId xmlns:a16="http://schemas.microsoft.com/office/drawing/2014/main" id="{8B1BD5D1-4B03-47E0-8F46-3F036ECE060D}"/>
+                <a16:creationId xmlns:a16="http://schemas.microsoft.com/office/drawing/2014/main" id="{7EB7DFC4-74B3-46F1-BF6C-3C7C38C817DE}"/>
               </a:ext>
             </a:extLst>
           </p:cNvPr>
@@ -3729,7 +3729,7 @@
           <p:cNvPr id="26" name="">
             <a:extLst xmlns:a="http://schemas.openxmlformats.org/drawingml/2006/main">
               <a:ext uri="{FF2B5EF4-FFF2-40B4-BE49-F238E27FC236}">
-                <a16:creationId xmlns:a16="http://schemas.microsoft.com/office/drawing/2014/main" id="{F1407524-6733-45A5-A9CA-1CDC397115C4}"/>
+                <a16:creationId xmlns:a16="http://schemas.microsoft.com/office/drawing/2014/main" id="{24A83E34-9B87-486C-ACAA-3C6385C1D95B}"/>
               </a:ext>
             </a:extLst>
           </p:cNvPr>
@@ -3779,7 +3779,7 @@
           <p:cNvPr id="27" name="">
             <a:extLst xmlns:a="http://schemas.openxmlformats.org/drawingml/2006/main">
               <a:ext uri="{FF2B5EF4-FFF2-40B4-BE49-F238E27FC236}">
-                <a16:creationId xmlns:a16="http://schemas.microsoft.com/office/drawing/2014/main" id="{55B92D38-8ECA-4A57-9A39-9B3426E2A4F5}"/>
+                <a16:creationId xmlns:a16="http://schemas.microsoft.com/office/drawing/2014/main" id="{0B8B505C-3E2C-4F61-A58A-81A31BC8A9AF}"/>
               </a:ext>
             </a:extLst>
           </p:cNvPr>
@@ -3829,7 +3829,7 @@
           <p:cNvPr id="28" name="">
             <a:extLst xmlns:a="http://schemas.openxmlformats.org/drawingml/2006/main">
               <a:ext uri="{FF2B5EF4-FFF2-40B4-BE49-F238E27FC236}">
-                <a16:creationId xmlns:a16="http://schemas.microsoft.com/office/drawing/2014/main" id="{10508745-3C7E-42CB-B8C6-EB620879E038}"/>
+                <a16:creationId xmlns:a16="http://schemas.microsoft.com/office/drawing/2014/main" id="{5FA10741-3A82-4C70-B65F-D2756DB69B5D}"/>
               </a:ext>
             </a:extLst>
           </p:cNvPr>
@@ -3879,7 +3879,7 @@
           <p:cNvPr id="29" name="">
             <a:extLst xmlns:a="http://schemas.openxmlformats.org/drawingml/2006/main">
               <a:ext uri="{FF2B5EF4-FFF2-40B4-BE49-F238E27FC236}">
-                <a16:creationId xmlns:a16="http://schemas.microsoft.com/office/drawing/2014/main" id="{A3DC3661-2DFB-43FE-B4DC-1ABB32FAE15E}"/>
+                <a16:creationId xmlns:a16="http://schemas.microsoft.com/office/drawing/2014/main" id="{786B0967-9282-48C7-892B-E622F76B312D}"/>
               </a:ext>
             </a:extLst>
           </p:cNvPr>
@@ -3929,7 +3929,7 @@
           <p:cNvPr id="30" name="">
             <a:extLst xmlns:a="http://schemas.openxmlformats.org/drawingml/2006/main">
               <a:ext uri="{FF2B5EF4-FFF2-40B4-BE49-F238E27FC236}">
-                <a16:creationId xmlns:a16="http://schemas.microsoft.com/office/drawing/2014/main" id="{01047A1B-C477-4209-900F-729EA13B9CE0}"/>
+                <a16:creationId xmlns:a16="http://schemas.microsoft.com/office/drawing/2014/main" id="{6AD49AC9-4B7D-4F51-A600-31FA34EC9899}"/>
               </a:ext>
             </a:extLst>
           </p:cNvPr>
@@ -3979,7 +3979,7 @@
           <p:cNvPr id="31" name="">
             <a:extLst xmlns:a="http://schemas.openxmlformats.org/drawingml/2006/main">
               <a:ext uri="{FF2B5EF4-FFF2-40B4-BE49-F238E27FC236}">
-                <a16:creationId xmlns:a16="http://schemas.microsoft.com/office/drawing/2014/main" id="{72828C0D-022D-4D35-9BCE-895D0C712A39}"/>
+                <a16:creationId xmlns:a16="http://schemas.microsoft.com/office/drawing/2014/main" id="{FF5B5DA6-8943-4CAB-9C0D-9C519C7DEA2F}"/>
               </a:ext>
             </a:extLst>
           </p:cNvPr>
@@ -4029,7 +4029,7 @@
           <p:cNvPr id="32" name="">
             <a:extLst xmlns:a="http://schemas.openxmlformats.org/drawingml/2006/main">
               <a:ext uri="{FF2B5EF4-FFF2-40B4-BE49-F238E27FC236}">
-                <a16:creationId xmlns:a16="http://schemas.microsoft.com/office/drawing/2014/main" id="{61F6164B-8DCF-4A75-8B65-3382422F14C2}"/>
+                <a16:creationId xmlns:a16="http://schemas.microsoft.com/office/drawing/2014/main" id="{6BB88AAE-04E7-49A7-AC9D-032D3D7935F9}"/>
               </a:ext>
             </a:extLst>
           </p:cNvPr>
@@ -4079,7 +4079,7 @@
           <p:cNvPr id="33" name="">
             <a:extLst xmlns:a="http://schemas.openxmlformats.org/drawingml/2006/main">
               <a:ext uri="{FF2B5EF4-FFF2-40B4-BE49-F238E27FC236}">
-                <a16:creationId xmlns:a16="http://schemas.microsoft.com/office/drawing/2014/main" id="{5EB116C0-17CF-4A7E-9F27-A0661650C5EE}"/>
+                <a16:creationId xmlns:a16="http://schemas.microsoft.com/office/drawing/2014/main" id="{01C544E5-EFA7-4CA4-A4E9-7A166CBC0A66}"/>
               </a:ext>
             </a:extLst>
           </p:cNvPr>
@@ -4110,7 +4110,7 @@
           <p:cNvPr id="34" name="">
             <a:extLst xmlns:a="http://schemas.openxmlformats.org/drawingml/2006/main">
               <a:ext uri="{FF2B5EF4-FFF2-40B4-BE49-F238E27FC236}">
-                <a16:creationId xmlns:a16="http://schemas.microsoft.com/office/drawing/2014/main" id="{22B5D5E1-5729-4107-9AC2-DE0AF91CA1E0}"/>
+                <a16:creationId xmlns:a16="http://schemas.microsoft.com/office/drawing/2014/main" id="{C11E2725-7CAB-4159-9781-39199D2472CB}"/>
               </a:ext>
             </a:extLst>
           </p:cNvPr>
@@ -4160,7 +4160,7 @@
           <p:cNvPr id="35" name="">
             <a:extLst xmlns:a="http://schemas.openxmlformats.org/drawingml/2006/main">
               <a:ext uri="{FF2B5EF4-FFF2-40B4-BE49-F238E27FC236}">
-                <a16:creationId xmlns:a16="http://schemas.microsoft.com/office/drawing/2014/main" id="{9EAE72CB-BF4E-420C-BF3A-E6F4AE05941E}"/>
+                <a16:creationId xmlns:a16="http://schemas.microsoft.com/office/drawing/2014/main" id="{1AEC95DD-E6FD-47B7-944B-BFA7123A4239}"/>
               </a:ext>
             </a:extLst>
           </p:cNvPr>
@@ -4210,7 +4210,7 @@
           <p:cNvPr id="36" name="">
             <a:extLst xmlns:a="http://schemas.openxmlformats.org/drawingml/2006/main">
               <a:ext uri="{FF2B5EF4-FFF2-40B4-BE49-F238E27FC236}">
-                <a16:creationId xmlns:a16="http://schemas.microsoft.com/office/drawing/2014/main" id="{95747773-D27D-40F3-B047-8DA874250243}"/>
+                <a16:creationId xmlns:a16="http://schemas.microsoft.com/office/drawing/2014/main" id="{042DDBF5-EFBE-4E25-812B-75C452AF2923}"/>
               </a:ext>
             </a:extLst>
           </p:cNvPr>
@@ -4260,7 +4260,7 @@
           <p:cNvPr id="37" name="">
             <a:extLst xmlns:a="http://schemas.openxmlformats.org/drawingml/2006/main">
               <a:ext uri="{FF2B5EF4-FFF2-40B4-BE49-F238E27FC236}">
-                <a16:creationId xmlns:a16="http://schemas.microsoft.com/office/drawing/2014/main" id="{BD828791-9A72-4AAF-A352-70CD606BE417}"/>
+                <a16:creationId xmlns:a16="http://schemas.microsoft.com/office/drawing/2014/main" id="{7134E44F-54B8-48B8-89A0-EA10D7ACA306}"/>
               </a:ext>
             </a:extLst>
           </p:cNvPr>
@@ -4310,7 +4310,7 @@
           <p:cNvPr id="38" name="">
             <a:extLst xmlns:a="http://schemas.openxmlformats.org/drawingml/2006/main">
               <a:ext uri="{FF2B5EF4-FFF2-40B4-BE49-F238E27FC236}">
-                <a16:creationId xmlns:a16="http://schemas.microsoft.com/office/drawing/2014/main" id="{4A7FA05A-D014-43DE-94A3-ED0857E72D48}"/>
+                <a16:creationId xmlns:a16="http://schemas.microsoft.com/office/drawing/2014/main" id="{6883574C-20F2-4C69-8E4A-8FA6C8A8C9FC}"/>
               </a:ext>
             </a:extLst>
           </p:cNvPr>
@@ -4360,7 +4360,7 @@
           <p:cNvPr id="39" name="">
             <a:extLst xmlns:a="http://schemas.openxmlformats.org/drawingml/2006/main">
               <a:ext uri="{FF2B5EF4-FFF2-40B4-BE49-F238E27FC236}">
-                <a16:creationId xmlns:a16="http://schemas.microsoft.com/office/drawing/2014/main" id="{C8A92931-C91B-415D-B106-2AAD2950F1B8}"/>
+                <a16:creationId xmlns:a16="http://schemas.microsoft.com/office/drawing/2014/main" id="{8A53D69F-7766-4BDB-AF5C-1B36714E592E}"/>
               </a:ext>
             </a:extLst>
           </p:cNvPr>
@@ -4408,7 +4408,7 @@
     </p:spTree>
     <p:extLst>
       <p:ext uri="{BB962C8B-B14F-4D97-AF65-F5344CB8AC3E}">
-        <p14:creationId xmlns:p14="http://schemas.microsoft.com/office/powerpoint/2010/main" val="591946797"/>
+        <p14:creationId xmlns:p14="http://schemas.microsoft.com/office/powerpoint/2010/main" val="1679332768"/>
       </p:ext>
     </p:extLst>
   </p:cSld>
@@ -4439,7 +4439,7 @@
           <p:cNvPr id="1" name="">
             <a:extLst xmlns:a="http://schemas.openxmlformats.org/drawingml/2006/main">
               <a:ext uri="{FF2B5EF4-FFF2-40B4-BE49-F238E27FC236}">
-                <a16:creationId xmlns:a16="http://schemas.microsoft.com/office/drawing/2014/main" id="{84BD784B-EAAA-41AE-8468-1F8D6AC966DD}"/>
+                <a16:creationId xmlns:a16="http://schemas.microsoft.com/office/drawing/2014/main" id="{8262BF15-436E-4073-9BB3-64F356243F57}"/>
               </a:ext>
             </a:extLst>
           </p:cNvPr>
@@ -4467,14 +4467,14 @@
       </p:sp>
       <p:pic>
         <p:nvPicPr>
-          <p:cNvPr id="47" name=""/>
+          <p:cNvPr id="53" name=""/>
           <p:cNvPicPr>
             <a:picLocks xmlns:a="http://schemas.openxmlformats.org/drawingml/2006/main" noChangeAspect="1"/>
           </p:cNvPicPr>
           <p:nvPr/>
         </p:nvPicPr>
         <p:blipFill>
-          <a:blip xmlns:r="http://schemas.openxmlformats.org/officeDocument/2006/relationships" xmlns:a="http://schemas.openxmlformats.org/drawingml/2006/main" r:embed="R48d8fca5b2764ba7"/>
+          <a:blip xmlns:r="http://schemas.openxmlformats.org/officeDocument/2006/relationships" xmlns:a="http://schemas.openxmlformats.org/drawingml/2006/main" r:embed="Reb72b54001b04131"/>
           <a:stretch xmlns:a="http://schemas.openxmlformats.org/drawingml/2006/main"/>
         </p:blipFill>
         <p:spPr>
@@ -4492,7 +4492,7 @@
           <p:cNvPr id="3" name="">
             <a:extLst xmlns:a="http://schemas.openxmlformats.org/drawingml/2006/main">
               <a:ext uri="{FF2B5EF4-FFF2-40B4-BE49-F238E27FC236}">
-                <a16:creationId xmlns:a16="http://schemas.microsoft.com/office/drawing/2014/main" id="{9653AB26-2719-47DA-BE6F-5AB4CFBD0A36}"/>
+                <a16:creationId xmlns:a16="http://schemas.microsoft.com/office/drawing/2014/main" id="{DDA8AA54-AE38-4575-937A-6D7C9DD9EC4A}"/>
               </a:ext>
             </a:extLst>
           </p:cNvPr>
@@ -4542,7 +4542,7 @@
           <p:cNvPr id="4" name="">
             <a:extLst xmlns:a="http://schemas.openxmlformats.org/drawingml/2006/main">
               <a:ext uri="{FF2B5EF4-FFF2-40B4-BE49-F238E27FC236}">
-                <a16:creationId xmlns:a16="http://schemas.microsoft.com/office/drawing/2014/main" id="{8A5B70C4-B8C8-4ED1-8C32-D75922CDAE7E}"/>
+                <a16:creationId xmlns:a16="http://schemas.microsoft.com/office/drawing/2014/main" id="{CA0A0082-E522-410C-88E0-90F93BDF6B96}"/>
               </a:ext>
             </a:extLst>
           </p:cNvPr>
@@ -4575,7 +4575,7 @@
           <p:cNvPr id="5" name="">
             <a:extLst xmlns:a="http://schemas.openxmlformats.org/drawingml/2006/main">
               <a:ext uri="{FF2B5EF4-FFF2-40B4-BE49-F238E27FC236}">
-                <a16:creationId xmlns:a16="http://schemas.microsoft.com/office/drawing/2014/main" id="{3F39CDE2-77C5-4317-8179-1B3AA7271525}"/>
+                <a16:creationId xmlns:a16="http://schemas.microsoft.com/office/drawing/2014/main" id="{B74470D8-E913-403B-AADD-E059FA0BDA1A}"/>
               </a:ext>
             </a:extLst>
           </p:cNvPr>
@@ -4606,7 +4606,7 @@
           <p:cNvPr id="6" name="">
             <a:extLst xmlns:a="http://schemas.openxmlformats.org/drawingml/2006/main">
               <a:ext uri="{FF2B5EF4-FFF2-40B4-BE49-F238E27FC236}">
-                <a16:creationId xmlns:a16="http://schemas.microsoft.com/office/drawing/2014/main" id="{B14D7665-D4A1-4260-9981-AFBB281C724B}"/>
+                <a16:creationId xmlns:a16="http://schemas.microsoft.com/office/drawing/2014/main" id="{26826C28-4824-4936-944B-490D441D4152}"/>
               </a:ext>
             </a:extLst>
           </p:cNvPr>
@@ -4656,7 +4656,7 @@
           <p:cNvPr id="7" name="">
             <a:extLst xmlns:a="http://schemas.openxmlformats.org/drawingml/2006/main">
               <a:ext uri="{FF2B5EF4-FFF2-40B4-BE49-F238E27FC236}">
-                <a16:creationId xmlns:a16="http://schemas.microsoft.com/office/drawing/2014/main" id="{64313E20-C0E5-43B8-B623-FA41E4B9D85E}"/>
+                <a16:creationId xmlns:a16="http://schemas.microsoft.com/office/drawing/2014/main" id="{8C407A24-7F0D-4D0F-8CFC-84A4A7E2EB72}"/>
               </a:ext>
             </a:extLst>
           </p:cNvPr>
@@ -4706,7 +4706,7 @@
           <p:cNvPr id="8" name="">
             <a:extLst xmlns:a="http://schemas.openxmlformats.org/drawingml/2006/main">
               <a:ext uri="{FF2B5EF4-FFF2-40B4-BE49-F238E27FC236}">
-                <a16:creationId xmlns:a16="http://schemas.microsoft.com/office/drawing/2014/main" id="{93D73E32-F6F0-484D-924E-7DE39206D874}"/>
+                <a16:creationId xmlns:a16="http://schemas.microsoft.com/office/drawing/2014/main" id="{9214D3D0-D401-4C85-813A-94A5E0E8C76D}"/>
               </a:ext>
             </a:extLst>
           </p:cNvPr>
@@ -4756,7 +4756,7 @@
           <p:cNvPr id="9" name="">
             <a:extLst xmlns:a="http://schemas.openxmlformats.org/drawingml/2006/main">
               <a:ext uri="{FF2B5EF4-FFF2-40B4-BE49-F238E27FC236}">
-                <a16:creationId xmlns:a16="http://schemas.microsoft.com/office/drawing/2014/main" id="{3973E15B-AFF6-4B94-8E00-720A8CE47A60}"/>
+                <a16:creationId xmlns:a16="http://schemas.microsoft.com/office/drawing/2014/main" id="{8462D223-0CB2-4BCB-B1D6-3E055A0C1E5C}"/>
               </a:ext>
             </a:extLst>
           </p:cNvPr>
@@ -4787,7 +4787,7 @@
           <p:cNvPr id="10" name="">
             <a:extLst xmlns:a="http://schemas.openxmlformats.org/drawingml/2006/main">
               <a:ext uri="{FF2B5EF4-FFF2-40B4-BE49-F238E27FC236}">
-                <a16:creationId xmlns:a16="http://schemas.microsoft.com/office/drawing/2014/main" id="{746A61C7-6CDD-4F28-93C1-D7823C1FACAB}"/>
+                <a16:creationId xmlns:a16="http://schemas.microsoft.com/office/drawing/2014/main" id="{B82E9C51-5D95-4725-9F50-3B862CB3C676}"/>
               </a:ext>
             </a:extLst>
           </p:cNvPr>
@@ -4818,7 +4818,7 @@
           <p:cNvPr id="11" name="">
             <a:extLst xmlns:a="http://schemas.openxmlformats.org/drawingml/2006/main">
               <a:ext uri="{FF2B5EF4-FFF2-40B4-BE49-F238E27FC236}">
-                <a16:creationId xmlns:a16="http://schemas.microsoft.com/office/drawing/2014/main" id="{CCE58A84-2C0D-4EF9-A80C-EA001111EF91}"/>
+                <a16:creationId xmlns:a16="http://schemas.microsoft.com/office/drawing/2014/main" id="{A812756B-C1EA-45EA-A32A-1BA2B85EC8A8}"/>
               </a:ext>
             </a:extLst>
           </p:cNvPr>
@@ -4868,7 +4868,7 @@
           <p:cNvPr id="12" name="">
             <a:extLst xmlns:a="http://schemas.openxmlformats.org/drawingml/2006/main">
               <a:ext uri="{FF2B5EF4-FFF2-40B4-BE49-F238E27FC236}">
-                <a16:creationId xmlns:a16="http://schemas.microsoft.com/office/drawing/2014/main" id="{09DB66B4-F109-4644-B5A9-7592833D4AE0}"/>
+                <a16:creationId xmlns:a16="http://schemas.microsoft.com/office/drawing/2014/main" id="{BCF666EB-0E31-4CF1-8D81-EF09D0F56DC1}"/>
               </a:ext>
             </a:extLst>
           </p:cNvPr>
@@ -4903,7 +4903,7 @@
           <p:cNvPr id="13" name="">
             <a:extLst xmlns:a="http://schemas.openxmlformats.org/drawingml/2006/main">
               <a:ext uri="{FF2B5EF4-FFF2-40B4-BE49-F238E27FC236}">
-                <a16:creationId xmlns:a16="http://schemas.microsoft.com/office/drawing/2014/main" id="{5F2E25EC-88BE-4302-97A5-188EAD00B5BE}"/>
+                <a16:creationId xmlns:a16="http://schemas.microsoft.com/office/drawing/2014/main" id="{08201983-6E98-4C81-B031-F1438858663F}"/>
               </a:ext>
             </a:extLst>
           </p:cNvPr>
@@ -4953,7 +4953,7 @@
           <p:cNvPr id="14" name="">
             <a:extLst xmlns:a="http://schemas.openxmlformats.org/drawingml/2006/main">
               <a:ext uri="{FF2B5EF4-FFF2-40B4-BE49-F238E27FC236}">
-                <a16:creationId xmlns:a16="http://schemas.microsoft.com/office/drawing/2014/main" id="{612E00B7-0ECC-43A2-8D87-08032F505170}"/>
+                <a16:creationId xmlns:a16="http://schemas.microsoft.com/office/drawing/2014/main" id="{E361D9B1-1415-490D-96A7-736759DA9C84}"/>
               </a:ext>
             </a:extLst>
           </p:cNvPr>
@@ -5003,18 +5003,18 @@
           <p:cNvPr id="15" name="">
             <a:extLst xmlns:a="http://schemas.openxmlformats.org/drawingml/2006/main">
               <a:ext uri="{FF2B5EF4-FFF2-40B4-BE49-F238E27FC236}">
-                <a16:creationId xmlns:a16="http://schemas.microsoft.com/office/drawing/2014/main" id="{B3728966-779F-435B-83BA-D80131FEBEAE}"/>
-              </a:ext>
-            </a:extLst>
-          </p:cNvPr>
-          <p:cNvSpPr>
-            <a:spLocks xmlns:a="http://schemas.openxmlformats.org/drawingml/2006/main" noGrp="1"/>
-          </p:cNvSpPr>
-          <p:nvPr/>
-        </p:nvSpPr>
-        <p:spPr>
-          <a:xfrm xmlns:a="http://schemas.openxmlformats.org/drawingml/2006/main">
-            <a:off x="4210050" y="1952625"/>
+                <a16:creationId xmlns:a16="http://schemas.microsoft.com/office/drawing/2014/main" id="{AC8CDF5D-DA7E-408A-85C9-D9E2894E0B8F}"/>
+              </a:ext>
+            </a:extLst>
+          </p:cNvPr>
+          <p:cNvSpPr>
+            <a:spLocks xmlns:a="http://schemas.openxmlformats.org/drawingml/2006/main" noGrp="1"/>
+          </p:cNvSpPr>
+          <p:nvPr/>
+        </p:nvSpPr>
+        <p:spPr>
+          <a:xfrm xmlns:a="http://schemas.openxmlformats.org/drawingml/2006/main">
+            <a:off x="4210050" y="1933575"/>
             <a:ext cx="304800" cy="190500"/>
           </a:xfrm>
           <a:prstGeom xmlns:a="http://schemas.openxmlformats.org/drawingml/2006/main" prst="rect">
@@ -5053,42 +5053,42 @@
           <p:cNvPr id="16" name="">
             <a:extLst xmlns:a="http://schemas.openxmlformats.org/drawingml/2006/main">
               <a:ext uri="{FF2B5EF4-FFF2-40B4-BE49-F238E27FC236}">
-                <a16:creationId xmlns:a16="http://schemas.microsoft.com/office/drawing/2014/main" id="{85AF4D9E-A90C-4951-AB66-96D45365D7E7}"/>
-              </a:ext>
-            </a:extLst>
-          </p:cNvPr>
-          <p:cNvSpPr>
-            <a:spLocks xmlns:a="http://schemas.openxmlformats.org/drawingml/2006/main" noGrp="1"/>
-          </p:cNvSpPr>
-          <p:nvPr/>
-        </p:nvSpPr>
-        <p:spPr>
-          <a:xfrm xmlns:a="http://schemas.openxmlformats.org/drawingml/2006/main">
-            <a:off x="4572000" y="1895475"/>
-            <a:ext cx="2362200" cy="895350"/>
-          </a:xfrm>
-          <a:prstGeom xmlns:a="http://schemas.openxmlformats.org/drawingml/2006/main" prst="rect">
-            <a:avLst/>
-          </a:prstGeom>
-          <a:noFill xmlns:a="http://schemas.openxmlformats.org/drawingml/2006/main"/>
-          <a:ln xmlns:a="http://schemas.openxmlformats.org/drawingml/2006/main" w="0">
-            <a:noFill/>
-            <a:prstDash val="solid"/>
-          </a:ln>
-        </p:spPr>
-        <p:txBody>
-          <a:bodyPr xmlns:a="http://schemas.openxmlformats.org/drawingml/2006/main"/>
-          <a:lstStyle xmlns:a="http://schemas.openxmlformats.org/drawingml/2006/main"/>
-          <a:p xmlns:a="http://schemas.openxmlformats.org/drawingml/2006/main">
-            <a:pPr>
-              <a:defRPr sz="975">
-                <a:solidFill>
-                  <a:srgbClr val="161616"/>
-                </a:solidFill>
-              </a:defRPr>
-            </a:pPr>
-            <a:r>
-              <a:rPr sz="975">
+                <a16:creationId xmlns:a16="http://schemas.microsoft.com/office/drawing/2014/main" id="{984419F6-0BDA-4856-905C-99192E2BA1C4}"/>
+              </a:ext>
+            </a:extLst>
+          </p:cNvPr>
+          <p:cNvSpPr>
+            <a:spLocks xmlns:a="http://schemas.openxmlformats.org/drawingml/2006/main" noGrp="1"/>
+          </p:cNvSpPr>
+          <p:nvPr/>
+        </p:nvSpPr>
+        <p:spPr>
+          <a:xfrm xmlns:a="http://schemas.openxmlformats.org/drawingml/2006/main">
+            <a:off x="4572000" y="1876425"/>
+            <a:ext cx="2781300" cy="533400"/>
+          </a:xfrm>
+          <a:prstGeom xmlns:a="http://schemas.openxmlformats.org/drawingml/2006/main" prst="rect">
+            <a:avLst/>
+          </a:prstGeom>
+          <a:noFill xmlns:a="http://schemas.openxmlformats.org/drawingml/2006/main"/>
+          <a:ln xmlns:a="http://schemas.openxmlformats.org/drawingml/2006/main" w="0">
+            <a:noFill/>
+            <a:prstDash val="solid"/>
+          </a:ln>
+        </p:spPr>
+        <p:txBody>
+          <a:bodyPr xmlns:a="http://schemas.openxmlformats.org/drawingml/2006/main"/>
+          <a:lstStyle xmlns:a="http://schemas.openxmlformats.org/drawingml/2006/main"/>
+          <a:p xmlns:a="http://schemas.openxmlformats.org/drawingml/2006/main">
+            <a:pPr>
+              <a:defRPr sz="900">
+                <a:solidFill>
+                  <a:srgbClr val="161616"/>
+                </a:solidFill>
+              </a:defRPr>
+            </a:pPr>
+            <a:r>
+              <a:rPr sz="900">
                 <a:solidFill>
                   <a:srgbClr val="161616"/>
                 </a:solidFill>
@@ -5103,18 +5103,149 @@
           <p:cNvPr id="17" name="">
             <a:extLst xmlns:a="http://schemas.openxmlformats.org/drawingml/2006/main">
               <a:ext uri="{FF2B5EF4-FFF2-40B4-BE49-F238E27FC236}">
-                <a16:creationId xmlns:a16="http://schemas.microsoft.com/office/drawing/2014/main" id="{C6C84CB6-E623-4C9A-A454-D48F3E2A0D61}"/>
-              </a:ext>
-            </a:extLst>
-          </p:cNvPr>
-          <p:cNvSpPr>
-            <a:spLocks xmlns:a="http://schemas.openxmlformats.org/drawingml/2006/main" noGrp="1"/>
-          </p:cNvSpPr>
-          <p:nvPr/>
-        </p:nvSpPr>
-        <p:spPr>
-          <a:xfrm xmlns:a="http://schemas.openxmlformats.org/drawingml/2006/main">
-            <a:off x="7124700" y="1952625"/>
+                <a16:creationId xmlns:a16="http://schemas.microsoft.com/office/drawing/2014/main" id="{6775E9B0-B6A9-4FE1-80C4-519F1839BC26}"/>
+              </a:ext>
+            </a:extLst>
+          </p:cNvPr>
+          <p:cNvSpPr>
+            <a:spLocks xmlns:a="http://schemas.openxmlformats.org/drawingml/2006/main" noGrp="1"/>
+          </p:cNvSpPr>
+          <p:nvPr/>
+        </p:nvSpPr>
+        <p:spPr>
+          <a:xfrm xmlns:a="http://schemas.openxmlformats.org/drawingml/2006/main">
+            <a:off x="4572000" y="2476500"/>
+            <a:ext cx="723900" cy="133350"/>
+          </a:xfrm>
+          <a:prstGeom xmlns:a="http://schemas.openxmlformats.org/drawingml/2006/main" prst="rect">
+            <a:avLst/>
+          </a:prstGeom>
+          <a:noFill xmlns:a="http://schemas.openxmlformats.org/drawingml/2006/main"/>
+          <a:ln xmlns:a="http://schemas.openxmlformats.org/drawingml/2006/main" w="0">
+            <a:noFill/>
+            <a:prstDash val="solid"/>
+          </a:ln>
+        </p:spPr>
+        <p:txBody>
+          <a:bodyPr xmlns:a="http://schemas.openxmlformats.org/drawingml/2006/main"/>
+          <a:lstStyle xmlns:a="http://schemas.openxmlformats.org/drawingml/2006/main"/>
+          <a:p xmlns:a="http://schemas.openxmlformats.org/drawingml/2006/main">
+            <a:pPr>
+              <a:defRPr sz="600" b="1">
+                <a:solidFill>
+                  <a:srgbClr val="FF6412"/>
+                </a:solidFill>
+              </a:defRPr>
+            </a:pPr>
+            <a:r>
+              <a:rPr sz="600" b="1">
+                <a:solidFill>
+                  <a:srgbClr val="FF6412"/>
+                </a:solidFill>
+              </a:rPr>
+              <a:t>РЕЗУЛЬТАТ</a:t>
+            </a:r>
+          </a:p>
+        </p:txBody>
+      </p:sp>
+      <p:sp>
+        <p:nvSpPr>
+          <p:cNvPr id="18" name="">
+            <a:extLst xmlns:a="http://schemas.openxmlformats.org/drawingml/2006/main">
+              <a:ext uri="{FF2B5EF4-FFF2-40B4-BE49-F238E27FC236}">
+                <a16:creationId xmlns:a16="http://schemas.microsoft.com/office/drawing/2014/main" id="{1B1038F8-9165-4485-BB24-43B49FCD18BC}"/>
+              </a:ext>
+            </a:extLst>
+          </p:cNvPr>
+          <p:cNvSpPr>
+            <a:spLocks xmlns:a="http://schemas.openxmlformats.org/drawingml/2006/main" noGrp="1"/>
+          </p:cNvSpPr>
+          <p:nvPr/>
+        </p:nvSpPr>
+        <p:spPr>
+          <a:xfrm xmlns:a="http://schemas.openxmlformats.org/drawingml/2006/main">
+            <a:off x="4572000" y="2628900"/>
+            <a:ext cx="2781300" cy="285750"/>
+          </a:xfrm>
+          <a:prstGeom xmlns:a="http://schemas.openxmlformats.org/drawingml/2006/main" prst="rect">
+            <a:avLst/>
+          </a:prstGeom>
+          <a:noFill xmlns:a="http://schemas.openxmlformats.org/drawingml/2006/main"/>
+          <a:ln xmlns:a="http://schemas.openxmlformats.org/drawingml/2006/main" w="0">
+            <a:noFill/>
+            <a:prstDash val="solid"/>
+          </a:ln>
+        </p:spPr>
+        <p:txBody>
+          <a:bodyPr xmlns:a="http://schemas.openxmlformats.org/drawingml/2006/main"/>
+          <a:lstStyle xmlns:a="http://schemas.openxmlformats.org/drawingml/2006/main"/>
+          <a:p xmlns:a="http://schemas.openxmlformats.org/drawingml/2006/main">
+            <a:pPr>
+              <a:defRPr sz="750" b="1">
+                <a:solidFill>
+                  <a:srgbClr val="161616"/>
+                </a:solidFill>
+              </a:defRPr>
+            </a:pPr>
+            <a:r>
+              <a:rPr sz="750" b="1">
+                <a:solidFill>
+                  <a:srgbClr val="161616"/>
+                </a:solidFill>
+              </a:rPr>
+              <a:t>{{ROADMAP_1_1_RESULT}}</a:t>
+            </a:r>
+          </a:p>
+        </p:txBody>
+      </p:sp>
+      <p:sp>
+        <p:nvSpPr>
+          <p:cNvPr id="19" name="">
+            <a:extLst xmlns:a="http://schemas.openxmlformats.org/drawingml/2006/main">
+              <a:ext uri="{FF2B5EF4-FFF2-40B4-BE49-F238E27FC236}">
+                <a16:creationId xmlns:a16="http://schemas.microsoft.com/office/drawing/2014/main" id="{2D1832FC-AEB1-4D5B-93F8-34880BDD6213}"/>
+              </a:ext>
+            </a:extLst>
+          </p:cNvPr>
+          <p:cNvSpPr>
+            <a:spLocks xmlns:a="http://schemas.openxmlformats.org/drawingml/2006/main" noGrp="1"/>
+          </p:cNvSpPr>
+          <p:nvPr/>
+        </p:nvSpPr>
+        <p:spPr>
+          <a:xfrm xmlns:a="http://schemas.openxmlformats.org/drawingml/2006/main">
+            <a:off x="7543800" y="1905000"/>
+            <a:ext cx="9525" cy="952500"/>
+          </a:xfrm>
+          <a:prstGeom xmlns:a="http://schemas.openxmlformats.org/drawingml/2006/main" prst="rect">
+            <a:avLst/>
+          </a:prstGeom>
+          <a:solidFill xmlns:a="http://schemas.openxmlformats.org/drawingml/2006/main">
+            <a:srgbClr val="E4E7EC"/>
+          </a:solidFill>
+          <a:ln xmlns:a="http://schemas.openxmlformats.org/drawingml/2006/main" w="0">
+            <a:noFill/>
+            <a:prstDash val="solid"/>
+          </a:ln>
+        </p:spPr>
+      </p:sp>
+      <p:sp>
+        <p:nvSpPr>
+          <p:cNvPr id="20" name="">
+            <a:extLst xmlns:a="http://schemas.openxmlformats.org/drawingml/2006/main">
+              <a:ext uri="{FF2B5EF4-FFF2-40B4-BE49-F238E27FC236}">
+                <a16:creationId xmlns:a16="http://schemas.microsoft.com/office/drawing/2014/main" id="{2ED4C476-42E5-4158-BEC8-B14C53515137}"/>
+              </a:ext>
+            </a:extLst>
+          </p:cNvPr>
+          <p:cNvSpPr>
+            <a:spLocks xmlns:a="http://schemas.openxmlformats.org/drawingml/2006/main" noGrp="1"/>
+          </p:cNvSpPr>
+          <p:nvPr/>
+        </p:nvSpPr>
+        <p:spPr>
+          <a:xfrm xmlns:a="http://schemas.openxmlformats.org/drawingml/2006/main">
+            <a:off x="7772400" y="1933575"/>
             <a:ext cx="304800" cy="190500"/>
           </a:xfrm>
           <a:prstGeom xmlns:a="http://schemas.openxmlformats.org/drawingml/2006/main" prst="rect">
@@ -5150,45 +5281,45 @@
       </p:sp>
       <p:sp>
         <p:nvSpPr>
-          <p:cNvPr id="18" name="">
-            <a:extLst xmlns:a="http://schemas.openxmlformats.org/drawingml/2006/main">
-              <a:ext uri="{FF2B5EF4-FFF2-40B4-BE49-F238E27FC236}">
-                <a16:creationId xmlns:a16="http://schemas.microsoft.com/office/drawing/2014/main" id="{C4B7352C-A1AB-44D1-96F7-26490FA8997A}"/>
-              </a:ext>
-            </a:extLst>
-          </p:cNvPr>
-          <p:cNvSpPr>
-            <a:spLocks xmlns:a="http://schemas.openxmlformats.org/drawingml/2006/main" noGrp="1"/>
-          </p:cNvSpPr>
-          <p:nvPr/>
-        </p:nvSpPr>
-        <p:spPr>
-          <a:xfrm xmlns:a="http://schemas.openxmlformats.org/drawingml/2006/main">
-            <a:off x="7486650" y="1895475"/>
-            <a:ext cx="1847850" cy="895350"/>
-          </a:xfrm>
-          <a:prstGeom xmlns:a="http://schemas.openxmlformats.org/drawingml/2006/main" prst="rect">
-            <a:avLst/>
-          </a:prstGeom>
-          <a:noFill xmlns:a="http://schemas.openxmlformats.org/drawingml/2006/main"/>
-          <a:ln xmlns:a="http://schemas.openxmlformats.org/drawingml/2006/main" w="0">
-            <a:noFill/>
-            <a:prstDash val="solid"/>
-          </a:ln>
-        </p:spPr>
-        <p:txBody>
-          <a:bodyPr xmlns:a="http://schemas.openxmlformats.org/drawingml/2006/main"/>
-          <a:lstStyle xmlns:a="http://schemas.openxmlformats.org/drawingml/2006/main"/>
-          <a:p xmlns:a="http://schemas.openxmlformats.org/drawingml/2006/main">
-            <a:pPr>
-              <a:defRPr sz="975">
-                <a:solidFill>
-                  <a:srgbClr val="161616"/>
-                </a:solidFill>
-              </a:defRPr>
-            </a:pPr>
-            <a:r>
-              <a:rPr sz="975">
+          <p:cNvPr id="21" name="">
+            <a:extLst xmlns:a="http://schemas.openxmlformats.org/drawingml/2006/main">
+              <a:ext uri="{FF2B5EF4-FFF2-40B4-BE49-F238E27FC236}">
+                <a16:creationId xmlns:a16="http://schemas.microsoft.com/office/drawing/2014/main" id="{DB1F4B92-EEEE-443A-874B-AEC0B3915506}"/>
+              </a:ext>
+            </a:extLst>
+          </p:cNvPr>
+          <p:cNvSpPr>
+            <a:spLocks xmlns:a="http://schemas.openxmlformats.org/drawingml/2006/main" noGrp="1"/>
+          </p:cNvSpPr>
+          <p:nvPr/>
+        </p:nvSpPr>
+        <p:spPr>
+          <a:xfrm xmlns:a="http://schemas.openxmlformats.org/drawingml/2006/main">
+            <a:off x="8134350" y="1876425"/>
+            <a:ext cx="2705100" cy="533400"/>
+          </a:xfrm>
+          <a:prstGeom xmlns:a="http://schemas.openxmlformats.org/drawingml/2006/main" prst="rect">
+            <a:avLst/>
+          </a:prstGeom>
+          <a:noFill xmlns:a="http://schemas.openxmlformats.org/drawingml/2006/main"/>
+          <a:ln xmlns:a="http://schemas.openxmlformats.org/drawingml/2006/main" w="0">
+            <a:noFill/>
+            <a:prstDash val="solid"/>
+          </a:ln>
+        </p:spPr>
+        <p:txBody>
+          <a:bodyPr xmlns:a="http://schemas.openxmlformats.org/drawingml/2006/main"/>
+          <a:lstStyle xmlns:a="http://schemas.openxmlformats.org/drawingml/2006/main"/>
+          <a:p xmlns:a="http://schemas.openxmlformats.org/drawingml/2006/main">
+            <a:pPr>
+              <a:defRPr sz="900">
+                <a:solidFill>
+                  <a:srgbClr val="161616"/>
+                </a:solidFill>
+              </a:defRPr>
+            </a:pPr>
+            <a:r>
+              <a:rPr sz="900">
                 <a:solidFill>
                   <a:srgbClr val="161616"/>
                 </a:solidFill>
@@ -5200,26 +5331,207 @@
       </p:sp>
       <p:sp>
         <p:nvSpPr>
-          <p:cNvPr id="19" name="">
-            <a:extLst xmlns:a="http://schemas.openxmlformats.org/drawingml/2006/main">
-              <a:ext uri="{FF2B5EF4-FFF2-40B4-BE49-F238E27FC236}">
-                <a16:creationId xmlns:a16="http://schemas.microsoft.com/office/drawing/2014/main" id="{E0C2543B-E057-4A8B-AB2F-DC5252BE73A3}"/>
-              </a:ext>
-            </a:extLst>
-          </p:cNvPr>
-          <p:cNvSpPr>
-            <a:spLocks xmlns:a="http://schemas.openxmlformats.org/drawingml/2006/main" noGrp="1"/>
-          </p:cNvSpPr>
-          <p:nvPr/>
-        </p:nvSpPr>
-        <p:spPr>
-          <a:xfrm xmlns:a="http://schemas.openxmlformats.org/drawingml/2006/main">
-            <a:off x="9505950" y="1885950"/>
-            <a:ext cx="1524000" cy="990600"/>
+          <p:cNvPr id="22" name="">
+            <a:extLst xmlns:a="http://schemas.openxmlformats.org/drawingml/2006/main">
+              <a:ext uri="{FF2B5EF4-FFF2-40B4-BE49-F238E27FC236}">
+                <a16:creationId xmlns:a16="http://schemas.microsoft.com/office/drawing/2014/main" id="{7006CECB-D307-4378-9898-9B641A27CBC6}"/>
+              </a:ext>
+            </a:extLst>
+          </p:cNvPr>
+          <p:cNvSpPr>
+            <a:spLocks xmlns:a="http://schemas.openxmlformats.org/drawingml/2006/main" noGrp="1"/>
+          </p:cNvSpPr>
+          <p:nvPr/>
+        </p:nvSpPr>
+        <p:spPr>
+          <a:xfrm xmlns:a="http://schemas.openxmlformats.org/drawingml/2006/main">
+            <a:off x="8134350" y="2476500"/>
+            <a:ext cx="723900" cy="133350"/>
+          </a:xfrm>
+          <a:prstGeom xmlns:a="http://schemas.openxmlformats.org/drawingml/2006/main" prst="rect">
+            <a:avLst/>
+          </a:prstGeom>
+          <a:noFill xmlns:a="http://schemas.openxmlformats.org/drawingml/2006/main"/>
+          <a:ln xmlns:a="http://schemas.openxmlformats.org/drawingml/2006/main" w="0">
+            <a:noFill/>
+            <a:prstDash val="solid"/>
+          </a:ln>
+        </p:spPr>
+        <p:txBody>
+          <a:bodyPr xmlns:a="http://schemas.openxmlformats.org/drawingml/2006/main"/>
+          <a:lstStyle xmlns:a="http://schemas.openxmlformats.org/drawingml/2006/main"/>
+          <a:p xmlns:a="http://schemas.openxmlformats.org/drawingml/2006/main">
+            <a:pPr>
+              <a:defRPr sz="600" b="1">
+                <a:solidFill>
+                  <a:srgbClr val="FF6412"/>
+                </a:solidFill>
+              </a:defRPr>
+            </a:pPr>
+            <a:r>
+              <a:rPr sz="600" b="1">
+                <a:solidFill>
+                  <a:srgbClr val="FF6412"/>
+                </a:solidFill>
+              </a:rPr>
+              <a:t>РЕЗУЛЬТАТ</a:t>
+            </a:r>
+          </a:p>
+        </p:txBody>
+      </p:sp>
+      <p:sp>
+        <p:nvSpPr>
+          <p:cNvPr id="23" name="">
+            <a:extLst xmlns:a="http://schemas.openxmlformats.org/drawingml/2006/main">
+              <a:ext uri="{FF2B5EF4-FFF2-40B4-BE49-F238E27FC236}">
+                <a16:creationId xmlns:a16="http://schemas.microsoft.com/office/drawing/2014/main" id="{9671BBD1-F222-4B93-90F0-D78C29B724A9}"/>
+              </a:ext>
+            </a:extLst>
+          </p:cNvPr>
+          <p:cNvSpPr>
+            <a:spLocks xmlns:a="http://schemas.openxmlformats.org/drawingml/2006/main" noGrp="1"/>
+          </p:cNvSpPr>
+          <p:nvPr/>
+        </p:nvSpPr>
+        <p:spPr>
+          <a:xfrm xmlns:a="http://schemas.openxmlformats.org/drawingml/2006/main">
+            <a:off x="8134350" y="2628900"/>
+            <a:ext cx="2705100" cy="285750"/>
+          </a:xfrm>
+          <a:prstGeom xmlns:a="http://schemas.openxmlformats.org/drawingml/2006/main" prst="rect">
+            <a:avLst/>
+          </a:prstGeom>
+          <a:noFill xmlns:a="http://schemas.openxmlformats.org/drawingml/2006/main"/>
+          <a:ln xmlns:a="http://schemas.openxmlformats.org/drawingml/2006/main" w="0">
+            <a:noFill/>
+            <a:prstDash val="solid"/>
+          </a:ln>
+        </p:spPr>
+        <p:txBody>
+          <a:bodyPr xmlns:a="http://schemas.openxmlformats.org/drawingml/2006/main"/>
+          <a:lstStyle xmlns:a="http://schemas.openxmlformats.org/drawingml/2006/main"/>
+          <a:p xmlns:a="http://schemas.openxmlformats.org/drawingml/2006/main">
+            <a:pPr>
+              <a:defRPr sz="750" b="1">
+                <a:solidFill>
+                  <a:srgbClr val="161616"/>
+                </a:solidFill>
+              </a:defRPr>
+            </a:pPr>
+            <a:r>
+              <a:rPr sz="750" b="1">
+                <a:solidFill>
+                  <a:srgbClr val="161616"/>
+                </a:solidFill>
+              </a:rPr>
+              <a:t>{{ROADMAP_1_2_RESULT}}</a:t>
+            </a:r>
+          </a:p>
+        </p:txBody>
+      </p:sp>
+      <p:sp>
+        <p:nvSpPr>
+          <p:cNvPr id="24" name="">
+            <a:extLst xmlns:a="http://schemas.openxmlformats.org/drawingml/2006/main">
+              <a:ext uri="{FF2B5EF4-FFF2-40B4-BE49-F238E27FC236}">
+                <a16:creationId xmlns:a16="http://schemas.microsoft.com/office/drawing/2014/main" id="{4D92BF89-4AAB-4B69-9120-CB8E5D6CC3D7}"/>
+              </a:ext>
+            </a:extLst>
+          </p:cNvPr>
+          <p:cNvSpPr>
+            <a:spLocks xmlns:a="http://schemas.openxmlformats.org/drawingml/2006/main" noGrp="1"/>
+          </p:cNvSpPr>
+          <p:nvPr/>
+        </p:nvSpPr>
+        <p:spPr>
+          <a:xfrm xmlns:a="http://schemas.openxmlformats.org/drawingml/2006/main">
+            <a:off x="609600" y="3581400"/>
+            <a:ext cx="514350" cy="514350"/>
+          </a:xfrm>
+          <a:prstGeom xmlns:a="http://schemas.openxmlformats.org/drawingml/2006/main" prst="ellipse">
+            <a:avLst/>
+          </a:prstGeom>
+          <a:solidFill xmlns:a="http://schemas.openxmlformats.org/drawingml/2006/main">
+            <a:srgbClr val="161616"/>
+          </a:solidFill>
+          <a:ln xmlns:a="http://schemas.openxmlformats.org/drawingml/2006/main" w="0">
+            <a:noFill/>
+            <a:prstDash val="solid"/>
+          </a:ln>
+        </p:spPr>
+      </p:sp>
+      <p:sp>
+        <p:nvSpPr>
+          <p:cNvPr id="25" name="">
+            <a:extLst xmlns:a="http://schemas.openxmlformats.org/drawingml/2006/main">
+              <a:ext uri="{FF2B5EF4-FFF2-40B4-BE49-F238E27FC236}">
+                <a16:creationId xmlns:a16="http://schemas.microsoft.com/office/drawing/2014/main" id="{9A03DEF8-79F6-48D8-A398-27FF0C81DD4F}"/>
+              </a:ext>
+            </a:extLst>
+          </p:cNvPr>
+          <p:cNvSpPr>
+            <a:spLocks xmlns:a="http://schemas.openxmlformats.org/drawingml/2006/main" noGrp="1"/>
+          </p:cNvSpPr>
+          <p:nvPr/>
+        </p:nvSpPr>
+        <p:spPr>
+          <a:xfrm xmlns:a="http://schemas.openxmlformats.org/drawingml/2006/main">
+            <a:off x="704850" y="3705225"/>
+            <a:ext cx="323850" cy="228600"/>
+          </a:xfrm>
+          <a:prstGeom xmlns:a="http://schemas.openxmlformats.org/drawingml/2006/main" prst="rect">
+            <a:avLst/>
+          </a:prstGeom>
+          <a:noFill xmlns:a="http://schemas.openxmlformats.org/drawingml/2006/main"/>
+          <a:ln xmlns:a="http://schemas.openxmlformats.org/drawingml/2006/main" w="0">
+            <a:noFill/>
+            <a:prstDash val="solid"/>
+          </a:ln>
+        </p:spPr>
+        <p:txBody>
+          <a:bodyPr xmlns:a="http://schemas.openxmlformats.org/drawingml/2006/main"/>
+          <a:lstStyle xmlns:a="http://schemas.openxmlformats.org/drawingml/2006/main"/>
+          <a:p xmlns:a="http://schemas.openxmlformats.org/drawingml/2006/main">
+            <a:pPr algn="ctr">
+              <a:defRPr sz="1200" b="1">
+                <a:solidFill>
+                  <a:srgbClr val="FFFFFF"/>
+                </a:solidFill>
+              </a:defRPr>
+            </a:pPr>
+            <a:r>
+              <a:rPr sz="1200" b="1">
+                <a:solidFill>
+                  <a:srgbClr val="FFFFFF"/>
+                </a:solidFill>
+              </a:rPr>
+              <a:t>2</a:t>
+            </a:r>
+          </a:p>
+        </p:txBody>
+      </p:sp>
+      <p:sp>
+        <p:nvSpPr>
+          <p:cNvPr id="26" name="">
+            <a:extLst xmlns:a="http://schemas.openxmlformats.org/drawingml/2006/main">
+              <a:ext uri="{FF2B5EF4-FFF2-40B4-BE49-F238E27FC236}">
+                <a16:creationId xmlns:a16="http://schemas.microsoft.com/office/drawing/2014/main" id="{AB845E6B-22F3-43AD-A72C-93271535FF6D}"/>
+              </a:ext>
+            </a:extLst>
+          </p:cNvPr>
+          <p:cNvSpPr>
+            <a:spLocks xmlns:a="http://schemas.openxmlformats.org/drawingml/2006/main" noGrp="1"/>
+          </p:cNvSpPr>
+          <p:nvPr/>
+        </p:nvSpPr>
+        <p:spPr>
+          <a:xfrm xmlns:a="http://schemas.openxmlformats.org/drawingml/2006/main">
+            <a:off x="1390650" y="3219450"/>
+            <a:ext cx="9810750" cy="1257300"/>
           </a:xfrm>
           <a:prstGeom xmlns:a="http://schemas.openxmlformats.org/drawingml/2006/main" prst="roundRect">
             <a:avLst>
-              <a:gd name="adj" fmla="val 7692"/>
+              <a:gd name="adj" fmla="val 6061"/>
             </a:avLst>
           </a:prstGeom>
           <a:solidFill xmlns:a="http://schemas.openxmlformats.org/drawingml/2006/main">
@@ -5235,49 +5547,249 @@
       </p:sp>
       <p:sp>
         <p:nvSpPr>
-          <p:cNvPr id="20" name="">
-            <a:extLst xmlns:a="http://schemas.openxmlformats.org/drawingml/2006/main">
-              <a:ext uri="{FF2B5EF4-FFF2-40B4-BE49-F238E27FC236}">
-                <a16:creationId xmlns:a16="http://schemas.microsoft.com/office/drawing/2014/main" id="{BBBB8230-C3DE-4394-8D54-B57F3B8FBF34}"/>
-              </a:ext>
-            </a:extLst>
-          </p:cNvPr>
-          <p:cNvSpPr>
-            <a:spLocks xmlns:a="http://schemas.openxmlformats.org/drawingml/2006/main" noGrp="1"/>
-          </p:cNvSpPr>
-          <p:nvPr/>
-        </p:nvSpPr>
-        <p:spPr>
-          <a:xfrm xmlns:a="http://schemas.openxmlformats.org/drawingml/2006/main">
-            <a:off x="9620250" y="1981200"/>
-            <a:ext cx="1295400" cy="171450"/>
-          </a:xfrm>
-          <a:prstGeom xmlns:a="http://schemas.openxmlformats.org/drawingml/2006/main" prst="rect">
-            <a:avLst/>
-          </a:prstGeom>
-          <a:noFill xmlns:a="http://schemas.openxmlformats.org/drawingml/2006/main"/>
-          <a:ln xmlns:a="http://schemas.openxmlformats.org/drawingml/2006/main" w="0">
-            <a:noFill/>
-            <a:prstDash val="solid"/>
-          </a:ln>
-        </p:spPr>
-        <p:txBody>
-          <a:bodyPr xmlns:a="http://schemas.openxmlformats.org/drawingml/2006/main"/>
-          <a:lstStyle xmlns:a="http://schemas.openxmlformats.org/drawingml/2006/main"/>
-          <a:p xmlns:a="http://schemas.openxmlformats.org/drawingml/2006/main">
-            <a:pPr algn="ctr">
-              <a:defRPr sz="675" b="1">
+          <p:cNvPr id="27" name="">
+            <a:extLst xmlns:a="http://schemas.openxmlformats.org/drawingml/2006/main">
+              <a:ext uri="{FF2B5EF4-FFF2-40B4-BE49-F238E27FC236}">
+                <a16:creationId xmlns:a16="http://schemas.microsoft.com/office/drawing/2014/main" id="{B3AFFEC8-7581-493C-A201-A9AFFE13C21B}"/>
+              </a:ext>
+            </a:extLst>
+          </p:cNvPr>
+          <p:cNvSpPr>
+            <a:spLocks xmlns:a="http://schemas.openxmlformats.org/drawingml/2006/main" noGrp="1"/>
+          </p:cNvSpPr>
+          <p:nvPr/>
+        </p:nvSpPr>
+        <p:spPr>
+          <a:xfrm xmlns:a="http://schemas.openxmlformats.org/drawingml/2006/main">
+            <a:off x="1619250" y="3371850"/>
+            <a:ext cx="1409700" cy="228600"/>
+          </a:xfrm>
+          <a:prstGeom xmlns:a="http://schemas.openxmlformats.org/drawingml/2006/main" prst="rect">
+            <a:avLst/>
+          </a:prstGeom>
+          <a:noFill xmlns:a="http://schemas.openxmlformats.org/drawingml/2006/main"/>
+          <a:ln xmlns:a="http://schemas.openxmlformats.org/drawingml/2006/main" w="0">
+            <a:noFill/>
+            <a:prstDash val="solid"/>
+          </a:ln>
+        </p:spPr>
+        <p:txBody>
+          <a:bodyPr xmlns:a="http://schemas.openxmlformats.org/drawingml/2006/main"/>
+          <a:lstStyle xmlns:a="http://schemas.openxmlformats.org/drawingml/2006/main"/>
+          <a:p xmlns:a="http://schemas.openxmlformats.org/drawingml/2006/main">
+            <a:pPr>
+              <a:defRPr sz="1125" b="1">
                 <a:solidFill>
                   <a:srgbClr val="FF6412"/>
                 </a:solidFill>
               </a:defRPr>
             </a:pPr>
             <a:r>
-              <a:rPr sz="675" b="1">
+              <a:rPr sz="1125" b="1">
                 <a:solidFill>
                   <a:srgbClr val="FF6412"/>
                 </a:solidFill>
               </a:rPr>
+              <a:t>31–60 дней</a:t>
+            </a:r>
+          </a:p>
+        </p:txBody>
+      </p:sp>
+      <p:sp>
+        <p:nvSpPr>
+          <p:cNvPr id="28" name="">
+            <a:extLst xmlns:a="http://schemas.openxmlformats.org/drawingml/2006/main">
+              <a:ext uri="{FF2B5EF4-FFF2-40B4-BE49-F238E27FC236}">
+                <a16:creationId xmlns:a16="http://schemas.microsoft.com/office/drawing/2014/main" id="{4A841FA5-0641-46B7-9C39-68F3FE684822}"/>
+              </a:ext>
+            </a:extLst>
+          </p:cNvPr>
+          <p:cNvSpPr>
+            <a:spLocks xmlns:a="http://schemas.openxmlformats.org/drawingml/2006/main" noGrp="1"/>
+          </p:cNvSpPr>
+          <p:nvPr/>
+        </p:nvSpPr>
+        <p:spPr>
+          <a:xfrm xmlns:a="http://schemas.openxmlformats.org/drawingml/2006/main">
+            <a:off x="1619250" y="3657600"/>
+            <a:ext cx="2381250" cy="495300"/>
+          </a:xfrm>
+          <a:prstGeom xmlns:a="http://schemas.openxmlformats.org/drawingml/2006/main" prst="rect">
+            <a:avLst/>
+          </a:prstGeom>
+          <a:noFill xmlns:a="http://schemas.openxmlformats.org/drawingml/2006/main"/>
+          <a:ln xmlns:a="http://schemas.openxmlformats.org/drawingml/2006/main" w="0">
+            <a:noFill/>
+            <a:prstDash val="solid"/>
+          </a:ln>
+        </p:spPr>
+        <p:txBody>
+          <a:bodyPr xmlns:a="http://schemas.openxmlformats.org/drawingml/2006/main"/>
+          <a:lstStyle xmlns:a="http://schemas.openxmlformats.org/drawingml/2006/main"/>
+          <a:p xmlns:a="http://schemas.openxmlformats.org/drawingml/2006/main">
+            <a:pPr>
+              <a:defRPr sz="1125" b="1">
+                <a:solidFill>
+                  <a:srgbClr val="161616"/>
+                </a:solidFill>
+              </a:defRPr>
+            </a:pPr>
+            <a:r>
+              <a:rPr sz="1125" b="1">
+                <a:solidFill>
+                  <a:srgbClr val="161616"/>
+                </a:solidFill>
+              </a:rPr>
+              <a:t>ПИЛОТЫ И РЕГЛАМЕНТЫ</a:t>
+            </a:r>
+          </a:p>
+        </p:txBody>
+      </p:sp>
+      <p:sp>
+        <p:nvSpPr>
+          <p:cNvPr id="29" name="">
+            <a:extLst xmlns:a="http://schemas.openxmlformats.org/drawingml/2006/main">
+              <a:ext uri="{FF2B5EF4-FFF2-40B4-BE49-F238E27FC236}">
+                <a16:creationId xmlns:a16="http://schemas.microsoft.com/office/drawing/2014/main" id="{3D72BC5E-7920-4D8A-90B2-6BD8C38A3C72}"/>
+              </a:ext>
+            </a:extLst>
+          </p:cNvPr>
+          <p:cNvSpPr>
+            <a:spLocks xmlns:a="http://schemas.openxmlformats.org/drawingml/2006/main" noGrp="1"/>
+          </p:cNvSpPr>
+          <p:nvPr/>
+        </p:nvSpPr>
+        <p:spPr>
+          <a:xfrm xmlns:a="http://schemas.openxmlformats.org/drawingml/2006/main">
+            <a:off x="4210050" y="3400425"/>
+            <a:ext cx="304800" cy="190500"/>
+          </a:xfrm>
+          <a:prstGeom xmlns:a="http://schemas.openxmlformats.org/drawingml/2006/main" prst="rect">
+            <a:avLst/>
+          </a:prstGeom>
+          <a:noFill xmlns:a="http://schemas.openxmlformats.org/drawingml/2006/main"/>
+          <a:ln xmlns:a="http://schemas.openxmlformats.org/drawingml/2006/main" w="0">
+            <a:noFill/>
+            <a:prstDash val="solid"/>
+          </a:ln>
+        </p:spPr>
+        <p:txBody>
+          <a:bodyPr xmlns:a="http://schemas.openxmlformats.org/drawingml/2006/main"/>
+          <a:lstStyle xmlns:a="http://schemas.openxmlformats.org/drawingml/2006/main"/>
+          <a:p xmlns:a="http://schemas.openxmlformats.org/drawingml/2006/main">
+            <a:pPr>
+              <a:defRPr sz="825" b="1">
+                <a:solidFill>
+                  <a:srgbClr val="FF6412"/>
+                </a:solidFill>
+              </a:defRPr>
+            </a:pPr>
+            <a:r>
+              <a:rPr sz="825" b="1">
+                <a:solidFill>
+                  <a:srgbClr val="FF6412"/>
+                </a:solidFill>
+              </a:rPr>
+              <a:t>01</a:t>
+            </a:r>
+          </a:p>
+        </p:txBody>
+      </p:sp>
+      <p:sp>
+        <p:nvSpPr>
+          <p:cNvPr id="30" name="">
+            <a:extLst xmlns:a="http://schemas.openxmlformats.org/drawingml/2006/main">
+              <a:ext uri="{FF2B5EF4-FFF2-40B4-BE49-F238E27FC236}">
+                <a16:creationId xmlns:a16="http://schemas.microsoft.com/office/drawing/2014/main" id="{0179B165-59E7-45CF-8A59-E53D678F24AD}"/>
+              </a:ext>
+            </a:extLst>
+          </p:cNvPr>
+          <p:cNvSpPr>
+            <a:spLocks xmlns:a="http://schemas.openxmlformats.org/drawingml/2006/main" noGrp="1"/>
+          </p:cNvSpPr>
+          <p:nvPr/>
+        </p:nvSpPr>
+        <p:spPr>
+          <a:xfrm xmlns:a="http://schemas.openxmlformats.org/drawingml/2006/main">
+            <a:off x="4572000" y="3343275"/>
+            <a:ext cx="2781300" cy="533400"/>
+          </a:xfrm>
+          <a:prstGeom xmlns:a="http://schemas.openxmlformats.org/drawingml/2006/main" prst="rect">
+            <a:avLst/>
+          </a:prstGeom>
+          <a:noFill xmlns:a="http://schemas.openxmlformats.org/drawingml/2006/main"/>
+          <a:ln xmlns:a="http://schemas.openxmlformats.org/drawingml/2006/main" w="0">
+            <a:noFill/>
+            <a:prstDash val="solid"/>
+          </a:ln>
+        </p:spPr>
+        <p:txBody>
+          <a:bodyPr xmlns:a="http://schemas.openxmlformats.org/drawingml/2006/main"/>
+          <a:lstStyle xmlns:a="http://schemas.openxmlformats.org/drawingml/2006/main"/>
+          <a:p xmlns:a="http://schemas.openxmlformats.org/drawingml/2006/main">
+            <a:pPr>
+              <a:defRPr sz="900">
+                <a:solidFill>
+                  <a:srgbClr val="161616"/>
+                </a:solidFill>
+              </a:defRPr>
+            </a:pPr>
+            <a:r>
+              <a:rPr sz="900">
+                <a:solidFill>
+                  <a:srgbClr val="161616"/>
+                </a:solidFill>
+              </a:rPr>
+              <a:t>{{ROADMAP_2_1}}</a:t>
+            </a:r>
+          </a:p>
+        </p:txBody>
+      </p:sp>
+      <p:sp>
+        <p:nvSpPr>
+          <p:cNvPr id="31" name="">
+            <a:extLst xmlns:a="http://schemas.openxmlformats.org/drawingml/2006/main">
+              <a:ext uri="{FF2B5EF4-FFF2-40B4-BE49-F238E27FC236}">
+                <a16:creationId xmlns:a16="http://schemas.microsoft.com/office/drawing/2014/main" id="{5478DD01-9EB9-47B6-A17B-59032DC020CF}"/>
+              </a:ext>
+            </a:extLst>
+          </p:cNvPr>
+          <p:cNvSpPr>
+            <a:spLocks xmlns:a="http://schemas.openxmlformats.org/drawingml/2006/main" noGrp="1"/>
+          </p:cNvSpPr>
+          <p:nvPr/>
+        </p:nvSpPr>
+        <p:spPr>
+          <a:xfrm xmlns:a="http://schemas.openxmlformats.org/drawingml/2006/main">
+            <a:off x="4572000" y="3943350"/>
+            <a:ext cx="723900" cy="133350"/>
+          </a:xfrm>
+          <a:prstGeom xmlns:a="http://schemas.openxmlformats.org/drawingml/2006/main" prst="rect">
+            <a:avLst/>
+          </a:prstGeom>
+          <a:noFill xmlns:a="http://schemas.openxmlformats.org/drawingml/2006/main"/>
+          <a:ln xmlns:a="http://schemas.openxmlformats.org/drawingml/2006/main" w="0">
+            <a:noFill/>
+            <a:prstDash val="solid"/>
+          </a:ln>
+        </p:spPr>
+        <p:txBody>
+          <a:bodyPr xmlns:a="http://schemas.openxmlformats.org/drawingml/2006/main"/>
+          <a:lstStyle xmlns:a="http://schemas.openxmlformats.org/drawingml/2006/main"/>
+          <a:p xmlns:a="http://schemas.openxmlformats.org/drawingml/2006/main">
+            <a:pPr>
+              <a:defRPr sz="600" b="1">
+                <a:solidFill>
+                  <a:srgbClr val="FF6412"/>
+                </a:solidFill>
+              </a:defRPr>
+            </a:pPr>
+            <a:r>
+              <a:rPr sz="600" b="1">
+                <a:solidFill>
+                  <a:srgbClr val="FF6412"/>
+                </a:solidFill>
+              </a:rPr>
               <a:t>РЕЗУЛЬТАТ</a:t>
             </a:r>
           </a:p>
@@ -5285,37 +5797,37 @@
       </p:sp>
       <p:sp>
         <p:nvSpPr>
-          <p:cNvPr id="21" name="">
-            <a:extLst xmlns:a="http://schemas.openxmlformats.org/drawingml/2006/main">
-              <a:ext uri="{FF2B5EF4-FFF2-40B4-BE49-F238E27FC236}">
-                <a16:creationId xmlns:a16="http://schemas.microsoft.com/office/drawing/2014/main" id="{CA720A26-6F4C-4F4A-81C1-FAA7A541CA6F}"/>
-              </a:ext>
-            </a:extLst>
-          </p:cNvPr>
-          <p:cNvSpPr>
-            <a:spLocks xmlns:a="http://schemas.openxmlformats.org/drawingml/2006/main" noGrp="1"/>
-          </p:cNvSpPr>
-          <p:nvPr/>
-        </p:nvSpPr>
-        <p:spPr>
-          <a:xfrm xmlns:a="http://schemas.openxmlformats.org/drawingml/2006/main">
-            <a:off x="9620250" y="2190750"/>
-            <a:ext cx="1295400" cy="609600"/>
-          </a:xfrm>
-          <a:prstGeom xmlns:a="http://schemas.openxmlformats.org/drawingml/2006/main" prst="rect">
-            <a:avLst/>
-          </a:prstGeom>
-          <a:noFill xmlns:a="http://schemas.openxmlformats.org/drawingml/2006/main"/>
-          <a:ln xmlns:a="http://schemas.openxmlformats.org/drawingml/2006/main" w="0">
-            <a:noFill/>
-            <a:prstDash val="solid"/>
-          </a:ln>
-        </p:spPr>
-        <p:txBody>
-          <a:bodyPr xmlns:a="http://schemas.openxmlformats.org/drawingml/2006/main"/>
-          <a:lstStyle xmlns:a="http://schemas.openxmlformats.org/drawingml/2006/main"/>
-          <a:p xmlns:a="http://schemas.openxmlformats.org/drawingml/2006/main">
-            <a:pPr algn="ctr">
+          <p:cNvPr id="32" name="">
+            <a:extLst xmlns:a="http://schemas.openxmlformats.org/drawingml/2006/main">
+              <a:ext uri="{FF2B5EF4-FFF2-40B4-BE49-F238E27FC236}">
+                <a16:creationId xmlns:a16="http://schemas.microsoft.com/office/drawing/2014/main" id="{63E589A7-D728-4C17-9047-AF002581F827}"/>
+              </a:ext>
+            </a:extLst>
+          </p:cNvPr>
+          <p:cNvSpPr>
+            <a:spLocks xmlns:a="http://schemas.openxmlformats.org/drawingml/2006/main" noGrp="1"/>
+          </p:cNvSpPr>
+          <p:nvPr/>
+        </p:nvSpPr>
+        <p:spPr>
+          <a:xfrm xmlns:a="http://schemas.openxmlformats.org/drawingml/2006/main">
+            <a:off x="4572000" y="4095750"/>
+            <a:ext cx="2781300" cy="285750"/>
+          </a:xfrm>
+          <a:prstGeom xmlns:a="http://schemas.openxmlformats.org/drawingml/2006/main" prst="rect">
+            <a:avLst/>
+          </a:prstGeom>
+          <a:noFill xmlns:a="http://schemas.openxmlformats.org/drawingml/2006/main"/>
+          <a:ln xmlns:a="http://schemas.openxmlformats.org/drawingml/2006/main" w="0">
+            <a:noFill/>
+            <a:prstDash val="solid"/>
+          </a:ln>
+        </p:spPr>
+        <p:txBody>
+          <a:bodyPr xmlns:a="http://schemas.openxmlformats.org/drawingml/2006/main"/>
+          <a:lstStyle xmlns:a="http://schemas.openxmlformats.org/drawingml/2006/main"/>
+          <a:p xmlns:a="http://schemas.openxmlformats.org/drawingml/2006/main">
+            <a:pPr>
               <a:defRPr sz="750" b="1">
                 <a:solidFill>
                   <a:srgbClr val="161616"/>
@@ -5328,28 +5840,259 @@
                   <a:srgbClr val="161616"/>
                 </a:solidFill>
               </a:rPr>
-              <a:t>{{ROADMAP_1_RESULT}}</a:t>
-            </a:r>
-          </a:p>
-        </p:txBody>
-      </p:sp>
-      <p:sp>
-        <p:nvSpPr>
-          <p:cNvPr id="22" name="">
-            <a:extLst xmlns:a="http://schemas.openxmlformats.org/drawingml/2006/main">
-              <a:ext uri="{FF2B5EF4-FFF2-40B4-BE49-F238E27FC236}">
-                <a16:creationId xmlns:a16="http://schemas.microsoft.com/office/drawing/2014/main" id="{ED7BCE37-39D3-4563-BB5A-E7F078AB89E0}"/>
-              </a:ext>
-            </a:extLst>
-          </p:cNvPr>
-          <p:cNvSpPr>
-            <a:spLocks xmlns:a="http://schemas.openxmlformats.org/drawingml/2006/main" noGrp="1"/>
-          </p:cNvSpPr>
-          <p:nvPr/>
-        </p:nvSpPr>
-        <p:spPr>
-          <a:xfrm xmlns:a="http://schemas.openxmlformats.org/drawingml/2006/main">
-            <a:off x="609600" y="3581400"/>
+              <a:t>{{ROADMAP_2_1_RESULT}}</a:t>
+            </a:r>
+          </a:p>
+        </p:txBody>
+      </p:sp>
+      <p:sp>
+        <p:nvSpPr>
+          <p:cNvPr id="33" name="">
+            <a:extLst xmlns:a="http://schemas.openxmlformats.org/drawingml/2006/main">
+              <a:ext uri="{FF2B5EF4-FFF2-40B4-BE49-F238E27FC236}">
+                <a16:creationId xmlns:a16="http://schemas.microsoft.com/office/drawing/2014/main" id="{6953016A-50F7-42F3-91FA-59DAA47AA2CD}"/>
+              </a:ext>
+            </a:extLst>
+          </p:cNvPr>
+          <p:cNvSpPr>
+            <a:spLocks xmlns:a="http://schemas.openxmlformats.org/drawingml/2006/main" noGrp="1"/>
+          </p:cNvSpPr>
+          <p:nvPr/>
+        </p:nvSpPr>
+        <p:spPr>
+          <a:xfrm xmlns:a="http://schemas.openxmlformats.org/drawingml/2006/main">
+            <a:off x="7543800" y="3371850"/>
+            <a:ext cx="9525" cy="952500"/>
+          </a:xfrm>
+          <a:prstGeom xmlns:a="http://schemas.openxmlformats.org/drawingml/2006/main" prst="rect">
+            <a:avLst/>
+          </a:prstGeom>
+          <a:solidFill xmlns:a="http://schemas.openxmlformats.org/drawingml/2006/main">
+            <a:srgbClr val="E4E7EC"/>
+          </a:solidFill>
+          <a:ln xmlns:a="http://schemas.openxmlformats.org/drawingml/2006/main" w="0">
+            <a:noFill/>
+            <a:prstDash val="solid"/>
+          </a:ln>
+        </p:spPr>
+      </p:sp>
+      <p:sp>
+        <p:nvSpPr>
+          <p:cNvPr id="34" name="">
+            <a:extLst xmlns:a="http://schemas.openxmlformats.org/drawingml/2006/main">
+              <a:ext uri="{FF2B5EF4-FFF2-40B4-BE49-F238E27FC236}">
+                <a16:creationId xmlns:a16="http://schemas.microsoft.com/office/drawing/2014/main" id="{171E8BD9-74C6-4B5D-AE88-0E08E535AF85}"/>
+              </a:ext>
+            </a:extLst>
+          </p:cNvPr>
+          <p:cNvSpPr>
+            <a:spLocks xmlns:a="http://schemas.openxmlformats.org/drawingml/2006/main" noGrp="1"/>
+          </p:cNvSpPr>
+          <p:nvPr/>
+        </p:nvSpPr>
+        <p:spPr>
+          <a:xfrm xmlns:a="http://schemas.openxmlformats.org/drawingml/2006/main">
+            <a:off x="7772400" y="3400425"/>
+            <a:ext cx="304800" cy="190500"/>
+          </a:xfrm>
+          <a:prstGeom xmlns:a="http://schemas.openxmlformats.org/drawingml/2006/main" prst="rect">
+            <a:avLst/>
+          </a:prstGeom>
+          <a:noFill xmlns:a="http://schemas.openxmlformats.org/drawingml/2006/main"/>
+          <a:ln xmlns:a="http://schemas.openxmlformats.org/drawingml/2006/main" w="0">
+            <a:noFill/>
+            <a:prstDash val="solid"/>
+          </a:ln>
+        </p:spPr>
+        <p:txBody>
+          <a:bodyPr xmlns:a="http://schemas.openxmlformats.org/drawingml/2006/main"/>
+          <a:lstStyle xmlns:a="http://schemas.openxmlformats.org/drawingml/2006/main"/>
+          <a:p xmlns:a="http://schemas.openxmlformats.org/drawingml/2006/main">
+            <a:pPr>
+              <a:defRPr sz="825" b="1">
+                <a:solidFill>
+                  <a:srgbClr val="FF6412"/>
+                </a:solidFill>
+              </a:defRPr>
+            </a:pPr>
+            <a:r>
+              <a:rPr sz="825" b="1">
+                <a:solidFill>
+                  <a:srgbClr val="FF6412"/>
+                </a:solidFill>
+              </a:rPr>
+              <a:t>02</a:t>
+            </a:r>
+          </a:p>
+        </p:txBody>
+      </p:sp>
+      <p:sp>
+        <p:nvSpPr>
+          <p:cNvPr id="35" name="">
+            <a:extLst xmlns:a="http://schemas.openxmlformats.org/drawingml/2006/main">
+              <a:ext uri="{FF2B5EF4-FFF2-40B4-BE49-F238E27FC236}">
+                <a16:creationId xmlns:a16="http://schemas.microsoft.com/office/drawing/2014/main" id="{6B796C22-12F8-4341-BEE1-5BC763DFD0E7}"/>
+              </a:ext>
+            </a:extLst>
+          </p:cNvPr>
+          <p:cNvSpPr>
+            <a:spLocks xmlns:a="http://schemas.openxmlformats.org/drawingml/2006/main" noGrp="1"/>
+          </p:cNvSpPr>
+          <p:nvPr/>
+        </p:nvSpPr>
+        <p:spPr>
+          <a:xfrm xmlns:a="http://schemas.openxmlformats.org/drawingml/2006/main">
+            <a:off x="8134350" y="3343275"/>
+            <a:ext cx="2705100" cy="533400"/>
+          </a:xfrm>
+          <a:prstGeom xmlns:a="http://schemas.openxmlformats.org/drawingml/2006/main" prst="rect">
+            <a:avLst/>
+          </a:prstGeom>
+          <a:noFill xmlns:a="http://schemas.openxmlformats.org/drawingml/2006/main"/>
+          <a:ln xmlns:a="http://schemas.openxmlformats.org/drawingml/2006/main" w="0">
+            <a:noFill/>
+            <a:prstDash val="solid"/>
+          </a:ln>
+        </p:spPr>
+        <p:txBody>
+          <a:bodyPr xmlns:a="http://schemas.openxmlformats.org/drawingml/2006/main"/>
+          <a:lstStyle xmlns:a="http://schemas.openxmlformats.org/drawingml/2006/main"/>
+          <a:p xmlns:a="http://schemas.openxmlformats.org/drawingml/2006/main">
+            <a:pPr>
+              <a:defRPr sz="900">
+                <a:solidFill>
+                  <a:srgbClr val="161616"/>
+                </a:solidFill>
+              </a:defRPr>
+            </a:pPr>
+            <a:r>
+              <a:rPr sz="900">
+                <a:solidFill>
+                  <a:srgbClr val="161616"/>
+                </a:solidFill>
+              </a:rPr>
+              <a:t>{{ROADMAP_2_2}}</a:t>
+            </a:r>
+          </a:p>
+        </p:txBody>
+      </p:sp>
+      <p:sp>
+        <p:nvSpPr>
+          <p:cNvPr id="36" name="">
+            <a:extLst xmlns:a="http://schemas.openxmlformats.org/drawingml/2006/main">
+              <a:ext uri="{FF2B5EF4-FFF2-40B4-BE49-F238E27FC236}">
+                <a16:creationId xmlns:a16="http://schemas.microsoft.com/office/drawing/2014/main" id="{59FFB181-883E-4FAE-8DEF-CB80244C9609}"/>
+              </a:ext>
+            </a:extLst>
+          </p:cNvPr>
+          <p:cNvSpPr>
+            <a:spLocks xmlns:a="http://schemas.openxmlformats.org/drawingml/2006/main" noGrp="1"/>
+          </p:cNvSpPr>
+          <p:nvPr/>
+        </p:nvSpPr>
+        <p:spPr>
+          <a:xfrm xmlns:a="http://schemas.openxmlformats.org/drawingml/2006/main">
+            <a:off x="8134350" y="3943350"/>
+            <a:ext cx="723900" cy="133350"/>
+          </a:xfrm>
+          <a:prstGeom xmlns:a="http://schemas.openxmlformats.org/drawingml/2006/main" prst="rect">
+            <a:avLst/>
+          </a:prstGeom>
+          <a:noFill xmlns:a="http://schemas.openxmlformats.org/drawingml/2006/main"/>
+          <a:ln xmlns:a="http://schemas.openxmlformats.org/drawingml/2006/main" w="0">
+            <a:noFill/>
+            <a:prstDash val="solid"/>
+          </a:ln>
+        </p:spPr>
+        <p:txBody>
+          <a:bodyPr xmlns:a="http://schemas.openxmlformats.org/drawingml/2006/main"/>
+          <a:lstStyle xmlns:a="http://schemas.openxmlformats.org/drawingml/2006/main"/>
+          <a:p xmlns:a="http://schemas.openxmlformats.org/drawingml/2006/main">
+            <a:pPr>
+              <a:defRPr sz="600" b="1">
+                <a:solidFill>
+                  <a:srgbClr val="FF6412"/>
+                </a:solidFill>
+              </a:defRPr>
+            </a:pPr>
+            <a:r>
+              <a:rPr sz="600" b="1">
+                <a:solidFill>
+                  <a:srgbClr val="FF6412"/>
+                </a:solidFill>
+              </a:rPr>
+              <a:t>РЕЗУЛЬТАТ</a:t>
+            </a:r>
+          </a:p>
+        </p:txBody>
+      </p:sp>
+      <p:sp>
+        <p:nvSpPr>
+          <p:cNvPr id="37" name="">
+            <a:extLst xmlns:a="http://schemas.openxmlformats.org/drawingml/2006/main">
+              <a:ext uri="{FF2B5EF4-FFF2-40B4-BE49-F238E27FC236}">
+                <a16:creationId xmlns:a16="http://schemas.microsoft.com/office/drawing/2014/main" id="{D9112CCE-8DA8-4202-8D3C-54874DFFDCB5}"/>
+              </a:ext>
+            </a:extLst>
+          </p:cNvPr>
+          <p:cNvSpPr>
+            <a:spLocks xmlns:a="http://schemas.openxmlformats.org/drawingml/2006/main" noGrp="1"/>
+          </p:cNvSpPr>
+          <p:nvPr/>
+        </p:nvSpPr>
+        <p:spPr>
+          <a:xfrm xmlns:a="http://schemas.openxmlformats.org/drawingml/2006/main">
+            <a:off x="8134350" y="4095750"/>
+            <a:ext cx="2705100" cy="285750"/>
+          </a:xfrm>
+          <a:prstGeom xmlns:a="http://schemas.openxmlformats.org/drawingml/2006/main" prst="rect">
+            <a:avLst/>
+          </a:prstGeom>
+          <a:noFill xmlns:a="http://schemas.openxmlformats.org/drawingml/2006/main"/>
+          <a:ln xmlns:a="http://schemas.openxmlformats.org/drawingml/2006/main" w="0">
+            <a:noFill/>
+            <a:prstDash val="solid"/>
+          </a:ln>
+        </p:spPr>
+        <p:txBody>
+          <a:bodyPr xmlns:a="http://schemas.openxmlformats.org/drawingml/2006/main"/>
+          <a:lstStyle xmlns:a="http://schemas.openxmlformats.org/drawingml/2006/main"/>
+          <a:p xmlns:a="http://schemas.openxmlformats.org/drawingml/2006/main">
+            <a:pPr>
+              <a:defRPr sz="750" b="1">
+                <a:solidFill>
+                  <a:srgbClr val="161616"/>
+                </a:solidFill>
+              </a:defRPr>
+            </a:pPr>
+            <a:r>
+              <a:rPr sz="750" b="1">
+                <a:solidFill>
+                  <a:srgbClr val="161616"/>
+                </a:solidFill>
+              </a:rPr>
+              <a:t>{{ROADMAP_2_2_RESULT}}</a:t>
+            </a:r>
+          </a:p>
+        </p:txBody>
+      </p:sp>
+      <p:sp>
+        <p:nvSpPr>
+          <p:cNvPr id="38" name="">
+            <a:extLst xmlns:a="http://schemas.openxmlformats.org/drawingml/2006/main">
+              <a:ext uri="{FF2B5EF4-FFF2-40B4-BE49-F238E27FC236}">
+                <a16:creationId xmlns:a16="http://schemas.microsoft.com/office/drawing/2014/main" id="{666FD83F-C4F4-454E-9981-7A929CC7AB0F}"/>
+              </a:ext>
+            </a:extLst>
+          </p:cNvPr>
+          <p:cNvSpPr>
+            <a:spLocks xmlns:a="http://schemas.openxmlformats.org/drawingml/2006/main" noGrp="1"/>
+          </p:cNvSpPr>
+          <p:nvPr/>
+        </p:nvSpPr>
+        <p:spPr>
+          <a:xfrm xmlns:a="http://schemas.openxmlformats.org/drawingml/2006/main">
+            <a:off x="609600" y="5048250"/>
             <a:ext cx="514350" cy="514350"/>
           </a:xfrm>
           <a:prstGeom xmlns:a="http://schemas.openxmlformats.org/drawingml/2006/main" prst="ellipse">
@@ -5366,21 +6109,21 @@
       </p:sp>
       <p:sp>
         <p:nvSpPr>
-          <p:cNvPr id="23" name="">
-            <a:extLst xmlns:a="http://schemas.openxmlformats.org/drawingml/2006/main">
-              <a:ext uri="{FF2B5EF4-FFF2-40B4-BE49-F238E27FC236}">
-                <a16:creationId xmlns:a16="http://schemas.microsoft.com/office/drawing/2014/main" id="{96D059FE-00D2-4720-9710-D6FC6556ABB9}"/>
-              </a:ext>
-            </a:extLst>
-          </p:cNvPr>
-          <p:cNvSpPr>
-            <a:spLocks xmlns:a="http://schemas.openxmlformats.org/drawingml/2006/main" noGrp="1"/>
-          </p:cNvSpPr>
-          <p:nvPr/>
-        </p:nvSpPr>
-        <p:spPr>
-          <a:xfrm xmlns:a="http://schemas.openxmlformats.org/drawingml/2006/main">
-            <a:off x="704850" y="3705225"/>
+          <p:cNvPr id="39" name="">
+            <a:extLst xmlns:a="http://schemas.openxmlformats.org/drawingml/2006/main">
+              <a:ext uri="{FF2B5EF4-FFF2-40B4-BE49-F238E27FC236}">
+                <a16:creationId xmlns:a16="http://schemas.microsoft.com/office/drawing/2014/main" id="{1BE2D343-4655-48CE-A7EE-EAD273150818}"/>
+              </a:ext>
+            </a:extLst>
+          </p:cNvPr>
+          <p:cNvSpPr>
+            <a:spLocks xmlns:a="http://schemas.openxmlformats.org/drawingml/2006/main" noGrp="1"/>
+          </p:cNvSpPr>
+          <p:nvPr/>
+        </p:nvSpPr>
+        <p:spPr>
+          <a:xfrm xmlns:a="http://schemas.openxmlformats.org/drawingml/2006/main">
+            <a:off x="704850" y="5172075"/>
             <a:ext cx="323850" cy="228600"/>
           </a:xfrm>
           <a:prstGeom xmlns:a="http://schemas.openxmlformats.org/drawingml/2006/main" prst="rect">
@@ -5409,28 +6152,28 @@
                   <a:srgbClr val="FFFFFF"/>
                 </a:solidFill>
               </a:rPr>
-              <a:t>2</a:t>
-            </a:r>
-          </a:p>
-        </p:txBody>
-      </p:sp>
-      <p:sp>
-        <p:nvSpPr>
-          <p:cNvPr id="24" name="">
-            <a:extLst xmlns:a="http://schemas.openxmlformats.org/drawingml/2006/main">
-              <a:ext uri="{FF2B5EF4-FFF2-40B4-BE49-F238E27FC236}">
-                <a16:creationId xmlns:a16="http://schemas.microsoft.com/office/drawing/2014/main" id="{25F79F60-96D2-4FC7-99F1-A76C7EFD04A9}"/>
-              </a:ext>
-            </a:extLst>
-          </p:cNvPr>
-          <p:cNvSpPr>
-            <a:spLocks xmlns:a="http://schemas.openxmlformats.org/drawingml/2006/main" noGrp="1"/>
-          </p:cNvSpPr>
-          <p:nvPr/>
-        </p:nvSpPr>
-        <p:spPr>
-          <a:xfrm xmlns:a="http://schemas.openxmlformats.org/drawingml/2006/main">
-            <a:off x="1390650" y="3219450"/>
+              <a:t>3</a:t>
+            </a:r>
+          </a:p>
+        </p:txBody>
+      </p:sp>
+      <p:sp>
+        <p:nvSpPr>
+          <p:cNvPr id="40" name="">
+            <a:extLst xmlns:a="http://schemas.openxmlformats.org/drawingml/2006/main">
+              <a:ext uri="{FF2B5EF4-FFF2-40B4-BE49-F238E27FC236}">
+                <a16:creationId xmlns:a16="http://schemas.microsoft.com/office/drawing/2014/main" id="{6B668385-026E-4592-A523-0DE7478C62BD}"/>
+              </a:ext>
+            </a:extLst>
+          </p:cNvPr>
+          <p:cNvSpPr>
+            <a:spLocks xmlns:a="http://schemas.openxmlformats.org/drawingml/2006/main" noGrp="1"/>
+          </p:cNvSpPr>
+          <p:nvPr/>
+        </p:nvSpPr>
+        <p:spPr>
+          <a:xfrm xmlns:a="http://schemas.openxmlformats.org/drawingml/2006/main">
+            <a:off x="1390650" y="4686300"/>
             <a:ext cx="9810750" cy="1257300"/>
           </a:xfrm>
           <a:prstGeom xmlns:a="http://schemas.openxmlformats.org/drawingml/2006/main" prst="roundRect">
@@ -5451,561 +6194,10 @@
       </p:sp>
       <p:sp>
         <p:nvSpPr>
-          <p:cNvPr id="25" name="">
-            <a:extLst xmlns:a="http://schemas.openxmlformats.org/drawingml/2006/main">
-              <a:ext uri="{FF2B5EF4-FFF2-40B4-BE49-F238E27FC236}">
-                <a16:creationId xmlns:a16="http://schemas.microsoft.com/office/drawing/2014/main" id="{C9BE4A4C-EFD4-49CC-9DBA-9E34CE182D05}"/>
-              </a:ext>
-            </a:extLst>
-          </p:cNvPr>
-          <p:cNvSpPr>
-            <a:spLocks xmlns:a="http://schemas.openxmlformats.org/drawingml/2006/main" noGrp="1"/>
-          </p:cNvSpPr>
-          <p:nvPr/>
-        </p:nvSpPr>
-        <p:spPr>
-          <a:xfrm xmlns:a="http://schemas.openxmlformats.org/drawingml/2006/main">
-            <a:off x="1619250" y="3371850"/>
-            <a:ext cx="1409700" cy="228600"/>
-          </a:xfrm>
-          <a:prstGeom xmlns:a="http://schemas.openxmlformats.org/drawingml/2006/main" prst="rect">
-            <a:avLst/>
-          </a:prstGeom>
-          <a:noFill xmlns:a="http://schemas.openxmlformats.org/drawingml/2006/main"/>
-          <a:ln xmlns:a="http://schemas.openxmlformats.org/drawingml/2006/main" w="0">
-            <a:noFill/>
-            <a:prstDash val="solid"/>
-          </a:ln>
-        </p:spPr>
-        <p:txBody>
-          <a:bodyPr xmlns:a="http://schemas.openxmlformats.org/drawingml/2006/main"/>
-          <a:lstStyle xmlns:a="http://schemas.openxmlformats.org/drawingml/2006/main"/>
-          <a:p xmlns:a="http://schemas.openxmlformats.org/drawingml/2006/main">
-            <a:pPr>
-              <a:defRPr sz="1125" b="1">
-                <a:solidFill>
-                  <a:srgbClr val="FF6412"/>
-                </a:solidFill>
-              </a:defRPr>
-            </a:pPr>
-            <a:r>
-              <a:rPr sz="1125" b="1">
-                <a:solidFill>
-                  <a:srgbClr val="FF6412"/>
-                </a:solidFill>
-              </a:rPr>
-              <a:t>31–60 дней</a:t>
-            </a:r>
-          </a:p>
-        </p:txBody>
-      </p:sp>
-      <p:sp>
-        <p:nvSpPr>
-          <p:cNvPr id="26" name="">
-            <a:extLst xmlns:a="http://schemas.openxmlformats.org/drawingml/2006/main">
-              <a:ext uri="{FF2B5EF4-FFF2-40B4-BE49-F238E27FC236}">
-                <a16:creationId xmlns:a16="http://schemas.microsoft.com/office/drawing/2014/main" id="{837F4EF2-C991-4DFC-A8A5-B2929FCFC1E9}"/>
-              </a:ext>
-            </a:extLst>
-          </p:cNvPr>
-          <p:cNvSpPr>
-            <a:spLocks xmlns:a="http://schemas.openxmlformats.org/drawingml/2006/main" noGrp="1"/>
-          </p:cNvSpPr>
-          <p:nvPr/>
-        </p:nvSpPr>
-        <p:spPr>
-          <a:xfrm xmlns:a="http://schemas.openxmlformats.org/drawingml/2006/main">
-            <a:off x="1619250" y="3657600"/>
-            <a:ext cx="2381250" cy="495300"/>
-          </a:xfrm>
-          <a:prstGeom xmlns:a="http://schemas.openxmlformats.org/drawingml/2006/main" prst="rect">
-            <a:avLst/>
-          </a:prstGeom>
-          <a:noFill xmlns:a="http://schemas.openxmlformats.org/drawingml/2006/main"/>
-          <a:ln xmlns:a="http://schemas.openxmlformats.org/drawingml/2006/main" w="0">
-            <a:noFill/>
-            <a:prstDash val="solid"/>
-          </a:ln>
-        </p:spPr>
-        <p:txBody>
-          <a:bodyPr xmlns:a="http://schemas.openxmlformats.org/drawingml/2006/main"/>
-          <a:lstStyle xmlns:a="http://schemas.openxmlformats.org/drawingml/2006/main"/>
-          <a:p xmlns:a="http://schemas.openxmlformats.org/drawingml/2006/main">
-            <a:pPr>
-              <a:defRPr sz="1125" b="1">
-                <a:solidFill>
-                  <a:srgbClr val="161616"/>
-                </a:solidFill>
-              </a:defRPr>
-            </a:pPr>
-            <a:r>
-              <a:rPr sz="1125" b="1">
-                <a:solidFill>
-                  <a:srgbClr val="161616"/>
-                </a:solidFill>
-              </a:rPr>
-              <a:t>ПИЛОТЫ И РЕГЛАМЕНТЫ</a:t>
-            </a:r>
-          </a:p>
-        </p:txBody>
-      </p:sp>
-      <p:sp>
-        <p:nvSpPr>
-          <p:cNvPr id="27" name="">
-            <a:extLst xmlns:a="http://schemas.openxmlformats.org/drawingml/2006/main">
-              <a:ext uri="{FF2B5EF4-FFF2-40B4-BE49-F238E27FC236}">
-                <a16:creationId xmlns:a16="http://schemas.microsoft.com/office/drawing/2014/main" id="{2F1C3D32-4D80-47F5-A7FE-56C761913525}"/>
-              </a:ext>
-            </a:extLst>
-          </p:cNvPr>
-          <p:cNvSpPr>
-            <a:spLocks xmlns:a="http://schemas.openxmlformats.org/drawingml/2006/main" noGrp="1"/>
-          </p:cNvSpPr>
-          <p:nvPr/>
-        </p:nvSpPr>
-        <p:spPr>
-          <a:xfrm xmlns:a="http://schemas.openxmlformats.org/drawingml/2006/main">
-            <a:off x="4210050" y="3419475"/>
-            <a:ext cx="304800" cy="190500"/>
-          </a:xfrm>
-          <a:prstGeom xmlns:a="http://schemas.openxmlformats.org/drawingml/2006/main" prst="rect">
-            <a:avLst/>
-          </a:prstGeom>
-          <a:noFill xmlns:a="http://schemas.openxmlformats.org/drawingml/2006/main"/>
-          <a:ln xmlns:a="http://schemas.openxmlformats.org/drawingml/2006/main" w="0">
-            <a:noFill/>
-            <a:prstDash val="solid"/>
-          </a:ln>
-        </p:spPr>
-        <p:txBody>
-          <a:bodyPr xmlns:a="http://schemas.openxmlformats.org/drawingml/2006/main"/>
-          <a:lstStyle xmlns:a="http://schemas.openxmlformats.org/drawingml/2006/main"/>
-          <a:p xmlns:a="http://schemas.openxmlformats.org/drawingml/2006/main">
-            <a:pPr>
-              <a:defRPr sz="825" b="1">
-                <a:solidFill>
-                  <a:srgbClr val="FF6412"/>
-                </a:solidFill>
-              </a:defRPr>
-            </a:pPr>
-            <a:r>
-              <a:rPr sz="825" b="1">
-                <a:solidFill>
-                  <a:srgbClr val="FF6412"/>
-                </a:solidFill>
-              </a:rPr>
-              <a:t>01</a:t>
-            </a:r>
-          </a:p>
-        </p:txBody>
-      </p:sp>
-      <p:sp>
-        <p:nvSpPr>
-          <p:cNvPr id="28" name="">
-            <a:extLst xmlns:a="http://schemas.openxmlformats.org/drawingml/2006/main">
-              <a:ext uri="{FF2B5EF4-FFF2-40B4-BE49-F238E27FC236}">
-                <a16:creationId xmlns:a16="http://schemas.microsoft.com/office/drawing/2014/main" id="{AE4E8800-75F4-4FCC-B10F-2503B88D8043}"/>
-              </a:ext>
-            </a:extLst>
-          </p:cNvPr>
-          <p:cNvSpPr>
-            <a:spLocks xmlns:a="http://schemas.openxmlformats.org/drawingml/2006/main" noGrp="1"/>
-          </p:cNvSpPr>
-          <p:nvPr/>
-        </p:nvSpPr>
-        <p:spPr>
-          <a:xfrm xmlns:a="http://schemas.openxmlformats.org/drawingml/2006/main">
-            <a:off x="4572000" y="3362325"/>
-            <a:ext cx="2362200" cy="895350"/>
-          </a:xfrm>
-          <a:prstGeom xmlns:a="http://schemas.openxmlformats.org/drawingml/2006/main" prst="rect">
-            <a:avLst/>
-          </a:prstGeom>
-          <a:noFill xmlns:a="http://schemas.openxmlformats.org/drawingml/2006/main"/>
-          <a:ln xmlns:a="http://schemas.openxmlformats.org/drawingml/2006/main" w="0">
-            <a:noFill/>
-            <a:prstDash val="solid"/>
-          </a:ln>
-        </p:spPr>
-        <p:txBody>
-          <a:bodyPr xmlns:a="http://schemas.openxmlformats.org/drawingml/2006/main"/>
-          <a:lstStyle xmlns:a="http://schemas.openxmlformats.org/drawingml/2006/main"/>
-          <a:p xmlns:a="http://schemas.openxmlformats.org/drawingml/2006/main">
-            <a:pPr>
-              <a:defRPr sz="975">
-                <a:solidFill>
-                  <a:srgbClr val="161616"/>
-                </a:solidFill>
-              </a:defRPr>
-            </a:pPr>
-            <a:r>
-              <a:rPr sz="975">
-                <a:solidFill>
-                  <a:srgbClr val="161616"/>
-                </a:solidFill>
-              </a:rPr>
-              <a:t>{{ROADMAP_2_1}}</a:t>
-            </a:r>
-          </a:p>
-        </p:txBody>
-      </p:sp>
-      <p:sp>
-        <p:nvSpPr>
-          <p:cNvPr id="29" name="">
-            <a:extLst xmlns:a="http://schemas.openxmlformats.org/drawingml/2006/main">
-              <a:ext uri="{FF2B5EF4-FFF2-40B4-BE49-F238E27FC236}">
-                <a16:creationId xmlns:a16="http://schemas.microsoft.com/office/drawing/2014/main" id="{8E7E08FD-78A7-462D-AF2B-69EBD5D2AE7B}"/>
-              </a:ext>
-            </a:extLst>
-          </p:cNvPr>
-          <p:cNvSpPr>
-            <a:spLocks xmlns:a="http://schemas.openxmlformats.org/drawingml/2006/main" noGrp="1"/>
-          </p:cNvSpPr>
-          <p:nvPr/>
-        </p:nvSpPr>
-        <p:spPr>
-          <a:xfrm xmlns:a="http://schemas.openxmlformats.org/drawingml/2006/main">
-            <a:off x="7124700" y="3419475"/>
-            <a:ext cx="304800" cy="190500"/>
-          </a:xfrm>
-          <a:prstGeom xmlns:a="http://schemas.openxmlformats.org/drawingml/2006/main" prst="rect">
-            <a:avLst/>
-          </a:prstGeom>
-          <a:noFill xmlns:a="http://schemas.openxmlformats.org/drawingml/2006/main"/>
-          <a:ln xmlns:a="http://schemas.openxmlformats.org/drawingml/2006/main" w="0">
-            <a:noFill/>
-            <a:prstDash val="solid"/>
-          </a:ln>
-        </p:spPr>
-        <p:txBody>
-          <a:bodyPr xmlns:a="http://schemas.openxmlformats.org/drawingml/2006/main"/>
-          <a:lstStyle xmlns:a="http://schemas.openxmlformats.org/drawingml/2006/main"/>
-          <a:p xmlns:a="http://schemas.openxmlformats.org/drawingml/2006/main">
-            <a:pPr>
-              <a:defRPr sz="825" b="1">
-                <a:solidFill>
-                  <a:srgbClr val="FF6412"/>
-                </a:solidFill>
-              </a:defRPr>
-            </a:pPr>
-            <a:r>
-              <a:rPr sz="825" b="1">
-                <a:solidFill>
-                  <a:srgbClr val="FF6412"/>
-                </a:solidFill>
-              </a:rPr>
-              <a:t>02</a:t>
-            </a:r>
-          </a:p>
-        </p:txBody>
-      </p:sp>
-      <p:sp>
-        <p:nvSpPr>
-          <p:cNvPr id="30" name="">
-            <a:extLst xmlns:a="http://schemas.openxmlformats.org/drawingml/2006/main">
-              <a:ext uri="{FF2B5EF4-FFF2-40B4-BE49-F238E27FC236}">
-                <a16:creationId xmlns:a16="http://schemas.microsoft.com/office/drawing/2014/main" id="{CA075544-D867-49FD-A8A4-D337197DCCB6}"/>
-              </a:ext>
-            </a:extLst>
-          </p:cNvPr>
-          <p:cNvSpPr>
-            <a:spLocks xmlns:a="http://schemas.openxmlformats.org/drawingml/2006/main" noGrp="1"/>
-          </p:cNvSpPr>
-          <p:nvPr/>
-        </p:nvSpPr>
-        <p:spPr>
-          <a:xfrm xmlns:a="http://schemas.openxmlformats.org/drawingml/2006/main">
-            <a:off x="7486650" y="3362325"/>
-            <a:ext cx="1847850" cy="895350"/>
-          </a:xfrm>
-          <a:prstGeom xmlns:a="http://schemas.openxmlformats.org/drawingml/2006/main" prst="rect">
-            <a:avLst/>
-          </a:prstGeom>
-          <a:noFill xmlns:a="http://schemas.openxmlformats.org/drawingml/2006/main"/>
-          <a:ln xmlns:a="http://schemas.openxmlformats.org/drawingml/2006/main" w="0">
-            <a:noFill/>
-            <a:prstDash val="solid"/>
-          </a:ln>
-        </p:spPr>
-        <p:txBody>
-          <a:bodyPr xmlns:a="http://schemas.openxmlformats.org/drawingml/2006/main"/>
-          <a:lstStyle xmlns:a="http://schemas.openxmlformats.org/drawingml/2006/main"/>
-          <a:p xmlns:a="http://schemas.openxmlformats.org/drawingml/2006/main">
-            <a:pPr>
-              <a:defRPr sz="975">
-                <a:solidFill>
-                  <a:srgbClr val="161616"/>
-                </a:solidFill>
-              </a:defRPr>
-            </a:pPr>
-            <a:r>
-              <a:rPr sz="975">
-                <a:solidFill>
-                  <a:srgbClr val="161616"/>
-                </a:solidFill>
-              </a:rPr>
-              <a:t>{{ROADMAP_2_2}}</a:t>
-            </a:r>
-          </a:p>
-        </p:txBody>
-      </p:sp>
-      <p:sp>
-        <p:nvSpPr>
-          <p:cNvPr id="31" name="">
-            <a:extLst xmlns:a="http://schemas.openxmlformats.org/drawingml/2006/main">
-              <a:ext uri="{FF2B5EF4-FFF2-40B4-BE49-F238E27FC236}">
-                <a16:creationId xmlns:a16="http://schemas.microsoft.com/office/drawing/2014/main" id="{3A003997-1FB5-4D3F-B2C9-9CBD3C3D6F97}"/>
-              </a:ext>
-            </a:extLst>
-          </p:cNvPr>
-          <p:cNvSpPr>
-            <a:spLocks xmlns:a="http://schemas.openxmlformats.org/drawingml/2006/main" noGrp="1"/>
-          </p:cNvSpPr>
-          <p:nvPr/>
-        </p:nvSpPr>
-        <p:spPr>
-          <a:xfrm xmlns:a="http://schemas.openxmlformats.org/drawingml/2006/main">
-            <a:off x="9505950" y="3352800"/>
-            <a:ext cx="1524000" cy="990600"/>
-          </a:xfrm>
-          <a:prstGeom xmlns:a="http://schemas.openxmlformats.org/drawingml/2006/main" prst="roundRect">
-            <a:avLst>
-              <a:gd name="adj" fmla="val 7692"/>
-            </a:avLst>
-          </a:prstGeom>
-          <a:solidFill xmlns:a="http://schemas.openxmlformats.org/drawingml/2006/main">
-            <a:srgbClr val="FFFFFF"/>
-          </a:solidFill>
-          <a:ln xmlns:a="http://schemas.openxmlformats.org/drawingml/2006/main" w="9525">
-            <a:solidFill>
-              <a:srgbClr val="E4E7EC"/>
-            </a:solidFill>
-            <a:prstDash val="solid"/>
-          </a:ln>
-        </p:spPr>
-      </p:sp>
-      <p:sp>
-        <p:nvSpPr>
-          <p:cNvPr id="32" name="">
-            <a:extLst xmlns:a="http://schemas.openxmlformats.org/drawingml/2006/main">
-              <a:ext uri="{FF2B5EF4-FFF2-40B4-BE49-F238E27FC236}">
-                <a16:creationId xmlns:a16="http://schemas.microsoft.com/office/drawing/2014/main" id="{7EA09651-1576-4C85-9FB0-A0F5E5AAE7F5}"/>
-              </a:ext>
-            </a:extLst>
-          </p:cNvPr>
-          <p:cNvSpPr>
-            <a:spLocks xmlns:a="http://schemas.openxmlformats.org/drawingml/2006/main" noGrp="1"/>
-          </p:cNvSpPr>
-          <p:nvPr/>
-        </p:nvSpPr>
-        <p:spPr>
-          <a:xfrm xmlns:a="http://schemas.openxmlformats.org/drawingml/2006/main">
-            <a:off x="9620250" y="3448050"/>
-            <a:ext cx="1295400" cy="171450"/>
-          </a:xfrm>
-          <a:prstGeom xmlns:a="http://schemas.openxmlformats.org/drawingml/2006/main" prst="rect">
-            <a:avLst/>
-          </a:prstGeom>
-          <a:noFill xmlns:a="http://schemas.openxmlformats.org/drawingml/2006/main"/>
-          <a:ln xmlns:a="http://schemas.openxmlformats.org/drawingml/2006/main" w="0">
-            <a:noFill/>
-            <a:prstDash val="solid"/>
-          </a:ln>
-        </p:spPr>
-        <p:txBody>
-          <a:bodyPr xmlns:a="http://schemas.openxmlformats.org/drawingml/2006/main"/>
-          <a:lstStyle xmlns:a="http://schemas.openxmlformats.org/drawingml/2006/main"/>
-          <a:p xmlns:a="http://schemas.openxmlformats.org/drawingml/2006/main">
-            <a:pPr algn="ctr">
-              <a:defRPr sz="675" b="1">
-                <a:solidFill>
-                  <a:srgbClr val="FF6412"/>
-                </a:solidFill>
-              </a:defRPr>
-            </a:pPr>
-            <a:r>
-              <a:rPr sz="675" b="1">
-                <a:solidFill>
-                  <a:srgbClr val="FF6412"/>
-                </a:solidFill>
-              </a:rPr>
-              <a:t>РЕЗУЛЬТАТ</a:t>
-            </a:r>
-          </a:p>
-        </p:txBody>
-      </p:sp>
-      <p:sp>
-        <p:nvSpPr>
-          <p:cNvPr id="33" name="">
-            <a:extLst xmlns:a="http://schemas.openxmlformats.org/drawingml/2006/main">
-              <a:ext uri="{FF2B5EF4-FFF2-40B4-BE49-F238E27FC236}">
-                <a16:creationId xmlns:a16="http://schemas.microsoft.com/office/drawing/2014/main" id="{72EB3CD9-9257-4165-9F94-5C50EC19C93B}"/>
-              </a:ext>
-            </a:extLst>
-          </p:cNvPr>
-          <p:cNvSpPr>
-            <a:spLocks xmlns:a="http://schemas.openxmlformats.org/drawingml/2006/main" noGrp="1"/>
-          </p:cNvSpPr>
-          <p:nvPr/>
-        </p:nvSpPr>
-        <p:spPr>
-          <a:xfrm xmlns:a="http://schemas.openxmlformats.org/drawingml/2006/main">
-            <a:off x="9620250" y="3657600"/>
-            <a:ext cx="1295400" cy="609600"/>
-          </a:xfrm>
-          <a:prstGeom xmlns:a="http://schemas.openxmlformats.org/drawingml/2006/main" prst="rect">
-            <a:avLst/>
-          </a:prstGeom>
-          <a:noFill xmlns:a="http://schemas.openxmlformats.org/drawingml/2006/main"/>
-          <a:ln xmlns:a="http://schemas.openxmlformats.org/drawingml/2006/main" w="0">
-            <a:noFill/>
-            <a:prstDash val="solid"/>
-          </a:ln>
-        </p:spPr>
-        <p:txBody>
-          <a:bodyPr xmlns:a="http://schemas.openxmlformats.org/drawingml/2006/main"/>
-          <a:lstStyle xmlns:a="http://schemas.openxmlformats.org/drawingml/2006/main"/>
-          <a:p xmlns:a="http://schemas.openxmlformats.org/drawingml/2006/main">
-            <a:pPr algn="ctr">
-              <a:defRPr sz="750" b="1">
-                <a:solidFill>
-                  <a:srgbClr val="161616"/>
-                </a:solidFill>
-              </a:defRPr>
-            </a:pPr>
-            <a:r>
-              <a:rPr sz="750" b="1">
-                <a:solidFill>
-                  <a:srgbClr val="161616"/>
-                </a:solidFill>
-              </a:rPr>
-              <a:t>{{ROADMAP_2_RESULT}}</a:t>
-            </a:r>
-          </a:p>
-        </p:txBody>
-      </p:sp>
-      <p:sp>
-        <p:nvSpPr>
-          <p:cNvPr id="34" name="">
-            <a:extLst xmlns:a="http://schemas.openxmlformats.org/drawingml/2006/main">
-              <a:ext uri="{FF2B5EF4-FFF2-40B4-BE49-F238E27FC236}">
-                <a16:creationId xmlns:a16="http://schemas.microsoft.com/office/drawing/2014/main" id="{E69A8841-3E5E-43F6-A6E2-1194A0F8D159}"/>
-              </a:ext>
-            </a:extLst>
-          </p:cNvPr>
-          <p:cNvSpPr>
-            <a:spLocks xmlns:a="http://schemas.openxmlformats.org/drawingml/2006/main" noGrp="1"/>
-          </p:cNvSpPr>
-          <p:nvPr/>
-        </p:nvSpPr>
-        <p:spPr>
-          <a:xfrm xmlns:a="http://schemas.openxmlformats.org/drawingml/2006/main">
-            <a:off x="609600" y="5048250"/>
-            <a:ext cx="514350" cy="514350"/>
-          </a:xfrm>
-          <a:prstGeom xmlns:a="http://schemas.openxmlformats.org/drawingml/2006/main" prst="ellipse">
-            <a:avLst/>
-          </a:prstGeom>
-          <a:solidFill xmlns:a="http://schemas.openxmlformats.org/drawingml/2006/main">
-            <a:srgbClr val="161616"/>
-          </a:solidFill>
-          <a:ln xmlns:a="http://schemas.openxmlformats.org/drawingml/2006/main" w="0">
-            <a:noFill/>
-            <a:prstDash val="solid"/>
-          </a:ln>
-        </p:spPr>
-      </p:sp>
-      <p:sp>
-        <p:nvSpPr>
-          <p:cNvPr id="35" name="">
-            <a:extLst xmlns:a="http://schemas.openxmlformats.org/drawingml/2006/main">
-              <a:ext uri="{FF2B5EF4-FFF2-40B4-BE49-F238E27FC236}">
-                <a16:creationId xmlns:a16="http://schemas.microsoft.com/office/drawing/2014/main" id="{F8A5F240-8344-46A8-8BE4-19C85B6FC546}"/>
-              </a:ext>
-            </a:extLst>
-          </p:cNvPr>
-          <p:cNvSpPr>
-            <a:spLocks xmlns:a="http://schemas.openxmlformats.org/drawingml/2006/main" noGrp="1"/>
-          </p:cNvSpPr>
-          <p:nvPr/>
-        </p:nvSpPr>
-        <p:spPr>
-          <a:xfrm xmlns:a="http://schemas.openxmlformats.org/drawingml/2006/main">
-            <a:off x="704850" y="5172075"/>
-            <a:ext cx="323850" cy="228600"/>
-          </a:xfrm>
-          <a:prstGeom xmlns:a="http://schemas.openxmlformats.org/drawingml/2006/main" prst="rect">
-            <a:avLst/>
-          </a:prstGeom>
-          <a:noFill xmlns:a="http://schemas.openxmlformats.org/drawingml/2006/main"/>
-          <a:ln xmlns:a="http://schemas.openxmlformats.org/drawingml/2006/main" w="0">
-            <a:noFill/>
-            <a:prstDash val="solid"/>
-          </a:ln>
-        </p:spPr>
-        <p:txBody>
-          <a:bodyPr xmlns:a="http://schemas.openxmlformats.org/drawingml/2006/main"/>
-          <a:lstStyle xmlns:a="http://schemas.openxmlformats.org/drawingml/2006/main"/>
-          <a:p xmlns:a="http://schemas.openxmlformats.org/drawingml/2006/main">
-            <a:pPr algn="ctr">
-              <a:defRPr sz="1200" b="1">
-                <a:solidFill>
-                  <a:srgbClr val="FFFFFF"/>
-                </a:solidFill>
-              </a:defRPr>
-            </a:pPr>
-            <a:r>
-              <a:rPr sz="1200" b="1">
-                <a:solidFill>
-                  <a:srgbClr val="FFFFFF"/>
-                </a:solidFill>
-              </a:rPr>
-              <a:t>3</a:t>
-            </a:r>
-          </a:p>
-        </p:txBody>
-      </p:sp>
-      <p:sp>
-        <p:nvSpPr>
-          <p:cNvPr id="36" name="">
-            <a:extLst xmlns:a="http://schemas.openxmlformats.org/drawingml/2006/main">
-              <a:ext uri="{FF2B5EF4-FFF2-40B4-BE49-F238E27FC236}">
-                <a16:creationId xmlns:a16="http://schemas.microsoft.com/office/drawing/2014/main" id="{781CA71C-2B85-4128-A5A1-06979865BF43}"/>
-              </a:ext>
-            </a:extLst>
-          </p:cNvPr>
-          <p:cNvSpPr>
-            <a:spLocks xmlns:a="http://schemas.openxmlformats.org/drawingml/2006/main" noGrp="1"/>
-          </p:cNvSpPr>
-          <p:nvPr/>
-        </p:nvSpPr>
-        <p:spPr>
-          <a:xfrm xmlns:a="http://schemas.openxmlformats.org/drawingml/2006/main">
-            <a:off x="1390650" y="4686300"/>
-            <a:ext cx="9810750" cy="1257300"/>
-          </a:xfrm>
-          <a:prstGeom xmlns:a="http://schemas.openxmlformats.org/drawingml/2006/main" prst="roundRect">
-            <a:avLst>
-              <a:gd name="adj" fmla="val 6061"/>
-            </a:avLst>
-          </a:prstGeom>
-          <a:solidFill xmlns:a="http://schemas.openxmlformats.org/drawingml/2006/main">
-            <a:srgbClr val="FFFFFF"/>
-          </a:solidFill>
-          <a:ln xmlns:a="http://schemas.openxmlformats.org/drawingml/2006/main" w="9525">
-            <a:solidFill>
-              <a:srgbClr val="E4E7EC"/>
-            </a:solidFill>
-            <a:prstDash val="solid"/>
-          </a:ln>
-        </p:spPr>
-      </p:sp>
-      <p:sp>
-        <p:nvSpPr>
-          <p:cNvPr id="37" name="">
-            <a:extLst xmlns:a="http://schemas.openxmlformats.org/drawingml/2006/main">
-              <a:ext uri="{FF2B5EF4-FFF2-40B4-BE49-F238E27FC236}">
-                <a16:creationId xmlns:a16="http://schemas.microsoft.com/office/drawing/2014/main" id="{7AF78BD0-4467-4C92-8543-1BF2758BE1D5}"/>
+          <p:cNvPr id="41" name="">
+            <a:extLst xmlns:a="http://schemas.openxmlformats.org/drawingml/2006/main">
+              <a:ext uri="{FF2B5EF4-FFF2-40B4-BE49-F238E27FC236}">
+                <a16:creationId xmlns:a16="http://schemas.microsoft.com/office/drawing/2014/main" id="{B6B7BE52-868D-4D01-9FB0-5FB428A8E094}"/>
               </a:ext>
             </a:extLst>
           </p:cNvPr>
@@ -6052,10 +6244,10 @@
       </p:sp>
       <p:sp>
         <p:nvSpPr>
-          <p:cNvPr id="38" name="">
-            <a:extLst xmlns:a="http://schemas.openxmlformats.org/drawingml/2006/main">
-              <a:ext uri="{FF2B5EF4-FFF2-40B4-BE49-F238E27FC236}">
-                <a16:creationId xmlns:a16="http://schemas.microsoft.com/office/drawing/2014/main" id="{B03CFDB0-3983-4EBC-8CF3-1A25659B5FB0}"/>
+          <p:cNvPr id="42" name="">
+            <a:extLst xmlns:a="http://schemas.openxmlformats.org/drawingml/2006/main">
+              <a:ext uri="{FF2B5EF4-FFF2-40B4-BE49-F238E27FC236}">
+                <a16:creationId xmlns:a16="http://schemas.microsoft.com/office/drawing/2014/main" id="{3C86ED4E-8420-4B11-9D3B-8E6925A1BF14}"/>
               </a:ext>
             </a:extLst>
           </p:cNvPr>
@@ -6102,21 +6294,21 @@
       </p:sp>
       <p:sp>
         <p:nvSpPr>
-          <p:cNvPr id="39" name="">
-            <a:extLst xmlns:a="http://schemas.openxmlformats.org/drawingml/2006/main">
-              <a:ext uri="{FF2B5EF4-FFF2-40B4-BE49-F238E27FC236}">
-                <a16:creationId xmlns:a16="http://schemas.microsoft.com/office/drawing/2014/main" id="{CF59B6B9-4273-4035-9583-3771DA89AC03}"/>
-              </a:ext>
-            </a:extLst>
-          </p:cNvPr>
-          <p:cNvSpPr>
-            <a:spLocks xmlns:a="http://schemas.openxmlformats.org/drawingml/2006/main" noGrp="1"/>
-          </p:cNvSpPr>
-          <p:nvPr/>
-        </p:nvSpPr>
-        <p:spPr>
-          <a:xfrm xmlns:a="http://schemas.openxmlformats.org/drawingml/2006/main">
-            <a:off x="4210050" y="4886325"/>
+          <p:cNvPr id="43" name="">
+            <a:extLst xmlns:a="http://schemas.openxmlformats.org/drawingml/2006/main">
+              <a:ext uri="{FF2B5EF4-FFF2-40B4-BE49-F238E27FC236}">
+                <a16:creationId xmlns:a16="http://schemas.microsoft.com/office/drawing/2014/main" id="{F4AFC694-8ABA-4265-B873-FA057D495C60}"/>
+              </a:ext>
+            </a:extLst>
+          </p:cNvPr>
+          <p:cNvSpPr>
+            <a:spLocks xmlns:a="http://schemas.openxmlformats.org/drawingml/2006/main" noGrp="1"/>
+          </p:cNvSpPr>
+          <p:nvPr/>
+        </p:nvSpPr>
+        <p:spPr>
+          <a:xfrm xmlns:a="http://schemas.openxmlformats.org/drawingml/2006/main">
+            <a:off x="4210050" y="4867275"/>
             <a:ext cx="304800" cy="190500"/>
           </a:xfrm>
           <a:prstGeom xmlns:a="http://schemas.openxmlformats.org/drawingml/2006/main" prst="rect">
@@ -6152,45 +6344,45 @@
       </p:sp>
       <p:sp>
         <p:nvSpPr>
-          <p:cNvPr id="40" name="">
-            <a:extLst xmlns:a="http://schemas.openxmlformats.org/drawingml/2006/main">
-              <a:ext uri="{FF2B5EF4-FFF2-40B4-BE49-F238E27FC236}">
-                <a16:creationId xmlns:a16="http://schemas.microsoft.com/office/drawing/2014/main" id="{BC7F9F8C-3D37-436C-A7E6-53D779DA726F}"/>
-              </a:ext>
-            </a:extLst>
-          </p:cNvPr>
-          <p:cNvSpPr>
-            <a:spLocks xmlns:a="http://schemas.openxmlformats.org/drawingml/2006/main" noGrp="1"/>
-          </p:cNvSpPr>
-          <p:nvPr/>
-        </p:nvSpPr>
-        <p:spPr>
-          <a:xfrm xmlns:a="http://schemas.openxmlformats.org/drawingml/2006/main">
-            <a:off x="4572000" y="4829175"/>
-            <a:ext cx="2362200" cy="895350"/>
-          </a:xfrm>
-          <a:prstGeom xmlns:a="http://schemas.openxmlformats.org/drawingml/2006/main" prst="rect">
-            <a:avLst/>
-          </a:prstGeom>
-          <a:noFill xmlns:a="http://schemas.openxmlformats.org/drawingml/2006/main"/>
-          <a:ln xmlns:a="http://schemas.openxmlformats.org/drawingml/2006/main" w="0">
-            <a:noFill/>
-            <a:prstDash val="solid"/>
-          </a:ln>
-        </p:spPr>
-        <p:txBody>
-          <a:bodyPr xmlns:a="http://schemas.openxmlformats.org/drawingml/2006/main"/>
-          <a:lstStyle xmlns:a="http://schemas.openxmlformats.org/drawingml/2006/main"/>
-          <a:p xmlns:a="http://schemas.openxmlformats.org/drawingml/2006/main">
-            <a:pPr>
-              <a:defRPr sz="975">
-                <a:solidFill>
-                  <a:srgbClr val="161616"/>
-                </a:solidFill>
-              </a:defRPr>
-            </a:pPr>
-            <a:r>
-              <a:rPr sz="975">
+          <p:cNvPr id="44" name="">
+            <a:extLst xmlns:a="http://schemas.openxmlformats.org/drawingml/2006/main">
+              <a:ext uri="{FF2B5EF4-FFF2-40B4-BE49-F238E27FC236}">
+                <a16:creationId xmlns:a16="http://schemas.microsoft.com/office/drawing/2014/main" id="{B5AF1970-0B99-476E-9169-E47477E78BE5}"/>
+              </a:ext>
+            </a:extLst>
+          </p:cNvPr>
+          <p:cNvSpPr>
+            <a:spLocks xmlns:a="http://schemas.openxmlformats.org/drawingml/2006/main" noGrp="1"/>
+          </p:cNvSpPr>
+          <p:nvPr/>
+        </p:nvSpPr>
+        <p:spPr>
+          <a:xfrm xmlns:a="http://schemas.openxmlformats.org/drawingml/2006/main">
+            <a:off x="4572000" y="4810125"/>
+            <a:ext cx="2781300" cy="533400"/>
+          </a:xfrm>
+          <a:prstGeom xmlns:a="http://schemas.openxmlformats.org/drawingml/2006/main" prst="rect">
+            <a:avLst/>
+          </a:prstGeom>
+          <a:noFill xmlns:a="http://schemas.openxmlformats.org/drawingml/2006/main"/>
+          <a:ln xmlns:a="http://schemas.openxmlformats.org/drawingml/2006/main" w="0">
+            <a:noFill/>
+            <a:prstDash val="solid"/>
+          </a:ln>
+        </p:spPr>
+        <p:txBody>
+          <a:bodyPr xmlns:a="http://schemas.openxmlformats.org/drawingml/2006/main"/>
+          <a:lstStyle xmlns:a="http://schemas.openxmlformats.org/drawingml/2006/main"/>
+          <a:p xmlns:a="http://schemas.openxmlformats.org/drawingml/2006/main">
+            <a:pPr>
+              <a:defRPr sz="900">
+                <a:solidFill>
+                  <a:srgbClr val="161616"/>
+                </a:solidFill>
+              </a:defRPr>
+            </a:pPr>
+            <a:r>
+              <a:rPr sz="900">
                 <a:solidFill>
                   <a:srgbClr val="161616"/>
                 </a:solidFill>
@@ -6202,21 +6394,152 @@
       </p:sp>
       <p:sp>
         <p:nvSpPr>
-          <p:cNvPr id="41" name="">
-            <a:extLst xmlns:a="http://schemas.openxmlformats.org/drawingml/2006/main">
-              <a:ext uri="{FF2B5EF4-FFF2-40B4-BE49-F238E27FC236}">
-                <a16:creationId xmlns:a16="http://schemas.microsoft.com/office/drawing/2014/main" id="{5A245226-036E-4F34-9D48-EFB48D1EDF57}"/>
-              </a:ext>
-            </a:extLst>
-          </p:cNvPr>
-          <p:cNvSpPr>
-            <a:spLocks xmlns:a="http://schemas.openxmlformats.org/drawingml/2006/main" noGrp="1"/>
-          </p:cNvSpPr>
-          <p:nvPr/>
-        </p:nvSpPr>
-        <p:spPr>
-          <a:xfrm xmlns:a="http://schemas.openxmlformats.org/drawingml/2006/main">
-            <a:off x="7124700" y="4886325"/>
+          <p:cNvPr id="45" name="">
+            <a:extLst xmlns:a="http://schemas.openxmlformats.org/drawingml/2006/main">
+              <a:ext uri="{FF2B5EF4-FFF2-40B4-BE49-F238E27FC236}">
+                <a16:creationId xmlns:a16="http://schemas.microsoft.com/office/drawing/2014/main" id="{5B39848F-8975-4590-B9C3-ED84492897B9}"/>
+              </a:ext>
+            </a:extLst>
+          </p:cNvPr>
+          <p:cNvSpPr>
+            <a:spLocks xmlns:a="http://schemas.openxmlformats.org/drawingml/2006/main" noGrp="1"/>
+          </p:cNvSpPr>
+          <p:nvPr/>
+        </p:nvSpPr>
+        <p:spPr>
+          <a:xfrm xmlns:a="http://schemas.openxmlformats.org/drawingml/2006/main">
+            <a:off x="4572000" y="5410200"/>
+            <a:ext cx="723900" cy="133350"/>
+          </a:xfrm>
+          <a:prstGeom xmlns:a="http://schemas.openxmlformats.org/drawingml/2006/main" prst="rect">
+            <a:avLst/>
+          </a:prstGeom>
+          <a:noFill xmlns:a="http://schemas.openxmlformats.org/drawingml/2006/main"/>
+          <a:ln xmlns:a="http://schemas.openxmlformats.org/drawingml/2006/main" w="0">
+            <a:noFill/>
+            <a:prstDash val="solid"/>
+          </a:ln>
+        </p:spPr>
+        <p:txBody>
+          <a:bodyPr xmlns:a="http://schemas.openxmlformats.org/drawingml/2006/main"/>
+          <a:lstStyle xmlns:a="http://schemas.openxmlformats.org/drawingml/2006/main"/>
+          <a:p xmlns:a="http://schemas.openxmlformats.org/drawingml/2006/main">
+            <a:pPr>
+              <a:defRPr sz="600" b="1">
+                <a:solidFill>
+                  <a:srgbClr val="FF6412"/>
+                </a:solidFill>
+              </a:defRPr>
+            </a:pPr>
+            <a:r>
+              <a:rPr sz="600" b="1">
+                <a:solidFill>
+                  <a:srgbClr val="FF6412"/>
+                </a:solidFill>
+              </a:rPr>
+              <a:t>РЕЗУЛЬТАТ</a:t>
+            </a:r>
+          </a:p>
+        </p:txBody>
+      </p:sp>
+      <p:sp>
+        <p:nvSpPr>
+          <p:cNvPr id="46" name="">
+            <a:extLst xmlns:a="http://schemas.openxmlformats.org/drawingml/2006/main">
+              <a:ext uri="{FF2B5EF4-FFF2-40B4-BE49-F238E27FC236}">
+                <a16:creationId xmlns:a16="http://schemas.microsoft.com/office/drawing/2014/main" id="{B7DCA7ED-5E07-4F5C-B36E-8CDBB838A1A3}"/>
+              </a:ext>
+            </a:extLst>
+          </p:cNvPr>
+          <p:cNvSpPr>
+            <a:spLocks xmlns:a="http://schemas.openxmlformats.org/drawingml/2006/main" noGrp="1"/>
+          </p:cNvSpPr>
+          <p:nvPr/>
+        </p:nvSpPr>
+        <p:spPr>
+          <a:xfrm xmlns:a="http://schemas.openxmlformats.org/drawingml/2006/main">
+            <a:off x="4572000" y="5562600"/>
+            <a:ext cx="2781300" cy="285750"/>
+          </a:xfrm>
+          <a:prstGeom xmlns:a="http://schemas.openxmlformats.org/drawingml/2006/main" prst="rect">
+            <a:avLst/>
+          </a:prstGeom>
+          <a:noFill xmlns:a="http://schemas.openxmlformats.org/drawingml/2006/main"/>
+          <a:ln xmlns:a="http://schemas.openxmlformats.org/drawingml/2006/main" w="0">
+            <a:noFill/>
+            <a:prstDash val="solid"/>
+          </a:ln>
+        </p:spPr>
+        <p:txBody>
+          <a:bodyPr xmlns:a="http://schemas.openxmlformats.org/drawingml/2006/main"/>
+          <a:lstStyle xmlns:a="http://schemas.openxmlformats.org/drawingml/2006/main"/>
+          <a:p xmlns:a="http://schemas.openxmlformats.org/drawingml/2006/main">
+            <a:pPr>
+              <a:defRPr sz="750" b="1">
+                <a:solidFill>
+                  <a:srgbClr val="161616"/>
+                </a:solidFill>
+              </a:defRPr>
+            </a:pPr>
+            <a:r>
+              <a:rPr sz="750" b="1">
+                <a:solidFill>
+                  <a:srgbClr val="161616"/>
+                </a:solidFill>
+              </a:rPr>
+              <a:t>{{ROADMAP_3_1_RESULT}}</a:t>
+            </a:r>
+          </a:p>
+        </p:txBody>
+      </p:sp>
+      <p:sp>
+        <p:nvSpPr>
+          <p:cNvPr id="47" name="">
+            <a:extLst xmlns:a="http://schemas.openxmlformats.org/drawingml/2006/main">
+              <a:ext uri="{FF2B5EF4-FFF2-40B4-BE49-F238E27FC236}">
+                <a16:creationId xmlns:a16="http://schemas.microsoft.com/office/drawing/2014/main" id="{DD62A152-81BA-49B1-9805-8FF2D07781AB}"/>
+              </a:ext>
+            </a:extLst>
+          </p:cNvPr>
+          <p:cNvSpPr>
+            <a:spLocks xmlns:a="http://schemas.openxmlformats.org/drawingml/2006/main" noGrp="1"/>
+          </p:cNvSpPr>
+          <p:nvPr/>
+        </p:nvSpPr>
+        <p:spPr>
+          <a:xfrm xmlns:a="http://schemas.openxmlformats.org/drawingml/2006/main">
+            <a:off x="7543800" y="4838700"/>
+            <a:ext cx="9525" cy="952500"/>
+          </a:xfrm>
+          <a:prstGeom xmlns:a="http://schemas.openxmlformats.org/drawingml/2006/main" prst="rect">
+            <a:avLst/>
+          </a:prstGeom>
+          <a:solidFill xmlns:a="http://schemas.openxmlformats.org/drawingml/2006/main">
+            <a:srgbClr val="E4E7EC"/>
+          </a:solidFill>
+          <a:ln xmlns:a="http://schemas.openxmlformats.org/drawingml/2006/main" w="0">
+            <a:noFill/>
+            <a:prstDash val="solid"/>
+          </a:ln>
+        </p:spPr>
+      </p:sp>
+      <p:sp>
+        <p:nvSpPr>
+          <p:cNvPr id="48" name="">
+            <a:extLst xmlns:a="http://schemas.openxmlformats.org/drawingml/2006/main">
+              <a:ext uri="{FF2B5EF4-FFF2-40B4-BE49-F238E27FC236}">
+                <a16:creationId xmlns:a16="http://schemas.microsoft.com/office/drawing/2014/main" id="{8BADF17F-61E4-415A-9E41-3114B4790061}"/>
+              </a:ext>
+            </a:extLst>
+          </p:cNvPr>
+          <p:cNvSpPr>
+            <a:spLocks xmlns:a="http://schemas.openxmlformats.org/drawingml/2006/main" noGrp="1"/>
+          </p:cNvSpPr>
+          <p:nvPr/>
+        </p:nvSpPr>
+        <p:spPr>
+          <a:xfrm xmlns:a="http://schemas.openxmlformats.org/drawingml/2006/main">
+            <a:off x="7772400" y="4867275"/>
             <a:ext cx="304800" cy="190500"/>
           </a:xfrm>
           <a:prstGeom xmlns:a="http://schemas.openxmlformats.org/drawingml/2006/main" prst="rect">
@@ -6252,45 +6575,45 @@
       </p:sp>
       <p:sp>
         <p:nvSpPr>
-          <p:cNvPr id="42" name="">
-            <a:extLst xmlns:a="http://schemas.openxmlformats.org/drawingml/2006/main">
-              <a:ext uri="{FF2B5EF4-FFF2-40B4-BE49-F238E27FC236}">
-                <a16:creationId xmlns:a16="http://schemas.microsoft.com/office/drawing/2014/main" id="{09EF42E9-E985-4C42-A077-87DCA969096F}"/>
-              </a:ext>
-            </a:extLst>
-          </p:cNvPr>
-          <p:cNvSpPr>
-            <a:spLocks xmlns:a="http://schemas.openxmlformats.org/drawingml/2006/main" noGrp="1"/>
-          </p:cNvSpPr>
-          <p:nvPr/>
-        </p:nvSpPr>
-        <p:spPr>
-          <a:xfrm xmlns:a="http://schemas.openxmlformats.org/drawingml/2006/main">
-            <a:off x="7486650" y="4829175"/>
-            <a:ext cx="1847850" cy="895350"/>
-          </a:xfrm>
-          <a:prstGeom xmlns:a="http://schemas.openxmlformats.org/drawingml/2006/main" prst="rect">
-            <a:avLst/>
-          </a:prstGeom>
-          <a:noFill xmlns:a="http://schemas.openxmlformats.org/drawingml/2006/main"/>
-          <a:ln xmlns:a="http://schemas.openxmlformats.org/drawingml/2006/main" w="0">
-            <a:noFill/>
-            <a:prstDash val="solid"/>
-          </a:ln>
-        </p:spPr>
-        <p:txBody>
-          <a:bodyPr xmlns:a="http://schemas.openxmlformats.org/drawingml/2006/main"/>
-          <a:lstStyle xmlns:a="http://schemas.openxmlformats.org/drawingml/2006/main"/>
-          <a:p xmlns:a="http://schemas.openxmlformats.org/drawingml/2006/main">
-            <a:pPr>
-              <a:defRPr sz="975">
-                <a:solidFill>
-                  <a:srgbClr val="161616"/>
-                </a:solidFill>
-              </a:defRPr>
-            </a:pPr>
-            <a:r>
-              <a:rPr sz="975">
+          <p:cNvPr id="49" name="">
+            <a:extLst xmlns:a="http://schemas.openxmlformats.org/drawingml/2006/main">
+              <a:ext uri="{FF2B5EF4-FFF2-40B4-BE49-F238E27FC236}">
+                <a16:creationId xmlns:a16="http://schemas.microsoft.com/office/drawing/2014/main" id="{C12DF5EF-30CA-46AA-8F21-5B35B39150E5}"/>
+              </a:ext>
+            </a:extLst>
+          </p:cNvPr>
+          <p:cNvSpPr>
+            <a:spLocks xmlns:a="http://schemas.openxmlformats.org/drawingml/2006/main" noGrp="1"/>
+          </p:cNvSpPr>
+          <p:nvPr/>
+        </p:nvSpPr>
+        <p:spPr>
+          <a:xfrm xmlns:a="http://schemas.openxmlformats.org/drawingml/2006/main">
+            <a:off x="8134350" y="4810125"/>
+            <a:ext cx="2705100" cy="533400"/>
+          </a:xfrm>
+          <a:prstGeom xmlns:a="http://schemas.openxmlformats.org/drawingml/2006/main" prst="rect">
+            <a:avLst/>
+          </a:prstGeom>
+          <a:noFill xmlns:a="http://schemas.openxmlformats.org/drawingml/2006/main"/>
+          <a:ln xmlns:a="http://schemas.openxmlformats.org/drawingml/2006/main" w="0">
+            <a:noFill/>
+            <a:prstDash val="solid"/>
+          </a:ln>
+        </p:spPr>
+        <p:txBody>
+          <a:bodyPr xmlns:a="http://schemas.openxmlformats.org/drawingml/2006/main"/>
+          <a:lstStyle xmlns:a="http://schemas.openxmlformats.org/drawingml/2006/main"/>
+          <a:p xmlns:a="http://schemas.openxmlformats.org/drawingml/2006/main">
+            <a:pPr>
+              <a:defRPr sz="900">
+                <a:solidFill>
+                  <a:srgbClr val="161616"/>
+                </a:solidFill>
+              </a:defRPr>
+            </a:pPr>
+            <a:r>
+              <a:rPr sz="900">
                 <a:solidFill>
                   <a:srgbClr val="161616"/>
                 </a:solidFill>
@@ -6302,80 +6625,45 @@
       </p:sp>
       <p:sp>
         <p:nvSpPr>
-          <p:cNvPr id="43" name="">
-            <a:extLst xmlns:a="http://schemas.openxmlformats.org/drawingml/2006/main">
-              <a:ext uri="{FF2B5EF4-FFF2-40B4-BE49-F238E27FC236}">
-                <a16:creationId xmlns:a16="http://schemas.microsoft.com/office/drawing/2014/main" id="{2746123F-5869-40B5-8DEA-42D133C911F0}"/>
-              </a:ext>
-            </a:extLst>
-          </p:cNvPr>
-          <p:cNvSpPr>
-            <a:spLocks xmlns:a="http://schemas.openxmlformats.org/drawingml/2006/main" noGrp="1"/>
-          </p:cNvSpPr>
-          <p:nvPr/>
-        </p:nvSpPr>
-        <p:spPr>
-          <a:xfrm xmlns:a="http://schemas.openxmlformats.org/drawingml/2006/main">
-            <a:off x="9505950" y="4819650"/>
-            <a:ext cx="1524000" cy="990600"/>
-          </a:xfrm>
-          <a:prstGeom xmlns:a="http://schemas.openxmlformats.org/drawingml/2006/main" prst="roundRect">
-            <a:avLst>
-              <a:gd name="adj" fmla="val 7692"/>
-            </a:avLst>
-          </a:prstGeom>
-          <a:solidFill xmlns:a="http://schemas.openxmlformats.org/drawingml/2006/main">
-            <a:srgbClr val="FFFFFF"/>
-          </a:solidFill>
-          <a:ln xmlns:a="http://schemas.openxmlformats.org/drawingml/2006/main" w="9525">
-            <a:solidFill>
-              <a:srgbClr val="E4E7EC"/>
-            </a:solidFill>
-            <a:prstDash val="solid"/>
-          </a:ln>
-        </p:spPr>
-      </p:sp>
-      <p:sp>
-        <p:nvSpPr>
-          <p:cNvPr id="44" name="">
-            <a:extLst xmlns:a="http://schemas.openxmlformats.org/drawingml/2006/main">
-              <a:ext uri="{FF2B5EF4-FFF2-40B4-BE49-F238E27FC236}">
-                <a16:creationId xmlns:a16="http://schemas.microsoft.com/office/drawing/2014/main" id="{7E14E16A-F6B5-48EF-B781-D4426FC19DC4}"/>
-              </a:ext>
-            </a:extLst>
-          </p:cNvPr>
-          <p:cNvSpPr>
-            <a:spLocks xmlns:a="http://schemas.openxmlformats.org/drawingml/2006/main" noGrp="1"/>
-          </p:cNvSpPr>
-          <p:nvPr/>
-        </p:nvSpPr>
-        <p:spPr>
-          <a:xfrm xmlns:a="http://schemas.openxmlformats.org/drawingml/2006/main">
-            <a:off x="9620250" y="4914900"/>
-            <a:ext cx="1295400" cy="171450"/>
-          </a:xfrm>
-          <a:prstGeom xmlns:a="http://schemas.openxmlformats.org/drawingml/2006/main" prst="rect">
-            <a:avLst/>
-          </a:prstGeom>
-          <a:noFill xmlns:a="http://schemas.openxmlformats.org/drawingml/2006/main"/>
-          <a:ln xmlns:a="http://schemas.openxmlformats.org/drawingml/2006/main" w="0">
-            <a:noFill/>
-            <a:prstDash val="solid"/>
-          </a:ln>
-        </p:spPr>
-        <p:txBody>
-          <a:bodyPr xmlns:a="http://schemas.openxmlformats.org/drawingml/2006/main"/>
-          <a:lstStyle xmlns:a="http://schemas.openxmlformats.org/drawingml/2006/main"/>
-          <a:p xmlns:a="http://schemas.openxmlformats.org/drawingml/2006/main">
-            <a:pPr algn="ctr">
-              <a:defRPr sz="675" b="1">
+          <p:cNvPr id="50" name="">
+            <a:extLst xmlns:a="http://schemas.openxmlformats.org/drawingml/2006/main">
+              <a:ext uri="{FF2B5EF4-FFF2-40B4-BE49-F238E27FC236}">
+                <a16:creationId xmlns:a16="http://schemas.microsoft.com/office/drawing/2014/main" id="{246A27D1-3600-4074-91C4-370A9CC5275C}"/>
+              </a:ext>
+            </a:extLst>
+          </p:cNvPr>
+          <p:cNvSpPr>
+            <a:spLocks xmlns:a="http://schemas.openxmlformats.org/drawingml/2006/main" noGrp="1"/>
+          </p:cNvSpPr>
+          <p:nvPr/>
+        </p:nvSpPr>
+        <p:spPr>
+          <a:xfrm xmlns:a="http://schemas.openxmlformats.org/drawingml/2006/main">
+            <a:off x="8134350" y="5410200"/>
+            <a:ext cx="723900" cy="133350"/>
+          </a:xfrm>
+          <a:prstGeom xmlns:a="http://schemas.openxmlformats.org/drawingml/2006/main" prst="rect">
+            <a:avLst/>
+          </a:prstGeom>
+          <a:noFill xmlns:a="http://schemas.openxmlformats.org/drawingml/2006/main"/>
+          <a:ln xmlns:a="http://schemas.openxmlformats.org/drawingml/2006/main" w="0">
+            <a:noFill/>
+            <a:prstDash val="solid"/>
+          </a:ln>
+        </p:spPr>
+        <p:txBody>
+          <a:bodyPr xmlns:a="http://schemas.openxmlformats.org/drawingml/2006/main"/>
+          <a:lstStyle xmlns:a="http://schemas.openxmlformats.org/drawingml/2006/main"/>
+          <a:p xmlns:a="http://schemas.openxmlformats.org/drawingml/2006/main">
+            <a:pPr>
+              <a:defRPr sz="600" b="1">
                 <a:solidFill>
                   <a:srgbClr val="FF6412"/>
                 </a:solidFill>
               </a:defRPr>
             </a:pPr>
             <a:r>
-              <a:rPr sz="675" b="1">
+              <a:rPr sz="600" b="1">
                 <a:solidFill>
                   <a:srgbClr val="FF6412"/>
                 </a:solidFill>
@@ -6387,37 +6675,37 @@
       </p:sp>
       <p:sp>
         <p:nvSpPr>
-          <p:cNvPr id="45" name="">
-            <a:extLst xmlns:a="http://schemas.openxmlformats.org/drawingml/2006/main">
-              <a:ext uri="{FF2B5EF4-FFF2-40B4-BE49-F238E27FC236}">
-                <a16:creationId xmlns:a16="http://schemas.microsoft.com/office/drawing/2014/main" id="{83F4F02C-02E9-41A9-A3D9-D7409DB5A388}"/>
-              </a:ext>
-            </a:extLst>
-          </p:cNvPr>
-          <p:cNvSpPr>
-            <a:spLocks xmlns:a="http://schemas.openxmlformats.org/drawingml/2006/main" noGrp="1"/>
-          </p:cNvSpPr>
-          <p:nvPr/>
-        </p:nvSpPr>
-        <p:spPr>
-          <a:xfrm xmlns:a="http://schemas.openxmlformats.org/drawingml/2006/main">
-            <a:off x="9620250" y="5124450"/>
-            <a:ext cx="1295400" cy="609600"/>
-          </a:xfrm>
-          <a:prstGeom xmlns:a="http://schemas.openxmlformats.org/drawingml/2006/main" prst="rect">
-            <a:avLst/>
-          </a:prstGeom>
-          <a:noFill xmlns:a="http://schemas.openxmlformats.org/drawingml/2006/main"/>
-          <a:ln xmlns:a="http://schemas.openxmlformats.org/drawingml/2006/main" w="0">
-            <a:noFill/>
-            <a:prstDash val="solid"/>
-          </a:ln>
-        </p:spPr>
-        <p:txBody>
-          <a:bodyPr xmlns:a="http://schemas.openxmlformats.org/drawingml/2006/main"/>
-          <a:lstStyle xmlns:a="http://schemas.openxmlformats.org/drawingml/2006/main"/>
-          <a:p xmlns:a="http://schemas.openxmlformats.org/drawingml/2006/main">
-            <a:pPr algn="ctr">
+          <p:cNvPr id="51" name="">
+            <a:extLst xmlns:a="http://schemas.openxmlformats.org/drawingml/2006/main">
+              <a:ext uri="{FF2B5EF4-FFF2-40B4-BE49-F238E27FC236}">
+                <a16:creationId xmlns:a16="http://schemas.microsoft.com/office/drawing/2014/main" id="{C013BE4A-218B-4D7A-B656-DFFA090DB706}"/>
+              </a:ext>
+            </a:extLst>
+          </p:cNvPr>
+          <p:cNvSpPr>
+            <a:spLocks xmlns:a="http://schemas.openxmlformats.org/drawingml/2006/main" noGrp="1"/>
+          </p:cNvSpPr>
+          <p:nvPr/>
+        </p:nvSpPr>
+        <p:spPr>
+          <a:xfrm xmlns:a="http://schemas.openxmlformats.org/drawingml/2006/main">
+            <a:off x="8134350" y="5562600"/>
+            <a:ext cx="2705100" cy="285750"/>
+          </a:xfrm>
+          <a:prstGeom xmlns:a="http://schemas.openxmlformats.org/drawingml/2006/main" prst="rect">
+            <a:avLst/>
+          </a:prstGeom>
+          <a:noFill xmlns:a="http://schemas.openxmlformats.org/drawingml/2006/main"/>
+          <a:ln xmlns:a="http://schemas.openxmlformats.org/drawingml/2006/main" w="0">
+            <a:noFill/>
+            <a:prstDash val="solid"/>
+          </a:ln>
+        </p:spPr>
+        <p:txBody>
+          <a:bodyPr xmlns:a="http://schemas.openxmlformats.org/drawingml/2006/main"/>
+          <a:lstStyle xmlns:a="http://schemas.openxmlformats.org/drawingml/2006/main"/>
+          <a:p xmlns:a="http://schemas.openxmlformats.org/drawingml/2006/main">
+            <a:pPr>
               <a:defRPr sz="750" b="1">
                 <a:solidFill>
                   <a:srgbClr val="161616"/>
@@ -6430,7 +6718,7 @@
                   <a:srgbClr val="161616"/>
                 </a:solidFill>
               </a:rPr>
-              <a:t>{{ROADMAP_3_RESULT}}</a:t>
+              <a:t>{{ROADMAP_3_2_RESULT}}</a:t>
             </a:r>
           </a:p>
         </p:txBody>
@@ -6438,7 +6726,7 @@
     </p:spTree>
     <p:extLst>
       <p:ext uri="{BB962C8B-B14F-4D97-AF65-F5344CB8AC3E}">
-        <p14:creationId xmlns:p14="http://schemas.microsoft.com/office/powerpoint/2010/main" val="1665526817"/>
+        <p14:creationId xmlns:p14="http://schemas.microsoft.com/office/powerpoint/2010/main" val="107706697"/>
       </p:ext>
     </p:extLst>
   </p:cSld>
@@ -6469,7 +6757,7 @@
           <p:cNvPr id="1" name="">
             <a:extLst xmlns:a="http://schemas.openxmlformats.org/drawingml/2006/main">
               <a:ext uri="{FF2B5EF4-FFF2-40B4-BE49-F238E27FC236}">
-                <a16:creationId xmlns:a16="http://schemas.microsoft.com/office/drawing/2014/main" id="{4FE9A11D-2280-4BF8-A21C-FFFAAAD8E57F}"/>
+                <a16:creationId xmlns:a16="http://schemas.microsoft.com/office/drawing/2014/main" id="{D1611D6D-A14E-44E6-8A45-03BFE437ABA0}"/>
               </a:ext>
             </a:extLst>
           </p:cNvPr>
@@ -6504,7 +6792,7 @@
           <p:nvPr/>
         </p:nvPicPr>
         <p:blipFill>
-          <a:blip xmlns:r="http://schemas.openxmlformats.org/officeDocument/2006/relationships" xmlns:a="http://schemas.openxmlformats.org/drawingml/2006/main" r:embed="R70b475b9ead84141"/>
+          <a:blip xmlns:r="http://schemas.openxmlformats.org/officeDocument/2006/relationships" xmlns:a="http://schemas.openxmlformats.org/drawingml/2006/main" r:embed="Ra3adad3a6aac4439"/>
           <a:stretch xmlns:a="http://schemas.openxmlformats.org/drawingml/2006/main"/>
         </p:blipFill>
         <p:spPr>
@@ -6522,7 +6810,7 @@
           <p:cNvPr id="3" name="">
             <a:extLst xmlns:a="http://schemas.openxmlformats.org/drawingml/2006/main">
               <a:ext uri="{FF2B5EF4-FFF2-40B4-BE49-F238E27FC236}">
-                <a16:creationId xmlns:a16="http://schemas.microsoft.com/office/drawing/2014/main" id="{35B165CB-D235-417B-AA95-1E4FBA14C642}"/>
+                <a16:creationId xmlns:a16="http://schemas.microsoft.com/office/drawing/2014/main" id="{BF4121AC-5AA9-4A69-B4C2-822FD90CFB40}"/>
               </a:ext>
             </a:extLst>
           </p:cNvPr>
@@ -6572,7 +6860,7 @@
           <p:cNvPr id="4" name="">
             <a:extLst xmlns:a="http://schemas.openxmlformats.org/drawingml/2006/main">
               <a:ext uri="{FF2B5EF4-FFF2-40B4-BE49-F238E27FC236}">
-                <a16:creationId xmlns:a16="http://schemas.microsoft.com/office/drawing/2014/main" id="{0559063C-7EA4-4E76-B689-12BAF13A8FFF}"/>
+                <a16:creationId xmlns:a16="http://schemas.microsoft.com/office/drawing/2014/main" id="{47AF9E02-4A9D-4E94-AF1F-7A0174CAE9C7}"/>
               </a:ext>
             </a:extLst>
           </p:cNvPr>
@@ -6605,7 +6893,7 @@
           <p:cNvPr id="5" name="">
             <a:extLst xmlns:a="http://schemas.openxmlformats.org/drawingml/2006/main">
               <a:ext uri="{FF2B5EF4-FFF2-40B4-BE49-F238E27FC236}">
-                <a16:creationId xmlns:a16="http://schemas.microsoft.com/office/drawing/2014/main" id="{591C09A9-CD94-4D99-B916-623BB5ADA6CD}"/>
+                <a16:creationId xmlns:a16="http://schemas.microsoft.com/office/drawing/2014/main" id="{337A5484-2693-465D-B003-1B020BEFBAB6}"/>
               </a:ext>
             </a:extLst>
           </p:cNvPr>
@@ -6636,7 +6924,7 @@
           <p:cNvPr id="6" name="">
             <a:extLst xmlns:a="http://schemas.openxmlformats.org/drawingml/2006/main">
               <a:ext uri="{FF2B5EF4-FFF2-40B4-BE49-F238E27FC236}">
-                <a16:creationId xmlns:a16="http://schemas.microsoft.com/office/drawing/2014/main" id="{5F0DBB2F-F5E9-4F10-95E7-1B5A0770B825}"/>
+                <a16:creationId xmlns:a16="http://schemas.microsoft.com/office/drawing/2014/main" id="{75147542-48B3-4F90-BA1B-AEC554A0BEA2}"/>
               </a:ext>
             </a:extLst>
           </p:cNvPr>
@@ -6686,7 +6974,7 @@
           <p:cNvPr id="7" name="">
             <a:extLst xmlns:a="http://schemas.openxmlformats.org/drawingml/2006/main">
               <a:ext uri="{FF2B5EF4-FFF2-40B4-BE49-F238E27FC236}">
-                <a16:creationId xmlns:a16="http://schemas.microsoft.com/office/drawing/2014/main" id="{4A2AC2E2-5466-4BB6-A7F6-BDA54B39F3D1}"/>
+                <a16:creationId xmlns:a16="http://schemas.microsoft.com/office/drawing/2014/main" id="{44EAB3D3-7B3A-4AB5-B59F-73D21554E168}"/>
               </a:ext>
             </a:extLst>
           </p:cNvPr>
@@ -6736,7 +7024,7 @@
           <p:cNvPr id="8" name="">
             <a:extLst xmlns:a="http://schemas.openxmlformats.org/drawingml/2006/main">
               <a:ext uri="{FF2B5EF4-FFF2-40B4-BE49-F238E27FC236}">
-                <a16:creationId xmlns:a16="http://schemas.microsoft.com/office/drawing/2014/main" id="{0675D19B-88C7-4362-8924-D6BD258225EB}"/>
+                <a16:creationId xmlns:a16="http://schemas.microsoft.com/office/drawing/2014/main" id="{BA6F6AEF-1ACD-4009-BAC0-CC1CCDBBEE28}"/>
               </a:ext>
             </a:extLst>
           </p:cNvPr>
@@ -6786,7 +7074,7 @@
           <p:cNvPr id="9" name="">
             <a:extLst xmlns:a="http://schemas.openxmlformats.org/drawingml/2006/main">
               <a:ext uri="{FF2B5EF4-FFF2-40B4-BE49-F238E27FC236}">
-                <a16:creationId xmlns:a16="http://schemas.microsoft.com/office/drawing/2014/main" id="{18F3CC68-EF93-4914-A0EB-15895C7A1879}"/>
+                <a16:creationId xmlns:a16="http://schemas.microsoft.com/office/drawing/2014/main" id="{26A44109-9E51-4CE2-96AD-0517A4C1AB50}"/>
               </a:ext>
             </a:extLst>
           </p:cNvPr>
@@ -6836,7 +7124,7 @@
           <p:cNvPr id="10" name="">
             <a:extLst xmlns:a="http://schemas.openxmlformats.org/drawingml/2006/main">
               <a:ext uri="{FF2B5EF4-FFF2-40B4-BE49-F238E27FC236}">
-                <a16:creationId xmlns:a16="http://schemas.microsoft.com/office/drawing/2014/main" id="{DFDC2DDF-45E5-41B2-B777-1A05ED624D9E}"/>
+                <a16:creationId xmlns:a16="http://schemas.microsoft.com/office/drawing/2014/main" id="{899C4250-38C3-448A-A376-90EF8E1FA6F9}"/>
               </a:ext>
             </a:extLst>
           </p:cNvPr>
@@ -6886,7 +7174,7 @@
           <p:cNvPr id="11" name="">
             <a:extLst xmlns:a="http://schemas.openxmlformats.org/drawingml/2006/main">
               <a:ext uri="{FF2B5EF4-FFF2-40B4-BE49-F238E27FC236}">
-                <a16:creationId xmlns:a16="http://schemas.microsoft.com/office/drawing/2014/main" id="{87C61B9C-C552-4689-BC14-878DA0164237}"/>
+                <a16:creationId xmlns:a16="http://schemas.microsoft.com/office/drawing/2014/main" id="{71C37D1D-5471-454F-973D-5E71B41F1BFD}"/>
               </a:ext>
             </a:extLst>
           </p:cNvPr>
@@ -6936,7 +7224,7 @@
           <p:cNvPr id="12" name="">
             <a:extLst xmlns:a="http://schemas.openxmlformats.org/drawingml/2006/main">
               <a:ext uri="{FF2B5EF4-FFF2-40B4-BE49-F238E27FC236}">
-                <a16:creationId xmlns:a16="http://schemas.microsoft.com/office/drawing/2014/main" id="{987A33BB-95FC-48A5-9A74-0C090F825E50}"/>
+                <a16:creationId xmlns:a16="http://schemas.microsoft.com/office/drawing/2014/main" id="{DD3F0C94-88DB-439A-89FF-B88C406D4771}"/>
               </a:ext>
             </a:extLst>
           </p:cNvPr>
@@ -6986,7 +7274,7 @@
           <p:cNvPr id="13" name="">
             <a:extLst xmlns:a="http://schemas.openxmlformats.org/drawingml/2006/main">
               <a:ext uri="{FF2B5EF4-FFF2-40B4-BE49-F238E27FC236}">
-                <a16:creationId xmlns:a16="http://schemas.microsoft.com/office/drawing/2014/main" id="{397BE56F-5FEC-4894-9331-91989FF38C16}"/>
+                <a16:creationId xmlns:a16="http://schemas.microsoft.com/office/drawing/2014/main" id="{806F6118-D688-4139-8EA3-90D715D12F61}"/>
               </a:ext>
             </a:extLst>
           </p:cNvPr>
@@ -7036,7 +7324,7 @@
           <p:cNvPr id="14" name="">
             <a:extLst xmlns:a="http://schemas.openxmlformats.org/drawingml/2006/main">
               <a:ext uri="{FF2B5EF4-FFF2-40B4-BE49-F238E27FC236}">
-                <a16:creationId xmlns:a16="http://schemas.microsoft.com/office/drawing/2014/main" id="{F2C7361D-6A1B-40D6-874F-B05444F995A9}"/>
+                <a16:creationId xmlns:a16="http://schemas.microsoft.com/office/drawing/2014/main" id="{3E06120E-9729-4A70-A21B-94DB4126B35D}"/>
               </a:ext>
             </a:extLst>
           </p:cNvPr>
@@ -7086,7 +7374,7 @@
           <p:cNvPr id="15" name="">
             <a:extLst xmlns:a="http://schemas.openxmlformats.org/drawingml/2006/main">
               <a:ext uri="{FF2B5EF4-FFF2-40B4-BE49-F238E27FC236}">
-                <a16:creationId xmlns:a16="http://schemas.microsoft.com/office/drawing/2014/main" id="{ABC7E46E-83EA-44B5-9D2F-F06BA4CC49D8}"/>
+                <a16:creationId xmlns:a16="http://schemas.microsoft.com/office/drawing/2014/main" id="{994B8DAB-13C7-4514-94F7-22730AD61D31}"/>
               </a:ext>
             </a:extLst>
           </p:cNvPr>
@@ -7136,7 +7424,7 @@
           <p:cNvPr id="16" name="">
             <a:extLst xmlns:a="http://schemas.openxmlformats.org/drawingml/2006/main">
               <a:ext uri="{FF2B5EF4-FFF2-40B4-BE49-F238E27FC236}">
-                <a16:creationId xmlns:a16="http://schemas.microsoft.com/office/drawing/2014/main" id="{DAC990FB-A8D2-47C0-8224-42F7F03A25F0}"/>
+                <a16:creationId xmlns:a16="http://schemas.microsoft.com/office/drawing/2014/main" id="{694AD1FD-E707-4A78-8C18-15BD10E8C179}"/>
               </a:ext>
             </a:extLst>
           </p:cNvPr>
@@ -7186,7 +7474,7 @@
           <p:cNvPr id="17" name="">
             <a:extLst xmlns:a="http://schemas.openxmlformats.org/drawingml/2006/main">
               <a:ext uri="{FF2B5EF4-FFF2-40B4-BE49-F238E27FC236}">
-                <a16:creationId xmlns:a16="http://schemas.microsoft.com/office/drawing/2014/main" id="{3A1DF108-3D60-4FFC-AEA1-47D35793F8BF}"/>
+                <a16:creationId xmlns:a16="http://schemas.microsoft.com/office/drawing/2014/main" id="{7D6C1A75-E1D5-4415-9334-4657E22A2855}"/>
               </a:ext>
             </a:extLst>
           </p:cNvPr>
@@ -7219,7 +7507,7 @@
           <p:cNvPr id="18" name="">
             <a:extLst xmlns:a="http://schemas.openxmlformats.org/drawingml/2006/main">
               <a:ext uri="{FF2B5EF4-FFF2-40B4-BE49-F238E27FC236}">
-                <a16:creationId xmlns:a16="http://schemas.microsoft.com/office/drawing/2014/main" id="{B54FF9E6-F632-4770-A0F4-D1D5EB59DDFF}"/>
+                <a16:creationId xmlns:a16="http://schemas.microsoft.com/office/drawing/2014/main" id="{7820695D-3A19-4691-8D16-305B5F611C03}"/>
               </a:ext>
             </a:extLst>
           </p:cNvPr>
@@ -7269,7 +7557,7 @@
           <p:cNvPr id="19" name="">
             <a:extLst xmlns:a="http://schemas.openxmlformats.org/drawingml/2006/main">
               <a:ext uri="{FF2B5EF4-FFF2-40B4-BE49-F238E27FC236}">
-                <a16:creationId xmlns:a16="http://schemas.microsoft.com/office/drawing/2014/main" id="{8A7FAA85-2E93-4429-B93C-CE7AA51CCE90}"/>
+                <a16:creationId xmlns:a16="http://schemas.microsoft.com/office/drawing/2014/main" id="{5DF7CEB2-91A1-44C6-B256-532083BC7CA7}"/>
               </a:ext>
             </a:extLst>
           </p:cNvPr>
@@ -7319,7 +7607,7 @@
           <p:cNvPr id="20" name="">
             <a:extLst xmlns:a="http://schemas.openxmlformats.org/drawingml/2006/main">
               <a:ext uri="{FF2B5EF4-FFF2-40B4-BE49-F238E27FC236}">
-                <a16:creationId xmlns:a16="http://schemas.microsoft.com/office/drawing/2014/main" id="{228F0B15-36EC-49AF-9F63-A731C65EE920}"/>
+                <a16:creationId xmlns:a16="http://schemas.microsoft.com/office/drawing/2014/main" id="{BAB5B1D2-B4AD-4B1E-8234-E709541417A8}"/>
               </a:ext>
             </a:extLst>
           </p:cNvPr>
@@ -7369,7 +7657,7 @@
           <p:cNvPr id="21" name="">
             <a:extLst xmlns:a="http://schemas.openxmlformats.org/drawingml/2006/main">
               <a:ext uri="{FF2B5EF4-FFF2-40B4-BE49-F238E27FC236}">
-                <a16:creationId xmlns:a16="http://schemas.microsoft.com/office/drawing/2014/main" id="{59CCD027-62B7-4086-BEF0-9C2145112ED1}"/>
+                <a16:creationId xmlns:a16="http://schemas.microsoft.com/office/drawing/2014/main" id="{45FB2859-5D0C-4C74-8716-B68FF5E5BA41}"/>
               </a:ext>
             </a:extLst>
           </p:cNvPr>
@@ -7419,7 +7707,7 @@
           <p:cNvPr id="22" name="">
             <a:extLst xmlns:a="http://schemas.openxmlformats.org/drawingml/2006/main">
               <a:ext uri="{FF2B5EF4-FFF2-40B4-BE49-F238E27FC236}">
-                <a16:creationId xmlns:a16="http://schemas.microsoft.com/office/drawing/2014/main" id="{D3FF1882-5B31-4CBD-9C66-8B31E60398FA}"/>
+                <a16:creationId xmlns:a16="http://schemas.microsoft.com/office/drawing/2014/main" id="{7D21B7F7-6761-4E95-B445-F1880AD0D78C}"/>
               </a:ext>
             </a:extLst>
           </p:cNvPr>
@@ -7469,7 +7757,7 @@
           <p:cNvPr id="23" name="">
             <a:extLst xmlns:a="http://schemas.openxmlformats.org/drawingml/2006/main">
               <a:ext uri="{FF2B5EF4-FFF2-40B4-BE49-F238E27FC236}">
-                <a16:creationId xmlns:a16="http://schemas.microsoft.com/office/drawing/2014/main" id="{2EBBAAC8-E388-46A5-BB4F-C1A790598790}"/>
+                <a16:creationId xmlns:a16="http://schemas.microsoft.com/office/drawing/2014/main" id="{96F521DD-C651-47C2-B335-64850A48503D}"/>
               </a:ext>
             </a:extLst>
           </p:cNvPr>
@@ -7519,7 +7807,7 @@
           <p:cNvPr id="24" name="">
             <a:extLst xmlns:a="http://schemas.openxmlformats.org/drawingml/2006/main">
               <a:ext uri="{FF2B5EF4-FFF2-40B4-BE49-F238E27FC236}">
-                <a16:creationId xmlns:a16="http://schemas.microsoft.com/office/drawing/2014/main" id="{FC5B377C-DBBB-45E6-9678-4F1CA6199CDB}"/>
+                <a16:creationId xmlns:a16="http://schemas.microsoft.com/office/drawing/2014/main" id="{7A3A30C8-A873-40FB-B541-9A6797B06B11}"/>
               </a:ext>
             </a:extLst>
           </p:cNvPr>
@@ -7569,7 +7857,7 @@
           <p:cNvPr id="25" name="">
             <a:extLst xmlns:a="http://schemas.openxmlformats.org/drawingml/2006/main">
               <a:ext uri="{FF2B5EF4-FFF2-40B4-BE49-F238E27FC236}">
-                <a16:creationId xmlns:a16="http://schemas.microsoft.com/office/drawing/2014/main" id="{EBCCACF1-E977-489C-8852-27693271BCBC}"/>
+                <a16:creationId xmlns:a16="http://schemas.microsoft.com/office/drawing/2014/main" id="{22EB9ECB-9548-4E14-99E1-B105EA1BAD83}"/>
               </a:ext>
             </a:extLst>
           </p:cNvPr>
@@ -7619,7 +7907,7 @@
           <p:cNvPr id="26" name="">
             <a:extLst xmlns:a="http://schemas.openxmlformats.org/drawingml/2006/main">
               <a:ext uri="{FF2B5EF4-FFF2-40B4-BE49-F238E27FC236}">
-                <a16:creationId xmlns:a16="http://schemas.microsoft.com/office/drawing/2014/main" id="{B721E96E-14DA-4537-9181-4E18F942DAA4}"/>
+                <a16:creationId xmlns:a16="http://schemas.microsoft.com/office/drawing/2014/main" id="{64F79419-C079-46AA-B384-76073D2235F4}"/>
               </a:ext>
             </a:extLst>
           </p:cNvPr>
@@ -7667,7 +7955,7 @@
     </p:spTree>
     <p:extLst>
       <p:ext uri="{BB962C8B-B14F-4D97-AF65-F5344CB8AC3E}">
-        <p14:creationId xmlns:p14="http://schemas.microsoft.com/office/powerpoint/2010/main" val="173857940"/>
+        <p14:creationId xmlns:p14="http://schemas.microsoft.com/office/powerpoint/2010/main" val="6916548"/>
       </p:ext>
     </p:extLst>
   </p:cSld>
@@ -7698,7 +7986,7 @@
           <p:cNvPr id="1" name="">
             <a:extLst xmlns:a="http://schemas.openxmlformats.org/drawingml/2006/main">
               <a:ext uri="{FF2B5EF4-FFF2-40B4-BE49-F238E27FC236}">
-                <a16:creationId xmlns:a16="http://schemas.microsoft.com/office/drawing/2014/main" id="{ACE62689-791F-46EA-A5A6-D2D368D3E23D}"/>
+                <a16:creationId xmlns:a16="http://schemas.microsoft.com/office/drawing/2014/main" id="{4CF9D63C-3615-4F16-9374-CE47C7F48489}"/>
               </a:ext>
             </a:extLst>
           </p:cNvPr>
@@ -7733,7 +8021,7 @@
           <p:nvPr/>
         </p:nvPicPr>
         <p:blipFill>
-          <a:blip xmlns:r="http://schemas.openxmlformats.org/officeDocument/2006/relationships" xmlns:a="http://schemas.openxmlformats.org/drawingml/2006/main" r:embed="Rd035fb96003a4ee1"/>
+          <a:blip xmlns:r="http://schemas.openxmlformats.org/officeDocument/2006/relationships" xmlns:a="http://schemas.openxmlformats.org/drawingml/2006/main" r:embed="R7aaaac456d2b4bc2"/>
           <a:stretch xmlns:a="http://schemas.openxmlformats.org/drawingml/2006/main"/>
         </p:blipFill>
         <p:spPr>
@@ -7751,7 +8039,7 @@
           <p:cNvPr id="3" name="">
             <a:extLst xmlns:a="http://schemas.openxmlformats.org/drawingml/2006/main">
               <a:ext uri="{FF2B5EF4-FFF2-40B4-BE49-F238E27FC236}">
-                <a16:creationId xmlns:a16="http://schemas.microsoft.com/office/drawing/2014/main" id="{249F9616-0108-4AF6-A1A4-AFAF2314DD2D}"/>
+                <a16:creationId xmlns:a16="http://schemas.microsoft.com/office/drawing/2014/main" id="{A4760891-FBF5-4D96-B010-D7D64DF44850}"/>
               </a:ext>
             </a:extLst>
           </p:cNvPr>
@@ -7801,7 +8089,7 @@
           <p:cNvPr id="4" name="">
             <a:extLst xmlns:a="http://schemas.openxmlformats.org/drawingml/2006/main">
               <a:ext uri="{FF2B5EF4-FFF2-40B4-BE49-F238E27FC236}">
-                <a16:creationId xmlns:a16="http://schemas.microsoft.com/office/drawing/2014/main" id="{4E714C15-E0C0-41C3-A2A1-A914DAF07EE9}"/>
+                <a16:creationId xmlns:a16="http://schemas.microsoft.com/office/drawing/2014/main" id="{BBB0F25C-090B-4145-8FDB-11016DA448E2}"/>
               </a:ext>
             </a:extLst>
           </p:cNvPr>
@@ -7834,7 +8122,7 @@
           <p:cNvPr id="5" name="">
             <a:extLst xmlns:a="http://schemas.openxmlformats.org/drawingml/2006/main">
               <a:ext uri="{FF2B5EF4-FFF2-40B4-BE49-F238E27FC236}">
-                <a16:creationId xmlns:a16="http://schemas.microsoft.com/office/drawing/2014/main" id="{80615044-6767-436D-B2B0-674C36FD0447}"/>
+                <a16:creationId xmlns:a16="http://schemas.microsoft.com/office/drawing/2014/main" id="{820C97EF-5F97-402A-8136-A1FD7707BB77}"/>
               </a:ext>
             </a:extLst>
           </p:cNvPr>
@@ -7865,7 +8153,7 @@
           <p:cNvPr id="6" name="">
             <a:extLst xmlns:a="http://schemas.openxmlformats.org/drawingml/2006/main">
               <a:ext uri="{FF2B5EF4-FFF2-40B4-BE49-F238E27FC236}">
-                <a16:creationId xmlns:a16="http://schemas.microsoft.com/office/drawing/2014/main" id="{CF6F433A-39B6-454E-AE6D-FEBB98012951}"/>
+                <a16:creationId xmlns:a16="http://schemas.microsoft.com/office/drawing/2014/main" id="{A5D76578-476D-4B50-B238-59D7683B7A61}"/>
               </a:ext>
             </a:extLst>
           </p:cNvPr>
@@ -7915,7 +8203,7 @@
           <p:cNvPr id="7" name="">
             <a:extLst xmlns:a="http://schemas.openxmlformats.org/drawingml/2006/main">
               <a:ext uri="{FF2B5EF4-FFF2-40B4-BE49-F238E27FC236}">
-                <a16:creationId xmlns:a16="http://schemas.microsoft.com/office/drawing/2014/main" id="{9F372FB6-628D-4508-9750-91006ED88D89}"/>
+                <a16:creationId xmlns:a16="http://schemas.microsoft.com/office/drawing/2014/main" id="{D9FE0FF7-757E-457C-AD1D-457F89B7E38D}"/>
               </a:ext>
             </a:extLst>
           </p:cNvPr>
@@ -7965,7 +8253,7 @@
           <p:cNvPr id="8" name="">
             <a:extLst xmlns:a="http://schemas.openxmlformats.org/drawingml/2006/main">
               <a:ext uri="{FF2B5EF4-FFF2-40B4-BE49-F238E27FC236}">
-                <a16:creationId xmlns:a16="http://schemas.microsoft.com/office/drawing/2014/main" id="{988FAC10-9B06-4C13-BC38-FDAE47CAA869}"/>
+                <a16:creationId xmlns:a16="http://schemas.microsoft.com/office/drawing/2014/main" id="{D74EF589-0C3C-44CB-BFAF-FCF413D1D1D5}"/>
               </a:ext>
             </a:extLst>
           </p:cNvPr>
@@ -8015,7 +8303,7 @@
           <p:cNvPr id="9" name="">
             <a:extLst xmlns:a="http://schemas.openxmlformats.org/drawingml/2006/main">
               <a:ext uri="{FF2B5EF4-FFF2-40B4-BE49-F238E27FC236}">
-                <a16:creationId xmlns:a16="http://schemas.microsoft.com/office/drawing/2014/main" id="{F520D460-27B8-4006-AEFD-1BAB912DCD3E}"/>
+                <a16:creationId xmlns:a16="http://schemas.microsoft.com/office/drawing/2014/main" id="{BB17F39A-15C5-4AC3-BB2F-F9C7F881CD0C}"/>
               </a:ext>
             </a:extLst>
           </p:cNvPr>
@@ -8065,7 +8353,7 @@
           <p:cNvPr id="10" name="">
             <a:extLst xmlns:a="http://schemas.openxmlformats.org/drawingml/2006/main">
               <a:ext uri="{FF2B5EF4-FFF2-40B4-BE49-F238E27FC236}">
-                <a16:creationId xmlns:a16="http://schemas.microsoft.com/office/drawing/2014/main" id="{934B3CE3-D955-4AE3-B6DC-C5E9F153E0BF}"/>
+                <a16:creationId xmlns:a16="http://schemas.microsoft.com/office/drawing/2014/main" id="{2BC1BD4A-5AF7-483C-B0AD-A9D3690BBC21}"/>
               </a:ext>
             </a:extLst>
           </p:cNvPr>
@@ -8096,7 +8384,7 @@
           <p:cNvPr id="11" name="">
             <a:extLst xmlns:a="http://schemas.openxmlformats.org/drawingml/2006/main">
               <a:ext uri="{FF2B5EF4-FFF2-40B4-BE49-F238E27FC236}">
-                <a16:creationId xmlns:a16="http://schemas.microsoft.com/office/drawing/2014/main" id="{A3A73E77-C8CD-4CCE-A900-88EA478522CA}"/>
+                <a16:creationId xmlns:a16="http://schemas.microsoft.com/office/drawing/2014/main" id="{61E7702B-29ED-4F67-89AE-1D901BDA403C}"/>
               </a:ext>
             </a:extLst>
           </p:cNvPr>
@@ -8146,7 +8434,7 @@
           <p:cNvPr id="12" name="">
             <a:extLst xmlns:a="http://schemas.openxmlformats.org/drawingml/2006/main">
               <a:ext uri="{FF2B5EF4-FFF2-40B4-BE49-F238E27FC236}">
-                <a16:creationId xmlns:a16="http://schemas.microsoft.com/office/drawing/2014/main" id="{AD1F8A65-F47C-4F28-B7B5-E5E5831F245C}"/>
+                <a16:creationId xmlns:a16="http://schemas.microsoft.com/office/drawing/2014/main" id="{B73159C3-E7B2-4D59-8622-64959D383150}"/>
               </a:ext>
             </a:extLst>
           </p:cNvPr>
@@ -8196,7 +8484,7 @@
           <p:cNvPr id="13" name="">
             <a:extLst xmlns:a="http://schemas.openxmlformats.org/drawingml/2006/main">
               <a:ext uri="{FF2B5EF4-FFF2-40B4-BE49-F238E27FC236}">
-                <a16:creationId xmlns:a16="http://schemas.microsoft.com/office/drawing/2014/main" id="{B11F5CF0-20F7-4A0D-96BD-4DCE7ED08598}"/>
+                <a16:creationId xmlns:a16="http://schemas.microsoft.com/office/drawing/2014/main" id="{7F259375-CB1B-48EA-B9D4-9EF914CD3EF0}"/>
               </a:ext>
             </a:extLst>
           </p:cNvPr>
@@ -8227,7 +8515,7 @@
           <p:cNvPr id="14" name="">
             <a:extLst xmlns:a="http://schemas.openxmlformats.org/drawingml/2006/main">
               <a:ext uri="{FF2B5EF4-FFF2-40B4-BE49-F238E27FC236}">
-                <a16:creationId xmlns:a16="http://schemas.microsoft.com/office/drawing/2014/main" id="{C93255FA-9D86-46C4-87DB-5AF308E90A41}"/>
+                <a16:creationId xmlns:a16="http://schemas.microsoft.com/office/drawing/2014/main" id="{673D1475-2DF2-4C1E-AE37-F66C00E06D00}"/>
               </a:ext>
             </a:extLst>
           </p:cNvPr>
@@ -8277,7 +8565,7 @@
           <p:cNvPr id="15" name="">
             <a:extLst xmlns:a="http://schemas.openxmlformats.org/drawingml/2006/main">
               <a:ext uri="{FF2B5EF4-FFF2-40B4-BE49-F238E27FC236}">
-                <a16:creationId xmlns:a16="http://schemas.microsoft.com/office/drawing/2014/main" id="{AD6C8295-CBF4-42F5-B03E-E987027ABD10}"/>
+                <a16:creationId xmlns:a16="http://schemas.microsoft.com/office/drawing/2014/main" id="{6A55BE1C-F0C1-44A4-ACD0-FCB30FC6A843}"/>
               </a:ext>
             </a:extLst>
           </p:cNvPr>
@@ -8327,7 +8615,7 @@
           <p:cNvPr id="16" name="">
             <a:extLst xmlns:a="http://schemas.openxmlformats.org/drawingml/2006/main">
               <a:ext uri="{FF2B5EF4-FFF2-40B4-BE49-F238E27FC236}">
-                <a16:creationId xmlns:a16="http://schemas.microsoft.com/office/drawing/2014/main" id="{02092E59-EACF-4DE5-B922-935216C93AC7}"/>
+                <a16:creationId xmlns:a16="http://schemas.microsoft.com/office/drawing/2014/main" id="{4B4248BB-C7CF-4C2C-A1D1-C48D6BDA339E}"/>
               </a:ext>
             </a:extLst>
           </p:cNvPr>
@@ -8358,7 +8646,7 @@
           <p:cNvPr id="17" name="">
             <a:extLst xmlns:a="http://schemas.openxmlformats.org/drawingml/2006/main">
               <a:ext uri="{FF2B5EF4-FFF2-40B4-BE49-F238E27FC236}">
-                <a16:creationId xmlns:a16="http://schemas.microsoft.com/office/drawing/2014/main" id="{E5F9583E-643D-49C3-BADA-B644CC9DB988}"/>
+                <a16:creationId xmlns:a16="http://schemas.microsoft.com/office/drawing/2014/main" id="{FBCB1D28-6BD9-41D7-8218-5C525A0AE340}"/>
               </a:ext>
             </a:extLst>
           </p:cNvPr>
@@ -8408,7 +8696,7 @@
           <p:cNvPr id="18" name="">
             <a:extLst xmlns:a="http://schemas.openxmlformats.org/drawingml/2006/main">
               <a:ext uri="{FF2B5EF4-FFF2-40B4-BE49-F238E27FC236}">
-                <a16:creationId xmlns:a16="http://schemas.microsoft.com/office/drawing/2014/main" id="{1AFAB87D-F19E-4E65-98E0-53340CCD1A76}"/>
+                <a16:creationId xmlns:a16="http://schemas.microsoft.com/office/drawing/2014/main" id="{245C9F7D-CB92-473E-A379-56F1C2868E39}"/>
               </a:ext>
             </a:extLst>
           </p:cNvPr>
@@ -8458,7 +8746,7 @@
           <p:cNvPr id="19" name="">
             <a:extLst xmlns:a="http://schemas.openxmlformats.org/drawingml/2006/main">
               <a:ext uri="{FF2B5EF4-FFF2-40B4-BE49-F238E27FC236}">
-                <a16:creationId xmlns:a16="http://schemas.microsoft.com/office/drawing/2014/main" id="{45E97428-DE69-471D-9217-CD4B4B8156B6}"/>
+                <a16:creationId xmlns:a16="http://schemas.microsoft.com/office/drawing/2014/main" id="{11726E08-8E0A-47B7-97BD-74721E213D4A}"/>
               </a:ext>
             </a:extLst>
           </p:cNvPr>
@@ -8493,7 +8781,7 @@
           <p:cNvPr id="20" name="">
             <a:extLst xmlns:a="http://schemas.openxmlformats.org/drawingml/2006/main">
               <a:ext uri="{FF2B5EF4-FFF2-40B4-BE49-F238E27FC236}">
-                <a16:creationId xmlns:a16="http://schemas.microsoft.com/office/drawing/2014/main" id="{A8994800-6C6D-4F0A-A213-76FDF8CB99BA}"/>
+                <a16:creationId xmlns:a16="http://schemas.microsoft.com/office/drawing/2014/main" id="{B6116227-0D97-4A86-8717-103794B9EA9C}"/>
               </a:ext>
             </a:extLst>
           </p:cNvPr>
@@ -8543,7 +8831,7 @@
           <p:cNvPr id="21" name="">
             <a:extLst xmlns:a="http://schemas.openxmlformats.org/drawingml/2006/main">
               <a:ext uri="{FF2B5EF4-FFF2-40B4-BE49-F238E27FC236}">
-                <a16:creationId xmlns:a16="http://schemas.microsoft.com/office/drawing/2014/main" id="{F705B87D-2ABC-4EB8-B866-2B5B54F97F63}"/>
+                <a16:creationId xmlns:a16="http://schemas.microsoft.com/office/drawing/2014/main" id="{E8D23364-4D2C-4495-8292-CB02F00F40D4}"/>
               </a:ext>
             </a:extLst>
           </p:cNvPr>
@@ -8597,7 +8885,7 @@
           <p:nvPr/>
         </p:nvPicPr>
         <p:blipFill>
-          <a:blip xmlns:r="http://schemas.openxmlformats.org/officeDocument/2006/relationships" xmlns:a="http://schemas.openxmlformats.org/drawingml/2006/main" r:embed="R4325c8278ed84b6f"/>
+          <a:blip xmlns:r="http://schemas.openxmlformats.org/officeDocument/2006/relationships" xmlns:a="http://schemas.openxmlformats.org/drawingml/2006/main" r:embed="R207f2ac6be2844ca"/>
           <a:stretch xmlns:a="http://schemas.openxmlformats.org/drawingml/2006/main"/>
         </p:blipFill>
         <p:spPr>
@@ -8615,7 +8903,7 @@
           <p:cNvPr id="23" name="">
             <a:extLst xmlns:a="http://schemas.openxmlformats.org/drawingml/2006/main">
               <a:ext uri="{FF2B5EF4-FFF2-40B4-BE49-F238E27FC236}">
-                <a16:creationId xmlns:a16="http://schemas.microsoft.com/office/drawing/2014/main" id="{01141B8A-DB4A-4A34-B982-325299A0AF06}"/>
+                <a16:creationId xmlns:a16="http://schemas.microsoft.com/office/drawing/2014/main" id="{002CAA95-B7D8-400E-8E16-1D7BBCBD9FF8}"/>
               </a:ext>
             </a:extLst>
           </p:cNvPr>
@@ -8665,7 +8953,7 @@
           <p:cNvPr id="24" name="">
             <a:extLst xmlns:a="http://schemas.openxmlformats.org/drawingml/2006/main">
               <a:ext uri="{FF2B5EF4-FFF2-40B4-BE49-F238E27FC236}">
-                <a16:creationId xmlns:a16="http://schemas.microsoft.com/office/drawing/2014/main" id="{2D200418-A0A5-4959-9463-FED2441CBB6F}"/>
+                <a16:creationId xmlns:a16="http://schemas.microsoft.com/office/drawing/2014/main" id="{75640603-7CA0-413D-B9E8-2BBC045EC643}"/>
               </a:ext>
             </a:extLst>
           </p:cNvPr>
@@ -8715,7 +9003,7 @@
           <p:cNvPr id="25" name="">
             <a:extLst xmlns:a="http://schemas.openxmlformats.org/drawingml/2006/main">
               <a:ext uri="{FF2B5EF4-FFF2-40B4-BE49-F238E27FC236}">
-                <a16:creationId xmlns:a16="http://schemas.microsoft.com/office/drawing/2014/main" id="{0E285735-6E27-4BF6-B37B-AF338A58F36A}"/>
+                <a16:creationId xmlns:a16="http://schemas.microsoft.com/office/drawing/2014/main" id="{2B83494C-4735-470E-96F7-FC8B717975B3}"/>
               </a:ext>
             </a:extLst>
           </p:cNvPr>
@@ -8763,7 +9051,7 @@
     </p:spTree>
     <p:extLst>
       <p:ext uri="{BB962C8B-B14F-4D97-AF65-F5344CB8AC3E}">
-        <p14:creationId xmlns:p14="http://schemas.microsoft.com/office/powerpoint/2010/main" val="1615220753"/>
+        <p14:creationId xmlns:p14="http://schemas.microsoft.com/office/powerpoint/2010/main" val="1195762561"/>
       </p:ext>
     </p:extLst>
   </p:cSld>
@@ -8794,7 +9082,7 @@
           <p:cNvPr id="1" name="">
             <a:extLst xmlns:a="http://schemas.openxmlformats.org/drawingml/2006/main">
               <a:ext uri="{FF2B5EF4-FFF2-40B4-BE49-F238E27FC236}">
-                <a16:creationId xmlns:a16="http://schemas.microsoft.com/office/drawing/2014/main" id="{DB049769-9221-405A-A52E-2F9E5D333E07}"/>
+                <a16:creationId xmlns:a16="http://schemas.microsoft.com/office/drawing/2014/main" id="{B778AA60-89E9-4E27-9DE4-28F22169F560}"/>
               </a:ext>
             </a:extLst>
           </p:cNvPr>
@@ -8829,7 +9117,7 @@
           <p:nvPr/>
         </p:nvPicPr>
         <p:blipFill>
-          <a:blip xmlns:r="http://schemas.openxmlformats.org/officeDocument/2006/relationships" xmlns:a="http://schemas.openxmlformats.org/drawingml/2006/main" r:embed="Re91870f2ecbe4cd3"/>
+          <a:blip xmlns:r="http://schemas.openxmlformats.org/officeDocument/2006/relationships" xmlns:a="http://schemas.openxmlformats.org/drawingml/2006/main" r:embed="Rb5d9a0f75b1447ab"/>
           <a:stretch xmlns:a="http://schemas.openxmlformats.org/drawingml/2006/main"/>
         </p:blipFill>
         <p:spPr>
@@ -8847,7 +9135,7 @@
           <p:cNvPr id="3" name="">
             <a:extLst xmlns:a="http://schemas.openxmlformats.org/drawingml/2006/main">
               <a:ext uri="{FF2B5EF4-FFF2-40B4-BE49-F238E27FC236}">
-                <a16:creationId xmlns:a16="http://schemas.microsoft.com/office/drawing/2014/main" id="{EEE025BC-8E5E-4BE1-B502-C27B2BC5FCC3}"/>
+                <a16:creationId xmlns:a16="http://schemas.microsoft.com/office/drawing/2014/main" id="{05A53E1F-FAC3-4FC3-9873-A3DF2A82C536}"/>
               </a:ext>
             </a:extLst>
           </p:cNvPr>
@@ -8897,7 +9185,7 @@
           <p:cNvPr id="4" name="">
             <a:extLst xmlns:a="http://schemas.openxmlformats.org/drawingml/2006/main">
               <a:ext uri="{FF2B5EF4-FFF2-40B4-BE49-F238E27FC236}">
-                <a16:creationId xmlns:a16="http://schemas.microsoft.com/office/drawing/2014/main" id="{8EE408EE-3105-4F79-AFFD-7E909122BDBC}"/>
+                <a16:creationId xmlns:a16="http://schemas.microsoft.com/office/drawing/2014/main" id="{5007BB4C-F42B-4520-A71D-E622951B2B9A}"/>
               </a:ext>
             </a:extLst>
           </p:cNvPr>
@@ -8930,7 +9218,7 @@
           <p:cNvPr id="5" name="">
             <a:extLst xmlns:a="http://schemas.openxmlformats.org/drawingml/2006/main">
               <a:ext uri="{FF2B5EF4-FFF2-40B4-BE49-F238E27FC236}">
-                <a16:creationId xmlns:a16="http://schemas.microsoft.com/office/drawing/2014/main" id="{F76928FE-B14F-400C-BC5B-C29E00022F18}"/>
+                <a16:creationId xmlns:a16="http://schemas.microsoft.com/office/drawing/2014/main" id="{0ACB0A8A-702C-4A28-B5E0-9B19D7904126}"/>
               </a:ext>
             </a:extLst>
           </p:cNvPr>
@@ -8961,7 +9249,7 @@
           <p:cNvPr id="6" name="">
             <a:extLst xmlns:a="http://schemas.openxmlformats.org/drawingml/2006/main">
               <a:ext uri="{FF2B5EF4-FFF2-40B4-BE49-F238E27FC236}">
-                <a16:creationId xmlns:a16="http://schemas.microsoft.com/office/drawing/2014/main" id="{DFBD6163-6A8D-49AB-B232-EC2C5A0C3DDE}"/>
+                <a16:creationId xmlns:a16="http://schemas.microsoft.com/office/drawing/2014/main" id="{2100D01B-F60D-48FC-955E-7AA21C9C2631}"/>
               </a:ext>
             </a:extLst>
           </p:cNvPr>
@@ -9011,7 +9299,7 @@
           <p:cNvPr id="7" name="">
             <a:extLst xmlns:a="http://schemas.openxmlformats.org/drawingml/2006/main">
               <a:ext uri="{FF2B5EF4-FFF2-40B4-BE49-F238E27FC236}">
-                <a16:creationId xmlns:a16="http://schemas.microsoft.com/office/drawing/2014/main" id="{FCB5B748-F142-4C9D-A25C-643349204929}"/>
+                <a16:creationId xmlns:a16="http://schemas.microsoft.com/office/drawing/2014/main" id="{1D03957A-9EC5-4C2F-B6BC-2E9CF9404A63}"/>
               </a:ext>
             </a:extLst>
           </p:cNvPr>
@@ -9061,7 +9349,7 @@
           <p:cNvPr id="8" name="">
             <a:extLst xmlns:a="http://schemas.openxmlformats.org/drawingml/2006/main">
               <a:ext uri="{FF2B5EF4-FFF2-40B4-BE49-F238E27FC236}">
-                <a16:creationId xmlns:a16="http://schemas.microsoft.com/office/drawing/2014/main" id="{120C1B93-1F78-425F-A9CC-AB5746494249}"/>
+                <a16:creationId xmlns:a16="http://schemas.microsoft.com/office/drawing/2014/main" id="{B88F6B6A-B977-4A75-A339-BB32C5178807}"/>
               </a:ext>
             </a:extLst>
           </p:cNvPr>
@@ -9111,7 +9399,7 @@
           <p:cNvPr id="9" name="">
             <a:extLst xmlns:a="http://schemas.openxmlformats.org/drawingml/2006/main">
               <a:ext uri="{FF2B5EF4-FFF2-40B4-BE49-F238E27FC236}">
-                <a16:creationId xmlns:a16="http://schemas.microsoft.com/office/drawing/2014/main" id="{84947EBB-0C63-4EFB-8BB7-C6988110FE86}"/>
+                <a16:creationId xmlns:a16="http://schemas.microsoft.com/office/drawing/2014/main" id="{69D1B9D3-BB36-4B08-9A72-FF44B400D246}"/>
               </a:ext>
             </a:extLst>
           </p:cNvPr>
@@ -9161,7 +9449,7 @@
           <p:cNvPr id="10" name="">
             <a:extLst xmlns:a="http://schemas.openxmlformats.org/drawingml/2006/main">
               <a:ext uri="{FF2B5EF4-FFF2-40B4-BE49-F238E27FC236}">
-                <a16:creationId xmlns:a16="http://schemas.microsoft.com/office/drawing/2014/main" id="{3FA355B4-5397-48F4-94DB-211A58A2A25F}"/>
+                <a16:creationId xmlns:a16="http://schemas.microsoft.com/office/drawing/2014/main" id="{68544961-AB54-45B7-AB9D-C1AA4B55B609}"/>
               </a:ext>
             </a:extLst>
           </p:cNvPr>
@@ -9211,7 +9499,7 @@
           <p:cNvPr id="11" name="">
             <a:extLst xmlns:a="http://schemas.openxmlformats.org/drawingml/2006/main">
               <a:ext uri="{FF2B5EF4-FFF2-40B4-BE49-F238E27FC236}">
-                <a16:creationId xmlns:a16="http://schemas.microsoft.com/office/drawing/2014/main" id="{2219AFA0-B996-4126-A233-616883B87DA4}"/>
+                <a16:creationId xmlns:a16="http://schemas.microsoft.com/office/drawing/2014/main" id="{DB7F1174-C74B-412A-8EE7-94DBCA622704}"/>
               </a:ext>
             </a:extLst>
           </p:cNvPr>
@@ -9261,7 +9549,7 @@
           <p:cNvPr id="12" name="">
             <a:extLst xmlns:a="http://schemas.openxmlformats.org/drawingml/2006/main">
               <a:ext uri="{FF2B5EF4-FFF2-40B4-BE49-F238E27FC236}">
-                <a16:creationId xmlns:a16="http://schemas.microsoft.com/office/drawing/2014/main" id="{AF03634F-FA17-4A82-8C74-994CC627F800}"/>
+                <a16:creationId xmlns:a16="http://schemas.microsoft.com/office/drawing/2014/main" id="{B4968BA6-D39A-4F59-B879-5B6F1E755C2C}"/>
               </a:ext>
             </a:extLst>
           </p:cNvPr>
@@ -9311,7 +9599,7 @@
           <p:cNvPr id="13" name="">
             <a:extLst xmlns:a="http://schemas.openxmlformats.org/drawingml/2006/main">
               <a:ext uri="{FF2B5EF4-FFF2-40B4-BE49-F238E27FC236}">
-                <a16:creationId xmlns:a16="http://schemas.microsoft.com/office/drawing/2014/main" id="{75BF49B1-2BF3-4B45-8C52-649387858B00}"/>
+                <a16:creationId xmlns:a16="http://schemas.microsoft.com/office/drawing/2014/main" id="{87C53222-22BD-42A7-9A9B-B292138C059E}"/>
               </a:ext>
             </a:extLst>
           </p:cNvPr>
@@ -9361,7 +9649,7 @@
           <p:cNvPr id="14" name="">
             <a:extLst xmlns:a="http://schemas.openxmlformats.org/drawingml/2006/main">
               <a:ext uri="{FF2B5EF4-FFF2-40B4-BE49-F238E27FC236}">
-                <a16:creationId xmlns:a16="http://schemas.microsoft.com/office/drawing/2014/main" id="{84D13CD4-7A48-43E6-809F-B1E88CDC50DC}"/>
+                <a16:creationId xmlns:a16="http://schemas.microsoft.com/office/drawing/2014/main" id="{DC9DB9CA-7A64-4EE3-85AC-38AF72E72818}"/>
               </a:ext>
             </a:extLst>
           </p:cNvPr>
@@ -9411,7 +9699,7 @@
           <p:cNvPr id="15" name="">
             <a:extLst xmlns:a="http://schemas.openxmlformats.org/drawingml/2006/main">
               <a:ext uri="{FF2B5EF4-FFF2-40B4-BE49-F238E27FC236}">
-                <a16:creationId xmlns:a16="http://schemas.microsoft.com/office/drawing/2014/main" id="{C18DCC0F-3B1F-46D9-9E27-CA8A999A79AE}"/>
+                <a16:creationId xmlns:a16="http://schemas.microsoft.com/office/drawing/2014/main" id="{14AE483B-427C-44A5-B95A-3132F20A7BCE}"/>
               </a:ext>
             </a:extLst>
           </p:cNvPr>
@@ -9461,7 +9749,7 @@
           <p:cNvPr id="16" name="">
             <a:extLst xmlns:a="http://schemas.openxmlformats.org/drawingml/2006/main">
               <a:ext uri="{FF2B5EF4-FFF2-40B4-BE49-F238E27FC236}">
-                <a16:creationId xmlns:a16="http://schemas.microsoft.com/office/drawing/2014/main" id="{34A8ACDE-E53B-46B1-8313-FA2B54878D50}"/>
+                <a16:creationId xmlns:a16="http://schemas.microsoft.com/office/drawing/2014/main" id="{FDFDE7B5-D6A4-409E-A4B7-07880D186B0E}"/>
               </a:ext>
             </a:extLst>
           </p:cNvPr>
@@ -9511,7 +9799,7 @@
           <p:cNvPr id="17" name="">
             <a:extLst xmlns:a="http://schemas.openxmlformats.org/drawingml/2006/main">
               <a:ext uri="{FF2B5EF4-FFF2-40B4-BE49-F238E27FC236}">
-                <a16:creationId xmlns:a16="http://schemas.microsoft.com/office/drawing/2014/main" id="{8D71E7CE-4664-4BF6-8D55-0B4C51806B1C}"/>
+                <a16:creationId xmlns:a16="http://schemas.microsoft.com/office/drawing/2014/main" id="{20C33108-2D3C-4F6D-AB83-5CAA5AAD9AC0}"/>
               </a:ext>
             </a:extLst>
           </p:cNvPr>
@@ -9546,7 +9834,7 @@
           <p:cNvPr id="18" name="">
             <a:extLst xmlns:a="http://schemas.openxmlformats.org/drawingml/2006/main">
               <a:ext uri="{FF2B5EF4-FFF2-40B4-BE49-F238E27FC236}">
-                <a16:creationId xmlns:a16="http://schemas.microsoft.com/office/drawing/2014/main" id="{BC0C20E9-76B9-49DD-A0E9-BF3B3B1D1BD8}"/>
+                <a16:creationId xmlns:a16="http://schemas.microsoft.com/office/drawing/2014/main" id="{29E17071-43F9-4018-B0F0-CF2F0633523B}"/>
               </a:ext>
             </a:extLst>
           </p:cNvPr>
@@ -9596,7 +9884,7 @@
           <p:cNvPr id="19" name="">
             <a:extLst xmlns:a="http://schemas.openxmlformats.org/drawingml/2006/main">
               <a:ext uri="{FF2B5EF4-FFF2-40B4-BE49-F238E27FC236}">
-                <a16:creationId xmlns:a16="http://schemas.microsoft.com/office/drawing/2014/main" id="{B3C0CE0A-B709-4BBA-9E9E-7B85BCCBE98C}"/>
+                <a16:creationId xmlns:a16="http://schemas.microsoft.com/office/drawing/2014/main" id="{F45A15B7-80AD-46E2-BF72-FD667BA13CF6}"/>
               </a:ext>
             </a:extLst>
           </p:cNvPr>
@@ -9646,7 +9934,7 @@
           <p:cNvPr id="20" name="">
             <a:extLst xmlns:a="http://schemas.openxmlformats.org/drawingml/2006/main">
               <a:ext uri="{FF2B5EF4-FFF2-40B4-BE49-F238E27FC236}">
-                <a16:creationId xmlns:a16="http://schemas.microsoft.com/office/drawing/2014/main" id="{DB9A59E1-9E9A-465D-89DD-FF12A77FA427}"/>
+                <a16:creationId xmlns:a16="http://schemas.microsoft.com/office/drawing/2014/main" id="{7107BE66-6FE4-4A8E-9AD8-827B68DE19D8}"/>
               </a:ext>
             </a:extLst>
           </p:cNvPr>
@@ -9696,7 +9984,7 @@
           <p:cNvPr id="21" name="">
             <a:extLst xmlns:a="http://schemas.openxmlformats.org/drawingml/2006/main">
               <a:ext uri="{FF2B5EF4-FFF2-40B4-BE49-F238E27FC236}">
-                <a16:creationId xmlns:a16="http://schemas.microsoft.com/office/drawing/2014/main" id="{90653A26-F3F7-4C19-9EBE-EB83F594BD26}"/>
+                <a16:creationId xmlns:a16="http://schemas.microsoft.com/office/drawing/2014/main" id="{A1702221-2247-4393-8E17-0AB782753643}"/>
               </a:ext>
             </a:extLst>
           </p:cNvPr>
@@ -9746,7 +10034,7 @@
           <p:cNvPr id="22" name="">
             <a:extLst xmlns:a="http://schemas.openxmlformats.org/drawingml/2006/main">
               <a:ext uri="{FF2B5EF4-FFF2-40B4-BE49-F238E27FC236}">
-                <a16:creationId xmlns:a16="http://schemas.microsoft.com/office/drawing/2014/main" id="{C0DD8F4F-1BBC-42BC-A69C-6AF4F0FD3389}"/>
+                <a16:creationId xmlns:a16="http://schemas.microsoft.com/office/drawing/2014/main" id="{E0478B79-8DD3-43A9-9334-F49F8AA2CDD7}"/>
               </a:ext>
             </a:extLst>
           </p:cNvPr>
@@ -9777,7 +10065,7 @@
           <p:cNvPr id="23" name="">
             <a:extLst xmlns:a="http://schemas.openxmlformats.org/drawingml/2006/main">
               <a:ext uri="{FF2B5EF4-FFF2-40B4-BE49-F238E27FC236}">
-                <a16:creationId xmlns:a16="http://schemas.microsoft.com/office/drawing/2014/main" id="{1ACEA1FA-6836-48F6-A414-73F59263EA90}"/>
+                <a16:creationId xmlns:a16="http://schemas.microsoft.com/office/drawing/2014/main" id="{F9E49CDE-71C9-49F8-8D18-E05526E64D98}"/>
               </a:ext>
             </a:extLst>
           </p:cNvPr>
@@ -9827,7 +10115,7 @@
           <p:cNvPr id="24" name="">
             <a:extLst xmlns:a="http://schemas.openxmlformats.org/drawingml/2006/main">
               <a:ext uri="{FF2B5EF4-FFF2-40B4-BE49-F238E27FC236}">
-                <a16:creationId xmlns:a16="http://schemas.microsoft.com/office/drawing/2014/main" id="{B7DFB10E-B96B-4DAF-A96B-3C1B48E0D8C7}"/>
+                <a16:creationId xmlns:a16="http://schemas.microsoft.com/office/drawing/2014/main" id="{9F7BBA22-4DF0-49C2-A45C-3EB00A3C2D77}"/>
               </a:ext>
             </a:extLst>
           </p:cNvPr>
@@ -9877,7 +10165,7 @@
           <p:cNvPr id="25" name="">
             <a:extLst xmlns:a="http://schemas.openxmlformats.org/drawingml/2006/main">
               <a:ext uri="{FF2B5EF4-FFF2-40B4-BE49-F238E27FC236}">
-                <a16:creationId xmlns:a16="http://schemas.microsoft.com/office/drawing/2014/main" id="{FF22009B-0A2C-449D-BAD8-41B58381FAAD}"/>
+                <a16:creationId xmlns:a16="http://schemas.microsoft.com/office/drawing/2014/main" id="{5EC1D70E-6418-40EC-8573-BC68689ABD03}"/>
               </a:ext>
             </a:extLst>
           </p:cNvPr>
@@ -9927,7 +10215,7 @@
           <p:cNvPr id="26" name="">
             <a:extLst xmlns:a="http://schemas.openxmlformats.org/drawingml/2006/main">
               <a:ext uri="{FF2B5EF4-FFF2-40B4-BE49-F238E27FC236}">
-                <a16:creationId xmlns:a16="http://schemas.microsoft.com/office/drawing/2014/main" id="{4729C461-E4AE-4DED-A721-18BE60D0F99E}"/>
+                <a16:creationId xmlns:a16="http://schemas.microsoft.com/office/drawing/2014/main" id="{8124BE8A-68A2-4DC5-8E45-A797FA2D6B0C}"/>
               </a:ext>
             </a:extLst>
           </p:cNvPr>
@@ -9958,7 +10246,7 @@
           <p:cNvPr id="27" name="">
             <a:extLst xmlns:a="http://schemas.openxmlformats.org/drawingml/2006/main">
               <a:ext uri="{FF2B5EF4-FFF2-40B4-BE49-F238E27FC236}">
-                <a16:creationId xmlns:a16="http://schemas.microsoft.com/office/drawing/2014/main" id="{0AADA8C3-0569-421A-822E-708FE638863A}"/>
+                <a16:creationId xmlns:a16="http://schemas.microsoft.com/office/drawing/2014/main" id="{9709E357-7F5A-43DD-B327-D4A39C80F93A}"/>
               </a:ext>
             </a:extLst>
           </p:cNvPr>
@@ -10008,7 +10296,7 @@
           <p:cNvPr id="28" name="">
             <a:extLst xmlns:a="http://schemas.openxmlformats.org/drawingml/2006/main">
               <a:ext uri="{FF2B5EF4-FFF2-40B4-BE49-F238E27FC236}">
-                <a16:creationId xmlns:a16="http://schemas.microsoft.com/office/drawing/2014/main" id="{79462ECB-C36A-4739-8D59-6E7F293ACE9A}"/>
+                <a16:creationId xmlns:a16="http://schemas.microsoft.com/office/drawing/2014/main" id="{FF8CB448-46B8-4401-B08B-39E8F8B498C1}"/>
               </a:ext>
             </a:extLst>
           </p:cNvPr>
@@ -10058,7 +10346,7 @@
           <p:cNvPr id="29" name="">
             <a:extLst xmlns:a="http://schemas.openxmlformats.org/drawingml/2006/main">
               <a:ext uri="{FF2B5EF4-FFF2-40B4-BE49-F238E27FC236}">
-                <a16:creationId xmlns:a16="http://schemas.microsoft.com/office/drawing/2014/main" id="{AD26A559-9F55-48C4-947F-FAC998FC10A3}"/>
+                <a16:creationId xmlns:a16="http://schemas.microsoft.com/office/drawing/2014/main" id="{D419B792-92C2-4F3C-AF72-C59F18A6501A}"/>
               </a:ext>
             </a:extLst>
           </p:cNvPr>
@@ -10108,7 +10396,7 @@
           <p:cNvPr id="30" name="">
             <a:extLst xmlns:a="http://schemas.openxmlformats.org/drawingml/2006/main">
               <a:ext uri="{FF2B5EF4-FFF2-40B4-BE49-F238E27FC236}">
-                <a16:creationId xmlns:a16="http://schemas.microsoft.com/office/drawing/2014/main" id="{BF37FC7B-7824-4BCA-98E7-617A6463F749}"/>
+                <a16:creationId xmlns:a16="http://schemas.microsoft.com/office/drawing/2014/main" id="{3179E5AF-474F-4B2C-8806-2A7B50D19CE7}"/>
               </a:ext>
             </a:extLst>
           </p:cNvPr>
@@ -10139,7 +10427,7 @@
           <p:cNvPr id="31" name="">
             <a:extLst xmlns:a="http://schemas.openxmlformats.org/drawingml/2006/main">
               <a:ext uri="{FF2B5EF4-FFF2-40B4-BE49-F238E27FC236}">
-                <a16:creationId xmlns:a16="http://schemas.microsoft.com/office/drawing/2014/main" id="{EE038EF9-A4B0-4DC2-9ACC-4D464DA4F968}"/>
+                <a16:creationId xmlns:a16="http://schemas.microsoft.com/office/drawing/2014/main" id="{3CD8E208-0FE2-45C5-86B0-32A26837BE15}"/>
               </a:ext>
             </a:extLst>
           </p:cNvPr>
@@ -10189,7 +10477,7 @@
           <p:cNvPr id="32" name="">
             <a:extLst xmlns:a="http://schemas.openxmlformats.org/drawingml/2006/main">
               <a:ext uri="{FF2B5EF4-FFF2-40B4-BE49-F238E27FC236}">
-                <a16:creationId xmlns:a16="http://schemas.microsoft.com/office/drawing/2014/main" id="{763FBBE3-65AE-4CA3-91ED-59134D7B4345}"/>
+                <a16:creationId xmlns:a16="http://schemas.microsoft.com/office/drawing/2014/main" id="{BF881E2B-078F-4B60-981A-6A1F5DF4AD07}"/>
               </a:ext>
             </a:extLst>
           </p:cNvPr>
@@ -10239,7 +10527,7 @@
           <p:cNvPr id="33" name="">
             <a:extLst xmlns:a="http://schemas.openxmlformats.org/drawingml/2006/main">
               <a:ext uri="{FF2B5EF4-FFF2-40B4-BE49-F238E27FC236}">
-                <a16:creationId xmlns:a16="http://schemas.microsoft.com/office/drawing/2014/main" id="{A539A7AE-48CB-481C-84AD-7E7C5B01C9D9}"/>
+                <a16:creationId xmlns:a16="http://schemas.microsoft.com/office/drawing/2014/main" id="{ACBE5D57-72B2-4891-8C5F-D833A017A823}"/>
               </a:ext>
             </a:extLst>
           </p:cNvPr>
@@ -10289,7 +10577,7 @@
           <p:cNvPr id="34" name="">
             <a:extLst xmlns:a="http://schemas.openxmlformats.org/drawingml/2006/main">
               <a:ext uri="{FF2B5EF4-FFF2-40B4-BE49-F238E27FC236}">
-                <a16:creationId xmlns:a16="http://schemas.microsoft.com/office/drawing/2014/main" id="{E22F6D0F-3828-4817-B86C-156FED63B9E9}"/>
+                <a16:creationId xmlns:a16="http://schemas.microsoft.com/office/drawing/2014/main" id="{4B08AA76-4182-47DD-B33A-298ADEF1D090}"/>
               </a:ext>
             </a:extLst>
           </p:cNvPr>
@@ -10320,7 +10608,7 @@
           <p:cNvPr id="35" name="">
             <a:extLst xmlns:a="http://schemas.openxmlformats.org/drawingml/2006/main">
               <a:ext uri="{FF2B5EF4-FFF2-40B4-BE49-F238E27FC236}">
-                <a16:creationId xmlns:a16="http://schemas.microsoft.com/office/drawing/2014/main" id="{DE9EE3E2-8CFC-497D-93C0-2BAB934A19A9}"/>
+                <a16:creationId xmlns:a16="http://schemas.microsoft.com/office/drawing/2014/main" id="{EEC17657-7EAD-4A6E-BE7C-7D84B845B1C6}"/>
               </a:ext>
             </a:extLst>
           </p:cNvPr>
@@ -10355,7 +10643,7 @@
           <p:nvPr/>
         </p:nvPicPr>
         <p:blipFill>
-          <a:blip xmlns:r="http://schemas.openxmlformats.org/officeDocument/2006/relationships" xmlns:a="http://schemas.openxmlformats.org/drawingml/2006/main" r:embed="Rc1e19d0ee2574ab8"/>
+          <a:blip xmlns:r="http://schemas.openxmlformats.org/officeDocument/2006/relationships" xmlns:a="http://schemas.openxmlformats.org/drawingml/2006/main" r:embed="Ra5438bdd508f43ad"/>
           <a:stretch xmlns:a="http://schemas.openxmlformats.org/drawingml/2006/main"/>
         </p:blipFill>
         <p:spPr>
@@ -10373,7 +10661,7 @@
           <p:cNvPr id="37" name="">
             <a:extLst xmlns:a="http://schemas.openxmlformats.org/drawingml/2006/main">
               <a:ext uri="{FF2B5EF4-FFF2-40B4-BE49-F238E27FC236}">
-                <a16:creationId xmlns:a16="http://schemas.microsoft.com/office/drawing/2014/main" id="{989586D3-4A31-43B3-BC05-A8669370CA5A}"/>
+                <a16:creationId xmlns:a16="http://schemas.microsoft.com/office/drawing/2014/main" id="{506EF0F7-692A-4FF9-80E3-7D18F8B47F92}"/>
               </a:ext>
             </a:extLst>
           </p:cNvPr>
@@ -10423,7 +10711,7 @@
           <p:cNvPr id="38" name="">
             <a:extLst xmlns:a="http://schemas.openxmlformats.org/drawingml/2006/main">
               <a:ext uri="{FF2B5EF4-FFF2-40B4-BE49-F238E27FC236}">
-                <a16:creationId xmlns:a16="http://schemas.microsoft.com/office/drawing/2014/main" id="{6EA86CF0-2530-4BF9-B000-21244784B04D}"/>
+                <a16:creationId xmlns:a16="http://schemas.microsoft.com/office/drawing/2014/main" id="{735B9E43-3E30-4DC4-9FDA-A756B6D292D0}"/>
               </a:ext>
             </a:extLst>
           </p:cNvPr>
@@ -10456,7 +10744,7 @@
           <p:cNvPr id="39" name="">
             <a:extLst xmlns:a="http://schemas.openxmlformats.org/drawingml/2006/main">
               <a:ext uri="{FF2B5EF4-FFF2-40B4-BE49-F238E27FC236}">
-                <a16:creationId xmlns:a16="http://schemas.microsoft.com/office/drawing/2014/main" id="{72072BBE-E1EC-448B-A281-DE5C3759BF4C}"/>
+                <a16:creationId xmlns:a16="http://schemas.microsoft.com/office/drawing/2014/main" id="{D4AA0059-BD01-413C-9A94-E72DAEC6E4D7}"/>
               </a:ext>
             </a:extLst>
           </p:cNvPr>
@@ -10487,7 +10775,7 @@
           <p:cNvPr id="40" name="">
             <a:extLst xmlns:a="http://schemas.openxmlformats.org/drawingml/2006/main">
               <a:ext uri="{FF2B5EF4-FFF2-40B4-BE49-F238E27FC236}">
-                <a16:creationId xmlns:a16="http://schemas.microsoft.com/office/drawing/2014/main" id="{2DECF964-02F5-4EAA-ACE6-1E7E742D4984}"/>
+                <a16:creationId xmlns:a16="http://schemas.microsoft.com/office/drawing/2014/main" id="{0ED374CC-5970-4E83-9C3F-3C93D7728475}"/>
               </a:ext>
             </a:extLst>
           </p:cNvPr>
@@ -10537,7 +10825,7 @@
           <p:cNvPr id="41" name="">
             <a:extLst xmlns:a="http://schemas.openxmlformats.org/drawingml/2006/main">
               <a:ext uri="{FF2B5EF4-FFF2-40B4-BE49-F238E27FC236}">
-                <a16:creationId xmlns:a16="http://schemas.microsoft.com/office/drawing/2014/main" id="{CA815130-77F1-4C7D-B6A4-AFEFA74B1AB4}"/>
+                <a16:creationId xmlns:a16="http://schemas.microsoft.com/office/drawing/2014/main" id="{08C576AA-C527-43FD-B77F-17464D08095D}"/>
               </a:ext>
             </a:extLst>
           </p:cNvPr>
@@ -10587,7 +10875,7 @@
           <p:cNvPr id="42" name="">
             <a:extLst xmlns:a="http://schemas.openxmlformats.org/drawingml/2006/main">
               <a:ext uri="{FF2B5EF4-FFF2-40B4-BE49-F238E27FC236}">
-                <a16:creationId xmlns:a16="http://schemas.microsoft.com/office/drawing/2014/main" id="{80025C5B-607D-43D5-9036-85C0EFD7CDD7}"/>
+                <a16:creationId xmlns:a16="http://schemas.microsoft.com/office/drawing/2014/main" id="{4F1D2735-A8C5-4DA9-AA5D-14163EA0EECD}"/>
               </a:ext>
             </a:extLst>
           </p:cNvPr>
@@ -10637,7 +10925,7 @@
           <p:cNvPr id="43" name="">
             <a:extLst xmlns:a="http://schemas.openxmlformats.org/drawingml/2006/main">
               <a:ext uri="{FF2B5EF4-FFF2-40B4-BE49-F238E27FC236}">
-                <a16:creationId xmlns:a16="http://schemas.microsoft.com/office/drawing/2014/main" id="{539C52F8-EE6F-4D1E-81AE-807EBFF6B9B3}"/>
+                <a16:creationId xmlns:a16="http://schemas.microsoft.com/office/drawing/2014/main" id="{730CED71-6DF4-45B9-B22F-42B144AC2544}"/>
               </a:ext>
             </a:extLst>
           </p:cNvPr>
@@ -10670,7 +10958,7 @@
           <p:cNvPr id="44" name="">
             <a:extLst xmlns:a="http://schemas.openxmlformats.org/drawingml/2006/main">
               <a:ext uri="{FF2B5EF4-FFF2-40B4-BE49-F238E27FC236}">
-                <a16:creationId xmlns:a16="http://schemas.microsoft.com/office/drawing/2014/main" id="{F96DD3BB-E514-4000-A35C-25431FF6F8BF}"/>
+                <a16:creationId xmlns:a16="http://schemas.microsoft.com/office/drawing/2014/main" id="{A08F1C05-4118-4F03-B26B-FA32AB036D06}"/>
               </a:ext>
             </a:extLst>
           </p:cNvPr>
@@ -10720,7 +11008,7 @@
           <p:cNvPr id="45" name="">
             <a:extLst xmlns:a="http://schemas.openxmlformats.org/drawingml/2006/main">
               <a:ext uri="{FF2B5EF4-FFF2-40B4-BE49-F238E27FC236}">
-                <a16:creationId xmlns:a16="http://schemas.microsoft.com/office/drawing/2014/main" id="{D9A564C4-4647-4F3B-84AC-1446901DAFEF}"/>
+                <a16:creationId xmlns:a16="http://schemas.microsoft.com/office/drawing/2014/main" id="{946C0585-946A-459F-B874-E37AFE6C04B7}"/>
               </a:ext>
             </a:extLst>
           </p:cNvPr>
@@ -10770,7 +11058,7 @@
           <p:cNvPr id="46" name="">
             <a:extLst xmlns:a="http://schemas.openxmlformats.org/drawingml/2006/main">
               <a:ext uri="{FF2B5EF4-FFF2-40B4-BE49-F238E27FC236}">
-                <a16:creationId xmlns:a16="http://schemas.microsoft.com/office/drawing/2014/main" id="{AF6CE96B-2BA9-410A-A46D-650FDE349178}"/>
+                <a16:creationId xmlns:a16="http://schemas.microsoft.com/office/drawing/2014/main" id="{3CCDFE17-C6C3-41AC-8270-3761724D9E1F}"/>
               </a:ext>
             </a:extLst>
           </p:cNvPr>
@@ -10803,7 +11091,7 @@
           <p:cNvPr id="47" name="">
             <a:extLst xmlns:a="http://schemas.openxmlformats.org/drawingml/2006/main">
               <a:ext uri="{FF2B5EF4-FFF2-40B4-BE49-F238E27FC236}">
-                <a16:creationId xmlns:a16="http://schemas.microsoft.com/office/drawing/2014/main" id="{F57D19AC-9E37-42DB-8BB8-979B14D0AAC6}"/>
+                <a16:creationId xmlns:a16="http://schemas.microsoft.com/office/drawing/2014/main" id="{3C40F4CB-65AE-4651-996E-67CC92D27338}"/>
               </a:ext>
             </a:extLst>
           </p:cNvPr>
@@ -10853,7 +11141,7 @@
           <p:cNvPr id="48" name="">
             <a:extLst xmlns:a="http://schemas.openxmlformats.org/drawingml/2006/main">
               <a:ext uri="{FF2B5EF4-FFF2-40B4-BE49-F238E27FC236}">
-                <a16:creationId xmlns:a16="http://schemas.microsoft.com/office/drawing/2014/main" id="{844BADA2-EDDE-4952-A8CC-43C76418A6E5}"/>
+                <a16:creationId xmlns:a16="http://schemas.microsoft.com/office/drawing/2014/main" id="{7F343711-00EE-4F5B-A0C8-6CB5FB265481}"/>
               </a:ext>
             </a:extLst>
           </p:cNvPr>
@@ -10903,7 +11191,7 @@
           <p:cNvPr id="49" name="">
             <a:extLst xmlns:a="http://schemas.openxmlformats.org/drawingml/2006/main">
               <a:ext uri="{FF2B5EF4-FFF2-40B4-BE49-F238E27FC236}">
-                <a16:creationId xmlns:a16="http://schemas.microsoft.com/office/drawing/2014/main" id="{60027154-2AE3-4CBC-860E-14A9CAC57A4A}"/>
+                <a16:creationId xmlns:a16="http://schemas.microsoft.com/office/drawing/2014/main" id="{BCD0D881-AB31-40DC-9376-15B7B13548EE}"/>
               </a:ext>
             </a:extLst>
           </p:cNvPr>
@@ -10953,7 +11241,7 @@
           <p:cNvPr id="50" name="">
             <a:extLst xmlns:a="http://schemas.openxmlformats.org/drawingml/2006/main">
               <a:ext uri="{FF2B5EF4-FFF2-40B4-BE49-F238E27FC236}">
-                <a16:creationId xmlns:a16="http://schemas.microsoft.com/office/drawing/2014/main" id="{28D17894-C557-4962-AA5D-4E1D3E80D6C4}"/>
+                <a16:creationId xmlns:a16="http://schemas.microsoft.com/office/drawing/2014/main" id="{44ED10E3-D7D4-4D09-A1B3-B4B65CF250B3}"/>
               </a:ext>
             </a:extLst>
           </p:cNvPr>
@@ -11003,7 +11291,7 @@
           <p:cNvPr id="51" name="">
             <a:extLst xmlns:a="http://schemas.openxmlformats.org/drawingml/2006/main">
               <a:ext uri="{FF2B5EF4-FFF2-40B4-BE49-F238E27FC236}">
-                <a16:creationId xmlns:a16="http://schemas.microsoft.com/office/drawing/2014/main" id="{768F80BB-51E5-4D9D-8C79-D8C46853CE62}"/>
+                <a16:creationId xmlns:a16="http://schemas.microsoft.com/office/drawing/2014/main" id="{E48968E3-E5B4-4E2C-980C-518016970DB3}"/>
               </a:ext>
             </a:extLst>
           </p:cNvPr>
@@ -11053,7 +11341,7 @@
           <p:cNvPr id="52" name="">
             <a:extLst xmlns:a="http://schemas.openxmlformats.org/drawingml/2006/main">
               <a:ext uri="{FF2B5EF4-FFF2-40B4-BE49-F238E27FC236}">
-                <a16:creationId xmlns:a16="http://schemas.microsoft.com/office/drawing/2014/main" id="{EA963663-7532-4129-8178-E6D490A3D3FF}"/>
+                <a16:creationId xmlns:a16="http://schemas.microsoft.com/office/drawing/2014/main" id="{22D502DE-3397-45B4-A67D-4205C84AA91D}"/>
               </a:ext>
             </a:extLst>
           </p:cNvPr>
@@ -11084,7 +11372,7 @@
           <p:cNvPr id="53" name="">
             <a:extLst xmlns:a="http://schemas.openxmlformats.org/drawingml/2006/main">
               <a:ext uri="{FF2B5EF4-FFF2-40B4-BE49-F238E27FC236}">
-                <a16:creationId xmlns:a16="http://schemas.microsoft.com/office/drawing/2014/main" id="{F966F198-EE5D-4694-8BF3-B85E85E2377A}"/>
+                <a16:creationId xmlns:a16="http://schemas.microsoft.com/office/drawing/2014/main" id="{B980BD37-436E-4358-84D2-F9051CB0A6A0}"/>
               </a:ext>
             </a:extLst>
           </p:cNvPr>
@@ -11134,7 +11422,7 @@
           <p:cNvPr id="54" name="">
             <a:extLst xmlns:a="http://schemas.openxmlformats.org/drawingml/2006/main">
               <a:ext uri="{FF2B5EF4-FFF2-40B4-BE49-F238E27FC236}">
-                <a16:creationId xmlns:a16="http://schemas.microsoft.com/office/drawing/2014/main" id="{E04CF933-58A4-4CA0-9876-9293C86709C3}"/>
+                <a16:creationId xmlns:a16="http://schemas.microsoft.com/office/drawing/2014/main" id="{4F0379B0-BC3A-490A-8107-4A12336B4EF1}"/>
               </a:ext>
             </a:extLst>
           </p:cNvPr>
@@ -11184,7 +11472,7 @@
           <p:cNvPr id="55" name="">
             <a:extLst xmlns:a="http://schemas.openxmlformats.org/drawingml/2006/main">
               <a:ext uri="{FF2B5EF4-FFF2-40B4-BE49-F238E27FC236}">
-                <a16:creationId xmlns:a16="http://schemas.microsoft.com/office/drawing/2014/main" id="{3EFD8F9B-3C4B-4AC3-A1D2-5D46FC2EFBBB}"/>
+                <a16:creationId xmlns:a16="http://schemas.microsoft.com/office/drawing/2014/main" id="{7EABBC35-151D-4877-95B7-9640B2DB5AC4}"/>
               </a:ext>
             </a:extLst>
           </p:cNvPr>
@@ -11215,7 +11503,7 @@
           <p:cNvPr id="56" name="">
             <a:extLst xmlns:a="http://schemas.openxmlformats.org/drawingml/2006/main">
               <a:ext uri="{FF2B5EF4-FFF2-40B4-BE49-F238E27FC236}">
-                <a16:creationId xmlns:a16="http://schemas.microsoft.com/office/drawing/2014/main" id="{3927BD25-B25B-467B-91ED-863B3452FF02}"/>
+                <a16:creationId xmlns:a16="http://schemas.microsoft.com/office/drawing/2014/main" id="{FA7A8B6A-8B72-4C0F-A980-11F3823CCBCC}"/>
               </a:ext>
             </a:extLst>
           </p:cNvPr>
@@ -11265,7 +11553,7 @@
           <p:cNvPr id="57" name="">
             <a:extLst xmlns:a="http://schemas.openxmlformats.org/drawingml/2006/main">
               <a:ext uri="{FF2B5EF4-FFF2-40B4-BE49-F238E27FC236}">
-                <a16:creationId xmlns:a16="http://schemas.microsoft.com/office/drawing/2014/main" id="{5ECF5B02-BF40-451B-A29B-03EDFA927D41}"/>
+                <a16:creationId xmlns:a16="http://schemas.microsoft.com/office/drawing/2014/main" id="{5337BB69-BA99-4459-9BED-DFCCFC57F9D0}"/>
               </a:ext>
             </a:extLst>
           </p:cNvPr>
@@ -11313,7 +11601,7 @@
     </p:spTree>
     <p:extLst>
       <p:ext uri="{BB962C8B-B14F-4D97-AF65-F5344CB8AC3E}">
-        <p14:creationId xmlns:p14="http://schemas.microsoft.com/office/powerpoint/2010/main" val="1136938782"/>
+        <p14:creationId xmlns:p14="http://schemas.microsoft.com/office/powerpoint/2010/main" val="1961058659"/>
       </p:ext>
     </p:extLst>
   </p:cSld>
@@ -11344,7 +11632,7 @@
           <p:cNvPr id="1" name="">
             <a:extLst xmlns:a="http://schemas.openxmlformats.org/drawingml/2006/main">
               <a:ext uri="{FF2B5EF4-FFF2-40B4-BE49-F238E27FC236}">
-                <a16:creationId xmlns:a16="http://schemas.microsoft.com/office/drawing/2014/main" id="{75FE978F-3FA8-486C-8D1B-86BA97D1CA54}"/>
+                <a16:creationId xmlns:a16="http://schemas.microsoft.com/office/drawing/2014/main" id="{E85A32CA-6DEB-4AB1-BE93-540C7B1B21C9}"/>
               </a:ext>
             </a:extLst>
           </p:cNvPr>
@@ -11372,14 +11660,14 @@
       </p:sp>
       <p:pic>
         <p:nvPicPr>
-          <p:cNvPr id="41" name=""/>
+          <p:cNvPr id="46" name=""/>
           <p:cNvPicPr>
             <a:picLocks xmlns:a="http://schemas.openxmlformats.org/drawingml/2006/main" noChangeAspect="1"/>
           </p:cNvPicPr>
           <p:nvPr/>
         </p:nvPicPr>
         <p:blipFill>
-          <a:blip xmlns:r="http://schemas.openxmlformats.org/officeDocument/2006/relationships" xmlns:a="http://schemas.openxmlformats.org/drawingml/2006/main" r:embed="Rfde0ccccdf5540c5"/>
+          <a:blip xmlns:r="http://schemas.openxmlformats.org/officeDocument/2006/relationships" xmlns:a="http://schemas.openxmlformats.org/drawingml/2006/main" r:embed="R35e868a1cc9a4a46"/>
           <a:stretch xmlns:a="http://schemas.openxmlformats.org/drawingml/2006/main"/>
         </p:blipFill>
         <p:spPr>
@@ -11397,7 +11685,7 @@
           <p:cNvPr id="3" name="">
             <a:extLst xmlns:a="http://schemas.openxmlformats.org/drawingml/2006/main">
               <a:ext uri="{FF2B5EF4-FFF2-40B4-BE49-F238E27FC236}">
-                <a16:creationId xmlns:a16="http://schemas.microsoft.com/office/drawing/2014/main" id="{0EA316D9-C83C-4E26-9853-DBC31FCC2005}"/>
+                <a16:creationId xmlns:a16="http://schemas.microsoft.com/office/drawing/2014/main" id="{F443EB8A-D5B8-4035-9238-05ACB1653D3C}"/>
               </a:ext>
             </a:extLst>
           </p:cNvPr>
@@ -11437,7 +11725,7 @@
                   <a:srgbClr val="161616"/>
                 </a:solidFill>
               </a:rPr>
-              <a:t>Профиль угроз и разрывов контроля</a:t>
+              <a:t>Профиль покрытия ключевых контролей</a:t>
             </a:r>
           </a:p>
         </p:txBody>
@@ -11447,7 +11735,7 @@
           <p:cNvPr id="4" name="">
             <a:extLst xmlns:a="http://schemas.openxmlformats.org/drawingml/2006/main">
               <a:ext uri="{FF2B5EF4-FFF2-40B4-BE49-F238E27FC236}">
-                <a16:creationId xmlns:a16="http://schemas.microsoft.com/office/drawing/2014/main" id="{972027BB-3628-41F3-948B-1CBAF2AD95E0}"/>
+                <a16:creationId xmlns:a16="http://schemas.microsoft.com/office/drawing/2014/main" id="{A25E26D9-44B6-4785-859B-51E080FC5973}"/>
               </a:ext>
             </a:extLst>
           </p:cNvPr>
@@ -11480,7 +11768,7 @@
           <p:cNvPr id="5" name="">
             <a:extLst xmlns:a="http://schemas.openxmlformats.org/drawingml/2006/main">
               <a:ext uri="{FF2B5EF4-FFF2-40B4-BE49-F238E27FC236}">
-                <a16:creationId xmlns:a16="http://schemas.microsoft.com/office/drawing/2014/main" id="{F93B76BD-DC35-4416-8A32-680FE63BA229}"/>
+                <a16:creationId xmlns:a16="http://schemas.microsoft.com/office/drawing/2014/main" id="{E23C2393-FD7E-4A43-A41E-6C82AE96E008}"/>
               </a:ext>
             </a:extLst>
           </p:cNvPr>
@@ -11511,7 +11799,7 @@
           <p:cNvPr id="6" name="">
             <a:extLst xmlns:a="http://schemas.openxmlformats.org/drawingml/2006/main">
               <a:ext uri="{FF2B5EF4-FFF2-40B4-BE49-F238E27FC236}">
-                <a16:creationId xmlns:a16="http://schemas.microsoft.com/office/drawing/2014/main" id="{158BF54D-32C6-4859-9CC3-A79D512A791F}"/>
+                <a16:creationId xmlns:a16="http://schemas.microsoft.com/office/drawing/2014/main" id="{3A0D9237-638E-4798-8FF3-D3BA9380BE53}"/>
               </a:ext>
             </a:extLst>
           </p:cNvPr>
@@ -11561,7 +11849,7 @@
           <p:cNvPr id="7" name="">
             <a:extLst xmlns:a="http://schemas.openxmlformats.org/drawingml/2006/main">
               <a:ext uri="{FF2B5EF4-FFF2-40B4-BE49-F238E27FC236}">
-                <a16:creationId xmlns:a16="http://schemas.microsoft.com/office/drawing/2014/main" id="{5396AC5F-3073-445D-8ADA-F6A6C672C9D6}"/>
+                <a16:creationId xmlns:a16="http://schemas.microsoft.com/office/drawing/2014/main" id="{43E5F6BE-179A-4BD7-908B-244077E83F98}"/>
               </a:ext>
             </a:extLst>
           </p:cNvPr>
@@ -11611,7 +11899,7 @@
           <p:cNvPr id="8" name="">
             <a:extLst xmlns:a="http://schemas.openxmlformats.org/drawingml/2006/main">
               <a:ext uri="{FF2B5EF4-FFF2-40B4-BE49-F238E27FC236}">
-                <a16:creationId xmlns:a16="http://schemas.microsoft.com/office/drawing/2014/main" id="{0095517D-ABEE-4E2B-BE58-623231442FC0}"/>
+                <a16:creationId xmlns:a16="http://schemas.microsoft.com/office/drawing/2014/main" id="{F97CB97E-C9DE-4CCC-B332-4C046DE05F97}"/>
               </a:ext>
             </a:extLst>
           </p:cNvPr>
@@ -11623,7 +11911,7 @@
         <p:spPr>
           <a:xfrm xmlns:a="http://schemas.openxmlformats.org/drawingml/2006/main">
             <a:off x="552450" y="1333500"/>
-            <a:ext cx="10648950" cy="323850"/>
+            <a:ext cx="7239000" cy="323850"/>
           </a:xfrm>
           <a:prstGeom xmlns:a="http://schemas.openxmlformats.org/drawingml/2006/main" prst="rect">
             <a:avLst/>
@@ -11651,7 +11939,7 @@
                   <a:srgbClr val="FF6412"/>
                 </a:solidFill>
               </a:rPr>
-              <a:t>Доля незакрытых контрольных зон по данным анкеты</a:t>
+              <a:t>0% — контроль не подтвержден; 100% — целевой контур закрыт</a:t>
             </a:r>
           </a:p>
         </p:txBody>
@@ -11661,7 +11949,7 @@
           <p:cNvPr id="9" name="">
             <a:extLst xmlns:a="http://schemas.openxmlformats.org/drawingml/2006/main">
               <a:ext uri="{FF2B5EF4-FFF2-40B4-BE49-F238E27FC236}">
-                <a16:creationId xmlns:a16="http://schemas.microsoft.com/office/drawing/2014/main" id="{6FF7B63D-C33F-481A-8638-DB5FFECCDDD0}"/>
+                <a16:creationId xmlns:a16="http://schemas.microsoft.com/office/drawing/2014/main" id="{7300AC9B-BE2F-41B0-8459-5809B995323F}"/>
               </a:ext>
             </a:extLst>
           </p:cNvPr>
@@ -11673,7 +11961,7 @@
         <p:spPr>
           <a:xfrm xmlns:a="http://schemas.openxmlformats.org/drawingml/2006/main">
             <a:off x="552450" y="1695450"/>
-            <a:ext cx="10648950" cy="266700"/>
+            <a:ext cx="7810500" cy="266700"/>
           </a:xfrm>
           <a:prstGeom xmlns:a="http://schemas.openxmlformats.org/drawingml/2006/main" prst="rect">
             <a:avLst/>
@@ -11711,7 +11999,142 @@
           <p:cNvPr id="10" name="">
             <a:extLst xmlns:a="http://schemas.openxmlformats.org/drawingml/2006/main">
               <a:ext uri="{FF2B5EF4-FFF2-40B4-BE49-F238E27FC236}">
-                <a16:creationId xmlns:a16="http://schemas.microsoft.com/office/drawing/2014/main" id="{4601222F-5E32-457C-86D1-6DA65DF216D5}"/>
+                <a16:creationId xmlns:a16="http://schemas.microsoft.com/office/drawing/2014/main" id="{59B964B8-9107-43EA-BBB9-CF4B7528CED3}"/>
+              </a:ext>
+            </a:extLst>
+          </p:cNvPr>
+          <p:cNvSpPr>
+            <a:spLocks xmlns:a="http://schemas.openxmlformats.org/drawingml/2006/main" noGrp="1"/>
+          </p:cNvSpPr>
+          <p:nvPr/>
+        </p:nvSpPr>
+        <p:spPr>
+          <a:xfrm xmlns:a="http://schemas.openxmlformats.org/drawingml/2006/main">
+            <a:off x="8934450" y="1333500"/>
+            <a:ext cx="2266950" cy="647700"/>
+          </a:xfrm>
+          <a:prstGeom xmlns:a="http://schemas.openxmlformats.org/drawingml/2006/main" prst="roundRect">
+            <a:avLst>
+              <a:gd name="adj" fmla="val 11765"/>
+            </a:avLst>
+          </a:prstGeom>
+          <a:solidFill xmlns:a="http://schemas.openxmlformats.org/drawingml/2006/main">
+            <a:srgbClr val="FFF3EB"/>
+          </a:solidFill>
+          <a:ln xmlns:a="http://schemas.openxmlformats.org/drawingml/2006/main" w="9525">
+            <a:solidFill>
+              <a:srgbClr val="E4E7EC"/>
+            </a:solidFill>
+            <a:prstDash val="solid"/>
+          </a:ln>
+        </p:spPr>
+      </p:sp>
+      <p:sp>
+        <p:nvSpPr>
+          <p:cNvPr id="11" name="">
+            <a:extLst xmlns:a="http://schemas.openxmlformats.org/drawingml/2006/main">
+              <a:ext uri="{FF2B5EF4-FFF2-40B4-BE49-F238E27FC236}">
+                <a16:creationId xmlns:a16="http://schemas.microsoft.com/office/drawing/2014/main" id="{66298818-72B0-40BF-9CC4-0DBE876E0B8F}"/>
+              </a:ext>
+            </a:extLst>
+          </p:cNvPr>
+          <p:cNvSpPr>
+            <a:spLocks xmlns:a="http://schemas.openxmlformats.org/drawingml/2006/main" noGrp="1"/>
+          </p:cNvSpPr>
+          <p:nvPr/>
+        </p:nvSpPr>
+        <p:spPr>
+          <a:xfrm xmlns:a="http://schemas.openxmlformats.org/drawingml/2006/main">
+            <a:off x="9124950" y="1428750"/>
+            <a:ext cx="781050" cy="361950"/>
+          </a:xfrm>
+          <a:prstGeom xmlns:a="http://schemas.openxmlformats.org/drawingml/2006/main" prst="rect">
+            <a:avLst/>
+          </a:prstGeom>
+          <a:noFill xmlns:a="http://schemas.openxmlformats.org/drawingml/2006/main"/>
+          <a:ln xmlns:a="http://schemas.openxmlformats.org/drawingml/2006/main" w="0">
+            <a:noFill/>
+            <a:prstDash val="solid"/>
+          </a:ln>
+        </p:spPr>
+        <p:txBody>
+          <a:bodyPr xmlns:a="http://schemas.openxmlformats.org/drawingml/2006/main"/>
+          <a:lstStyle xmlns:a="http://schemas.openxmlformats.org/drawingml/2006/main"/>
+          <a:p xmlns:a="http://schemas.openxmlformats.org/drawingml/2006/main">
+            <a:pPr algn="ctr">
+              <a:defRPr sz="2025" b="1">
+                <a:solidFill>
+                  <a:srgbClr val="161616"/>
+                </a:solidFill>
+              </a:defRPr>
+            </a:pPr>
+            <a:r>
+              <a:rPr sz="2025" b="1">
+                <a:solidFill>
+                  <a:srgbClr val="161616"/>
+                </a:solidFill>
+              </a:rPr>
+              <a:t>{{COVERAGE_AVERAGE}}%</a:t>
+            </a:r>
+          </a:p>
+        </p:txBody>
+      </p:sp>
+      <p:sp>
+        <p:nvSpPr>
+          <p:cNvPr id="12" name="">
+            <a:extLst xmlns:a="http://schemas.openxmlformats.org/drawingml/2006/main">
+              <a:ext uri="{FF2B5EF4-FFF2-40B4-BE49-F238E27FC236}">
+                <a16:creationId xmlns:a16="http://schemas.microsoft.com/office/drawing/2014/main" id="{B2DABB4F-4BD6-4295-9656-C8D00E3FF604}"/>
+              </a:ext>
+            </a:extLst>
+          </p:cNvPr>
+          <p:cNvSpPr>
+            <a:spLocks xmlns:a="http://schemas.openxmlformats.org/drawingml/2006/main" noGrp="1"/>
+          </p:cNvSpPr>
+          <p:nvPr/>
+        </p:nvSpPr>
+        <p:spPr>
+          <a:xfrm xmlns:a="http://schemas.openxmlformats.org/drawingml/2006/main">
+            <a:off x="9944100" y="1504950"/>
+            <a:ext cx="1066800" cy="228600"/>
+          </a:xfrm>
+          <a:prstGeom xmlns:a="http://schemas.openxmlformats.org/drawingml/2006/main" prst="rect">
+            <a:avLst/>
+          </a:prstGeom>
+          <a:noFill xmlns:a="http://schemas.openxmlformats.org/drawingml/2006/main"/>
+          <a:ln xmlns:a="http://schemas.openxmlformats.org/drawingml/2006/main" w="0">
+            <a:noFill/>
+            <a:prstDash val="solid"/>
+          </a:ln>
+        </p:spPr>
+        <p:txBody>
+          <a:bodyPr xmlns:a="http://schemas.openxmlformats.org/drawingml/2006/main"/>
+          <a:lstStyle xmlns:a="http://schemas.openxmlformats.org/drawingml/2006/main"/>
+          <a:p xmlns:a="http://schemas.openxmlformats.org/drawingml/2006/main">
+            <a:pPr algn="ctr">
+              <a:defRPr sz="900" b="1">
+                <a:solidFill>
+                  <a:srgbClr val="667085"/>
+                </a:solidFill>
+              </a:defRPr>
+            </a:pPr>
+            <a:r>
+              <a:rPr sz="900" b="1">
+                <a:solidFill>
+                  <a:srgbClr val="667085"/>
+                </a:solidFill>
+              </a:rPr>
+              <a:t>среднее покрытие</a:t>
+            </a:r>
+          </a:p>
+        </p:txBody>
+      </p:sp>
+      <p:sp>
+        <p:nvSpPr>
+          <p:cNvPr id="13" name="">
+            <a:extLst xmlns:a="http://schemas.openxmlformats.org/drawingml/2006/main">
+              <a:ext uri="{FF2B5EF4-FFF2-40B4-BE49-F238E27FC236}">
+                <a16:creationId xmlns:a16="http://schemas.microsoft.com/office/drawing/2014/main" id="{0E49528B-44A2-4BC1-9F03-2F6D9994AF44}"/>
               </a:ext>
             </a:extLst>
           </p:cNvPr>
@@ -11739,10 +12162,10 @@
       </p:sp>
       <p:sp>
         <p:nvSpPr>
-          <p:cNvPr id="11" name="">
-            <a:extLst xmlns:a="http://schemas.openxmlformats.org/drawingml/2006/main">
-              <a:ext uri="{FF2B5EF4-FFF2-40B4-BE49-F238E27FC236}">
-                <a16:creationId xmlns:a16="http://schemas.microsoft.com/office/drawing/2014/main" id="{22FA9057-38BA-4504-B8C6-D1318D920222}"/>
+          <p:cNvPr id="14" name="">
+            <a:extLst xmlns:a="http://schemas.openxmlformats.org/drawingml/2006/main">
+              <a:ext uri="{FF2B5EF4-FFF2-40B4-BE49-F238E27FC236}">
+                <a16:creationId xmlns:a16="http://schemas.microsoft.com/office/drawing/2014/main" id="{5C959D71-AA72-44FC-BAAA-134537BCB22D}"/>
               </a:ext>
             </a:extLst>
           </p:cNvPr>
@@ -11770,10 +12193,10 @@
       </p:sp>
       <p:sp>
         <p:nvSpPr>
-          <p:cNvPr id="12" name="">
-            <a:extLst xmlns:a="http://schemas.openxmlformats.org/drawingml/2006/main">
-              <a:ext uri="{FF2B5EF4-FFF2-40B4-BE49-F238E27FC236}">
-                <a16:creationId xmlns:a16="http://schemas.microsoft.com/office/drawing/2014/main" id="{627BFC9B-B91C-4219-828C-E82B38F1FC7E}"/>
+          <p:cNvPr id="15" name="">
+            <a:extLst xmlns:a="http://schemas.openxmlformats.org/drawingml/2006/main">
+              <a:ext uri="{FF2B5EF4-FFF2-40B4-BE49-F238E27FC236}">
+                <a16:creationId xmlns:a16="http://schemas.microsoft.com/office/drawing/2014/main" id="{6522B81B-7D3F-44D7-BC37-7A3868152731}"/>
               </a:ext>
             </a:extLst>
           </p:cNvPr>
@@ -11820,10 +12243,10 @@
       </p:sp>
       <p:sp>
         <p:nvSpPr>
-          <p:cNvPr id="13" name="">
-            <a:extLst xmlns:a="http://schemas.openxmlformats.org/drawingml/2006/main">
-              <a:ext uri="{FF2B5EF4-FFF2-40B4-BE49-F238E27FC236}">
-                <a16:creationId xmlns:a16="http://schemas.microsoft.com/office/drawing/2014/main" id="{6CE8753B-1D9E-48A5-A1E6-79CEEF9A4C05}"/>
+          <p:cNvPr id="16" name="">
+            <a:extLst xmlns:a="http://schemas.openxmlformats.org/drawingml/2006/main">
+              <a:ext uri="{FF2B5EF4-FFF2-40B4-BE49-F238E27FC236}">
+                <a16:creationId xmlns:a16="http://schemas.microsoft.com/office/drawing/2014/main" id="{F4676433-DE92-4484-A11A-208EF9DDAD76}"/>
               </a:ext>
             </a:extLst>
           </p:cNvPr>
@@ -11870,10 +12293,10 @@
       </p:sp>
       <p:sp>
         <p:nvSpPr>
-          <p:cNvPr id="14" name="">
-            <a:extLst xmlns:a="http://schemas.openxmlformats.org/drawingml/2006/main">
-              <a:ext uri="{FF2B5EF4-FFF2-40B4-BE49-F238E27FC236}">
-                <a16:creationId xmlns:a16="http://schemas.microsoft.com/office/drawing/2014/main" id="{9EEBDDED-42CE-41DB-9C68-0E1383A2E388}"/>
+          <p:cNvPr id="17" name="">
+            <a:extLst xmlns:a="http://schemas.openxmlformats.org/drawingml/2006/main">
+              <a:ext uri="{FF2B5EF4-FFF2-40B4-BE49-F238E27FC236}">
+                <a16:creationId xmlns:a16="http://schemas.microsoft.com/office/drawing/2014/main" id="{EEE344BE-39B2-4686-BAAA-4F75CCA973BD}"/>
               </a:ext>
             </a:extLst>
           </p:cNvPr>
@@ -11913,17 +12336,17 @@
                   <a:srgbClr val="667085"/>
                 </a:solidFill>
               </a:rPr>
-              <a:t>разрыв контроля</a:t>
-            </a:r>
-          </a:p>
-        </p:txBody>
-      </p:sp>
-      <p:sp>
-        <p:nvSpPr>
-          <p:cNvPr id="15" name="">
-            <a:extLst xmlns:a="http://schemas.openxmlformats.org/drawingml/2006/main">
-              <a:ext uri="{FF2B5EF4-FFF2-40B4-BE49-F238E27FC236}">
-                <a16:creationId xmlns:a16="http://schemas.microsoft.com/office/drawing/2014/main" id="{672ABB74-099F-44D3-95ED-843FDD6F90E6}"/>
+              <a:t>уровень покрытия</a:t>
+            </a:r>
+          </a:p>
+        </p:txBody>
+      </p:sp>
+      <p:sp>
+        <p:nvSpPr>
+          <p:cNvPr id="18" name="">
+            <a:extLst xmlns:a="http://schemas.openxmlformats.org/drawingml/2006/main">
+              <a:ext uri="{FF2B5EF4-FFF2-40B4-BE49-F238E27FC236}">
+                <a16:creationId xmlns:a16="http://schemas.microsoft.com/office/drawing/2014/main" id="{513A901B-DAEE-4205-82AE-1FFEDD986FC0}"/>
               </a:ext>
             </a:extLst>
           </p:cNvPr>
@@ -11951,10 +12374,10 @@
       </p:sp>
       <p:sp>
         <p:nvSpPr>
-          <p:cNvPr id="16" name="">
-            <a:extLst xmlns:a="http://schemas.openxmlformats.org/drawingml/2006/main">
-              <a:ext uri="{FF2B5EF4-FFF2-40B4-BE49-F238E27FC236}">
-                <a16:creationId xmlns:a16="http://schemas.microsoft.com/office/drawing/2014/main" id="{74D76DB6-8678-4C0C-A172-7CE44E0A4AE6}"/>
+          <p:cNvPr id="19" name="">
+            <a:extLst xmlns:a="http://schemas.openxmlformats.org/drawingml/2006/main">
+              <a:ext uri="{FF2B5EF4-FFF2-40B4-BE49-F238E27FC236}">
+                <a16:creationId xmlns:a16="http://schemas.microsoft.com/office/drawing/2014/main" id="{8AD44563-5C59-4F93-AD98-1DF1D54F4C22}"/>
               </a:ext>
             </a:extLst>
           </p:cNvPr>
@@ -11982,10 +12405,10 @@
       </p:sp>
       <p:sp>
         <p:nvSpPr>
-          <p:cNvPr id="17" name="">
-            <a:extLst xmlns:a="http://schemas.openxmlformats.org/drawingml/2006/main">
-              <a:ext uri="{FF2B5EF4-FFF2-40B4-BE49-F238E27FC236}">
-                <a16:creationId xmlns:a16="http://schemas.microsoft.com/office/drawing/2014/main" id="{8C55DAA6-0B43-4CB6-A0DF-E51629351401}"/>
+          <p:cNvPr id="20" name="">
+            <a:extLst xmlns:a="http://schemas.openxmlformats.org/drawingml/2006/main">
+              <a:ext uri="{FF2B5EF4-FFF2-40B4-BE49-F238E27FC236}">
+                <a16:creationId xmlns:a16="http://schemas.microsoft.com/office/drawing/2014/main" id="{BD78A33C-FE5F-4106-AF13-1C1C5DC6E686}"/>
               </a:ext>
             </a:extLst>
           </p:cNvPr>
@@ -12032,10 +12455,10 @@
       </p:sp>
       <p:sp>
         <p:nvSpPr>
-          <p:cNvPr id="18" name="">
-            <a:extLst xmlns:a="http://schemas.openxmlformats.org/drawingml/2006/main">
-              <a:ext uri="{FF2B5EF4-FFF2-40B4-BE49-F238E27FC236}">
-                <a16:creationId xmlns:a16="http://schemas.microsoft.com/office/drawing/2014/main" id="{A7777C4B-A570-46EE-B916-9E1B0DACC8A2}"/>
+          <p:cNvPr id="21" name="">
+            <a:extLst xmlns:a="http://schemas.openxmlformats.org/drawingml/2006/main">
+              <a:ext uri="{FF2B5EF4-FFF2-40B4-BE49-F238E27FC236}">
+                <a16:creationId xmlns:a16="http://schemas.microsoft.com/office/drawing/2014/main" id="{855642E1-69EB-4B22-BA27-F360A94D8775}"/>
               </a:ext>
             </a:extLst>
           </p:cNvPr>
@@ -12082,10 +12505,10 @@
       </p:sp>
       <p:sp>
         <p:nvSpPr>
-          <p:cNvPr id="19" name="">
-            <a:extLst xmlns:a="http://schemas.openxmlformats.org/drawingml/2006/main">
-              <a:ext uri="{FF2B5EF4-FFF2-40B4-BE49-F238E27FC236}">
-                <a16:creationId xmlns:a16="http://schemas.microsoft.com/office/drawing/2014/main" id="{A9017ACF-5F21-4987-B2D4-494760D947D3}"/>
+          <p:cNvPr id="22" name="">
+            <a:extLst xmlns:a="http://schemas.openxmlformats.org/drawingml/2006/main">
+              <a:ext uri="{FF2B5EF4-FFF2-40B4-BE49-F238E27FC236}">
+                <a16:creationId xmlns:a16="http://schemas.microsoft.com/office/drawing/2014/main" id="{DD3B7C8A-377E-493F-8201-819765799A19}"/>
               </a:ext>
             </a:extLst>
           </p:cNvPr>
@@ -12125,17 +12548,17 @@
                   <a:srgbClr val="667085"/>
                 </a:solidFill>
               </a:rPr>
-              <a:t>разрыв контроля</a:t>
-            </a:r>
-          </a:p>
-        </p:txBody>
-      </p:sp>
-      <p:sp>
-        <p:nvSpPr>
-          <p:cNvPr id="20" name="">
-            <a:extLst xmlns:a="http://schemas.openxmlformats.org/drawingml/2006/main">
-              <a:ext uri="{FF2B5EF4-FFF2-40B4-BE49-F238E27FC236}">
-                <a16:creationId xmlns:a16="http://schemas.microsoft.com/office/drawing/2014/main" id="{887D1A55-E53B-43AB-B1FF-CD5EAA348C77}"/>
+              <a:t>уровень покрытия</a:t>
+            </a:r>
+          </a:p>
+        </p:txBody>
+      </p:sp>
+      <p:sp>
+        <p:nvSpPr>
+          <p:cNvPr id="23" name="">
+            <a:extLst xmlns:a="http://schemas.openxmlformats.org/drawingml/2006/main">
+              <a:ext uri="{FF2B5EF4-FFF2-40B4-BE49-F238E27FC236}">
+                <a16:creationId xmlns:a16="http://schemas.microsoft.com/office/drawing/2014/main" id="{7ED18A13-262D-4038-A135-17DEBF3546A6}"/>
               </a:ext>
             </a:extLst>
           </p:cNvPr>
@@ -12163,10 +12586,10 @@
       </p:sp>
       <p:sp>
         <p:nvSpPr>
-          <p:cNvPr id="21" name="">
-            <a:extLst xmlns:a="http://schemas.openxmlformats.org/drawingml/2006/main">
-              <a:ext uri="{FF2B5EF4-FFF2-40B4-BE49-F238E27FC236}">
-                <a16:creationId xmlns:a16="http://schemas.microsoft.com/office/drawing/2014/main" id="{4B412591-1B3C-4573-8E11-E18A882B37DC}"/>
+          <p:cNvPr id="24" name="">
+            <a:extLst xmlns:a="http://schemas.openxmlformats.org/drawingml/2006/main">
+              <a:ext uri="{FF2B5EF4-FFF2-40B4-BE49-F238E27FC236}">
+                <a16:creationId xmlns:a16="http://schemas.microsoft.com/office/drawing/2014/main" id="{2CA01B2B-C0A3-4208-B2AB-F02DD04908B1}"/>
               </a:ext>
             </a:extLst>
           </p:cNvPr>
@@ -12194,10 +12617,10 @@
       </p:sp>
       <p:sp>
         <p:nvSpPr>
-          <p:cNvPr id="22" name="">
-            <a:extLst xmlns:a="http://schemas.openxmlformats.org/drawingml/2006/main">
-              <a:ext uri="{FF2B5EF4-FFF2-40B4-BE49-F238E27FC236}">
-                <a16:creationId xmlns:a16="http://schemas.microsoft.com/office/drawing/2014/main" id="{9F7ED941-B15E-4AC8-9F38-86BF1F2F5F1E}"/>
+          <p:cNvPr id="25" name="">
+            <a:extLst xmlns:a="http://schemas.openxmlformats.org/drawingml/2006/main">
+              <a:ext uri="{FF2B5EF4-FFF2-40B4-BE49-F238E27FC236}">
+                <a16:creationId xmlns:a16="http://schemas.microsoft.com/office/drawing/2014/main" id="{C99C6502-D3A5-43B7-AA6F-D8DFC5A5905D}"/>
               </a:ext>
             </a:extLst>
           </p:cNvPr>
@@ -12244,10 +12667,10 @@
       </p:sp>
       <p:sp>
         <p:nvSpPr>
-          <p:cNvPr id="23" name="">
-            <a:extLst xmlns:a="http://schemas.openxmlformats.org/drawingml/2006/main">
-              <a:ext uri="{FF2B5EF4-FFF2-40B4-BE49-F238E27FC236}">
-                <a16:creationId xmlns:a16="http://schemas.microsoft.com/office/drawing/2014/main" id="{2D5D781E-2CB7-4CE1-B363-5F0C383D0B28}"/>
+          <p:cNvPr id="26" name="">
+            <a:extLst xmlns:a="http://schemas.openxmlformats.org/drawingml/2006/main">
+              <a:ext uri="{FF2B5EF4-FFF2-40B4-BE49-F238E27FC236}">
+                <a16:creationId xmlns:a16="http://schemas.microsoft.com/office/drawing/2014/main" id="{7FF912EF-85C2-4703-B5E3-1CED2F8E4B12}"/>
               </a:ext>
             </a:extLst>
           </p:cNvPr>
@@ -12294,10 +12717,10 @@
       </p:sp>
       <p:sp>
         <p:nvSpPr>
-          <p:cNvPr id="24" name="">
-            <a:extLst xmlns:a="http://schemas.openxmlformats.org/drawingml/2006/main">
-              <a:ext uri="{FF2B5EF4-FFF2-40B4-BE49-F238E27FC236}">
-                <a16:creationId xmlns:a16="http://schemas.microsoft.com/office/drawing/2014/main" id="{6EA4F4A5-208E-485A-9672-6785350E120E}"/>
+          <p:cNvPr id="27" name="">
+            <a:extLst xmlns:a="http://schemas.openxmlformats.org/drawingml/2006/main">
+              <a:ext uri="{FF2B5EF4-FFF2-40B4-BE49-F238E27FC236}">
+                <a16:creationId xmlns:a16="http://schemas.microsoft.com/office/drawing/2014/main" id="{63BFE430-D612-4394-9FF8-1CB0AC92A3FB}"/>
               </a:ext>
             </a:extLst>
           </p:cNvPr>
@@ -12337,17 +12760,17 @@
                   <a:srgbClr val="667085"/>
                 </a:solidFill>
               </a:rPr>
-              <a:t>разрыв контроля</a:t>
-            </a:r>
-          </a:p>
-        </p:txBody>
-      </p:sp>
-      <p:sp>
-        <p:nvSpPr>
-          <p:cNvPr id="25" name="">
-            <a:extLst xmlns:a="http://schemas.openxmlformats.org/drawingml/2006/main">
-              <a:ext uri="{FF2B5EF4-FFF2-40B4-BE49-F238E27FC236}">
-                <a16:creationId xmlns:a16="http://schemas.microsoft.com/office/drawing/2014/main" id="{E90E1A50-CEA1-4A92-8BE7-893525F1D11D}"/>
+              <a:t>уровень покрытия</a:t>
+            </a:r>
+          </a:p>
+        </p:txBody>
+      </p:sp>
+      <p:sp>
+        <p:nvSpPr>
+          <p:cNvPr id="28" name="">
+            <a:extLst xmlns:a="http://schemas.openxmlformats.org/drawingml/2006/main">
+              <a:ext uri="{FF2B5EF4-FFF2-40B4-BE49-F238E27FC236}">
+                <a16:creationId xmlns:a16="http://schemas.microsoft.com/office/drawing/2014/main" id="{E7D2BD85-2494-4856-87BD-3F72C0C15D29}"/>
               </a:ext>
             </a:extLst>
           </p:cNvPr>
@@ -12375,10 +12798,10 @@
       </p:sp>
       <p:sp>
         <p:nvSpPr>
-          <p:cNvPr id="26" name="">
-            <a:extLst xmlns:a="http://schemas.openxmlformats.org/drawingml/2006/main">
-              <a:ext uri="{FF2B5EF4-FFF2-40B4-BE49-F238E27FC236}">
-                <a16:creationId xmlns:a16="http://schemas.microsoft.com/office/drawing/2014/main" id="{10B30B7C-3C37-4EA3-B0B9-15FF63808F58}"/>
+          <p:cNvPr id="29" name="">
+            <a:extLst xmlns:a="http://schemas.openxmlformats.org/drawingml/2006/main">
+              <a:ext uri="{FF2B5EF4-FFF2-40B4-BE49-F238E27FC236}">
+                <a16:creationId xmlns:a16="http://schemas.microsoft.com/office/drawing/2014/main" id="{CFF62C5E-A768-4FED-8718-6E9838B451EF}"/>
               </a:ext>
             </a:extLst>
           </p:cNvPr>
@@ -12406,10 +12829,10 @@
       </p:sp>
       <p:sp>
         <p:nvSpPr>
-          <p:cNvPr id="27" name="">
-            <a:extLst xmlns:a="http://schemas.openxmlformats.org/drawingml/2006/main">
-              <a:ext uri="{FF2B5EF4-FFF2-40B4-BE49-F238E27FC236}">
-                <a16:creationId xmlns:a16="http://schemas.microsoft.com/office/drawing/2014/main" id="{9A0FDA89-3B2C-45F2-AD6B-2A3602E5BE47}"/>
+          <p:cNvPr id="30" name="">
+            <a:extLst xmlns:a="http://schemas.openxmlformats.org/drawingml/2006/main">
+              <a:ext uri="{FF2B5EF4-FFF2-40B4-BE49-F238E27FC236}">
+                <a16:creationId xmlns:a16="http://schemas.microsoft.com/office/drawing/2014/main" id="{FF22D7D4-B94C-4049-B83E-22A72841EBC5}"/>
               </a:ext>
             </a:extLst>
           </p:cNvPr>
@@ -12456,10 +12879,10 @@
       </p:sp>
       <p:sp>
         <p:nvSpPr>
-          <p:cNvPr id="28" name="">
-            <a:extLst xmlns:a="http://schemas.openxmlformats.org/drawingml/2006/main">
-              <a:ext uri="{FF2B5EF4-FFF2-40B4-BE49-F238E27FC236}">
-                <a16:creationId xmlns:a16="http://schemas.microsoft.com/office/drawing/2014/main" id="{4E489D4D-0297-49FD-A306-687B14ABAC92}"/>
+          <p:cNvPr id="31" name="">
+            <a:extLst xmlns:a="http://schemas.openxmlformats.org/drawingml/2006/main">
+              <a:ext uri="{FF2B5EF4-FFF2-40B4-BE49-F238E27FC236}">
+                <a16:creationId xmlns:a16="http://schemas.microsoft.com/office/drawing/2014/main" id="{FEAFBD87-3435-4D18-AA18-0DF494B9E0B3}"/>
               </a:ext>
             </a:extLst>
           </p:cNvPr>
@@ -12506,10 +12929,10 @@
       </p:sp>
       <p:sp>
         <p:nvSpPr>
-          <p:cNvPr id="29" name="">
-            <a:extLst xmlns:a="http://schemas.openxmlformats.org/drawingml/2006/main">
-              <a:ext uri="{FF2B5EF4-FFF2-40B4-BE49-F238E27FC236}">
-                <a16:creationId xmlns:a16="http://schemas.microsoft.com/office/drawing/2014/main" id="{FDD596EB-CEED-4232-8105-74AD9FCC5185}"/>
+          <p:cNvPr id="32" name="">
+            <a:extLst xmlns:a="http://schemas.openxmlformats.org/drawingml/2006/main">
+              <a:ext uri="{FF2B5EF4-FFF2-40B4-BE49-F238E27FC236}">
+                <a16:creationId xmlns:a16="http://schemas.microsoft.com/office/drawing/2014/main" id="{EF25F8B8-A5C0-42BA-A414-99AF935815BF}"/>
               </a:ext>
             </a:extLst>
           </p:cNvPr>
@@ -12549,17 +12972,17 @@
                   <a:srgbClr val="667085"/>
                 </a:solidFill>
               </a:rPr>
-              <a:t>разрыв контроля</a:t>
-            </a:r>
-          </a:p>
-        </p:txBody>
-      </p:sp>
-      <p:sp>
-        <p:nvSpPr>
-          <p:cNvPr id="30" name="">
-            <a:extLst xmlns:a="http://schemas.openxmlformats.org/drawingml/2006/main">
-              <a:ext uri="{FF2B5EF4-FFF2-40B4-BE49-F238E27FC236}">
-                <a16:creationId xmlns:a16="http://schemas.microsoft.com/office/drawing/2014/main" id="{F31B82F6-07D5-4364-A91C-E61A84B61A95}"/>
+              <a:t>уровень покрытия</a:t>
+            </a:r>
+          </a:p>
+        </p:txBody>
+      </p:sp>
+      <p:sp>
+        <p:nvSpPr>
+          <p:cNvPr id="33" name="">
+            <a:extLst xmlns:a="http://schemas.openxmlformats.org/drawingml/2006/main">
+              <a:ext uri="{FF2B5EF4-FFF2-40B4-BE49-F238E27FC236}">
+                <a16:creationId xmlns:a16="http://schemas.microsoft.com/office/drawing/2014/main" id="{35715253-E65E-467E-8B46-AEC4CC0EFFB4}"/>
               </a:ext>
             </a:extLst>
           </p:cNvPr>
@@ -12587,10 +13010,10 @@
       </p:sp>
       <p:sp>
         <p:nvSpPr>
-          <p:cNvPr id="31" name="">
-            <a:extLst xmlns:a="http://schemas.openxmlformats.org/drawingml/2006/main">
-              <a:ext uri="{FF2B5EF4-FFF2-40B4-BE49-F238E27FC236}">
-                <a16:creationId xmlns:a16="http://schemas.microsoft.com/office/drawing/2014/main" id="{6DD7559E-4E8D-4752-8969-C60321DA1CEC}"/>
+          <p:cNvPr id="34" name="">
+            <a:extLst xmlns:a="http://schemas.openxmlformats.org/drawingml/2006/main">
+              <a:ext uri="{FF2B5EF4-FFF2-40B4-BE49-F238E27FC236}">
+                <a16:creationId xmlns:a16="http://schemas.microsoft.com/office/drawing/2014/main" id="{B68396BE-00EA-4F26-A14C-574A2750FF74}"/>
               </a:ext>
             </a:extLst>
           </p:cNvPr>
@@ -12618,10 +13041,10 @@
       </p:sp>
       <p:sp>
         <p:nvSpPr>
-          <p:cNvPr id="32" name="">
-            <a:extLst xmlns:a="http://schemas.openxmlformats.org/drawingml/2006/main">
-              <a:ext uri="{FF2B5EF4-FFF2-40B4-BE49-F238E27FC236}">
-                <a16:creationId xmlns:a16="http://schemas.microsoft.com/office/drawing/2014/main" id="{80B23412-F58C-407F-88CD-BD0E1D12EC55}"/>
+          <p:cNvPr id="35" name="">
+            <a:extLst xmlns:a="http://schemas.openxmlformats.org/drawingml/2006/main">
+              <a:ext uri="{FF2B5EF4-FFF2-40B4-BE49-F238E27FC236}">
+                <a16:creationId xmlns:a16="http://schemas.microsoft.com/office/drawing/2014/main" id="{F46A124E-A623-4C16-8A02-6860AE14D5BB}"/>
               </a:ext>
             </a:extLst>
           </p:cNvPr>
@@ -12668,10 +13091,10 @@
       </p:sp>
       <p:sp>
         <p:nvSpPr>
-          <p:cNvPr id="33" name="">
-            <a:extLst xmlns:a="http://schemas.openxmlformats.org/drawingml/2006/main">
-              <a:ext uri="{FF2B5EF4-FFF2-40B4-BE49-F238E27FC236}">
-                <a16:creationId xmlns:a16="http://schemas.microsoft.com/office/drawing/2014/main" id="{EF4D466E-148E-4A60-B2FB-18836F0CAA9E}"/>
+          <p:cNvPr id="36" name="">
+            <a:extLst xmlns:a="http://schemas.openxmlformats.org/drawingml/2006/main">
+              <a:ext uri="{FF2B5EF4-FFF2-40B4-BE49-F238E27FC236}">
+                <a16:creationId xmlns:a16="http://schemas.microsoft.com/office/drawing/2014/main" id="{9AA65EFF-D35C-49B2-AC75-E271C0FA30A5}"/>
               </a:ext>
             </a:extLst>
           </p:cNvPr>
@@ -12718,10 +13141,10 @@
       </p:sp>
       <p:sp>
         <p:nvSpPr>
-          <p:cNvPr id="34" name="">
-            <a:extLst xmlns:a="http://schemas.openxmlformats.org/drawingml/2006/main">
-              <a:ext uri="{FF2B5EF4-FFF2-40B4-BE49-F238E27FC236}">
-                <a16:creationId xmlns:a16="http://schemas.microsoft.com/office/drawing/2014/main" id="{6CF89F8C-B16E-43E8-B73C-2DB66F36588F}"/>
+          <p:cNvPr id="37" name="">
+            <a:extLst xmlns:a="http://schemas.openxmlformats.org/drawingml/2006/main">
+              <a:ext uri="{FF2B5EF4-FFF2-40B4-BE49-F238E27FC236}">
+                <a16:creationId xmlns:a16="http://schemas.microsoft.com/office/drawing/2014/main" id="{6BA9BD73-6C56-4397-B936-721ADE870349}"/>
               </a:ext>
             </a:extLst>
           </p:cNvPr>
@@ -12761,17 +13184,17 @@
                   <a:srgbClr val="667085"/>
                 </a:solidFill>
               </a:rPr>
-              <a:t>разрыв контроля</a:t>
-            </a:r>
-          </a:p>
-        </p:txBody>
-      </p:sp>
-      <p:sp>
-        <p:nvSpPr>
-          <p:cNvPr id="35" name="">
-            <a:extLst xmlns:a="http://schemas.openxmlformats.org/drawingml/2006/main">
-              <a:ext uri="{FF2B5EF4-FFF2-40B4-BE49-F238E27FC236}">
-                <a16:creationId xmlns:a16="http://schemas.microsoft.com/office/drawing/2014/main" id="{8D6F7C90-7D80-4F0D-8CE3-09BD8FD0C8EB}"/>
+              <a:t>уровень покрытия</a:t>
+            </a:r>
+          </a:p>
+        </p:txBody>
+      </p:sp>
+      <p:sp>
+        <p:nvSpPr>
+          <p:cNvPr id="38" name="">
+            <a:extLst xmlns:a="http://schemas.openxmlformats.org/drawingml/2006/main">
+              <a:ext uri="{FF2B5EF4-FFF2-40B4-BE49-F238E27FC236}">
+                <a16:creationId xmlns:a16="http://schemas.microsoft.com/office/drawing/2014/main" id="{EF44BA27-D7EC-4581-9545-F15E9059EAAA}"/>
               </a:ext>
             </a:extLst>
           </p:cNvPr>
@@ -12799,10 +13222,10 @@
       </p:sp>
       <p:sp>
         <p:nvSpPr>
-          <p:cNvPr id="36" name="">
-            <a:extLst xmlns:a="http://schemas.openxmlformats.org/drawingml/2006/main">
-              <a:ext uri="{FF2B5EF4-FFF2-40B4-BE49-F238E27FC236}">
-                <a16:creationId xmlns:a16="http://schemas.microsoft.com/office/drawing/2014/main" id="{9D9A19A0-D38C-4B04-96C0-09F5F98CF8D5}"/>
+          <p:cNvPr id="39" name="">
+            <a:extLst xmlns:a="http://schemas.openxmlformats.org/drawingml/2006/main">
+              <a:ext uri="{FF2B5EF4-FFF2-40B4-BE49-F238E27FC236}">
+                <a16:creationId xmlns:a16="http://schemas.microsoft.com/office/drawing/2014/main" id="{19F292B8-D32A-466F-A34A-9C3759AED9B3}"/>
               </a:ext>
             </a:extLst>
           </p:cNvPr>
@@ -12830,10 +13253,10 @@
       </p:sp>
       <p:sp>
         <p:nvSpPr>
-          <p:cNvPr id="37" name="">
-            <a:extLst xmlns:a="http://schemas.openxmlformats.org/drawingml/2006/main">
-              <a:ext uri="{FF2B5EF4-FFF2-40B4-BE49-F238E27FC236}">
-                <a16:creationId xmlns:a16="http://schemas.microsoft.com/office/drawing/2014/main" id="{FA304725-A77F-47BF-9DE8-C67FE539EDBC}"/>
+          <p:cNvPr id="40" name="">
+            <a:extLst xmlns:a="http://schemas.openxmlformats.org/drawingml/2006/main">
+              <a:ext uri="{FF2B5EF4-FFF2-40B4-BE49-F238E27FC236}">
+                <a16:creationId xmlns:a16="http://schemas.microsoft.com/office/drawing/2014/main" id="{68CF8AB2-6535-4646-9923-B52ABE6D7809}"/>
               </a:ext>
             </a:extLst>
           </p:cNvPr>
@@ -12880,10 +13303,10 @@
       </p:sp>
       <p:sp>
         <p:nvSpPr>
-          <p:cNvPr id="38" name="">
-            <a:extLst xmlns:a="http://schemas.openxmlformats.org/drawingml/2006/main">
-              <a:ext uri="{FF2B5EF4-FFF2-40B4-BE49-F238E27FC236}">
-                <a16:creationId xmlns:a16="http://schemas.microsoft.com/office/drawing/2014/main" id="{7B251EE8-1984-43C8-9537-F3A2F07F5E68}"/>
+          <p:cNvPr id="41" name="">
+            <a:extLst xmlns:a="http://schemas.openxmlformats.org/drawingml/2006/main">
+              <a:ext uri="{FF2B5EF4-FFF2-40B4-BE49-F238E27FC236}">
+                <a16:creationId xmlns:a16="http://schemas.microsoft.com/office/drawing/2014/main" id="{AE0E740D-71D8-40C6-9172-9E2513C72924}"/>
               </a:ext>
             </a:extLst>
           </p:cNvPr>
@@ -12930,10 +13353,10 @@
       </p:sp>
       <p:sp>
         <p:nvSpPr>
-          <p:cNvPr id="39" name="">
-            <a:extLst xmlns:a="http://schemas.openxmlformats.org/drawingml/2006/main">
-              <a:ext uri="{FF2B5EF4-FFF2-40B4-BE49-F238E27FC236}">
-                <a16:creationId xmlns:a16="http://schemas.microsoft.com/office/drawing/2014/main" id="{AEC1C500-F7EB-425F-B5EA-413137EF6D3A}"/>
+          <p:cNvPr id="42" name="">
+            <a:extLst xmlns:a="http://schemas.openxmlformats.org/drawingml/2006/main">
+              <a:ext uri="{FF2B5EF4-FFF2-40B4-BE49-F238E27FC236}">
+                <a16:creationId xmlns:a16="http://schemas.microsoft.com/office/drawing/2014/main" id="{7693A2C2-2F47-4A15-9A92-C49CE3CA2B4D}"/>
               </a:ext>
             </a:extLst>
           </p:cNvPr>
@@ -12973,7 +13396,90 @@
                   <a:srgbClr val="667085"/>
                 </a:solidFill>
               </a:rPr>
-              <a:t>разрыв контроля</a:t>
+              <a:t>уровень покрытия</a:t>
+            </a:r>
+          </a:p>
+        </p:txBody>
+      </p:sp>
+      <p:sp>
+        <p:nvSpPr>
+          <p:cNvPr id="43" name="">
+            <a:extLst xmlns:a="http://schemas.openxmlformats.org/drawingml/2006/main">
+              <a:ext uri="{FF2B5EF4-FFF2-40B4-BE49-F238E27FC236}">
+                <a16:creationId xmlns:a16="http://schemas.microsoft.com/office/drawing/2014/main" id="{E0164F2E-1EE8-49C5-A998-4567F69561A4}"/>
+              </a:ext>
+            </a:extLst>
+          </p:cNvPr>
+          <p:cNvSpPr>
+            <a:spLocks xmlns:a="http://schemas.openxmlformats.org/drawingml/2006/main" noGrp="1"/>
+          </p:cNvSpPr>
+          <p:nvPr/>
+        </p:nvSpPr>
+        <p:spPr>
+          <a:xfrm xmlns:a="http://schemas.openxmlformats.org/drawingml/2006/main">
+            <a:off x="552450" y="6172200"/>
+            <a:ext cx="10648950" cy="323850"/>
+          </a:xfrm>
+          <a:prstGeom xmlns:a="http://schemas.openxmlformats.org/drawingml/2006/main" prst="roundRect">
+            <a:avLst>
+              <a:gd name="adj" fmla="val 23529"/>
+            </a:avLst>
+          </a:prstGeom>
+          <a:solidFill xmlns:a="http://schemas.openxmlformats.org/drawingml/2006/main">
+            <a:srgbClr val="FFF3EB"/>
+          </a:solidFill>
+          <a:ln xmlns:a="http://schemas.openxmlformats.org/drawingml/2006/main" w="0">
+            <a:noFill/>
+            <a:prstDash val="solid"/>
+          </a:ln>
+        </p:spPr>
+      </p:sp>
+      <p:sp>
+        <p:nvSpPr>
+          <p:cNvPr id="44" name="">
+            <a:extLst xmlns:a="http://schemas.openxmlformats.org/drawingml/2006/main">
+              <a:ext uri="{FF2B5EF4-FFF2-40B4-BE49-F238E27FC236}">
+                <a16:creationId xmlns:a16="http://schemas.microsoft.com/office/drawing/2014/main" id="{20DF5FF2-617A-4502-BD2B-1E8105368D6E}"/>
+              </a:ext>
+            </a:extLst>
+          </p:cNvPr>
+          <p:cNvSpPr>
+            <a:spLocks xmlns:a="http://schemas.openxmlformats.org/drawingml/2006/main" noGrp="1"/>
+          </p:cNvSpPr>
+          <p:nvPr/>
+        </p:nvSpPr>
+        <p:spPr>
+          <a:xfrm xmlns:a="http://schemas.openxmlformats.org/drawingml/2006/main">
+            <a:off x="742950" y="6248400"/>
+            <a:ext cx="10267950" cy="190500"/>
+          </a:xfrm>
+          <a:prstGeom xmlns:a="http://schemas.openxmlformats.org/drawingml/2006/main" prst="rect">
+            <a:avLst/>
+          </a:prstGeom>
+          <a:noFill xmlns:a="http://schemas.openxmlformats.org/drawingml/2006/main"/>
+          <a:ln xmlns:a="http://schemas.openxmlformats.org/drawingml/2006/main" w="0">
+            <a:noFill/>
+            <a:prstDash val="solid"/>
+          </a:ln>
+        </p:spPr>
+        <p:txBody>
+          <a:bodyPr xmlns:a="http://schemas.openxmlformats.org/drawingml/2006/main"/>
+          <a:lstStyle xmlns:a="http://schemas.openxmlformats.org/drawingml/2006/main"/>
+          <a:p xmlns:a="http://schemas.openxmlformats.org/drawingml/2006/main">
+            <a:pPr algn="ctr">
+              <a:defRPr sz="900" b="1">
+                <a:solidFill>
+                  <a:srgbClr val="161616"/>
+                </a:solidFill>
+              </a:defRPr>
+            </a:pPr>
+            <a:r>
+              <a:rPr sz="900" b="1">
+                <a:solidFill>
+                  <a:srgbClr val="161616"/>
+                </a:solidFill>
+              </a:rPr>
+              <a:t>{{COVERAGE_INSIGHT}}</a:t>
             </a:r>
           </a:p>
         </p:txBody>
@@ -12981,7 +13487,7 @@
     </p:spTree>
     <p:extLst>
       <p:ext uri="{BB962C8B-B14F-4D97-AF65-F5344CB8AC3E}">
-        <p14:creationId xmlns:p14="http://schemas.microsoft.com/office/powerpoint/2010/main" val="2008045257"/>
+        <p14:creationId xmlns:p14="http://schemas.microsoft.com/office/powerpoint/2010/main" val="708709806"/>
       </p:ext>
     </p:extLst>
   </p:cSld>
@@ -13012,7 +13518,7 @@
           <p:cNvPr id="1" name="">
             <a:extLst xmlns:a="http://schemas.openxmlformats.org/drawingml/2006/main">
               <a:ext uri="{FF2B5EF4-FFF2-40B4-BE49-F238E27FC236}">
-                <a16:creationId xmlns:a16="http://schemas.microsoft.com/office/drawing/2014/main" id="{20619A96-3FD5-4531-BFAA-95FCFA5192C1}"/>
+                <a16:creationId xmlns:a16="http://schemas.microsoft.com/office/drawing/2014/main" id="{2FFD9307-5473-49A7-9567-4D2C12211FEB}"/>
               </a:ext>
             </a:extLst>
           </p:cNvPr>
@@ -13047,7 +13553,7 @@
           <p:nvPr/>
         </p:nvPicPr>
         <p:blipFill>
-          <a:blip xmlns:r="http://schemas.openxmlformats.org/officeDocument/2006/relationships" xmlns:a="http://schemas.openxmlformats.org/drawingml/2006/main" r:embed="R05ed4ae72f2d408d"/>
+          <a:blip xmlns:r="http://schemas.openxmlformats.org/officeDocument/2006/relationships" xmlns:a="http://schemas.openxmlformats.org/drawingml/2006/main" r:embed="R0d92c16bf28141f6"/>
           <a:stretch xmlns:a="http://schemas.openxmlformats.org/drawingml/2006/main"/>
         </p:blipFill>
         <p:spPr>
@@ -13065,7 +13571,7 @@
           <p:cNvPr id="3" name="">
             <a:extLst xmlns:a="http://schemas.openxmlformats.org/drawingml/2006/main">
               <a:ext uri="{FF2B5EF4-FFF2-40B4-BE49-F238E27FC236}">
-                <a16:creationId xmlns:a16="http://schemas.microsoft.com/office/drawing/2014/main" id="{A49DFC2F-CEEC-4E9F-A5E2-EB0967EBB6B4}"/>
+                <a16:creationId xmlns:a16="http://schemas.microsoft.com/office/drawing/2014/main" id="{A9E37D4C-6038-4337-BCA1-21CC8B724C8A}"/>
               </a:ext>
             </a:extLst>
           </p:cNvPr>
@@ -13115,7 +13621,7 @@
           <p:cNvPr id="4" name="">
             <a:extLst xmlns:a="http://schemas.openxmlformats.org/drawingml/2006/main">
               <a:ext uri="{FF2B5EF4-FFF2-40B4-BE49-F238E27FC236}">
-                <a16:creationId xmlns:a16="http://schemas.microsoft.com/office/drawing/2014/main" id="{C36D5111-6941-4B24-B26D-AAE566588177}"/>
+                <a16:creationId xmlns:a16="http://schemas.microsoft.com/office/drawing/2014/main" id="{D69BA151-A050-4716-A44A-443F4B4E744B}"/>
               </a:ext>
             </a:extLst>
           </p:cNvPr>
@@ -13148,7 +13654,7 @@
           <p:cNvPr id="5" name="">
             <a:extLst xmlns:a="http://schemas.openxmlformats.org/drawingml/2006/main">
               <a:ext uri="{FF2B5EF4-FFF2-40B4-BE49-F238E27FC236}">
-                <a16:creationId xmlns:a16="http://schemas.microsoft.com/office/drawing/2014/main" id="{061AB70F-4997-4444-9381-660052FA882E}"/>
+                <a16:creationId xmlns:a16="http://schemas.microsoft.com/office/drawing/2014/main" id="{469E8E94-7CDF-4C4F-8974-AE73CC7DECC3}"/>
               </a:ext>
             </a:extLst>
           </p:cNvPr>
@@ -13179,7 +13685,7 @@
           <p:cNvPr id="6" name="">
             <a:extLst xmlns:a="http://schemas.openxmlformats.org/drawingml/2006/main">
               <a:ext uri="{FF2B5EF4-FFF2-40B4-BE49-F238E27FC236}">
-                <a16:creationId xmlns:a16="http://schemas.microsoft.com/office/drawing/2014/main" id="{38087E10-2AA9-43C9-8CF5-092DFEB2E0AD}"/>
+                <a16:creationId xmlns:a16="http://schemas.microsoft.com/office/drawing/2014/main" id="{455D7F60-BAD1-4B1D-BEB2-0792D866D8B6}"/>
               </a:ext>
             </a:extLst>
           </p:cNvPr>
@@ -13229,7 +13735,7 @@
           <p:cNvPr id="7" name="">
             <a:extLst xmlns:a="http://schemas.openxmlformats.org/drawingml/2006/main">
               <a:ext uri="{FF2B5EF4-FFF2-40B4-BE49-F238E27FC236}">
-                <a16:creationId xmlns:a16="http://schemas.microsoft.com/office/drawing/2014/main" id="{032B2CFB-1740-4646-B20C-930E90F47902}"/>
+                <a16:creationId xmlns:a16="http://schemas.microsoft.com/office/drawing/2014/main" id="{F0BE8E9D-3D9C-4A75-B57C-26F7930B5AD0}"/>
               </a:ext>
             </a:extLst>
           </p:cNvPr>
@@ -13279,7 +13785,7 @@
           <p:cNvPr id="8" name="">
             <a:extLst xmlns:a="http://schemas.openxmlformats.org/drawingml/2006/main">
               <a:ext uri="{FF2B5EF4-FFF2-40B4-BE49-F238E27FC236}">
-                <a16:creationId xmlns:a16="http://schemas.microsoft.com/office/drawing/2014/main" id="{B0FE9179-F5B6-4008-92BD-7CC9D7A0340E}"/>
+                <a16:creationId xmlns:a16="http://schemas.microsoft.com/office/drawing/2014/main" id="{5902A6E2-701A-4C52-A660-C717CD325DE3}"/>
               </a:ext>
             </a:extLst>
           </p:cNvPr>
@@ -13314,7 +13820,7 @@
           <p:cNvPr id="9" name="">
             <a:extLst xmlns:a="http://schemas.openxmlformats.org/drawingml/2006/main">
               <a:ext uri="{FF2B5EF4-FFF2-40B4-BE49-F238E27FC236}">
-                <a16:creationId xmlns:a16="http://schemas.microsoft.com/office/drawing/2014/main" id="{4B57C9C1-05BA-42DD-8326-21C4263F6508}"/>
+                <a16:creationId xmlns:a16="http://schemas.microsoft.com/office/drawing/2014/main" id="{7D1B2A22-B84A-4F34-AF59-2857C2CEB2B9}"/>
               </a:ext>
             </a:extLst>
           </p:cNvPr>
@@ -13364,7 +13870,7 @@
           <p:cNvPr id="10" name="">
             <a:extLst xmlns:a="http://schemas.openxmlformats.org/drawingml/2006/main">
               <a:ext uri="{FF2B5EF4-FFF2-40B4-BE49-F238E27FC236}">
-                <a16:creationId xmlns:a16="http://schemas.microsoft.com/office/drawing/2014/main" id="{09E28755-467C-465A-A897-AB505DA329EA}"/>
+                <a16:creationId xmlns:a16="http://schemas.microsoft.com/office/drawing/2014/main" id="{115932CD-813A-48C1-B16A-8E80A5D9317D}"/>
               </a:ext>
             </a:extLst>
           </p:cNvPr>
@@ -13414,7 +13920,7 @@
           <p:cNvPr id="11" name="">
             <a:extLst xmlns:a="http://schemas.openxmlformats.org/drawingml/2006/main">
               <a:ext uri="{FF2B5EF4-FFF2-40B4-BE49-F238E27FC236}">
-                <a16:creationId xmlns:a16="http://schemas.microsoft.com/office/drawing/2014/main" id="{5AFFC21C-CED3-4F6F-8731-84CB39D081FD}"/>
+                <a16:creationId xmlns:a16="http://schemas.microsoft.com/office/drawing/2014/main" id="{2A8382D6-3199-4264-BFF3-500F075894B4}"/>
               </a:ext>
             </a:extLst>
           </p:cNvPr>
@@ -13449,7 +13955,7 @@
           <p:cNvPr id="12" name="">
             <a:extLst xmlns:a="http://schemas.openxmlformats.org/drawingml/2006/main">
               <a:ext uri="{FF2B5EF4-FFF2-40B4-BE49-F238E27FC236}">
-                <a16:creationId xmlns:a16="http://schemas.microsoft.com/office/drawing/2014/main" id="{239002FD-CF61-4C24-A40C-6454E1384579}"/>
+                <a16:creationId xmlns:a16="http://schemas.microsoft.com/office/drawing/2014/main" id="{3CF5D1E7-E3E8-4855-96A1-D87EFB8DDECA}"/>
               </a:ext>
             </a:extLst>
           </p:cNvPr>
@@ -13499,7 +14005,7 @@
           <p:cNvPr id="13" name="">
             <a:extLst xmlns:a="http://schemas.openxmlformats.org/drawingml/2006/main">
               <a:ext uri="{FF2B5EF4-FFF2-40B4-BE49-F238E27FC236}">
-                <a16:creationId xmlns:a16="http://schemas.microsoft.com/office/drawing/2014/main" id="{98874392-E19F-4CB9-9133-E9D724ECB4F2}"/>
+                <a16:creationId xmlns:a16="http://schemas.microsoft.com/office/drawing/2014/main" id="{06591417-50FA-4F8D-918B-8CFB3AB5C32D}"/>
               </a:ext>
             </a:extLst>
           </p:cNvPr>
@@ -13549,7 +14055,7 @@
           <p:cNvPr id="14" name="">
             <a:extLst xmlns:a="http://schemas.openxmlformats.org/drawingml/2006/main">
               <a:ext uri="{FF2B5EF4-FFF2-40B4-BE49-F238E27FC236}">
-                <a16:creationId xmlns:a16="http://schemas.microsoft.com/office/drawing/2014/main" id="{3FB8054B-B0ED-4500-BCDC-3B83C6FB6058}"/>
+                <a16:creationId xmlns:a16="http://schemas.microsoft.com/office/drawing/2014/main" id="{DE0FB6E4-5ED9-4190-A979-EAB01A7682A7}"/>
               </a:ext>
             </a:extLst>
           </p:cNvPr>
@@ -13584,7 +14090,7 @@
           <p:cNvPr id="15" name="">
             <a:extLst xmlns:a="http://schemas.openxmlformats.org/drawingml/2006/main">
               <a:ext uri="{FF2B5EF4-FFF2-40B4-BE49-F238E27FC236}">
-                <a16:creationId xmlns:a16="http://schemas.microsoft.com/office/drawing/2014/main" id="{4D9BA60F-40D0-4A8F-9B2B-3348855E4457}"/>
+                <a16:creationId xmlns:a16="http://schemas.microsoft.com/office/drawing/2014/main" id="{8BE5B79D-347B-43C4-98D3-C937E1BC46FA}"/>
               </a:ext>
             </a:extLst>
           </p:cNvPr>
@@ -13634,7 +14140,7 @@
           <p:cNvPr id="16" name="">
             <a:extLst xmlns:a="http://schemas.openxmlformats.org/drawingml/2006/main">
               <a:ext uri="{FF2B5EF4-FFF2-40B4-BE49-F238E27FC236}">
-                <a16:creationId xmlns:a16="http://schemas.microsoft.com/office/drawing/2014/main" id="{1FBAD5DA-90D4-42C2-B465-96ECF9B90CB5}"/>
+                <a16:creationId xmlns:a16="http://schemas.microsoft.com/office/drawing/2014/main" id="{EBCF8ACE-0C59-4BEA-890B-06EB13F95A30}"/>
               </a:ext>
             </a:extLst>
           </p:cNvPr>
@@ -13684,7 +14190,7 @@
           <p:cNvPr id="17" name="">
             <a:extLst xmlns:a="http://schemas.openxmlformats.org/drawingml/2006/main">
               <a:ext uri="{FF2B5EF4-FFF2-40B4-BE49-F238E27FC236}">
-                <a16:creationId xmlns:a16="http://schemas.microsoft.com/office/drawing/2014/main" id="{D7AD8A8B-D89D-4430-8662-570493896CC6}"/>
+                <a16:creationId xmlns:a16="http://schemas.microsoft.com/office/drawing/2014/main" id="{7A0FE18B-16D3-45B8-A5B6-7DA46A69A16E}"/>
               </a:ext>
             </a:extLst>
           </p:cNvPr>
@@ -13719,7 +14225,7 @@
           <p:cNvPr id="18" name="">
             <a:extLst xmlns:a="http://schemas.openxmlformats.org/drawingml/2006/main">
               <a:ext uri="{FF2B5EF4-FFF2-40B4-BE49-F238E27FC236}">
-                <a16:creationId xmlns:a16="http://schemas.microsoft.com/office/drawing/2014/main" id="{023DA70B-F768-44AC-A58D-5156BE2661CD}"/>
+                <a16:creationId xmlns:a16="http://schemas.microsoft.com/office/drawing/2014/main" id="{0F375E59-B2FD-4C59-9831-3DA5FE75FD26}"/>
               </a:ext>
             </a:extLst>
           </p:cNvPr>
@@ -13769,7 +14275,7 @@
           <p:cNvPr id="19" name="">
             <a:extLst xmlns:a="http://schemas.openxmlformats.org/drawingml/2006/main">
               <a:ext uri="{FF2B5EF4-FFF2-40B4-BE49-F238E27FC236}">
-                <a16:creationId xmlns:a16="http://schemas.microsoft.com/office/drawing/2014/main" id="{96900ADA-D18D-403B-A65E-D16278B4CCDE}"/>
+                <a16:creationId xmlns:a16="http://schemas.microsoft.com/office/drawing/2014/main" id="{A78FA203-D566-4E74-8259-89CBA873EDB4}"/>
               </a:ext>
             </a:extLst>
           </p:cNvPr>
@@ -13819,7 +14325,7 @@
           <p:cNvPr id="20" name="">
             <a:extLst xmlns:a="http://schemas.openxmlformats.org/drawingml/2006/main">
               <a:ext uri="{FF2B5EF4-FFF2-40B4-BE49-F238E27FC236}">
-                <a16:creationId xmlns:a16="http://schemas.microsoft.com/office/drawing/2014/main" id="{AF8ED842-9C56-45FF-A1FD-7D60491BCA15}"/>
+                <a16:creationId xmlns:a16="http://schemas.microsoft.com/office/drawing/2014/main" id="{BCA70E2D-7B06-4F89-9778-A75F20062A0C}"/>
               </a:ext>
             </a:extLst>
           </p:cNvPr>
@@ -13869,7 +14375,7 @@
           <p:cNvPr id="21" name="">
             <a:extLst xmlns:a="http://schemas.openxmlformats.org/drawingml/2006/main">
               <a:ext uri="{FF2B5EF4-FFF2-40B4-BE49-F238E27FC236}">
-                <a16:creationId xmlns:a16="http://schemas.microsoft.com/office/drawing/2014/main" id="{3F5C8D25-4283-48C9-A338-809516B1865C}"/>
+                <a16:creationId xmlns:a16="http://schemas.microsoft.com/office/drawing/2014/main" id="{D8D16BBB-2F97-4A76-8699-0FA6C2966203}"/>
               </a:ext>
             </a:extLst>
           </p:cNvPr>
@@ -13919,7 +14425,7 @@
           <p:cNvPr id="22" name="">
             <a:extLst xmlns:a="http://schemas.openxmlformats.org/drawingml/2006/main">
               <a:ext uri="{FF2B5EF4-FFF2-40B4-BE49-F238E27FC236}">
-                <a16:creationId xmlns:a16="http://schemas.microsoft.com/office/drawing/2014/main" id="{74474F6B-E209-4622-9815-769F7AD23600}"/>
+                <a16:creationId xmlns:a16="http://schemas.microsoft.com/office/drawing/2014/main" id="{02141BA0-8676-46B6-91B3-3F728EE779BC}"/>
               </a:ext>
             </a:extLst>
           </p:cNvPr>
@@ -13969,7 +14475,7 @@
           <p:cNvPr id="23" name="">
             <a:extLst xmlns:a="http://schemas.openxmlformats.org/drawingml/2006/main">
               <a:ext uri="{FF2B5EF4-FFF2-40B4-BE49-F238E27FC236}">
-                <a16:creationId xmlns:a16="http://schemas.microsoft.com/office/drawing/2014/main" id="{86F436B3-82C8-4A95-ACF8-A75EDAF52A8E}"/>
+                <a16:creationId xmlns:a16="http://schemas.microsoft.com/office/drawing/2014/main" id="{F348516D-D61A-4D25-BD39-ADE52A6EE59F}"/>
               </a:ext>
             </a:extLst>
           </p:cNvPr>
@@ -14002,7 +14508,7 @@
           <p:cNvPr id="24" name="">
             <a:extLst xmlns:a="http://schemas.openxmlformats.org/drawingml/2006/main">
               <a:ext uri="{FF2B5EF4-FFF2-40B4-BE49-F238E27FC236}">
-                <a16:creationId xmlns:a16="http://schemas.microsoft.com/office/drawing/2014/main" id="{62AB8DA0-CAB6-479E-A560-E48631D0E7E4}"/>
+                <a16:creationId xmlns:a16="http://schemas.microsoft.com/office/drawing/2014/main" id="{94ED0F62-4AF2-4A00-AEB6-7AC3FED469A7}"/>
               </a:ext>
             </a:extLst>
           </p:cNvPr>
@@ -14052,7 +14558,7 @@
           <p:cNvPr id="25" name="">
             <a:extLst xmlns:a="http://schemas.openxmlformats.org/drawingml/2006/main">
               <a:ext uri="{FF2B5EF4-FFF2-40B4-BE49-F238E27FC236}">
-                <a16:creationId xmlns:a16="http://schemas.microsoft.com/office/drawing/2014/main" id="{2871C055-AF9B-4C15-957A-DF216E6CF3F2}"/>
+                <a16:creationId xmlns:a16="http://schemas.microsoft.com/office/drawing/2014/main" id="{13786348-DA29-41F1-9BC7-E7BD4BCD848C}"/>
               </a:ext>
             </a:extLst>
           </p:cNvPr>
@@ -14085,7 +14591,7 @@
           <p:cNvPr id="26" name="">
             <a:extLst xmlns:a="http://schemas.openxmlformats.org/drawingml/2006/main">
               <a:ext uri="{FF2B5EF4-FFF2-40B4-BE49-F238E27FC236}">
-                <a16:creationId xmlns:a16="http://schemas.microsoft.com/office/drawing/2014/main" id="{CD6C0DDE-C583-4CDE-840A-6A7B3BCAD4C2}"/>
+                <a16:creationId xmlns:a16="http://schemas.microsoft.com/office/drawing/2014/main" id="{33EC3298-A955-4088-8F7B-4ACADF60AC59}"/>
               </a:ext>
             </a:extLst>
           </p:cNvPr>
@@ -14135,7 +14641,7 @@
           <p:cNvPr id="27" name="">
             <a:extLst xmlns:a="http://schemas.openxmlformats.org/drawingml/2006/main">
               <a:ext uri="{FF2B5EF4-FFF2-40B4-BE49-F238E27FC236}">
-                <a16:creationId xmlns:a16="http://schemas.microsoft.com/office/drawing/2014/main" id="{D87FB19B-2B23-45CB-B274-F8257F200ADB}"/>
+                <a16:creationId xmlns:a16="http://schemas.microsoft.com/office/drawing/2014/main" id="{8455294A-DEA3-44D8-B53F-64550AC6B33B}"/>
               </a:ext>
             </a:extLst>
           </p:cNvPr>
@@ -14168,7 +14674,7 @@
           <p:cNvPr id="28" name="">
             <a:extLst xmlns:a="http://schemas.openxmlformats.org/drawingml/2006/main">
               <a:ext uri="{FF2B5EF4-FFF2-40B4-BE49-F238E27FC236}">
-                <a16:creationId xmlns:a16="http://schemas.microsoft.com/office/drawing/2014/main" id="{FD0E9338-E88E-4923-B9A4-DBACE30D556B}"/>
+                <a16:creationId xmlns:a16="http://schemas.microsoft.com/office/drawing/2014/main" id="{BC1D85E7-2BF7-4FBC-8270-BE391387B522}"/>
               </a:ext>
             </a:extLst>
           </p:cNvPr>
@@ -14216,7 +14722,7 @@
     </p:spTree>
     <p:extLst>
       <p:ext uri="{BB962C8B-B14F-4D97-AF65-F5344CB8AC3E}">
-        <p14:creationId xmlns:p14="http://schemas.microsoft.com/office/powerpoint/2010/main" val="1951951231"/>
+        <p14:creationId xmlns:p14="http://schemas.microsoft.com/office/powerpoint/2010/main" val="1645987960"/>
       </p:ext>
     </p:extLst>
   </p:cSld>
@@ -14247,7 +14753,7 @@
           <p:cNvPr id="1" name="">
             <a:extLst xmlns:a="http://schemas.openxmlformats.org/drawingml/2006/main">
               <a:ext uri="{FF2B5EF4-FFF2-40B4-BE49-F238E27FC236}">
-                <a16:creationId xmlns:a16="http://schemas.microsoft.com/office/drawing/2014/main" id="{36FF5E19-D1DB-483F-9749-98FBEA39B636}"/>
+                <a16:creationId xmlns:a16="http://schemas.microsoft.com/office/drawing/2014/main" id="{3E524544-949F-4441-AB1B-B26501815B8A}"/>
               </a:ext>
             </a:extLst>
           </p:cNvPr>
@@ -14282,7 +14788,7 @@
           <p:nvPr/>
         </p:nvPicPr>
         <p:blipFill>
-          <a:blip xmlns:r="http://schemas.openxmlformats.org/officeDocument/2006/relationships" xmlns:a="http://schemas.openxmlformats.org/drawingml/2006/main" r:embed="R84c1b4b94bff4234"/>
+          <a:blip xmlns:r="http://schemas.openxmlformats.org/officeDocument/2006/relationships" xmlns:a="http://schemas.openxmlformats.org/drawingml/2006/main" r:embed="R18b05535b3e448fe"/>
           <a:stretch xmlns:a="http://schemas.openxmlformats.org/drawingml/2006/main"/>
         </p:blipFill>
         <p:spPr>
@@ -14300,7 +14806,7 @@
           <p:cNvPr id="3" name="">
             <a:extLst xmlns:a="http://schemas.openxmlformats.org/drawingml/2006/main">
               <a:ext uri="{FF2B5EF4-FFF2-40B4-BE49-F238E27FC236}">
-                <a16:creationId xmlns:a16="http://schemas.microsoft.com/office/drawing/2014/main" id="{23CBBAB5-9619-40C2-A7BC-8FFE729D7203}"/>
+                <a16:creationId xmlns:a16="http://schemas.microsoft.com/office/drawing/2014/main" id="{4B81987A-A208-408B-86CB-39EA4EAC826F}"/>
               </a:ext>
             </a:extLst>
           </p:cNvPr>
@@ -14350,7 +14856,7 @@
           <p:cNvPr id="4" name="">
             <a:extLst xmlns:a="http://schemas.openxmlformats.org/drawingml/2006/main">
               <a:ext uri="{FF2B5EF4-FFF2-40B4-BE49-F238E27FC236}">
-                <a16:creationId xmlns:a16="http://schemas.microsoft.com/office/drawing/2014/main" id="{9FEBD1B6-104A-4945-A379-EDEE92212053}"/>
+                <a16:creationId xmlns:a16="http://schemas.microsoft.com/office/drawing/2014/main" id="{23B47B64-3CE7-4603-BCC2-F6FBCDE77AA1}"/>
               </a:ext>
             </a:extLst>
           </p:cNvPr>
@@ -14383,7 +14889,7 @@
           <p:cNvPr id="5" name="">
             <a:extLst xmlns:a="http://schemas.openxmlformats.org/drawingml/2006/main">
               <a:ext uri="{FF2B5EF4-FFF2-40B4-BE49-F238E27FC236}">
-                <a16:creationId xmlns:a16="http://schemas.microsoft.com/office/drawing/2014/main" id="{901B2070-7250-4CFE-AFA5-E6EAED682545}"/>
+                <a16:creationId xmlns:a16="http://schemas.microsoft.com/office/drawing/2014/main" id="{F2D7C8AF-B213-4C3C-8B29-B979A8E3673D}"/>
               </a:ext>
             </a:extLst>
           </p:cNvPr>
@@ -14414,7 +14920,7 @@
           <p:cNvPr id="6" name="">
             <a:extLst xmlns:a="http://schemas.openxmlformats.org/drawingml/2006/main">
               <a:ext uri="{FF2B5EF4-FFF2-40B4-BE49-F238E27FC236}">
-                <a16:creationId xmlns:a16="http://schemas.microsoft.com/office/drawing/2014/main" id="{4EEE430F-082D-4DDA-B715-368421E2C40B}"/>
+                <a16:creationId xmlns:a16="http://schemas.microsoft.com/office/drawing/2014/main" id="{30084F2E-FF90-49FD-83A7-AF61CEDA0A84}"/>
               </a:ext>
             </a:extLst>
           </p:cNvPr>
@@ -14464,7 +14970,7 @@
           <p:cNvPr id="7" name="">
             <a:extLst xmlns:a="http://schemas.openxmlformats.org/drawingml/2006/main">
               <a:ext uri="{FF2B5EF4-FFF2-40B4-BE49-F238E27FC236}">
-                <a16:creationId xmlns:a16="http://schemas.microsoft.com/office/drawing/2014/main" id="{610E5504-FCD4-4120-8636-400CF9D34623}"/>
+                <a16:creationId xmlns:a16="http://schemas.microsoft.com/office/drawing/2014/main" id="{9F2C5F78-AAFD-4010-AD39-95EC09301FEC}"/>
               </a:ext>
             </a:extLst>
           </p:cNvPr>
@@ -14514,7 +15020,7 @@
           <p:cNvPr id="8" name="">
             <a:extLst xmlns:a="http://schemas.openxmlformats.org/drawingml/2006/main">
               <a:ext uri="{FF2B5EF4-FFF2-40B4-BE49-F238E27FC236}">
-                <a16:creationId xmlns:a16="http://schemas.microsoft.com/office/drawing/2014/main" id="{170C575D-32FC-4FC6-9996-1EDB889F3AA2}"/>
+                <a16:creationId xmlns:a16="http://schemas.microsoft.com/office/drawing/2014/main" id="{914E51FE-22AC-4852-B5D8-9572130D8D03}"/>
               </a:ext>
             </a:extLst>
           </p:cNvPr>
@@ -14549,7 +15055,7 @@
           <p:cNvPr id="9" name="">
             <a:extLst xmlns:a="http://schemas.openxmlformats.org/drawingml/2006/main">
               <a:ext uri="{FF2B5EF4-FFF2-40B4-BE49-F238E27FC236}">
-                <a16:creationId xmlns:a16="http://schemas.microsoft.com/office/drawing/2014/main" id="{BD814B60-C103-4B92-9E7A-40FDC0E82299}"/>
+                <a16:creationId xmlns:a16="http://schemas.microsoft.com/office/drawing/2014/main" id="{2A2F1C77-00D0-43A7-B839-4FA324BB4078}"/>
               </a:ext>
             </a:extLst>
           </p:cNvPr>
@@ -14582,7 +15088,7 @@
           <p:cNvPr id="10" name="">
             <a:extLst xmlns:a="http://schemas.openxmlformats.org/drawingml/2006/main">
               <a:ext uri="{FF2B5EF4-FFF2-40B4-BE49-F238E27FC236}">
-                <a16:creationId xmlns:a16="http://schemas.microsoft.com/office/drawing/2014/main" id="{9971C5A2-B66A-407C-A0F5-8789338C5189}"/>
+                <a16:creationId xmlns:a16="http://schemas.microsoft.com/office/drawing/2014/main" id="{80ED544C-09A0-49CB-80C7-73027ABDB61D}"/>
               </a:ext>
             </a:extLst>
           </p:cNvPr>
@@ -14632,7 +15138,7 @@
           <p:cNvPr id="11" name="">
             <a:extLst xmlns:a="http://schemas.openxmlformats.org/drawingml/2006/main">
               <a:ext uri="{FF2B5EF4-FFF2-40B4-BE49-F238E27FC236}">
-                <a16:creationId xmlns:a16="http://schemas.microsoft.com/office/drawing/2014/main" id="{47EA86FA-78CF-4BCC-9C02-A480AC745FC1}"/>
+                <a16:creationId xmlns:a16="http://schemas.microsoft.com/office/drawing/2014/main" id="{CBEDBA99-E04E-4042-8CC2-A8A66282A160}"/>
               </a:ext>
             </a:extLst>
           </p:cNvPr>
@@ -14682,7 +15188,7 @@
           <p:cNvPr id="12" name="">
             <a:extLst xmlns:a="http://schemas.openxmlformats.org/drawingml/2006/main">
               <a:ext uri="{FF2B5EF4-FFF2-40B4-BE49-F238E27FC236}">
-                <a16:creationId xmlns:a16="http://schemas.microsoft.com/office/drawing/2014/main" id="{F52E76C1-5B96-42AD-AFFD-60B28FAB244C}"/>
+                <a16:creationId xmlns:a16="http://schemas.microsoft.com/office/drawing/2014/main" id="{6C38ECB9-8A59-48A1-8B3B-52F8FCF5977C}"/>
               </a:ext>
             </a:extLst>
           </p:cNvPr>
@@ -14732,7 +15238,7 @@
           <p:cNvPr id="13" name="">
             <a:extLst xmlns:a="http://schemas.openxmlformats.org/drawingml/2006/main">
               <a:ext uri="{FF2B5EF4-FFF2-40B4-BE49-F238E27FC236}">
-                <a16:creationId xmlns:a16="http://schemas.microsoft.com/office/drawing/2014/main" id="{42F3AB2A-2313-4334-A63D-24C2559023EF}"/>
+                <a16:creationId xmlns:a16="http://schemas.microsoft.com/office/drawing/2014/main" id="{B7A4BA5D-6E62-4511-8095-9B99BD505EF5}"/>
               </a:ext>
             </a:extLst>
           </p:cNvPr>
@@ -14767,7 +15273,7 @@
           <p:cNvPr id="14" name="">
             <a:extLst xmlns:a="http://schemas.openxmlformats.org/drawingml/2006/main">
               <a:ext uri="{FF2B5EF4-FFF2-40B4-BE49-F238E27FC236}">
-                <a16:creationId xmlns:a16="http://schemas.microsoft.com/office/drawing/2014/main" id="{993C9A50-1189-4F31-8CA0-277B300F5316}"/>
+                <a16:creationId xmlns:a16="http://schemas.microsoft.com/office/drawing/2014/main" id="{7477DEED-25C7-4652-AD7C-5733FA550BEB}"/>
               </a:ext>
             </a:extLst>
           </p:cNvPr>
@@ -14800,7 +15306,7 @@
           <p:cNvPr id="15" name="">
             <a:extLst xmlns:a="http://schemas.openxmlformats.org/drawingml/2006/main">
               <a:ext uri="{FF2B5EF4-FFF2-40B4-BE49-F238E27FC236}">
-                <a16:creationId xmlns:a16="http://schemas.microsoft.com/office/drawing/2014/main" id="{7E03E379-6FC0-478A-A0EF-1085EEF04EEB}"/>
+                <a16:creationId xmlns:a16="http://schemas.microsoft.com/office/drawing/2014/main" id="{DA5B1EE7-59CF-4C94-B45B-A4BF436E78BA}"/>
               </a:ext>
             </a:extLst>
           </p:cNvPr>
@@ -14850,7 +15356,7 @@
           <p:cNvPr id="16" name="">
             <a:extLst xmlns:a="http://schemas.openxmlformats.org/drawingml/2006/main">
               <a:ext uri="{FF2B5EF4-FFF2-40B4-BE49-F238E27FC236}">
-                <a16:creationId xmlns:a16="http://schemas.microsoft.com/office/drawing/2014/main" id="{BE7044CE-AED8-4134-9F47-C547763F978A}"/>
+                <a16:creationId xmlns:a16="http://schemas.microsoft.com/office/drawing/2014/main" id="{8EE31F87-FD3A-4D9B-B124-DAB7558B4812}"/>
               </a:ext>
             </a:extLst>
           </p:cNvPr>
@@ -14900,7 +15406,7 @@
           <p:cNvPr id="17" name="">
             <a:extLst xmlns:a="http://schemas.openxmlformats.org/drawingml/2006/main">
               <a:ext uri="{FF2B5EF4-FFF2-40B4-BE49-F238E27FC236}">
-                <a16:creationId xmlns:a16="http://schemas.microsoft.com/office/drawing/2014/main" id="{1C99C4B3-C27A-4C15-B412-717C33284074}"/>
+                <a16:creationId xmlns:a16="http://schemas.microsoft.com/office/drawing/2014/main" id="{9044CA6F-2A83-4C9C-B81E-4AA7E69526CA}"/>
               </a:ext>
             </a:extLst>
           </p:cNvPr>
@@ -14950,7 +15456,7 @@
           <p:cNvPr id="18" name="">
             <a:extLst xmlns:a="http://schemas.openxmlformats.org/drawingml/2006/main">
               <a:ext uri="{FF2B5EF4-FFF2-40B4-BE49-F238E27FC236}">
-                <a16:creationId xmlns:a16="http://schemas.microsoft.com/office/drawing/2014/main" id="{25B33A60-3671-4F87-A957-A5DB0613DEED}"/>
+                <a16:creationId xmlns:a16="http://schemas.microsoft.com/office/drawing/2014/main" id="{03D5788E-722B-44E0-9437-7D8CE3A8BE56}"/>
               </a:ext>
             </a:extLst>
           </p:cNvPr>
@@ -14985,7 +15491,7 @@
           <p:cNvPr id="19" name="">
             <a:extLst xmlns:a="http://schemas.openxmlformats.org/drawingml/2006/main">
               <a:ext uri="{FF2B5EF4-FFF2-40B4-BE49-F238E27FC236}">
-                <a16:creationId xmlns:a16="http://schemas.microsoft.com/office/drawing/2014/main" id="{BFDBCAF4-FFA6-45DF-BCD4-34BC9B2CE55D}"/>
+                <a16:creationId xmlns:a16="http://schemas.microsoft.com/office/drawing/2014/main" id="{D4A60F30-152F-4366-90AB-06DB6AC91DA3}"/>
               </a:ext>
             </a:extLst>
           </p:cNvPr>
@@ -15018,7 +15524,7 @@
           <p:cNvPr id="20" name="">
             <a:extLst xmlns:a="http://schemas.openxmlformats.org/drawingml/2006/main">
               <a:ext uri="{FF2B5EF4-FFF2-40B4-BE49-F238E27FC236}">
-                <a16:creationId xmlns:a16="http://schemas.microsoft.com/office/drawing/2014/main" id="{9E873E5B-B73E-40E7-8C1A-897CADFBDB6C}"/>
+                <a16:creationId xmlns:a16="http://schemas.microsoft.com/office/drawing/2014/main" id="{AF3E1773-A166-4BAF-A799-3A1769E5A307}"/>
               </a:ext>
             </a:extLst>
           </p:cNvPr>
@@ -15068,7 +15574,7 @@
           <p:cNvPr id="21" name="">
             <a:extLst xmlns:a="http://schemas.openxmlformats.org/drawingml/2006/main">
               <a:ext uri="{FF2B5EF4-FFF2-40B4-BE49-F238E27FC236}">
-                <a16:creationId xmlns:a16="http://schemas.microsoft.com/office/drawing/2014/main" id="{C3F88E35-DE5D-412B-890E-4E36116862F5}"/>
+                <a16:creationId xmlns:a16="http://schemas.microsoft.com/office/drawing/2014/main" id="{EFF8F0FE-E3A4-46AA-8720-E9EFE1D5A4A0}"/>
               </a:ext>
             </a:extLst>
           </p:cNvPr>
@@ -15118,7 +15624,7 @@
           <p:cNvPr id="22" name="">
             <a:extLst xmlns:a="http://schemas.openxmlformats.org/drawingml/2006/main">
               <a:ext uri="{FF2B5EF4-FFF2-40B4-BE49-F238E27FC236}">
-                <a16:creationId xmlns:a16="http://schemas.microsoft.com/office/drawing/2014/main" id="{AADF4C9B-9870-461B-A9DE-2BF050D192E3}"/>
+                <a16:creationId xmlns:a16="http://schemas.microsoft.com/office/drawing/2014/main" id="{3A5CA4D9-8B10-457D-AE9D-4445EB230EA5}"/>
               </a:ext>
             </a:extLst>
           </p:cNvPr>
@@ -15168,7 +15674,7 @@
           <p:cNvPr id="23" name="">
             <a:extLst xmlns:a="http://schemas.openxmlformats.org/drawingml/2006/main">
               <a:ext uri="{FF2B5EF4-FFF2-40B4-BE49-F238E27FC236}">
-                <a16:creationId xmlns:a16="http://schemas.microsoft.com/office/drawing/2014/main" id="{8B70591C-0121-485D-A52B-AAFE839A18DF}"/>
+                <a16:creationId xmlns:a16="http://schemas.microsoft.com/office/drawing/2014/main" id="{4B0E8943-B47B-48DF-BC6C-A6D362560C1B}"/>
               </a:ext>
             </a:extLst>
           </p:cNvPr>
@@ -15203,7 +15709,7 @@
           <p:cNvPr id="24" name="">
             <a:extLst xmlns:a="http://schemas.openxmlformats.org/drawingml/2006/main">
               <a:ext uri="{FF2B5EF4-FFF2-40B4-BE49-F238E27FC236}">
-                <a16:creationId xmlns:a16="http://schemas.microsoft.com/office/drawing/2014/main" id="{36056F5C-F6A3-4059-9A4E-C98E39A4057F}"/>
+                <a16:creationId xmlns:a16="http://schemas.microsoft.com/office/drawing/2014/main" id="{0FFDDBFE-068D-480A-9765-62CE950537BC}"/>
               </a:ext>
             </a:extLst>
           </p:cNvPr>
@@ -15236,7 +15742,7 @@
           <p:cNvPr id="25" name="">
             <a:extLst xmlns:a="http://schemas.openxmlformats.org/drawingml/2006/main">
               <a:ext uri="{FF2B5EF4-FFF2-40B4-BE49-F238E27FC236}">
-                <a16:creationId xmlns:a16="http://schemas.microsoft.com/office/drawing/2014/main" id="{D6ABB99A-909C-4A60-BE12-5FB16578CD85}"/>
+                <a16:creationId xmlns:a16="http://schemas.microsoft.com/office/drawing/2014/main" id="{A43CC410-C50A-43CB-BE30-AD21F9A72858}"/>
               </a:ext>
             </a:extLst>
           </p:cNvPr>
@@ -15286,7 +15792,7 @@
           <p:cNvPr id="26" name="">
             <a:extLst xmlns:a="http://schemas.openxmlformats.org/drawingml/2006/main">
               <a:ext uri="{FF2B5EF4-FFF2-40B4-BE49-F238E27FC236}">
-                <a16:creationId xmlns:a16="http://schemas.microsoft.com/office/drawing/2014/main" id="{B1B3DFB9-1CC9-4008-B021-1286D7545B3A}"/>
+                <a16:creationId xmlns:a16="http://schemas.microsoft.com/office/drawing/2014/main" id="{9EEAF6C1-6E02-426D-841A-1E1F0D07B627}"/>
               </a:ext>
             </a:extLst>
           </p:cNvPr>
@@ -15336,7 +15842,7 @@
           <p:cNvPr id="27" name="">
             <a:extLst xmlns:a="http://schemas.openxmlformats.org/drawingml/2006/main">
               <a:ext uri="{FF2B5EF4-FFF2-40B4-BE49-F238E27FC236}">
-                <a16:creationId xmlns:a16="http://schemas.microsoft.com/office/drawing/2014/main" id="{C6237989-F4E3-4611-9237-6A280586E623}"/>
+                <a16:creationId xmlns:a16="http://schemas.microsoft.com/office/drawing/2014/main" id="{3A2D8E17-67A8-4A84-ADB5-F79B24617F06}"/>
               </a:ext>
             </a:extLst>
           </p:cNvPr>
@@ -15386,7 +15892,7 @@
           <p:cNvPr id="28" name="">
             <a:extLst xmlns:a="http://schemas.openxmlformats.org/drawingml/2006/main">
               <a:ext uri="{FF2B5EF4-FFF2-40B4-BE49-F238E27FC236}">
-                <a16:creationId xmlns:a16="http://schemas.microsoft.com/office/drawing/2014/main" id="{E971635C-1A8A-44E9-BCE0-251C3197881B}"/>
+                <a16:creationId xmlns:a16="http://schemas.microsoft.com/office/drawing/2014/main" id="{8B8C7AA6-67AF-40FE-8407-1A11D351A0A1}"/>
               </a:ext>
             </a:extLst>
           </p:cNvPr>
@@ -15421,7 +15927,7 @@
           <p:cNvPr id="29" name="">
             <a:extLst xmlns:a="http://schemas.openxmlformats.org/drawingml/2006/main">
               <a:ext uri="{FF2B5EF4-FFF2-40B4-BE49-F238E27FC236}">
-                <a16:creationId xmlns:a16="http://schemas.microsoft.com/office/drawing/2014/main" id="{9D4417F2-DA0F-4909-8111-8CD504CC85DE}"/>
+                <a16:creationId xmlns:a16="http://schemas.microsoft.com/office/drawing/2014/main" id="{14844FF5-180D-4FD5-A4C1-B754409B2F59}"/>
               </a:ext>
             </a:extLst>
           </p:cNvPr>
@@ -15454,7 +15960,7 @@
           <p:cNvPr id="30" name="">
             <a:extLst xmlns:a="http://schemas.openxmlformats.org/drawingml/2006/main">
               <a:ext uri="{FF2B5EF4-FFF2-40B4-BE49-F238E27FC236}">
-                <a16:creationId xmlns:a16="http://schemas.microsoft.com/office/drawing/2014/main" id="{EAA7590D-1EA6-4D4E-9201-6AECBC7BFC43}"/>
+                <a16:creationId xmlns:a16="http://schemas.microsoft.com/office/drawing/2014/main" id="{E9B9C71F-1D53-4B8A-8F45-03720DD9E69E}"/>
               </a:ext>
             </a:extLst>
           </p:cNvPr>
@@ -15504,7 +16010,7 @@
           <p:cNvPr id="31" name="">
             <a:extLst xmlns:a="http://schemas.openxmlformats.org/drawingml/2006/main">
               <a:ext uri="{FF2B5EF4-FFF2-40B4-BE49-F238E27FC236}">
-                <a16:creationId xmlns:a16="http://schemas.microsoft.com/office/drawing/2014/main" id="{CF8EF6FF-1340-4060-B4D5-68862AEACFBE}"/>
+                <a16:creationId xmlns:a16="http://schemas.microsoft.com/office/drawing/2014/main" id="{35068329-FFE6-45AC-B0B8-C0250F3A8F1A}"/>
               </a:ext>
             </a:extLst>
           </p:cNvPr>
@@ -15554,7 +16060,7 @@
           <p:cNvPr id="32" name="">
             <a:extLst xmlns:a="http://schemas.openxmlformats.org/drawingml/2006/main">
               <a:ext uri="{FF2B5EF4-FFF2-40B4-BE49-F238E27FC236}">
-                <a16:creationId xmlns:a16="http://schemas.microsoft.com/office/drawing/2014/main" id="{1AEDE12C-592A-416A-803A-EDDEBF497CA2}"/>
+                <a16:creationId xmlns:a16="http://schemas.microsoft.com/office/drawing/2014/main" id="{B9472D88-6283-4130-9335-325CEC410431}"/>
               </a:ext>
             </a:extLst>
           </p:cNvPr>
@@ -15604,7 +16110,7 @@
           <p:cNvPr id="33" name="">
             <a:extLst xmlns:a="http://schemas.openxmlformats.org/drawingml/2006/main">
               <a:ext uri="{FF2B5EF4-FFF2-40B4-BE49-F238E27FC236}">
-                <a16:creationId xmlns:a16="http://schemas.microsoft.com/office/drawing/2014/main" id="{D46C22B9-D648-44F9-8806-C61085BC6B15}"/>
+                <a16:creationId xmlns:a16="http://schemas.microsoft.com/office/drawing/2014/main" id="{B06495BB-35A7-4771-8520-BE60FC0277F5}"/>
               </a:ext>
             </a:extLst>
           </p:cNvPr>
@@ -15639,7 +16145,7 @@
           <p:cNvPr id="34" name="">
             <a:extLst xmlns:a="http://schemas.openxmlformats.org/drawingml/2006/main">
               <a:ext uri="{FF2B5EF4-FFF2-40B4-BE49-F238E27FC236}">
-                <a16:creationId xmlns:a16="http://schemas.microsoft.com/office/drawing/2014/main" id="{73CA634B-9773-4797-AE80-A11D677A717F}"/>
+                <a16:creationId xmlns:a16="http://schemas.microsoft.com/office/drawing/2014/main" id="{C7B7E1AC-7FE3-4EEE-A3B3-8BA01D53A37E}"/>
               </a:ext>
             </a:extLst>
           </p:cNvPr>
@@ -15672,7 +16178,7 @@
           <p:cNvPr id="35" name="">
             <a:extLst xmlns:a="http://schemas.openxmlformats.org/drawingml/2006/main">
               <a:ext uri="{FF2B5EF4-FFF2-40B4-BE49-F238E27FC236}">
-                <a16:creationId xmlns:a16="http://schemas.microsoft.com/office/drawing/2014/main" id="{9D90AF49-9630-4ABE-9D26-D2476D972DE6}"/>
+                <a16:creationId xmlns:a16="http://schemas.microsoft.com/office/drawing/2014/main" id="{53AD1A2A-0701-4ED2-951C-BB3B556AFCBE}"/>
               </a:ext>
             </a:extLst>
           </p:cNvPr>
@@ -15722,7 +16228,7 @@
           <p:cNvPr id="36" name="">
             <a:extLst xmlns:a="http://schemas.openxmlformats.org/drawingml/2006/main">
               <a:ext uri="{FF2B5EF4-FFF2-40B4-BE49-F238E27FC236}">
-                <a16:creationId xmlns:a16="http://schemas.microsoft.com/office/drawing/2014/main" id="{5834D678-C570-453D-89F7-445B5525088E}"/>
+                <a16:creationId xmlns:a16="http://schemas.microsoft.com/office/drawing/2014/main" id="{A97621B6-0451-4992-B8F1-9CDB31B303CE}"/>
               </a:ext>
             </a:extLst>
           </p:cNvPr>
@@ -15772,7 +16278,7 @@
           <p:cNvPr id="37" name="">
             <a:extLst xmlns:a="http://schemas.openxmlformats.org/drawingml/2006/main">
               <a:ext uri="{FF2B5EF4-FFF2-40B4-BE49-F238E27FC236}">
-                <a16:creationId xmlns:a16="http://schemas.microsoft.com/office/drawing/2014/main" id="{57438686-2FC9-47E2-830F-5F403C1E6E7C}"/>
+                <a16:creationId xmlns:a16="http://schemas.microsoft.com/office/drawing/2014/main" id="{0583B383-6168-45CE-BAB7-A012A751035D}"/>
               </a:ext>
             </a:extLst>
           </p:cNvPr>
@@ -15820,7 +16326,7 @@
     </p:spTree>
     <p:extLst>
       <p:ext uri="{BB962C8B-B14F-4D97-AF65-F5344CB8AC3E}">
-        <p14:creationId xmlns:p14="http://schemas.microsoft.com/office/powerpoint/2010/main" val="996968560"/>
+        <p14:creationId xmlns:p14="http://schemas.microsoft.com/office/powerpoint/2010/main" val="492402858"/>
       </p:ext>
     </p:extLst>
   </p:cSld>
@@ -15851,7 +16357,7 @@
           <p:cNvPr id="1" name="">
             <a:extLst xmlns:a="http://schemas.openxmlformats.org/drawingml/2006/main">
               <a:ext uri="{FF2B5EF4-FFF2-40B4-BE49-F238E27FC236}">
-                <a16:creationId xmlns:a16="http://schemas.microsoft.com/office/drawing/2014/main" id="{8A17C798-6A1A-43CC-B42D-5DDDA9797291}"/>
+                <a16:creationId xmlns:a16="http://schemas.microsoft.com/office/drawing/2014/main" id="{7C3206DC-55CC-498E-98DA-EAD5B5E869D7}"/>
               </a:ext>
             </a:extLst>
           </p:cNvPr>
@@ -15886,7 +16392,7 @@
           <p:nvPr/>
         </p:nvPicPr>
         <p:blipFill>
-          <a:blip xmlns:r="http://schemas.openxmlformats.org/officeDocument/2006/relationships" xmlns:a="http://schemas.openxmlformats.org/drawingml/2006/main" r:embed="R4fdddceec39a4bc3"/>
+          <a:blip xmlns:r="http://schemas.openxmlformats.org/officeDocument/2006/relationships" xmlns:a="http://schemas.openxmlformats.org/drawingml/2006/main" r:embed="R590ab3408eca41d6"/>
           <a:stretch xmlns:a="http://schemas.openxmlformats.org/drawingml/2006/main"/>
         </p:blipFill>
         <p:spPr>
@@ -15904,7 +16410,7 @@
           <p:cNvPr id="3" name="">
             <a:extLst xmlns:a="http://schemas.openxmlformats.org/drawingml/2006/main">
               <a:ext uri="{FF2B5EF4-FFF2-40B4-BE49-F238E27FC236}">
-                <a16:creationId xmlns:a16="http://schemas.microsoft.com/office/drawing/2014/main" id="{6815B1FE-7473-4326-B7CF-5DF39B80EC3C}"/>
+                <a16:creationId xmlns:a16="http://schemas.microsoft.com/office/drawing/2014/main" id="{27E16305-AFC5-48D8-8F20-A1B1F08CDB4E}"/>
               </a:ext>
             </a:extLst>
           </p:cNvPr>
@@ -15954,7 +16460,7 @@
           <p:cNvPr id="4" name="">
             <a:extLst xmlns:a="http://schemas.openxmlformats.org/drawingml/2006/main">
               <a:ext uri="{FF2B5EF4-FFF2-40B4-BE49-F238E27FC236}">
-                <a16:creationId xmlns:a16="http://schemas.microsoft.com/office/drawing/2014/main" id="{1FA59360-9FBC-43BD-B93E-14D870550D9A}"/>
+                <a16:creationId xmlns:a16="http://schemas.microsoft.com/office/drawing/2014/main" id="{C66875EE-CCE7-4069-B106-C88F203C4309}"/>
               </a:ext>
             </a:extLst>
           </p:cNvPr>
@@ -15987,7 +16493,7 @@
           <p:cNvPr id="5" name="">
             <a:extLst xmlns:a="http://schemas.openxmlformats.org/drawingml/2006/main">
               <a:ext uri="{FF2B5EF4-FFF2-40B4-BE49-F238E27FC236}">
-                <a16:creationId xmlns:a16="http://schemas.microsoft.com/office/drawing/2014/main" id="{A1B76E0E-D42B-4D6C-803C-7112E084FBE3}"/>
+                <a16:creationId xmlns:a16="http://schemas.microsoft.com/office/drawing/2014/main" id="{628CABAF-9E0E-4D58-96EC-556EC5B41B0F}"/>
               </a:ext>
             </a:extLst>
           </p:cNvPr>
@@ -16018,7 +16524,7 @@
           <p:cNvPr id="6" name="">
             <a:extLst xmlns:a="http://schemas.openxmlformats.org/drawingml/2006/main">
               <a:ext uri="{FF2B5EF4-FFF2-40B4-BE49-F238E27FC236}">
-                <a16:creationId xmlns:a16="http://schemas.microsoft.com/office/drawing/2014/main" id="{9C7B7875-0281-4C9C-B2A1-BA00F8CBFABB}"/>
+                <a16:creationId xmlns:a16="http://schemas.microsoft.com/office/drawing/2014/main" id="{9CA45374-2262-4228-83D9-150C83A184EA}"/>
               </a:ext>
             </a:extLst>
           </p:cNvPr>
@@ -16068,7 +16574,7 @@
           <p:cNvPr id="7" name="">
             <a:extLst xmlns:a="http://schemas.openxmlformats.org/drawingml/2006/main">
               <a:ext uri="{FF2B5EF4-FFF2-40B4-BE49-F238E27FC236}">
-                <a16:creationId xmlns:a16="http://schemas.microsoft.com/office/drawing/2014/main" id="{EE08165F-B04C-4FAE-AD6E-99DF768A131A}"/>
+                <a16:creationId xmlns:a16="http://schemas.microsoft.com/office/drawing/2014/main" id="{BB395487-8978-4FA1-8497-E8B96820C3F9}"/>
               </a:ext>
             </a:extLst>
           </p:cNvPr>
@@ -16118,7 +16624,7 @@
           <p:cNvPr id="8" name="">
             <a:extLst xmlns:a="http://schemas.openxmlformats.org/drawingml/2006/main">
               <a:ext uri="{FF2B5EF4-FFF2-40B4-BE49-F238E27FC236}">
-                <a16:creationId xmlns:a16="http://schemas.microsoft.com/office/drawing/2014/main" id="{291E1EBC-195D-47B3-A515-6F658703644B}"/>
+                <a16:creationId xmlns:a16="http://schemas.microsoft.com/office/drawing/2014/main" id="{66DC9839-D0F1-45A6-A107-EF68082234CF}"/>
               </a:ext>
             </a:extLst>
           </p:cNvPr>
@@ -16168,7 +16674,7 @@
           <p:cNvPr id="9" name="">
             <a:extLst xmlns:a="http://schemas.openxmlformats.org/drawingml/2006/main">
               <a:ext uri="{FF2B5EF4-FFF2-40B4-BE49-F238E27FC236}">
-                <a16:creationId xmlns:a16="http://schemas.microsoft.com/office/drawing/2014/main" id="{B248F031-DCFD-4BD3-926A-7395AB9917D3}"/>
+                <a16:creationId xmlns:a16="http://schemas.microsoft.com/office/drawing/2014/main" id="{E9A25B0E-1107-4B25-B15D-49CB8A2D5923}"/>
               </a:ext>
             </a:extLst>
           </p:cNvPr>
@@ -16218,7 +16724,7 @@
           <p:cNvPr id="10" name="">
             <a:extLst xmlns:a="http://schemas.openxmlformats.org/drawingml/2006/main">
               <a:ext uri="{FF2B5EF4-FFF2-40B4-BE49-F238E27FC236}">
-                <a16:creationId xmlns:a16="http://schemas.microsoft.com/office/drawing/2014/main" id="{3BC4A397-CED8-4D47-BB0E-A847F7292DA6}"/>
+                <a16:creationId xmlns:a16="http://schemas.microsoft.com/office/drawing/2014/main" id="{FD98C2E3-3639-4727-AF2B-9F799AC038D0}"/>
               </a:ext>
             </a:extLst>
           </p:cNvPr>
@@ -16268,7 +16774,7 @@
           <p:cNvPr id="11" name="">
             <a:extLst xmlns:a="http://schemas.openxmlformats.org/drawingml/2006/main">
               <a:ext uri="{FF2B5EF4-FFF2-40B4-BE49-F238E27FC236}">
-                <a16:creationId xmlns:a16="http://schemas.microsoft.com/office/drawing/2014/main" id="{9963F6FF-78A5-426C-93D0-6EE58E5F4B5B}"/>
+                <a16:creationId xmlns:a16="http://schemas.microsoft.com/office/drawing/2014/main" id="{FF09591E-928A-4E85-93F4-7F1A20812DD5}"/>
               </a:ext>
             </a:extLst>
           </p:cNvPr>
@@ -16318,7 +16824,7 @@
           <p:cNvPr id="12" name="">
             <a:extLst xmlns:a="http://schemas.openxmlformats.org/drawingml/2006/main">
               <a:ext uri="{FF2B5EF4-FFF2-40B4-BE49-F238E27FC236}">
-                <a16:creationId xmlns:a16="http://schemas.microsoft.com/office/drawing/2014/main" id="{04F8B94E-8AD7-4577-A2D7-DC02A0A95641}"/>
+                <a16:creationId xmlns:a16="http://schemas.microsoft.com/office/drawing/2014/main" id="{E8BBA9F1-5588-4241-8887-44FEF3DEC408}"/>
               </a:ext>
             </a:extLst>
           </p:cNvPr>
@@ -16349,7 +16855,7 @@
           <p:cNvPr id="13" name="">
             <a:extLst xmlns:a="http://schemas.openxmlformats.org/drawingml/2006/main">
               <a:ext uri="{FF2B5EF4-FFF2-40B4-BE49-F238E27FC236}">
-                <a16:creationId xmlns:a16="http://schemas.microsoft.com/office/drawing/2014/main" id="{1A00470E-B9C7-4125-AE65-CA275059B80A}"/>
+                <a16:creationId xmlns:a16="http://schemas.microsoft.com/office/drawing/2014/main" id="{A454BD96-2F8D-4A31-96A2-91E89F2988A2}"/>
               </a:ext>
             </a:extLst>
           </p:cNvPr>
@@ -16399,7 +16905,7 @@
           <p:cNvPr id="14" name="">
             <a:extLst xmlns:a="http://schemas.openxmlformats.org/drawingml/2006/main">
               <a:ext uri="{FF2B5EF4-FFF2-40B4-BE49-F238E27FC236}">
-                <a16:creationId xmlns:a16="http://schemas.microsoft.com/office/drawing/2014/main" id="{60FD7D5F-9239-485E-B49C-ED8526886746}"/>
+                <a16:creationId xmlns:a16="http://schemas.microsoft.com/office/drawing/2014/main" id="{6F94689A-F176-4A28-BCCF-65BF2D99CB18}"/>
               </a:ext>
             </a:extLst>
           </p:cNvPr>
@@ -16449,7 +16955,7 @@
           <p:cNvPr id="15" name="">
             <a:extLst xmlns:a="http://schemas.openxmlformats.org/drawingml/2006/main">
               <a:ext uri="{FF2B5EF4-FFF2-40B4-BE49-F238E27FC236}">
-                <a16:creationId xmlns:a16="http://schemas.microsoft.com/office/drawing/2014/main" id="{36DF2797-0DEB-46B8-B8C6-99C8C2E174EF}"/>
+                <a16:creationId xmlns:a16="http://schemas.microsoft.com/office/drawing/2014/main" id="{DA194080-D827-42DB-808C-622803BBFE95}"/>
               </a:ext>
             </a:extLst>
           </p:cNvPr>
@@ -16499,7 +17005,7 @@
           <p:cNvPr id="16" name="">
             <a:extLst xmlns:a="http://schemas.openxmlformats.org/drawingml/2006/main">
               <a:ext uri="{FF2B5EF4-FFF2-40B4-BE49-F238E27FC236}">
-                <a16:creationId xmlns:a16="http://schemas.microsoft.com/office/drawing/2014/main" id="{0ED387BC-432B-4BC1-B644-1D560117843A}"/>
+                <a16:creationId xmlns:a16="http://schemas.microsoft.com/office/drawing/2014/main" id="{52F96AAC-D1B0-4B78-8CD3-2DD23D3ABB9C}"/>
               </a:ext>
             </a:extLst>
           </p:cNvPr>
@@ -16530,7 +17036,7 @@
           <p:cNvPr id="17" name="">
             <a:extLst xmlns:a="http://schemas.openxmlformats.org/drawingml/2006/main">
               <a:ext uri="{FF2B5EF4-FFF2-40B4-BE49-F238E27FC236}">
-                <a16:creationId xmlns:a16="http://schemas.microsoft.com/office/drawing/2014/main" id="{62F2F4B7-0A4D-451C-858B-F4A883EE94B7}"/>
+                <a16:creationId xmlns:a16="http://schemas.microsoft.com/office/drawing/2014/main" id="{05301FCD-90EC-4BB2-AF29-3DF19A47C3B7}"/>
               </a:ext>
             </a:extLst>
           </p:cNvPr>
@@ -16580,7 +17086,7 @@
           <p:cNvPr id="18" name="">
             <a:extLst xmlns:a="http://schemas.openxmlformats.org/drawingml/2006/main">
               <a:ext uri="{FF2B5EF4-FFF2-40B4-BE49-F238E27FC236}">
-                <a16:creationId xmlns:a16="http://schemas.microsoft.com/office/drawing/2014/main" id="{80600BF5-C6F6-45E0-8C6C-20AC484CC3C9}"/>
+                <a16:creationId xmlns:a16="http://schemas.microsoft.com/office/drawing/2014/main" id="{9D10628E-6CFB-4678-832E-718F2F740E73}"/>
               </a:ext>
             </a:extLst>
           </p:cNvPr>
@@ -16630,7 +17136,7 @@
           <p:cNvPr id="19" name="">
             <a:extLst xmlns:a="http://schemas.openxmlformats.org/drawingml/2006/main">
               <a:ext uri="{FF2B5EF4-FFF2-40B4-BE49-F238E27FC236}">
-                <a16:creationId xmlns:a16="http://schemas.microsoft.com/office/drawing/2014/main" id="{24B1FA81-6D6A-4947-A7C3-53582AD67F27}"/>
+                <a16:creationId xmlns:a16="http://schemas.microsoft.com/office/drawing/2014/main" id="{9283FC91-45E1-45EE-8592-5AA92662C5E9}"/>
               </a:ext>
             </a:extLst>
           </p:cNvPr>
@@ -16680,7 +17186,7 @@
           <p:cNvPr id="20" name="">
             <a:extLst xmlns:a="http://schemas.openxmlformats.org/drawingml/2006/main">
               <a:ext uri="{FF2B5EF4-FFF2-40B4-BE49-F238E27FC236}">
-                <a16:creationId xmlns:a16="http://schemas.microsoft.com/office/drawing/2014/main" id="{303AD103-A087-4BCC-B322-005C52644498}"/>
+                <a16:creationId xmlns:a16="http://schemas.microsoft.com/office/drawing/2014/main" id="{23133F9D-7592-4EED-8D1E-683D658F76C2}"/>
               </a:ext>
             </a:extLst>
           </p:cNvPr>
@@ -16715,7 +17221,7 @@
           <p:cNvPr id="21" name="">
             <a:extLst xmlns:a="http://schemas.openxmlformats.org/drawingml/2006/main">
               <a:ext uri="{FF2B5EF4-FFF2-40B4-BE49-F238E27FC236}">
-                <a16:creationId xmlns:a16="http://schemas.microsoft.com/office/drawing/2014/main" id="{AF362A46-E5E8-4F20-9249-63C9C3ABD68F}"/>
+                <a16:creationId xmlns:a16="http://schemas.microsoft.com/office/drawing/2014/main" id="{E5210F6B-A094-49BA-BF79-AAD1D8BD33F2}"/>
               </a:ext>
             </a:extLst>
           </p:cNvPr>
@@ -16765,7 +17271,7 @@
           <p:cNvPr id="22" name="">
             <a:extLst xmlns:a="http://schemas.openxmlformats.org/drawingml/2006/main">
               <a:ext uri="{FF2B5EF4-FFF2-40B4-BE49-F238E27FC236}">
-                <a16:creationId xmlns:a16="http://schemas.microsoft.com/office/drawing/2014/main" id="{6B42C116-202E-4D98-934A-592E2C2C5A98}"/>
+                <a16:creationId xmlns:a16="http://schemas.microsoft.com/office/drawing/2014/main" id="{5CBA29F7-71D1-4063-9734-1CF63D79E69C}"/>
               </a:ext>
             </a:extLst>
           </p:cNvPr>
@@ -16815,7 +17321,7 @@
           <p:cNvPr id="23" name="">
             <a:extLst xmlns:a="http://schemas.openxmlformats.org/drawingml/2006/main">
               <a:ext uri="{FF2B5EF4-FFF2-40B4-BE49-F238E27FC236}">
-                <a16:creationId xmlns:a16="http://schemas.microsoft.com/office/drawing/2014/main" id="{579B8B9C-4F0F-4AE9-9C66-9ABE81103D17}"/>
+                <a16:creationId xmlns:a16="http://schemas.microsoft.com/office/drawing/2014/main" id="{7136C357-08B4-4F72-822F-9D4D306F1F63}"/>
               </a:ext>
             </a:extLst>
           </p:cNvPr>
@@ -16850,7 +17356,7 @@
           <p:cNvPr id="24" name="">
             <a:extLst xmlns:a="http://schemas.openxmlformats.org/drawingml/2006/main">
               <a:ext uri="{FF2B5EF4-FFF2-40B4-BE49-F238E27FC236}">
-                <a16:creationId xmlns:a16="http://schemas.microsoft.com/office/drawing/2014/main" id="{C6575E81-7EF3-4934-8A0B-44A8A49527B0}"/>
+                <a16:creationId xmlns:a16="http://schemas.microsoft.com/office/drawing/2014/main" id="{27274DFD-8839-4637-8A83-CBA73EE2F6E7}"/>
               </a:ext>
             </a:extLst>
           </p:cNvPr>
@@ -16900,7 +17406,7 @@
           <p:cNvPr id="25" name="">
             <a:extLst xmlns:a="http://schemas.openxmlformats.org/drawingml/2006/main">
               <a:ext uri="{FF2B5EF4-FFF2-40B4-BE49-F238E27FC236}">
-                <a16:creationId xmlns:a16="http://schemas.microsoft.com/office/drawing/2014/main" id="{832B6AA9-106A-4F93-8B42-2AADC8271B74}"/>
+                <a16:creationId xmlns:a16="http://schemas.microsoft.com/office/drawing/2014/main" id="{5FA9FF6B-C099-4178-AABB-1249F42B4C31}"/>
               </a:ext>
             </a:extLst>
           </p:cNvPr>
@@ -16950,7 +17456,7 @@
           <p:cNvPr id="26" name="">
             <a:extLst xmlns:a="http://schemas.openxmlformats.org/drawingml/2006/main">
               <a:ext uri="{FF2B5EF4-FFF2-40B4-BE49-F238E27FC236}">
-                <a16:creationId xmlns:a16="http://schemas.microsoft.com/office/drawing/2014/main" id="{FA8DD0A9-419E-4521-8636-3C4C76194255}"/>
+                <a16:creationId xmlns:a16="http://schemas.microsoft.com/office/drawing/2014/main" id="{8BE6E0D0-E681-42B8-8A1A-65A41ED9AA5B}"/>
               </a:ext>
             </a:extLst>
           </p:cNvPr>
@@ -16998,7 +17504,7 @@
     </p:spTree>
     <p:extLst>
       <p:ext uri="{BB962C8B-B14F-4D97-AF65-F5344CB8AC3E}">
-        <p14:creationId xmlns:p14="http://schemas.microsoft.com/office/powerpoint/2010/main" val="396931761"/>
+        <p14:creationId xmlns:p14="http://schemas.microsoft.com/office/powerpoint/2010/main" val="867938201"/>
       </p:ext>
     </p:extLst>
   </p:cSld>
@@ -17029,7 +17535,7 @@
           <p:cNvPr id="1" name="">
             <a:extLst xmlns:a="http://schemas.openxmlformats.org/drawingml/2006/main">
               <a:ext uri="{FF2B5EF4-FFF2-40B4-BE49-F238E27FC236}">
-                <a16:creationId xmlns:a16="http://schemas.microsoft.com/office/drawing/2014/main" id="{299DEC48-D6EE-4AC5-9ECC-FDEB1EFE14DD}"/>
+                <a16:creationId xmlns:a16="http://schemas.microsoft.com/office/drawing/2014/main" id="{A60F30D7-275A-4BFB-8581-AE9BF9DDA39F}"/>
               </a:ext>
             </a:extLst>
           </p:cNvPr>
@@ -17064,7 +17570,7 @@
           <p:nvPr/>
         </p:nvPicPr>
         <p:blipFill>
-          <a:blip xmlns:r="http://schemas.openxmlformats.org/officeDocument/2006/relationships" xmlns:a="http://schemas.openxmlformats.org/drawingml/2006/main" r:embed="Ree190270a3c54207"/>
+          <a:blip xmlns:r="http://schemas.openxmlformats.org/officeDocument/2006/relationships" xmlns:a="http://schemas.openxmlformats.org/drawingml/2006/main" r:embed="R2aee60d7d7c849c6"/>
           <a:stretch xmlns:a="http://schemas.openxmlformats.org/drawingml/2006/main"/>
         </p:blipFill>
         <p:spPr>
@@ -17082,7 +17588,7 @@
           <p:cNvPr id="3" name="">
             <a:extLst xmlns:a="http://schemas.openxmlformats.org/drawingml/2006/main">
               <a:ext uri="{FF2B5EF4-FFF2-40B4-BE49-F238E27FC236}">
-                <a16:creationId xmlns:a16="http://schemas.microsoft.com/office/drawing/2014/main" id="{FA4991B6-0F5A-45E6-A600-FD1C42ADC069}"/>
+                <a16:creationId xmlns:a16="http://schemas.microsoft.com/office/drawing/2014/main" id="{934B9CE3-2100-484C-BF8D-F6D902FC0606}"/>
               </a:ext>
             </a:extLst>
           </p:cNvPr>
@@ -17132,7 +17638,7 @@
           <p:cNvPr id="4" name="">
             <a:extLst xmlns:a="http://schemas.openxmlformats.org/drawingml/2006/main">
               <a:ext uri="{FF2B5EF4-FFF2-40B4-BE49-F238E27FC236}">
-                <a16:creationId xmlns:a16="http://schemas.microsoft.com/office/drawing/2014/main" id="{5F12ED18-A009-4918-A874-FD232E54DF71}"/>
+                <a16:creationId xmlns:a16="http://schemas.microsoft.com/office/drawing/2014/main" id="{116ECF35-1989-46DB-9D83-830F217A9962}"/>
               </a:ext>
             </a:extLst>
           </p:cNvPr>
@@ -17165,7 +17671,7 @@
           <p:cNvPr id="5" name="">
             <a:extLst xmlns:a="http://schemas.openxmlformats.org/drawingml/2006/main">
               <a:ext uri="{FF2B5EF4-FFF2-40B4-BE49-F238E27FC236}">
-                <a16:creationId xmlns:a16="http://schemas.microsoft.com/office/drawing/2014/main" id="{9FB5A36A-7CBE-4297-B86A-73CC24B76C3E}"/>
+                <a16:creationId xmlns:a16="http://schemas.microsoft.com/office/drawing/2014/main" id="{CD3C2CD1-0D53-4204-8845-B770D11EF6E3}"/>
               </a:ext>
             </a:extLst>
           </p:cNvPr>
@@ -17196,7 +17702,7 @@
           <p:cNvPr id="6" name="">
             <a:extLst xmlns:a="http://schemas.openxmlformats.org/drawingml/2006/main">
               <a:ext uri="{FF2B5EF4-FFF2-40B4-BE49-F238E27FC236}">
-                <a16:creationId xmlns:a16="http://schemas.microsoft.com/office/drawing/2014/main" id="{A370485E-FE86-4A28-9E74-D1BC37E4CC85}"/>
+                <a16:creationId xmlns:a16="http://schemas.microsoft.com/office/drawing/2014/main" id="{CDD821D9-6A25-4A64-A027-D4DCA612E7F5}"/>
               </a:ext>
             </a:extLst>
           </p:cNvPr>
@@ -17246,7 +17752,7 @@
           <p:cNvPr id="7" name="">
             <a:extLst xmlns:a="http://schemas.openxmlformats.org/drawingml/2006/main">
               <a:ext uri="{FF2B5EF4-FFF2-40B4-BE49-F238E27FC236}">
-                <a16:creationId xmlns:a16="http://schemas.microsoft.com/office/drawing/2014/main" id="{11A5A785-603D-4FCC-B273-371001432A8C}"/>
+                <a16:creationId xmlns:a16="http://schemas.microsoft.com/office/drawing/2014/main" id="{4CDA754A-7B56-4E2F-99A2-77BEF236284E}"/>
               </a:ext>
             </a:extLst>
           </p:cNvPr>
@@ -17296,7 +17802,7 @@
           <p:cNvPr id="8" name="">
             <a:extLst xmlns:a="http://schemas.openxmlformats.org/drawingml/2006/main">
               <a:ext uri="{FF2B5EF4-FFF2-40B4-BE49-F238E27FC236}">
-                <a16:creationId xmlns:a16="http://schemas.microsoft.com/office/drawing/2014/main" id="{82BFDE67-8722-450E-B18B-A9DF397566A2}"/>
+                <a16:creationId xmlns:a16="http://schemas.microsoft.com/office/drawing/2014/main" id="{A158DC3C-D32D-4C83-AE11-9D2CEA6DA04F}"/>
               </a:ext>
             </a:extLst>
           </p:cNvPr>
@@ -17331,7 +17837,7 @@
           <p:cNvPr id="9" name="">
             <a:extLst xmlns:a="http://schemas.openxmlformats.org/drawingml/2006/main">
               <a:ext uri="{FF2B5EF4-FFF2-40B4-BE49-F238E27FC236}">
-                <a16:creationId xmlns:a16="http://schemas.microsoft.com/office/drawing/2014/main" id="{64A2B7CC-EC07-4A19-9646-3CCF51549C16}"/>
+                <a16:creationId xmlns:a16="http://schemas.microsoft.com/office/drawing/2014/main" id="{DBE5F132-26F1-4695-96FA-9D39DF033D36}"/>
               </a:ext>
             </a:extLst>
           </p:cNvPr>
@@ -17364,7 +17870,7 @@
           <p:cNvPr id="10" name="">
             <a:extLst xmlns:a="http://schemas.openxmlformats.org/drawingml/2006/main">
               <a:ext uri="{FF2B5EF4-FFF2-40B4-BE49-F238E27FC236}">
-                <a16:creationId xmlns:a16="http://schemas.microsoft.com/office/drawing/2014/main" id="{B946DC38-0CC0-48DF-A580-4EEA33892692}"/>
+                <a16:creationId xmlns:a16="http://schemas.microsoft.com/office/drawing/2014/main" id="{364FB3A1-7049-4EC7-87F8-BA9A005399B8}"/>
               </a:ext>
             </a:extLst>
           </p:cNvPr>
@@ -17414,7 +17920,7 @@
           <p:cNvPr id="11" name="">
             <a:extLst xmlns:a="http://schemas.openxmlformats.org/drawingml/2006/main">
               <a:ext uri="{FF2B5EF4-FFF2-40B4-BE49-F238E27FC236}">
-                <a16:creationId xmlns:a16="http://schemas.microsoft.com/office/drawing/2014/main" id="{F5BCAD3C-4D41-46BB-B8DA-48FF68DE6103}"/>
+                <a16:creationId xmlns:a16="http://schemas.microsoft.com/office/drawing/2014/main" id="{49A2422D-6291-4648-A7BB-CCBD059E16C3}"/>
               </a:ext>
             </a:extLst>
           </p:cNvPr>
@@ -17464,7 +17970,7 @@
           <p:cNvPr id="12" name="">
             <a:extLst xmlns:a="http://schemas.openxmlformats.org/drawingml/2006/main">
               <a:ext uri="{FF2B5EF4-FFF2-40B4-BE49-F238E27FC236}">
-                <a16:creationId xmlns:a16="http://schemas.microsoft.com/office/drawing/2014/main" id="{6DFB8754-95E4-4B18-806D-BC7DFBF9FEAB}"/>
+                <a16:creationId xmlns:a16="http://schemas.microsoft.com/office/drawing/2014/main" id="{DAE43604-CBFD-44BA-A378-0253D2A69619}"/>
               </a:ext>
             </a:extLst>
           </p:cNvPr>
@@ -17514,7 +18020,7 @@
           <p:cNvPr id="13" name="">
             <a:extLst xmlns:a="http://schemas.openxmlformats.org/drawingml/2006/main">
               <a:ext uri="{FF2B5EF4-FFF2-40B4-BE49-F238E27FC236}">
-                <a16:creationId xmlns:a16="http://schemas.microsoft.com/office/drawing/2014/main" id="{77272FA5-6742-4C1E-9EDE-2A130511D67D}"/>
+                <a16:creationId xmlns:a16="http://schemas.microsoft.com/office/drawing/2014/main" id="{0C71E88B-14E3-42F0-B2EE-0792BC645CF8}"/>
               </a:ext>
             </a:extLst>
           </p:cNvPr>
@@ -17564,7 +18070,7 @@
           <p:cNvPr id="14" name="">
             <a:extLst xmlns:a="http://schemas.openxmlformats.org/drawingml/2006/main">
               <a:ext uri="{FF2B5EF4-FFF2-40B4-BE49-F238E27FC236}">
-                <a16:creationId xmlns:a16="http://schemas.microsoft.com/office/drawing/2014/main" id="{82055EB2-D21E-4DA2-9040-0F516A104BA9}"/>
+                <a16:creationId xmlns:a16="http://schemas.microsoft.com/office/drawing/2014/main" id="{C666825E-B554-4D70-91AF-310D6D474ADB}"/>
               </a:ext>
             </a:extLst>
           </p:cNvPr>
@@ -17614,7 +18120,7 @@
           <p:cNvPr id="15" name="">
             <a:extLst xmlns:a="http://schemas.openxmlformats.org/drawingml/2006/main">
               <a:ext uri="{FF2B5EF4-FFF2-40B4-BE49-F238E27FC236}">
-                <a16:creationId xmlns:a16="http://schemas.microsoft.com/office/drawing/2014/main" id="{36AABE41-876C-42D2-9F05-7AE0912E2DF3}"/>
+                <a16:creationId xmlns:a16="http://schemas.microsoft.com/office/drawing/2014/main" id="{E7A61AE5-0ECC-4D52-B845-41BEFD02A4CE}"/>
               </a:ext>
             </a:extLst>
           </p:cNvPr>
@@ -17664,7 +18170,7 @@
           <p:cNvPr id="16" name="">
             <a:extLst xmlns:a="http://schemas.openxmlformats.org/drawingml/2006/main">
               <a:ext uri="{FF2B5EF4-FFF2-40B4-BE49-F238E27FC236}">
-                <a16:creationId xmlns:a16="http://schemas.microsoft.com/office/drawing/2014/main" id="{2480F43D-79C9-4497-8EC0-78A3304571B3}"/>
+                <a16:creationId xmlns:a16="http://schemas.microsoft.com/office/drawing/2014/main" id="{13830D33-6BAB-47C4-8A24-7AEA38DDA23A}"/>
               </a:ext>
             </a:extLst>
           </p:cNvPr>
@@ -17714,7 +18220,7 @@
           <p:cNvPr id="17" name="">
             <a:extLst xmlns:a="http://schemas.openxmlformats.org/drawingml/2006/main">
               <a:ext uri="{FF2B5EF4-FFF2-40B4-BE49-F238E27FC236}">
-                <a16:creationId xmlns:a16="http://schemas.microsoft.com/office/drawing/2014/main" id="{B8EEA417-8D61-4BE7-B215-F2DCD9D60AFD}"/>
+                <a16:creationId xmlns:a16="http://schemas.microsoft.com/office/drawing/2014/main" id="{A5E4266D-F562-4EB9-984E-FCD16BD60C31}"/>
               </a:ext>
             </a:extLst>
           </p:cNvPr>
@@ -17745,7 +18251,7 @@
           <p:cNvPr id="18" name="">
             <a:extLst xmlns:a="http://schemas.openxmlformats.org/drawingml/2006/main">
               <a:ext uri="{FF2B5EF4-FFF2-40B4-BE49-F238E27FC236}">
-                <a16:creationId xmlns:a16="http://schemas.microsoft.com/office/drawing/2014/main" id="{591E95F2-3DF1-43E9-8630-E87286A0B50F}"/>
+                <a16:creationId xmlns:a16="http://schemas.microsoft.com/office/drawing/2014/main" id="{75BEB02F-8692-4491-AB74-C96B4C43650D}"/>
               </a:ext>
             </a:extLst>
           </p:cNvPr>
@@ -17795,7 +18301,7 @@
           <p:cNvPr id="19" name="">
             <a:extLst xmlns:a="http://schemas.openxmlformats.org/drawingml/2006/main">
               <a:ext uri="{FF2B5EF4-FFF2-40B4-BE49-F238E27FC236}">
-                <a16:creationId xmlns:a16="http://schemas.microsoft.com/office/drawing/2014/main" id="{7EAEFE46-1735-437B-889E-D0274DA8FBDA}"/>
+                <a16:creationId xmlns:a16="http://schemas.microsoft.com/office/drawing/2014/main" id="{15E58970-4897-4EE1-89EE-4329D6AC7701}"/>
               </a:ext>
             </a:extLst>
           </p:cNvPr>
@@ -17845,7 +18351,7 @@
           <p:cNvPr id="20" name="">
             <a:extLst xmlns:a="http://schemas.openxmlformats.org/drawingml/2006/main">
               <a:ext uri="{FF2B5EF4-FFF2-40B4-BE49-F238E27FC236}">
-                <a16:creationId xmlns:a16="http://schemas.microsoft.com/office/drawing/2014/main" id="{C2CA9037-2C89-4912-B9BC-A67035A79352}"/>
+                <a16:creationId xmlns:a16="http://schemas.microsoft.com/office/drawing/2014/main" id="{434FA2C8-0E63-4346-B343-EC35A822D0E5}"/>
               </a:ext>
             </a:extLst>
           </p:cNvPr>
@@ -17895,7 +18401,7 @@
           <p:cNvPr id="21" name="">
             <a:extLst xmlns:a="http://schemas.openxmlformats.org/drawingml/2006/main">
               <a:ext uri="{FF2B5EF4-FFF2-40B4-BE49-F238E27FC236}">
-                <a16:creationId xmlns:a16="http://schemas.microsoft.com/office/drawing/2014/main" id="{911A7BC7-6000-4E0C-9D98-FD15DE44BDF7}"/>
+                <a16:creationId xmlns:a16="http://schemas.microsoft.com/office/drawing/2014/main" id="{FF069998-4EFE-4094-AE7D-B78A038E88FB}"/>
               </a:ext>
             </a:extLst>
           </p:cNvPr>
@@ -17945,7 +18451,7 @@
           <p:cNvPr id="22" name="">
             <a:extLst xmlns:a="http://schemas.openxmlformats.org/drawingml/2006/main">
               <a:ext uri="{FF2B5EF4-FFF2-40B4-BE49-F238E27FC236}">
-                <a16:creationId xmlns:a16="http://schemas.microsoft.com/office/drawing/2014/main" id="{F4936B83-833E-4C54-9279-C4D455276AAB}"/>
+                <a16:creationId xmlns:a16="http://schemas.microsoft.com/office/drawing/2014/main" id="{FBF4E7C1-8525-4451-8F13-2019204B51F0}"/>
               </a:ext>
             </a:extLst>
           </p:cNvPr>
@@ -17995,7 +18501,7 @@
           <p:cNvPr id="23" name="">
             <a:extLst xmlns:a="http://schemas.openxmlformats.org/drawingml/2006/main">
               <a:ext uri="{FF2B5EF4-FFF2-40B4-BE49-F238E27FC236}">
-                <a16:creationId xmlns:a16="http://schemas.microsoft.com/office/drawing/2014/main" id="{E16F17B9-2972-450F-81CA-CACA1EAF5DF2}"/>
+                <a16:creationId xmlns:a16="http://schemas.microsoft.com/office/drawing/2014/main" id="{EE554855-6794-428B-A37F-FBF53F20B09B}"/>
               </a:ext>
             </a:extLst>
           </p:cNvPr>
@@ -18045,7 +18551,7 @@
           <p:cNvPr id="24" name="">
             <a:extLst xmlns:a="http://schemas.openxmlformats.org/drawingml/2006/main">
               <a:ext uri="{FF2B5EF4-FFF2-40B4-BE49-F238E27FC236}">
-                <a16:creationId xmlns:a16="http://schemas.microsoft.com/office/drawing/2014/main" id="{73C01E59-5F20-4BCE-8E43-E2B9A444FF2B}"/>
+                <a16:creationId xmlns:a16="http://schemas.microsoft.com/office/drawing/2014/main" id="{1F7F1D33-BA16-43B4-AD81-E1633AD16D02}"/>
               </a:ext>
             </a:extLst>
           </p:cNvPr>
@@ -18080,7 +18586,7 @@
           <p:cNvPr id="25" name="">
             <a:extLst xmlns:a="http://schemas.openxmlformats.org/drawingml/2006/main">
               <a:ext uri="{FF2B5EF4-FFF2-40B4-BE49-F238E27FC236}">
-                <a16:creationId xmlns:a16="http://schemas.microsoft.com/office/drawing/2014/main" id="{59805983-3F93-4992-8CA4-161D88CCD691}"/>
+                <a16:creationId xmlns:a16="http://schemas.microsoft.com/office/drawing/2014/main" id="{876132AB-A4C4-4CCC-ABB8-82C084FE897C}"/>
               </a:ext>
             </a:extLst>
           </p:cNvPr>
@@ -18113,7 +18619,7 @@
           <p:cNvPr id="26" name="">
             <a:extLst xmlns:a="http://schemas.openxmlformats.org/drawingml/2006/main">
               <a:ext uri="{FF2B5EF4-FFF2-40B4-BE49-F238E27FC236}">
-                <a16:creationId xmlns:a16="http://schemas.microsoft.com/office/drawing/2014/main" id="{59396C19-CA87-4B3B-9A0F-9099B937D195}"/>
+                <a16:creationId xmlns:a16="http://schemas.microsoft.com/office/drawing/2014/main" id="{0B42DDE9-AA71-4557-82C0-9A97B9554C29}"/>
               </a:ext>
             </a:extLst>
           </p:cNvPr>
@@ -18163,7 +18669,7 @@
           <p:cNvPr id="27" name="">
             <a:extLst xmlns:a="http://schemas.openxmlformats.org/drawingml/2006/main">
               <a:ext uri="{FF2B5EF4-FFF2-40B4-BE49-F238E27FC236}">
-                <a16:creationId xmlns:a16="http://schemas.microsoft.com/office/drawing/2014/main" id="{88EE367D-6164-4258-9751-39BCE33BE100}"/>
+                <a16:creationId xmlns:a16="http://schemas.microsoft.com/office/drawing/2014/main" id="{8C134051-150D-4F65-8C41-7E68D01063C4}"/>
               </a:ext>
             </a:extLst>
           </p:cNvPr>
@@ -18213,7 +18719,7 @@
           <p:cNvPr id="28" name="">
             <a:extLst xmlns:a="http://schemas.openxmlformats.org/drawingml/2006/main">
               <a:ext uri="{FF2B5EF4-FFF2-40B4-BE49-F238E27FC236}">
-                <a16:creationId xmlns:a16="http://schemas.microsoft.com/office/drawing/2014/main" id="{A56D8B4D-3F63-47A1-8DC3-6047262959B2}"/>
+                <a16:creationId xmlns:a16="http://schemas.microsoft.com/office/drawing/2014/main" id="{0A79ED37-79B5-4602-A0E8-0A06DE285F5D}"/>
               </a:ext>
             </a:extLst>
           </p:cNvPr>
@@ -18263,7 +18769,7 @@
           <p:cNvPr id="29" name="">
             <a:extLst xmlns:a="http://schemas.openxmlformats.org/drawingml/2006/main">
               <a:ext uri="{FF2B5EF4-FFF2-40B4-BE49-F238E27FC236}">
-                <a16:creationId xmlns:a16="http://schemas.microsoft.com/office/drawing/2014/main" id="{F2E0DF85-CCA3-45FE-8DF9-B5E095E5E42F}"/>
+                <a16:creationId xmlns:a16="http://schemas.microsoft.com/office/drawing/2014/main" id="{A5957B4B-8249-49FC-81B5-95672B6ED38C}"/>
               </a:ext>
             </a:extLst>
           </p:cNvPr>
@@ -18313,7 +18819,7 @@
           <p:cNvPr id="30" name="">
             <a:extLst xmlns:a="http://schemas.openxmlformats.org/drawingml/2006/main">
               <a:ext uri="{FF2B5EF4-FFF2-40B4-BE49-F238E27FC236}">
-                <a16:creationId xmlns:a16="http://schemas.microsoft.com/office/drawing/2014/main" id="{503C480C-B983-47E3-BBC3-40C2DB1947AC}"/>
+                <a16:creationId xmlns:a16="http://schemas.microsoft.com/office/drawing/2014/main" id="{93CEC28D-538A-4523-97AF-B05BFF990C1A}"/>
               </a:ext>
             </a:extLst>
           </p:cNvPr>
@@ -18363,7 +18869,7 @@
           <p:cNvPr id="31" name="">
             <a:extLst xmlns:a="http://schemas.openxmlformats.org/drawingml/2006/main">
               <a:ext uri="{FF2B5EF4-FFF2-40B4-BE49-F238E27FC236}">
-                <a16:creationId xmlns:a16="http://schemas.microsoft.com/office/drawing/2014/main" id="{51BFA739-36D5-4D74-A2F1-6C3225F627DC}"/>
+                <a16:creationId xmlns:a16="http://schemas.microsoft.com/office/drawing/2014/main" id="{E37D60D4-E231-4952-99D9-68F06A89D86B}"/>
               </a:ext>
             </a:extLst>
           </p:cNvPr>
@@ -18413,7 +18919,7 @@
           <p:cNvPr id="32" name="">
             <a:extLst xmlns:a="http://schemas.openxmlformats.org/drawingml/2006/main">
               <a:ext uri="{FF2B5EF4-FFF2-40B4-BE49-F238E27FC236}">
-                <a16:creationId xmlns:a16="http://schemas.microsoft.com/office/drawing/2014/main" id="{5FC6AE76-FDC5-49B1-82DB-2AD51C27743A}"/>
+                <a16:creationId xmlns:a16="http://schemas.microsoft.com/office/drawing/2014/main" id="{028A8134-2328-4036-990A-2E3E33422479}"/>
               </a:ext>
             </a:extLst>
           </p:cNvPr>
@@ -18463,7 +18969,7 @@
           <p:cNvPr id="33" name="">
             <a:extLst xmlns:a="http://schemas.openxmlformats.org/drawingml/2006/main">
               <a:ext uri="{FF2B5EF4-FFF2-40B4-BE49-F238E27FC236}">
-                <a16:creationId xmlns:a16="http://schemas.microsoft.com/office/drawing/2014/main" id="{5DB7232F-9CE7-47BF-A85A-5E0709E0EEEB}"/>
+                <a16:creationId xmlns:a16="http://schemas.microsoft.com/office/drawing/2014/main" id="{861E6B27-436B-431B-B266-D95E7217A98E}"/>
               </a:ext>
             </a:extLst>
           </p:cNvPr>
@@ -18494,7 +19000,7 @@
           <p:cNvPr id="34" name="">
             <a:extLst xmlns:a="http://schemas.openxmlformats.org/drawingml/2006/main">
               <a:ext uri="{FF2B5EF4-FFF2-40B4-BE49-F238E27FC236}">
-                <a16:creationId xmlns:a16="http://schemas.microsoft.com/office/drawing/2014/main" id="{1643B384-EE66-4ECE-8786-D8A503ECCD8F}"/>
+                <a16:creationId xmlns:a16="http://schemas.microsoft.com/office/drawing/2014/main" id="{CFC712F9-EDB6-4CD1-BA35-57AE2A91F7FD}"/>
               </a:ext>
             </a:extLst>
           </p:cNvPr>
@@ -18544,7 +19050,7 @@
           <p:cNvPr id="35" name="">
             <a:extLst xmlns:a="http://schemas.openxmlformats.org/drawingml/2006/main">
               <a:ext uri="{FF2B5EF4-FFF2-40B4-BE49-F238E27FC236}">
-                <a16:creationId xmlns:a16="http://schemas.microsoft.com/office/drawing/2014/main" id="{C393399F-42DA-4526-B3E1-B188A9B78350}"/>
+                <a16:creationId xmlns:a16="http://schemas.microsoft.com/office/drawing/2014/main" id="{953B7039-D5D0-48C8-A23C-4EEF4498E03F}"/>
               </a:ext>
             </a:extLst>
           </p:cNvPr>
@@ -18594,7 +19100,7 @@
           <p:cNvPr id="36" name="">
             <a:extLst xmlns:a="http://schemas.openxmlformats.org/drawingml/2006/main">
               <a:ext uri="{FF2B5EF4-FFF2-40B4-BE49-F238E27FC236}">
-                <a16:creationId xmlns:a16="http://schemas.microsoft.com/office/drawing/2014/main" id="{DF8BDE0F-83FC-4761-9EA4-CF8E4F96448B}"/>
+                <a16:creationId xmlns:a16="http://schemas.microsoft.com/office/drawing/2014/main" id="{9F4610A0-9815-420B-89C4-3143F6C228EF}"/>
               </a:ext>
             </a:extLst>
           </p:cNvPr>
@@ -18644,7 +19150,7 @@
           <p:cNvPr id="37" name="">
             <a:extLst xmlns:a="http://schemas.openxmlformats.org/drawingml/2006/main">
               <a:ext uri="{FF2B5EF4-FFF2-40B4-BE49-F238E27FC236}">
-                <a16:creationId xmlns:a16="http://schemas.microsoft.com/office/drawing/2014/main" id="{763C71A8-B71A-4829-B953-89DCC77A5043}"/>
+                <a16:creationId xmlns:a16="http://schemas.microsoft.com/office/drawing/2014/main" id="{9A22E250-9417-4987-A8F7-6EDB988A6B23}"/>
               </a:ext>
             </a:extLst>
           </p:cNvPr>
@@ -18694,7 +19200,7 @@
           <p:cNvPr id="38" name="">
             <a:extLst xmlns:a="http://schemas.openxmlformats.org/drawingml/2006/main">
               <a:ext uri="{FF2B5EF4-FFF2-40B4-BE49-F238E27FC236}">
-                <a16:creationId xmlns:a16="http://schemas.microsoft.com/office/drawing/2014/main" id="{3061BCC7-0F8E-4C2D-AAFE-54E44666DB4E}"/>
+                <a16:creationId xmlns:a16="http://schemas.microsoft.com/office/drawing/2014/main" id="{CAAAECB6-2DEB-437C-9F8F-D9589E17763E}"/>
               </a:ext>
             </a:extLst>
           </p:cNvPr>
@@ -18744,7 +19250,7 @@
           <p:cNvPr id="39" name="">
             <a:extLst xmlns:a="http://schemas.openxmlformats.org/drawingml/2006/main">
               <a:ext uri="{FF2B5EF4-FFF2-40B4-BE49-F238E27FC236}">
-                <a16:creationId xmlns:a16="http://schemas.microsoft.com/office/drawing/2014/main" id="{13F8D418-7ED9-433A-A405-53120B1CDF4A}"/>
+                <a16:creationId xmlns:a16="http://schemas.microsoft.com/office/drawing/2014/main" id="{5D89A2FF-DBF3-4F28-9390-98C71BF119FC}"/>
               </a:ext>
             </a:extLst>
           </p:cNvPr>
@@ -18792,7 +19298,7 @@
     </p:spTree>
     <p:extLst>
       <p:ext uri="{BB962C8B-B14F-4D97-AF65-F5344CB8AC3E}">
-        <p14:creationId xmlns:p14="http://schemas.microsoft.com/office/powerpoint/2010/main" val="786600195"/>
+        <p14:creationId xmlns:p14="http://schemas.microsoft.com/office/powerpoint/2010/main" val="1843904389"/>
       </p:ext>
     </p:extLst>
   </p:cSld>
@@ -18823,7 +19329,7 @@
           <p:cNvPr id="1" name="">
             <a:extLst xmlns:a="http://schemas.openxmlformats.org/drawingml/2006/main">
               <a:ext uri="{FF2B5EF4-FFF2-40B4-BE49-F238E27FC236}">
-                <a16:creationId xmlns:a16="http://schemas.microsoft.com/office/drawing/2014/main" id="{0C807019-7557-421B-AE91-A1C019E923CC}"/>
+                <a16:creationId xmlns:a16="http://schemas.microsoft.com/office/drawing/2014/main" id="{A915743E-906B-416E-804E-3C6945D86881}"/>
               </a:ext>
             </a:extLst>
           </p:cNvPr>
@@ -18858,7 +19364,7 @@
           <p:nvPr/>
         </p:nvPicPr>
         <p:blipFill>
-          <a:blip xmlns:r="http://schemas.openxmlformats.org/officeDocument/2006/relationships" xmlns:a="http://schemas.openxmlformats.org/drawingml/2006/main" r:embed="R27c0c3cc5e1f4e62"/>
+          <a:blip xmlns:r="http://schemas.openxmlformats.org/officeDocument/2006/relationships" xmlns:a="http://schemas.openxmlformats.org/drawingml/2006/main" r:embed="R5574a64c3b634f6e"/>
           <a:stretch xmlns:a="http://schemas.openxmlformats.org/drawingml/2006/main"/>
         </p:blipFill>
         <p:spPr>
@@ -18876,7 +19382,7 @@
           <p:cNvPr id="3" name="">
             <a:extLst xmlns:a="http://schemas.openxmlformats.org/drawingml/2006/main">
               <a:ext uri="{FF2B5EF4-FFF2-40B4-BE49-F238E27FC236}">
-                <a16:creationId xmlns:a16="http://schemas.microsoft.com/office/drawing/2014/main" id="{FF741A29-FCBC-488E-8CE4-5E2E1670EC86}"/>
+                <a16:creationId xmlns:a16="http://schemas.microsoft.com/office/drawing/2014/main" id="{3A99BE7C-69E4-4A0D-A9B5-D983BFAAA378}"/>
               </a:ext>
             </a:extLst>
           </p:cNvPr>
@@ -18926,7 +19432,7 @@
           <p:cNvPr id="4" name="">
             <a:extLst xmlns:a="http://schemas.openxmlformats.org/drawingml/2006/main">
               <a:ext uri="{FF2B5EF4-FFF2-40B4-BE49-F238E27FC236}">
-                <a16:creationId xmlns:a16="http://schemas.microsoft.com/office/drawing/2014/main" id="{C77C5DBC-F19E-4255-AF45-EC63A33AEA04}"/>
+                <a16:creationId xmlns:a16="http://schemas.microsoft.com/office/drawing/2014/main" id="{51F10CE2-192D-4193-A979-4A614C846BAB}"/>
               </a:ext>
             </a:extLst>
           </p:cNvPr>
@@ -18959,7 +19465,7 @@
           <p:cNvPr id="5" name="">
             <a:extLst xmlns:a="http://schemas.openxmlformats.org/drawingml/2006/main">
               <a:ext uri="{FF2B5EF4-FFF2-40B4-BE49-F238E27FC236}">
-                <a16:creationId xmlns:a16="http://schemas.microsoft.com/office/drawing/2014/main" id="{6F66776A-479E-47C9-A497-7411137FA637}"/>
+                <a16:creationId xmlns:a16="http://schemas.microsoft.com/office/drawing/2014/main" id="{54D0F19B-8820-4955-B370-8660BCACDAED}"/>
               </a:ext>
             </a:extLst>
           </p:cNvPr>
@@ -18990,7 +19496,7 @@
           <p:cNvPr id="6" name="">
             <a:extLst xmlns:a="http://schemas.openxmlformats.org/drawingml/2006/main">
               <a:ext uri="{FF2B5EF4-FFF2-40B4-BE49-F238E27FC236}">
-                <a16:creationId xmlns:a16="http://schemas.microsoft.com/office/drawing/2014/main" id="{D5090230-61EB-4E1B-B08F-0E2D4F777F48}"/>
+                <a16:creationId xmlns:a16="http://schemas.microsoft.com/office/drawing/2014/main" id="{53FA3634-5825-492E-8595-C477E6DD8C61}"/>
               </a:ext>
             </a:extLst>
           </p:cNvPr>
@@ -19040,7 +19546,7 @@
           <p:cNvPr id="7" name="">
             <a:extLst xmlns:a="http://schemas.openxmlformats.org/drawingml/2006/main">
               <a:ext uri="{FF2B5EF4-FFF2-40B4-BE49-F238E27FC236}">
-                <a16:creationId xmlns:a16="http://schemas.microsoft.com/office/drawing/2014/main" id="{B8E3CF6E-A3F4-4E9B-BFE4-63B3A6B1ADA2}"/>
+                <a16:creationId xmlns:a16="http://schemas.microsoft.com/office/drawing/2014/main" id="{6B25FD3F-8186-427C-8537-BF85F4CEBB93}"/>
               </a:ext>
             </a:extLst>
           </p:cNvPr>
@@ -19090,7 +19596,7 @@
           <p:cNvPr id="8" name="">
             <a:extLst xmlns:a="http://schemas.openxmlformats.org/drawingml/2006/main">
               <a:ext uri="{FF2B5EF4-FFF2-40B4-BE49-F238E27FC236}">
-                <a16:creationId xmlns:a16="http://schemas.microsoft.com/office/drawing/2014/main" id="{88107149-BF28-4F13-B521-8B7C15477E48}"/>
+                <a16:creationId xmlns:a16="http://schemas.microsoft.com/office/drawing/2014/main" id="{A7FA351A-6B86-4DBA-8B49-A99A31264599}"/>
               </a:ext>
             </a:extLst>
           </p:cNvPr>
@@ -19125,7 +19631,7 @@
           <p:cNvPr id="9" name="">
             <a:extLst xmlns:a="http://schemas.openxmlformats.org/drawingml/2006/main">
               <a:ext uri="{FF2B5EF4-FFF2-40B4-BE49-F238E27FC236}">
-                <a16:creationId xmlns:a16="http://schemas.microsoft.com/office/drawing/2014/main" id="{DFCE3ECB-78FE-4FD4-82F2-8C571D2614B2}"/>
+                <a16:creationId xmlns:a16="http://schemas.microsoft.com/office/drawing/2014/main" id="{09AB9D09-0BAF-4F1A-8C30-486FE7A574F0}"/>
               </a:ext>
             </a:extLst>
           </p:cNvPr>
@@ -19158,7 +19664,7 @@
           <p:cNvPr id="10" name="">
             <a:extLst xmlns:a="http://schemas.openxmlformats.org/drawingml/2006/main">
               <a:ext uri="{FF2B5EF4-FFF2-40B4-BE49-F238E27FC236}">
-                <a16:creationId xmlns:a16="http://schemas.microsoft.com/office/drawing/2014/main" id="{E31732B2-AA4A-4467-9C72-19DD0318E0C2}"/>
+                <a16:creationId xmlns:a16="http://schemas.microsoft.com/office/drawing/2014/main" id="{B569FDDE-0777-41C7-959A-2681218BDAE2}"/>
               </a:ext>
             </a:extLst>
           </p:cNvPr>
@@ -19208,7 +19714,7 @@
           <p:cNvPr id="11" name="">
             <a:extLst xmlns:a="http://schemas.openxmlformats.org/drawingml/2006/main">
               <a:ext uri="{FF2B5EF4-FFF2-40B4-BE49-F238E27FC236}">
-                <a16:creationId xmlns:a16="http://schemas.microsoft.com/office/drawing/2014/main" id="{9EC6F545-CBF1-4904-98AF-D7BFE556D09B}"/>
+                <a16:creationId xmlns:a16="http://schemas.microsoft.com/office/drawing/2014/main" id="{E63E16C4-14B8-4FA4-A109-47B84F488D96}"/>
               </a:ext>
             </a:extLst>
           </p:cNvPr>
@@ -19258,7 +19764,7 @@
           <p:cNvPr id="12" name="">
             <a:extLst xmlns:a="http://schemas.openxmlformats.org/drawingml/2006/main">
               <a:ext uri="{FF2B5EF4-FFF2-40B4-BE49-F238E27FC236}">
-                <a16:creationId xmlns:a16="http://schemas.microsoft.com/office/drawing/2014/main" id="{29E4114F-8532-4222-A7DE-DB9CF7161539}"/>
+                <a16:creationId xmlns:a16="http://schemas.microsoft.com/office/drawing/2014/main" id="{3355B676-8DE0-465A-A71C-A793A6E164D3}"/>
               </a:ext>
             </a:extLst>
           </p:cNvPr>
@@ -19308,7 +19814,7 @@
           <p:cNvPr id="13" name="">
             <a:extLst xmlns:a="http://schemas.openxmlformats.org/drawingml/2006/main">
               <a:ext uri="{FF2B5EF4-FFF2-40B4-BE49-F238E27FC236}">
-                <a16:creationId xmlns:a16="http://schemas.microsoft.com/office/drawing/2014/main" id="{E28D12E7-1D15-4588-8DE8-BE17275839E6}"/>
+                <a16:creationId xmlns:a16="http://schemas.microsoft.com/office/drawing/2014/main" id="{5416EF4D-D682-4C9A-8392-2B869CA8730B}"/>
               </a:ext>
             </a:extLst>
           </p:cNvPr>
@@ -19358,7 +19864,7 @@
           <p:cNvPr id="14" name="">
             <a:extLst xmlns:a="http://schemas.openxmlformats.org/drawingml/2006/main">
               <a:ext uri="{FF2B5EF4-FFF2-40B4-BE49-F238E27FC236}">
-                <a16:creationId xmlns:a16="http://schemas.microsoft.com/office/drawing/2014/main" id="{AA3E5692-F623-4CE5-9955-FF9DEC84BD47}"/>
+                <a16:creationId xmlns:a16="http://schemas.microsoft.com/office/drawing/2014/main" id="{EA709B45-2278-434D-99E1-369416E2395E}"/>
               </a:ext>
             </a:extLst>
           </p:cNvPr>
@@ -19408,7 +19914,7 @@
           <p:cNvPr id="15" name="">
             <a:extLst xmlns:a="http://schemas.openxmlformats.org/drawingml/2006/main">
               <a:ext uri="{FF2B5EF4-FFF2-40B4-BE49-F238E27FC236}">
-                <a16:creationId xmlns:a16="http://schemas.microsoft.com/office/drawing/2014/main" id="{777AC041-AD94-44D2-835E-B5604F195F95}"/>
+                <a16:creationId xmlns:a16="http://schemas.microsoft.com/office/drawing/2014/main" id="{802BAB41-244E-4095-BFCD-21736F8B8933}"/>
               </a:ext>
             </a:extLst>
           </p:cNvPr>
@@ -19458,7 +19964,7 @@
           <p:cNvPr id="16" name="">
             <a:extLst xmlns:a="http://schemas.openxmlformats.org/drawingml/2006/main">
               <a:ext uri="{FF2B5EF4-FFF2-40B4-BE49-F238E27FC236}">
-                <a16:creationId xmlns:a16="http://schemas.microsoft.com/office/drawing/2014/main" id="{AF1A2026-0303-48B3-96B0-4FEB707C01C5}"/>
+                <a16:creationId xmlns:a16="http://schemas.microsoft.com/office/drawing/2014/main" id="{AC4EB813-9220-4BE8-824C-243505253918}"/>
               </a:ext>
             </a:extLst>
           </p:cNvPr>
@@ -19508,7 +20014,7 @@
           <p:cNvPr id="17" name="">
             <a:extLst xmlns:a="http://schemas.openxmlformats.org/drawingml/2006/main">
               <a:ext uri="{FF2B5EF4-FFF2-40B4-BE49-F238E27FC236}">
-                <a16:creationId xmlns:a16="http://schemas.microsoft.com/office/drawing/2014/main" id="{8373387C-B74C-42AF-B495-75D1A081441A}"/>
+                <a16:creationId xmlns:a16="http://schemas.microsoft.com/office/drawing/2014/main" id="{60D727AA-E10A-4F50-AFC5-A4D210BD29DB}"/>
               </a:ext>
             </a:extLst>
           </p:cNvPr>
@@ -19539,7 +20045,7 @@
           <p:cNvPr id="18" name="">
             <a:extLst xmlns:a="http://schemas.openxmlformats.org/drawingml/2006/main">
               <a:ext uri="{FF2B5EF4-FFF2-40B4-BE49-F238E27FC236}">
-                <a16:creationId xmlns:a16="http://schemas.microsoft.com/office/drawing/2014/main" id="{4CF84B5F-29C5-4728-AE55-C97A1C55DDD7}"/>
+                <a16:creationId xmlns:a16="http://schemas.microsoft.com/office/drawing/2014/main" id="{8A153692-9EFF-4718-8D30-5098280E245A}"/>
               </a:ext>
             </a:extLst>
           </p:cNvPr>
@@ -19589,7 +20095,7 @@
           <p:cNvPr id="19" name="">
             <a:extLst xmlns:a="http://schemas.openxmlformats.org/drawingml/2006/main">
               <a:ext uri="{FF2B5EF4-FFF2-40B4-BE49-F238E27FC236}">
-                <a16:creationId xmlns:a16="http://schemas.microsoft.com/office/drawing/2014/main" id="{855737E9-F7ED-4FD5-8131-A350206CEA2C}"/>
+                <a16:creationId xmlns:a16="http://schemas.microsoft.com/office/drawing/2014/main" id="{48C20A27-A3A2-4AD8-8C2F-673BE214C86E}"/>
               </a:ext>
             </a:extLst>
           </p:cNvPr>
@@ -19639,7 +20145,7 @@
           <p:cNvPr id="20" name="">
             <a:extLst xmlns:a="http://schemas.openxmlformats.org/drawingml/2006/main">
               <a:ext uri="{FF2B5EF4-FFF2-40B4-BE49-F238E27FC236}">
-                <a16:creationId xmlns:a16="http://schemas.microsoft.com/office/drawing/2014/main" id="{BA9F8CB7-3503-48FD-8145-06DD7F44352E}"/>
+                <a16:creationId xmlns:a16="http://schemas.microsoft.com/office/drawing/2014/main" id="{7F1A4AF2-3A1F-4262-901E-FE139E5C39C6}"/>
               </a:ext>
             </a:extLst>
           </p:cNvPr>
@@ -19689,7 +20195,7 @@
           <p:cNvPr id="21" name="">
             <a:extLst xmlns:a="http://schemas.openxmlformats.org/drawingml/2006/main">
               <a:ext uri="{FF2B5EF4-FFF2-40B4-BE49-F238E27FC236}">
-                <a16:creationId xmlns:a16="http://schemas.microsoft.com/office/drawing/2014/main" id="{0D851788-D652-449D-899E-190BB94E8A26}"/>
+                <a16:creationId xmlns:a16="http://schemas.microsoft.com/office/drawing/2014/main" id="{8B0A5915-E4C7-474A-A419-7747AEBE81F1}"/>
               </a:ext>
             </a:extLst>
           </p:cNvPr>
@@ -19739,7 +20245,7 @@
           <p:cNvPr id="22" name="">
             <a:extLst xmlns:a="http://schemas.openxmlformats.org/drawingml/2006/main">
               <a:ext uri="{FF2B5EF4-FFF2-40B4-BE49-F238E27FC236}">
-                <a16:creationId xmlns:a16="http://schemas.microsoft.com/office/drawing/2014/main" id="{C212A5B8-9CA1-4A45-BEAB-3C8B3D24319E}"/>
+                <a16:creationId xmlns:a16="http://schemas.microsoft.com/office/drawing/2014/main" id="{29ECDE04-5683-42EC-87F6-AC26A87DAC0A}"/>
               </a:ext>
             </a:extLst>
           </p:cNvPr>
@@ -19789,7 +20295,7 @@
           <p:cNvPr id="23" name="">
             <a:extLst xmlns:a="http://schemas.openxmlformats.org/drawingml/2006/main">
               <a:ext uri="{FF2B5EF4-FFF2-40B4-BE49-F238E27FC236}">
-                <a16:creationId xmlns:a16="http://schemas.microsoft.com/office/drawing/2014/main" id="{083D5918-2413-4970-87C9-D102696D6B0C}"/>
+                <a16:creationId xmlns:a16="http://schemas.microsoft.com/office/drawing/2014/main" id="{C42AA57A-C2D2-4D38-9C32-74DEBDE80558}"/>
               </a:ext>
             </a:extLst>
           </p:cNvPr>
@@ -19839,7 +20345,7 @@
           <p:cNvPr id="24" name="">
             <a:extLst xmlns:a="http://schemas.openxmlformats.org/drawingml/2006/main">
               <a:ext uri="{FF2B5EF4-FFF2-40B4-BE49-F238E27FC236}">
-                <a16:creationId xmlns:a16="http://schemas.microsoft.com/office/drawing/2014/main" id="{9345C5E2-01AD-4D16-8A5F-78B3BEBF8F17}"/>
+                <a16:creationId xmlns:a16="http://schemas.microsoft.com/office/drawing/2014/main" id="{004FDEC4-94E3-4674-BF7E-863F1C6A71EB}"/>
               </a:ext>
             </a:extLst>
           </p:cNvPr>
@@ -19874,7 +20380,7 @@
           <p:cNvPr id="25" name="">
             <a:extLst xmlns:a="http://schemas.openxmlformats.org/drawingml/2006/main">
               <a:ext uri="{FF2B5EF4-FFF2-40B4-BE49-F238E27FC236}">
-                <a16:creationId xmlns:a16="http://schemas.microsoft.com/office/drawing/2014/main" id="{C8A041C3-3AFD-49EC-B57E-99C7E5736F4E}"/>
+                <a16:creationId xmlns:a16="http://schemas.microsoft.com/office/drawing/2014/main" id="{9613BFC5-1657-4E12-B6BE-797323A8FCA4}"/>
               </a:ext>
             </a:extLst>
           </p:cNvPr>
@@ -19907,7 +20413,7 @@
           <p:cNvPr id="26" name="">
             <a:extLst xmlns:a="http://schemas.openxmlformats.org/drawingml/2006/main">
               <a:ext uri="{FF2B5EF4-FFF2-40B4-BE49-F238E27FC236}">
-                <a16:creationId xmlns:a16="http://schemas.microsoft.com/office/drawing/2014/main" id="{AC5C2693-DE60-434B-B913-A02CBD57DD61}"/>
+                <a16:creationId xmlns:a16="http://schemas.microsoft.com/office/drawing/2014/main" id="{7CE9F818-04B1-498B-B615-2DDBAED7C198}"/>
               </a:ext>
             </a:extLst>
           </p:cNvPr>
@@ -19957,7 +20463,7 @@
           <p:cNvPr id="27" name="">
             <a:extLst xmlns:a="http://schemas.openxmlformats.org/drawingml/2006/main">
               <a:ext uri="{FF2B5EF4-FFF2-40B4-BE49-F238E27FC236}">
-                <a16:creationId xmlns:a16="http://schemas.microsoft.com/office/drawing/2014/main" id="{A79AB834-1B7A-476F-88C2-6E340EBF91BD}"/>
+                <a16:creationId xmlns:a16="http://schemas.microsoft.com/office/drawing/2014/main" id="{05F1544C-3BCA-4C8F-9D81-0AA40080F719}"/>
               </a:ext>
             </a:extLst>
           </p:cNvPr>
@@ -20007,7 +20513,7 @@
           <p:cNvPr id="28" name="">
             <a:extLst xmlns:a="http://schemas.openxmlformats.org/drawingml/2006/main">
               <a:ext uri="{FF2B5EF4-FFF2-40B4-BE49-F238E27FC236}">
-                <a16:creationId xmlns:a16="http://schemas.microsoft.com/office/drawing/2014/main" id="{B98C5461-9CD4-4E10-820D-F7CBB7C7E220}"/>
+                <a16:creationId xmlns:a16="http://schemas.microsoft.com/office/drawing/2014/main" id="{BD622D34-9C5E-4B09-A430-060BE5794A2F}"/>
               </a:ext>
             </a:extLst>
           </p:cNvPr>
@@ -20057,7 +20563,7 @@
           <p:cNvPr id="29" name="">
             <a:extLst xmlns:a="http://schemas.openxmlformats.org/drawingml/2006/main">
               <a:ext uri="{FF2B5EF4-FFF2-40B4-BE49-F238E27FC236}">
-                <a16:creationId xmlns:a16="http://schemas.microsoft.com/office/drawing/2014/main" id="{C5D3C147-A227-4FDE-8E21-2E2071CAABC3}"/>
+                <a16:creationId xmlns:a16="http://schemas.microsoft.com/office/drawing/2014/main" id="{F9D00E23-E52B-4E74-B875-64E5233FBDA9}"/>
               </a:ext>
             </a:extLst>
           </p:cNvPr>
@@ -20107,7 +20613,7 @@
           <p:cNvPr id="30" name="">
             <a:extLst xmlns:a="http://schemas.openxmlformats.org/drawingml/2006/main">
               <a:ext uri="{FF2B5EF4-FFF2-40B4-BE49-F238E27FC236}">
-                <a16:creationId xmlns:a16="http://schemas.microsoft.com/office/drawing/2014/main" id="{DC5822AE-F70B-401E-BF34-1B1288763497}"/>
+                <a16:creationId xmlns:a16="http://schemas.microsoft.com/office/drawing/2014/main" id="{934EC9AC-9879-4EA7-9148-7FF2C3F30E3E}"/>
               </a:ext>
             </a:extLst>
           </p:cNvPr>
@@ -20157,7 +20663,7 @@
           <p:cNvPr id="31" name="">
             <a:extLst xmlns:a="http://schemas.openxmlformats.org/drawingml/2006/main">
               <a:ext uri="{FF2B5EF4-FFF2-40B4-BE49-F238E27FC236}">
-                <a16:creationId xmlns:a16="http://schemas.microsoft.com/office/drawing/2014/main" id="{26B74832-BFAC-49BE-822C-97A5B79D6549}"/>
+                <a16:creationId xmlns:a16="http://schemas.microsoft.com/office/drawing/2014/main" id="{2C26CA14-A758-41EB-8766-4353493481BF}"/>
               </a:ext>
             </a:extLst>
           </p:cNvPr>
@@ -20207,7 +20713,7 @@
           <p:cNvPr id="32" name="">
             <a:extLst xmlns:a="http://schemas.openxmlformats.org/drawingml/2006/main">
               <a:ext uri="{FF2B5EF4-FFF2-40B4-BE49-F238E27FC236}">
-                <a16:creationId xmlns:a16="http://schemas.microsoft.com/office/drawing/2014/main" id="{D92545A5-5699-4633-ABCB-710B43DECDC1}"/>
+                <a16:creationId xmlns:a16="http://schemas.microsoft.com/office/drawing/2014/main" id="{30592020-7D29-40E1-B21C-73E35BA488BD}"/>
               </a:ext>
             </a:extLst>
           </p:cNvPr>
@@ -20257,7 +20763,7 @@
           <p:cNvPr id="33" name="">
             <a:extLst xmlns:a="http://schemas.openxmlformats.org/drawingml/2006/main">
               <a:ext uri="{FF2B5EF4-FFF2-40B4-BE49-F238E27FC236}">
-                <a16:creationId xmlns:a16="http://schemas.microsoft.com/office/drawing/2014/main" id="{9B296E79-D11F-46D3-8381-1841F4F35075}"/>
+                <a16:creationId xmlns:a16="http://schemas.microsoft.com/office/drawing/2014/main" id="{984F4D7A-D23C-436D-88DF-BEB0B49BCC9D}"/>
               </a:ext>
             </a:extLst>
           </p:cNvPr>
@@ -20288,7 +20794,7 @@
           <p:cNvPr id="34" name="">
             <a:extLst xmlns:a="http://schemas.openxmlformats.org/drawingml/2006/main">
               <a:ext uri="{FF2B5EF4-FFF2-40B4-BE49-F238E27FC236}">
-                <a16:creationId xmlns:a16="http://schemas.microsoft.com/office/drawing/2014/main" id="{19A4754E-0AF7-42C6-B7BE-F5FB82E43F03}"/>
+                <a16:creationId xmlns:a16="http://schemas.microsoft.com/office/drawing/2014/main" id="{13D64277-03E9-4D20-9AC6-EF7E8B6F7F25}"/>
               </a:ext>
             </a:extLst>
           </p:cNvPr>
@@ -20338,7 +20844,7 @@
           <p:cNvPr id="35" name="">
             <a:extLst xmlns:a="http://schemas.openxmlformats.org/drawingml/2006/main">
               <a:ext uri="{FF2B5EF4-FFF2-40B4-BE49-F238E27FC236}">
-                <a16:creationId xmlns:a16="http://schemas.microsoft.com/office/drawing/2014/main" id="{0E628227-8BEA-43DC-A940-D35388A8BB08}"/>
+                <a16:creationId xmlns:a16="http://schemas.microsoft.com/office/drawing/2014/main" id="{25E859DE-598A-4C07-8820-34FF921FCCB7}"/>
               </a:ext>
             </a:extLst>
           </p:cNvPr>
@@ -20388,7 +20